--- a/Master_EAS_Meta-Model.pptx
+++ b/Master_EAS_Meta-Model.pptx
@@ -6875,7 +6875,7 @@
         <p:spPr>
           <a:xfrm>
             <a:off x="0" y="3143"/>
-            <a:ext cx="1501422" cy="1058013"/>
+            <a:ext cx="1754188" cy="1058013"/>
           </a:xfrm>
           <a:prstGeom prst="rect">
             <a:avLst/>
@@ -6960,16 +6960,16 @@
           <a:p>
             <a:pPr algn="ctr"/>
             <a:r>
-              <a:rPr lang="en-US" sz="8000" b="1" dirty="0">
+              <a:rPr lang="en-US" b="1" dirty="0">
                 <a:solidFill>
                   <a:schemeClr val="accent1">
                     <a:lumMod val="75000"/>
                   </a:schemeClr>
                 </a:solidFill>
               </a:rPr>
-              <a:t>01</a:t>
-            </a:r>
-            <a:endParaRPr lang="ru-RU" sz="8000" b="1" dirty="0">
+              <a:t>001</a:t>
+            </a:r>
+            <a:endParaRPr lang="ru-RU" b="1" dirty="0">
               <a:solidFill>
                 <a:schemeClr val="accent1">
                   <a:lumMod val="75000"/>
@@ -7290,6 +7290,76 @@
           </p:spPr>
         </p:pic>
       </p:grpSp>
+      <p:sp>
+        <p:nvSpPr>
+          <p:cNvPr id="16" name="TextBox 15">
+            <a:extLst>
+              <a:ext uri="{FF2B5EF4-FFF2-40B4-BE49-F238E27FC236}">
+                <a16:creationId xmlns:a16="http://schemas.microsoft.com/office/drawing/2014/main" id="{A76B4B21-2091-A494-3901-B7DE776977CD}"/>
+              </a:ext>
+            </a:extLst>
+          </p:cNvPr>
+          <p:cNvSpPr txBox="1"/>
+          <p:nvPr/>
+        </p:nvSpPr>
+        <p:spPr>
+          <a:xfrm>
+            <a:off x="1636272" y="5467958"/>
+            <a:ext cx="505267" cy="369332"/>
+          </a:xfrm>
+          <a:prstGeom prst="rect">
+            <a:avLst/>
+          </a:prstGeom>
+          <a:noFill/>
+        </p:spPr>
+        <p:txBody>
+          <a:bodyPr wrap="square" rtlCol="0">
+            <a:spAutoFit/>
+          </a:bodyPr>
+          <a:lstStyle/>
+          <a:p>
+            <a:r>
+              <a:rPr lang="en-US" dirty="0"/>
+              <a:t>3.5</a:t>
+            </a:r>
+          </a:p>
+        </p:txBody>
+      </p:sp>
+      <p:sp>
+        <p:nvSpPr>
+          <p:cNvPr id="17" name="TextBox 16">
+            <a:extLst>
+              <a:ext uri="{FF2B5EF4-FFF2-40B4-BE49-F238E27FC236}">
+                <a16:creationId xmlns:a16="http://schemas.microsoft.com/office/drawing/2014/main" id="{F79F436E-B180-CC50-15DC-9E21FD4771FF}"/>
+              </a:ext>
+            </a:extLst>
+          </p:cNvPr>
+          <p:cNvSpPr txBox="1"/>
+          <p:nvPr/>
+        </p:nvSpPr>
+        <p:spPr>
+          <a:xfrm>
+            <a:off x="9980965" y="4872699"/>
+            <a:ext cx="685800" cy="369332"/>
+          </a:xfrm>
+          <a:prstGeom prst="rect">
+            <a:avLst/>
+          </a:prstGeom>
+          <a:noFill/>
+        </p:spPr>
+        <p:txBody>
+          <a:bodyPr wrap="square" rtlCol="0">
+            <a:spAutoFit/>
+          </a:bodyPr>
+          <a:lstStyle/>
+          <a:p>
+            <a:r>
+              <a:rPr lang="en-US" dirty="0"/>
+              <a:t>5.6+</a:t>
+            </a:r>
+          </a:p>
+        </p:txBody>
+      </p:sp>
     </p:spTree>
     <p:extLst>
       <p:ext uri="{BB962C8B-B14F-4D97-AF65-F5344CB8AC3E}">
@@ -7336,40 +7406,445 @@
             <p:ph type="title"/>
           </p:nvPr>
         </p:nvSpPr>
-        <p:spPr/>
+        <p:spPr>
+          <a:xfrm>
+            <a:off x="1754188" y="452718"/>
+            <a:ext cx="8296646" cy="1400530"/>
+          </a:xfrm>
+        </p:spPr>
         <p:txBody>
           <a:bodyPr/>
           <a:lstStyle/>
           <a:p>
-            <a:endParaRPr lang="en-US"/>
-          </a:p>
-        </p:txBody>
-      </p:sp>
-      <p:sp>
-        <p:nvSpPr>
-          <p:cNvPr id="3" name="Content Placeholder 2">
+            <a:r>
+              <a:rPr lang="en-US" b="1" dirty="0"/>
+              <a:t>Understanding EAS Metamodel</a:t>
+            </a:r>
+          </a:p>
+        </p:txBody>
+      </p:sp>
+      <p:pic>
+        <p:nvPicPr>
+          <p:cNvPr id="6" name="Content Placeholder 5">
             <a:extLst>
               <a:ext uri="{FF2B5EF4-FFF2-40B4-BE49-F238E27FC236}">
-                <a16:creationId xmlns:a16="http://schemas.microsoft.com/office/drawing/2014/main" id="{8B215677-3037-63BE-7410-6B7608C40557}"/>
+                <a16:creationId xmlns:a16="http://schemas.microsoft.com/office/drawing/2014/main" id="{C5CE6604-B384-AE7F-ADEE-C23A021FF119}"/>
               </a:ext>
             </a:extLst>
           </p:cNvPr>
-          <p:cNvSpPr>
-            <a:spLocks noGrp="1"/>
-          </p:cNvSpPr>
+          <p:cNvPicPr>
+            <a:picLocks noGrp="1" noChangeAspect="1"/>
+          </p:cNvPicPr>
           <p:nvPr>
             <p:ph idx="1"/>
           </p:nvPr>
-        </p:nvSpPr>
-        <p:spPr/>
-        <p:txBody>
-          <a:bodyPr/>
+        </p:nvPicPr>
+        <p:blipFill>
+          <a:blip r:embed="rId2"/>
+          <a:stretch>
+            <a:fillRect/>
+          </a:stretch>
+        </p:blipFill>
+        <p:spPr>
+          <a:xfrm>
+            <a:off x="1456647" y="1224062"/>
+            <a:ext cx="4748944" cy="5389674"/>
+          </a:xfrm>
+          <a:prstGeom prst="rect">
+            <a:avLst/>
+          </a:prstGeom>
+          <a:ln>
+            <a:noFill/>
+          </a:ln>
+          <a:effectLst>
+            <a:outerShdw blurRad="292100" dist="139700" dir="2700000" algn="tl" rotWithShape="0">
+              <a:srgbClr val="333333">
+                <a:alpha val="65000"/>
+              </a:srgbClr>
+            </a:outerShdw>
+          </a:effectLst>
+        </p:spPr>
+      </p:pic>
+      <p:sp>
+        <p:nvSpPr>
+          <p:cNvPr id="4" name="Title 1">
+            <a:extLst>
+              <a:ext uri="{FF2B5EF4-FFF2-40B4-BE49-F238E27FC236}">
+                <a16:creationId xmlns:a16="http://schemas.microsoft.com/office/drawing/2014/main" id="{B8F2FE4C-F570-9598-B96E-2D875C9893E2}"/>
+              </a:ext>
+            </a:extLst>
+          </p:cNvPr>
+          <p:cNvSpPr txBox="1">
+            <a:spLocks/>
+          </p:cNvSpPr>
+          <p:nvPr/>
+        </p:nvSpPr>
+        <p:spPr>
+          <a:xfrm>
+            <a:off x="0" y="3143"/>
+            <a:ext cx="1754188" cy="1058013"/>
+          </a:xfrm>
+          <a:prstGeom prst="rect">
+            <a:avLst/>
+          </a:prstGeom>
+        </p:spPr>
+        <p:txBody>
+          <a:bodyPr vert="horz" lIns="91440" tIns="45720" rIns="91440" bIns="45720" rtlCol="0" anchor="ctr">
+            <a:noAutofit/>
+          </a:bodyPr>
+          <a:lstStyle>
+            <a:lvl1pPr algn="l" defTabSz="457200" rtl="0" eaLnBrk="1" latinLnBrk="0" hangingPunct="1">
+              <a:spcBef>
+                <a:spcPct val="0"/>
+              </a:spcBef>
+              <a:buNone/>
+              <a:defRPr sz="7200" b="0" i="0" kern="1200">
+                <a:solidFill>
+                  <a:schemeClr val="tx2"/>
+                </a:solidFill>
+                <a:latin typeface="+mj-lt"/>
+                <a:ea typeface="+mj-ea"/>
+                <a:cs typeface="+mj-cs"/>
+              </a:defRPr>
+            </a:lvl1pPr>
+            <a:lvl2pPr eaLnBrk="1" hangingPunct="1">
+              <a:defRPr>
+                <a:solidFill>
+                  <a:schemeClr val="tx2"/>
+                </a:solidFill>
+              </a:defRPr>
+            </a:lvl2pPr>
+            <a:lvl3pPr eaLnBrk="1" hangingPunct="1">
+              <a:defRPr>
+                <a:solidFill>
+                  <a:schemeClr val="tx2"/>
+                </a:solidFill>
+              </a:defRPr>
+            </a:lvl3pPr>
+            <a:lvl4pPr eaLnBrk="1" hangingPunct="1">
+              <a:defRPr>
+                <a:solidFill>
+                  <a:schemeClr val="tx2"/>
+                </a:solidFill>
+              </a:defRPr>
+            </a:lvl4pPr>
+            <a:lvl5pPr eaLnBrk="1" hangingPunct="1">
+              <a:defRPr>
+                <a:solidFill>
+                  <a:schemeClr val="tx2"/>
+                </a:solidFill>
+              </a:defRPr>
+            </a:lvl5pPr>
+            <a:lvl6pPr eaLnBrk="1" hangingPunct="1">
+              <a:defRPr>
+                <a:solidFill>
+                  <a:schemeClr val="tx2"/>
+                </a:solidFill>
+              </a:defRPr>
+            </a:lvl6pPr>
+            <a:lvl7pPr eaLnBrk="1" hangingPunct="1">
+              <a:defRPr>
+                <a:solidFill>
+                  <a:schemeClr val="tx2"/>
+                </a:solidFill>
+              </a:defRPr>
+            </a:lvl7pPr>
+            <a:lvl8pPr eaLnBrk="1" hangingPunct="1">
+              <a:defRPr>
+                <a:solidFill>
+                  <a:schemeClr val="tx2"/>
+                </a:solidFill>
+              </a:defRPr>
+            </a:lvl8pPr>
+            <a:lvl9pPr eaLnBrk="1" hangingPunct="1">
+              <a:defRPr>
+                <a:solidFill>
+                  <a:schemeClr val="tx2"/>
+                </a:solidFill>
+              </a:defRPr>
+            </a:lvl9pPr>
+          </a:lstStyle>
+          <a:p>
+            <a:pPr algn="ctr"/>
+            <a:r>
+              <a:rPr lang="en-US" b="1" dirty="0">
+                <a:solidFill>
+                  <a:schemeClr val="accent1">
+                    <a:lumMod val="75000"/>
+                  </a:schemeClr>
+                </a:solidFill>
+              </a:rPr>
+              <a:t>002</a:t>
+            </a:r>
+            <a:endParaRPr lang="ru-RU" b="1" dirty="0">
+              <a:solidFill>
+                <a:schemeClr val="accent1">
+                  <a:lumMod val="75000"/>
+                </a:schemeClr>
+              </a:solidFill>
+            </a:endParaRPr>
+          </a:p>
+        </p:txBody>
+      </p:sp>
+      <p:pic>
+        <p:nvPicPr>
+          <p:cNvPr id="7" name="Picture 6">
+            <a:extLst>
+              <a:ext uri="{FF2B5EF4-FFF2-40B4-BE49-F238E27FC236}">
+                <a16:creationId xmlns:a16="http://schemas.microsoft.com/office/drawing/2014/main" id="{1450B529-4B1E-859B-EC08-6C29AD298AEC}"/>
+              </a:ext>
+            </a:extLst>
+          </p:cNvPr>
+          <p:cNvPicPr>
+            <a:picLocks noChangeAspect="1"/>
+          </p:cNvPicPr>
+          <p:nvPr/>
+        </p:nvPicPr>
+        <p:blipFill>
+          <a:blip r:embed="rId3"/>
+          <a:stretch>
+            <a:fillRect/>
+          </a:stretch>
+        </p:blipFill>
+        <p:spPr>
+          <a:xfrm>
+            <a:off x="181336" y="3429000"/>
+            <a:ext cx="1772040" cy="398709"/>
+          </a:xfrm>
+          <a:prstGeom prst="roundRect">
+            <a:avLst>
+              <a:gd name="adj" fmla="val 8594"/>
+            </a:avLst>
+          </a:prstGeom>
+          <a:solidFill>
+            <a:srgbClr val="FFFFFF">
+              <a:shade val="85000"/>
+            </a:srgbClr>
+          </a:solidFill>
+          <a:ln>
+            <a:noFill/>
+          </a:ln>
+          <a:effectLst>
+            <a:reflection blurRad="12700" stA="38000" endPos="28000" dist="5000" dir="5400000" sy="-100000" algn="bl" rotWithShape="0"/>
+          </a:effectLst>
+        </p:spPr>
+      </p:pic>
+      <p:pic>
+        <p:nvPicPr>
+          <p:cNvPr id="8" name="Picture 7">
+            <a:extLst>
+              <a:ext uri="{FF2B5EF4-FFF2-40B4-BE49-F238E27FC236}">
+                <a16:creationId xmlns:a16="http://schemas.microsoft.com/office/drawing/2014/main" id="{97FA55ED-6D2E-E9BB-56CA-5E548C5A7C0A}"/>
+              </a:ext>
+            </a:extLst>
+          </p:cNvPr>
+          <p:cNvPicPr>
+            <a:picLocks noChangeAspect="1"/>
+          </p:cNvPicPr>
+          <p:nvPr/>
+        </p:nvPicPr>
+        <p:blipFill>
+          <a:blip r:embed="rId4"/>
+          <a:stretch>
+            <a:fillRect/>
+          </a:stretch>
+        </p:blipFill>
+        <p:spPr>
+          <a:xfrm>
+            <a:off x="7959779" y="1673987"/>
+            <a:ext cx="1805255" cy="1353942"/>
+          </a:xfrm>
+          <a:prstGeom prst="rect">
+            <a:avLst/>
+          </a:prstGeom>
+        </p:spPr>
+      </p:pic>
+      <p:sp>
+        <p:nvSpPr>
+          <p:cNvPr id="9" name="TextBox 8">
+            <a:extLst>
+              <a:ext uri="{FF2B5EF4-FFF2-40B4-BE49-F238E27FC236}">
+                <a16:creationId xmlns:a16="http://schemas.microsoft.com/office/drawing/2014/main" id="{32D77D53-E5B1-541D-3D31-F5581E14887B}"/>
+              </a:ext>
+            </a:extLst>
+          </p:cNvPr>
+          <p:cNvSpPr txBox="1"/>
+          <p:nvPr/>
+        </p:nvSpPr>
+        <p:spPr>
+          <a:xfrm>
+            <a:off x="6503132" y="1298289"/>
+            <a:ext cx="5246949" cy="307777"/>
+          </a:xfrm>
+          <a:prstGeom prst="rect">
+            <a:avLst/>
+          </a:prstGeom>
+          <a:noFill/>
+        </p:spPr>
+        <p:txBody>
+          <a:bodyPr wrap="none" rtlCol="0">
+            <a:spAutoFit/>
+          </a:bodyPr>
           <a:lstStyle/>
           <a:p>
-            <a:endParaRPr lang="en-US"/>
-          </a:p>
-        </p:txBody>
-      </p:sp>
+            <a:r>
+              <a:rPr lang="en-US" sz="1400" b="1" dirty="0">
+                <a:solidFill>
+                  <a:schemeClr val="accent1">
+                    <a:lumMod val="60000"/>
+                    <a:lumOff val="40000"/>
+                  </a:schemeClr>
+                </a:solidFill>
+              </a:rPr>
+              <a:t>MODAF: British Ministry of Defense Architecture Framework</a:t>
+            </a:r>
+          </a:p>
+        </p:txBody>
+      </p:sp>
+      <p:sp>
+        <p:nvSpPr>
+          <p:cNvPr id="10" name="TextBox 9">
+            <a:extLst>
+              <a:ext uri="{FF2B5EF4-FFF2-40B4-BE49-F238E27FC236}">
+                <a16:creationId xmlns:a16="http://schemas.microsoft.com/office/drawing/2014/main" id="{74F1033D-83ED-CFEA-65C1-8A5C031ED459}"/>
+              </a:ext>
+            </a:extLst>
+          </p:cNvPr>
+          <p:cNvSpPr txBox="1"/>
+          <p:nvPr/>
+        </p:nvSpPr>
+        <p:spPr>
+          <a:xfrm>
+            <a:off x="6503132" y="2998269"/>
+            <a:ext cx="4374916" cy="307777"/>
+          </a:xfrm>
+          <a:prstGeom prst="rect">
+            <a:avLst/>
+          </a:prstGeom>
+          <a:noFill/>
+        </p:spPr>
+        <p:txBody>
+          <a:bodyPr wrap="none" rtlCol="0">
+            <a:spAutoFit/>
+          </a:bodyPr>
+          <a:lstStyle/>
+          <a:p>
+            <a:r>
+              <a:rPr lang="en-US" sz="1400" b="1" dirty="0">
+                <a:solidFill>
+                  <a:schemeClr val="accent1">
+                    <a:lumMod val="60000"/>
+                    <a:lumOff val="40000"/>
+                  </a:schemeClr>
+                </a:solidFill>
+              </a:rPr>
+              <a:t>FEAF: Federal Enterprise Architecture Framework</a:t>
+            </a:r>
+          </a:p>
+        </p:txBody>
+      </p:sp>
+      <p:pic>
+        <p:nvPicPr>
+          <p:cNvPr id="11" name="Picture 10">
+            <a:extLst>
+              <a:ext uri="{FF2B5EF4-FFF2-40B4-BE49-F238E27FC236}">
+                <a16:creationId xmlns:a16="http://schemas.microsoft.com/office/drawing/2014/main" id="{6894BB93-8958-DB5F-3B3D-70DA03C9E614}"/>
+              </a:ext>
+            </a:extLst>
+          </p:cNvPr>
+          <p:cNvPicPr>
+            <a:picLocks noChangeAspect="1"/>
+          </p:cNvPicPr>
+          <p:nvPr/>
+        </p:nvPicPr>
+        <p:blipFill>
+          <a:blip r:embed="rId5"/>
+          <a:stretch>
+            <a:fillRect/>
+          </a:stretch>
+        </p:blipFill>
+        <p:spPr>
+          <a:xfrm>
+            <a:off x="7959778" y="3329406"/>
+            <a:ext cx="1805255" cy="1457327"/>
+          </a:xfrm>
+          <a:prstGeom prst="rect">
+            <a:avLst/>
+          </a:prstGeom>
+        </p:spPr>
+      </p:pic>
+      <p:sp>
+        <p:nvSpPr>
+          <p:cNvPr id="12" name="TextBox 11">
+            <a:extLst>
+              <a:ext uri="{FF2B5EF4-FFF2-40B4-BE49-F238E27FC236}">
+                <a16:creationId xmlns:a16="http://schemas.microsoft.com/office/drawing/2014/main" id="{A48C40A1-8C22-B4D9-2C2B-EEA60611A95E}"/>
+              </a:ext>
+            </a:extLst>
+          </p:cNvPr>
+          <p:cNvSpPr txBox="1"/>
+          <p:nvPr/>
+        </p:nvSpPr>
+        <p:spPr>
+          <a:xfrm>
+            <a:off x="6503132" y="4787312"/>
+            <a:ext cx="4464684" cy="307777"/>
+          </a:xfrm>
+          <a:prstGeom prst="rect">
+            <a:avLst/>
+          </a:prstGeom>
+          <a:noFill/>
+        </p:spPr>
+        <p:txBody>
+          <a:bodyPr wrap="none" rtlCol="0">
+            <a:spAutoFit/>
+          </a:bodyPr>
+          <a:lstStyle/>
+          <a:p>
+            <a:r>
+              <a:rPr lang="en-US" sz="1400" b="1" dirty="0">
+                <a:solidFill>
+                  <a:schemeClr val="accent1">
+                    <a:lumMod val="60000"/>
+                    <a:lumOff val="40000"/>
+                  </a:schemeClr>
+                </a:solidFill>
+              </a:rPr>
+              <a:t>TOGAF: The Open Group Architecture Framework</a:t>
+            </a:r>
+          </a:p>
+        </p:txBody>
+      </p:sp>
+      <p:pic>
+        <p:nvPicPr>
+          <p:cNvPr id="13" name="Picture 12">
+            <a:extLst>
+              <a:ext uri="{FF2B5EF4-FFF2-40B4-BE49-F238E27FC236}">
+                <a16:creationId xmlns:a16="http://schemas.microsoft.com/office/drawing/2014/main" id="{799EB17C-9B78-B394-2F8D-25DC39ED7A8E}"/>
+              </a:ext>
+            </a:extLst>
+          </p:cNvPr>
+          <p:cNvPicPr>
+            <a:picLocks noChangeAspect="1"/>
+          </p:cNvPicPr>
+          <p:nvPr/>
+        </p:nvPicPr>
+        <p:blipFill>
+          <a:blip r:embed="rId6"/>
+          <a:stretch>
+            <a:fillRect/>
+          </a:stretch>
+        </p:blipFill>
+        <p:spPr>
+          <a:xfrm>
+            <a:off x="7959778" y="5119027"/>
+            <a:ext cx="1805255" cy="1426151"/>
+          </a:xfrm>
+          <a:prstGeom prst="rect">
+            <a:avLst/>
+          </a:prstGeom>
+        </p:spPr>
+      </p:pic>
     </p:spTree>
     <p:extLst>
       <p:ext uri="{BB962C8B-B14F-4D97-AF65-F5344CB8AC3E}">

--- a/Master_EAS_Meta-Model.pptx
+++ b/Master_EAS_Meta-Model.pptx
@@ -5,15 +5,17 @@
     <p:sldMasterId id="2147483648" r:id="rId4"/>
   </p:sldMasterIdLst>
   <p:notesMasterIdLst>
-    <p:notesMasterId r:id="rId8"/>
+    <p:notesMasterId r:id="rId10"/>
   </p:notesMasterIdLst>
   <p:handoutMasterIdLst>
-    <p:handoutMasterId r:id="rId9"/>
+    <p:handoutMasterId r:id="rId11"/>
   </p:handoutMasterIdLst>
   <p:sldIdLst>
     <p:sldId id="256" r:id="rId5"/>
     <p:sldId id="270" r:id="rId6"/>
-    <p:sldId id="267" r:id="rId7"/>
+    <p:sldId id="271" r:id="rId7"/>
+    <p:sldId id="272" r:id="rId8"/>
+    <p:sldId id="267" r:id="rId9"/>
   </p:sldIdLst>
   <p:sldSz cx="12192000" cy="6858000"/>
   <p:notesSz cx="6858000" cy="9144000"/>
@@ -821,7 +823,7 @@
           <a:p>
             <a:fld id="{EE000EEB-8338-48D7-8EE8-EE0082EF7602}" type="slidenum">
               <a:rPr lang="en-US" smtClean="0"/>
-              <a:t>3</a:t>
+              <a:t>5</a:t>
             </a:fld>
             <a:endParaRPr lang="en-US" dirty="0"/>
           </a:p>
@@ -6745,21 +6747,21 @@
         </p:nvSpPr>
         <p:spPr>
           <a:xfrm>
-            <a:off x="1612154" y="307943"/>
-            <a:ext cx="8825658" cy="3329581"/>
+            <a:off x="1466237" y="327399"/>
+            <a:ext cx="9054612" cy="3329581"/>
           </a:xfrm>
         </p:spPr>
         <p:txBody>
           <a:bodyPr anchor="ctr">
-            <a:normAutofit fontScale="90000"/>
+            <a:normAutofit/>
           </a:bodyPr>
           <a:lstStyle/>
           <a:p>
             <a:r>
-              <a:rPr lang="en-US" b="1" dirty="0"/>
+              <a:rPr lang="en-US" sz="6000" b="1" dirty="0"/>
               <a:t>Master EAS Meta-Model in Ontology &amp; Graph Perspective</a:t>
             </a:r>
-            <a:endParaRPr lang="ru-RU" b="1" dirty="0"/>
+            <a:endParaRPr lang="ru-RU" sz="6000" b="1" dirty="0"/>
           </a:p>
         </p:txBody>
       </p:sp>
@@ -6792,8 +6794,12 @@
           <a:lstStyle/>
           <a:p>
             <a:r>
+              <a:rPr lang="en-US"/>
+              <a:t>Building </a:t>
+            </a:r>
+            <a:r>
               <a:rPr lang="en-US" dirty="0"/>
-              <a:t>Build Up Enterprise Architecture Meta-Model From Scratch</a:t>
+              <a:t>Up Enterprise Architecture Meta-Model From Scratch</a:t>
             </a:r>
           </a:p>
         </p:txBody>
@@ -6981,10 +6987,10 @@
       </p:sp>
       <p:grpSp>
         <p:nvGrpSpPr>
-          <p:cNvPr id="15" name="Group 14">
+          <p:cNvPr id="18" name="Group 17">
             <a:extLst>
               <a:ext uri="{FF2B5EF4-FFF2-40B4-BE49-F238E27FC236}">
-                <a16:creationId xmlns:a16="http://schemas.microsoft.com/office/drawing/2014/main" id="{B7A3EDAE-1B0E-C1CF-8C16-C6F54D1C5488}"/>
+                <a16:creationId xmlns:a16="http://schemas.microsoft.com/office/drawing/2014/main" id="{D50695D8-97CE-5B8C-815E-9CD5D506DD72}"/>
               </a:ext>
             </a:extLst>
           </p:cNvPr>
@@ -6993,373 +6999,394 @@
         </p:nvGrpSpPr>
         <p:grpSpPr>
           <a:xfrm>
-            <a:off x="2141549" y="4323296"/>
-            <a:ext cx="7766868" cy="2226761"/>
-            <a:chOff x="1463863" y="4391350"/>
-            <a:chExt cx="7766868" cy="2226761"/>
+            <a:off x="1636272" y="4323296"/>
+            <a:ext cx="9030493" cy="2226761"/>
+            <a:chOff x="1636272" y="4323296"/>
+            <a:chExt cx="9030493" cy="2226761"/>
           </a:xfrm>
         </p:grpSpPr>
-        <p:pic>
-          <p:nvPicPr>
-            <p:cNvPr id="6" name="Picture 5">
+        <p:grpSp>
+          <p:nvGrpSpPr>
+            <p:cNvPr id="15" name="Group 14">
               <a:extLst>
                 <a:ext uri="{FF2B5EF4-FFF2-40B4-BE49-F238E27FC236}">
-                  <a16:creationId xmlns:a16="http://schemas.microsoft.com/office/drawing/2014/main" id="{7AE0F899-9B30-1477-EF90-A3BFF355E9AC}"/>
+                  <a16:creationId xmlns:a16="http://schemas.microsoft.com/office/drawing/2014/main" id="{B7A3EDAE-1B0E-C1CF-8C16-C6F54D1C5488}"/>
                 </a:ext>
               </a:extLst>
             </p:cNvPr>
-            <p:cNvPicPr>
-              <a:picLocks noChangeAspect="1"/>
-            </p:cNvPicPr>
+            <p:cNvGrpSpPr/>
             <p:nvPr/>
-          </p:nvPicPr>
-          <p:blipFill>
-            <a:blip r:embed="rId5"/>
-            <a:stretch>
-              <a:fillRect/>
-            </a:stretch>
-          </p:blipFill>
-          <p:spPr>
+          </p:nvGrpSpPr>
+          <p:grpSpPr>
             <a:xfrm>
-              <a:off x="1949627" y="4399844"/>
-              <a:ext cx="1900932" cy="2218267"/>
+              <a:off x="2141549" y="4323296"/>
+              <a:ext cx="7766868" cy="2226761"/>
+              <a:chOff x="1463863" y="4391350"/>
+              <a:chExt cx="7766868" cy="2226761"/>
             </a:xfrm>
-            <a:prstGeom prst="roundRect">
-              <a:avLst>
-                <a:gd name="adj" fmla="val 8594"/>
-              </a:avLst>
-            </a:prstGeom>
-            <a:solidFill>
-              <a:srgbClr val="FFFFFF">
-                <a:shade val="85000"/>
-              </a:srgbClr>
-            </a:solidFill>
-            <a:ln>
-              <a:noFill/>
-            </a:ln>
-            <a:effectLst>
-              <a:reflection blurRad="12700" stA="38000" endPos="28000" dist="5000" dir="5400000" sy="-100000" algn="bl" rotWithShape="0"/>
-            </a:effectLst>
-          </p:spPr>
-        </p:pic>
-        <p:pic>
-          <p:nvPicPr>
-            <p:cNvPr id="7" name="Picture 6">
+          </p:grpSpPr>
+          <p:pic>
+            <p:nvPicPr>
+              <p:cNvPr id="6" name="Picture 5">
+                <a:extLst>
+                  <a:ext uri="{FF2B5EF4-FFF2-40B4-BE49-F238E27FC236}">
+                    <a16:creationId xmlns:a16="http://schemas.microsoft.com/office/drawing/2014/main" id="{7AE0F899-9B30-1477-EF90-A3BFF355E9AC}"/>
+                  </a:ext>
+                </a:extLst>
+              </p:cNvPr>
+              <p:cNvPicPr>
+                <a:picLocks noChangeAspect="1"/>
+              </p:cNvPicPr>
+              <p:nvPr/>
+            </p:nvPicPr>
+            <p:blipFill>
+              <a:blip r:embed="rId5"/>
+              <a:stretch>
+                <a:fillRect/>
+              </a:stretch>
+            </p:blipFill>
+            <p:spPr>
+              <a:xfrm>
+                <a:off x="1949627" y="4399844"/>
+                <a:ext cx="1900932" cy="2218267"/>
+              </a:xfrm>
+              <a:prstGeom prst="roundRect">
+                <a:avLst>
+                  <a:gd name="adj" fmla="val 8594"/>
+                </a:avLst>
+              </a:prstGeom>
+              <a:solidFill>
+                <a:srgbClr val="FFFFFF">
+                  <a:shade val="85000"/>
+                </a:srgbClr>
+              </a:solidFill>
+              <a:ln>
+                <a:noFill/>
+              </a:ln>
+              <a:effectLst>
+                <a:reflection blurRad="12700" stA="38000" endPos="28000" dist="5000" dir="5400000" sy="-100000" algn="bl" rotWithShape="0"/>
+              </a:effectLst>
+            </p:spPr>
+          </p:pic>
+          <p:pic>
+            <p:nvPicPr>
+              <p:cNvPr id="7" name="Picture 6">
+                <a:extLst>
+                  <a:ext uri="{FF2B5EF4-FFF2-40B4-BE49-F238E27FC236}">
+                    <a16:creationId xmlns:a16="http://schemas.microsoft.com/office/drawing/2014/main" id="{DF92B555-999F-2F3B-6A00-4426832C8B93}"/>
+                  </a:ext>
+                </a:extLst>
+              </p:cNvPr>
+              <p:cNvPicPr>
+                <a:picLocks noChangeAspect="1"/>
+              </p:cNvPicPr>
+              <p:nvPr/>
+            </p:nvPicPr>
+            <p:blipFill>
+              <a:blip r:embed="rId6"/>
+              <a:stretch>
+                <a:fillRect/>
+              </a:stretch>
+            </p:blipFill>
+            <p:spPr>
+              <a:xfrm>
+                <a:off x="6387188" y="4391350"/>
+                <a:ext cx="2339123" cy="2201527"/>
+              </a:xfrm>
+              <a:prstGeom prst="roundRect">
+                <a:avLst>
+                  <a:gd name="adj" fmla="val 8594"/>
+                </a:avLst>
+              </a:prstGeom>
+              <a:solidFill>
+                <a:srgbClr val="FFFFFF">
+                  <a:shade val="85000"/>
+                </a:srgbClr>
+              </a:solidFill>
+              <a:ln>
+                <a:noFill/>
+              </a:ln>
+              <a:effectLst>
+                <a:reflection blurRad="12700" stA="38000" endPos="28000" dist="5000" dir="5400000" sy="-100000" algn="bl" rotWithShape="0"/>
+              </a:effectLst>
+            </p:spPr>
+          </p:pic>
+          <p:sp>
+            <p:nvSpPr>
+              <p:cNvPr id="8" name="Arrow: Right 7">
+                <a:extLst>
+                  <a:ext uri="{FF2B5EF4-FFF2-40B4-BE49-F238E27FC236}">
+                    <a16:creationId xmlns:a16="http://schemas.microsoft.com/office/drawing/2014/main" id="{18612BDC-FCFA-4143-D6C2-08664DA7F3EF}"/>
+                  </a:ext>
+                </a:extLst>
+              </p:cNvPr>
+              <p:cNvSpPr/>
+              <p:nvPr/>
+            </p:nvSpPr>
+            <p:spPr>
+              <a:xfrm>
+                <a:off x="4570725" y="5031380"/>
+                <a:ext cx="1207911" cy="767644"/>
+              </a:xfrm>
+              <a:prstGeom prst="rightArrow">
+                <a:avLst/>
+              </a:prstGeom>
+            </p:spPr>
+            <p:style>
+              <a:lnRef idx="0">
+                <a:schemeClr val="accent1"/>
+              </a:lnRef>
+              <a:fillRef idx="3">
+                <a:schemeClr val="accent1"/>
+              </a:fillRef>
+              <a:effectRef idx="3">
+                <a:schemeClr val="accent1"/>
+              </a:effectRef>
+              <a:fontRef idx="minor">
+                <a:schemeClr val="lt1"/>
+              </a:fontRef>
+            </p:style>
+            <p:txBody>
+              <a:bodyPr rtlCol="0" anchor="ctr"/>
+              <a:lstStyle/>
+              <a:p>
+                <a:pPr algn="ctr"/>
+                <a:endParaRPr lang="en-US"/>
+              </a:p>
+            </p:txBody>
+          </p:sp>
+          <p:pic>
+            <p:nvPicPr>
+              <p:cNvPr id="11" name="Picture 10">
+                <a:extLst>
+                  <a:ext uri="{FF2B5EF4-FFF2-40B4-BE49-F238E27FC236}">
+                    <a16:creationId xmlns:a16="http://schemas.microsoft.com/office/drawing/2014/main" id="{C796209F-D274-5DEB-45D9-C3402DD8B46A}"/>
+                  </a:ext>
+                </a:extLst>
+              </p:cNvPr>
+              <p:cNvPicPr>
+                <a:picLocks noChangeAspect="1"/>
+              </p:cNvPicPr>
+              <p:nvPr/>
+            </p:nvPicPr>
+            <p:blipFill>
+              <a:blip r:embed="rId7"/>
+              <a:stretch>
+                <a:fillRect/>
+              </a:stretch>
+            </p:blipFill>
+            <p:spPr>
+              <a:xfrm>
+                <a:off x="1463863" y="4957083"/>
+                <a:ext cx="360209" cy="401771"/>
+              </a:xfrm>
+              <a:prstGeom prst="rect">
+                <a:avLst/>
+              </a:prstGeom>
+              <a:ln>
+                <a:noFill/>
+              </a:ln>
+              <a:effectLst>
+                <a:outerShdw blurRad="292100" dist="139700" dir="2700000" algn="tl" rotWithShape="0">
+                  <a:srgbClr val="333333">
+                    <a:alpha val="65000"/>
+                  </a:srgbClr>
+                </a:outerShdw>
+              </a:effectLst>
+            </p:spPr>
+          </p:pic>
+          <p:pic>
+            <p:nvPicPr>
+              <p:cNvPr id="12" name="Picture 11">
+                <a:extLst>
+                  <a:ext uri="{FF2B5EF4-FFF2-40B4-BE49-F238E27FC236}">
+                    <a16:creationId xmlns:a16="http://schemas.microsoft.com/office/drawing/2014/main" id="{D6C7995A-87F7-91D6-C1F6-318F2C06C783}"/>
+                  </a:ext>
+                </a:extLst>
+              </p:cNvPr>
+              <p:cNvPicPr>
+                <a:picLocks noChangeAspect="1"/>
+              </p:cNvPicPr>
+              <p:nvPr/>
+            </p:nvPicPr>
+            <p:blipFill>
+              <a:blip r:embed="rId8"/>
+              <a:stretch>
+                <a:fillRect/>
+              </a:stretch>
+            </p:blipFill>
+            <p:spPr>
+              <a:xfrm>
+                <a:off x="1463863" y="5536012"/>
+                <a:ext cx="362976" cy="362976"/>
+              </a:xfrm>
+              <a:prstGeom prst="rect">
+                <a:avLst/>
+              </a:prstGeom>
+              <a:ln>
+                <a:noFill/>
+              </a:ln>
+              <a:effectLst>
+                <a:outerShdw blurRad="292100" dist="139700" dir="2700000" algn="tl" rotWithShape="0">
+                  <a:srgbClr val="333333">
+                    <a:alpha val="65000"/>
+                  </a:srgbClr>
+                </a:outerShdw>
+              </a:effectLst>
+            </p:spPr>
+          </p:pic>
+          <p:pic>
+            <p:nvPicPr>
+              <p:cNvPr id="13" name="Picture 12">
+                <a:extLst>
+                  <a:ext uri="{FF2B5EF4-FFF2-40B4-BE49-F238E27FC236}">
+                    <a16:creationId xmlns:a16="http://schemas.microsoft.com/office/drawing/2014/main" id="{967B15A3-E502-426B-3004-FC2BA59000B0}"/>
+                  </a:ext>
+                </a:extLst>
+              </p:cNvPr>
+              <p:cNvPicPr>
+                <a:picLocks noChangeAspect="1"/>
+              </p:cNvPicPr>
+              <p:nvPr/>
+            </p:nvPicPr>
+            <p:blipFill>
+              <a:blip r:embed="rId8"/>
+              <a:stretch>
+                <a:fillRect/>
+              </a:stretch>
+            </p:blipFill>
+            <p:spPr>
+              <a:xfrm>
+                <a:off x="8859620" y="4951896"/>
+                <a:ext cx="362976" cy="362976"/>
+              </a:xfrm>
+              <a:prstGeom prst="rect">
+                <a:avLst/>
+              </a:prstGeom>
+              <a:ln>
+                <a:noFill/>
+              </a:ln>
+              <a:effectLst>
+                <a:outerShdw blurRad="292100" dist="139700" dir="2700000" algn="tl" rotWithShape="0">
+                  <a:srgbClr val="333333">
+                    <a:alpha val="65000"/>
+                  </a:srgbClr>
+                </a:outerShdw>
+              </a:effectLst>
+            </p:spPr>
+          </p:pic>
+          <p:pic>
+            <p:nvPicPr>
+              <p:cNvPr id="14" name="Picture 13">
+                <a:extLst>
+                  <a:ext uri="{FF2B5EF4-FFF2-40B4-BE49-F238E27FC236}">
+                    <a16:creationId xmlns:a16="http://schemas.microsoft.com/office/drawing/2014/main" id="{6FF42F9F-AF6A-3226-86B2-248451228BC6}"/>
+                  </a:ext>
+                </a:extLst>
+              </p:cNvPr>
+              <p:cNvPicPr>
+                <a:picLocks noChangeAspect="1"/>
+              </p:cNvPicPr>
+              <p:nvPr/>
+            </p:nvPicPr>
+            <p:blipFill>
+              <a:blip r:embed="rId9"/>
+              <a:stretch>
+                <a:fillRect/>
+              </a:stretch>
+            </p:blipFill>
+            <p:spPr>
+              <a:xfrm>
+                <a:off x="8859620" y="5438299"/>
+                <a:ext cx="371111" cy="460689"/>
+              </a:xfrm>
+              <a:prstGeom prst="rect">
+                <a:avLst/>
+              </a:prstGeom>
+              <a:ln>
+                <a:noFill/>
+              </a:ln>
+              <a:effectLst>
+                <a:outerShdw blurRad="292100" dist="139700" dir="2700000" algn="tl" rotWithShape="0">
+                  <a:srgbClr val="333333">
+                    <a:alpha val="65000"/>
+                  </a:srgbClr>
+                </a:outerShdw>
+              </a:effectLst>
+            </p:spPr>
+          </p:pic>
+        </p:grpSp>
+        <p:sp>
+          <p:nvSpPr>
+            <p:cNvPr id="16" name="TextBox 15">
               <a:extLst>
                 <a:ext uri="{FF2B5EF4-FFF2-40B4-BE49-F238E27FC236}">
-                  <a16:creationId xmlns:a16="http://schemas.microsoft.com/office/drawing/2014/main" id="{DF92B555-999F-2F3B-6A00-4426832C8B93}"/>
+                  <a16:creationId xmlns:a16="http://schemas.microsoft.com/office/drawing/2014/main" id="{A76B4B21-2091-A494-3901-B7DE776977CD}"/>
                 </a:ext>
               </a:extLst>
             </p:cNvPr>
-            <p:cNvPicPr>
-              <a:picLocks noChangeAspect="1"/>
-            </p:cNvPicPr>
-            <p:nvPr/>
-          </p:nvPicPr>
-          <p:blipFill>
-            <a:blip r:embed="rId6"/>
-            <a:stretch>
-              <a:fillRect/>
-            </a:stretch>
-          </p:blipFill>
-          <p:spPr>
-            <a:xfrm>
-              <a:off x="6387188" y="4391350"/>
-              <a:ext cx="2339123" cy="2201527"/>
-            </a:xfrm>
-            <a:prstGeom prst="roundRect">
-              <a:avLst>
-                <a:gd name="adj" fmla="val 8594"/>
-              </a:avLst>
-            </a:prstGeom>
-            <a:solidFill>
-              <a:srgbClr val="FFFFFF">
-                <a:shade val="85000"/>
-              </a:srgbClr>
-            </a:solidFill>
-            <a:ln>
-              <a:noFill/>
-            </a:ln>
-            <a:effectLst>
-              <a:reflection blurRad="12700" stA="38000" endPos="28000" dist="5000" dir="5400000" sy="-100000" algn="bl" rotWithShape="0"/>
-            </a:effectLst>
-          </p:spPr>
-        </p:pic>
-        <p:sp>
-          <p:nvSpPr>
-            <p:cNvPr id="8" name="Arrow: Right 7">
-              <a:extLst>
-                <a:ext uri="{FF2B5EF4-FFF2-40B4-BE49-F238E27FC236}">
-                  <a16:creationId xmlns:a16="http://schemas.microsoft.com/office/drawing/2014/main" id="{18612BDC-FCFA-4143-D6C2-08664DA7F3EF}"/>
-                </a:ext>
-              </a:extLst>
-            </p:cNvPr>
-            <p:cNvSpPr/>
+            <p:cNvSpPr txBox="1"/>
             <p:nvPr/>
           </p:nvSpPr>
           <p:spPr>
             <a:xfrm>
-              <a:off x="4570725" y="5031380"/>
-              <a:ext cx="1207911" cy="767644"/>
-            </a:xfrm>
-            <a:prstGeom prst="rightArrow">
-              <a:avLst/>
-            </a:prstGeom>
-          </p:spPr>
-          <p:style>
-            <a:lnRef idx="0">
-              <a:schemeClr val="accent1"/>
-            </a:lnRef>
-            <a:fillRef idx="3">
-              <a:schemeClr val="accent1"/>
-            </a:fillRef>
-            <a:effectRef idx="3">
-              <a:schemeClr val="accent1"/>
-            </a:effectRef>
-            <a:fontRef idx="minor">
-              <a:schemeClr val="lt1"/>
-            </a:fontRef>
-          </p:style>
-          <p:txBody>
-            <a:bodyPr rtlCol="0" anchor="ctr"/>
-            <a:lstStyle/>
-            <a:p>
-              <a:pPr algn="ctr"/>
-              <a:endParaRPr lang="en-US"/>
-            </a:p>
-          </p:txBody>
-        </p:sp>
-        <p:pic>
-          <p:nvPicPr>
-            <p:cNvPr id="11" name="Picture 10">
-              <a:extLst>
-                <a:ext uri="{FF2B5EF4-FFF2-40B4-BE49-F238E27FC236}">
-                  <a16:creationId xmlns:a16="http://schemas.microsoft.com/office/drawing/2014/main" id="{C796209F-D274-5DEB-45D9-C3402DD8B46A}"/>
-                </a:ext>
-              </a:extLst>
-            </p:cNvPr>
-            <p:cNvPicPr>
-              <a:picLocks noChangeAspect="1"/>
-            </p:cNvPicPr>
-            <p:nvPr/>
-          </p:nvPicPr>
-          <p:blipFill>
-            <a:blip r:embed="rId7"/>
-            <a:stretch>
-              <a:fillRect/>
-            </a:stretch>
-          </p:blipFill>
-          <p:spPr>
-            <a:xfrm>
-              <a:off x="1463863" y="4957083"/>
-              <a:ext cx="360209" cy="401771"/>
+              <a:off x="1636272" y="5467958"/>
+              <a:ext cx="505267" cy="369332"/>
             </a:xfrm>
             <a:prstGeom prst="rect">
               <a:avLst/>
             </a:prstGeom>
-            <a:ln>
-              <a:noFill/>
-            </a:ln>
-            <a:effectLst>
-              <a:outerShdw blurRad="292100" dist="139700" dir="2700000" algn="tl" rotWithShape="0">
-                <a:srgbClr val="333333">
-                  <a:alpha val="65000"/>
-                </a:srgbClr>
-              </a:outerShdw>
-            </a:effectLst>
+            <a:noFill/>
           </p:spPr>
-        </p:pic>
-        <p:pic>
-          <p:nvPicPr>
-            <p:cNvPr id="12" name="Picture 11">
+          <p:txBody>
+            <a:bodyPr wrap="square" rtlCol="0">
+              <a:spAutoFit/>
+            </a:bodyPr>
+            <a:lstStyle/>
+            <a:p>
+              <a:r>
+                <a:rPr lang="en-US" dirty="0"/>
+                <a:t>3.5</a:t>
+              </a:r>
+            </a:p>
+          </p:txBody>
+        </p:sp>
+        <p:sp>
+          <p:nvSpPr>
+            <p:cNvPr id="17" name="TextBox 16">
               <a:extLst>
                 <a:ext uri="{FF2B5EF4-FFF2-40B4-BE49-F238E27FC236}">
-                  <a16:creationId xmlns:a16="http://schemas.microsoft.com/office/drawing/2014/main" id="{D6C7995A-87F7-91D6-C1F6-318F2C06C783}"/>
+                  <a16:creationId xmlns:a16="http://schemas.microsoft.com/office/drawing/2014/main" id="{F79F436E-B180-CC50-15DC-9E21FD4771FF}"/>
                 </a:ext>
               </a:extLst>
             </p:cNvPr>
-            <p:cNvPicPr>
-              <a:picLocks noChangeAspect="1"/>
-            </p:cNvPicPr>
+            <p:cNvSpPr txBox="1"/>
             <p:nvPr/>
-          </p:nvPicPr>
-          <p:blipFill>
-            <a:blip r:embed="rId8"/>
-            <a:stretch>
-              <a:fillRect/>
-            </a:stretch>
-          </p:blipFill>
+          </p:nvSpPr>
           <p:spPr>
             <a:xfrm>
-              <a:off x="1463863" y="5536012"/>
-              <a:ext cx="362976" cy="362976"/>
+              <a:off x="9980965" y="4872699"/>
+              <a:ext cx="685800" cy="369332"/>
             </a:xfrm>
             <a:prstGeom prst="rect">
               <a:avLst/>
             </a:prstGeom>
-            <a:ln>
-              <a:noFill/>
-            </a:ln>
-            <a:effectLst>
-              <a:outerShdw blurRad="292100" dist="139700" dir="2700000" algn="tl" rotWithShape="0">
-                <a:srgbClr val="333333">
-                  <a:alpha val="65000"/>
-                </a:srgbClr>
-              </a:outerShdw>
-            </a:effectLst>
+            <a:noFill/>
           </p:spPr>
-        </p:pic>
-        <p:pic>
-          <p:nvPicPr>
-            <p:cNvPr id="13" name="Picture 12">
-              <a:extLst>
-                <a:ext uri="{FF2B5EF4-FFF2-40B4-BE49-F238E27FC236}">
-                  <a16:creationId xmlns:a16="http://schemas.microsoft.com/office/drawing/2014/main" id="{967B15A3-E502-426B-3004-FC2BA59000B0}"/>
-                </a:ext>
-              </a:extLst>
-            </p:cNvPr>
-            <p:cNvPicPr>
-              <a:picLocks noChangeAspect="1"/>
-            </p:cNvPicPr>
-            <p:nvPr/>
-          </p:nvPicPr>
-          <p:blipFill>
-            <a:blip r:embed="rId8"/>
-            <a:stretch>
-              <a:fillRect/>
-            </a:stretch>
-          </p:blipFill>
-          <p:spPr>
-            <a:xfrm>
-              <a:off x="8859620" y="4951896"/>
-              <a:ext cx="362976" cy="362976"/>
-            </a:xfrm>
-            <a:prstGeom prst="rect">
-              <a:avLst/>
-            </a:prstGeom>
-            <a:ln>
-              <a:noFill/>
-            </a:ln>
-            <a:effectLst>
-              <a:outerShdw blurRad="292100" dist="139700" dir="2700000" algn="tl" rotWithShape="0">
-                <a:srgbClr val="333333">
-                  <a:alpha val="65000"/>
-                </a:srgbClr>
-              </a:outerShdw>
-            </a:effectLst>
-          </p:spPr>
-        </p:pic>
-        <p:pic>
-          <p:nvPicPr>
-            <p:cNvPr id="14" name="Picture 13">
-              <a:extLst>
-                <a:ext uri="{FF2B5EF4-FFF2-40B4-BE49-F238E27FC236}">
-                  <a16:creationId xmlns:a16="http://schemas.microsoft.com/office/drawing/2014/main" id="{6FF42F9F-AF6A-3226-86B2-248451228BC6}"/>
-                </a:ext>
-              </a:extLst>
-            </p:cNvPr>
-            <p:cNvPicPr>
-              <a:picLocks noChangeAspect="1"/>
-            </p:cNvPicPr>
-            <p:nvPr/>
-          </p:nvPicPr>
-          <p:blipFill>
-            <a:blip r:embed="rId9"/>
-            <a:stretch>
-              <a:fillRect/>
-            </a:stretch>
-          </p:blipFill>
-          <p:spPr>
-            <a:xfrm>
-              <a:off x="8859620" y="5438299"/>
-              <a:ext cx="371111" cy="460689"/>
-            </a:xfrm>
-            <a:prstGeom prst="rect">
-              <a:avLst/>
-            </a:prstGeom>
-            <a:ln>
-              <a:noFill/>
-            </a:ln>
-            <a:effectLst>
-              <a:outerShdw blurRad="292100" dist="139700" dir="2700000" algn="tl" rotWithShape="0">
-                <a:srgbClr val="333333">
-                  <a:alpha val="65000"/>
-                </a:srgbClr>
-              </a:outerShdw>
-            </a:effectLst>
-          </p:spPr>
-        </p:pic>
+          <p:txBody>
+            <a:bodyPr wrap="square" rtlCol="0">
+              <a:spAutoFit/>
+            </a:bodyPr>
+            <a:lstStyle/>
+            <a:p>
+              <a:r>
+                <a:rPr lang="en-US" dirty="0"/>
+                <a:t>5.6+</a:t>
+              </a:r>
+            </a:p>
+          </p:txBody>
+        </p:sp>
       </p:grpSp>
-      <p:sp>
-        <p:nvSpPr>
-          <p:cNvPr id="16" name="TextBox 15">
-            <a:extLst>
-              <a:ext uri="{FF2B5EF4-FFF2-40B4-BE49-F238E27FC236}">
-                <a16:creationId xmlns:a16="http://schemas.microsoft.com/office/drawing/2014/main" id="{A76B4B21-2091-A494-3901-B7DE776977CD}"/>
-              </a:ext>
-            </a:extLst>
-          </p:cNvPr>
-          <p:cNvSpPr txBox="1"/>
-          <p:nvPr/>
-        </p:nvSpPr>
-        <p:spPr>
-          <a:xfrm>
-            <a:off x="1636272" y="5467958"/>
-            <a:ext cx="505267" cy="369332"/>
-          </a:xfrm>
-          <a:prstGeom prst="rect">
-            <a:avLst/>
-          </a:prstGeom>
-          <a:noFill/>
-        </p:spPr>
-        <p:txBody>
-          <a:bodyPr wrap="square" rtlCol="0">
-            <a:spAutoFit/>
-          </a:bodyPr>
-          <a:lstStyle/>
-          <a:p>
-            <a:r>
-              <a:rPr lang="en-US" dirty="0"/>
-              <a:t>3.5</a:t>
-            </a:r>
-          </a:p>
-        </p:txBody>
-      </p:sp>
-      <p:sp>
-        <p:nvSpPr>
-          <p:cNvPr id="17" name="TextBox 16">
-            <a:extLst>
-              <a:ext uri="{FF2B5EF4-FFF2-40B4-BE49-F238E27FC236}">
-                <a16:creationId xmlns:a16="http://schemas.microsoft.com/office/drawing/2014/main" id="{F79F436E-B180-CC50-15DC-9E21FD4771FF}"/>
-              </a:ext>
-            </a:extLst>
-          </p:cNvPr>
-          <p:cNvSpPr txBox="1"/>
-          <p:nvPr/>
-        </p:nvSpPr>
-        <p:spPr>
-          <a:xfrm>
-            <a:off x="9980965" y="4872699"/>
-            <a:ext cx="685800" cy="369332"/>
-          </a:xfrm>
-          <a:prstGeom prst="rect">
-            <a:avLst/>
-          </a:prstGeom>
-          <a:noFill/>
-        </p:spPr>
-        <p:txBody>
-          <a:bodyPr wrap="square" rtlCol="0">
-            <a:spAutoFit/>
-          </a:bodyPr>
-          <a:lstStyle/>
-          <a:p>
-            <a:r>
-              <a:rPr lang="en-US" dirty="0"/>
-              <a:t>5.6+</a:t>
-            </a:r>
-          </a:p>
-        </p:txBody>
-      </p:sp>
     </p:spTree>
     <p:extLst>
       <p:ext uri="{BB962C8B-B14F-4D97-AF65-F5344CB8AC3E}">
@@ -7370,6 +7397,89 @@
   <p:clrMapOvr>
     <a:masterClrMapping/>
   </p:clrMapOvr>
+  <p:timing>
+    <p:tnLst>
+      <p:par>
+        <p:cTn id="1" dur="indefinite" restart="never" nodeType="tmRoot">
+          <p:childTnLst>
+            <p:seq concurrent="1" nextAc="seek">
+              <p:cTn id="2" dur="indefinite" nodeType="mainSeq">
+                <p:childTnLst>
+                  <p:par>
+                    <p:cTn id="3" fill="hold">
+                      <p:stCondLst>
+                        <p:cond delay="indefinite"/>
+                      </p:stCondLst>
+                      <p:childTnLst>
+                        <p:par>
+                          <p:cTn id="4" fill="hold">
+                            <p:stCondLst>
+                              <p:cond delay="0"/>
+                            </p:stCondLst>
+                            <p:childTnLst>
+                              <p:par>
+                                <p:cTn id="5" presetID="22" presetClass="entr" presetSubtype="8" fill="hold" nodeType="clickEffect">
+                                  <p:stCondLst>
+                                    <p:cond delay="0"/>
+                                  </p:stCondLst>
+                                  <p:childTnLst>
+                                    <p:set>
+                                      <p:cBhvr>
+                                        <p:cTn id="6" dur="1" fill="hold">
+                                          <p:stCondLst>
+                                            <p:cond delay="0"/>
+                                          </p:stCondLst>
+                                        </p:cTn>
+                                        <p:tgtEl>
+                                          <p:spTgt spid="18"/>
+                                        </p:tgtEl>
+                                        <p:attrNameLst>
+                                          <p:attrName>style.visibility</p:attrName>
+                                        </p:attrNameLst>
+                                      </p:cBhvr>
+                                      <p:to>
+                                        <p:strVal val="visible"/>
+                                      </p:to>
+                                    </p:set>
+                                    <p:animEffect transition="in" filter="wipe(left)">
+                                      <p:cBhvr>
+                                        <p:cTn id="7" dur="750"/>
+                                        <p:tgtEl>
+                                          <p:spTgt spid="18"/>
+                                        </p:tgtEl>
+                                      </p:cBhvr>
+                                    </p:animEffect>
+                                  </p:childTnLst>
+                                </p:cTn>
+                              </p:par>
+                            </p:childTnLst>
+                          </p:cTn>
+                        </p:par>
+                      </p:childTnLst>
+                    </p:cTn>
+                  </p:par>
+                </p:childTnLst>
+              </p:cTn>
+              <p:prevCondLst>
+                <p:cond evt="onPrev" delay="0">
+                  <p:tgtEl>
+                    <p:sldTgt/>
+                  </p:tgtEl>
+                </p:cond>
+              </p:prevCondLst>
+              <p:nextCondLst>
+                <p:cond evt="onNext" delay="0">
+                  <p:tgtEl>
+                    <p:sldTgt/>
+                  </p:tgtEl>
+                </p:cond>
+              </p:nextCondLst>
+            </p:seq>
+          </p:childTnLst>
+        </p:cTn>
+      </p:par>
+    </p:tnLst>
+  </p:timing>
 </p:sld>
 </file>
 
@@ -7859,6 +7969,480 @@
 </file>
 
 <file path=ppt/slides/slide3.xml><?xml version="1.0" encoding="utf-8"?>
+<p:sld xmlns:a="http://schemas.openxmlformats.org/drawingml/2006/main" xmlns:r="http://schemas.openxmlformats.org/officeDocument/2006/relationships" xmlns:p="http://schemas.openxmlformats.org/presentationml/2006/main">
+  <p:cSld>
+    <p:spTree>
+      <p:nvGrpSpPr>
+        <p:cNvPr id="1" name="">
+          <a:extLst>
+            <a:ext uri="{FF2B5EF4-FFF2-40B4-BE49-F238E27FC236}">
+              <a16:creationId xmlns:a16="http://schemas.microsoft.com/office/drawing/2014/main" id="{18B89ECA-496A-A03E-437E-F113253271CA}"/>
+            </a:ext>
+          </a:extLst>
+        </p:cNvPr>
+        <p:cNvGrpSpPr/>
+        <p:nvPr/>
+      </p:nvGrpSpPr>
+      <p:grpSpPr>
+        <a:xfrm>
+          <a:off x="0" y="0"/>
+          <a:ext cx="0" cy="0"/>
+          <a:chOff x="0" y="0"/>
+          <a:chExt cx="0" cy="0"/>
+        </a:xfrm>
+      </p:grpSpPr>
+      <p:sp>
+        <p:nvSpPr>
+          <p:cNvPr id="2" name="Title 1">
+            <a:extLst>
+              <a:ext uri="{FF2B5EF4-FFF2-40B4-BE49-F238E27FC236}">
+                <a16:creationId xmlns:a16="http://schemas.microsoft.com/office/drawing/2014/main" id="{1A46176F-4D1D-C373-40D4-D16CAC76BF9F}"/>
+              </a:ext>
+            </a:extLst>
+          </p:cNvPr>
+          <p:cNvSpPr>
+            <a:spLocks noGrp="1"/>
+          </p:cNvSpPr>
+          <p:nvPr>
+            <p:ph type="title"/>
+          </p:nvPr>
+        </p:nvSpPr>
+        <p:spPr>
+          <a:xfrm>
+            <a:off x="1754188" y="452718"/>
+            <a:ext cx="8296646" cy="1400530"/>
+          </a:xfrm>
+        </p:spPr>
+        <p:txBody>
+          <a:bodyPr/>
+          <a:lstStyle/>
+          <a:p>
+            <a:r>
+              <a:rPr lang="en-US" b="1" dirty="0"/>
+              <a:t>Setup Modeling Environment</a:t>
+            </a:r>
+            <a:br>
+              <a:rPr lang="en-US" b="1" dirty="0"/>
+            </a:br>
+            <a:r>
+              <a:rPr lang="en-US" b="1" dirty="0"/>
+              <a:t>- </a:t>
+            </a:r>
+            <a:r>
+              <a:rPr lang="en-US" altLang="zh-CN" b="1" dirty="0"/>
+              <a:t>Essential Open Source EA Tool</a:t>
+            </a:r>
+            <a:endParaRPr lang="en-US" b="1" dirty="0"/>
+          </a:p>
+        </p:txBody>
+      </p:sp>
+      <p:sp>
+        <p:nvSpPr>
+          <p:cNvPr id="4" name="Title 1">
+            <a:extLst>
+              <a:ext uri="{FF2B5EF4-FFF2-40B4-BE49-F238E27FC236}">
+                <a16:creationId xmlns:a16="http://schemas.microsoft.com/office/drawing/2014/main" id="{C75085BF-0762-04EF-08E2-21385F1A52C9}"/>
+              </a:ext>
+            </a:extLst>
+          </p:cNvPr>
+          <p:cNvSpPr txBox="1">
+            <a:spLocks/>
+          </p:cNvSpPr>
+          <p:nvPr/>
+        </p:nvSpPr>
+        <p:spPr>
+          <a:xfrm>
+            <a:off x="0" y="3143"/>
+            <a:ext cx="1754188" cy="1058013"/>
+          </a:xfrm>
+          <a:prstGeom prst="rect">
+            <a:avLst/>
+          </a:prstGeom>
+        </p:spPr>
+        <p:txBody>
+          <a:bodyPr vert="horz" lIns="91440" tIns="45720" rIns="91440" bIns="45720" rtlCol="0" anchor="ctr">
+            <a:noAutofit/>
+          </a:bodyPr>
+          <a:lstStyle>
+            <a:lvl1pPr algn="l" defTabSz="457200" rtl="0" eaLnBrk="1" latinLnBrk="0" hangingPunct="1">
+              <a:spcBef>
+                <a:spcPct val="0"/>
+              </a:spcBef>
+              <a:buNone/>
+              <a:defRPr sz="7200" b="0" i="0" kern="1200">
+                <a:solidFill>
+                  <a:schemeClr val="tx2"/>
+                </a:solidFill>
+                <a:latin typeface="+mj-lt"/>
+                <a:ea typeface="+mj-ea"/>
+                <a:cs typeface="+mj-cs"/>
+              </a:defRPr>
+            </a:lvl1pPr>
+            <a:lvl2pPr eaLnBrk="1" hangingPunct="1">
+              <a:defRPr>
+                <a:solidFill>
+                  <a:schemeClr val="tx2"/>
+                </a:solidFill>
+              </a:defRPr>
+            </a:lvl2pPr>
+            <a:lvl3pPr eaLnBrk="1" hangingPunct="1">
+              <a:defRPr>
+                <a:solidFill>
+                  <a:schemeClr val="tx2"/>
+                </a:solidFill>
+              </a:defRPr>
+            </a:lvl3pPr>
+            <a:lvl4pPr eaLnBrk="1" hangingPunct="1">
+              <a:defRPr>
+                <a:solidFill>
+                  <a:schemeClr val="tx2"/>
+                </a:solidFill>
+              </a:defRPr>
+            </a:lvl4pPr>
+            <a:lvl5pPr eaLnBrk="1" hangingPunct="1">
+              <a:defRPr>
+                <a:solidFill>
+                  <a:schemeClr val="tx2"/>
+                </a:solidFill>
+              </a:defRPr>
+            </a:lvl5pPr>
+            <a:lvl6pPr eaLnBrk="1" hangingPunct="1">
+              <a:defRPr>
+                <a:solidFill>
+                  <a:schemeClr val="tx2"/>
+                </a:solidFill>
+              </a:defRPr>
+            </a:lvl6pPr>
+            <a:lvl7pPr eaLnBrk="1" hangingPunct="1">
+              <a:defRPr>
+                <a:solidFill>
+                  <a:schemeClr val="tx2"/>
+                </a:solidFill>
+              </a:defRPr>
+            </a:lvl7pPr>
+            <a:lvl8pPr eaLnBrk="1" hangingPunct="1">
+              <a:defRPr>
+                <a:solidFill>
+                  <a:schemeClr val="tx2"/>
+                </a:solidFill>
+              </a:defRPr>
+            </a:lvl8pPr>
+            <a:lvl9pPr eaLnBrk="1" hangingPunct="1">
+              <a:defRPr>
+                <a:solidFill>
+                  <a:schemeClr val="tx2"/>
+                </a:solidFill>
+              </a:defRPr>
+            </a:lvl9pPr>
+          </a:lstStyle>
+          <a:p>
+            <a:pPr algn="ctr"/>
+            <a:r>
+              <a:rPr lang="en-US" b="1" dirty="0">
+                <a:solidFill>
+                  <a:schemeClr val="accent1">
+                    <a:lumMod val="75000"/>
+                  </a:schemeClr>
+                </a:solidFill>
+              </a:rPr>
+              <a:t>003</a:t>
+            </a:r>
+            <a:endParaRPr lang="ru-RU" b="1" dirty="0">
+              <a:solidFill>
+                <a:schemeClr val="accent1">
+                  <a:lumMod val="75000"/>
+                </a:schemeClr>
+              </a:solidFill>
+            </a:endParaRPr>
+          </a:p>
+        </p:txBody>
+      </p:sp>
+      <p:pic>
+        <p:nvPicPr>
+          <p:cNvPr id="15" name="Content Placeholder 14">
+            <a:extLst>
+              <a:ext uri="{FF2B5EF4-FFF2-40B4-BE49-F238E27FC236}">
+                <a16:creationId xmlns:a16="http://schemas.microsoft.com/office/drawing/2014/main" id="{C5AEE0F6-50BA-94EA-A24A-CD6240422C85}"/>
+              </a:ext>
+            </a:extLst>
+          </p:cNvPr>
+          <p:cNvPicPr>
+            <a:picLocks noGrp="1" noChangeAspect="1"/>
+          </p:cNvPicPr>
+          <p:nvPr>
+            <p:ph idx="1"/>
+          </p:nvPr>
+        </p:nvPicPr>
+        <p:blipFill>
+          <a:blip r:embed="rId2"/>
+          <a:stretch>
+            <a:fillRect/>
+          </a:stretch>
+        </p:blipFill>
+        <p:spPr>
+          <a:xfrm>
+            <a:off x="751290" y="1986330"/>
+            <a:ext cx="10578594" cy="3930346"/>
+          </a:xfrm>
+          <a:prstGeom prst="roundRect">
+            <a:avLst>
+              <a:gd name="adj" fmla="val 8594"/>
+            </a:avLst>
+          </a:prstGeom>
+          <a:solidFill>
+            <a:srgbClr val="FFFFFF">
+              <a:shade val="85000"/>
+            </a:srgbClr>
+          </a:solidFill>
+          <a:ln>
+            <a:noFill/>
+          </a:ln>
+          <a:effectLst>
+            <a:reflection blurRad="12700" stA="38000" endPos="28000" dist="5000" dir="5400000" sy="-100000" algn="bl" rotWithShape="0"/>
+          </a:effectLst>
+        </p:spPr>
+      </p:pic>
+    </p:spTree>
+    <p:extLst>
+      <p:ext uri="{BB962C8B-B14F-4D97-AF65-F5344CB8AC3E}">
+        <p14:creationId xmlns:p14="http://schemas.microsoft.com/office/powerpoint/2010/main" val="3534675789"/>
+      </p:ext>
+    </p:extLst>
+  </p:cSld>
+  <p:clrMapOvr>
+    <a:masterClrMapping/>
+  </p:clrMapOvr>
+</p:sld>
+</file>
+
+<file path=ppt/slides/slide4.xml><?xml version="1.0" encoding="utf-8"?>
+<p:sld xmlns:a="http://schemas.openxmlformats.org/drawingml/2006/main" xmlns:r="http://schemas.openxmlformats.org/officeDocument/2006/relationships" xmlns:p="http://schemas.openxmlformats.org/presentationml/2006/main">
+  <p:cSld>
+    <p:spTree>
+      <p:nvGrpSpPr>
+        <p:cNvPr id="1" name="">
+          <a:extLst>
+            <a:ext uri="{FF2B5EF4-FFF2-40B4-BE49-F238E27FC236}">
+              <a16:creationId xmlns:a16="http://schemas.microsoft.com/office/drawing/2014/main" id="{3578C238-12BA-88F3-D9C1-1C208A941D68}"/>
+            </a:ext>
+          </a:extLst>
+        </p:cNvPr>
+        <p:cNvGrpSpPr/>
+        <p:nvPr/>
+      </p:nvGrpSpPr>
+      <p:grpSpPr>
+        <a:xfrm>
+          <a:off x="0" y="0"/>
+          <a:ext cx="0" cy="0"/>
+          <a:chOff x="0" y="0"/>
+          <a:chExt cx="0" cy="0"/>
+        </a:xfrm>
+      </p:grpSpPr>
+      <p:sp>
+        <p:nvSpPr>
+          <p:cNvPr id="2" name="Title 1">
+            <a:extLst>
+              <a:ext uri="{FF2B5EF4-FFF2-40B4-BE49-F238E27FC236}">
+                <a16:creationId xmlns:a16="http://schemas.microsoft.com/office/drawing/2014/main" id="{DBB3B5CE-5419-35B0-16E8-861451475657}"/>
+              </a:ext>
+            </a:extLst>
+          </p:cNvPr>
+          <p:cNvSpPr>
+            <a:spLocks noGrp="1"/>
+          </p:cNvSpPr>
+          <p:nvPr>
+            <p:ph type="title"/>
+          </p:nvPr>
+        </p:nvSpPr>
+        <p:spPr>
+          <a:xfrm>
+            <a:off x="1754188" y="452718"/>
+            <a:ext cx="8296646" cy="1400530"/>
+          </a:xfrm>
+        </p:spPr>
+        <p:txBody>
+          <a:bodyPr/>
+          <a:lstStyle/>
+          <a:p>
+            <a:r>
+              <a:rPr lang="en-US" b="1" dirty="0"/>
+              <a:t>Setup Modeling Environment</a:t>
+            </a:r>
+            <a:br>
+              <a:rPr lang="en-US" b="1" dirty="0"/>
+            </a:br>
+            <a:r>
+              <a:rPr lang="en-US" b="1" dirty="0"/>
+              <a:t>- </a:t>
+            </a:r>
+            <a:r>
+              <a:rPr lang="en-US" altLang="zh-CN" b="1" dirty="0"/>
+              <a:t>Protégé &amp; Neo4j</a:t>
+            </a:r>
+            <a:endParaRPr lang="en-US" b="1" dirty="0"/>
+          </a:p>
+        </p:txBody>
+      </p:sp>
+      <p:sp>
+        <p:nvSpPr>
+          <p:cNvPr id="4" name="Title 1">
+            <a:extLst>
+              <a:ext uri="{FF2B5EF4-FFF2-40B4-BE49-F238E27FC236}">
+                <a16:creationId xmlns:a16="http://schemas.microsoft.com/office/drawing/2014/main" id="{BEEB3645-A16E-C6E6-5926-96E8BF14E00E}"/>
+              </a:ext>
+            </a:extLst>
+          </p:cNvPr>
+          <p:cNvSpPr txBox="1">
+            <a:spLocks/>
+          </p:cNvSpPr>
+          <p:nvPr/>
+        </p:nvSpPr>
+        <p:spPr>
+          <a:xfrm>
+            <a:off x="0" y="3143"/>
+            <a:ext cx="1754188" cy="1058013"/>
+          </a:xfrm>
+          <a:prstGeom prst="rect">
+            <a:avLst/>
+          </a:prstGeom>
+        </p:spPr>
+        <p:txBody>
+          <a:bodyPr vert="horz" lIns="91440" tIns="45720" rIns="91440" bIns="45720" rtlCol="0" anchor="ctr">
+            <a:noAutofit/>
+          </a:bodyPr>
+          <a:lstStyle>
+            <a:lvl1pPr algn="l" defTabSz="457200" rtl="0" eaLnBrk="1" latinLnBrk="0" hangingPunct="1">
+              <a:spcBef>
+                <a:spcPct val="0"/>
+              </a:spcBef>
+              <a:buNone/>
+              <a:defRPr sz="7200" b="0" i="0" kern="1200">
+                <a:solidFill>
+                  <a:schemeClr val="tx2"/>
+                </a:solidFill>
+                <a:latin typeface="+mj-lt"/>
+                <a:ea typeface="+mj-ea"/>
+                <a:cs typeface="+mj-cs"/>
+              </a:defRPr>
+            </a:lvl1pPr>
+            <a:lvl2pPr eaLnBrk="1" hangingPunct="1">
+              <a:defRPr>
+                <a:solidFill>
+                  <a:schemeClr val="tx2"/>
+                </a:solidFill>
+              </a:defRPr>
+            </a:lvl2pPr>
+            <a:lvl3pPr eaLnBrk="1" hangingPunct="1">
+              <a:defRPr>
+                <a:solidFill>
+                  <a:schemeClr val="tx2"/>
+                </a:solidFill>
+              </a:defRPr>
+            </a:lvl3pPr>
+            <a:lvl4pPr eaLnBrk="1" hangingPunct="1">
+              <a:defRPr>
+                <a:solidFill>
+                  <a:schemeClr val="tx2"/>
+                </a:solidFill>
+              </a:defRPr>
+            </a:lvl4pPr>
+            <a:lvl5pPr eaLnBrk="1" hangingPunct="1">
+              <a:defRPr>
+                <a:solidFill>
+                  <a:schemeClr val="tx2"/>
+                </a:solidFill>
+              </a:defRPr>
+            </a:lvl5pPr>
+            <a:lvl6pPr eaLnBrk="1" hangingPunct="1">
+              <a:defRPr>
+                <a:solidFill>
+                  <a:schemeClr val="tx2"/>
+                </a:solidFill>
+              </a:defRPr>
+            </a:lvl6pPr>
+            <a:lvl7pPr eaLnBrk="1" hangingPunct="1">
+              <a:defRPr>
+                <a:solidFill>
+                  <a:schemeClr val="tx2"/>
+                </a:solidFill>
+              </a:defRPr>
+            </a:lvl7pPr>
+            <a:lvl8pPr eaLnBrk="1" hangingPunct="1">
+              <a:defRPr>
+                <a:solidFill>
+                  <a:schemeClr val="tx2"/>
+                </a:solidFill>
+              </a:defRPr>
+            </a:lvl8pPr>
+            <a:lvl9pPr eaLnBrk="1" hangingPunct="1">
+              <a:defRPr>
+                <a:solidFill>
+                  <a:schemeClr val="tx2"/>
+                </a:solidFill>
+              </a:defRPr>
+            </a:lvl9pPr>
+          </a:lstStyle>
+          <a:p>
+            <a:pPr algn="ctr"/>
+            <a:r>
+              <a:rPr lang="en-US" b="1" dirty="0">
+                <a:solidFill>
+                  <a:schemeClr val="accent1">
+                    <a:lumMod val="75000"/>
+                  </a:schemeClr>
+                </a:solidFill>
+              </a:rPr>
+              <a:t>003</a:t>
+            </a:r>
+            <a:endParaRPr lang="ru-RU" b="1" dirty="0">
+              <a:solidFill>
+                <a:schemeClr val="accent1">
+                  <a:lumMod val="75000"/>
+                </a:schemeClr>
+              </a:solidFill>
+            </a:endParaRPr>
+          </a:p>
+        </p:txBody>
+      </p:sp>
+      <p:sp>
+        <p:nvSpPr>
+          <p:cNvPr id="5" name="Content Placeholder 4">
+            <a:extLst>
+              <a:ext uri="{FF2B5EF4-FFF2-40B4-BE49-F238E27FC236}">
+                <a16:creationId xmlns:a16="http://schemas.microsoft.com/office/drawing/2014/main" id="{283B264E-E287-5E02-DCD6-CD497112855C}"/>
+              </a:ext>
+            </a:extLst>
+          </p:cNvPr>
+          <p:cNvSpPr>
+            <a:spLocks noGrp="1"/>
+          </p:cNvSpPr>
+          <p:nvPr>
+            <p:ph idx="1"/>
+          </p:nvPr>
+        </p:nvSpPr>
+        <p:spPr/>
+        <p:txBody>
+          <a:bodyPr/>
+          <a:lstStyle/>
+          <a:p>
+            <a:endParaRPr lang="en-US"/>
+          </a:p>
+        </p:txBody>
+      </p:sp>
+    </p:spTree>
+    <p:extLst>
+      <p:ext uri="{BB962C8B-B14F-4D97-AF65-F5344CB8AC3E}">
+        <p14:creationId xmlns:p14="http://schemas.microsoft.com/office/powerpoint/2010/main" val="2895920197"/>
+      </p:ext>
+    </p:extLst>
+  </p:cSld>
+  <p:clrMapOvr>
+    <a:masterClrMapping/>
+  </p:clrMapOvr>
+</p:sld>
+</file>
+
+<file path=ppt/slides/slide5.xml><?xml version="1.0" encoding="utf-8"?>
 <p:sld xmlns:a="http://schemas.openxmlformats.org/drawingml/2006/main" xmlns:r="http://schemas.openxmlformats.org/officeDocument/2006/relationships" xmlns:p="http://schemas.openxmlformats.org/presentationml/2006/main">
   <p:cSld>
     <p:bg>

--- a/Master_EAS_Meta-Model.pptx
+++ b/Master_EAS_Meta-Model.pptx
@@ -5,17 +5,19 @@
     <p:sldMasterId id="2147483648" r:id="rId4"/>
   </p:sldMasterIdLst>
   <p:notesMasterIdLst>
-    <p:notesMasterId r:id="rId10"/>
+    <p:notesMasterId r:id="rId12"/>
   </p:notesMasterIdLst>
   <p:handoutMasterIdLst>
-    <p:handoutMasterId r:id="rId11"/>
+    <p:handoutMasterId r:id="rId13"/>
   </p:handoutMasterIdLst>
   <p:sldIdLst>
     <p:sldId id="256" r:id="rId5"/>
     <p:sldId id="270" r:id="rId6"/>
-    <p:sldId id="271" r:id="rId7"/>
-    <p:sldId id="272" r:id="rId8"/>
-    <p:sldId id="267" r:id="rId9"/>
+    <p:sldId id="273" r:id="rId7"/>
+    <p:sldId id="274" r:id="rId8"/>
+    <p:sldId id="271" r:id="rId9"/>
+    <p:sldId id="272" r:id="rId10"/>
+    <p:sldId id="267" r:id="rId11"/>
   </p:sldIdLst>
   <p:sldSz cx="12192000" cy="6858000"/>
   <p:notesSz cx="6858000" cy="9144000"/>
@@ -823,7 +825,7 @@
           <a:p>
             <a:fld id="{EE000EEB-8338-48D7-8EE8-EE0082EF7602}" type="slidenum">
               <a:rPr lang="en-US" smtClean="0"/>
-              <a:t>5</a:t>
+              <a:t>7</a:t>
             </a:fld>
             <a:endParaRPr lang="en-US" dirty="0"/>
           </a:p>
@@ -1025,7 +1027,7 @@
           <a:p>
             <a:fld id="{4AAD347D-5ACD-4C99-B74B-A9C85AD731AF}" type="datetimeFigureOut">
               <a:rPr lang="en-US" dirty="0"/>
-              <a:t>3/17/2026</a:t>
+              <a:t>3/18/2026</a:t>
             </a:fld>
             <a:endParaRPr lang="en-US" dirty="0"/>
           </a:p>
@@ -1052,7 +1054,13 @@
       </p:sp>
       <p:sp>
         <p:nvSpPr>
-          <p:cNvPr id="6" name="Slide Number Placeholder 5"/>
+          <p:cNvPr id="7" name="Slide Number Placeholder 5">
+            <a:extLst>
+              <a:ext uri="{FF2B5EF4-FFF2-40B4-BE49-F238E27FC236}">
+                <a16:creationId xmlns:a16="http://schemas.microsoft.com/office/drawing/2014/main" id="{589952ED-BE7B-104F-320E-6EEF21592CF8}"/>
+              </a:ext>
+            </a:extLst>
+          </p:cNvPr>
           <p:cNvSpPr>
             <a:spLocks noGrp="1"/>
           </p:cNvSpPr>
@@ -1060,19 +1068,54 @@
             <p:ph type="sldNum" sz="quarter" idx="12"/>
           </p:nvPr>
         </p:nvSpPr>
-        <p:spPr/>
+        <p:spPr>
+          <a:xfrm>
+            <a:off x="10352539" y="385296"/>
+            <a:ext cx="838199" cy="767687"/>
+          </a:xfrm>
+        </p:spPr>
         <p:txBody>
           <a:bodyPr/>
           <a:lstStyle/>
           <a:p>
             <a:fld id="{D57F1E4F-1CFF-5643-939E-02111984F565}" type="slidenum">
-              <a:rPr lang="en-US" dirty="0"/>
+              <a:rPr lang="en-US" smtClean="0"/>
               <a:t>‹#›</a:t>
             </a:fld>
             <a:endParaRPr lang="en-US" dirty="0"/>
           </a:p>
         </p:txBody>
       </p:sp>
+      <p:pic>
+        <p:nvPicPr>
+          <p:cNvPr id="8" name="Picture 7">
+            <a:extLst>
+              <a:ext uri="{FF2B5EF4-FFF2-40B4-BE49-F238E27FC236}">
+                <a16:creationId xmlns:a16="http://schemas.microsoft.com/office/drawing/2014/main" id="{8D7EA4B0-AF51-48C0-759F-856ED00F6A4B}"/>
+              </a:ext>
+            </a:extLst>
+          </p:cNvPr>
+          <p:cNvPicPr>
+            <a:picLocks noChangeAspect="1"/>
+          </p:cNvPicPr>
+          <p:nvPr userDrawn="1"/>
+        </p:nvPicPr>
+        <p:blipFill>
+          <a:blip r:embed="rId2"/>
+          <a:stretch>
+            <a:fillRect/>
+          </a:stretch>
+        </p:blipFill>
+        <p:spPr>
+          <a:xfrm>
+            <a:off x="10440834" y="0"/>
+            <a:ext cx="682228" cy="682228"/>
+          </a:xfrm>
+          <a:prstGeom prst="rect">
+            <a:avLst/>
+          </a:prstGeom>
+        </p:spPr>
+      </p:pic>
     </p:spTree>
   </p:cSld>
   <p:clrMapOvr>
@@ -1295,7 +1338,7 @@
           <a:p>
             <a:fld id="{4509A250-FF31-4206-8172-F9D3106AACB1}" type="datetimeFigureOut">
               <a:rPr lang="en-US" dirty="0"/>
-              <a:t>3/17/2026</a:t>
+              <a:t>3/18/2026</a:t>
             </a:fld>
             <a:endParaRPr lang="en-US" dirty="0"/>
           </a:p>
@@ -1343,6 +1386,36 @@
           </a:p>
         </p:txBody>
       </p:sp>
+      <p:pic>
+        <p:nvPicPr>
+          <p:cNvPr id="8" name="Picture 7">
+            <a:extLst>
+              <a:ext uri="{FF2B5EF4-FFF2-40B4-BE49-F238E27FC236}">
+                <a16:creationId xmlns:a16="http://schemas.microsoft.com/office/drawing/2014/main" id="{F7BBD940-3F8A-E15B-201A-693884A2474F}"/>
+              </a:ext>
+            </a:extLst>
+          </p:cNvPr>
+          <p:cNvPicPr>
+            <a:picLocks noChangeAspect="1"/>
+          </p:cNvPicPr>
+          <p:nvPr userDrawn="1"/>
+        </p:nvPicPr>
+        <p:blipFill>
+          <a:blip r:embed="rId2"/>
+          <a:stretch>
+            <a:fillRect/>
+          </a:stretch>
+        </p:blipFill>
+        <p:spPr>
+          <a:xfrm>
+            <a:off x="10440834" y="0"/>
+            <a:ext cx="682228" cy="682228"/>
+          </a:xfrm>
+          <a:prstGeom prst="rect">
+            <a:avLst/>
+          </a:prstGeom>
+        </p:spPr>
+      </p:pic>
     </p:spTree>
   </p:cSld>
   <p:clrMapOvr>
@@ -1484,7 +1557,7 @@
           <a:p>
             <a:fld id="{4509A250-FF31-4206-8172-F9D3106AACB1}" type="datetimeFigureOut">
               <a:rPr lang="en-US" dirty="0"/>
-              <a:t>3/17/2026</a:t>
+              <a:t>3/18/2026</a:t>
             </a:fld>
             <a:endParaRPr lang="en-US" dirty="0"/>
           </a:p>
@@ -1532,6 +1605,36 @@
           </a:p>
         </p:txBody>
       </p:sp>
+      <p:pic>
+        <p:nvPicPr>
+          <p:cNvPr id="3" name="Picture 2">
+            <a:extLst>
+              <a:ext uri="{FF2B5EF4-FFF2-40B4-BE49-F238E27FC236}">
+                <a16:creationId xmlns:a16="http://schemas.microsoft.com/office/drawing/2014/main" id="{5F1E0F3E-FA9E-302F-3521-A9482EEC6B2A}"/>
+              </a:ext>
+            </a:extLst>
+          </p:cNvPr>
+          <p:cNvPicPr>
+            <a:picLocks noChangeAspect="1"/>
+          </p:cNvPicPr>
+          <p:nvPr userDrawn="1"/>
+        </p:nvPicPr>
+        <p:blipFill>
+          <a:blip r:embed="rId2"/>
+          <a:stretch>
+            <a:fillRect/>
+          </a:stretch>
+        </p:blipFill>
+        <p:spPr>
+          <a:xfrm>
+            <a:off x="10440834" y="0"/>
+            <a:ext cx="682228" cy="682228"/>
+          </a:xfrm>
+          <a:prstGeom prst="rect">
+            <a:avLst/>
+          </a:prstGeom>
+        </p:spPr>
+      </p:pic>
     </p:spTree>
   </p:cSld>
   <p:clrMapOvr>
@@ -1747,7 +1850,7 @@
           <a:p>
             <a:fld id="{4509A250-FF31-4206-8172-F9D3106AACB1}" type="datetimeFigureOut">
               <a:rPr lang="en-US" dirty="0"/>
-              <a:t>3/17/2026</a:t>
+              <a:t>3/18/2026</a:t>
             </a:fld>
             <a:endParaRPr lang="en-US" dirty="0"/>
           </a:p>
@@ -1883,6 +1986,36 @@
           </a:p>
         </p:txBody>
       </p:sp>
+      <p:pic>
+        <p:nvPicPr>
+          <p:cNvPr id="3" name="Picture 2">
+            <a:extLst>
+              <a:ext uri="{FF2B5EF4-FFF2-40B4-BE49-F238E27FC236}">
+                <a16:creationId xmlns:a16="http://schemas.microsoft.com/office/drawing/2014/main" id="{DBEA7A36-DB49-F034-0D2B-B99B57E4C824}"/>
+              </a:ext>
+            </a:extLst>
+          </p:cNvPr>
+          <p:cNvPicPr>
+            <a:picLocks noChangeAspect="1"/>
+          </p:cNvPicPr>
+          <p:nvPr userDrawn="1"/>
+        </p:nvPicPr>
+        <p:blipFill>
+          <a:blip r:embed="rId2"/>
+          <a:stretch>
+            <a:fillRect/>
+          </a:stretch>
+        </p:blipFill>
+        <p:spPr>
+          <a:xfrm>
+            <a:off x="10440834" y="0"/>
+            <a:ext cx="682228" cy="682228"/>
+          </a:xfrm>
+          <a:prstGeom prst="rect">
+            <a:avLst/>
+          </a:prstGeom>
+        </p:spPr>
+      </p:pic>
     </p:spTree>
   </p:cSld>
   <p:clrMapOvr>
@@ -2074,7 +2207,7 @@
           <a:p>
             <a:fld id="{4509A250-FF31-4206-8172-F9D3106AACB1}" type="datetimeFigureOut">
               <a:rPr lang="en-US" dirty="0"/>
-              <a:t>3/17/2026</a:t>
+              <a:t>3/18/2026</a:t>
             </a:fld>
             <a:endParaRPr lang="en-US" dirty="0"/>
           </a:p>
@@ -2122,6 +2255,36 @@
           </a:p>
         </p:txBody>
       </p:sp>
+      <p:pic>
+        <p:nvPicPr>
+          <p:cNvPr id="7" name="Picture 6">
+            <a:extLst>
+              <a:ext uri="{FF2B5EF4-FFF2-40B4-BE49-F238E27FC236}">
+                <a16:creationId xmlns:a16="http://schemas.microsoft.com/office/drawing/2014/main" id="{19F20AA9-43F0-09A4-23E6-E8DC988ED713}"/>
+              </a:ext>
+            </a:extLst>
+          </p:cNvPr>
+          <p:cNvPicPr>
+            <a:picLocks noChangeAspect="1"/>
+          </p:cNvPicPr>
+          <p:nvPr userDrawn="1"/>
+        </p:nvPicPr>
+        <p:blipFill>
+          <a:blip r:embed="rId2"/>
+          <a:stretch>
+            <a:fillRect/>
+          </a:stretch>
+        </p:blipFill>
+        <p:spPr>
+          <a:xfrm>
+            <a:off x="10440834" y="0"/>
+            <a:ext cx="682228" cy="682228"/>
+          </a:xfrm>
+          <a:prstGeom prst="rect">
+            <a:avLst/>
+          </a:prstGeom>
+        </p:spPr>
+      </p:pic>
     </p:spTree>
   </p:cSld>
   <p:clrMapOvr>
@@ -2679,7 +2842,7 @@
           <a:p>
             <a:fld id="{4509A250-FF31-4206-8172-F9D3106AACB1}" type="datetimeFigureOut">
               <a:rPr lang="en-US" dirty="0"/>
-              <a:t>3/17/2026</a:t>
+              <a:t>3/18/2026</a:t>
             </a:fld>
             <a:endParaRPr lang="en-US" dirty="0"/>
           </a:p>
@@ -2727,6 +2890,36 @@
           </a:p>
         </p:txBody>
       </p:sp>
+      <p:pic>
+        <p:nvPicPr>
+          <p:cNvPr id="8" name="Picture 7">
+            <a:extLst>
+              <a:ext uri="{FF2B5EF4-FFF2-40B4-BE49-F238E27FC236}">
+                <a16:creationId xmlns:a16="http://schemas.microsoft.com/office/drawing/2014/main" id="{0D343B25-C4FD-0656-3F40-DA010D99E423}"/>
+              </a:ext>
+            </a:extLst>
+          </p:cNvPr>
+          <p:cNvPicPr>
+            <a:picLocks noChangeAspect="1"/>
+          </p:cNvPicPr>
+          <p:nvPr userDrawn="1"/>
+        </p:nvPicPr>
+        <p:blipFill>
+          <a:blip r:embed="rId2"/>
+          <a:stretch>
+            <a:fillRect/>
+          </a:stretch>
+        </p:blipFill>
+        <p:spPr>
+          <a:xfrm>
+            <a:off x="10440834" y="0"/>
+            <a:ext cx="682228" cy="682228"/>
+          </a:xfrm>
+          <a:prstGeom prst="rect">
+            <a:avLst/>
+          </a:prstGeom>
+        </p:spPr>
+      </p:pic>
     </p:spTree>
   </p:cSld>
   <p:clrMapOvr>
@@ -3521,7 +3714,7 @@
           <a:p>
             <a:fld id="{4509A250-FF31-4206-8172-F9D3106AACB1}" type="datetimeFigureOut">
               <a:rPr lang="en-US" dirty="0"/>
-              <a:t>3/17/2026</a:t>
+              <a:t>3/18/2026</a:t>
             </a:fld>
             <a:endParaRPr lang="en-US" dirty="0"/>
           </a:p>
@@ -3569,6 +3762,36 @@
           </a:p>
         </p:txBody>
       </p:sp>
+      <p:pic>
+        <p:nvPicPr>
+          <p:cNvPr id="8" name="Picture 7">
+            <a:extLst>
+              <a:ext uri="{FF2B5EF4-FFF2-40B4-BE49-F238E27FC236}">
+                <a16:creationId xmlns:a16="http://schemas.microsoft.com/office/drawing/2014/main" id="{C6F9F672-9EAB-0049-C35D-2069EEEDDA48}"/>
+              </a:ext>
+            </a:extLst>
+          </p:cNvPr>
+          <p:cNvPicPr>
+            <a:picLocks noChangeAspect="1"/>
+          </p:cNvPicPr>
+          <p:nvPr userDrawn="1"/>
+        </p:nvPicPr>
+        <p:blipFill>
+          <a:blip r:embed="rId2"/>
+          <a:stretch>
+            <a:fillRect/>
+          </a:stretch>
+        </p:blipFill>
+        <p:spPr>
+          <a:xfrm>
+            <a:off x="10440834" y="0"/>
+            <a:ext cx="682228" cy="682228"/>
+          </a:xfrm>
+          <a:prstGeom prst="rect">
+            <a:avLst/>
+          </a:prstGeom>
+        </p:spPr>
+      </p:pic>
     </p:spTree>
   </p:cSld>
   <p:clrMapOvr>
@@ -3686,7 +3909,7 @@
           <a:p>
             <a:fld id="{4509A250-FF31-4206-8172-F9D3106AACB1}" type="datetimeFigureOut">
               <a:rPr lang="en-US" dirty="0"/>
-              <a:t>3/17/2026</a:t>
+              <a:t>3/18/2026</a:t>
             </a:fld>
             <a:endParaRPr lang="en-US" dirty="0"/>
           </a:p>
@@ -3734,6 +3957,36 @@
           </a:p>
         </p:txBody>
       </p:sp>
+      <p:pic>
+        <p:nvPicPr>
+          <p:cNvPr id="7" name="Picture 6">
+            <a:extLst>
+              <a:ext uri="{FF2B5EF4-FFF2-40B4-BE49-F238E27FC236}">
+                <a16:creationId xmlns:a16="http://schemas.microsoft.com/office/drawing/2014/main" id="{5637B27C-DA22-75FF-154B-52F1F848F8A0}"/>
+              </a:ext>
+            </a:extLst>
+          </p:cNvPr>
+          <p:cNvPicPr>
+            <a:picLocks noChangeAspect="1"/>
+          </p:cNvPicPr>
+          <p:nvPr userDrawn="1"/>
+        </p:nvPicPr>
+        <p:blipFill>
+          <a:blip r:embed="rId2"/>
+          <a:stretch>
+            <a:fillRect/>
+          </a:stretch>
+        </p:blipFill>
+        <p:spPr>
+          <a:xfrm>
+            <a:off x="10440834" y="0"/>
+            <a:ext cx="682228" cy="682228"/>
+          </a:xfrm>
+          <a:prstGeom prst="rect">
+            <a:avLst/>
+          </a:prstGeom>
+        </p:spPr>
+      </p:pic>
     </p:spTree>
   </p:cSld>
   <p:clrMapOvr>
@@ -3861,7 +4114,7 @@
           <a:p>
             <a:fld id="{4509A250-FF31-4206-8172-F9D3106AACB1}" type="datetimeFigureOut">
               <a:rPr lang="en-US" dirty="0"/>
-              <a:t>3/17/2026</a:t>
+              <a:t>3/18/2026</a:t>
             </a:fld>
             <a:endParaRPr lang="en-US" dirty="0"/>
           </a:p>
@@ -3909,6 +4162,36 @@
           </a:p>
         </p:txBody>
       </p:sp>
+      <p:pic>
+        <p:nvPicPr>
+          <p:cNvPr id="7" name="Picture 6">
+            <a:extLst>
+              <a:ext uri="{FF2B5EF4-FFF2-40B4-BE49-F238E27FC236}">
+                <a16:creationId xmlns:a16="http://schemas.microsoft.com/office/drawing/2014/main" id="{91D404BD-5B8C-E289-6E49-7BD1564A597B}"/>
+              </a:ext>
+            </a:extLst>
+          </p:cNvPr>
+          <p:cNvPicPr>
+            <a:picLocks noChangeAspect="1"/>
+          </p:cNvPicPr>
+          <p:nvPr userDrawn="1"/>
+        </p:nvPicPr>
+        <p:blipFill>
+          <a:blip r:embed="rId2"/>
+          <a:stretch>
+            <a:fillRect/>
+          </a:stretch>
+        </p:blipFill>
+        <p:spPr>
+          <a:xfrm>
+            <a:off x="10440834" y="0"/>
+            <a:ext cx="682228" cy="682228"/>
+          </a:xfrm>
+          <a:prstGeom prst="rect">
+            <a:avLst/>
+          </a:prstGeom>
+        </p:spPr>
+      </p:pic>
     </p:spTree>
   </p:cSld>
   <p:clrMapOvr>
@@ -4026,7 +4309,7 @@
           <a:p>
             <a:fld id="{4509A250-FF31-4206-8172-F9D3106AACB1}" type="datetimeFigureOut">
               <a:rPr lang="en-US" dirty="0"/>
-              <a:t>3/17/2026</a:t>
+              <a:t>3/18/2026</a:t>
             </a:fld>
             <a:endParaRPr lang="en-US" dirty="0"/>
           </a:p>
@@ -4061,7 +4344,12 @@
             <p:ph type="sldNum" sz="quarter" idx="12"/>
           </p:nvPr>
         </p:nvSpPr>
-        <p:spPr/>
+        <p:spPr>
+          <a:xfrm>
+            <a:off x="10352539" y="385296"/>
+            <a:ext cx="838199" cy="767687"/>
+          </a:xfrm>
+        </p:spPr>
         <p:txBody>
           <a:bodyPr/>
           <a:lstStyle/>
@@ -4074,6 +4362,36 @@
           </a:p>
         </p:txBody>
       </p:sp>
+      <p:pic>
+        <p:nvPicPr>
+          <p:cNvPr id="8" name="Picture 7">
+            <a:extLst>
+              <a:ext uri="{FF2B5EF4-FFF2-40B4-BE49-F238E27FC236}">
+                <a16:creationId xmlns:a16="http://schemas.microsoft.com/office/drawing/2014/main" id="{A1CCDF70-DC45-44E1-D644-134EE418061B}"/>
+              </a:ext>
+            </a:extLst>
+          </p:cNvPr>
+          <p:cNvPicPr>
+            <a:picLocks noChangeAspect="1"/>
+          </p:cNvPicPr>
+          <p:nvPr userDrawn="1"/>
+        </p:nvPicPr>
+        <p:blipFill>
+          <a:blip r:embed="rId2"/>
+          <a:stretch>
+            <a:fillRect/>
+          </a:stretch>
+        </p:blipFill>
+        <p:spPr>
+          <a:xfrm>
+            <a:off x="10440834" y="0"/>
+            <a:ext cx="682228" cy="682228"/>
+          </a:xfrm>
+          <a:prstGeom prst="rect">
+            <a:avLst/>
+          </a:prstGeom>
+        </p:spPr>
+      </p:pic>
     </p:spTree>
   </p:cSld>
   <p:clrMapOvr>
@@ -4265,7 +4583,7 @@
           <a:p>
             <a:fld id="{4509A250-FF31-4206-8172-F9D3106AACB1}" type="datetimeFigureOut">
               <a:rPr lang="en-US" dirty="0"/>
-              <a:t>3/17/2026</a:t>
+              <a:t>3/18/2026</a:t>
             </a:fld>
             <a:endParaRPr lang="en-US" dirty="0"/>
           </a:p>
@@ -4313,6 +4631,36 @@
           </a:p>
         </p:txBody>
       </p:sp>
+      <p:pic>
+        <p:nvPicPr>
+          <p:cNvPr id="7" name="Picture 6">
+            <a:extLst>
+              <a:ext uri="{FF2B5EF4-FFF2-40B4-BE49-F238E27FC236}">
+                <a16:creationId xmlns:a16="http://schemas.microsoft.com/office/drawing/2014/main" id="{F9B35F26-01CA-66E4-2632-E34E79D9B460}"/>
+              </a:ext>
+            </a:extLst>
+          </p:cNvPr>
+          <p:cNvPicPr>
+            <a:picLocks noChangeAspect="1"/>
+          </p:cNvPicPr>
+          <p:nvPr userDrawn="1"/>
+        </p:nvPicPr>
+        <p:blipFill>
+          <a:blip r:embed="rId2"/>
+          <a:stretch>
+            <a:fillRect/>
+          </a:stretch>
+        </p:blipFill>
+        <p:spPr>
+          <a:xfrm>
+            <a:off x="10440834" y="0"/>
+            <a:ext cx="682228" cy="682228"/>
+          </a:xfrm>
+          <a:prstGeom prst="rect">
+            <a:avLst/>
+          </a:prstGeom>
+        </p:spPr>
+      </p:pic>
     </p:spTree>
   </p:cSld>
   <p:clrMapOvr>
@@ -4985,7 +5333,7 @@
           <a:p>
             <a:fld id="{4509A250-FF31-4206-8172-F9D3106AACB1}" type="datetimeFigureOut">
               <a:rPr lang="en-US" dirty="0"/>
-              <a:t>3/17/2026</a:t>
+              <a:t>3/18/2026</a:t>
             </a:fld>
             <a:endParaRPr lang="en-US" dirty="0"/>
           </a:p>
@@ -5033,6 +5381,36 @@
           </a:p>
         </p:txBody>
       </p:sp>
+      <p:pic>
+        <p:nvPicPr>
+          <p:cNvPr id="10" name="Picture 9">
+            <a:extLst>
+              <a:ext uri="{FF2B5EF4-FFF2-40B4-BE49-F238E27FC236}">
+                <a16:creationId xmlns:a16="http://schemas.microsoft.com/office/drawing/2014/main" id="{342F0297-D013-6C14-E9A5-B10F9BA1988F}"/>
+              </a:ext>
+            </a:extLst>
+          </p:cNvPr>
+          <p:cNvPicPr>
+            <a:picLocks noChangeAspect="1"/>
+          </p:cNvPicPr>
+          <p:nvPr userDrawn="1"/>
+        </p:nvPicPr>
+        <p:blipFill>
+          <a:blip r:embed="rId2"/>
+          <a:stretch>
+            <a:fillRect/>
+          </a:stretch>
+        </p:blipFill>
+        <p:spPr>
+          <a:xfrm>
+            <a:off x="10440834" y="0"/>
+            <a:ext cx="682228" cy="682228"/>
+          </a:xfrm>
+          <a:prstGeom prst="rect">
+            <a:avLst/>
+          </a:prstGeom>
+        </p:spPr>
+      </p:pic>
     </p:spTree>
   </p:cSld>
   <p:clrMapOvr>
@@ -5098,7 +5476,7 @@
           <a:p>
             <a:fld id="{4509A250-FF31-4206-8172-F9D3106AACB1}" type="datetimeFigureOut">
               <a:rPr lang="en-US" dirty="0"/>
-              <a:t>3/17/2026</a:t>
+              <a:t>3/18/2026</a:t>
             </a:fld>
             <a:endParaRPr lang="en-US" dirty="0"/>
           </a:p>
@@ -5146,6 +5524,36 @@
           </a:p>
         </p:txBody>
       </p:sp>
+      <p:pic>
+        <p:nvPicPr>
+          <p:cNvPr id="3" name="Picture 2">
+            <a:extLst>
+              <a:ext uri="{FF2B5EF4-FFF2-40B4-BE49-F238E27FC236}">
+                <a16:creationId xmlns:a16="http://schemas.microsoft.com/office/drawing/2014/main" id="{87FF0769-0A6B-2BE0-2B44-37EC146583F4}"/>
+              </a:ext>
+            </a:extLst>
+          </p:cNvPr>
+          <p:cNvPicPr>
+            <a:picLocks noChangeAspect="1"/>
+          </p:cNvPicPr>
+          <p:nvPr userDrawn="1"/>
+        </p:nvPicPr>
+        <p:blipFill>
+          <a:blip r:embed="rId2"/>
+          <a:stretch>
+            <a:fillRect/>
+          </a:stretch>
+        </p:blipFill>
+        <p:spPr>
+          <a:xfrm>
+            <a:off x="10440834" y="0"/>
+            <a:ext cx="682228" cy="682228"/>
+          </a:xfrm>
+          <a:prstGeom prst="rect">
+            <a:avLst/>
+          </a:prstGeom>
+        </p:spPr>
+      </p:pic>
     </p:spTree>
   </p:cSld>
   <p:clrMapOvr>
@@ -5188,7 +5596,7 @@
           <a:p>
             <a:fld id="{4509A250-FF31-4206-8172-F9D3106AACB1}" type="datetimeFigureOut">
               <a:rPr lang="en-US" dirty="0"/>
-              <a:t>3/17/2026</a:t>
+              <a:t>3/18/2026</a:t>
             </a:fld>
             <a:endParaRPr lang="en-US" dirty="0"/>
           </a:p>
@@ -5236,6 +5644,36 @@
           </a:p>
         </p:txBody>
       </p:sp>
+      <p:pic>
+        <p:nvPicPr>
+          <p:cNvPr id="2" name="Picture 1">
+            <a:extLst>
+              <a:ext uri="{FF2B5EF4-FFF2-40B4-BE49-F238E27FC236}">
+                <a16:creationId xmlns:a16="http://schemas.microsoft.com/office/drawing/2014/main" id="{1CD96C0B-0C44-D93F-ADC5-24D2EA155A7F}"/>
+              </a:ext>
+            </a:extLst>
+          </p:cNvPr>
+          <p:cNvPicPr>
+            <a:picLocks noChangeAspect="1"/>
+          </p:cNvPicPr>
+          <p:nvPr userDrawn="1"/>
+        </p:nvPicPr>
+        <p:blipFill>
+          <a:blip r:embed="rId2"/>
+          <a:stretch>
+            <a:fillRect/>
+          </a:stretch>
+        </p:blipFill>
+        <p:spPr>
+          <a:xfrm>
+            <a:off x="10440834" y="0"/>
+            <a:ext cx="682228" cy="682228"/>
+          </a:xfrm>
+          <a:prstGeom prst="rect">
+            <a:avLst/>
+          </a:prstGeom>
+        </p:spPr>
+      </p:pic>
     </p:spTree>
   </p:cSld>
   <p:clrMapOvr>
@@ -5462,7 +5900,7 @@
           <a:p>
             <a:fld id="{4509A250-FF31-4206-8172-F9D3106AACB1}" type="datetimeFigureOut">
               <a:rPr lang="en-US" dirty="0"/>
-              <a:t>3/17/2026</a:t>
+              <a:t>3/18/2026</a:t>
             </a:fld>
             <a:endParaRPr lang="en-US" dirty="0"/>
           </a:p>
@@ -5510,6 +5948,36 @@
           </a:p>
         </p:txBody>
       </p:sp>
+      <p:pic>
+        <p:nvPicPr>
+          <p:cNvPr id="8" name="Picture 7">
+            <a:extLst>
+              <a:ext uri="{FF2B5EF4-FFF2-40B4-BE49-F238E27FC236}">
+                <a16:creationId xmlns:a16="http://schemas.microsoft.com/office/drawing/2014/main" id="{E1721AEE-200B-53C1-EA9B-335DCDDA2E1B}"/>
+              </a:ext>
+            </a:extLst>
+          </p:cNvPr>
+          <p:cNvPicPr>
+            <a:picLocks noChangeAspect="1"/>
+          </p:cNvPicPr>
+          <p:nvPr userDrawn="1"/>
+        </p:nvPicPr>
+        <p:blipFill>
+          <a:blip r:embed="rId2"/>
+          <a:stretch>
+            <a:fillRect/>
+          </a:stretch>
+        </p:blipFill>
+        <p:spPr>
+          <a:xfrm>
+            <a:off x="10440834" y="0"/>
+            <a:ext cx="682228" cy="682228"/>
+          </a:xfrm>
+          <a:prstGeom prst="rect">
+            <a:avLst/>
+          </a:prstGeom>
+        </p:spPr>
+      </p:pic>
     </p:spTree>
   </p:cSld>
   <p:clrMapOvr>
@@ -5732,7 +6200,7 @@
           <a:p>
             <a:fld id="{4509A250-FF31-4206-8172-F9D3106AACB1}" type="datetimeFigureOut">
               <a:rPr lang="en-US" dirty="0"/>
-              <a:t>3/17/2026</a:t>
+              <a:t>3/18/2026</a:t>
             </a:fld>
             <a:endParaRPr lang="en-US" dirty="0"/>
           </a:p>
@@ -5780,6 +6248,36 @@
           </a:p>
         </p:txBody>
       </p:sp>
+      <p:pic>
+        <p:nvPicPr>
+          <p:cNvPr id="8" name="Picture 7">
+            <a:extLst>
+              <a:ext uri="{FF2B5EF4-FFF2-40B4-BE49-F238E27FC236}">
+                <a16:creationId xmlns:a16="http://schemas.microsoft.com/office/drawing/2014/main" id="{CCD963E2-6AF5-388B-BB85-29C1467F6B99}"/>
+              </a:ext>
+            </a:extLst>
+          </p:cNvPr>
+          <p:cNvPicPr>
+            <a:picLocks noChangeAspect="1"/>
+          </p:cNvPicPr>
+          <p:nvPr userDrawn="1"/>
+        </p:nvPicPr>
+        <p:blipFill>
+          <a:blip r:embed="rId2"/>
+          <a:stretch>
+            <a:fillRect/>
+          </a:stretch>
+        </p:blipFill>
+        <p:spPr>
+          <a:xfrm>
+            <a:off x="10440834" y="0"/>
+            <a:ext cx="682228" cy="682228"/>
+          </a:xfrm>
+          <a:prstGeom prst="rect">
+            <a:avLst/>
+          </a:prstGeom>
+        </p:spPr>
+      </p:pic>
     </p:spTree>
   </p:cSld>
   <p:clrMapOvr>
@@ -6794,12 +7292,8 @@
           <a:lstStyle/>
           <a:p>
             <a:r>
-              <a:rPr lang="en-US"/>
-              <a:t>Building </a:t>
-            </a:r>
-            <a:r>
               <a:rPr lang="en-US" dirty="0"/>
-              <a:t>Up Enterprise Architecture Meta-Model From Scratch</a:t>
+              <a:t>Building Up Enterprise Architecture Meta-Model From Scratch</a:t>
             </a:r>
           </a:p>
         </p:txBody>
@@ -7387,6 +7881,36 @@
           </p:txBody>
         </p:sp>
       </p:grpSp>
+      <p:pic>
+        <p:nvPicPr>
+          <p:cNvPr id="22" name="Picture 21">
+            <a:extLst>
+              <a:ext uri="{FF2B5EF4-FFF2-40B4-BE49-F238E27FC236}">
+                <a16:creationId xmlns:a16="http://schemas.microsoft.com/office/drawing/2014/main" id="{ED6E28A9-476E-DD13-7581-373C3DC93FE5}"/>
+              </a:ext>
+            </a:extLst>
+          </p:cNvPr>
+          <p:cNvPicPr>
+            <a:picLocks noChangeAspect="1"/>
+          </p:cNvPicPr>
+          <p:nvPr/>
+        </p:nvPicPr>
+        <p:blipFill>
+          <a:blip r:embed="rId10"/>
+          <a:stretch>
+            <a:fillRect/>
+          </a:stretch>
+        </p:blipFill>
+        <p:spPr>
+          <a:xfrm>
+            <a:off x="10433311" y="2916"/>
+            <a:ext cx="676656" cy="676656"/>
+          </a:xfrm>
+          <a:prstGeom prst="rect">
+            <a:avLst/>
+          </a:prstGeom>
+        </p:spPr>
+      </p:pic>
     </p:spTree>
     <p:extLst>
       <p:ext uri="{BB962C8B-B14F-4D97-AF65-F5344CB8AC3E}">
@@ -7528,53 +8052,11 @@
           <a:p>
             <a:r>
               <a:rPr lang="en-US" b="1" dirty="0"/>
-              <a:t>Understanding EAS Metamodel</a:t>
-            </a:r>
-          </a:p>
-        </p:txBody>
-      </p:sp>
-      <p:pic>
-        <p:nvPicPr>
-          <p:cNvPr id="6" name="Content Placeholder 5">
-            <a:extLst>
-              <a:ext uri="{FF2B5EF4-FFF2-40B4-BE49-F238E27FC236}">
-                <a16:creationId xmlns:a16="http://schemas.microsoft.com/office/drawing/2014/main" id="{C5CE6604-B384-AE7F-ADEE-C23A021FF119}"/>
-              </a:ext>
-            </a:extLst>
-          </p:cNvPr>
-          <p:cNvPicPr>
-            <a:picLocks noGrp="1" noChangeAspect="1"/>
-          </p:cNvPicPr>
-          <p:nvPr>
-            <p:ph idx="1"/>
-          </p:nvPr>
-        </p:nvPicPr>
-        <p:blipFill>
-          <a:blip r:embed="rId2"/>
-          <a:stretch>
-            <a:fillRect/>
-          </a:stretch>
-        </p:blipFill>
-        <p:spPr>
-          <a:xfrm>
-            <a:off x="1456647" y="1224062"/>
-            <a:ext cx="4748944" cy="5389674"/>
-          </a:xfrm>
-          <a:prstGeom prst="rect">
-            <a:avLst/>
-          </a:prstGeom>
-          <a:ln>
-            <a:noFill/>
-          </a:ln>
-          <a:effectLst>
-            <a:outerShdw blurRad="292100" dist="139700" dir="2700000" algn="tl" rotWithShape="0">
-              <a:srgbClr val="333333">
-                <a:alpha val="65000"/>
-              </a:srgbClr>
-            </a:outerShdw>
-          </a:effectLst>
-        </p:spPr>
-      </p:pic>
+              <a:t>What is Metamodel?</a:t>
+            </a:r>
+          </a:p>
+        </p:txBody>
+      </p:sp>
       <p:sp>
         <p:nvSpPr>
           <p:cNvPr id="4" name="Title 1">
@@ -7698,83 +8180,48 @@
       </p:sp>
       <p:pic>
         <p:nvPicPr>
-          <p:cNvPr id="7" name="Picture 6">
+          <p:cNvPr id="16" name="Content Placeholder 15">
             <a:extLst>
               <a:ext uri="{FF2B5EF4-FFF2-40B4-BE49-F238E27FC236}">
-                <a16:creationId xmlns:a16="http://schemas.microsoft.com/office/drawing/2014/main" id="{1450B529-4B1E-859B-EC08-6C29AD298AEC}"/>
+                <a16:creationId xmlns:a16="http://schemas.microsoft.com/office/drawing/2014/main" id="{26C5F8E6-1898-6EF3-FA8C-DD760C08E35A}"/>
               </a:ext>
             </a:extLst>
           </p:cNvPr>
           <p:cNvPicPr>
-            <a:picLocks noChangeAspect="1"/>
+            <a:picLocks noGrp="1" noChangeAspect="1"/>
           </p:cNvPicPr>
-          <p:nvPr/>
+          <p:nvPr>
+            <p:ph idx="1"/>
+          </p:nvPr>
         </p:nvPicPr>
         <p:blipFill>
-          <a:blip r:embed="rId3"/>
+          <a:blip r:embed="rId2"/>
           <a:stretch>
             <a:fillRect/>
           </a:stretch>
         </p:blipFill>
         <p:spPr>
           <a:xfrm>
-            <a:off x="181336" y="3429000"/>
-            <a:ext cx="1772040" cy="398709"/>
-          </a:xfrm>
-          <a:prstGeom prst="roundRect">
-            <a:avLst>
-              <a:gd name="adj" fmla="val 8594"/>
-            </a:avLst>
+            <a:off x="426896" y="1692503"/>
+            <a:ext cx="7221654" cy="4328918"/>
+          </a:xfrm>
+          <a:prstGeom prst="rect">
+            <a:avLst/>
           </a:prstGeom>
-          <a:solidFill>
-            <a:srgbClr val="FFFFFF">
-              <a:shade val="85000"/>
-            </a:srgbClr>
-          </a:solidFill>
           <a:ln>
             <a:noFill/>
           </a:ln>
           <a:effectLst>
-            <a:reflection blurRad="12700" stA="38000" endPos="28000" dist="5000" dir="5400000" sy="-100000" algn="bl" rotWithShape="0"/>
+            <a:softEdge rad="112500"/>
           </a:effectLst>
         </p:spPr>
       </p:pic>
-      <p:pic>
-        <p:nvPicPr>
-          <p:cNvPr id="8" name="Picture 7">
+      <p:sp>
+        <p:nvSpPr>
+          <p:cNvPr id="18" name="TextBox 17">
             <a:extLst>
               <a:ext uri="{FF2B5EF4-FFF2-40B4-BE49-F238E27FC236}">
-                <a16:creationId xmlns:a16="http://schemas.microsoft.com/office/drawing/2014/main" id="{97FA55ED-6D2E-E9BB-56CA-5E548C5A7C0A}"/>
-              </a:ext>
-            </a:extLst>
-          </p:cNvPr>
-          <p:cNvPicPr>
-            <a:picLocks noChangeAspect="1"/>
-          </p:cNvPicPr>
-          <p:nvPr/>
-        </p:nvPicPr>
-        <p:blipFill>
-          <a:blip r:embed="rId4"/>
-          <a:stretch>
-            <a:fillRect/>
-          </a:stretch>
-        </p:blipFill>
-        <p:spPr>
-          <a:xfrm>
-            <a:off x="7959779" y="1673987"/>
-            <a:ext cx="1805255" cy="1353942"/>
-          </a:xfrm>
-          <a:prstGeom prst="rect">
-            <a:avLst/>
-          </a:prstGeom>
-        </p:spPr>
-      </p:pic>
-      <p:sp>
-        <p:nvSpPr>
-          <p:cNvPr id="9" name="TextBox 8">
-            <a:extLst>
-              <a:ext uri="{FF2B5EF4-FFF2-40B4-BE49-F238E27FC236}">
-                <a16:creationId xmlns:a16="http://schemas.microsoft.com/office/drawing/2014/main" id="{32D77D53-E5B1-541D-3D31-F5581E14887B}"/>
+                <a16:creationId xmlns:a16="http://schemas.microsoft.com/office/drawing/2014/main" id="{76502029-A09B-6808-2CC6-02B3F9FA62E4}"/>
               </a:ext>
             </a:extLst>
           </p:cNvPr>
@@ -7783,8 +8230,8 @@
         </p:nvSpPr>
         <p:spPr>
           <a:xfrm>
-            <a:off x="6503132" y="1298289"/>
-            <a:ext cx="5246949" cy="307777"/>
+            <a:off x="7743217" y="1696302"/>
+            <a:ext cx="4221475" cy="3908762"/>
           </a:xfrm>
           <a:prstGeom prst="rect">
             <a:avLst/>
@@ -7792,13 +8239,31 @@
           <a:noFill/>
         </p:spPr>
         <p:txBody>
-          <a:bodyPr wrap="none" rtlCol="0">
+          <a:bodyPr wrap="square">
             <a:spAutoFit/>
           </a:bodyPr>
           <a:lstStyle/>
           <a:p>
             <a:r>
-              <a:rPr lang="en-US" sz="1400" b="1" dirty="0">
+              <a:rPr lang="en-US" sz="2400" b="1" dirty="0">
+                <a:solidFill>
+                  <a:schemeClr val="accent1">
+                    <a:lumMod val="60000"/>
+                    <a:lumOff val="40000"/>
+                  </a:schemeClr>
+                </a:solidFill>
+                <a:effectLst>
+                  <a:outerShdw blurRad="38100" dist="38100" dir="2700000" algn="tl">
+                    <a:srgbClr val="000000">
+                      <a:alpha val="43137"/>
+                    </a:srgbClr>
+                  </a:outerShdw>
+                </a:effectLst>
+              </a:rPr>
+              <a:t>A metamodel is a model of a model</a:t>
+            </a:r>
+            <a:r>
+              <a:rPr lang="en-US" sz="2000" dirty="0">
                 <a:solidFill>
                   <a:schemeClr val="accent1">
                     <a:lumMod val="60000"/>
@@ -7806,41 +8271,22 @@
                   </a:schemeClr>
                 </a:solidFill>
               </a:rPr>
-              <a:t>MODAF: British Ministry of Defense Architecture Framework</a:t>
-            </a:r>
-          </a:p>
-        </p:txBody>
-      </p:sp>
-      <p:sp>
-        <p:nvSpPr>
-          <p:cNvPr id="10" name="TextBox 9">
-            <a:extLst>
-              <a:ext uri="{FF2B5EF4-FFF2-40B4-BE49-F238E27FC236}">
-                <a16:creationId xmlns:a16="http://schemas.microsoft.com/office/drawing/2014/main" id="{74F1033D-83ED-CFEA-65C1-8A5C031ED459}"/>
-              </a:ext>
-            </a:extLst>
-          </p:cNvPr>
-          <p:cNvSpPr txBox="1"/>
-          <p:nvPr/>
-        </p:nvSpPr>
-        <p:spPr>
-          <a:xfrm>
-            <a:off x="6503132" y="2998269"/>
-            <a:ext cx="4374916" cy="307777"/>
-          </a:xfrm>
-          <a:prstGeom prst="rect">
-            <a:avLst/>
-          </a:prstGeom>
-          <a:noFill/>
-        </p:spPr>
-        <p:txBody>
-          <a:bodyPr wrap="none" rtlCol="0">
-            <a:spAutoFit/>
-          </a:bodyPr>
-          <a:lstStyle/>
-          <a:p>
-            <a:r>
-              <a:rPr lang="en-US" sz="1400" b="1" dirty="0">
+              <a:t>, and metamodeling is the process of generating such metamodels.</a:t>
+            </a:r>
+          </a:p>
+          <a:p>
+            <a:endParaRPr lang="en-US" sz="2000" dirty="0">
+              <a:solidFill>
+                <a:schemeClr val="accent1">
+                  <a:lumMod val="60000"/>
+                  <a:lumOff val="40000"/>
+                </a:schemeClr>
+              </a:solidFill>
+            </a:endParaRPr>
+          </a:p>
+          <a:p>
+            <a:r>
+              <a:rPr lang="en-US" sz="2000" dirty="0">
                 <a:solidFill>
                   <a:schemeClr val="accent1">
                     <a:lumMod val="60000"/>
@@ -7848,113 +8294,11 @@
                   </a:schemeClr>
                 </a:solidFill>
               </a:rPr>
-              <a:t>FEAF: Federal Enterprise Architecture Framework</a:t>
-            </a:r>
-          </a:p>
-        </p:txBody>
-      </p:sp>
-      <p:pic>
-        <p:nvPicPr>
-          <p:cNvPr id="11" name="Picture 10">
-            <a:extLst>
-              <a:ext uri="{FF2B5EF4-FFF2-40B4-BE49-F238E27FC236}">
-                <a16:creationId xmlns:a16="http://schemas.microsoft.com/office/drawing/2014/main" id="{6894BB93-8958-DB5F-3B3D-70DA03C9E614}"/>
-              </a:ext>
-            </a:extLst>
-          </p:cNvPr>
-          <p:cNvPicPr>
-            <a:picLocks noChangeAspect="1"/>
-          </p:cNvPicPr>
-          <p:nvPr/>
-        </p:nvPicPr>
-        <p:blipFill>
-          <a:blip r:embed="rId5"/>
-          <a:stretch>
-            <a:fillRect/>
-          </a:stretch>
-        </p:blipFill>
-        <p:spPr>
-          <a:xfrm>
-            <a:off x="7959778" y="3329406"/>
-            <a:ext cx="1805255" cy="1457327"/>
-          </a:xfrm>
-          <a:prstGeom prst="rect">
-            <a:avLst/>
-          </a:prstGeom>
-        </p:spPr>
-      </p:pic>
-      <p:sp>
-        <p:nvSpPr>
-          <p:cNvPr id="12" name="TextBox 11">
-            <a:extLst>
-              <a:ext uri="{FF2B5EF4-FFF2-40B4-BE49-F238E27FC236}">
-                <a16:creationId xmlns:a16="http://schemas.microsoft.com/office/drawing/2014/main" id="{A48C40A1-8C22-B4D9-2C2B-EEA60611A95E}"/>
-              </a:ext>
-            </a:extLst>
-          </p:cNvPr>
-          <p:cNvSpPr txBox="1"/>
-          <p:nvPr/>
-        </p:nvSpPr>
-        <p:spPr>
-          <a:xfrm>
-            <a:off x="6503132" y="4787312"/>
-            <a:ext cx="4464684" cy="307777"/>
-          </a:xfrm>
-          <a:prstGeom prst="rect">
-            <a:avLst/>
-          </a:prstGeom>
-          <a:noFill/>
-        </p:spPr>
-        <p:txBody>
-          <a:bodyPr wrap="none" rtlCol="0">
-            <a:spAutoFit/>
-          </a:bodyPr>
-          <a:lstStyle/>
-          <a:p>
-            <a:r>
-              <a:rPr lang="en-US" sz="1400" b="1" dirty="0">
-                <a:solidFill>
-                  <a:schemeClr val="accent1">
-                    <a:lumMod val="60000"/>
-                    <a:lumOff val="40000"/>
-                  </a:schemeClr>
-                </a:solidFill>
-              </a:rPr>
-              <a:t>TOGAF: The Open Group Architecture Framework</a:t>
-            </a:r>
-          </a:p>
-        </p:txBody>
-      </p:sp>
-      <p:pic>
-        <p:nvPicPr>
-          <p:cNvPr id="13" name="Picture 12">
-            <a:extLst>
-              <a:ext uri="{FF2B5EF4-FFF2-40B4-BE49-F238E27FC236}">
-                <a16:creationId xmlns:a16="http://schemas.microsoft.com/office/drawing/2014/main" id="{799EB17C-9B78-B394-2F8D-25DC39ED7A8E}"/>
-              </a:ext>
-            </a:extLst>
-          </p:cNvPr>
-          <p:cNvPicPr>
-            <a:picLocks noChangeAspect="1"/>
-          </p:cNvPicPr>
-          <p:nvPr/>
-        </p:nvPicPr>
-        <p:blipFill>
-          <a:blip r:embed="rId6"/>
-          <a:stretch>
-            <a:fillRect/>
-          </a:stretch>
-        </p:blipFill>
-        <p:spPr>
-          <a:xfrm>
-            <a:off x="7959778" y="5119027"/>
-            <a:ext cx="1805255" cy="1426151"/>
-          </a:xfrm>
-          <a:prstGeom prst="rect">
-            <a:avLst/>
-          </a:prstGeom>
-        </p:spPr>
-      </p:pic>
+              <a:t>Metamodeling or meta-modeling is the analysis, construction, and development of the frames, rules, constraints, models, and theories applicable and useful for modeling a predefined class of problems.</a:t>
+            </a:r>
+          </a:p>
+        </p:txBody>
+      </p:sp>
     </p:spTree>
     <p:extLst>
       <p:ext uri="{BB962C8B-B14F-4D97-AF65-F5344CB8AC3E}">
@@ -7965,6 +8309,161 @@
   <p:clrMapOvr>
     <a:masterClrMapping/>
   </p:clrMapOvr>
+  <p:timing>
+    <p:tnLst>
+      <p:par>
+        <p:cTn id="1" dur="indefinite" restart="never" nodeType="tmRoot">
+          <p:childTnLst>
+            <p:seq concurrent="1" nextAc="seek">
+              <p:cTn id="2" dur="indefinite" nodeType="mainSeq">
+                <p:childTnLst>
+                  <p:par>
+                    <p:cTn id="3" fill="hold">
+                      <p:stCondLst>
+                        <p:cond delay="indefinite"/>
+                      </p:stCondLst>
+                      <p:childTnLst>
+                        <p:par>
+                          <p:cTn id="4" fill="hold">
+                            <p:stCondLst>
+                              <p:cond delay="0"/>
+                            </p:stCondLst>
+                            <p:childTnLst>
+                              <p:par>
+                                <p:cTn id="5" presetID="10" presetClass="entr" presetSubtype="0" fill="hold" grpId="0" nodeType="clickEffect">
+                                  <p:stCondLst>
+                                    <p:cond delay="0"/>
+                                  </p:stCondLst>
+                                  <p:childTnLst>
+                                    <p:set>
+                                      <p:cBhvr>
+                                        <p:cTn id="6" dur="1" fill="hold">
+                                          <p:stCondLst>
+                                            <p:cond delay="0"/>
+                                          </p:stCondLst>
+                                        </p:cTn>
+                                        <p:tgtEl>
+                                          <p:spTgt spid="18">
+                                            <p:txEl>
+                                              <p:pRg st="0" end="0"/>
+                                            </p:txEl>
+                                          </p:spTgt>
+                                        </p:tgtEl>
+                                        <p:attrNameLst>
+                                          <p:attrName>style.visibility</p:attrName>
+                                        </p:attrNameLst>
+                                      </p:cBhvr>
+                                      <p:to>
+                                        <p:strVal val="visible"/>
+                                      </p:to>
+                                    </p:set>
+                                    <p:animEffect transition="in" filter="fade">
+                                      <p:cBhvr>
+                                        <p:cTn id="7" dur="500"/>
+                                        <p:tgtEl>
+                                          <p:spTgt spid="18">
+                                            <p:txEl>
+                                              <p:pRg st="0" end="0"/>
+                                            </p:txEl>
+                                          </p:spTgt>
+                                        </p:tgtEl>
+                                      </p:cBhvr>
+                                    </p:animEffect>
+                                  </p:childTnLst>
+                                </p:cTn>
+                              </p:par>
+                            </p:childTnLst>
+                          </p:cTn>
+                        </p:par>
+                      </p:childTnLst>
+                    </p:cTn>
+                  </p:par>
+                  <p:par>
+                    <p:cTn id="8" fill="hold">
+                      <p:stCondLst>
+                        <p:cond delay="indefinite"/>
+                      </p:stCondLst>
+                      <p:childTnLst>
+                        <p:par>
+                          <p:cTn id="9" fill="hold">
+                            <p:stCondLst>
+                              <p:cond delay="0"/>
+                            </p:stCondLst>
+                            <p:childTnLst>
+                              <p:par>
+                                <p:cTn id="10" presetID="10" presetClass="entr" presetSubtype="0" fill="hold" grpId="0" nodeType="clickEffect">
+                                  <p:stCondLst>
+                                    <p:cond delay="0"/>
+                                  </p:stCondLst>
+                                  <p:childTnLst>
+                                    <p:set>
+                                      <p:cBhvr>
+                                        <p:cTn id="11" dur="1" fill="hold">
+                                          <p:stCondLst>
+                                            <p:cond delay="0"/>
+                                          </p:stCondLst>
+                                        </p:cTn>
+                                        <p:tgtEl>
+                                          <p:spTgt spid="18">
+                                            <p:txEl>
+                                              <p:pRg st="2" end="2"/>
+                                            </p:txEl>
+                                          </p:spTgt>
+                                        </p:tgtEl>
+                                        <p:attrNameLst>
+                                          <p:attrName>style.visibility</p:attrName>
+                                        </p:attrNameLst>
+                                      </p:cBhvr>
+                                      <p:to>
+                                        <p:strVal val="visible"/>
+                                      </p:to>
+                                    </p:set>
+                                    <p:animEffect transition="in" filter="fade">
+                                      <p:cBhvr>
+                                        <p:cTn id="12" dur="500"/>
+                                        <p:tgtEl>
+                                          <p:spTgt spid="18">
+                                            <p:txEl>
+                                              <p:pRg st="2" end="2"/>
+                                            </p:txEl>
+                                          </p:spTgt>
+                                        </p:tgtEl>
+                                      </p:cBhvr>
+                                    </p:animEffect>
+                                  </p:childTnLst>
+                                </p:cTn>
+                              </p:par>
+                            </p:childTnLst>
+                          </p:cTn>
+                        </p:par>
+                      </p:childTnLst>
+                    </p:cTn>
+                  </p:par>
+                </p:childTnLst>
+              </p:cTn>
+              <p:prevCondLst>
+                <p:cond evt="onPrev" delay="0">
+                  <p:tgtEl>
+                    <p:sldTgt/>
+                  </p:tgtEl>
+                </p:cond>
+              </p:prevCondLst>
+              <p:nextCondLst>
+                <p:cond evt="onNext" delay="0">
+                  <p:tgtEl>
+                    <p:sldTgt/>
+                  </p:tgtEl>
+                </p:cond>
+              </p:nextCondLst>
+            </p:seq>
+          </p:childTnLst>
+        </p:cTn>
+      </p:par>
+    </p:tnLst>
+    <p:bldLst>
+      <p:bldP spid="18" grpId="0" build="p"/>
+    </p:bldLst>
+  </p:timing>
 </p:sld>
 </file>
 
@@ -7976,7 +8475,7 @@
         <p:cNvPr id="1" name="">
           <a:extLst>
             <a:ext uri="{FF2B5EF4-FFF2-40B4-BE49-F238E27FC236}">
-              <a16:creationId xmlns:a16="http://schemas.microsoft.com/office/drawing/2014/main" id="{18B89ECA-496A-A03E-437E-F113253271CA}"/>
+              <a16:creationId xmlns:a16="http://schemas.microsoft.com/office/drawing/2014/main" id="{CD0AE5B6-80DF-D70A-F20B-FEA4ECBA7859}"/>
             </a:ext>
           </a:extLst>
         </p:cNvPr>
@@ -7996,7 +8495,7 @@
           <p:cNvPr id="2" name="Title 1">
             <a:extLst>
               <a:ext uri="{FF2B5EF4-FFF2-40B4-BE49-F238E27FC236}">
-                <a16:creationId xmlns:a16="http://schemas.microsoft.com/office/drawing/2014/main" id="{1A46176F-4D1D-C373-40D4-D16CAC76BF9F}"/>
+                <a16:creationId xmlns:a16="http://schemas.microsoft.com/office/drawing/2014/main" id="{359C0FF8-4E49-6AF6-6543-8EC91803EF6C}"/>
               </a:ext>
             </a:extLst>
           </p:cNvPr>
@@ -8019,29 +8518,59 @@
           <a:p>
             <a:r>
               <a:rPr lang="en-US" b="1" dirty="0"/>
-              <a:t>Setup Modeling Environment</a:t>
-            </a:r>
-            <a:br>
-              <a:rPr lang="en-US" b="1" dirty="0"/>
-            </a:br>
-            <a:r>
-              <a:rPr lang="en-US" b="1" dirty="0"/>
-              <a:t>- </a:t>
-            </a:r>
-            <a:r>
-              <a:rPr lang="en-US" altLang="zh-CN" b="1" dirty="0"/>
-              <a:t>Essential Open Source EA Tool</a:t>
-            </a:r>
-            <a:endParaRPr lang="en-US" b="1" dirty="0"/>
-          </a:p>
-        </p:txBody>
-      </p:sp>
+              <a:t>Understanding EAS Metamodel</a:t>
+            </a:r>
+          </a:p>
+        </p:txBody>
+      </p:sp>
+      <p:pic>
+        <p:nvPicPr>
+          <p:cNvPr id="6" name="Content Placeholder 5">
+            <a:extLst>
+              <a:ext uri="{FF2B5EF4-FFF2-40B4-BE49-F238E27FC236}">
+                <a16:creationId xmlns:a16="http://schemas.microsoft.com/office/drawing/2014/main" id="{ADEB0D3F-A404-6BB2-1E1D-5CC2474878EC}"/>
+              </a:ext>
+            </a:extLst>
+          </p:cNvPr>
+          <p:cNvPicPr>
+            <a:picLocks noGrp="1" noChangeAspect="1"/>
+          </p:cNvPicPr>
+          <p:nvPr>
+            <p:ph idx="1"/>
+          </p:nvPr>
+        </p:nvPicPr>
+        <p:blipFill>
+          <a:blip r:embed="rId2"/>
+          <a:stretch>
+            <a:fillRect/>
+          </a:stretch>
+        </p:blipFill>
+        <p:spPr>
+          <a:xfrm>
+            <a:off x="1456647" y="1224062"/>
+            <a:ext cx="4748944" cy="5389674"/>
+          </a:xfrm>
+          <a:prstGeom prst="rect">
+            <a:avLst/>
+          </a:prstGeom>
+          <a:ln>
+            <a:noFill/>
+          </a:ln>
+          <a:effectLst>
+            <a:outerShdw blurRad="292100" dist="139700" dir="2700000" algn="tl" rotWithShape="0">
+              <a:srgbClr val="333333">
+                <a:alpha val="65000"/>
+              </a:srgbClr>
+            </a:outerShdw>
+          </a:effectLst>
+        </p:spPr>
+      </p:pic>
       <p:sp>
         <p:nvSpPr>
           <p:cNvPr id="4" name="Title 1">
             <a:extLst>
               <a:ext uri="{FF2B5EF4-FFF2-40B4-BE49-F238E27FC236}">
-                <a16:creationId xmlns:a16="http://schemas.microsoft.com/office/drawing/2014/main" id="{C75085BF-0762-04EF-08E2-21385F1A52C9}"/>
+                <a16:creationId xmlns:a16="http://schemas.microsoft.com/office/drawing/2014/main" id="{76D7B0F9-1CC8-9F3C-0657-1F59FC2CBC65}"/>
               </a:ext>
             </a:extLst>
           </p:cNvPr>
@@ -8159,30 +8688,28 @@
       </p:sp>
       <p:pic>
         <p:nvPicPr>
-          <p:cNvPr id="15" name="Content Placeholder 14">
+          <p:cNvPr id="7" name="Picture 6">
             <a:extLst>
               <a:ext uri="{FF2B5EF4-FFF2-40B4-BE49-F238E27FC236}">
-                <a16:creationId xmlns:a16="http://schemas.microsoft.com/office/drawing/2014/main" id="{C5AEE0F6-50BA-94EA-A24A-CD6240422C85}"/>
+                <a16:creationId xmlns:a16="http://schemas.microsoft.com/office/drawing/2014/main" id="{F342C48B-BA5B-E812-69AC-BF70DDE307A5}"/>
               </a:ext>
             </a:extLst>
           </p:cNvPr>
           <p:cNvPicPr>
-            <a:picLocks noGrp="1" noChangeAspect="1"/>
+            <a:picLocks noChangeAspect="1"/>
           </p:cNvPicPr>
-          <p:nvPr>
-            <p:ph idx="1"/>
-          </p:nvPr>
+          <p:nvPr/>
         </p:nvPicPr>
         <p:blipFill>
-          <a:blip r:embed="rId2"/>
+          <a:blip r:embed="rId3"/>
           <a:stretch>
             <a:fillRect/>
           </a:stretch>
         </p:blipFill>
         <p:spPr>
           <a:xfrm>
-            <a:off x="751290" y="1986330"/>
-            <a:ext cx="10578594" cy="3930346"/>
+            <a:off x="181336" y="3429000"/>
+            <a:ext cx="1772040" cy="398709"/>
           </a:xfrm>
           <a:prstGeom prst="roundRect">
             <a:avLst>
@@ -8202,10 +8729,226 @@
           </a:effectLst>
         </p:spPr>
       </p:pic>
+      <p:pic>
+        <p:nvPicPr>
+          <p:cNvPr id="8" name="Picture 7">
+            <a:extLst>
+              <a:ext uri="{FF2B5EF4-FFF2-40B4-BE49-F238E27FC236}">
+                <a16:creationId xmlns:a16="http://schemas.microsoft.com/office/drawing/2014/main" id="{8D408417-9471-F069-8916-5C469353ED20}"/>
+              </a:ext>
+            </a:extLst>
+          </p:cNvPr>
+          <p:cNvPicPr>
+            <a:picLocks noChangeAspect="1"/>
+          </p:cNvPicPr>
+          <p:nvPr/>
+        </p:nvPicPr>
+        <p:blipFill>
+          <a:blip r:embed="rId4"/>
+          <a:stretch>
+            <a:fillRect/>
+          </a:stretch>
+        </p:blipFill>
+        <p:spPr>
+          <a:xfrm>
+            <a:off x="7959779" y="1673987"/>
+            <a:ext cx="1805255" cy="1353942"/>
+          </a:xfrm>
+          <a:prstGeom prst="rect">
+            <a:avLst/>
+          </a:prstGeom>
+        </p:spPr>
+      </p:pic>
+      <p:sp>
+        <p:nvSpPr>
+          <p:cNvPr id="9" name="TextBox 8">
+            <a:extLst>
+              <a:ext uri="{FF2B5EF4-FFF2-40B4-BE49-F238E27FC236}">
+                <a16:creationId xmlns:a16="http://schemas.microsoft.com/office/drawing/2014/main" id="{D06ABE23-80C9-5A69-3112-B7949CCA9FC3}"/>
+              </a:ext>
+            </a:extLst>
+          </p:cNvPr>
+          <p:cNvSpPr txBox="1"/>
+          <p:nvPr/>
+        </p:nvSpPr>
+        <p:spPr>
+          <a:xfrm>
+            <a:off x="6503132" y="1298289"/>
+            <a:ext cx="5246949" cy="307777"/>
+          </a:xfrm>
+          <a:prstGeom prst="rect">
+            <a:avLst/>
+          </a:prstGeom>
+          <a:noFill/>
+        </p:spPr>
+        <p:txBody>
+          <a:bodyPr wrap="none" rtlCol="0">
+            <a:spAutoFit/>
+          </a:bodyPr>
+          <a:lstStyle/>
+          <a:p>
+            <a:r>
+              <a:rPr lang="en-US" sz="1400" b="1" dirty="0">
+                <a:solidFill>
+                  <a:schemeClr val="accent1">
+                    <a:lumMod val="60000"/>
+                    <a:lumOff val="40000"/>
+                  </a:schemeClr>
+                </a:solidFill>
+              </a:rPr>
+              <a:t>MODAF: British Ministry of Defense Architecture Framework</a:t>
+            </a:r>
+          </a:p>
+        </p:txBody>
+      </p:sp>
+      <p:sp>
+        <p:nvSpPr>
+          <p:cNvPr id="10" name="TextBox 9">
+            <a:extLst>
+              <a:ext uri="{FF2B5EF4-FFF2-40B4-BE49-F238E27FC236}">
+                <a16:creationId xmlns:a16="http://schemas.microsoft.com/office/drawing/2014/main" id="{8D495C7E-5242-C6A4-F1AF-6FDE81C768BB}"/>
+              </a:ext>
+            </a:extLst>
+          </p:cNvPr>
+          <p:cNvSpPr txBox="1"/>
+          <p:nvPr/>
+        </p:nvSpPr>
+        <p:spPr>
+          <a:xfrm>
+            <a:off x="6503132" y="2998269"/>
+            <a:ext cx="4374916" cy="307777"/>
+          </a:xfrm>
+          <a:prstGeom prst="rect">
+            <a:avLst/>
+          </a:prstGeom>
+          <a:noFill/>
+        </p:spPr>
+        <p:txBody>
+          <a:bodyPr wrap="none" rtlCol="0">
+            <a:spAutoFit/>
+          </a:bodyPr>
+          <a:lstStyle/>
+          <a:p>
+            <a:r>
+              <a:rPr lang="en-US" sz="1400" b="1" dirty="0">
+                <a:solidFill>
+                  <a:schemeClr val="accent1">
+                    <a:lumMod val="60000"/>
+                    <a:lumOff val="40000"/>
+                  </a:schemeClr>
+                </a:solidFill>
+              </a:rPr>
+              <a:t>FEAF: Federal Enterprise Architecture Framework</a:t>
+            </a:r>
+          </a:p>
+        </p:txBody>
+      </p:sp>
+      <p:pic>
+        <p:nvPicPr>
+          <p:cNvPr id="11" name="Picture 10">
+            <a:extLst>
+              <a:ext uri="{FF2B5EF4-FFF2-40B4-BE49-F238E27FC236}">
+                <a16:creationId xmlns:a16="http://schemas.microsoft.com/office/drawing/2014/main" id="{11A6F2B2-B902-0850-51B9-E170D2F5AC05}"/>
+              </a:ext>
+            </a:extLst>
+          </p:cNvPr>
+          <p:cNvPicPr>
+            <a:picLocks noChangeAspect="1"/>
+          </p:cNvPicPr>
+          <p:nvPr/>
+        </p:nvPicPr>
+        <p:blipFill>
+          <a:blip r:embed="rId5"/>
+          <a:stretch>
+            <a:fillRect/>
+          </a:stretch>
+        </p:blipFill>
+        <p:spPr>
+          <a:xfrm>
+            <a:off x="7959778" y="3329406"/>
+            <a:ext cx="1805255" cy="1457327"/>
+          </a:xfrm>
+          <a:prstGeom prst="rect">
+            <a:avLst/>
+          </a:prstGeom>
+        </p:spPr>
+      </p:pic>
+      <p:sp>
+        <p:nvSpPr>
+          <p:cNvPr id="12" name="TextBox 11">
+            <a:extLst>
+              <a:ext uri="{FF2B5EF4-FFF2-40B4-BE49-F238E27FC236}">
+                <a16:creationId xmlns:a16="http://schemas.microsoft.com/office/drawing/2014/main" id="{DD01B92F-574A-7012-85A2-7F69847B32BF}"/>
+              </a:ext>
+            </a:extLst>
+          </p:cNvPr>
+          <p:cNvSpPr txBox="1"/>
+          <p:nvPr/>
+        </p:nvSpPr>
+        <p:spPr>
+          <a:xfrm>
+            <a:off x="6503132" y="4787312"/>
+            <a:ext cx="4464684" cy="307777"/>
+          </a:xfrm>
+          <a:prstGeom prst="rect">
+            <a:avLst/>
+          </a:prstGeom>
+          <a:noFill/>
+        </p:spPr>
+        <p:txBody>
+          <a:bodyPr wrap="none" rtlCol="0">
+            <a:spAutoFit/>
+          </a:bodyPr>
+          <a:lstStyle/>
+          <a:p>
+            <a:r>
+              <a:rPr lang="en-US" sz="1400" b="1" dirty="0">
+                <a:solidFill>
+                  <a:schemeClr val="accent1">
+                    <a:lumMod val="60000"/>
+                    <a:lumOff val="40000"/>
+                  </a:schemeClr>
+                </a:solidFill>
+              </a:rPr>
+              <a:t>TOGAF: The Open Group Architecture Framework</a:t>
+            </a:r>
+          </a:p>
+        </p:txBody>
+      </p:sp>
+      <p:pic>
+        <p:nvPicPr>
+          <p:cNvPr id="13" name="Picture 12">
+            <a:extLst>
+              <a:ext uri="{FF2B5EF4-FFF2-40B4-BE49-F238E27FC236}">
+                <a16:creationId xmlns:a16="http://schemas.microsoft.com/office/drawing/2014/main" id="{1B859B87-CA7F-1075-138D-47F35FAF96FD}"/>
+              </a:ext>
+            </a:extLst>
+          </p:cNvPr>
+          <p:cNvPicPr>
+            <a:picLocks noChangeAspect="1"/>
+          </p:cNvPicPr>
+          <p:nvPr/>
+        </p:nvPicPr>
+        <p:blipFill>
+          <a:blip r:embed="rId6"/>
+          <a:stretch>
+            <a:fillRect/>
+          </a:stretch>
+        </p:blipFill>
+        <p:spPr>
+          <a:xfrm>
+            <a:off x="7959778" y="5119027"/>
+            <a:ext cx="1805255" cy="1426151"/>
+          </a:xfrm>
+          <a:prstGeom prst="rect">
+            <a:avLst/>
+          </a:prstGeom>
+        </p:spPr>
+      </p:pic>
     </p:spTree>
     <p:extLst>
       <p:ext uri="{BB962C8B-B14F-4D97-AF65-F5344CB8AC3E}">
-        <p14:creationId xmlns:p14="http://schemas.microsoft.com/office/powerpoint/2010/main" val="3534675789"/>
+        <p14:creationId xmlns:p14="http://schemas.microsoft.com/office/powerpoint/2010/main" val="3349596429"/>
       </p:ext>
     </p:extLst>
   </p:cSld>
@@ -8223,7 +8966,7 @@
         <p:cNvPr id="1" name="">
           <a:extLst>
             <a:ext uri="{FF2B5EF4-FFF2-40B4-BE49-F238E27FC236}">
-              <a16:creationId xmlns:a16="http://schemas.microsoft.com/office/drawing/2014/main" id="{3578C238-12BA-88F3-D9C1-1C208A941D68}"/>
+              <a16:creationId xmlns:a16="http://schemas.microsoft.com/office/drawing/2014/main" id="{87548F35-04E4-5807-5C2A-620BEA0DAE47}"/>
             </a:ext>
           </a:extLst>
         </p:cNvPr>
@@ -8243,7 +8986,7 @@
           <p:cNvPr id="2" name="Title 1">
             <a:extLst>
               <a:ext uri="{FF2B5EF4-FFF2-40B4-BE49-F238E27FC236}">
-                <a16:creationId xmlns:a16="http://schemas.microsoft.com/office/drawing/2014/main" id="{DBB3B5CE-5419-35B0-16E8-861451475657}"/>
+                <a16:creationId xmlns:a16="http://schemas.microsoft.com/office/drawing/2014/main" id="{A6AA4448-02F1-CDC2-FAF7-969D8DE4B91A}"/>
               </a:ext>
             </a:extLst>
           </p:cNvPr>
@@ -8266,29 +9009,59 @@
           <a:p>
             <a:r>
               <a:rPr lang="en-US" b="1" dirty="0"/>
-              <a:t>Setup Modeling Environment</a:t>
-            </a:r>
-            <a:br>
-              <a:rPr lang="en-US" b="1" dirty="0"/>
-            </a:br>
-            <a:r>
-              <a:rPr lang="en-US" b="1" dirty="0"/>
-              <a:t>- </a:t>
-            </a:r>
-            <a:r>
-              <a:rPr lang="en-US" altLang="zh-CN" b="1" dirty="0"/>
-              <a:t>Protégé &amp; Neo4j</a:t>
-            </a:r>
-            <a:endParaRPr lang="en-US" b="1" dirty="0"/>
-          </a:p>
-        </p:txBody>
-      </p:sp>
+              <a:t>Metamodel in Reference EA Frameworks</a:t>
+            </a:r>
+          </a:p>
+        </p:txBody>
+      </p:sp>
+      <p:pic>
+        <p:nvPicPr>
+          <p:cNvPr id="6" name="Content Placeholder 5">
+            <a:extLst>
+              <a:ext uri="{FF2B5EF4-FFF2-40B4-BE49-F238E27FC236}">
+                <a16:creationId xmlns:a16="http://schemas.microsoft.com/office/drawing/2014/main" id="{AD9AC4B2-6317-9F6B-9FC4-C1FFE15BE3B4}"/>
+              </a:ext>
+            </a:extLst>
+          </p:cNvPr>
+          <p:cNvPicPr>
+            <a:picLocks noGrp="1" noChangeAspect="1"/>
+          </p:cNvPicPr>
+          <p:nvPr>
+            <p:ph idx="1"/>
+          </p:nvPr>
+        </p:nvPicPr>
+        <p:blipFill>
+          <a:blip r:embed="rId2"/>
+          <a:stretch>
+            <a:fillRect/>
+          </a:stretch>
+        </p:blipFill>
+        <p:spPr>
+          <a:xfrm>
+            <a:off x="1456647" y="2302822"/>
+            <a:ext cx="3798427" cy="4310913"/>
+          </a:xfrm>
+          <a:prstGeom prst="rect">
+            <a:avLst/>
+          </a:prstGeom>
+          <a:ln>
+            <a:noFill/>
+          </a:ln>
+          <a:effectLst>
+            <a:outerShdw blurRad="292100" dist="139700" dir="2700000" algn="tl" rotWithShape="0">
+              <a:srgbClr val="333333">
+                <a:alpha val="65000"/>
+              </a:srgbClr>
+            </a:outerShdw>
+          </a:effectLst>
+        </p:spPr>
+      </p:pic>
       <p:sp>
         <p:nvSpPr>
           <p:cNvPr id="4" name="Title 1">
             <a:extLst>
               <a:ext uri="{FF2B5EF4-FFF2-40B4-BE49-F238E27FC236}">
-                <a16:creationId xmlns:a16="http://schemas.microsoft.com/office/drawing/2014/main" id="{BEEB3645-A16E-C6E6-5926-96E8BF14E00E}"/>
+                <a16:creationId xmlns:a16="http://schemas.microsoft.com/office/drawing/2014/main" id="{D9EDD144-F22C-74B4-5002-E4C6BD3EE513}"/>
               </a:ext>
             </a:extLst>
           </p:cNvPr>
@@ -8392,7 +9165,755 @@
                   </a:schemeClr>
                 </a:solidFill>
               </a:rPr>
-              <a:t>003</a:t>
+              <a:t>004</a:t>
+            </a:r>
+            <a:endParaRPr lang="ru-RU" b="1" dirty="0">
+              <a:solidFill>
+                <a:schemeClr val="accent1">
+                  <a:lumMod val="75000"/>
+                </a:schemeClr>
+              </a:solidFill>
+            </a:endParaRPr>
+          </a:p>
+        </p:txBody>
+      </p:sp>
+      <p:pic>
+        <p:nvPicPr>
+          <p:cNvPr id="7" name="Picture 6">
+            <a:extLst>
+              <a:ext uri="{FF2B5EF4-FFF2-40B4-BE49-F238E27FC236}">
+                <a16:creationId xmlns:a16="http://schemas.microsoft.com/office/drawing/2014/main" id="{F7560E9C-5AF5-B579-B7B6-716B3573C1AE}"/>
+              </a:ext>
+            </a:extLst>
+          </p:cNvPr>
+          <p:cNvPicPr>
+            <a:picLocks noChangeAspect="1"/>
+          </p:cNvPicPr>
+          <p:nvPr/>
+        </p:nvPicPr>
+        <p:blipFill>
+          <a:blip r:embed="rId3"/>
+          <a:stretch>
+            <a:fillRect/>
+          </a:stretch>
+        </p:blipFill>
+        <p:spPr>
+          <a:xfrm>
+            <a:off x="181336" y="3429000"/>
+            <a:ext cx="1772040" cy="398709"/>
+          </a:xfrm>
+          <a:prstGeom prst="roundRect">
+            <a:avLst>
+              <a:gd name="adj" fmla="val 8594"/>
+            </a:avLst>
+          </a:prstGeom>
+          <a:solidFill>
+            <a:srgbClr val="FFFFFF">
+              <a:shade val="85000"/>
+            </a:srgbClr>
+          </a:solidFill>
+          <a:ln>
+            <a:noFill/>
+          </a:ln>
+          <a:effectLst>
+            <a:reflection blurRad="12700" stA="38000" endPos="28000" dist="5000" dir="5400000" sy="-100000" algn="bl" rotWithShape="0"/>
+          </a:effectLst>
+        </p:spPr>
+      </p:pic>
+      <p:pic>
+        <p:nvPicPr>
+          <p:cNvPr id="8" name="Picture 7">
+            <a:extLst>
+              <a:ext uri="{FF2B5EF4-FFF2-40B4-BE49-F238E27FC236}">
+                <a16:creationId xmlns:a16="http://schemas.microsoft.com/office/drawing/2014/main" id="{941150DD-58EF-EB9E-4760-2BA47163633A}"/>
+              </a:ext>
+            </a:extLst>
+          </p:cNvPr>
+          <p:cNvPicPr>
+            <a:picLocks noChangeAspect="1"/>
+          </p:cNvPicPr>
+          <p:nvPr/>
+        </p:nvPicPr>
+        <p:blipFill>
+          <a:blip r:embed="rId4"/>
+          <a:stretch>
+            <a:fillRect/>
+          </a:stretch>
+        </p:blipFill>
+        <p:spPr>
+          <a:xfrm>
+            <a:off x="7959779" y="1673987"/>
+            <a:ext cx="1805255" cy="1353942"/>
+          </a:xfrm>
+          <a:prstGeom prst="rect">
+            <a:avLst/>
+          </a:prstGeom>
+        </p:spPr>
+      </p:pic>
+      <p:sp>
+        <p:nvSpPr>
+          <p:cNvPr id="9" name="TextBox 8">
+            <a:extLst>
+              <a:ext uri="{FF2B5EF4-FFF2-40B4-BE49-F238E27FC236}">
+                <a16:creationId xmlns:a16="http://schemas.microsoft.com/office/drawing/2014/main" id="{53CC8133-DA27-4A38-9141-8E76F1778C14}"/>
+              </a:ext>
+            </a:extLst>
+          </p:cNvPr>
+          <p:cNvSpPr txBox="1"/>
+          <p:nvPr/>
+        </p:nvSpPr>
+        <p:spPr>
+          <a:xfrm>
+            <a:off x="6503132" y="1298289"/>
+            <a:ext cx="5246949" cy="307777"/>
+          </a:xfrm>
+          <a:prstGeom prst="rect">
+            <a:avLst/>
+          </a:prstGeom>
+          <a:noFill/>
+        </p:spPr>
+        <p:txBody>
+          <a:bodyPr wrap="none" rtlCol="0">
+            <a:spAutoFit/>
+          </a:bodyPr>
+          <a:lstStyle/>
+          <a:p>
+            <a:r>
+              <a:rPr lang="en-US" sz="1400" b="1" dirty="0">
+                <a:solidFill>
+                  <a:schemeClr val="accent1">
+                    <a:lumMod val="60000"/>
+                    <a:lumOff val="40000"/>
+                  </a:schemeClr>
+                </a:solidFill>
+              </a:rPr>
+              <a:t>MODAF: British Ministry of Defense Architecture Framework</a:t>
+            </a:r>
+          </a:p>
+        </p:txBody>
+      </p:sp>
+      <p:sp>
+        <p:nvSpPr>
+          <p:cNvPr id="10" name="TextBox 9">
+            <a:extLst>
+              <a:ext uri="{FF2B5EF4-FFF2-40B4-BE49-F238E27FC236}">
+                <a16:creationId xmlns:a16="http://schemas.microsoft.com/office/drawing/2014/main" id="{48EC4CBA-F1DD-285B-1721-6F45133ACA52}"/>
+              </a:ext>
+            </a:extLst>
+          </p:cNvPr>
+          <p:cNvSpPr txBox="1"/>
+          <p:nvPr/>
+        </p:nvSpPr>
+        <p:spPr>
+          <a:xfrm>
+            <a:off x="6503132" y="2998269"/>
+            <a:ext cx="4374916" cy="307777"/>
+          </a:xfrm>
+          <a:prstGeom prst="rect">
+            <a:avLst/>
+          </a:prstGeom>
+          <a:noFill/>
+        </p:spPr>
+        <p:txBody>
+          <a:bodyPr wrap="none" rtlCol="0">
+            <a:spAutoFit/>
+          </a:bodyPr>
+          <a:lstStyle/>
+          <a:p>
+            <a:r>
+              <a:rPr lang="en-US" sz="1400" b="1" dirty="0">
+                <a:solidFill>
+                  <a:schemeClr val="accent1">
+                    <a:lumMod val="60000"/>
+                    <a:lumOff val="40000"/>
+                  </a:schemeClr>
+                </a:solidFill>
+              </a:rPr>
+              <a:t>FEAF: Federal Enterprise Architecture Framework</a:t>
+            </a:r>
+          </a:p>
+        </p:txBody>
+      </p:sp>
+      <p:pic>
+        <p:nvPicPr>
+          <p:cNvPr id="11" name="Picture 10">
+            <a:extLst>
+              <a:ext uri="{FF2B5EF4-FFF2-40B4-BE49-F238E27FC236}">
+                <a16:creationId xmlns:a16="http://schemas.microsoft.com/office/drawing/2014/main" id="{7BABF5E1-3BD9-29A5-56A1-16CF02F70434}"/>
+              </a:ext>
+            </a:extLst>
+          </p:cNvPr>
+          <p:cNvPicPr>
+            <a:picLocks noChangeAspect="1"/>
+          </p:cNvPicPr>
+          <p:nvPr/>
+        </p:nvPicPr>
+        <p:blipFill>
+          <a:blip r:embed="rId5"/>
+          <a:stretch>
+            <a:fillRect/>
+          </a:stretch>
+        </p:blipFill>
+        <p:spPr>
+          <a:xfrm>
+            <a:off x="7959778" y="3329406"/>
+            <a:ext cx="1805255" cy="1457327"/>
+          </a:xfrm>
+          <a:prstGeom prst="rect">
+            <a:avLst/>
+          </a:prstGeom>
+        </p:spPr>
+      </p:pic>
+      <p:sp>
+        <p:nvSpPr>
+          <p:cNvPr id="12" name="TextBox 11">
+            <a:extLst>
+              <a:ext uri="{FF2B5EF4-FFF2-40B4-BE49-F238E27FC236}">
+                <a16:creationId xmlns:a16="http://schemas.microsoft.com/office/drawing/2014/main" id="{EA4AFB4A-3D9B-A840-0048-1C71FEB3B770}"/>
+              </a:ext>
+            </a:extLst>
+          </p:cNvPr>
+          <p:cNvSpPr txBox="1"/>
+          <p:nvPr/>
+        </p:nvSpPr>
+        <p:spPr>
+          <a:xfrm>
+            <a:off x="6503132" y="4787312"/>
+            <a:ext cx="4464684" cy="307777"/>
+          </a:xfrm>
+          <a:prstGeom prst="rect">
+            <a:avLst/>
+          </a:prstGeom>
+          <a:noFill/>
+        </p:spPr>
+        <p:txBody>
+          <a:bodyPr wrap="none" rtlCol="0">
+            <a:spAutoFit/>
+          </a:bodyPr>
+          <a:lstStyle/>
+          <a:p>
+            <a:r>
+              <a:rPr lang="en-US" sz="1400" b="1" dirty="0">
+                <a:solidFill>
+                  <a:schemeClr val="accent1">
+                    <a:lumMod val="60000"/>
+                    <a:lumOff val="40000"/>
+                  </a:schemeClr>
+                </a:solidFill>
+              </a:rPr>
+              <a:t>TOGAF: The Open Group Architecture Framework</a:t>
+            </a:r>
+          </a:p>
+        </p:txBody>
+      </p:sp>
+      <p:pic>
+        <p:nvPicPr>
+          <p:cNvPr id="13" name="Picture 12">
+            <a:extLst>
+              <a:ext uri="{FF2B5EF4-FFF2-40B4-BE49-F238E27FC236}">
+                <a16:creationId xmlns:a16="http://schemas.microsoft.com/office/drawing/2014/main" id="{91B2A9F0-138A-DB81-909E-30C63931F6A7}"/>
+              </a:ext>
+            </a:extLst>
+          </p:cNvPr>
+          <p:cNvPicPr>
+            <a:picLocks noChangeAspect="1"/>
+          </p:cNvPicPr>
+          <p:nvPr/>
+        </p:nvPicPr>
+        <p:blipFill>
+          <a:blip r:embed="rId6"/>
+          <a:stretch>
+            <a:fillRect/>
+          </a:stretch>
+        </p:blipFill>
+        <p:spPr>
+          <a:xfrm>
+            <a:off x="7959778" y="5119027"/>
+            <a:ext cx="1805255" cy="1426151"/>
+          </a:xfrm>
+          <a:prstGeom prst="rect">
+            <a:avLst/>
+          </a:prstGeom>
+        </p:spPr>
+      </p:pic>
+    </p:spTree>
+    <p:extLst>
+      <p:ext uri="{BB962C8B-B14F-4D97-AF65-F5344CB8AC3E}">
+        <p14:creationId xmlns:p14="http://schemas.microsoft.com/office/powerpoint/2010/main" val="1139562465"/>
+      </p:ext>
+    </p:extLst>
+  </p:cSld>
+  <p:clrMapOvr>
+    <a:masterClrMapping/>
+  </p:clrMapOvr>
+</p:sld>
+</file>
+
+<file path=ppt/slides/slide5.xml><?xml version="1.0" encoding="utf-8"?>
+<p:sld xmlns:a="http://schemas.openxmlformats.org/drawingml/2006/main" xmlns:r="http://schemas.openxmlformats.org/officeDocument/2006/relationships" xmlns:p="http://schemas.openxmlformats.org/presentationml/2006/main">
+  <p:cSld>
+    <p:spTree>
+      <p:nvGrpSpPr>
+        <p:cNvPr id="1" name="">
+          <a:extLst>
+            <a:ext uri="{FF2B5EF4-FFF2-40B4-BE49-F238E27FC236}">
+              <a16:creationId xmlns:a16="http://schemas.microsoft.com/office/drawing/2014/main" id="{18B89ECA-496A-A03E-437E-F113253271CA}"/>
+            </a:ext>
+          </a:extLst>
+        </p:cNvPr>
+        <p:cNvGrpSpPr/>
+        <p:nvPr/>
+      </p:nvGrpSpPr>
+      <p:grpSpPr>
+        <a:xfrm>
+          <a:off x="0" y="0"/>
+          <a:ext cx="0" cy="0"/>
+          <a:chOff x="0" y="0"/>
+          <a:chExt cx="0" cy="0"/>
+        </a:xfrm>
+      </p:grpSpPr>
+      <p:sp>
+        <p:nvSpPr>
+          <p:cNvPr id="2" name="Title 1">
+            <a:extLst>
+              <a:ext uri="{FF2B5EF4-FFF2-40B4-BE49-F238E27FC236}">
+                <a16:creationId xmlns:a16="http://schemas.microsoft.com/office/drawing/2014/main" id="{1A46176F-4D1D-C373-40D4-D16CAC76BF9F}"/>
+              </a:ext>
+            </a:extLst>
+          </p:cNvPr>
+          <p:cNvSpPr>
+            <a:spLocks noGrp="1"/>
+          </p:cNvSpPr>
+          <p:nvPr>
+            <p:ph type="title"/>
+          </p:nvPr>
+        </p:nvSpPr>
+        <p:spPr>
+          <a:xfrm>
+            <a:off x="1754188" y="452718"/>
+            <a:ext cx="8296646" cy="1400530"/>
+          </a:xfrm>
+        </p:spPr>
+        <p:txBody>
+          <a:bodyPr/>
+          <a:lstStyle/>
+          <a:p>
+            <a:r>
+              <a:rPr lang="en-US" b="1" dirty="0"/>
+              <a:t>Setup Modeling Environment</a:t>
+            </a:r>
+            <a:br>
+              <a:rPr lang="en-US" b="1" dirty="0"/>
+            </a:br>
+            <a:r>
+              <a:rPr lang="en-US" b="1" dirty="0"/>
+              <a:t>- </a:t>
+            </a:r>
+            <a:r>
+              <a:rPr lang="en-US" altLang="zh-CN" b="1" dirty="0"/>
+              <a:t>Essential Open Source EA Tool</a:t>
+            </a:r>
+            <a:endParaRPr lang="en-US" b="1" dirty="0"/>
+          </a:p>
+        </p:txBody>
+      </p:sp>
+      <p:sp>
+        <p:nvSpPr>
+          <p:cNvPr id="4" name="Title 1">
+            <a:extLst>
+              <a:ext uri="{FF2B5EF4-FFF2-40B4-BE49-F238E27FC236}">
+                <a16:creationId xmlns:a16="http://schemas.microsoft.com/office/drawing/2014/main" id="{C75085BF-0762-04EF-08E2-21385F1A52C9}"/>
+              </a:ext>
+            </a:extLst>
+          </p:cNvPr>
+          <p:cNvSpPr txBox="1">
+            <a:spLocks/>
+          </p:cNvSpPr>
+          <p:nvPr/>
+        </p:nvSpPr>
+        <p:spPr>
+          <a:xfrm>
+            <a:off x="0" y="3143"/>
+            <a:ext cx="1754188" cy="1058013"/>
+          </a:xfrm>
+          <a:prstGeom prst="rect">
+            <a:avLst/>
+          </a:prstGeom>
+        </p:spPr>
+        <p:txBody>
+          <a:bodyPr vert="horz" lIns="91440" tIns="45720" rIns="91440" bIns="45720" rtlCol="0" anchor="ctr">
+            <a:noAutofit/>
+          </a:bodyPr>
+          <a:lstStyle>
+            <a:lvl1pPr algn="l" defTabSz="457200" rtl="0" eaLnBrk="1" latinLnBrk="0" hangingPunct="1">
+              <a:spcBef>
+                <a:spcPct val="0"/>
+              </a:spcBef>
+              <a:buNone/>
+              <a:defRPr sz="7200" b="0" i="0" kern="1200">
+                <a:solidFill>
+                  <a:schemeClr val="tx2"/>
+                </a:solidFill>
+                <a:latin typeface="+mj-lt"/>
+                <a:ea typeface="+mj-ea"/>
+                <a:cs typeface="+mj-cs"/>
+              </a:defRPr>
+            </a:lvl1pPr>
+            <a:lvl2pPr eaLnBrk="1" hangingPunct="1">
+              <a:defRPr>
+                <a:solidFill>
+                  <a:schemeClr val="tx2"/>
+                </a:solidFill>
+              </a:defRPr>
+            </a:lvl2pPr>
+            <a:lvl3pPr eaLnBrk="1" hangingPunct="1">
+              <a:defRPr>
+                <a:solidFill>
+                  <a:schemeClr val="tx2"/>
+                </a:solidFill>
+              </a:defRPr>
+            </a:lvl3pPr>
+            <a:lvl4pPr eaLnBrk="1" hangingPunct="1">
+              <a:defRPr>
+                <a:solidFill>
+                  <a:schemeClr val="tx2"/>
+                </a:solidFill>
+              </a:defRPr>
+            </a:lvl4pPr>
+            <a:lvl5pPr eaLnBrk="1" hangingPunct="1">
+              <a:defRPr>
+                <a:solidFill>
+                  <a:schemeClr val="tx2"/>
+                </a:solidFill>
+              </a:defRPr>
+            </a:lvl5pPr>
+            <a:lvl6pPr eaLnBrk="1" hangingPunct="1">
+              <a:defRPr>
+                <a:solidFill>
+                  <a:schemeClr val="tx2"/>
+                </a:solidFill>
+              </a:defRPr>
+            </a:lvl6pPr>
+            <a:lvl7pPr eaLnBrk="1" hangingPunct="1">
+              <a:defRPr>
+                <a:solidFill>
+                  <a:schemeClr val="tx2"/>
+                </a:solidFill>
+              </a:defRPr>
+            </a:lvl7pPr>
+            <a:lvl8pPr eaLnBrk="1" hangingPunct="1">
+              <a:defRPr>
+                <a:solidFill>
+                  <a:schemeClr val="tx2"/>
+                </a:solidFill>
+              </a:defRPr>
+            </a:lvl8pPr>
+            <a:lvl9pPr eaLnBrk="1" hangingPunct="1">
+              <a:defRPr>
+                <a:solidFill>
+                  <a:schemeClr val="tx2"/>
+                </a:solidFill>
+              </a:defRPr>
+            </a:lvl9pPr>
+          </a:lstStyle>
+          <a:p>
+            <a:pPr algn="ctr"/>
+            <a:r>
+              <a:rPr lang="en-US" b="1" dirty="0">
+                <a:solidFill>
+                  <a:schemeClr val="accent1">
+                    <a:lumMod val="75000"/>
+                  </a:schemeClr>
+                </a:solidFill>
+              </a:rPr>
+              <a:t>005</a:t>
+            </a:r>
+            <a:endParaRPr lang="ru-RU" b="1" dirty="0">
+              <a:solidFill>
+                <a:schemeClr val="accent1">
+                  <a:lumMod val="75000"/>
+                </a:schemeClr>
+              </a:solidFill>
+            </a:endParaRPr>
+          </a:p>
+        </p:txBody>
+      </p:sp>
+      <p:pic>
+        <p:nvPicPr>
+          <p:cNvPr id="15" name="Content Placeholder 14">
+            <a:extLst>
+              <a:ext uri="{FF2B5EF4-FFF2-40B4-BE49-F238E27FC236}">
+                <a16:creationId xmlns:a16="http://schemas.microsoft.com/office/drawing/2014/main" id="{C5AEE0F6-50BA-94EA-A24A-CD6240422C85}"/>
+              </a:ext>
+            </a:extLst>
+          </p:cNvPr>
+          <p:cNvPicPr>
+            <a:picLocks noGrp="1" noChangeAspect="1"/>
+          </p:cNvPicPr>
+          <p:nvPr>
+            <p:ph idx="1"/>
+          </p:nvPr>
+        </p:nvPicPr>
+        <p:blipFill>
+          <a:blip r:embed="rId2"/>
+          <a:stretch>
+            <a:fillRect/>
+          </a:stretch>
+        </p:blipFill>
+        <p:spPr>
+          <a:xfrm>
+            <a:off x="751290" y="1986330"/>
+            <a:ext cx="10578594" cy="3930346"/>
+          </a:xfrm>
+          <a:prstGeom prst="roundRect">
+            <a:avLst>
+              <a:gd name="adj" fmla="val 8594"/>
+            </a:avLst>
+          </a:prstGeom>
+          <a:solidFill>
+            <a:srgbClr val="FFFFFF">
+              <a:shade val="85000"/>
+            </a:srgbClr>
+          </a:solidFill>
+          <a:ln>
+            <a:noFill/>
+          </a:ln>
+          <a:effectLst>
+            <a:reflection blurRad="12700" stA="38000" endPos="28000" dist="5000" dir="5400000" sy="-100000" algn="bl" rotWithShape="0"/>
+          </a:effectLst>
+        </p:spPr>
+      </p:pic>
+      <p:pic>
+        <p:nvPicPr>
+          <p:cNvPr id="16" name="Picture 15">
+            <a:extLst>
+              <a:ext uri="{FF2B5EF4-FFF2-40B4-BE49-F238E27FC236}">
+                <a16:creationId xmlns:a16="http://schemas.microsoft.com/office/drawing/2014/main" id="{45F4B03C-08D5-67E5-1529-5C1342611C57}"/>
+              </a:ext>
+            </a:extLst>
+          </p:cNvPr>
+          <p:cNvPicPr>
+            <a:picLocks noChangeAspect="1"/>
+          </p:cNvPicPr>
+          <p:nvPr/>
+        </p:nvPicPr>
+        <p:blipFill>
+          <a:blip r:embed="rId3"/>
+          <a:stretch>
+            <a:fillRect/>
+          </a:stretch>
+        </p:blipFill>
+        <p:spPr>
+          <a:xfrm>
+            <a:off x="38000" y="5814174"/>
+            <a:ext cx="872107" cy="972733"/>
+          </a:xfrm>
+          <a:prstGeom prst="rect">
+            <a:avLst/>
+          </a:prstGeom>
+          <a:ln>
+            <a:noFill/>
+          </a:ln>
+          <a:effectLst>
+            <a:outerShdw blurRad="292100" dist="139700" dir="2700000" algn="tl" rotWithShape="0">
+              <a:srgbClr val="333333">
+                <a:alpha val="65000"/>
+              </a:srgbClr>
+            </a:outerShdw>
+          </a:effectLst>
+        </p:spPr>
+      </p:pic>
+    </p:spTree>
+    <p:extLst>
+      <p:ext uri="{BB962C8B-B14F-4D97-AF65-F5344CB8AC3E}">
+        <p14:creationId xmlns:p14="http://schemas.microsoft.com/office/powerpoint/2010/main" val="3534675789"/>
+      </p:ext>
+    </p:extLst>
+  </p:cSld>
+  <p:clrMapOvr>
+    <a:masterClrMapping/>
+  </p:clrMapOvr>
+</p:sld>
+</file>
+
+<file path=ppt/slides/slide6.xml><?xml version="1.0" encoding="utf-8"?>
+<p:sld xmlns:a="http://schemas.openxmlformats.org/drawingml/2006/main" xmlns:r="http://schemas.openxmlformats.org/officeDocument/2006/relationships" xmlns:p="http://schemas.openxmlformats.org/presentationml/2006/main">
+  <p:cSld>
+    <p:spTree>
+      <p:nvGrpSpPr>
+        <p:cNvPr id="1" name="">
+          <a:extLst>
+            <a:ext uri="{FF2B5EF4-FFF2-40B4-BE49-F238E27FC236}">
+              <a16:creationId xmlns:a16="http://schemas.microsoft.com/office/drawing/2014/main" id="{3578C238-12BA-88F3-D9C1-1C208A941D68}"/>
+            </a:ext>
+          </a:extLst>
+        </p:cNvPr>
+        <p:cNvGrpSpPr/>
+        <p:nvPr/>
+      </p:nvGrpSpPr>
+      <p:grpSpPr>
+        <a:xfrm>
+          <a:off x="0" y="0"/>
+          <a:ext cx="0" cy="0"/>
+          <a:chOff x="0" y="0"/>
+          <a:chExt cx="0" cy="0"/>
+        </a:xfrm>
+      </p:grpSpPr>
+      <p:sp>
+        <p:nvSpPr>
+          <p:cNvPr id="2" name="Title 1">
+            <a:extLst>
+              <a:ext uri="{FF2B5EF4-FFF2-40B4-BE49-F238E27FC236}">
+                <a16:creationId xmlns:a16="http://schemas.microsoft.com/office/drawing/2014/main" id="{DBB3B5CE-5419-35B0-16E8-861451475657}"/>
+              </a:ext>
+            </a:extLst>
+          </p:cNvPr>
+          <p:cNvSpPr>
+            <a:spLocks noGrp="1"/>
+          </p:cNvSpPr>
+          <p:nvPr>
+            <p:ph type="title"/>
+          </p:nvPr>
+        </p:nvSpPr>
+        <p:spPr>
+          <a:xfrm>
+            <a:off x="1754188" y="452718"/>
+            <a:ext cx="8296646" cy="1400530"/>
+          </a:xfrm>
+        </p:spPr>
+        <p:txBody>
+          <a:bodyPr/>
+          <a:lstStyle/>
+          <a:p>
+            <a:r>
+              <a:rPr lang="en-US" b="1" dirty="0"/>
+              <a:t>Setup Modeling Environment</a:t>
+            </a:r>
+            <a:br>
+              <a:rPr lang="en-US" b="1" dirty="0"/>
+            </a:br>
+            <a:r>
+              <a:rPr lang="en-US" b="1" dirty="0"/>
+              <a:t>- </a:t>
+            </a:r>
+            <a:r>
+              <a:rPr lang="en-US" altLang="zh-CN" b="1" dirty="0"/>
+              <a:t>Protégé &amp; Neo4j</a:t>
+            </a:r>
+            <a:endParaRPr lang="en-US" b="1" dirty="0"/>
+          </a:p>
+        </p:txBody>
+      </p:sp>
+      <p:sp>
+        <p:nvSpPr>
+          <p:cNvPr id="4" name="Title 1">
+            <a:extLst>
+              <a:ext uri="{FF2B5EF4-FFF2-40B4-BE49-F238E27FC236}">
+                <a16:creationId xmlns:a16="http://schemas.microsoft.com/office/drawing/2014/main" id="{BEEB3645-A16E-C6E6-5926-96E8BF14E00E}"/>
+              </a:ext>
+            </a:extLst>
+          </p:cNvPr>
+          <p:cNvSpPr txBox="1">
+            <a:spLocks/>
+          </p:cNvSpPr>
+          <p:nvPr/>
+        </p:nvSpPr>
+        <p:spPr>
+          <a:xfrm>
+            <a:off x="0" y="3143"/>
+            <a:ext cx="1754188" cy="1058013"/>
+          </a:xfrm>
+          <a:prstGeom prst="rect">
+            <a:avLst/>
+          </a:prstGeom>
+        </p:spPr>
+        <p:txBody>
+          <a:bodyPr vert="horz" lIns="91440" tIns="45720" rIns="91440" bIns="45720" rtlCol="0" anchor="ctr">
+            <a:noAutofit/>
+          </a:bodyPr>
+          <a:lstStyle>
+            <a:lvl1pPr algn="l" defTabSz="457200" rtl="0" eaLnBrk="1" latinLnBrk="0" hangingPunct="1">
+              <a:spcBef>
+                <a:spcPct val="0"/>
+              </a:spcBef>
+              <a:buNone/>
+              <a:defRPr sz="7200" b="0" i="0" kern="1200">
+                <a:solidFill>
+                  <a:schemeClr val="tx2"/>
+                </a:solidFill>
+                <a:latin typeface="+mj-lt"/>
+                <a:ea typeface="+mj-ea"/>
+                <a:cs typeface="+mj-cs"/>
+              </a:defRPr>
+            </a:lvl1pPr>
+            <a:lvl2pPr eaLnBrk="1" hangingPunct="1">
+              <a:defRPr>
+                <a:solidFill>
+                  <a:schemeClr val="tx2"/>
+                </a:solidFill>
+              </a:defRPr>
+            </a:lvl2pPr>
+            <a:lvl3pPr eaLnBrk="1" hangingPunct="1">
+              <a:defRPr>
+                <a:solidFill>
+                  <a:schemeClr val="tx2"/>
+                </a:solidFill>
+              </a:defRPr>
+            </a:lvl3pPr>
+            <a:lvl4pPr eaLnBrk="1" hangingPunct="1">
+              <a:defRPr>
+                <a:solidFill>
+                  <a:schemeClr val="tx2"/>
+                </a:solidFill>
+              </a:defRPr>
+            </a:lvl4pPr>
+            <a:lvl5pPr eaLnBrk="1" hangingPunct="1">
+              <a:defRPr>
+                <a:solidFill>
+                  <a:schemeClr val="tx2"/>
+                </a:solidFill>
+              </a:defRPr>
+            </a:lvl5pPr>
+            <a:lvl6pPr eaLnBrk="1" hangingPunct="1">
+              <a:defRPr>
+                <a:solidFill>
+                  <a:schemeClr val="tx2"/>
+                </a:solidFill>
+              </a:defRPr>
+            </a:lvl6pPr>
+            <a:lvl7pPr eaLnBrk="1" hangingPunct="1">
+              <a:defRPr>
+                <a:solidFill>
+                  <a:schemeClr val="tx2"/>
+                </a:solidFill>
+              </a:defRPr>
+            </a:lvl7pPr>
+            <a:lvl8pPr eaLnBrk="1" hangingPunct="1">
+              <a:defRPr>
+                <a:solidFill>
+                  <a:schemeClr val="tx2"/>
+                </a:solidFill>
+              </a:defRPr>
+            </a:lvl8pPr>
+            <a:lvl9pPr eaLnBrk="1" hangingPunct="1">
+              <a:defRPr>
+                <a:solidFill>
+                  <a:schemeClr val="tx2"/>
+                </a:solidFill>
+              </a:defRPr>
+            </a:lvl9pPr>
+          </a:lstStyle>
+          <a:p>
+            <a:pPr algn="ctr"/>
+            <a:r>
+              <a:rPr lang="en-US" b="1" dirty="0">
+                <a:solidFill>
+                  <a:schemeClr val="accent1">
+                    <a:lumMod val="75000"/>
+                  </a:schemeClr>
+                </a:solidFill>
+              </a:rPr>
+              <a:t>006</a:t>
             </a:r>
             <a:endParaRPr lang="ru-RU" b="1" dirty="0">
               <a:solidFill>
@@ -8442,7 +9963,7 @@
 </p:sld>
 </file>
 
-<file path=ppt/slides/slide5.xml><?xml version="1.0" encoding="utf-8"?>
+<file path=ppt/slides/slide7.xml><?xml version="1.0" encoding="utf-8"?>
 <p:sld xmlns:a="http://schemas.openxmlformats.org/drawingml/2006/main" xmlns:r="http://schemas.openxmlformats.org/officeDocument/2006/relationships" xmlns:p="http://schemas.openxmlformats.org/presentationml/2006/main">
   <p:cSld>
     <p:bg>
@@ -8653,6 +10174,36 @@
           </a:p>
         </p:txBody>
       </p:sp>
+      <p:pic>
+        <p:nvPicPr>
+          <p:cNvPr id="4" name="Picture 3">
+            <a:extLst>
+              <a:ext uri="{FF2B5EF4-FFF2-40B4-BE49-F238E27FC236}">
+                <a16:creationId xmlns:a16="http://schemas.microsoft.com/office/drawing/2014/main" id="{B011F562-7C5B-B39E-2FF0-681E86D50FE2}"/>
+              </a:ext>
+            </a:extLst>
+          </p:cNvPr>
+          <p:cNvPicPr>
+            <a:picLocks noChangeAspect="1"/>
+          </p:cNvPicPr>
+          <p:nvPr/>
+        </p:nvPicPr>
+        <p:blipFill>
+          <a:blip r:embed="rId5"/>
+          <a:stretch>
+            <a:fillRect/>
+          </a:stretch>
+        </p:blipFill>
+        <p:spPr>
+          <a:xfrm>
+            <a:off x="10440834" y="0"/>
+            <a:ext cx="682228" cy="682228"/>
+          </a:xfrm>
+          <a:prstGeom prst="rect">
+            <a:avLst/>
+          </a:prstGeom>
+        </p:spPr>
+      </p:pic>
     </p:spTree>
     <p:extLst>
       <p:ext uri="{BB962C8B-B14F-4D97-AF65-F5344CB8AC3E}">

--- a/Master_EAS_Meta-Model.pptx
+++ b/Master_EAS_Meta-Model.pptx
@@ -5,10 +5,10 @@
     <p:sldMasterId id="2147483648" r:id="rId4"/>
   </p:sldMasterIdLst>
   <p:notesMasterIdLst>
-    <p:notesMasterId r:id="rId12"/>
+    <p:notesMasterId r:id="rId15"/>
   </p:notesMasterIdLst>
   <p:handoutMasterIdLst>
-    <p:handoutMasterId r:id="rId13"/>
+    <p:handoutMasterId r:id="rId16"/>
   </p:handoutMasterIdLst>
   <p:sldIdLst>
     <p:sldId id="256" r:id="rId5"/>
@@ -17,7 +17,10 @@
     <p:sldId id="274" r:id="rId8"/>
     <p:sldId id="271" r:id="rId9"/>
     <p:sldId id="272" r:id="rId10"/>
-    <p:sldId id="267" r:id="rId11"/>
+    <p:sldId id="275" r:id="rId11"/>
+    <p:sldId id="276" r:id="rId12"/>
+    <p:sldId id="277" r:id="rId13"/>
+    <p:sldId id="267" r:id="rId14"/>
   </p:sldIdLst>
   <p:sldSz cx="12192000" cy="6858000"/>
   <p:notesSz cx="6858000" cy="9144000"/>
@@ -232,7 +235,7 @@
           <a:p>
             <a:fld id="{F6E59275-AFE1-4999-B78A-D0D76B9F2B0B}" type="datetimeFigureOut">
               <a:rPr lang="en-US" smtClean="0"/>
-              <a:t>3/17/2026</a:t>
+              <a:t>3/21/2026</a:t>
             </a:fld>
             <a:endParaRPr lang="en-US" dirty="0"/>
           </a:p>
@@ -409,7 +412,7 @@
           <a:p>
             <a:fld id="{B3EADD7A-FE61-48EE-BE0E-8546E5401374}" type="datetimeFigureOut">
               <a:rPr lang="en-US" smtClean="0"/>
-              <a:t>3/17/2026</a:t>
+              <a:t>3/21/2026</a:t>
             </a:fld>
             <a:endParaRPr lang="en-US" dirty="0"/>
           </a:p>
@@ -825,7 +828,7 @@
           <a:p>
             <a:fld id="{EE000EEB-8338-48D7-8EE8-EE0082EF7602}" type="slidenum">
               <a:rPr lang="en-US" smtClean="0"/>
-              <a:t>7</a:t>
+              <a:t>10</a:t>
             </a:fld>
             <a:endParaRPr lang="en-US" dirty="0"/>
           </a:p>
@@ -1027,7 +1030,7 @@
           <a:p>
             <a:fld id="{4AAD347D-5ACD-4C99-B74B-A9C85AD731AF}" type="datetimeFigureOut">
               <a:rPr lang="en-US" dirty="0"/>
-              <a:t>3/18/2026</a:t>
+              <a:t>3/21/2026</a:t>
             </a:fld>
             <a:endParaRPr lang="en-US" dirty="0"/>
           </a:p>
@@ -1338,7 +1341,7 @@
           <a:p>
             <a:fld id="{4509A250-FF31-4206-8172-F9D3106AACB1}" type="datetimeFigureOut">
               <a:rPr lang="en-US" dirty="0"/>
-              <a:t>3/18/2026</a:t>
+              <a:t>3/21/2026</a:t>
             </a:fld>
             <a:endParaRPr lang="en-US" dirty="0"/>
           </a:p>
@@ -1557,7 +1560,7 @@
           <a:p>
             <a:fld id="{4509A250-FF31-4206-8172-F9D3106AACB1}" type="datetimeFigureOut">
               <a:rPr lang="en-US" dirty="0"/>
-              <a:t>3/18/2026</a:t>
+              <a:t>3/21/2026</a:t>
             </a:fld>
             <a:endParaRPr lang="en-US" dirty="0"/>
           </a:p>
@@ -1850,7 +1853,7 @@
           <a:p>
             <a:fld id="{4509A250-FF31-4206-8172-F9D3106AACB1}" type="datetimeFigureOut">
               <a:rPr lang="en-US" dirty="0"/>
-              <a:t>3/18/2026</a:t>
+              <a:t>3/21/2026</a:t>
             </a:fld>
             <a:endParaRPr lang="en-US" dirty="0"/>
           </a:p>
@@ -2207,7 +2210,7 @@
           <a:p>
             <a:fld id="{4509A250-FF31-4206-8172-F9D3106AACB1}" type="datetimeFigureOut">
               <a:rPr lang="en-US" dirty="0"/>
-              <a:t>3/18/2026</a:t>
+              <a:t>3/21/2026</a:t>
             </a:fld>
             <a:endParaRPr lang="en-US" dirty="0"/>
           </a:p>
@@ -2842,7 +2845,7 @@
           <a:p>
             <a:fld id="{4509A250-FF31-4206-8172-F9D3106AACB1}" type="datetimeFigureOut">
               <a:rPr lang="en-US" dirty="0"/>
-              <a:t>3/18/2026</a:t>
+              <a:t>3/21/2026</a:t>
             </a:fld>
             <a:endParaRPr lang="en-US" dirty="0"/>
           </a:p>
@@ -3714,7 +3717,7 @@
           <a:p>
             <a:fld id="{4509A250-FF31-4206-8172-F9D3106AACB1}" type="datetimeFigureOut">
               <a:rPr lang="en-US" dirty="0"/>
-              <a:t>3/18/2026</a:t>
+              <a:t>3/21/2026</a:t>
             </a:fld>
             <a:endParaRPr lang="en-US" dirty="0"/>
           </a:p>
@@ -3909,7 +3912,7 @@
           <a:p>
             <a:fld id="{4509A250-FF31-4206-8172-F9D3106AACB1}" type="datetimeFigureOut">
               <a:rPr lang="en-US" dirty="0"/>
-              <a:t>3/18/2026</a:t>
+              <a:t>3/21/2026</a:t>
             </a:fld>
             <a:endParaRPr lang="en-US" dirty="0"/>
           </a:p>
@@ -4114,7 +4117,7 @@
           <a:p>
             <a:fld id="{4509A250-FF31-4206-8172-F9D3106AACB1}" type="datetimeFigureOut">
               <a:rPr lang="en-US" dirty="0"/>
-              <a:t>3/18/2026</a:t>
+              <a:t>3/21/2026</a:t>
             </a:fld>
             <a:endParaRPr lang="en-US" dirty="0"/>
           </a:p>
@@ -4309,7 +4312,7 @@
           <a:p>
             <a:fld id="{4509A250-FF31-4206-8172-F9D3106AACB1}" type="datetimeFigureOut">
               <a:rPr lang="en-US" dirty="0"/>
-              <a:t>3/18/2026</a:t>
+              <a:t>3/21/2026</a:t>
             </a:fld>
             <a:endParaRPr lang="en-US" dirty="0"/>
           </a:p>
@@ -4583,7 +4586,7 @@
           <a:p>
             <a:fld id="{4509A250-FF31-4206-8172-F9D3106AACB1}" type="datetimeFigureOut">
               <a:rPr lang="en-US" dirty="0"/>
-              <a:t>3/18/2026</a:t>
+              <a:t>3/21/2026</a:t>
             </a:fld>
             <a:endParaRPr lang="en-US" dirty="0"/>
           </a:p>
@@ -4900,7 +4903,7 @@
           <a:p>
             <a:fld id="{4509A250-FF31-4206-8172-F9D3106AACB1}" type="datetimeFigureOut">
               <a:rPr lang="en-US" dirty="0"/>
-              <a:t>3/17/2026</a:t>
+              <a:t>3/21/2026</a:t>
             </a:fld>
             <a:endParaRPr lang="en-US" dirty="0"/>
           </a:p>
@@ -5333,7 +5336,7 @@
           <a:p>
             <a:fld id="{4509A250-FF31-4206-8172-F9D3106AACB1}" type="datetimeFigureOut">
               <a:rPr lang="en-US" dirty="0"/>
-              <a:t>3/18/2026</a:t>
+              <a:t>3/21/2026</a:t>
             </a:fld>
             <a:endParaRPr lang="en-US" dirty="0"/>
           </a:p>
@@ -5476,7 +5479,7 @@
           <a:p>
             <a:fld id="{4509A250-FF31-4206-8172-F9D3106AACB1}" type="datetimeFigureOut">
               <a:rPr lang="en-US" dirty="0"/>
-              <a:t>3/18/2026</a:t>
+              <a:t>3/21/2026</a:t>
             </a:fld>
             <a:endParaRPr lang="en-US" dirty="0"/>
           </a:p>
@@ -5596,7 +5599,7 @@
           <a:p>
             <a:fld id="{4509A250-FF31-4206-8172-F9D3106AACB1}" type="datetimeFigureOut">
               <a:rPr lang="en-US" dirty="0"/>
-              <a:t>3/18/2026</a:t>
+              <a:t>3/21/2026</a:t>
             </a:fld>
             <a:endParaRPr lang="en-US" dirty="0"/>
           </a:p>
@@ -5900,7 +5903,7 @@
           <a:p>
             <a:fld id="{4509A250-FF31-4206-8172-F9D3106AACB1}" type="datetimeFigureOut">
               <a:rPr lang="en-US" dirty="0"/>
-              <a:t>3/18/2026</a:t>
+              <a:t>3/21/2026</a:t>
             </a:fld>
             <a:endParaRPr lang="en-US" dirty="0"/>
           </a:p>
@@ -6200,7 +6203,7 @@
           <a:p>
             <a:fld id="{4509A250-FF31-4206-8172-F9D3106AACB1}" type="datetimeFigureOut">
               <a:rPr lang="en-US" dirty="0"/>
-              <a:t>3/18/2026</a:t>
+              <a:t>3/21/2026</a:t>
             </a:fld>
             <a:endParaRPr lang="en-US" dirty="0"/>
           </a:p>
@@ -6668,7 +6671,7 @@
           <a:p>
             <a:fld id="{4509A250-FF31-4206-8172-F9D3106AACB1}" type="datetimeFigureOut">
               <a:rPr lang="en-US" dirty="0"/>
-              <a:t>3/17/2026</a:t>
+              <a:t>3/21/2026</a:t>
             </a:fld>
             <a:endParaRPr lang="en-US" dirty="0"/>
           </a:p>
@@ -8007,6 +8010,260 @@
 </p:sld>
 </file>
 
+<file path=ppt/slides/slide10.xml><?xml version="1.0" encoding="utf-8"?>
+<p:sld xmlns:a="http://schemas.openxmlformats.org/drawingml/2006/main" xmlns:r="http://schemas.openxmlformats.org/officeDocument/2006/relationships" xmlns:p="http://schemas.openxmlformats.org/presentationml/2006/main">
+  <p:cSld>
+    <p:bg>
+      <p:bgPr>
+        <a:blipFill rotWithShape="1">
+          <a:blip r:embed="rId3">
+            <a:duotone>
+              <a:schemeClr val="bg2">
+                <a:shade val="62000"/>
+                <a:hueMod val="108000"/>
+                <a:satMod val="164000"/>
+                <a:lumMod val="69000"/>
+              </a:schemeClr>
+              <a:schemeClr val="bg2">
+                <a:tint val="96000"/>
+                <a:hueMod val="90000"/>
+                <a:satMod val="130000"/>
+                <a:lumMod val="134000"/>
+              </a:schemeClr>
+            </a:duotone>
+          </a:blip>
+          <a:stretch/>
+        </a:blipFill>
+        <a:effectLst/>
+      </p:bgPr>
+    </p:bg>
+    <p:spTree>
+      <p:nvGrpSpPr>
+        <p:cNvPr id="1" name=""/>
+        <p:cNvGrpSpPr/>
+        <p:nvPr/>
+      </p:nvGrpSpPr>
+      <p:grpSpPr>
+        <a:xfrm>
+          <a:off x="0" y="0"/>
+          <a:ext cx="0" cy="0"/>
+          <a:chOff x="0" y="0"/>
+          <a:chExt cx="0" cy="0"/>
+        </a:xfrm>
+      </p:grpSpPr>
+      <p:pic>
+        <p:nvPicPr>
+          <p:cNvPr id="15" name="Picture 14" descr="abstract design">
+            <a:extLst>
+              <a:ext uri="{FF2B5EF4-FFF2-40B4-BE49-F238E27FC236}">
+                <a16:creationId xmlns:a16="http://schemas.microsoft.com/office/drawing/2014/main" id="{6D363037-1741-4470-A023-883E2FFD5840}"/>
+              </a:ext>
+            </a:extLst>
+          </p:cNvPr>
+          <p:cNvPicPr>
+            <a:picLocks noChangeAspect="1"/>
+          </p:cNvPicPr>
+          <p:nvPr/>
+        </p:nvPicPr>
+        <p:blipFill rotWithShape="1">
+          <a:blip r:embed="rId4">
+            <a:duotone>
+              <a:prstClr val="black"/>
+              <a:schemeClr val="accent5">
+                <a:tint val="45000"/>
+                <a:satMod val="400000"/>
+              </a:schemeClr>
+            </a:duotone>
+            <a:alphaModFix amt="25000"/>
+          </a:blip>
+          <a:srcRect t="18308" r="6818" b="2872"/>
+          <a:stretch/>
+        </p:blipFill>
+        <p:spPr>
+          <a:xfrm flipH="1">
+            <a:off x="20" y="10"/>
+            <a:ext cx="12191980" cy="6857990"/>
+          </a:xfrm>
+          <a:prstGeom prst="rect">
+            <a:avLst/>
+          </a:prstGeom>
+        </p:spPr>
+      </p:pic>
+      <p:sp>
+        <p:nvSpPr>
+          <p:cNvPr id="12" name="Title 11">
+            <a:extLst>
+              <a:ext uri="{FF2B5EF4-FFF2-40B4-BE49-F238E27FC236}">
+                <a16:creationId xmlns:a16="http://schemas.microsoft.com/office/drawing/2014/main" id="{970C361B-D32E-42E0-A41E-86C3D9AC886F}"/>
+              </a:ext>
+            </a:extLst>
+          </p:cNvPr>
+          <p:cNvSpPr>
+            <a:spLocks noGrp="1"/>
+          </p:cNvSpPr>
+          <p:nvPr>
+            <p:ph type="ctrTitle"/>
+          </p:nvPr>
+        </p:nvSpPr>
+        <p:spPr>
+          <a:xfrm>
+            <a:off x="1154955" y="1447800"/>
+            <a:ext cx="8825658" cy="3329581"/>
+          </a:xfrm>
+        </p:spPr>
+        <p:txBody>
+          <a:bodyPr>
+            <a:normAutofit/>
+          </a:bodyPr>
+          <a:lstStyle/>
+          <a:p>
+            <a:r>
+              <a:rPr lang="en-US" dirty="0"/>
+              <a:t>Thank You!</a:t>
+            </a:r>
+            <a:endParaRPr lang="ru-RU" dirty="0"/>
+          </a:p>
+        </p:txBody>
+      </p:sp>
+      <p:sp>
+        <p:nvSpPr>
+          <p:cNvPr id="13" name="Subtitle 12">
+            <a:extLst>
+              <a:ext uri="{FF2B5EF4-FFF2-40B4-BE49-F238E27FC236}">
+                <a16:creationId xmlns:a16="http://schemas.microsoft.com/office/drawing/2014/main" id="{336E726C-3DE4-41AA-88A0-C92B0C34163D}"/>
+              </a:ext>
+            </a:extLst>
+          </p:cNvPr>
+          <p:cNvSpPr>
+            <a:spLocks noGrp="1"/>
+          </p:cNvSpPr>
+          <p:nvPr>
+            <p:ph type="subTitle" idx="1"/>
+          </p:nvPr>
+        </p:nvSpPr>
+        <p:spPr>
+          <a:xfrm>
+            <a:off x="1154955" y="4777380"/>
+            <a:ext cx="8825658" cy="861420"/>
+          </a:xfrm>
+        </p:spPr>
+        <p:txBody>
+          <a:bodyPr>
+            <a:normAutofit/>
+          </a:bodyPr>
+          <a:lstStyle/>
+          <a:p>
+            <a:r>
+              <a:rPr lang="en-US" dirty="0"/>
+              <a:t>someone@Example.com</a:t>
+            </a:r>
+            <a:endParaRPr lang="ru-RU" dirty="0"/>
+          </a:p>
+        </p:txBody>
+      </p:sp>
+      <p:sp>
+        <p:nvSpPr>
+          <p:cNvPr id="57" name="Rectangle 56">
+            <a:extLst>
+              <a:ext uri="{FF2B5EF4-FFF2-40B4-BE49-F238E27FC236}">
+                <a16:creationId xmlns:a16="http://schemas.microsoft.com/office/drawing/2014/main" id="{318E9D62-7BA3-4D5E-8915-0D0E8661E3D7}"/>
+              </a:ext>
+              <a:ext uri="{C183D7F6-B498-43B3-948B-1728B52AA6E4}">
+                <adec:decorative xmlns:adec="http://schemas.microsoft.com/office/drawing/2017/decorative" val="1"/>
+              </a:ext>
+            </a:extLst>
+          </p:cNvPr>
+          <p:cNvSpPr>
+            <a:spLocks noGrp="1" noRot="1" noChangeAspect="1" noMove="1" noResize="1" noEditPoints="1" noAdjustHandles="1" noChangeArrowheads="1" noChangeShapeType="1" noTextEdit="1"/>
+          </p:cNvSpPr>
+          <p:nvPr>
+            <p:extLst>
+              <p:ext uri="{386F3935-93C4-4BCD-93E2-E3B085C9AB24}">
+                <p16:designElem xmlns:p16="http://schemas.microsoft.com/office/powerpoint/2015/main" val="1"/>
+              </p:ext>
+            </p:extLst>
+          </p:nvPr>
+        </p:nvSpPr>
+        <p:spPr>
+          <a:xfrm>
+            <a:off x="10437812" y="0"/>
+            <a:ext cx="685800" cy="1143000"/>
+          </a:xfrm>
+          <a:prstGeom prst="rect">
+            <a:avLst/>
+          </a:prstGeom>
+          <a:solidFill>
+            <a:schemeClr val="accent1"/>
+          </a:solidFill>
+          <a:ln>
+            <a:noFill/>
+          </a:ln>
+        </p:spPr>
+        <p:style>
+          <a:lnRef idx="1">
+            <a:schemeClr val="accent1"/>
+          </a:lnRef>
+          <a:fillRef idx="3">
+            <a:schemeClr val="accent1"/>
+          </a:fillRef>
+          <a:effectRef idx="2">
+            <a:schemeClr val="accent1"/>
+          </a:effectRef>
+          <a:fontRef idx="minor">
+            <a:schemeClr val="lt1"/>
+          </a:fontRef>
+        </p:style>
+        <p:txBody>
+          <a:bodyPr/>
+          <a:lstStyle/>
+          <a:p>
+            <a:endParaRPr lang="en-US"/>
+          </a:p>
+        </p:txBody>
+      </p:sp>
+      <p:pic>
+        <p:nvPicPr>
+          <p:cNvPr id="4" name="Picture 3">
+            <a:extLst>
+              <a:ext uri="{FF2B5EF4-FFF2-40B4-BE49-F238E27FC236}">
+                <a16:creationId xmlns:a16="http://schemas.microsoft.com/office/drawing/2014/main" id="{B011F562-7C5B-B39E-2FF0-681E86D50FE2}"/>
+              </a:ext>
+            </a:extLst>
+          </p:cNvPr>
+          <p:cNvPicPr>
+            <a:picLocks noChangeAspect="1"/>
+          </p:cNvPicPr>
+          <p:nvPr/>
+        </p:nvPicPr>
+        <p:blipFill>
+          <a:blip r:embed="rId5"/>
+          <a:stretch>
+            <a:fillRect/>
+          </a:stretch>
+        </p:blipFill>
+        <p:spPr>
+          <a:xfrm>
+            <a:off x="10440834" y="0"/>
+            <a:ext cx="682228" cy="682228"/>
+          </a:xfrm>
+          <a:prstGeom prst="rect">
+            <a:avLst/>
+          </a:prstGeom>
+        </p:spPr>
+      </p:pic>
+    </p:spTree>
+    <p:extLst>
+      <p:ext uri="{BB962C8B-B14F-4D97-AF65-F5344CB8AC3E}">
+        <p14:creationId xmlns:p14="http://schemas.microsoft.com/office/powerpoint/2010/main" val="510767980"/>
+      </p:ext>
+    </p:extLst>
+  </p:cSld>
+  <p:clrMapOvr>
+    <a:masterClrMapping/>
+  </p:clrMapOvr>
+</p:sld>
+</file>
+
 <file path=ppt/slides/slide2.xml><?xml version="1.0" encoding="utf-8"?>
 <p:sld xmlns:a="http://schemas.openxmlformats.org/drawingml/2006/main" xmlns:r="http://schemas.openxmlformats.org/officeDocument/2006/relationships" xmlns:p="http://schemas.openxmlformats.org/presentationml/2006/main">
   <p:cSld>
@@ -9662,8 +9919,8 @@
         </p:blipFill>
         <p:spPr>
           <a:xfrm>
-            <a:off x="751290" y="1986330"/>
-            <a:ext cx="10578594" cy="3930346"/>
+            <a:off x="763880" y="1995785"/>
+            <a:ext cx="10277261" cy="3818389"/>
           </a:xfrm>
           <a:prstGeom prst="roundRect">
             <a:avLst>
@@ -9925,31 +10182,86 @@
           </a:p>
         </p:txBody>
       </p:sp>
-      <p:sp>
-        <p:nvSpPr>
-          <p:cNvPr id="5" name="Content Placeholder 4">
+      <p:pic>
+        <p:nvPicPr>
+          <p:cNvPr id="6" name="Picture 5">
             <a:extLst>
               <a:ext uri="{FF2B5EF4-FFF2-40B4-BE49-F238E27FC236}">
-                <a16:creationId xmlns:a16="http://schemas.microsoft.com/office/drawing/2014/main" id="{283B264E-E287-5E02-DCD6-CD497112855C}"/>
+                <a16:creationId xmlns:a16="http://schemas.microsoft.com/office/drawing/2014/main" id="{0913EAF2-EEC3-E490-C676-6BBD446B8399}"/>
               </a:ext>
             </a:extLst>
           </p:cNvPr>
-          <p:cNvSpPr>
-            <a:spLocks noGrp="1"/>
-          </p:cNvSpPr>
-          <p:nvPr>
-            <p:ph idx="1"/>
-          </p:nvPr>
-        </p:nvSpPr>
-        <p:spPr/>
-        <p:txBody>
-          <a:bodyPr/>
-          <a:lstStyle/>
-          <a:p>
-            <a:endParaRPr lang="en-US"/>
-          </a:p>
-        </p:txBody>
-      </p:sp>
+          <p:cNvPicPr>
+            <a:picLocks noChangeAspect="1"/>
+          </p:cNvPicPr>
+          <p:nvPr/>
+        </p:nvPicPr>
+        <p:blipFill>
+          <a:blip r:embed="rId2"/>
+          <a:stretch>
+            <a:fillRect/>
+          </a:stretch>
+        </p:blipFill>
+        <p:spPr>
+          <a:xfrm>
+            <a:off x="373475" y="2022210"/>
+            <a:ext cx="5416020" cy="3358433"/>
+          </a:xfrm>
+          <a:prstGeom prst="rect">
+            <a:avLst/>
+          </a:prstGeom>
+          <a:ln>
+            <a:noFill/>
+          </a:ln>
+          <a:effectLst>
+            <a:outerShdw blurRad="292100" dist="139700" dir="2700000" algn="tl" rotWithShape="0">
+              <a:srgbClr val="333333">
+                <a:alpha val="65000"/>
+              </a:srgbClr>
+            </a:outerShdw>
+          </a:effectLst>
+        </p:spPr>
+      </p:pic>
+      <p:pic>
+        <p:nvPicPr>
+          <p:cNvPr id="8" name="Picture 7">
+            <a:extLst>
+              <a:ext uri="{FF2B5EF4-FFF2-40B4-BE49-F238E27FC236}">
+                <a16:creationId xmlns:a16="http://schemas.microsoft.com/office/drawing/2014/main" id="{6C1ABD6E-E7D8-6644-DD8B-EE481D752B05}"/>
+              </a:ext>
+            </a:extLst>
+          </p:cNvPr>
+          <p:cNvPicPr>
+            <a:picLocks noChangeAspect="1"/>
+          </p:cNvPicPr>
+          <p:nvPr/>
+        </p:nvPicPr>
+        <p:blipFill>
+          <a:blip r:embed="rId3"/>
+          <a:stretch>
+            <a:fillRect/>
+          </a:stretch>
+        </p:blipFill>
+        <p:spPr>
+          <a:xfrm>
+            <a:off x="6176475" y="2025026"/>
+            <a:ext cx="5709961" cy="3355617"/>
+          </a:xfrm>
+          <a:prstGeom prst="rect">
+            <a:avLst/>
+          </a:prstGeom>
+          <a:ln>
+            <a:noFill/>
+          </a:ln>
+          <a:effectLst>
+            <a:outerShdw blurRad="292100" dist="139700" dir="2700000" algn="tl" rotWithShape="0">
+              <a:srgbClr val="333333">
+                <a:alpha val="65000"/>
+              </a:srgbClr>
+            </a:outerShdw>
+          </a:effectLst>
+        </p:spPr>
+      </p:pic>
     </p:spTree>
     <p:extLst>
       <p:ext uri="{BB962C8B-B14F-4D97-AF65-F5344CB8AC3E}">
@@ -9966,33 +10278,15 @@
 <file path=ppt/slides/slide7.xml><?xml version="1.0" encoding="utf-8"?>
 <p:sld xmlns:a="http://schemas.openxmlformats.org/drawingml/2006/main" xmlns:r="http://schemas.openxmlformats.org/officeDocument/2006/relationships" xmlns:p="http://schemas.openxmlformats.org/presentationml/2006/main">
   <p:cSld>
-    <p:bg>
-      <p:bgPr>
-        <a:blipFill rotWithShape="1">
-          <a:blip r:embed="rId3">
-            <a:duotone>
-              <a:schemeClr val="bg2">
-                <a:shade val="62000"/>
-                <a:hueMod val="108000"/>
-                <a:satMod val="164000"/>
-                <a:lumMod val="69000"/>
-              </a:schemeClr>
-              <a:schemeClr val="bg2">
-                <a:tint val="96000"/>
-                <a:hueMod val="90000"/>
-                <a:satMod val="130000"/>
-                <a:lumMod val="134000"/>
-              </a:schemeClr>
-            </a:duotone>
-          </a:blip>
-          <a:stretch/>
-        </a:blipFill>
-        <a:effectLst/>
-      </p:bgPr>
-    </p:bg>
     <p:spTree>
       <p:nvGrpSpPr>
-        <p:cNvPr id="1" name=""/>
+        <p:cNvPr id="1" name="">
+          <a:extLst>
+            <a:ext uri="{FF2B5EF4-FFF2-40B4-BE49-F238E27FC236}">
+              <a16:creationId xmlns:a16="http://schemas.microsoft.com/office/drawing/2014/main" id="{BAB848FE-1D84-B5AB-9432-B35C9850E031}"/>
+            </a:ext>
+          </a:extLst>
+        </p:cNvPr>
         <p:cNvGrpSpPr/>
         <p:nvPr/>
       </p:nvGrpSpPr>
@@ -10004,182 +10298,173 @@
           <a:chExt cx="0" cy="0"/>
         </a:xfrm>
       </p:grpSpPr>
-      <p:pic>
-        <p:nvPicPr>
-          <p:cNvPr id="15" name="Picture 14" descr="abstract design">
+      <p:sp>
+        <p:nvSpPr>
+          <p:cNvPr id="2" name="Title 1">
             <a:extLst>
               <a:ext uri="{FF2B5EF4-FFF2-40B4-BE49-F238E27FC236}">
-                <a16:creationId xmlns:a16="http://schemas.microsoft.com/office/drawing/2014/main" id="{6D363037-1741-4470-A023-883E2FFD5840}"/>
+                <a16:creationId xmlns:a16="http://schemas.microsoft.com/office/drawing/2014/main" id="{B9A4A4F0-6F9B-8A16-B1C4-03D99B0835CA}"/>
               </a:ext>
             </a:extLst>
           </p:cNvPr>
-          <p:cNvPicPr>
-            <a:picLocks noChangeAspect="1"/>
-          </p:cNvPicPr>
+          <p:cNvSpPr>
+            <a:spLocks noGrp="1"/>
+          </p:cNvSpPr>
+          <p:nvPr>
+            <p:ph type="title"/>
+          </p:nvPr>
+        </p:nvSpPr>
+        <p:spPr>
+          <a:xfrm>
+            <a:off x="1754188" y="452718"/>
+            <a:ext cx="8296646" cy="1400530"/>
+          </a:xfrm>
+        </p:spPr>
+        <p:txBody>
+          <a:bodyPr/>
+          <a:lstStyle/>
+          <a:p>
+            <a:r>
+              <a:rPr lang="en-US" b="1" dirty="0"/>
+              <a:t>Essential EA Meta-Model</a:t>
+            </a:r>
+            <a:br>
+              <a:rPr lang="en-US" b="1" dirty="0"/>
+            </a:br>
+            <a:r>
+              <a:rPr lang="en-US" b="1" dirty="0"/>
+              <a:t>- Business Conceptual - 01 </a:t>
+            </a:r>
+          </a:p>
+        </p:txBody>
+      </p:sp>
+      <p:sp>
+        <p:nvSpPr>
+          <p:cNvPr id="4" name="Title 1">
+            <a:extLst>
+              <a:ext uri="{FF2B5EF4-FFF2-40B4-BE49-F238E27FC236}">
+                <a16:creationId xmlns:a16="http://schemas.microsoft.com/office/drawing/2014/main" id="{9100DAF3-36E5-3DA4-0012-D67C18968779}"/>
+              </a:ext>
+            </a:extLst>
+          </p:cNvPr>
+          <p:cNvSpPr txBox="1">
+            <a:spLocks/>
+          </p:cNvSpPr>
           <p:nvPr/>
-        </p:nvPicPr>
-        <p:blipFill rotWithShape="1">
-          <a:blip r:embed="rId4">
-            <a:duotone>
-              <a:prstClr val="black"/>
-              <a:schemeClr val="accent5">
-                <a:tint val="45000"/>
-                <a:satMod val="400000"/>
-              </a:schemeClr>
-            </a:duotone>
-            <a:alphaModFix amt="25000"/>
-          </a:blip>
-          <a:srcRect t="18308" r="6818" b="2872"/>
-          <a:stretch/>
-        </p:blipFill>
-        <p:spPr>
-          <a:xfrm flipH="1">
-            <a:off x="20" y="10"/>
-            <a:ext cx="12191980" cy="6857990"/>
+        </p:nvSpPr>
+        <p:spPr>
+          <a:xfrm>
+            <a:off x="0" y="3143"/>
+            <a:ext cx="1754188" cy="1058013"/>
           </a:xfrm>
           <a:prstGeom prst="rect">
             <a:avLst/>
           </a:prstGeom>
         </p:spPr>
-      </p:pic>
-      <p:sp>
-        <p:nvSpPr>
-          <p:cNvPr id="12" name="Title 11">
+        <p:txBody>
+          <a:bodyPr vert="horz" lIns="91440" tIns="45720" rIns="91440" bIns="45720" rtlCol="0" anchor="ctr">
+            <a:noAutofit/>
+          </a:bodyPr>
+          <a:lstStyle>
+            <a:lvl1pPr algn="l" defTabSz="457200" rtl="0" eaLnBrk="1" latinLnBrk="0" hangingPunct="1">
+              <a:spcBef>
+                <a:spcPct val="0"/>
+              </a:spcBef>
+              <a:buNone/>
+              <a:defRPr sz="7200" b="0" i="0" kern="1200">
+                <a:solidFill>
+                  <a:schemeClr val="tx2"/>
+                </a:solidFill>
+                <a:latin typeface="+mj-lt"/>
+                <a:ea typeface="+mj-ea"/>
+                <a:cs typeface="+mj-cs"/>
+              </a:defRPr>
+            </a:lvl1pPr>
+            <a:lvl2pPr eaLnBrk="1" hangingPunct="1">
+              <a:defRPr>
+                <a:solidFill>
+                  <a:schemeClr val="tx2"/>
+                </a:solidFill>
+              </a:defRPr>
+            </a:lvl2pPr>
+            <a:lvl3pPr eaLnBrk="1" hangingPunct="1">
+              <a:defRPr>
+                <a:solidFill>
+                  <a:schemeClr val="tx2"/>
+                </a:solidFill>
+              </a:defRPr>
+            </a:lvl3pPr>
+            <a:lvl4pPr eaLnBrk="1" hangingPunct="1">
+              <a:defRPr>
+                <a:solidFill>
+                  <a:schemeClr val="tx2"/>
+                </a:solidFill>
+              </a:defRPr>
+            </a:lvl4pPr>
+            <a:lvl5pPr eaLnBrk="1" hangingPunct="1">
+              <a:defRPr>
+                <a:solidFill>
+                  <a:schemeClr val="tx2"/>
+                </a:solidFill>
+              </a:defRPr>
+            </a:lvl5pPr>
+            <a:lvl6pPr eaLnBrk="1" hangingPunct="1">
+              <a:defRPr>
+                <a:solidFill>
+                  <a:schemeClr val="tx2"/>
+                </a:solidFill>
+              </a:defRPr>
+            </a:lvl6pPr>
+            <a:lvl7pPr eaLnBrk="1" hangingPunct="1">
+              <a:defRPr>
+                <a:solidFill>
+                  <a:schemeClr val="tx2"/>
+                </a:solidFill>
+              </a:defRPr>
+            </a:lvl7pPr>
+            <a:lvl8pPr eaLnBrk="1" hangingPunct="1">
+              <a:defRPr>
+                <a:solidFill>
+                  <a:schemeClr val="tx2"/>
+                </a:solidFill>
+              </a:defRPr>
+            </a:lvl8pPr>
+            <a:lvl9pPr eaLnBrk="1" hangingPunct="1">
+              <a:defRPr>
+                <a:solidFill>
+                  <a:schemeClr val="tx2"/>
+                </a:solidFill>
+              </a:defRPr>
+            </a:lvl9pPr>
+          </a:lstStyle>
+          <a:p>
+            <a:pPr algn="ctr"/>
+            <a:r>
+              <a:rPr lang="en-US" b="1" dirty="0">
+                <a:solidFill>
+                  <a:schemeClr val="accent1">
+                    <a:lumMod val="75000"/>
+                  </a:schemeClr>
+                </a:solidFill>
+              </a:rPr>
+              <a:t>007</a:t>
+            </a:r>
+            <a:endParaRPr lang="ru-RU" b="1" dirty="0">
+              <a:solidFill>
+                <a:schemeClr val="accent1">
+                  <a:lumMod val="75000"/>
+                </a:schemeClr>
+              </a:solidFill>
+            </a:endParaRPr>
+          </a:p>
+        </p:txBody>
+      </p:sp>
+      <p:pic>
+        <p:nvPicPr>
+          <p:cNvPr id="5" name="Picture 4">
             <a:extLst>
               <a:ext uri="{FF2B5EF4-FFF2-40B4-BE49-F238E27FC236}">
-                <a16:creationId xmlns:a16="http://schemas.microsoft.com/office/drawing/2014/main" id="{970C361B-D32E-42E0-A41E-86C3D9AC886F}"/>
-              </a:ext>
-            </a:extLst>
-          </p:cNvPr>
-          <p:cNvSpPr>
-            <a:spLocks noGrp="1"/>
-          </p:cNvSpPr>
-          <p:nvPr>
-            <p:ph type="ctrTitle"/>
-          </p:nvPr>
-        </p:nvSpPr>
-        <p:spPr>
-          <a:xfrm>
-            <a:off x="1154955" y="1447800"/>
-            <a:ext cx="8825658" cy="3329581"/>
-          </a:xfrm>
-        </p:spPr>
-        <p:txBody>
-          <a:bodyPr>
-            <a:normAutofit/>
-          </a:bodyPr>
-          <a:lstStyle/>
-          <a:p>
-            <a:r>
-              <a:rPr lang="en-US" dirty="0"/>
-              <a:t>Thank You!</a:t>
-            </a:r>
-            <a:endParaRPr lang="ru-RU" dirty="0"/>
-          </a:p>
-        </p:txBody>
-      </p:sp>
-      <p:sp>
-        <p:nvSpPr>
-          <p:cNvPr id="13" name="Subtitle 12">
-            <a:extLst>
-              <a:ext uri="{FF2B5EF4-FFF2-40B4-BE49-F238E27FC236}">
-                <a16:creationId xmlns:a16="http://schemas.microsoft.com/office/drawing/2014/main" id="{336E726C-3DE4-41AA-88A0-C92B0C34163D}"/>
-              </a:ext>
-            </a:extLst>
-          </p:cNvPr>
-          <p:cNvSpPr>
-            <a:spLocks noGrp="1"/>
-          </p:cNvSpPr>
-          <p:nvPr>
-            <p:ph type="subTitle" idx="1"/>
-          </p:nvPr>
-        </p:nvSpPr>
-        <p:spPr>
-          <a:xfrm>
-            <a:off x="1154955" y="4777380"/>
-            <a:ext cx="8825658" cy="861420"/>
-          </a:xfrm>
-        </p:spPr>
-        <p:txBody>
-          <a:bodyPr>
-            <a:normAutofit/>
-          </a:bodyPr>
-          <a:lstStyle/>
-          <a:p>
-            <a:r>
-              <a:rPr lang="en-US" dirty="0"/>
-              <a:t>someone@Example.com</a:t>
-            </a:r>
-            <a:endParaRPr lang="ru-RU" dirty="0"/>
-          </a:p>
-        </p:txBody>
-      </p:sp>
-      <p:sp>
-        <p:nvSpPr>
-          <p:cNvPr id="57" name="Rectangle 56">
-            <a:extLst>
-              <a:ext uri="{FF2B5EF4-FFF2-40B4-BE49-F238E27FC236}">
-                <a16:creationId xmlns:a16="http://schemas.microsoft.com/office/drawing/2014/main" id="{318E9D62-7BA3-4D5E-8915-0D0E8661E3D7}"/>
-              </a:ext>
-              <a:ext uri="{C183D7F6-B498-43B3-948B-1728B52AA6E4}">
-                <adec:decorative xmlns:adec="http://schemas.microsoft.com/office/drawing/2017/decorative" val="1"/>
-              </a:ext>
-            </a:extLst>
-          </p:cNvPr>
-          <p:cNvSpPr>
-            <a:spLocks noGrp="1" noRot="1" noChangeAspect="1" noMove="1" noResize="1" noEditPoints="1" noAdjustHandles="1" noChangeArrowheads="1" noChangeShapeType="1" noTextEdit="1"/>
-          </p:cNvSpPr>
-          <p:nvPr>
-            <p:extLst>
-              <p:ext uri="{386F3935-93C4-4BCD-93E2-E3B085C9AB24}">
-                <p16:designElem xmlns:p16="http://schemas.microsoft.com/office/powerpoint/2015/main" val="1"/>
-              </p:ext>
-            </p:extLst>
-          </p:nvPr>
-        </p:nvSpPr>
-        <p:spPr>
-          <a:xfrm>
-            <a:off x="10437812" y="0"/>
-            <a:ext cx="685800" cy="1143000"/>
-          </a:xfrm>
-          <a:prstGeom prst="rect">
-            <a:avLst/>
-          </a:prstGeom>
-          <a:solidFill>
-            <a:schemeClr val="accent1"/>
-          </a:solidFill>
-          <a:ln>
-            <a:noFill/>
-          </a:ln>
-        </p:spPr>
-        <p:style>
-          <a:lnRef idx="1">
-            <a:schemeClr val="accent1"/>
-          </a:lnRef>
-          <a:fillRef idx="3">
-            <a:schemeClr val="accent1"/>
-          </a:fillRef>
-          <a:effectRef idx="2">
-            <a:schemeClr val="accent1"/>
-          </a:effectRef>
-          <a:fontRef idx="minor">
-            <a:schemeClr val="lt1"/>
-          </a:fontRef>
-        </p:style>
-        <p:txBody>
-          <a:bodyPr/>
-          <a:lstStyle/>
-          <a:p>
-            <a:endParaRPr lang="en-US"/>
-          </a:p>
-        </p:txBody>
-      </p:sp>
-      <p:pic>
-        <p:nvPicPr>
-          <p:cNvPr id="4" name="Picture 3">
-            <a:extLst>
-              <a:ext uri="{FF2B5EF4-FFF2-40B4-BE49-F238E27FC236}">
-                <a16:creationId xmlns:a16="http://schemas.microsoft.com/office/drawing/2014/main" id="{B011F562-7C5B-B39E-2FF0-681E86D50FE2}"/>
+                <a16:creationId xmlns:a16="http://schemas.microsoft.com/office/drawing/2014/main" id="{AA8F42FD-5A89-140B-6C50-A2C200F8DA2A}"/>
               </a:ext>
             </a:extLst>
           </p:cNvPr>
@@ -10189,25 +10474,683 @@
           <p:nvPr/>
         </p:nvPicPr>
         <p:blipFill>
-          <a:blip r:embed="rId5"/>
+          <a:blip r:embed="rId2"/>
           <a:stretch>
             <a:fillRect/>
           </a:stretch>
         </p:blipFill>
         <p:spPr>
           <a:xfrm>
-            <a:off x="10440834" y="0"/>
-            <a:ext cx="682228" cy="682228"/>
+            <a:off x="1941816" y="1853248"/>
+            <a:ext cx="8296646" cy="4669795"/>
           </a:xfrm>
           <a:prstGeom prst="rect">
             <a:avLst/>
           </a:prstGeom>
+          <a:ln>
+            <a:noFill/>
+          </a:ln>
+          <a:effectLst>
+            <a:outerShdw blurRad="292100" dist="139700" dir="2700000" algn="tl" rotWithShape="0">
+              <a:srgbClr val="333333">
+                <a:alpha val="65000"/>
+              </a:srgbClr>
+            </a:outerShdw>
+          </a:effectLst>
         </p:spPr>
       </p:pic>
+      <p:sp>
+        <p:nvSpPr>
+          <p:cNvPr id="7" name="Rectangle: Rounded Corners 6">
+            <a:extLst>
+              <a:ext uri="{FF2B5EF4-FFF2-40B4-BE49-F238E27FC236}">
+                <a16:creationId xmlns:a16="http://schemas.microsoft.com/office/drawing/2014/main" id="{79DA41FD-0157-49C4-D9F4-1DD0289BBB08}"/>
+              </a:ext>
+            </a:extLst>
+          </p:cNvPr>
+          <p:cNvSpPr/>
+          <p:nvPr/>
+        </p:nvSpPr>
+        <p:spPr>
+          <a:xfrm>
+            <a:off x="2301411" y="2188396"/>
+            <a:ext cx="2054832" cy="1400530"/>
+          </a:xfrm>
+          <a:prstGeom prst="roundRect">
+            <a:avLst>
+              <a:gd name="adj" fmla="val 6916"/>
+            </a:avLst>
+          </a:prstGeom>
+          <a:solidFill>
+            <a:srgbClr val="FFCC66">
+              <a:alpha val="20000"/>
+            </a:srgbClr>
+          </a:solidFill>
+          <a:ln>
+            <a:solidFill>
+              <a:srgbClr val="92D050"/>
+            </a:solidFill>
+          </a:ln>
+        </p:spPr>
+        <p:style>
+          <a:lnRef idx="2">
+            <a:schemeClr val="accent1">
+              <a:shade val="15000"/>
+            </a:schemeClr>
+          </a:lnRef>
+          <a:fillRef idx="1">
+            <a:schemeClr val="accent1"/>
+          </a:fillRef>
+          <a:effectRef idx="0">
+            <a:schemeClr val="accent1"/>
+          </a:effectRef>
+          <a:fontRef idx="minor">
+            <a:schemeClr val="lt1"/>
+          </a:fontRef>
+        </p:style>
+        <p:txBody>
+          <a:bodyPr rtlCol="0" anchor="ctr"/>
+          <a:lstStyle/>
+          <a:p>
+            <a:pPr algn="ctr"/>
+            <a:endParaRPr lang="en-US"/>
+          </a:p>
+        </p:txBody>
+      </p:sp>
     </p:spTree>
     <p:extLst>
       <p:ext uri="{BB962C8B-B14F-4D97-AF65-F5344CB8AC3E}">
-        <p14:creationId xmlns:p14="http://schemas.microsoft.com/office/powerpoint/2010/main" val="510767980"/>
+        <p14:creationId xmlns:p14="http://schemas.microsoft.com/office/powerpoint/2010/main" val="936530022"/>
+      </p:ext>
+    </p:extLst>
+  </p:cSld>
+  <p:clrMapOvr>
+    <a:masterClrMapping/>
+  </p:clrMapOvr>
+</p:sld>
+</file>
+
+<file path=ppt/slides/slide8.xml><?xml version="1.0" encoding="utf-8"?>
+<p:sld xmlns:a="http://schemas.openxmlformats.org/drawingml/2006/main" xmlns:r="http://schemas.openxmlformats.org/officeDocument/2006/relationships" xmlns:p="http://schemas.openxmlformats.org/presentationml/2006/main">
+  <p:cSld>
+    <p:spTree>
+      <p:nvGrpSpPr>
+        <p:cNvPr id="1" name="">
+          <a:extLst>
+            <a:ext uri="{FF2B5EF4-FFF2-40B4-BE49-F238E27FC236}">
+              <a16:creationId xmlns:a16="http://schemas.microsoft.com/office/drawing/2014/main" id="{69394AB3-81D7-77CA-B199-4BCA514F56BB}"/>
+            </a:ext>
+          </a:extLst>
+        </p:cNvPr>
+        <p:cNvGrpSpPr/>
+        <p:nvPr/>
+      </p:nvGrpSpPr>
+      <p:grpSpPr>
+        <a:xfrm>
+          <a:off x="0" y="0"/>
+          <a:ext cx="0" cy="0"/>
+          <a:chOff x="0" y="0"/>
+          <a:chExt cx="0" cy="0"/>
+        </a:xfrm>
+      </p:grpSpPr>
+      <p:sp>
+        <p:nvSpPr>
+          <p:cNvPr id="2" name="Title 1">
+            <a:extLst>
+              <a:ext uri="{FF2B5EF4-FFF2-40B4-BE49-F238E27FC236}">
+                <a16:creationId xmlns:a16="http://schemas.microsoft.com/office/drawing/2014/main" id="{59952FC1-9AB6-8A92-0B2F-87613FD1E857}"/>
+              </a:ext>
+            </a:extLst>
+          </p:cNvPr>
+          <p:cNvSpPr>
+            <a:spLocks noGrp="1"/>
+          </p:cNvSpPr>
+          <p:nvPr>
+            <p:ph type="title"/>
+          </p:nvPr>
+        </p:nvSpPr>
+        <p:spPr>
+          <a:xfrm>
+            <a:off x="1754188" y="452718"/>
+            <a:ext cx="8296646" cy="1400530"/>
+          </a:xfrm>
+        </p:spPr>
+        <p:txBody>
+          <a:bodyPr/>
+          <a:lstStyle/>
+          <a:p>
+            <a:r>
+              <a:rPr lang="en-US" b="1" dirty="0"/>
+              <a:t>Essential EA Meta-Model</a:t>
+            </a:r>
+            <a:br>
+              <a:rPr lang="en-US" b="1" dirty="0"/>
+            </a:br>
+            <a:r>
+              <a:rPr lang="en-US" b="1" dirty="0"/>
+              <a:t>- Business Conceptual - 02 </a:t>
+            </a:r>
+          </a:p>
+        </p:txBody>
+      </p:sp>
+      <p:sp>
+        <p:nvSpPr>
+          <p:cNvPr id="4" name="Title 1">
+            <a:extLst>
+              <a:ext uri="{FF2B5EF4-FFF2-40B4-BE49-F238E27FC236}">
+                <a16:creationId xmlns:a16="http://schemas.microsoft.com/office/drawing/2014/main" id="{D2035176-1130-3F0C-E45A-EEBAFA2FF24E}"/>
+              </a:ext>
+            </a:extLst>
+          </p:cNvPr>
+          <p:cNvSpPr txBox="1">
+            <a:spLocks/>
+          </p:cNvSpPr>
+          <p:nvPr/>
+        </p:nvSpPr>
+        <p:spPr>
+          <a:xfrm>
+            <a:off x="0" y="3143"/>
+            <a:ext cx="1754188" cy="1058013"/>
+          </a:xfrm>
+          <a:prstGeom prst="rect">
+            <a:avLst/>
+          </a:prstGeom>
+        </p:spPr>
+        <p:txBody>
+          <a:bodyPr vert="horz" lIns="91440" tIns="45720" rIns="91440" bIns="45720" rtlCol="0" anchor="ctr">
+            <a:noAutofit/>
+          </a:bodyPr>
+          <a:lstStyle>
+            <a:lvl1pPr algn="l" defTabSz="457200" rtl="0" eaLnBrk="1" latinLnBrk="0" hangingPunct="1">
+              <a:spcBef>
+                <a:spcPct val="0"/>
+              </a:spcBef>
+              <a:buNone/>
+              <a:defRPr sz="7200" b="0" i="0" kern="1200">
+                <a:solidFill>
+                  <a:schemeClr val="tx2"/>
+                </a:solidFill>
+                <a:latin typeface="+mj-lt"/>
+                <a:ea typeface="+mj-ea"/>
+                <a:cs typeface="+mj-cs"/>
+              </a:defRPr>
+            </a:lvl1pPr>
+            <a:lvl2pPr eaLnBrk="1" hangingPunct="1">
+              <a:defRPr>
+                <a:solidFill>
+                  <a:schemeClr val="tx2"/>
+                </a:solidFill>
+              </a:defRPr>
+            </a:lvl2pPr>
+            <a:lvl3pPr eaLnBrk="1" hangingPunct="1">
+              <a:defRPr>
+                <a:solidFill>
+                  <a:schemeClr val="tx2"/>
+                </a:solidFill>
+              </a:defRPr>
+            </a:lvl3pPr>
+            <a:lvl4pPr eaLnBrk="1" hangingPunct="1">
+              <a:defRPr>
+                <a:solidFill>
+                  <a:schemeClr val="tx2"/>
+                </a:solidFill>
+              </a:defRPr>
+            </a:lvl4pPr>
+            <a:lvl5pPr eaLnBrk="1" hangingPunct="1">
+              <a:defRPr>
+                <a:solidFill>
+                  <a:schemeClr val="tx2"/>
+                </a:solidFill>
+              </a:defRPr>
+            </a:lvl5pPr>
+            <a:lvl6pPr eaLnBrk="1" hangingPunct="1">
+              <a:defRPr>
+                <a:solidFill>
+                  <a:schemeClr val="tx2"/>
+                </a:solidFill>
+              </a:defRPr>
+            </a:lvl6pPr>
+            <a:lvl7pPr eaLnBrk="1" hangingPunct="1">
+              <a:defRPr>
+                <a:solidFill>
+                  <a:schemeClr val="tx2"/>
+                </a:solidFill>
+              </a:defRPr>
+            </a:lvl7pPr>
+            <a:lvl8pPr eaLnBrk="1" hangingPunct="1">
+              <a:defRPr>
+                <a:solidFill>
+                  <a:schemeClr val="tx2"/>
+                </a:solidFill>
+              </a:defRPr>
+            </a:lvl8pPr>
+            <a:lvl9pPr eaLnBrk="1" hangingPunct="1">
+              <a:defRPr>
+                <a:solidFill>
+                  <a:schemeClr val="tx2"/>
+                </a:solidFill>
+              </a:defRPr>
+            </a:lvl9pPr>
+          </a:lstStyle>
+          <a:p>
+            <a:pPr algn="ctr"/>
+            <a:r>
+              <a:rPr lang="en-US" b="1" dirty="0">
+                <a:solidFill>
+                  <a:schemeClr val="accent1">
+                    <a:lumMod val="75000"/>
+                  </a:schemeClr>
+                </a:solidFill>
+              </a:rPr>
+              <a:t>008</a:t>
+            </a:r>
+            <a:endParaRPr lang="ru-RU" b="1" dirty="0">
+              <a:solidFill>
+                <a:schemeClr val="accent1">
+                  <a:lumMod val="75000"/>
+                </a:schemeClr>
+              </a:solidFill>
+            </a:endParaRPr>
+          </a:p>
+        </p:txBody>
+      </p:sp>
+      <p:pic>
+        <p:nvPicPr>
+          <p:cNvPr id="5" name="Picture 4">
+            <a:extLst>
+              <a:ext uri="{FF2B5EF4-FFF2-40B4-BE49-F238E27FC236}">
+                <a16:creationId xmlns:a16="http://schemas.microsoft.com/office/drawing/2014/main" id="{BC5DC183-913D-E016-906D-E7E7978E5F95}"/>
+              </a:ext>
+            </a:extLst>
+          </p:cNvPr>
+          <p:cNvPicPr>
+            <a:picLocks noChangeAspect="1"/>
+          </p:cNvPicPr>
+          <p:nvPr/>
+        </p:nvPicPr>
+        <p:blipFill>
+          <a:blip r:embed="rId2"/>
+          <a:stretch>
+            <a:fillRect/>
+          </a:stretch>
+        </p:blipFill>
+        <p:spPr>
+          <a:xfrm>
+            <a:off x="1941816" y="1853248"/>
+            <a:ext cx="8296646" cy="4669795"/>
+          </a:xfrm>
+          <a:prstGeom prst="rect">
+            <a:avLst/>
+          </a:prstGeom>
+          <a:ln>
+            <a:noFill/>
+          </a:ln>
+          <a:effectLst>
+            <a:outerShdw blurRad="292100" dist="139700" dir="2700000" algn="tl" rotWithShape="0">
+              <a:srgbClr val="333333">
+                <a:alpha val="65000"/>
+              </a:srgbClr>
+            </a:outerShdw>
+          </a:effectLst>
+        </p:spPr>
+      </p:pic>
+      <p:sp>
+        <p:nvSpPr>
+          <p:cNvPr id="7" name="Rectangle: Rounded Corners 6">
+            <a:extLst>
+              <a:ext uri="{FF2B5EF4-FFF2-40B4-BE49-F238E27FC236}">
+                <a16:creationId xmlns:a16="http://schemas.microsoft.com/office/drawing/2014/main" id="{6CABA8A8-4318-7C44-38E2-85E5EA4F8BFD}"/>
+              </a:ext>
+            </a:extLst>
+          </p:cNvPr>
+          <p:cNvSpPr/>
+          <p:nvPr/>
+        </p:nvSpPr>
+        <p:spPr>
+          <a:xfrm>
+            <a:off x="2301411" y="2188396"/>
+            <a:ext cx="2054832" cy="1400530"/>
+          </a:xfrm>
+          <a:prstGeom prst="roundRect">
+            <a:avLst>
+              <a:gd name="adj" fmla="val 6916"/>
+            </a:avLst>
+          </a:prstGeom>
+          <a:solidFill>
+            <a:srgbClr val="FFCC66">
+              <a:alpha val="20000"/>
+            </a:srgbClr>
+          </a:solidFill>
+          <a:ln>
+            <a:solidFill>
+              <a:srgbClr val="92D050"/>
+            </a:solidFill>
+          </a:ln>
+        </p:spPr>
+        <p:style>
+          <a:lnRef idx="2">
+            <a:schemeClr val="accent1">
+              <a:shade val="15000"/>
+            </a:schemeClr>
+          </a:lnRef>
+          <a:fillRef idx="1">
+            <a:schemeClr val="accent1"/>
+          </a:fillRef>
+          <a:effectRef idx="0">
+            <a:schemeClr val="accent1"/>
+          </a:effectRef>
+          <a:fontRef idx="minor">
+            <a:schemeClr val="lt1"/>
+          </a:fontRef>
+        </p:style>
+        <p:txBody>
+          <a:bodyPr rtlCol="0" anchor="ctr"/>
+          <a:lstStyle/>
+          <a:p>
+            <a:pPr algn="ctr"/>
+            <a:endParaRPr lang="en-US"/>
+          </a:p>
+        </p:txBody>
+      </p:sp>
+    </p:spTree>
+    <p:extLst>
+      <p:ext uri="{BB962C8B-B14F-4D97-AF65-F5344CB8AC3E}">
+        <p14:creationId xmlns:p14="http://schemas.microsoft.com/office/powerpoint/2010/main" val="3543606810"/>
+      </p:ext>
+    </p:extLst>
+  </p:cSld>
+  <p:clrMapOvr>
+    <a:masterClrMapping/>
+  </p:clrMapOvr>
+</p:sld>
+</file>
+
+<file path=ppt/slides/slide9.xml><?xml version="1.0" encoding="utf-8"?>
+<p:sld xmlns:a="http://schemas.openxmlformats.org/drawingml/2006/main" xmlns:r="http://schemas.openxmlformats.org/officeDocument/2006/relationships" xmlns:p="http://schemas.openxmlformats.org/presentationml/2006/main">
+  <p:cSld>
+    <p:spTree>
+      <p:nvGrpSpPr>
+        <p:cNvPr id="1" name="">
+          <a:extLst>
+            <a:ext uri="{FF2B5EF4-FFF2-40B4-BE49-F238E27FC236}">
+              <a16:creationId xmlns:a16="http://schemas.microsoft.com/office/drawing/2014/main" id="{6F115740-8931-9432-5022-9B33126AF0CD}"/>
+            </a:ext>
+          </a:extLst>
+        </p:cNvPr>
+        <p:cNvGrpSpPr/>
+        <p:nvPr/>
+      </p:nvGrpSpPr>
+      <p:grpSpPr>
+        <a:xfrm>
+          <a:off x="0" y="0"/>
+          <a:ext cx="0" cy="0"/>
+          <a:chOff x="0" y="0"/>
+          <a:chExt cx="0" cy="0"/>
+        </a:xfrm>
+      </p:grpSpPr>
+      <p:sp>
+        <p:nvSpPr>
+          <p:cNvPr id="2" name="Title 1">
+            <a:extLst>
+              <a:ext uri="{FF2B5EF4-FFF2-40B4-BE49-F238E27FC236}">
+                <a16:creationId xmlns:a16="http://schemas.microsoft.com/office/drawing/2014/main" id="{196D5AE0-97B2-F5A1-20E0-90D7AF83AAB7}"/>
+              </a:ext>
+            </a:extLst>
+          </p:cNvPr>
+          <p:cNvSpPr>
+            <a:spLocks noGrp="1"/>
+          </p:cNvSpPr>
+          <p:nvPr>
+            <p:ph type="title"/>
+          </p:nvPr>
+        </p:nvSpPr>
+        <p:spPr>
+          <a:xfrm>
+            <a:off x="1754188" y="452718"/>
+            <a:ext cx="8296646" cy="1400530"/>
+          </a:xfrm>
+        </p:spPr>
+        <p:txBody>
+          <a:bodyPr/>
+          <a:lstStyle/>
+          <a:p>
+            <a:r>
+              <a:rPr lang="en-US" b="1" dirty="0"/>
+              <a:t>Essential EA Meta-Model</a:t>
+            </a:r>
+            <a:br>
+              <a:rPr lang="en-US" b="1" dirty="0"/>
+            </a:br>
+            <a:r>
+              <a:rPr lang="en-US" b="1" dirty="0"/>
+              <a:t>- Business Conceptual - 03 </a:t>
+            </a:r>
+          </a:p>
+        </p:txBody>
+      </p:sp>
+      <p:sp>
+        <p:nvSpPr>
+          <p:cNvPr id="4" name="Title 1">
+            <a:extLst>
+              <a:ext uri="{FF2B5EF4-FFF2-40B4-BE49-F238E27FC236}">
+                <a16:creationId xmlns:a16="http://schemas.microsoft.com/office/drawing/2014/main" id="{E1259266-9EFF-EE1C-8089-9467C74B9C7A}"/>
+              </a:ext>
+            </a:extLst>
+          </p:cNvPr>
+          <p:cNvSpPr txBox="1">
+            <a:spLocks/>
+          </p:cNvSpPr>
+          <p:nvPr/>
+        </p:nvSpPr>
+        <p:spPr>
+          <a:xfrm>
+            <a:off x="0" y="3143"/>
+            <a:ext cx="1754188" cy="1058013"/>
+          </a:xfrm>
+          <a:prstGeom prst="rect">
+            <a:avLst/>
+          </a:prstGeom>
+        </p:spPr>
+        <p:txBody>
+          <a:bodyPr vert="horz" lIns="91440" tIns="45720" rIns="91440" bIns="45720" rtlCol="0" anchor="ctr">
+            <a:noAutofit/>
+          </a:bodyPr>
+          <a:lstStyle>
+            <a:lvl1pPr algn="l" defTabSz="457200" rtl="0" eaLnBrk="1" latinLnBrk="0" hangingPunct="1">
+              <a:spcBef>
+                <a:spcPct val="0"/>
+              </a:spcBef>
+              <a:buNone/>
+              <a:defRPr sz="7200" b="0" i="0" kern="1200">
+                <a:solidFill>
+                  <a:schemeClr val="tx2"/>
+                </a:solidFill>
+                <a:latin typeface="+mj-lt"/>
+                <a:ea typeface="+mj-ea"/>
+                <a:cs typeface="+mj-cs"/>
+              </a:defRPr>
+            </a:lvl1pPr>
+            <a:lvl2pPr eaLnBrk="1" hangingPunct="1">
+              <a:defRPr>
+                <a:solidFill>
+                  <a:schemeClr val="tx2"/>
+                </a:solidFill>
+              </a:defRPr>
+            </a:lvl2pPr>
+            <a:lvl3pPr eaLnBrk="1" hangingPunct="1">
+              <a:defRPr>
+                <a:solidFill>
+                  <a:schemeClr val="tx2"/>
+                </a:solidFill>
+              </a:defRPr>
+            </a:lvl3pPr>
+            <a:lvl4pPr eaLnBrk="1" hangingPunct="1">
+              <a:defRPr>
+                <a:solidFill>
+                  <a:schemeClr val="tx2"/>
+                </a:solidFill>
+              </a:defRPr>
+            </a:lvl4pPr>
+            <a:lvl5pPr eaLnBrk="1" hangingPunct="1">
+              <a:defRPr>
+                <a:solidFill>
+                  <a:schemeClr val="tx2"/>
+                </a:solidFill>
+              </a:defRPr>
+            </a:lvl5pPr>
+            <a:lvl6pPr eaLnBrk="1" hangingPunct="1">
+              <a:defRPr>
+                <a:solidFill>
+                  <a:schemeClr val="tx2"/>
+                </a:solidFill>
+              </a:defRPr>
+            </a:lvl6pPr>
+            <a:lvl7pPr eaLnBrk="1" hangingPunct="1">
+              <a:defRPr>
+                <a:solidFill>
+                  <a:schemeClr val="tx2"/>
+                </a:solidFill>
+              </a:defRPr>
+            </a:lvl7pPr>
+            <a:lvl8pPr eaLnBrk="1" hangingPunct="1">
+              <a:defRPr>
+                <a:solidFill>
+                  <a:schemeClr val="tx2"/>
+                </a:solidFill>
+              </a:defRPr>
+            </a:lvl8pPr>
+            <a:lvl9pPr eaLnBrk="1" hangingPunct="1">
+              <a:defRPr>
+                <a:solidFill>
+                  <a:schemeClr val="tx2"/>
+                </a:solidFill>
+              </a:defRPr>
+            </a:lvl9pPr>
+          </a:lstStyle>
+          <a:p>
+            <a:pPr algn="ctr"/>
+            <a:r>
+              <a:rPr lang="en-US" b="1" dirty="0">
+                <a:solidFill>
+                  <a:schemeClr val="accent1">
+                    <a:lumMod val="75000"/>
+                  </a:schemeClr>
+                </a:solidFill>
+              </a:rPr>
+              <a:t>009</a:t>
+            </a:r>
+            <a:endParaRPr lang="ru-RU" b="1" dirty="0">
+              <a:solidFill>
+                <a:schemeClr val="accent1">
+                  <a:lumMod val="75000"/>
+                </a:schemeClr>
+              </a:solidFill>
+            </a:endParaRPr>
+          </a:p>
+        </p:txBody>
+      </p:sp>
+      <p:pic>
+        <p:nvPicPr>
+          <p:cNvPr id="5" name="Picture 4">
+            <a:extLst>
+              <a:ext uri="{FF2B5EF4-FFF2-40B4-BE49-F238E27FC236}">
+                <a16:creationId xmlns:a16="http://schemas.microsoft.com/office/drawing/2014/main" id="{094B322A-9342-D809-4B0E-2F3FDB884EF0}"/>
+              </a:ext>
+            </a:extLst>
+          </p:cNvPr>
+          <p:cNvPicPr>
+            <a:picLocks noChangeAspect="1"/>
+          </p:cNvPicPr>
+          <p:nvPr/>
+        </p:nvPicPr>
+        <p:blipFill>
+          <a:blip r:embed="rId2"/>
+          <a:stretch>
+            <a:fillRect/>
+          </a:stretch>
+        </p:blipFill>
+        <p:spPr>
+          <a:xfrm>
+            <a:off x="1941816" y="1853248"/>
+            <a:ext cx="8296646" cy="4669795"/>
+          </a:xfrm>
+          <a:prstGeom prst="rect">
+            <a:avLst/>
+          </a:prstGeom>
+          <a:ln>
+            <a:noFill/>
+          </a:ln>
+          <a:effectLst>
+            <a:outerShdw blurRad="292100" dist="139700" dir="2700000" algn="tl" rotWithShape="0">
+              <a:srgbClr val="333333">
+                <a:alpha val="65000"/>
+              </a:srgbClr>
+            </a:outerShdw>
+          </a:effectLst>
+        </p:spPr>
+      </p:pic>
+      <p:sp>
+        <p:nvSpPr>
+          <p:cNvPr id="7" name="Rectangle: Rounded Corners 6">
+            <a:extLst>
+              <a:ext uri="{FF2B5EF4-FFF2-40B4-BE49-F238E27FC236}">
+                <a16:creationId xmlns:a16="http://schemas.microsoft.com/office/drawing/2014/main" id="{1030BCA1-1E2D-0A36-1368-DC023E3A69D5}"/>
+              </a:ext>
+            </a:extLst>
+          </p:cNvPr>
+          <p:cNvSpPr/>
+          <p:nvPr/>
+        </p:nvSpPr>
+        <p:spPr>
+          <a:xfrm>
+            <a:off x="2301411" y="2188396"/>
+            <a:ext cx="2054832" cy="1400530"/>
+          </a:xfrm>
+          <a:prstGeom prst="roundRect">
+            <a:avLst>
+              <a:gd name="adj" fmla="val 6916"/>
+            </a:avLst>
+          </a:prstGeom>
+          <a:solidFill>
+            <a:srgbClr val="FFCC66">
+              <a:alpha val="20000"/>
+            </a:srgbClr>
+          </a:solidFill>
+          <a:ln>
+            <a:solidFill>
+              <a:srgbClr val="92D050"/>
+            </a:solidFill>
+          </a:ln>
+        </p:spPr>
+        <p:style>
+          <a:lnRef idx="2">
+            <a:schemeClr val="accent1">
+              <a:shade val="15000"/>
+            </a:schemeClr>
+          </a:lnRef>
+          <a:fillRef idx="1">
+            <a:schemeClr val="accent1"/>
+          </a:fillRef>
+          <a:effectRef idx="0">
+            <a:schemeClr val="accent1"/>
+          </a:effectRef>
+          <a:fontRef idx="minor">
+            <a:schemeClr val="lt1"/>
+          </a:fontRef>
+        </p:style>
+        <p:txBody>
+          <a:bodyPr rtlCol="0" anchor="ctr"/>
+          <a:lstStyle/>
+          <a:p>
+            <a:pPr algn="ctr"/>
+            <a:endParaRPr lang="en-US"/>
+          </a:p>
+        </p:txBody>
+      </p:sp>
+    </p:spTree>
+    <p:extLst>
+      <p:ext uri="{BB962C8B-B14F-4D97-AF65-F5344CB8AC3E}">
+        <p14:creationId xmlns:p14="http://schemas.microsoft.com/office/powerpoint/2010/main" val="4236598300"/>
       </p:ext>
     </p:extLst>
   </p:cSld>
@@ -11073,24 +12016,6 @@
 </file>
 
 <file path=customXml/item1.xml><?xml version="1.0" encoding="utf-8"?>
-<p:properties xmlns:p="http://schemas.microsoft.com/office/2006/metadata/properties" xmlns:xsi="http://www.w3.org/2001/XMLSchema-instance" xmlns:pc="http://schemas.microsoft.com/office/infopath/2007/PartnerControls">
-  <documentManagement>
-    <Status xmlns="71af3243-3dd4-4a8d-8c0d-dd76da1f02a5">Not started</Status>
-    <MediaServiceKeyPoints xmlns="71af3243-3dd4-4a8d-8c0d-dd76da1f02a5" xsi:nil="true"/>
-  </documentManagement>
-</p:properties>
-</file>
-
-<file path=customXml/item2.xml><?xml version="1.0" encoding="utf-8"?>
-<?mso-contentType ?>
-<FormTemplates xmlns="http://schemas.microsoft.com/sharepoint/v3/contenttype/forms">
-  <Display>DocumentLibraryForm</Display>
-  <Edit>DocumentLibraryForm</Edit>
-  <New>DocumentLibraryForm</New>
-</FormTemplates>
-</file>
-
-<file path=customXml/item3.xml><?xml version="1.0" encoding="utf-8"?>
 <ct:contentTypeSchema xmlns:ct="http://schemas.microsoft.com/office/2006/metadata/contentType" xmlns:ma="http://schemas.microsoft.com/office/2006/metadata/properties/metaAttributes" ct:_="" ma:_="" ma:contentTypeName="Document" ma:contentTypeID="0x01010079F111ED35F8CC479449609E8A0923A6" ma:contentTypeVersion="12" ma:contentTypeDescription="Create a new document." ma:contentTypeScope="" ma:versionID="93813dd7ca6ad654711aa0ab317e03a3">
   <xsd:schema xmlns:xsd="http://www.w3.org/2001/XMLSchema" xmlns:xs="http://www.w3.org/2001/XMLSchema" xmlns:p="http://schemas.microsoft.com/office/2006/metadata/properties" xmlns:ns2="71af3243-3dd4-4a8d-8c0d-dd76da1f02a5" xmlns:ns3="16c05727-aa75-4e4a-9b5f-8a80a1165891" targetNamespace="http://schemas.microsoft.com/office/2006/metadata/properties" ma:root="true" ma:fieldsID="f11dc0ce689dd3925e84e4e35398c6e7" ns2:_="" ns3:_="">
     <xsd:import namespace="71af3243-3dd4-4a8d-8c0d-dd76da1f02a5"/>
@@ -11311,25 +12236,25 @@
 </ct:contentTypeSchema>
 </file>
 
-<file path=customXml/itemProps1.xml><?xml version="1.0" encoding="utf-8"?>
-<ds:datastoreItem xmlns:ds="http://schemas.openxmlformats.org/officeDocument/2006/customXml" ds:itemID="{048C88F1-1664-415F-AFCE-F6CF45809817}">
-  <ds:schemaRefs>
-    <ds:schemaRef ds:uri="http://schemas.microsoft.com/office/2006/metadata/properties"/>
-    <ds:schemaRef ds:uri="http://schemas.microsoft.com/office/infopath/2007/PartnerControls"/>
-    <ds:schemaRef ds:uri="71af3243-3dd4-4a8d-8c0d-dd76da1f02a5"/>
-  </ds:schemaRefs>
-</ds:datastoreItem>
+<file path=customXml/item2.xml><?xml version="1.0" encoding="utf-8"?>
+<?mso-contentType ?>
+<FormTemplates xmlns="http://schemas.microsoft.com/sharepoint/v3/contenttype/forms">
+  <Display>DocumentLibraryForm</Display>
+  <Edit>DocumentLibraryForm</Edit>
+  <New>DocumentLibraryForm</New>
+</FormTemplates>
 </file>
 
-<file path=customXml/itemProps2.xml><?xml version="1.0" encoding="utf-8"?>
-<ds:datastoreItem xmlns:ds="http://schemas.openxmlformats.org/officeDocument/2006/customXml" ds:itemID="{0D16958A-754B-4396-9457-FD7A427A37DD}">
-  <ds:schemaRefs>
-    <ds:schemaRef ds:uri="http://schemas.microsoft.com/sharepoint/v3/contenttype/forms"/>
-  </ds:schemaRefs>
-</ds:datastoreItem>
+<file path=customXml/item3.xml><?xml version="1.0" encoding="utf-8"?>
+<p:properties xmlns:p="http://schemas.microsoft.com/office/2006/metadata/properties" xmlns:xsi="http://www.w3.org/2001/XMLSchema-instance" xmlns:pc="http://schemas.microsoft.com/office/infopath/2007/PartnerControls">
+  <documentManagement>
+    <Status xmlns="71af3243-3dd4-4a8d-8c0d-dd76da1f02a5">Not started</Status>
+    <MediaServiceKeyPoints xmlns="71af3243-3dd4-4a8d-8c0d-dd76da1f02a5" xsi:nil="true"/>
+  </documentManagement>
+</p:properties>
 </file>
 
-<file path=customXml/itemProps3.xml><?xml version="1.0" encoding="utf-8"?>
+<file path=customXml/itemProps1.xml><?xml version="1.0" encoding="utf-8"?>
 <ds:datastoreItem xmlns:ds="http://schemas.openxmlformats.org/officeDocument/2006/customXml" ds:itemID="{CC30393A-FEC6-4A44-9E4A-6EA49F1F7DC0}">
   <ds:schemaRefs>
     <ds:schemaRef ds:uri="http://schemas.microsoft.com/office/2006/metadata/contentType"/>
@@ -11348,6 +12273,24 @@
 </ds:datastoreItem>
 </file>
 
+<file path=customXml/itemProps2.xml><?xml version="1.0" encoding="utf-8"?>
+<ds:datastoreItem xmlns:ds="http://schemas.openxmlformats.org/officeDocument/2006/customXml" ds:itemID="{0D16958A-754B-4396-9457-FD7A427A37DD}">
+  <ds:schemaRefs>
+    <ds:schemaRef ds:uri="http://schemas.microsoft.com/sharepoint/v3/contenttype/forms"/>
+  </ds:schemaRefs>
+</ds:datastoreItem>
+</file>
+
+<file path=customXml/itemProps3.xml><?xml version="1.0" encoding="utf-8"?>
+<ds:datastoreItem xmlns:ds="http://schemas.openxmlformats.org/officeDocument/2006/customXml" ds:itemID="{048C88F1-1664-415F-AFCE-F6CF45809817}">
+  <ds:schemaRefs>
+    <ds:schemaRef ds:uri="http://schemas.microsoft.com/office/2006/metadata/properties"/>
+    <ds:schemaRef ds:uri="http://schemas.microsoft.com/office/infopath/2007/PartnerControls"/>
+    <ds:schemaRef ds:uri="71af3243-3dd4-4a8d-8c0d-dd76da1f02a5"/>
+  </ds:schemaRefs>
+</ds:datastoreItem>
+</file>
+
 <file path=docMetadata/LabelInfo.xml><?xml version="1.0" encoding="utf-8"?>
 <clbl:labelList xmlns:clbl="http://schemas.microsoft.com/office/2020/mipLabelMetadata">
   <clbl:label id="{19540963-e559-4020-8a90-fe8a502c2801}" enabled="1" method="Standard" siteId="{f25493ae-1c98-41d7-8a33-0be75f5fe603}" contentBits="0" removed="0"/>

--- a/Master_EAS_Meta-Model.pptx
+++ b/Master_EAS_Meta-Model.pptx
@@ -10557,6 +10557,86 @@
           </a:p>
         </p:txBody>
       </p:sp>
+      <p:pic>
+        <p:nvPicPr>
+          <p:cNvPr id="9" name="Picture 8">
+            <a:extLst>
+              <a:ext uri="{FF2B5EF4-FFF2-40B4-BE49-F238E27FC236}">
+                <a16:creationId xmlns:a16="http://schemas.microsoft.com/office/drawing/2014/main" id="{9D7E3673-4348-0701-8D66-FB5EB7BAA58F}"/>
+              </a:ext>
+            </a:extLst>
+          </p:cNvPr>
+          <p:cNvPicPr>
+            <a:picLocks noChangeAspect="1"/>
+          </p:cNvPicPr>
+          <p:nvPr/>
+        </p:nvPicPr>
+        <p:blipFill>
+          <a:blip r:embed="rId3"/>
+          <a:stretch>
+            <a:fillRect/>
+          </a:stretch>
+        </p:blipFill>
+        <p:spPr>
+          <a:xfrm>
+            <a:off x="157000" y="1094226"/>
+            <a:ext cx="362976" cy="362976"/>
+          </a:xfrm>
+          <a:prstGeom prst="rect">
+            <a:avLst/>
+          </a:prstGeom>
+          <a:ln>
+            <a:noFill/>
+          </a:ln>
+          <a:effectLst>
+            <a:outerShdw blurRad="292100" dist="139700" dir="2700000" algn="tl" rotWithShape="0">
+              <a:srgbClr val="333333">
+                <a:alpha val="65000"/>
+              </a:srgbClr>
+            </a:outerShdw>
+          </a:effectLst>
+        </p:spPr>
+      </p:pic>
+      <p:pic>
+        <p:nvPicPr>
+          <p:cNvPr id="11" name="Picture 10">
+            <a:extLst>
+              <a:ext uri="{FF2B5EF4-FFF2-40B4-BE49-F238E27FC236}">
+                <a16:creationId xmlns:a16="http://schemas.microsoft.com/office/drawing/2014/main" id="{6CBDB4F7-AD96-E5FF-FB74-1EF32F3CFFC0}"/>
+              </a:ext>
+            </a:extLst>
+          </p:cNvPr>
+          <p:cNvPicPr>
+            <a:picLocks noChangeAspect="1"/>
+          </p:cNvPicPr>
+          <p:nvPr/>
+        </p:nvPicPr>
+        <p:blipFill>
+          <a:blip r:embed="rId4"/>
+          <a:stretch>
+            <a:fillRect/>
+          </a:stretch>
+        </p:blipFill>
+        <p:spPr>
+          <a:xfrm>
+            <a:off x="592618" y="1094226"/>
+            <a:ext cx="362976" cy="362976"/>
+          </a:xfrm>
+          <a:prstGeom prst="rect">
+            <a:avLst/>
+          </a:prstGeom>
+          <a:ln>
+            <a:noFill/>
+          </a:ln>
+          <a:effectLst>
+            <a:outerShdw blurRad="292100" dist="139700" dir="2700000" algn="tl" rotWithShape="0">
+              <a:srgbClr val="333333">
+                <a:alpha val="65000"/>
+              </a:srgbClr>
+            </a:outerShdw>
+          </a:effectLst>
+        </p:spPr>
+      </p:pic>
     </p:spTree>
     <p:extLst>
       <p:ext uri="{BB962C8B-B14F-4D97-AF65-F5344CB8AC3E}">
@@ -10852,6 +10932,46 @@
           </a:p>
         </p:txBody>
       </p:sp>
+      <p:pic>
+        <p:nvPicPr>
+          <p:cNvPr id="12" name="Picture 11">
+            <a:extLst>
+              <a:ext uri="{FF2B5EF4-FFF2-40B4-BE49-F238E27FC236}">
+                <a16:creationId xmlns:a16="http://schemas.microsoft.com/office/drawing/2014/main" id="{6B53E160-0729-9BA3-0260-559EB5A688A4}"/>
+              </a:ext>
+            </a:extLst>
+          </p:cNvPr>
+          <p:cNvPicPr>
+            <a:picLocks noChangeAspect="1"/>
+          </p:cNvPicPr>
+          <p:nvPr/>
+        </p:nvPicPr>
+        <p:blipFill>
+          <a:blip r:embed="rId3"/>
+          <a:stretch>
+            <a:fillRect/>
+          </a:stretch>
+        </p:blipFill>
+        <p:spPr>
+          <a:xfrm>
+            <a:off x="179657" y="1094226"/>
+            <a:ext cx="371111" cy="362976"/>
+          </a:xfrm>
+          <a:prstGeom prst="rect">
+            <a:avLst/>
+          </a:prstGeom>
+          <a:ln>
+            <a:noFill/>
+          </a:ln>
+          <a:effectLst>
+            <a:outerShdw blurRad="292100" dist="139700" dir="2700000" algn="tl" rotWithShape="0">
+              <a:srgbClr val="333333">
+                <a:alpha val="65000"/>
+              </a:srgbClr>
+            </a:outerShdw>
+          </a:effectLst>
+        </p:spPr>
+      </p:pic>
     </p:spTree>
     <p:extLst>
       <p:ext uri="{BB962C8B-B14F-4D97-AF65-F5344CB8AC3E}">

--- a/Master_EAS_Meta-Model.pptx
+++ b/Master_EAS_Meta-Model.pptx
@@ -5,10 +5,10 @@
     <p:sldMasterId id="2147483648" r:id="rId4"/>
   </p:sldMasterIdLst>
   <p:notesMasterIdLst>
-    <p:notesMasterId r:id="rId15"/>
+    <p:notesMasterId r:id="rId18"/>
   </p:notesMasterIdLst>
   <p:handoutMasterIdLst>
-    <p:handoutMasterId r:id="rId16"/>
+    <p:handoutMasterId r:id="rId19"/>
   </p:handoutMasterIdLst>
   <p:sldIdLst>
     <p:sldId id="256" r:id="rId5"/>
@@ -20,7 +20,10 @@
     <p:sldId id="275" r:id="rId11"/>
     <p:sldId id="276" r:id="rId12"/>
     <p:sldId id="277" r:id="rId13"/>
-    <p:sldId id="267" r:id="rId14"/>
+    <p:sldId id="279" r:id="rId14"/>
+    <p:sldId id="278" r:id="rId15"/>
+    <p:sldId id="280" r:id="rId16"/>
+    <p:sldId id="267" r:id="rId17"/>
   </p:sldIdLst>
   <p:sldSz cx="12192000" cy="6858000"/>
   <p:notesSz cx="6858000" cy="9144000"/>
@@ -828,7 +831,7 @@
           <a:p>
             <a:fld id="{EE000EEB-8338-48D7-8EE8-EE0082EF7602}" type="slidenum">
               <a:rPr lang="en-US" smtClean="0"/>
-              <a:t>10</a:t>
+              <a:t>13</a:t>
             </a:fld>
             <a:endParaRPr lang="en-US" dirty="0"/>
           </a:p>
@@ -8013,6 +8016,905 @@
 <file path=ppt/slides/slide10.xml><?xml version="1.0" encoding="utf-8"?>
 <p:sld xmlns:a="http://schemas.openxmlformats.org/drawingml/2006/main" xmlns:r="http://schemas.openxmlformats.org/officeDocument/2006/relationships" xmlns:p="http://schemas.openxmlformats.org/presentationml/2006/main">
   <p:cSld>
+    <p:spTree>
+      <p:nvGrpSpPr>
+        <p:cNvPr id="1" name="">
+          <a:extLst>
+            <a:ext uri="{FF2B5EF4-FFF2-40B4-BE49-F238E27FC236}">
+              <a16:creationId xmlns:a16="http://schemas.microsoft.com/office/drawing/2014/main" id="{48F9F61F-31DA-6EA2-B2F5-8C417DD29C95}"/>
+            </a:ext>
+          </a:extLst>
+        </p:cNvPr>
+        <p:cNvGrpSpPr/>
+        <p:nvPr/>
+      </p:nvGrpSpPr>
+      <p:grpSpPr>
+        <a:xfrm>
+          <a:off x="0" y="0"/>
+          <a:ext cx="0" cy="0"/>
+          <a:chOff x="0" y="0"/>
+          <a:chExt cx="0" cy="0"/>
+        </a:xfrm>
+      </p:grpSpPr>
+      <p:sp>
+        <p:nvSpPr>
+          <p:cNvPr id="2" name="Title 1">
+            <a:extLst>
+              <a:ext uri="{FF2B5EF4-FFF2-40B4-BE49-F238E27FC236}">
+                <a16:creationId xmlns:a16="http://schemas.microsoft.com/office/drawing/2014/main" id="{01C9CD06-A8B8-8800-3E33-FD63119E7FFA}"/>
+              </a:ext>
+            </a:extLst>
+          </p:cNvPr>
+          <p:cNvSpPr>
+            <a:spLocks noGrp="1"/>
+          </p:cNvSpPr>
+          <p:nvPr>
+            <p:ph type="title"/>
+          </p:nvPr>
+        </p:nvSpPr>
+        <p:spPr>
+          <a:xfrm>
+            <a:off x="1754188" y="452718"/>
+            <a:ext cx="8296646" cy="1400530"/>
+          </a:xfrm>
+        </p:spPr>
+        <p:txBody>
+          <a:bodyPr/>
+          <a:lstStyle/>
+          <a:p>
+            <a:r>
+              <a:rPr lang="en-US" b="1" dirty="0"/>
+              <a:t>Essential EA Meta-Model</a:t>
+            </a:r>
+            <a:br>
+              <a:rPr lang="en-US" b="1" dirty="0"/>
+            </a:br>
+            <a:r>
+              <a:rPr lang="en-US" b="1" dirty="0"/>
+              <a:t>- Business Conceptual - 04 </a:t>
+            </a:r>
+          </a:p>
+        </p:txBody>
+      </p:sp>
+      <p:sp>
+        <p:nvSpPr>
+          <p:cNvPr id="4" name="Title 1">
+            <a:extLst>
+              <a:ext uri="{FF2B5EF4-FFF2-40B4-BE49-F238E27FC236}">
+                <a16:creationId xmlns:a16="http://schemas.microsoft.com/office/drawing/2014/main" id="{A7CBDB5A-7994-C17D-5CB0-CB1A44CD59D3}"/>
+              </a:ext>
+            </a:extLst>
+          </p:cNvPr>
+          <p:cNvSpPr txBox="1">
+            <a:spLocks/>
+          </p:cNvSpPr>
+          <p:nvPr/>
+        </p:nvSpPr>
+        <p:spPr>
+          <a:xfrm>
+            <a:off x="0" y="3143"/>
+            <a:ext cx="1754188" cy="1058013"/>
+          </a:xfrm>
+          <a:prstGeom prst="rect">
+            <a:avLst/>
+          </a:prstGeom>
+        </p:spPr>
+        <p:txBody>
+          <a:bodyPr vert="horz" lIns="91440" tIns="45720" rIns="91440" bIns="45720" rtlCol="0" anchor="ctr">
+            <a:noAutofit/>
+          </a:bodyPr>
+          <a:lstStyle>
+            <a:lvl1pPr algn="l" defTabSz="457200" rtl="0" eaLnBrk="1" latinLnBrk="0" hangingPunct="1">
+              <a:spcBef>
+                <a:spcPct val="0"/>
+              </a:spcBef>
+              <a:buNone/>
+              <a:defRPr sz="7200" b="0" i="0" kern="1200">
+                <a:solidFill>
+                  <a:schemeClr val="tx2"/>
+                </a:solidFill>
+                <a:latin typeface="+mj-lt"/>
+                <a:ea typeface="+mj-ea"/>
+                <a:cs typeface="+mj-cs"/>
+              </a:defRPr>
+            </a:lvl1pPr>
+            <a:lvl2pPr eaLnBrk="1" hangingPunct="1">
+              <a:defRPr>
+                <a:solidFill>
+                  <a:schemeClr val="tx2"/>
+                </a:solidFill>
+              </a:defRPr>
+            </a:lvl2pPr>
+            <a:lvl3pPr eaLnBrk="1" hangingPunct="1">
+              <a:defRPr>
+                <a:solidFill>
+                  <a:schemeClr val="tx2"/>
+                </a:solidFill>
+              </a:defRPr>
+            </a:lvl3pPr>
+            <a:lvl4pPr eaLnBrk="1" hangingPunct="1">
+              <a:defRPr>
+                <a:solidFill>
+                  <a:schemeClr val="tx2"/>
+                </a:solidFill>
+              </a:defRPr>
+            </a:lvl4pPr>
+            <a:lvl5pPr eaLnBrk="1" hangingPunct="1">
+              <a:defRPr>
+                <a:solidFill>
+                  <a:schemeClr val="tx2"/>
+                </a:solidFill>
+              </a:defRPr>
+            </a:lvl5pPr>
+            <a:lvl6pPr eaLnBrk="1" hangingPunct="1">
+              <a:defRPr>
+                <a:solidFill>
+                  <a:schemeClr val="tx2"/>
+                </a:solidFill>
+              </a:defRPr>
+            </a:lvl6pPr>
+            <a:lvl7pPr eaLnBrk="1" hangingPunct="1">
+              <a:defRPr>
+                <a:solidFill>
+                  <a:schemeClr val="tx2"/>
+                </a:solidFill>
+              </a:defRPr>
+            </a:lvl7pPr>
+            <a:lvl8pPr eaLnBrk="1" hangingPunct="1">
+              <a:defRPr>
+                <a:solidFill>
+                  <a:schemeClr val="tx2"/>
+                </a:solidFill>
+              </a:defRPr>
+            </a:lvl8pPr>
+            <a:lvl9pPr eaLnBrk="1" hangingPunct="1">
+              <a:defRPr>
+                <a:solidFill>
+                  <a:schemeClr val="tx2"/>
+                </a:solidFill>
+              </a:defRPr>
+            </a:lvl9pPr>
+          </a:lstStyle>
+          <a:p>
+            <a:pPr algn="ctr"/>
+            <a:r>
+              <a:rPr lang="en-US" b="1" dirty="0">
+                <a:solidFill>
+                  <a:schemeClr val="accent1">
+                    <a:lumMod val="75000"/>
+                  </a:schemeClr>
+                </a:solidFill>
+              </a:rPr>
+              <a:t>010</a:t>
+            </a:r>
+            <a:endParaRPr lang="ru-RU" b="1" dirty="0">
+              <a:solidFill>
+                <a:schemeClr val="accent1">
+                  <a:lumMod val="75000"/>
+                </a:schemeClr>
+              </a:solidFill>
+            </a:endParaRPr>
+          </a:p>
+        </p:txBody>
+      </p:sp>
+      <p:pic>
+        <p:nvPicPr>
+          <p:cNvPr id="3" name="Picture 2">
+            <a:extLst>
+              <a:ext uri="{FF2B5EF4-FFF2-40B4-BE49-F238E27FC236}">
+                <a16:creationId xmlns:a16="http://schemas.microsoft.com/office/drawing/2014/main" id="{06CB3424-D112-59FC-EFAE-07E8B75E63BA}"/>
+              </a:ext>
+            </a:extLst>
+          </p:cNvPr>
+          <p:cNvPicPr>
+            <a:picLocks noChangeAspect="1"/>
+          </p:cNvPicPr>
+          <p:nvPr/>
+        </p:nvPicPr>
+        <p:blipFill>
+          <a:blip r:embed="rId2"/>
+          <a:stretch>
+            <a:fillRect/>
+          </a:stretch>
+        </p:blipFill>
+        <p:spPr>
+          <a:xfrm>
+            <a:off x="236841" y="1853248"/>
+            <a:ext cx="8296646" cy="4669795"/>
+          </a:xfrm>
+          <a:prstGeom prst="rect">
+            <a:avLst/>
+          </a:prstGeom>
+          <a:ln>
+            <a:noFill/>
+          </a:ln>
+          <a:effectLst>
+            <a:outerShdw blurRad="292100" dist="139700" dir="2700000" algn="tl" rotWithShape="0">
+              <a:srgbClr val="333333">
+                <a:alpha val="65000"/>
+              </a:srgbClr>
+            </a:outerShdw>
+          </a:effectLst>
+        </p:spPr>
+      </p:pic>
+      <p:sp>
+        <p:nvSpPr>
+          <p:cNvPr id="6" name="Rectangle: Rounded Corners 5">
+            <a:extLst>
+              <a:ext uri="{FF2B5EF4-FFF2-40B4-BE49-F238E27FC236}">
+                <a16:creationId xmlns:a16="http://schemas.microsoft.com/office/drawing/2014/main" id="{50981AE7-1C7C-E5F2-E9C8-6147D868CBF1}"/>
+              </a:ext>
+            </a:extLst>
+          </p:cNvPr>
+          <p:cNvSpPr/>
+          <p:nvPr/>
+        </p:nvSpPr>
+        <p:spPr>
+          <a:xfrm>
+            <a:off x="596436" y="2188396"/>
+            <a:ext cx="2054832" cy="1400530"/>
+          </a:xfrm>
+          <a:prstGeom prst="roundRect">
+            <a:avLst>
+              <a:gd name="adj" fmla="val 6916"/>
+            </a:avLst>
+          </a:prstGeom>
+          <a:solidFill>
+            <a:srgbClr val="FFCC66">
+              <a:alpha val="20000"/>
+            </a:srgbClr>
+          </a:solidFill>
+          <a:ln>
+            <a:solidFill>
+              <a:srgbClr val="92D050"/>
+            </a:solidFill>
+          </a:ln>
+        </p:spPr>
+        <p:style>
+          <a:lnRef idx="2">
+            <a:schemeClr val="accent1">
+              <a:shade val="15000"/>
+            </a:schemeClr>
+          </a:lnRef>
+          <a:fillRef idx="1">
+            <a:schemeClr val="accent1"/>
+          </a:fillRef>
+          <a:effectRef idx="0">
+            <a:schemeClr val="accent1"/>
+          </a:effectRef>
+          <a:fontRef idx="minor">
+            <a:schemeClr val="lt1"/>
+          </a:fontRef>
+        </p:style>
+        <p:txBody>
+          <a:bodyPr rtlCol="0" anchor="ctr"/>
+          <a:lstStyle/>
+          <a:p>
+            <a:pPr algn="ctr"/>
+            <a:endParaRPr lang="en-US"/>
+          </a:p>
+        </p:txBody>
+      </p:sp>
+      <p:pic>
+        <p:nvPicPr>
+          <p:cNvPr id="8" name="Picture 7">
+            <a:extLst>
+              <a:ext uri="{FF2B5EF4-FFF2-40B4-BE49-F238E27FC236}">
+                <a16:creationId xmlns:a16="http://schemas.microsoft.com/office/drawing/2014/main" id="{122D5555-678C-5743-DCE7-653A7F1D7B7D}"/>
+              </a:ext>
+            </a:extLst>
+          </p:cNvPr>
+          <p:cNvPicPr>
+            <a:picLocks noChangeAspect="1"/>
+          </p:cNvPicPr>
+          <p:nvPr/>
+        </p:nvPicPr>
+        <p:blipFill>
+          <a:blip r:embed="rId3"/>
+          <a:stretch>
+            <a:fillRect/>
+          </a:stretch>
+        </p:blipFill>
+        <p:spPr>
+          <a:xfrm>
+            <a:off x="8893082" y="3197407"/>
+            <a:ext cx="2398961" cy="2123337"/>
+          </a:xfrm>
+          <a:prstGeom prst="roundRect">
+            <a:avLst>
+              <a:gd name="adj" fmla="val 8594"/>
+            </a:avLst>
+          </a:prstGeom>
+          <a:solidFill>
+            <a:srgbClr val="FFFFFF">
+              <a:shade val="85000"/>
+            </a:srgbClr>
+          </a:solidFill>
+          <a:ln>
+            <a:noFill/>
+          </a:ln>
+          <a:effectLst>
+            <a:reflection blurRad="12700" stA="38000" endPos="28000" dist="5000" dir="5400000" sy="-100000" algn="bl" rotWithShape="0"/>
+          </a:effectLst>
+        </p:spPr>
+      </p:pic>
+      <p:sp>
+        <p:nvSpPr>
+          <p:cNvPr id="9" name="Rectangle 8">
+            <a:extLst>
+              <a:ext uri="{FF2B5EF4-FFF2-40B4-BE49-F238E27FC236}">
+                <a16:creationId xmlns:a16="http://schemas.microsoft.com/office/drawing/2014/main" id="{4C305A3B-E771-332E-1234-FE8C5CC9953B}"/>
+              </a:ext>
+            </a:extLst>
+          </p:cNvPr>
+          <p:cNvSpPr/>
+          <p:nvPr/>
+        </p:nvSpPr>
+        <p:spPr>
+          <a:xfrm>
+            <a:off x="9231684" y="3429000"/>
+            <a:ext cx="819150" cy="1371600"/>
+          </a:xfrm>
+          <a:prstGeom prst="rect">
+            <a:avLst/>
+          </a:prstGeom>
+          <a:solidFill>
+            <a:srgbClr val="ACD433">
+              <a:alpha val="30196"/>
+            </a:srgbClr>
+          </a:solidFill>
+          <a:ln>
+            <a:solidFill>
+              <a:srgbClr val="00B050"/>
+            </a:solidFill>
+          </a:ln>
+        </p:spPr>
+        <p:style>
+          <a:lnRef idx="2">
+            <a:schemeClr val="accent1">
+              <a:shade val="15000"/>
+            </a:schemeClr>
+          </a:lnRef>
+          <a:fillRef idx="1">
+            <a:schemeClr val="accent1"/>
+          </a:fillRef>
+          <a:effectRef idx="0">
+            <a:schemeClr val="accent1"/>
+          </a:effectRef>
+          <a:fontRef idx="minor">
+            <a:schemeClr val="lt1"/>
+          </a:fontRef>
+        </p:style>
+        <p:txBody>
+          <a:bodyPr rtlCol="0" anchor="ctr"/>
+          <a:lstStyle/>
+          <a:p>
+            <a:pPr algn="ctr"/>
+            <a:endParaRPr lang="en-US"/>
+          </a:p>
+        </p:txBody>
+      </p:sp>
+    </p:spTree>
+    <p:extLst>
+      <p:ext uri="{BB962C8B-B14F-4D97-AF65-F5344CB8AC3E}">
+        <p14:creationId xmlns:p14="http://schemas.microsoft.com/office/powerpoint/2010/main" val="934358661"/>
+      </p:ext>
+    </p:extLst>
+  </p:cSld>
+  <p:clrMapOvr>
+    <a:masterClrMapping/>
+  </p:clrMapOvr>
+</p:sld>
+</file>
+
+<file path=ppt/slides/slide11.xml><?xml version="1.0" encoding="utf-8"?>
+<p:sld xmlns:a="http://schemas.openxmlformats.org/drawingml/2006/main" xmlns:r="http://schemas.openxmlformats.org/officeDocument/2006/relationships" xmlns:p="http://schemas.openxmlformats.org/presentationml/2006/main">
+  <p:cSld>
+    <p:spTree>
+      <p:nvGrpSpPr>
+        <p:cNvPr id="1" name=""/>
+        <p:cNvGrpSpPr/>
+        <p:nvPr/>
+      </p:nvGrpSpPr>
+      <p:grpSpPr>
+        <a:xfrm>
+          <a:off x="0" y="0"/>
+          <a:ext cx="0" cy="0"/>
+          <a:chOff x="0" y="0"/>
+          <a:chExt cx="0" cy="0"/>
+        </a:xfrm>
+      </p:grpSpPr>
+      <p:pic>
+        <p:nvPicPr>
+          <p:cNvPr id="3" name="Picture 2">
+            <a:extLst>
+              <a:ext uri="{FF2B5EF4-FFF2-40B4-BE49-F238E27FC236}">
+                <a16:creationId xmlns:a16="http://schemas.microsoft.com/office/drawing/2014/main" id="{0FB59808-A26A-6C11-5620-DDFA99D3D12E}"/>
+              </a:ext>
+            </a:extLst>
+          </p:cNvPr>
+          <p:cNvPicPr>
+            <a:picLocks noChangeAspect="1"/>
+          </p:cNvPicPr>
+          <p:nvPr/>
+        </p:nvPicPr>
+        <p:blipFill>
+          <a:blip r:embed="rId2"/>
+          <a:stretch>
+            <a:fillRect/>
+          </a:stretch>
+        </p:blipFill>
+        <p:spPr>
+          <a:xfrm>
+            <a:off x="2592309" y="0"/>
+            <a:ext cx="7007382" cy="6858000"/>
+          </a:xfrm>
+          <a:prstGeom prst="rect">
+            <a:avLst/>
+          </a:prstGeom>
+        </p:spPr>
+      </p:pic>
+      <p:sp>
+        <p:nvSpPr>
+          <p:cNvPr id="4" name="Rectangle 3">
+            <a:extLst>
+              <a:ext uri="{FF2B5EF4-FFF2-40B4-BE49-F238E27FC236}">
+                <a16:creationId xmlns:a16="http://schemas.microsoft.com/office/drawing/2014/main" id="{D87E7E31-E680-0DF6-548F-D05029F9D691}"/>
+              </a:ext>
+            </a:extLst>
+          </p:cNvPr>
+          <p:cNvSpPr/>
+          <p:nvPr/>
+        </p:nvSpPr>
+        <p:spPr>
+          <a:xfrm>
+            <a:off x="3700530" y="223234"/>
+            <a:ext cx="957329" cy="64394"/>
+          </a:xfrm>
+          <a:prstGeom prst="rect">
+            <a:avLst/>
+          </a:prstGeom>
+          <a:solidFill>
+            <a:srgbClr val="ACD433">
+              <a:alpha val="50196"/>
+            </a:srgbClr>
+          </a:solidFill>
+        </p:spPr>
+        <p:style>
+          <a:lnRef idx="2">
+            <a:schemeClr val="accent1">
+              <a:shade val="15000"/>
+            </a:schemeClr>
+          </a:lnRef>
+          <a:fillRef idx="1">
+            <a:schemeClr val="accent1"/>
+          </a:fillRef>
+          <a:effectRef idx="0">
+            <a:schemeClr val="accent1"/>
+          </a:effectRef>
+          <a:fontRef idx="minor">
+            <a:schemeClr val="lt1"/>
+          </a:fontRef>
+        </p:style>
+        <p:txBody>
+          <a:bodyPr rtlCol="0" anchor="ctr"/>
+          <a:lstStyle/>
+          <a:p>
+            <a:pPr algn="ctr"/>
+            <a:endParaRPr lang="en-US"/>
+          </a:p>
+        </p:txBody>
+      </p:sp>
+    </p:spTree>
+    <p:extLst>
+      <p:ext uri="{BB962C8B-B14F-4D97-AF65-F5344CB8AC3E}">
+        <p14:creationId xmlns:p14="http://schemas.microsoft.com/office/powerpoint/2010/main" val="1856124418"/>
+      </p:ext>
+    </p:extLst>
+  </p:cSld>
+  <p:clrMapOvr>
+    <a:masterClrMapping/>
+  </p:clrMapOvr>
+</p:sld>
+</file>
+
+<file path=ppt/slides/slide12.xml><?xml version="1.0" encoding="utf-8"?>
+<p:sld xmlns:a="http://schemas.openxmlformats.org/drawingml/2006/main" xmlns:r="http://schemas.openxmlformats.org/officeDocument/2006/relationships" xmlns:p="http://schemas.openxmlformats.org/presentationml/2006/main">
+  <p:cSld>
+    <p:spTree>
+      <p:nvGrpSpPr>
+        <p:cNvPr id="1" name="">
+          <a:extLst>
+            <a:ext uri="{FF2B5EF4-FFF2-40B4-BE49-F238E27FC236}">
+              <a16:creationId xmlns:a16="http://schemas.microsoft.com/office/drawing/2014/main" id="{0ECB59C3-A4DE-6412-5EB2-960BAAD0FC0B}"/>
+            </a:ext>
+          </a:extLst>
+        </p:cNvPr>
+        <p:cNvGrpSpPr/>
+        <p:nvPr/>
+      </p:nvGrpSpPr>
+      <p:grpSpPr>
+        <a:xfrm>
+          <a:off x="0" y="0"/>
+          <a:ext cx="0" cy="0"/>
+          <a:chOff x="0" y="0"/>
+          <a:chExt cx="0" cy="0"/>
+        </a:xfrm>
+      </p:grpSpPr>
+      <p:sp>
+        <p:nvSpPr>
+          <p:cNvPr id="2" name="Title 1">
+            <a:extLst>
+              <a:ext uri="{FF2B5EF4-FFF2-40B4-BE49-F238E27FC236}">
+                <a16:creationId xmlns:a16="http://schemas.microsoft.com/office/drawing/2014/main" id="{B36A558C-3E7A-0B2D-8E7C-143C80CA6D92}"/>
+              </a:ext>
+            </a:extLst>
+          </p:cNvPr>
+          <p:cNvSpPr>
+            <a:spLocks noGrp="1"/>
+          </p:cNvSpPr>
+          <p:nvPr>
+            <p:ph type="title"/>
+          </p:nvPr>
+        </p:nvSpPr>
+        <p:spPr>
+          <a:xfrm>
+            <a:off x="1754188" y="452718"/>
+            <a:ext cx="8296646" cy="1400530"/>
+          </a:xfrm>
+        </p:spPr>
+        <p:txBody>
+          <a:bodyPr/>
+          <a:lstStyle/>
+          <a:p>
+            <a:r>
+              <a:rPr lang="en-US" b="1" dirty="0"/>
+              <a:t>Essential EA Meta-Model</a:t>
+            </a:r>
+            <a:br>
+              <a:rPr lang="en-US" b="1" dirty="0"/>
+            </a:br>
+            <a:r>
+              <a:rPr lang="en-US" b="1" dirty="0"/>
+              <a:t>- Business Conceptual - 05 </a:t>
+            </a:r>
+          </a:p>
+        </p:txBody>
+      </p:sp>
+      <p:sp>
+        <p:nvSpPr>
+          <p:cNvPr id="4" name="Title 1">
+            <a:extLst>
+              <a:ext uri="{FF2B5EF4-FFF2-40B4-BE49-F238E27FC236}">
+                <a16:creationId xmlns:a16="http://schemas.microsoft.com/office/drawing/2014/main" id="{2E814BE4-3108-4FF6-EEB5-36E033EBAF1F}"/>
+              </a:ext>
+            </a:extLst>
+          </p:cNvPr>
+          <p:cNvSpPr txBox="1">
+            <a:spLocks/>
+          </p:cNvSpPr>
+          <p:nvPr/>
+        </p:nvSpPr>
+        <p:spPr>
+          <a:xfrm>
+            <a:off x="0" y="3143"/>
+            <a:ext cx="1754188" cy="1058013"/>
+          </a:xfrm>
+          <a:prstGeom prst="rect">
+            <a:avLst/>
+          </a:prstGeom>
+        </p:spPr>
+        <p:txBody>
+          <a:bodyPr vert="horz" lIns="91440" tIns="45720" rIns="91440" bIns="45720" rtlCol="0" anchor="ctr">
+            <a:noAutofit/>
+          </a:bodyPr>
+          <a:lstStyle>
+            <a:lvl1pPr algn="l" defTabSz="457200" rtl="0" eaLnBrk="1" latinLnBrk="0" hangingPunct="1">
+              <a:spcBef>
+                <a:spcPct val="0"/>
+              </a:spcBef>
+              <a:buNone/>
+              <a:defRPr sz="7200" b="0" i="0" kern="1200">
+                <a:solidFill>
+                  <a:schemeClr val="tx2"/>
+                </a:solidFill>
+                <a:latin typeface="+mj-lt"/>
+                <a:ea typeface="+mj-ea"/>
+                <a:cs typeface="+mj-cs"/>
+              </a:defRPr>
+            </a:lvl1pPr>
+            <a:lvl2pPr eaLnBrk="1" hangingPunct="1">
+              <a:defRPr>
+                <a:solidFill>
+                  <a:schemeClr val="tx2"/>
+                </a:solidFill>
+              </a:defRPr>
+            </a:lvl2pPr>
+            <a:lvl3pPr eaLnBrk="1" hangingPunct="1">
+              <a:defRPr>
+                <a:solidFill>
+                  <a:schemeClr val="tx2"/>
+                </a:solidFill>
+              </a:defRPr>
+            </a:lvl3pPr>
+            <a:lvl4pPr eaLnBrk="1" hangingPunct="1">
+              <a:defRPr>
+                <a:solidFill>
+                  <a:schemeClr val="tx2"/>
+                </a:solidFill>
+              </a:defRPr>
+            </a:lvl4pPr>
+            <a:lvl5pPr eaLnBrk="1" hangingPunct="1">
+              <a:defRPr>
+                <a:solidFill>
+                  <a:schemeClr val="tx2"/>
+                </a:solidFill>
+              </a:defRPr>
+            </a:lvl5pPr>
+            <a:lvl6pPr eaLnBrk="1" hangingPunct="1">
+              <a:defRPr>
+                <a:solidFill>
+                  <a:schemeClr val="tx2"/>
+                </a:solidFill>
+              </a:defRPr>
+            </a:lvl6pPr>
+            <a:lvl7pPr eaLnBrk="1" hangingPunct="1">
+              <a:defRPr>
+                <a:solidFill>
+                  <a:schemeClr val="tx2"/>
+                </a:solidFill>
+              </a:defRPr>
+            </a:lvl7pPr>
+            <a:lvl8pPr eaLnBrk="1" hangingPunct="1">
+              <a:defRPr>
+                <a:solidFill>
+                  <a:schemeClr val="tx2"/>
+                </a:solidFill>
+              </a:defRPr>
+            </a:lvl8pPr>
+            <a:lvl9pPr eaLnBrk="1" hangingPunct="1">
+              <a:defRPr>
+                <a:solidFill>
+                  <a:schemeClr val="tx2"/>
+                </a:solidFill>
+              </a:defRPr>
+            </a:lvl9pPr>
+          </a:lstStyle>
+          <a:p>
+            <a:pPr algn="ctr"/>
+            <a:r>
+              <a:rPr lang="en-US" b="1" dirty="0">
+                <a:solidFill>
+                  <a:schemeClr val="accent1">
+                    <a:lumMod val="75000"/>
+                  </a:schemeClr>
+                </a:solidFill>
+              </a:rPr>
+              <a:t>011</a:t>
+            </a:r>
+            <a:endParaRPr lang="ru-RU" b="1" dirty="0">
+              <a:solidFill>
+                <a:schemeClr val="accent1">
+                  <a:lumMod val="75000"/>
+                </a:schemeClr>
+              </a:solidFill>
+            </a:endParaRPr>
+          </a:p>
+        </p:txBody>
+      </p:sp>
+      <p:pic>
+        <p:nvPicPr>
+          <p:cNvPr id="3" name="Picture 2">
+            <a:extLst>
+              <a:ext uri="{FF2B5EF4-FFF2-40B4-BE49-F238E27FC236}">
+                <a16:creationId xmlns:a16="http://schemas.microsoft.com/office/drawing/2014/main" id="{39C58872-12BF-6192-FB02-5943ACCEFA75}"/>
+              </a:ext>
+            </a:extLst>
+          </p:cNvPr>
+          <p:cNvPicPr>
+            <a:picLocks noChangeAspect="1"/>
+          </p:cNvPicPr>
+          <p:nvPr/>
+        </p:nvPicPr>
+        <p:blipFill>
+          <a:blip r:embed="rId2"/>
+          <a:stretch>
+            <a:fillRect/>
+          </a:stretch>
+        </p:blipFill>
+        <p:spPr>
+          <a:xfrm>
+            <a:off x="236841" y="1853248"/>
+            <a:ext cx="8296646" cy="4669795"/>
+          </a:xfrm>
+          <a:prstGeom prst="rect">
+            <a:avLst/>
+          </a:prstGeom>
+          <a:ln>
+            <a:noFill/>
+          </a:ln>
+          <a:effectLst>
+            <a:outerShdw blurRad="292100" dist="139700" dir="2700000" algn="tl" rotWithShape="0">
+              <a:srgbClr val="333333">
+                <a:alpha val="65000"/>
+              </a:srgbClr>
+            </a:outerShdw>
+          </a:effectLst>
+        </p:spPr>
+      </p:pic>
+      <p:sp>
+        <p:nvSpPr>
+          <p:cNvPr id="6" name="Rectangle: Rounded Corners 5">
+            <a:extLst>
+              <a:ext uri="{FF2B5EF4-FFF2-40B4-BE49-F238E27FC236}">
+                <a16:creationId xmlns:a16="http://schemas.microsoft.com/office/drawing/2014/main" id="{ACD72E08-612F-05BB-E7EC-D37D30D9AFE9}"/>
+              </a:ext>
+            </a:extLst>
+          </p:cNvPr>
+          <p:cNvSpPr/>
+          <p:nvPr/>
+        </p:nvSpPr>
+        <p:spPr>
+          <a:xfrm>
+            <a:off x="596436" y="2188396"/>
+            <a:ext cx="2054832" cy="1400530"/>
+          </a:xfrm>
+          <a:prstGeom prst="roundRect">
+            <a:avLst>
+              <a:gd name="adj" fmla="val 6916"/>
+            </a:avLst>
+          </a:prstGeom>
+          <a:solidFill>
+            <a:srgbClr val="FFCC66">
+              <a:alpha val="20000"/>
+            </a:srgbClr>
+          </a:solidFill>
+          <a:ln>
+            <a:solidFill>
+              <a:srgbClr val="92D050"/>
+            </a:solidFill>
+          </a:ln>
+        </p:spPr>
+        <p:style>
+          <a:lnRef idx="2">
+            <a:schemeClr val="accent1">
+              <a:shade val="15000"/>
+            </a:schemeClr>
+          </a:lnRef>
+          <a:fillRef idx="1">
+            <a:schemeClr val="accent1"/>
+          </a:fillRef>
+          <a:effectRef idx="0">
+            <a:schemeClr val="accent1"/>
+          </a:effectRef>
+          <a:fontRef idx="minor">
+            <a:schemeClr val="lt1"/>
+          </a:fontRef>
+        </p:style>
+        <p:txBody>
+          <a:bodyPr rtlCol="0" anchor="ctr"/>
+          <a:lstStyle/>
+          <a:p>
+            <a:pPr algn="ctr"/>
+            <a:endParaRPr lang="en-US"/>
+          </a:p>
+        </p:txBody>
+      </p:sp>
+      <p:pic>
+        <p:nvPicPr>
+          <p:cNvPr id="8" name="Picture 7">
+            <a:extLst>
+              <a:ext uri="{FF2B5EF4-FFF2-40B4-BE49-F238E27FC236}">
+                <a16:creationId xmlns:a16="http://schemas.microsoft.com/office/drawing/2014/main" id="{DEDF7A62-66BA-8DFC-1D2F-22C235FA318A}"/>
+              </a:ext>
+            </a:extLst>
+          </p:cNvPr>
+          <p:cNvPicPr>
+            <a:picLocks noChangeAspect="1"/>
+          </p:cNvPicPr>
+          <p:nvPr/>
+        </p:nvPicPr>
+        <p:blipFill>
+          <a:blip r:embed="rId3"/>
+          <a:stretch>
+            <a:fillRect/>
+          </a:stretch>
+        </p:blipFill>
+        <p:spPr>
+          <a:xfrm>
+            <a:off x="8893082" y="3197407"/>
+            <a:ext cx="2398961" cy="2123337"/>
+          </a:xfrm>
+          <a:prstGeom prst="roundRect">
+            <a:avLst>
+              <a:gd name="adj" fmla="val 8594"/>
+            </a:avLst>
+          </a:prstGeom>
+          <a:solidFill>
+            <a:srgbClr val="FFFFFF">
+              <a:shade val="85000"/>
+            </a:srgbClr>
+          </a:solidFill>
+          <a:ln>
+            <a:noFill/>
+          </a:ln>
+          <a:effectLst>
+            <a:reflection blurRad="12700" stA="38000" endPos="28000" dist="5000" dir="5400000" sy="-100000" algn="bl" rotWithShape="0"/>
+          </a:effectLst>
+        </p:spPr>
+      </p:pic>
+      <p:sp>
+        <p:nvSpPr>
+          <p:cNvPr id="9" name="Rectangle 8">
+            <a:extLst>
+              <a:ext uri="{FF2B5EF4-FFF2-40B4-BE49-F238E27FC236}">
+                <a16:creationId xmlns:a16="http://schemas.microsoft.com/office/drawing/2014/main" id="{491A83CF-2235-2F22-2528-87717C3DC81C}"/>
+              </a:ext>
+            </a:extLst>
+          </p:cNvPr>
+          <p:cNvSpPr/>
+          <p:nvPr/>
+        </p:nvSpPr>
+        <p:spPr>
+          <a:xfrm>
+            <a:off x="9231684" y="3429000"/>
+            <a:ext cx="819150" cy="1371600"/>
+          </a:xfrm>
+          <a:prstGeom prst="rect">
+            <a:avLst/>
+          </a:prstGeom>
+          <a:solidFill>
+            <a:srgbClr val="ACD433">
+              <a:alpha val="30196"/>
+            </a:srgbClr>
+          </a:solidFill>
+          <a:ln>
+            <a:solidFill>
+              <a:srgbClr val="00B050"/>
+            </a:solidFill>
+          </a:ln>
+        </p:spPr>
+        <p:style>
+          <a:lnRef idx="2">
+            <a:schemeClr val="accent1">
+              <a:shade val="15000"/>
+            </a:schemeClr>
+          </a:lnRef>
+          <a:fillRef idx="1">
+            <a:schemeClr val="accent1"/>
+          </a:fillRef>
+          <a:effectRef idx="0">
+            <a:schemeClr val="accent1"/>
+          </a:effectRef>
+          <a:fontRef idx="minor">
+            <a:schemeClr val="lt1"/>
+          </a:fontRef>
+        </p:style>
+        <p:txBody>
+          <a:bodyPr rtlCol="0" anchor="ctr"/>
+          <a:lstStyle/>
+          <a:p>
+            <a:pPr algn="ctr"/>
+            <a:endParaRPr lang="en-US"/>
+          </a:p>
+        </p:txBody>
+      </p:sp>
+    </p:spTree>
+    <p:extLst>
+      <p:ext uri="{BB962C8B-B14F-4D97-AF65-F5344CB8AC3E}">
+        <p14:creationId xmlns:p14="http://schemas.microsoft.com/office/powerpoint/2010/main" val="4170692098"/>
+      </p:ext>
+    </p:extLst>
+  </p:cSld>
+  <p:clrMapOvr>
+    <a:masterClrMapping/>
+  </p:clrMapOvr>
+</p:sld>
+</file>
+
+<file path=ppt/slides/slide13.xml><?xml version="1.0" encoding="utf-8"?>
+<p:sld xmlns:a="http://schemas.openxmlformats.org/drawingml/2006/main" xmlns:r="http://schemas.openxmlformats.org/officeDocument/2006/relationships" xmlns:p="http://schemas.openxmlformats.org/presentationml/2006/main">
+  <p:cSld>
     <p:bg>
       <p:bgPr>
         <a:blipFill rotWithShape="1">
@@ -10481,7 +11383,7 @@
         </p:blipFill>
         <p:spPr>
           <a:xfrm>
-            <a:off x="1941816" y="1853248"/>
+            <a:off x="157000" y="1853248"/>
             <a:ext cx="8296646" cy="4669795"/>
           </a:xfrm>
           <a:prstGeom prst="rect">
@@ -10513,7 +11415,7 @@
         </p:nvSpPr>
         <p:spPr>
           <a:xfrm>
-            <a:off x="2301411" y="2188396"/>
+            <a:off x="516595" y="2188396"/>
             <a:ext cx="2054832" cy="1400530"/>
           </a:xfrm>
           <a:prstGeom prst="roundRect">
@@ -10634,6 +11536,49 @@
                 <a:alpha val="65000"/>
               </a:srgbClr>
             </a:outerShdw>
+          </a:effectLst>
+        </p:spPr>
+      </p:pic>
+      <p:pic>
+        <p:nvPicPr>
+          <p:cNvPr id="14" name="Picture 13">
+            <a:extLst>
+              <a:ext uri="{FF2B5EF4-FFF2-40B4-BE49-F238E27FC236}">
+                <a16:creationId xmlns:a16="http://schemas.microsoft.com/office/drawing/2014/main" id="{8E45F975-2715-FFCB-B237-6BB44514FCD3}"/>
+              </a:ext>
+            </a:extLst>
+          </p:cNvPr>
+          <p:cNvPicPr>
+            <a:picLocks noChangeAspect="1"/>
+          </p:cNvPicPr>
+          <p:nvPr/>
+        </p:nvPicPr>
+        <p:blipFill>
+          <a:blip r:embed="rId5"/>
+          <a:stretch>
+            <a:fillRect/>
+          </a:stretch>
+        </p:blipFill>
+        <p:spPr>
+          <a:xfrm>
+            <a:off x="8582025" y="3799818"/>
+            <a:ext cx="3524250" cy="776654"/>
+          </a:xfrm>
+          <a:prstGeom prst="roundRect">
+            <a:avLst>
+              <a:gd name="adj" fmla="val 8594"/>
+            </a:avLst>
+          </a:prstGeom>
+          <a:solidFill>
+            <a:srgbClr val="FFFFFF">
+              <a:shade val="85000"/>
+            </a:srgbClr>
+          </a:solidFill>
+          <a:ln>
+            <a:noFill/>
+          </a:ln>
+          <a:effectLst>
+            <a:reflection blurRad="12700" stA="38000" endPos="28000" dist="5000" dir="5400000" sy="-100000" algn="bl" rotWithShape="0"/>
           </a:effectLst>
         </p:spPr>
       </p:pic>
@@ -10856,7 +11801,7 @@
         </p:blipFill>
         <p:spPr>
           <a:xfrm>
-            <a:off x="1941816" y="1853248"/>
+            <a:off x="179657" y="1853248"/>
             <a:ext cx="8296646" cy="4669795"/>
           </a:xfrm>
           <a:prstGeom prst="rect">
@@ -10888,7 +11833,7 @@
         </p:nvSpPr>
         <p:spPr>
           <a:xfrm>
-            <a:off x="2301411" y="2188396"/>
+            <a:off x="539252" y="2188396"/>
             <a:ext cx="2054832" cy="1400530"/>
           </a:xfrm>
           <a:prstGeom prst="roundRect">
@@ -10969,6 +11914,49 @@
                 <a:alpha val="65000"/>
               </a:srgbClr>
             </a:outerShdw>
+          </a:effectLst>
+        </p:spPr>
+      </p:pic>
+      <p:pic>
+        <p:nvPicPr>
+          <p:cNvPr id="3" name="Picture 2">
+            <a:extLst>
+              <a:ext uri="{FF2B5EF4-FFF2-40B4-BE49-F238E27FC236}">
+                <a16:creationId xmlns:a16="http://schemas.microsoft.com/office/drawing/2014/main" id="{BD0E0EDA-EC05-A838-D14B-E51AC5DABBD2}"/>
+              </a:ext>
+            </a:extLst>
+          </p:cNvPr>
+          <p:cNvPicPr>
+            <a:picLocks noChangeAspect="1"/>
+          </p:cNvPicPr>
+          <p:nvPr/>
+        </p:nvPicPr>
+        <p:blipFill>
+          <a:blip r:embed="rId4"/>
+          <a:stretch>
+            <a:fillRect/>
+          </a:stretch>
+        </p:blipFill>
+        <p:spPr>
+          <a:xfrm>
+            <a:off x="8582025" y="3799818"/>
+            <a:ext cx="3524250" cy="776654"/>
+          </a:xfrm>
+          <a:prstGeom prst="roundRect">
+            <a:avLst>
+              <a:gd name="adj" fmla="val 8594"/>
+            </a:avLst>
+          </a:prstGeom>
+          <a:solidFill>
+            <a:srgbClr val="FFFFFF">
+              <a:shade val="85000"/>
+            </a:srgbClr>
+          </a:solidFill>
+          <a:ln>
+            <a:noFill/>
+          </a:ln>
+          <a:effectLst>
+            <a:reflection blurRad="12700" stA="38000" endPos="28000" dist="5000" dir="5400000" sy="-100000" algn="bl" rotWithShape="0"/>
           </a:effectLst>
         </p:spPr>
       </p:pic>
@@ -11026,7 +12014,7 @@
         </p:nvSpPr>
         <p:spPr>
           <a:xfrm>
-            <a:off x="1754188" y="452718"/>
+            <a:off x="2049463" y="452718"/>
             <a:ext cx="8296646" cy="1400530"/>
           </a:xfrm>
         </p:spPr>
@@ -11191,7 +12179,7 @@
         </p:blipFill>
         <p:spPr>
           <a:xfrm>
-            <a:off x="1941816" y="1853248"/>
+            <a:off x="236841" y="1853248"/>
             <a:ext cx="8296646" cy="4669795"/>
           </a:xfrm>
           <a:prstGeom prst="rect">
@@ -11223,7 +12211,7 @@
         </p:nvSpPr>
         <p:spPr>
           <a:xfrm>
-            <a:off x="2301411" y="2188396"/>
+            <a:off x="596436" y="2188396"/>
             <a:ext cx="2054832" cy="1400530"/>
           </a:xfrm>
           <a:prstGeom prst="roundRect">
@@ -11239,6 +12227,225 @@
           <a:ln>
             <a:solidFill>
               <a:srgbClr val="92D050"/>
+            </a:solidFill>
+          </a:ln>
+        </p:spPr>
+        <p:style>
+          <a:lnRef idx="2">
+            <a:schemeClr val="accent1">
+              <a:shade val="15000"/>
+            </a:schemeClr>
+          </a:lnRef>
+          <a:fillRef idx="1">
+            <a:schemeClr val="accent1"/>
+          </a:fillRef>
+          <a:effectRef idx="0">
+            <a:schemeClr val="accent1"/>
+          </a:effectRef>
+          <a:fontRef idx="minor">
+            <a:schemeClr val="lt1"/>
+          </a:fontRef>
+        </p:style>
+        <p:txBody>
+          <a:bodyPr rtlCol="0" anchor="ctr"/>
+          <a:lstStyle/>
+          <a:p>
+            <a:pPr algn="ctr"/>
+            <a:endParaRPr lang="en-US"/>
+          </a:p>
+        </p:txBody>
+      </p:sp>
+      <p:pic>
+        <p:nvPicPr>
+          <p:cNvPr id="6" name="Picture 5">
+            <a:extLst>
+              <a:ext uri="{FF2B5EF4-FFF2-40B4-BE49-F238E27FC236}">
+                <a16:creationId xmlns:a16="http://schemas.microsoft.com/office/drawing/2014/main" id="{3388FF68-E6FE-AFFA-E8A8-224461DAFAE4}"/>
+              </a:ext>
+            </a:extLst>
+          </p:cNvPr>
+          <p:cNvPicPr>
+            <a:picLocks noChangeAspect="1"/>
+          </p:cNvPicPr>
+          <p:nvPr/>
+        </p:nvPicPr>
+        <p:blipFill>
+          <a:blip r:embed="rId3"/>
+          <a:stretch>
+            <a:fillRect/>
+          </a:stretch>
+        </p:blipFill>
+        <p:spPr>
+          <a:xfrm>
+            <a:off x="8893082" y="3197407"/>
+            <a:ext cx="2398961" cy="2123337"/>
+          </a:xfrm>
+          <a:prstGeom prst="roundRect">
+            <a:avLst>
+              <a:gd name="adj" fmla="val 8594"/>
+            </a:avLst>
+          </a:prstGeom>
+          <a:solidFill>
+            <a:srgbClr val="FFFFFF">
+              <a:shade val="85000"/>
+            </a:srgbClr>
+          </a:solidFill>
+          <a:ln>
+            <a:noFill/>
+          </a:ln>
+          <a:effectLst>
+            <a:reflection blurRad="12700" stA="38000" endPos="28000" dist="5000" dir="5400000" sy="-100000" algn="bl" rotWithShape="0"/>
+          </a:effectLst>
+        </p:spPr>
+      </p:pic>
+      <p:pic>
+        <p:nvPicPr>
+          <p:cNvPr id="8" name="Picture 7">
+            <a:extLst>
+              <a:ext uri="{FF2B5EF4-FFF2-40B4-BE49-F238E27FC236}">
+                <a16:creationId xmlns:a16="http://schemas.microsoft.com/office/drawing/2014/main" id="{AE5C6D78-0D28-D6A3-881E-1F1ECDDE8EEC}"/>
+              </a:ext>
+            </a:extLst>
+          </p:cNvPr>
+          <p:cNvPicPr>
+            <a:picLocks noChangeAspect="1"/>
+          </p:cNvPicPr>
+          <p:nvPr/>
+        </p:nvPicPr>
+        <p:blipFill>
+          <a:blip r:embed="rId4"/>
+          <a:stretch>
+            <a:fillRect/>
+          </a:stretch>
+        </p:blipFill>
+        <p:spPr>
+          <a:xfrm>
+            <a:off x="157000" y="1094226"/>
+            <a:ext cx="362976" cy="362976"/>
+          </a:xfrm>
+          <a:prstGeom prst="rect">
+            <a:avLst/>
+          </a:prstGeom>
+          <a:ln>
+            <a:noFill/>
+          </a:ln>
+          <a:effectLst>
+            <a:outerShdw blurRad="292100" dist="139700" dir="2700000" algn="tl" rotWithShape="0">
+              <a:srgbClr val="333333">
+                <a:alpha val="65000"/>
+              </a:srgbClr>
+            </a:outerShdw>
+          </a:effectLst>
+        </p:spPr>
+      </p:pic>
+      <p:pic>
+        <p:nvPicPr>
+          <p:cNvPr id="9" name="Picture 8">
+            <a:extLst>
+              <a:ext uri="{FF2B5EF4-FFF2-40B4-BE49-F238E27FC236}">
+                <a16:creationId xmlns:a16="http://schemas.microsoft.com/office/drawing/2014/main" id="{C68B8198-717B-7CEF-FCEB-94DC41F51C02}"/>
+              </a:ext>
+            </a:extLst>
+          </p:cNvPr>
+          <p:cNvPicPr>
+            <a:picLocks noChangeAspect="1"/>
+          </p:cNvPicPr>
+          <p:nvPr/>
+        </p:nvPicPr>
+        <p:blipFill>
+          <a:blip r:embed="rId5"/>
+          <a:stretch>
+            <a:fillRect/>
+          </a:stretch>
+        </p:blipFill>
+        <p:spPr>
+          <a:xfrm>
+            <a:off x="611241" y="1094226"/>
+            <a:ext cx="362976" cy="362976"/>
+          </a:xfrm>
+          <a:prstGeom prst="rect">
+            <a:avLst/>
+          </a:prstGeom>
+          <a:ln>
+            <a:noFill/>
+          </a:ln>
+          <a:effectLst>
+            <a:outerShdw blurRad="292100" dist="139700" dir="2700000" algn="tl" rotWithShape="0">
+              <a:srgbClr val="333333">
+                <a:alpha val="65000"/>
+              </a:srgbClr>
+            </a:outerShdw>
+          </a:effectLst>
+        </p:spPr>
+      </p:pic>
+      <p:pic>
+        <p:nvPicPr>
+          <p:cNvPr id="10" name="Picture 9">
+            <a:extLst>
+              <a:ext uri="{FF2B5EF4-FFF2-40B4-BE49-F238E27FC236}">
+                <a16:creationId xmlns:a16="http://schemas.microsoft.com/office/drawing/2014/main" id="{EB5E8671-9294-A003-D073-84418785CF4D}"/>
+              </a:ext>
+            </a:extLst>
+          </p:cNvPr>
+          <p:cNvPicPr>
+            <a:picLocks noChangeAspect="1"/>
+          </p:cNvPicPr>
+          <p:nvPr/>
+        </p:nvPicPr>
+        <p:blipFill>
+          <a:blip r:embed="rId6"/>
+          <a:stretch>
+            <a:fillRect/>
+          </a:stretch>
+        </p:blipFill>
+        <p:spPr>
+          <a:xfrm>
+            <a:off x="1065482" y="1094226"/>
+            <a:ext cx="371111" cy="362976"/>
+          </a:xfrm>
+          <a:prstGeom prst="rect">
+            <a:avLst/>
+          </a:prstGeom>
+          <a:ln>
+            <a:noFill/>
+          </a:ln>
+          <a:effectLst>
+            <a:outerShdw blurRad="292100" dist="139700" dir="2700000" algn="tl" rotWithShape="0">
+              <a:srgbClr val="333333">
+                <a:alpha val="65000"/>
+              </a:srgbClr>
+            </a:outerShdw>
+          </a:effectLst>
+        </p:spPr>
+      </p:pic>
+      <p:sp>
+        <p:nvSpPr>
+          <p:cNvPr id="11" name="Rectangle 10">
+            <a:extLst>
+              <a:ext uri="{FF2B5EF4-FFF2-40B4-BE49-F238E27FC236}">
+                <a16:creationId xmlns:a16="http://schemas.microsoft.com/office/drawing/2014/main" id="{A8828B8B-88B8-5ACA-864D-1DD8AD2339B0}"/>
+              </a:ext>
+            </a:extLst>
+          </p:cNvPr>
+          <p:cNvSpPr/>
+          <p:nvPr/>
+        </p:nvSpPr>
+        <p:spPr>
+          <a:xfrm>
+            <a:off x="10582275" y="2952750"/>
+            <a:ext cx="819150" cy="857250"/>
+          </a:xfrm>
+          <a:prstGeom prst="rect">
+            <a:avLst/>
+          </a:prstGeom>
+          <a:solidFill>
+            <a:srgbClr val="ACD433">
+              <a:alpha val="30196"/>
+            </a:srgbClr>
+          </a:solidFill>
+          <a:ln>
+            <a:solidFill>
+              <a:srgbClr val="00B050"/>
             </a:solidFill>
           </a:ln>
         </p:spPr>

--- a/Master_EAS_Meta-Model.pptx
+++ b/Master_EAS_Meta-Model.pptx
@@ -5,10 +5,10 @@
     <p:sldMasterId id="2147483648" r:id="rId4"/>
   </p:sldMasterIdLst>
   <p:notesMasterIdLst>
-    <p:notesMasterId r:id="rId18"/>
+    <p:notesMasterId r:id="rId19"/>
   </p:notesMasterIdLst>
   <p:handoutMasterIdLst>
-    <p:handoutMasterId r:id="rId19"/>
+    <p:handoutMasterId r:id="rId20"/>
   </p:handoutMasterIdLst>
   <p:sldIdLst>
     <p:sldId id="256" r:id="rId5"/>
@@ -21,9 +21,10 @@
     <p:sldId id="276" r:id="rId12"/>
     <p:sldId id="277" r:id="rId13"/>
     <p:sldId id="279" r:id="rId14"/>
-    <p:sldId id="278" r:id="rId15"/>
-    <p:sldId id="280" r:id="rId16"/>
-    <p:sldId id="267" r:id="rId17"/>
+    <p:sldId id="281" r:id="rId15"/>
+    <p:sldId id="278" r:id="rId16"/>
+    <p:sldId id="280" r:id="rId17"/>
+    <p:sldId id="267" r:id="rId18"/>
   </p:sldIdLst>
   <p:sldSz cx="12192000" cy="6858000"/>
   <p:notesSz cx="6858000" cy="9144000"/>
@@ -831,7 +832,7 @@
           <a:p>
             <a:fld id="{EE000EEB-8338-48D7-8EE8-EE0082EF7602}" type="slidenum">
               <a:rPr lang="en-US" smtClean="0"/>
-              <a:t>13</a:t>
+              <a:t>14</a:t>
             </a:fld>
             <a:endParaRPr lang="en-US" dirty="0"/>
           </a:p>
@@ -8394,6 +8395,126 @@
           </a:p>
         </p:txBody>
       </p:sp>
+      <p:pic>
+        <p:nvPicPr>
+          <p:cNvPr id="10" name="Picture 9">
+            <a:extLst>
+              <a:ext uri="{FF2B5EF4-FFF2-40B4-BE49-F238E27FC236}">
+                <a16:creationId xmlns:a16="http://schemas.microsoft.com/office/drawing/2014/main" id="{37F9A7B1-0A44-AC5D-5EB9-C2D0584E18D0}"/>
+              </a:ext>
+            </a:extLst>
+          </p:cNvPr>
+          <p:cNvPicPr>
+            <a:picLocks noChangeAspect="1"/>
+          </p:cNvPicPr>
+          <p:nvPr/>
+        </p:nvPicPr>
+        <p:blipFill>
+          <a:blip r:embed="rId4"/>
+          <a:stretch>
+            <a:fillRect/>
+          </a:stretch>
+        </p:blipFill>
+        <p:spPr>
+          <a:xfrm>
+            <a:off x="157000" y="1094226"/>
+            <a:ext cx="362976" cy="362976"/>
+          </a:xfrm>
+          <a:prstGeom prst="rect">
+            <a:avLst/>
+          </a:prstGeom>
+          <a:ln>
+            <a:noFill/>
+          </a:ln>
+          <a:effectLst>
+            <a:outerShdw blurRad="292100" dist="139700" dir="2700000" algn="tl" rotWithShape="0">
+              <a:srgbClr val="333333">
+                <a:alpha val="65000"/>
+              </a:srgbClr>
+            </a:outerShdw>
+          </a:effectLst>
+        </p:spPr>
+      </p:pic>
+      <p:pic>
+        <p:nvPicPr>
+          <p:cNvPr id="11" name="Picture 10">
+            <a:extLst>
+              <a:ext uri="{FF2B5EF4-FFF2-40B4-BE49-F238E27FC236}">
+                <a16:creationId xmlns:a16="http://schemas.microsoft.com/office/drawing/2014/main" id="{75C1A182-85B2-BDED-6384-C08CC1A22C82}"/>
+              </a:ext>
+            </a:extLst>
+          </p:cNvPr>
+          <p:cNvPicPr>
+            <a:picLocks noChangeAspect="1"/>
+          </p:cNvPicPr>
+          <p:nvPr/>
+        </p:nvPicPr>
+        <p:blipFill>
+          <a:blip r:embed="rId5"/>
+          <a:stretch>
+            <a:fillRect/>
+          </a:stretch>
+        </p:blipFill>
+        <p:spPr>
+          <a:xfrm>
+            <a:off x="611241" y="1094226"/>
+            <a:ext cx="362976" cy="362976"/>
+          </a:xfrm>
+          <a:prstGeom prst="rect">
+            <a:avLst/>
+          </a:prstGeom>
+          <a:ln>
+            <a:noFill/>
+          </a:ln>
+          <a:effectLst>
+            <a:outerShdw blurRad="292100" dist="139700" dir="2700000" algn="tl" rotWithShape="0">
+              <a:srgbClr val="333333">
+                <a:alpha val="65000"/>
+              </a:srgbClr>
+            </a:outerShdw>
+          </a:effectLst>
+        </p:spPr>
+      </p:pic>
+      <p:pic>
+        <p:nvPicPr>
+          <p:cNvPr id="12" name="Picture 11">
+            <a:extLst>
+              <a:ext uri="{FF2B5EF4-FFF2-40B4-BE49-F238E27FC236}">
+                <a16:creationId xmlns:a16="http://schemas.microsoft.com/office/drawing/2014/main" id="{346BA763-D900-AECC-8457-550C87953041}"/>
+              </a:ext>
+            </a:extLst>
+          </p:cNvPr>
+          <p:cNvPicPr>
+            <a:picLocks noChangeAspect="1"/>
+          </p:cNvPicPr>
+          <p:nvPr/>
+        </p:nvPicPr>
+        <p:blipFill>
+          <a:blip r:embed="rId6"/>
+          <a:stretch>
+            <a:fillRect/>
+          </a:stretch>
+        </p:blipFill>
+        <p:spPr>
+          <a:xfrm>
+            <a:off x="1065482" y="1094226"/>
+            <a:ext cx="371111" cy="362976"/>
+          </a:xfrm>
+          <a:prstGeom prst="rect">
+            <a:avLst/>
+          </a:prstGeom>
+          <a:ln>
+            <a:noFill/>
+          </a:ln>
+          <a:effectLst>
+            <a:outerShdw blurRad="292100" dist="139700" dir="2700000" algn="tl" rotWithShape="0">
+              <a:srgbClr val="333333">
+                <a:alpha val="65000"/>
+              </a:srgbClr>
+            </a:outerShdw>
+          </a:effectLst>
+        </p:spPr>
+      </p:pic>
     </p:spTree>
     <p:extLst>
       <p:ext uri="{BB962C8B-B14F-4D97-AF65-F5344CB8AC3E}">
@@ -8408,6 +8529,391 @@
 </file>
 
 <file path=ppt/slides/slide11.xml><?xml version="1.0" encoding="utf-8"?>
+<p:sld xmlns:a="http://schemas.openxmlformats.org/drawingml/2006/main" xmlns:r="http://schemas.openxmlformats.org/officeDocument/2006/relationships" xmlns:p="http://schemas.openxmlformats.org/presentationml/2006/main">
+  <p:cSld>
+    <p:spTree>
+      <p:nvGrpSpPr>
+        <p:cNvPr id="1" name="">
+          <a:extLst>
+            <a:ext uri="{FF2B5EF4-FFF2-40B4-BE49-F238E27FC236}">
+              <a16:creationId xmlns:a16="http://schemas.microsoft.com/office/drawing/2014/main" id="{276125F0-8EC1-6A13-F64A-5AEB3C2DF7E0}"/>
+            </a:ext>
+          </a:extLst>
+        </p:cNvPr>
+        <p:cNvGrpSpPr/>
+        <p:nvPr/>
+      </p:nvGrpSpPr>
+      <p:grpSpPr>
+        <a:xfrm>
+          <a:off x="0" y="0"/>
+          <a:ext cx="0" cy="0"/>
+          <a:chOff x="0" y="0"/>
+          <a:chExt cx="0" cy="0"/>
+        </a:xfrm>
+      </p:grpSpPr>
+      <p:sp>
+        <p:nvSpPr>
+          <p:cNvPr id="2" name="Title 1">
+            <a:extLst>
+              <a:ext uri="{FF2B5EF4-FFF2-40B4-BE49-F238E27FC236}">
+                <a16:creationId xmlns:a16="http://schemas.microsoft.com/office/drawing/2014/main" id="{79F02A93-5504-6049-D215-E386C384D742}"/>
+              </a:ext>
+            </a:extLst>
+          </p:cNvPr>
+          <p:cNvSpPr>
+            <a:spLocks noGrp="1"/>
+          </p:cNvSpPr>
+          <p:nvPr>
+            <p:ph type="title"/>
+          </p:nvPr>
+        </p:nvSpPr>
+        <p:spPr>
+          <a:xfrm>
+            <a:off x="1754188" y="452718"/>
+            <a:ext cx="8296646" cy="1400530"/>
+          </a:xfrm>
+        </p:spPr>
+        <p:txBody>
+          <a:bodyPr/>
+          <a:lstStyle/>
+          <a:p>
+            <a:r>
+              <a:rPr lang="en-US" b="1" dirty="0"/>
+              <a:t>Essential EA Meta-Model</a:t>
+            </a:r>
+            <a:br>
+              <a:rPr lang="en-US" b="1" dirty="0"/>
+            </a:br>
+            <a:r>
+              <a:rPr lang="en-US" b="1" dirty="0"/>
+              <a:t>- Business Conceptual - 05 </a:t>
+            </a:r>
+          </a:p>
+        </p:txBody>
+      </p:sp>
+      <p:sp>
+        <p:nvSpPr>
+          <p:cNvPr id="4" name="Title 1">
+            <a:extLst>
+              <a:ext uri="{FF2B5EF4-FFF2-40B4-BE49-F238E27FC236}">
+                <a16:creationId xmlns:a16="http://schemas.microsoft.com/office/drawing/2014/main" id="{C0403F24-74EA-DF46-BA09-988604F2595D}"/>
+              </a:ext>
+            </a:extLst>
+          </p:cNvPr>
+          <p:cNvSpPr txBox="1">
+            <a:spLocks/>
+          </p:cNvSpPr>
+          <p:nvPr/>
+        </p:nvSpPr>
+        <p:spPr>
+          <a:xfrm>
+            <a:off x="0" y="3143"/>
+            <a:ext cx="1754188" cy="1058013"/>
+          </a:xfrm>
+          <a:prstGeom prst="rect">
+            <a:avLst/>
+          </a:prstGeom>
+        </p:spPr>
+        <p:txBody>
+          <a:bodyPr vert="horz" lIns="91440" tIns="45720" rIns="91440" bIns="45720" rtlCol="0" anchor="ctr">
+            <a:noAutofit/>
+          </a:bodyPr>
+          <a:lstStyle>
+            <a:lvl1pPr algn="l" defTabSz="457200" rtl="0" eaLnBrk="1" latinLnBrk="0" hangingPunct="1">
+              <a:spcBef>
+                <a:spcPct val="0"/>
+              </a:spcBef>
+              <a:buNone/>
+              <a:defRPr sz="7200" b="0" i="0" kern="1200">
+                <a:solidFill>
+                  <a:schemeClr val="tx2"/>
+                </a:solidFill>
+                <a:latin typeface="+mj-lt"/>
+                <a:ea typeface="+mj-ea"/>
+                <a:cs typeface="+mj-cs"/>
+              </a:defRPr>
+            </a:lvl1pPr>
+            <a:lvl2pPr eaLnBrk="1" hangingPunct="1">
+              <a:defRPr>
+                <a:solidFill>
+                  <a:schemeClr val="tx2"/>
+                </a:solidFill>
+              </a:defRPr>
+            </a:lvl2pPr>
+            <a:lvl3pPr eaLnBrk="1" hangingPunct="1">
+              <a:defRPr>
+                <a:solidFill>
+                  <a:schemeClr val="tx2"/>
+                </a:solidFill>
+              </a:defRPr>
+            </a:lvl3pPr>
+            <a:lvl4pPr eaLnBrk="1" hangingPunct="1">
+              <a:defRPr>
+                <a:solidFill>
+                  <a:schemeClr val="tx2"/>
+                </a:solidFill>
+              </a:defRPr>
+            </a:lvl4pPr>
+            <a:lvl5pPr eaLnBrk="1" hangingPunct="1">
+              <a:defRPr>
+                <a:solidFill>
+                  <a:schemeClr val="tx2"/>
+                </a:solidFill>
+              </a:defRPr>
+            </a:lvl5pPr>
+            <a:lvl6pPr eaLnBrk="1" hangingPunct="1">
+              <a:defRPr>
+                <a:solidFill>
+                  <a:schemeClr val="tx2"/>
+                </a:solidFill>
+              </a:defRPr>
+            </a:lvl6pPr>
+            <a:lvl7pPr eaLnBrk="1" hangingPunct="1">
+              <a:defRPr>
+                <a:solidFill>
+                  <a:schemeClr val="tx2"/>
+                </a:solidFill>
+              </a:defRPr>
+            </a:lvl7pPr>
+            <a:lvl8pPr eaLnBrk="1" hangingPunct="1">
+              <a:defRPr>
+                <a:solidFill>
+                  <a:schemeClr val="tx2"/>
+                </a:solidFill>
+              </a:defRPr>
+            </a:lvl8pPr>
+            <a:lvl9pPr eaLnBrk="1" hangingPunct="1">
+              <a:defRPr>
+                <a:solidFill>
+                  <a:schemeClr val="tx2"/>
+                </a:solidFill>
+              </a:defRPr>
+            </a:lvl9pPr>
+          </a:lstStyle>
+          <a:p>
+            <a:pPr algn="ctr"/>
+            <a:r>
+              <a:rPr lang="en-US" b="1" dirty="0">
+                <a:solidFill>
+                  <a:schemeClr val="accent1">
+                    <a:lumMod val="75000"/>
+                  </a:schemeClr>
+                </a:solidFill>
+              </a:rPr>
+              <a:t>011</a:t>
+            </a:r>
+            <a:endParaRPr lang="ru-RU" b="1" dirty="0">
+              <a:solidFill>
+                <a:schemeClr val="accent1">
+                  <a:lumMod val="75000"/>
+                </a:schemeClr>
+              </a:solidFill>
+            </a:endParaRPr>
+          </a:p>
+        </p:txBody>
+      </p:sp>
+      <p:pic>
+        <p:nvPicPr>
+          <p:cNvPr id="3" name="Picture 2">
+            <a:extLst>
+              <a:ext uri="{FF2B5EF4-FFF2-40B4-BE49-F238E27FC236}">
+                <a16:creationId xmlns:a16="http://schemas.microsoft.com/office/drawing/2014/main" id="{EE02C35D-DF93-A92B-2D08-0D1AB6EFC5FD}"/>
+              </a:ext>
+            </a:extLst>
+          </p:cNvPr>
+          <p:cNvPicPr>
+            <a:picLocks noChangeAspect="1"/>
+          </p:cNvPicPr>
+          <p:nvPr/>
+        </p:nvPicPr>
+        <p:blipFill>
+          <a:blip r:embed="rId2"/>
+          <a:stretch>
+            <a:fillRect/>
+          </a:stretch>
+        </p:blipFill>
+        <p:spPr>
+          <a:xfrm>
+            <a:off x="236841" y="1853248"/>
+            <a:ext cx="8296646" cy="4669795"/>
+          </a:xfrm>
+          <a:prstGeom prst="rect">
+            <a:avLst/>
+          </a:prstGeom>
+          <a:ln>
+            <a:noFill/>
+          </a:ln>
+          <a:effectLst>
+            <a:outerShdw blurRad="292100" dist="139700" dir="2700000" algn="tl" rotWithShape="0">
+              <a:srgbClr val="333333">
+                <a:alpha val="65000"/>
+              </a:srgbClr>
+            </a:outerShdw>
+          </a:effectLst>
+        </p:spPr>
+      </p:pic>
+      <p:sp>
+        <p:nvSpPr>
+          <p:cNvPr id="6" name="Rectangle: Rounded Corners 5">
+            <a:extLst>
+              <a:ext uri="{FF2B5EF4-FFF2-40B4-BE49-F238E27FC236}">
+                <a16:creationId xmlns:a16="http://schemas.microsoft.com/office/drawing/2014/main" id="{2FE23A13-EAE9-5415-6626-3F97BC70A03B}"/>
+              </a:ext>
+            </a:extLst>
+          </p:cNvPr>
+          <p:cNvSpPr/>
+          <p:nvPr/>
+        </p:nvSpPr>
+        <p:spPr>
+          <a:xfrm>
+            <a:off x="596435" y="2188396"/>
+            <a:ext cx="3924193" cy="1400530"/>
+          </a:xfrm>
+          <a:prstGeom prst="roundRect">
+            <a:avLst>
+              <a:gd name="adj" fmla="val 6916"/>
+            </a:avLst>
+          </a:prstGeom>
+          <a:solidFill>
+            <a:srgbClr val="FFCC66">
+              <a:alpha val="20000"/>
+            </a:srgbClr>
+          </a:solidFill>
+          <a:ln>
+            <a:solidFill>
+              <a:srgbClr val="92D050"/>
+            </a:solidFill>
+          </a:ln>
+        </p:spPr>
+        <p:style>
+          <a:lnRef idx="2">
+            <a:schemeClr val="accent1">
+              <a:shade val="15000"/>
+            </a:schemeClr>
+          </a:lnRef>
+          <a:fillRef idx="1">
+            <a:schemeClr val="accent1"/>
+          </a:fillRef>
+          <a:effectRef idx="0">
+            <a:schemeClr val="accent1"/>
+          </a:effectRef>
+          <a:fontRef idx="minor">
+            <a:schemeClr val="lt1"/>
+          </a:fontRef>
+        </p:style>
+        <p:txBody>
+          <a:bodyPr rtlCol="0" anchor="ctr"/>
+          <a:lstStyle/>
+          <a:p>
+            <a:pPr algn="ctr"/>
+            <a:endParaRPr lang="en-US"/>
+          </a:p>
+        </p:txBody>
+      </p:sp>
+      <p:pic>
+        <p:nvPicPr>
+          <p:cNvPr id="7" name="Picture 6">
+            <a:extLst>
+              <a:ext uri="{FF2B5EF4-FFF2-40B4-BE49-F238E27FC236}">
+                <a16:creationId xmlns:a16="http://schemas.microsoft.com/office/drawing/2014/main" id="{C839B2F5-D4BA-164E-C8DD-1FDA7FA0DB27}"/>
+              </a:ext>
+            </a:extLst>
+          </p:cNvPr>
+          <p:cNvPicPr>
+            <a:picLocks noChangeAspect="1"/>
+          </p:cNvPicPr>
+          <p:nvPr/>
+        </p:nvPicPr>
+        <p:blipFill>
+          <a:blip r:embed="rId3"/>
+          <a:stretch>
+            <a:fillRect/>
+          </a:stretch>
+        </p:blipFill>
+        <p:spPr>
+          <a:xfrm>
+            <a:off x="9231569" y="2393655"/>
+            <a:ext cx="1638529" cy="3200847"/>
+          </a:xfrm>
+          <a:prstGeom prst="rect">
+            <a:avLst/>
+          </a:prstGeom>
+          <a:solidFill>
+            <a:schemeClr val="accent2">
+              <a:lumMod val="40000"/>
+              <a:lumOff val="60000"/>
+            </a:schemeClr>
+          </a:solidFill>
+        </p:spPr>
+      </p:pic>
+      <p:sp>
+        <p:nvSpPr>
+          <p:cNvPr id="10" name="Rectangle: Rounded Corners 9">
+            <a:extLst>
+              <a:ext uri="{FF2B5EF4-FFF2-40B4-BE49-F238E27FC236}">
+                <a16:creationId xmlns:a16="http://schemas.microsoft.com/office/drawing/2014/main" id="{2B9E9156-231F-2A61-C1A5-D9693BD9E930}"/>
+              </a:ext>
+            </a:extLst>
+          </p:cNvPr>
+          <p:cNvSpPr/>
+          <p:nvPr/>
+        </p:nvSpPr>
+        <p:spPr>
+          <a:xfrm>
+            <a:off x="9965933" y="4438436"/>
+            <a:ext cx="164386" cy="595901"/>
+          </a:xfrm>
+          <a:prstGeom prst="roundRect">
+            <a:avLst/>
+          </a:prstGeom>
+          <a:solidFill>
+            <a:srgbClr val="E6C133">
+              <a:alpha val="30196"/>
+            </a:srgbClr>
+          </a:solidFill>
+          <a:ln>
+            <a:noFill/>
+          </a:ln>
+        </p:spPr>
+        <p:style>
+          <a:lnRef idx="2">
+            <a:schemeClr val="accent2">
+              <a:shade val="15000"/>
+            </a:schemeClr>
+          </a:lnRef>
+          <a:fillRef idx="1">
+            <a:schemeClr val="accent2"/>
+          </a:fillRef>
+          <a:effectRef idx="0">
+            <a:schemeClr val="accent2"/>
+          </a:effectRef>
+          <a:fontRef idx="minor">
+            <a:schemeClr val="lt1"/>
+          </a:fontRef>
+        </p:style>
+        <p:txBody>
+          <a:bodyPr rtlCol="0" anchor="ctr"/>
+          <a:lstStyle/>
+          <a:p>
+            <a:pPr algn="ctr"/>
+            <a:endParaRPr lang="en-US"/>
+          </a:p>
+        </p:txBody>
+      </p:sp>
+    </p:spTree>
+    <p:extLst>
+      <p:ext uri="{BB962C8B-B14F-4D97-AF65-F5344CB8AC3E}">
+        <p14:creationId xmlns:p14="http://schemas.microsoft.com/office/powerpoint/2010/main" val="1073255477"/>
+      </p:ext>
+    </p:extLst>
+  </p:cSld>
+  <p:clrMapOvr>
+    <a:masterClrMapping/>
+  </p:clrMapOvr>
+</p:sld>
+</file>
+
+<file path=ppt/slides/slide12.xml><?xml version="1.0" encoding="utf-8"?>
 <p:sld xmlns:a="http://schemas.openxmlformats.org/drawingml/2006/main" xmlns:r="http://schemas.openxmlformats.org/officeDocument/2006/relationships" xmlns:p="http://schemas.openxmlformats.org/presentationml/2006/main">
   <p:cSld>
     <p:spTree>
@@ -8505,6 +9011,108 @@
           </a:p>
         </p:txBody>
       </p:sp>
+      <p:sp>
+        <p:nvSpPr>
+          <p:cNvPr id="5" name="Rectangle 4">
+            <a:extLst>
+              <a:ext uri="{FF2B5EF4-FFF2-40B4-BE49-F238E27FC236}">
+                <a16:creationId xmlns:a16="http://schemas.microsoft.com/office/drawing/2014/main" id="{5F26F058-AFC9-DC43-BDA3-904A13D99E17}"/>
+              </a:ext>
+            </a:extLst>
+          </p:cNvPr>
+          <p:cNvSpPr/>
+          <p:nvPr/>
+        </p:nvSpPr>
+        <p:spPr>
+          <a:xfrm>
+            <a:off x="3619568" y="0"/>
+            <a:ext cx="233295" cy="181579"/>
+          </a:xfrm>
+          <a:prstGeom prst="rect">
+            <a:avLst/>
+          </a:prstGeom>
+          <a:solidFill>
+            <a:srgbClr val="ACD433">
+              <a:alpha val="50196"/>
+            </a:srgbClr>
+          </a:solidFill>
+        </p:spPr>
+        <p:style>
+          <a:lnRef idx="2">
+            <a:schemeClr val="accent1">
+              <a:shade val="15000"/>
+            </a:schemeClr>
+          </a:lnRef>
+          <a:fillRef idx="1">
+            <a:schemeClr val="accent1"/>
+          </a:fillRef>
+          <a:effectRef idx="0">
+            <a:schemeClr val="accent1"/>
+          </a:effectRef>
+          <a:fontRef idx="minor">
+            <a:schemeClr val="lt1"/>
+          </a:fontRef>
+        </p:style>
+        <p:txBody>
+          <a:bodyPr rtlCol="0" anchor="ctr"/>
+          <a:lstStyle/>
+          <a:p>
+            <a:pPr algn="ctr"/>
+            <a:endParaRPr lang="en-US"/>
+          </a:p>
+        </p:txBody>
+      </p:sp>
+      <p:sp>
+        <p:nvSpPr>
+          <p:cNvPr id="6" name="Rectangle 5">
+            <a:extLst>
+              <a:ext uri="{FF2B5EF4-FFF2-40B4-BE49-F238E27FC236}">
+                <a16:creationId xmlns:a16="http://schemas.microsoft.com/office/drawing/2014/main" id="{D41E7655-6941-F23C-1924-E03767E9FF1F}"/>
+              </a:ext>
+            </a:extLst>
+          </p:cNvPr>
+          <p:cNvSpPr/>
+          <p:nvPr/>
+        </p:nvSpPr>
+        <p:spPr>
+          <a:xfrm>
+            <a:off x="2913124" y="164641"/>
+            <a:ext cx="233295" cy="568784"/>
+          </a:xfrm>
+          <a:prstGeom prst="rect">
+            <a:avLst/>
+          </a:prstGeom>
+          <a:solidFill>
+            <a:srgbClr val="ACD433">
+              <a:alpha val="50196"/>
+            </a:srgbClr>
+          </a:solidFill>
+        </p:spPr>
+        <p:style>
+          <a:lnRef idx="2">
+            <a:schemeClr val="accent1">
+              <a:shade val="15000"/>
+            </a:schemeClr>
+          </a:lnRef>
+          <a:fillRef idx="1">
+            <a:schemeClr val="accent1"/>
+          </a:fillRef>
+          <a:effectRef idx="0">
+            <a:schemeClr val="accent1"/>
+          </a:effectRef>
+          <a:fontRef idx="minor">
+            <a:schemeClr val="lt1"/>
+          </a:fontRef>
+        </p:style>
+        <p:txBody>
+          <a:bodyPr rtlCol="0" anchor="ctr"/>
+          <a:lstStyle/>
+          <a:p>
+            <a:pPr algn="ctr"/>
+            <a:endParaRPr lang="en-US"/>
+          </a:p>
+        </p:txBody>
+      </p:sp>
     </p:spTree>
     <p:extLst>
       <p:ext uri="{BB962C8B-B14F-4D97-AF65-F5344CB8AC3E}">
@@ -8518,7 +9126,7 @@
 </p:sld>
 </file>
 
-<file path=ppt/slides/slide12.xml><?xml version="1.0" encoding="utf-8"?>
+<file path=ppt/slides/slide13.xml><?xml version="1.0" encoding="utf-8"?>
 <p:sld xmlns:a="http://schemas.openxmlformats.org/drawingml/2006/main" xmlns:r="http://schemas.openxmlformats.org/officeDocument/2006/relationships" xmlns:p="http://schemas.openxmlformats.org/presentationml/2006/main">
   <p:cSld>
     <p:spTree>
@@ -8690,7 +9298,7 @@
                   </a:schemeClr>
                 </a:solidFill>
               </a:rPr>
-              <a:t>011</a:t>
+              <a:t>012</a:t>
             </a:r>
             <a:endParaRPr lang="ru-RU" b="1" dirty="0">
               <a:solidFill>
@@ -8800,105 +9408,6 @@
           </a:p>
         </p:txBody>
       </p:sp>
-      <p:pic>
-        <p:nvPicPr>
-          <p:cNvPr id="8" name="Picture 7">
-            <a:extLst>
-              <a:ext uri="{FF2B5EF4-FFF2-40B4-BE49-F238E27FC236}">
-                <a16:creationId xmlns:a16="http://schemas.microsoft.com/office/drawing/2014/main" id="{DEDF7A62-66BA-8DFC-1D2F-22C235FA318A}"/>
-              </a:ext>
-            </a:extLst>
-          </p:cNvPr>
-          <p:cNvPicPr>
-            <a:picLocks noChangeAspect="1"/>
-          </p:cNvPicPr>
-          <p:nvPr/>
-        </p:nvPicPr>
-        <p:blipFill>
-          <a:blip r:embed="rId3"/>
-          <a:stretch>
-            <a:fillRect/>
-          </a:stretch>
-        </p:blipFill>
-        <p:spPr>
-          <a:xfrm>
-            <a:off x="8893082" y="3197407"/>
-            <a:ext cx="2398961" cy="2123337"/>
-          </a:xfrm>
-          <a:prstGeom prst="roundRect">
-            <a:avLst>
-              <a:gd name="adj" fmla="val 8594"/>
-            </a:avLst>
-          </a:prstGeom>
-          <a:solidFill>
-            <a:srgbClr val="FFFFFF">
-              <a:shade val="85000"/>
-            </a:srgbClr>
-          </a:solidFill>
-          <a:ln>
-            <a:noFill/>
-          </a:ln>
-          <a:effectLst>
-            <a:reflection blurRad="12700" stA="38000" endPos="28000" dist="5000" dir="5400000" sy="-100000" algn="bl" rotWithShape="0"/>
-          </a:effectLst>
-        </p:spPr>
-      </p:pic>
-      <p:sp>
-        <p:nvSpPr>
-          <p:cNvPr id="9" name="Rectangle 8">
-            <a:extLst>
-              <a:ext uri="{FF2B5EF4-FFF2-40B4-BE49-F238E27FC236}">
-                <a16:creationId xmlns:a16="http://schemas.microsoft.com/office/drawing/2014/main" id="{491A83CF-2235-2F22-2528-87717C3DC81C}"/>
-              </a:ext>
-            </a:extLst>
-          </p:cNvPr>
-          <p:cNvSpPr/>
-          <p:nvPr/>
-        </p:nvSpPr>
-        <p:spPr>
-          <a:xfrm>
-            <a:off x="9231684" y="3429000"/>
-            <a:ext cx="819150" cy="1371600"/>
-          </a:xfrm>
-          <a:prstGeom prst="rect">
-            <a:avLst/>
-          </a:prstGeom>
-          <a:solidFill>
-            <a:srgbClr val="ACD433">
-              <a:alpha val="30196"/>
-            </a:srgbClr>
-          </a:solidFill>
-          <a:ln>
-            <a:solidFill>
-              <a:srgbClr val="00B050"/>
-            </a:solidFill>
-          </a:ln>
-        </p:spPr>
-        <p:style>
-          <a:lnRef idx="2">
-            <a:schemeClr val="accent1">
-              <a:shade val="15000"/>
-            </a:schemeClr>
-          </a:lnRef>
-          <a:fillRef idx="1">
-            <a:schemeClr val="accent1"/>
-          </a:fillRef>
-          <a:effectRef idx="0">
-            <a:schemeClr val="accent1"/>
-          </a:effectRef>
-          <a:fontRef idx="minor">
-            <a:schemeClr val="lt1"/>
-          </a:fontRef>
-        </p:style>
-        <p:txBody>
-          <a:bodyPr rtlCol="0" anchor="ctr"/>
-          <a:lstStyle/>
-          <a:p>
-            <a:pPr algn="ctr"/>
-            <a:endParaRPr lang="en-US"/>
-          </a:p>
-        </p:txBody>
-      </p:sp>
     </p:spTree>
     <p:extLst>
       <p:ext uri="{BB962C8B-B14F-4D97-AF65-F5344CB8AC3E}">
@@ -8912,7 +9421,7 @@
 </p:sld>
 </file>
 
-<file path=ppt/slides/slide13.xml><?xml version="1.0" encoding="utf-8"?>
+<file path=ppt/slides/slide14.xml><?xml version="1.0" encoding="utf-8"?>
 <p:sld xmlns:a="http://schemas.openxmlformats.org/drawingml/2006/main" xmlns:r="http://schemas.openxmlformats.org/officeDocument/2006/relationships" xmlns:p="http://schemas.openxmlformats.org/presentationml/2006/main">
   <p:cSld>
     <p:bg>

--- a/Master_EAS_Meta-Model.pptx
+++ b/Master_EAS_Meta-Model.pptx
@@ -5,10 +5,10 @@
     <p:sldMasterId id="2147483648" r:id="rId4"/>
   </p:sldMasterIdLst>
   <p:notesMasterIdLst>
-    <p:notesMasterId r:id="rId19"/>
+    <p:notesMasterId r:id="rId24"/>
   </p:notesMasterIdLst>
   <p:handoutMasterIdLst>
-    <p:handoutMasterId r:id="rId20"/>
+    <p:handoutMasterId r:id="rId25"/>
   </p:handoutMasterIdLst>
   <p:sldIdLst>
     <p:sldId id="256" r:id="rId5"/>
@@ -24,7 +24,12 @@
     <p:sldId id="281" r:id="rId15"/>
     <p:sldId id="278" r:id="rId16"/>
     <p:sldId id="280" r:id="rId17"/>
-    <p:sldId id="267" r:id="rId18"/>
+    <p:sldId id="283" r:id="rId18"/>
+    <p:sldId id="282" r:id="rId19"/>
+    <p:sldId id="284" r:id="rId20"/>
+    <p:sldId id="285" r:id="rId21"/>
+    <p:sldId id="286" r:id="rId22"/>
+    <p:sldId id="267" r:id="rId23"/>
   </p:sldIdLst>
   <p:sldSz cx="12192000" cy="6858000"/>
   <p:notesSz cx="6858000" cy="9144000"/>
@@ -832,7 +837,7 @@
           <a:p>
             <a:fld id="{EE000EEB-8338-48D7-8EE8-EE0082EF7602}" type="slidenum">
               <a:rPr lang="en-US" smtClean="0"/>
-              <a:t>14</a:t>
+              <a:t>19</a:t>
             </a:fld>
             <a:endParaRPr lang="en-US" dirty="0"/>
           </a:p>
@@ -8296,105 +8301,126 @@
           </a:p>
         </p:txBody>
       </p:sp>
-      <p:pic>
-        <p:nvPicPr>
-          <p:cNvPr id="8" name="Picture 7">
+      <p:grpSp>
+        <p:nvGrpSpPr>
+          <p:cNvPr id="13" name="Group 12">
             <a:extLst>
               <a:ext uri="{FF2B5EF4-FFF2-40B4-BE49-F238E27FC236}">
-                <a16:creationId xmlns:a16="http://schemas.microsoft.com/office/drawing/2014/main" id="{122D5555-678C-5743-DCE7-653A7F1D7B7D}"/>
+                <a16:creationId xmlns:a16="http://schemas.microsoft.com/office/drawing/2014/main" id="{D20FE24D-0609-3170-FC8A-A508CA131146}"/>
               </a:ext>
             </a:extLst>
           </p:cNvPr>
-          <p:cNvPicPr>
-            <a:picLocks noChangeAspect="1"/>
-          </p:cNvPicPr>
+          <p:cNvGrpSpPr/>
           <p:nvPr/>
-        </p:nvPicPr>
-        <p:blipFill>
-          <a:blip r:embed="rId3"/>
-          <a:stretch>
-            <a:fillRect/>
-          </a:stretch>
-        </p:blipFill>
-        <p:spPr>
+        </p:nvGrpSpPr>
+        <p:grpSpPr>
           <a:xfrm>
             <a:off x="8893082" y="3197407"/>
             <a:ext cx="2398961" cy="2123337"/>
-          </a:xfrm>
-          <a:prstGeom prst="roundRect">
-            <a:avLst>
-              <a:gd name="adj" fmla="val 8594"/>
-            </a:avLst>
-          </a:prstGeom>
-          <a:solidFill>
-            <a:srgbClr val="FFFFFF">
-              <a:shade val="85000"/>
-            </a:srgbClr>
-          </a:solidFill>
-          <a:ln>
-            <a:noFill/>
-          </a:ln>
-          <a:effectLst>
-            <a:reflection blurRad="12700" stA="38000" endPos="28000" dist="5000" dir="5400000" sy="-100000" algn="bl" rotWithShape="0"/>
-          </a:effectLst>
-        </p:spPr>
-      </p:pic>
-      <p:sp>
-        <p:nvSpPr>
-          <p:cNvPr id="9" name="Rectangle 8">
-            <a:extLst>
-              <a:ext uri="{FF2B5EF4-FFF2-40B4-BE49-F238E27FC236}">
-                <a16:creationId xmlns:a16="http://schemas.microsoft.com/office/drawing/2014/main" id="{4C305A3B-E771-332E-1234-FE8C5CC9953B}"/>
-              </a:ext>
-            </a:extLst>
-          </p:cNvPr>
-          <p:cNvSpPr/>
-          <p:nvPr/>
-        </p:nvSpPr>
-        <p:spPr>
-          <a:xfrm>
-            <a:off x="9231684" y="3429000"/>
-            <a:ext cx="819150" cy="1371600"/>
-          </a:xfrm>
-          <a:prstGeom prst="rect">
-            <a:avLst/>
-          </a:prstGeom>
-          <a:solidFill>
-            <a:srgbClr val="ACD433">
-              <a:alpha val="30196"/>
-            </a:srgbClr>
-          </a:solidFill>
-          <a:ln>
+            <a:chOff x="8893082" y="3197407"/>
+            <a:chExt cx="2398961" cy="2123337"/>
+          </a:xfrm>
+        </p:grpSpPr>
+        <p:pic>
+          <p:nvPicPr>
+            <p:cNvPr id="8" name="Picture 7">
+              <a:extLst>
+                <a:ext uri="{FF2B5EF4-FFF2-40B4-BE49-F238E27FC236}">
+                  <a16:creationId xmlns:a16="http://schemas.microsoft.com/office/drawing/2014/main" id="{122D5555-678C-5743-DCE7-653A7F1D7B7D}"/>
+                </a:ext>
+              </a:extLst>
+            </p:cNvPr>
+            <p:cNvPicPr>
+              <a:picLocks noChangeAspect="1"/>
+            </p:cNvPicPr>
+            <p:nvPr/>
+          </p:nvPicPr>
+          <p:blipFill>
+            <a:blip r:embed="rId3"/>
+            <a:stretch>
+              <a:fillRect/>
+            </a:stretch>
+          </p:blipFill>
+          <p:spPr>
+            <a:xfrm>
+              <a:off x="8893082" y="3197407"/>
+              <a:ext cx="2398961" cy="2123337"/>
+            </a:xfrm>
+            <a:prstGeom prst="roundRect">
+              <a:avLst>
+                <a:gd name="adj" fmla="val 8594"/>
+              </a:avLst>
+            </a:prstGeom>
             <a:solidFill>
-              <a:srgbClr val="00B050"/>
+              <a:srgbClr val="FFFFFF">
+                <a:shade val="85000"/>
+              </a:srgbClr>
             </a:solidFill>
-          </a:ln>
-        </p:spPr>
-        <p:style>
-          <a:lnRef idx="2">
-            <a:schemeClr val="accent1">
-              <a:shade val="15000"/>
-            </a:schemeClr>
-          </a:lnRef>
-          <a:fillRef idx="1">
-            <a:schemeClr val="accent1"/>
-          </a:fillRef>
-          <a:effectRef idx="0">
-            <a:schemeClr val="accent1"/>
-          </a:effectRef>
-          <a:fontRef idx="minor">
-            <a:schemeClr val="lt1"/>
-          </a:fontRef>
-        </p:style>
-        <p:txBody>
-          <a:bodyPr rtlCol="0" anchor="ctr"/>
-          <a:lstStyle/>
-          <a:p>
-            <a:pPr algn="ctr"/>
-            <a:endParaRPr lang="en-US"/>
-          </a:p>
-        </p:txBody>
-      </p:sp>
+            <a:ln>
+              <a:noFill/>
+            </a:ln>
+            <a:effectLst>
+              <a:reflection blurRad="12700" stA="38000" endPos="28000" dist="5000" dir="5400000" sy="-100000" algn="bl" rotWithShape="0"/>
+            </a:effectLst>
+          </p:spPr>
+        </p:pic>
+        <p:sp>
+          <p:nvSpPr>
+            <p:cNvPr id="9" name="Rectangle 8">
+              <a:extLst>
+                <a:ext uri="{FF2B5EF4-FFF2-40B4-BE49-F238E27FC236}">
+                  <a16:creationId xmlns:a16="http://schemas.microsoft.com/office/drawing/2014/main" id="{4C305A3B-E771-332E-1234-FE8C5CC9953B}"/>
+                </a:ext>
+              </a:extLst>
+            </p:cNvPr>
+            <p:cNvSpPr/>
+            <p:nvPr/>
+          </p:nvSpPr>
+          <p:spPr>
+            <a:xfrm>
+              <a:off x="9231684" y="3429000"/>
+              <a:ext cx="819150" cy="1371600"/>
+            </a:xfrm>
+            <a:prstGeom prst="rect">
+              <a:avLst/>
+            </a:prstGeom>
+            <a:solidFill>
+              <a:srgbClr val="ACD433">
+                <a:alpha val="30196"/>
+              </a:srgbClr>
+            </a:solidFill>
+            <a:ln>
+              <a:solidFill>
+                <a:srgbClr val="00B050"/>
+              </a:solidFill>
+            </a:ln>
+          </p:spPr>
+          <p:style>
+            <a:lnRef idx="2">
+              <a:schemeClr val="accent1">
+                <a:shade val="15000"/>
+              </a:schemeClr>
+            </a:lnRef>
+            <a:fillRef idx="1">
+              <a:schemeClr val="accent1"/>
+            </a:fillRef>
+            <a:effectRef idx="0">
+              <a:schemeClr val="accent1"/>
+            </a:effectRef>
+            <a:fontRef idx="minor">
+              <a:schemeClr val="lt1"/>
+            </a:fontRef>
+          </p:style>
+          <p:txBody>
+            <a:bodyPr rtlCol="0" anchor="ctr"/>
+            <a:lstStyle/>
+            <a:p>
+              <a:pPr algn="ctr"/>
+              <a:endParaRPr lang="en-US"/>
+            </a:p>
+          </p:txBody>
+        </p:sp>
+      </p:grpSp>
       <p:pic>
         <p:nvPicPr>
           <p:cNvPr id="10" name="Picture 9">
@@ -8832,18 +8858,36 @@
         </p:blipFill>
         <p:spPr>
           <a:xfrm>
-            <a:off x="9231569" y="2393655"/>
-            <a:ext cx="1638529" cy="3200847"/>
-          </a:xfrm>
-          <a:prstGeom prst="rect">
-            <a:avLst/>
+            <a:off x="8893081" y="1457202"/>
+            <a:ext cx="2400433" cy="4689218"/>
+          </a:xfrm>
+          <a:prstGeom prst="roundRect">
+            <a:avLst>
+              <a:gd name="adj" fmla="val 16667"/>
+            </a:avLst>
           </a:prstGeom>
-          <a:solidFill>
-            <a:schemeClr val="accent2">
-              <a:lumMod val="40000"/>
-              <a:lumOff val="60000"/>
-            </a:schemeClr>
-          </a:solidFill>
+          <a:ln>
+            <a:noFill/>
+          </a:ln>
+          <a:effectLst>
+            <a:outerShdw blurRad="152400" dist="12000" dir="900000" sy="98000" kx="110000" ky="200000" algn="tl" rotWithShape="0">
+              <a:srgbClr val="000000">
+                <a:alpha val="30000"/>
+              </a:srgbClr>
+            </a:outerShdw>
+          </a:effectLst>
+          <a:scene3d>
+            <a:camera prst="perspectiveRelaxed">
+              <a:rot lat="19800000" lon="1200000" rev="20820000"/>
+            </a:camera>
+            <a:lightRig rig="threePt" dir="t"/>
+          </a:scene3d>
+          <a:sp3d contourW="6350" prstMaterial="matte">
+            <a:bevelT w="101600" h="101600"/>
+            <a:contourClr>
+              <a:srgbClr val="969696"/>
+            </a:contourClr>
+          </a:sp3d>
         </p:spPr>
       </p:pic>
       <p:sp>
@@ -8900,6 +8944,126 @@
           </a:p>
         </p:txBody>
       </p:sp>
+      <p:pic>
+        <p:nvPicPr>
+          <p:cNvPr id="5" name="Picture 4">
+            <a:extLst>
+              <a:ext uri="{FF2B5EF4-FFF2-40B4-BE49-F238E27FC236}">
+                <a16:creationId xmlns:a16="http://schemas.microsoft.com/office/drawing/2014/main" id="{D5A47497-EE95-A854-082B-5ED091E34A35}"/>
+              </a:ext>
+            </a:extLst>
+          </p:cNvPr>
+          <p:cNvPicPr>
+            <a:picLocks noChangeAspect="1"/>
+          </p:cNvPicPr>
+          <p:nvPr/>
+        </p:nvPicPr>
+        <p:blipFill>
+          <a:blip r:embed="rId4"/>
+          <a:stretch>
+            <a:fillRect/>
+          </a:stretch>
+        </p:blipFill>
+        <p:spPr>
+          <a:xfrm>
+            <a:off x="157000" y="1094226"/>
+            <a:ext cx="362976" cy="362976"/>
+          </a:xfrm>
+          <a:prstGeom prst="rect">
+            <a:avLst/>
+          </a:prstGeom>
+          <a:ln>
+            <a:noFill/>
+          </a:ln>
+          <a:effectLst>
+            <a:outerShdw blurRad="292100" dist="139700" dir="2700000" algn="tl" rotWithShape="0">
+              <a:srgbClr val="333333">
+                <a:alpha val="65000"/>
+              </a:srgbClr>
+            </a:outerShdw>
+          </a:effectLst>
+        </p:spPr>
+      </p:pic>
+      <p:pic>
+        <p:nvPicPr>
+          <p:cNvPr id="8" name="Picture 7">
+            <a:extLst>
+              <a:ext uri="{FF2B5EF4-FFF2-40B4-BE49-F238E27FC236}">
+                <a16:creationId xmlns:a16="http://schemas.microsoft.com/office/drawing/2014/main" id="{A45935FF-6419-72BA-DFDD-6F796D76B211}"/>
+              </a:ext>
+            </a:extLst>
+          </p:cNvPr>
+          <p:cNvPicPr>
+            <a:picLocks noChangeAspect="1"/>
+          </p:cNvPicPr>
+          <p:nvPr/>
+        </p:nvPicPr>
+        <p:blipFill>
+          <a:blip r:embed="rId5"/>
+          <a:stretch>
+            <a:fillRect/>
+          </a:stretch>
+        </p:blipFill>
+        <p:spPr>
+          <a:xfrm>
+            <a:off x="611241" y="1094226"/>
+            <a:ext cx="362976" cy="362976"/>
+          </a:xfrm>
+          <a:prstGeom prst="rect">
+            <a:avLst/>
+          </a:prstGeom>
+          <a:ln>
+            <a:noFill/>
+          </a:ln>
+          <a:effectLst>
+            <a:outerShdw blurRad="292100" dist="139700" dir="2700000" algn="tl" rotWithShape="0">
+              <a:srgbClr val="333333">
+                <a:alpha val="65000"/>
+              </a:srgbClr>
+            </a:outerShdw>
+          </a:effectLst>
+        </p:spPr>
+      </p:pic>
+      <p:pic>
+        <p:nvPicPr>
+          <p:cNvPr id="9" name="Picture 8">
+            <a:extLst>
+              <a:ext uri="{FF2B5EF4-FFF2-40B4-BE49-F238E27FC236}">
+                <a16:creationId xmlns:a16="http://schemas.microsoft.com/office/drawing/2014/main" id="{E4AF068F-C46C-2F10-3B3C-DF2825DB9FD4}"/>
+              </a:ext>
+            </a:extLst>
+          </p:cNvPr>
+          <p:cNvPicPr>
+            <a:picLocks noChangeAspect="1"/>
+          </p:cNvPicPr>
+          <p:nvPr/>
+        </p:nvPicPr>
+        <p:blipFill>
+          <a:blip r:embed="rId6"/>
+          <a:stretch>
+            <a:fillRect/>
+          </a:stretch>
+        </p:blipFill>
+        <p:spPr>
+          <a:xfrm>
+            <a:off x="1065482" y="1094226"/>
+            <a:ext cx="371111" cy="362976"/>
+          </a:xfrm>
+          <a:prstGeom prst="rect">
+            <a:avLst/>
+          </a:prstGeom>
+          <a:ln>
+            <a:noFill/>
+          </a:ln>
+          <a:effectLst>
+            <a:outerShdw blurRad="292100" dist="139700" dir="2700000" algn="tl" rotWithShape="0">
+              <a:srgbClr val="333333">
+                <a:alpha val="65000"/>
+              </a:srgbClr>
+            </a:outerShdw>
+          </a:effectLst>
+        </p:spPr>
+      </p:pic>
     </p:spTree>
     <p:extLst>
       <p:ext uri="{BB962C8B-B14F-4D97-AF65-F5344CB8AC3E}">
@@ -9113,6 +9277,57 @@
           </a:p>
         </p:txBody>
       </p:sp>
+      <p:sp>
+        <p:nvSpPr>
+          <p:cNvPr id="7" name="Rectangle 6">
+            <a:extLst>
+              <a:ext uri="{FF2B5EF4-FFF2-40B4-BE49-F238E27FC236}">
+                <a16:creationId xmlns:a16="http://schemas.microsoft.com/office/drawing/2014/main" id="{E3C54FEF-8C9A-BBFC-0D84-002D10047F7A}"/>
+              </a:ext>
+            </a:extLst>
+          </p:cNvPr>
+          <p:cNvSpPr/>
+          <p:nvPr/>
+        </p:nvSpPr>
+        <p:spPr>
+          <a:xfrm>
+            <a:off x="2913124" y="996949"/>
+            <a:ext cx="115825" cy="298451"/>
+          </a:xfrm>
+          <a:prstGeom prst="rect">
+            <a:avLst/>
+          </a:prstGeom>
+          <a:solidFill>
+            <a:srgbClr val="ACD433">
+              <a:alpha val="50196"/>
+            </a:srgbClr>
+          </a:solidFill>
+        </p:spPr>
+        <p:style>
+          <a:lnRef idx="2">
+            <a:schemeClr val="accent1">
+              <a:shade val="15000"/>
+            </a:schemeClr>
+          </a:lnRef>
+          <a:fillRef idx="1">
+            <a:schemeClr val="accent1"/>
+          </a:fillRef>
+          <a:effectRef idx="0">
+            <a:schemeClr val="accent1"/>
+          </a:effectRef>
+          <a:fontRef idx="minor">
+            <a:schemeClr val="lt1"/>
+          </a:fontRef>
+        </p:style>
+        <p:txBody>
+          <a:bodyPr rtlCol="0" anchor="ctr"/>
+          <a:lstStyle/>
+          <a:p>
+            <a:pPr algn="ctr"/>
+            <a:endParaRPr lang="en-US"/>
+          </a:p>
+        </p:txBody>
+      </p:sp>
     </p:spTree>
     <p:extLst>
       <p:ext uri="{BB962C8B-B14F-4D97-AF65-F5344CB8AC3E}">
@@ -9184,7 +9399,7 @@
             </a:br>
             <a:r>
               <a:rPr lang="en-US" b="1" dirty="0"/>
-              <a:t>- Business Conceptual - 05 </a:t>
+              <a:t>- Business Conceptual - 06 </a:t>
             </a:r>
           </a:p>
         </p:txBody>
@@ -9408,6 +9623,180 @@
           </a:p>
         </p:txBody>
       </p:sp>
+      <p:pic>
+        <p:nvPicPr>
+          <p:cNvPr id="11" name="Picture 10">
+            <a:extLst>
+              <a:ext uri="{FF2B5EF4-FFF2-40B4-BE49-F238E27FC236}">
+                <a16:creationId xmlns:a16="http://schemas.microsoft.com/office/drawing/2014/main" id="{06C999C2-029D-326E-E86C-2BCFB5F77C70}"/>
+              </a:ext>
+            </a:extLst>
+          </p:cNvPr>
+          <p:cNvPicPr>
+            <a:picLocks noChangeAspect="1"/>
+          </p:cNvPicPr>
+          <p:nvPr/>
+        </p:nvPicPr>
+        <p:blipFill>
+          <a:blip r:embed="rId3"/>
+          <a:stretch>
+            <a:fillRect/>
+          </a:stretch>
+        </p:blipFill>
+        <p:spPr>
+          <a:xfrm>
+            <a:off x="157000" y="1094226"/>
+            <a:ext cx="362976" cy="362976"/>
+          </a:xfrm>
+          <a:prstGeom prst="rect">
+            <a:avLst/>
+          </a:prstGeom>
+          <a:ln>
+            <a:noFill/>
+          </a:ln>
+          <a:effectLst>
+            <a:outerShdw blurRad="292100" dist="139700" dir="2700000" algn="tl" rotWithShape="0">
+              <a:srgbClr val="333333">
+                <a:alpha val="65000"/>
+              </a:srgbClr>
+            </a:outerShdw>
+          </a:effectLst>
+        </p:spPr>
+      </p:pic>
+      <p:pic>
+        <p:nvPicPr>
+          <p:cNvPr id="12" name="Picture 11">
+            <a:extLst>
+              <a:ext uri="{FF2B5EF4-FFF2-40B4-BE49-F238E27FC236}">
+                <a16:creationId xmlns:a16="http://schemas.microsoft.com/office/drawing/2014/main" id="{9BB82AA0-3739-E689-54E7-31B2DA6EB591}"/>
+              </a:ext>
+            </a:extLst>
+          </p:cNvPr>
+          <p:cNvPicPr>
+            <a:picLocks noChangeAspect="1"/>
+          </p:cNvPicPr>
+          <p:nvPr/>
+        </p:nvPicPr>
+        <p:blipFill>
+          <a:blip r:embed="rId4"/>
+          <a:stretch>
+            <a:fillRect/>
+          </a:stretch>
+        </p:blipFill>
+        <p:spPr>
+          <a:xfrm>
+            <a:off x="611241" y="1094226"/>
+            <a:ext cx="362976" cy="362976"/>
+          </a:xfrm>
+          <a:prstGeom prst="rect">
+            <a:avLst/>
+          </a:prstGeom>
+          <a:ln>
+            <a:noFill/>
+          </a:ln>
+          <a:effectLst>
+            <a:outerShdw blurRad="292100" dist="139700" dir="2700000" algn="tl" rotWithShape="0">
+              <a:srgbClr val="333333">
+                <a:alpha val="65000"/>
+              </a:srgbClr>
+            </a:outerShdw>
+          </a:effectLst>
+        </p:spPr>
+      </p:pic>
+      <p:pic>
+        <p:nvPicPr>
+          <p:cNvPr id="13" name="Picture 12">
+            <a:extLst>
+              <a:ext uri="{FF2B5EF4-FFF2-40B4-BE49-F238E27FC236}">
+                <a16:creationId xmlns:a16="http://schemas.microsoft.com/office/drawing/2014/main" id="{E7A3B4F7-3749-5953-406A-B427A1BEF6BA}"/>
+              </a:ext>
+            </a:extLst>
+          </p:cNvPr>
+          <p:cNvPicPr>
+            <a:picLocks noChangeAspect="1"/>
+          </p:cNvPicPr>
+          <p:nvPr/>
+        </p:nvPicPr>
+        <p:blipFill>
+          <a:blip r:embed="rId5"/>
+          <a:stretch>
+            <a:fillRect/>
+          </a:stretch>
+        </p:blipFill>
+        <p:spPr>
+          <a:xfrm>
+            <a:off x="1065482" y="1094226"/>
+            <a:ext cx="371111" cy="362976"/>
+          </a:xfrm>
+          <a:prstGeom prst="rect">
+            <a:avLst/>
+          </a:prstGeom>
+          <a:ln>
+            <a:noFill/>
+          </a:ln>
+          <a:effectLst>
+            <a:outerShdw blurRad="292100" dist="139700" dir="2700000" algn="tl" rotWithShape="0">
+              <a:srgbClr val="333333">
+                <a:alpha val="65000"/>
+              </a:srgbClr>
+            </a:outerShdw>
+          </a:effectLst>
+        </p:spPr>
+      </p:pic>
+      <p:pic>
+        <p:nvPicPr>
+          <p:cNvPr id="15" name="Picture 14">
+            <a:extLst>
+              <a:ext uri="{FF2B5EF4-FFF2-40B4-BE49-F238E27FC236}">
+                <a16:creationId xmlns:a16="http://schemas.microsoft.com/office/drawing/2014/main" id="{CBE18703-65FF-42DB-0364-3B0BB299D9BF}"/>
+              </a:ext>
+            </a:extLst>
+          </p:cNvPr>
+          <p:cNvPicPr>
+            <a:picLocks noChangeAspect="1"/>
+          </p:cNvPicPr>
+          <p:nvPr/>
+        </p:nvPicPr>
+        <p:blipFill>
+          <a:blip r:embed="rId6"/>
+          <a:stretch>
+            <a:fillRect/>
+          </a:stretch>
+        </p:blipFill>
+        <p:spPr>
+          <a:xfrm>
+            <a:off x="7844835" y="2774022"/>
+            <a:ext cx="4214205" cy="2370490"/>
+          </a:xfrm>
+          <a:prstGeom prst="roundRect">
+            <a:avLst>
+              <a:gd name="adj" fmla="val 16667"/>
+            </a:avLst>
+          </a:prstGeom>
+          <a:ln>
+            <a:noFill/>
+          </a:ln>
+          <a:effectLst>
+            <a:outerShdw blurRad="152400" dist="12000" dir="900000" sy="98000" kx="110000" ky="200000" algn="tl" rotWithShape="0">
+              <a:srgbClr val="000000">
+                <a:alpha val="30000"/>
+              </a:srgbClr>
+            </a:outerShdw>
+          </a:effectLst>
+          <a:scene3d>
+            <a:camera prst="perspectiveRelaxed">
+              <a:rot lat="19800000" lon="1200000" rev="20820000"/>
+            </a:camera>
+            <a:lightRig rig="threePt" dir="t"/>
+          </a:scene3d>
+          <a:sp3d contourW="6350" prstMaterial="matte">
+            <a:bevelT w="101600" h="101600"/>
+            <a:contourClr>
+              <a:srgbClr val="969696"/>
+            </a:contourClr>
+          </a:sp3d>
+        </p:spPr>
+      </p:pic>
     </p:spTree>
     <p:extLst>
       <p:ext uri="{BB962C8B-B14F-4D97-AF65-F5344CB8AC3E}">
@@ -9422,6 +9811,2202 @@
 </file>
 
 <file path=ppt/slides/slide14.xml><?xml version="1.0" encoding="utf-8"?>
+<p:sld xmlns:a="http://schemas.openxmlformats.org/drawingml/2006/main" xmlns:r="http://schemas.openxmlformats.org/officeDocument/2006/relationships" xmlns:p="http://schemas.openxmlformats.org/presentationml/2006/main">
+  <p:cSld>
+    <p:spTree>
+      <p:nvGrpSpPr>
+        <p:cNvPr id="1" name="">
+          <a:extLst>
+            <a:ext uri="{FF2B5EF4-FFF2-40B4-BE49-F238E27FC236}">
+              <a16:creationId xmlns:a16="http://schemas.microsoft.com/office/drawing/2014/main" id="{922C408E-654F-E922-78EE-EB778BE6A942}"/>
+            </a:ext>
+          </a:extLst>
+        </p:cNvPr>
+        <p:cNvGrpSpPr/>
+        <p:nvPr/>
+      </p:nvGrpSpPr>
+      <p:grpSpPr>
+        <a:xfrm>
+          <a:off x="0" y="0"/>
+          <a:ext cx="0" cy="0"/>
+          <a:chOff x="0" y="0"/>
+          <a:chExt cx="0" cy="0"/>
+        </a:xfrm>
+      </p:grpSpPr>
+      <p:pic>
+        <p:nvPicPr>
+          <p:cNvPr id="3" name="Picture 2">
+            <a:extLst>
+              <a:ext uri="{FF2B5EF4-FFF2-40B4-BE49-F238E27FC236}">
+                <a16:creationId xmlns:a16="http://schemas.microsoft.com/office/drawing/2014/main" id="{DDAC963D-8D22-5ABF-7C3A-BBC645E6E5BD}"/>
+              </a:ext>
+            </a:extLst>
+          </p:cNvPr>
+          <p:cNvPicPr>
+            <a:picLocks noChangeAspect="1"/>
+          </p:cNvPicPr>
+          <p:nvPr/>
+        </p:nvPicPr>
+        <p:blipFill>
+          <a:blip r:embed="rId2"/>
+          <a:stretch>
+            <a:fillRect/>
+          </a:stretch>
+        </p:blipFill>
+        <p:spPr>
+          <a:xfrm>
+            <a:off x="2592309" y="0"/>
+            <a:ext cx="7007382" cy="6858000"/>
+          </a:xfrm>
+          <a:prstGeom prst="rect">
+            <a:avLst/>
+          </a:prstGeom>
+        </p:spPr>
+      </p:pic>
+      <p:sp>
+        <p:nvSpPr>
+          <p:cNvPr id="4" name="Rectangle 3">
+            <a:extLst>
+              <a:ext uri="{FF2B5EF4-FFF2-40B4-BE49-F238E27FC236}">
+                <a16:creationId xmlns:a16="http://schemas.microsoft.com/office/drawing/2014/main" id="{0E69C169-EBC8-1297-9E82-7EA2D8D52B6D}"/>
+              </a:ext>
+            </a:extLst>
+          </p:cNvPr>
+          <p:cNvSpPr/>
+          <p:nvPr/>
+        </p:nvSpPr>
+        <p:spPr>
+          <a:xfrm>
+            <a:off x="3700530" y="223234"/>
+            <a:ext cx="957329" cy="64394"/>
+          </a:xfrm>
+          <a:prstGeom prst="rect">
+            <a:avLst/>
+          </a:prstGeom>
+          <a:solidFill>
+            <a:srgbClr val="ACD433">
+              <a:alpha val="50196"/>
+            </a:srgbClr>
+          </a:solidFill>
+        </p:spPr>
+        <p:style>
+          <a:lnRef idx="2">
+            <a:schemeClr val="accent1">
+              <a:shade val="15000"/>
+            </a:schemeClr>
+          </a:lnRef>
+          <a:fillRef idx="1">
+            <a:schemeClr val="accent1"/>
+          </a:fillRef>
+          <a:effectRef idx="0">
+            <a:schemeClr val="accent1"/>
+          </a:effectRef>
+          <a:fontRef idx="minor">
+            <a:schemeClr val="lt1"/>
+          </a:fontRef>
+        </p:style>
+        <p:txBody>
+          <a:bodyPr rtlCol="0" anchor="ctr"/>
+          <a:lstStyle/>
+          <a:p>
+            <a:pPr algn="ctr"/>
+            <a:endParaRPr lang="en-US"/>
+          </a:p>
+        </p:txBody>
+      </p:sp>
+      <p:sp>
+        <p:nvSpPr>
+          <p:cNvPr id="5" name="Rectangle 4">
+            <a:extLst>
+              <a:ext uri="{FF2B5EF4-FFF2-40B4-BE49-F238E27FC236}">
+                <a16:creationId xmlns:a16="http://schemas.microsoft.com/office/drawing/2014/main" id="{F2BD0E5F-D5BA-C63C-C6C3-E8F716731F66}"/>
+              </a:ext>
+            </a:extLst>
+          </p:cNvPr>
+          <p:cNvSpPr/>
+          <p:nvPr/>
+        </p:nvSpPr>
+        <p:spPr>
+          <a:xfrm>
+            <a:off x="3619568" y="0"/>
+            <a:ext cx="233295" cy="181579"/>
+          </a:xfrm>
+          <a:prstGeom prst="rect">
+            <a:avLst/>
+          </a:prstGeom>
+          <a:solidFill>
+            <a:srgbClr val="ACD433">
+              <a:alpha val="50196"/>
+            </a:srgbClr>
+          </a:solidFill>
+        </p:spPr>
+        <p:style>
+          <a:lnRef idx="2">
+            <a:schemeClr val="accent1">
+              <a:shade val="15000"/>
+            </a:schemeClr>
+          </a:lnRef>
+          <a:fillRef idx="1">
+            <a:schemeClr val="accent1"/>
+          </a:fillRef>
+          <a:effectRef idx="0">
+            <a:schemeClr val="accent1"/>
+          </a:effectRef>
+          <a:fontRef idx="minor">
+            <a:schemeClr val="lt1"/>
+          </a:fontRef>
+        </p:style>
+        <p:txBody>
+          <a:bodyPr rtlCol="0" anchor="ctr"/>
+          <a:lstStyle/>
+          <a:p>
+            <a:pPr algn="ctr"/>
+            <a:endParaRPr lang="en-US"/>
+          </a:p>
+        </p:txBody>
+      </p:sp>
+      <p:sp>
+        <p:nvSpPr>
+          <p:cNvPr id="6" name="Rectangle 5">
+            <a:extLst>
+              <a:ext uri="{FF2B5EF4-FFF2-40B4-BE49-F238E27FC236}">
+                <a16:creationId xmlns:a16="http://schemas.microsoft.com/office/drawing/2014/main" id="{FB73751F-E8F8-1BC0-0125-37FD4451EB20}"/>
+              </a:ext>
+            </a:extLst>
+          </p:cNvPr>
+          <p:cNvSpPr/>
+          <p:nvPr/>
+        </p:nvSpPr>
+        <p:spPr>
+          <a:xfrm>
+            <a:off x="2913124" y="164641"/>
+            <a:ext cx="233295" cy="568784"/>
+          </a:xfrm>
+          <a:prstGeom prst="rect">
+            <a:avLst/>
+          </a:prstGeom>
+          <a:solidFill>
+            <a:srgbClr val="ACD433">
+              <a:alpha val="50196"/>
+            </a:srgbClr>
+          </a:solidFill>
+        </p:spPr>
+        <p:style>
+          <a:lnRef idx="2">
+            <a:schemeClr val="accent1">
+              <a:shade val="15000"/>
+            </a:schemeClr>
+          </a:lnRef>
+          <a:fillRef idx="1">
+            <a:schemeClr val="accent1"/>
+          </a:fillRef>
+          <a:effectRef idx="0">
+            <a:schemeClr val="accent1"/>
+          </a:effectRef>
+          <a:fontRef idx="minor">
+            <a:schemeClr val="lt1"/>
+          </a:fontRef>
+        </p:style>
+        <p:txBody>
+          <a:bodyPr rtlCol="0" anchor="ctr"/>
+          <a:lstStyle/>
+          <a:p>
+            <a:pPr algn="ctr"/>
+            <a:endParaRPr lang="en-US"/>
+          </a:p>
+        </p:txBody>
+      </p:sp>
+      <p:sp>
+        <p:nvSpPr>
+          <p:cNvPr id="7" name="Rectangle 6">
+            <a:extLst>
+              <a:ext uri="{FF2B5EF4-FFF2-40B4-BE49-F238E27FC236}">
+                <a16:creationId xmlns:a16="http://schemas.microsoft.com/office/drawing/2014/main" id="{1081FDC1-4CEB-F53B-EEC6-ED3D138226FE}"/>
+              </a:ext>
+            </a:extLst>
+          </p:cNvPr>
+          <p:cNvSpPr/>
+          <p:nvPr/>
+        </p:nvSpPr>
+        <p:spPr>
+          <a:xfrm>
+            <a:off x="2913124" y="996949"/>
+            <a:ext cx="115825" cy="298451"/>
+          </a:xfrm>
+          <a:prstGeom prst="rect">
+            <a:avLst/>
+          </a:prstGeom>
+          <a:solidFill>
+            <a:srgbClr val="ACD433">
+              <a:alpha val="50196"/>
+            </a:srgbClr>
+          </a:solidFill>
+        </p:spPr>
+        <p:style>
+          <a:lnRef idx="2">
+            <a:schemeClr val="accent1">
+              <a:shade val="15000"/>
+            </a:schemeClr>
+          </a:lnRef>
+          <a:fillRef idx="1">
+            <a:schemeClr val="accent1"/>
+          </a:fillRef>
+          <a:effectRef idx="0">
+            <a:schemeClr val="accent1"/>
+          </a:effectRef>
+          <a:fontRef idx="minor">
+            <a:schemeClr val="lt1"/>
+          </a:fontRef>
+        </p:style>
+        <p:txBody>
+          <a:bodyPr rtlCol="0" anchor="ctr"/>
+          <a:lstStyle/>
+          <a:p>
+            <a:pPr algn="ctr"/>
+            <a:endParaRPr lang="en-US"/>
+          </a:p>
+        </p:txBody>
+      </p:sp>
+      <p:sp>
+        <p:nvSpPr>
+          <p:cNvPr id="2" name="Rectangle 1">
+            <a:extLst>
+              <a:ext uri="{FF2B5EF4-FFF2-40B4-BE49-F238E27FC236}">
+                <a16:creationId xmlns:a16="http://schemas.microsoft.com/office/drawing/2014/main" id="{6E307F77-3178-C40A-2B7D-BC784CA0930E}"/>
+              </a:ext>
+            </a:extLst>
+          </p:cNvPr>
+          <p:cNvSpPr/>
+          <p:nvPr/>
+        </p:nvSpPr>
+        <p:spPr>
+          <a:xfrm rot="1551019">
+            <a:off x="3573376" y="623121"/>
+            <a:ext cx="1093916" cy="102021"/>
+          </a:xfrm>
+          <a:prstGeom prst="rect">
+            <a:avLst/>
+          </a:prstGeom>
+          <a:solidFill>
+            <a:srgbClr val="ACD433">
+              <a:alpha val="50196"/>
+            </a:srgbClr>
+          </a:solidFill>
+        </p:spPr>
+        <p:style>
+          <a:lnRef idx="2">
+            <a:schemeClr val="accent1">
+              <a:shade val="15000"/>
+            </a:schemeClr>
+          </a:lnRef>
+          <a:fillRef idx="1">
+            <a:schemeClr val="accent1"/>
+          </a:fillRef>
+          <a:effectRef idx="0">
+            <a:schemeClr val="accent1"/>
+          </a:effectRef>
+          <a:fontRef idx="minor">
+            <a:schemeClr val="lt1"/>
+          </a:fontRef>
+        </p:style>
+        <p:txBody>
+          <a:bodyPr rtlCol="0" anchor="ctr"/>
+          <a:lstStyle/>
+          <a:p>
+            <a:pPr algn="ctr"/>
+            <a:endParaRPr lang="en-US"/>
+          </a:p>
+        </p:txBody>
+      </p:sp>
+      <p:sp>
+        <p:nvSpPr>
+          <p:cNvPr id="8" name="Rectangle 7">
+            <a:extLst>
+              <a:ext uri="{FF2B5EF4-FFF2-40B4-BE49-F238E27FC236}">
+                <a16:creationId xmlns:a16="http://schemas.microsoft.com/office/drawing/2014/main" id="{3D8AA0BC-72F0-708E-A79E-79161FC2A159}"/>
+              </a:ext>
+            </a:extLst>
+          </p:cNvPr>
+          <p:cNvSpPr/>
+          <p:nvPr/>
+        </p:nvSpPr>
+        <p:spPr>
+          <a:xfrm>
+            <a:off x="5065260" y="733425"/>
+            <a:ext cx="318398" cy="225099"/>
+          </a:xfrm>
+          <a:prstGeom prst="rect">
+            <a:avLst/>
+          </a:prstGeom>
+          <a:solidFill>
+            <a:srgbClr val="ACD433">
+              <a:alpha val="50196"/>
+            </a:srgbClr>
+          </a:solidFill>
+        </p:spPr>
+        <p:style>
+          <a:lnRef idx="2">
+            <a:schemeClr val="accent1">
+              <a:shade val="15000"/>
+            </a:schemeClr>
+          </a:lnRef>
+          <a:fillRef idx="1">
+            <a:schemeClr val="accent1"/>
+          </a:fillRef>
+          <a:effectRef idx="0">
+            <a:schemeClr val="accent1"/>
+          </a:effectRef>
+          <a:fontRef idx="minor">
+            <a:schemeClr val="lt1"/>
+          </a:fontRef>
+        </p:style>
+        <p:txBody>
+          <a:bodyPr rtlCol="0" anchor="ctr"/>
+          <a:lstStyle/>
+          <a:p>
+            <a:pPr algn="ctr"/>
+            <a:endParaRPr lang="en-US"/>
+          </a:p>
+        </p:txBody>
+      </p:sp>
+    </p:spTree>
+    <p:extLst>
+      <p:ext uri="{BB962C8B-B14F-4D97-AF65-F5344CB8AC3E}">
+        <p14:creationId xmlns:p14="http://schemas.microsoft.com/office/powerpoint/2010/main" val="2784006949"/>
+      </p:ext>
+    </p:extLst>
+  </p:cSld>
+  <p:clrMapOvr>
+    <a:masterClrMapping/>
+  </p:clrMapOvr>
+</p:sld>
+</file>
+
+<file path=ppt/slides/slide15.xml><?xml version="1.0" encoding="utf-8"?>
+<p:sld xmlns:a="http://schemas.openxmlformats.org/drawingml/2006/main" xmlns:r="http://schemas.openxmlformats.org/officeDocument/2006/relationships" xmlns:p="http://schemas.openxmlformats.org/presentationml/2006/main">
+  <p:cSld>
+    <p:spTree>
+      <p:nvGrpSpPr>
+        <p:cNvPr id="1" name="">
+          <a:extLst>
+            <a:ext uri="{FF2B5EF4-FFF2-40B4-BE49-F238E27FC236}">
+              <a16:creationId xmlns:a16="http://schemas.microsoft.com/office/drawing/2014/main" id="{B75AEF3F-5FA3-C22D-93F6-7EC2A74C8B6B}"/>
+            </a:ext>
+          </a:extLst>
+        </p:cNvPr>
+        <p:cNvGrpSpPr/>
+        <p:nvPr/>
+      </p:nvGrpSpPr>
+      <p:grpSpPr>
+        <a:xfrm>
+          <a:off x="0" y="0"/>
+          <a:ext cx="0" cy="0"/>
+          <a:chOff x="0" y="0"/>
+          <a:chExt cx="0" cy="0"/>
+        </a:xfrm>
+      </p:grpSpPr>
+      <p:sp>
+        <p:nvSpPr>
+          <p:cNvPr id="2" name="Title 1">
+            <a:extLst>
+              <a:ext uri="{FF2B5EF4-FFF2-40B4-BE49-F238E27FC236}">
+                <a16:creationId xmlns:a16="http://schemas.microsoft.com/office/drawing/2014/main" id="{E876D802-2FA7-87A7-F780-5D1DB3416CFD}"/>
+              </a:ext>
+            </a:extLst>
+          </p:cNvPr>
+          <p:cNvSpPr>
+            <a:spLocks noGrp="1"/>
+          </p:cNvSpPr>
+          <p:nvPr>
+            <p:ph type="title"/>
+          </p:nvPr>
+        </p:nvSpPr>
+        <p:spPr>
+          <a:xfrm>
+            <a:off x="1754188" y="452718"/>
+            <a:ext cx="8296646" cy="1400530"/>
+          </a:xfrm>
+        </p:spPr>
+        <p:txBody>
+          <a:bodyPr/>
+          <a:lstStyle/>
+          <a:p>
+            <a:r>
+              <a:rPr lang="en-US" b="1" dirty="0"/>
+              <a:t>Essential EA Meta-Model</a:t>
+            </a:r>
+            <a:br>
+              <a:rPr lang="en-US" b="1" dirty="0"/>
+            </a:br>
+            <a:r>
+              <a:rPr lang="en-US" b="1" dirty="0"/>
+              <a:t>- Business Conceptual - 07 </a:t>
+            </a:r>
+          </a:p>
+        </p:txBody>
+      </p:sp>
+      <p:sp>
+        <p:nvSpPr>
+          <p:cNvPr id="4" name="Title 1">
+            <a:extLst>
+              <a:ext uri="{FF2B5EF4-FFF2-40B4-BE49-F238E27FC236}">
+                <a16:creationId xmlns:a16="http://schemas.microsoft.com/office/drawing/2014/main" id="{86504B53-13D5-4FCD-0274-0C1531BF03A0}"/>
+              </a:ext>
+            </a:extLst>
+          </p:cNvPr>
+          <p:cNvSpPr txBox="1">
+            <a:spLocks/>
+          </p:cNvSpPr>
+          <p:nvPr/>
+        </p:nvSpPr>
+        <p:spPr>
+          <a:xfrm>
+            <a:off x="0" y="3143"/>
+            <a:ext cx="1754188" cy="1058013"/>
+          </a:xfrm>
+          <a:prstGeom prst="rect">
+            <a:avLst/>
+          </a:prstGeom>
+        </p:spPr>
+        <p:txBody>
+          <a:bodyPr vert="horz" lIns="91440" tIns="45720" rIns="91440" bIns="45720" rtlCol="0" anchor="ctr">
+            <a:noAutofit/>
+          </a:bodyPr>
+          <a:lstStyle>
+            <a:lvl1pPr algn="l" defTabSz="457200" rtl="0" eaLnBrk="1" latinLnBrk="0" hangingPunct="1">
+              <a:spcBef>
+                <a:spcPct val="0"/>
+              </a:spcBef>
+              <a:buNone/>
+              <a:defRPr sz="7200" b="0" i="0" kern="1200">
+                <a:solidFill>
+                  <a:schemeClr val="tx2"/>
+                </a:solidFill>
+                <a:latin typeface="+mj-lt"/>
+                <a:ea typeface="+mj-ea"/>
+                <a:cs typeface="+mj-cs"/>
+              </a:defRPr>
+            </a:lvl1pPr>
+            <a:lvl2pPr eaLnBrk="1" hangingPunct="1">
+              <a:defRPr>
+                <a:solidFill>
+                  <a:schemeClr val="tx2"/>
+                </a:solidFill>
+              </a:defRPr>
+            </a:lvl2pPr>
+            <a:lvl3pPr eaLnBrk="1" hangingPunct="1">
+              <a:defRPr>
+                <a:solidFill>
+                  <a:schemeClr val="tx2"/>
+                </a:solidFill>
+              </a:defRPr>
+            </a:lvl3pPr>
+            <a:lvl4pPr eaLnBrk="1" hangingPunct="1">
+              <a:defRPr>
+                <a:solidFill>
+                  <a:schemeClr val="tx2"/>
+                </a:solidFill>
+              </a:defRPr>
+            </a:lvl4pPr>
+            <a:lvl5pPr eaLnBrk="1" hangingPunct="1">
+              <a:defRPr>
+                <a:solidFill>
+                  <a:schemeClr val="tx2"/>
+                </a:solidFill>
+              </a:defRPr>
+            </a:lvl5pPr>
+            <a:lvl6pPr eaLnBrk="1" hangingPunct="1">
+              <a:defRPr>
+                <a:solidFill>
+                  <a:schemeClr val="tx2"/>
+                </a:solidFill>
+              </a:defRPr>
+            </a:lvl6pPr>
+            <a:lvl7pPr eaLnBrk="1" hangingPunct="1">
+              <a:defRPr>
+                <a:solidFill>
+                  <a:schemeClr val="tx2"/>
+                </a:solidFill>
+              </a:defRPr>
+            </a:lvl7pPr>
+            <a:lvl8pPr eaLnBrk="1" hangingPunct="1">
+              <a:defRPr>
+                <a:solidFill>
+                  <a:schemeClr val="tx2"/>
+                </a:solidFill>
+              </a:defRPr>
+            </a:lvl8pPr>
+            <a:lvl9pPr eaLnBrk="1" hangingPunct="1">
+              <a:defRPr>
+                <a:solidFill>
+                  <a:schemeClr val="tx2"/>
+                </a:solidFill>
+              </a:defRPr>
+            </a:lvl9pPr>
+          </a:lstStyle>
+          <a:p>
+            <a:pPr algn="ctr"/>
+            <a:r>
+              <a:rPr lang="en-US" b="1" dirty="0">
+                <a:solidFill>
+                  <a:schemeClr val="accent1">
+                    <a:lumMod val="75000"/>
+                  </a:schemeClr>
+                </a:solidFill>
+              </a:rPr>
+              <a:t>013</a:t>
+            </a:r>
+            <a:endParaRPr lang="ru-RU" b="1" dirty="0">
+              <a:solidFill>
+                <a:schemeClr val="accent1">
+                  <a:lumMod val="75000"/>
+                </a:schemeClr>
+              </a:solidFill>
+            </a:endParaRPr>
+          </a:p>
+        </p:txBody>
+      </p:sp>
+      <p:pic>
+        <p:nvPicPr>
+          <p:cNvPr id="3" name="Picture 2">
+            <a:extLst>
+              <a:ext uri="{FF2B5EF4-FFF2-40B4-BE49-F238E27FC236}">
+                <a16:creationId xmlns:a16="http://schemas.microsoft.com/office/drawing/2014/main" id="{4E614281-3ADF-472D-2931-489A3478383F}"/>
+              </a:ext>
+            </a:extLst>
+          </p:cNvPr>
+          <p:cNvPicPr>
+            <a:picLocks noChangeAspect="1"/>
+          </p:cNvPicPr>
+          <p:nvPr/>
+        </p:nvPicPr>
+        <p:blipFill>
+          <a:blip r:embed="rId2"/>
+          <a:stretch>
+            <a:fillRect/>
+          </a:stretch>
+        </p:blipFill>
+        <p:spPr>
+          <a:xfrm>
+            <a:off x="236841" y="1853248"/>
+            <a:ext cx="8296646" cy="4669795"/>
+          </a:xfrm>
+          <a:prstGeom prst="rect">
+            <a:avLst/>
+          </a:prstGeom>
+          <a:ln>
+            <a:noFill/>
+          </a:ln>
+          <a:effectLst>
+            <a:outerShdw blurRad="292100" dist="139700" dir="2700000" algn="tl" rotWithShape="0">
+              <a:srgbClr val="333333">
+                <a:alpha val="65000"/>
+              </a:srgbClr>
+            </a:outerShdw>
+          </a:effectLst>
+        </p:spPr>
+      </p:pic>
+      <p:sp>
+        <p:nvSpPr>
+          <p:cNvPr id="6" name="Rectangle: Rounded Corners 5">
+            <a:extLst>
+              <a:ext uri="{FF2B5EF4-FFF2-40B4-BE49-F238E27FC236}">
+                <a16:creationId xmlns:a16="http://schemas.microsoft.com/office/drawing/2014/main" id="{187C01DC-4B1F-E5E6-7F0A-1890A1D4A655}"/>
+              </a:ext>
+            </a:extLst>
+          </p:cNvPr>
+          <p:cNvSpPr/>
+          <p:nvPr/>
+        </p:nvSpPr>
+        <p:spPr>
+          <a:xfrm>
+            <a:off x="596436" y="2188396"/>
+            <a:ext cx="2054832" cy="1400530"/>
+          </a:xfrm>
+          <a:prstGeom prst="roundRect">
+            <a:avLst>
+              <a:gd name="adj" fmla="val 6916"/>
+            </a:avLst>
+          </a:prstGeom>
+          <a:solidFill>
+            <a:srgbClr val="FFCC66">
+              <a:alpha val="20000"/>
+            </a:srgbClr>
+          </a:solidFill>
+          <a:ln>
+            <a:solidFill>
+              <a:srgbClr val="92D050"/>
+            </a:solidFill>
+          </a:ln>
+        </p:spPr>
+        <p:style>
+          <a:lnRef idx="2">
+            <a:schemeClr val="accent1">
+              <a:shade val="15000"/>
+            </a:schemeClr>
+          </a:lnRef>
+          <a:fillRef idx="1">
+            <a:schemeClr val="accent1"/>
+          </a:fillRef>
+          <a:effectRef idx="0">
+            <a:schemeClr val="accent1"/>
+          </a:effectRef>
+          <a:fontRef idx="minor">
+            <a:schemeClr val="lt1"/>
+          </a:fontRef>
+        </p:style>
+        <p:txBody>
+          <a:bodyPr rtlCol="0" anchor="ctr"/>
+          <a:lstStyle/>
+          <a:p>
+            <a:pPr algn="ctr"/>
+            <a:endParaRPr lang="en-US"/>
+          </a:p>
+        </p:txBody>
+      </p:sp>
+      <p:pic>
+        <p:nvPicPr>
+          <p:cNvPr id="11" name="Picture 10">
+            <a:extLst>
+              <a:ext uri="{FF2B5EF4-FFF2-40B4-BE49-F238E27FC236}">
+                <a16:creationId xmlns:a16="http://schemas.microsoft.com/office/drawing/2014/main" id="{6C56ADE7-8458-E11A-BC64-E7137E648DFB}"/>
+              </a:ext>
+            </a:extLst>
+          </p:cNvPr>
+          <p:cNvPicPr>
+            <a:picLocks noChangeAspect="1"/>
+          </p:cNvPicPr>
+          <p:nvPr/>
+        </p:nvPicPr>
+        <p:blipFill>
+          <a:blip r:embed="rId3"/>
+          <a:stretch>
+            <a:fillRect/>
+          </a:stretch>
+        </p:blipFill>
+        <p:spPr>
+          <a:xfrm>
+            <a:off x="157000" y="1094226"/>
+            <a:ext cx="362976" cy="362976"/>
+          </a:xfrm>
+          <a:prstGeom prst="rect">
+            <a:avLst/>
+          </a:prstGeom>
+          <a:ln>
+            <a:noFill/>
+          </a:ln>
+          <a:effectLst>
+            <a:outerShdw blurRad="292100" dist="139700" dir="2700000" algn="tl" rotWithShape="0">
+              <a:srgbClr val="333333">
+                <a:alpha val="65000"/>
+              </a:srgbClr>
+            </a:outerShdw>
+          </a:effectLst>
+        </p:spPr>
+      </p:pic>
+      <p:pic>
+        <p:nvPicPr>
+          <p:cNvPr id="12" name="Picture 11">
+            <a:extLst>
+              <a:ext uri="{FF2B5EF4-FFF2-40B4-BE49-F238E27FC236}">
+                <a16:creationId xmlns:a16="http://schemas.microsoft.com/office/drawing/2014/main" id="{8F3B1AAC-90F0-3B95-B20E-9ADAF588912A}"/>
+              </a:ext>
+            </a:extLst>
+          </p:cNvPr>
+          <p:cNvPicPr>
+            <a:picLocks noChangeAspect="1"/>
+          </p:cNvPicPr>
+          <p:nvPr/>
+        </p:nvPicPr>
+        <p:blipFill>
+          <a:blip r:embed="rId4"/>
+          <a:stretch>
+            <a:fillRect/>
+          </a:stretch>
+        </p:blipFill>
+        <p:spPr>
+          <a:xfrm>
+            <a:off x="611241" y="1094226"/>
+            <a:ext cx="362976" cy="362976"/>
+          </a:xfrm>
+          <a:prstGeom prst="rect">
+            <a:avLst/>
+          </a:prstGeom>
+          <a:ln>
+            <a:noFill/>
+          </a:ln>
+          <a:effectLst>
+            <a:outerShdw blurRad="292100" dist="139700" dir="2700000" algn="tl" rotWithShape="0">
+              <a:srgbClr val="333333">
+                <a:alpha val="65000"/>
+              </a:srgbClr>
+            </a:outerShdw>
+          </a:effectLst>
+        </p:spPr>
+      </p:pic>
+      <p:pic>
+        <p:nvPicPr>
+          <p:cNvPr id="13" name="Picture 12">
+            <a:extLst>
+              <a:ext uri="{FF2B5EF4-FFF2-40B4-BE49-F238E27FC236}">
+                <a16:creationId xmlns:a16="http://schemas.microsoft.com/office/drawing/2014/main" id="{C3004357-1761-1A4F-8DD2-584F94679DE1}"/>
+              </a:ext>
+            </a:extLst>
+          </p:cNvPr>
+          <p:cNvPicPr>
+            <a:picLocks noChangeAspect="1"/>
+          </p:cNvPicPr>
+          <p:nvPr/>
+        </p:nvPicPr>
+        <p:blipFill>
+          <a:blip r:embed="rId5"/>
+          <a:stretch>
+            <a:fillRect/>
+          </a:stretch>
+        </p:blipFill>
+        <p:spPr>
+          <a:xfrm>
+            <a:off x="1065482" y="1094226"/>
+            <a:ext cx="371111" cy="362976"/>
+          </a:xfrm>
+          <a:prstGeom prst="rect">
+            <a:avLst/>
+          </a:prstGeom>
+          <a:ln>
+            <a:noFill/>
+          </a:ln>
+          <a:effectLst>
+            <a:outerShdw blurRad="292100" dist="139700" dir="2700000" algn="tl" rotWithShape="0">
+              <a:srgbClr val="333333">
+                <a:alpha val="65000"/>
+              </a:srgbClr>
+            </a:outerShdw>
+          </a:effectLst>
+        </p:spPr>
+      </p:pic>
+      <p:pic>
+        <p:nvPicPr>
+          <p:cNvPr id="7" name="Picture 6">
+            <a:extLst>
+              <a:ext uri="{FF2B5EF4-FFF2-40B4-BE49-F238E27FC236}">
+                <a16:creationId xmlns:a16="http://schemas.microsoft.com/office/drawing/2014/main" id="{06D59839-0A82-F3F9-5F5A-B4B3170CF0C5}"/>
+              </a:ext>
+            </a:extLst>
+          </p:cNvPr>
+          <p:cNvPicPr>
+            <a:picLocks noChangeAspect="1"/>
+          </p:cNvPicPr>
+          <p:nvPr/>
+        </p:nvPicPr>
+        <p:blipFill>
+          <a:blip r:embed="rId6"/>
+          <a:stretch>
+            <a:fillRect/>
+          </a:stretch>
+        </p:blipFill>
+        <p:spPr>
+          <a:xfrm>
+            <a:off x="7520683" y="2964557"/>
+            <a:ext cx="4544076" cy="1905581"/>
+          </a:xfrm>
+          <a:prstGeom prst="roundRect">
+            <a:avLst>
+              <a:gd name="adj" fmla="val 16667"/>
+            </a:avLst>
+          </a:prstGeom>
+          <a:ln>
+            <a:noFill/>
+          </a:ln>
+          <a:effectLst>
+            <a:outerShdw blurRad="152400" dist="12000" dir="900000" sy="98000" kx="110000" ky="200000" algn="tl" rotWithShape="0">
+              <a:srgbClr val="000000">
+                <a:alpha val="30000"/>
+              </a:srgbClr>
+            </a:outerShdw>
+          </a:effectLst>
+          <a:scene3d>
+            <a:camera prst="perspectiveRelaxed">
+              <a:rot lat="19800000" lon="1200000" rev="20820000"/>
+            </a:camera>
+            <a:lightRig rig="threePt" dir="t"/>
+          </a:scene3d>
+          <a:sp3d contourW="6350" prstMaterial="matte">
+            <a:bevelT w="101600" h="101600"/>
+            <a:contourClr>
+              <a:srgbClr val="969696"/>
+            </a:contourClr>
+          </a:sp3d>
+        </p:spPr>
+      </p:pic>
+    </p:spTree>
+    <p:extLst>
+      <p:ext uri="{BB962C8B-B14F-4D97-AF65-F5344CB8AC3E}">
+        <p14:creationId xmlns:p14="http://schemas.microsoft.com/office/powerpoint/2010/main" val="3625269238"/>
+      </p:ext>
+    </p:extLst>
+  </p:cSld>
+  <p:clrMapOvr>
+    <a:masterClrMapping/>
+  </p:clrMapOvr>
+</p:sld>
+</file>
+
+<file path=ppt/slides/slide16.xml><?xml version="1.0" encoding="utf-8"?>
+<p:sld xmlns:a="http://schemas.openxmlformats.org/drawingml/2006/main" xmlns:r="http://schemas.openxmlformats.org/officeDocument/2006/relationships" xmlns:p="http://schemas.openxmlformats.org/presentationml/2006/main">
+  <p:cSld>
+    <p:spTree>
+      <p:nvGrpSpPr>
+        <p:cNvPr id="1" name="">
+          <a:extLst>
+            <a:ext uri="{FF2B5EF4-FFF2-40B4-BE49-F238E27FC236}">
+              <a16:creationId xmlns:a16="http://schemas.microsoft.com/office/drawing/2014/main" id="{9F61E52D-1F4F-37FD-1A10-F861C13C54A4}"/>
+            </a:ext>
+          </a:extLst>
+        </p:cNvPr>
+        <p:cNvGrpSpPr/>
+        <p:nvPr/>
+      </p:nvGrpSpPr>
+      <p:grpSpPr>
+        <a:xfrm>
+          <a:off x="0" y="0"/>
+          <a:ext cx="0" cy="0"/>
+          <a:chOff x="0" y="0"/>
+          <a:chExt cx="0" cy="0"/>
+        </a:xfrm>
+      </p:grpSpPr>
+      <p:pic>
+        <p:nvPicPr>
+          <p:cNvPr id="3" name="Picture 2">
+            <a:extLst>
+              <a:ext uri="{FF2B5EF4-FFF2-40B4-BE49-F238E27FC236}">
+                <a16:creationId xmlns:a16="http://schemas.microsoft.com/office/drawing/2014/main" id="{2F93A7D5-95FD-4BBD-199D-FE3727FB9FB4}"/>
+              </a:ext>
+            </a:extLst>
+          </p:cNvPr>
+          <p:cNvPicPr>
+            <a:picLocks noChangeAspect="1"/>
+          </p:cNvPicPr>
+          <p:nvPr/>
+        </p:nvPicPr>
+        <p:blipFill>
+          <a:blip r:embed="rId2"/>
+          <a:stretch>
+            <a:fillRect/>
+          </a:stretch>
+        </p:blipFill>
+        <p:spPr>
+          <a:xfrm>
+            <a:off x="2592309" y="0"/>
+            <a:ext cx="7007382" cy="6858000"/>
+          </a:xfrm>
+          <a:prstGeom prst="rect">
+            <a:avLst/>
+          </a:prstGeom>
+        </p:spPr>
+      </p:pic>
+      <p:sp>
+        <p:nvSpPr>
+          <p:cNvPr id="4" name="Rectangle 3">
+            <a:extLst>
+              <a:ext uri="{FF2B5EF4-FFF2-40B4-BE49-F238E27FC236}">
+                <a16:creationId xmlns:a16="http://schemas.microsoft.com/office/drawing/2014/main" id="{E62D5D00-3B75-7685-E3EE-46133C0150C2}"/>
+              </a:ext>
+            </a:extLst>
+          </p:cNvPr>
+          <p:cNvSpPr/>
+          <p:nvPr/>
+        </p:nvSpPr>
+        <p:spPr>
+          <a:xfrm>
+            <a:off x="3700530" y="223234"/>
+            <a:ext cx="957329" cy="64394"/>
+          </a:xfrm>
+          <a:prstGeom prst="rect">
+            <a:avLst/>
+          </a:prstGeom>
+          <a:solidFill>
+            <a:srgbClr val="ACD433">
+              <a:alpha val="50196"/>
+            </a:srgbClr>
+          </a:solidFill>
+        </p:spPr>
+        <p:style>
+          <a:lnRef idx="2">
+            <a:schemeClr val="accent1">
+              <a:shade val="15000"/>
+            </a:schemeClr>
+          </a:lnRef>
+          <a:fillRef idx="1">
+            <a:schemeClr val="accent1"/>
+          </a:fillRef>
+          <a:effectRef idx="0">
+            <a:schemeClr val="accent1"/>
+          </a:effectRef>
+          <a:fontRef idx="minor">
+            <a:schemeClr val="lt1"/>
+          </a:fontRef>
+        </p:style>
+        <p:txBody>
+          <a:bodyPr rtlCol="0" anchor="ctr"/>
+          <a:lstStyle/>
+          <a:p>
+            <a:pPr algn="ctr"/>
+            <a:endParaRPr lang="en-US"/>
+          </a:p>
+        </p:txBody>
+      </p:sp>
+      <p:sp>
+        <p:nvSpPr>
+          <p:cNvPr id="5" name="Rectangle 4">
+            <a:extLst>
+              <a:ext uri="{FF2B5EF4-FFF2-40B4-BE49-F238E27FC236}">
+                <a16:creationId xmlns:a16="http://schemas.microsoft.com/office/drawing/2014/main" id="{54EE5344-B642-2EB0-9C8B-5F6F2D746E8C}"/>
+              </a:ext>
+            </a:extLst>
+          </p:cNvPr>
+          <p:cNvSpPr/>
+          <p:nvPr/>
+        </p:nvSpPr>
+        <p:spPr>
+          <a:xfrm>
+            <a:off x="3619568" y="0"/>
+            <a:ext cx="233295" cy="181579"/>
+          </a:xfrm>
+          <a:prstGeom prst="rect">
+            <a:avLst/>
+          </a:prstGeom>
+          <a:solidFill>
+            <a:srgbClr val="ACD433">
+              <a:alpha val="50196"/>
+            </a:srgbClr>
+          </a:solidFill>
+        </p:spPr>
+        <p:style>
+          <a:lnRef idx="2">
+            <a:schemeClr val="accent1">
+              <a:shade val="15000"/>
+            </a:schemeClr>
+          </a:lnRef>
+          <a:fillRef idx="1">
+            <a:schemeClr val="accent1"/>
+          </a:fillRef>
+          <a:effectRef idx="0">
+            <a:schemeClr val="accent1"/>
+          </a:effectRef>
+          <a:fontRef idx="minor">
+            <a:schemeClr val="lt1"/>
+          </a:fontRef>
+        </p:style>
+        <p:txBody>
+          <a:bodyPr rtlCol="0" anchor="ctr"/>
+          <a:lstStyle/>
+          <a:p>
+            <a:pPr algn="ctr"/>
+            <a:endParaRPr lang="en-US"/>
+          </a:p>
+        </p:txBody>
+      </p:sp>
+      <p:sp>
+        <p:nvSpPr>
+          <p:cNvPr id="6" name="Rectangle 5">
+            <a:extLst>
+              <a:ext uri="{FF2B5EF4-FFF2-40B4-BE49-F238E27FC236}">
+                <a16:creationId xmlns:a16="http://schemas.microsoft.com/office/drawing/2014/main" id="{32368065-3FDD-A3B5-C9DE-0E9AA1F4DDAA}"/>
+              </a:ext>
+            </a:extLst>
+          </p:cNvPr>
+          <p:cNvSpPr/>
+          <p:nvPr/>
+        </p:nvSpPr>
+        <p:spPr>
+          <a:xfrm>
+            <a:off x="2913124" y="164641"/>
+            <a:ext cx="233295" cy="568784"/>
+          </a:xfrm>
+          <a:prstGeom prst="rect">
+            <a:avLst/>
+          </a:prstGeom>
+          <a:solidFill>
+            <a:srgbClr val="ACD433">
+              <a:alpha val="50196"/>
+            </a:srgbClr>
+          </a:solidFill>
+        </p:spPr>
+        <p:style>
+          <a:lnRef idx="2">
+            <a:schemeClr val="accent1">
+              <a:shade val="15000"/>
+            </a:schemeClr>
+          </a:lnRef>
+          <a:fillRef idx="1">
+            <a:schemeClr val="accent1"/>
+          </a:fillRef>
+          <a:effectRef idx="0">
+            <a:schemeClr val="accent1"/>
+          </a:effectRef>
+          <a:fontRef idx="minor">
+            <a:schemeClr val="lt1"/>
+          </a:fontRef>
+        </p:style>
+        <p:txBody>
+          <a:bodyPr rtlCol="0" anchor="ctr"/>
+          <a:lstStyle/>
+          <a:p>
+            <a:pPr algn="ctr"/>
+            <a:endParaRPr lang="en-US"/>
+          </a:p>
+        </p:txBody>
+      </p:sp>
+      <p:sp>
+        <p:nvSpPr>
+          <p:cNvPr id="7" name="Rectangle 6">
+            <a:extLst>
+              <a:ext uri="{FF2B5EF4-FFF2-40B4-BE49-F238E27FC236}">
+                <a16:creationId xmlns:a16="http://schemas.microsoft.com/office/drawing/2014/main" id="{E9B957A5-E7E6-B333-3B23-F21788BF0DC9}"/>
+              </a:ext>
+            </a:extLst>
+          </p:cNvPr>
+          <p:cNvSpPr/>
+          <p:nvPr/>
+        </p:nvSpPr>
+        <p:spPr>
+          <a:xfrm>
+            <a:off x="2913124" y="996949"/>
+            <a:ext cx="115825" cy="298451"/>
+          </a:xfrm>
+          <a:prstGeom prst="rect">
+            <a:avLst/>
+          </a:prstGeom>
+          <a:solidFill>
+            <a:srgbClr val="ACD433">
+              <a:alpha val="50196"/>
+            </a:srgbClr>
+          </a:solidFill>
+        </p:spPr>
+        <p:style>
+          <a:lnRef idx="2">
+            <a:schemeClr val="accent1">
+              <a:shade val="15000"/>
+            </a:schemeClr>
+          </a:lnRef>
+          <a:fillRef idx="1">
+            <a:schemeClr val="accent1"/>
+          </a:fillRef>
+          <a:effectRef idx="0">
+            <a:schemeClr val="accent1"/>
+          </a:effectRef>
+          <a:fontRef idx="minor">
+            <a:schemeClr val="lt1"/>
+          </a:fontRef>
+        </p:style>
+        <p:txBody>
+          <a:bodyPr rtlCol="0" anchor="ctr"/>
+          <a:lstStyle/>
+          <a:p>
+            <a:pPr algn="ctr"/>
+            <a:endParaRPr lang="en-US"/>
+          </a:p>
+        </p:txBody>
+      </p:sp>
+      <p:sp>
+        <p:nvSpPr>
+          <p:cNvPr id="2" name="Rectangle 1">
+            <a:extLst>
+              <a:ext uri="{FF2B5EF4-FFF2-40B4-BE49-F238E27FC236}">
+                <a16:creationId xmlns:a16="http://schemas.microsoft.com/office/drawing/2014/main" id="{778A5120-4933-6C99-06C1-EC6F01996EAE}"/>
+              </a:ext>
+            </a:extLst>
+          </p:cNvPr>
+          <p:cNvSpPr/>
+          <p:nvPr/>
+        </p:nvSpPr>
+        <p:spPr>
+          <a:xfrm rot="1551019">
+            <a:off x="3573376" y="623121"/>
+            <a:ext cx="1093916" cy="102021"/>
+          </a:xfrm>
+          <a:prstGeom prst="rect">
+            <a:avLst/>
+          </a:prstGeom>
+          <a:solidFill>
+            <a:srgbClr val="ACD433">
+              <a:alpha val="50196"/>
+            </a:srgbClr>
+          </a:solidFill>
+        </p:spPr>
+        <p:style>
+          <a:lnRef idx="2">
+            <a:schemeClr val="accent1">
+              <a:shade val="15000"/>
+            </a:schemeClr>
+          </a:lnRef>
+          <a:fillRef idx="1">
+            <a:schemeClr val="accent1"/>
+          </a:fillRef>
+          <a:effectRef idx="0">
+            <a:schemeClr val="accent1"/>
+          </a:effectRef>
+          <a:fontRef idx="minor">
+            <a:schemeClr val="lt1"/>
+          </a:fontRef>
+        </p:style>
+        <p:txBody>
+          <a:bodyPr rtlCol="0" anchor="ctr"/>
+          <a:lstStyle/>
+          <a:p>
+            <a:pPr algn="ctr"/>
+            <a:endParaRPr lang="en-US"/>
+          </a:p>
+        </p:txBody>
+      </p:sp>
+      <p:sp>
+        <p:nvSpPr>
+          <p:cNvPr id="8" name="Rectangle 7">
+            <a:extLst>
+              <a:ext uri="{FF2B5EF4-FFF2-40B4-BE49-F238E27FC236}">
+                <a16:creationId xmlns:a16="http://schemas.microsoft.com/office/drawing/2014/main" id="{DB079828-8EB6-36A7-FC9B-3B3ECE872C27}"/>
+              </a:ext>
+            </a:extLst>
+          </p:cNvPr>
+          <p:cNvSpPr/>
+          <p:nvPr/>
+        </p:nvSpPr>
+        <p:spPr>
+          <a:xfrm>
+            <a:off x="5065260" y="733425"/>
+            <a:ext cx="318398" cy="225099"/>
+          </a:xfrm>
+          <a:prstGeom prst="rect">
+            <a:avLst/>
+          </a:prstGeom>
+          <a:solidFill>
+            <a:srgbClr val="ACD433">
+              <a:alpha val="50196"/>
+            </a:srgbClr>
+          </a:solidFill>
+        </p:spPr>
+        <p:style>
+          <a:lnRef idx="2">
+            <a:schemeClr val="accent1">
+              <a:shade val="15000"/>
+            </a:schemeClr>
+          </a:lnRef>
+          <a:fillRef idx="1">
+            <a:schemeClr val="accent1"/>
+          </a:fillRef>
+          <a:effectRef idx="0">
+            <a:schemeClr val="accent1"/>
+          </a:effectRef>
+          <a:fontRef idx="minor">
+            <a:schemeClr val="lt1"/>
+          </a:fontRef>
+        </p:style>
+        <p:txBody>
+          <a:bodyPr rtlCol="0" anchor="ctr"/>
+          <a:lstStyle/>
+          <a:p>
+            <a:pPr algn="ctr"/>
+            <a:endParaRPr lang="en-US"/>
+          </a:p>
+        </p:txBody>
+      </p:sp>
+      <p:sp>
+        <p:nvSpPr>
+          <p:cNvPr id="9" name="Rectangle 8">
+            <a:extLst>
+              <a:ext uri="{FF2B5EF4-FFF2-40B4-BE49-F238E27FC236}">
+                <a16:creationId xmlns:a16="http://schemas.microsoft.com/office/drawing/2014/main" id="{48918369-011C-95DA-5B4B-7458163B83A1}"/>
+              </a:ext>
+            </a:extLst>
+          </p:cNvPr>
+          <p:cNvSpPr/>
+          <p:nvPr/>
+        </p:nvSpPr>
+        <p:spPr>
+          <a:xfrm>
+            <a:off x="4886705" y="434974"/>
+            <a:ext cx="81536" cy="426086"/>
+          </a:xfrm>
+          <a:prstGeom prst="rect">
+            <a:avLst/>
+          </a:prstGeom>
+          <a:solidFill>
+            <a:srgbClr val="ACD433">
+              <a:alpha val="50196"/>
+            </a:srgbClr>
+          </a:solidFill>
+        </p:spPr>
+        <p:style>
+          <a:lnRef idx="2">
+            <a:schemeClr val="accent1">
+              <a:shade val="15000"/>
+            </a:schemeClr>
+          </a:lnRef>
+          <a:fillRef idx="1">
+            <a:schemeClr val="accent1"/>
+          </a:fillRef>
+          <a:effectRef idx="0">
+            <a:schemeClr val="accent1"/>
+          </a:effectRef>
+          <a:fontRef idx="minor">
+            <a:schemeClr val="lt1"/>
+          </a:fontRef>
+        </p:style>
+        <p:txBody>
+          <a:bodyPr rtlCol="0" anchor="ctr"/>
+          <a:lstStyle/>
+          <a:p>
+            <a:pPr algn="ctr"/>
+            <a:endParaRPr lang="en-US"/>
+          </a:p>
+        </p:txBody>
+      </p:sp>
+      <p:sp>
+        <p:nvSpPr>
+          <p:cNvPr id="10" name="Rectangle 9">
+            <a:extLst>
+              <a:ext uri="{FF2B5EF4-FFF2-40B4-BE49-F238E27FC236}">
+                <a16:creationId xmlns:a16="http://schemas.microsoft.com/office/drawing/2014/main" id="{EB468BC5-3FAA-311F-BB88-25F91429B294}"/>
+              </a:ext>
+            </a:extLst>
+          </p:cNvPr>
+          <p:cNvSpPr/>
+          <p:nvPr/>
+        </p:nvSpPr>
+        <p:spPr>
+          <a:xfrm>
+            <a:off x="5006340" y="478664"/>
+            <a:ext cx="622522" cy="100455"/>
+          </a:xfrm>
+          <a:prstGeom prst="rect">
+            <a:avLst/>
+          </a:prstGeom>
+          <a:solidFill>
+            <a:srgbClr val="ACD433">
+              <a:alpha val="50196"/>
+            </a:srgbClr>
+          </a:solidFill>
+        </p:spPr>
+        <p:style>
+          <a:lnRef idx="2">
+            <a:schemeClr val="accent1">
+              <a:shade val="15000"/>
+            </a:schemeClr>
+          </a:lnRef>
+          <a:fillRef idx="1">
+            <a:schemeClr val="accent1"/>
+          </a:fillRef>
+          <a:effectRef idx="0">
+            <a:schemeClr val="accent1"/>
+          </a:effectRef>
+          <a:fontRef idx="minor">
+            <a:schemeClr val="lt1"/>
+          </a:fontRef>
+        </p:style>
+        <p:txBody>
+          <a:bodyPr rtlCol="0" anchor="ctr"/>
+          <a:lstStyle/>
+          <a:p>
+            <a:pPr algn="ctr"/>
+            <a:endParaRPr lang="en-US"/>
+          </a:p>
+        </p:txBody>
+      </p:sp>
+      <p:sp>
+        <p:nvSpPr>
+          <p:cNvPr id="11" name="Rectangle 10">
+            <a:extLst>
+              <a:ext uri="{FF2B5EF4-FFF2-40B4-BE49-F238E27FC236}">
+                <a16:creationId xmlns:a16="http://schemas.microsoft.com/office/drawing/2014/main" id="{D12A32D1-5AAE-F4A1-4339-F328B076E577}"/>
+              </a:ext>
+            </a:extLst>
+          </p:cNvPr>
+          <p:cNvSpPr/>
+          <p:nvPr/>
+        </p:nvSpPr>
+        <p:spPr>
+          <a:xfrm>
+            <a:off x="5006340" y="587374"/>
+            <a:ext cx="114301" cy="273686"/>
+          </a:xfrm>
+          <a:prstGeom prst="rect">
+            <a:avLst/>
+          </a:prstGeom>
+          <a:solidFill>
+            <a:srgbClr val="ACD433">
+              <a:alpha val="50196"/>
+            </a:srgbClr>
+          </a:solidFill>
+        </p:spPr>
+        <p:style>
+          <a:lnRef idx="2">
+            <a:schemeClr val="accent1">
+              <a:shade val="15000"/>
+            </a:schemeClr>
+          </a:lnRef>
+          <a:fillRef idx="1">
+            <a:schemeClr val="accent1"/>
+          </a:fillRef>
+          <a:effectRef idx="0">
+            <a:schemeClr val="accent1"/>
+          </a:effectRef>
+          <a:fontRef idx="minor">
+            <a:schemeClr val="lt1"/>
+          </a:fontRef>
+        </p:style>
+        <p:txBody>
+          <a:bodyPr rtlCol="0" anchor="ctr"/>
+          <a:lstStyle/>
+          <a:p>
+            <a:pPr algn="ctr"/>
+            <a:endParaRPr lang="en-US"/>
+          </a:p>
+        </p:txBody>
+      </p:sp>
+    </p:spTree>
+    <p:extLst>
+      <p:ext uri="{BB962C8B-B14F-4D97-AF65-F5344CB8AC3E}">
+        <p14:creationId xmlns:p14="http://schemas.microsoft.com/office/powerpoint/2010/main" val="2007288725"/>
+      </p:ext>
+    </p:extLst>
+  </p:cSld>
+  <p:clrMapOvr>
+    <a:masterClrMapping/>
+  </p:clrMapOvr>
+</p:sld>
+</file>
+
+<file path=ppt/slides/slide17.xml><?xml version="1.0" encoding="utf-8"?>
+<p:sld xmlns:a="http://schemas.openxmlformats.org/drawingml/2006/main" xmlns:r="http://schemas.openxmlformats.org/officeDocument/2006/relationships" xmlns:p="http://schemas.openxmlformats.org/presentationml/2006/main">
+  <p:cSld>
+    <p:spTree>
+      <p:nvGrpSpPr>
+        <p:cNvPr id="1" name="">
+          <a:extLst>
+            <a:ext uri="{FF2B5EF4-FFF2-40B4-BE49-F238E27FC236}">
+              <a16:creationId xmlns:a16="http://schemas.microsoft.com/office/drawing/2014/main" id="{E8DCA127-570B-7BA0-1142-69C45478CDC5}"/>
+            </a:ext>
+          </a:extLst>
+        </p:cNvPr>
+        <p:cNvGrpSpPr/>
+        <p:nvPr/>
+      </p:nvGrpSpPr>
+      <p:grpSpPr>
+        <a:xfrm>
+          <a:off x="0" y="0"/>
+          <a:ext cx="0" cy="0"/>
+          <a:chOff x="0" y="0"/>
+          <a:chExt cx="0" cy="0"/>
+        </a:xfrm>
+      </p:grpSpPr>
+      <p:sp>
+        <p:nvSpPr>
+          <p:cNvPr id="2" name="Title 1">
+            <a:extLst>
+              <a:ext uri="{FF2B5EF4-FFF2-40B4-BE49-F238E27FC236}">
+                <a16:creationId xmlns:a16="http://schemas.microsoft.com/office/drawing/2014/main" id="{6E2C1959-6755-3E62-8836-4039E43F0714}"/>
+              </a:ext>
+            </a:extLst>
+          </p:cNvPr>
+          <p:cNvSpPr>
+            <a:spLocks noGrp="1"/>
+          </p:cNvSpPr>
+          <p:nvPr>
+            <p:ph type="title"/>
+          </p:nvPr>
+        </p:nvSpPr>
+        <p:spPr>
+          <a:xfrm>
+            <a:off x="1754188" y="452718"/>
+            <a:ext cx="8296646" cy="1400530"/>
+          </a:xfrm>
+        </p:spPr>
+        <p:txBody>
+          <a:bodyPr/>
+          <a:lstStyle/>
+          <a:p>
+            <a:r>
+              <a:rPr lang="en-US" b="1" dirty="0"/>
+              <a:t>Essential EA Meta-Model</a:t>
+            </a:r>
+            <a:br>
+              <a:rPr lang="en-US" b="1" dirty="0"/>
+            </a:br>
+            <a:r>
+              <a:rPr lang="en-US" b="1" dirty="0"/>
+              <a:t>- Business Conceptual - 08 </a:t>
+            </a:r>
+          </a:p>
+        </p:txBody>
+      </p:sp>
+      <p:sp>
+        <p:nvSpPr>
+          <p:cNvPr id="4" name="Title 1">
+            <a:extLst>
+              <a:ext uri="{FF2B5EF4-FFF2-40B4-BE49-F238E27FC236}">
+                <a16:creationId xmlns:a16="http://schemas.microsoft.com/office/drawing/2014/main" id="{A78E7F61-C83B-C0BA-325F-28D949528820}"/>
+              </a:ext>
+            </a:extLst>
+          </p:cNvPr>
+          <p:cNvSpPr txBox="1">
+            <a:spLocks/>
+          </p:cNvSpPr>
+          <p:nvPr/>
+        </p:nvSpPr>
+        <p:spPr>
+          <a:xfrm>
+            <a:off x="0" y="3143"/>
+            <a:ext cx="1754188" cy="1058013"/>
+          </a:xfrm>
+          <a:prstGeom prst="rect">
+            <a:avLst/>
+          </a:prstGeom>
+        </p:spPr>
+        <p:txBody>
+          <a:bodyPr vert="horz" lIns="91440" tIns="45720" rIns="91440" bIns="45720" rtlCol="0" anchor="ctr">
+            <a:noAutofit/>
+          </a:bodyPr>
+          <a:lstStyle>
+            <a:lvl1pPr algn="l" defTabSz="457200" rtl="0" eaLnBrk="1" latinLnBrk="0" hangingPunct="1">
+              <a:spcBef>
+                <a:spcPct val="0"/>
+              </a:spcBef>
+              <a:buNone/>
+              <a:defRPr sz="7200" b="0" i="0" kern="1200">
+                <a:solidFill>
+                  <a:schemeClr val="tx2"/>
+                </a:solidFill>
+                <a:latin typeface="+mj-lt"/>
+                <a:ea typeface="+mj-ea"/>
+                <a:cs typeface="+mj-cs"/>
+              </a:defRPr>
+            </a:lvl1pPr>
+            <a:lvl2pPr eaLnBrk="1" hangingPunct="1">
+              <a:defRPr>
+                <a:solidFill>
+                  <a:schemeClr val="tx2"/>
+                </a:solidFill>
+              </a:defRPr>
+            </a:lvl2pPr>
+            <a:lvl3pPr eaLnBrk="1" hangingPunct="1">
+              <a:defRPr>
+                <a:solidFill>
+                  <a:schemeClr val="tx2"/>
+                </a:solidFill>
+              </a:defRPr>
+            </a:lvl3pPr>
+            <a:lvl4pPr eaLnBrk="1" hangingPunct="1">
+              <a:defRPr>
+                <a:solidFill>
+                  <a:schemeClr val="tx2"/>
+                </a:solidFill>
+              </a:defRPr>
+            </a:lvl4pPr>
+            <a:lvl5pPr eaLnBrk="1" hangingPunct="1">
+              <a:defRPr>
+                <a:solidFill>
+                  <a:schemeClr val="tx2"/>
+                </a:solidFill>
+              </a:defRPr>
+            </a:lvl5pPr>
+            <a:lvl6pPr eaLnBrk="1" hangingPunct="1">
+              <a:defRPr>
+                <a:solidFill>
+                  <a:schemeClr val="tx2"/>
+                </a:solidFill>
+              </a:defRPr>
+            </a:lvl6pPr>
+            <a:lvl7pPr eaLnBrk="1" hangingPunct="1">
+              <a:defRPr>
+                <a:solidFill>
+                  <a:schemeClr val="tx2"/>
+                </a:solidFill>
+              </a:defRPr>
+            </a:lvl7pPr>
+            <a:lvl8pPr eaLnBrk="1" hangingPunct="1">
+              <a:defRPr>
+                <a:solidFill>
+                  <a:schemeClr val="tx2"/>
+                </a:solidFill>
+              </a:defRPr>
+            </a:lvl8pPr>
+            <a:lvl9pPr eaLnBrk="1" hangingPunct="1">
+              <a:defRPr>
+                <a:solidFill>
+                  <a:schemeClr val="tx2"/>
+                </a:solidFill>
+              </a:defRPr>
+            </a:lvl9pPr>
+          </a:lstStyle>
+          <a:p>
+            <a:pPr algn="ctr"/>
+            <a:r>
+              <a:rPr lang="en-US" b="1" dirty="0">
+                <a:solidFill>
+                  <a:schemeClr val="accent1">
+                    <a:lumMod val="75000"/>
+                  </a:schemeClr>
+                </a:solidFill>
+              </a:rPr>
+              <a:t>014</a:t>
+            </a:r>
+            <a:endParaRPr lang="ru-RU" b="1" dirty="0">
+              <a:solidFill>
+                <a:schemeClr val="accent1">
+                  <a:lumMod val="75000"/>
+                </a:schemeClr>
+              </a:solidFill>
+            </a:endParaRPr>
+          </a:p>
+        </p:txBody>
+      </p:sp>
+      <p:pic>
+        <p:nvPicPr>
+          <p:cNvPr id="3" name="Picture 2">
+            <a:extLst>
+              <a:ext uri="{FF2B5EF4-FFF2-40B4-BE49-F238E27FC236}">
+                <a16:creationId xmlns:a16="http://schemas.microsoft.com/office/drawing/2014/main" id="{D70935C3-923A-FA2F-787B-EB5185C6B134}"/>
+              </a:ext>
+            </a:extLst>
+          </p:cNvPr>
+          <p:cNvPicPr>
+            <a:picLocks noChangeAspect="1"/>
+          </p:cNvPicPr>
+          <p:nvPr/>
+        </p:nvPicPr>
+        <p:blipFill>
+          <a:blip r:embed="rId2"/>
+          <a:stretch>
+            <a:fillRect/>
+          </a:stretch>
+        </p:blipFill>
+        <p:spPr>
+          <a:xfrm>
+            <a:off x="236841" y="1853248"/>
+            <a:ext cx="8296646" cy="4669795"/>
+          </a:xfrm>
+          <a:prstGeom prst="rect">
+            <a:avLst/>
+          </a:prstGeom>
+          <a:ln>
+            <a:noFill/>
+          </a:ln>
+          <a:effectLst>
+            <a:outerShdw blurRad="292100" dist="139700" dir="2700000" algn="tl" rotWithShape="0">
+              <a:srgbClr val="333333">
+                <a:alpha val="65000"/>
+              </a:srgbClr>
+            </a:outerShdw>
+          </a:effectLst>
+        </p:spPr>
+      </p:pic>
+      <p:sp>
+        <p:nvSpPr>
+          <p:cNvPr id="6" name="Rectangle: Rounded Corners 5">
+            <a:extLst>
+              <a:ext uri="{FF2B5EF4-FFF2-40B4-BE49-F238E27FC236}">
+                <a16:creationId xmlns:a16="http://schemas.microsoft.com/office/drawing/2014/main" id="{E1FE3CF1-2A59-267E-4F53-5D6E1E4C5C9A}"/>
+              </a:ext>
+            </a:extLst>
+          </p:cNvPr>
+          <p:cNvSpPr/>
+          <p:nvPr/>
+        </p:nvSpPr>
+        <p:spPr>
+          <a:xfrm>
+            <a:off x="596436" y="2188396"/>
+            <a:ext cx="2054832" cy="1400530"/>
+          </a:xfrm>
+          <a:prstGeom prst="roundRect">
+            <a:avLst>
+              <a:gd name="adj" fmla="val 6916"/>
+            </a:avLst>
+          </a:prstGeom>
+          <a:solidFill>
+            <a:srgbClr val="FFCC66">
+              <a:alpha val="20000"/>
+            </a:srgbClr>
+          </a:solidFill>
+          <a:ln>
+            <a:solidFill>
+              <a:srgbClr val="92D050"/>
+            </a:solidFill>
+          </a:ln>
+        </p:spPr>
+        <p:style>
+          <a:lnRef idx="2">
+            <a:schemeClr val="accent1">
+              <a:shade val="15000"/>
+            </a:schemeClr>
+          </a:lnRef>
+          <a:fillRef idx="1">
+            <a:schemeClr val="accent1"/>
+          </a:fillRef>
+          <a:effectRef idx="0">
+            <a:schemeClr val="accent1"/>
+          </a:effectRef>
+          <a:fontRef idx="minor">
+            <a:schemeClr val="lt1"/>
+          </a:fontRef>
+        </p:style>
+        <p:txBody>
+          <a:bodyPr rtlCol="0" anchor="ctr"/>
+          <a:lstStyle/>
+          <a:p>
+            <a:pPr algn="ctr"/>
+            <a:endParaRPr lang="en-US"/>
+          </a:p>
+        </p:txBody>
+      </p:sp>
+      <p:pic>
+        <p:nvPicPr>
+          <p:cNvPr id="11" name="Picture 10">
+            <a:extLst>
+              <a:ext uri="{FF2B5EF4-FFF2-40B4-BE49-F238E27FC236}">
+                <a16:creationId xmlns:a16="http://schemas.microsoft.com/office/drawing/2014/main" id="{D0FD72E4-3457-13FE-5449-5BB102D7FDC7}"/>
+              </a:ext>
+            </a:extLst>
+          </p:cNvPr>
+          <p:cNvPicPr>
+            <a:picLocks noChangeAspect="1"/>
+          </p:cNvPicPr>
+          <p:nvPr/>
+        </p:nvPicPr>
+        <p:blipFill>
+          <a:blip r:embed="rId3"/>
+          <a:stretch>
+            <a:fillRect/>
+          </a:stretch>
+        </p:blipFill>
+        <p:spPr>
+          <a:xfrm>
+            <a:off x="157000" y="1094226"/>
+            <a:ext cx="362976" cy="362976"/>
+          </a:xfrm>
+          <a:prstGeom prst="rect">
+            <a:avLst/>
+          </a:prstGeom>
+          <a:ln>
+            <a:noFill/>
+          </a:ln>
+          <a:effectLst>
+            <a:outerShdw blurRad="292100" dist="139700" dir="2700000" algn="tl" rotWithShape="0">
+              <a:srgbClr val="333333">
+                <a:alpha val="65000"/>
+              </a:srgbClr>
+            </a:outerShdw>
+          </a:effectLst>
+        </p:spPr>
+      </p:pic>
+      <p:pic>
+        <p:nvPicPr>
+          <p:cNvPr id="12" name="Picture 11">
+            <a:extLst>
+              <a:ext uri="{FF2B5EF4-FFF2-40B4-BE49-F238E27FC236}">
+                <a16:creationId xmlns:a16="http://schemas.microsoft.com/office/drawing/2014/main" id="{9F4E7F12-C48D-E3BE-E5AF-5B9E100F2BA9}"/>
+              </a:ext>
+            </a:extLst>
+          </p:cNvPr>
+          <p:cNvPicPr>
+            <a:picLocks noChangeAspect="1"/>
+          </p:cNvPicPr>
+          <p:nvPr/>
+        </p:nvPicPr>
+        <p:blipFill>
+          <a:blip r:embed="rId4"/>
+          <a:stretch>
+            <a:fillRect/>
+          </a:stretch>
+        </p:blipFill>
+        <p:spPr>
+          <a:xfrm>
+            <a:off x="611241" y="1094226"/>
+            <a:ext cx="362976" cy="362976"/>
+          </a:xfrm>
+          <a:prstGeom prst="rect">
+            <a:avLst/>
+          </a:prstGeom>
+          <a:ln>
+            <a:noFill/>
+          </a:ln>
+          <a:effectLst>
+            <a:outerShdw blurRad="292100" dist="139700" dir="2700000" algn="tl" rotWithShape="0">
+              <a:srgbClr val="333333">
+                <a:alpha val="65000"/>
+              </a:srgbClr>
+            </a:outerShdw>
+          </a:effectLst>
+        </p:spPr>
+      </p:pic>
+      <p:pic>
+        <p:nvPicPr>
+          <p:cNvPr id="13" name="Picture 12">
+            <a:extLst>
+              <a:ext uri="{FF2B5EF4-FFF2-40B4-BE49-F238E27FC236}">
+                <a16:creationId xmlns:a16="http://schemas.microsoft.com/office/drawing/2014/main" id="{6AAB41F1-C5C4-77DD-577F-8368FB729DF5}"/>
+              </a:ext>
+            </a:extLst>
+          </p:cNvPr>
+          <p:cNvPicPr>
+            <a:picLocks noChangeAspect="1"/>
+          </p:cNvPicPr>
+          <p:nvPr/>
+        </p:nvPicPr>
+        <p:blipFill>
+          <a:blip r:embed="rId5"/>
+          <a:stretch>
+            <a:fillRect/>
+          </a:stretch>
+        </p:blipFill>
+        <p:spPr>
+          <a:xfrm>
+            <a:off x="1065482" y="1094226"/>
+            <a:ext cx="371111" cy="362976"/>
+          </a:xfrm>
+          <a:prstGeom prst="rect">
+            <a:avLst/>
+          </a:prstGeom>
+          <a:ln>
+            <a:noFill/>
+          </a:ln>
+          <a:effectLst>
+            <a:outerShdw blurRad="292100" dist="139700" dir="2700000" algn="tl" rotWithShape="0">
+              <a:srgbClr val="333333">
+                <a:alpha val="65000"/>
+              </a:srgbClr>
+            </a:outerShdw>
+          </a:effectLst>
+        </p:spPr>
+      </p:pic>
+    </p:spTree>
+    <p:extLst>
+      <p:ext uri="{BB962C8B-B14F-4D97-AF65-F5344CB8AC3E}">
+        <p14:creationId xmlns:p14="http://schemas.microsoft.com/office/powerpoint/2010/main" val="194312724"/>
+      </p:ext>
+    </p:extLst>
+  </p:cSld>
+  <p:clrMapOvr>
+    <a:masterClrMapping/>
+  </p:clrMapOvr>
+</p:sld>
+</file>
+
+<file path=ppt/slides/slide18.xml><?xml version="1.0" encoding="utf-8"?>
+<p:sld xmlns:a="http://schemas.openxmlformats.org/drawingml/2006/main" xmlns:r="http://schemas.openxmlformats.org/officeDocument/2006/relationships" xmlns:p="http://schemas.openxmlformats.org/presentationml/2006/main">
+  <p:cSld>
+    <p:spTree>
+      <p:nvGrpSpPr>
+        <p:cNvPr id="1" name="">
+          <a:extLst>
+            <a:ext uri="{FF2B5EF4-FFF2-40B4-BE49-F238E27FC236}">
+              <a16:creationId xmlns:a16="http://schemas.microsoft.com/office/drawing/2014/main" id="{E5396D9C-05A9-A9CA-0D45-6929BA37F101}"/>
+            </a:ext>
+          </a:extLst>
+        </p:cNvPr>
+        <p:cNvGrpSpPr/>
+        <p:nvPr/>
+      </p:nvGrpSpPr>
+      <p:grpSpPr>
+        <a:xfrm>
+          <a:off x="0" y="0"/>
+          <a:ext cx="0" cy="0"/>
+          <a:chOff x="0" y="0"/>
+          <a:chExt cx="0" cy="0"/>
+        </a:xfrm>
+      </p:grpSpPr>
+      <p:sp>
+        <p:nvSpPr>
+          <p:cNvPr id="2" name="Title 1">
+            <a:extLst>
+              <a:ext uri="{FF2B5EF4-FFF2-40B4-BE49-F238E27FC236}">
+                <a16:creationId xmlns:a16="http://schemas.microsoft.com/office/drawing/2014/main" id="{1286E242-9349-AD5E-88C3-9D65A1980B7B}"/>
+              </a:ext>
+            </a:extLst>
+          </p:cNvPr>
+          <p:cNvSpPr>
+            <a:spLocks noGrp="1"/>
+          </p:cNvSpPr>
+          <p:nvPr>
+            <p:ph type="title"/>
+          </p:nvPr>
+        </p:nvSpPr>
+        <p:spPr>
+          <a:xfrm>
+            <a:off x="1754188" y="452718"/>
+            <a:ext cx="8296646" cy="1400530"/>
+          </a:xfrm>
+        </p:spPr>
+        <p:txBody>
+          <a:bodyPr/>
+          <a:lstStyle/>
+          <a:p>
+            <a:r>
+              <a:rPr lang="en-US" b="1" dirty="0"/>
+              <a:t>Essential EA Meta-Model</a:t>
+            </a:r>
+            <a:br>
+              <a:rPr lang="en-US" b="1" dirty="0"/>
+            </a:br>
+            <a:r>
+              <a:rPr lang="en-US" b="1" dirty="0"/>
+              <a:t>- Business Conceptual - 09 </a:t>
+            </a:r>
+          </a:p>
+        </p:txBody>
+      </p:sp>
+      <p:sp>
+        <p:nvSpPr>
+          <p:cNvPr id="4" name="Title 1">
+            <a:extLst>
+              <a:ext uri="{FF2B5EF4-FFF2-40B4-BE49-F238E27FC236}">
+                <a16:creationId xmlns:a16="http://schemas.microsoft.com/office/drawing/2014/main" id="{84114FC6-A4C2-0C5C-B3BF-F6A703398EA3}"/>
+              </a:ext>
+            </a:extLst>
+          </p:cNvPr>
+          <p:cNvSpPr txBox="1">
+            <a:spLocks/>
+          </p:cNvSpPr>
+          <p:nvPr/>
+        </p:nvSpPr>
+        <p:spPr>
+          <a:xfrm>
+            <a:off x="0" y="3143"/>
+            <a:ext cx="1754188" cy="1058013"/>
+          </a:xfrm>
+          <a:prstGeom prst="rect">
+            <a:avLst/>
+          </a:prstGeom>
+        </p:spPr>
+        <p:txBody>
+          <a:bodyPr vert="horz" lIns="91440" tIns="45720" rIns="91440" bIns="45720" rtlCol="0" anchor="ctr">
+            <a:noAutofit/>
+          </a:bodyPr>
+          <a:lstStyle>
+            <a:lvl1pPr algn="l" defTabSz="457200" rtl="0" eaLnBrk="1" latinLnBrk="0" hangingPunct="1">
+              <a:spcBef>
+                <a:spcPct val="0"/>
+              </a:spcBef>
+              <a:buNone/>
+              <a:defRPr sz="7200" b="0" i="0" kern="1200">
+                <a:solidFill>
+                  <a:schemeClr val="tx2"/>
+                </a:solidFill>
+                <a:latin typeface="+mj-lt"/>
+                <a:ea typeface="+mj-ea"/>
+                <a:cs typeface="+mj-cs"/>
+              </a:defRPr>
+            </a:lvl1pPr>
+            <a:lvl2pPr eaLnBrk="1" hangingPunct="1">
+              <a:defRPr>
+                <a:solidFill>
+                  <a:schemeClr val="tx2"/>
+                </a:solidFill>
+              </a:defRPr>
+            </a:lvl2pPr>
+            <a:lvl3pPr eaLnBrk="1" hangingPunct="1">
+              <a:defRPr>
+                <a:solidFill>
+                  <a:schemeClr val="tx2"/>
+                </a:solidFill>
+              </a:defRPr>
+            </a:lvl3pPr>
+            <a:lvl4pPr eaLnBrk="1" hangingPunct="1">
+              <a:defRPr>
+                <a:solidFill>
+                  <a:schemeClr val="tx2"/>
+                </a:solidFill>
+              </a:defRPr>
+            </a:lvl4pPr>
+            <a:lvl5pPr eaLnBrk="1" hangingPunct="1">
+              <a:defRPr>
+                <a:solidFill>
+                  <a:schemeClr val="tx2"/>
+                </a:solidFill>
+              </a:defRPr>
+            </a:lvl5pPr>
+            <a:lvl6pPr eaLnBrk="1" hangingPunct="1">
+              <a:defRPr>
+                <a:solidFill>
+                  <a:schemeClr val="tx2"/>
+                </a:solidFill>
+              </a:defRPr>
+            </a:lvl6pPr>
+            <a:lvl7pPr eaLnBrk="1" hangingPunct="1">
+              <a:defRPr>
+                <a:solidFill>
+                  <a:schemeClr val="tx2"/>
+                </a:solidFill>
+              </a:defRPr>
+            </a:lvl7pPr>
+            <a:lvl8pPr eaLnBrk="1" hangingPunct="1">
+              <a:defRPr>
+                <a:solidFill>
+                  <a:schemeClr val="tx2"/>
+                </a:solidFill>
+              </a:defRPr>
+            </a:lvl8pPr>
+            <a:lvl9pPr eaLnBrk="1" hangingPunct="1">
+              <a:defRPr>
+                <a:solidFill>
+                  <a:schemeClr val="tx2"/>
+                </a:solidFill>
+              </a:defRPr>
+            </a:lvl9pPr>
+          </a:lstStyle>
+          <a:p>
+            <a:pPr algn="ctr"/>
+            <a:r>
+              <a:rPr lang="en-US" b="1" dirty="0">
+                <a:solidFill>
+                  <a:schemeClr val="accent1">
+                    <a:lumMod val="75000"/>
+                  </a:schemeClr>
+                </a:solidFill>
+              </a:rPr>
+              <a:t>015</a:t>
+            </a:r>
+            <a:endParaRPr lang="ru-RU" b="1" dirty="0">
+              <a:solidFill>
+                <a:schemeClr val="accent1">
+                  <a:lumMod val="75000"/>
+                </a:schemeClr>
+              </a:solidFill>
+            </a:endParaRPr>
+          </a:p>
+        </p:txBody>
+      </p:sp>
+      <p:pic>
+        <p:nvPicPr>
+          <p:cNvPr id="3" name="Picture 2">
+            <a:extLst>
+              <a:ext uri="{FF2B5EF4-FFF2-40B4-BE49-F238E27FC236}">
+                <a16:creationId xmlns:a16="http://schemas.microsoft.com/office/drawing/2014/main" id="{ADCBD2B5-D8D7-A727-D12E-8F3074FB3C42}"/>
+              </a:ext>
+            </a:extLst>
+          </p:cNvPr>
+          <p:cNvPicPr>
+            <a:picLocks noChangeAspect="1"/>
+          </p:cNvPicPr>
+          <p:nvPr/>
+        </p:nvPicPr>
+        <p:blipFill>
+          <a:blip r:embed="rId2"/>
+          <a:stretch>
+            <a:fillRect/>
+          </a:stretch>
+        </p:blipFill>
+        <p:spPr>
+          <a:xfrm>
+            <a:off x="236841" y="1853248"/>
+            <a:ext cx="8296646" cy="4669795"/>
+          </a:xfrm>
+          <a:prstGeom prst="rect">
+            <a:avLst/>
+          </a:prstGeom>
+          <a:ln>
+            <a:noFill/>
+          </a:ln>
+          <a:effectLst>
+            <a:outerShdw blurRad="292100" dist="139700" dir="2700000" algn="tl" rotWithShape="0">
+              <a:srgbClr val="333333">
+                <a:alpha val="65000"/>
+              </a:srgbClr>
+            </a:outerShdw>
+          </a:effectLst>
+        </p:spPr>
+      </p:pic>
+      <p:sp>
+        <p:nvSpPr>
+          <p:cNvPr id="6" name="Rectangle: Rounded Corners 5">
+            <a:extLst>
+              <a:ext uri="{FF2B5EF4-FFF2-40B4-BE49-F238E27FC236}">
+                <a16:creationId xmlns:a16="http://schemas.microsoft.com/office/drawing/2014/main" id="{C02248E4-9922-DE55-57D3-E64B98B14891}"/>
+              </a:ext>
+            </a:extLst>
+          </p:cNvPr>
+          <p:cNvSpPr/>
+          <p:nvPr/>
+        </p:nvSpPr>
+        <p:spPr>
+          <a:xfrm>
+            <a:off x="596436" y="2188396"/>
+            <a:ext cx="2054832" cy="1400530"/>
+          </a:xfrm>
+          <a:prstGeom prst="roundRect">
+            <a:avLst>
+              <a:gd name="adj" fmla="val 6916"/>
+            </a:avLst>
+          </a:prstGeom>
+          <a:solidFill>
+            <a:srgbClr val="FFCC66">
+              <a:alpha val="20000"/>
+            </a:srgbClr>
+          </a:solidFill>
+          <a:ln>
+            <a:solidFill>
+              <a:srgbClr val="92D050"/>
+            </a:solidFill>
+          </a:ln>
+        </p:spPr>
+        <p:style>
+          <a:lnRef idx="2">
+            <a:schemeClr val="accent1">
+              <a:shade val="15000"/>
+            </a:schemeClr>
+          </a:lnRef>
+          <a:fillRef idx="1">
+            <a:schemeClr val="accent1"/>
+          </a:fillRef>
+          <a:effectRef idx="0">
+            <a:schemeClr val="accent1"/>
+          </a:effectRef>
+          <a:fontRef idx="minor">
+            <a:schemeClr val="lt1"/>
+          </a:fontRef>
+        </p:style>
+        <p:txBody>
+          <a:bodyPr rtlCol="0" anchor="ctr"/>
+          <a:lstStyle/>
+          <a:p>
+            <a:pPr algn="ctr"/>
+            <a:endParaRPr lang="en-US"/>
+          </a:p>
+        </p:txBody>
+      </p:sp>
+      <p:pic>
+        <p:nvPicPr>
+          <p:cNvPr id="11" name="Picture 10">
+            <a:extLst>
+              <a:ext uri="{FF2B5EF4-FFF2-40B4-BE49-F238E27FC236}">
+                <a16:creationId xmlns:a16="http://schemas.microsoft.com/office/drawing/2014/main" id="{67D162A1-4BAC-D39C-34E1-254CC366FE93}"/>
+              </a:ext>
+            </a:extLst>
+          </p:cNvPr>
+          <p:cNvPicPr>
+            <a:picLocks noChangeAspect="1"/>
+          </p:cNvPicPr>
+          <p:nvPr/>
+        </p:nvPicPr>
+        <p:blipFill>
+          <a:blip r:embed="rId3"/>
+          <a:stretch>
+            <a:fillRect/>
+          </a:stretch>
+        </p:blipFill>
+        <p:spPr>
+          <a:xfrm>
+            <a:off x="157000" y="1094226"/>
+            <a:ext cx="362976" cy="362976"/>
+          </a:xfrm>
+          <a:prstGeom prst="rect">
+            <a:avLst/>
+          </a:prstGeom>
+          <a:ln>
+            <a:noFill/>
+          </a:ln>
+          <a:effectLst>
+            <a:outerShdw blurRad="292100" dist="139700" dir="2700000" algn="tl" rotWithShape="0">
+              <a:srgbClr val="333333">
+                <a:alpha val="65000"/>
+              </a:srgbClr>
+            </a:outerShdw>
+          </a:effectLst>
+        </p:spPr>
+      </p:pic>
+      <p:pic>
+        <p:nvPicPr>
+          <p:cNvPr id="12" name="Picture 11">
+            <a:extLst>
+              <a:ext uri="{FF2B5EF4-FFF2-40B4-BE49-F238E27FC236}">
+                <a16:creationId xmlns:a16="http://schemas.microsoft.com/office/drawing/2014/main" id="{B4E9C6E5-AB88-CF8F-5ECB-475303B793BF}"/>
+              </a:ext>
+            </a:extLst>
+          </p:cNvPr>
+          <p:cNvPicPr>
+            <a:picLocks noChangeAspect="1"/>
+          </p:cNvPicPr>
+          <p:nvPr/>
+        </p:nvPicPr>
+        <p:blipFill>
+          <a:blip r:embed="rId4"/>
+          <a:stretch>
+            <a:fillRect/>
+          </a:stretch>
+        </p:blipFill>
+        <p:spPr>
+          <a:xfrm>
+            <a:off x="611241" y="1094226"/>
+            <a:ext cx="362976" cy="362976"/>
+          </a:xfrm>
+          <a:prstGeom prst="rect">
+            <a:avLst/>
+          </a:prstGeom>
+          <a:ln>
+            <a:noFill/>
+          </a:ln>
+          <a:effectLst>
+            <a:outerShdw blurRad="292100" dist="139700" dir="2700000" algn="tl" rotWithShape="0">
+              <a:srgbClr val="333333">
+                <a:alpha val="65000"/>
+              </a:srgbClr>
+            </a:outerShdw>
+          </a:effectLst>
+        </p:spPr>
+      </p:pic>
+      <p:pic>
+        <p:nvPicPr>
+          <p:cNvPr id="13" name="Picture 12">
+            <a:extLst>
+              <a:ext uri="{FF2B5EF4-FFF2-40B4-BE49-F238E27FC236}">
+                <a16:creationId xmlns:a16="http://schemas.microsoft.com/office/drawing/2014/main" id="{6A8FDD88-4432-AC48-777E-3CFD082B8F9E}"/>
+              </a:ext>
+            </a:extLst>
+          </p:cNvPr>
+          <p:cNvPicPr>
+            <a:picLocks noChangeAspect="1"/>
+          </p:cNvPicPr>
+          <p:nvPr/>
+        </p:nvPicPr>
+        <p:blipFill>
+          <a:blip r:embed="rId5"/>
+          <a:stretch>
+            <a:fillRect/>
+          </a:stretch>
+        </p:blipFill>
+        <p:spPr>
+          <a:xfrm>
+            <a:off x="1065482" y="1094226"/>
+            <a:ext cx="371111" cy="362976"/>
+          </a:xfrm>
+          <a:prstGeom prst="rect">
+            <a:avLst/>
+          </a:prstGeom>
+          <a:ln>
+            <a:noFill/>
+          </a:ln>
+          <a:effectLst>
+            <a:outerShdw blurRad="292100" dist="139700" dir="2700000" algn="tl" rotWithShape="0">
+              <a:srgbClr val="333333">
+                <a:alpha val="65000"/>
+              </a:srgbClr>
+            </a:outerShdw>
+          </a:effectLst>
+        </p:spPr>
+      </p:pic>
+    </p:spTree>
+    <p:extLst>
+      <p:ext uri="{BB962C8B-B14F-4D97-AF65-F5344CB8AC3E}">
+        <p14:creationId xmlns:p14="http://schemas.microsoft.com/office/powerpoint/2010/main" val="151579558"/>
+      </p:ext>
+    </p:extLst>
+  </p:cSld>
+  <p:clrMapOvr>
+    <a:masterClrMapping/>
+  </p:clrMapOvr>
+</p:sld>
+</file>
+
+<file path=ppt/slides/slide19.xml><?xml version="1.0" encoding="utf-8"?>
 <p:sld xmlns:a="http://schemas.openxmlformats.org/drawingml/2006/main" xmlns:r="http://schemas.openxmlformats.org/officeDocument/2006/relationships" xmlns:p="http://schemas.openxmlformats.org/presentationml/2006/main">
   <p:cSld>
     <p:bg>
@@ -12448,25 +15033,36 @@
         </p:blipFill>
         <p:spPr>
           <a:xfrm>
-            <a:off x="8582025" y="3799818"/>
-            <a:ext cx="3524250" cy="776654"/>
+            <a:off x="7870003" y="3642906"/>
+            <a:ext cx="4236271" cy="933565"/>
           </a:xfrm>
           <a:prstGeom prst="roundRect">
             <a:avLst>
-              <a:gd name="adj" fmla="val 8594"/>
+              <a:gd name="adj" fmla="val 16667"/>
             </a:avLst>
           </a:prstGeom>
-          <a:solidFill>
-            <a:srgbClr val="FFFFFF">
-              <a:shade val="85000"/>
-            </a:srgbClr>
-          </a:solidFill>
           <a:ln>
             <a:noFill/>
           </a:ln>
           <a:effectLst>
-            <a:reflection blurRad="12700" stA="38000" endPos="28000" dist="5000" dir="5400000" sy="-100000" algn="bl" rotWithShape="0"/>
+            <a:outerShdw blurRad="152400" dist="12000" dir="900000" sy="98000" kx="110000" ky="200000" algn="tl" rotWithShape="0">
+              <a:srgbClr val="000000">
+                <a:alpha val="30000"/>
+              </a:srgbClr>
+            </a:outerShdw>
           </a:effectLst>
+          <a:scene3d>
+            <a:camera prst="perspectiveRelaxed">
+              <a:rot lat="19800000" lon="1200000" rev="20820000"/>
+            </a:camera>
+            <a:lightRig rig="threePt" dir="t"/>
+          </a:scene3d>
+          <a:sp3d contourW="6350" prstMaterial="matte">
+            <a:bevelT w="101600" h="101600"/>
+            <a:contourClr>
+              <a:srgbClr val="969696"/>
+            </a:contourClr>
+          </a:sp3d>
         </p:spPr>
       </p:pic>
     </p:spTree>
@@ -12766,49 +15362,6 @@
       </p:sp>
       <p:pic>
         <p:nvPicPr>
-          <p:cNvPr id="6" name="Picture 5">
-            <a:extLst>
-              <a:ext uri="{FF2B5EF4-FFF2-40B4-BE49-F238E27FC236}">
-                <a16:creationId xmlns:a16="http://schemas.microsoft.com/office/drawing/2014/main" id="{3388FF68-E6FE-AFFA-E8A8-224461DAFAE4}"/>
-              </a:ext>
-            </a:extLst>
-          </p:cNvPr>
-          <p:cNvPicPr>
-            <a:picLocks noChangeAspect="1"/>
-          </p:cNvPicPr>
-          <p:nvPr/>
-        </p:nvPicPr>
-        <p:blipFill>
-          <a:blip r:embed="rId3"/>
-          <a:stretch>
-            <a:fillRect/>
-          </a:stretch>
-        </p:blipFill>
-        <p:spPr>
-          <a:xfrm>
-            <a:off x="8893082" y="3197407"/>
-            <a:ext cx="2398961" cy="2123337"/>
-          </a:xfrm>
-          <a:prstGeom prst="roundRect">
-            <a:avLst>
-              <a:gd name="adj" fmla="val 8594"/>
-            </a:avLst>
-          </a:prstGeom>
-          <a:solidFill>
-            <a:srgbClr val="FFFFFF">
-              <a:shade val="85000"/>
-            </a:srgbClr>
-          </a:solidFill>
-          <a:ln>
-            <a:noFill/>
-          </a:ln>
-          <a:effectLst>
-            <a:reflection blurRad="12700" stA="38000" endPos="28000" dist="5000" dir="5400000" sy="-100000" algn="bl" rotWithShape="0"/>
-          </a:effectLst>
-        </p:spPr>
-      </p:pic>
-      <p:pic>
-        <p:nvPicPr>
           <p:cNvPr id="8" name="Picture 7">
             <a:extLst>
               <a:ext uri="{FF2B5EF4-FFF2-40B4-BE49-F238E27FC236}">
@@ -12822,7 +15375,7 @@
           <p:nvPr/>
         </p:nvPicPr>
         <p:blipFill>
-          <a:blip r:embed="rId4"/>
+          <a:blip r:embed="rId3"/>
           <a:stretch>
             <a:fillRect/>
           </a:stretch>
@@ -12862,7 +15415,7 @@
           <p:nvPr/>
         </p:nvPicPr>
         <p:blipFill>
-          <a:blip r:embed="rId5"/>
+          <a:blip r:embed="rId4"/>
           <a:stretch>
             <a:fillRect/>
           </a:stretch>
@@ -12902,7 +15455,7 @@
           <p:nvPr/>
         </p:nvPicPr>
         <p:blipFill>
-          <a:blip r:embed="rId6"/>
+          <a:blip r:embed="rId5"/>
           <a:stretch>
             <a:fillRect/>
           </a:stretch>
@@ -12927,62 +15480,126 @@
           </a:effectLst>
         </p:spPr>
       </p:pic>
-      <p:sp>
-        <p:nvSpPr>
-          <p:cNvPr id="11" name="Rectangle 10">
+      <p:grpSp>
+        <p:nvGrpSpPr>
+          <p:cNvPr id="12" name="Group 11">
             <a:extLst>
               <a:ext uri="{FF2B5EF4-FFF2-40B4-BE49-F238E27FC236}">
-                <a16:creationId xmlns:a16="http://schemas.microsoft.com/office/drawing/2014/main" id="{A8828B8B-88B8-5ACA-864D-1DD8AD2339B0}"/>
+                <a16:creationId xmlns:a16="http://schemas.microsoft.com/office/drawing/2014/main" id="{B7B584FF-98AC-3D51-02D1-574C0597C17D}"/>
               </a:ext>
             </a:extLst>
           </p:cNvPr>
-          <p:cNvSpPr/>
+          <p:cNvGrpSpPr/>
           <p:nvPr/>
-        </p:nvSpPr>
-        <p:spPr>
-          <a:xfrm>
-            <a:off x="10582275" y="2952750"/>
-            <a:ext cx="819150" cy="857250"/>
-          </a:xfrm>
-          <a:prstGeom prst="rect">
-            <a:avLst/>
-          </a:prstGeom>
-          <a:solidFill>
-            <a:srgbClr val="ACD433">
-              <a:alpha val="30196"/>
-            </a:srgbClr>
-          </a:solidFill>
-          <a:ln>
+        </p:nvGrpSpPr>
+        <p:grpSpPr>
+          <a:xfrm>
+            <a:off x="8893082" y="2952750"/>
+            <a:ext cx="2508343" cy="2367994"/>
+            <a:chOff x="8893082" y="2952750"/>
+            <a:chExt cx="2508343" cy="2367994"/>
+          </a:xfrm>
+        </p:grpSpPr>
+        <p:pic>
+          <p:nvPicPr>
+            <p:cNvPr id="6" name="Picture 5">
+              <a:extLst>
+                <a:ext uri="{FF2B5EF4-FFF2-40B4-BE49-F238E27FC236}">
+                  <a16:creationId xmlns:a16="http://schemas.microsoft.com/office/drawing/2014/main" id="{3388FF68-E6FE-AFFA-E8A8-224461DAFAE4}"/>
+                </a:ext>
+              </a:extLst>
+            </p:cNvPr>
+            <p:cNvPicPr>
+              <a:picLocks noChangeAspect="1"/>
+            </p:cNvPicPr>
+            <p:nvPr/>
+          </p:nvPicPr>
+          <p:blipFill>
+            <a:blip r:embed="rId6"/>
+            <a:stretch>
+              <a:fillRect/>
+            </a:stretch>
+          </p:blipFill>
+          <p:spPr>
+            <a:xfrm>
+              <a:off x="8893082" y="3197407"/>
+              <a:ext cx="2398961" cy="2123337"/>
+            </a:xfrm>
+            <a:prstGeom prst="roundRect">
+              <a:avLst>
+                <a:gd name="adj" fmla="val 8594"/>
+              </a:avLst>
+            </a:prstGeom>
             <a:solidFill>
-              <a:srgbClr val="00B050"/>
+              <a:srgbClr val="FFFFFF">
+                <a:shade val="85000"/>
+              </a:srgbClr>
             </a:solidFill>
-          </a:ln>
-        </p:spPr>
-        <p:style>
-          <a:lnRef idx="2">
-            <a:schemeClr val="accent1">
-              <a:shade val="15000"/>
-            </a:schemeClr>
-          </a:lnRef>
-          <a:fillRef idx="1">
-            <a:schemeClr val="accent1"/>
-          </a:fillRef>
-          <a:effectRef idx="0">
-            <a:schemeClr val="accent1"/>
-          </a:effectRef>
-          <a:fontRef idx="minor">
-            <a:schemeClr val="lt1"/>
-          </a:fontRef>
-        </p:style>
-        <p:txBody>
-          <a:bodyPr rtlCol="0" anchor="ctr"/>
-          <a:lstStyle/>
-          <a:p>
-            <a:pPr algn="ctr"/>
-            <a:endParaRPr lang="en-US"/>
-          </a:p>
-        </p:txBody>
-      </p:sp>
+            <a:ln>
+              <a:noFill/>
+            </a:ln>
+            <a:effectLst>
+              <a:reflection blurRad="12700" stA="38000" endPos="28000" dist="5000" dir="5400000" sy="-100000" algn="bl" rotWithShape="0"/>
+            </a:effectLst>
+          </p:spPr>
+        </p:pic>
+        <p:sp>
+          <p:nvSpPr>
+            <p:cNvPr id="11" name="Rectangle 10">
+              <a:extLst>
+                <a:ext uri="{FF2B5EF4-FFF2-40B4-BE49-F238E27FC236}">
+                  <a16:creationId xmlns:a16="http://schemas.microsoft.com/office/drawing/2014/main" id="{A8828B8B-88B8-5ACA-864D-1DD8AD2339B0}"/>
+                </a:ext>
+              </a:extLst>
+            </p:cNvPr>
+            <p:cNvSpPr/>
+            <p:nvPr/>
+          </p:nvSpPr>
+          <p:spPr>
+            <a:xfrm>
+              <a:off x="10582275" y="2952750"/>
+              <a:ext cx="819150" cy="857250"/>
+            </a:xfrm>
+            <a:prstGeom prst="rect">
+              <a:avLst/>
+            </a:prstGeom>
+            <a:solidFill>
+              <a:srgbClr val="ACD433">
+                <a:alpha val="30196"/>
+              </a:srgbClr>
+            </a:solidFill>
+            <a:ln>
+              <a:solidFill>
+                <a:srgbClr val="00B050"/>
+              </a:solidFill>
+            </a:ln>
+          </p:spPr>
+          <p:style>
+            <a:lnRef idx="2">
+              <a:schemeClr val="accent1">
+                <a:shade val="15000"/>
+              </a:schemeClr>
+            </a:lnRef>
+            <a:fillRef idx="1">
+              <a:schemeClr val="accent1"/>
+            </a:fillRef>
+            <a:effectRef idx="0">
+              <a:schemeClr val="accent1"/>
+            </a:effectRef>
+            <a:fontRef idx="minor">
+              <a:schemeClr val="lt1"/>
+            </a:fontRef>
+          </p:style>
+          <p:txBody>
+            <a:bodyPr rtlCol="0" anchor="ctr"/>
+            <a:lstStyle/>
+            <a:p>
+              <a:pPr algn="ctr"/>
+              <a:endParaRPr lang="en-US"/>
+            </a:p>
+          </p:txBody>
+        </p:sp>
+      </p:grpSp>
     </p:spTree>
     <p:extLst>
       <p:ext uri="{BB962C8B-B14F-4D97-AF65-F5344CB8AC3E}">

--- a/Master_EAS_Meta-Model.pptx
+++ b/Master_EAS_Meta-Model.pptx
@@ -5,10 +5,10 @@
     <p:sldMasterId id="2147483648" r:id="rId4"/>
   </p:sldMasterIdLst>
   <p:notesMasterIdLst>
-    <p:notesMasterId r:id="rId24"/>
+    <p:notesMasterId r:id="rId27"/>
   </p:notesMasterIdLst>
   <p:handoutMasterIdLst>
-    <p:handoutMasterId r:id="rId25"/>
+    <p:handoutMasterId r:id="rId28"/>
   </p:handoutMasterIdLst>
   <p:sldIdLst>
     <p:sldId id="256" r:id="rId5"/>
@@ -28,8 +28,11 @@
     <p:sldId id="282" r:id="rId19"/>
     <p:sldId id="284" r:id="rId20"/>
     <p:sldId id="285" r:id="rId21"/>
-    <p:sldId id="286" r:id="rId22"/>
-    <p:sldId id="267" r:id="rId23"/>
+    <p:sldId id="287" r:id="rId22"/>
+    <p:sldId id="286" r:id="rId23"/>
+    <p:sldId id="288" r:id="rId24"/>
+    <p:sldId id="289" r:id="rId25"/>
+    <p:sldId id="267" r:id="rId26"/>
   </p:sldIdLst>
   <p:sldSz cx="12192000" cy="6858000"/>
   <p:notesSz cx="6858000" cy="9144000"/>
@@ -837,7 +840,7 @@
           <a:p>
             <a:fld id="{EE000EEB-8338-48D7-8EE8-EE0082EF7602}" type="slidenum">
               <a:rPr lang="en-US" smtClean="0"/>
-              <a:t>19</a:t>
+              <a:t>22</a:t>
             </a:fld>
             <a:endParaRPr lang="en-US" dirty="0"/>
           </a:p>
@@ -11578,6 +11581,60 @@
           </a:effectLst>
         </p:spPr>
       </p:pic>
+      <p:pic>
+        <p:nvPicPr>
+          <p:cNvPr id="8" name="Picture 7">
+            <a:extLst>
+              <a:ext uri="{FF2B5EF4-FFF2-40B4-BE49-F238E27FC236}">
+                <a16:creationId xmlns:a16="http://schemas.microsoft.com/office/drawing/2014/main" id="{33325B68-12FD-DF2E-7782-FFC49E92BCA7}"/>
+              </a:ext>
+            </a:extLst>
+          </p:cNvPr>
+          <p:cNvPicPr>
+            <a:picLocks noChangeAspect="1"/>
+          </p:cNvPicPr>
+          <p:nvPr/>
+        </p:nvPicPr>
+        <p:blipFill>
+          <a:blip r:embed="rId6"/>
+          <a:stretch>
+            <a:fillRect/>
+          </a:stretch>
+        </p:blipFill>
+        <p:spPr>
+          <a:xfrm>
+            <a:off x="7834980" y="2909135"/>
+            <a:ext cx="4120179" cy="2176573"/>
+          </a:xfrm>
+          <a:prstGeom prst="roundRect">
+            <a:avLst>
+              <a:gd name="adj" fmla="val 16667"/>
+            </a:avLst>
+          </a:prstGeom>
+          <a:ln>
+            <a:noFill/>
+          </a:ln>
+          <a:effectLst>
+            <a:outerShdw blurRad="152400" dist="12000" dir="900000" sy="98000" kx="110000" ky="200000" algn="tl" rotWithShape="0">
+              <a:srgbClr val="000000">
+                <a:alpha val="30000"/>
+              </a:srgbClr>
+            </a:outerShdw>
+          </a:effectLst>
+          <a:scene3d>
+            <a:camera prst="perspectiveRelaxed">
+              <a:rot lat="19800000" lon="1200000" rev="20820000"/>
+            </a:camera>
+            <a:lightRig rig="threePt" dir="t"/>
+          </a:scene3d>
+          <a:sp3d contourW="6350" prstMaterial="matte">
+            <a:bevelT w="101600" h="101600"/>
+            <a:contourClr>
+              <a:srgbClr val="969696"/>
+            </a:contourClr>
+          </a:sp3d>
+        </p:spPr>
+      </p:pic>
     </p:spTree>
     <p:extLst>
       <p:ext uri="{BB962C8B-B14F-4D97-AF65-F5344CB8AC3E}">
@@ -11592,6 +11649,735 @@
 </file>
 
 <file path=ppt/slides/slide18.xml><?xml version="1.0" encoding="utf-8"?>
+<p:sld xmlns:a="http://schemas.openxmlformats.org/drawingml/2006/main" xmlns:r="http://schemas.openxmlformats.org/officeDocument/2006/relationships" xmlns:p="http://schemas.openxmlformats.org/presentationml/2006/main">
+  <p:cSld>
+    <p:spTree>
+      <p:nvGrpSpPr>
+        <p:cNvPr id="1" name="">
+          <a:extLst>
+            <a:ext uri="{FF2B5EF4-FFF2-40B4-BE49-F238E27FC236}">
+              <a16:creationId xmlns:a16="http://schemas.microsoft.com/office/drawing/2014/main" id="{72C9946F-D0E4-0012-EC13-F163C0EA93CC}"/>
+            </a:ext>
+          </a:extLst>
+        </p:cNvPr>
+        <p:cNvGrpSpPr/>
+        <p:nvPr/>
+      </p:nvGrpSpPr>
+      <p:grpSpPr>
+        <a:xfrm>
+          <a:off x="0" y="0"/>
+          <a:ext cx="0" cy="0"/>
+          <a:chOff x="0" y="0"/>
+          <a:chExt cx="0" cy="0"/>
+        </a:xfrm>
+      </p:grpSpPr>
+      <p:pic>
+        <p:nvPicPr>
+          <p:cNvPr id="3" name="Picture 2">
+            <a:extLst>
+              <a:ext uri="{FF2B5EF4-FFF2-40B4-BE49-F238E27FC236}">
+                <a16:creationId xmlns:a16="http://schemas.microsoft.com/office/drawing/2014/main" id="{CB5515BB-71A7-EE8F-5625-58C06C88C549}"/>
+              </a:ext>
+            </a:extLst>
+          </p:cNvPr>
+          <p:cNvPicPr>
+            <a:picLocks noChangeAspect="1"/>
+          </p:cNvPicPr>
+          <p:nvPr/>
+        </p:nvPicPr>
+        <p:blipFill>
+          <a:blip r:embed="rId2"/>
+          <a:stretch>
+            <a:fillRect/>
+          </a:stretch>
+        </p:blipFill>
+        <p:spPr>
+          <a:xfrm>
+            <a:off x="2592309" y="0"/>
+            <a:ext cx="7007382" cy="6858000"/>
+          </a:xfrm>
+          <a:prstGeom prst="rect">
+            <a:avLst/>
+          </a:prstGeom>
+        </p:spPr>
+      </p:pic>
+      <p:sp>
+        <p:nvSpPr>
+          <p:cNvPr id="4" name="Rectangle 3">
+            <a:extLst>
+              <a:ext uri="{FF2B5EF4-FFF2-40B4-BE49-F238E27FC236}">
+                <a16:creationId xmlns:a16="http://schemas.microsoft.com/office/drawing/2014/main" id="{2DA229C2-E16D-2F65-73E4-51DC69EB3D56}"/>
+              </a:ext>
+            </a:extLst>
+          </p:cNvPr>
+          <p:cNvSpPr/>
+          <p:nvPr/>
+        </p:nvSpPr>
+        <p:spPr>
+          <a:xfrm>
+            <a:off x="3700530" y="223234"/>
+            <a:ext cx="957329" cy="64394"/>
+          </a:xfrm>
+          <a:prstGeom prst="rect">
+            <a:avLst/>
+          </a:prstGeom>
+          <a:solidFill>
+            <a:srgbClr val="ACD433">
+              <a:alpha val="50196"/>
+            </a:srgbClr>
+          </a:solidFill>
+        </p:spPr>
+        <p:style>
+          <a:lnRef idx="2">
+            <a:schemeClr val="accent1">
+              <a:shade val="15000"/>
+            </a:schemeClr>
+          </a:lnRef>
+          <a:fillRef idx="1">
+            <a:schemeClr val="accent1"/>
+          </a:fillRef>
+          <a:effectRef idx="0">
+            <a:schemeClr val="accent1"/>
+          </a:effectRef>
+          <a:fontRef idx="minor">
+            <a:schemeClr val="lt1"/>
+          </a:fontRef>
+        </p:style>
+        <p:txBody>
+          <a:bodyPr rtlCol="0" anchor="ctr"/>
+          <a:lstStyle/>
+          <a:p>
+            <a:pPr algn="ctr"/>
+            <a:endParaRPr lang="en-US"/>
+          </a:p>
+        </p:txBody>
+      </p:sp>
+      <p:sp>
+        <p:nvSpPr>
+          <p:cNvPr id="5" name="Rectangle 4">
+            <a:extLst>
+              <a:ext uri="{FF2B5EF4-FFF2-40B4-BE49-F238E27FC236}">
+                <a16:creationId xmlns:a16="http://schemas.microsoft.com/office/drawing/2014/main" id="{809B70BF-BA09-E69C-73A3-903C5C7BCF6E}"/>
+              </a:ext>
+            </a:extLst>
+          </p:cNvPr>
+          <p:cNvSpPr/>
+          <p:nvPr/>
+        </p:nvSpPr>
+        <p:spPr>
+          <a:xfrm>
+            <a:off x="3619568" y="0"/>
+            <a:ext cx="233295" cy="181579"/>
+          </a:xfrm>
+          <a:prstGeom prst="rect">
+            <a:avLst/>
+          </a:prstGeom>
+          <a:solidFill>
+            <a:srgbClr val="ACD433">
+              <a:alpha val="50196"/>
+            </a:srgbClr>
+          </a:solidFill>
+        </p:spPr>
+        <p:style>
+          <a:lnRef idx="2">
+            <a:schemeClr val="accent1">
+              <a:shade val="15000"/>
+            </a:schemeClr>
+          </a:lnRef>
+          <a:fillRef idx="1">
+            <a:schemeClr val="accent1"/>
+          </a:fillRef>
+          <a:effectRef idx="0">
+            <a:schemeClr val="accent1"/>
+          </a:effectRef>
+          <a:fontRef idx="minor">
+            <a:schemeClr val="lt1"/>
+          </a:fontRef>
+        </p:style>
+        <p:txBody>
+          <a:bodyPr rtlCol="0" anchor="ctr"/>
+          <a:lstStyle/>
+          <a:p>
+            <a:pPr algn="ctr"/>
+            <a:endParaRPr lang="en-US"/>
+          </a:p>
+        </p:txBody>
+      </p:sp>
+      <p:sp>
+        <p:nvSpPr>
+          <p:cNvPr id="6" name="Rectangle 5">
+            <a:extLst>
+              <a:ext uri="{FF2B5EF4-FFF2-40B4-BE49-F238E27FC236}">
+                <a16:creationId xmlns:a16="http://schemas.microsoft.com/office/drawing/2014/main" id="{FBB25C13-7E86-C236-5AAC-366CAA2BD50C}"/>
+              </a:ext>
+            </a:extLst>
+          </p:cNvPr>
+          <p:cNvSpPr/>
+          <p:nvPr/>
+        </p:nvSpPr>
+        <p:spPr>
+          <a:xfrm>
+            <a:off x="2913124" y="164641"/>
+            <a:ext cx="233295" cy="568784"/>
+          </a:xfrm>
+          <a:prstGeom prst="rect">
+            <a:avLst/>
+          </a:prstGeom>
+          <a:solidFill>
+            <a:srgbClr val="ACD433">
+              <a:alpha val="50196"/>
+            </a:srgbClr>
+          </a:solidFill>
+        </p:spPr>
+        <p:style>
+          <a:lnRef idx="2">
+            <a:schemeClr val="accent1">
+              <a:shade val="15000"/>
+            </a:schemeClr>
+          </a:lnRef>
+          <a:fillRef idx="1">
+            <a:schemeClr val="accent1"/>
+          </a:fillRef>
+          <a:effectRef idx="0">
+            <a:schemeClr val="accent1"/>
+          </a:effectRef>
+          <a:fontRef idx="minor">
+            <a:schemeClr val="lt1"/>
+          </a:fontRef>
+        </p:style>
+        <p:txBody>
+          <a:bodyPr rtlCol="0" anchor="ctr"/>
+          <a:lstStyle/>
+          <a:p>
+            <a:pPr algn="ctr"/>
+            <a:endParaRPr lang="en-US"/>
+          </a:p>
+        </p:txBody>
+      </p:sp>
+      <p:sp>
+        <p:nvSpPr>
+          <p:cNvPr id="7" name="Rectangle 6">
+            <a:extLst>
+              <a:ext uri="{FF2B5EF4-FFF2-40B4-BE49-F238E27FC236}">
+                <a16:creationId xmlns:a16="http://schemas.microsoft.com/office/drawing/2014/main" id="{1DEC2ACD-B82A-C42F-AB10-4F4944B58CB2}"/>
+              </a:ext>
+            </a:extLst>
+          </p:cNvPr>
+          <p:cNvSpPr/>
+          <p:nvPr/>
+        </p:nvSpPr>
+        <p:spPr>
+          <a:xfrm>
+            <a:off x="2913124" y="996949"/>
+            <a:ext cx="115825" cy="298451"/>
+          </a:xfrm>
+          <a:prstGeom prst="rect">
+            <a:avLst/>
+          </a:prstGeom>
+          <a:solidFill>
+            <a:srgbClr val="ACD433">
+              <a:alpha val="50196"/>
+            </a:srgbClr>
+          </a:solidFill>
+        </p:spPr>
+        <p:style>
+          <a:lnRef idx="2">
+            <a:schemeClr val="accent1">
+              <a:shade val="15000"/>
+            </a:schemeClr>
+          </a:lnRef>
+          <a:fillRef idx="1">
+            <a:schemeClr val="accent1"/>
+          </a:fillRef>
+          <a:effectRef idx="0">
+            <a:schemeClr val="accent1"/>
+          </a:effectRef>
+          <a:fontRef idx="minor">
+            <a:schemeClr val="lt1"/>
+          </a:fontRef>
+        </p:style>
+        <p:txBody>
+          <a:bodyPr rtlCol="0" anchor="ctr"/>
+          <a:lstStyle/>
+          <a:p>
+            <a:pPr algn="ctr"/>
+            <a:endParaRPr lang="en-US"/>
+          </a:p>
+        </p:txBody>
+      </p:sp>
+      <p:sp>
+        <p:nvSpPr>
+          <p:cNvPr id="2" name="Rectangle 1">
+            <a:extLst>
+              <a:ext uri="{FF2B5EF4-FFF2-40B4-BE49-F238E27FC236}">
+                <a16:creationId xmlns:a16="http://schemas.microsoft.com/office/drawing/2014/main" id="{38236571-B2CD-41EA-21DC-A9463E8FD294}"/>
+              </a:ext>
+            </a:extLst>
+          </p:cNvPr>
+          <p:cNvSpPr/>
+          <p:nvPr/>
+        </p:nvSpPr>
+        <p:spPr>
+          <a:xfrm rot="1551019">
+            <a:off x="3573376" y="623121"/>
+            <a:ext cx="1093916" cy="102021"/>
+          </a:xfrm>
+          <a:prstGeom prst="rect">
+            <a:avLst/>
+          </a:prstGeom>
+          <a:solidFill>
+            <a:srgbClr val="ACD433">
+              <a:alpha val="50196"/>
+            </a:srgbClr>
+          </a:solidFill>
+        </p:spPr>
+        <p:style>
+          <a:lnRef idx="2">
+            <a:schemeClr val="accent1">
+              <a:shade val="15000"/>
+            </a:schemeClr>
+          </a:lnRef>
+          <a:fillRef idx="1">
+            <a:schemeClr val="accent1"/>
+          </a:fillRef>
+          <a:effectRef idx="0">
+            <a:schemeClr val="accent1"/>
+          </a:effectRef>
+          <a:fontRef idx="minor">
+            <a:schemeClr val="lt1"/>
+          </a:fontRef>
+        </p:style>
+        <p:txBody>
+          <a:bodyPr rtlCol="0" anchor="ctr"/>
+          <a:lstStyle/>
+          <a:p>
+            <a:pPr algn="ctr"/>
+            <a:endParaRPr lang="en-US"/>
+          </a:p>
+        </p:txBody>
+      </p:sp>
+      <p:sp>
+        <p:nvSpPr>
+          <p:cNvPr id="8" name="Rectangle 7">
+            <a:extLst>
+              <a:ext uri="{FF2B5EF4-FFF2-40B4-BE49-F238E27FC236}">
+                <a16:creationId xmlns:a16="http://schemas.microsoft.com/office/drawing/2014/main" id="{E86D6F6C-C89F-A0DC-CF3D-FCC13BB76F9C}"/>
+              </a:ext>
+            </a:extLst>
+          </p:cNvPr>
+          <p:cNvSpPr/>
+          <p:nvPr/>
+        </p:nvSpPr>
+        <p:spPr>
+          <a:xfrm>
+            <a:off x="5065260" y="733425"/>
+            <a:ext cx="318398" cy="225099"/>
+          </a:xfrm>
+          <a:prstGeom prst="rect">
+            <a:avLst/>
+          </a:prstGeom>
+          <a:solidFill>
+            <a:srgbClr val="ACD433">
+              <a:alpha val="50196"/>
+            </a:srgbClr>
+          </a:solidFill>
+        </p:spPr>
+        <p:style>
+          <a:lnRef idx="2">
+            <a:schemeClr val="accent1">
+              <a:shade val="15000"/>
+            </a:schemeClr>
+          </a:lnRef>
+          <a:fillRef idx="1">
+            <a:schemeClr val="accent1"/>
+          </a:fillRef>
+          <a:effectRef idx="0">
+            <a:schemeClr val="accent1"/>
+          </a:effectRef>
+          <a:fontRef idx="minor">
+            <a:schemeClr val="lt1"/>
+          </a:fontRef>
+        </p:style>
+        <p:txBody>
+          <a:bodyPr rtlCol="0" anchor="ctr"/>
+          <a:lstStyle/>
+          <a:p>
+            <a:pPr algn="ctr"/>
+            <a:endParaRPr lang="en-US"/>
+          </a:p>
+        </p:txBody>
+      </p:sp>
+      <p:sp>
+        <p:nvSpPr>
+          <p:cNvPr id="9" name="Rectangle 8">
+            <a:extLst>
+              <a:ext uri="{FF2B5EF4-FFF2-40B4-BE49-F238E27FC236}">
+                <a16:creationId xmlns:a16="http://schemas.microsoft.com/office/drawing/2014/main" id="{D2C55E19-83EE-AABA-0868-D3193DFB3B96}"/>
+              </a:ext>
+            </a:extLst>
+          </p:cNvPr>
+          <p:cNvSpPr/>
+          <p:nvPr/>
+        </p:nvSpPr>
+        <p:spPr>
+          <a:xfrm>
+            <a:off x="4886705" y="434974"/>
+            <a:ext cx="81536" cy="426086"/>
+          </a:xfrm>
+          <a:prstGeom prst="rect">
+            <a:avLst/>
+          </a:prstGeom>
+          <a:solidFill>
+            <a:srgbClr val="ACD433">
+              <a:alpha val="50196"/>
+            </a:srgbClr>
+          </a:solidFill>
+        </p:spPr>
+        <p:style>
+          <a:lnRef idx="2">
+            <a:schemeClr val="accent1">
+              <a:shade val="15000"/>
+            </a:schemeClr>
+          </a:lnRef>
+          <a:fillRef idx="1">
+            <a:schemeClr val="accent1"/>
+          </a:fillRef>
+          <a:effectRef idx="0">
+            <a:schemeClr val="accent1"/>
+          </a:effectRef>
+          <a:fontRef idx="minor">
+            <a:schemeClr val="lt1"/>
+          </a:fontRef>
+        </p:style>
+        <p:txBody>
+          <a:bodyPr rtlCol="0" anchor="ctr"/>
+          <a:lstStyle/>
+          <a:p>
+            <a:pPr algn="ctr"/>
+            <a:endParaRPr lang="en-US"/>
+          </a:p>
+        </p:txBody>
+      </p:sp>
+      <p:sp>
+        <p:nvSpPr>
+          <p:cNvPr id="10" name="Rectangle 9">
+            <a:extLst>
+              <a:ext uri="{FF2B5EF4-FFF2-40B4-BE49-F238E27FC236}">
+                <a16:creationId xmlns:a16="http://schemas.microsoft.com/office/drawing/2014/main" id="{31B47393-366A-EAF4-1256-B1F26EFCFE79}"/>
+              </a:ext>
+            </a:extLst>
+          </p:cNvPr>
+          <p:cNvSpPr/>
+          <p:nvPr/>
+        </p:nvSpPr>
+        <p:spPr>
+          <a:xfrm>
+            <a:off x="5006340" y="478664"/>
+            <a:ext cx="622522" cy="100455"/>
+          </a:xfrm>
+          <a:prstGeom prst="rect">
+            <a:avLst/>
+          </a:prstGeom>
+          <a:solidFill>
+            <a:srgbClr val="ACD433">
+              <a:alpha val="50196"/>
+            </a:srgbClr>
+          </a:solidFill>
+        </p:spPr>
+        <p:style>
+          <a:lnRef idx="2">
+            <a:schemeClr val="accent1">
+              <a:shade val="15000"/>
+            </a:schemeClr>
+          </a:lnRef>
+          <a:fillRef idx="1">
+            <a:schemeClr val="accent1"/>
+          </a:fillRef>
+          <a:effectRef idx="0">
+            <a:schemeClr val="accent1"/>
+          </a:effectRef>
+          <a:fontRef idx="minor">
+            <a:schemeClr val="lt1"/>
+          </a:fontRef>
+        </p:style>
+        <p:txBody>
+          <a:bodyPr rtlCol="0" anchor="ctr"/>
+          <a:lstStyle/>
+          <a:p>
+            <a:pPr algn="ctr"/>
+            <a:endParaRPr lang="en-US"/>
+          </a:p>
+        </p:txBody>
+      </p:sp>
+      <p:sp>
+        <p:nvSpPr>
+          <p:cNvPr id="11" name="Rectangle 10">
+            <a:extLst>
+              <a:ext uri="{FF2B5EF4-FFF2-40B4-BE49-F238E27FC236}">
+                <a16:creationId xmlns:a16="http://schemas.microsoft.com/office/drawing/2014/main" id="{19BA5C61-7665-01A0-A858-7818669FC0B0}"/>
+              </a:ext>
+            </a:extLst>
+          </p:cNvPr>
+          <p:cNvSpPr/>
+          <p:nvPr/>
+        </p:nvSpPr>
+        <p:spPr>
+          <a:xfrm>
+            <a:off x="5006340" y="587374"/>
+            <a:ext cx="114301" cy="273686"/>
+          </a:xfrm>
+          <a:prstGeom prst="rect">
+            <a:avLst/>
+          </a:prstGeom>
+          <a:solidFill>
+            <a:srgbClr val="ACD433">
+              <a:alpha val="50196"/>
+            </a:srgbClr>
+          </a:solidFill>
+        </p:spPr>
+        <p:style>
+          <a:lnRef idx="2">
+            <a:schemeClr val="accent1">
+              <a:shade val="15000"/>
+            </a:schemeClr>
+          </a:lnRef>
+          <a:fillRef idx="1">
+            <a:schemeClr val="accent1"/>
+          </a:fillRef>
+          <a:effectRef idx="0">
+            <a:schemeClr val="accent1"/>
+          </a:effectRef>
+          <a:fontRef idx="minor">
+            <a:schemeClr val="lt1"/>
+          </a:fontRef>
+        </p:style>
+        <p:txBody>
+          <a:bodyPr rtlCol="0" anchor="ctr"/>
+          <a:lstStyle/>
+          <a:p>
+            <a:pPr algn="ctr"/>
+            <a:endParaRPr lang="en-US"/>
+          </a:p>
+        </p:txBody>
+      </p:sp>
+      <p:sp>
+        <p:nvSpPr>
+          <p:cNvPr id="12" name="Rectangle 11">
+            <a:extLst>
+              <a:ext uri="{FF2B5EF4-FFF2-40B4-BE49-F238E27FC236}">
+                <a16:creationId xmlns:a16="http://schemas.microsoft.com/office/drawing/2014/main" id="{22AFFBAB-6B52-6F38-4D28-DB79EF7E0A86}"/>
+              </a:ext>
+            </a:extLst>
+          </p:cNvPr>
+          <p:cNvSpPr/>
+          <p:nvPr/>
+        </p:nvSpPr>
+        <p:spPr>
+          <a:xfrm>
+            <a:off x="3382706" y="434974"/>
+            <a:ext cx="76700" cy="1133476"/>
+          </a:xfrm>
+          <a:prstGeom prst="rect">
+            <a:avLst/>
+          </a:prstGeom>
+          <a:solidFill>
+            <a:srgbClr val="ACD433">
+              <a:alpha val="50196"/>
+            </a:srgbClr>
+          </a:solidFill>
+        </p:spPr>
+        <p:style>
+          <a:lnRef idx="2">
+            <a:schemeClr val="accent1">
+              <a:shade val="15000"/>
+            </a:schemeClr>
+          </a:lnRef>
+          <a:fillRef idx="1">
+            <a:schemeClr val="accent1"/>
+          </a:fillRef>
+          <a:effectRef idx="0">
+            <a:schemeClr val="accent1"/>
+          </a:effectRef>
+          <a:fontRef idx="minor">
+            <a:schemeClr val="lt1"/>
+          </a:fontRef>
+        </p:style>
+        <p:txBody>
+          <a:bodyPr rtlCol="0" anchor="ctr"/>
+          <a:lstStyle/>
+          <a:p>
+            <a:pPr algn="ctr"/>
+            <a:endParaRPr lang="en-US"/>
+          </a:p>
+        </p:txBody>
+      </p:sp>
+      <p:sp>
+        <p:nvSpPr>
+          <p:cNvPr id="13" name="Rectangle 12">
+            <a:extLst>
+              <a:ext uri="{FF2B5EF4-FFF2-40B4-BE49-F238E27FC236}">
+                <a16:creationId xmlns:a16="http://schemas.microsoft.com/office/drawing/2014/main" id="{4CBB0361-764B-DFBD-B313-A1E2342F1DE0}"/>
+              </a:ext>
+            </a:extLst>
+          </p:cNvPr>
+          <p:cNvSpPr/>
+          <p:nvPr/>
+        </p:nvSpPr>
+        <p:spPr>
+          <a:xfrm>
+            <a:off x="3565097" y="974398"/>
+            <a:ext cx="76700" cy="594051"/>
+          </a:xfrm>
+          <a:prstGeom prst="rect">
+            <a:avLst/>
+          </a:prstGeom>
+          <a:solidFill>
+            <a:srgbClr val="ACD433">
+              <a:alpha val="50196"/>
+            </a:srgbClr>
+          </a:solidFill>
+        </p:spPr>
+        <p:style>
+          <a:lnRef idx="2">
+            <a:schemeClr val="accent1">
+              <a:shade val="15000"/>
+            </a:schemeClr>
+          </a:lnRef>
+          <a:fillRef idx="1">
+            <a:schemeClr val="accent1"/>
+          </a:fillRef>
+          <a:effectRef idx="0">
+            <a:schemeClr val="accent1"/>
+          </a:effectRef>
+          <a:fontRef idx="minor">
+            <a:schemeClr val="lt1"/>
+          </a:fontRef>
+        </p:style>
+        <p:txBody>
+          <a:bodyPr rtlCol="0" anchor="ctr"/>
+          <a:lstStyle/>
+          <a:p>
+            <a:pPr algn="ctr"/>
+            <a:endParaRPr lang="en-US"/>
+          </a:p>
+        </p:txBody>
+      </p:sp>
+      <p:sp>
+        <p:nvSpPr>
+          <p:cNvPr id="14" name="Rectangle 13">
+            <a:extLst>
+              <a:ext uri="{FF2B5EF4-FFF2-40B4-BE49-F238E27FC236}">
+                <a16:creationId xmlns:a16="http://schemas.microsoft.com/office/drawing/2014/main" id="{6B10422F-EE46-F48B-FCA8-0C8186ED23CD}"/>
+              </a:ext>
+            </a:extLst>
+          </p:cNvPr>
+          <p:cNvSpPr/>
+          <p:nvPr/>
+        </p:nvSpPr>
+        <p:spPr>
+          <a:xfrm>
+            <a:off x="3641797" y="958524"/>
+            <a:ext cx="993006" cy="102111"/>
+          </a:xfrm>
+          <a:prstGeom prst="rect">
+            <a:avLst/>
+          </a:prstGeom>
+          <a:solidFill>
+            <a:srgbClr val="ACD433">
+              <a:alpha val="50196"/>
+            </a:srgbClr>
+          </a:solidFill>
+        </p:spPr>
+        <p:style>
+          <a:lnRef idx="2">
+            <a:schemeClr val="accent1">
+              <a:shade val="15000"/>
+            </a:schemeClr>
+          </a:lnRef>
+          <a:fillRef idx="1">
+            <a:schemeClr val="accent1"/>
+          </a:fillRef>
+          <a:effectRef idx="0">
+            <a:schemeClr val="accent1"/>
+          </a:effectRef>
+          <a:fontRef idx="minor">
+            <a:schemeClr val="lt1"/>
+          </a:fontRef>
+        </p:style>
+        <p:txBody>
+          <a:bodyPr rtlCol="0" anchor="ctr"/>
+          <a:lstStyle/>
+          <a:p>
+            <a:pPr algn="ctr"/>
+            <a:endParaRPr lang="en-US"/>
+          </a:p>
+        </p:txBody>
+      </p:sp>
+      <p:sp>
+        <p:nvSpPr>
+          <p:cNvPr id="15" name="Rectangle 14">
+            <a:extLst>
+              <a:ext uri="{FF2B5EF4-FFF2-40B4-BE49-F238E27FC236}">
+                <a16:creationId xmlns:a16="http://schemas.microsoft.com/office/drawing/2014/main" id="{5E99F6D8-F86F-3A81-1AF6-6DD67E3C6F9C}"/>
+              </a:ext>
+            </a:extLst>
+          </p:cNvPr>
+          <p:cNvSpPr/>
+          <p:nvPr/>
+        </p:nvSpPr>
+        <p:spPr>
+          <a:xfrm>
+            <a:off x="3788357" y="1447841"/>
+            <a:ext cx="233295" cy="181579"/>
+          </a:xfrm>
+          <a:prstGeom prst="rect">
+            <a:avLst/>
+          </a:prstGeom>
+          <a:solidFill>
+            <a:srgbClr val="ACD433">
+              <a:alpha val="50196"/>
+            </a:srgbClr>
+          </a:solidFill>
+        </p:spPr>
+        <p:style>
+          <a:lnRef idx="2">
+            <a:schemeClr val="accent1">
+              <a:shade val="15000"/>
+            </a:schemeClr>
+          </a:lnRef>
+          <a:fillRef idx="1">
+            <a:schemeClr val="accent1"/>
+          </a:fillRef>
+          <a:effectRef idx="0">
+            <a:schemeClr val="accent1"/>
+          </a:effectRef>
+          <a:fontRef idx="minor">
+            <a:schemeClr val="lt1"/>
+          </a:fontRef>
+        </p:style>
+        <p:txBody>
+          <a:bodyPr rtlCol="0" anchor="ctr"/>
+          <a:lstStyle/>
+          <a:p>
+            <a:pPr algn="ctr"/>
+            <a:endParaRPr lang="en-US"/>
+          </a:p>
+        </p:txBody>
+      </p:sp>
+    </p:spTree>
+    <p:extLst>
+      <p:ext uri="{BB962C8B-B14F-4D97-AF65-F5344CB8AC3E}">
+        <p14:creationId xmlns:p14="http://schemas.microsoft.com/office/powerpoint/2010/main" val="2636113045"/>
+      </p:ext>
+    </p:extLst>
+  </p:cSld>
+  <p:clrMapOvr>
+    <a:masterClrMapping/>
+  </p:clrMapOvr>
+</p:sld>
+</file>
+
+<file path=ppt/slides/slide19.xml><?xml version="1.0" encoding="utf-8"?>
 <p:sld xmlns:a="http://schemas.openxmlformats.org/drawingml/2006/main" xmlns:r="http://schemas.openxmlformats.org/officeDocument/2006/relationships" xmlns:p="http://schemas.openxmlformats.org/presentationml/2006/main">
   <p:cSld>
     <p:spTree>
@@ -11830,7 +12616,7 @@
         <p:spPr>
           <a:xfrm>
             <a:off x="596436" y="2188396"/>
-            <a:ext cx="2054832" cy="1400530"/>
+            <a:ext cx="3975564" cy="1589854"/>
           </a:xfrm>
           <a:prstGeom prst="roundRect">
             <a:avLst>
@@ -11997,260 +12783,6 @@
     <p:extLst>
       <p:ext uri="{BB962C8B-B14F-4D97-AF65-F5344CB8AC3E}">
         <p14:creationId xmlns:p14="http://schemas.microsoft.com/office/powerpoint/2010/main" val="151579558"/>
-      </p:ext>
-    </p:extLst>
-  </p:cSld>
-  <p:clrMapOvr>
-    <a:masterClrMapping/>
-  </p:clrMapOvr>
-</p:sld>
-</file>
-
-<file path=ppt/slides/slide19.xml><?xml version="1.0" encoding="utf-8"?>
-<p:sld xmlns:a="http://schemas.openxmlformats.org/drawingml/2006/main" xmlns:r="http://schemas.openxmlformats.org/officeDocument/2006/relationships" xmlns:p="http://schemas.openxmlformats.org/presentationml/2006/main">
-  <p:cSld>
-    <p:bg>
-      <p:bgPr>
-        <a:blipFill rotWithShape="1">
-          <a:blip r:embed="rId3">
-            <a:duotone>
-              <a:schemeClr val="bg2">
-                <a:shade val="62000"/>
-                <a:hueMod val="108000"/>
-                <a:satMod val="164000"/>
-                <a:lumMod val="69000"/>
-              </a:schemeClr>
-              <a:schemeClr val="bg2">
-                <a:tint val="96000"/>
-                <a:hueMod val="90000"/>
-                <a:satMod val="130000"/>
-                <a:lumMod val="134000"/>
-              </a:schemeClr>
-            </a:duotone>
-          </a:blip>
-          <a:stretch/>
-        </a:blipFill>
-        <a:effectLst/>
-      </p:bgPr>
-    </p:bg>
-    <p:spTree>
-      <p:nvGrpSpPr>
-        <p:cNvPr id="1" name=""/>
-        <p:cNvGrpSpPr/>
-        <p:nvPr/>
-      </p:nvGrpSpPr>
-      <p:grpSpPr>
-        <a:xfrm>
-          <a:off x="0" y="0"/>
-          <a:ext cx="0" cy="0"/>
-          <a:chOff x="0" y="0"/>
-          <a:chExt cx="0" cy="0"/>
-        </a:xfrm>
-      </p:grpSpPr>
-      <p:pic>
-        <p:nvPicPr>
-          <p:cNvPr id="15" name="Picture 14" descr="abstract design">
-            <a:extLst>
-              <a:ext uri="{FF2B5EF4-FFF2-40B4-BE49-F238E27FC236}">
-                <a16:creationId xmlns:a16="http://schemas.microsoft.com/office/drawing/2014/main" id="{6D363037-1741-4470-A023-883E2FFD5840}"/>
-              </a:ext>
-            </a:extLst>
-          </p:cNvPr>
-          <p:cNvPicPr>
-            <a:picLocks noChangeAspect="1"/>
-          </p:cNvPicPr>
-          <p:nvPr/>
-        </p:nvPicPr>
-        <p:blipFill rotWithShape="1">
-          <a:blip r:embed="rId4">
-            <a:duotone>
-              <a:prstClr val="black"/>
-              <a:schemeClr val="accent5">
-                <a:tint val="45000"/>
-                <a:satMod val="400000"/>
-              </a:schemeClr>
-            </a:duotone>
-            <a:alphaModFix amt="25000"/>
-          </a:blip>
-          <a:srcRect t="18308" r="6818" b="2872"/>
-          <a:stretch/>
-        </p:blipFill>
-        <p:spPr>
-          <a:xfrm flipH="1">
-            <a:off x="20" y="10"/>
-            <a:ext cx="12191980" cy="6857990"/>
-          </a:xfrm>
-          <a:prstGeom prst="rect">
-            <a:avLst/>
-          </a:prstGeom>
-        </p:spPr>
-      </p:pic>
-      <p:sp>
-        <p:nvSpPr>
-          <p:cNvPr id="12" name="Title 11">
-            <a:extLst>
-              <a:ext uri="{FF2B5EF4-FFF2-40B4-BE49-F238E27FC236}">
-                <a16:creationId xmlns:a16="http://schemas.microsoft.com/office/drawing/2014/main" id="{970C361B-D32E-42E0-A41E-86C3D9AC886F}"/>
-              </a:ext>
-            </a:extLst>
-          </p:cNvPr>
-          <p:cNvSpPr>
-            <a:spLocks noGrp="1"/>
-          </p:cNvSpPr>
-          <p:nvPr>
-            <p:ph type="ctrTitle"/>
-          </p:nvPr>
-        </p:nvSpPr>
-        <p:spPr>
-          <a:xfrm>
-            <a:off x="1154955" y="1447800"/>
-            <a:ext cx="8825658" cy="3329581"/>
-          </a:xfrm>
-        </p:spPr>
-        <p:txBody>
-          <a:bodyPr>
-            <a:normAutofit/>
-          </a:bodyPr>
-          <a:lstStyle/>
-          <a:p>
-            <a:r>
-              <a:rPr lang="en-US" dirty="0"/>
-              <a:t>Thank You!</a:t>
-            </a:r>
-            <a:endParaRPr lang="ru-RU" dirty="0"/>
-          </a:p>
-        </p:txBody>
-      </p:sp>
-      <p:sp>
-        <p:nvSpPr>
-          <p:cNvPr id="13" name="Subtitle 12">
-            <a:extLst>
-              <a:ext uri="{FF2B5EF4-FFF2-40B4-BE49-F238E27FC236}">
-                <a16:creationId xmlns:a16="http://schemas.microsoft.com/office/drawing/2014/main" id="{336E726C-3DE4-41AA-88A0-C92B0C34163D}"/>
-              </a:ext>
-            </a:extLst>
-          </p:cNvPr>
-          <p:cNvSpPr>
-            <a:spLocks noGrp="1"/>
-          </p:cNvSpPr>
-          <p:nvPr>
-            <p:ph type="subTitle" idx="1"/>
-          </p:nvPr>
-        </p:nvSpPr>
-        <p:spPr>
-          <a:xfrm>
-            <a:off x="1154955" y="4777380"/>
-            <a:ext cx="8825658" cy="861420"/>
-          </a:xfrm>
-        </p:spPr>
-        <p:txBody>
-          <a:bodyPr>
-            <a:normAutofit/>
-          </a:bodyPr>
-          <a:lstStyle/>
-          <a:p>
-            <a:r>
-              <a:rPr lang="en-US" dirty="0"/>
-              <a:t>someone@Example.com</a:t>
-            </a:r>
-            <a:endParaRPr lang="ru-RU" dirty="0"/>
-          </a:p>
-        </p:txBody>
-      </p:sp>
-      <p:sp>
-        <p:nvSpPr>
-          <p:cNvPr id="57" name="Rectangle 56">
-            <a:extLst>
-              <a:ext uri="{FF2B5EF4-FFF2-40B4-BE49-F238E27FC236}">
-                <a16:creationId xmlns:a16="http://schemas.microsoft.com/office/drawing/2014/main" id="{318E9D62-7BA3-4D5E-8915-0D0E8661E3D7}"/>
-              </a:ext>
-              <a:ext uri="{C183D7F6-B498-43B3-948B-1728B52AA6E4}">
-                <adec:decorative xmlns:adec="http://schemas.microsoft.com/office/drawing/2017/decorative" val="1"/>
-              </a:ext>
-            </a:extLst>
-          </p:cNvPr>
-          <p:cNvSpPr>
-            <a:spLocks noGrp="1" noRot="1" noChangeAspect="1" noMove="1" noResize="1" noEditPoints="1" noAdjustHandles="1" noChangeArrowheads="1" noChangeShapeType="1" noTextEdit="1"/>
-          </p:cNvSpPr>
-          <p:nvPr>
-            <p:extLst>
-              <p:ext uri="{386F3935-93C4-4BCD-93E2-E3B085C9AB24}">
-                <p16:designElem xmlns:p16="http://schemas.microsoft.com/office/powerpoint/2015/main" val="1"/>
-              </p:ext>
-            </p:extLst>
-          </p:nvPr>
-        </p:nvSpPr>
-        <p:spPr>
-          <a:xfrm>
-            <a:off x="10437812" y="0"/>
-            <a:ext cx="685800" cy="1143000"/>
-          </a:xfrm>
-          <a:prstGeom prst="rect">
-            <a:avLst/>
-          </a:prstGeom>
-          <a:solidFill>
-            <a:schemeClr val="accent1"/>
-          </a:solidFill>
-          <a:ln>
-            <a:noFill/>
-          </a:ln>
-        </p:spPr>
-        <p:style>
-          <a:lnRef idx="1">
-            <a:schemeClr val="accent1"/>
-          </a:lnRef>
-          <a:fillRef idx="3">
-            <a:schemeClr val="accent1"/>
-          </a:fillRef>
-          <a:effectRef idx="2">
-            <a:schemeClr val="accent1"/>
-          </a:effectRef>
-          <a:fontRef idx="minor">
-            <a:schemeClr val="lt1"/>
-          </a:fontRef>
-        </p:style>
-        <p:txBody>
-          <a:bodyPr/>
-          <a:lstStyle/>
-          <a:p>
-            <a:endParaRPr lang="en-US"/>
-          </a:p>
-        </p:txBody>
-      </p:sp>
-      <p:pic>
-        <p:nvPicPr>
-          <p:cNvPr id="4" name="Picture 3">
-            <a:extLst>
-              <a:ext uri="{FF2B5EF4-FFF2-40B4-BE49-F238E27FC236}">
-                <a16:creationId xmlns:a16="http://schemas.microsoft.com/office/drawing/2014/main" id="{B011F562-7C5B-B39E-2FF0-681E86D50FE2}"/>
-              </a:ext>
-            </a:extLst>
-          </p:cNvPr>
-          <p:cNvPicPr>
-            <a:picLocks noChangeAspect="1"/>
-          </p:cNvPicPr>
-          <p:nvPr/>
-        </p:nvPicPr>
-        <p:blipFill>
-          <a:blip r:embed="rId5"/>
-          <a:stretch>
-            <a:fillRect/>
-          </a:stretch>
-        </p:blipFill>
-        <p:spPr>
-          <a:xfrm>
-            <a:off x="10440834" y="0"/>
-            <a:ext cx="682228" cy="682228"/>
-          </a:xfrm>
-          <a:prstGeom prst="rect">
-            <a:avLst/>
-          </a:prstGeom>
-        </p:spPr>
-      </p:pic>
-    </p:spTree>
-    <p:extLst>
-      <p:ext uri="{BB962C8B-B14F-4D97-AF65-F5344CB8AC3E}">
-        <p14:creationId xmlns:p14="http://schemas.microsoft.com/office/powerpoint/2010/main" val="510767980"/>
       </p:ext>
     </p:extLst>
   </p:cSld>
@@ -12717,6 +13249,1404 @@
       <p:bldP spid="18" grpId="0" build="p"/>
     </p:bldLst>
   </p:timing>
+</p:sld>
+</file>
+
+<file path=ppt/slides/slide20.xml><?xml version="1.0" encoding="utf-8"?>
+<p:sld xmlns:a="http://schemas.openxmlformats.org/drawingml/2006/main" xmlns:r="http://schemas.openxmlformats.org/officeDocument/2006/relationships" xmlns:p="http://schemas.openxmlformats.org/presentationml/2006/main">
+  <p:cSld>
+    <p:spTree>
+      <p:nvGrpSpPr>
+        <p:cNvPr id="1" name="">
+          <a:extLst>
+            <a:ext uri="{FF2B5EF4-FFF2-40B4-BE49-F238E27FC236}">
+              <a16:creationId xmlns:a16="http://schemas.microsoft.com/office/drawing/2014/main" id="{FB728F48-1C0E-221A-F0D1-4BD337C7F6A2}"/>
+            </a:ext>
+          </a:extLst>
+        </p:cNvPr>
+        <p:cNvGrpSpPr/>
+        <p:nvPr/>
+      </p:nvGrpSpPr>
+      <p:grpSpPr>
+        <a:xfrm>
+          <a:off x="0" y="0"/>
+          <a:ext cx="0" cy="0"/>
+          <a:chOff x="0" y="0"/>
+          <a:chExt cx="0" cy="0"/>
+        </a:xfrm>
+      </p:grpSpPr>
+      <p:pic>
+        <p:nvPicPr>
+          <p:cNvPr id="3" name="Picture 2">
+            <a:extLst>
+              <a:ext uri="{FF2B5EF4-FFF2-40B4-BE49-F238E27FC236}">
+                <a16:creationId xmlns:a16="http://schemas.microsoft.com/office/drawing/2014/main" id="{AF3B4464-C47D-3072-E742-057698863CEE}"/>
+              </a:ext>
+            </a:extLst>
+          </p:cNvPr>
+          <p:cNvPicPr>
+            <a:picLocks noChangeAspect="1"/>
+          </p:cNvPicPr>
+          <p:nvPr/>
+        </p:nvPicPr>
+        <p:blipFill>
+          <a:blip r:embed="rId2"/>
+          <a:stretch>
+            <a:fillRect/>
+          </a:stretch>
+        </p:blipFill>
+        <p:spPr>
+          <a:xfrm>
+            <a:off x="2592309" y="0"/>
+            <a:ext cx="7007382" cy="6858000"/>
+          </a:xfrm>
+          <a:prstGeom prst="rect">
+            <a:avLst/>
+          </a:prstGeom>
+        </p:spPr>
+      </p:pic>
+      <p:sp>
+        <p:nvSpPr>
+          <p:cNvPr id="4" name="Rectangle 3">
+            <a:extLst>
+              <a:ext uri="{FF2B5EF4-FFF2-40B4-BE49-F238E27FC236}">
+                <a16:creationId xmlns:a16="http://schemas.microsoft.com/office/drawing/2014/main" id="{E13C79F7-8319-C40E-9C56-0F3C820BC5C0}"/>
+              </a:ext>
+            </a:extLst>
+          </p:cNvPr>
+          <p:cNvSpPr/>
+          <p:nvPr/>
+        </p:nvSpPr>
+        <p:spPr>
+          <a:xfrm>
+            <a:off x="3700530" y="223234"/>
+            <a:ext cx="957329" cy="64394"/>
+          </a:xfrm>
+          <a:prstGeom prst="rect">
+            <a:avLst/>
+          </a:prstGeom>
+          <a:solidFill>
+            <a:srgbClr val="ACD433">
+              <a:alpha val="50196"/>
+            </a:srgbClr>
+          </a:solidFill>
+        </p:spPr>
+        <p:style>
+          <a:lnRef idx="2">
+            <a:schemeClr val="accent1">
+              <a:shade val="15000"/>
+            </a:schemeClr>
+          </a:lnRef>
+          <a:fillRef idx="1">
+            <a:schemeClr val="accent1"/>
+          </a:fillRef>
+          <a:effectRef idx="0">
+            <a:schemeClr val="accent1"/>
+          </a:effectRef>
+          <a:fontRef idx="minor">
+            <a:schemeClr val="lt1"/>
+          </a:fontRef>
+        </p:style>
+        <p:txBody>
+          <a:bodyPr rtlCol="0" anchor="ctr"/>
+          <a:lstStyle/>
+          <a:p>
+            <a:pPr algn="ctr"/>
+            <a:endParaRPr lang="en-US"/>
+          </a:p>
+        </p:txBody>
+      </p:sp>
+      <p:sp>
+        <p:nvSpPr>
+          <p:cNvPr id="5" name="Rectangle 4">
+            <a:extLst>
+              <a:ext uri="{FF2B5EF4-FFF2-40B4-BE49-F238E27FC236}">
+                <a16:creationId xmlns:a16="http://schemas.microsoft.com/office/drawing/2014/main" id="{166629F1-6A63-864D-4209-626E528D56A2}"/>
+              </a:ext>
+            </a:extLst>
+          </p:cNvPr>
+          <p:cNvSpPr/>
+          <p:nvPr/>
+        </p:nvSpPr>
+        <p:spPr>
+          <a:xfrm>
+            <a:off x="3619568" y="0"/>
+            <a:ext cx="233295" cy="181579"/>
+          </a:xfrm>
+          <a:prstGeom prst="rect">
+            <a:avLst/>
+          </a:prstGeom>
+          <a:solidFill>
+            <a:srgbClr val="ACD433">
+              <a:alpha val="50196"/>
+            </a:srgbClr>
+          </a:solidFill>
+        </p:spPr>
+        <p:style>
+          <a:lnRef idx="2">
+            <a:schemeClr val="accent1">
+              <a:shade val="15000"/>
+            </a:schemeClr>
+          </a:lnRef>
+          <a:fillRef idx="1">
+            <a:schemeClr val="accent1"/>
+          </a:fillRef>
+          <a:effectRef idx="0">
+            <a:schemeClr val="accent1"/>
+          </a:effectRef>
+          <a:fontRef idx="minor">
+            <a:schemeClr val="lt1"/>
+          </a:fontRef>
+        </p:style>
+        <p:txBody>
+          <a:bodyPr rtlCol="0" anchor="ctr"/>
+          <a:lstStyle/>
+          <a:p>
+            <a:pPr algn="ctr"/>
+            <a:endParaRPr lang="en-US"/>
+          </a:p>
+        </p:txBody>
+      </p:sp>
+      <p:sp>
+        <p:nvSpPr>
+          <p:cNvPr id="6" name="Rectangle 5">
+            <a:extLst>
+              <a:ext uri="{FF2B5EF4-FFF2-40B4-BE49-F238E27FC236}">
+                <a16:creationId xmlns:a16="http://schemas.microsoft.com/office/drawing/2014/main" id="{7ADD3CFC-2C64-48F0-ABD2-983C849420EC}"/>
+              </a:ext>
+            </a:extLst>
+          </p:cNvPr>
+          <p:cNvSpPr/>
+          <p:nvPr/>
+        </p:nvSpPr>
+        <p:spPr>
+          <a:xfrm>
+            <a:off x="2913124" y="164641"/>
+            <a:ext cx="233295" cy="568784"/>
+          </a:xfrm>
+          <a:prstGeom prst="rect">
+            <a:avLst/>
+          </a:prstGeom>
+          <a:solidFill>
+            <a:srgbClr val="ACD433">
+              <a:alpha val="50196"/>
+            </a:srgbClr>
+          </a:solidFill>
+        </p:spPr>
+        <p:style>
+          <a:lnRef idx="2">
+            <a:schemeClr val="accent1">
+              <a:shade val="15000"/>
+            </a:schemeClr>
+          </a:lnRef>
+          <a:fillRef idx="1">
+            <a:schemeClr val="accent1"/>
+          </a:fillRef>
+          <a:effectRef idx="0">
+            <a:schemeClr val="accent1"/>
+          </a:effectRef>
+          <a:fontRef idx="minor">
+            <a:schemeClr val="lt1"/>
+          </a:fontRef>
+        </p:style>
+        <p:txBody>
+          <a:bodyPr rtlCol="0" anchor="ctr"/>
+          <a:lstStyle/>
+          <a:p>
+            <a:pPr algn="ctr"/>
+            <a:endParaRPr lang="en-US"/>
+          </a:p>
+        </p:txBody>
+      </p:sp>
+      <p:sp>
+        <p:nvSpPr>
+          <p:cNvPr id="7" name="Rectangle 6">
+            <a:extLst>
+              <a:ext uri="{FF2B5EF4-FFF2-40B4-BE49-F238E27FC236}">
+                <a16:creationId xmlns:a16="http://schemas.microsoft.com/office/drawing/2014/main" id="{E7327F41-04A3-9C8C-7F37-C10C03A0A6E1}"/>
+              </a:ext>
+            </a:extLst>
+          </p:cNvPr>
+          <p:cNvSpPr/>
+          <p:nvPr/>
+        </p:nvSpPr>
+        <p:spPr>
+          <a:xfrm>
+            <a:off x="2913124" y="996949"/>
+            <a:ext cx="115825" cy="298451"/>
+          </a:xfrm>
+          <a:prstGeom prst="rect">
+            <a:avLst/>
+          </a:prstGeom>
+          <a:solidFill>
+            <a:srgbClr val="ACD433">
+              <a:alpha val="50196"/>
+            </a:srgbClr>
+          </a:solidFill>
+        </p:spPr>
+        <p:style>
+          <a:lnRef idx="2">
+            <a:schemeClr val="accent1">
+              <a:shade val="15000"/>
+            </a:schemeClr>
+          </a:lnRef>
+          <a:fillRef idx="1">
+            <a:schemeClr val="accent1"/>
+          </a:fillRef>
+          <a:effectRef idx="0">
+            <a:schemeClr val="accent1"/>
+          </a:effectRef>
+          <a:fontRef idx="minor">
+            <a:schemeClr val="lt1"/>
+          </a:fontRef>
+        </p:style>
+        <p:txBody>
+          <a:bodyPr rtlCol="0" anchor="ctr"/>
+          <a:lstStyle/>
+          <a:p>
+            <a:pPr algn="ctr"/>
+            <a:endParaRPr lang="en-US"/>
+          </a:p>
+        </p:txBody>
+      </p:sp>
+      <p:sp>
+        <p:nvSpPr>
+          <p:cNvPr id="2" name="Rectangle 1">
+            <a:extLst>
+              <a:ext uri="{FF2B5EF4-FFF2-40B4-BE49-F238E27FC236}">
+                <a16:creationId xmlns:a16="http://schemas.microsoft.com/office/drawing/2014/main" id="{3CE271A7-87B1-8A12-A237-9167AAAE8AC8}"/>
+              </a:ext>
+            </a:extLst>
+          </p:cNvPr>
+          <p:cNvSpPr/>
+          <p:nvPr/>
+        </p:nvSpPr>
+        <p:spPr>
+          <a:xfrm rot="1551019">
+            <a:off x="3573376" y="623121"/>
+            <a:ext cx="1093916" cy="102021"/>
+          </a:xfrm>
+          <a:prstGeom prst="rect">
+            <a:avLst/>
+          </a:prstGeom>
+          <a:solidFill>
+            <a:srgbClr val="ACD433">
+              <a:alpha val="50196"/>
+            </a:srgbClr>
+          </a:solidFill>
+        </p:spPr>
+        <p:style>
+          <a:lnRef idx="2">
+            <a:schemeClr val="accent1">
+              <a:shade val="15000"/>
+            </a:schemeClr>
+          </a:lnRef>
+          <a:fillRef idx="1">
+            <a:schemeClr val="accent1"/>
+          </a:fillRef>
+          <a:effectRef idx="0">
+            <a:schemeClr val="accent1"/>
+          </a:effectRef>
+          <a:fontRef idx="minor">
+            <a:schemeClr val="lt1"/>
+          </a:fontRef>
+        </p:style>
+        <p:txBody>
+          <a:bodyPr rtlCol="0" anchor="ctr"/>
+          <a:lstStyle/>
+          <a:p>
+            <a:pPr algn="ctr"/>
+            <a:endParaRPr lang="en-US"/>
+          </a:p>
+        </p:txBody>
+      </p:sp>
+      <p:sp>
+        <p:nvSpPr>
+          <p:cNvPr id="8" name="Rectangle 7">
+            <a:extLst>
+              <a:ext uri="{FF2B5EF4-FFF2-40B4-BE49-F238E27FC236}">
+                <a16:creationId xmlns:a16="http://schemas.microsoft.com/office/drawing/2014/main" id="{8C08268B-ECC0-A4A9-5EAA-72AE0DD32001}"/>
+              </a:ext>
+            </a:extLst>
+          </p:cNvPr>
+          <p:cNvSpPr/>
+          <p:nvPr/>
+        </p:nvSpPr>
+        <p:spPr>
+          <a:xfrm>
+            <a:off x="5065260" y="733425"/>
+            <a:ext cx="318398" cy="225099"/>
+          </a:xfrm>
+          <a:prstGeom prst="rect">
+            <a:avLst/>
+          </a:prstGeom>
+          <a:solidFill>
+            <a:srgbClr val="ACD433">
+              <a:alpha val="50196"/>
+            </a:srgbClr>
+          </a:solidFill>
+        </p:spPr>
+        <p:style>
+          <a:lnRef idx="2">
+            <a:schemeClr val="accent1">
+              <a:shade val="15000"/>
+            </a:schemeClr>
+          </a:lnRef>
+          <a:fillRef idx="1">
+            <a:schemeClr val="accent1"/>
+          </a:fillRef>
+          <a:effectRef idx="0">
+            <a:schemeClr val="accent1"/>
+          </a:effectRef>
+          <a:fontRef idx="minor">
+            <a:schemeClr val="lt1"/>
+          </a:fontRef>
+        </p:style>
+        <p:txBody>
+          <a:bodyPr rtlCol="0" anchor="ctr"/>
+          <a:lstStyle/>
+          <a:p>
+            <a:pPr algn="ctr"/>
+            <a:endParaRPr lang="en-US"/>
+          </a:p>
+        </p:txBody>
+      </p:sp>
+      <p:sp>
+        <p:nvSpPr>
+          <p:cNvPr id="9" name="Rectangle 8">
+            <a:extLst>
+              <a:ext uri="{FF2B5EF4-FFF2-40B4-BE49-F238E27FC236}">
+                <a16:creationId xmlns:a16="http://schemas.microsoft.com/office/drawing/2014/main" id="{B8C59CEF-3147-9742-B251-A9AFA9CDB26C}"/>
+              </a:ext>
+            </a:extLst>
+          </p:cNvPr>
+          <p:cNvSpPr/>
+          <p:nvPr/>
+        </p:nvSpPr>
+        <p:spPr>
+          <a:xfrm>
+            <a:off x="4886705" y="434974"/>
+            <a:ext cx="81536" cy="426086"/>
+          </a:xfrm>
+          <a:prstGeom prst="rect">
+            <a:avLst/>
+          </a:prstGeom>
+          <a:solidFill>
+            <a:srgbClr val="ACD433">
+              <a:alpha val="50196"/>
+            </a:srgbClr>
+          </a:solidFill>
+        </p:spPr>
+        <p:style>
+          <a:lnRef idx="2">
+            <a:schemeClr val="accent1">
+              <a:shade val="15000"/>
+            </a:schemeClr>
+          </a:lnRef>
+          <a:fillRef idx="1">
+            <a:schemeClr val="accent1"/>
+          </a:fillRef>
+          <a:effectRef idx="0">
+            <a:schemeClr val="accent1"/>
+          </a:effectRef>
+          <a:fontRef idx="minor">
+            <a:schemeClr val="lt1"/>
+          </a:fontRef>
+        </p:style>
+        <p:txBody>
+          <a:bodyPr rtlCol="0" anchor="ctr"/>
+          <a:lstStyle/>
+          <a:p>
+            <a:pPr algn="ctr"/>
+            <a:endParaRPr lang="en-US"/>
+          </a:p>
+        </p:txBody>
+      </p:sp>
+      <p:sp>
+        <p:nvSpPr>
+          <p:cNvPr id="10" name="Rectangle 9">
+            <a:extLst>
+              <a:ext uri="{FF2B5EF4-FFF2-40B4-BE49-F238E27FC236}">
+                <a16:creationId xmlns:a16="http://schemas.microsoft.com/office/drawing/2014/main" id="{CFD32CA4-10C9-09C5-30FC-FC3770E9F050}"/>
+              </a:ext>
+            </a:extLst>
+          </p:cNvPr>
+          <p:cNvSpPr/>
+          <p:nvPr/>
+        </p:nvSpPr>
+        <p:spPr>
+          <a:xfrm>
+            <a:off x="5006340" y="478664"/>
+            <a:ext cx="622522" cy="100455"/>
+          </a:xfrm>
+          <a:prstGeom prst="rect">
+            <a:avLst/>
+          </a:prstGeom>
+          <a:solidFill>
+            <a:srgbClr val="ACD433">
+              <a:alpha val="50196"/>
+            </a:srgbClr>
+          </a:solidFill>
+        </p:spPr>
+        <p:style>
+          <a:lnRef idx="2">
+            <a:schemeClr val="accent1">
+              <a:shade val="15000"/>
+            </a:schemeClr>
+          </a:lnRef>
+          <a:fillRef idx="1">
+            <a:schemeClr val="accent1"/>
+          </a:fillRef>
+          <a:effectRef idx="0">
+            <a:schemeClr val="accent1"/>
+          </a:effectRef>
+          <a:fontRef idx="minor">
+            <a:schemeClr val="lt1"/>
+          </a:fontRef>
+        </p:style>
+        <p:txBody>
+          <a:bodyPr rtlCol="0" anchor="ctr"/>
+          <a:lstStyle/>
+          <a:p>
+            <a:pPr algn="ctr"/>
+            <a:endParaRPr lang="en-US"/>
+          </a:p>
+        </p:txBody>
+      </p:sp>
+      <p:sp>
+        <p:nvSpPr>
+          <p:cNvPr id="11" name="Rectangle 10">
+            <a:extLst>
+              <a:ext uri="{FF2B5EF4-FFF2-40B4-BE49-F238E27FC236}">
+                <a16:creationId xmlns:a16="http://schemas.microsoft.com/office/drawing/2014/main" id="{25A2C931-D144-2AFB-D3D8-8CA966618C61}"/>
+              </a:ext>
+            </a:extLst>
+          </p:cNvPr>
+          <p:cNvSpPr/>
+          <p:nvPr/>
+        </p:nvSpPr>
+        <p:spPr>
+          <a:xfrm>
+            <a:off x="5006340" y="587374"/>
+            <a:ext cx="114301" cy="273686"/>
+          </a:xfrm>
+          <a:prstGeom prst="rect">
+            <a:avLst/>
+          </a:prstGeom>
+          <a:solidFill>
+            <a:srgbClr val="ACD433">
+              <a:alpha val="50196"/>
+            </a:srgbClr>
+          </a:solidFill>
+        </p:spPr>
+        <p:style>
+          <a:lnRef idx="2">
+            <a:schemeClr val="accent1">
+              <a:shade val="15000"/>
+            </a:schemeClr>
+          </a:lnRef>
+          <a:fillRef idx="1">
+            <a:schemeClr val="accent1"/>
+          </a:fillRef>
+          <a:effectRef idx="0">
+            <a:schemeClr val="accent1"/>
+          </a:effectRef>
+          <a:fontRef idx="minor">
+            <a:schemeClr val="lt1"/>
+          </a:fontRef>
+        </p:style>
+        <p:txBody>
+          <a:bodyPr rtlCol="0" anchor="ctr"/>
+          <a:lstStyle/>
+          <a:p>
+            <a:pPr algn="ctr"/>
+            <a:endParaRPr lang="en-US"/>
+          </a:p>
+        </p:txBody>
+      </p:sp>
+      <p:sp>
+        <p:nvSpPr>
+          <p:cNvPr id="12" name="Rectangle 11">
+            <a:extLst>
+              <a:ext uri="{FF2B5EF4-FFF2-40B4-BE49-F238E27FC236}">
+                <a16:creationId xmlns:a16="http://schemas.microsoft.com/office/drawing/2014/main" id="{E05946B3-3BE4-23FB-E348-F0EEB3F6947B}"/>
+              </a:ext>
+            </a:extLst>
+          </p:cNvPr>
+          <p:cNvSpPr/>
+          <p:nvPr/>
+        </p:nvSpPr>
+        <p:spPr>
+          <a:xfrm>
+            <a:off x="3382706" y="434974"/>
+            <a:ext cx="76700" cy="1133476"/>
+          </a:xfrm>
+          <a:prstGeom prst="rect">
+            <a:avLst/>
+          </a:prstGeom>
+          <a:solidFill>
+            <a:srgbClr val="ACD433">
+              <a:alpha val="50196"/>
+            </a:srgbClr>
+          </a:solidFill>
+        </p:spPr>
+        <p:style>
+          <a:lnRef idx="2">
+            <a:schemeClr val="accent1">
+              <a:shade val="15000"/>
+            </a:schemeClr>
+          </a:lnRef>
+          <a:fillRef idx="1">
+            <a:schemeClr val="accent1"/>
+          </a:fillRef>
+          <a:effectRef idx="0">
+            <a:schemeClr val="accent1"/>
+          </a:effectRef>
+          <a:fontRef idx="minor">
+            <a:schemeClr val="lt1"/>
+          </a:fontRef>
+        </p:style>
+        <p:txBody>
+          <a:bodyPr rtlCol="0" anchor="ctr"/>
+          <a:lstStyle/>
+          <a:p>
+            <a:pPr algn="ctr"/>
+            <a:endParaRPr lang="en-US"/>
+          </a:p>
+        </p:txBody>
+      </p:sp>
+      <p:sp>
+        <p:nvSpPr>
+          <p:cNvPr id="13" name="Rectangle 12">
+            <a:extLst>
+              <a:ext uri="{FF2B5EF4-FFF2-40B4-BE49-F238E27FC236}">
+                <a16:creationId xmlns:a16="http://schemas.microsoft.com/office/drawing/2014/main" id="{46CF0E65-068A-674F-096D-CF87EC246C1C}"/>
+              </a:ext>
+            </a:extLst>
+          </p:cNvPr>
+          <p:cNvSpPr/>
+          <p:nvPr/>
+        </p:nvSpPr>
+        <p:spPr>
+          <a:xfrm>
+            <a:off x="3565097" y="974398"/>
+            <a:ext cx="76700" cy="594051"/>
+          </a:xfrm>
+          <a:prstGeom prst="rect">
+            <a:avLst/>
+          </a:prstGeom>
+          <a:solidFill>
+            <a:srgbClr val="ACD433">
+              <a:alpha val="50196"/>
+            </a:srgbClr>
+          </a:solidFill>
+        </p:spPr>
+        <p:style>
+          <a:lnRef idx="2">
+            <a:schemeClr val="accent1">
+              <a:shade val="15000"/>
+            </a:schemeClr>
+          </a:lnRef>
+          <a:fillRef idx="1">
+            <a:schemeClr val="accent1"/>
+          </a:fillRef>
+          <a:effectRef idx="0">
+            <a:schemeClr val="accent1"/>
+          </a:effectRef>
+          <a:fontRef idx="minor">
+            <a:schemeClr val="lt1"/>
+          </a:fontRef>
+        </p:style>
+        <p:txBody>
+          <a:bodyPr rtlCol="0" anchor="ctr"/>
+          <a:lstStyle/>
+          <a:p>
+            <a:pPr algn="ctr"/>
+            <a:endParaRPr lang="en-US"/>
+          </a:p>
+        </p:txBody>
+      </p:sp>
+      <p:sp>
+        <p:nvSpPr>
+          <p:cNvPr id="14" name="Rectangle 13">
+            <a:extLst>
+              <a:ext uri="{FF2B5EF4-FFF2-40B4-BE49-F238E27FC236}">
+                <a16:creationId xmlns:a16="http://schemas.microsoft.com/office/drawing/2014/main" id="{8B92A37C-53AE-938D-201B-CD7FEAE74869}"/>
+              </a:ext>
+            </a:extLst>
+          </p:cNvPr>
+          <p:cNvSpPr/>
+          <p:nvPr/>
+        </p:nvSpPr>
+        <p:spPr>
+          <a:xfrm>
+            <a:off x="3641797" y="958524"/>
+            <a:ext cx="993006" cy="102111"/>
+          </a:xfrm>
+          <a:prstGeom prst="rect">
+            <a:avLst/>
+          </a:prstGeom>
+          <a:solidFill>
+            <a:srgbClr val="ACD433">
+              <a:alpha val="50196"/>
+            </a:srgbClr>
+          </a:solidFill>
+        </p:spPr>
+        <p:style>
+          <a:lnRef idx="2">
+            <a:schemeClr val="accent1">
+              <a:shade val="15000"/>
+            </a:schemeClr>
+          </a:lnRef>
+          <a:fillRef idx="1">
+            <a:schemeClr val="accent1"/>
+          </a:fillRef>
+          <a:effectRef idx="0">
+            <a:schemeClr val="accent1"/>
+          </a:effectRef>
+          <a:fontRef idx="minor">
+            <a:schemeClr val="lt1"/>
+          </a:fontRef>
+        </p:style>
+        <p:txBody>
+          <a:bodyPr rtlCol="0" anchor="ctr"/>
+          <a:lstStyle/>
+          <a:p>
+            <a:pPr algn="ctr"/>
+            <a:endParaRPr lang="en-US"/>
+          </a:p>
+        </p:txBody>
+      </p:sp>
+      <p:sp>
+        <p:nvSpPr>
+          <p:cNvPr id="15" name="Rectangle 14">
+            <a:extLst>
+              <a:ext uri="{FF2B5EF4-FFF2-40B4-BE49-F238E27FC236}">
+                <a16:creationId xmlns:a16="http://schemas.microsoft.com/office/drawing/2014/main" id="{2E3CE59B-5947-B186-86C4-2CD3B525AF99}"/>
+              </a:ext>
+            </a:extLst>
+          </p:cNvPr>
+          <p:cNvSpPr/>
+          <p:nvPr/>
+        </p:nvSpPr>
+        <p:spPr>
+          <a:xfrm>
+            <a:off x="3788357" y="1447841"/>
+            <a:ext cx="233295" cy="181579"/>
+          </a:xfrm>
+          <a:prstGeom prst="rect">
+            <a:avLst/>
+          </a:prstGeom>
+          <a:solidFill>
+            <a:srgbClr val="ACD433">
+              <a:alpha val="50196"/>
+            </a:srgbClr>
+          </a:solidFill>
+        </p:spPr>
+        <p:style>
+          <a:lnRef idx="2">
+            <a:schemeClr val="accent1">
+              <a:shade val="15000"/>
+            </a:schemeClr>
+          </a:lnRef>
+          <a:fillRef idx="1">
+            <a:schemeClr val="accent1"/>
+          </a:fillRef>
+          <a:effectRef idx="0">
+            <a:schemeClr val="accent1"/>
+          </a:effectRef>
+          <a:fontRef idx="minor">
+            <a:schemeClr val="lt1"/>
+          </a:fontRef>
+        </p:style>
+        <p:txBody>
+          <a:bodyPr rtlCol="0" anchor="ctr"/>
+          <a:lstStyle/>
+          <a:p>
+            <a:pPr algn="ctr"/>
+            <a:endParaRPr lang="en-US"/>
+          </a:p>
+        </p:txBody>
+      </p:sp>
+    </p:spTree>
+    <p:extLst>
+      <p:ext uri="{BB962C8B-B14F-4D97-AF65-F5344CB8AC3E}">
+        <p14:creationId xmlns:p14="http://schemas.microsoft.com/office/powerpoint/2010/main" val="1811637965"/>
+      </p:ext>
+    </p:extLst>
+  </p:cSld>
+  <p:clrMapOvr>
+    <a:masterClrMapping/>
+  </p:clrMapOvr>
+</p:sld>
+</file>
+
+<file path=ppt/slides/slide21.xml><?xml version="1.0" encoding="utf-8"?>
+<p:sld xmlns:a="http://schemas.openxmlformats.org/drawingml/2006/main" xmlns:r="http://schemas.openxmlformats.org/officeDocument/2006/relationships" xmlns:p="http://schemas.openxmlformats.org/presentationml/2006/main">
+  <p:cSld>
+    <p:spTree>
+      <p:nvGrpSpPr>
+        <p:cNvPr id="1" name="">
+          <a:extLst>
+            <a:ext uri="{FF2B5EF4-FFF2-40B4-BE49-F238E27FC236}">
+              <a16:creationId xmlns:a16="http://schemas.microsoft.com/office/drawing/2014/main" id="{62CC054F-9A96-2FFD-11A7-277C59F24F20}"/>
+            </a:ext>
+          </a:extLst>
+        </p:cNvPr>
+        <p:cNvGrpSpPr/>
+        <p:nvPr/>
+      </p:nvGrpSpPr>
+      <p:grpSpPr>
+        <a:xfrm>
+          <a:off x="0" y="0"/>
+          <a:ext cx="0" cy="0"/>
+          <a:chOff x="0" y="0"/>
+          <a:chExt cx="0" cy="0"/>
+        </a:xfrm>
+      </p:grpSpPr>
+      <p:sp>
+        <p:nvSpPr>
+          <p:cNvPr id="2" name="Title 1">
+            <a:extLst>
+              <a:ext uri="{FF2B5EF4-FFF2-40B4-BE49-F238E27FC236}">
+                <a16:creationId xmlns:a16="http://schemas.microsoft.com/office/drawing/2014/main" id="{89FA8AFD-C5F3-5BFF-7D4F-FA2D2DE08FC2}"/>
+              </a:ext>
+            </a:extLst>
+          </p:cNvPr>
+          <p:cNvSpPr>
+            <a:spLocks noGrp="1"/>
+          </p:cNvSpPr>
+          <p:nvPr>
+            <p:ph type="title"/>
+          </p:nvPr>
+        </p:nvSpPr>
+        <p:spPr>
+          <a:xfrm>
+            <a:off x="1754188" y="452718"/>
+            <a:ext cx="8296646" cy="1400530"/>
+          </a:xfrm>
+        </p:spPr>
+        <p:txBody>
+          <a:bodyPr/>
+          <a:lstStyle/>
+          <a:p>
+            <a:r>
+              <a:rPr lang="en-US" b="1" dirty="0"/>
+              <a:t>Essential EA Meta-Model</a:t>
+            </a:r>
+            <a:br>
+              <a:rPr lang="en-US" b="1" dirty="0"/>
+            </a:br>
+            <a:r>
+              <a:rPr lang="en-US" b="1" dirty="0"/>
+              <a:t>- Business Conceptual - 10 </a:t>
+            </a:r>
+          </a:p>
+        </p:txBody>
+      </p:sp>
+      <p:sp>
+        <p:nvSpPr>
+          <p:cNvPr id="4" name="Title 1">
+            <a:extLst>
+              <a:ext uri="{FF2B5EF4-FFF2-40B4-BE49-F238E27FC236}">
+                <a16:creationId xmlns:a16="http://schemas.microsoft.com/office/drawing/2014/main" id="{198D5E3A-D93F-CB53-47E8-0F229E9FE496}"/>
+              </a:ext>
+            </a:extLst>
+          </p:cNvPr>
+          <p:cNvSpPr txBox="1">
+            <a:spLocks/>
+          </p:cNvSpPr>
+          <p:nvPr/>
+        </p:nvSpPr>
+        <p:spPr>
+          <a:xfrm>
+            <a:off x="0" y="3143"/>
+            <a:ext cx="1754188" cy="1058013"/>
+          </a:xfrm>
+          <a:prstGeom prst="rect">
+            <a:avLst/>
+          </a:prstGeom>
+        </p:spPr>
+        <p:txBody>
+          <a:bodyPr vert="horz" lIns="91440" tIns="45720" rIns="91440" bIns="45720" rtlCol="0" anchor="ctr">
+            <a:noAutofit/>
+          </a:bodyPr>
+          <a:lstStyle>
+            <a:lvl1pPr algn="l" defTabSz="457200" rtl="0" eaLnBrk="1" latinLnBrk="0" hangingPunct="1">
+              <a:spcBef>
+                <a:spcPct val="0"/>
+              </a:spcBef>
+              <a:buNone/>
+              <a:defRPr sz="7200" b="0" i="0" kern="1200">
+                <a:solidFill>
+                  <a:schemeClr val="tx2"/>
+                </a:solidFill>
+                <a:latin typeface="+mj-lt"/>
+                <a:ea typeface="+mj-ea"/>
+                <a:cs typeface="+mj-cs"/>
+              </a:defRPr>
+            </a:lvl1pPr>
+            <a:lvl2pPr eaLnBrk="1" hangingPunct="1">
+              <a:defRPr>
+                <a:solidFill>
+                  <a:schemeClr val="tx2"/>
+                </a:solidFill>
+              </a:defRPr>
+            </a:lvl2pPr>
+            <a:lvl3pPr eaLnBrk="1" hangingPunct="1">
+              <a:defRPr>
+                <a:solidFill>
+                  <a:schemeClr val="tx2"/>
+                </a:solidFill>
+              </a:defRPr>
+            </a:lvl3pPr>
+            <a:lvl4pPr eaLnBrk="1" hangingPunct="1">
+              <a:defRPr>
+                <a:solidFill>
+                  <a:schemeClr val="tx2"/>
+                </a:solidFill>
+              </a:defRPr>
+            </a:lvl4pPr>
+            <a:lvl5pPr eaLnBrk="1" hangingPunct="1">
+              <a:defRPr>
+                <a:solidFill>
+                  <a:schemeClr val="tx2"/>
+                </a:solidFill>
+              </a:defRPr>
+            </a:lvl5pPr>
+            <a:lvl6pPr eaLnBrk="1" hangingPunct="1">
+              <a:defRPr>
+                <a:solidFill>
+                  <a:schemeClr val="tx2"/>
+                </a:solidFill>
+              </a:defRPr>
+            </a:lvl6pPr>
+            <a:lvl7pPr eaLnBrk="1" hangingPunct="1">
+              <a:defRPr>
+                <a:solidFill>
+                  <a:schemeClr val="tx2"/>
+                </a:solidFill>
+              </a:defRPr>
+            </a:lvl7pPr>
+            <a:lvl8pPr eaLnBrk="1" hangingPunct="1">
+              <a:defRPr>
+                <a:solidFill>
+                  <a:schemeClr val="tx2"/>
+                </a:solidFill>
+              </a:defRPr>
+            </a:lvl8pPr>
+            <a:lvl9pPr eaLnBrk="1" hangingPunct="1">
+              <a:defRPr>
+                <a:solidFill>
+                  <a:schemeClr val="tx2"/>
+                </a:solidFill>
+              </a:defRPr>
+            </a:lvl9pPr>
+          </a:lstStyle>
+          <a:p>
+            <a:pPr algn="ctr"/>
+            <a:r>
+              <a:rPr lang="en-US" b="1" dirty="0">
+                <a:solidFill>
+                  <a:schemeClr val="accent1">
+                    <a:lumMod val="75000"/>
+                  </a:schemeClr>
+                </a:solidFill>
+              </a:rPr>
+              <a:t>016</a:t>
+            </a:r>
+            <a:endParaRPr lang="ru-RU" b="1" dirty="0">
+              <a:solidFill>
+                <a:schemeClr val="accent1">
+                  <a:lumMod val="75000"/>
+                </a:schemeClr>
+              </a:solidFill>
+            </a:endParaRPr>
+          </a:p>
+        </p:txBody>
+      </p:sp>
+      <p:pic>
+        <p:nvPicPr>
+          <p:cNvPr id="3" name="Picture 2">
+            <a:extLst>
+              <a:ext uri="{FF2B5EF4-FFF2-40B4-BE49-F238E27FC236}">
+                <a16:creationId xmlns:a16="http://schemas.microsoft.com/office/drawing/2014/main" id="{9905571A-32EA-7A11-9C67-83A03E979326}"/>
+              </a:ext>
+            </a:extLst>
+          </p:cNvPr>
+          <p:cNvPicPr>
+            <a:picLocks noChangeAspect="1"/>
+          </p:cNvPicPr>
+          <p:nvPr/>
+        </p:nvPicPr>
+        <p:blipFill>
+          <a:blip r:embed="rId2"/>
+          <a:stretch>
+            <a:fillRect/>
+          </a:stretch>
+        </p:blipFill>
+        <p:spPr>
+          <a:xfrm>
+            <a:off x="236841" y="1853248"/>
+            <a:ext cx="8296646" cy="4669795"/>
+          </a:xfrm>
+          <a:prstGeom prst="rect">
+            <a:avLst/>
+          </a:prstGeom>
+          <a:ln>
+            <a:noFill/>
+          </a:ln>
+          <a:effectLst>
+            <a:outerShdw blurRad="292100" dist="139700" dir="2700000" algn="tl" rotWithShape="0">
+              <a:srgbClr val="333333">
+                <a:alpha val="65000"/>
+              </a:srgbClr>
+            </a:outerShdw>
+          </a:effectLst>
+        </p:spPr>
+      </p:pic>
+      <p:sp>
+        <p:nvSpPr>
+          <p:cNvPr id="6" name="Rectangle: Rounded Corners 5">
+            <a:extLst>
+              <a:ext uri="{FF2B5EF4-FFF2-40B4-BE49-F238E27FC236}">
+                <a16:creationId xmlns:a16="http://schemas.microsoft.com/office/drawing/2014/main" id="{A7B3C632-1540-FA39-E1D6-7730B9120BB0}"/>
+              </a:ext>
+            </a:extLst>
+          </p:cNvPr>
+          <p:cNvSpPr/>
+          <p:nvPr/>
+        </p:nvSpPr>
+        <p:spPr>
+          <a:xfrm>
+            <a:off x="596436" y="2188396"/>
+            <a:ext cx="2054832" cy="1400530"/>
+          </a:xfrm>
+          <a:prstGeom prst="roundRect">
+            <a:avLst>
+              <a:gd name="adj" fmla="val 6916"/>
+            </a:avLst>
+          </a:prstGeom>
+          <a:solidFill>
+            <a:srgbClr val="FFCC66">
+              <a:alpha val="20000"/>
+            </a:srgbClr>
+          </a:solidFill>
+          <a:ln>
+            <a:solidFill>
+              <a:srgbClr val="92D050"/>
+            </a:solidFill>
+          </a:ln>
+        </p:spPr>
+        <p:style>
+          <a:lnRef idx="2">
+            <a:schemeClr val="accent1">
+              <a:shade val="15000"/>
+            </a:schemeClr>
+          </a:lnRef>
+          <a:fillRef idx="1">
+            <a:schemeClr val="accent1"/>
+          </a:fillRef>
+          <a:effectRef idx="0">
+            <a:schemeClr val="accent1"/>
+          </a:effectRef>
+          <a:fontRef idx="minor">
+            <a:schemeClr val="lt1"/>
+          </a:fontRef>
+        </p:style>
+        <p:txBody>
+          <a:bodyPr rtlCol="0" anchor="ctr"/>
+          <a:lstStyle/>
+          <a:p>
+            <a:pPr algn="ctr"/>
+            <a:endParaRPr lang="en-US"/>
+          </a:p>
+        </p:txBody>
+      </p:sp>
+      <p:pic>
+        <p:nvPicPr>
+          <p:cNvPr id="11" name="Picture 10">
+            <a:extLst>
+              <a:ext uri="{FF2B5EF4-FFF2-40B4-BE49-F238E27FC236}">
+                <a16:creationId xmlns:a16="http://schemas.microsoft.com/office/drawing/2014/main" id="{EB84AA08-8B0B-09E4-3A7C-88AF0D9C5F2F}"/>
+              </a:ext>
+            </a:extLst>
+          </p:cNvPr>
+          <p:cNvPicPr>
+            <a:picLocks noChangeAspect="1"/>
+          </p:cNvPicPr>
+          <p:nvPr/>
+        </p:nvPicPr>
+        <p:blipFill>
+          <a:blip r:embed="rId3"/>
+          <a:stretch>
+            <a:fillRect/>
+          </a:stretch>
+        </p:blipFill>
+        <p:spPr>
+          <a:xfrm>
+            <a:off x="157000" y="1094226"/>
+            <a:ext cx="362976" cy="362976"/>
+          </a:xfrm>
+          <a:prstGeom prst="rect">
+            <a:avLst/>
+          </a:prstGeom>
+          <a:ln>
+            <a:noFill/>
+          </a:ln>
+          <a:effectLst>
+            <a:outerShdw blurRad="292100" dist="139700" dir="2700000" algn="tl" rotWithShape="0">
+              <a:srgbClr val="333333">
+                <a:alpha val="65000"/>
+              </a:srgbClr>
+            </a:outerShdw>
+          </a:effectLst>
+        </p:spPr>
+      </p:pic>
+      <p:pic>
+        <p:nvPicPr>
+          <p:cNvPr id="12" name="Picture 11">
+            <a:extLst>
+              <a:ext uri="{FF2B5EF4-FFF2-40B4-BE49-F238E27FC236}">
+                <a16:creationId xmlns:a16="http://schemas.microsoft.com/office/drawing/2014/main" id="{CB30C57D-4D30-71B2-4D54-9BAD21FAFD72}"/>
+              </a:ext>
+            </a:extLst>
+          </p:cNvPr>
+          <p:cNvPicPr>
+            <a:picLocks noChangeAspect="1"/>
+          </p:cNvPicPr>
+          <p:nvPr/>
+        </p:nvPicPr>
+        <p:blipFill>
+          <a:blip r:embed="rId4"/>
+          <a:stretch>
+            <a:fillRect/>
+          </a:stretch>
+        </p:blipFill>
+        <p:spPr>
+          <a:xfrm>
+            <a:off x="611241" y="1094226"/>
+            <a:ext cx="362976" cy="362976"/>
+          </a:xfrm>
+          <a:prstGeom prst="rect">
+            <a:avLst/>
+          </a:prstGeom>
+          <a:ln>
+            <a:noFill/>
+          </a:ln>
+          <a:effectLst>
+            <a:outerShdw blurRad="292100" dist="139700" dir="2700000" algn="tl" rotWithShape="0">
+              <a:srgbClr val="333333">
+                <a:alpha val="65000"/>
+              </a:srgbClr>
+            </a:outerShdw>
+          </a:effectLst>
+        </p:spPr>
+      </p:pic>
+      <p:pic>
+        <p:nvPicPr>
+          <p:cNvPr id="13" name="Picture 12">
+            <a:extLst>
+              <a:ext uri="{FF2B5EF4-FFF2-40B4-BE49-F238E27FC236}">
+                <a16:creationId xmlns:a16="http://schemas.microsoft.com/office/drawing/2014/main" id="{9E2B3C7E-EE5F-A19E-7142-505CE404856D}"/>
+              </a:ext>
+            </a:extLst>
+          </p:cNvPr>
+          <p:cNvPicPr>
+            <a:picLocks noChangeAspect="1"/>
+          </p:cNvPicPr>
+          <p:nvPr/>
+        </p:nvPicPr>
+        <p:blipFill>
+          <a:blip r:embed="rId5"/>
+          <a:stretch>
+            <a:fillRect/>
+          </a:stretch>
+        </p:blipFill>
+        <p:spPr>
+          <a:xfrm>
+            <a:off x="1065482" y="1094226"/>
+            <a:ext cx="371111" cy="362976"/>
+          </a:xfrm>
+          <a:prstGeom prst="rect">
+            <a:avLst/>
+          </a:prstGeom>
+          <a:ln>
+            <a:noFill/>
+          </a:ln>
+          <a:effectLst>
+            <a:outerShdw blurRad="292100" dist="139700" dir="2700000" algn="tl" rotWithShape="0">
+              <a:srgbClr val="333333">
+                <a:alpha val="65000"/>
+              </a:srgbClr>
+            </a:outerShdw>
+          </a:effectLst>
+        </p:spPr>
+      </p:pic>
+    </p:spTree>
+    <p:extLst>
+      <p:ext uri="{BB962C8B-B14F-4D97-AF65-F5344CB8AC3E}">
+        <p14:creationId xmlns:p14="http://schemas.microsoft.com/office/powerpoint/2010/main" val="3496391006"/>
+      </p:ext>
+    </p:extLst>
+  </p:cSld>
+  <p:clrMapOvr>
+    <a:masterClrMapping/>
+  </p:clrMapOvr>
+</p:sld>
+</file>
+
+<file path=ppt/slides/slide22.xml><?xml version="1.0" encoding="utf-8"?>
+<p:sld xmlns:a="http://schemas.openxmlformats.org/drawingml/2006/main" xmlns:r="http://schemas.openxmlformats.org/officeDocument/2006/relationships" xmlns:p="http://schemas.openxmlformats.org/presentationml/2006/main">
+  <p:cSld>
+    <p:bg>
+      <p:bgPr>
+        <a:blipFill rotWithShape="1">
+          <a:blip r:embed="rId3">
+            <a:duotone>
+              <a:schemeClr val="bg2">
+                <a:shade val="62000"/>
+                <a:hueMod val="108000"/>
+                <a:satMod val="164000"/>
+                <a:lumMod val="69000"/>
+              </a:schemeClr>
+              <a:schemeClr val="bg2">
+                <a:tint val="96000"/>
+                <a:hueMod val="90000"/>
+                <a:satMod val="130000"/>
+                <a:lumMod val="134000"/>
+              </a:schemeClr>
+            </a:duotone>
+          </a:blip>
+          <a:stretch/>
+        </a:blipFill>
+        <a:effectLst/>
+      </p:bgPr>
+    </p:bg>
+    <p:spTree>
+      <p:nvGrpSpPr>
+        <p:cNvPr id="1" name=""/>
+        <p:cNvGrpSpPr/>
+        <p:nvPr/>
+      </p:nvGrpSpPr>
+      <p:grpSpPr>
+        <a:xfrm>
+          <a:off x="0" y="0"/>
+          <a:ext cx="0" cy="0"/>
+          <a:chOff x="0" y="0"/>
+          <a:chExt cx="0" cy="0"/>
+        </a:xfrm>
+      </p:grpSpPr>
+      <p:pic>
+        <p:nvPicPr>
+          <p:cNvPr id="15" name="Picture 14" descr="abstract design">
+            <a:extLst>
+              <a:ext uri="{FF2B5EF4-FFF2-40B4-BE49-F238E27FC236}">
+                <a16:creationId xmlns:a16="http://schemas.microsoft.com/office/drawing/2014/main" id="{6D363037-1741-4470-A023-883E2FFD5840}"/>
+              </a:ext>
+            </a:extLst>
+          </p:cNvPr>
+          <p:cNvPicPr>
+            <a:picLocks noChangeAspect="1"/>
+          </p:cNvPicPr>
+          <p:nvPr/>
+        </p:nvPicPr>
+        <p:blipFill rotWithShape="1">
+          <a:blip r:embed="rId4">
+            <a:duotone>
+              <a:prstClr val="black"/>
+              <a:schemeClr val="accent5">
+                <a:tint val="45000"/>
+                <a:satMod val="400000"/>
+              </a:schemeClr>
+            </a:duotone>
+            <a:alphaModFix amt="25000"/>
+          </a:blip>
+          <a:srcRect t="18308" r="6818" b="2872"/>
+          <a:stretch/>
+        </p:blipFill>
+        <p:spPr>
+          <a:xfrm flipH="1">
+            <a:off x="20" y="10"/>
+            <a:ext cx="12191980" cy="6857990"/>
+          </a:xfrm>
+          <a:prstGeom prst="rect">
+            <a:avLst/>
+          </a:prstGeom>
+        </p:spPr>
+      </p:pic>
+      <p:sp>
+        <p:nvSpPr>
+          <p:cNvPr id="12" name="Title 11">
+            <a:extLst>
+              <a:ext uri="{FF2B5EF4-FFF2-40B4-BE49-F238E27FC236}">
+                <a16:creationId xmlns:a16="http://schemas.microsoft.com/office/drawing/2014/main" id="{970C361B-D32E-42E0-A41E-86C3D9AC886F}"/>
+              </a:ext>
+            </a:extLst>
+          </p:cNvPr>
+          <p:cNvSpPr>
+            <a:spLocks noGrp="1"/>
+          </p:cNvSpPr>
+          <p:nvPr>
+            <p:ph type="ctrTitle"/>
+          </p:nvPr>
+        </p:nvSpPr>
+        <p:spPr>
+          <a:xfrm>
+            <a:off x="1154955" y="1447800"/>
+            <a:ext cx="8825658" cy="3329581"/>
+          </a:xfrm>
+        </p:spPr>
+        <p:txBody>
+          <a:bodyPr>
+            <a:normAutofit/>
+          </a:bodyPr>
+          <a:lstStyle/>
+          <a:p>
+            <a:r>
+              <a:rPr lang="en-US" dirty="0"/>
+              <a:t>Thank You!</a:t>
+            </a:r>
+            <a:endParaRPr lang="ru-RU" dirty="0"/>
+          </a:p>
+        </p:txBody>
+      </p:sp>
+      <p:sp>
+        <p:nvSpPr>
+          <p:cNvPr id="13" name="Subtitle 12">
+            <a:extLst>
+              <a:ext uri="{FF2B5EF4-FFF2-40B4-BE49-F238E27FC236}">
+                <a16:creationId xmlns:a16="http://schemas.microsoft.com/office/drawing/2014/main" id="{336E726C-3DE4-41AA-88A0-C92B0C34163D}"/>
+              </a:ext>
+            </a:extLst>
+          </p:cNvPr>
+          <p:cNvSpPr>
+            <a:spLocks noGrp="1"/>
+          </p:cNvSpPr>
+          <p:nvPr>
+            <p:ph type="subTitle" idx="1"/>
+          </p:nvPr>
+        </p:nvSpPr>
+        <p:spPr>
+          <a:xfrm>
+            <a:off x="1154955" y="4777380"/>
+            <a:ext cx="8825658" cy="861420"/>
+          </a:xfrm>
+        </p:spPr>
+        <p:txBody>
+          <a:bodyPr>
+            <a:normAutofit/>
+          </a:bodyPr>
+          <a:lstStyle/>
+          <a:p>
+            <a:r>
+              <a:rPr lang="en-US" dirty="0"/>
+              <a:t>someone@Example.com</a:t>
+            </a:r>
+            <a:endParaRPr lang="ru-RU" dirty="0"/>
+          </a:p>
+        </p:txBody>
+      </p:sp>
+      <p:sp>
+        <p:nvSpPr>
+          <p:cNvPr id="57" name="Rectangle 56">
+            <a:extLst>
+              <a:ext uri="{FF2B5EF4-FFF2-40B4-BE49-F238E27FC236}">
+                <a16:creationId xmlns:a16="http://schemas.microsoft.com/office/drawing/2014/main" id="{318E9D62-7BA3-4D5E-8915-0D0E8661E3D7}"/>
+              </a:ext>
+              <a:ext uri="{C183D7F6-B498-43B3-948B-1728B52AA6E4}">
+                <adec:decorative xmlns:adec="http://schemas.microsoft.com/office/drawing/2017/decorative" val="1"/>
+              </a:ext>
+            </a:extLst>
+          </p:cNvPr>
+          <p:cNvSpPr>
+            <a:spLocks noGrp="1" noRot="1" noChangeAspect="1" noMove="1" noResize="1" noEditPoints="1" noAdjustHandles="1" noChangeArrowheads="1" noChangeShapeType="1" noTextEdit="1"/>
+          </p:cNvSpPr>
+          <p:nvPr>
+            <p:extLst>
+              <p:ext uri="{386F3935-93C4-4BCD-93E2-E3B085C9AB24}">
+                <p16:designElem xmlns:p16="http://schemas.microsoft.com/office/powerpoint/2015/main" val="1"/>
+              </p:ext>
+            </p:extLst>
+          </p:nvPr>
+        </p:nvSpPr>
+        <p:spPr>
+          <a:xfrm>
+            <a:off x="10437812" y="0"/>
+            <a:ext cx="685800" cy="1143000"/>
+          </a:xfrm>
+          <a:prstGeom prst="rect">
+            <a:avLst/>
+          </a:prstGeom>
+          <a:solidFill>
+            <a:schemeClr val="accent1"/>
+          </a:solidFill>
+          <a:ln>
+            <a:noFill/>
+          </a:ln>
+        </p:spPr>
+        <p:style>
+          <a:lnRef idx="1">
+            <a:schemeClr val="accent1"/>
+          </a:lnRef>
+          <a:fillRef idx="3">
+            <a:schemeClr val="accent1"/>
+          </a:fillRef>
+          <a:effectRef idx="2">
+            <a:schemeClr val="accent1"/>
+          </a:effectRef>
+          <a:fontRef idx="minor">
+            <a:schemeClr val="lt1"/>
+          </a:fontRef>
+        </p:style>
+        <p:txBody>
+          <a:bodyPr/>
+          <a:lstStyle/>
+          <a:p>
+            <a:endParaRPr lang="en-US"/>
+          </a:p>
+        </p:txBody>
+      </p:sp>
+      <p:pic>
+        <p:nvPicPr>
+          <p:cNvPr id="4" name="Picture 3">
+            <a:extLst>
+              <a:ext uri="{FF2B5EF4-FFF2-40B4-BE49-F238E27FC236}">
+                <a16:creationId xmlns:a16="http://schemas.microsoft.com/office/drawing/2014/main" id="{B011F562-7C5B-B39E-2FF0-681E86D50FE2}"/>
+              </a:ext>
+            </a:extLst>
+          </p:cNvPr>
+          <p:cNvPicPr>
+            <a:picLocks noChangeAspect="1"/>
+          </p:cNvPicPr>
+          <p:nvPr/>
+        </p:nvPicPr>
+        <p:blipFill>
+          <a:blip r:embed="rId5"/>
+          <a:stretch>
+            <a:fillRect/>
+          </a:stretch>
+        </p:blipFill>
+        <p:spPr>
+          <a:xfrm>
+            <a:off x="10440834" y="0"/>
+            <a:ext cx="682228" cy="682228"/>
+          </a:xfrm>
+          <a:prstGeom prst="rect">
+            <a:avLst/>
+          </a:prstGeom>
+        </p:spPr>
+      </p:pic>
+    </p:spTree>
+    <p:extLst>
+      <p:ext uri="{BB962C8B-B14F-4D97-AF65-F5344CB8AC3E}">
+        <p14:creationId xmlns:p14="http://schemas.microsoft.com/office/powerpoint/2010/main" val="510767980"/>
+      </p:ext>
+    </p:extLst>
+  </p:cSld>
+  <p:clrMapOvr>
+    <a:masterClrMapping/>
+  </p:clrMapOvr>
 </p:sld>
 </file>
 

--- a/Master_EAS_Meta-Model.pptx
+++ b/Master_EAS_Meta-Model.pptx
@@ -5,10 +5,10 @@
     <p:sldMasterId id="2147483648" r:id="rId4"/>
   </p:sldMasterIdLst>
   <p:notesMasterIdLst>
-    <p:notesMasterId r:id="rId27"/>
+    <p:notesMasterId r:id="rId29"/>
   </p:notesMasterIdLst>
   <p:handoutMasterIdLst>
-    <p:handoutMasterId r:id="rId28"/>
+    <p:handoutMasterId r:id="rId30"/>
   </p:handoutMasterIdLst>
   <p:sldIdLst>
     <p:sldId id="256" r:id="rId5"/>
@@ -32,7 +32,9 @@
     <p:sldId id="286" r:id="rId23"/>
     <p:sldId id="288" r:id="rId24"/>
     <p:sldId id="289" r:id="rId25"/>
-    <p:sldId id="267" r:id="rId26"/>
+    <p:sldId id="290" r:id="rId26"/>
+    <p:sldId id="291" r:id="rId27"/>
+    <p:sldId id="267" r:id="rId28"/>
   </p:sldIdLst>
   <p:sldSz cx="12192000" cy="6858000"/>
   <p:notesSz cx="6858000" cy="9144000"/>
@@ -840,7 +842,7 @@
           <a:p>
             <a:fld id="{EE000EEB-8338-48D7-8EE8-EE0082EF7602}" type="slidenum">
               <a:rPr lang="en-US" smtClean="0"/>
-              <a:t>22</a:t>
+              <a:t>24</a:t>
             </a:fld>
             <a:endParaRPr lang="en-US" dirty="0"/>
           </a:p>
@@ -12779,6 +12781,60 @@
           </a:effectLst>
         </p:spPr>
       </p:pic>
+      <p:pic>
+        <p:nvPicPr>
+          <p:cNvPr id="7" name="Picture 6">
+            <a:extLst>
+              <a:ext uri="{FF2B5EF4-FFF2-40B4-BE49-F238E27FC236}">
+                <a16:creationId xmlns:a16="http://schemas.microsoft.com/office/drawing/2014/main" id="{67CC047E-FC1A-5F7D-47FB-A412C3055917}"/>
+              </a:ext>
+            </a:extLst>
+          </p:cNvPr>
+          <p:cNvPicPr>
+            <a:picLocks noChangeAspect="1"/>
+          </p:cNvPicPr>
+          <p:nvPr/>
+        </p:nvPicPr>
+        <p:blipFill>
+          <a:blip r:embed="rId6"/>
+          <a:stretch>
+            <a:fillRect/>
+          </a:stretch>
+        </p:blipFill>
+        <p:spPr>
+          <a:xfrm>
+            <a:off x="7870445" y="2688117"/>
+            <a:ext cx="4084714" cy="2180266"/>
+          </a:xfrm>
+          <a:prstGeom prst="roundRect">
+            <a:avLst>
+              <a:gd name="adj" fmla="val 16667"/>
+            </a:avLst>
+          </a:prstGeom>
+          <a:ln>
+            <a:noFill/>
+          </a:ln>
+          <a:effectLst>
+            <a:outerShdw blurRad="152400" dist="12000" dir="900000" sy="98000" kx="110000" ky="200000" algn="tl" rotWithShape="0">
+              <a:srgbClr val="000000">
+                <a:alpha val="30000"/>
+              </a:srgbClr>
+            </a:outerShdw>
+          </a:effectLst>
+          <a:scene3d>
+            <a:camera prst="perspectiveRelaxed">
+              <a:rot lat="19800000" lon="1200000" rev="20820000"/>
+            </a:camera>
+            <a:lightRig rig="threePt" dir="t"/>
+          </a:scene3d>
+          <a:sp3d contourW="6350" prstMaterial="matte">
+            <a:bevelT w="101600" h="101600"/>
+            <a:contourClr>
+              <a:srgbClr val="969696"/>
+            </a:contourClr>
+          </a:sp3d>
+        </p:spPr>
+      </p:pic>
     </p:spTree>
     <p:extLst>
       <p:ext uri="{BB962C8B-B14F-4D97-AF65-F5344CB8AC3E}">
@@ -13968,6 +14024,57 @@
           </a:p>
         </p:txBody>
       </p:sp>
+      <p:sp>
+        <p:nvSpPr>
+          <p:cNvPr id="16" name="Rectangle 15">
+            <a:extLst>
+              <a:ext uri="{FF2B5EF4-FFF2-40B4-BE49-F238E27FC236}">
+                <a16:creationId xmlns:a16="http://schemas.microsoft.com/office/drawing/2014/main" id="{995B081E-4763-98C8-324F-E030C1875920}"/>
+              </a:ext>
+            </a:extLst>
+          </p:cNvPr>
+          <p:cNvSpPr/>
+          <p:nvPr/>
+        </p:nvSpPr>
+        <p:spPr>
+          <a:xfrm rot="4874518">
+            <a:off x="4478330" y="985650"/>
+            <a:ext cx="81536" cy="426086"/>
+          </a:xfrm>
+          <a:prstGeom prst="rect">
+            <a:avLst/>
+          </a:prstGeom>
+          <a:solidFill>
+            <a:srgbClr val="ACD433">
+              <a:alpha val="50196"/>
+            </a:srgbClr>
+          </a:solidFill>
+        </p:spPr>
+        <p:style>
+          <a:lnRef idx="2">
+            <a:schemeClr val="accent1">
+              <a:shade val="15000"/>
+            </a:schemeClr>
+          </a:lnRef>
+          <a:fillRef idx="1">
+            <a:schemeClr val="accent1"/>
+          </a:fillRef>
+          <a:effectRef idx="0">
+            <a:schemeClr val="accent1"/>
+          </a:effectRef>
+          <a:fontRef idx="minor">
+            <a:schemeClr val="lt1"/>
+          </a:fontRef>
+        </p:style>
+        <p:txBody>
+          <a:bodyPr rtlCol="0" anchor="ctr"/>
+          <a:lstStyle/>
+          <a:p>
+            <a:pPr algn="ctr"/>
+            <a:endParaRPr lang="en-US"/>
+          </a:p>
+        </p:txBody>
+      </p:sp>
     </p:spTree>
     <p:extLst>
       <p:ext uri="{BB962C8B-B14F-4D97-AF65-F5344CB8AC3E}">
@@ -14383,6 +14490,60 @@
           </a:effectLst>
         </p:spPr>
       </p:pic>
+      <p:pic>
+        <p:nvPicPr>
+          <p:cNvPr id="7" name="Picture 6">
+            <a:extLst>
+              <a:ext uri="{FF2B5EF4-FFF2-40B4-BE49-F238E27FC236}">
+                <a16:creationId xmlns:a16="http://schemas.microsoft.com/office/drawing/2014/main" id="{517ACAD9-2965-581E-5CB0-EDD06434993D}"/>
+              </a:ext>
+            </a:extLst>
+          </p:cNvPr>
+          <p:cNvPicPr>
+            <a:picLocks noChangeAspect="1"/>
+          </p:cNvPicPr>
+          <p:nvPr/>
+        </p:nvPicPr>
+        <p:blipFill>
+          <a:blip r:embed="rId6"/>
+          <a:stretch>
+            <a:fillRect/>
+          </a:stretch>
+        </p:blipFill>
+        <p:spPr>
+          <a:xfrm>
+            <a:off x="8297989" y="2089556"/>
+            <a:ext cx="3046248" cy="3807810"/>
+          </a:xfrm>
+          <a:prstGeom prst="roundRect">
+            <a:avLst>
+              <a:gd name="adj" fmla="val 16667"/>
+            </a:avLst>
+          </a:prstGeom>
+          <a:ln>
+            <a:noFill/>
+          </a:ln>
+          <a:effectLst>
+            <a:outerShdw blurRad="152400" dist="12000" dir="900000" sy="98000" kx="110000" ky="200000" algn="tl" rotWithShape="0">
+              <a:srgbClr val="000000">
+                <a:alpha val="30000"/>
+              </a:srgbClr>
+            </a:outerShdw>
+          </a:effectLst>
+          <a:scene3d>
+            <a:camera prst="perspectiveRelaxed">
+              <a:rot lat="19800000" lon="1200000" rev="20820000"/>
+            </a:camera>
+            <a:lightRig rig="threePt" dir="t"/>
+          </a:scene3d>
+          <a:sp3d contourW="6350" prstMaterial="matte">
+            <a:bevelT w="101600" h="101600"/>
+            <a:contourClr>
+              <a:srgbClr val="969696"/>
+            </a:contourClr>
+          </a:sp3d>
+        </p:spPr>
+      </p:pic>
     </p:spTree>
     <p:extLst>
       <p:ext uri="{BB962C8B-B14F-4D97-AF65-F5344CB8AC3E}">
@@ -14397,6 +14558,1306 @@
 </file>
 
 <file path=ppt/slides/slide22.xml><?xml version="1.0" encoding="utf-8"?>
+<p:sld xmlns:a="http://schemas.openxmlformats.org/drawingml/2006/main" xmlns:r="http://schemas.openxmlformats.org/officeDocument/2006/relationships" xmlns:p="http://schemas.openxmlformats.org/presentationml/2006/main">
+  <p:cSld>
+    <p:spTree>
+      <p:nvGrpSpPr>
+        <p:cNvPr id="1" name="">
+          <a:extLst>
+            <a:ext uri="{FF2B5EF4-FFF2-40B4-BE49-F238E27FC236}">
+              <a16:creationId xmlns:a16="http://schemas.microsoft.com/office/drawing/2014/main" id="{B3F03E6D-F90F-463C-7114-2BDE175B1677}"/>
+            </a:ext>
+          </a:extLst>
+        </p:cNvPr>
+        <p:cNvGrpSpPr/>
+        <p:nvPr/>
+      </p:nvGrpSpPr>
+      <p:grpSpPr>
+        <a:xfrm>
+          <a:off x="0" y="0"/>
+          <a:ext cx="0" cy="0"/>
+          <a:chOff x="0" y="0"/>
+          <a:chExt cx="0" cy="0"/>
+        </a:xfrm>
+      </p:grpSpPr>
+      <p:pic>
+        <p:nvPicPr>
+          <p:cNvPr id="3" name="Picture 2">
+            <a:extLst>
+              <a:ext uri="{FF2B5EF4-FFF2-40B4-BE49-F238E27FC236}">
+                <a16:creationId xmlns:a16="http://schemas.microsoft.com/office/drawing/2014/main" id="{1874F856-3F27-06DC-08F7-B4E9526113FF}"/>
+              </a:ext>
+            </a:extLst>
+          </p:cNvPr>
+          <p:cNvPicPr>
+            <a:picLocks noChangeAspect="1"/>
+          </p:cNvPicPr>
+          <p:nvPr/>
+        </p:nvPicPr>
+        <p:blipFill>
+          <a:blip r:embed="rId2"/>
+          <a:stretch>
+            <a:fillRect/>
+          </a:stretch>
+        </p:blipFill>
+        <p:spPr>
+          <a:xfrm>
+            <a:off x="2592309" y="0"/>
+            <a:ext cx="7007382" cy="6858000"/>
+          </a:xfrm>
+          <a:prstGeom prst="rect">
+            <a:avLst/>
+          </a:prstGeom>
+        </p:spPr>
+      </p:pic>
+      <p:sp>
+        <p:nvSpPr>
+          <p:cNvPr id="4" name="Rectangle 3">
+            <a:extLst>
+              <a:ext uri="{FF2B5EF4-FFF2-40B4-BE49-F238E27FC236}">
+                <a16:creationId xmlns:a16="http://schemas.microsoft.com/office/drawing/2014/main" id="{07112E2E-15CD-8309-E120-8CC3F3587FD2}"/>
+              </a:ext>
+            </a:extLst>
+          </p:cNvPr>
+          <p:cNvSpPr/>
+          <p:nvPr/>
+        </p:nvSpPr>
+        <p:spPr>
+          <a:xfrm>
+            <a:off x="3700530" y="223234"/>
+            <a:ext cx="957329" cy="64394"/>
+          </a:xfrm>
+          <a:prstGeom prst="rect">
+            <a:avLst/>
+          </a:prstGeom>
+          <a:solidFill>
+            <a:srgbClr val="ACD433">
+              <a:alpha val="50196"/>
+            </a:srgbClr>
+          </a:solidFill>
+        </p:spPr>
+        <p:style>
+          <a:lnRef idx="2">
+            <a:schemeClr val="accent1">
+              <a:shade val="15000"/>
+            </a:schemeClr>
+          </a:lnRef>
+          <a:fillRef idx="1">
+            <a:schemeClr val="accent1"/>
+          </a:fillRef>
+          <a:effectRef idx="0">
+            <a:schemeClr val="accent1"/>
+          </a:effectRef>
+          <a:fontRef idx="minor">
+            <a:schemeClr val="lt1"/>
+          </a:fontRef>
+        </p:style>
+        <p:txBody>
+          <a:bodyPr rtlCol="0" anchor="ctr"/>
+          <a:lstStyle/>
+          <a:p>
+            <a:pPr algn="ctr"/>
+            <a:endParaRPr lang="en-US"/>
+          </a:p>
+        </p:txBody>
+      </p:sp>
+      <p:sp>
+        <p:nvSpPr>
+          <p:cNvPr id="5" name="Rectangle 4">
+            <a:extLst>
+              <a:ext uri="{FF2B5EF4-FFF2-40B4-BE49-F238E27FC236}">
+                <a16:creationId xmlns:a16="http://schemas.microsoft.com/office/drawing/2014/main" id="{FD249C8A-7ACD-0B8D-1473-C707EB5133AB}"/>
+              </a:ext>
+            </a:extLst>
+          </p:cNvPr>
+          <p:cNvSpPr/>
+          <p:nvPr/>
+        </p:nvSpPr>
+        <p:spPr>
+          <a:xfrm>
+            <a:off x="3619568" y="0"/>
+            <a:ext cx="233295" cy="181579"/>
+          </a:xfrm>
+          <a:prstGeom prst="rect">
+            <a:avLst/>
+          </a:prstGeom>
+          <a:solidFill>
+            <a:srgbClr val="ACD433">
+              <a:alpha val="50196"/>
+            </a:srgbClr>
+          </a:solidFill>
+        </p:spPr>
+        <p:style>
+          <a:lnRef idx="2">
+            <a:schemeClr val="accent1">
+              <a:shade val="15000"/>
+            </a:schemeClr>
+          </a:lnRef>
+          <a:fillRef idx="1">
+            <a:schemeClr val="accent1"/>
+          </a:fillRef>
+          <a:effectRef idx="0">
+            <a:schemeClr val="accent1"/>
+          </a:effectRef>
+          <a:fontRef idx="minor">
+            <a:schemeClr val="lt1"/>
+          </a:fontRef>
+        </p:style>
+        <p:txBody>
+          <a:bodyPr rtlCol="0" anchor="ctr"/>
+          <a:lstStyle/>
+          <a:p>
+            <a:pPr algn="ctr"/>
+            <a:endParaRPr lang="en-US"/>
+          </a:p>
+        </p:txBody>
+      </p:sp>
+      <p:sp>
+        <p:nvSpPr>
+          <p:cNvPr id="6" name="Rectangle 5">
+            <a:extLst>
+              <a:ext uri="{FF2B5EF4-FFF2-40B4-BE49-F238E27FC236}">
+                <a16:creationId xmlns:a16="http://schemas.microsoft.com/office/drawing/2014/main" id="{7079521F-172E-2360-4969-6D61B2BC10E0}"/>
+              </a:ext>
+            </a:extLst>
+          </p:cNvPr>
+          <p:cNvSpPr/>
+          <p:nvPr/>
+        </p:nvSpPr>
+        <p:spPr>
+          <a:xfrm>
+            <a:off x="2913124" y="164641"/>
+            <a:ext cx="233295" cy="568784"/>
+          </a:xfrm>
+          <a:prstGeom prst="rect">
+            <a:avLst/>
+          </a:prstGeom>
+          <a:solidFill>
+            <a:srgbClr val="ACD433">
+              <a:alpha val="50196"/>
+            </a:srgbClr>
+          </a:solidFill>
+        </p:spPr>
+        <p:style>
+          <a:lnRef idx="2">
+            <a:schemeClr val="accent1">
+              <a:shade val="15000"/>
+            </a:schemeClr>
+          </a:lnRef>
+          <a:fillRef idx="1">
+            <a:schemeClr val="accent1"/>
+          </a:fillRef>
+          <a:effectRef idx="0">
+            <a:schemeClr val="accent1"/>
+          </a:effectRef>
+          <a:fontRef idx="minor">
+            <a:schemeClr val="lt1"/>
+          </a:fontRef>
+        </p:style>
+        <p:txBody>
+          <a:bodyPr rtlCol="0" anchor="ctr"/>
+          <a:lstStyle/>
+          <a:p>
+            <a:pPr algn="ctr"/>
+            <a:endParaRPr lang="en-US"/>
+          </a:p>
+        </p:txBody>
+      </p:sp>
+      <p:sp>
+        <p:nvSpPr>
+          <p:cNvPr id="7" name="Rectangle 6">
+            <a:extLst>
+              <a:ext uri="{FF2B5EF4-FFF2-40B4-BE49-F238E27FC236}">
+                <a16:creationId xmlns:a16="http://schemas.microsoft.com/office/drawing/2014/main" id="{05AF1A1C-0BAA-1890-DECA-5AF31191D8B4}"/>
+              </a:ext>
+            </a:extLst>
+          </p:cNvPr>
+          <p:cNvSpPr/>
+          <p:nvPr/>
+        </p:nvSpPr>
+        <p:spPr>
+          <a:xfrm>
+            <a:off x="2913124" y="996949"/>
+            <a:ext cx="115825" cy="298451"/>
+          </a:xfrm>
+          <a:prstGeom prst="rect">
+            <a:avLst/>
+          </a:prstGeom>
+          <a:solidFill>
+            <a:srgbClr val="ACD433">
+              <a:alpha val="50196"/>
+            </a:srgbClr>
+          </a:solidFill>
+        </p:spPr>
+        <p:style>
+          <a:lnRef idx="2">
+            <a:schemeClr val="accent1">
+              <a:shade val="15000"/>
+            </a:schemeClr>
+          </a:lnRef>
+          <a:fillRef idx="1">
+            <a:schemeClr val="accent1"/>
+          </a:fillRef>
+          <a:effectRef idx="0">
+            <a:schemeClr val="accent1"/>
+          </a:effectRef>
+          <a:fontRef idx="minor">
+            <a:schemeClr val="lt1"/>
+          </a:fontRef>
+        </p:style>
+        <p:txBody>
+          <a:bodyPr rtlCol="0" anchor="ctr"/>
+          <a:lstStyle/>
+          <a:p>
+            <a:pPr algn="ctr"/>
+            <a:endParaRPr lang="en-US"/>
+          </a:p>
+        </p:txBody>
+      </p:sp>
+      <p:sp>
+        <p:nvSpPr>
+          <p:cNvPr id="2" name="Rectangle 1">
+            <a:extLst>
+              <a:ext uri="{FF2B5EF4-FFF2-40B4-BE49-F238E27FC236}">
+                <a16:creationId xmlns:a16="http://schemas.microsoft.com/office/drawing/2014/main" id="{30F3B6A3-7279-CDAC-2B38-A91991923151}"/>
+              </a:ext>
+            </a:extLst>
+          </p:cNvPr>
+          <p:cNvSpPr/>
+          <p:nvPr/>
+        </p:nvSpPr>
+        <p:spPr>
+          <a:xfrm rot="1551019">
+            <a:off x="3573376" y="623121"/>
+            <a:ext cx="1093916" cy="102021"/>
+          </a:xfrm>
+          <a:prstGeom prst="rect">
+            <a:avLst/>
+          </a:prstGeom>
+          <a:solidFill>
+            <a:srgbClr val="ACD433">
+              <a:alpha val="50196"/>
+            </a:srgbClr>
+          </a:solidFill>
+        </p:spPr>
+        <p:style>
+          <a:lnRef idx="2">
+            <a:schemeClr val="accent1">
+              <a:shade val="15000"/>
+            </a:schemeClr>
+          </a:lnRef>
+          <a:fillRef idx="1">
+            <a:schemeClr val="accent1"/>
+          </a:fillRef>
+          <a:effectRef idx="0">
+            <a:schemeClr val="accent1"/>
+          </a:effectRef>
+          <a:fontRef idx="minor">
+            <a:schemeClr val="lt1"/>
+          </a:fontRef>
+        </p:style>
+        <p:txBody>
+          <a:bodyPr rtlCol="0" anchor="ctr"/>
+          <a:lstStyle/>
+          <a:p>
+            <a:pPr algn="ctr"/>
+            <a:endParaRPr lang="en-US"/>
+          </a:p>
+        </p:txBody>
+      </p:sp>
+      <p:sp>
+        <p:nvSpPr>
+          <p:cNvPr id="8" name="Rectangle 7">
+            <a:extLst>
+              <a:ext uri="{FF2B5EF4-FFF2-40B4-BE49-F238E27FC236}">
+                <a16:creationId xmlns:a16="http://schemas.microsoft.com/office/drawing/2014/main" id="{7F34AE03-89AD-C2DC-1E2D-1F647EDFBF3C}"/>
+              </a:ext>
+            </a:extLst>
+          </p:cNvPr>
+          <p:cNvSpPr/>
+          <p:nvPr/>
+        </p:nvSpPr>
+        <p:spPr>
+          <a:xfrm>
+            <a:off x="5065260" y="733425"/>
+            <a:ext cx="318398" cy="225099"/>
+          </a:xfrm>
+          <a:prstGeom prst="rect">
+            <a:avLst/>
+          </a:prstGeom>
+          <a:solidFill>
+            <a:srgbClr val="ACD433">
+              <a:alpha val="50196"/>
+            </a:srgbClr>
+          </a:solidFill>
+        </p:spPr>
+        <p:style>
+          <a:lnRef idx="2">
+            <a:schemeClr val="accent1">
+              <a:shade val="15000"/>
+            </a:schemeClr>
+          </a:lnRef>
+          <a:fillRef idx="1">
+            <a:schemeClr val="accent1"/>
+          </a:fillRef>
+          <a:effectRef idx="0">
+            <a:schemeClr val="accent1"/>
+          </a:effectRef>
+          <a:fontRef idx="minor">
+            <a:schemeClr val="lt1"/>
+          </a:fontRef>
+        </p:style>
+        <p:txBody>
+          <a:bodyPr rtlCol="0" anchor="ctr"/>
+          <a:lstStyle/>
+          <a:p>
+            <a:pPr algn="ctr"/>
+            <a:endParaRPr lang="en-US"/>
+          </a:p>
+        </p:txBody>
+      </p:sp>
+      <p:sp>
+        <p:nvSpPr>
+          <p:cNvPr id="9" name="Rectangle 8">
+            <a:extLst>
+              <a:ext uri="{FF2B5EF4-FFF2-40B4-BE49-F238E27FC236}">
+                <a16:creationId xmlns:a16="http://schemas.microsoft.com/office/drawing/2014/main" id="{5D0BC1FD-B22D-72EE-E568-F4182B66A89C}"/>
+              </a:ext>
+            </a:extLst>
+          </p:cNvPr>
+          <p:cNvSpPr/>
+          <p:nvPr/>
+        </p:nvSpPr>
+        <p:spPr>
+          <a:xfrm>
+            <a:off x="4886705" y="434974"/>
+            <a:ext cx="81536" cy="426086"/>
+          </a:xfrm>
+          <a:prstGeom prst="rect">
+            <a:avLst/>
+          </a:prstGeom>
+          <a:solidFill>
+            <a:srgbClr val="ACD433">
+              <a:alpha val="50196"/>
+            </a:srgbClr>
+          </a:solidFill>
+        </p:spPr>
+        <p:style>
+          <a:lnRef idx="2">
+            <a:schemeClr val="accent1">
+              <a:shade val="15000"/>
+            </a:schemeClr>
+          </a:lnRef>
+          <a:fillRef idx="1">
+            <a:schemeClr val="accent1"/>
+          </a:fillRef>
+          <a:effectRef idx="0">
+            <a:schemeClr val="accent1"/>
+          </a:effectRef>
+          <a:fontRef idx="minor">
+            <a:schemeClr val="lt1"/>
+          </a:fontRef>
+        </p:style>
+        <p:txBody>
+          <a:bodyPr rtlCol="0" anchor="ctr"/>
+          <a:lstStyle/>
+          <a:p>
+            <a:pPr algn="ctr"/>
+            <a:endParaRPr lang="en-US"/>
+          </a:p>
+        </p:txBody>
+      </p:sp>
+      <p:sp>
+        <p:nvSpPr>
+          <p:cNvPr id="10" name="Rectangle 9">
+            <a:extLst>
+              <a:ext uri="{FF2B5EF4-FFF2-40B4-BE49-F238E27FC236}">
+                <a16:creationId xmlns:a16="http://schemas.microsoft.com/office/drawing/2014/main" id="{F8C720FF-4460-437F-4DDE-A6C07EE7CEDB}"/>
+              </a:ext>
+            </a:extLst>
+          </p:cNvPr>
+          <p:cNvSpPr/>
+          <p:nvPr/>
+        </p:nvSpPr>
+        <p:spPr>
+          <a:xfrm>
+            <a:off x="5006340" y="478664"/>
+            <a:ext cx="622522" cy="100455"/>
+          </a:xfrm>
+          <a:prstGeom prst="rect">
+            <a:avLst/>
+          </a:prstGeom>
+          <a:solidFill>
+            <a:srgbClr val="ACD433">
+              <a:alpha val="50196"/>
+            </a:srgbClr>
+          </a:solidFill>
+        </p:spPr>
+        <p:style>
+          <a:lnRef idx="2">
+            <a:schemeClr val="accent1">
+              <a:shade val="15000"/>
+            </a:schemeClr>
+          </a:lnRef>
+          <a:fillRef idx="1">
+            <a:schemeClr val="accent1"/>
+          </a:fillRef>
+          <a:effectRef idx="0">
+            <a:schemeClr val="accent1"/>
+          </a:effectRef>
+          <a:fontRef idx="minor">
+            <a:schemeClr val="lt1"/>
+          </a:fontRef>
+        </p:style>
+        <p:txBody>
+          <a:bodyPr rtlCol="0" anchor="ctr"/>
+          <a:lstStyle/>
+          <a:p>
+            <a:pPr algn="ctr"/>
+            <a:endParaRPr lang="en-US"/>
+          </a:p>
+        </p:txBody>
+      </p:sp>
+      <p:sp>
+        <p:nvSpPr>
+          <p:cNvPr id="11" name="Rectangle 10">
+            <a:extLst>
+              <a:ext uri="{FF2B5EF4-FFF2-40B4-BE49-F238E27FC236}">
+                <a16:creationId xmlns:a16="http://schemas.microsoft.com/office/drawing/2014/main" id="{7FE1049D-6480-B0A9-8BC7-26D3DD37C4CA}"/>
+              </a:ext>
+            </a:extLst>
+          </p:cNvPr>
+          <p:cNvSpPr/>
+          <p:nvPr/>
+        </p:nvSpPr>
+        <p:spPr>
+          <a:xfrm>
+            <a:off x="5006340" y="587374"/>
+            <a:ext cx="114301" cy="273686"/>
+          </a:xfrm>
+          <a:prstGeom prst="rect">
+            <a:avLst/>
+          </a:prstGeom>
+          <a:solidFill>
+            <a:srgbClr val="ACD433">
+              <a:alpha val="50196"/>
+            </a:srgbClr>
+          </a:solidFill>
+        </p:spPr>
+        <p:style>
+          <a:lnRef idx="2">
+            <a:schemeClr val="accent1">
+              <a:shade val="15000"/>
+            </a:schemeClr>
+          </a:lnRef>
+          <a:fillRef idx="1">
+            <a:schemeClr val="accent1"/>
+          </a:fillRef>
+          <a:effectRef idx="0">
+            <a:schemeClr val="accent1"/>
+          </a:effectRef>
+          <a:fontRef idx="minor">
+            <a:schemeClr val="lt1"/>
+          </a:fontRef>
+        </p:style>
+        <p:txBody>
+          <a:bodyPr rtlCol="0" anchor="ctr"/>
+          <a:lstStyle/>
+          <a:p>
+            <a:pPr algn="ctr"/>
+            <a:endParaRPr lang="en-US"/>
+          </a:p>
+        </p:txBody>
+      </p:sp>
+      <p:sp>
+        <p:nvSpPr>
+          <p:cNvPr id="12" name="Rectangle 11">
+            <a:extLst>
+              <a:ext uri="{FF2B5EF4-FFF2-40B4-BE49-F238E27FC236}">
+                <a16:creationId xmlns:a16="http://schemas.microsoft.com/office/drawing/2014/main" id="{11439A75-3191-A9BD-E891-8975C12CD433}"/>
+              </a:ext>
+            </a:extLst>
+          </p:cNvPr>
+          <p:cNvSpPr/>
+          <p:nvPr/>
+        </p:nvSpPr>
+        <p:spPr>
+          <a:xfrm>
+            <a:off x="3382706" y="434974"/>
+            <a:ext cx="76700" cy="1133476"/>
+          </a:xfrm>
+          <a:prstGeom prst="rect">
+            <a:avLst/>
+          </a:prstGeom>
+          <a:solidFill>
+            <a:srgbClr val="ACD433">
+              <a:alpha val="50196"/>
+            </a:srgbClr>
+          </a:solidFill>
+        </p:spPr>
+        <p:style>
+          <a:lnRef idx="2">
+            <a:schemeClr val="accent1">
+              <a:shade val="15000"/>
+            </a:schemeClr>
+          </a:lnRef>
+          <a:fillRef idx="1">
+            <a:schemeClr val="accent1"/>
+          </a:fillRef>
+          <a:effectRef idx="0">
+            <a:schemeClr val="accent1"/>
+          </a:effectRef>
+          <a:fontRef idx="minor">
+            <a:schemeClr val="lt1"/>
+          </a:fontRef>
+        </p:style>
+        <p:txBody>
+          <a:bodyPr rtlCol="0" anchor="ctr"/>
+          <a:lstStyle/>
+          <a:p>
+            <a:pPr algn="ctr"/>
+            <a:endParaRPr lang="en-US"/>
+          </a:p>
+        </p:txBody>
+      </p:sp>
+      <p:sp>
+        <p:nvSpPr>
+          <p:cNvPr id="13" name="Rectangle 12">
+            <a:extLst>
+              <a:ext uri="{FF2B5EF4-FFF2-40B4-BE49-F238E27FC236}">
+                <a16:creationId xmlns:a16="http://schemas.microsoft.com/office/drawing/2014/main" id="{73C9306C-0518-C7AC-8A2B-490647910575}"/>
+              </a:ext>
+            </a:extLst>
+          </p:cNvPr>
+          <p:cNvSpPr/>
+          <p:nvPr/>
+        </p:nvSpPr>
+        <p:spPr>
+          <a:xfrm>
+            <a:off x="3565097" y="974398"/>
+            <a:ext cx="76700" cy="594051"/>
+          </a:xfrm>
+          <a:prstGeom prst="rect">
+            <a:avLst/>
+          </a:prstGeom>
+          <a:solidFill>
+            <a:srgbClr val="ACD433">
+              <a:alpha val="50196"/>
+            </a:srgbClr>
+          </a:solidFill>
+        </p:spPr>
+        <p:style>
+          <a:lnRef idx="2">
+            <a:schemeClr val="accent1">
+              <a:shade val="15000"/>
+            </a:schemeClr>
+          </a:lnRef>
+          <a:fillRef idx="1">
+            <a:schemeClr val="accent1"/>
+          </a:fillRef>
+          <a:effectRef idx="0">
+            <a:schemeClr val="accent1"/>
+          </a:effectRef>
+          <a:fontRef idx="minor">
+            <a:schemeClr val="lt1"/>
+          </a:fontRef>
+        </p:style>
+        <p:txBody>
+          <a:bodyPr rtlCol="0" anchor="ctr"/>
+          <a:lstStyle/>
+          <a:p>
+            <a:pPr algn="ctr"/>
+            <a:endParaRPr lang="en-US"/>
+          </a:p>
+        </p:txBody>
+      </p:sp>
+      <p:sp>
+        <p:nvSpPr>
+          <p:cNvPr id="14" name="Rectangle 13">
+            <a:extLst>
+              <a:ext uri="{FF2B5EF4-FFF2-40B4-BE49-F238E27FC236}">
+                <a16:creationId xmlns:a16="http://schemas.microsoft.com/office/drawing/2014/main" id="{37F6A244-0290-9330-E70C-069A87071BB0}"/>
+              </a:ext>
+            </a:extLst>
+          </p:cNvPr>
+          <p:cNvSpPr/>
+          <p:nvPr/>
+        </p:nvSpPr>
+        <p:spPr>
+          <a:xfrm>
+            <a:off x="3641797" y="958524"/>
+            <a:ext cx="993006" cy="102111"/>
+          </a:xfrm>
+          <a:prstGeom prst="rect">
+            <a:avLst/>
+          </a:prstGeom>
+          <a:solidFill>
+            <a:srgbClr val="ACD433">
+              <a:alpha val="50196"/>
+            </a:srgbClr>
+          </a:solidFill>
+        </p:spPr>
+        <p:style>
+          <a:lnRef idx="2">
+            <a:schemeClr val="accent1">
+              <a:shade val="15000"/>
+            </a:schemeClr>
+          </a:lnRef>
+          <a:fillRef idx="1">
+            <a:schemeClr val="accent1"/>
+          </a:fillRef>
+          <a:effectRef idx="0">
+            <a:schemeClr val="accent1"/>
+          </a:effectRef>
+          <a:fontRef idx="minor">
+            <a:schemeClr val="lt1"/>
+          </a:fontRef>
+        </p:style>
+        <p:txBody>
+          <a:bodyPr rtlCol="0" anchor="ctr"/>
+          <a:lstStyle/>
+          <a:p>
+            <a:pPr algn="ctr"/>
+            <a:endParaRPr lang="en-US"/>
+          </a:p>
+        </p:txBody>
+      </p:sp>
+      <p:sp>
+        <p:nvSpPr>
+          <p:cNvPr id="15" name="Rectangle 14">
+            <a:extLst>
+              <a:ext uri="{FF2B5EF4-FFF2-40B4-BE49-F238E27FC236}">
+                <a16:creationId xmlns:a16="http://schemas.microsoft.com/office/drawing/2014/main" id="{FE750005-EAD0-CA7B-2A77-4608E0362E25}"/>
+              </a:ext>
+            </a:extLst>
+          </p:cNvPr>
+          <p:cNvSpPr/>
+          <p:nvPr/>
+        </p:nvSpPr>
+        <p:spPr>
+          <a:xfrm>
+            <a:off x="3788357" y="1447841"/>
+            <a:ext cx="233295" cy="181579"/>
+          </a:xfrm>
+          <a:prstGeom prst="rect">
+            <a:avLst/>
+          </a:prstGeom>
+          <a:solidFill>
+            <a:srgbClr val="ACD433">
+              <a:alpha val="50196"/>
+            </a:srgbClr>
+          </a:solidFill>
+        </p:spPr>
+        <p:style>
+          <a:lnRef idx="2">
+            <a:schemeClr val="accent1">
+              <a:shade val="15000"/>
+            </a:schemeClr>
+          </a:lnRef>
+          <a:fillRef idx="1">
+            <a:schemeClr val="accent1"/>
+          </a:fillRef>
+          <a:effectRef idx="0">
+            <a:schemeClr val="accent1"/>
+          </a:effectRef>
+          <a:fontRef idx="minor">
+            <a:schemeClr val="lt1"/>
+          </a:fontRef>
+        </p:style>
+        <p:txBody>
+          <a:bodyPr rtlCol="0" anchor="ctr"/>
+          <a:lstStyle/>
+          <a:p>
+            <a:pPr algn="ctr"/>
+            <a:endParaRPr lang="en-US"/>
+          </a:p>
+        </p:txBody>
+      </p:sp>
+      <p:sp>
+        <p:nvSpPr>
+          <p:cNvPr id="16" name="Rectangle 15">
+            <a:extLst>
+              <a:ext uri="{FF2B5EF4-FFF2-40B4-BE49-F238E27FC236}">
+                <a16:creationId xmlns:a16="http://schemas.microsoft.com/office/drawing/2014/main" id="{676D2C9A-E95F-8A2B-252E-407E27E654CE}"/>
+              </a:ext>
+            </a:extLst>
+          </p:cNvPr>
+          <p:cNvSpPr/>
+          <p:nvPr/>
+        </p:nvSpPr>
+        <p:spPr>
+          <a:xfrm rot="4874518">
+            <a:off x="4478330" y="985650"/>
+            <a:ext cx="81536" cy="426086"/>
+          </a:xfrm>
+          <a:prstGeom prst="rect">
+            <a:avLst/>
+          </a:prstGeom>
+          <a:solidFill>
+            <a:srgbClr val="ACD433">
+              <a:alpha val="50196"/>
+            </a:srgbClr>
+          </a:solidFill>
+        </p:spPr>
+        <p:style>
+          <a:lnRef idx="2">
+            <a:schemeClr val="accent1">
+              <a:shade val="15000"/>
+            </a:schemeClr>
+          </a:lnRef>
+          <a:fillRef idx="1">
+            <a:schemeClr val="accent1"/>
+          </a:fillRef>
+          <a:effectRef idx="0">
+            <a:schemeClr val="accent1"/>
+          </a:effectRef>
+          <a:fontRef idx="minor">
+            <a:schemeClr val="lt1"/>
+          </a:fontRef>
+        </p:style>
+        <p:txBody>
+          <a:bodyPr rtlCol="0" anchor="ctr"/>
+          <a:lstStyle/>
+          <a:p>
+            <a:pPr algn="ctr"/>
+            <a:endParaRPr lang="en-US"/>
+          </a:p>
+        </p:txBody>
+      </p:sp>
+      <p:sp>
+        <p:nvSpPr>
+          <p:cNvPr id="17" name="Rectangle 16">
+            <a:extLst>
+              <a:ext uri="{FF2B5EF4-FFF2-40B4-BE49-F238E27FC236}">
+                <a16:creationId xmlns:a16="http://schemas.microsoft.com/office/drawing/2014/main" id="{946D46EE-5BFC-14D0-F88F-72A3133ADF8A}"/>
+              </a:ext>
+            </a:extLst>
+          </p:cNvPr>
+          <p:cNvSpPr/>
+          <p:nvPr/>
+        </p:nvSpPr>
+        <p:spPr>
+          <a:xfrm>
+            <a:off x="4904356" y="1176175"/>
+            <a:ext cx="81536" cy="426086"/>
+          </a:xfrm>
+          <a:prstGeom prst="rect">
+            <a:avLst/>
+          </a:prstGeom>
+          <a:solidFill>
+            <a:srgbClr val="ACD433">
+              <a:alpha val="50196"/>
+            </a:srgbClr>
+          </a:solidFill>
+        </p:spPr>
+        <p:style>
+          <a:lnRef idx="2">
+            <a:schemeClr val="accent1">
+              <a:shade val="15000"/>
+            </a:schemeClr>
+          </a:lnRef>
+          <a:fillRef idx="1">
+            <a:schemeClr val="accent1"/>
+          </a:fillRef>
+          <a:effectRef idx="0">
+            <a:schemeClr val="accent1"/>
+          </a:effectRef>
+          <a:fontRef idx="minor">
+            <a:schemeClr val="lt1"/>
+          </a:fontRef>
+        </p:style>
+        <p:txBody>
+          <a:bodyPr rtlCol="0" anchor="ctr"/>
+          <a:lstStyle/>
+          <a:p>
+            <a:pPr algn="ctr"/>
+            <a:endParaRPr lang="en-US"/>
+          </a:p>
+        </p:txBody>
+      </p:sp>
+    </p:spTree>
+    <p:extLst>
+      <p:ext uri="{BB962C8B-B14F-4D97-AF65-F5344CB8AC3E}">
+        <p14:creationId xmlns:p14="http://schemas.microsoft.com/office/powerpoint/2010/main" val="2298448102"/>
+      </p:ext>
+    </p:extLst>
+  </p:cSld>
+  <p:clrMapOvr>
+    <a:masterClrMapping/>
+  </p:clrMapOvr>
+</p:sld>
+</file>
+
+<file path=ppt/slides/slide23.xml><?xml version="1.0" encoding="utf-8"?>
+<p:sld xmlns:a="http://schemas.openxmlformats.org/drawingml/2006/main" xmlns:r="http://schemas.openxmlformats.org/officeDocument/2006/relationships" xmlns:p="http://schemas.openxmlformats.org/presentationml/2006/main">
+  <p:cSld>
+    <p:spTree>
+      <p:nvGrpSpPr>
+        <p:cNvPr id="1" name="">
+          <a:extLst>
+            <a:ext uri="{FF2B5EF4-FFF2-40B4-BE49-F238E27FC236}">
+              <a16:creationId xmlns:a16="http://schemas.microsoft.com/office/drawing/2014/main" id="{42F5F501-2698-E802-E21E-DF1FC7A60A25}"/>
+            </a:ext>
+          </a:extLst>
+        </p:cNvPr>
+        <p:cNvGrpSpPr/>
+        <p:nvPr/>
+      </p:nvGrpSpPr>
+      <p:grpSpPr>
+        <a:xfrm>
+          <a:off x="0" y="0"/>
+          <a:ext cx="0" cy="0"/>
+          <a:chOff x="0" y="0"/>
+          <a:chExt cx="0" cy="0"/>
+        </a:xfrm>
+      </p:grpSpPr>
+      <p:sp>
+        <p:nvSpPr>
+          <p:cNvPr id="2" name="Title 1">
+            <a:extLst>
+              <a:ext uri="{FF2B5EF4-FFF2-40B4-BE49-F238E27FC236}">
+                <a16:creationId xmlns:a16="http://schemas.microsoft.com/office/drawing/2014/main" id="{7935F562-0912-4AA2-2AC7-95B9EC338229}"/>
+              </a:ext>
+            </a:extLst>
+          </p:cNvPr>
+          <p:cNvSpPr>
+            <a:spLocks noGrp="1"/>
+          </p:cNvSpPr>
+          <p:nvPr>
+            <p:ph type="title"/>
+          </p:nvPr>
+        </p:nvSpPr>
+        <p:spPr>
+          <a:xfrm>
+            <a:off x="1754188" y="452718"/>
+            <a:ext cx="8296646" cy="1400530"/>
+          </a:xfrm>
+        </p:spPr>
+        <p:txBody>
+          <a:bodyPr/>
+          <a:lstStyle/>
+          <a:p>
+            <a:r>
+              <a:rPr lang="en-US" b="1" dirty="0"/>
+              <a:t>Essential EA Meta-Model</a:t>
+            </a:r>
+            <a:br>
+              <a:rPr lang="en-US" b="1" dirty="0"/>
+            </a:br>
+            <a:r>
+              <a:rPr lang="en-US" b="1" dirty="0"/>
+              <a:t>- Business Conceptual - 11 </a:t>
+            </a:r>
+          </a:p>
+        </p:txBody>
+      </p:sp>
+      <p:sp>
+        <p:nvSpPr>
+          <p:cNvPr id="4" name="Title 1">
+            <a:extLst>
+              <a:ext uri="{FF2B5EF4-FFF2-40B4-BE49-F238E27FC236}">
+                <a16:creationId xmlns:a16="http://schemas.microsoft.com/office/drawing/2014/main" id="{A7D3F0AF-28B6-0D01-E6CE-CD4369C20C35}"/>
+              </a:ext>
+            </a:extLst>
+          </p:cNvPr>
+          <p:cNvSpPr txBox="1">
+            <a:spLocks/>
+          </p:cNvSpPr>
+          <p:nvPr/>
+        </p:nvSpPr>
+        <p:spPr>
+          <a:xfrm>
+            <a:off x="0" y="3143"/>
+            <a:ext cx="1754188" cy="1058013"/>
+          </a:xfrm>
+          <a:prstGeom prst="rect">
+            <a:avLst/>
+          </a:prstGeom>
+        </p:spPr>
+        <p:txBody>
+          <a:bodyPr vert="horz" lIns="91440" tIns="45720" rIns="91440" bIns="45720" rtlCol="0" anchor="ctr">
+            <a:noAutofit/>
+          </a:bodyPr>
+          <a:lstStyle>
+            <a:lvl1pPr algn="l" defTabSz="457200" rtl="0" eaLnBrk="1" latinLnBrk="0" hangingPunct="1">
+              <a:spcBef>
+                <a:spcPct val="0"/>
+              </a:spcBef>
+              <a:buNone/>
+              <a:defRPr sz="7200" b="0" i="0" kern="1200">
+                <a:solidFill>
+                  <a:schemeClr val="tx2"/>
+                </a:solidFill>
+                <a:latin typeface="+mj-lt"/>
+                <a:ea typeface="+mj-ea"/>
+                <a:cs typeface="+mj-cs"/>
+              </a:defRPr>
+            </a:lvl1pPr>
+            <a:lvl2pPr eaLnBrk="1" hangingPunct="1">
+              <a:defRPr>
+                <a:solidFill>
+                  <a:schemeClr val="tx2"/>
+                </a:solidFill>
+              </a:defRPr>
+            </a:lvl2pPr>
+            <a:lvl3pPr eaLnBrk="1" hangingPunct="1">
+              <a:defRPr>
+                <a:solidFill>
+                  <a:schemeClr val="tx2"/>
+                </a:solidFill>
+              </a:defRPr>
+            </a:lvl3pPr>
+            <a:lvl4pPr eaLnBrk="1" hangingPunct="1">
+              <a:defRPr>
+                <a:solidFill>
+                  <a:schemeClr val="tx2"/>
+                </a:solidFill>
+              </a:defRPr>
+            </a:lvl4pPr>
+            <a:lvl5pPr eaLnBrk="1" hangingPunct="1">
+              <a:defRPr>
+                <a:solidFill>
+                  <a:schemeClr val="tx2"/>
+                </a:solidFill>
+              </a:defRPr>
+            </a:lvl5pPr>
+            <a:lvl6pPr eaLnBrk="1" hangingPunct="1">
+              <a:defRPr>
+                <a:solidFill>
+                  <a:schemeClr val="tx2"/>
+                </a:solidFill>
+              </a:defRPr>
+            </a:lvl6pPr>
+            <a:lvl7pPr eaLnBrk="1" hangingPunct="1">
+              <a:defRPr>
+                <a:solidFill>
+                  <a:schemeClr val="tx2"/>
+                </a:solidFill>
+              </a:defRPr>
+            </a:lvl7pPr>
+            <a:lvl8pPr eaLnBrk="1" hangingPunct="1">
+              <a:defRPr>
+                <a:solidFill>
+                  <a:schemeClr val="tx2"/>
+                </a:solidFill>
+              </a:defRPr>
+            </a:lvl8pPr>
+            <a:lvl9pPr eaLnBrk="1" hangingPunct="1">
+              <a:defRPr>
+                <a:solidFill>
+                  <a:schemeClr val="tx2"/>
+                </a:solidFill>
+              </a:defRPr>
+            </a:lvl9pPr>
+          </a:lstStyle>
+          <a:p>
+            <a:pPr algn="ctr"/>
+            <a:r>
+              <a:rPr lang="en-US" b="1" dirty="0">
+                <a:solidFill>
+                  <a:schemeClr val="accent1">
+                    <a:lumMod val="75000"/>
+                  </a:schemeClr>
+                </a:solidFill>
+              </a:rPr>
+              <a:t>017</a:t>
+            </a:r>
+            <a:endParaRPr lang="ru-RU" b="1" dirty="0">
+              <a:solidFill>
+                <a:schemeClr val="accent1">
+                  <a:lumMod val="75000"/>
+                </a:schemeClr>
+              </a:solidFill>
+            </a:endParaRPr>
+          </a:p>
+        </p:txBody>
+      </p:sp>
+      <p:pic>
+        <p:nvPicPr>
+          <p:cNvPr id="3" name="Picture 2">
+            <a:extLst>
+              <a:ext uri="{FF2B5EF4-FFF2-40B4-BE49-F238E27FC236}">
+                <a16:creationId xmlns:a16="http://schemas.microsoft.com/office/drawing/2014/main" id="{E2365840-0192-6E37-6541-91B24686A35C}"/>
+              </a:ext>
+            </a:extLst>
+          </p:cNvPr>
+          <p:cNvPicPr>
+            <a:picLocks noChangeAspect="1"/>
+          </p:cNvPicPr>
+          <p:nvPr/>
+        </p:nvPicPr>
+        <p:blipFill>
+          <a:blip r:embed="rId2"/>
+          <a:stretch>
+            <a:fillRect/>
+          </a:stretch>
+        </p:blipFill>
+        <p:spPr>
+          <a:xfrm>
+            <a:off x="236841" y="1853248"/>
+            <a:ext cx="8296646" cy="4669795"/>
+          </a:xfrm>
+          <a:prstGeom prst="rect">
+            <a:avLst/>
+          </a:prstGeom>
+          <a:ln>
+            <a:noFill/>
+          </a:ln>
+          <a:effectLst>
+            <a:outerShdw blurRad="292100" dist="139700" dir="2700000" algn="tl" rotWithShape="0">
+              <a:srgbClr val="333333">
+                <a:alpha val="65000"/>
+              </a:srgbClr>
+            </a:outerShdw>
+          </a:effectLst>
+        </p:spPr>
+      </p:pic>
+      <p:sp>
+        <p:nvSpPr>
+          <p:cNvPr id="6" name="Rectangle: Rounded Corners 5">
+            <a:extLst>
+              <a:ext uri="{FF2B5EF4-FFF2-40B4-BE49-F238E27FC236}">
+                <a16:creationId xmlns:a16="http://schemas.microsoft.com/office/drawing/2014/main" id="{BE6057D6-3363-33B8-69F3-4C006147ED33}"/>
+              </a:ext>
+            </a:extLst>
+          </p:cNvPr>
+          <p:cNvSpPr/>
+          <p:nvPr/>
+        </p:nvSpPr>
+        <p:spPr>
+          <a:xfrm>
+            <a:off x="596436" y="2188396"/>
+            <a:ext cx="2054832" cy="1400530"/>
+          </a:xfrm>
+          <a:prstGeom prst="roundRect">
+            <a:avLst>
+              <a:gd name="adj" fmla="val 6916"/>
+            </a:avLst>
+          </a:prstGeom>
+          <a:solidFill>
+            <a:srgbClr val="FFCC66">
+              <a:alpha val="20000"/>
+            </a:srgbClr>
+          </a:solidFill>
+          <a:ln>
+            <a:solidFill>
+              <a:srgbClr val="92D050"/>
+            </a:solidFill>
+          </a:ln>
+        </p:spPr>
+        <p:style>
+          <a:lnRef idx="2">
+            <a:schemeClr val="accent1">
+              <a:shade val="15000"/>
+            </a:schemeClr>
+          </a:lnRef>
+          <a:fillRef idx="1">
+            <a:schemeClr val="accent1"/>
+          </a:fillRef>
+          <a:effectRef idx="0">
+            <a:schemeClr val="accent1"/>
+          </a:effectRef>
+          <a:fontRef idx="minor">
+            <a:schemeClr val="lt1"/>
+          </a:fontRef>
+        </p:style>
+        <p:txBody>
+          <a:bodyPr rtlCol="0" anchor="ctr"/>
+          <a:lstStyle/>
+          <a:p>
+            <a:pPr algn="ctr"/>
+            <a:endParaRPr lang="en-US"/>
+          </a:p>
+        </p:txBody>
+      </p:sp>
+      <p:pic>
+        <p:nvPicPr>
+          <p:cNvPr id="11" name="Picture 10">
+            <a:extLst>
+              <a:ext uri="{FF2B5EF4-FFF2-40B4-BE49-F238E27FC236}">
+                <a16:creationId xmlns:a16="http://schemas.microsoft.com/office/drawing/2014/main" id="{B28C2ED1-AC4F-B996-5691-C807CF2490F3}"/>
+              </a:ext>
+            </a:extLst>
+          </p:cNvPr>
+          <p:cNvPicPr>
+            <a:picLocks noChangeAspect="1"/>
+          </p:cNvPicPr>
+          <p:nvPr/>
+        </p:nvPicPr>
+        <p:blipFill>
+          <a:blip r:embed="rId3"/>
+          <a:stretch>
+            <a:fillRect/>
+          </a:stretch>
+        </p:blipFill>
+        <p:spPr>
+          <a:xfrm>
+            <a:off x="157000" y="1094226"/>
+            <a:ext cx="362976" cy="362976"/>
+          </a:xfrm>
+          <a:prstGeom prst="rect">
+            <a:avLst/>
+          </a:prstGeom>
+          <a:ln>
+            <a:noFill/>
+          </a:ln>
+          <a:effectLst>
+            <a:outerShdw blurRad="292100" dist="139700" dir="2700000" algn="tl" rotWithShape="0">
+              <a:srgbClr val="333333">
+                <a:alpha val="65000"/>
+              </a:srgbClr>
+            </a:outerShdw>
+          </a:effectLst>
+        </p:spPr>
+      </p:pic>
+      <p:pic>
+        <p:nvPicPr>
+          <p:cNvPr id="12" name="Picture 11">
+            <a:extLst>
+              <a:ext uri="{FF2B5EF4-FFF2-40B4-BE49-F238E27FC236}">
+                <a16:creationId xmlns:a16="http://schemas.microsoft.com/office/drawing/2014/main" id="{CF406E1A-8CA6-EACD-72C9-5E7ECE07C13D}"/>
+              </a:ext>
+            </a:extLst>
+          </p:cNvPr>
+          <p:cNvPicPr>
+            <a:picLocks noChangeAspect="1"/>
+          </p:cNvPicPr>
+          <p:nvPr/>
+        </p:nvPicPr>
+        <p:blipFill>
+          <a:blip r:embed="rId4"/>
+          <a:stretch>
+            <a:fillRect/>
+          </a:stretch>
+        </p:blipFill>
+        <p:spPr>
+          <a:xfrm>
+            <a:off x="611241" y="1094226"/>
+            <a:ext cx="362976" cy="362976"/>
+          </a:xfrm>
+          <a:prstGeom prst="rect">
+            <a:avLst/>
+          </a:prstGeom>
+          <a:ln>
+            <a:noFill/>
+          </a:ln>
+          <a:effectLst>
+            <a:outerShdw blurRad="292100" dist="139700" dir="2700000" algn="tl" rotWithShape="0">
+              <a:srgbClr val="333333">
+                <a:alpha val="65000"/>
+              </a:srgbClr>
+            </a:outerShdw>
+          </a:effectLst>
+        </p:spPr>
+      </p:pic>
+      <p:pic>
+        <p:nvPicPr>
+          <p:cNvPr id="13" name="Picture 12">
+            <a:extLst>
+              <a:ext uri="{FF2B5EF4-FFF2-40B4-BE49-F238E27FC236}">
+                <a16:creationId xmlns:a16="http://schemas.microsoft.com/office/drawing/2014/main" id="{14121E25-449A-511E-419D-9C638D38D292}"/>
+              </a:ext>
+            </a:extLst>
+          </p:cNvPr>
+          <p:cNvPicPr>
+            <a:picLocks noChangeAspect="1"/>
+          </p:cNvPicPr>
+          <p:nvPr/>
+        </p:nvPicPr>
+        <p:blipFill>
+          <a:blip r:embed="rId5"/>
+          <a:stretch>
+            <a:fillRect/>
+          </a:stretch>
+        </p:blipFill>
+        <p:spPr>
+          <a:xfrm>
+            <a:off x="1065482" y="1094226"/>
+            <a:ext cx="371111" cy="362976"/>
+          </a:xfrm>
+          <a:prstGeom prst="rect">
+            <a:avLst/>
+          </a:prstGeom>
+          <a:ln>
+            <a:noFill/>
+          </a:ln>
+          <a:effectLst>
+            <a:outerShdw blurRad="292100" dist="139700" dir="2700000" algn="tl" rotWithShape="0">
+              <a:srgbClr val="333333">
+                <a:alpha val="65000"/>
+              </a:srgbClr>
+            </a:outerShdw>
+          </a:effectLst>
+        </p:spPr>
+      </p:pic>
+      <p:pic>
+        <p:nvPicPr>
+          <p:cNvPr id="8" name="Picture 7">
+            <a:extLst>
+              <a:ext uri="{FF2B5EF4-FFF2-40B4-BE49-F238E27FC236}">
+                <a16:creationId xmlns:a16="http://schemas.microsoft.com/office/drawing/2014/main" id="{657B7C76-8639-D3F3-AC67-8D61A7A740B7}"/>
+              </a:ext>
+            </a:extLst>
+          </p:cNvPr>
+          <p:cNvPicPr>
+            <a:picLocks noChangeAspect="1"/>
+          </p:cNvPicPr>
+          <p:nvPr/>
+        </p:nvPicPr>
+        <p:blipFill>
+          <a:blip r:embed="rId6"/>
+          <a:stretch>
+            <a:fillRect/>
+          </a:stretch>
+        </p:blipFill>
+        <p:spPr>
+          <a:xfrm>
+            <a:off x="7958147" y="2426324"/>
+            <a:ext cx="3983743" cy="2823770"/>
+          </a:xfrm>
+          <a:prstGeom prst="roundRect">
+            <a:avLst>
+              <a:gd name="adj" fmla="val 16667"/>
+            </a:avLst>
+          </a:prstGeom>
+          <a:ln>
+            <a:noFill/>
+          </a:ln>
+          <a:effectLst>
+            <a:outerShdw blurRad="152400" dist="12000" dir="900000" sy="98000" kx="110000" ky="200000" algn="tl" rotWithShape="0">
+              <a:srgbClr val="000000">
+                <a:alpha val="30000"/>
+              </a:srgbClr>
+            </a:outerShdw>
+          </a:effectLst>
+          <a:scene3d>
+            <a:camera prst="perspectiveRelaxed">
+              <a:rot lat="19800000" lon="1200000" rev="20820000"/>
+            </a:camera>
+            <a:lightRig rig="threePt" dir="t"/>
+          </a:scene3d>
+          <a:sp3d contourW="6350" prstMaterial="matte">
+            <a:bevelT w="101600" h="101600"/>
+            <a:contourClr>
+              <a:srgbClr val="969696"/>
+            </a:contourClr>
+          </a:sp3d>
+        </p:spPr>
+      </p:pic>
+    </p:spTree>
+    <p:extLst>
+      <p:ext uri="{BB962C8B-B14F-4D97-AF65-F5344CB8AC3E}">
+        <p14:creationId xmlns:p14="http://schemas.microsoft.com/office/powerpoint/2010/main" val="196200986"/>
+      </p:ext>
+    </p:extLst>
+  </p:cSld>
+  <p:clrMapOvr>
+    <a:masterClrMapping/>
+  </p:clrMapOvr>
+</p:sld>
+</file>
+
+<file path=ppt/slides/slide24.xml><?xml version="1.0" encoding="utf-8"?>
 <p:sld xmlns:a="http://schemas.openxmlformats.org/drawingml/2006/main" xmlns:r="http://schemas.openxmlformats.org/officeDocument/2006/relationships" xmlns:p="http://schemas.openxmlformats.org/presentationml/2006/main">
   <p:cSld>
     <p:bg>

--- a/Master_EAS_Meta-Model.pptx
+++ b/Master_EAS_Meta-Model.pptx
@@ -5,10 +5,10 @@
     <p:sldMasterId id="2147483648" r:id="rId4"/>
   </p:sldMasterIdLst>
   <p:notesMasterIdLst>
-    <p:notesMasterId r:id="rId29"/>
+    <p:notesMasterId r:id="rId34"/>
   </p:notesMasterIdLst>
   <p:handoutMasterIdLst>
-    <p:handoutMasterId r:id="rId30"/>
+    <p:handoutMasterId r:id="rId35"/>
   </p:handoutMasterIdLst>
   <p:sldIdLst>
     <p:sldId id="256" r:id="rId5"/>
@@ -34,7 +34,12 @@
     <p:sldId id="289" r:id="rId25"/>
     <p:sldId id="290" r:id="rId26"/>
     <p:sldId id="291" r:id="rId27"/>
-    <p:sldId id="267" r:id="rId28"/>
+    <p:sldId id="292" r:id="rId28"/>
+    <p:sldId id="293" r:id="rId29"/>
+    <p:sldId id="294" r:id="rId30"/>
+    <p:sldId id="295" r:id="rId31"/>
+    <p:sldId id="296" r:id="rId32"/>
+    <p:sldId id="267" r:id="rId33"/>
   </p:sldIdLst>
   <p:sldSz cx="12192000" cy="6858000"/>
   <p:notesSz cx="6858000" cy="9144000"/>
@@ -249,7 +254,7 @@
           <a:p>
             <a:fld id="{F6E59275-AFE1-4999-B78A-D0D76B9F2B0B}" type="datetimeFigureOut">
               <a:rPr lang="en-US" smtClean="0"/>
-              <a:t>3/21/2026</a:t>
+              <a:t>3/24/2026</a:t>
             </a:fld>
             <a:endParaRPr lang="en-US" dirty="0"/>
           </a:p>
@@ -426,7 +431,7 @@
           <a:p>
             <a:fld id="{B3EADD7A-FE61-48EE-BE0E-8546E5401374}" type="datetimeFigureOut">
               <a:rPr lang="en-US" smtClean="0"/>
-              <a:t>3/21/2026</a:t>
+              <a:t>3/24/2026</a:t>
             </a:fld>
             <a:endParaRPr lang="en-US" dirty="0"/>
           </a:p>
@@ -842,7 +847,7 @@
           <a:p>
             <a:fld id="{EE000EEB-8338-48D7-8EE8-EE0082EF7602}" type="slidenum">
               <a:rPr lang="en-US" smtClean="0"/>
-              <a:t>24</a:t>
+              <a:t>29</a:t>
             </a:fld>
             <a:endParaRPr lang="en-US" dirty="0"/>
           </a:p>
@@ -1044,7 +1049,7 @@
           <a:p>
             <a:fld id="{4AAD347D-5ACD-4C99-B74B-A9C85AD731AF}" type="datetimeFigureOut">
               <a:rPr lang="en-US" dirty="0"/>
-              <a:t>3/21/2026</a:t>
+              <a:t>3/24/2026</a:t>
             </a:fld>
             <a:endParaRPr lang="en-US" dirty="0"/>
           </a:p>
@@ -1355,7 +1360,7 @@
           <a:p>
             <a:fld id="{4509A250-FF31-4206-8172-F9D3106AACB1}" type="datetimeFigureOut">
               <a:rPr lang="en-US" dirty="0"/>
-              <a:t>3/21/2026</a:t>
+              <a:t>3/24/2026</a:t>
             </a:fld>
             <a:endParaRPr lang="en-US" dirty="0"/>
           </a:p>
@@ -1574,7 +1579,7 @@
           <a:p>
             <a:fld id="{4509A250-FF31-4206-8172-F9D3106AACB1}" type="datetimeFigureOut">
               <a:rPr lang="en-US" dirty="0"/>
-              <a:t>3/21/2026</a:t>
+              <a:t>3/24/2026</a:t>
             </a:fld>
             <a:endParaRPr lang="en-US" dirty="0"/>
           </a:p>
@@ -1867,7 +1872,7 @@
           <a:p>
             <a:fld id="{4509A250-FF31-4206-8172-F9D3106AACB1}" type="datetimeFigureOut">
               <a:rPr lang="en-US" dirty="0"/>
-              <a:t>3/21/2026</a:t>
+              <a:t>3/24/2026</a:t>
             </a:fld>
             <a:endParaRPr lang="en-US" dirty="0"/>
           </a:p>
@@ -2224,7 +2229,7 @@
           <a:p>
             <a:fld id="{4509A250-FF31-4206-8172-F9D3106AACB1}" type="datetimeFigureOut">
               <a:rPr lang="en-US" dirty="0"/>
-              <a:t>3/21/2026</a:t>
+              <a:t>3/24/2026</a:t>
             </a:fld>
             <a:endParaRPr lang="en-US" dirty="0"/>
           </a:p>
@@ -2859,7 +2864,7 @@
           <a:p>
             <a:fld id="{4509A250-FF31-4206-8172-F9D3106AACB1}" type="datetimeFigureOut">
               <a:rPr lang="en-US" dirty="0"/>
-              <a:t>3/21/2026</a:t>
+              <a:t>3/24/2026</a:t>
             </a:fld>
             <a:endParaRPr lang="en-US" dirty="0"/>
           </a:p>
@@ -3731,7 +3736,7 @@
           <a:p>
             <a:fld id="{4509A250-FF31-4206-8172-F9D3106AACB1}" type="datetimeFigureOut">
               <a:rPr lang="en-US" dirty="0"/>
-              <a:t>3/21/2026</a:t>
+              <a:t>3/24/2026</a:t>
             </a:fld>
             <a:endParaRPr lang="en-US" dirty="0"/>
           </a:p>
@@ -3926,7 +3931,7 @@
           <a:p>
             <a:fld id="{4509A250-FF31-4206-8172-F9D3106AACB1}" type="datetimeFigureOut">
               <a:rPr lang="en-US" dirty="0"/>
-              <a:t>3/21/2026</a:t>
+              <a:t>3/24/2026</a:t>
             </a:fld>
             <a:endParaRPr lang="en-US" dirty="0"/>
           </a:p>
@@ -4131,7 +4136,7 @@
           <a:p>
             <a:fld id="{4509A250-FF31-4206-8172-F9D3106AACB1}" type="datetimeFigureOut">
               <a:rPr lang="en-US" dirty="0"/>
-              <a:t>3/21/2026</a:t>
+              <a:t>3/24/2026</a:t>
             </a:fld>
             <a:endParaRPr lang="en-US" dirty="0"/>
           </a:p>
@@ -4326,7 +4331,7 @@
           <a:p>
             <a:fld id="{4509A250-FF31-4206-8172-F9D3106AACB1}" type="datetimeFigureOut">
               <a:rPr lang="en-US" dirty="0"/>
-              <a:t>3/21/2026</a:t>
+              <a:t>3/24/2026</a:t>
             </a:fld>
             <a:endParaRPr lang="en-US" dirty="0"/>
           </a:p>
@@ -4600,7 +4605,7 @@
           <a:p>
             <a:fld id="{4509A250-FF31-4206-8172-F9D3106AACB1}" type="datetimeFigureOut">
               <a:rPr lang="en-US" dirty="0"/>
-              <a:t>3/21/2026</a:t>
+              <a:t>3/24/2026</a:t>
             </a:fld>
             <a:endParaRPr lang="en-US" dirty="0"/>
           </a:p>
@@ -4917,7 +4922,7 @@
           <a:p>
             <a:fld id="{4509A250-FF31-4206-8172-F9D3106AACB1}" type="datetimeFigureOut">
               <a:rPr lang="en-US" dirty="0"/>
-              <a:t>3/21/2026</a:t>
+              <a:t>3/24/2026</a:t>
             </a:fld>
             <a:endParaRPr lang="en-US" dirty="0"/>
           </a:p>
@@ -5350,7 +5355,7 @@
           <a:p>
             <a:fld id="{4509A250-FF31-4206-8172-F9D3106AACB1}" type="datetimeFigureOut">
               <a:rPr lang="en-US" dirty="0"/>
-              <a:t>3/21/2026</a:t>
+              <a:t>3/24/2026</a:t>
             </a:fld>
             <a:endParaRPr lang="en-US" dirty="0"/>
           </a:p>
@@ -5493,7 +5498,7 @@
           <a:p>
             <a:fld id="{4509A250-FF31-4206-8172-F9D3106AACB1}" type="datetimeFigureOut">
               <a:rPr lang="en-US" dirty="0"/>
-              <a:t>3/21/2026</a:t>
+              <a:t>3/24/2026</a:t>
             </a:fld>
             <a:endParaRPr lang="en-US" dirty="0"/>
           </a:p>
@@ -5613,7 +5618,7 @@
           <a:p>
             <a:fld id="{4509A250-FF31-4206-8172-F9D3106AACB1}" type="datetimeFigureOut">
               <a:rPr lang="en-US" dirty="0"/>
-              <a:t>3/21/2026</a:t>
+              <a:t>3/24/2026</a:t>
             </a:fld>
             <a:endParaRPr lang="en-US" dirty="0"/>
           </a:p>
@@ -5917,7 +5922,7 @@
           <a:p>
             <a:fld id="{4509A250-FF31-4206-8172-F9D3106AACB1}" type="datetimeFigureOut">
               <a:rPr lang="en-US" dirty="0"/>
-              <a:t>3/21/2026</a:t>
+              <a:t>3/24/2026</a:t>
             </a:fld>
             <a:endParaRPr lang="en-US" dirty="0"/>
           </a:p>
@@ -6217,7 +6222,7 @@
           <a:p>
             <a:fld id="{4509A250-FF31-4206-8172-F9D3106AACB1}" type="datetimeFigureOut">
               <a:rPr lang="en-US" dirty="0"/>
-              <a:t>3/21/2026</a:t>
+              <a:t>3/24/2026</a:t>
             </a:fld>
             <a:endParaRPr lang="en-US" dirty="0"/>
           </a:p>
@@ -6685,7 +6690,7 @@
           <a:p>
             <a:fld id="{4509A250-FF31-4206-8172-F9D3106AACB1}" type="datetimeFigureOut">
               <a:rPr lang="en-US" dirty="0"/>
-              <a:t>3/21/2026</a:t>
+              <a:t>3/24/2026</a:t>
             </a:fld>
             <a:endParaRPr lang="en-US" dirty="0"/>
           </a:p>
@@ -15858,6 +15863,3743 @@
 </file>
 
 <file path=ppt/slides/slide24.xml><?xml version="1.0" encoding="utf-8"?>
+<p:sld xmlns:a="http://schemas.openxmlformats.org/drawingml/2006/main" xmlns:r="http://schemas.openxmlformats.org/officeDocument/2006/relationships" xmlns:p="http://schemas.openxmlformats.org/presentationml/2006/main">
+  <p:cSld>
+    <p:spTree>
+      <p:nvGrpSpPr>
+        <p:cNvPr id="1" name="">
+          <a:extLst>
+            <a:ext uri="{FF2B5EF4-FFF2-40B4-BE49-F238E27FC236}">
+              <a16:creationId xmlns:a16="http://schemas.microsoft.com/office/drawing/2014/main" id="{E92217D4-7F64-8843-4A1F-EF8FC1C8060F}"/>
+            </a:ext>
+          </a:extLst>
+        </p:cNvPr>
+        <p:cNvGrpSpPr/>
+        <p:nvPr/>
+      </p:nvGrpSpPr>
+      <p:grpSpPr>
+        <a:xfrm>
+          <a:off x="0" y="0"/>
+          <a:ext cx="0" cy="0"/>
+          <a:chOff x="0" y="0"/>
+          <a:chExt cx="0" cy="0"/>
+        </a:xfrm>
+      </p:grpSpPr>
+      <p:pic>
+        <p:nvPicPr>
+          <p:cNvPr id="3" name="Picture 2">
+            <a:extLst>
+              <a:ext uri="{FF2B5EF4-FFF2-40B4-BE49-F238E27FC236}">
+                <a16:creationId xmlns:a16="http://schemas.microsoft.com/office/drawing/2014/main" id="{E6E40DE9-C6D2-913A-9544-30DF362E840E}"/>
+              </a:ext>
+            </a:extLst>
+          </p:cNvPr>
+          <p:cNvPicPr>
+            <a:picLocks noChangeAspect="1"/>
+          </p:cNvPicPr>
+          <p:nvPr/>
+        </p:nvPicPr>
+        <p:blipFill>
+          <a:blip r:embed="rId2"/>
+          <a:stretch>
+            <a:fillRect/>
+          </a:stretch>
+        </p:blipFill>
+        <p:spPr>
+          <a:xfrm>
+            <a:off x="2592309" y="0"/>
+            <a:ext cx="7007382" cy="6858000"/>
+          </a:xfrm>
+          <a:prstGeom prst="rect">
+            <a:avLst/>
+          </a:prstGeom>
+        </p:spPr>
+      </p:pic>
+      <p:sp>
+        <p:nvSpPr>
+          <p:cNvPr id="4" name="Rectangle 3">
+            <a:extLst>
+              <a:ext uri="{FF2B5EF4-FFF2-40B4-BE49-F238E27FC236}">
+                <a16:creationId xmlns:a16="http://schemas.microsoft.com/office/drawing/2014/main" id="{2D3CF5C3-1795-0B4F-F4F6-E47277B88FDF}"/>
+              </a:ext>
+            </a:extLst>
+          </p:cNvPr>
+          <p:cNvSpPr/>
+          <p:nvPr/>
+        </p:nvSpPr>
+        <p:spPr>
+          <a:xfrm>
+            <a:off x="3700530" y="223234"/>
+            <a:ext cx="957329" cy="64394"/>
+          </a:xfrm>
+          <a:prstGeom prst="rect">
+            <a:avLst/>
+          </a:prstGeom>
+          <a:solidFill>
+            <a:srgbClr val="ACD433">
+              <a:alpha val="50196"/>
+            </a:srgbClr>
+          </a:solidFill>
+        </p:spPr>
+        <p:style>
+          <a:lnRef idx="2">
+            <a:schemeClr val="accent1">
+              <a:shade val="15000"/>
+            </a:schemeClr>
+          </a:lnRef>
+          <a:fillRef idx="1">
+            <a:schemeClr val="accent1"/>
+          </a:fillRef>
+          <a:effectRef idx="0">
+            <a:schemeClr val="accent1"/>
+          </a:effectRef>
+          <a:fontRef idx="minor">
+            <a:schemeClr val="lt1"/>
+          </a:fontRef>
+        </p:style>
+        <p:txBody>
+          <a:bodyPr rtlCol="0" anchor="ctr"/>
+          <a:lstStyle/>
+          <a:p>
+            <a:pPr algn="ctr"/>
+            <a:endParaRPr lang="en-US"/>
+          </a:p>
+        </p:txBody>
+      </p:sp>
+      <p:sp>
+        <p:nvSpPr>
+          <p:cNvPr id="5" name="Rectangle 4">
+            <a:extLst>
+              <a:ext uri="{FF2B5EF4-FFF2-40B4-BE49-F238E27FC236}">
+                <a16:creationId xmlns:a16="http://schemas.microsoft.com/office/drawing/2014/main" id="{8AD159BD-8325-00F3-59D9-726F1117C6D1}"/>
+              </a:ext>
+            </a:extLst>
+          </p:cNvPr>
+          <p:cNvSpPr/>
+          <p:nvPr/>
+        </p:nvSpPr>
+        <p:spPr>
+          <a:xfrm>
+            <a:off x="3619568" y="0"/>
+            <a:ext cx="233295" cy="181579"/>
+          </a:xfrm>
+          <a:prstGeom prst="rect">
+            <a:avLst/>
+          </a:prstGeom>
+          <a:solidFill>
+            <a:srgbClr val="ACD433">
+              <a:alpha val="50196"/>
+            </a:srgbClr>
+          </a:solidFill>
+        </p:spPr>
+        <p:style>
+          <a:lnRef idx="2">
+            <a:schemeClr val="accent1">
+              <a:shade val="15000"/>
+            </a:schemeClr>
+          </a:lnRef>
+          <a:fillRef idx="1">
+            <a:schemeClr val="accent1"/>
+          </a:fillRef>
+          <a:effectRef idx="0">
+            <a:schemeClr val="accent1"/>
+          </a:effectRef>
+          <a:fontRef idx="minor">
+            <a:schemeClr val="lt1"/>
+          </a:fontRef>
+        </p:style>
+        <p:txBody>
+          <a:bodyPr rtlCol="0" anchor="ctr"/>
+          <a:lstStyle/>
+          <a:p>
+            <a:pPr algn="ctr"/>
+            <a:endParaRPr lang="en-US"/>
+          </a:p>
+        </p:txBody>
+      </p:sp>
+      <p:sp>
+        <p:nvSpPr>
+          <p:cNvPr id="6" name="Rectangle 5">
+            <a:extLst>
+              <a:ext uri="{FF2B5EF4-FFF2-40B4-BE49-F238E27FC236}">
+                <a16:creationId xmlns:a16="http://schemas.microsoft.com/office/drawing/2014/main" id="{16A5B280-BDF9-0777-FC48-4A2DC0C06446}"/>
+              </a:ext>
+            </a:extLst>
+          </p:cNvPr>
+          <p:cNvSpPr/>
+          <p:nvPr/>
+        </p:nvSpPr>
+        <p:spPr>
+          <a:xfrm>
+            <a:off x="2913124" y="164641"/>
+            <a:ext cx="233295" cy="568784"/>
+          </a:xfrm>
+          <a:prstGeom prst="rect">
+            <a:avLst/>
+          </a:prstGeom>
+          <a:solidFill>
+            <a:srgbClr val="ACD433">
+              <a:alpha val="50196"/>
+            </a:srgbClr>
+          </a:solidFill>
+        </p:spPr>
+        <p:style>
+          <a:lnRef idx="2">
+            <a:schemeClr val="accent1">
+              <a:shade val="15000"/>
+            </a:schemeClr>
+          </a:lnRef>
+          <a:fillRef idx="1">
+            <a:schemeClr val="accent1"/>
+          </a:fillRef>
+          <a:effectRef idx="0">
+            <a:schemeClr val="accent1"/>
+          </a:effectRef>
+          <a:fontRef idx="minor">
+            <a:schemeClr val="lt1"/>
+          </a:fontRef>
+        </p:style>
+        <p:txBody>
+          <a:bodyPr rtlCol="0" anchor="ctr"/>
+          <a:lstStyle/>
+          <a:p>
+            <a:pPr algn="ctr"/>
+            <a:endParaRPr lang="en-US"/>
+          </a:p>
+        </p:txBody>
+      </p:sp>
+      <p:sp>
+        <p:nvSpPr>
+          <p:cNvPr id="7" name="Rectangle 6">
+            <a:extLst>
+              <a:ext uri="{FF2B5EF4-FFF2-40B4-BE49-F238E27FC236}">
+                <a16:creationId xmlns:a16="http://schemas.microsoft.com/office/drawing/2014/main" id="{C1F085A8-2352-F6C4-C538-A938F854AB5C}"/>
+              </a:ext>
+            </a:extLst>
+          </p:cNvPr>
+          <p:cNvSpPr/>
+          <p:nvPr/>
+        </p:nvSpPr>
+        <p:spPr>
+          <a:xfrm>
+            <a:off x="2913124" y="996949"/>
+            <a:ext cx="115825" cy="298451"/>
+          </a:xfrm>
+          <a:prstGeom prst="rect">
+            <a:avLst/>
+          </a:prstGeom>
+          <a:solidFill>
+            <a:srgbClr val="ACD433">
+              <a:alpha val="50196"/>
+            </a:srgbClr>
+          </a:solidFill>
+        </p:spPr>
+        <p:style>
+          <a:lnRef idx="2">
+            <a:schemeClr val="accent1">
+              <a:shade val="15000"/>
+            </a:schemeClr>
+          </a:lnRef>
+          <a:fillRef idx="1">
+            <a:schemeClr val="accent1"/>
+          </a:fillRef>
+          <a:effectRef idx="0">
+            <a:schemeClr val="accent1"/>
+          </a:effectRef>
+          <a:fontRef idx="minor">
+            <a:schemeClr val="lt1"/>
+          </a:fontRef>
+        </p:style>
+        <p:txBody>
+          <a:bodyPr rtlCol="0" anchor="ctr"/>
+          <a:lstStyle/>
+          <a:p>
+            <a:pPr algn="ctr"/>
+            <a:endParaRPr lang="en-US"/>
+          </a:p>
+        </p:txBody>
+      </p:sp>
+      <p:sp>
+        <p:nvSpPr>
+          <p:cNvPr id="2" name="Rectangle 1">
+            <a:extLst>
+              <a:ext uri="{FF2B5EF4-FFF2-40B4-BE49-F238E27FC236}">
+                <a16:creationId xmlns:a16="http://schemas.microsoft.com/office/drawing/2014/main" id="{79E764C2-6991-C064-A7C6-D7DA417968F8}"/>
+              </a:ext>
+            </a:extLst>
+          </p:cNvPr>
+          <p:cNvSpPr/>
+          <p:nvPr/>
+        </p:nvSpPr>
+        <p:spPr>
+          <a:xfrm rot="1551019">
+            <a:off x="3573376" y="623121"/>
+            <a:ext cx="1093916" cy="102021"/>
+          </a:xfrm>
+          <a:prstGeom prst="rect">
+            <a:avLst/>
+          </a:prstGeom>
+          <a:solidFill>
+            <a:srgbClr val="ACD433">
+              <a:alpha val="50196"/>
+            </a:srgbClr>
+          </a:solidFill>
+        </p:spPr>
+        <p:style>
+          <a:lnRef idx="2">
+            <a:schemeClr val="accent1">
+              <a:shade val="15000"/>
+            </a:schemeClr>
+          </a:lnRef>
+          <a:fillRef idx="1">
+            <a:schemeClr val="accent1"/>
+          </a:fillRef>
+          <a:effectRef idx="0">
+            <a:schemeClr val="accent1"/>
+          </a:effectRef>
+          <a:fontRef idx="minor">
+            <a:schemeClr val="lt1"/>
+          </a:fontRef>
+        </p:style>
+        <p:txBody>
+          <a:bodyPr rtlCol="0" anchor="ctr"/>
+          <a:lstStyle/>
+          <a:p>
+            <a:pPr algn="ctr"/>
+            <a:endParaRPr lang="en-US"/>
+          </a:p>
+        </p:txBody>
+      </p:sp>
+      <p:sp>
+        <p:nvSpPr>
+          <p:cNvPr id="8" name="Rectangle 7">
+            <a:extLst>
+              <a:ext uri="{FF2B5EF4-FFF2-40B4-BE49-F238E27FC236}">
+                <a16:creationId xmlns:a16="http://schemas.microsoft.com/office/drawing/2014/main" id="{8EA43FB8-A810-48F0-62BC-BC83A382C724}"/>
+              </a:ext>
+            </a:extLst>
+          </p:cNvPr>
+          <p:cNvSpPr/>
+          <p:nvPr/>
+        </p:nvSpPr>
+        <p:spPr>
+          <a:xfrm>
+            <a:off x="5065260" y="733425"/>
+            <a:ext cx="318398" cy="225099"/>
+          </a:xfrm>
+          <a:prstGeom prst="rect">
+            <a:avLst/>
+          </a:prstGeom>
+          <a:solidFill>
+            <a:srgbClr val="ACD433">
+              <a:alpha val="50196"/>
+            </a:srgbClr>
+          </a:solidFill>
+        </p:spPr>
+        <p:style>
+          <a:lnRef idx="2">
+            <a:schemeClr val="accent1">
+              <a:shade val="15000"/>
+            </a:schemeClr>
+          </a:lnRef>
+          <a:fillRef idx="1">
+            <a:schemeClr val="accent1"/>
+          </a:fillRef>
+          <a:effectRef idx="0">
+            <a:schemeClr val="accent1"/>
+          </a:effectRef>
+          <a:fontRef idx="minor">
+            <a:schemeClr val="lt1"/>
+          </a:fontRef>
+        </p:style>
+        <p:txBody>
+          <a:bodyPr rtlCol="0" anchor="ctr"/>
+          <a:lstStyle/>
+          <a:p>
+            <a:pPr algn="ctr"/>
+            <a:endParaRPr lang="en-US"/>
+          </a:p>
+        </p:txBody>
+      </p:sp>
+      <p:sp>
+        <p:nvSpPr>
+          <p:cNvPr id="9" name="Rectangle 8">
+            <a:extLst>
+              <a:ext uri="{FF2B5EF4-FFF2-40B4-BE49-F238E27FC236}">
+                <a16:creationId xmlns:a16="http://schemas.microsoft.com/office/drawing/2014/main" id="{4183BC76-02F3-8CBD-DDF3-B882FAEDEBD3}"/>
+              </a:ext>
+            </a:extLst>
+          </p:cNvPr>
+          <p:cNvSpPr/>
+          <p:nvPr/>
+        </p:nvSpPr>
+        <p:spPr>
+          <a:xfrm>
+            <a:off x="4886705" y="434974"/>
+            <a:ext cx="81536" cy="426086"/>
+          </a:xfrm>
+          <a:prstGeom prst="rect">
+            <a:avLst/>
+          </a:prstGeom>
+          <a:solidFill>
+            <a:srgbClr val="ACD433">
+              <a:alpha val="50196"/>
+            </a:srgbClr>
+          </a:solidFill>
+        </p:spPr>
+        <p:style>
+          <a:lnRef idx="2">
+            <a:schemeClr val="accent1">
+              <a:shade val="15000"/>
+            </a:schemeClr>
+          </a:lnRef>
+          <a:fillRef idx="1">
+            <a:schemeClr val="accent1"/>
+          </a:fillRef>
+          <a:effectRef idx="0">
+            <a:schemeClr val="accent1"/>
+          </a:effectRef>
+          <a:fontRef idx="minor">
+            <a:schemeClr val="lt1"/>
+          </a:fontRef>
+        </p:style>
+        <p:txBody>
+          <a:bodyPr rtlCol="0" anchor="ctr"/>
+          <a:lstStyle/>
+          <a:p>
+            <a:pPr algn="ctr"/>
+            <a:endParaRPr lang="en-US"/>
+          </a:p>
+        </p:txBody>
+      </p:sp>
+      <p:sp>
+        <p:nvSpPr>
+          <p:cNvPr id="10" name="Rectangle 9">
+            <a:extLst>
+              <a:ext uri="{FF2B5EF4-FFF2-40B4-BE49-F238E27FC236}">
+                <a16:creationId xmlns:a16="http://schemas.microsoft.com/office/drawing/2014/main" id="{EA52C0F6-D24A-7B20-F415-BDA191F5B92C}"/>
+              </a:ext>
+            </a:extLst>
+          </p:cNvPr>
+          <p:cNvSpPr/>
+          <p:nvPr/>
+        </p:nvSpPr>
+        <p:spPr>
+          <a:xfrm>
+            <a:off x="5006340" y="478664"/>
+            <a:ext cx="622522" cy="100455"/>
+          </a:xfrm>
+          <a:prstGeom prst="rect">
+            <a:avLst/>
+          </a:prstGeom>
+          <a:solidFill>
+            <a:srgbClr val="ACD433">
+              <a:alpha val="50196"/>
+            </a:srgbClr>
+          </a:solidFill>
+        </p:spPr>
+        <p:style>
+          <a:lnRef idx="2">
+            <a:schemeClr val="accent1">
+              <a:shade val="15000"/>
+            </a:schemeClr>
+          </a:lnRef>
+          <a:fillRef idx="1">
+            <a:schemeClr val="accent1"/>
+          </a:fillRef>
+          <a:effectRef idx="0">
+            <a:schemeClr val="accent1"/>
+          </a:effectRef>
+          <a:fontRef idx="minor">
+            <a:schemeClr val="lt1"/>
+          </a:fontRef>
+        </p:style>
+        <p:txBody>
+          <a:bodyPr rtlCol="0" anchor="ctr"/>
+          <a:lstStyle/>
+          <a:p>
+            <a:pPr algn="ctr"/>
+            <a:endParaRPr lang="en-US"/>
+          </a:p>
+        </p:txBody>
+      </p:sp>
+      <p:sp>
+        <p:nvSpPr>
+          <p:cNvPr id="11" name="Rectangle 10">
+            <a:extLst>
+              <a:ext uri="{FF2B5EF4-FFF2-40B4-BE49-F238E27FC236}">
+                <a16:creationId xmlns:a16="http://schemas.microsoft.com/office/drawing/2014/main" id="{920ECFE5-D4A2-85A6-DCE5-3C024A83470E}"/>
+              </a:ext>
+            </a:extLst>
+          </p:cNvPr>
+          <p:cNvSpPr/>
+          <p:nvPr/>
+        </p:nvSpPr>
+        <p:spPr>
+          <a:xfrm>
+            <a:off x="5006340" y="587374"/>
+            <a:ext cx="114301" cy="273686"/>
+          </a:xfrm>
+          <a:prstGeom prst="rect">
+            <a:avLst/>
+          </a:prstGeom>
+          <a:solidFill>
+            <a:srgbClr val="ACD433">
+              <a:alpha val="50196"/>
+            </a:srgbClr>
+          </a:solidFill>
+        </p:spPr>
+        <p:style>
+          <a:lnRef idx="2">
+            <a:schemeClr val="accent1">
+              <a:shade val="15000"/>
+            </a:schemeClr>
+          </a:lnRef>
+          <a:fillRef idx="1">
+            <a:schemeClr val="accent1"/>
+          </a:fillRef>
+          <a:effectRef idx="0">
+            <a:schemeClr val="accent1"/>
+          </a:effectRef>
+          <a:fontRef idx="minor">
+            <a:schemeClr val="lt1"/>
+          </a:fontRef>
+        </p:style>
+        <p:txBody>
+          <a:bodyPr rtlCol="0" anchor="ctr"/>
+          <a:lstStyle/>
+          <a:p>
+            <a:pPr algn="ctr"/>
+            <a:endParaRPr lang="en-US"/>
+          </a:p>
+        </p:txBody>
+      </p:sp>
+      <p:sp>
+        <p:nvSpPr>
+          <p:cNvPr id="12" name="Rectangle 11">
+            <a:extLst>
+              <a:ext uri="{FF2B5EF4-FFF2-40B4-BE49-F238E27FC236}">
+                <a16:creationId xmlns:a16="http://schemas.microsoft.com/office/drawing/2014/main" id="{AC97F4F0-3BCB-56AA-4B3D-2E217E23A75F}"/>
+              </a:ext>
+            </a:extLst>
+          </p:cNvPr>
+          <p:cNvSpPr/>
+          <p:nvPr/>
+        </p:nvSpPr>
+        <p:spPr>
+          <a:xfrm>
+            <a:off x="3382706" y="434974"/>
+            <a:ext cx="76700" cy="1133476"/>
+          </a:xfrm>
+          <a:prstGeom prst="rect">
+            <a:avLst/>
+          </a:prstGeom>
+          <a:solidFill>
+            <a:srgbClr val="ACD433">
+              <a:alpha val="50196"/>
+            </a:srgbClr>
+          </a:solidFill>
+        </p:spPr>
+        <p:style>
+          <a:lnRef idx="2">
+            <a:schemeClr val="accent1">
+              <a:shade val="15000"/>
+            </a:schemeClr>
+          </a:lnRef>
+          <a:fillRef idx="1">
+            <a:schemeClr val="accent1"/>
+          </a:fillRef>
+          <a:effectRef idx="0">
+            <a:schemeClr val="accent1"/>
+          </a:effectRef>
+          <a:fontRef idx="minor">
+            <a:schemeClr val="lt1"/>
+          </a:fontRef>
+        </p:style>
+        <p:txBody>
+          <a:bodyPr rtlCol="0" anchor="ctr"/>
+          <a:lstStyle/>
+          <a:p>
+            <a:pPr algn="ctr"/>
+            <a:endParaRPr lang="en-US"/>
+          </a:p>
+        </p:txBody>
+      </p:sp>
+      <p:sp>
+        <p:nvSpPr>
+          <p:cNvPr id="13" name="Rectangle 12">
+            <a:extLst>
+              <a:ext uri="{FF2B5EF4-FFF2-40B4-BE49-F238E27FC236}">
+                <a16:creationId xmlns:a16="http://schemas.microsoft.com/office/drawing/2014/main" id="{F969EB8C-2938-39B6-07FC-6E35B0F7FE70}"/>
+              </a:ext>
+            </a:extLst>
+          </p:cNvPr>
+          <p:cNvSpPr/>
+          <p:nvPr/>
+        </p:nvSpPr>
+        <p:spPr>
+          <a:xfrm>
+            <a:off x="3565097" y="974398"/>
+            <a:ext cx="76700" cy="594051"/>
+          </a:xfrm>
+          <a:prstGeom prst="rect">
+            <a:avLst/>
+          </a:prstGeom>
+          <a:solidFill>
+            <a:srgbClr val="ACD433">
+              <a:alpha val="50196"/>
+            </a:srgbClr>
+          </a:solidFill>
+        </p:spPr>
+        <p:style>
+          <a:lnRef idx="2">
+            <a:schemeClr val="accent1">
+              <a:shade val="15000"/>
+            </a:schemeClr>
+          </a:lnRef>
+          <a:fillRef idx="1">
+            <a:schemeClr val="accent1"/>
+          </a:fillRef>
+          <a:effectRef idx="0">
+            <a:schemeClr val="accent1"/>
+          </a:effectRef>
+          <a:fontRef idx="minor">
+            <a:schemeClr val="lt1"/>
+          </a:fontRef>
+        </p:style>
+        <p:txBody>
+          <a:bodyPr rtlCol="0" anchor="ctr"/>
+          <a:lstStyle/>
+          <a:p>
+            <a:pPr algn="ctr"/>
+            <a:endParaRPr lang="en-US"/>
+          </a:p>
+        </p:txBody>
+      </p:sp>
+      <p:sp>
+        <p:nvSpPr>
+          <p:cNvPr id="14" name="Rectangle 13">
+            <a:extLst>
+              <a:ext uri="{FF2B5EF4-FFF2-40B4-BE49-F238E27FC236}">
+                <a16:creationId xmlns:a16="http://schemas.microsoft.com/office/drawing/2014/main" id="{60D58E72-C677-FCB0-A4C7-66E90CA3E479}"/>
+              </a:ext>
+            </a:extLst>
+          </p:cNvPr>
+          <p:cNvSpPr/>
+          <p:nvPr/>
+        </p:nvSpPr>
+        <p:spPr>
+          <a:xfrm>
+            <a:off x="3641797" y="958524"/>
+            <a:ext cx="993006" cy="102111"/>
+          </a:xfrm>
+          <a:prstGeom prst="rect">
+            <a:avLst/>
+          </a:prstGeom>
+          <a:solidFill>
+            <a:srgbClr val="ACD433">
+              <a:alpha val="50196"/>
+            </a:srgbClr>
+          </a:solidFill>
+        </p:spPr>
+        <p:style>
+          <a:lnRef idx="2">
+            <a:schemeClr val="accent1">
+              <a:shade val="15000"/>
+            </a:schemeClr>
+          </a:lnRef>
+          <a:fillRef idx="1">
+            <a:schemeClr val="accent1"/>
+          </a:fillRef>
+          <a:effectRef idx="0">
+            <a:schemeClr val="accent1"/>
+          </a:effectRef>
+          <a:fontRef idx="minor">
+            <a:schemeClr val="lt1"/>
+          </a:fontRef>
+        </p:style>
+        <p:txBody>
+          <a:bodyPr rtlCol="0" anchor="ctr"/>
+          <a:lstStyle/>
+          <a:p>
+            <a:pPr algn="ctr"/>
+            <a:endParaRPr lang="en-US"/>
+          </a:p>
+        </p:txBody>
+      </p:sp>
+      <p:sp>
+        <p:nvSpPr>
+          <p:cNvPr id="15" name="Rectangle 14">
+            <a:extLst>
+              <a:ext uri="{FF2B5EF4-FFF2-40B4-BE49-F238E27FC236}">
+                <a16:creationId xmlns:a16="http://schemas.microsoft.com/office/drawing/2014/main" id="{5523F2BC-889D-AD36-0DD9-3D16CC65B1E5}"/>
+              </a:ext>
+            </a:extLst>
+          </p:cNvPr>
+          <p:cNvSpPr/>
+          <p:nvPr/>
+        </p:nvSpPr>
+        <p:spPr>
+          <a:xfrm>
+            <a:off x="3788357" y="1447841"/>
+            <a:ext cx="233295" cy="181579"/>
+          </a:xfrm>
+          <a:prstGeom prst="rect">
+            <a:avLst/>
+          </a:prstGeom>
+          <a:solidFill>
+            <a:srgbClr val="ACD433">
+              <a:alpha val="50196"/>
+            </a:srgbClr>
+          </a:solidFill>
+        </p:spPr>
+        <p:style>
+          <a:lnRef idx="2">
+            <a:schemeClr val="accent1">
+              <a:shade val="15000"/>
+            </a:schemeClr>
+          </a:lnRef>
+          <a:fillRef idx="1">
+            <a:schemeClr val="accent1"/>
+          </a:fillRef>
+          <a:effectRef idx="0">
+            <a:schemeClr val="accent1"/>
+          </a:effectRef>
+          <a:fontRef idx="minor">
+            <a:schemeClr val="lt1"/>
+          </a:fontRef>
+        </p:style>
+        <p:txBody>
+          <a:bodyPr rtlCol="0" anchor="ctr"/>
+          <a:lstStyle/>
+          <a:p>
+            <a:pPr algn="ctr"/>
+            <a:endParaRPr lang="en-US"/>
+          </a:p>
+        </p:txBody>
+      </p:sp>
+      <p:sp>
+        <p:nvSpPr>
+          <p:cNvPr id="16" name="Rectangle 15">
+            <a:extLst>
+              <a:ext uri="{FF2B5EF4-FFF2-40B4-BE49-F238E27FC236}">
+                <a16:creationId xmlns:a16="http://schemas.microsoft.com/office/drawing/2014/main" id="{5A742B4F-0B5B-1DC1-989F-3B2DD73DA77D}"/>
+              </a:ext>
+            </a:extLst>
+          </p:cNvPr>
+          <p:cNvSpPr/>
+          <p:nvPr/>
+        </p:nvSpPr>
+        <p:spPr>
+          <a:xfrm rot="4874518">
+            <a:off x="4478330" y="985650"/>
+            <a:ext cx="81536" cy="426086"/>
+          </a:xfrm>
+          <a:prstGeom prst="rect">
+            <a:avLst/>
+          </a:prstGeom>
+          <a:solidFill>
+            <a:srgbClr val="ACD433">
+              <a:alpha val="50196"/>
+            </a:srgbClr>
+          </a:solidFill>
+        </p:spPr>
+        <p:style>
+          <a:lnRef idx="2">
+            <a:schemeClr val="accent1">
+              <a:shade val="15000"/>
+            </a:schemeClr>
+          </a:lnRef>
+          <a:fillRef idx="1">
+            <a:schemeClr val="accent1"/>
+          </a:fillRef>
+          <a:effectRef idx="0">
+            <a:schemeClr val="accent1"/>
+          </a:effectRef>
+          <a:fontRef idx="minor">
+            <a:schemeClr val="lt1"/>
+          </a:fontRef>
+        </p:style>
+        <p:txBody>
+          <a:bodyPr rtlCol="0" anchor="ctr"/>
+          <a:lstStyle/>
+          <a:p>
+            <a:pPr algn="ctr"/>
+            <a:endParaRPr lang="en-US"/>
+          </a:p>
+        </p:txBody>
+      </p:sp>
+      <p:sp>
+        <p:nvSpPr>
+          <p:cNvPr id="17" name="Rectangle 16">
+            <a:extLst>
+              <a:ext uri="{FF2B5EF4-FFF2-40B4-BE49-F238E27FC236}">
+                <a16:creationId xmlns:a16="http://schemas.microsoft.com/office/drawing/2014/main" id="{0FD93B5A-D985-BB45-36B9-2EB650288B14}"/>
+              </a:ext>
+            </a:extLst>
+          </p:cNvPr>
+          <p:cNvSpPr/>
+          <p:nvPr/>
+        </p:nvSpPr>
+        <p:spPr>
+          <a:xfrm>
+            <a:off x="4904356" y="1176175"/>
+            <a:ext cx="81536" cy="426086"/>
+          </a:xfrm>
+          <a:prstGeom prst="rect">
+            <a:avLst/>
+          </a:prstGeom>
+          <a:solidFill>
+            <a:srgbClr val="ACD433">
+              <a:alpha val="50196"/>
+            </a:srgbClr>
+          </a:solidFill>
+        </p:spPr>
+        <p:style>
+          <a:lnRef idx="2">
+            <a:schemeClr val="accent1">
+              <a:shade val="15000"/>
+            </a:schemeClr>
+          </a:lnRef>
+          <a:fillRef idx="1">
+            <a:schemeClr val="accent1"/>
+          </a:fillRef>
+          <a:effectRef idx="0">
+            <a:schemeClr val="accent1"/>
+          </a:effectRef>
+          <a:fontRef idx="minor">
+            <a:schemeClr val="lt1"/>
+          </a:fontRef>
+        </p:style>
+        <p:txBody>
+          <a:bodyPr rtlCol="0" anchor="ctr"/>
+          <a:lstStyle/>
+          <a:p>
+            <a:pPr algn="ctr"/>
+            <a:endParaRPr lang="en-US"/>
+          </a:p>
+        </p:txBody>
+      </p:sp>
+      <p:sp>
+        <p:nvSpPr>
+          <p:cNvPr id="18" name="Rectangle 17">
+            <a:extLst>
+              <a:ext uri="{FF2B5EF4-FFF2-40B4-BE49-F238E27FC236}">
+                <a16:creationId xmlns:a16="http://schemas.microsoft.com/office/drawing/2014/main" id="{2AFDFAD6-D17C-8786-E900-412110064450}"/>
+              </a:ext>
+            </a:extLst>
+          </p:cNvPr>
+          <p:cNvSpPr/>
+          <p:nvPr/>
+        </p:nvSpPr>
+        <p:spPr>
+          <a:xfrm>
+            <a:off x="5200132" y="946721"/>
+            <a:ext cx="428730" cy="100455"/>
+          </a:xfrm>
+          <a:prstGeom prst="rect">
+            <a:avLst/>
+          </a:prstGeom>
+          <a:solidFill>
+            <a:srgbClr val="ACD433">
+              <a:alpha val="50196"/>
+            </a:srgbClr>
+          </a:solidFill>
+        </p:spPr>
+        <p:style>
+          <a:lnRef idx="2">
+            <a:schemeClr val="accent1">
+              <a:shade val="15000"/>
+            </a:schemeClr>
+          </a:lnRef>
+          <a:fillRef idx="1">
+            <a:schemeClr val="accent1"/>
+          </a:fillRef>
+          <a:effectRef idx="0">
+            <a:schemeClr val="accent1"/>
+          </a:effectRef>
+          <a:fontRef idx="minor">
+            <a:schemeClr val="lt1"/>
+          </a:fontRef>
+        </p:style>
+        <p:txBody>
+          <a:bodyPr rtlCol="0" anchor="ctr"/>
+          <a:lstStyle/>
+          <a:p>
+            <a:pPr algn="ctr"/>
+            <a:endParaRPr lang="en-US"/>
+          </a:p>
+        </p:txBody>
+      </p:sp>
+    </p:spTree>
+    <p:extLst>
+      <p:ext uri="{BB962C8B-B14F-4D97-AF65-F5344CB8AC3E}">
+        <p14:creationId xmlns:p14="http://schemas.microsoft.com/office/powerpoint/2010/main" val="1399032722"/>
+      </p:ext>
+    </p:extLst>
+  </p:cSld>
+  <p:clrMapOvr>
+    <a:masterClrMapping/>
+  </p:clrMapOvr>
+</p:sld>
+</file>
+
+<file path=ppt/slides/slide25.xml><?xml version="1.0" encoding="utf-8"?>
+<p:sld xmlns:a="http://schemas.openxmlformats.org/drawingml/2006/main" xmlns:r="http://schemas.openxmlformats.org/officeDocument/2006/relationships" xmlns:p="http://schemas.openxmlformats.org/presentationml/2006/main">
+  <p:cSld>
+    <p:spTree>
+      <p:nvGrpSpPr>
+        <p:cNvPr id="1" name="">
+          <a:extLst>
+            <a:ext uri="{FF2B5EF4-FFF2-40B4-BE49-F238E27FC236}">
+              <a16:creationId xmlns:a16="http://schemas.microsoft.com/office/drawing/2014/main" id="{92178ACB-524B-8769-B412-554D794B5016}"/>
+            </a:ext>
+          </a:extLst>
+        </p:cNvPr>
+        <p:cNvGrpSpPr/>
+        <p:nvPr/>
+      </p:nvGrpSpPr>
+      <p:grpSpPr>
+        <a:xfrm>
+          <a:off x="0" y="0"/>
+          <a:ext cx="0" cy="0"/>
+          <a:chOff x="0" y="0"/>
+          <a:chExt cx="0" cy="0"/>
+        </a:xfrm>
+      </p:grpSpPr>
+      <p:sp>
+        <p:nvSpPr>
+          <p:cNvPr id="2" name="Title 1">
+            <a:extLst>
+              <a:ext uri="{FF2B5EF4-FFF2-40B4-BE49-F238E27FC236}">
+                <a16:creationId xmlns:a16="http://schemas.microsoft.com/office/drawing/2014/main" id="{DA2D6575-5DF8-ADEA-4C89-05A143B6087A}"/>
+              </a:ext>
+            </a:extLst>
+          </p:cNvPr>
+          <p:cNvSpPr>
+            <a:spLocks noGrp="1"/>
+          </p:cNvSpPr>
+          <p:nvPr>
+            <p:ph type="title"/>
+          </p:nvPr>
+        </p:nvSpPr>
+        <p:spPr>
+          <a:xfrm>
+            <a:off x="1754188" y="452718"/>
+            <a:ext cx="8296646" cy="1400530"/>
+          </a:xfrm>
+        </p:spPr>
+        <p:txBody>
+          <a:bodyPr/>
+          <a:lstStyle/>
+          <a:p>
+            <a:r>
+              <a:rPr lang="en-US" b="1" dirty="0"/>
+              <a:t>Essential EA Meta-Model</a:t>
+            </a:r>
+            <a:br>
+              <a:rPr lang="en-US" b="1" dirty="0"/>
+            </a:br>
+            <a:r>
+              <a:rPr lang="en-US" b="1" dirty="0"/>
+              <a:t>- Business Layer - 12 </a:t>
+            </a:r>
+          </a:p>
+        </p:txBody>
+      </p:sp>
+      <p:sp>
+        <p:nvSpPr>
+          <p:cNvPr id="4" name="Title 1">
+            <a:extLst>
+              <a:ext uri="{FF2B5EF4-FFF2-40B4-BE49-F238E27FC236}">
+                <a16:creationId xmlns:a16="http://schemas.microsoft.com/office/drawing/2014/main" id="{D2D60EDC-1642-A5AC-82E0-D0C3D092616E}"/>
+              </a:ext>
+            </a:extLst>
+          </p:cNvPr>
+          <p:cNvSpPr txBox="1">
+            <a:spLocks/>
+          </p:cNvSpPr>
+          <p:nvPr/>
+        </p:nvSpPr>
+        <p:spPr>
+          <a:xfrm>
+            <a:off x="0" y="3143"/>
+            <a:ext cx="1754188" cy="1058013"/>
+          </a:xfrm>
+          <a:prstGeom prst="rect">
+            <a:avLst/>
+          </a:prstGeom>
+        </p:spPr>
+        <p:txBody>
+          <a:bodyPr vert="horz" lIns="91440" tIns="45720" rIns="91440" bIns="45720" rtlCol="0" anchor="ctr">
+            <a:noAutofit/>
+          </a:bodyPr>
+          <a:lstStyle>
+            <a:lvl1pPr algn="l" defTabSz="457200" rtl="0" eaLnBrk="1" latinLnBrk="0" hangingPunct="1">
+              <a:spcBef>
+                <a:spcPct val="0"/>
+              </a:spcBef>
+              <a:buNone/>
+              <a:defRPr sz="7200" b="0" i="0" kern="1200">
+                <a:solidFill>
+                  <a:schemeClr val="tx2"/>
+                </a:solidFill>
+                <a:latin typeface="+mj-lt"/>
+                <a:ea typeface="+mj-ea"/>
+                <a:cs typeface="+mj-cs"/>
+              </a:defRPr>
+            </a:lvl1pPr>
+            <a:lvl2pPr eaLnBrk="1" hangingPunct="1">
+              <a:defRPr>
+                <a:solidFill>
+                  <a:schemeClr val="tx2"/>
+                </a:solidFill>
+              </a:defRPr>
+            </a:lvl2pPr>
+            <a:lvl3pPr eaLnBrk="1" hangingPunct="1">
+              <a:defRPr>
+                <a:solidFill>
+                  <a:schemeClr val="tx2"/>
+                </a:solidFill>
+              </a:defRPr>
+            </a:lvl3pPr>
+            <a:lvl4pPr eaLnBrk="1" hangingPunct="1">
+              <a:defRPr>
+                <a:solidFill>
+                  <a:schemeClr val="tx2"/>
+                </a:solidFill>
+              </a:defRPr>
+            </a:lvl4pPr>
+            <a:lvl5pPr eaLnBrk="1" hangingPunct="1">
+              <a:defRPr>
+                <a:solidFill>
+                  <a:schemeClr val="tx2"/>
+                </a:solidFill>
+              </a:defRPr>
+            </a:lvl5pPr>
+            <a:lvl6pPr eaLnBrk="1" hangingPunct="1">
+              <a:defRPr>
+                <a:solidFill>
+                  <a:schemeClr val="tx2"/>
+                </a:solidFill>
+              </a:defRPr>
+            </a:lvl6pPr>
+            <a:lvl7pPr eaLnBrk="1" hangingPunct="1">
+              <a:defRPr>
+                <a:solidFill>
+                  <a:schemeClr val="tx2"/>
+                </a:solidFill>
+              </a:defRPr>
+            </a:lvl7pPr>
+            <a:lvl8pPr eaLnBrk="1" hangingPunct="1">
+              <a:defRPr>
+                <a:solidFill>
+                  <a:schemeClr val="tx2"/>
+                </a:solidFill>
+              </a:defRPr>
+            </a:lvl8pPr>
+            <a:lvl9pPr eaLnBrk="1" hangingPunct="1">
+              <a:defRPr>
+                <a:solidFill>
+                  <a:schemeClr val="tx2"/>
+                </a:solidFill>
+              </a:defRPr>
+            </a:lvl9pPr>
+          </a:lstStyle>
+          <a:p>
+            <a:pPr algn="ctr"/>
+            <a:r>
+              <a:rPr lang="en-US" b="1" dirty="0">
+                <a:solidFill>
+                  <a:schemeClr val="accent1">
+                    <a:lumMod val="75000"/>
+                  </a:schemeClr>
+                </a:solidFill>
+              </a:rPr>
+              <a:t>018</a:t>
+            </a:r>
+            <a:endParaRPr lang="ru-RU" b="1" dirty="0">
+              <a:solidFill>
+                <a:schemeClr val="accent1">
+                  <a:lumMod val="75000"/>
+                </a:schemeClr>
+              </a:solidFill>
+            </a:endParaRPr>
+          </a:p>
+        </p:txBody>
+      </p:sp>
+      <p:pic>
+        <p:nvPicPr>
+          <p:cNvPr id="3" name="Picture 2">
+            <a:extLst>
+              <a:ext uri="{FF2B5EF4-FFF2-40B4-BE49-F238E27FC236}">
+                <a16:creationId xmlns:a16="http://schemas.microsoft.com/office/drawing/2014/main" id="{08261B83-4D8A-5E40-DAC2-A595BF61D469}"/>
+              </a:ext>
+            </a:extLst>
+          </p:cNvPr>
+          <p:cNvPicPr>
+            <a:picLocks noChangeAspect="1"/>
+          </p:cNvPicPr>
+          <p:nvPr/>
+        </p:nvPicPr>
+        <p:blipFill>
+          <a:blip r:embed="rId2"/>
+          <a:stretch>
+            <a:fillRect/>
+          </a:stretch>
+        </p:blipFill>
+        <p:spPr>
+          <a:xfrm>
+            <a:off x="236841" y="1853248"/>
+            <a:ext cx="8296646" cy="4669795"/>
+          </a:xfrm>
+          <a:prstGeom prst="rect">
+            <a:avLst/>
+          </a:prstGeom>
+          <a:ln>
+            <a:noFill/>
+          </a:ln>
+          <a:effectLst>
+            <a:outerShdw blurRad="292100" dist="139700" dir="2700000" algn="tl" rotWithShape="0">
+              <a:srgbClr val="333333">
+                <a:alpha val="65000"/>
+              </a:srgbClr>
+            </a:outerShdw>
+          </a:effectLst>
+        </p:spPr>
+      </p:pic>
+      <p:sp>
+        <p:nvSpPr>
+          <p:cNvPr id="6" name="Rectangle: Rounded Corners 5">
+            <a:extLst>
+              <a:ext uri="{FF2B5EF4-FFF2-40B4-BE49-F238E27FC236}">
+                <a16:creationId xmlns:a16="http://schemas.microsoft.com/office/drawing/2014/main" id="{7FF74DCB-C246-D691-5B34-D1BE2F16B716}"/>
+              </a:ext>
+            </a:extLst>
+          </p:cNvPr>
+          <p:cNvSpPr/>
+          <p:nvPr/>
+        </p:nvSpPr>
+        <p:spPr>
+          <a:xfrm>
+            <a:off x="596436" y="2188396"/>
+            <a:ext cx="2054832" cy="1400530"/>
+          </a:xfrm>
+          <a:prstGeom prst="roundRect">
+            <a:avLst>
+              <a:gd name="adj" fmla="val 6916"/>
+            </a:avLst>
+          </a:prstGeom>
+          <a:solidFill>
+            <a:srgbClr val="FFCC66">
+              <a:alpha val="20000"/>
+            </a:srgbClr>
+          </a:solidFill>
+          <a:ln>
+            <a:solidFill>
+              <a:srgbClr val="92D050"/>
+            </a:solidFill>
+          </a:ln>
+        </p:spPr>
+        <p:style>
+          <a:lnRef idx="2">
+            <a:schemeClr val="accent1">
+              <a:shade val="15000"/>
+            </a:schemeClr>
+          </a:lnRef>
+          <a:fillRef idx="1">
+            <a:schemeClr val="accent1"/>
+          </a:fillRef>
+          <a:effectRef idx="0">
+            <a:schemeClr val="accent1"/>
+          </a:effectRef>
+          <a:fontRef idx="minor">
+            <a:schemeClr val="lt1"/>
+          </a:fontRef>
+        </p:style>
+        <p:txBody>
+          <a:bodyPr rtlCol="0" anchor="ctr"/>
+          <a:lstStyle/>
+          <a:p>
+            <a:pPr algn="ctr"/>
+            <a:endParaRPr lang="en-US"/>
+          </a:p>
+        </p:txBody>
+      </p:sp>
+      <p:pic>
+        <p:nvPicPr>
+          <p:cNvPr id="11" name="Picture 10">
+            <a:extLst>
+              <a:ext uri="{FF2B5EF4-FFF2-40B4-BE49-F238E27FC236}">
+                <a16:creationId xmlns:a16="http://schemas.microsoft.com/office/drawing/2014/main" id="{B0EBC631-E414-8B13-EA2E-6686017FC7E1}"/>
+              </a:ext>
+            </a:extLst>
+          </p:cNvPr>
+          <p:cNvPicPr>
+            <a:picLocks noChangeAspect="1"/>
+          </p:cNvPicPr>
+          <p:nvPr/>
+        </p:nvPicPr>
+        <p:blipFill>
+          <a:blip r:embed="rId3"/>
+          <a:stretch>
+            <a:fillRect/>
+          </a:stretch>
+        </p:blipFill>
+        <p:spPr>
+          <a:xfrm>
+            <a:off x="157000" y="1094226"/>
+            <a:ext cx="362976" cy="362976"/>
+          </a:xfrm>
+          <a:prstGeom prst="rect">
+            <a:avLst/>
+          </a:prstGeom>
+          <a:ln>
+            <a:noFill/>
+          </a:ln>
+          <a:effectLst>
+            <a:outerShdw blurRad="292100" dist="139700" dir="2700000" algn="tl" rotWithShape="0">
+              <a:srgbClr val="333333">
+                <a:alpha val="65000"/>
+              </a:srgbClr>
+            </a:outerShdw>
+          </a:effectLst>
+        </p:spPr>
+      </p:pic>
+      <p:pic>
+        <p:nvPicPr>
+          <p:cNvPr id="12" name="Picture 11">
+            <a:extLst>
+              <a:ext uri="{FF2B5EF4-FFF2-40B4-BE49-F238E27FC236}">
+                <a16:creationId xmlns:a16="http://schemas.microsoft.com/office/drawing/2014/main" id="{B037ACB9-7096-E5FD-C852-F4D1B4E97E9A}"/>
+              </a:ext>
+            </a:extLst>
+          </p:cNvPr>
+          <p:cNvPicPr>
+            <a:picLocks noChangeAspect="1"/>
+          </p:cNvPicPr>
+          <p:nvPr/>
+        </p:nvPicPr>
+        <p:blipFill>
+          <a:blip r:embed="rId4"/>
+          <a:stretch>
+            <a:fillRect/>
+          </a:stretch>
+        </p:blipFill>
+        <p:spPr>
+          <a:xfrm>
+            <a:off x="611241" y="1094226"/>
+            <a:ext cx="362976" cy="362976"/>
+          </a:xfrm>
+          <a:prstGeom prst="rect">
+            <a:avLst/>
+          </a:prstGeom>
+          <a:ln>
+            <a:noFill/>
+          </a:ln>
+          <a:effectLst>
+            <a:outerShdw blurRad="292100" dist="139700" dir="2700000" algn="tl" rotWithShape="0">
+              <a:srgbClr val="333333">
+                <a:alpha val="65000"/>
+              </a:srgbClr>
+            </a:outerShdw>
+          </a:effectLst>
+        </p:spPr>
+      </p:pic>
+      <p:pic>
+        <p:nvPicPr>
+          <p:cNvPr id="13" name="Picture 12">
+            <a:extLst>
+              <a:ext uri="{FF2B5EF4-FFF2-40B4-BE49-F238E27FC236}">
+                <a16:creationId xmlns:a16="http://schemas.microsoft.com/office/drawing/2014/main" id="{956A1453-2F6B-3488-214A-FC7C8CA515B6}"/>
+              </a:ext>
+            </a:extLst>
+          </p:cNvPr>
+          <p:cNvPicPr>
+            <a:picLocks noChangeAspect="1"/>
+          </p:cNvPicPr>
+          <p:nvPr/>
+        </p:nvPicPr>
+        <p:blipFill>
+          <a:blip r:embed="rId5"/>
+          <a:stretch>
+            <a:fillRect/>
+          </a:stretch>
+        </p:blipFill>
+        <p:spPr>
+          <a:xfrm>
+            <a:off x="1065482" y="1094226"/>
+            <a:ext cx="371111" cy="362976"/>
+          </a:xfrm>
+          <a:prstGeom prst="rect">
+            <a:avLst/>
+          </a:prstGeom>
+          <a:ln>
+            <a:noFill/>
+          </a:ln>
+          <a:effectLst>
+            <a:outerShdw blurRad="292100" dist="139700" dir="2700000" algn="tl" rotWithShape="0">
+              <a:srgbClr val="333333">
+                <a:alpha val="65000"/>
+              </a:srgbClr>
+            </a:outerShdw>
+          </a:effectLst>
+        </p:spPr>
+      </p:pic>
+      <p:pic>
+        <p:nvPicPr>
+          <p:cNvPr id="10" name="Picture 9">
+            <a:extLst>
+              <a:ext uri="{FF2B5EF4-FFF2-40B4-BE49-F238E27FC236}">
+                <a16:creationId xmlns:a16="http://schemas.microsoft.com/office/drawing/2014/main" id="{6B4E1C16-77DB-69E6-ACD7-07A9292E6464}"/>
+              </a:ext>
+            </a:extLst>
+          </p:cNvPr>
+          <p:cNvPicPr>
+            <a:picLocks noChangeAspect="1"/>
+          </p:cNvPicPr>
+          <p:nvPr/>
+        </p:nvPicPr>
+        <p:blipFill>
+          <a:blip r:embed="rId6"/>
+          <a:stretch>
+            <a:fillRect/>
+          </a:stretch>
+        </p:blipFill>
+        <p:spPr>
+          <a:xfrm>
+            <a:off x="5575712" y="2727711"/>
+            <a:ext cx="6299620" cy="2522384"/>
+          </a:xfrm>
+          <a:prstGeom prst="roundRect">
+            <a:avLst>
+              <a:gd name="adj" fmla="val 16667"/>
+            </a:avLst>
+          </a:prstGeom>
+          <a:ln>
+            <a:noFill/>
+          </a:ln>
+          <a:effectLst>
+            <a:outerShdw blurRad="152400" dist="12000" dir="900000" sy="98000" kx="110000" ky="200000" algn="tl" rotWithShape="0">
+              <a:srgbClr val="000000">
+                <a:alpha val="30000"/>
+              </a:srgbClr>
+            </a:outerShdw>
+          </a:effectLst>
+          <a:scene3d>
+            <a:camera prst="perspectiveRelaxed">
+              <a:rot lat="19800000" lon="1200000" rev="20820000"/>
+            </a:camera>
+            <a:lightRig rig="threePt" dir="t"/>
+          </a:scene3d>
+          <a:sp3d contourW="6350" prstMaterial="matte">
+            <a:bevelT w="101600" h="101600"/>
+            <a:contourClr>
+              <a:srgbClr val="969696"/>
+            </a:contourClr>
+          </a:sp3d>
+        </p:spPr>
+      </p:pic>
+    </p:spTree>
+    <p:extLst>
+      <p:ext uri="{BB962C8B-B14F-4D97-AF65-F5344CB8AC3E}">
+        <p14:creationId xmlns:p14="http://schemas.microsoft.com/office/powerpoint/2010/main" val="2031158873"/>
+      </p:ext>
+    </p:extLst>
+  </p:cSld>
+  <p:clrMapOvr>
+    <a:masterClrMapping/>
+  </p:clrMapOvr>
+</p:sld>
+</file>
+
+<file path=ppt/slides/slide26.xml><?xml version="1.0" encoding="utf-8"?>
+<p:sld xmlns:a="http://schemas.openxmlformats.org/drawingml/2006/main" xmlns:r="http://schemas.openxmlformats.org/officeDocument/2006/relationships" xmlns:p="http://schemas.openxmlformats.org/presentationml/2006/main">
+  <p:cSld>
+    <p:spTree>
+      <p:nvGrpSpPr>
+        <p:cNvPr id="1" name="">
+          <a:extLst>
+            <a:ext uri="{FF2B5EF4-FFF2-40B4-BE49-F238E27FC236}">
+              <a16:creationId xmlns:a16="http://schemas.microsoft.com/office/drawing/2014/main" id="{E9ED0F9C-FA88-7947-7D50-5F5B7DDAB1E6}"/>
+            </a:ext>
+          </a:extLst>
+        </p:cNvPr>
+        <p:cNvGrpSpPr/>
+        <p:nvPr/>
+      </p:nvGrpSpPr>
+      <p:grpSpPr>
+        <a:xfrm>
+          <a:off x="0" y="0"/>
+          <a:ext cx="0" cy="0"/>
+          <a:chOff x="0" y="0"/>
+          <a:chExt cx="0" cy="0"/>
+        </a:xfrm>
+      </p:grpSpPr>
+      <p:pic>
+        <p:nvPicPr>
+          <p:cNvPr id="3" name="Picture 2">
+            <a:extLst>
+              <a:ext uri="{FF2B5EF4-FFF2-40B4-BE49-F238E27FC236}">
+                <a16:creationId xmlns:a16="http://schemas.microsoft.com/office/drawing/2014/main" id="{47363CEB-11F8-7C67-8545-349DA8DE6531}"/>
+              </a:ext>
+            </a:extLst>
+          </p:cNvPr>
+          <p:cNvPicPr>
+            <a:picLocks noChangeAspect="1"/>
+          </p:cNvPicPr>
+          <p:nvPr/>
+        </p:nvPicPr>
+        <p:blipFill>
+          <a:blip r:embed="rId2"/>
+          <a:stretch>
+            <a:fillRect/>
+          </a:stretch>
+        </p:blipFill>
+        <p:spPr>
+          <a:xfrm>
+            <a:off x="2592309" y="0"/>
+            <a:ext cx="7007382" cy="6858000"/>
+          </a:xfrm>
+          <a:prstGeom prst="rect">
+            <a:avLst/>
+          </a:prstGeom>
+        </p:spPr>
+      </p:pic>
+      <p:sp>
+        <p:nvSpPr>
+          <p:cNvPr id="4" name="Rectangle 3">
+            <a:extLst>
+              <a:ext uri="{FF2B5EF4-FFF2-40B4-BE49-F238E27FC236}">
+                <a16:creationId xmlns:a16="http://schemas.microsoft.com/office/drawing/2014/main" id="{6F0EAAEB-4C34-5CE9-41F6-EBDE23BE92D1}"/>
+              </a:ext>
+            </a:extLst>
+          </p:cNvPr>
+          <p:cNvSpPr/>
+          <p:nvPr/>
+        </p:nvSpPr>
+        <p:spPr>
+          <a:xfrm>
+            <a:off x="3700530" y="223234"/>
+            <a:ext cx="957329" cy="64394"/>
+          </a:xfrm>
+          <a:prstGeom prst="rect">
+            <a:avLst/>
+          </a:prstGeom>
+          <a:solidFill>
+            <a:srgbClr val="ACD433">
+              <a:alpha val="50196"/>
+            </a:srgbClr>
+          </a:solidFill>
+        </p:spPr>
+        <p:style>
+          <a:lnRef idx="2">
+            <a:schemeClr val="accent1">
+              <a:shade val="15000"/>
+            </a:schemeClr>
+          </a:lnRef>
+          <a:fillRef idx="1">
+            <a:schemeClr val="accent1"/>
+          </a:fillRef>
+          <a:effectRef idx="0">
+            <a:schemeClr val="accent1"/>
+          </a:effectRef>
+          <a:fontRef idx="minor">
+            <a:schemeClr val="lt1"/>
+          </a:fontRef>
+        </p:style>
+        <p:txBody>
+          <a:bodyPr rtlCol="0" anchor="ctr"/>
+          <a:lstStyle/>
+          <a:p>
+            <a:pPr algn="ctr"/>
+            <a:endParaRPr lang="en-US"/>
+          </a:p>
+        </p:txBody>
+      </p:sp>
+      <p:sp>
+        <p:nvSpPr>
+          <p:cNvPr id="5" name="Rectangle 4">
+            <a:extLst>
+              <a:ext uri="{FF2B5EF4-FFF2-40B4-BE49-F238E27FC236}">
+                <a16:creationId xmlns:a16="http://schemas.microsoft.com/office/drawing/2014/main" id="{FFECB941-3E7D-0AA2-885C-EF2AB2AFA520}"/>
+              </a:ext>
+            </a:extLst>
+          </p:cNvPr>
+          <p:cNvSpPr/>
+          <p:nvPr/>
+        </p:nvSpPr>
+        <p:spPr>
+          <a:xfrm>
+            <a:off x="3619568" y="0"/>
+            <a:ext cx="233295" cy="181579"/>
+          </a:xfrm>
+          <a:prstGeom prst="rect">
+            <a:avLst/>
+          </a:prstGeom>
+          <a:solidFill>
+            <a:srgbClr val="ACD433">
+              <a:alpha val="50196"/>
+            </a:srgbClr>
+          </a:solidFill>
+        </p:spPr>
+        <p:style>
+          <a:lnRef idx="2">
+            <a:schemeClr val="accent1">
+              <a:shade val="15000"/>
+            </a:schemeClr>
+          </a:lnRef>
+          <a:fillRef idx="1">
+            <a:schemeClr val="accent1"/>
+          </a:fillRef>
+          <a:effectRef idx="0">
+            <a:schemeClr val="accent1"/>
+          </a:effectRef>
+          <a:fontRef idx="minor">
+            <a:schemeClr val="lt1"/>
+          </a:fontRef>
+        </p:style>
+        <p:txBody>
+          <a:bodyPr rtlCol="0" anchor="ctr"/>
+          <a:lstStyle/>
+          <a:p>
+            <a:pPr algn="ctr"/>
+            <a:endParaRPr lang="en-US"/>
+          </a:p>
+        </p:txBody>
+      </p:sp>
+      <p:sp>
+        <p:nvSpPr>
+          <p:cNvPr id="6" name="Rectangle 5">
+            <a:extLst>
+              <a:ext uri="{FF2B5EF4-FFF2-40B4-BE49-F238E27FC236}">
+                <a16:creationId xmlns:a16="http://schemas.microsoft.com/office/drawing/2014/main" id="{6AFC02E2-62C1-917F-D812-D2D9428C37DC}"/>
+              </a:ext>
+            </a:extLst>
+          </p:cNvPr>
+          <p:cNvSpPr/>
+          <p:nvPr/>
+        </p:nvSpPr>
+        <p:spPr>
+          <a:xfrm>
+            <a:off x="2913124" y="164641"/>
+            <a:ext cx="233295" cy="568784"/>
+          </a:xfrm>
+          <a:prstGeom prst="rect">
+            <a:avLst/>
+          </a:prstGeom>
+          <a:solidFill>
+            <a:srgbClr val="ACD433">
+              <a:alpha val="50196"/>
+            </a:srgbClr>
+          </a:solidFill>
+        </p:spPr>
+        <p:style>
+          <a:lnRef idx="2">
+            <a:schemeClr val="accent1">
+              <a:shade val="15000"/>
+            </a:schemeClr>
+          </a:lnRef>
+          <a:fillRef idx="1">
+            <a:schemeClr val="accent1"/>
+          </a:fillRef>
+          <a:effectRef idx="0">
+            <a:schemeClr val="accent1"/>
+          </a:effectRef>
+          <a:fontRef idx="minor">
+            <a:schemeClr val="lt1"/>
+          </a:fontRef>
+        </p:style>
+        <p:txBody>
+          <a:bodyPr rtlCol="0" anchor="ctr"/>
+          <a:lstStyle/>
+          <a:p>
+            <a:pPr algn="ctr"/>
+            <a:endParaRPr lang="en-US"/>
+          </a:p>
+        </p:txBody>
+      </p:sp>
+      <p:sp>
+        <p:nvSpPr>
+          <p:cNvPr id="7" name="Rectangle 6">
+            <a:extLst>
+              <a:ext uri="{FF2B5EF4-FFF2-40B4-BE49-F238E27FC236}">
+                <a16:creationId xmlns:a16="http://schemas.microsoft.com/office/drawing/2014/main" id="{320AB26B-93F6-7DB3-F663-A1197116DED5}"/>
+              </a:ext>
+            </a:extLst>
+          </p:cNvPr>
+          <p:cNvSpPr/>
+          <p:nvPr/>
+        </p:nvSpPr>
+        <p:spPr>
+          <a:xfrm>
+            <a:off x="2913124" y="996949"/>
+            <a:ext cx="115825" cy="298451"/>
+          </a:xfrm>
+          <a:prstGeom prst="rect">
+            <a:avLst/>
+          </a:prstGeom>
+          <a:solidFill>
+            <a:srgbClr val="ACD433">
+              <a:alpha val="50196"/>
+            </a:srgbClr>
+          </a:solidFill>
+        </p:spPr>
+        <p:style>
+          <a:lnRef idx="2">
+            <a:schemeClr val="accent1">
+              <a:shade val="15000"/>
+            </a:schemeClr>
+          </a:lnRef>
+          <a:fillRef idx="1">
+            <a:schemeClr val="accent1"/>
+          </a:fillRef>
+          <a:effectRef idx="0">
+            <a:schemeClr val="accent1"/>
+          </a:effectRef>
+          <a:fontRef idx="minor">
+            <a:schemeClr val="lt1"/>
+          </a:fontRef>
+        </p:style>
+        <p:txBody>
+          <a:bodyPr rtlCol="0" anchor="ctr"/>
+          <a:lstStyle/>
+          <a:p>
+            <a:pPr algn="ctr"/>
+            <a:endParaRPr lang="en-US"/>
+          </a:p>
+        </p:txBody>
+      </p:sp>
+      <p:sp>
+        <p:nvSpPr>
+          <p:cNvPr id="2" name="Rectangle 1">
+            <a:extLst>
+              <a:ext uri="{FF2B5EF4-FFF2-40B4-BE49-F238E27FC236}">
+                <a16:creationId xmlns:a16="http://schemas.microsoft.com/office/drawing/2014/main" id="{C787E3DA-65C0-F2BB-AB25-3CAAE145CCBD}"/>
+              </a:ext>
+            </a:extLst>
+          </p:cNvPr>
+          <p:cNvSpPr/>
+          <p:nvPr/>
+        </p:nvSpPr>
+        <p:spPr>
+          <a:xfrm rot="1551019">
+            <a:off x="3573376" y="623121"/>
+            <a:ext cx="1093916" cy="102021"/>
+          </a:xfrm>
+          <a:prstGeom prst="rect">
+            <a:avLst/>
+          </a:prstGeom>
+          <a:solidFill>
+            <a:srgbClr val="ACD433">
+              <a:alpha val="50196"/>
+            </a:srgbClr>
+          </a:solidFill>
+        </p:spPr>
+        <p:style>
+          <a:lnRef idx="2">
+            <a:schemeClr val="accent1">
+              <a:shade val="15000"/>
+            </a:schemeClr>
+          </a:lnRef>
+          <a:fillRef idx="1">
+            <a:schemeClr val="accent1"/>
+          </a:fillRef>
+          <a:effectRef idx="0">
+            <a:schemeClr val="accent1"/>
+          </a:effectRef>
+          <a:fontRef idx="minor">
+            <a:schemeClr val="lt1"/>
+          </a:fontRef>
+        </p:style>
+        <p:txBody>
+          <a:bodyPr rtlCol="0" anchor="ctr"/>
+          <a:lstStyle/>
+          <a:p>
+            <a:pPr algn="ctr"/>
+            <a:endParaRPr lang="en-US"/>
+          </a:p>
+        </p:txBody>
+      </p:sp>
+      <p:sp>
+        <p:nvSpPr>
+          <p:cNvPr id="8" name="Rectangle 7">
+            <a:extLst>
+              <a:ext uri="{FF2B5EF4-FFF2-40B4-BE49-F238E27FC236}">
+                <a16:creationId xmlns:a16="http://schemas.microsoft.com/office/drawing/2014/main" id="{640982A7-C68F-BB22-920F-18B2D110494B}"/>
+              </a:ext>
+            </a:extLst>
+          </p:cNvPr>
+          <p:cNvSpPr/>
+          <p:nvPr/>
+        </p:nvSpPr>
+        <p:spPr>
+          <a:xfrm>
+            <a:off x="5065260" y="733425"/>
+            <a:ext cx="318398" cy="225099"/>
+          </a:xfrm>
+          <a:prstGeom prst="rect">
+            <a:avLst/>
+          </a:prstGeom>
+          <a:solidFill>
+            <a:srgbClr val="ACD433">
+              <a:alpha val="50196"/>
+            </a:srgbClr>
+          </a:solidFill>
+        </p:spPr>
+        <p:style>
+          <a:lnRef idx="2">
+            <a:schemeClr val="accent1">
+              <a:shade val="15000"/>
+            </a:schemeClr>
+          </a:lnRef>
+          <a:fillRef idx="1">
+            <a:schemeClr val="accent1"/>
+          </a:fillRef>
+          <a:effectRef idx="0">
+            <a:schemeClr val="accent1"/>
+          </a:effectRef>
+          <a:fontRef idx="minor">
+            <a:schemeClr val="lt1"/>
+          </a:fontRef>
+        </p:style>
+        <p:txBody>
+          <a:bodyPr rtlCol="0" anchor="ctr"/>
+          <a:lstStyle/>
+          <a:p>
+            <a:pPr algn="ctr"/>
+            <a:endParaRPr lang="en-US"/>
+          </a:p>
+        </p:txBody>
+      </p:sp>
+      <p:sp>
+        <p:nvSpPr>
+          <p:cNvPr id="9" name="Rectangle 8">
+            <a:extLst>
+              <a:ext uri="{FF2B5EF4-FFF2-40B4-BE49-F238E27FC236}">
+                <a16:creationId xmlns:a16="http://schemas.microsoft.com/office/drawing/2014/main" id="{E262B8B4-2DAA-CECF-13AF-49E8ED3542F5}"/>
+              </a:ext>
+            </a:extLst>
+          </p:cNvPr>
+          <p:cNvSpPr/>
+          <p:nvPr/>
+        </p:nvSpPr>
+        <p:spPr>
+          <a:xfrm>
+            <a:off x="4886705" y="434974"/>
+            <a:ext cx="81536" cy="426086"/>
+          </a:xfrm>
+          <a:prstGeom prst="rect">
+            <a:avLst/>
+          </a:prstGeom>
+          <a:solidFill>
+            <a:srgbClr val="ACD433">
+              <a:alpha val="50196"/>
+            </a:srgbClr>
+          </a:solidFill>
+        </p:spPr>
+        <p:style>
+          <a:lnRef idx="2">
+            <a:schemeClr val="accent1">
+              <a:shade val="15000"/>
+            </a:schemeClr>
+          </a:lnRef>
+          <a:fillRef idx="1">
+            <a:schemeClr val="accent1"/>
+          </a:fillRef>
+          <a:effectRef idx="0">
+            <a:schemeClr val="accent1"/>
+          </a:effectRef>
+          <a:fontRef idx="minor">
+            <a:schemeClr val="lt1"/>
+          </a:fontRef>
+        </p:style>
+        <p:txBody>
+          <a:bodyPr rtlCol="0" anchor="ctr"/>
+          <a:lstStyle/>
+          <a:p>
+            <a:pPr algn="ctr"/>
+            <a:endParaRPr lang="en-US"/>
+          </a:p>
+        </p:txBody>
+      </p:sp>
+      <p:sp>
+        <p:nvSpPr>
+          <p:cNvPr id="10" name="Rectangle 9">
+            <a:extLst>
+              <a:ext uri="{FF2B5EF4-FFF2-40B4-BE49-F238E27FC236}">
+                <a16:creationId xmlns:a16="http://schemas.microsoft.com/office/drawing/2014/main" id="{541155D4-56BE-A310-B376-E37BF67AC820}"/>
+              </a:ext>
+            </a:extLst>
+          </p:cNvPr>
+          <p:cNvSpPr/>
+          <p:nvPr/>
+        </p:nvSpPr>
+        <p:spPr>
+          <a:xfrm>
+            <a:off x="5006340" y="478664"/>
+            <a:ext cx="622522" cy="100455"/>
+          </a:xfrm>
+          <a:prstGeom prst="rect">
+            <a:avLst/>
+          </a:prstGeom>
+          <a:solidFill>
+            <a:srgbClr val="ACD433">
+              <a:alpha val="50196"/>
+            </a:srgbClr>
+          </a:solidFill>
+        </p:spPr>
+        <p:style>
+          <a:lnRef idx="2">
+            <a:schemeClr val="accent1">
+              <a:shade val="15000"/>
+            </a:schemeClr>
+          </a:lnRef>
+          <a:fillRef idx="1">
+            <a:schemeClr val="accent1"/>
+          </a:fillRef>
+          <a:effectRef idx="0">
+            <a:schemeClr val="accent1"/>
+          </a:effectRef>
+          <a:fontRef idx="minor">
+            <a:schemeClr val="lt1"/>
+          </a:fontRef>
+        </p:style>
+        <p:txBody>
+          <a:bodyPr rtlCol="0" anchor="ctr"/>
+          <a:lstStyle/>
+          <a:p>
+            <a:pPr algn="ctr"/>
+            <a:endParaRPr lang="en-US"/>
+          </a:p>
+        </p:txBody>
+      </p:sp>
+      <p:sp>
+        <p:nvSpPr>
+          <p:cNvPr id="11" name="Rectangle 10">
+            <a:extLst>
+              <a:ext uri="{FF2B5EF4-FFF2-40B4-BE49-F238E27FC236}">
+                <a16:creationId xmlns:a16="http://schemas.microsoft.com/office/drawing/2014/main" id="{26DD1474-0113-B78B-4D59-44214369F898}"/>
+              </a:ext>
+            </a:extLst>
+          </p:cNvPr>
+          <p:cNvSpPr/>
+          <p:nvPr/>
+        </p:nvSpPr>
+        <p:spPr>
+          <a:xfrm>
+            <a:off x="5006340" y="587374"/>
+            <a:ext cx="114301" cy="273686"/>
+          </a:xfrm>
+          <a:prstGeom prst="rect">
+            <a:avLst/>
+          </a:prstGeom>
+          <a:solidFill>
+            <a:srgbClr val="ACD433">
+              <a:alpha val="50196"/>
+            </a:srgbClr>
+          </a:solidFill>
+        </p:spPr>
+        <p:style>
+          <a:lnRef idx="2">
+            <a:schemeClr val="accent1">
+              <a:shade val="15000"/>
+            </a:schemeClr>
+          </a:lnRef>
+          <a:fillRef idx="1">
+            <a:schemeClr val="accent1"/>
+          </a:fillRef>
+          <a:effectRef idx="0">
+            <a:schemeClr val="accent1"/>
+          </a:effectRef>
+          <a:fontRef idx="minor">
+            <a:schemeClr val="lt1"/>
+          </a:fontRef>
+        </p:style>
+        <p:txBody>
+          <a:bodyPr rtlCol="0" anchor="ctr"/>
+          <a:lstStyle/>
+          <a:p>
+            <a:pPr algn="ctr"/>
+            <a:endParaRPr lang="en-US"/>
+          </a:p>
+        </p:txBody>
+      </p:sp>
+      <p:sp>
+        <p:nvSpPr>
+          <p:cNvPr id="12" name="Rectangle 11">
+            <a:extLst>
+              <a:ext uri="{FF2B5EF4-FFF2-40B4-BE49-F238E27FC236}">
+                <a16:creationId xmlns:a16="http://schemas.microsoft.com/office/drawing/2014/main" id="{3E4DFFB0-2766-0438-0A1A-FA0FC9A978D0}"/>
+              </a:ext>
+            </a:extLst>
+          </p:cNvPr>
+          <p:cNvSpPr/>
+          <p:nvPr/>
+        </p:nvSpPr>
+        <p:spPr>
+          <a:xfrm>
+            <a:off x="3382706" y="434974"/>
+            <a:ext cx="76700" cy="1133476"/>
+          </a:xfrm>
+          <a:prstGeom prst="rect">
+            <a:avLst/>
+          </a:prstGeom>
+          <a:solidFill>
+            <a:srgbClr val="ACD433">
+              <a:alpha val="50196"/>
+            </a:srgbClr>
+          </a:solidFill>
+        </p:spPr>
+        <p:style>
+          <a:lnRef idx="2">
+            <a:schemeClr val="accent1">
+              <a:shade val="15000"/>
+            </a:schemeClr>
+          </a:lnRef>
+          <a:fillRef idx="1">
+            <a:schemeClr val="accent1"/>
+          </a:fillRef>
+          <a:effectRef idx="0">
+            <a:schemeClr val="accent1"/>
+          </a:effectRef>
+          <a:fontRef idx="minor">
+            <a:schemeClr val="lt1"/>
+          </a:fontRef>
+        </p:style>
+        <p:txBody>
+          <a:bodyPr rtlCol="0" anchor="ctr"/>
+          <a:lstStyle/>
+          <a:p>
+            <a:pPr algn="ctr"/>
+            <a:endParaRPr lang="en-US"/>
+          </a:p>
+        </p:txBody>
+      </p:sp>
+      <p:sp>
+        <p:nvSpPr>
+          <p:cNvPr id="13" name="Rectangle 12">
+            <a:extLst>
+              <a:ext uri="{FF2B5EF4-FFF2-40B4-BE49-F238E27FC236}">
+                <a16:creationId xmlns:a16="http://schemas.microsoft.com/office/drawing/2014/main" id="{31793961-859E-0BDB-42EA-FD9288DCD0FE}"/>
+              </a:ext>
+            </a:extLst>
+          </p:cNvPr>
+          <p:cNvSpPr/>
+          <p:nvPr/>
+        </p:nvSpPr>
+        <p:spPr>
+          <a:xfrm>
+            <a:off x="3565097" y="974398"/>
+            <a:ext cx="76700" cy="594051"/>
+          </a:xfrm>
+          <a:prstGeom prst="rect">
+            <a:avLst/>
+          </a:prstGeom>
+          <a:solidFill>
+            <a:srgbClr val="ACD433">
+              <a:alpha val="50196"/>
+            </a:srgbClr>
+          </a:solidFill>
+        </p:spPr>
+        <p:style>
+          <a:lnRef idx="2">
+            <a:schemeClr val="accent1">
+              <a:shade val="15000"/>
+            </a:schemeClr>
+          </a:lnRef>
+          <a:fillRef idx="1">
+            <a:schemeClr val="accent1"/>
+          </a:fillRef>
+          <a:effectRef idx="0">
+            <a:schemeClr val="accent1"/>
+          </a:effectRef>
+          <a:fontRef idx="minor">
+            <a:schemeClr val="lt1"/>
+          </a:fontRef>
+        </p:style>
+        <p:txBody>
+          <a:bodyPr rtlCol="0" anchor="ctr"/>
+          <a:lstStyle/>
+          <a:p>
+            <a:pPr algn="ctr"/>
+            <a:endParaRPr lang="en-US"/>
+          </a:p>
+        </p:txBody>
+      </p:sp>
+      <p:sp>
+        <p:nvSpPr>
+          <p:cNvPr id="14" name="Rectangle 13">
+            <a:extLst>
+              <a:ext uri="{FF2B5EF4-FFF2-40B4-BE49-F238E27FC236}">
+                <a16:creationId xmlns:a16="http://schemas.microsoft.com/office/drawing/2014/main" id="{E3DB0267-652B-B889-2C63-ED5160596B9B}"/>
+              </a:ext>
+            </a:extLst>
+          </p:cNvPr>
+          <p:cNvSpPr/>
+          <p:nvPr/>
+        </p:nvSpPr>
+        <p:spPr>
+          <a:xfrm>
+            <a:off x="3641797" y="958524"/>
+            <a:ext cx="993006" cy="102111"/>
+          </a:xfrm>
+          <a:prstGeom prst="rect">
+            <a:avLst/>
+          </a:prstGeom>
+          <a:solidFill>
+            <a:srgbClr val="ACD433">
+              <a:alpha val="50196"/>
+            </a:srgbClr>
+          </a:solidFill>
+        </p:spPr>
+        <p:style>
+          <a:lnRef idx="2">
+            <a:schemeClr val="accent1">
+              <a:shade val="15000"/>
+            </a:schemeClr>
+          </a:lnRef>
+          <a:fillRef idx="1">
+            <a:schemeClr val="accent1"/>
+          </a:fillRef>
+          <a:effectRef idx="0">
+            <a:schemeClr val="accent1"/>
+          </a:effectRef>
+          <a:fontRef idx="minor">
+            <a:schemeClr val="lt1"/>
+          </a:fontRef>
+        </p:style>
+        <p:txBody>
+          <a:bodyPr rtlCol="0" anchor="ctr"/>
+          <a:lstStyle/>
+          <a:p>
+            <a:pPr algn="ctr"/>
+            <a:endParaRPr lang="en-US"/>
+          </a:p>
+        </p:txBody>
+      </p:sp>
+      <p:sp>
+        <p:nvSpPr>
+          <p:cNvPr id="15" name="Rectangle 14">
+            <a:extLst>
+              <a:ext uri="{FF2B5EF4-FFF2-40B4-BE49-F238E27FC236}">
+                <a16:creationId xmlns:a16="http://schemas.microsoft.com/office/drawing/2014/main" id="{5C5F31A6-B809-F7A3-3679-E617C3CA5CF4}"/>
+              </a:ext>
+            </a:extLst>
+          </p:cNvPr>
+          <p:cNvSpPr/>
+          <p:nvPr/>
+        </p:nvSpPr>
+        <p:spPr>
+          <a:xfrm>
+            <a:off x="3788357" y="1447841"/>
+            <a:ext cx="233295" cy="181579"/>
+          </a:xfrm>
+          <a:prstGeom prst="rect">
+            <a:avLst/>
+          </a:prstGeom>
+          <a:solidFill>
+            <a:srgbClr val="ACD433">
+              <a:alpha val="50196"/>
+            </a:srgbClr>
+          </a:solidFill>
+        </p:spPr>
+        <p:style>
+          <a:lnRef idx="2">
+            <a:schemeClr val="accent1">
+              <a:shade val="15000"/>
+            </a:schemeClr>
+          </a:lnRef>
+          <a:fillRef idx="1">
+            <a:schemeClr val="accent1"/>
+          </a:fillRef>
+          <a:effectRef idx="0">
+            <a:schemeClr val="accent1"/>
+          </a:effectRef>
+          <a:fontRef idx="minor">
+            <a:schemeClr val="lt1"/>
+          </a:fontRef>
+        </p:style>
+        <p:txBody>
+          <a:bodyPr rtlCol="0" anchor="ctr"/>
+          <a:lstStyle/>
+          <a:p>
+            <a:pPr algn="ctr"/>
+            <a:endParaRPr lang="en-US"/>
+          </a:p>
+        </p:txBody>
+      </p:sp>
+      <p:sp>
+        <p:nvSpPr>
+          <p:cNvPr id="16" name="Rectangle 15">
+            <a:extLst>
+              <a:ext uri="{FF2B5EF4-FFF2-40B4-BE49-F238E27FC236}">
+                <a16:creationId xmlns:a16="http://schemas.microsoft.com/office/drawing/2014/main" id="{1FE3B3F7-220B-D855-5BC5-85CD0FC8BA83}"/>
+              </a:ext>
+            </a:extLst>
+          </p:cNvPr>
+          <p:cNvSpPr/>
+          <p:nvPr/>
+        </p:nvSpPr>
+        <p:spPr>
+          <a:xfrm rot="4874518">
+            <a:off x="4478330" y="985650"/>
+            <a:ext cx="81536" cy="426086"/>
+          </a:xfrm>
+          <a:prstGeom prst="rect">
+            <a:avLst/>
+          </a:prstGeom>
+          <a:solidFill>
+            <a:srgbClr val="ACD433">
+              <a:alpha val="50196"/>
+            </a:srgbClr>
+          </a:solidFill>
+        </p:spPr>
+        <p:style>
+          <a:lnRef idx="2">
+            <a:schemeClr val="accent1">
+              <a:shade val="15000"/>
+            </a:schemeClr>
+          </a:lnRef>
+          <a:fillRef idx="1">
+            <a:schemeClr val="accent1"/>
+          </a:fillRef>
+          <a:effectRef idx="0">
+            <a:schemeClr val="accent1"/>
+          </a:effectRef>
+          <a:fontRef idx="minor">
+            <a:schemeClr val="lt1"/>
+          </a:fontRef>
+        </p:style>
+        <p:txBody>
+          <a:bodyPr rtlCol="0" anchor="ctr"/>
+          <a:lstStyle/>
+          <a:p>
+            <a:pPr algn="ctr"/>
+            <a:endParaRPr lang="en-US"/>
+          </a:p>
+        </p:txBody>
+      </p:sp>
+      <p:sp>
+        <p:nvSpPr>
+          <p:cNvPr id="17" name="Rectangle 16">
+            <a:extLst>
+              <a:ext uri="{FF2B5EF4-FFF2-40B4-BE49-F238E27FC236}">
+                <a16:creationId xmlns:a16="http://schemas.microsoft.com/office/drawing/2014/main" id="{418337D6-7DFC-0BCC-A337-CAE50D3149AD}"/>
+              </a:ext>
+            </a:extLst>
+          </p:cNvPr>
+          <p:cNvSpPr/>
+          <p:nvPr/>
+        </p:nvSpPr>
+        <p:spPr>
+          <a:xfrm>
+            <a:off x="4904356" y="1176175"/>
+            <a:ext cx="81536" cy="426086"/>
+          </a:xfrm>
+          <a:prstGeom prst="rect">
+            <a:avLst/>
+          </a:prstGeom>
+          <a:solidFill>
+            <a:srgbClr val="ACD433">
+              <a:alpha val="50196"/>
+            </a:srgbClr>
+          </a:solidFill>
+        </p:spPr>
+        <p:style>
+          <a:lnRef idx="2">
+            <a:schemeClr val="accent1">
+              <a:shade val="15000"/>
+            </a:schemeClr>
+          </a:lnRef>
+          <a:fillRef idx="1">
+            <a:schemeClr val="accent1"/>
+          </a:fillRef>
+          <a:effectRef idx="0">
+            <a:schemeClr val="accent1"/>
+          </a:effectRef>
+          <a:fontRef idx="minor">
+            <a:schemeClr val="lt1"/>
+          </a:fontRef>
+        </p:style>
+        <p:txBody>
+          <a:bodyPr rtlCol="0" anchor="ctr"/>
+          <a:lstStyle/>
+          <a:p>
+            <a:pPr algn="ctr"/>
+            <a:endParaRPr lang="en-US"/>
+          </a:p>
+        </p:txBody>
+      </p:sp>
+      <p:sp>
+        <p:nvSpPr>
+          <p:cNvPr id="18" name="Rectangle 17">
+            <a:extLst>
+              <a:ext uri="{FF2B5EF4-FFF2-40B4-BE49-F238E27FC236}">
+                <a16:creationId xmlns:a16="http://schemas.microsoft.com/office/drawing/2014/main" id="{72DC811A-C69D-F6AE-0130-CA62ACABD3E5}"/>
+              </a:ext>
+            </a:extLst>
+          </p:cNvPr>
+          <p:cNvSpPr/>
+          <p:nvPr/>
+        </p:nvSpPr>
+        <p:spPr>
+          <a:xfrm>
+            <a:off x="5200132" y="946721"/>
+            <a:ext cx="428730" cy="100455"/>
+          </a:xfrm>
+          <a:prstGeom prst="rect">
+            <a:avLst/>
+          </a:prstGeom>
+          <a:solidFill>
+            <a:srgbClr val="ACD433">
+              <a:alpha val="50196"/>
+            </a:srgbClr>
+          </a:solidFill>
+        </p:spPr>
+        <p:style>
+          <a:lnRef idx="2">
+            <a:schemeClr val="accent1">
+              <a:shade val="15000"/>
+            </a:schemeClr>
+          </a:lnRef>
+          <a:fillRef idx="1">
+            <a:schemeClr val="accent1"/>
+          </a:fillRef>
+          <a:effectRef idx="0">
+            <a:schemeClr val="accent1"/>
+          </a:effectRef>
+          <a:fontRef idx="minor">
+            <a:schemeClr val="lt1"/>
+          </a:fontRef>
+        </p:style>
+        <p:txBody>
+          <a:bodyPr rtlCol="0" anchor="ctr"/>
+          <a:lstStyle/>
+          <a:p>
+            <a:pPr algn="ctr"/>
+            <a:endParaRPr lang="en-US"/>
+          </a:p>
+        </p:txBody>
+      </p:sp>
+      <p:sp>
+        <p:nvSpPr>
+          <p:cNvPr id="19" name="Rectangle 18">
+            <a:extLst>
+              <a:ext uri="{FF2B5EF4-FFF2-40B4-BE49-F238E27FC236}">
+                <a16:creationId xmlns:a16="http://schemas.microsoft.com/office/drawing/2014/main" id="{B0F8E959-F313-AC64-0493-F70D47EC36F2}"/>
+              </a:ext>
+            </a:extLst>
+          </p:cNvPr>
+          <p:cNvSpPr/>
+          <p:nvPr/>
+        </p:nvSpPr>
+        <p:spPr>
+          <a:xfrm>
+            <a:off x="6191487" y="946721"/>
+            <a:ext cx="428730" cy="100455"/>
+          </a:xfrm>
+          <a:prstGeom prst="rect">
+            <a:avLst/>
+          </a:prstGeom>
+          <a:solidFill>
+            <a:srgbClr val="ACD433">
+              <a:alpha val="50196"/>
+            </a:srgbClr>
+          </a:solidFill>
+        </p:spPr>
+        <p:style>
+          <a:lnRef idx="2">
+            <a:schemeClr val="accent1">
+              <a:shade val="15000"/>
+            </a:schemeClr>
+          </a:lnRef>
+          <a:fillRef idx="1">
+            <a:schemeClr val="accent1"/>
+          </a:fillRef>
+          <a:effectRef idx="0">
+            <a:schemeClr val="accent1"/>
+          </a:effectRef>
+          <a:fontRef idx="minor">
+            <a:schemeClr val="lt1"/>
+          </a:fontRef>
+        </p:style>
+        <p:txBody>
+          <a:bodyPr rtlCol="0" anchor="ctr"/>
+          <a:lstStyle/>
+          <a:p>
+            <a:pPr algn="ctr"/>
+            <a:endParaRPr lang="en-US"/>
+          </a:p>
+        </p:txBody>
+      </p:sp>
+    </p:spTree>
+    <p:extLst>
+      <p:ext uri="{BB962C8B-B14F-4D97-AF65-F5344CB8AC3E}">
+        <p14:creationId xmlns:p14="http://schemas.microsoft.com/office/powerpoint/2010/main" val="1344398148"/>
+      </p:ext>
+    </p:extLst>
+  </p:cSld>
+  <p:clrMapOvr>
+    <a:masterClrMapping/>
+  </p:clrMapOvr>
+</p:sld>
+</file>
+
+<file path=ppt/slides/slide27.xml><?xml version="1.0" encoding="utf-8"?>
+<p:sld xmlns:a="http://schemas.openxmlformats.org/drawingml/2006/main" xmlns:r="http://schemas.openxmlformats.org/officeDocument/2006/relationships" xmlns:p="http://schemas.openxmlformats.org/presentationml/2006/main">
+  <p:cSld>
+    <p:spTree>
+      <p:nvGrpSpPr>
+        <p:cNvPr id="1" name="">
+          <a:extLst>
+            <a:ext uri="{FF2B5EF4-FFF2-40B4-BE49-F238E27FC236}">
+              <a16:creationId xmlns:a16="http://schemas.microsoft.com/office/drawing/2014/main" id="{EC68D2B6-104F-9F03-8F0C-0441F7CF3D1C}"/>
+            </a:ext>
+          </a:extLst>
+        </p:cNvPr>
+        <p:cNvGrpSpPr/>
+        <p:nvPr/>
+      </p:nvGrpSpPr>
+      <p:grpSpPr>
+        <a:xfrm>
+          <a:off x="0" y="0"/>
+          <a:ext cx="0" cy="0"/>
+          <a:chOff x="0" y="0"/>
+          <a:chExt cx="0" cy="0"/>
+        </a:xfrm>
+      </p:grpSpPr>
+      <p:sp>
+        <p:nvSpPr>
+          <p:cNvPr id="2" name="Title 1">
+            <a:extLst>
+              <a:ext uri="{FF2B5EF4-FFF2-40B4-BE49-F238E27FC236}">
+                <a16:creationId xmlns:a16="http://schemas.microsoft.com/office/drawing/2014/main" id="{920CA520-91FC-43A1-A32E-D707F58996E1}"/>
+              </a:ext>
+            </a:extLst>
+          </p:cNvPr>
+          <p:cNvSpPr>
+            <a:spLocks noGrp="1"/>
+          </p:cNvSpPr>
+          <p:nvPr>
+            <p:ph type="title"/>
+          </p:nvPr>
+        </p:nvSpPr>
+        <p:spPr>
+          <a:xfrm>
+            <a:off x="1754188" y="452718"/>
+            <a:ext cx="8296646" cy="1400530"/>
+          </a:xfrm>
+        </p:spPr>
+        <p:txBody>
+          <a:bodyPr/>
+          <a:lstStyle/>
+          <a:p>
+            <a:r>
+              <a:rPr lang="en-US" b="1" dirty="0"/>
+              <a:t>Essential EA Meta-Model</a:t>
+            </a:r>
+            <a:br>
+              <a:rPr lang="en-US" b="1" dirty="0"/>
+            </a:br>
+            <a:r>
+              <a:rPr lang="en-US" b="1" dirty="0"/>
+              <a:t>- Business Layer - 13 </a:t>
+            </a:r>
+          </a:p>
+        </p:txBody>
+      </p:sp>
+      <p:sp>
+        <p:nvSpPr>
+          <p:cNvPr id="4" name="Title 1">
+            <a:extLst>
+              <a:ext uri="{FF2B5EF4-FFF2-40B4-BE49-F238E27FC236}">
+                <a16:creationId xmlns:a16="http://schemas.microsoft.com/office/drawing/2014/main" id="{7F6CF377-58EC-BEE3-7998-5AD10276EC3E}"/>
+              </a:ext>
+            </a:extLst>
+          </p:cNvPr>
+          <p:cNvSpPr txBox="1">
+            <a:spLocks/>
+          </p:cNvSpPr>
+          <p:nvPr/>
+        </p:nvSpPr>
+        <p:spPr>
+          <a:xfrm>
+            <a:off x="0" y="3143"/>
+            <a:ext cx="1754188" cy="1058013"/>
+          </a:xfrm>
+          <a:prstGeom prst="rect">
+            <a:avLst/>
+          </a:prstGeom>
+        </p:spPr>
+        <p:txBody>
+          <a:bodyPr vert="horz" lIns="91440" tIns="45720" rIns="91440" bIns="45720" rtlCol="0" anchor="ctr">
+            <a:noAutofit/>
+          </a:bodyPr>
+          <a:lstStyle>
+            <a:lvl1pPr algn="l" defTabSz="457200" rtl="0" eaLnBrk="1" latinLnBrk="0" hangingPunct="1">
+              <a:spcBef>
+                <a:spcPct val="0"/>
+              </a:spcBef>
+              <a:buNone/>
+              <a:defRPr sz="7200" b="0" i="0" kern="1200">
+                <a:solidFill>
+                  <a:schemeClr val="tx2"/>
+                </a:solidFill>
+                <a:latin typeface="+mj-lt"/>
+                <a:ea typeface="+mj-ea"/>
+                <a:cs typeface="+mj-cs"/>
+              </a:defRPr>
+            </a:lvl1pPr>
+            <a:lvl2pPr eaLnBrk="1" hangingPunct="1">
+              <a:defRPr>
+                <a:solidFill>
+                  <a:schemeClr val="tx2"/>
+                </a:solidFill>
+              </a:defRPr>
+            </a:lvl2pPr>
+            <a:lvl3pPr eaLnBrk="1" hangingPunct="1">
+              <a:defRPr>
+                <a:solidFill>
+                  <a:schemeClr val="tx2"/>
+                </a:solidFill>
+              </a:defRPr>
+            </a:lvl3pPr>
+            <a:lvl4pPr eaLnBrk="1" hangingPunct="1">
+              <a:defRPr>
+                <a:solidFill>
+                  <a:schemeClr val="tx2"/>
+                </a:solidFill>
+              </a:defRPr>
+            </a:lvl4pPr>
+            <a:lvl5pPr eaLnBrk="1" hangingPunct="1">
+              <a:defRPr>
+                <a:solidFill>
+                  <a:schemeClr val="tx2"/>
+                </a:solidFill>
+              </a:defRPr>
+            </a:lvl5pPr>
+            <a:lvl6pPr eaLnBrk="1" hangingPunct="1">
+              <a:defRPr>
+                <a:solidFill>
+                  <a:schemeClr val="tx2"/>
+                </a:solidFill>
+              </a:defRPr>
+            </a:lvl6pPr>
+            <a:lvl7pPr eaLnBrk="1" hangingPunct="1">
+              <a:defRPr>
+                <a:solidFill>
+                  <a:schemeClr val="tx2"/>
+                </a:solidFill>
+              </a:defRPr>
+            </a:lvl7pPr>
+            <a:lvl8pPr eaLnBrk="1" hangingPunct="1">
+              <a:defRPr>
+                <a:solidFill>
+                  <a:schemeClr val="tx2"/>
+                </a:solidFill>
+              </a:defRPr>
+            </a:lvl8pPr>
+            <a:lvl9pPr eaLnBrk="1" hangingPunct="1">
+              <a:defRPr>
+                <a:solidFill>
+                  <a:schemeClr val="tx2"/>
+                </a:solidFill>
+              </a:defRPr>
+            </a:lvl9pPr>
+          </a:lstStyle>
+          <a:p>
+            <a:pPr algn="ctr"/>
+            <a:r>
+              <a:rPr lang="en-US" b="1" dirty="0">
+                <a:solidFill>
+                  <a:schemeClr val="accent1">
+                    <a:lumMod val="75000"/>
+                  </a:schemeClr>
+                </a:solidFill>
+              </a:rPr>
+              <a:t>019</a:t>
+            </a:r>
+            <a:endParaRPr lang="ru-RU" b="1" dirty="0">
+              <a:solidFill>
+                <a:schemeClr val="accent1">
+                  <a:lumMod val="75000"/>
+                </a:schemeClr>
+              </a:solidFill>
+            </a:endParaRPr>
+          </a:p>
+        </p:txBody>
+      </p:sp>
+      <p:pic>
+        <p:nvPicPr>
+          <p:cNvPr id="3" name="Picture 2">
+            <a:extLst>
+              <a:ext uri="{FF2B5EF4-FFF2-40B4-BE49-F238E27FC236}">
+                <a16:creationId xmlns:a16="http://schemas.microsoft.com/office/drawing/2014/main" id="{B4A8BFF5-A13B-4165-15DE-B3444A9F90FF}"/>
+              </a:ext>
+            </a:extLst>
+          </p:cNvPr>
+          <p:cNvPicPr>
+            <a:picLocks noChangeAspect="1"/>
+          </p:cNvPicPr>
+          <p:nvPr/>
+        </p:nvPicPr>
+        <p:blipFill>
+          <a:blip r:embed="rId2"/>
+          <a:stretch>
+            <a:fillRect/>
+          </a:stretch>
+        </p:blipFill>
+        <p:spPr>
+          <a:xfrm>
+            <a:off x="236841" y="1853248"/>
+            <a:ext cx="8296646" cy="4669795"/>
+          </a:xfrm>
+          <a:prstGeom prst="rect">
+            <a:avLst/>
+          </a:prstGeom>
+          <a:ln>
+            <a:noFill/>
+          </a:ln>
+          <a:effectLst>
+            <a:outerShdw blurRad="292100" dist="139700" dir="2700000" algn="tl" rotWithShape="0">
+              <a:srgbClr val="333333">
+                <a:alpha val="65000"/>
+              </a:srgbClr>
+            </a:outerShdw>
+          </a:effectLst>
+        </p:spPr>
+      </p:pic>
+      <p:sp>
+        <p:nvSpPr>
+          <p:cNvPr id="6" name="Rectangle: Rounded Corners 5">
+            <a:extLst>
+              <a:ext uri="{FF2B5EF4-FFF2-40B4-BE49-F238E27FC236}">
+                <a16:creationId xmlns:a16="http://schemas.microsoft.com/office/drawing/2014/main" id="{16A1EEAE-9569-11C3-48A3-60567C376C44}"/>
+              </a:ext>
+            </a:extLst>
+          </p:cNvPr>
+          <p:cNvSpPr/>
+          <p:nvPr/>
+        </p:nvSpPr>
+        <p:spPr>
+          <a:xfrm>
+            <a:off x="596436" y="2188396"/>
+            <a:ext cx="2054832" cy="1400530"/>
+          </a:xfrm>
+          <a:prstGeom prst="roundRect">
+            <a:avLst>
+              <a:gd name="adj" fmla="val 6916"/>
+            </a:avLst>
+          </a:prstGeom>
+          <a:solidFill>
+            <a:srgbClr val="FFCC66">
+              <a:alpha val="20000"/>
+            </a:srgbClr>
+          </a:solidFill>
+          <a:ln>
+            <a:solidFill>
+              <a:srgbClr val="92D050"/>
+            </a:solidFill>
+          </a:ln>
+        </p:spPr>
+        <p:style>
+          <a:lnRef idx="2">
+            <a:schemeClr val="accent1">
+              <a:shade val="15000"/>
+            </a:schemeClr>
+          </a:lnRef>
+          <a:fillRef idx="1">
+            <a:schemeClr val="accent1"/>
+          </a:fillRef>
+          <a:effectRef idx="0">
+            <a:schemeClr val="accent1"/>
+          </a:effectRef>
+          <a:fontRef idx="minor">
+            <a:schemeClr val="lt1"/>
+          </a:fontRef>
+        </p:style>
+        <p:txBody>
+          <a:bodyPr rtlCol="0" anchor="ctr"/>
+          <a:lstStyle/>
+          <a:p>
+            <a:pPr algn="ctr"/>
+            <a:endParaRPr lang="en-US"/>
+          </a:p>
+        </p:txBody>
+      </p:sp>
+      <p:pic>
+        <p:nvPicPr>
+          <p:cNvPr id="11" name="Picture 10">
+            <a:extLst>
+              <a:ext uri="{FF2B5EF4-FFF2-40B4-BE49-F238E27FC236}">
+                <a16:creationId xmlns:a16="http://schemas.microsoft.com/office/drawing/2014/main" id="{79AAAD0D-28DA-C72F-8262-A99AC1239F74}"/>
+              </a:ext>
+            </a:extLst>
+          </p:cNvPr>
+          <p:cNvPicPr>
+            <a:picLocks noChangeAspect="1"/>
+          </p:cNvPicPr>
+          <p:nvPr/>
+        </p:nvPicPr>
+        <p:blipFill>
+          <a:blip r:embed="rId3"/>
+          <a:stretch>
+            <a:fillRect/>
+          </a:stretch>
+        </p:blipFill>
+        <p:spPr>
+          <a:xfrm>
+            <a:off x="157000" y="1094226"/>
+            <a:ext cx="362976" cy="362976"/>
+          </a:xfrm>
+          <a:prstGeom prst="rect">
+            <a:avLst/>
+          </a:prstGeom>
+          <a:ln>
+            <a:noFill/>
+          </a:ln>
+          <a:effectLst>
+            <a:outerShdw blurRad="292100" dist="139700" dir="2700000" algn="tl" rotWithShape="0">
+              <a:srgbClr val="333333">
+                <a:alpha val="65000"/>
+              </a:srgbClr>
+            </a:outerShdw>
+          </a:effectLst>
+        </p:spPr>
+      </p:pic>
+      <p:pic>
+        <p:nvPicPr>
+          <p:cNvPr id="12" name="Picture 11">
+            <a:extLst>
+              <a:ext uri="{FF2B5EF4-FFF2-40B4-BE49-F238E27FC236}">
+                <a16:creationId xmlns:a16="http://schemas.microsoft.com/office/drawing/2014/main" id="{276F3C9E-6F41-C876-1468-6620D04D054E}"/>
+              </a:ext>
+            </a:extLst>
+          </p:cNvPr>
+          <p:cNvPicPr>
+            <a:picLocks noChangeAspect="1"/>
+          </p:cNvPicPr>
+          <p:nvPr/>
+        </p:nvPicPr>
+        <p:blipFill>
+          <a:blip r:embed="rId4"/>
+          <a:stretch>
+            <a:fillRect/>
+          </a:stretch>
+        </p:blipFill>
+        <p:spPr>
+          <a:xfrm>
+            <a:off x="611241" y="1094226"/>
+            <a:ext cx="362976" cy="362976"/>
+          </a:xfrm>
+          <a:prstGeom prst="rect">
+            <a:avLst/>
+          </a:prstGeom>
+          <a:ln>
+            <a:noFill/>
+          </a:ln>
+          <a:effectLst>
+            <a:outerShdw blurRad="292100" dist="139700" dir="2700000" algn="tl" rotWithShape="0">
+              <a:srgbClr val="333333">
+                <a:alpha val="65000"/>
+              </a:srgbClr>
+            </a:outerShdw>
+          </a:effectLst>
+        </p:spPr>
+      </p:pic>
+      <p:pic>
+        <p:nvPicPr>
+          <p:cNvPr id="13" name="Picture 12">
+            <a:extLst>
+              <a:ext uri="{FF2B5EF4-FFF2-40B4-BE49-F238E27FC236}">
+                <a16:creationId xmlns:a16="http://schemas.microsoft.com/office/drawing/2014/main" id="{1D17A6BB-D55C-2FC0-398F-80BB99B3F346}"/>
+              </a:ext>
+            </a:extLst>
+          </p:cNvPr>
+          <p:cNvPicPr>
+            <a:picLocks noChangeAspect="1"/>
+          </p:cNvPicPr>
+          <p:nvPr/>
+        </p:nvPicPr>
+        <p:blipFill>
+          <a:blip r:embed="rId5"/>
+          <a:stretch>
+            <a:fillRect/>
+          </a:stretch>
+        </p:blipFill>
+        <p:spPr>
+          <a:xfrm>
+            <a:off x="1065482" y="1094226"/>
+            <a:ext cx="371111" cy="362976"/>
+          </a:xfrm>
+          <a:prstGeom prst="rect">
+            <a:avLst/>
+          </a:prstGeom>
+          <a:ln>
+            <a:noFill/>
+          </a:ln>
+          <a:effectLst>
+            <a:outerShdw blurRad="292100" dist="139700" dir="2700000" algn="tl" rotWithShape="0">
+              <a:srgbClr val="333333">
+                <a:alpha val="65000"/>
+              </a:srgbClr>
+            </a:outerShdw>
+          </a:effectLst>
+        </p:spPr>
+      </p:pic>
+      <p:pic>
+        <p:nvPicPr>
+          <p:cNvPr id="10" name="Picture 9">
+            <a:extLst>
+              <a:ext uri="{FF2B5EF4-FFF2-40B4-BE49-F238E27FC236}">
+                <a16:creationId xmlns:a16="http://schemas.microsoft.com/office/drawing/2014/main" id="{BF145DEE-DCDF-43A7-6F9B-D1AA5AA6EA20}"/>
+              </a:ext>
+            </a:extLst>
+          </p:cNvPr>
+          <p:cNvPicPr>
+            <a:picLocks noChangeAspect="1"/>
+          </p:cNvPicPr>
+          <p:nvPr/>
+        </p:nvPicPr>
+        <p:blipFill>
+          <a:blip r:embed="rId6"/>
+          <a:stretch>
+            <a:fillRect/>
+          </a:stretch>
+        </p:blipFill>
+        <p:spPr>
+          <a:xfrm>
+            <a:off x="5575712" y="2727711"/>
+            <a:ext cx="6299620" cy="2522384"/>
+          </a:xfrm>
+          <a:prstGeom prst="roundRect">
+            <a:avLst>
+              <a:gd name="adj" fmla="val 16667"/>
+            </a:avLst>
+          </a:prstGeom>
+          <a:ln>
+            <a:noFill/>
+          </a:ln>
+          <a:effectLst>
+            <a:outerShdw blurRad="152400" dist="12000" dir="900000" sy="98000" kx="110000" ky="200000" algn="tl" rotWithShape="0">
+              <a:srgbClr val="000000">
+                <a:alpha val="30000"/>
+              </a:srgbClr>
+            </a:outerShdw>
+          </a:effectLst>
+          <a:scene3d>
+            <a:camera prst="perspectiveRelaxed">
+              <a:rot lat="19800000" lon="1200000" rev="20820000"/>
+            </a:camera>
+            <a:lightRig rig="threePt" dir="t"/>
+          </a:scene3d>
+          <a:sp3d contourW="6350" prstMaterial="matte">
+            <a:bevelT w="101600" h="101600"/>
+            <a:contourClr>
+              <a:srgbClr val="969696"/>
+            </a:contourClr>
+          </a:sp3d>
+        </p:spPr>
+      </p:pic>
+    </p:spTree>
+    <p:extLst>
+      <p:ext uri="{BB962C8B-B14F-4D97-AF65-F5344CB8AC3E}">
+        <p14:creationId xmlns:p14="http://schemas.microsoft.com/office/powerpoint/2010/main" val="1600798096"/>
+      </p:ext>
+    </p:extLst>
+  </p:cSld>
+  <p:clrMapOvr>
+    <a:masterClrMapping/>
+  </p:clrMapOvr>
+</p:sld>
+</file>
+
+<file path=ppt/slides/slide28.xml><?xml version="1.0" encoding="utf-8"?>
+<p:sld xmlns:a="http://schemas.openxmlformats.org/drawingml/2006/main" xmlns:r="http://schemas.openxmlformats.org/officeDocument/2006/relationships" xmlns:p="http://schemas.openxmlformats.org/presentationml/2006/main">
+  <p:cSld>
+    <p:spTree>
+      <p:nvGrpSpPr>
+        <p:cNvPr id="1" name="">
+          <a:extLst>
+            <a:ext uri="{FF2B5EF4-FFF2-40B4-BE49-F238E27FC236}">
+              <a16:creationId xmlns:a16="http://schemas.microsoft.com/office/drawing/2014/main" id="{591844C9-9E44-873A-1C80-A9A351E4E8CA}"/>
+            </a:ext>
+          </a:extLst>
+        </p:cNvPr>
+        <p:cNvGrpSpPr/>
+        <p:nvPr/>
+      </p:nvGrpSpPr>
+      <p:grpSpPr>
+        <a:xfrm>
+          <a:off x="0" y="0"/>
+          <a:ext cx="0" cy="0"/>
+          <a:chOff x="0" y="0"/>
+          <a:chExt cx="0" cy="0"/>
+        </a:xfrm>
+      </p:grpSpPr>
+      <p:pic>
+        <p:nvPicPr>
+          <p:cNvPr id="3" name="Picture 2">
+            <a:extLst>
+              <a:ext uri="{FF2B5EF4-FFF2-40B4-BE49-F238E27FC236}">
+                <a16:creationId xmlns:a16="http://schemas.microsoft.com/office/drawing/2014/main" id="{6FB92253-0825-A588-A01C-CAE03D7C198A}"/>
+              </a:ext>
+            </a:extLst>
+          </p:cNvPr>
+          <p:cNvPicPr>
+            <a:picLocks noChangeAspect="1"/>
+          </p:cNvPicPr>
+          <p:nvPr/>
+        </p:nvPicPr>
+        <p:blipFill>
+          <a:blip r:embed="rId2"/>
+          <a:stretch>
+            <a:fillRect/>
+          </a:stretch>
+        </p:blipFill>
+        <p:spPr>
+          <a:xfrm>
+            <a:off x="2592309" y="0"/>
+            <a:ext cx="7007382" cy="6858000"/>
+          </a:xfrm>
+          <a:prstGeom prst="rect">
+            <a:avLst/>
+          </a:prstGeom>
+        </p:spPr>
+      </p:pic>
+      <p:sp>
+        <p:nvSpPr>
+          <p:cNvPr id="4" name="Rectangle 3">
+            <a:extLst>
+              <a:ext uri="{FF2B5EF4-FFF2-40B4-BE49-F238E27FC236}">
+                <a16:creationId xmlns:a16="http://schemas.microsoft.com/office/drawing/2014/main" id="{A09A0BC6-93AE-40C8-3D99-AC2473032516}"/>
+              </a:ext>
+            </a:extLst>
+          </p:cNvPr>
+          <p:cNvSpPr/>
+          <p:nvPr/>
+        </p:nvSpPr>
+        <p:spPr>
+          <a:xfrm>
+            <a:off x="3700530" y="223234"/>
+            <a:ext cx="957329" cy="64394"/>
+          </a:xfrm>
+          <a:prstGeom prst="rect">
+            <a:avLst/>
+          </a:prstGeom>
+          <a:solidFill>
+            <a:srgbClr val="ACD433">
+              <a:alpha val="50196"/>
+            </a:srgbClr>
+          </a:solidFill>
+        </p:spPr>
+        <p:style>
+          <a:lnRef idx="2">
+            <a:schemeClr val="accent1">
+              <a:shade val="15000"/>
+            </a:schemeClr>
+          </a:lnRef>
+          <a:fillRef idx="1">
+            <a:schemeClr val="accent1"/>
+          </a:fillRef>
+          <a:effectRef idx="0">
+            <a:schemeClr val="accent1"/>
+          </a:effectRef>
+          <a:fontRef idx="minor">
+            <a:schemeClr val="lt1"/>
+          </a:fontRef>
+        </p:style>
+        <p:txBody>
+          <a:bodyPr rtlCol="0" anchor="ctr"/>
+          <a:lstStyle/>
+          <a:p>
+            <a:pPr algn="ctr"/>
+            <a:endParaRPr lang="en-US"/>
+          </a:p>
+        </p:txBody>
+      </p:sp>
+      <p:sp>
+        <p:nvSpPr>
+          <p:cNvPr id="5" name="Rectangle 4">
+            <a:extLst>
+              <a:ext uri="{FF2B5EF4-FFF2-40B4-BE49-F238E27FC236}">
+                <a16:creationId xmlns:a16="http://schemas.microsoft.com/office/drawing/2014/main" id="{3E5E42CB-BF59-07EE-D4BB-142077E5A1E5}"/>
+              </a:ext>
+            </a:extLst>
+          </p:cNvPr>
+          <p:cNvSpPr/>
+          <p:nvPr/>
+        </p:nvSpPr>
+        <p:spPr>
+          <a:xfrm>
+            <a:off x="3619568" y="0"/>
+            <a:ext cx="233295" cy="181579"/>
+          </a:xfrm>
+          <a:prstGeom prst="rect">
+            <a:avLst/>
+          </a:prstGeom>
+          <a:solidFill>
+            <a:srgbClr val="ACD433">
+              <a:alpha val="50196"/>
+            </a:srgbClr>
+          </a:solidFill>
+        </p:spPr>
+        <p:style>
+          <a:lnRef idx="2">
+            <a:schemeClr val="accent1">
+              <a:shade val="15000"/>
+            </a:schemeClr>
+          </a:lnRef>
+          <a:fillRef idx="1">
+            <a:schemeClr val="accent1"/>
+          </a:fillRef>
+          <a:effectRef idx="0">
+            <a:schemeClr val="accent1"/>
+          </a:effectRef>
+          <a:fontRef idx="minor">
+            <a:schemeClr val="lt1"/>
+          </a:fontRef>
+        </p:style>
+        <p:txBody>
+          <a:bodyPr rtlCol="0" anchor="ctr"/>
+          <a:lstStyle/>
+          <a:p>
+            <a:pPr algn="ctr"/>
+            <a:endParaRPr lang="en-US"/>
+          </a:p>
+        </p:txBody>
+      </p:sp>
+      <p:sp>
+        <p:nvSpPr>
+          <p:cNvPr id="6" name="Rectangle 5">
+            <a:extLst>
+              <a:ext uri="{FF2B5EF4-FFF2-40B4-BE49-F238E27FC236}">
+                <a16:creationId xmlns:a16="http://schemas.microsoft.com/office/drawing/2014/main" id="{3B333C65-E3DE-E56F-A7F7-42FFFF38C18E}"/>
+              </a:ext>
+            </a:extLst>
+          </p:cNvPr>
+          <p:cNvSpPr/>
+          <p:nvPr/>
+        </p:nvSpPr>
+        <p:spPr>
+          <a:xfrm>
+            <a:off x="6757680" y="424700"/>
+            <a:ext cx="393133" cy="436792"/>
+          </a:xfrm>
+          <a:prstGeom prst="rect">
+            <a:avLst/>
+          </a:prstGeom>
+          <a:solidFill>
+            <a:srgbClr val="ACD433">
+              <a:alpha val="50196"/>
+            </a:srgbClr>
+          </a:solidFill>
+        </p:spPr>
+        <p:style>
+          <a:lnRef idx="2">
+            <a:schemeClr val="accent1">
+              <a:shade val="15000"/>
+            </a:schemeClr>
+          </a:lnRef>
+          <a:fillRef idx="1">
+            <a:schemeClr val="accent1"/>
+          </a:fillRef>
+          <a:effectRef idx="0">
+            <a:schemeClr val="accent1"/>
+          </a:effectRef>
+          <a:fontRef idx="minor">
+            <a:schemeClr val="lt1"/>
+          </a:fontRef>
+        </p:style>
+        <p:txBody>
+          <a:bodyPr rtlCol="0" anchor="ctr"/>
+          <a:lstStyle/>
+          <a:p>
+            <a:pPr algn="ctr"/>
+            <a:endParaRPr lang="en-US"/>
+          </a:p>
+        </p:txBody>
+      </p:sp>
+      <p:sp>
+        <p:nvSpPr>
+          <p:cNvPr id="7" name="Rectangle 6">
+            <a:extLst>
+              <a:ext uri="{FF2B5EF4-FFF2-40B4-BE49-F238E27FC236}">
+                <a16:creationId xmlns:a16="http://schemas.microsoft.com/office/drawing/2014/main" id="{40BDFFB7-C174-0525-1CA5-CCB6BAE3981C}"/>
+              </a:ext>
+            </a:extLst>
+          </p:cNvPr>
+          <p:cNvSpPr/>
+          <p:nvPr/>
+        </p:nvSpPr>
+        <p:spPr>
+          <a:xfrm>
+            <a:off x="2913124" y="996949"/>
+            <a:ext cx="115825" cy="298451"/>
+          </a:xfrm>
+          <a:prstGeom prst="rect">
+            <a:avLst/>
+          </a:prstGeom>
+          <a:solidFill>
+            <a:srgbClr val="ACD433">
+              <a:alpha val="50196"/>
+            </a:srgbClr>
+          </a:solidFill>
+        </p:spPr>
+        <p:style>
+          <a:lnRef idx="2">
+            <a:schemeClr val="accent1">
+              <a:shade val="15000"/>
+            </a:schemeClr>
+          </a:lnRef>
+          <a:fillRef idx="1">
+            <a:schemeClr val="accent1"/>
+          </a:fillRef>
+          <a:effectRef idx="0">
+            <a:schemeClr val="accent1"/>
+          </a:effectRef>
+          <a:fontRef idx="minor">
+            <a:schemeClr val="lt1"/>
+          </a:fontRef>
+        </p:style>
+        <p:txBody>
+          <a:bodyPr rtlCol="0" anchor="ctr"/>
+          <a:lstStyle/>
+          <a:p>
+            <a:pPr algn="ctr"/>
+            <a:endParaRPr lang="en-US"/>
+          </a:p>
+        </p:txBody>
+      </p:sp>
+      <p:sp>
+        <p:nvSpPr>
+          <p:cNvPr id="2" name="Rectangle 1">
+            <a:extLst>
+              <a:ext uri="{FF2B5EF4-FFF2-40B4-BE49-F238E27FC236}">
+                <a16:creationId xmlns:a16="http://schemas.microsoft.com/office/drawing/2014/main" id="{66D47912-69DF-310E-9B7E-656DCAA699F4}"/>
+              </a:ext>
+            </a:extLst>
+          </p:cNvPr>
+          <p:cNvSpPr/>
+          <p:nvPr/>
+        </p:nvSpPr>
+        <p:spPr>
+          <a:xfrm rot="1551019">
+            <a:off x="3573376" y="623121"/>
+            <a:ext cx="1093916" cy="102021"/>
+          </a:xfrm>
+          <a:prstGeom prst="rect">
+            <a:avLst/>
+          </a:prstGeom>
+          <a:solidFill>
+            <a:srgbClr val="ACD433">
+              <a:alpha val="50196"/>
+            </a:srgbClr>
+          </a:solidFill>
+        </p:spPr>
+        <p:style>
+          <a:lnRef idx="2">
+            <a:schemeClr val="accent1">
+              <a:shade val="15000"/>
+            </a:schemeClr>
+          </a:lnRef>
+          <a:fillRef idx="1">
+            <a:schemeClr val="accent1"/>
+          </a:fillRef>
+          <a:effectRef idx="0">
+            <a:schemeClr val="accent1"/>
+          </a:effectRef>
+          <a:fontRef idx="minor">
+            <a:schemeClr val="lt1"/>
+          </a:fontRef>
+        </p:style>
+        <p:txBody>
+          <a:bodyPr rtlCol="0" anchor="ctr"/>
+          <a:lstStyle/>
+          <a:p>
+            <a:pPr algn="ctr"/>
+            <a:endParaRPr lang="en-US"/>
+          </a:p>
+        </p:txBody>
+      </p:sp>
+      <p:sp>
+        <p:nvSpPr>
+          <p:cNvPr id="8" name="Rectangle 7">
+            <a:extLst>
+              <a:ext uri="{FF2B5EF4-FFF2-40B4-BE49-F238E27FC236}">
+                <a16:creationId xmlns:a16="http://schemas.microsoft.com/office/drawing/2014/main" id="{8EAB6C2E-DD56-959F-A906-51BFC9A75FA7}"/>
+              </a:ext>
+            </a:extLst>
+          </p:cNvPr>
+          <p:cNvSpPr/>
+          <p:nvPr/>
+        </p:nvSpPr>
+        <p:spPr>
+          <a:xfrm>
+            <a:off x="5065260" y="733425"/>
+            <a:ext cx="318398" cy="225099"/>
+          </a:xfrm>
+          <a:prstGeom prst="rect">
+            <a:avLst/>
+          </a:prstGeom>
+          <a:solidFill>
+            <a:srgbClr val="ACD433">
+              <a:alpha val="50196"/>
+            </a:srgbClr>
+          </a:solidFill>
+        </p:spPr>
+        <p:style>
+          <a:lnRef idx="2">
+            <a:schemeClr val="accent1">
+              <a:shade val="15000"/>
+            </a:schemeClr>
+          </a:lnRef>
+          <a:fillRef idx="1">
+            <a:schemeClr val="accent1"/>
+          </a:fillRef>
+          <a:effectRef idx="0">
+            <a:schemeClr val="accent1"/>
+          </a:effectRef>
+          <a:fontRef idx="minor">
+            <a:schemeClr val="lt1"/>
+          </a:fontRef>
+        </p:style>
+        <p:txBody>
+          <a:bodyPr rtlCol="0" anchor="ctr"/>
+          <a:lstStyle/>
+          <a:p>
+            <a:pPr algn="ctr"/>
+            <a:endParaRPr lang="en-US"/>
+          </a:p>
+        </p:txBody>
+      </p:sp>
+      <p:sp>
+        <p:nvSpPr>
+          <p:cNvPr id="9" name="Rectangle 8">
+            <a:extLst>
+              <a:ext uri="{FF2B5EF4-FFF2-40B4-BE49-F238E27FC236}">
+                <a16:creationId xmlns:a16="http://schemas.microsoft.com/office/drawing/2014/main" id="{20898669-217F-2624-9321-F2F4F3F0229D}"/>
+              </a:ext>
+            </a:extLst>
+          </p:cNvPr>
+          <p:cNvSpPr/>
+          <p:nvPr/>
+        </p:nvSpPr>
+        <p:spPr>
+          <a:xfrm>
+            <a:off x="4886705" y="434974"/>
+            <a:ext cx="81536" cy="426086"/>
+          </a:xfrm>
+          <a:prstGeom prst="rect">
+            <a:avLst/>
+          </a:prstGeom>
+          <a:solidFill>
+            <a:srgbClr val="ACD433">
+              <a:alpha val="50196"/>
+            </a:srgbClr>
+          </a:solidFill>
+        </p:spPr>
+        <p:style>
+          <a:lnRef idx="2">
+            <a:schemeClr val="accent1">
+              <a:shade val="15000"/>
+            </a:schemeClr>
+          </a:lnRef>
+          <a:fillRef idx="1">
+            <a:schemeClr val="accent1"/>
+          </a:fillRef>
+          <a:effectRef idx="0">
+            <a:schemeClr val="accent1"/>
+          </a:effectRef>
+          <a:fontRef idx="minor">
+            <a:schemeClr val="lt1"/>
+          </a:fontRef>
+        </p:style>
+        <p:txBody>
+          <a:bodyPr rtlCol="0" anchor="ctr"/>
+          <a:lstStyle/>
+          <a:p>
+            <a:pPr algn="ctr"/>
+            <a:endParaRPr lang="en-US"/>
+          </a:p>
+        </p:txBody>
+      </p:sp>
+      <p:sp>
+        <p:nvSpPr>
+          <p:cNvPr id="10" name="Rectangle 9">
+            <a:extLst>
+              <a:ext uri="{FF2B5EF4-FFF2-40B4-BE49-F238E27FC236}">
+                <a16:creationId xmlns:a16="http://schemas.microsoft.com/office/drawing/2014/main" id="{CF2273AB-1B3A-9D6B-F6BE-D935BC258C13}"/>
+              </a:ext>
+            </a:extLst>
+          </p:cNvPr>
+          <p:cNvSpPr/>
+          <p:nvPr/>
+        </p:nvSpPr>
+        <p:spPr>
+          <a:xfrm>
+            <a:off x="5006340" y="478664"/>
+            <a:ext cx="622522" cy="100455"/>
+          </a:xfrm>
+          <a:prstGeom prst="rect">
+            <a:avLst/>
+          </a:prstGeom>
+          <a:solidFill>
+            <a:srgbClr val="ACD433">
+              <a:alpha val="50196"/>
+            </a:srgbClr>
+          </a:solidFill>
+        </p:spPr>
+        <p:style>
+          <a:lnRef idx="2">
+            <a:schemeClr val="accent1">
+              <a:shade val="15000"/>
+            </a:schemeClr>
+          </a:lnRef>
+          <a:fillRef idx="1">
+            <a:schemeClr val="accent1"/>
+          </a:fillRef>
+          <a:effectRef idx="0">
+            <a:schemeClr val="accent1"/>
+          </a:effectRef>
+          <a:fontRef idx="minor">
+            <a:schemeClr val="lt1"/>
+          </a:fontRef>
+        </p:style>
+        <p:txBody>
+          <a:bodyPr rtlCol="0" anchor="ctr"/>
+          <a:lstStyle/>
+          <a:p>
+            <a:pPr algn="ctr"/>
+            <a:endParaRPr lang="en-US"/>
+          </a:p>
+        </p:txBody>
+      </p:sp>
+      <p:sp>
+        <p:nvSpPr>
+          <p:cNvPr id="11" name="Rectangle 10">
+            <a:extLst>
+              <a:ext uri="{FF2B5EF4-FFF2-40B4-BE49-F238E27FC236}">
+                <a16:creationId xmlns:a16="http://schemas.microsoft.com/office/drawing/2014/main" id="{AF70DE1C-A052-2B51-4ACB-983CEA5B3825}"/>
+              </a:ext>
+            </a:extLst>
+          </p:cNvPr>
+          <p:cNvSpPr/>
+          <p:nvPr/>
+        </p:nvSpPr>
+        <p:spPr>
+          <a:xfrm>
+            <a:off x="5006340" y="587374"/>
+            <a:ext cx="114301" cy="273686"/>
+          </a:xfrm>
+          <a:prstGeom prst="rect">
+            <a:avLst/>
+          </a:prstGeom>
+          <a:solidFill>
+            <a:srgbClr val="ACD433">
+              <a:alpha val="50196"/>
+            </a:srgbClr>
+          </a:solidFill>
+        </p:spPr>
+        <p:style>
+          <a:lnRef idx="2">
+            <a:schemeClr val="accent1">
+              <a:shade val="15000"/>
+            </a:schemeClr>
+          </a:lnRef>
+          <a:fillRef idx="1">
+            <a:schemeClr val="accent1"/>
+          </a:fillRef>
+          <a:effectRef idx="0">
+            <a:schemeClr val="accent1"/>
+          </a:effectRef>
+          <a:fontRef idx="minor">
+            <a:schemeClr val="lt1"/>
+          </a:fontRef>
+        </p:style>
+        <p:txBody>
+          <a:bodyPr rtlCol="0" anchor="ctr"/>
+          <a:lstStyle/>
+          <a:p>
+            <a:pPr algn="ctr"/>
+            <a:endParaRPr lang="en-US"/>
+          </a:p>
+        </p:txBody>
+      </p:sp>
+      <p:sp>
+        <p:nvSpPr>
+          <p:cNvPr id="12" name="Rectangle 11">
+            <a:extLst>
+              <a:ext uri="{FF2B5EF4-FFF2-40B4-BE49-F238E27FC236}">
+                <a16:creationId xmlns:a16="http://schemas.microsoft.com/office/drawing/2014/main" id="{2923ACCF-9906-AE89-302A-238013ADB653}"/>
+              </a:ext>
+            </a:extLst>
+          </p:cNvPr>
+          <p:cNvSpPr/>
+          <p:nvPr/>
+        </p:nvSpPr>
+        <p:spPr>
+          <a:xfrm>
+            <a:off x="3382706" y="434974"/>
+            <a:ext cx="76700" cy="1133476"/>
+          </a:xfrm>
+          <a:prstGeom prst="rect">
+            <a:avLst/>
+          </a:prstGeom>
+          <a:solidFill>
+            <a:srgbClr val="ACD433">
+              <a:alpha val="50196"/>
+            </a:srgbClr>
+          </a:solidFill>
+        </p:spPr>
+        <p:style>
+          <a:lnRef idx="2">
+            <a:schemeClr val="accent1">
+              <a:shade val="15000"/>
+            </a:schemeClr>
+          </a:lnRef>
+          <a:fillRef idx="1">
+            <a:schemeClr val="accent1"/>
+          </a:fillRef>
+          <a:effectRef idx="0">
+            <a:schemeClr val="accent1"/>
+          </a:effectRef>
+          <a:fontRef idx="minor">
+            <a:schemeClr val="lt1"/>
+          </a:fontRef>
+        </p:style>
+        <p:txBody>
+          <a:bodyPr rtlCol="0" anchor="ctr"/>
+          <a:lstStyle/>
+          <a:p>
+            <a:pPr algn="ctr"/>
+            <a:endParaRPr lang="en-US"/>
+          </a:p>
+        </p:txBody>
+      </p:sp>
+      <p:sp>
+        <p:nvSpPr>
+          <p:cNvPr id="13" name="Rectangle 12">
+            <a:extLst>
+              <a:ext uri="{FF2B5EF4-FFF2-40B4-BE49-F238E27FC236}">
+                <a16:creationId xmlns:a16="http://schemas.microsoft.com/office/drawing/2014/main" id="{C762E78A-2B07-C967-43F8-C3056D8FFA10}"/>
+              </a:ext>
+            </a:extLst>
+          </p:cNvPr>
+          <p:cNvSpPr/>
+          <p:nvPr/>
+        </p:nvSpPr>
+        <p:spPr>
+          <a:xfrm>
+            <a:off x="3565097" y="974398"/>
+            <a:ext cx="76700" cy="594051"/>
+          </a:xfrm>
+          <a:prstGeom prst="rect">
+            <a:avLst/>
+          </a:prstGeom>
+          <a:solidFill>
+            <a:srgbClr val="ACD433">
+              <a:alpha val="50196"/>
+            </a:srgbClr>
+          </a:solidFill>
+        </p:spPr>
+        <p:style>
+          <a:lnRef idx="2">
+            <a:schemeClr val="accent1">
+              <a:shade val="15000"/>
+            </a:schemeClr>
+          </a:lnRef>
+          <a:fillRef idx="1">
+            <a:schemeClr val="accent1"/>
+          </a:fillRef>
+          <a:effectRef idx="0">
+            <a:schemeClr val="accent1"/>
+          </a:effectRef>
+          <a:fontRef idx="minor">
+            <a:schemeClr val="lt1"/>
+          </a:fontRef>
+        </p:style>
+        <p:txBody>
+          <a:bodyPr rtlCol="0" anchor="ctr"/>
+          <a:lstStyle/>
+          <a:p>
+            <a:pPr algn="ctr"/>
+            <a:endParaRPr lang="en-US"/>
+          </a:p>
+        </p:txBody>
+      </p:sp>
+      <p:sp>
+        <p:nvSpPr>
+          <p:cNvPr id="14" name="Rectangle 13">
+            <a:extLst>
+              <a:ext uri="{FF2B5EF4-FFF2-40B4-BE49-F238E27FC236}">
+                <a16:creationId xmlns:a16="http://schemas.microsoft.com/office/drawing/2014/main" id="{1B591F4F-5D24-5FEA-EC62-064ED74CAB5E}"/>
+              </a:ext>
+            </a:extLst>
+          </p:cNvPr>
+          <p:cNvSpPr/>
+          <p:nvPr/>
+        </p:nvSpPr>
+        <p:spPr>
+          <a:xfrm>
+            <a:off x="3641797" y="958524"/>
+            <a:ext cx="993006" cy="102111"/>
+          </a:xfrm>
+          <a:prstGeom prst="rect">
+            <a:avLst/>
+          </a:prstGeom>
+          <a:solidFill>
+            <a:srgbClr val="ACD433">
+              <a:alpha val="50196"/>
+            </a:srgbClr>
+          </a:solidFill>
+        </p:spPr>
+        <p:style>
+          <a:lnRef idx="2">
+            <a:schemeClr val="accent1">
+              <a:shade val="15000"/>
+            </a:schemeClr>
+          </a:lnRef>
+          <a:fillRef idx="1">
+            <a:schemeClr val="accent1"/>
+          </a:fillRef>
+          <a:effectRef idx="0">
+            <a:schemeClr val="accent1"/>
+          </a:effectRef>
+          <a:fontRef idx="minor">
+            <a:schemeClr val="lt1"/>
+          </a:fontRef>
+        </p:style>
+        <p:txBody>
+          <a:bodyPr rtlCol="0" anchor="ctr"/>
+          <a:lstStyle/>
+          <a:p>
+            <a:pPr algn="ctr"/>
+            <a:endParaRPr lang="en-US"/>
+          </a:p>
+        </p:txBody>
+      </p:sp>
+      <p:sp>
+        <p:nvSpPr>
+          <p:cNvPr id="15" name="Rectangle 14">
+            <a:extLst>
+              <a:ext uri="{FF2B5EF4-FFF2-40B4-BE49-F238E27FC236}">
+                <a16:creationId xmlns:a16="http://schemas.microsoft.com/office/drawing/2014/main" id="{E1BA00D9-2338-64F5-C2E9-35D3B47D6587}"/>
+              </a:ext>
+            </a:extLst>
+          </p:cNvPr>
+          <p:cNvSpPr/>
+          <p:nvPr/>
+        </p:nvSpPr>
+        <p:spPr>
+          <a:xfrm>
+            <a:off x="3788357" y="1447841"/>
+            <a:ext cx="233295" cy="181579"/>
+          </a:xfrm>
+          <a:prstGeom prst="rect">
+            <a:avLst/>
+          </a:prstGeom>
+          <a:solidFill>
+            <a:srgbClr val="ACD433">
+              <a:alpha val="50196"/>
+            </a:srgbClr>
+          </a:solidFill>
+        </p:spPr>
+        <p:style>
+          <a:lnRef idx="2">
+            <a:schemeClr val="accent1">
+              <a:shade val="15000"/>
+            </a:schemeClr>
+          </a:lnRef>
+          <a:fillRef idx="1">
+            <a:schemeClr val="accent1"/>
+          </a:fillRef>
+          <a:effectRef idx="0">
+            <a:schemeClr val="accent1"/>
+          </a:effectRef>
+          <a:fontRef idx="minor">
+            <a:schemeClr val="lt1"/>
+          </a:fontRef>
+        </p:style>
+        <p:txBody>
+          <a:bodyPr rtlCol="0" anchor="ctr"/>
+          <a:lstStyle/>
+          <a:p>
+            <a:pPr algn="ctr"/>
+            <a:endParaRPr lang="en-US"/>
+          </a:p>
+        </p:txBody>
+      </p:sp>
+      <p:sp>
+        <p:nvSpPr>
+          <p:cNvPr id="16" name="Rectangle 15">
+            <a:extLst>
+              <a:ext uri="{FF2B5EF4-FFF2-40B4-BE49-F238E27FC236}">
+                <a16:creationId xmlns:a16="http://schemas.microsoft.com/office/drawing/2014/main" id="{A984B92E-80AE-B581-5C76-F3CDDBB2759B}"/>
+              </a:ext>
+            </a:extLst>
+          </p:cNvPr>
+          <p:cNvSpPr/>
+          <p:nvPr/>
+        </p:nvSpPr>
+        <p:spPr>
+          <a:xfrm rot="4874518">
+            <a:off x="4478330" y="985650"/>
+            <a:ext cx="81536" cy="426086"/>
+          </a:xfrm>
+          <a:prstGeom prst="rect">
+            <a:avLst/>
+          </a:prstGeom>
+          <a:solidFill>
+            <a:srgbClr val="ACD433">
+              <a:alpha val="50196"/>
+            </a:srgbClr>
+          </a:solidFill>
+        </p:spPr>
+        <p:style>
+          <a:lnRef idx="2">
+            <a:schemeClr val="accent1">
+              <a:shade val="15000"/>
+            </a:schemeClr>
+          </a:lnRef>
+          <a:fillRef idx="1">
+            <a:schemeClr val="accent1"/>
+          </a:fillRef>
+          <a:effectRef idx="0">
+            <a:schemeClr val="accent1"/>
+          </a:effectRef>
+          <a:fontRef idx="minor">
+            <a:schemeClr val="lt1"/>
+          </a:fontRef>
+        </p:style>
+        <p:txBody>
+          <a:bodyPr rtlCol="0" anchor="ctr"/>
+          <a:lstStyle/>
+          <a:p>
+            <a:pPr algn="ctr"/>
+            <a:endParaRPr lang="en-US"/>
+          </a:p>
+        </p:txBody>
+      </p:sp>
+      <p:sp>
+        <p:nvSpPr>
+          <p:cNvPr id="17" name="Rectangle 16">
+            <a:extLst>
+              <a:ext uri="{FF2B5EF4-FFF2-40B4-BE49-F238E27FC236}">
+                <a16:creationId xmlns:a16="http://schemas.microsoft.com/office/drawing/2014/main" id="{65C033FF-3EC0-7BD0-C1DB-9855DAC4B4F3}"/>
+              </a:ext>
+            </a:extLst>
+          </p:cNvPr>
+          <p:cNvSpPr/>
+          <p:nvPr/>
+        </p:nvSpPr>
+        <p:spPr>
+          <a:xfrm>
+            <a:off x="4904356" y="1176175"/>
+            <a:ext cx="81536" cy="426086"/>
+          </a:xfrm>
+          <a:prstGeom prst="rect">
+            <a:avLst/>
+          </a:prstGeom>
+          <a:solidFill>
+            <a:srgbClr val="ACD433">
+              <a:alpha val="50196"/>
+            </a:srgbClr>
+          </a:solidFill>
+        </p:spPr>
+        <p:style>
+          <a:lnRef idx="2">
+            <a:schemeClr val="accent1">
+              <a:shade val="15000"/>
+            </a:schemeClr>
+          </a:lnRef>
+          <a:fillRef idx="1">
+            <a:schemeClr val="accent1"/>
+          </a:fillRef>
+          <a:effectRef idx="0">
+            <a:schemeClr val="accent1"/>
+          </a:effectRef>
+          <a:fontRef idx="minor">
+            <a:schemeClr val="lt1"/>
+          </a:fontRef>
+        </p:style>
+        <p:txBody>
+          <a:bodyPr rtlCol="0" anchor="ctr"/>
+          <a:lstStyle/>
+          <a:p>
+            <a:pPr algn="ctr"/>
+            <a:endParaRPr lang="en-US"/>
+          </a:p>
+        </p:txBody>
+      </p:sp>
+      <p:sp>
+        <p:nvSpPr>
+          <p:cNvPr id="18" name="Rectangle 17">
+            <a:extLst>
+              <a:ext uri="{FF2B5EF4-FFF2-40B4-BE49-F238E27FC236}">
+                <a16:creationId xmlns:a16="http://schemas.microsoft.com/office/drawing/2014/main" id="{84F3FFD0-E207-D801-708A-372266F74E0E}"/>
+              </a:ext>
+            </a:extLst>
+          </p:cNvPr>
+          <p:cNvSpPr/>
+          <p:nvPr/>
+        </p:nvSpPr>
+        <p:spPr>
+          <a:xfrm>
+            <a:off x="5200132" y="946721"/>
+            <a:ext cx="428730" cy="100455"/>
+          </a:xfrm>
+          <a:prstGeom prst="rect">
+            <a:avLst/>
+          </a:prstGeom>
+          <a:solidFill>
+            <a:srgbClr val="ACD433">
+              <a:alpha val="50196"/>
+            </a:srgbClr>
+          </a:solidFill>
+        </p:spPr>
+        <p:style>
+          <a:lnRef idx="2">
+            <a:schemeClr val="accent1">
+              <a:shade val="15000"/>
+            </a:schemeClr>
+          </a:lnRef>
+          <a:fillRef idx="1">
+            <a:schemeClr val="accent1"/>
+          </a:fillRef>
+          <a:effectRef idx="0">
+            <a:schemeClr val="accent1"/>
+          </a:effectRef>
+          <a:fontRef idx="minor">
+            <a:schemeClr val="lt1"/>
+          </a:fontRef>
+        </p:style>
+        <p:txBody>
+          <a:bodyPr rtlCol="0" anchor="ctr"/>
+          <a:lstStyle/>
+          <a:p>
+            <a:pPr algn="ctr"/>
+            <a:endParaRPr lang="en-US"/>
+          </a:p>
+        </p:txBody>
+      </p:sp>
+      <p:sp>
+        <p:nvSpPr>
+          <p:cNvPr id="19" name="Rectangle 18">
+            <a:extLst>
+              <a:ext uri="{FF2B5EF4-FFF2-40B4-BE49-F238E27FC236}">
+                <a16:creationId xmlns:a16="http://schemas.microsoft.com/office/drawing/2014/main" id="{7441CC32-0076-B628-DE45-F2BCEAE5A61F}"/>
+              </a:ext>
+            </a:extLst>
+          </p:cNvPr>
+          <p:cNvSpPr/>
+          <p:nvPr/>
+        </p:nvSpPr>
+        <p:spPr>
+          <a:xfrm>
+            <a:off x="6191487" y="946721"/>
+            <a:ext cx="428730" cy="100455"/>
+          </a:xfrm>
+          <a:prstGeom prst="rect">
+            <a:avLst/>
+          </a:prstGeom>
+          <a:solidFill>
+            <a:srgbClr val="ACD433">
+              <a:alpha val="50196"/>
+            </a:srgbClr>
+          </a:solidFill>
+        </p:spPr>
+        <p:style>
+          <a:lnRef idx="2">
+            <a:schemeClr val="accent1">
+              <a:shade val="15000"/>
+            </a:schemeClr>
+          </a:lnRef>
+          <a:fillRef idx="1">
+            <a:schemeClr val="accent1"/>
+          </a:fillRef>
+          <a:effectRef idx="0">
+            <a:schemeClr val="accent1"/>
+          </a:effectRef>
+          <a:fontRef idx="minor">
+            <a:schemeClr val="lt1"/>
+          </a:fontRef>
+        </p:style>
+        <p:txBody>
+          <a:bodyPr rtlCol="0" anchor="ctr"/>
+          <a:lstStyle/>
+          <a:p>
+            <a:pPr algn="ctr"/>
+            <a:endParaRPr lang="en-US"/>
+          </a:p>
+        </p:txBody>
+      </p:sp>
+      <p:sp>
+        <p:nvSpPr>
+          <p:cNvPr id="20" name="Rectangle 19">
+            <a:extLst>
+              <a:ext uri="{FF2B5EF4-FFF2-40B4-BE49-F238E27FC236}">
+                <a16:creationId xmlns:a16="http://schemas.microsoft.com/office/drawing/2014/main" id="{3CF40E1A-3EC6-9FFC-C3D3-4097EF911904}"/>
+              </a:ext>
+            </a:extLst>
+          </p:cNvPr>
+          <p:cNvSpPr/>
+          <p:nvPr/>
+        </p:nvSpPr>
+        <p:spPr>
+          <a:xfrm>
+            <a:off x="7343745" y="424700"/>
+            <a:ext cx="393133" cy="436792"/>
+          </a:xfrm>
+          <a:prstGeom prst="rect">
+            <a:avLst/>
+          </a:prstGeom>
+          <a:solidFill>
+            <a:srgbClr val="ACD433">
+              <a:alpha val="50196"/>
+            </a:srgbClr>
+          </a:solidFill>
+        </p:spPr>
+        <p:style>
+          <a:lnRef idx="2">
+            <a:schemeClr val="accent1">
+              <a:shade val="15000"/>
+            </a:schemeClr>
+          </a:lnRef>
+          <a:fillRef idx="1">
+            <a:schemeClr val="accent1"/>
+          </a:fillRef>
+          <a:effectRef idx="0">
+            <a:schemeClr val="accent1"/>
+          </a:effectRef>
+          <a:fontRef idx="minor">
+            <a:schemeClr val="lt1"/>
+          </a:fontRef>
+        </p:style>
+        <p:txBody>
+          <a:bodyPr rtlCol="0" anchor="ctr"/>
+          <a:lstStyle/>
+          <a:p>
+            <a:pPr algn="ctr"/>
+            <a:endParaRPr lang="en-US"/>
+          </a:p>
+        </p:txBody>
+      </p:sp>
+    </p:spTree>
+    <p:extLst>
+      <p:ext uri="{BB962C8B-B14F-4D97-AF65-F5344CB8AC3E}">
+        <p14:creationId xmlns:p14="http://schemas.microsoft.com/office/powerpoint/2010/main" val="2832478932"/>
+      </p:ext>
+    </p:extLst>
+  </p:cSld>
+  <p:clrMapOvr>
+    <a:masterClrMapping/>
+  </p:clrMapOvr>
+</p:sld>
+</file>
+
+<file path=ppt/slides/slide29.xml><?xml version="1.0" encoding="utf-8"?>
 <p:sld xmlns:a="http://schemas.openxmlformats.org/drawingml/2006/main" xmlns:r="http://schemas.openxmlformats.org/officeDocument/2006/relationships" xmlns:p="http://schemas.openxmlformats.org/presentationml/2006/main">
   <p:cSld>
     <p:bg>
@@ -20081,21 +23823,21 @@
 </file>
 
 <file path=customXml/item2.xml><?xml version="1.0" encoding="utf-8"?>
+<p:properties xmlns:p="http://schemas.microsoft.com/office/2006/metadata/properties" xmlns:xsi="http://www.w3.org/2001/XMLSchema-instance" xmlns:pc="http://schemas.microsoft.com/office/infopath/2007/PartnerControls">
+  <documentManagement>
+    <Status xmlns="71af3243-3dd4-4a8d-8c0d-dd76da1f02a5">Not started</Status>
+    <MediaServiceKeyPoints xmlns="71af3243-3dd4-4a8d-8c0d-dd76da1f02a5" xsi:nil="true"/>
+  </documentManagement>
+</p:properties>
+</file>
+
+<file path=customXml/item3.xml><?xml version="1.0" encoding="utf-8"?>
 <?mso-contentType ?>
 <FormTemplates xmlns="http://schemas.microsoft.com/sharepoint/v3/contenttype/forms">
   <Display>DocumentLibraryForm</Display>
   <Edit>DocumentLibraryForm</Edit>
   <New>DocumentLibraryForm</New>
 </FormTemplates>
-</file>
-
-<file path=customXml/item3.xml><?xml version="1.0" encoding="utf-8"?>
-<p:properties xmlns:p="http://schemas.microsoft.com/office/2006/metadata/properties" xmlns:xsi="http://www.w3.org/2001/XMLSchema-instance" xmlns:pc="http://schemas.microsoft.com/office/infopath/2007/PartnerControls">
-  <documentManagement>
-    <Status xmlns="71af3243-3dd4-4a8d-8c0d-dd76da1f02a5">Not started</Status>
-    <MediaServiceKeyPoints xmlns="71af3243-3dd4-4a8d-8c0d-dd76da1f02a5" xsi:nil="true"/>
-  </documentManagement>
-</p:properties>
 </file>
 
 <file path=customXml/itemProps1.xml><?xml version="1.0" encoding="utf-8"?>
@@ -20118,14 +23860,6 @@
 </file>
 
 <file path=customXml/itemProps2.xml><?xml version="1.0" encoding="utf-8"?>
-<ds:datastoreItem xmlns:ds="http://schemas.openxmlformats.org/officeDocument/2006/customXml" ds:itemID="{0D16958A-754B-4396-9457-FD7A427A37DD}">
-  <ds:schemaRefs>
-    <ds:schemaRef ds:uri="http://schemas.microsoft.com/sharepoint/v3/contenttype/forms"/>
-  </ds:schemaRefs>
-</ds:datastoreItem>
-</file>
-
-<file path=customXml/itemProps3.xml><?xml version="1.0" encoding="utf-8"?>
 <ds:datastoreItem xmlns:ds="http://schemas.openxmlformats.org/officeDocument/2006/customXml" ds:itemID="{048C88F1-1664-415F-AFCE-F6CF45809817}">
   <ds:schemaRefs>
     <ds:schemaRef ds:uri="http://schemas.microsoft.com/office/2006/metadata/properties"/>
@@ -20135,6 +23869,14 @@
 </ds:datastoreItem>
 </file>
 
+<file path=customXml/itemProps3.xml><?xml version="1.0" encoding="utf-8"?>
+<ds:datastoreItem xmlns:ds="http://schemas.openxmlformats.org/officeDocument/2006/customXml" ds:itemID="{0D16958A-754B-4396-9457-FD7A427A37DD}">
+  <ds:schemaRefs>
+    <ds:schemaRef ds:uri="http://schemas.microsoft.com/sharepoint/v3/contenttype/forms"/>
+  </ds:schemaRefs>
+</ds:datastoreItem>
+</file>
+
 <file path=docMetadata/LabelInfo.xml><?xml version="1.0" encoding="utf-8"?>
 <clbl:labelList xmlns:clbl="http://schemas.microsoft.com/office/2020/mipLabelMetadata">
   <clbl:label id="{19540963-e559-4020-8a90-fe8a502c2801}" enabled="1" method="Standard" siteId="{f25493ae-1c98-41d7-8a33-0be75f5fe603}" contentBits="0" removed="0"/>

--- a/Master_EAS_Meta-Model.pptx
+++ b/Master_EAS_Meta-Model.pptx
@@ -5,10 +5,10 @@
     <p:sldMasterId id="2147483648" r:id="rId4"/>
   </p:sldMasterIdLst>
   <p:notesMasterIdLst>
-    <p:notesMasterId r:id="rId34"/>
+    <p:notesMasterId r:id="rId35"/>
   </p:notesMasterIdLst>
   <p:handoutMasterIdLst>
-    <p:handoutMasterId r:id="rId35"/>
+    <p:handoutMasterId r:id="rId36"/>
   </p:handoutMasterIdLst>
   <p:sldIdLst>
     <p:sldId id="256" r:id="rId5"/>
@@ -36,10 +36,11 @@
     <p:sldId id="291" r:id="rId27"/>
     <p:sldId id="292" r:id="rId28"/>
     <p:sldId id="293" r:id="rId29"/>
-    <p:sldId id="294" r:id="rId30"/>
+    <p:sldId id="296" r:id="rId30"/>
     <p:sldId id="295" r:id="rId31"/>
-    <p:sldId id="296" r:id="rId32"/>
-    <p:sldId id="267" r:id="rId33"/>
+    <p:sldId id="297" r:id="rId32"/>
+    <p:sldId id="298" r:id="rId33"/>
+    <p:sldId id="267" r:id="rId34"/>
   </p:sldIdLst>
   <p:sldSz cx="12192000" cy="6858000"/>
   <p:notesSz cx="6858000" cy="9144000"/>
@@ -254,7 +255,7 @@
           <a:p>
             <a:fld id="{F6E59275-AFE1-4999-B78A-D0D76B9F2B0B}" type="datetimeFigureOut">
               <a:rPr lang="en-US" smtClean="0"/>
-              <a:t>3/24/2026</a:t>
+              <a:t>3/25/2026</a:t>
             </a:fld>
             <a:endParaRPr lang="en-US" dirty="0"/>
           </a:p>
@@ -431,7 +432,7 @@
           <a:p>
             <a:fld id="{B3EADD7A-FE61-48EE-BE0E-8546E5401374}" type="datetimeFigureOut">
               <a:rPr lang="en-US" smtClean="0"/>
-              <a:t>3/24/2026</a:t>
+              <a:t>3/25/2026</a:t>
             </a:fld>
             <a:endParaRPr lang="en-US" dirty="0"/>
           </a:p>
@@ -847,7 +848,7 @@
           <a:p>
             <a:fld id="{EE000EEB-8338-48D7-8EE8-EE0082EF7602}" type="slidenum">
               <a:rPr lang="en-US" smtClean="0"/>
-              <a:t>29</a:t>
+              <a:t>30</a:t>
             </a:fld>
             <a:endParaRPr lang="en-US" dirty="0"/>
           </a:p>
@@ -1049,7 +1050,7 @@
           <a:p>
             <a:fld id="{4AAD347D-5ACD-4C99-B74B-A9C85AD731AF}" type="datetimeFigureOut">
               <a:rPr lang="en-US" dirty="0"/>
-              <a:t>3/24/2026</a:t>
+              <a:t>3/25/2026</a:t>
             </a:fld>
             <a:endParaRPr lang="en-US" dirty="0"/>
           </a:p>
@@ -1360,7 +1361,7 @@
           <a:p>
             <a:fld id="{4509A250-FF31-4206-8172-F9D3106AACB1}" type="datetimeFigureOut">
               <a:rPr lang="en-US" dirty="0"/>
-              <a:t>3/24/2026</a:t>
+              <a:t>3/25/2026</a:t>
             </a:fld>
             <a:endParaRPr lang="en-US" dirty="0"/>
           </a:p>
@@ -1579,7 +1580,7 @@
           <a:p>
             <a:fld id="{4509A250-FF31-4206-8172-F9D3106AACB1}" type="datetimeFigureOut">
               <a:rPr lang="en-US" dirty="0"/>
-              <a:t>3/24/2026</a:t>
+              <a:t>3/25/2026</a:t>
             </a:fld>
             <a:endParaRPr lang="en-US" dirty="0"/>
           </a:p>
@@ -1872,7 +1873,7 @@
           <a:p>
             <a:fld id="{4509A250-FF31-4206-8172-F9D3106AACB1}" type="datetimeFigureOut">
               <a:rPr lang="en-US" dirty="0"/>
-              <a:t>3/24/2026</a:t>
+              <a:t>3/25/2026</a:t>
             </a:fld>
             <a:endParaRPr lang="en-US" dirty="0"/>
           </a:p>
@@ -2229,7 +2230,7 @@
           <a:p>
             <a:fld id="{4509A250-FF31-4206-8172-F9D3106AACB1}" type="datetimeFigureOut">
               <a:rPr lang="en-US" dirty="0"/>
-              <a:t>3/24/2026</a:t>
+              <a:t>3/25/2026</a:t>
             </a:fld>
             <a:endParaRPr lang="en-US" dirty="0"/>
           </a:p>
@@ -2864,7 +2865,7 @@
           <a:p>
             <a:fld id="{4509A250-FF31-4206-8172-F9D3106AACB1}" type="datetimeFigureOut">
               <a:rPr lang="en-US" dirty="0"/>
-              <a:t>3/24/2026</a:t>
+              <a:t>3/25/2026</a:t>
             </a:fld>
             <a:endParaRPr lang="en-US" dirty="0"/>
           </a:p>
@@ -3736,7 +3737,7 @@
           <a:p>
             <a:fld id="{4509A250-FF31-4206-8172-F9D3106AACB1}" type="datetimeFigureOut">
               <a:rPr lang="en-US" dirty="0"/>
-              <a:t>3/24/2026</a:t>
+              <a:t>3/25/2026</a:t>
             </a:fld>
             <a:endParaRPr lang="en-US" dirty="0"/>
           </a:p>
@@ -3931,7 +3932,7 @@
           <a:p>
             <a:fld id="{4509A250-FF31-4206-8172-F9D3106AACB1}" type="datetimeFigureOut">
               <a:rPr lang="en-US" dirty="0"/>
-              <a:t>3/24/2026</a:t>
+              <a:t>3/25/2026</a:t>
             </a:fld>
             <a:endParaRPr lang="en-US" dirty="0"/>
           </a:p>
@@ -4136,7 +4137,7 @@
           <a:p>
             <a:fld id="{4509A250-FF31-4206-8172-F9D3106AACB1}" type="datetimeFigureOut">
               <a:rPr lang="en-US" dirty="0"/>
-              <a:t>3/24/2026</a:t>
+              <a:t>3/25/2026</a:t>
             </a:fld>
             <a:endParaRPr lang="en-US" dirty="0"/>
           </a:p>
@@ -4331,7 +4332,7 @@
           <a:p>
             <a:fld id="{4509A250-FF31-4206-8172-F9D3106AACB1}" type="datetimeFigureOut">
               <a:rPr lang="en-US" dirty="0"/>
-              <a:t>3/24/2026</a:t>
+              <a:t>3/25/2026</a:t>
             </a:fld>
             <a:endParaRPr lang="en-US" dirty="0"/>
           </a:p>
@@ -4605,7 +4606,7 @@
           <a:p>
             <a:fld id="{4509A250-FF31-4206-8172-F9D3106AACB1}" type="datetimeFigureOut">
               <a:rPr lang="en-US" dirty="0"/>
-              <a:t>3/24/2026</a:t>
+              <a:t>3/25/2026</a:t>
             </a:fld>
             <a:endParaRPr lang="en-US" dirty="0"/>
           </a:p>
@@ -4922,7 +4923,7 @@
           <a:p>
             <a:fld id="{4509A250-FF31-4206-8172-F9D3106AACB1}" type="datetimeFigureOut">
               <a:rPr lang="en-US" dirty="0"/>
-              <a:t>3/24/2026</a:t>
+              <a:t>3/25/2026</a:t>
             </a:fld>
             <a:endParaRPr lang="en-US" dirty="0"/>
           </a:p>
@@ -5355,7 +5356,7 @@
           <a:p>
             <a:fld id="{4509A250-FF31-4206-8172-F9D3106AACB1}" type="datetimeFigureOut">
               <a:rPr lang="en-US" dirty="0"/>
-              <a:t>3/24/2026</a:t>
+              <a:t>3/25/2026</a:t>
             </a:fld>
             <a:endParaRPr lang="en-US" dirty="0"/>
           </a:p>
@@ -5498,7 +5499,7 @@
           <a:p>
             <a:fld id="{4509A250-FF31-4206-8172-F9D3106AACB1}" type="datetimeFigureOut">
               <a:rPr lang="en-US" dirty="0"/>
-              <a:t>3/24/2026</a:t>
+              <a:t>3/25/2026</a:t>
             </a:fld>
             <a:endParaRPr lang="en-US" dirty="0"/>
           </a:p>
@@ -5618,7 +5619,7 @@
           <a:p>
             <a:fld id="{4509A250-FF31-4206-8172-F9D3106AACB1}" type="datetimeFigureOut">
               <a:rPr lang="en-US" dirty="0"/>
-              <a:t>3/24/2026</a:t>
+              <a:t>3/25/2026</a:t>
             </a:fld>
             <a:endParaRPr lang="en-US" dirty="0"/>
           </a:p>
@@ -5922,7 +5923,7 @@
           <a:p>
             <a:fld id="{4509A250-FF31-4206-8172-F9D3106AACB1}" type="datetimeFigureOut">
               <a:rPr lang="en-US" dirty="0"/>
-              <a:t>3/24/2026</a:t>
+              <a:t>3/25/2026</a:t>
             </a:fld>
             <a:endParaRPr lang="en-US" dirty="0"/>
           </a:p>
@@ -6222,7 +6223,7 @@
           <a:p>
             <a:fld id="{4509A250-FF31-4206-8172-F9D3106AACB1}" type="datetimeFigureOut">
               <a:rPr lang="en-US" dirty="0"/>
-              <a:t>3/24/2026</a:t>
+              <a:t>3/25/2026</a:t>
             </a:fld>
             <a:endParaRPr lang="en-US" dirty="0"/>
           </a:p>
@@ -6690,7 +6691,7 @@
           <a:p>
             <a:fld id="{4509A250-FF31-4206-8172-F9D3106AACB1}" type="datetimeFigureOut">
               <a:rPr lang="en-US" dirty="0"/>
-              <a:t>3/24/2026</a:t>
+              <a:t>3/25/2026</a:t>
             </a:fld>
             <a:endParaRPr lang="en-US" dirty="0"/>
           </a:p>
@@ -8087,7 +8088,7 @@
             </a:br>
             <a:r>
               <a:rPr lang="en-US" b="1" dirty="0"/>
-              <a:t>- Business Conceptual - 04 </a:t>
+              <a:t>- Business Layer - 04 </a:t>
             </a:r>
           </a:p>
         </p:txBody>
@@ -8622,7 +8623,7 @@
             </a:br>
             <a:r>
               <a:rPr lang="en-US" b="1" dirty="0"/>
-              <a:t>- Business Conceptual - 05 </a:t>
+              <a:t>- Business Layer - 05 </a:t>
             </a:r>
           </a:p>
         </p:txBody>
@@ -9409,7 +9410,7 @@
             </a:br>
             <a:r>
               <a:rPr lang="en-US" b="1" dirty="0"/>
-              <a:t>- Business Conceptual - 06 </a:t>
+              <a:t>- Business Layer - 06 </a:t>
             </a:r>
           </a:p>
         </p:txBody>
@@ -10250,7 +10251,7 @@
             </a:br>
             <a:r>
               <a:rPr lang="en-US" b="1" dirty="0"/>
-              <a:t>- Business Conceptual - 07 </a:t>
+              <a:t>- Business Layer - 07 </a:t>
             </a:r>
           </a:p>
         </p:txBody>
@@ -11244,7 +11245,7 @@
             </a:br>
             <a:r>
               <a:rPr lang="en-US" b="1" dirty="0"/>
-              <a:t>- Business Conceptual - 08 </a:t>
+              <a:t>- Business Layer - 08 </a:t>
             </a:r>
           </a:p>
         </p:txBody>
@@ -12442,7 +12443,7 @@
             </a:br>
             <a:r>
               <a:rPr lang="en-US" b="1" dirty="0"/>
-              <a:t>- Business Conceptual - 09 </a:t>
+              <a:t>- Business Layer - 09 </a:t>
             </a:r>
           </a:p>
         </p:txBody>
@@ -14151,7 +14152,7 @@
             </a:br>
             <a:r>
               <a:rPr lang="en-US" b="1" dirty="0"/>
-              <a:t>- Business Conceptual - 10 </a:t>
+              <a:t>- Business Layer - 10 </a:t>
             </a:r>
           </a:p>
         </p:txBody>
@@ -15451,7 +15452,7 @@
             </a:br>
             <a:r>
               <a:rPr lang="en-US" b="1" dirty="0"/>
-              <a:t>- Business Conceptual - 11 </a:t>
+              <a:t>- Business Layer - 11 </a:t>
             </a:r>
           </a:p>
         </p:txBody>
@@ -17221,7 +17222,7 @@
         <p:cNvPr id="1" name="">
           <a:extLst>
             <a:ext uri="{FF2B5EF4-FFF2-40B4-BE49-F238E27FC236}">
-              <a16:creationId xmlns:a16="http://schemas.microsoft.com/office/drawing/2014/main" id="{E9ED0F9C-FA88-7947-7D50-5F5B7DDAB1E6}"/>
+              <a16:creationId xmlns:a16="http://schemas.microsoft.com/office/drawing/2014/main" id="{591844C9-9E44-873A-1C80-A9A351E4E8CA}"/>
             </a:ext>
           </a:extLst>
         </p:cNvPr>
@@ -17241,7 +17242,7 @@
           <p:cNvPr id="3" name="Picture 2">
             <a:extLst>
               <a:ext uri="{FF2B5EF4-FFF2-40B4-BE49-F238E27FC236}">
-                <a16:creationId xmlns:a16="http://schemas.microsoft.com/office/drawing/2014/main" id="{47363CEB-11F8-7C67-8545-349DA8DE6531}"/>
+                <a16:creationId xmlns:a16="http://schemas.microsoft.com/office/drawing/2014/main" id="{6FB92253-0825-A588-A01C-CAE03D7C198A}"/>
               </a:ext>
             </a:extLst>
           </p:cNvPr>
@@ -17271,7 +17272,7 @@
           <p:cNvPr id="4" name="Rectangle 3">
             <a:extLst>
               <a:ext uri="{FF2B5EF4-FFF2-40B4-BE49-F238E27FC236}">
-                <a16:creationId xmlns:a16="http://schemas.microsoft.com/office/drawing/2014/main" id="{6F0EAAEB-4C34-5CE9-41F6-EBDE23BE92D1}"/>
+                <a16:creationId xmlns:a16="http://schemas.microsoft.com/office/drawing/2014/main" id="{A09A0BC6-93AE-40C8-3D99-AC2473032516}"/>
               </a:ext>
             </a:extLst>
           </p:cNvPr>
@@ -17322,7 +17323,7 @@
           <p:cNvPr id="5" name="Rectangle 4">
             <a:extLst>
               <a:ext uri="{FF2B5EF4-FFF2-40B4-BE49-F238E27FC236}">
-                <a16:creationId xmlns:a16="http://schemas.microsoft.com/office/drawing/2014/main" id="{FFECB941-3E7D-0AA2-885C-EF2AB2AFA520}"/>
+                <a16:creationId xmlns:a16="http://schemas.microsoft.com/office/drawing/2014/main" id="{3E5E42CB-BF59-07EE-D4BB-142077E5A1E5}"/>
               </a:ext>
             </a:extLst>
           </p:cNvPr>
@@ -17373,7 +17374,7 @@
           <p:cNvPr id="6" name="Rectangle 5">
             <a:extLst>
               <a:ext uri="{FF2B5EF4-FFF2-40B4-BE49-F238E27FC236}">
-                <a16:creationId xmlns:a16="http://schemas.microsoft.com/office/drawing/2014/main" id="{6AFC02E2-62C1-917F-D812-D2D9428C37DC}"/>
+                <a16:creationId xmlns:a16="http://schemas.microsoft.com/office/drawing/2014/main" id="{3B333C65-E3DE-E56F-A7F7-42FFFF38C18E}"/>
               </a:ext>
             </a:extLst>
           </p:cNvPr>
@@ -17382,8 +17383,8 @@
         </p:nvSpPr>
         <p:spPr>
           <a:xfrm>
-            <a:off x="2913124" y="164641"/>
-            <a:ext cx="233295" cy="568784"/>
+            <a:off x="6757680" y="424700"/>
+            <a:ext cx="393133" cy="436792"/>
           </a:xfrm>
           <a:prstGeom prst="rect">
             <a:avLst/>
@@ -17424,7 +17425,7 @@
           <p:cNvPr id="7" name="Rectangle 6">
             <a:extLst>
               <a:ext uri="{FF2B5EF4-FFF2-40B4-BE49-F238E27FC236}">
-                <a16:creationId xmlns:a16="http://schemas.microsoft.com/office/drawing/2014/main" id="{320AB26B-93F6-7DB3-F663-A1197116DED5}"/>
+                <a16:creationId xmlns:a16="http://schemas.microsoft.com/office/drawing/2014/main" id="{40BDFFB7-C174-0525-1CA5-CCB6BAE3981C}"/>
               </a:ext>
             </a:extLst>
           </p:cNvPr>
@@ -17475,7 +17476,7 @@
           <p:cNvPr id="2" name="Rectangle 1">
             <a:extLst>
               <a:ext uri="{FF2B5EF4-FFF2-40B4-BE49-F238E27FC236}">
-                <a16:creationId xmlns:a16="http://schemas.microsoft.com/office/drawing/2014/main" id="{C787E3DA-65C0-F2BB-AB25-3CAAE145CCBD}"/>
+                <a16:creationId xmlns:a16="http://schemas.microsoft.com/office/drawing/2014/main" id="{66D47912-69DF-310E-9B7E-656DCAA699F4}"/>
               </a:ext>
             </a:extLst>
           </p:cNvPr>
@@ -17526,7 +17527,7 @@
           <p:cNvPr id="8" name="Rectangle 7">
             <a:extLst>
               <a:ext uri="{FF2B5EF4-FFF2-40B4-BE49-F238E27FC236}">
-                <a16:creationId xmlns:a16="http://schemas.microsoft.com/office/drawing/2014/main" id="{640982A7-C68F-BB22-920F-18B2D110494B}"/>
+                <a16:creationId xmlns:a16="http://schemas.microsoft.com/office/drawing/2014/main" id="{8EAB6C2E-DD56-959F-A906-51BFC9A75FA7}"/>
               </a:ext>
             </a:extLst>
           </p:cNvPr>
@@ -17577,7 +17578,7 @@
           <p:cNvPr id="9" name="Rectangle 8">
             <a:extLst>
               <a:ext uri="{FF2B5EF4-FFF2-40B4-BE49-F238E27FC236}">
-                <a16:creationId xmlns:a16="http://schemas.microsoft.com/office/drawing/2014/main" id="{E262B8B4-2DAA-CECF-13AF-49E8ED3542F5}"/>
+                <a16:creationId xmlns:a16="http://schemas.microsoft.com/office/drawing/2014/main" id="{20898669-217F-2624-9321-F2F4F3F0229D}"/>
               </a:ext>
             </a:extLst>
           </p:cNvPr>
@@ -17628,7 +17629,7 @@
           <p:cNvPr id="10" name="Rectangle 9">
             <a:extLst>
               <a:ext uri="{FF2B5EF4-FFF2-40B4-BE49-F238E27FC236}">
-                <a16:creationId xmlns:a16="http://schemas.microsoft.com/office/drawing/2014/main" id="{541155D4-56BE-A310-B376-E37BF67AC820}"/>
+                <a16:creationId xmlns:a16="http://schemas.microsoft.com/office/drawing/2014/main" id="{CF2273AB-1B3A-9D6B-F6BE-D935BC258C13}"/>
               </a:ext>
             </a:extLst>
           </p:cNvPr>
@@ -17679,7 +17680,7 @@
           <p:cNvPr id="11" name="Rectangle 10">
             <a:extLst>
               <a:ext uri="{FF2B5EF4-FFF2-40B4-BE49-F238E27FC236}">
-                <a16:creationId xmlns:a16="http://schemas.microsoft.com/office/drawing/2014/main" id="{26DD1474-0113-B78B-4D59-44214369F898}"/>
+                <a16:creationId xmlns:a16="http://schemas.microsoft.com/office/drawing/2014/main" id="{AF70DE1C-A052-2B51-4ACB-983CEA5B3825}"/>
               </a:ext>
             </a:extLst>
           </p:cNvPr>
@@ -17730,7 +17731,7 @@
           <p:cNvPr id="12" name="Rectangle 11">
             <a:extLst>
               <a:ext uri="{FF2B5EF4-FFF2-40B4-BE49-F238E27FC236}">
-                <a16:creationId xmlns:a16="http://schemas.microsoft.com/office/drawing/2014/main" id="{3E4DFFB0-2766-0438-0A1A-FA0FC9A978D0}"/>
+                <a16:creationId xmlns:a16="http://schemas.microsoft.com/office/drawing/2014/main" id="{2923ACCF-9906-AE89-302A-238013ADB653}"/>
               </a:ext>
             </a:extLst>
           </p:cNvPr>
@@ -17781,7 +17782,7 @@
           <p:cNvPr id="13" name="Rectangle 12">
             <a:extLst>
               <a:ext uri="{FF2B5EF4-FFF2-40B4-BE49-F238E27FC236}">
-                <a16:creationId xmlns:a16="http://schemas.microsoft.com/office/drawing/2014/main" id="{31793961-859E-0BDB-42EA-FD9288DCD0FE}"/>
+                <a16:creationId xmlns:a16="http://schemas.microsoft.com/office/drawing/2014/main" id="{C762E78A-2B07-C967-43F8-C3056D8FFA10}"/>
               </a:ext>
             </a:extLst>
           </p:cNvPr>
@@ -17832,7 +17833,7 @@
           <p:cNvPr id="14" name="Rectangle 13">
             <a:extLst>
               <a:ext uri="{FF2B5EF4-FFF2-40B4-BE49-F238E27FC236}">
-                <a16:creationId xmlns:a16="http://schemas.microsoft.com/office/drawing/2014/main" id="{E3DB0267-652B-B889-2C63-ED5160596B9B}"/>
+                <a16:creationId xmlns:a16="http://schemas.microsoft.com/office/drawing/2014/main" id="{1B591F4F-5D24-5FEA-EC62-064ED74CAB5E}"/>
               </a:ext>
             </a:extLst>
           </p:cNvPr>
@@ -17883,7 +17884,7 @@
           <p:cNvPr id="15" name="Rectangle 14">
             <a:extLst>
               <a:ext uri="{FF2B5EF4-FFF2-40B4-BE49-F238E27FC236}">
-                <a16:creationId xmlns:a16="http://schemas.microsoft.com/office/drawing/2014/main" id="{5C5F31A6-B809-F7A3-3679-E617C3CA5CF4}"/>
+                <a16:creationId xmlns:a16="http://schemas.microsoft.com/office/drawing/2014/main" id="{E1BA00D9-2338-64F5-C2E9-35D3B47D6587}"/>
               </a:ext>
             </a:extLst>
           </p:cNvPr>
@@ -17934,7 +17935,7 @@
           <p:cNvPr id="16" name="Rectangle 15">
             <a:extLst>
               <a:ext uri="{FF2B5EF4-FFF2-40B4-BE49-F238E27FC236}">
-                <a16:creationId xmlns:a16="http://schemas.microsoft.com/office/drawing/2014/main" id="{1FE3B3F7-220B-D855-5BC5-85CD0FC8BA83}"/>
+                <a16:creationId xmlns:a16="http://schemas.microsoft.com/office/drawing/2014/main" id="{A984B92E-80AE-B581-5C76-F3CDDBB2759B}"/>
               </a:ext>
             </a:extLst>
           </p:cNvPr>
@@ -17985,7 +17986,7 @@
           <p:cNvPr id="17" name="Rectangle 16">
             <a:extLst>
               <a:ext uri="{FF2B5EF4-FFF2-40B4-BE49-F238E27FC236}">
-                <a16:creationId xmlns:a16="http://schemas.microsoft.com/office/drawing/2014/main" id="{418337D6-7DFC-0BCC-A337-CAE50D3149AD}"/>
+                <a16:creationId xmlns:a16="http://schemas.microsoft.com/office/drawing/2014/main" id="{65C033FF-3EC0-7BD0-C1DB-9855DAC4B4F3}"/>
               </a:ext>
             </a:extLst>
           </p:cNvPr>
@@ -18036,7 +18037,7 @@
           <p:cNvPr id="18" name="Rectangle 17">
             <a:extLst>
               <a:ext uri="{FF2B5EF4-FFF2-40B4-BE49-F238E27FC236}">
-                <a16:creationId xmlns:a16="http://schemas.microsoft.com/office/drawing/2014/main" id="{72DC811A-C69D-F6AE-0130-CA62ACABD3E5}"/>
+                <a16:creationId xmlns:a16="http://schemas.microsoft.com/office/drawing/2014/main" id="{84F3FFD0-E207-D801-708A-372266F74E0E}"/>
               </a:ext>
             </a:extLst>
           </p:cNvPr>
@@ -18087,7 +18088,7 @@
           <p:cNvPr id="19" name="Rectangle 18">
             <a:extLst>
               <a:ext uri="{FF2B5EF4-FFF2-40B4-BE49-F238E27FC236}">
-                <a16:creationId xmlns:a16="http://schemas.microsoft.com/office/drawing/2014/main" id="{B0F8E959-F313-AC64-0493-F70D47EC36F2}"/>
+                <a16:creationId xmlns:a16="http://schemas.microsoft.com/office/drawing/2014/main" id="{7441CC32-0076-B628-DE45-F2BCEAE5A61F}"/>
               </a:ext>
             </a:extLst>
           </p:cNvPr>
@@ -18133,10 +18134,61 @@
           </a:p>
         </p:txBody>
       </p:sp>
+      <p:sp>
+        <p:nvSpPr>
+          <p:cNvPr id="20" name="Rectangle 19">
+            <a:extLst>
+              <a:ext uri="{FF2B5EF4-FFF2-40B4-BE49-F238E27FC236}">
+                <a16:creationId xmlns:a16="http://schemas.microsoft.com/office/drawing/2014/main" id="{3CF40E1A-3EC6-9FFC-C3D3-4097EF911904}"/>
+              </a:ext>
+            </a:extLst>
+          </p:cNvPr>
+          <p:cNvSpPr/>
+          <p:nvPr/>
+        </p:nvSpPr>
+        <p:spPr>
+          <a:xfrm>
+            <a:off x="7343745" y="424700"/>
+            <a:ext cx="393133" cy="436792"/>
+          </a:xfrm>
+          <a:prstGeom prst="rect">
+            <a:avLst/>
+          </a:prstGeom>
+          <a:solidFill>
+            <a:srgbClr val="ACD433">
+              <a:alpha val="50196"/>
+            </a:srgbClr>
+          </a:solidFill>
+        </p:spPr>
+        <p:style>
+          <a:lnRef idx="2">
+            <a:schemeClr val="accent1">
+              <a:shade val="15000"/>
+            </a:schemeClr>
+          </a:lnRef>
+          <a:fillRef idx="1">
+            <a:schemeClr val="accent1"/>
+          </a:fillRef>
+          <a:effectRef idx="0">
+            <a:schemeClr val="accent1"/>
+          </a:effectRef>
+          <a:fontRef idx="minor">
+            <a:schemeClr val="lt1"/>
+          </a:fontRef>
+        </p:style>
+        <p:txBody>
+          <a:bodyPr rtlCol="0" anchor="ctr"/>
+          <a:lstStyle/>
+          <a:p>
+            <a:pPr algn="ctr"/>
+            <a:endParaRPr lang="en-US"/>
+          </a:p>
+        </p:txBody>
+      </p:sp>
     </p:spTree>
     <p:extLst>
       <p:ext uri="{BB962C8B-B14F-4D97-AF65-F5344CB8AC3E}">
-        <p14:creationId xmlns:p14="http://schemas.microsoft.com/office/powerpoint/2010/main" val="1344398148"/>
+        <p14:creationId xmlns:p14="http://schemas.microsoft.com/office/powerpoint/2010/main" val="2832478932"/>
       </p:ext>
     </p:extLst>
   </p:cSld>
@@ -18550,10 +18602,10 @@
       </p:pic>
       <p:pic>
         <p:nvPicPr>
-          <p:cNvPr id="10" name="Picture 9">
-            <a:extLst>
-              <a:ext uri="{FF2B5EF4-FFF2-40B4-BE49-F238E27FC236}">
-                <a16:creationId xmlns:a16="http://schemas.microsoft.com/office/drawing/2014/main" id="{BF145DEE-DCDF-43A7-6F9B-D1AA5AA6EA20}"/>
+          <p:cNvPr id="7" name="Picture 6">
+            <a:extLst>
+              <a:ext uri="{FF2B5EF4-FFF2-40B4-BE49-F238E27FC236}">
+                <a16:creationId xmlns:a16="http://schemas.microsoft.com/office/drawing/2014/main" id="{D65D8BD3-9723-03CD-C60F-22DCD401EE3A}"/>
               </a:ext>
             </a:extLst>
           </p:cNvPr>
@@ -18570,8 +18622,8 @@
         </p:blipFill>
         <p:spPr>
           <a:xfrm>
-            <a:off x="5575712" y="2727711"/>
-            <a:ext cx="6299620" cy="2522384"/>
+            <a:off x="6935056" y="2852393"/>
+            <a:ext cx="4944538" cy="2721836"/>
           </a:xfrm>
           <a:prstGeom prst="roundRect">
             <a:avLst>
@@ -18623,7 +18675,7 @@
         <p:cNvPr id="1" name="">
           <a:extLst>
             <a:ext uri="{FF2B5EF4-FFF2-40B4-BE49-F238E27FC236}">
-              <a16:creationId xmlns:a16="http://schemas.microsoft.com/office/drawing/2014/main" id="{591844C9-9E44-873A-1C80-A9A351E4E8CA}"/>
+              <a16:creationId xmlns:a16="http://schemas.microsoft.com/office/drawing/2014/main" id="{F5D1FF0A-E3E9-8C90-14DB-8A3FFE90ABE0}"/>
             </a:ext>
           </a:extLst>
         </p:cNvPr>
@@ -18643,7 +18695,7 @@
           <p:cNvPr id="3" name="Picture 2">
             <a:extLst>
               <a:ext uri="{FF2B5EF4-FFF2-40B4-BE49-F238E27FC236}">
-                <a16:creationId xmlns:a16="http://schemas.microsoft.com/office/drawing/2014/main" id="{6FB92253-0825-A588-A01C-CAE03D7C198A}"/>
+                <a16:creationId xmlns:a16="http://schemas.microsoft.com/office/drawing/2014/main" id="{F861628B-858F-3163-AF3A-7539FB7CB895}"/>
               </a:ext>
             </a:extLst>
           </p:cNvPr>
@@ -18673,7 +18725,7 @@
           <p:cNvPr id="4" name="Rectangle 3">
             <a:extLst>
               <a:ext uri="{FF2B5EF4-FFF2-40B4-BE49-F238E27FC236}">
-                <a16:creationId xmlns:a16="http://schemas.microsoft.com/office/drawing/2014/main" id="{A09A0BC6-93AE-40C8-3D99-AC2473032516}"/>
+                <a16:creationId xmlns:a16="http://schemas.microsoft.com/office/drawing/2014/main" id="{370E9F95-BBDF-4704-C5FE-60BD68105789}"/>
               </a:ext>
             </a:extLst>
           </p:cNvPr>
@@ -18724,7 +18776,7 @@
           <p:cNvPr id="5" name="Rectangle 4">
             <a:extLst>
               <a:ext uri="{FF2B5EF4-FFF2-40B4-BE49-F238E27FC236}">
-                <a16:creationId xmlns:a16="http://schemas.microsoft.com/office/drawing/2014/main" id="{3E5E42CB-BF59-07EE-D4BB-142077E5A1E5}"/>
+                <a16:creationId xmlns:a16="http://schemas.microsoft.com/office/drawing/2014/main" id="{A469F207-AF3E-01D7-0F3B-783A56D25765}"/>
               </a:ext>
             </a:extLst>
           </p:cNvPr>
@@ -18775,7 +18827,7 @@
           <p:cNvPr id="6" name="Rectangle 5">
             <a:extLst>
               <a:ext uri="{FF2B5EF4-FFF2-40B4-BE49-F238E27FC236}">
-                <a16:creationId xmlns:a16="http://schemas.microsoft.com/office/drawing/2014/main" id="{3B333C65-E3DE-E56F-A7F7-42FFFF38C18E}"/>
+                <a16:creationId xmlns:a16="http://schemas.microsoft.com/office/drawing/2014/main" id="{A0428FEE-CACE-7BC7-6F48-5B6F346819B3}"/>
               </a:ext>
             </a:extLst>
           </p:cNvPr>
@@ -18785,7 +18837,7 @@
         <p:spPr>
           <a:xfrm>
             <a:off x="6757680" y="424700"/>
-            <a:ext cx="393133" cy="436792"/>
+            <a:ext cx="1028938" cy="436792"/>
           </a:xfrm>
           <a:prstGeom prst="rect">
             <a:avLst/>
@@ -18826,7 +18878,7 @@
           <p:cNvPr id="7" name="Rectangle 6">
             <a:extLst>
               <a:ext uri="{FF2B5EF4-FFF2-40B4-BE49-F238E27FC236}">
-                <a16:creationId xmlns:a16="http://schemas.microsoft.com/office/drawing/2014/main" id="{40BDFFB7-C174-0525-1CA5-CCB6BAE3981C}"/>
+                <a16:creationId xmlns:a16="http://schemas.microsoft.com/office/drawing/2014/main" id="{1492C9F1-8721-3AEA-F41C-9012273ECC57}"/>
               </a:ext>
             </a:extLst>
           </p:cNvPr>
@@ -18877,7 +18929,7 @@
           <p:cNvPr id="2" name="Rectangle 1">
             <a:extLst>
               <a:ext uri="{FF2B5EF4-FFF2-40B4-BE49-F238E27FC236}">
-                <a16:creationId xmlns:a16="http://schemas.microsoft.com/office/drawing/2014/main" id="{66D47912-69DF-310E-9B7E-656DCAA699F4}"/>
+                <a16:creationId xmlns:a16="http://schemas.microsoft.com/office/drawing/2014/main" id="{3CDB6A84-A2A3-7C69-A652-08112635245C}"/>
               </a:ext>
             </a:extLst>
           </p:cNvPr>
@@ -18928,7 +18980,7 @@
           <p:cNvPr id="8" name="Rectangle 7">
             <a:extLst>
               <a:ext uri="{FF2B5EF4-FFF2-40B4-BE49-F238E27FC236}">
-                <a16:creationId xmlns:a16="http://schemas.microsoft.com/office/drawing/2014/main" id="{8EAB6C2E-DD56-959F-A906-51BFC9A75FA7}"/>
+                <a16:creationId xmlns:a16="http://schemas.microsoft.com/office/drawing/2014/main" id="{E3554300-C3CF-C564-DC84-72DD85448196}"/>
               </a:ext>
             </a:extLst>
           </p:cNvPr>
@@ -18979,7 +19031,7 @@
           <p:cNvPr id="9" name="Rectangle 8">
             <a:extLst>
               <a:ext uri="{FF2B5EF4-FFF2-40B4-BE49-F238E27FC236}">
-                <a16:creationId xmlns:a16="http://schemas.microsoft.com/office/drawing/2014/main" id="{20898669-217F-2624-9321-F2F4F3F0229D}"/>
+                <a16:creationId xmlns:a16="http://schemas.microsoft.com/office/drawing/2014/main" id="{03A66A0B-8583-4A42-8705-29DF22275973}"/>
               </a:ext>
             </a:extLst>
           </p:cNvPr>
@@ -19030,7 +19082,7 @@
           <p:cNvPr id="10" name="Rectangle 9">
             <a:extLst>
               <a:ext uri="{FF2B5EF4-FFF2-40B4-BE49-F238E27FC236}">
-                <a16:creationId xmlns:a16="http://schemas.microsoft.com/office/drawing/2014/main" id="{CF2273AB-1B3A-9D6B-F6BE-D935BC258C13}"/>
+                <a16:creationId xmlns:a16="http://schemas.microsoft.com/office/drawing/2014/main" id="{8617FF6A-5A8A-C9C3-D967-13AE71599701}"/>
               </a:ext>
             </a:extLst>
           </p:cNvPr>
@@ -19081,7 +19133,7 @@
           <p:cNvPr id="11" name="Rectangle 10">
             <a:extLst>
               <a:ext uri="{FF2B5EF4-FFF2-40B4-BE49-F238E27FC236}">
-                <a16:creationId xmlns:a16="http://schemas.microsoft.com/office/drawing/2014/main" id="{AF70DE1C-A052-2B51-4ACB-983CEA5B3825}"/>
+                <a16:creationId xmlns:a16="http://schemas.microsoft.com/office/drawing/2014/main" id="{4F6556AF-77B1-1187-354C-711DFD6D60BC}"/>
               </a:ext>
             </a:extLst>
           </p:cNvPr>
@@ -19132,7 +19184,7 @@
           <p:cNvPr id="12" name="Rectangle 11">
             <a:extLst>
               <a:ext uri="{FF2B5EF4-FFF2-40B4-BE49-F238E27FC236}">
-                <a16:creationId xmlns:a16="http://schemas.microsoft.com/office/drawing/2014/main" id="{2923ACCF-9906-AE89-302A-238013ADB653}"/>
+                <a16:creationId xmlns:a16="http://schemas.microsoft.com/office/drawing/2014/main" id="{4C4F67B1-7F22-E6F2-B668-29DAE727F62E}"/>
               </a:ext>
             </a:extLst>
           </p:cNvPr>
@@ -19183,7 +19235,7 @@
           <p:cNvPr id="13" name="Rectangle 12">
             <a:extLst>
               <a:ext uri="{FF2B5EF4-FFF2-40B4-BE49-F238E27FC236}">
-                <a16:creationId xmlns:a16="http://schemas.microsoft.com/office/drawing/2014/main" id="{C762E78A-2B07-C967-43F8-C3056D8FFA10}"/>
+                <a16:creationId xmlns:a16="http://schemas.microsoft.com/office/drawing/2014/main" id="{D5AC98B8-AE19-C03A-4FEA-F5CC7428D4BC}"/>
               </a:ext>
             </a:extLst>
           </p:cNvPr>
@@ -19234,7 +19286,7 @@
           <p:cNvPr id="14" name="Rectangle 13">
             <a:extLst>
               <a:ext uri="{FF2B5EF4-FFF2-40B4-BE49-F238E27FC236}">
-                <a16:creationId xmlns:a16="http://schemas.microsoft.com/office/drawing/2014/main" id="{1B591F4F-5D24-5FEA-EC62-064ED74CAB5E}"/>
+                <a16:creationId xmlns:a16="http://schemas.microsoft.com/office/drawing/2014/main" id="{4C6E7C49-0457-FD75-EAE8-4969A6BA38C6}"/>
               </a:ext>
             </a:extLst>
           </p:cNvPr>
@@ -19285,7 +19337,7 @@
           <p:cNvPr id="15" name="Rectangle 14">
             <a:extLst>
               <a:ext uri="{FF2B5EF4-FFF2-40B4-BE49-F238E27FC236}">
-                <a16:creationId xmlns:a16="http://schemas.microsoft.com/office/drawing/2014/main" id="{E1BA00D9-2338-64F5-C2E9-35D3B47D6587}"/>
+                <a16:creationId xmlns:a16="http://schemas.microsoft.com/office/drawing/2014/main" id="{F49CA70C-5B83-2165-020D-FE73F598623D}"/>
               </a:ext>
             </a:extLst>
           </p:cNvPr>
@@ -19336,7 +19388,7 @@
           <p:cNvPr id="16" name="Rectangle 15">
             <a:extLst>
               <a:ext uri="{FF2B5EF4-FFF2-40B4-BE49-F238E27FC236}">
-                <a16:creationId xmlns:a16="http://schemas.microsoft.com/office/drawing/2014/main" id="{A984B92E-80AE-B581-5C76-F3CDDBB2759B}"/>
+                <a16:creationId xmlns:a16="http://schemas.microsoft.com/office/drawing/2014/main" id="{0C8213F2-4A4B-3450-7119-301850865F9B}"/>
               </a:ext>
             </a:extLst>
           </p:cNvPr>
@@ -19387,7 +19439,7 @@
           <p:cNvPr id="17" name="Rectangle 16">
             <a:extLst>
               <a:ext uri="{FF2B5EF4-FFF2-40B4-BE49-F238E27FC236}">
-                <a16:creationId xmlns:a16="http://schemas.microsoft.com/office/drawing/2014/main" id="{65C033FF-3EC0-7BD0-C1DB-9855DAC4B4F3}"/>
+                <a16:creationId xmlns:a16="http://schemas.microsoft.com/office/drawing/2014/main" id="{AD2C8D49-FA18-D5E3-882D-27D6A8B74110}"/>
               </a:ext>
             </a:extLst>
           </p:cNvPr>
@@ -19438,7 +19490,7 @@
           <p:cNvPr id="18" name="Rectangle 17">
             <a:extLst>
               <a:ext uri="{FF2B5EF4-FFF2-40B4-BE49-F238E27FC236}">
-                <a16:creationId xmlns:a16="http://schemas.microsoft.com/office/drawing/2014/main" id="{84F3FFD0-E207-D801-708A-372266F74E0E}"/>
+                <a16:creationId xmlns:a16="http://schemas.microsoft.com/office/drawing/2014/main" id="{AA9FBA99-7477-8B12-0D6C-F69FD8B9BD5B}"/>
               </a:ext>
             </a:extLst>
           </p:cNvPr>
@@ -19489,7 +19541,7 @@
           <p:cNvPr id="19" name="Rectangle 18">
             <a:extLst>
               <a:ext uri="{FF2B5EF4-FFF2-40B4-BE49-F238E27FC236}">
-                <a16:creationId xmlns:a16="http://schemas.microsoft.com/office/drawing/2014/main" id="{7441CC32-0076-B628-DE45-F2BCEAE5A61F}"/>
+                <a16:creationId xmlns:a16="http://schemas.microsoft.com/office/drawing/2014/main" id="{854DD104-80A7-00DD-E373-991A61436E72}"/>
               </a:ext>
             </a:extLst>
           </p:cNvPr>
@@ -19537,10 +19589,10 @@
       </p:sp>
       <p:sp>
         <p:nvSpPr>
-          <p:cNvPr id="20" name="Rectangle 19">
-            <a:extLst>
-              <a:ext uri="{FF2B5EF4-FFF2-40B4-BE49-F238E27FC236}">
-                <a16:creationId xmlns:a16="http://schemas.microsoft.com/office/drawing/2014/main" id="{3CF40E1A-3EC6-9FFC-C3D3-4097EF911904}"/>
+          <p:cNvPr id="21" name="Rectangle 20">
+            <a:extLst>
+              <a:ext uri="{FF2B5EF4-FFF2-40B4-BE49-F238E27FC236}">
+                <a16:creationId xmlns:a16="http://schemas.microsoft.com/office/drawing/2014/main" id="{BE961A05-A6F4-62BD-E8B9-2403594438E8}"/>
               </a:ext>
             </a:extLst>
           </p:cNvPr>
@@ -19548,9 +19600,9 @@
           <p:nvPr/>
         </p:nvSpPr>
         <p:spPr>
-          <a:xfrm>
-            <a:off x="7343745" y="424700"/>
-            <a:ext cx="393133" cy="436792"/>
+          <a:xfrm rot="7689780">
+            <a:off x="5689987" y="725525"/>
+            <a:ext cx="76042" cy="1357830"/>
           </a:xfrm>
           <a:prstGeom prst="rect">
             <a:avLst/>
@@ -19586,10 +19638,112 @@
           </a:p>
         </p:txBody>
       </p:sp>
+      <p:sp>
+        <p:nvSpPr>
+          <p:cNvPr id="22" name="Rectangle 21">
+            <a:extLst>
+              <a:ext uri="{FF2B5EF4-FFF2-40B4-BE49-F238E27FC236}">
+                <a16:creationId xmlns:a16="http://schemas.microsoft.com/office/drawing/2014/main" id="{C4C5BD18-06FD-DED1-0A46-68583BF6995C}"/>
+              </a:ext>
+            </a:extLst>
+          </p:cNvPr>
+          <p:cNvSpPr/>
+          <p:nvPr/>
+        </p:nvSpPr>
+        <p:spPr>
+          <a:xfrm>
+            <a:off x="6503542" y="1862159"/>
+            <a:ext cx="647271" cy="131738"/>
+          </a:xfrm>
+          <a:prstGeom prst="rect">
+            <a:avLst/>
+          </a:prstGeom>
+          <a:solidFill>
+            <a:srgbClr val="ACD433">
+              <a:alpha val="50196"/>
+            </a:srgbClr>
+          </a:solidFill>
+        </p:spPr>
+        <p:style>
+          <a:lnRef idx="2">
+            <a:schemeClr val="accent1">
+              <a:shade val="15000"/>
+            </a:schemeClr>
+          </a:lnRef>
+          <a:fillRef idx="1">
+            <a:schemeClr val="accent1"/>
+          </a:fillRef>
+          <a:effectRef idx="0">
+            <a:schemeClr val="accent1"/>
+          </a:effectRef>
+          <a:fontRef idx="minor">
+            <a:schemeClr val="lt1"/>
+          </a:fontRef>
+        </p:style>
+        <p:txBody>
+          <a:bodyPr rtlCol="0" anchor="ctr"/>
+          <a:lstStyle/>
+          <a:p>
+            <a:pPr algn="ctr"/>
+            <a:endParaRPr lang="en-US"/>
+          </a:p>
+        </p:txBody>
+      </p:sp>
+      <p:sp>
+        <p:nvSpPr>
+          <p:cNvPr id="23" name="Rectangle 22">
+            <a:extLst>
+              <a:ext uri="{FF2B5EF4-FFF2-40B4-BE49-F238E27FC236}">
+                <a16:creationId xmlns:a16="http://schemas.microsoft.com/office/drawing/2014/main" id="{2DD81B06-7398-8CDE-41A5-E888C9346985}"/>
+              </a:ext>
+            </a:extLst>
+          </p:cNvPr>
+          <p:cNvSpPr/>
+          <p:nvPr/>
+        </p:nvSpPr>
+        <p:spPr>
+          <a:xfrm>
+            <a:off x="6285303" y="1568449"/>
+            <a:ext cx="1278993" cy="252208"/>
+          </a:xfrm>
+          <a:prstGeom prst="rect">
+            <a:avLst/>
+          </a:prstGeom>
+          <a:solidFill>
+            <a:srgbClr val="ACD433">
+              <a:alpha val="50196"/>
+            </a:srgbClr>
+          </a:solidFill>
+        </p:spPr>
+        <p:style>
+          <a:lnRef idx="2">
+            <a:schemeClr val="accent1">
+              <a:shade val="15000"/>
+            </a:schemeClr>
+          </a:lnRef>
+          <a:fillRef idx="1">
+            <a:schemeClr val="accent1"/>
+          </a:fillRef>
+          <a:effectRef idx="0">
+            <a:schemeClr val="accent1"/>
+          </a:effectRef>
+          <a:fontRef idx="minor">
+            <a:schemeClr val="lt1"/>
+          </a:fontRef>
+        </p:style>
+        <p:txBody>
+          <a:bodyPr rtlCol="0" anchor="ctr"/>
+          <a:lstStyle/>
+          <a:p>
+            <a:pPr algn="ctr"/>
+            <a:endParaRPr lang="en-US"/>
+          </a:p>
+        </p:txBody>
+      </p:sp>
     </p:spTree>
     <p:extLst>
       <p:ext uri="{BB962C8B-B14F-4D97-AF65-F5344CB8AC3E}">
-        <p14:creationId xmlns:p14="http://schemas.microsoft.com/office/powerpoint/2010/main" val="2832478932"/>
+        <p14:creationId xmlns:p14="http://schemas.microsoft.com/office/powerpoint/2010/main" val="2726683825"/>
       </p:ext>
     </p:extLst>
   </p:cSld>
@@ -19600,6 +19754,912 @@
 </file>
 
 <file path=ppt/slides/slide29.xml><?xml version="1.0" encoding="utf-8"?>
+<p:sld xmlns:a="http://schemas.openxmlformats.org/drawingml/2006/main" xmlns:r="http://schemas.openxmlformats.org/officeDocument/2006/relationships" xmlns:p="http://schemas.openxmlformats.org/presentationml/2006/main">
+  <p:cSld>
+    <p:spTree>
+      <p:nvGrpSpPr>
+        <p:cNvPr id="1" name="">
+          <a:extLst>
+            <a:ext uri="{FF2B5EF4-FFF2-40B4-BE49-F238E27FC236}">
+              <a16:creationId xmlns:a16="http://schemas.microsoft.com/office/drawing/2014/main" id="{14D6A2CE-7445-09A7-5525-3C0879F85C47}"/>
+            </a:ext>
+          </a:extLst>
+        </p:cNvPr>
+        <p:cNvGrpSpPr/>
+        <p:nvPr/>
+      </p:nvGrpSpPr>
+      <p:grpSpPr>
+        <a:xfrm>
+          <a:off x="0" y="0"/>
+          <a:ext cx="0" cy="0"/>
+          <a:chOff x="0" y="0"/>
+          <a:chExt cx="0" cy="0"/>
+        </a:xfrm>
+      </p:grpSpPr>
+      <p:sp>
+        <p:nvSpPr>
+          <p:cNvPr id="2" name="Title 1">
+            <a:extLst>
+              <a:ext uri="{FF2B5EF4-FFF2-40B4-BE49-F238E27FC236}">
+                <a16:creationId xmlns:a16="http://schemas.microsoft.com/office/drawing/2014/main" id="{3344DD61-6125-FD95-6876-CCFF9FD358E0}"/>
+              </a:ext>
+            </a:extLst>
+          </p:cNvPr>
+          <p:cNvSpPr>
+            <a:spLocks noGrp="1"/>
+          </p:cNvSpPr>
+          <p:nvPr>
+            <p:ph type="title"/>
+          </p:nvPr>
+        </p:nvSpPr>
+        <p:spPr>
+          <a:xfrm>
+            <a:off x="1754188" y="452718"/>
+            <a:ext cx="8296646" cy="1400530"/>
+          </a:xfrm>
+        </p:spPr>
+        <p:txBody>
+          <a:bodyPr/>
+          <a:lstStyle/>
+          <a:p>
+            <a:r>
+              <a:rPr lang="en-US" b="1" dirty="0"/>
+              <a:t>Essential EA Meta-Model</a:t>
+            </a:r>
+            <a:br>
+              <a:rPr lang="en-US" b="1" dirty="0"/>
+            </a:br>
+            <a:r>
+              <a:rPr lang="en-US" b="1" dirty="0"/>
+              <a:t>- Business Layer - 14</a:t>
+            </a:r>
+          </a:p>
+        </p:txBody>
+      </p:sp>
+      <p:sp>
+        <p:nvSpPr>
+          <p:cNvPr id="4" name="Title 1">
+            <a:extLst>
+              <a:ext uri="{FF2B5EF4-FFF2-40B4-BE49-F238E27FC236}">
+                <a16:creationId xmlns:a16="http://schemas.microsoft.com/office/drawing/2014/main" id="{C557BBD4-48E5-1F07-842F-F545960A20D8}"/>
+              </a:ext>
+            </a:extLst>
+          </p:cNvPr>
+          <p:cNvSpPr txBox="1">
+            <a:spLocks/>
+          </p:cNvSpPr>
+          <p:nvPr/>
+        </p:nvSpPr>
+        <p:spPr>
+          <a:xfrm>
+            <a:off x="0" y="3143"/>
+            <a:ext cx="1754188" cy="1058013"/>
+          </a:xfrm>
+          <a:prstGeom prst="rect">
+            <a:avLst/>
+          </a:prstGeom>
+        </p:spPr>
+        <p:txBody>
+          <a:bodyPr vert="horz" lIns="91440" tIns="45720" rIns="91440" bIns="45720" rtlCol="0" anchor="ctr">
+            <a:noAutofit/>
+          </a:bodyPr>
+          <a:lstStyle>
+            <a:lvl1pPr algn="l" defTabSz="457200" rtl="0" eaLnBrk="1" latinLnBrk="0" hangingPunct="1">
+              <a:spcBef>
+                <a:spcPct val="0"/>
+              </a:spcBef>
+              <a:buNone/>
+              <a:defRPr sz="7200" b="0" i="0" kern="1200">
+                <a:solidFill>
+                  <a:schemeClr val="tx2"/>
+                </a:solidFill>
+                <a:latin typeface="+mj-lt"/>
+                <a:ea typeface="+mj-ea"/>
+                <a:cs typeface="+mj-cs"/>
+              </a:defRPr>
+            </a:lvl1pPr>
+            <a:lvl2pPr eaLnBrk="1" hangingPunct="1">
+              <a:defRPr>
+                <a:solidFill>
+                  <a:schemeClr val="tx2"/>
+                </a:solidFill>
+              </a:defRPr>
+            </a:lvl2pPr>
+            <a:lvl3pPr eaLnBrk="1" hangingPunct="1">
+              <a:defRPr>
+                <a:solidFill>
+                  <a:schemeClr val="tx2"/>
+                </a:solidFill>
+              </a:defRPr>
+            </a:lvl3pPr>
+            <a:lvl4pPr eaLnBrk="1" hangingPunct="1">
+              <a:defRPr>
+                <a:solidFill>
+                  <a:schemeClr val="tx2"/>
+                </a:solidFill>
+              </a:defRPr>
+            </a:lvl4pPr>
+            <a:lvl5pPr eaLnBrk="1" hangingPunct="1">
+              <a:defRPr>
+                <a:solidFill>
+                  <a:schemeClr val="tx2"/>
+                </a:solidFill>
+              </a:defRPr>
+            </a:lvl5pPr>
+            <a:lvl6pPr eaLnBrk="1" hangingPunct="1">
+              <a:defRPr>
+                <a:solidFill>
+                  <a:schemeClr val="tx2"/>
+                </a:solidFill>
+              </a:defRPr>
+            </a:lvl6pPr>
+            <a:lvl7pPr eaLnBrk="1" hangingPunct="1">
+              <a:defRPr>
+                <a:solidFill>
+                  <a:schemeClr val="tx2"/>
+                </a:solidFill>
+              </a:defRPr>
+            </a:lvl7pPr>
+            <a:lvl8pPr eaLnBrk="1" hangingPunct="1">
+              <a:defRPr>
+                <a:solidFill>
+                  <a:schemeClr val="tx2"/>
+                </a:solidFill>
+              </a:defRPr>
+            </a:lvl8pPr>
+            <a:lvl9pPr eaLnBrk="1" hangingPunct="1">
+              <a:defRPr>
+                <a:solidFill>
+                  <a:schemeClr val="tx2"/>
+                </a:solidFill>
+              </a:defRPr>
+            </a:lvl9pPr>
+          </a:lstStyle>
+          <a:p>
+            <a:pPr algn="ctr"/>
+            <a:r>
+              <a:rPr lang="en-US" b="1" dirty="0">
+                <a:solidFill>
+                  <a:schemeClr val="accent1">
+                    <a:lumMod val="75000"/>
+                  </a:schemeClr>
+                </a:solidFill>
+              </a:rPr>
+              <a:t>020</a:t>
+            </a:r>
+            <a:endParaRPr lang="ru-RU" b="1" dirty="0">
+              <a:solidFill>
+                <a:schemeClr val="accent1">
+                  <a:lumMod val="75000"/>
+                </a:schemeClr>
+              </a:solidFill>
+            </a:endParaRPr>
+          </a:p>
+        </p:txBody>
+      </p:sp>
+      <p:pic>
+        <p:nvPicPr>
+          <p:cNvPr id="3" name="Picture 2">
+            <a:extLst>
+              <a:ext uri="{FF2B5EF4-FFF2-40B4-BE49-F238E27FC236}">
+                <a16:creationId xmlns:a16="http://schemas.microsoft.com/office/drawing/2014/main" id="{32EF3FAA-7F7D-E1AA-92CA-3D8ABC0CB576}"/>
+              </a:ext>
+            </a:extLst>
+          </p:cNvPr>
+          <p:cNvPicPr>
+            <a:picLocks noChangeAspect="1"/>
+          </p:cNvPicPr>
+          <p:nvPr/>
+        </p:nvPicPr>
+        <p:blipFill>
+          <a:blip r:embed="rId2"/>
+          <a:stretch>
+            <a:fillRect/>
+          </a:stretch>
+        </p:blipFill>
+        <p:spPr>
+          <a:xfrm>
+            <a:off x="236841" y="1853248"/>
+            <a:ext cx="8296646" cy="4669795"/>
+          </a:xfrm>
+          <a:prstGeom prst="rect">
+            <a:avLst/>
+          </a:prstGeom>
+          <a:ln>
+            <a:noFill/>
+          </a:ln>
+          <a:effectLst>
+            <a:outerShdw blurRad="292100" dist="139700" dir="2700000" algn="tl" rotWithShape="0">
+              <a:srgbClr val="333333">
+                <a:alpha val="65000"/>
+              </a:srgbClr>
+            </a:outerShdw>
+          </a:effectLst>
+        </p:spPr>
+      </p:pic>
+      <p:sp>
+        <p:nvSpPr>
+          <p:cNvPr id="6" name="Rectangle: Rounded Corners 5">
+            <a:extLst>
+              <a:ext uri="{FF2B5EF4-FFF2-40B4-BE49-F238E27FC236}">
+                <a16:creationId xmlns:a16="http://schemas.microsoft.com/office/drawing/2014/main" id="{41CFA9CB-7117-A0AC-50B3-3280A6FF036F}"/>
+              </a:ext>
+            </a:extLst>
+          </p:cNvPr>
+          <p:cNvSpPr/>
+          <p:nvPr/>
+        </p:nvSpPr>
+        <p:spPr>
+          <a:xfrm>
+            <a:off x="596436" y="2188396"/>
+            <a:ext cx="2054832" cy="1400530"/>
+          </a:xfrm>
+          <a:prstGeom prst="roundRect">
+            <a:avLst>
+              <a:gd name="adj" fmla="val 6916"/>
+            </a:avLst>
+          </a:prstGeom>
+          <a:solidFill>
+            <a:srgbClr val="FFCC66">
+              <a:alpha val="20000"/>
+            </a:srgbClr>
+          </a:solidFill>
+          <a:ln>
+            <a:solidFill>
+              <a:srgbClr val="92D050"/>
+            </a:solidFill>
+          </a:ln>
+        </p:spPr>
+        <p:style>
+          <a:lnRef idx="2">
+            <a:schemeClr val="accent1">
+              <a:shade val="15000"/>
+            </a:schemeClr>
+          </a:lnRef>
+          <a:fillRef idx="1">
+            <a:schemeClr val="accent1"/>
+          </a:fillRef>
+          <a:effectRef idx="0">
+            <a:schemeClr val="accent1"/>
+          </a:effectRef>
+          <a:fontRef idx="minor">
+            <a:schemeClr val="lt1"/>
+          </a:fontRef>
+        </p:style>
+        <p:txBody>
+          <a:bodyPr rtlCol="0" anchor="ctr"/>
+          <a:lstStyle/>
+          <a:p>
+            <a:pPr algn="ctr"/>
+            <a:endParaRPr lang="en-US"/>
+          </a:p>
+        </p:txBody>
+      </p:sp>
+      <p:pic>
+        <p:nvPicPr>
+          <p:cNvPr id="11" name="Picture 10">
+            <a:extLst>
+              <a:ext uri="{FF2B5EF4-FFF2-40B4-BE49-F238E27FC236}">
+                <a16:creationId xmlns:a16="http://schemas.microsoft.com/office/drawing/2014/main" id="{CC1B5F49-F4F8-4DBA-496A-A45A40887CC5}"/>
+              </a:ext>
+            </a:extLst>
+          </p:cNvPr>
+          <p:cNvPicPr>
+            <a:picLocks noChangeAspect="1"/>
+          </p:cNvPicPr>
+          <p:nvPr/>
+        </p:nvPicPr>
+        <p:blipFill>
+          <a:blip r:embed="rId3"/>
+          <a:stretch>
+            <a:fillRect/>
+          </a:stretch>
+        </p:blipFill>
+        <p:spPr>
+          <a:xfrm>
+            <a:off x="157000" y="1094226"/>
+            <a:ext cx="362976" cy="362976"/>
+          </a:xfrm>
+          <a:prstGeom prst="rect">
+            <a:avLst/>
+          </a:prstGeom>
+          <a:ln>
+            <a:noFill/>
+          </a:ln>
+          <a:effectLst>
+            <a:outerShdw blurRad="292100" dist="139700" dir="2700000" algn="tl" rotWithShape="0">
+              <a:srgbClr val="333333">
+                <a:alpha val="65000"/>
+              </a:srgbClr>
+            </a:outerShdw>
+          </a:effectLst>
+        </p:spPr>
+      </p:pic>
+      <p:pic>
+        <p:nvPicPr>
+          <p:cNvPr id="12" name="Picture 11">
+            <a:extLst>
+              <a:ext uri="{FF2B5EF4-FFF2-40B4-BE49-F238E27FC236}">
+                <a16:creationId xmlns:a16="http://schemas.microsoft.com/office/drawing/2014/main" id="{B3E4F3DA-7EB5-BF47-E419-7254733176BB}"/>
+              </a:ext>
+            </a:extLst>
+          </p:cNvPr>
+          <p:cNvPicPr>
+            <a:picLocks noChangeAspect="1"/>
+          </p:cNvPicPr>
+          <p:nvPr/>
+        </p:nvPicPr>
+        <p:blipFill>
+          <a:blip r:embed="rId4"/>
+          <a:stretch>
+            <a:fillRect/>
+          </a:stretch>
+        </p:blipFill>
+        <p:spPr>
+          <a:xfrm>
+            <a:off x="611241" y="1094226"/>
+            <a:ext cx="362976" cy="362976"/>
+          </a:xfrm>
+          <a:prstGeom prst="rect">
+            <a:avLst/>
+          </a:prstGeom>
+          <a:ln>
+            <a:noFill/>
+          </a:ln>
+          <a:effectLst>
+            <a:outerShdw blurRad="292100" dist="139700" dir="2700000" algn="tl" rotWithShape="0">
+              <a:srgbClr val="333333">
+                <a:alpha val="65000"/>
+              </a:srgbClr>
+            </a:outerShdw>
+          </a:effectLst>
+        </p:spPr>
+      </p:pic>
+      <p:pic>
+        <p:nvPicPr>
+          <p:cNvPr id="13" name="Picture 12">
+            <a:extLst>
+              <a:ext uri="{FF2B5EF4-FFF2-40B4-BE49-F238E27FC236}">
+                <a16:creationId xmlns:a16="http://schemas.microsoft.com/office/drawing/2014/main" id="{869CE6C0-0359-14DC-3D6C-D2A6584829F3}"/>
+              </a:ext>
+            </a:extLst>
+          </p:cNvPr>
+          <p:cNvPicPr>
+            <a:picLocks noChangeAspect="1"/>
+          </p:cNvPicPr>
+          <p:nvPr/>
+        </p:nvPicPr>
+        <p:blipFill>
+          <a:blip r:embed="rId5"/>
+          <a:stretch>
+            <a:fillRect/>
+          </a:stretch>
+        </p:blipFill>
+        <p:spPr>
+          <a:xfrm>
+            <a:off x="1065482" y="1094226"/>
+            <a:ext cx="371111" cy="362976"/>
+          </a:xfrm>
+          <a:prstGeom prst="rect">
+            <a:avLst/>
+          </a:prstGeom>
+          <a:ln>
+            <a:noFill/>
+          </a:ln>
+          <a:effectLst>
+            <a:outerShdw blurRad="292100" dist="139700" dir="2700000" algn="tl" rotWithShape="0">
+              <a:srgbClr val="333333">
+                <a:alpha val="65000"/>
+              </a:srgbClr>
+            </a:outerShdw>
+          </a:effectLst>
+        </p:spPr>
+      </p:pic>
+    </p:spTree>
+    <p:extLst>
+      <p:ext uri="{BB962C8B-B14F-4D97-AF65-F5344CB8AC3E}">
+        <p14:creationId xmlns:p14="http://schemas.microsoft.com/office/powerpoint/2010/main" val="3429116431"/>
+      </p:ext>
+    </p:extLst>
+  </p:cSld>
+  <p:clrMapOvr>
+    <a:masterClrMapping/>
+  </p:clrMapOvr>
+</p:sld>
+</file>
+
+<file path=ppt/slides/slide3.xml><?xml version="1.0" encoding="utf-8"?>
+<p:sld xmlns:a="http://schemas.openxmlformats.org/drawingml/2006/main" xmlns:r="http://schemas.openxmlformats.org/officeDocument/2006/relationships" xmlns:p="http://schemas.openxmlformats.org/presentationml/2006/main">
+  <p:cSld>
+    <p:spTree>
+      <p:nvGrpSpPr>
+        <p:cNvPr id="1" name="">
+          <a:extLst>
+            <a:ext uri="{FF2B5EF4-FFF2-40B4-BE49-F238E27FC236}">
+              <a16:creationId xmlns:a16="http://schemas.microsoft.com/office/drawing/2014/main" id="{CD0AE5B6-80DF-D70A-F20B-FEA4ECBA7859}"/>
+            </a:ext>
+          </a:extLst>
+        </p:cNvPr>
+        <p:cNvGrpSpPr/>
+        <p:nvPr/>
+      </p:nvGrpSpPr>
+      <p:grpSpPr>
+        <a:xfrm>
+          <a:off x="0" y="0"/>
+          <a:ext cx="0" cy="0"/>
+          <a:chOff x="0" y="0"/>
+          <a:chExt cx="0" cy="0"/>
+        </a:xfrm>
+      </p:grpSpPr>
+      <p:sp>
+        <p:nvSpPr>
+          <p:cNvPr id="2" name="Title 1">
+            <a:extLst>
+              <a:ext uri="{FF2B5EF4-FFF2-40B4-BE49-F238E27FC236}">
+                <a16:creationId xmlns:a16="http://schemas.microsoft.com/office/drawing/2014/main" id="{359C0FF8-4E49-6AF6-6543-8EC91803EF6C}"/>
+              </a:ext>
+            </a:extLst>
+          </p:cNvPr>
+          <p:cNvSpPr>
+            <a:spLocks noGrp="1"/>
+          </p:cNvSpPr>
+          <p:nvPr>
+            <p:ph type="title"/>
+          </p:nvPr>
+        </p:nvSpPr>
+        <p:spPr>
+          <a:xfrm>
+            <a:off x="1754188" y="452718"/>
+            <a:ext cx="8296646" cy="1400530"/>
+          </a:xfrm>
+        </p:spPr>
+        <p:txBody>
+          <a:bodyPr/>
+          <a:lstStyle/>
+          <a:p>
+            <a:r>
+              <a:rPr lang="en-US" b="1" dirty="0"/>
+              <a:t>Understanding EAS Metamodel</a:t>
+            </a:r>
+          </a:p>
+        </p:txBody>
+      </p:sp>
+      <p:pic>
+        <p:nvPicPr>
+          <p:cNvPr id="6" name="Content Placeholder 5">
+            <a:extLst>
+              <a:ext uri="{FF2B5EF4-FFF2-40B4-BE49-F238E27FC236}">
+                <a16:creationId xmlns:a16="http://schemas.microsoft.com/office/drawing/2014/main" id="{ADEB0D3F-A404-6BB2-1E1D-5CC2474878EC}"/>
+              </a:ext>
+            </a:extLst>
+          </p:cNvPr>
+          <p:cNvPicPr>
+            <a:picLocks noGrp="1" noChangeAspect="1"/>
+          </p:cNvPicPr>
+          <p:nvPr>
+            <p:ph idx="1"/>
+          </p:nvPr>
+        </p:nvPicPr>
+        <p:blipFill>
+          <a:blip r:embed="rId2"/>
+          <a:stretch>
+            <a:fillRect/>
+          </a:stretch>
+        </p:blipFill>
+        <p:spPr>
+          <a:xfrm>
+            <a:off x="1456647" y="1224062"/>
+            <a:ext cx="4748944" cy="5389674"/>
+          </a:xfrm>
+          <a:prstGeom prst="rect">
+            <a:avLst/>
+          </a:prstGeom>
+          <a:ln>
+            <a:noFill/>
+          </a:ln>
+          <a:effectLst>
+            <a:outerShdw blurRad="292100" dist="139700" dir="2700000" algn="tl" rotWithShape="0">
+              <a:srgbClr val="333333">
+                <a:alpha val="65000"/>
+              </a:srgbClr>
+            </a:outerShdw>
+          </a:effectLst>
+        </p:spPr>
+      </p:pic>
+      <p:sp>
+        <p:nvSpPr>
+          <p:cNvPr id="4" name="Title 1">
+            <a:extLst>
+              <a:ext uri="{FF2B5EF4-FFF2-40B4-BE49-F238E27FC236}">
+                <a16:creationId xmlns:a16="http://schemas.microsoft.com/office/drawing/2014/main" id="{76D7B0F9-1CC8-9F3C-0657-1F59FC2CBC65}"/>
+              </a:ext>
+            </a:extLst>
+          </p:cNvPr>
+          <p:cNvSpPr txBox="1">
+            <a:spLocks/>
+          </p:cNvSpPr>
+          <p:nvPr/>
+        </p:nvSpPr>
+        <p:spPr>
+          <a:xfrm>
+            <a:off x="0" y="3143"/>
+            <a:ext cx="1754188" cy="1058013"/>
+          </a:xfrm>
+          <a:prstGeom prst="rect">
+            <a:avLst/>
+          </a:prstGeom>
+        </p:spPr>
+        <p:txBody>
+          <a:bodyPr vert="horz" lIns="91440" tIns="45720" rIns="91440" bIns="45720" rtlCol="0" anchor="ctr">
+            <a:noAutofit/>
+          </a:bodyPr>
+          <a:lstStyle>
+            <a:lvl1pPr algn="l" defTabSz="457200" rtl="0" eaLnBrk="1" latinLnBrk="0" hangingPunct="1">
+              <a:spcBef>
+                <a:spcPct val="0"/>
+              </a:spcBef>
+              <a:buNone/>
+              <a:defRPr sz="7200" b="0" i="0" kern="1200">
+                <a:solidFill>
+                  <a:schemeClr val="tx2"/>
+                </a:solidFill>
+                <a:latin typeface="+mj-lt"/>
+                <a:ea typeface="+mj-ea"/>
+                <a:cs typeface="+mj-cs"/>
+              </a:defRPr>
+            </a:lvl1pPr>
+            <a:lvl2pPr eaLnBrk="1" hangingPunct="1">
+              <a:defRPr>
+                <a:solidFill>
+                  <a:schemeClr val="tx2"/>
+                </a:solidFill>
+              </a:defRPr>
+            </a:lvl2pPr>
+            <a:lvl3pPr eaLnBrk="1" hangingPunct="1">
+              <a:defRPr>
+                <a:solidFill>
+                  <a:schemeClr val="tx2"/>
+                </a:solidFill>
+              </a:defRPr>
+            </a:lvl3pPr>
+            <a:lvl4pPr eaLnBrk="1" hangingPunct="1">
+              <a:defRPr>
+                <a:solidFill>
+                  <a:schemeClr val="tx2"/>
+                </a:solidFill>
+              </a:defRPr>
+            </a:lvl4pPr>
+            <a:lvl5pPr eaLnBrk="1" hangingPunct="1">
+              <a:defRPr>
+                <a:solidFill>
+                  <a:schemeClr val="tx2"/>
+                </a:solidFill>
+              </a:defRPr>
+            </a:lvl5pPr>
+            <a:lvl6pPr eaLnBrk="1" hangingPunct="1">
+              <a:defRPr>
+                <a:solidFill>
+                  <a:schemeClr val="tx2"/>
+                </a:solidFill>
+              </a:defRPr>
+            </a:lvl6pPr>
+            <a:lvl7pPr eaLnBrk="1" hangingPunct="1">
+              <a:defRPr>
+                <a:solidFill>
+                  <a:schemeClr val="tx2"/>
+                </a:solidFill>
+              </a:defRPr>
+            </a:lvl7pPr>
+            <a:lvl8pPr eaLnBrk="1" hangingPunct="1">
+              <a:defRPr>
+                <a:solidFill>
+                  <a:schemeClr val="tx2"/>
+                </a:solidFill>
+              </a:defRPr>
+            </a:lvl8pPr>
+            <a:lvl9pPr eaLnBrk="1" hangingPunct="1">
+              <a:defRPr>
+                <a:solidFill>
+                  <a:schemeClr val="tx2"/>
+                </a:solidFill>
+              </a:defRPr>
+            </a:lvl9pPr>
+          </a:lstStyle>
+          <a:p>
+            <a:pPr algn="ctr"/>
+            <a:r>
+              <a:rPr lang="en-US" b="1" dirty="0">
+                <a:solidFill>
+                  <a:schemeClr val="accent1">
+                    <a:lumMod val="75000"/>
+                  </a:schemeClr>
+                </a:solidFill>
+              </a:rPr>
+              <a:t>003</a:t>
+            </a:r>
+            <a:endParaRPr lang="ru-RU" b="1" dirty="0">
+              <a:solidFill>
+                <a:schemeClr val="accent1">
+                  <a:lumMod val="75000"/>
+                </a:schemeClr>
+              </a:solidFill>
+            </a:endParaRPr>
+          </a:p>
+        </p:txBody>
+      </p:sp>
+      <p:pic>
+        <p:nvPicPr>
+          <p:cNvPr id="7" name="Picture 6">
+            <a:extLst>
+              <a:ext uri="{FF2B5EF4-FFF2-40B4-BE49-F238E27FC236}">
+                <a16:creationId xmlns:a16="http://schemas.microsoft.com/office/drawing/2014/main" id="{F342C48B-BA5B-E812-69AC-BF70DDE307A5}"/>
+              </a:ext>
+            </a:extLst>
+          </p:cNvPr>
+          <p:cNvPicPr>
+            <a:picLocks noChangeAspect="1"/>
+          </p:cNvPicPr>
+          <p:nvPr/>
+        </p:nvPicPr>
+        <p:blipFill>
+          <a:blip r:embed="rId3"/>
+          <a:stretch>
+            <a:fillRect/>
+          </a:stretch>
+        </p:blipFill>
+        <p:spPr>
+          <a:xfrm>
+            <a:off x="181336" y="3429000"/>
+            <a:ext cx="1772040" cy="398709"/>
+          </a:xfrm>
+          <a:prstGeom prst="roundRect">
+            <a:avLst>
+              <a:gd name="adj" fmla="val 8594"/>
+            </a:avLst>
+          </a:prstGeom>
+          <a:solidFill>
+            <a:srgbClr val="FFFFFF">
+              <a:shade val="85000"/>
+            </a:srgbClr>
+          </a:solidFill>
+          <a:ln>
+            <a:noFill/>
+          </a:ln>
+          <a:effectLst>
+            <a:reflection blurRad="12700" stA="38000" endPos="28000" dist="5000" dir="5400000" sy="-100000" algn="bl" rotWithShape="0"/>
+          </a:effectLst>
+        </p:spPr>
+      </p:pic>
+      <p:pic>
+        <p:nvPicPr>
+          <p:cNvPr id="8" name="Picture 7">
+            <a:extLst>
+              <a:ext uri="{FF2B5EF4-FFF2-40B4-BE49-F238E27FC236}">
+                <a16:creationId xmlns:a16="http://schemas.microsoft.com/office/drawing/2014/main" id="{8D408417-9471-F069-8916-5C469353ED20}"/>
+              </a:ext>
+            </a:extLst>
+          </p:cNvPr>
+          <p:cNvPicPr>
+            <a:picLocks noChangeAspect="1"/>
+          </p:cNvPicPr>
+          <p:nvPr/>
+        </p:nvPicPr>
+        <p:blipFill>
+          <a:blip r:embed="rId4"/>
+          <a:stretch>
+            <a:fillRect/>
+          </a:stretch>
+        </p:blipFill>
+        <p:spPr>
+          <a:xfrm>
+            <a:off x="7959779" y="1673987"/>
+            <a:ext cx="1805255" cy="1353942"/>
+          </a:xfrm>
+          <a:prstGeom prst="rect">
+            <a:avLst/>
+          </a:prstGeom>
+        </p:spPr>
+      </p:pic>
+      <p:sp>
+        <p:nvSpPr>
+          <p:cNvPr id="9" name="TextBox 8">
+            <a:extLst>
+              <a:ext uri="{FF2B5EF4-FFF2-40B4-BE49-F238E27FC236}">
+                <a16:creationId xmlns:a16="http://schemas.microsoft.com/office/drawing/2014/main" id="{D06ABE23-80C9-5A69-3112-B7949CCA9FC3}"/>
+              </a:ext>
+            </a:extLst>
+          </p:cNvPr>
+          <p:cNvSpPr txBox="1"/>
+          <p:nvPr/>
+        </p:nvSpPr>
+        <p:spPr>
+          <a:xfrm>
+            <a:off x="6503132" y="1298289"/>
+            <a:ext cx="5246949" cy="307777"/>
+          </a:xfrm>
+          <a:prstGeom prst="rect">
+            <a:avLst/>
+          </a:prstGeom>
+          <a:noFill/>
+        </p:spPr>
+        <p:txBody>
+          <a:bodyPr wrap="none" rtlCol="0">
+            <a:spAutoFit/>
+          </a:bodyPr>
+          <a:lstStyle/>
+          <a:p>
+            <a:r>
+              <a:rPr lang="en-US" sz="1400" b="1" dirty="0">
+                <a:solidFill>
+                  <a:schemeClr val="accent1">
+                    <a:lumMod val="60000"/>
+                    <a:lumOff val="40000"/>
+                  </a:schemeClr>
+                </a:solidFill>
+              </a:rPr>
+              <a:t>MODAF: British Ministry of Defense Architecture Framework</a:t>
+            </a:r>
+          </a:p>
+        </p:txBody>
+      </p:sp>
+      <p:sp>
+        <p:nvSpPr>
+          <p:cNvPr id="10" name="TextBox 9">
+            <a:extLst>
+              <a:ext uri="{FF2B5EF4-FFF2-40B4-BE49-F238E27FC236}">
+                <a16:creationId xmlns:a16="http://schemas.microsoft.com/office/drawing/2014/main" id="{8D495C7E-5242-C6A4-F1AF-6FDE81C768BB}"/>
+              </a:ext>
+            </a:extLst>
+          </p:cNvPr>
+          <p:cNvSpPr txBox="1"/>
+          <p:nvPr/>
+        </p:nvSpPr>
+        <p:spPr>
+          <a:xfrm>
+            <a:off x="6503132" y="2998269"/>
+            <a:ext cx="4374916" cy="307777"/>
+          </a:xfrm>
+          <a:prstGeom prst="rect">
+            <a:avLst/>
+          </a:prstGeom>
+          <a:noFill/>
+        </p:spPr>
+        <p:txBody>
+          <a:bodyPr wrap="none" rtlCol="0">
+            <a:spAutoFit/>
+          </a:bodyPr>
+          <a:lstStyle/>
+          <a:p>
+            <a:r>
+              <a:rPr lang="en-US" sz="1400" b="1" dirty="0">
+                <a:solidFill>
+                  <a:schemeClr val="accent1">
+                    <a:lumMod val="60000"/>
+                    <a:lumOff val="40000"/>
+                  </a:schemeClr>
+                </a:solidFill>
+              </a:rPr>
+              <a:t>FEAF: Federal Enterprise Architecture Framework</a:t>
+            </a:r>
+          </a:p>
+        </p:txBody>
+      </p:sp>
+      <p:pic>
+        <p:nvPicPr>
+          <p:cNvPr id="11" name="Picture 10">
+            <a:extLst>
+              <a:ext uri="{FF2B5EF4-FFF2-40B4-BE49-F238E27FC236}">
+                <a16:creationId xmlns:a16="http://schemas.microsoft.com/office/drawing/2014/main" id="{11A6F2B2-B902-0850-51B9-E170D2F5AC05}"/>
+              </a:ext>
+            </a:extLst>
+          </p:cNvPr>
+          <p:cNvPicPr>
+            <a:picLocks noChangeAspect="1"/>
+          </p:cNvPicPr>
+          <p:nvPr/>
+        </p:nvPicPr>
+        <p:blipFill>
+          <a:blip r:embed="rId5"/>
+          <a:stretch>
+            <a:fillRect/>
+          </a:stretch>
+        </p:blipFill>
+        <p:spPr>
+          <a:xfrm>
+            <a:off x="7959778" y="3329406"/>
+            <a:ext cx="1805255" cy="1457327"/>
+          </a:xfrm>
+          <a:prstGeom prst="rect">
+            <a:avLst/>
+          </a:prstGeom>
+        </p:spPr>
+      </p:pic>
+      <p:sp>
+        <p:nvSpPr>
+          <p:cNvPr id="12" name="TextBox 11">
+            <a:extLst>
+              <a:ext uri="{FF2B5EF4-FFF2-40B4-BE49-F238E27FC236}">
+                <a16:creationId xmlns:a16="http://schemas.microsoft.com/office/drawing/2014/main" id="{DD01B92F-574A-7012-85A2-7F69847B32BF}"/>
+              </a:ext>
+            </a:extLst>
+          </p:cNvPr>
+          <p:cNvSpPr txBox="1"/>
+          <p:nvPr/>
+        </p:nvSpPr>
+        <p:spPr>
+          <a:xfrm>
+            <a:off x="6503132" y="4787312"/>
+            <a:ext cx="4464684" cy="307777"/>
+          </a:xfrm>
+          <a:prstGeom prst="rect">
+            <a:avLst/>
+          </a:prstGeom>
+          <a:noFill/>
+        </p:spPr>
+        <p:txBody>
+          <a:bodyPr wrap="none" rtlCol="0">
+            <a:spAutoFit/>
+          </a:bodyPr>
+          <a:lstStyle/>
+          <a:p>
+            <a:r>
+              <a:rPr lang="en-US" sz="1400" b="1" dirty="0">
+                <a:solidFill>
+                  <a:schemeClr val="accent1">
+                    <a:lumMod val="60000"/>
+                    <a:lumOff val="40000"/>
+                  </a:schemeClr>
+                </a:solidFill>
+              </a:rPr>
+              <a:t>TOGAF: The Open Group Architecture Framework</a:t>
+            </a:r>
+          </a:p>
+        </p:txBody>
+      </p:sp>
+      <p:pic>
+        <p:nvPicPr>
+          <p:cNvPr id="13" name="Picture 12">
+            <a:extLst>
+              <a:ext uri="{FF2B5EF4-FFF2-40B4-BE49-F238E27FC236}">
+                <a16:creationId xmlns:a16="http://schemas.microsoft.com/office/drawing/2014/main" id="{1B859B87-CA7F-1075-138D-47F35FAF96FD}"/>
+              </a:ext>
+            </a:extLst>
+          </p:cNvPr>
+          <p:cNvPicPr>
+            <a:picLocks noChangeAspect="1"/>
+          </p:cNvPicPr>
+          <p:nvPr/>
+        </p:nvPicPr>
+        <p:blipFill>
+          <a:blip r:embed="rId6"/>
+          <a:stretch>
+            <a:fillRect/>
+          </a:stretch>
+        </p:blipFill>
+        <p:spPr>
+          <a:xfrm>
+            <a:off x="7959778" y="5119027"/>
+            <a:ext cx="1805255" cy="1426151"/>
+          </a:xfrm>
+          <a:prstGeom prst="rect">
+            <a:avLst/>
+          </a:prstGeom>
+        </p:spPr>
+      </p:pic>
+    </p:spTree>
+    <p:extLst>
+      <p:ext uri="{BB962C8B-B14F-4D97-AF65-F5344CB8AC3E}">
+        <p14:creationId xmlns:p14="http://schemas.microsoft.com/office/powerpoint/2010/main" val="3349596429"/>
+      </p:ext>
+    </p:extLst>
+  </p:cSld>
+  <p:clrMapOvr>
+    <a:masterClrMapping/>
+  </p:clrMapOvr>
+</p:sld>
+</file>
+
+<file path=ppt/slides/slide30.xml><?xml version="1.0" encoding="utf-8"?>
 <p:sld xmlns:a="http://schemas.openxmlformats.org/drawingml/2006/main" xmlns:r="http://schemas.openxmlformats.org/officeDocument/2006/relationships" xmlns:p="http://schemas.openxmlformats.org/presentationml/2006/main">
   <p:cSld>
     <p:bg>
@@ -19853,497 +20913,6 @@
 </p:sld>
 </file>
 
-<file path=ppt/slides/slide3.xml><?xml version="1.0" encoding="utf-8"?>
-<p:sld xmlns:a="http://schemas.openxmlformats.org/drawingml/2006/main" xmlns:r="http://schemas.openxmlformats.org/officeDocument/2006/relationships" xmlns:p="http://schemas.openxmlformats.org/presentationml/2006/main">
-  <p:cSld>
-    <p:spTree>
-      <p:nvGrpSpPr>
-        <p:cNvPr id="1" name="">
-          <a:extLst>
-            <a:ext uri="{FF2B5EF4-FFF2-40B4-BE49-F238E27FC236}">
-              <a16:creationId xmlns:a16="http://schemas.microsoft.com/office/drawing/2014/main" id="{CD0AE5B6-80DF-D70A-F20B-FEA4ECBA7859}"/>
-            </a:ext>
-          </a:extLst>
-        </p:cNvPr>
-        <p:cNvGrpSpPr/>
-        <p:nvPr/>
-      </p:nvGrpSpPr>
-      <p:grpSpPr>
-        <a:xfrm>
-          <a:off x="0" y="0"/>
-          <a:ext cx="0" cy="0"/>
-          <a:chOff x="0" y="0"/>
-          <a:chExt cx="0" cy="0"/>
-        </a:xfrm>
-      </p:grpSpPr>
-      <p:sp>
-        <p:nvSpPr>
-          <p:cNvPr id="2" name="Title 1">
-            <a:extLst>
-              <a:ext uri="{FF2B5EF4-FFF2-40B4-BE49-F238E27FC236}">
-                <a16:creationId xmlns:a16="http://schemas.microsoft.com/office/drawing/2014/main" id="{359C0FF8-4E49-6AF6-6543-8EC91803EF6C}"/>
-              </a:ext>
-            </a:extLst>
-          </p:cNvPr>
-          <p:cNvSpPr>
-            <a:spLocks noGrp="1"/>
-          </p:cNvSpPr>
-          <p:nvPr>
-            <p:ph type="title"/>
-          </p:nvPr>
-        </p:nvSpPr>
-        <p:spPr>
-          <a:xfrm>
-            <a:off x="1754188" y="452718"/>
-            <a:ext cx="8296646" cy="1400530"/>
-          </a:xfrm>
-        </p:spPr>
-        <p:txBody>
-          <a:bodyPr/>
-          <a:lstStyle/>
-          <a:p>
-            <a:r>
-              <a:rPr lang="en-US" b="1" dirty="0"/>
-              <a:t>Understanding EAS Metamodel</a:t>
-            </a:r>
-          </a:p>
-        </p:txBody>
-      </p:sp>
-      <p:pic>
-        <p:nvPicPr>
-          <p:cNvPr id="6" name="Content Placeholder 5">
-            <a:extLst>
-              <a:ext uri="{FF2B5EF4-FFF2-40B4-BE49-F238E27FC236}">
-                <a16:creationId xmlns:a16="http://schemas.microsoft.com/office/drawing/2014/main" id="{ADEB0D3F-A404-6BB2-1E1D-5CC2474878EC}"/>
-              </a:ext>
-            </a:extLst>
-          </p:cNvPr>
-          <p:cNvPicPr>
-            <a:picLocks noGrp="1" noChangeAspect="1"/>
-          </p:cNvPicPr>
-          <p:nvPr>
-            <p:ph idx="1"/>
-          </p:nvPr>
-        </p:nvPicPr>
-        <p:blipFill>
-          <a:blip r:embed="rId2"/>
-          <a:stretch>
-            <a:fillRect/>
-          </a:stretch>
-        </p:blipFill>
-        <p:spPr>
-          <a:xfrm>
-            <a:off x="1456647" y="1224062"/>
-            <a:ext cx="4748944" cy="5389674"/>
-          </a:xfrm>
-          <a:prstGeom prst="rect">
-            <a:avLst/>
-          </a:prstGeom>
-          <a:ln>
-            <a:noFill/>
-          </a:ln>
-          <a:effectLst>
-            <a:outerShdw blurRad="292100" dist="139700" dir="2700000" algn="tl" rotWithShape="0">
-              <a:srgbClr val="333333">
-                <a:alpha val="65000"/>
-              </a:srgbClr>
-            </a:outerShdw>
-          </a:effectLst>
-        </p:spPr>
-      </p:pic>
-      <p:sp>
-        <p:nvSpPr>
-          <p:cNvPr id="4" name="Title 1">
-            <a:extLst>
-              <a:ext uri="{FF2B5EF4-FFF2-40B4-BE49-F238E27FC236}">
-                <a16:creationId xmlns:a16="http://schemas.microsoft.com/office/drawing/2014/main" id="{76D7B0F9-1CC8-9F3C-0657-1F59FC2CBC65}"/>
-              </a:ext>
-            </a:extLst>
-          </p:cNvPr>
-          <p:cNvSpPr txBox="1">
-            <a:spLocks/>
-          </p:cNvSpPr>
-          <p:nvPr/>
-        </p:nvSpPr>
-        <p:spPr>
-          <a:xfrm>
-            <a:off x="0" y="3143"/>
-            <a:ext cx="1754188" cy="1058013"/>
-          </a:xfrm>
-          <a:prstGeom prst="rect">
-            <a:avLst/>
-          </a:prstGeom>
-        </p:spPr>
-        <p:txBody>
-          <a:bodyPr vert="horz" lIns="91440" tIns="45720" rIns="91440" bIns="45720" rtlCol="0" anchor="ctr">
-            <a:noAutofit/>
-          </a:bodyPr>
-          <a:lstStyle>
-            <a:lvl1pPr algn="l" defTabSz="457200" rtl="0" eaLnBrk="1" latinLnBrk="0" hangingPunct="1">
-              <a:spcBef>
-                <a:spcPct val="0"/>
-              </a:spcBef>
-              <a:buNone/>
-              <a:defRPr sz="7200" b="0" i="0" kern="1200">
-                <a:solidFill>
-                  <a:schemeClr val="tx2"/>
-                </a:solidFill>
-                <a:latin typeface="+mj-lt"/>
-                <a:ea typeface="+mj-ea"/>
-                <a:cs typeface="+mj-cs"/>
-              </a:defRPr>
-            </a:lvl1pPr>
-            <a:lvl2pPr eaLnBrk="1" hangingPunct="1">
-              <a:defRPr>
-                <a:solidFill>
-                  <a:schemeClr val="tx2"/>
-                </a:solidFill>
-              </a:defRPr>
-            </a:lvl2pPr>
-            <a:lvl3pPr eaLnBrk="1" hangingPunct="1">
-              <a:defRPr>
-                <a:solidFill>
-                  <a:schemeClr val="tx2"/>
-                </a:solidFill>
-              </a:defRPr>
-            </a:lvl3pPr>
-            <a:lvl4pPr eaLnBrk="1" hangingPunct="1">
-              <a:defRPr>
-                <a:solidFill>
-                  <a:schemeClr val="tx2"/>
-                </a:solidFill>
-              </a:defRPr>
-            </a:lvl4pPr>
-            <a:lvl5pPr eaLnBrk="1" hangingPunct="1">
-              <a:defRPr>
-                <a:solidFill>
-                  <a:schemeClr val="tx2"/>
-                </a:solidFill>
-              </a:defRPr>
-            </a:lvl5pPr>
-            <a:lvl6pPr eaLnBrk="1" hangingPunct="1">
-              <a:defRPr>
-                <a:solidFill>
-                  <a:schemeClr val="tx2"/>
-                </a:solidFill>
-              </a:defRPr>
-            </a:lvl6pPr>
-            <a:lvl7pPr eaLnBrk="1" hangingPunct="1">
-              <a:defRPr>
-                <a:solidFill>
-                  <a:schemeClr val="tx2"/>
-                </a:solidFill>
-              </a:defRPr>
-            </a:lvl7pPr>
-            <a:lvl8pPr eaLnBrk="1" hangingPunct="1">
-              <a:defRPr>
-                <a:solidFill>
-                  <a:schemeClr val="tx2"/>
-                </a:solidFill>
-              </a:defRPr>
-            </a:lvl8pPr>
-            <a:lvl9pPr eaLnBrk="1" hangingPunct="1">
-              <a:defRPr>
-                <a:solidFill>
-                  <a:schemeClr val="tx2"/>
-                </a:solidFill>
-              </a:defRPr>
-            </a:lvl9pPr>
-          </a:lstStyle>
-          <a:p>
-            <a:pPr algn="ctr"/>
-            <a:r>
-              <a:rPr lang="en-US" b="1" dirty="0">
-                <a:solidFill>
-                  <a:schemeClr val="accent1">
-                    <a:lumMod val="75000"/>
-                  </a:schemeClr>
-                </a:solidFill>
-              </a:rPr>
-              <a:t>003</a:t>
-            </a:r>
-            <a:endParaRPr lang="ru-RU" b="1" dirty="0">
-              <a:solidFill>
-                <a:schemeClr val="accent1">
-                  <a:lumMod val="75000"/>
-                </a:schemeClr>
-              </a:solidFill>
-            </a:endParaRPr>
-          </a:p>
-        </p:txBody>
-      </p:sp>
-      <p:pic>
-        <p:nvPicPr>
-          <p:cNvPr id="7" name="Picture 6">
-            <a:extLst>
-              <a:ext uri="{FF2B5EF4-FFF2-40B4-BE49-F238E27FC236}">
-                <a16:creationId xmlns:a16="http://schemas.microsoft.com/office/drawing/2014/main" id="{F342C48B-BA5B-E812-69AC-BF70DDE307A5}"/>
-              </a:ext>
-            </a:extLst>
-          </p:cNvPr>
-          <p:cNvPicPr>
-            <a:picLocks noChangeAspect="1"/>
-          </p:cNvPicPr>
-          <p:nvPr/>
-        </p:nvPicPr>
-        <p:blipFill>
-          <a:blip r:embed="rId3"/>
-          <a:stretch>
-            <a:fillRect/>
-          </a:stretch>
-        </p:blipFill>
-        <p:spPr>
-          <a:xfrm>
-            <a:off x="181336" y="3429000"/>
-            <a:ext cx="1772040" cy="398709"/>
-          </a:xfrm>
-          <a:prstGeom prst="roundRect">
-            <a:avLst>
-              <a:gd name="adj" fmla="val 8594"/>
-            </a:avLst>
-          </a:prstGeom>
-          <a:solidFill>
-            <a:srgbClr val="FFFFFF">
-              <a:shade val="85000"/>
-            </a:srgbClr>
-          </a:solidFill>
-          <a:ln>
-            <a:noFill/>
-          </a:ln>
-          <a:effectLst>
-            <a:reflection blurRad="12700" stA="38000" endPos="28000" dist="5000" dir="5400000" sy="-100000" algn="bl" rotWithShape="0"/>
-          </a:effectLst>
-        </p:spPr>
-      </p:pic>
-      <p:pic>
-        <p:nvPicPr>
-          <p:cNvPr id="8" name="Picture 7">
-            <a:extLst>
-              <a:ext uri="{FF2B5EF4-FFF2-40B4-BE49-F238E27FC236}">
-                <a16:creationId xmlns:a16="http://schemas.microsoft.com/office/drawing/2014/main" id="{8D408417-9471-F069-8916-5C469353ED20}"/>
-              </a:ext>
-            </a:extLst>
-          </p:cNvPr>
-          <p:cNvPicPr>
-            <a:picLocks noChangeAspect="1"/>
-          </p:cNvPicPr>
-          <p:nvPr/>
-        </p:nvPicPr>
-        <p:blipFill>
-          <a:blip r:embed="rId4"/>
-          <a:stretch>
-            <a:fillRect/>
-          </a:stretch>
-        </p:blipFill>
-        <p:spPr>
-          <a:xfrm>
-            <a:off x="7959779" y="1673987"/>
-            <a:ext cx="1805255" cy="1353942"/>
-          </a:xfrm>
-          <a:prstGeom prst="rect">
-            <a:avLst/>
-          </a:prstGeom>
-        </p:spPr>
-      </p:pic>
-      <p:sp>
-        <p:nvSpPr>
-          <p:cNvPr id="9" name="TextBox 8">
-            <a:extLst>
-              <a:ext uri="{FF2B5EF4-FFF2-40B4-BE49-F238E27FC236}">
-                <a16:creationId xmlns:a16="http://schemas.microsoft.com/office/drawing/2014/main" id="{D06ABE23-80C9-5A69-3112-B7949CCA9FC3}"/>
-              </a:ext>
-            </a:extLst>
-          </p:cNvPr>
-          <p:cNvSpPr txBox="1"/>
-          <p:nvPr/>
-        </p:nvSpPr>
-        <p:spPr>
-          <a:xfrm>
-            <a:off x="6503132" y="1298289"/>
-            <a:ext cx="5246949" cy="307777"/>
-          </a:xfrm>
-          <a:prstGeom prst="rect">
-            <a:avLst/>
-          </a:prstGeom>
-          <a:noFill/>
-        </p:spPr>
-        <p:txBody>
-          <a:bodyPr wrap="none" rtlCol="0">
-            <a:spAutoFit/>
-          </a:bodyPr>
-          <a:lstStyle/>
-          <a:p>
-            <a:r>
-              <a:rPr lang="en-US" sz="1400" b="1" dirty="0">
-                <a:solidFill>
-                  <a:schemeClr val="accent1">
-                    <a:lumMod val="60000"/>
-                    <a:lumOff val="40000"/>
-                  </a:schemeClr>
-                </a:solidFill>
-              </a:rPr>
-              <a:t>MODAF: British Ministry of Defense Architecture Framework</a:t>
-            </a:r>
-          </a:p>
-        </p:txBody>
-      </p:sp>
-      <p:sp>
-        <p:nvSpPr>
-          <p:cNvPr id="10" name="TextBox 9">
-            <a:extLst>
-              <a:ext uri="{FF2B5EF4-FFF2-40B4-BE49-F238E27FC236}">
-                <a16:creationId xmlns:a16="http://schemas.microsoft.com/office/drawing/2014/main" id="{8D495C7E-5242-C6A4-F1AF-6FDE81C768BB}"/>
-              </a:ext>
-            </a:extLst>
-          </p:cNvPr>
-          <p:cNvSpPr txBox="1"/>
-          <p:nvPr/>
-        </p:nvSpPr>
-        <p:spPr>
-          <a:xfrm>
-            <a:off x="6503132" y="2998269"/>
-            <a:ext cx="4374916" cy="307777"/>
-          </a:xfrm>
-          <a:prstGeom prst="rect">
-            <a:avLst/>
-          </a:prstGeom>
-          <a:noFill/>
-        </p:spPr>
-        <p:txBody>
-          <a:bodyPr wrap="none" rtlCol="0">
-            <a:spAutoFit/>
-          </a:bodyPr>
-          <a:lstStyle/>
-          <a:p>
-            <a:r>
-              <a:rPr lang="en-US" sz="1400" b="1" dirty="0">
-                <a:solidFill>
-                  <a:schemeClr val="accent1">
-                    <a:lumMod val="60000"/>
-                    <a:lumOff val="40000"/>
-                  </a:schemeClr>
-                </a:solidFill>
-              </a:rPr>
-              <a:t>FEAF: Federal Enterprise Architecture Framework</a:t>
-            </a:r>
-          </a:p>
-        </p:txBody>
-      </p:sp>
-      <p:pic>
-        <p:nvPicPr>
-          <p:cNvPr id="11" name="Picture 10">
-            <a:extLst>
-              <a:ext uri="{FF2B5EF4-FFF2-40B4-BE49-F238E27FC236}">
-                <a16:creationId xmlns:a16="http://schemas.microsoft.com/office/drawing/2014/main" id="{11A6F2B2-B902-0850-51B9-E170D2F5AC05}"/>
-              </a:ext>
-            </a:extLst>
-          </p:cNvPr>
-          <p:cNvPicPr>
-            <a:picLocks noChangeAspect="1"/>
-          </p:cNvPicPr>
-          <p:nvPr/>
-        </p:nvPicPr>
-        <p:blipFill>
-          <a:blip r:embed="rId5"/>
-          <a:stretch>
-            <a:fillRect/>
-          </a:stretch>
-        </p:blipFill>
-        <p:spPr>
-          <a:xfrm>
-            <a:off x="7959778" y="3329406"/>
-            <a:ext cx="1805255" cy="1457327"/>
-          </a:xfrm>
-          <a:prstGeom prst="rect">
-            <a:avLst/>
-          </a:prstGeom>
-        </p:spPr>
-      </p:pic>
-      <p:sp>
-        <p:nvSpPr>
-          <p:cNvPr id="12" name="TextBox 11">
-            <a:extLst>
-              <a:ext uri="{FF2B5EF4-FFF2-40B4-BE49-F238E27FC236}">
-                <a16:creationId xmlns:a16="http://schemas.microsoft.com/office/drawing/2014/main" id="{DD01B92F-574A-7012-85A2-7F69847B32BF}"/>
-              </a:ext>
-            </a:extLst>
-          </p:cNvPr>
-          <p:cNvSpPr txBox="1"/>
-          <p:nvPr/>
-        </p:nvSpPr>
-        <p:spPr>
-          <a:xfrm>
-            <a:off x="6503132" y="4787312"/>
-            <a:ext cx="4464684" cy="307777"/>
-          </a:xfrm>
-          <a:prstGeom prst="rect">
-            <a:avLst/>
-          </a:prstGeom>
-          <a:noFill/>
-        </p:spPr>
-        <p:txBody>
-          <a:bodyPr wrap="none" rtlCol="0">
-            <a:spAutoFit/>
-          </a:bodyPr>
-          <a:lstStyle/>
-          <a:p>
-            <a:r>
-              <a:rPr lang="en-US" sz="1400" b="1" dirty="0">
-                <a:solidFill>
-                  <a:schemeClr val="accent1">
-                    <a:lumMod val="60000"/>
-                    <a:lumOff val="40000"/>
-                  </a:schemeClr>
-                </a:solidFill>
-              </a:rPr>
-              <a:t>TOGAF: The Open Group Architecture Framework</a:t>
-            </a:r>
-          </a:p>
-        </p:txBody>
-      </p:sp>
-      <p:pic>
-        <p:nvPicPr>
-          <p:cNvPr id="13" name="Picture 12">
-            <a:extLst>
-              <a:ext uri="{FF2B5EF4-FFF2-40B4-BE49-F238E27FC236}">
-                <a16:creationId xmlns:a16="http://schemas.microsoft.com/office/drawing/2014/main" id="{1B859B87-CA7F-1075-138D-47F35FAF96FD}"/>
-              </a:ext>
-            </a:extLst>
-          </p:cNvPr>
-          <p:cNvPicPr>
-            <a:picLocks noChangeAspect="1"/>
-          </p:cNvPicPr>
-          <p:nvPr/>
-        </p:nvPicPr>
-        <p:blipFill>
-          <a:blip r:embed="rId6"/>
-          <a:stretch>
-            <a:fillRect/>
-          </a:stretch>
-        </p:blipFill>
-        <p:spPr>
-          <a:xfrm>
-            <a:off x="7959778" y="5119027"/>
-            <a:ext cx="1805255" cy="1426151"/>
-          </a:xfrm>
-          <a:prstGeom prst="rect">
-            <a:avLst/>
-          </a:prstGeom>
-        </p:spPr>
-      </p:pic>
-    </p:spTree>
-    <p:extLst>
-      <p:ext uri="{BB962C8B-B14F-4D97-AF65-F5344CB8AC3E}">
-        <p14:creationId xmlns:p14="http://schemas.microsoft.com/office/powerpoint/2010/main" val="3349596429"/>
-      </p:ext>
-    </p:extLst>
-  </p:cSld>
-  <p:clrMapOvr>
-    <a:masterClrMapping/>
-  </p:clrMapOvr>
-</p:sld>
-</file>
-
 <file path=ppt/slides/slide4.xml><?xml version="1.0" encoding="utf-8"?>
 <p:sld xmlns:a="http://schemas.openxmlformats.org/drawingml/2006/main" xmlns:r="http://schemas.openxmlformats.org/officeDocument/2006/relationships" xmlns:p="http://schemas.openxmlformats.org/presentationml/2006/main">
   <p:cSld>
@@ -21462,7 +22031,7 @@
             </a:br>
             <a:r>
               <a:rPr lang="en-US" b="1" dirty="0"/>
-              <a:t>- Business Conceptual - 01 </a:t>
+              <a:t>- Business Layer - 01 </a:t>
             </a:r>
           </a:p>
         </p:txBody>
@@ -22269,7 +22838,7 @@
             </a:br>
             <a:r>
               <a:rPr lang="en-US" b="1" dirty="0"/>
-              <a:t>- Business Conceptual - 03 </a:t>
+              <a:t>- Business Layer - 03 </a:t>
             </a:r>
           </a:p>
         </p:txBody>
@@ -23823,21 +24392,21 @@
 </file>
 
 <file path=customXml/item2.xml><?xml version="1.0" encoding="utf-8"?>
+<?mso-contentType ?>
+<FormTemplates xmlns="http://schemas.microsoft.com/sharepoint/v3/contenttype/forms">
+  <Display>DocumentLibraryForm</Display>
+  <Edit>DocumentLibraryForm</Edit>
+  <New>DocumentLibraryForm</New>
+</FormTemplates>
+</file>
+
+<file path=customXml/item3.xml><?xml version="1.0" encoding="utf-8"?>
 <p:properties xmlns:p="http://schemas.microsoft.com/office/2006/metadata/properties" xmlns:xsi="http://www.w3.org/2001/XMLSchema-instance" xmlns:pc="http://schemas.microsoft.com/office/infopath/2007/PartnerControls">
   <documentManagement>
     <Status xmlns="71af3243-3dd4-4a8d-8c0d-dd76da1f02a5">Not started</Status>
     <MediaServiceKeyPoints xmlns="71af3243-3dd4-4a8d-8c0d-dd76da1f02a5" xsi:nil="true"/>
   </documentManagement>
 </p:properties>
-</file>
-
-<file path=customXml/item3.xml><?xml version="1.0" encoding="utf-8"?>
-<?mso-contentType ?>
-<FormTemplates xmlns="http://schemas.microsoft.com/sharepoint/v3/contenttype/forms">
-  <Display>DocumentLibraryForm</Display>
-  <Edit>DocumentLibraryForm</Edit>
-  <New>DocumentLibraryForm</New>
-</FormTemplates>
 </file>
 
 <file path=customXml/itemProps1.xml><?xml version="1.0" encoding="utf-8"?>
@@ -23860,6 +24429,14 @@
 </file>
 
 <file path=customXml/itemProps2.xml><?xml version="1.0" encoding="utf-8"?>
+<ds:datastoreItem xmlns:ds="http://schemas.openxmlformats.org/officeDocument/2006/customXml" ds:itemID="{0D16958A-754B-4396-9457-FD7A427A37DD}">
+  <ds:schemaRefs>
+    <ds:schemaRef ds:uri="http://schemas.microsoft.com/sharepoint/v3/contenttype/forms"/>
+  </ds:schemaRefs>
+</ds:datastoreItem>
+</file>
+
+<file path=customXml/itemProps3.xml><?xml version="1.0" encoding="utf-8"?>
 <ds:datastoreItem xmlns:ds="http://schemas.openxmlformats.org/officeDocument/2006/customXml" ds:itemID="{048C88F1-1664-415F-AFCE-F6CF45809817}">
   <ds:schemaRefs>
     <ds:schemaRef ds:uri="http://schemas.microsoft.com/office/2006/metadata/properties"/>
@@ -23869,14 +24446,6 @@
 </ds:datastoreItem>
 </file>
 
-<file path=customXml/itemProps3.xml><?xml version="1.0" encoding="utf-8"?>
-<ds:datastoreItem xmlns:ds="http://schemas.openxmlformats.org/officeDocument/2006/customXml" ds:itemID="{0D16958A-754B-4396-9457-FD7A427A37DD}">
-  <ds:schemaRefs>
-    <ds:schemaRef ds:uri="http://schemas.microsoft.com/sharepoint/v3/contenttype/forms"/>
-  </ds:schemaRefs>
-</ds:datastoreItem>
-</file>
-
 <file path=docMetadata/LabelInfo.xml><?xml version="1.0" encoding="utf-8"?>
 <clbl:labelList xmlns:clbl="http://schemas.microsoft.com/office/2020/mipLabelMetadata">
   <clbl:label id="{19540963-e559-4020-8a90-fe8a502c2801}" enabled="1" method="Standard" siteId="{f25493ae-1c98-41d7-8a33-0be75f5fe603}" contentBits="0" removed="0"/>

--- a/Master_EAS_Meta-Model.pptx
+++ b/Master_EAS_Meta-Model.pptx
@@ -5,10 +5,10 @@
     <p:sldMasterId id="2147483648" r:id="rId4"/>
   </p:sldMasterIdLst>
   <p:notesMasterIdLst>
-    <p:notesMasterId r:id="rId35"/>
+    <p:notesMasterId r:id="rId37"/>
   </p:notesMasterIdLst>
   <p:handoutMasterIdLst>
-    <p:handoutMasterId r:id="rId36"/>
+    <p:handoutMasterId r:id="rId38"/>
   </p:handoutMasterIdLst>
   <p:sldIdLst>
     <p:sldId id="256" r:id="rId5"/>
@@ -40,7 +40,9 @@
     <p:sldId id="295" r:id="rId31"/>
     <p:sldId id="297" r:id="rId32"/>
     <p:sldId id="298" r:id="rId33"/>
-    <p:sldId id="267" r:id="rId34"/>
+    <p:sldId id="299" r:id="rId34"/>
+    <p:sldId id="300" r:id="rId35"/>
+    <p:sldId id="267" r:id="rId36"/>
   </p:sldIdLst>
   <p:sldSz cx="12192000" cy="6858000"/>
   <p:notesSz cx="6858000" cy="9144000"/>
@@ -848,7 +850,7 @@
           <a:p>
             <a:fld id="{EE000EEB-8338-48D7-8EE8-EE0082EF7602}" type="slidenum">
               <a:rPr lang="en-US" smtClean="0"/>
-              <a:t>30</a:t>
+              <a:t>32</a:t>
             </a:fld>
             <a:endParaRPr lang="en-US" dirty="0"/>
           </a:p>
@@ -20155,6 +20157,60 @@
           </a:effectLst>
         </p:spPr>
       </p:pic>
+      <p:pic>
+        <p:nvPicPr>
+          <p:cNvPr id="8" name="Picture 7">
+            <a:extLst>
+              <a:ext uri="{FF2B5EF4-FFF2-40B4-BE49-F238E27FC236}">
+                <a16:creationId xmlns:a16="http://schemas.microsoft.com/office/drawing/2014/main" id="{6D1EDB8D-8BCF-4675-0A0D-20838A34BDCB}"/>
+              </a:ext>
+            </a:extLst>
+          </p:cNvPr>
+          <p:cNvPicPr>
+            <a:picLocks noChangeAspect="1"/>
+          </p:cNvPicPr>
+          <p:nvPr/>
+        </p:nvPicPr>
+        <p:blipFill>
+          <a:blip r:embed="rId6"/>
+          <a:stretch>
+            <a:fillRect/>
+          </a:stretch>
+        </p:blipFill>
+        <p:spPr>
+          <a:xfrm>
+            <a:off x="6096000" y="2188396"/>
+            <a:ext cx="5868219" cy="3867690"/>
+          </a:xfrm>
+          <a:prstGeom prst="roundRect">
+            <a:avLst>
+              <a:gd name="adj" fmla="val 16667"/>
+            </a:avLst>
+          </a:prstGeom>
+          <a:ln>
+            <a:noFill/>
+          </a:ln>
+          <a:effectLst>
+            <a:outerShdw blurRad="152400" dist="12000" dir="900000" sy="98000" kx="110000" ky="200000" algn="tl" rotWithShape="0">
+              <a:srgbClr val="000000">
+                <a:alpha val="30000"/>
+              </a:srgbClr>
+            </a:outerShdw>
+          </a:effectLst>
+          <a:scene3d>
+            <a:camera prst="perspectiveRelaxed">
+              <a:rot lat="19800000" lon="1200000" rev="20820000"/>
+            </a:camera>
+            <a:lightRig rig="threePt" dir="t"/>
+          </a:scene3d>
+          <a:sp3d contourW="6350" prstMaterial="matte">
+            <a:bevelT w="101600" h="101600"/>
+            <a:contourClr>
+              <a:srgbClr val="969696"/>
+            </a:contourClr>
+          </a:sp3d>
+        </p:spPr>
+      </p:pic>
     </p:spTree>
     <p:extLst>
       <p:ext uri="{BB962C8B-B14F-4D97-AF65-F5344CB8AC3E}">
@@ -20660,6 +20716,1660 @@
 </file>
 
 <file path=ppt/slides/slide30.xml><?xml version="1.0" encoding="utf-8"?>
+<p:sld xmlns:a="http://schemas.openxmlformats.org/drawingml/2006/main" xmlns:r="http://schemas.openxmlformats.org/officeDocument/2006/relationships" xmlns:p="http://schemas.openxmlformats.org/presentationml/2006/main">
+  <p:cSld>
+    <p:spTree>
+      <p:nvGrpSpPr>
+        <p:cNvPr id="1" name="">
+          <a:extLst>
+            <a:ext uri="{FF2B5EF4-FFF2-40B4-BE49-F238E27FC236}">
+              <a16:creationId xmlns:a16="http://schemas.microsoft.com/office/drawing/2014/main" id="{AFAFD1D2-8D28-61F1-2F4D-83B5F772C9BF}"/>
+            </a:ext>
+          </a:extLst>
+        </p:cNvPr>
+        <p:cNvGrpSpPr/>
+        <p:nvPr/>
+      </p:nvGrpSpPr>
+      <p:grpSpPr>
+        <a:xfrm>
+          <a:off x="0" y="0"/>
+          <a:ext cx="0" cy="0"/>
+          <a:chOff x="0" y="0"/>
+          <a:chExt cx="0" cy="0"/>
+        </a:xfrm>
+      </p:grpSpPr>
+      <p:pic>
+        <p:nvPicPr>
+          <p:cNvPr id="3" name="Picture 2">
+            <a:extLst>
+              <a:ext uri="{FF2B5EF4-FFF2-40B4-BE49-F238E27FC236}">
+                <a16:creationId xmlns:a16="http://schemas.microsoft.com/office/drawing/2014/main" id="{029AF3C7-5828-A8FC-E06F-1E723C22E3E5}"/>
+              </a:ext>
+            </a:extLst>
+          </p:cNvPr>
+          <p:cNvPicPr>
+            <a:picLocks noChangeAspect="1"/>
+          </p:cNvPicPr>
+          <p:nvPr/>
+        </p:nvPicPr>
+        <p:blipFill>
+          <a:blip r:embed="rId2"/>
+          <a:stretch>
+            <a:fillRect/>
+          </a:stretch>
+        </p:blipFill>
+        <p:spPr>
+          <a:xfrm>
+            <a:off x="2592309" y="0"/>
+            <a:ext cx="7007382" cy="6858000"/>
+          </a:xfrm>
+          <a:prstGeom prst="rect">
+            <a:avLst/>
+          </a:prstGeom>
+        </p:spPr>
+      </p:pic>
+      <p:sp>
+        <p:nvSpPr>
+          <p:cNvPr id="4" name="Rectangle 3">
+            <a:extLst>
+              <a:ext uri="{FF2B5EF4-FFF2-40B4-BE49-F238E27FC236}">
+                <a16:creationId xmlns:a16="http://schemas.microsoft.com/office/drawing/2014/main" id="{F09C5850-9969-F6ED-82E4-23052DBEA7F3}"/>
+              </a:ext>
+            </a:extLst>
+          </p:cNvPr>
+          <p:cNvSpPr/>
+          <p:nvPr/>
+        </p:nvSpPr>
+        <p:spPr>
+          <a:xfrm>
+            <a:off x="3700530" y="223234"/>
+            <a:ext cx="957329" cy="64394"/>
+          </a:xfrm>
+          <a:prstGeom prst="rect">
+            <a:avLst/>
+          </a:prstGeom>
+          <a:solidFill>
+            <a:srgbClr val="ACD433">
+              <a:alpha val="50196"/>
+            </a:srgbClr>
+          </a:solidFill>
+        </p:spPr>
+        <p:style>
+          <a:lnRef idx="2">
+            <a:schemeClr val="accent1">
+              <a:shade val="15000"/>
+            </a:schemeClr>
+          </a:lnRef>
+          <a:fillRef idx="1">
+            <a:schemeClr val="accent1"/>
+          </a:fillRef>
+          <a:effectRef idx="0">
+            <a:schemeClr val="accent1"/>
+          </a:effectRef>
+          <a:fontRef idx="minor">
+            <a:schemeClr val="lt1"/>
+          </a:fontRef>
+        </p:style>
+        <p:txBody>
+          <a:bodyPr rtlCol="0" anchor="ctr"/>
+          <a:lstStyle/>
+          <a:p>
+            <a:pPr algn="ctr"/>
+            <a:endParaRPr lang="en-US"/>
+          </a:p>
+        </p:txBody>
+      </p:sp>
+      <p:sp>
+        <p:nvSpPr>
+          <p:cNvPr id="5" name="Rectangle 4">
+            <a:extLst>
+              <a:ext uri="{FF2B5EF4-FFF2-40B4-BE49-F238E27FC236}">
+                <a16:creationId xmlns:a16="http://schemas.microsoft.com/office/drawing/2014/main" id="{9C3B53E3-2EB8-0983-40DA-F8FF6BB76E19}"/>
+              </a:ext>
+            </a:extLst>
+          </p:cNvPr>
+          <p:cNvSpPr/>
+          <p:nvPr/>
+        </p:nvSpPr>
+        <p:spPr>
+          <a:xfrm>
+            <a:off x="3619568" y="0"/>
+            <a:ext cx="233295" cy="181579"/>
+          </a:xfrm>
+          <a:prstGeom prst="rect">
+            <a:avLst/>
+          </a:prstGeom>
+          <a:solidFill>
+            <a:srgbClr val="ACD433">
+              <a:alpha val="50196"/>
+            </a:srgbClr>
+          </a:solidFill>
+        </p:spPr>
+        <p:style>
+          <a:lnRef idx="2">
+            <a:schemeClr val="accent1">
+              <a:shade val="15000"/>
+            </a:schemeClr>
+          </a:lnRef>
+          <a:fillRef idx="1">
+            <a:schemeClr val="accent1"/>
+          </a:fillRef>
+          <a:effectRef idx="0">
+            <a:schemeClr val="accent1"/>
+          </a:effectRef>
+          <a:fontRef idx="minor">
+            <a:schemeClr val="lt1"/>
+          </a:fontRef>
+        </p:style>
+        <p:txBody>
+          <a:bodyPr rtlCol="0" anchor="ctr"/>
+          <a:lstStyle/>
+          <a:p>
+            <a:pPr algn="ctr"/>
+            <a:endParaRPr lang="en-US"/>
+          </a:p>
+        </p:txBody>
+      </p:sp>
+      <p:sp>
+        <p:nvSpPr>
+          <p:cNvPr id="6" name="Rectangle 5">
+            <a:extLst>
+              <a:ext uri="{FF2B5EF4-FFF2-40B4-BE49-F238E27FC236}">
+                <a16:creationId xmlns:a16="http://schemas.microsoft.com/office/drawing/2014/main" id="{0B916A0C-0D77-281D-2AEF-DBA8979744FE}"/>
+              </a:ext>
+            </a:extLst>
+          </p:cNvPr>
+          <p:cNvSpPr/>
+          <p:nvPr/>
+        </p:nvSpPr>
+        <p:spPr>
+          <a:xfrm>
+            <a:off x="6757680" y="424700"/>
+            <a:ext cx="1028938" cy="436792"/>
+          </a:xfrm>
+          <a:prstGeom prst="rect">
+            <a:avLst/>
+          </a:prstGeom>
+          <a:solidFill>
+            <a:srgbClr val="ACD433">
+              <a:alpha val="50196"/>
+            </a:srgbClr>
+          </a:solidFill>
+        </p:spPr>
+        <p:style>
+          <a:lnRef idx="2">
+            <a:schemeClr val="accent1">
+              <a:shade val="15000"/>
+            </a:schemeClr>
+          </a:lnRef>
+          <a:fillRef idx="1">
+            <a:schemeClr val="accent1"/>
+          </a:fillRef>
+          <a:effectRef idx="0">
+            <a:schemeClr val="accent1"/>
+          </a:effectRef>
+          <a:fontRef idx="minor">
+            <a:schemeClr val="lt1"/>
+          </a:fontRef>
+        </p:style>
+        <p:txBody>
+          <a:bodyPr rtlCol="0" anchor="ctr"/>
+          <a:lstStyle/>
+          <a:p>
+            <a:pPr algn="ctr"/>
+            <a:endParaRPr lang="en-US"/>
+          </a:p>
+        </p:txBody>
+      </p:sp>
+      <p:sp>
+        <p:nvSpPr>
+          <p:cNvPr id="7" name="Rectangle 6">
+            <a:extLst>
+              <a:ext uri="{FF2B5EF4-FFF2-40B4-BE49-F238E27FC236}">
+                <a16:creationId xmlns:a16="http://schemas.microsoft.com/office/drawing/2014/main" id="{0528EFF6-A937-BCB9-71EE-99DCDB534D53}"/>
+              </a:ext>
+            </a:extLst>
+          </p:cNvPr>
+          <p:cNvSpPr/>
+          <p:nvPr/>
+        </p:nvSpPr>
+        <p:spPr>
+          <a:xfrm>
+            <a:off x="2913124" y="996949"/>
+            <a:ext cx="115825" cy="298451"/>
+          </a:xfrm>
+          <a:prstGeom prst="rect">
+            <a:avLst/>
+          </a:prstGeom>
+          <a:solidFill>
+            <a:srgbClr val="ACD433">
+              <a:alpha val="50196"/>
+            </a:srgbClr>
+          </a:solidFill>
+        </p:spPr>
+        <p:style>
+          <a:lnRef idx="2">
+            <a:schemeClr val="accent1">
+              <a:shade val="15000"/>
+            </a:schemeClr>
+          </a:lnRef>
+          <a:fillRef idx="1">
+            <a:schemeClr val="accent1"/>
+          </a:fillRef>
+          <a:effectRef idx="0">
+            <a:schemeClr val="accent1"/>
+          </a:effectRef>
+          <a:fontRef idx="minor">
+            <a:schemeClr val="lt1"/>
+          </a:fontRef>
+        </p:style>
+        <p:txBody>
+          <a:bodyPr rtlCol="0" anchor="ctr"/>
+          <a:lstStyle/>
+          <a:p>
+            <a:pPr algn="ctr"/>
+            <a:endParaRPr lang="en-US"/>
+          </a:p>
+        </p:txBody>
+      </p:sp>
+      <p:sp>
+        <p:nvSpPr>
+          <p:cNvPr id="2" name="Rectangle 1">
+            <a:extLst>
+              <a:ext uri="{FF2B5EF4-FFF2-40B4-BE49-F238E27FC236}">
+                <a16:creationId xmlns:a16="http://schemas.microsoft.com/office/drawing/2014/main" id="{A1BCEC33-F1ED-58A9-23ED-170B5971174E}"/>
+              </a:ext>
+            </a:extLst>
+          </p:cNvPr>
+          <p:cNvSpPr/>
+          <p:nvPr/>
+        </p:nvSpPr>
+        <p:spPr>
+          <a:xfrm rot="1551019">
+            <a:off x="3573376" y="623121"/>
+            <a:ext cx="1093916" cy="102021"/>
+          </a:xfrm>
+          <a:prstGeom prst="rect">
+            <a:avLst/>
+          </a:prstGeom>
+          <a:solidFill>
+            <a:srgbClr val="ACD433">
+              <a:alpha val="50196"/>
+            </a:srgbClr>
+          </a:solidFill>
+        </p:spPr>
+        <p:style>
+          <a:lnRef idx="2">
+            <a:schemeClr val="accent1">
+              <a:shade val="15000"/>
+            </a:schemeClr>
+          </a:lnRef>
+          <a:fillRef idx="1">
+            <a:schemeClr val="accent1"/>
+          </a:fillRef>
+          <a:effectRef idx="0">
+            <a:schemeClr val="accent1"/>
+          </a:effectRef>
+          <a:fontRef idx="minor">
+            <a:schemeClr val="lt1"/>
+          </a:fontRef>
+        </p:style>
+        <p:txBody>
+          <a:bodyPr rtlCol="0" anchor="ctr"/>
+          <a:lstStyle/>
+          <a:p>
+            <a:pPr algn="ctr"/>
+            <a:endParaRPr lang="en-US"/>
+          </a:p>
+        </p:txBody>
+      </p:sp>
+      <p:sp>
+        <p:nvSpPr>
+          <p:cNvPr id="8" name="Rectangle 7">
+            <a:extLst>
+              <a:ext uri="{FF2B5EF4-FFF2-40B4-BE49-F238E27FC236}">
+                <a16:creationId xmlns:a16="http://schemas.microsoft.com/office/drawing/2014/main" id="{B815666F-8D97-EE98-A435-A894759C2B47}"/>
+              </a:ext>
+            </a:extLst>
+          </p:cNvPr>
+          <p:cNvSpPr/>
+          <p:nvPr/>
+        </p:nvSpPr>
+        <p:spPr>
+          <a:xfrm>
+            <a:off x="5065260" y="733425"/>
+            <a:ext cx="318398" cy="225099"/>
+          </a:xfrm>
+          <a:prstGeom prst="rect">
+            <a:avLst/>
+          </a:prstGeom>
+          <a:solidFill>
+            <a:srgbClr val="ACD433">
+              <a:alpha val="50196"/>
+            </a:srgbClr>
+          </a:solidFill>
+        </p:spPr>
+        <p:style>
+          <a:lnRef idx="2">
+            <a:schemeClr val="accent1">
+              <a:shade val="15000"/>
+            </a:schemeClr>
+          </a:lnRef>
+          <a:fillRef idx="1">
+            <a:schemeClr val="accent1"/>
+          </a:fillRef>
+          <a:effectRef idx="0">
+            <a:schemeClr val="accent1"/>
+          </a:effectRef>
+          <a:fontRef idx="minor">
+            <a:schemeClr val="lt1"/>
+          </a:fontRef>
+        </p:style>
+        <p:txBody>
+          <a:bodyPr rtlCol="0" anchor="ctr"/>
+          <a:lstStyle/>
+          <a:p>
+            <a:pPr algn="ctr"/>
+            <a:endParaRPr lang="en-US"/>
+          </a:p>
+        </p:txBody>
+      </p:sp>
+      <p:sp>
+        <p:nvSpPr>
+          <p:cNvPr id="9" name="Rectangle 8">
+            <a:extLst>
+              <a:ext uri="{FF2B5EF4-FFF2-40B4-BE49-F238E27FC236}">
+                <a16:creationId xmlns:a16="http://schemas.microsoft.com/office/drawing/2014/main" id="{A54B06DC-4ECF-D3D5-2A56-E193CF5F14D2}"/>
+              </a:ext>
+            </a:extLst>
+          </p:cNvPr>
+          <p:cNvSpPr/>
+          <p:nvPr/>
+        </p:nvSpPr>
+        <p:spPr>
+          <a:xfrm>
+            <a:off x="4886705" y="434974"/>
+            <a:ext cx="81536" cy="426086"/>
+          </a:xfrm>
+          <a:prstGeom prst="rect">
+            <a:avLst/>
+          </a:prstGeom>
+          <a:solidFill>
+            <a:srgbClr val="ACD433">
+              <a:alpha val="50196"/>
+            </a:srgbClr>
+          </a:solidFill>
+        </p:spPr>
+        <p:style>
+          <a:lnRef idx="2">
+            <a:schemeClr val="accent1">
+              <a:shade val="15000"/>
+            </a:schemeClr>
+          </a:lnRef>
+          <a:fillRef idx="1">
+            <a:schemeClr val="accent1"/>
+          </a:fillRef>
+          <a:effectRef idx="0">
+            <a:schemeClr val="accent1"/>
+          </a:effectRef>
+          <a:fontRef idx="minor">
+            <a:schemeClr val="lt1"/>
+          </a:fontRef>
+        </p:style>
+        <p:txBody>
+          <a:bodyPr rtlCol="0" anchor="ctr"/>
+          <a:lstStyle/>
+          <a:p>
+            <a:pPr algn="ctr"/>
+            <a:endParaRPr lang="en-US"/>
+          </a:p>
+        </p:txBody>
+      </p:sp>
+      <p:sp>
+        <p:nvSpPr>
+          <p:cNvPr id="10" name="Rectangle 9">
+            <a:extLst>
+              <a:ext uri="{FF2B5EF4-FFF2-40B4-BE49-F238E27FC236}">
+                <a16:creationId xmlns:a16="http://schemas.microsoft.com/office/drawing/2014/main" id="{3BFAA6CB-A9A0-4470-D6AD-F6DA0333C374}"/>
+              </a:ext>
+            </a:extLst>
+          </p:cNvPr>
+          <p:cNvSpPr/>
+          <p:nvPr/>
+        </p:nvSpPr>
+        <p:spPr>
+          <a:xfrm>
+            <a:off x="5006340" y="478664"/>
+            <a:ext cx="622522" cy="100455"/>
+          </a:xfrm>
+          <a:prstGeom prst="rect">
+            <a:avLst/>
+          </a:prstGeom>
+          <a:solidFill>
+            <a:srgbClr val="ACD433">
+              <a:alpha val="50196"/>
+            </a:srgbClr>
+          </a:solidFill>
+        </p:spPr>
+        <p:style>
+          <a:lnRef idx="2">
+            <a:schemeClr val="accent1">
+              <a:shade val="15000"/>
+            </a:schemeClr>
+          </a:lnRef>
+          <a:fillRef idx="1">
+            <a:schemeClr val="accent1"/>
+          </a:fillRef>
+          <a:effectRef idx="0">
+            <a:schemeClr val="accent1"/>
+          </a:effectRef>
+          <a:fontRef idx="minor">
+            <a:schemeClr val="lt1"/>
+          </a:fontRef>
+        </p:style>
+        <p:txBody>
+          <a:bodyPr rtlCol="0" anchor="ctr"/>
+          <a:lstStyle/>
+          <a:p>
+            <a:pPr algn="ctr"/>
+            <a:endParaRPr lang="en-US"/>
+          </a:p>
+        </p:txBody>
+      </p:sp>
+      <p:sp>
+        <p:nvSpPr>
+          <p:cNvPr id="11" name="Rectangle 10">
+            <a:extLst>
+              <a:ext uri="{FF2B5EF4-FFF2-40B4-BE49-F238E27FC236}">
+                <a16:creationId xmlns:a16="http://schemas.microsoft.com/office/drawing/2014/main" id="{ACD64265-4583-455F-6A0E-169A27B70578}"/>
+              </a:ext>
+            </a:extLst>
+          </p:cNvPr>
+          <p:cNvSpPr/>
+          <p:nvPr/>
+        </p:nvSpPr>
+        <p:spPr>
+          <a:xfrm>
+            <a:off x="5006340" y="587374"/>
+            <a:ext cx="114301" cy="273686"/>
+          </a:xfrm>
+          <a:prstGeom prst="rect">
+            <a:avLst/>
+          </a:prstGeom>
+          <a:solidFill>
+            <a:srgbClr val="ACD433">
+              <a:alpha val="50196"/>
+            </a:srgbClr>
+          </a:solidFill>
+        </p:spPr>
+        <p:style>
+          <a:lnRef idx="2">
+            <a:schemeClr val="accent1">
+              <a:shade val="15000"/>
+            </a:schemeClr>
+          </a:lnRef>
+          <a:fillRef idx="1">
+            <a:schemeClr val="accent1"/>
+          </a:fillRef>
+          <a:effectRef idx="0">
+            <a:schemeClr val="accent1"/>
+          </a:effectRef>
+          <a:fontRef idx="minor">
+            <a:schemeClr val="lt1"/>
+          </a:fontRef>
+        </p:style>
+        <p:txBody>
+          <a:bodyPr rtlCol="0" anchor="ctr"/>
+          <a:lstStyle/>
+          <a:p>
+            <a:pPr algn="ctr"/>
+            <a:endParaRPr lang="en-US"/>
+          </a:p>
+        </p:txBody>
+      </p:sp>
+      <p:sp>
+        <p:nvSpPr>
+          <p:cNvPr id="12" name="Rectangle 11">
+            <a:extLst>
+              <a:ext uri="{FF2B5EF4-FFF2-40B4-BE49-F238E27FC236}">
+                <a16:creationId xmlns:a16="http://schemas.microsoft.com/office/drawing/2014/main" id="{5DF8290F-CA94-09E5-EDF6-AB04D4E3BDFE}"/>
+              </a:ext>
+            </a:extLst>
+          </p:cNvPr>
+          <p:cNvSpPr/>
+          <p:nvPr/>
+        </p:nvSpPr>
+        <p:spPr>
+          <a:xfrm>
+            <a:off x="3382706" y="434974"/>
+            <a:ext cx="76700" cy="1133476"/>
+          </a:xfrm>
+          <a:prstGeom prst="rect">
+            <a:avLst/>
+          </a:prstGeom>
+          <a:solidFill>
+            <a:srgbClr val="ACD433">
+              <a:alpha val="50196"/>
+            </a:srgbClr>
+          </a:solidFill>
+        </p:spPr>
+        <p:style>
+          <a:lnRef idx="2">
+            <a:schemeClr val="accent1">
+              <a:shade val="15000"/>
+            </a:schemeClr>
+          </a:lnRef>
+          <a:fillRef idx="1">
+            <a:schemeClr val="accent1"/>
+          </a:fillRef>
+          <a:effectRef idx="0">
+            <a:schemeClr val="accent1"/>
+          </a:effectRef>
+          <a:fontRef idx="minor">
+            <a:schemeClr val="lt1"/>
+          </a:fontRef>
+        </p:style>
+        <p:txBody>
+          <a:bodyPr rtlCol="0" anchor="ctr"/>
+          <a:lstStyle/>
+          <a:p>
+            <a:pPr algn="ctr"/>
+            <a:endParaRPr lang="en-US"/>
+          </a:p>
+        </p:txBody>
+      </p:sp>
+      <p:sp>
+        <p:nvSpPr>
+          <p:cNvPr id="13" name="Rectangle 12">
+            <a:extLst>
+              <a:ext uri="{FF2B5EF4-FFF2-40B4-BE49-F238E27FC236}">
+                <a16:creationId xmlns:a16="http://schemas.microsoft.com/office/drawing/2014/main" id="{6993AA27-DD56-058D-A6EF-59FF8E437886}"/>
+              </a:ext>
+            </a:extLst>
+          </p:cNvPr>
+          <p:cNvSpPr/>
+          <p:nvPr/>
+        </p:nvSpPr>
+        <p:spPr>
+          <a:xfrm>
+            <a:off x="3565097" y="974398"/>
+            <a:ext cx="76700" cy="594051"/>
+          </a:xfrm>
+          <a:prstGeom prst="rect">
+            <a:avLst/>
+          </a:prstGeom>
+          <a:solidFill>
+            <a:srgbClr val="ACD433">
+              <a:alpha val="50196"/>
+            </a:srgbClr>
+          </a:solidFill>
+        </p:spPr>
+        <p:style>
+          <a:lnRef idx="2">
+            <a:schemeClr val="accent1">
+              <a:shade val="15000"/>
+            </a:schemeClr>
+          </a:lnRef>
+          <a:fillRef idx="1">
+            <a:schemeClr val="accent1"/>
+          </a:fillRef>
+          <a:effectRef idx="0">
+            <a:schemeClr val="accent1"/>
+          </a:effectRef>
+          <a:fontRef idx="minor">
+            <a:schemeClr val="lt1"/>
+          </a:fontRef>
+        </p:style>
+        <p:txBody>
+          <a:bodyPr rtlCol="0" anchor="ctr"/>
+          <a:lstStyle/>
+          <a:p>
+            <a:pPr algn="ctr"/>
+            <a:endParaRPr lang="en-US"/>
+          </a:p>
+        </p:txBody>
+      </p:sp>
+      <p:sp>
+        <p:nvSpPr>
+          <p:cNvPr id="14" name="Rectangle 13">
+            <a:extLst>
+              <a:ext uri="{FF2B5EF4-FFF2-40B4-BE49-F238E27FC236}">
+                <a16:creationId xmlns:a16="http://schemas.microsoft.com/office/drawing/2014/main" id="{986A0D6B-AB2D-F939-483F-CCB8431C8AC1}"/>
+              </a:ext>
+            </a:extLst>
+          </p:cNvPr>
+          <p:cNvSpPr/>
+          <p:nvPr/>
+        </p:nvSpPr>
+        <p:spPr>
+          <a:xfrm>
+            <a:off x="3641797" y="958524"/>
+            <a:ext cx="993006" cy="102111"/>
+          </a:xfrm>
+          <a:prstGeom prst="rect">
+            <a:avLst/>
+          </a:prstGeom>
+          <a:solidFill>
+            <a:srgbClr val="ACD433">
+              <a:alpha val="50196"/>
+            </a:srgbClr>
+          </a:solidFill>
+        </p:spPr>
+        <p:style>
+          <a:lnRef idx="2">
+            <a:schemeClr val="accent1">
+              <a:shade val="15000"/>
+            </a:schemeClr>
+          </a:lnRef>
+          <a:fillRef idx="1">
+            <a:schemeClr val="accent1"/>
+          </a:fillRef>
+          <a:effectRef idx="0">
+            <a:schemeClr val="accent1"/>
+          </a:effectRef>
+          <a:fontRef idx="minor">
+            <a:schemeClr val="lt1"/>
+          </a:fontRef>
+        </p:style>
+        <p:txBody>
+          <a:bodyPr rtlCol="0" anchor="ctr"/>
+          <a:lstStyle/>
+          <a:p>
+            <a:pPr algn="ctr"/>
+            <a:endParaRPr lang="en-US"/>
+          </a:p>
+        </p:txBody>
+      </p:sp>
+      <p:sp>
+        <p:nvSpPr>
+          <p:cNvPr id="15" name="Rectangle 14">
+            <a:extLst>
+              <a:ext uri="{FF2B5EF4-FFF2-40B4-BE49-F238E27FC236}">
+                <a16:creationId xmlns:a16="http://schemas.microsoft.com/office/drawing/2014/main" id="{608C10CC-6EE0-1608-E955-6C04FAC30E43}"/>
+              </a:ext>
+            </a:extLst>
+          </p:cNvPr>
+          <p:cNvSpPr/>
+          <p:nvPr/>
+        </p:nvSpPr>
+        <p:spPr>
+          <a:xfrm>
+            <a:off x="3788357" y="1447841"/>
+            <a:ext cx="233295" cy="181579"/>
+          </a:xfrm>
+          <a:prstGeom prst="rect">
+            <a:avLst/>
+          </a:prstGeom>
+          <a:solidFill>
+            <a:srgbClr val="ACD433">
+              <a:alpha val="50196"/>
+            </a:srgbClr>
+          </a:solidFill>
+        </p:spPr>
+        <p:style>
+          <a:lnRef idx="2">
+            <a:schemeClr val="accent1">
+              <a:shade val="15000"/>
+            </a:schemeClr>
+          </a:lnRef>
+          <a:fillRef idx="1">
+            <a:schemeClr val="accent1"/>
+          </a:fillRef>
+          <a:effectRef idx="0">
+            <a:schemeClr val="accent1"/>
+          </a:effectRef>
+          <a:fontRef idx="minor">
+            <a:schemeClr val="lt1"/>
+          </a:fontRef>
+        </p:style>
+        <p:txBody>
+          <a:bodyPr rtlCol="0" anchor="ctr"/>
+          <a:lstStyle/>
+          <a:p>
+            <a:pPr algn="ctr"/>
+            <a:endParaRPr lang="en-US"/>
+          </a:p>
+        </p:txBody>
+      </p:sp>
+      <p:sp>
+        <p:nvSpPr>
+          <p:cNvPr id="16" name="Rectangle 15">
+            <a:extLst>
+              <a:ext uri="{FF2B5EF4-FFF2-40B4-BE49-F238E27FC236}">
+                <a16:creationId xmlns:a16="http://schemas.microsoft.com/office/drawing/2014/main" id="{0ABB2294-70C6-537E-4920-5AA4F69656DF}"/>
+              </a:ext>
+            </a:extLst>
+          </p:cNvPr>
+          <p:cNvSpPr/>
+          <p:nvPr/>
+        </p:nvSpPr>
+        <p:spPr>
+          <a:xfrm rot="4874518">
+            <a:off x="4478330" y="985650"/>
+            <a:ext cx="81536" cy="426086"/>
+          </a:xfrm>
+          <a:prstGeom prst="rect">
+            <a:avLst/>
+          </a:prstGeom>
+          <a:solidFill>
+            <a:srgbClr val="ACD433">
+              <a:alpha val="50196"/>
+            </a:srgbClr>
+          </a:solidFill>
+        </p:spPr>
+        <p:style>
+          <a:lnRef idx="2">
+            <a:schemeClr val="accent1">
+              <a:shade val="15000"/>
+            </a:schemeClr>
+          </a:lnRef>
+          <a:fillRef idx="1">
+            <a:schemeClr val="accent1"/>
+          </a:fillRef>
+          <a:effectRef idx="0">
+            <a:schemeClr val="accent1"/>
+          </a:effectRef>
+          <a:fontRef idx="minor">
+            <a:schemeClr val="lt1"/>
+          </a:fontRef>
+        </p:style>
+        <p:txBody>
+          <a:bodyPr rtlCol="0" anchor="ctr"/>
+          <a:lstStyle/>
+          <a:p>
+            <a:pPr algn="ctr"/>
+            <a:endParaRPr lang="en-US"/>
+          </a:p>
+        </p:txBody>
+      </p:sp>
+      <p:sp>
+        <p:nvSpPr>
+          <p:cNvPr id="17" name="Rectangle 16">
+            <a:extLst>
+              <a:ext uri="{FF2B5EF4-FFF2-40B4-BE49-F238E27FC236}">
+                <a16:creationId xmlns:a16="http://schemas.microsoft.com/office/drawing/2014/main" id="{817600D5-3CD8-2F55-5271-F9E1D212C74B}"/>
+              </a:ext>
+            </a:extLst>
+          </p:cNvPr>
+          <p:cNvSpPr/>
+          <p:nvPr/>
+        </p:nvSpPr>
+        <p:spPr>
+          <a:xfrm>
+            <a:off x="4904356" y="1176175"/>
+            <a:ext cx="81536" cy="426086"/>
+          </a:xfrm>
+          <a:prstGeom prst="rect">
+            <a:avLst/>
+          </a:prstGeom>
+          <a:solidFill>
+            <a:srgbClr val="ACD433">
+              <a:alpha val="50196"/>
+            </a:srgbClr>
+          </a:solidFill>
+        </p:spPr>
+        <p:style>
+          <a:lnRef idx="2">
+            <a:schemeClr val="accent1">
+              <a:shade val="15000"/>
+            </a:schemeClr>
+          </a:lnRef>
+          <a:fillRef idx="1">
+            <a:schemeClr val="accent1"/>
+          </a:fillRef>
+          <a:effectRef idx="0">
+            <a:schemeClr val="accent1"/>
+          </a:effectRef>
+          <a:fontRef idx="minor">
+            <a:schemeClr val="lt1"/>
+          </a:fontRef>
+        </p:style>
+        <p:txBody>
+          <a:bodyPr rtlCol="0" anchor="ctr"/>
+          <a:lstStyle/>
+          <a:p>
+            <a:pPr algn="ctr"/>
+            <a:endParaRPr lang="en-US"/>
+          </a:p>
+        </p:txBody>
+      </p:sp>
+      <p:sp>
+        <p:nvSpPr>
+          <p:cNvPr id="18" name="Rectangle 17">
+            <a:extLst>
+              <a:ext uri="{FF2B5EF4-FFF2-40B4-BE49-F238E27FC236}">
+                <a16:creationId xmlns:a16="http://schemas.microsoft.com/office/drawing/2014/main" id="{A3992BE2-01FD-73C1-081B-CB4F4FFF5CB6}"/>
+              </a:ext>
+            </a:extLst>
+          </p:cNvPr>
+          <p:cNvSpPr/>
+          <p:nvPr/>
+        </p:nvSpPr>
+        <p:spPr>
+          <a:xfrm>
+            <a:off x="5200132" y="946721"/>
+            <a:ext cx="428730" cy="100455"/>
+          </a:xfrm>
+          <a:prstGeom prst="rect">
+            <a:avLst/>
+          </a:prstGeom>
+          <a:solidFill>
+            <a:srgbClr val="ACD433">
+              <a:alpha val="50196"/>
+            </a:srgbClr>
+          </a:solidFill>
+        </p:spPr>
+        <p:style>
+          <a:lnRef idx="2">
+            <a:schemeClr val="accent1">
+              <a:shade val="15000"/>
+            </a:schemeClr>
+          </a:lnRef>
+          <a:fillRef idx="1">
+            <a:schemeClr val="accent1"/>
+          </a:fillRef>
+          <a:effectRef idx="0">
+            <a:schemeClr val="accent1"/>
+          </a:effectRef>
+          <a:fontRef idx="minor">
+            <a:schemeClr val="lt1"/>
+          </a:fontRef>
+        </p:style>
+        <p:txBody>
+          <a:bodyPr rtlCol="0" anchor="ctr"/>
+          <a:lstStyle/>
+          <a:p>
+            <a:pPr algn="ctr"/>
+            <a:endParaRPr lang="en-US"/>
+          </a:p>
+        </p:txBody>
+      </p:sp>
+      <p:sp>
+        <p:nvSpPr>
+          <p:cNvPr id="19" name="Rectangle 18">
+            <a:extLst>
+              <a:ext uri="{FF2B5EF4-FFF2-40B4-BE49-F238E27FC236}">
+                <a16:creationId xmlns:a16="http://schemas.microsoft.com/office/drawing/2014/main" id="{EF044647-3E98-14A3-DE5B-39B668E04F1D}"/>
+              </a:ext>
+            </a:extLst>
+          </p:cNvPr>
+          <p:cNvSpPr/>
+          <p:nvPr/>
+        </p:nvSpPr>
+        <p:spPr>
+          <a:xfrm>
+            <a:off x="6191487" y="946721"/>
+            <a:ext cx="312055" cy="100455"/>
+          </a:xfrm>
+          <a:prstGeom prst="rect">
+            <a:avLst/>
+          </a:prstGeom>
+          <a:solidFill>
+            <a:srgbClr val="ACD433">
+              <a:alpha val="50196"/>
+            </a:srgbClr>
+          </a:solidFill>
+        </p:spPr>
+        <p:style>
+          <a:lnRef idx="2">
+            <a:schemeClr val="accent1">
+              <a:shade val="15000"/>
+            </a:schemeClr>
+          </a:lnRef>
+          <a:fillRef idx="1">
+            <a:schemeClr val="accent1"/>
+          </a:fillRef>
+          <a:effectRef idx="0">
+            <a:schemeClr val="accent1"/>
+          </a:effectRef>
+          <a:fontRef idx="minor">
+            <a:schemeClr val="lt1"/>
+          </a:fontRef>
+        </p:style>
+        <p:txBody>
+          <a:bodyPr rtlCol="0" anchor="ctr"/>
+          <a:lstStyle/>
+          <a:p>
+            <a:pPr algn="ctr"/>
+            <a:endParaRPr lang="en-US"/>
+          </a:p>
+        </p:txBody>
+      </p:sp>
+      <p:sp>
+        <p:nvSpPr>
+          <p:cNvPr id="21" name="Rectangle 20">
+            <a:extLst>
+              <a:ext uri="{FF2B5EF4-FFF2-40B4-BE49-F238E27FC236}">
+                <a16:creationId xmlns:a16="http://schemas.microsoft.com/office/drawing/2014/main" id="{E0063CF2-7312-E753-9709-82C3AD0F2DF0}"/>
+              </a:ext>
+            </a:extLst>
+          </p:cNvPr>
+          <p:cNvSpPr/>
+          <p:nvPr/>
+        </p:nvSpPr>
+        <p:spPr>
+          <a:xfrm rot="7689780">
+            <a:off x="5689987" y="725525"/>
+            <a:ext cx="76042" cy="1357830"/>
+          </a:xfrm>
+          <a:prstGeom prst="rect">
+            <a:avLst/>
+          </a:prstGeom>
+          <a:solidFill>
+            <a:srgbClr val="ACD433">
+              <a:alpha val="50196"/>
+            </a:srgbClr>
+          </a:solidFill>
+        </p:spPr>
+        <p:style>
+          <a:lnRef idx="2">
+            <a:schemeClr val="accent1">
+              <a:shade val="15000"/>
+            </a:schemeClr>
+          </a:lnRef>
+          <a:fillRef idx="1">
+            <a:schemeClr val="accent1"/>
+          </a:fillRef>
+          <a:effectRef idx="0">
+            <a:schemeClr val="accent1"/>
+          </a:effectRef>
+          <a:fontRef idx="minor">
+            <a:schemeClr val="lt1"/>
+          </a:fontRef>
+        </p:style>
+        <p:txBody>
+          <a:bodyPr rtlCol="0" anchor="ctr"/>
+          <a:lstStyle/>
+          <a:p>
+            <a:pPr algn="ctr"/>
+            <a:endParaRPr lang="en-US"/>
+          </a:p>
+        </p:txBody>
+      </p:sp>
+      <p:sp>
+        <p:nvSpPr>
+          <p:cNvPr id="22" name="Rectangle 21">
+            <a:extLst>
+              <a:ext uri="{FF2B5EF4-FFF2-40B4-BE49-F238E27FC236}">
+                <a16:creationId xmlns:a16="http://schemas.microsoft.com/office/drawing/2014/main" id="{E8D790A9-E2A0-1463-5845-74A09B126A48}"/>
+              </a:ext>
+            </a:extLst>
+          </p:cNvPr>
+          <p:cNvSpPr/>
+          <p:nvPr/>
+        </p:nvSpPr>
+        <p:spPr>
+          <a:xfrm>
+            <a:off x="6503542" y="1862159"/>
+            <a:ext cx="647271" cy="131738"/>
+          </a:xfrm>
+          <a:prstGeom prst="rect">
+            <a:avLst/>
+          </a:prstGeom>
+          <a:solidFill>
+            <a:srgbClr val="ACD433">
+              <a:alpha val="50196"/>
+            </a:srgbClr>
+          </a:solidFill>
+        </p:spPr>
+        <p:style>
+          <a:lnRef idx="2">
+            <a:schemeClr val="accent1">
+              <a:shade val="15000"/>
+            </a:schemeClr>
+          </a:lnRef>
+          <a:fillRef idx="1">
+            <a:schemeClr val="accent1"/>
+          </a:fillRef>
+          <a:effectRef idx="0">
+            <a:schemeClr val="accent1"/>
+          </a:effectRef>
+          <a:fontRef idx="minor">
+            <a:schemeClr val="lt1"/>
+          </a:fontRef>
+        </p:style>
+        <p:txBody>
+          <a:bodyPr rtlCol="0" anchor="ctr"/>
+          <a:lstStyle/>
+          <a:p>
+            <a:pPr algn="ctr"/>
+            <a:endParaRPr lang="en-US"/>
+          </a:p>
+        </p:txBody>
+      </p:sp>
+      <p:sp>
+        <p:nvSpPr>
+          <p:cNvPr id="23" name="Rectangle 22">
+            <a:extLst>
+              <a:ext uri="{FF2B5EF4-FFF2-40B4-BE49-F238E27FC236}">
+                <a16:creationId xmlns:a16="http://schemas.microsoft.com/office/drawing/2014/main" id="{B7232442-1FB5-AEC8-E309-1598BB5F455A}"/>
+              </a:ext>
+            </a:extLst>
+          </p:cNvPr>
+          <p:cNvSpPr/>
+          <p:nvPr/>
+        </p:nvSpPr>
+        <p:spPr>
+          <a:xfrm>
+            <a:off x="6285303" y="1568449"/>
+            <a:ext cx="1278993" cy="252208"/>
+          </a:xfrm>
+          <a:prstGeom prst="rect">
+            <a:avLst/>
+          </a:prstGeom>
+          <a:solidFill>
+            <a:srgbClr val="ACD433">
+              <a:alpha val="50196"/>
+            </a:srgbClr>
+          </a:solidFill>
+        </p:spPr>
+        <p:style>
+          <a:lnRef idx="2">
+            <a:schemeClr val="accent1">
+              <a:shade val="15000"/>
+            </a:schemeClr>
+          </a:lnRef>
+          <a:fillRef idx="1">
+            <a:schemeClr val="accent1"/>
+          </a:fillRef>
+          <a:effectRef idx="0">
+            <a:schemeClr val="accent1"/>
+          </a:effectRef>
+          <a:fontRef idx="minor">
+            <a:schemeClr val="lt1"/>
+          </a:fontRef>
+        </p:style>
+        <p:txBody>
+          <a:bodyPr rtlCol="0" anchor="ctr"/>
+          <a:lstStyle/>
+          <a:p>
+            <a:pPr algn="ctr"/>
+            <a:endParaRPr lang="en-US"/>
+          </a:p>
+        </p:txBody>
+      </p:sp>
+      <p:sp>
+        <p:nvSpPr>
+          <p:cNvPr id="20" name="Rectangle 19">
+            <a:extLst>
+              <a:ext uri="{FF2B5EF4-FFF2-40B4-BE49-F238E27FC236}">
+                <a16:creationId xmlns:a16="http://schemas.microsoft.com/office/drawing/2014/main" id="{833A4770-0D0D-732D-C5DB-0B94BADB37D4}"/>
+              </a:ext>
+            </a:extLst>
+          </p:cNvPr>
+          <p:cNvSpPr/>
+          <p:nvPr/>
+        </p:nvSpPr>
+        <p:spPr>
+          <a:xfrm>
+            <a:off x="6191487" y="2160350"/>
+            <a:ext cx="312055" cy="181579"/>
+          </a:xfrm>
+          <a:prstGeom prst="rect">
+            <a:avLst/>
+          </a:prstGeom>
+          <a:solidFill>
+            <a:srgbClr val="ACD433">
+              <a:alpha val="50196"/>
+            </a:srgbClr>
+          </a:solidFill>
+        </p:spPr>
+        <p:style>
+          <a:lnRef idx="2">
+            <a:schemeClr val="accent1">
+              <a:shade val="15000"/>
+            </a:schemeClr>
+          </a:lnRef>
+          <a:fillRef idx="1">
+            <a:schemeClr val="accent1"/>
+          </a:fillRef>
+          <a:effectRef idx="0">
+            <a:schemeClr val="accent1"/>
+          </a:effectRef>
+          <a:fontRef idx="minor">
+            <a:schemeClr val="lt1"/>
+          </a:fontRef>
+        </p:style>
+        <p:txBody>
+          <a:bodyPr rtlCol="0" anchor="ctr"/>
+          <a:lstStyle/>
+          <a:p>
+            <a:pPr algn="ctr"/>
+            <a:endParaRPr lang="en-US"/>
+          </a:p>
+        </p:txBody>
+      </p:sp>
+      <p:sp>
+        <p:nvSpPr>
+          <p:cNvPr id="24" name="Rectangle 23">
+            <a:extLst>
+              <a:ext uri="{FF2B5EF4-FFF2-40B4-BE49-F238E27FC236}">
+                <a16:creationId xmlns:a16="http://schemas.microsoft.com/office/drawing/2014/main" id="{7EE8B063-25E3-6D7F-BA69-AA19CC0DE074}"/>
+              </a:ext>
+            </a:extLst>
+          </p:cNvPr>
+          <p:cNvSpPr/>
+          <p:nvPr/>
+        </p:nvSpPr>
+        <p:spPr>
+          <a:xfrm>
+            <a:off x="5200132" y="2341929"/>
+            <a:ext cx="546618" cy="115521"/>
+          </a:xfrm>
+          <a:prstGeom prst="rect">
+            <a:avLst/>
+          </a:prstGeom>
+          <a:solidFill>
+            <a:srgbClr val="ACD433">
+              <a:alpha val="50196"/>
+            </a:srgbClr>
+          </a:solidFill>
+        </p:spPr>
+        <p:style>
+          <a:lnRef idx="2">
+            <a:schemeClr val="accent1">
+              <a:shade val="15000"/>
+            </a:schemeClr>
+          </a:lnRef>
+          <a:fillRef idx="1">
+            <a:schemeClr val="accent1"/>
+          </a:fillRef>
+          <a:effectRef idx="0">
+            <a:schemeClr val="accent1"/>
+          </a:effectRef>
+          <a:fontRef idx="minor">
+            <a:schemeClr val="lt1"/>
+          </a:fontRef>
+        </p:style>
+        <p:txBody>
+          <a:bodyPr rtlCol="0" anchor="ctr"/>
+          <a:lstStyle/>
+          <a:p>
+            <a:pPr algn="ctr"/>
+            <a:endParaRPr lang="en-US"/>
+          </a:p>
+        </p:txBody>
+      </p:sp>
+      <p:sp>
+        <p:nvSpPr>
+          <p:cNvPr id="25" name="Rectangle 24">
+            <a:extLst>
+              <a:ext uri="{FF2B5EF4-FFF2-40B4-BE49-F238E27FC236}">
+                <a16:creationId xmlns:a16="http://schemas.microsoft.com/office/drawing/2014/main" id="{56EF6A28-8B48-ADF7-4A69-B91E66662D70}"/>
+              </a:ext>
+            </a:extLst>
+          </p:cNvPr>
+          <p:cNvSpPr/>
+          <p:nvPr/>
+        </p:nvSpPr>
+        <p:spPr>
+          <a:xfrm rot="8938082">
+            <a:off x="5502940" y="1047172"/>
+            <a:ext cx="76042" cy="1357830"/>
+          </a:xfrm>
+          <a:prstGeom prst="rect">
+            <a:avLst/>
+          </a:prstGeom>
+          <a:solidFill>
+            <a:schemeClr val="accent2">
+              <a:alpha val="50196"/>
+            </a:schemeClr>
+          </a:solidFill>
+        </p:spPr>
+        <p:style>
+          <a:lnRef idx="2">
+            <a:schemeClr val="accent1">
+              <a:shade val="15000"/>
+            </a:schemeClr>
+          </a:lnRef>
+          <a:fillRef idx="1">
+            <a:schemeClr val="accent1"/>
+          </a:fillRef>
+          <a:effectRef idx="0">
+            <a:schemeClr val="accent1"/>
+          </a:effectRef>
+          <a:fontRef idx="minor">
+            <a:schemeClr val="lt1"/>
+          </a:fontRef>
+        </p:style>
+        <p:txBody>
+          <a:bodyPr rtlCol="0" anchor="ctr"/>
+          <a:lstStyle/>
+          <a:p>
+            <a:pPr algn="ctr"/>
+            <a:endParaRPr lang="en-US"/>
+          </a:p>
+        </p:txBody>
+      </p:sp>
+    </p:spTree>
+    <p:extLst>
+      <p:ext uri="{BB962C8B-B14F-4D97-AF65-F5344CB8AC3E}">
+        <p14:creationId xmlns:p14="http://schemas.microsoft.com/office/powerpoint/2010/main" val="1817526641"/>
+      </p:ext>
+    </p:extLst>
+  </p:cSld>
+  <p:clrMapOvr>
+    <a:masterClrMapping/>
+  </p:clrMapOvr>
+</p:sld>
+</file>
+
+<file path=ppt/slides/slide31.xml><?xml version="1.0" encoding="utf-8"?>
+<p:sld xmlns:a="http://schemas.openxmlformats.org/drawingml/2006/main" xmlns:r="http://schemas.openxmlformats.org/officeDocument/2006/relationships" xmlns:p="http://schemas.openxmlformats.org/presentationml/2006/main">
+  <p:cSld>
+    <p:spTree>
+      <p:nvGrpSpPr>
+        <p:cNvPr id="1" name="">
+          <a:extLst>
+            <a:ext uri="{FF2B5EF4-FFF2-40B4-BE49-F238E27FC236}">
+              <a16:creationId xmlns:a16="http://schemas.microsoft.com/office/drawing/2014/main" id="{DF7BF546-C819-31CB-F662-7F1137705E11}"/>
+            </a:ext>
+          </a:extLst>
+        </p:cNvPr>
+        <p:cNvGrpSpPr/>
+        <p:nvPr/>
+      </p:nvGrpSpPr>
+      <p:grpSpPr>
+        <a:xfrm>
+          <a:off x="0" y="0"/>
+          <a:ext cx="0" cy="0"/>
+          <a:chOff x="0" y="0"/>
+          <a:chExt cx="0" cy="0"/>
+        </a:xfrm>
+      </p:grpSpPr>
+      <p:sp>
+        <p:nvSpPr>
+          <p:cNvPr id="2" name="Title 1">
+            <a:extLst>
+              <a:ext uri="{FF2B5EF4-FFF2-40B4-BE49-F238E27FC236}">
+                <a16:creationId xmlns:a16="http://schemas.microsoft.com/office/drawing/2014/main" id="{6BEFDD15-7D36-2904-006C-A640B4D62D88}"/>
+              </a:ext>
+            </a:extLst>
+          </p:cNvPr>
+          <p:cNvSpPr>
+            <a:spLocks noGrp="1"/>
+          </p:cNvSpPr>
+          <p:nvPr>
+            <p:ph type="title"/>
+          </p:nvPr>
+        </p:nvSpPr>
+        <p:spPr>
+          <a:xfrm>
+            <a:off x="1754188" y="452718"/>
+            <a:ext cx="8296646" cy="1400530"/>
+          </a:xfrm>
+        </p:spPr>
+        <p:txBody>
+          <a:bodyPr/>
+          <a:lstStyle/>
+          <a:p>
+            <a:r>
+              <a:rPr lang="en-US" b="1" dirty="0"/>
+              <a:t>Essential EA Meta-Model</a:t>
+            </a:r>
+            <a:br>
+              <a:rPr lang="en-US" b="1" dirty="0"/>
+            </a:br>
+            <a:r>
+              <a:rPr lang="en-US" b="1" dirty="0"/>
+              <a:t>- Business Layer - 14</a:t>
+            </a:r>
+          </a:p>
+        </p:txBody>
+      </p:sp>
+      <p:sp>
+        <p:nvSpPr>
+          <p:cNvPr id="4" name="Title 1">
+            <a:extLst>
+              <a:ext uri="{FF2B5EF4-FFF2-40B4-BE49-F238E27FC236}">
+                <a16:creationId xmlns:a16="http://schemas.microsoft.com/office/drawing/2014/main" id="{5C6230C9-55C6-E71E-32AD-CC518DD01111}"/>
+              </a:ext>
+            </a:extLst>
+          </p:cNvPr>
+          <p:cNvSpPr txBox="1">
+            <a:spLocks/>
+          </p:cNvSpPr>
+          <p:nvPr/>
+        </p:nvSpPr>
+        <p:spPr>
+          <a:xfrm>
+            <a:off x="0" y="3143"/>
+            <a:ext cx="1754188" cy="1058013"/>
+          </a:xfrm>
+          <a:prstGeom prst="rect">
+            <a:avLst/>
+          </a:prstGeom>
+        </p:spPr>
+        <p:txBody>
+          <a:bodyPr vert="horz" lIns="91440" tIns="45720" rIns="91440" bIns="45720" rtlCol="0" anchor="ctr">
+            <a:noAutofit/>
+          </a:bodyPr>
+          <a:lstStyle>
+            <a:lvl1pPr algn="l" defTabSz="457200" rtl="0" eaLnBrk="1" latinLnBrk="0" hangingPunct="1">
+              <a:spcBef>
+                <a:spcPct val="0"/>
+              </a:spcBef>
+              <a:buNone/>
+              <a:defRPr sz="7200" b="0" i="0" kern="1200">
+                <a:solidFill>
+                  <a:schemeClr val="tx2"/>
+                </a:solidFill>
+                <a:latin typeface="+mj-lt"/>
+                <a:ea typeface="+mj-ea"/>
+                <a:cs typeface="+mj-cs"/>
+              </a:defRPr>
+            </a:lvl1pPr>
+            <a:lvl2pPr eaLnBrk="1" hangingPunct="1">
+              <a:defRPr>
+                <a:solidFill>
+                  <a:schemeClr val="tx2"/>
+                </a:solidFill>
+              </a:defRPr>
+            </a:lvl2pPr>
+            <a:lvl3pPr eaLnBrk="1" hangingPunct="1">
+              <a:defRPr>
+                <a:solidFill>
+                  <a:schemeClr val="tx2"/>
+                </a:solidFill>
+              </a:defRPr>
+            </a:lvl3pPr>
+            <a:lvl4pPr eaLnBrk="1" hangingPunct="1">
+              <a:defRPr>
+                <a:solidFill>
+                  <a:schemeClr val="tx2"/>
+                </a:solidFill>
+              </a:defRPr>
+            </a:lvl4pPr>
+            <a:lvl5pPr eaLnBrk="1" hangingPunct="1">
+              <a:defRPr>
+                <a:solidFill>
+                  <a:schemeClr val="tx2"/>
+                </a:solidFill>
+              </a:defRPr>
+            </a:lvl5pPr>
+            <a:lvl6pPr eaLnBrk="1" hangingPunct="1">
+              <a:defRPr>
+                <a:solidFill>
+                  <a:schemeClr val="tx2"/>
+                </a:solidFill>
+              </a:defRPr>
+            </a:lvl6pPr>
+            <a:lvl7pPr eaLnBrk="1" hangingPunct="1">
+              <a:defRPr>
+                <a:solidFill>
+                  <a:schemeClr val="tx2"/>
+                </a:solidFill>
+              </a:defRPr>
+            </a:lvl7pPr>
+            <a:lvl8pPr eaLnBrk="1" hangingPunct="1">
+              <a:defRPr>
+                <a:solidFill>
+                  <a:schemeClr val="tx2"/>
+                </a:solidFill>
+              </a:defRPr>
+            </a:lvl8pPr>
+            <a:lvl9pPr eaLnBrk="1" hangingPunct="1">
+              <a:defRPr>
+                <a:solidFill>
+                  <a:schemeClr val="tx2"/>
+                </a:solidFill>
+              </a:defRPr>
+            </a:lvl9pPr>
+          </a:lstStyle>
+          <a:p>
+            <a:pPr algn="ctr"/>
+            <a:r>
+              <a:rPr lang="en-US" b="1" dirty="0">
+                <a:solidFill>
+                  <a:schemeClr val="accent1">
+                    <a:lumMod val="75000"/>
+                  </a:schemeClr>
+                </a:solidFill>
+              </a:rPr>
+              <a:t>021</a:t>
+            </a:r>
+            <a:endParaRPr lang="ru-RU" b="1" dirty="0">
+              <a:solidFill>
+                <a:schemeClr val="accent1">
+                  <a:lumMod val="75000"/>
+                </a:schemeClr>
+              </a:solidFill>
+            </a:endParaRPr>
+          </a:p>
+        </p:txBody>
+      </p:sp>
+      <p:pic>
+        <p:nvPicPr>
+          <p:cNvPr id="3" name="Picture 2">
+            <a:extLst>
+              <a:ext uri="{FF2B5EF4-FFF2-40B4-BE49-F238E27FC236}">
+                <a16:creationId xmlns:a16="http://schemas.microsoft.com/office/drawing/2014/main" id="{9C0F06A2-1423-EC3C-D0A2-F0BEDB64D647}"/>
+              </a:ext>
+            </a:extLst>
+          </p:cNvPr>
+          <p:cNvPicPr>
+            <a:picLocks noChangeAspect="1"/>
+          </p:cNvPicPr>
+          <p:nvPr/>
+        </p:nvPicPr>
+        <p:blipFill>
+          <a:blip r:embed="rId2"/>
+          <a:stretch>
+            <a:fillRect/>
+          </a:stretch>
+        </p:blipFill>
+        <p:spPr>
+          <a:xfrm>
+            <a:off x="236841" y="1853248"/>
+            <a:ext cx="8296646" cy="4669795"/>
+          </a:xfrm>
+          <a:prstGeom prst="rect">
+            <a:avLst/>
+          </a:prstGeom>
+          <a:ln>
+            <a:noFill/>
+          </a:ln>
+          <a:effectLst>
+            <a:outerShdw blurRad="292100" dist="139700" dir="2700000" algn="tl" rotWithShape="0">
+              <a:srgbClr val="333333">
+                <a:alpha val="65000"/>
+              </a:srgbClr>
+            </a:outerShdw>
+          </a:effectLst>
+        </p:spPr>
+      </p:pic>
+      <p:sp>
+        <p:nvSpPr>
+          <p:cNvPr id="6" name="Rectangle: Rounded Corners 5">
+            <a:extLst>
+              <a:ext uri="{FF2B5EF4-FFF2-40B4-BE49-F238E27FC236}">
+                <a16:creationId xmlns:a16="http://schemas.microsoft.com/office/drawing/2014/main" id="{6FC2DB63-C4E6-25BB-5D7E-255254CD6AFF}"/>
+              </a:ext>
+            </a:extLst>
+          </p:cNvPr>
+          <p:cNvSpPr/>
+          <p:nvPr/>
+        </p:nvSpPr>
+        <p:spPr>
+          <a:xfrm>
+            <a:off x="596436" y="2188396"/>
+            <a:ext cx="2054832" cy="1400530"/>
+          </a:xfrm>
+          <a:prstGeom prst="roundRect">
+            <a:avLst>
+              <a:gd name="adj" fmla="val 6916"/>
+            </a:avLst>
+          </a:prstGeom>
+          <a:solidFill>
+            <a:srgbClr val="FFCC66">
+              <a:alpha val="20000"/>
+            </a:srgbClr>
+          </a:solidFill>
+          <a:ln>
+            <a:solidFill>
+              <a:srgbClr val="92D050"/>
+            </a:solidFill>
+          </a:ln>
+        </p:spPr>
+        <p:style>
+          <a:lnRef idx="2">
+            <a:schemeClr val="accent1">
+              <a:shade val="15000"/>
+            </a:schemeClr>
+          </a:lnRef>
+          <a:fillRef idx="1">
+            <a:schemeClr val="accent1"/>
+          </a:fillRef>
+          <a:effectRef idx="0">
+            <a:schemeClr val="accent1"/>
+          </a:effectRef>
+          <a:fontRef idx="minor">
+            <a:schemeClr val="lt1"/>
+          </a:fontRef>
+        </p:style>
+        <p:txBody>
+          <a:bodyPr rtlCol="0" anchor="ctr"/>
+          <a:lstStyle/>
+          <a:p>
+            <a:pPr algn="ctr"/>
+            <a:endParaRPr lang="en-US"/>
+          </a:p>
+        </p:txBody>
+      </p:sp>
+      <p:pic>
+        <p:nvPicPr>
+          <p:cNvPr id="11" name="Picture 10">
+            <a:extLst>
+              <a:ext uri="{FF2B5EF4-FFF2-40B4-BE49-F238E27FC236}">
+                <a16:creationId xmlns:a16="http://schemas.microsoft.com/office/drawing/2014/main" id="{D03BBB43-95BB-E59E-4E05-D1A8E57C233B}"/>
+              </a:ext>
+            </a:extLst>
+          </p:cNvPr>
+          <p:cNvPicPr>
+            <a:picLocks noChangeAspect="1"/>
+          </p:cNvPicPr>
+          <p:nvPr/>
+        </p:nvPicPr>
+        <p:blipFill>
+          <a:blip r:embed="rId3"/>
+          <a:stretch>
+            <a:fillRect/>
+          </a:stretch>
+        </p:blipFill>
+        <p:spPr>
+          <a:xfrm>
+            <a:off x="157000" y="1094226"/>
+            <a:ext cx="362976" cy="362976"/>
+          </a:xfrm>
+          <a:prstGeom prst="rect">
+            <a:avLst/>
+          </a:prstGeom>
+          <a:ln>
+            <a:noFill/>
+          </a:ln>
+          <a:effectLst>
+            <a:outerShdw blurRad="292100" dist="139700" dir="2700000" algn="tl" rotWithShape="0">
+              <a:srgbClr val="333333">
+                <a:alpha val="65000"/>
+              </a:srgbClr>
+            </a:outerShdw>
+          </a:effectLst>
+        </p:spPr>
+      </p:pic>
+      <p:pic>
+        <p:nvPicPr>
+          <p:cNvPr id="12" name="Picture 11">
+            <a:extLst>
+              <a:ext uri="{FF2B5EF4-FFF2-40B4-BE49-F238E27FC236}">
+                <a16:creationId xmlns:a16="http://schemas.microsoft.com/office/drawing/2014/main" id="{C363BDA3-5254-5A98-52E1-271F26EA78F6}"/>
+              </a:ext>
+            </a:extLst>
+          </p:cNvPr>
+          <p:cNvPicPr>
+            <a:picLocks noChangeAspect="1"/>
+          </p:cNvPicPr>
+          <p:nvPr/>
+        </p:nvPicPr>
+        <p:blipFill>
+          <a:blip r:embed="rId4"/>
+          <a:stretch>
+            <a:fillRect/>
+          </a:stretch>
+        </p:blipFill>
+        <p:spPr>
+          <a:xfrm>
+            <a:off x="611241" y="1094226"/>
+            <a:ext cx="362976" cy="362976"/>
+          </a:xfrm>
+          <a:prstGeom prst="rect">
+            <a:avLst/>
+          </a:prstGeom>
+          <a:ln>
+            <a:noFill/>
+          </a:ln>
+          <a:effectLst>
+            <a:outerShdw blurRad="292100" dist="139700" dir="2700000" algn="tl" rotWithShape="0">
+              <a:srgbClr val="333333">
+                <a:alpha val="65000"/>
+              </a:srgbClr>
+            </a:outerShdw>
+          </a:effectLst>
+        </p:spPr>
+      </p:pic>
+      <p:pic>
+        <p:nvPicPr>
+          <p:cNvPr id="13" name="Picture 12">
+            <a:extLst>
+              <a:ext uri="{FF2B5EF4-FFF2-40B4-BE49-F238E27FC236}">
+                <a16:creationId xmlns:a16="http://schemas.microsoft.com/office/drawing/2014/main" id="{C400411C-E68B-134D-10CC-C433ECBFB545}"/>
+              </a:ext>
+            </a:extLst>
+          </p:cNvPr>
+          <p:cNvPicPr>
+            <a:picLocks noChangeAspect="1"/>
+          </p:cNvPicPr>
+          <p:nvPr/>
+        </p:nvPicPr>
+        <p:blipFill>
+          <a:blip r:embed="rId5"/>
+          <a:stretch>
+            <a:fillRect/>
+          </a:stretch>
+        </p:blipFill>
+        <p:spPr>
+          <a:xfrm>
+            <a:off x="1065482" y="1094226"/>
+            <a:ext cx="371111" cy="362976"/>
+          </a:xfrm>
+          <a:prstGeom prst="rect">
+            <a:avLst/>
+          </a:prstGeom>
+          <a:ln>
+            <a:noFill/>
+          </a:ln>
+          <a:effectLst>
+            <a:outerShdw blurRad="292100" dist="139700" dir="2700000" algn="tl" rotWithShape="0">
+              <a:srgbClr val="333333">
+                <a:alpha val="65000"/>
+              </a:srgbClr>
+            </a:outerShdw>
+          </a:effectLst>
+        </p:spPr>
+      </p:pic>
+    </p:spTree>
+    <p:extLst>
+      <p:ext uri="{BB962C8B-B14F-4D97-AF65-F5344CB8AC3E}">
+        <p14:creationId xmlns:p14="http://schemas.microsoft.com/office/powerpoint/2010/main" val="3406395743"/>
+      </p:ext>
+    </p:extLst>
+  </p:cSld>
+  <p:clrMapOvr>
+    <a:masterClrMapping/>
+  </p:clrMapOvr>
+</p:sld>
+</file>
+
+<file path=ppt/slides/slide32.xml><?xml version="1.0" encoding="utf-8"?>
 <p:sld xmlns:a="http://schemas.openxmlformats.org/drawingml/2006/main" xmlns:r="http://schemas.openxmlformats.org/officeDocument/2006/relationships" xmlns:p="http://schemas.openxmlformats.org/presentationml/2006/main">
   <p:cSld>
     <p:bg>

--- a/Master_EAS_Meta-Model.pptx
+++ b/Master_EAS_Meta-Model.pptx
@@ -5,10 +5,10 @@
     <p:sldMasterId id="2147483648" r:id="rId4"/>
   </p:sldMasterIdLst>
   <p:notesMasterIdLst>
-    <p:notesMasterId r:id="rId37"/>
+    <p:notesMasterId r:id="rId40"/>
   </p:notesMasterIdLst>
   <p:handoutMasterIdLst>
-    <p:handoutMasterId r:id="rId38"/>
+    <p:handoutMasterId r:id="rId41"/>
   </p:handoutMasterIdLst>
   <p:sldIdLst>
     <p:sldId id="256" r:id="rId5"/>
@@ -42,7 +42,10 @@
     <p:sldId id="298" r:id="rId33"/>
     <p:sldId id="299" r:id="rId34"/>
     <p:sldId id="300" r:id="rId35"/>
-    <p:sldId id="267" r:id="rId36"/>
+    <p:sldId id="301" r:id="rId36"/>
+    <p:sldId id="302" r:id="rId37"/>
+    <p:sldId id="303" r:id="rId38"/>
+    <p:sldId id="267" r:id="rId39"/>
   </p:sldIdLst>
   <p:sldSz cx="12192000" cy="6858000"/>
   <p:notesSz cx="6858000" cy="9144000"/>
@@ -850,7 +853,7 @@
           <a:p>
             <a:fld id="{EE000EEB-8338-48D7-8EE8-EE0082EF7602}" type="slidenum">
               <a:rPr lang="en-US" smtClean="0"/>
-              <a:t>32</a:t>
+              <a:t>35</a:t>
             </a:fld>
             <a:endParaRPr lang="en-US" dirty="0"/>
           </a:p>
@@ -21911,7 +21914,7 @@
             <a:avLst/>
           </a:prstGeom>
           <a:solidFill>
-            <a:schemeClr val="accent2">
+            <a:schemeClr val="accent3">
               <a:alpha val="50196"/>
             </a:schemeClr>
           </a:solidFill>
@@ -22012,7 +22015,7 @@
             </a:br>
             <a:r>
               <a:rPr lang="en-US" b="1" dirty="0"/>
-              <a:t>- Business Layer - 14</a:t>
+              <a:t>- Business Layer - 15</a:t>
             </a:r>
           </a:p>
         </p:txBody>
@@ -22356,6 +22359,60 @@
           </a:effectLst>
         </p:spPr>
       </p:pic>
+      <p:pic>
+        <p:nvPicPr>
+          <p:cNvPr id="7" name="Picture 6">
+            <a:extLst>
+              <a:ext uri="{FF2B5EF4-FFF2-40B4-BE49-F238E27FC236}">
+                <a16:creationId xmlns:a16="http://schemas.microsoft.com/office/drawing/2014/main" id="{4CC08381-F8C1-7794-257B-3ACECDD590E1}"/>
+              </a:ext>
+            </a:extLst>
+          </p:cNvPr>
+          <p:cNvPicPr>
+            <a:picLocks noChangeAspect="1"/>
+          </p:cNvPicPr>
+          <p:nvPr/>
+        </p:nvPicPr>
+        <p:blipFill>
+          <a:blip r:embed="rId6"/>
+          <a:stretch>
+            <a:fillRect/>
+          </a:stretch>
+        </p:blipFill>
+        <p:spPr>
+          <a:xfrm>
+            <a:off x="7156173" y="1623065"/>
+            <a:ext cx="4648849" cy="4782217"/>
+          </a:xfrm>
+          <a:prstGeom prst="roundRect">
+            <a:avLst>
+              <a:gd name="adj" fmla="val 16667"/>
+            </a:avLst>
+          </a:prstGeom>
+          <a:ln>
+            <a:noFill/>
+          </a:ln>
+          <a:effectLst>
+            <a:outerShdw blurRad="152400" dist="12000" dir="900000" sy="98000" kx="110000" ky="200000" algn="tl" rotWithShape="0">
+              <a:srgbClr val="000000">
+                <a:alpha val="30000"/>
+              </a:srgbClr>
+            </a:outerShdw>
+          </a:effectLst>
+          <a:scene3d>
+            <a:camera prst="perspectiveRelaxed">
+              <a:rot lat="19800000" lon="1200000" rev="20820000"/>
+            </a:camera>
+            <a:lightRig rig="threePt" dir="t"/>
+          </a:scene3d>
+          <a:sp3d contourW="6350" prstMaterial="matte">
+            <a:bevelT w="101600" h="101600"/>
+            <a:contourClr>
+              <a:srgbClr val="969696"/>
+            </a:contourClr>
+          </a:sp3d>
+        </p:spPr>
+      </p:pic>
     </p:spTree>
     <p:extLst>
       <p:ext uri="{BB962C8B-B14F-4D97-AF65-F5344CB8AC3E}">
@@ -22370,6 +22427,3715 @@
 </file>
 
 <file path=ppt/slides/slide32.xml><?xml version="1.0" encoding="utf-8"?>
+<p:sld xmlns:a="http://schemas.openxmlformats.org/drawingml/2006/main" xmlns:r="http://schemas.openxmlformats.org/officeDocument/2006/relationships" xmlns:p="http://schemas.openxmlformats.org/presentationml/2006/main">
+  <p:cSld>
+    <p:spTree>
+      <p:nvGrpSpPr>
+        <p:cNvPr id="1" name="">
+          <a:extLst>
+            <a:ext uri="{FF2B5EF4-FFF2-40B4-BE49-F238E27FC236}">
+              <a16:creationId xmlns:a16="http://schemas.microsoft.com/office/drawing/2014/main" id="{4F12E4BA-CCB1-C99F-31E4-74ECD5FD2040}"/>
+            </a:ext>
+          </a:extLst>
+        </p:cNvPr>
+        <p:cNvGrpSpPr/>
+        <p:nvPr/>
+      </p:nvGrpSpPr>
+      <p:grpSpPr>
+        <a:xfrm>
+          <a:off x="0" y="0"/>
+          <a:ext cx="0" cy="0"/>
+          <a:chOff x="0" y="0"/>
+          <a:chExt cx="0" cy="0"/>
+        </a:xfrm>
+      </p:grpSpPr>
+      <p:pic>
+        <p:nvPicPr>
+          <p:cNvPr id="3" name="Picture 2">
+            <a:extLst>
+              <a:ext uri="{FF2B5EF4-FFF2-40B4-BE49-F238E27FC236}">
+                <a16:creationId xmlns:a16="http://schemas.microsoft.com/office/drawing/2014/main" id="{12450F3E-8000-E75A-91FB-8F324950166E}"/>
+              </a:ext>
+            </a:extLst>
+          </p:cNvPr>
+          <p:cNvPicPr>
+            <a:picLocks noChangeAspect="1"/>
+          </p:cNvPicPr>
+          <p:nvPr/>
+        </p:nvPicPr>
+        <p:blipFill>
+          <a:blip r:embed="rId2"/>
+          <a:stretch>
+            <a:fillRect/>
+          </a:stretch>
+        </p:blipFill>
+        <p:spPr>
+          <a:xfrm>
+            <a:off x="2592309" y="0"/>
+            <a:ext cx="7007382" cy="6858000"/>
+          </a:xfrm>
+          <a:prstGeom prst="rect">
+            <a:avLst/>
+          </a:prstGeom>
+        </p:spPr>
+      </p:pic>
+      <p:sp>
+        <p:nvSpPr>
+          <p:cNvPr id="4" name="Rectangle 3">
+            <a:extLst>
+              <a:ext uri="{FF2B5EF4-FFF2-40B4-BE49-F238E27FC236}">
+                <a16:creationId xmlns:a16="http://schemas.microsoft.com/office/drawing/2014/main" id="{9EECE290-55C5-40BC-A59C-EE0A01ADBBBF}"/>
+              </a:ext>
+            </a:extLst>
+          </p:cNvPr>
+          <p:cNvSpPr/>
+          <p:nvPr/>
+        </p:nvSpPr>
+        <p:spPr>
+          <a:xfrm>
+            <a:off x="3700530" y="223234"/>
+            <a:ext cx="957329" cy="64394"/>
+          </a:xfrm>
+          <a:prstGeom prst="rect">
+            <a:avLst/>
+          </a:prstGeom>
+          <a:solidFill>
+            <a:srgbClr val="ACD433">
+              <a:alpha val="50196"/>
+            </a:srgbClr>
+          </a:solidFill>
+        </p:spPr>
+        <p:style>
+          <a:lnRef idx="2">
+            <a:schemeClr val="accent1">
+              <a:shade val="15000"/>
+            </a:schemeClr>
+          </a:lnRef>
+          <a:fillRef idx="1">
+            <a:schemeClr val="accent1"/>
+          </a:fillRef>
+          <a:effectRef idx="0">
+            <a:schemeClr val="accent1"/>
+          </a:effectRef>
+          <a:fontRef idx="minor">
+            <a:schemeClr val="lt1"/>
+          </a:fontRef>
+        </p:style>
+        <p:txBody>
+          <a:bodyPr rtlCol="0" anchor="ctr"/>
+          <a:lstStyle/>
+          <a:p>
+            <a:pPr algn="ctr"/>
+            <a:endParaRPr lang="en-US"/>
+          </a:p>
+        </p:txBody>
+      </p:sp>
+      <p:sp>
+        <p:nvSpPr>
+          <p:cNvPr id="5" name="Rectangle 4">
+            <a:extLst>
+              <a:ext uri="{FF2B5EF4-FFF2-40B4-BE49-F238E27FC236}">
+                <a16:creationId xmlns:a16="http://schemas.microsoft.com/office/drawing/2014/main" id="{119853E5-D9D3-F4CD-AF1A-2D83B2A84606}"/>
+              </a:ext>
+            </a:extLst>
+          </p:cNvPr>
+          <p:cNvSpPr/>
+          <p:nvPr/>
+        </p:nvSpPr>
+        <p:spPr>
+          <a:xfrm>
+            <a:off x="3619568" y="0"/>
+            <a:ext cx="233295" cy="181579"/>
+          </a:xfrm>
+          <a:prstGeom prst="rect">
+            <a:avLst/>
+          </a:prstGeom>
+          <a:solidFill>
+            <a:srgbClr val="ACD433">
+              <a:alpha val="50196"/>
+            </a:srgbClr>
+          </a:solidFill>
+        </p:spPr>
+        <p:style>
+          <a:lnRef idx="2">
+            <a:schemeClr val="accent1">
+              <a:shade val="15000"/>
+            </a:schemeClr>
+          </a:lnRef>
+          <a:fillRef idx="1">
+            <a:schemeClr val="accent1"/>
+          </a:fillRef>
+          <a:effectRef idx="0">
+            <a:schemeClr val="accent1"/>
+          </a:effectRef>
+          <a:fontRef idx="minor">
+            <a:schemeClr val="lt1"/>
+          </a:fontRef>
+        </p:style>
+        <p:txBody>
+          <a:bodyPr rtlCol="0" anchor="ctr"/>
+          <a:lstStyle/>
+          <a:p>
+            <a:pPr algn="ctr"/>
+            <a:endParaRPr lang="en-US"/>
+          </a:p>
+        </p:txBody>
+      </p:sp>
+      <p:sp>
+        <p:nvSpPr>
+          <p:cNvPr id="6" name="Rectangle 5">
+            <a:extLst>
+              <a:ext uri="{FF2B5EF4-FFF2-40B4-BE49-F238E27FC236}">
+                <a16:creationId xmlns:a16="http://schemas.microsoft.com/office/drawing/2014/main" id="{4F04A881-8DB6-8FDD-D8DB-F542DC077117}"/>
+              </a:ext>
+            </a:extLst>
+          </p:cNvPr>
+          <p:cNvSpPr/>
+          <p:nvPr/>
+        </p:nvSpPr>
+        <p:spPr>
+          <a:xfrm>
+            <a:off x="6757680" y="424700"/>
+            <a:ext cx="1028938" cy="436792"/>
+          </a:xfrm>
+          <a:prstGeom prst="rect">
+            <a:avLst/>
+          </a:prstGeom>
+          <a:solidFill>
+            <a:srgbClr val="ACD433">
+              <a:alpha val="50196"/>
+            </a:srgbClr>
+          </a:solidFill>
+        </p:spPr>
+        <p:style>
+          <a:lnRef idx="2">
+            <a:schemeClr val="accent1">
+              <a:shade val="15000"/>
+            </a:schemeClr>
+          </a:lnRef>
+          <a:fillRef idx="1">
+            <a:schemeClr val="accent1"/>
+          </a:fillRef>
+          <a:effectRef idx="0">
+            <a:schemeClr val="accent1"/>
+          </a:effectRef>
+          <a:fontRef idx="minor">
+            <a:schemeClr val="lt1"/>
+          </a:fontRef>
+        </p:style>
+        <p:txBody>
+          <a:bodyPr rtlCol="0" anchor="ctr"/>
+          <a:lstStyle/>
+          <a:p>
+            <a:pPr algn="ctr"/>
+            <a:endParaRPr lang="en-US"/>
+          </a:p>
+        </p:txBody>
+      </p:sp>
+      <p:sp>
+        <p:nvSpPr>
+          <p:cNvPr id="7" name="Rectangle 6">
+            <a:extLst>
+              <a:ext uri="{FF2B5EF4-FFF2-40B4-BE49-F238E27FC236}">
+                <a16:creationId xmlns:a16="http://schemas.microsoft.com/office/drawing/2014/main" id="{52639855-8541-D312-FFDB-AFA0D980394E}"/>
+              </a:ext>
+            </a:extLst>
+          </p:cNvPr>
+          <p:cNvSpPr/>
+          <p:nvPr/>
+        </p:nvSpPr>
+        <p:spPr>
+          <a:xfrm>
+            <a:off x="2913124" y="996949"/>
+            <a:ext cx="115825" cy="298451"/>
+          </a:xfrm>
+          <a:prstGeom prst="rect">
+            <a:avLst/>
+          </a:prstGeom>
+          <a:solidFill>
+            <a:srgbClr val="ACD433">
+              <a:alpha val="50196"/>
+            </a:srgbClr>
+          </a:solidFill>
+        </p:spPr>
+        <p:style>
+          <a:lnRef idx="2">
+            <a:schemeClr val="accent1">
+              <a:shade val="15000"/>
+            </a:schemeClr>
+          </a:lnRef>
+          <a:fillRef idx="1">
+            <a:schemeClr val="accent1"/>
+          </a:fillRef>
+          <a:effectRef idx="0">
+            <a:schemeClr val="accent1"/>
+          </a:effectRef>
+          <a:fontRef idx="minor">
+            <a:schemeClr val="lt1"/>
+          </a:fontRef>
+        </p:style>
+        <p:txBody>
+          <a:bodyPr rtlCol="0" anchor="ctr"/>
+          <a:lstStyle/>
+          <a:p>
+            <a:pPr algn="ctr"/>
+            <a:endParaRPr lang="en-US"/>
+          </a:p>
+        </p:txBody>
+      </p:sp>
+      <p:sp>
+        <p:nvSpPr>
+          <p:cNvPr id="2" name="Rectangle 1">
+            <a:extLst>
+              <a:ext uri="{FF2B5EF4-FFF2-40B4-BE49-F238E27FC236}">
+                <a16:creationId xmlns:a16="http://schemas.microsoft.com/office/drawing/2014/main" id="{E32EE214-8D9F-00CF-8926-04DE1B8A697B}"/>
+              </a:ext>
+            </a:extLst>
+          </p:cNvPr>
+          <p:cNvSpPr/>
+          <p:nvPr/>
+        </p:nvSpPr>
+        <p:spPr>
+          <a:xfrm rot="1551019">
+            <a:off x="3573376" y="623121"/>
+            <a:ext cx="1093916" cy="102021"/>
+          </a:xfrm>
+          <a:prstGeom prst="rect">
+            <a:avLst/>
+          </a:prstGeom>
+          <a:solidFill>
+            <a:srgbClr val="ACD433">
+              <a:alpha val="50196"/>
+            </a:srgbClr>
+          </a:solidFill>
+        </p:spPr>
+        <p:style>
+          <a:lnRef idx="2">
+            <a:schemeClr val="accent1">
+              <a:shade val="15000"/>
+            </a:schemeClr>
+          </a:lnRef>
+          <a:fillRef idx="1">
+            <a:schemeClr val="accent1"/>
+          </a:fillRef>
+          <a:effectRef idx="0">
+            <a:schemeClr val="accent1"/>
+          </a:effectRef>
+          <a:fontRef idx="minor">
+            <a:schemeClr val="lt1"/>
+          </a:fontRef>
+        </p:style>
+        <p:txBody>
+          <a:bodyPr rtlCol="0" anchor="ctr"/>
+          <a:lstStyle/>
+          <a:p>
+            <a:pPr algn="ctr"/>
+            <a:endParaRPr lang="en-US"/>
+          </a:p>
+        </p:txBody>
+      </p:sp>
+      <p:sp>
+        <p:nvSpPr>
+          <p:cNvPr id="8" name="Rectangle 7">
+            <a:extLst>
+              <a:ext uri="{FF2B5EF4-FFF2-40B4-BE49-F238E27FC236}">
+                <a16:creationId xmlns:a16="http://schemas.microsoft.com/office/drawing/2014/main" id="{28F25F32-AA5D-2E91-80B6-F69F6E088A2C}"/>
+              </a:ext>
+            </a:extLst>
+          </p:cNvPr>
+          <p:cNvSpPr/>
+          <p:nvPr/>
+        </p:nvSpPr>
+        <p:spPr>
+          <a:xfrm>
+            <a:off x="5065260" y="733425"/>
+            <a:ext cx="318398" cy="225099"/>
+          </a:xfrm>
+          <a:prstGeom prst="rect">
+            <a:avLst/>
+          </a:prstGeom>
+          <a:solidFill>
+            <a:srgbClr val="ACD433">
+              <a:alpha val="50196"/>
+            </a:srgbClr>
+          </a:solidFill>
+        </p:spPr>
+        <p:style>
+          <a:lnRef idx="2">
+            <a:schemeClr val="accent1">
+              <a:shade val="15000"/>
+            </a:schemeClr>
+          </a:lnRef>
+          <a:fillRef idx="1">
+            <a:schemeClr val="accent1"/>
+          </a:fillRef>
+          <a:effectRef idx="0">
+            <a:schemeClr val="accent1"/>
+          </a:effectRef>
+          <a:fontRef idx="minor">
+            <a:schemeClr val="lt1"/>
+          </a:fontRef>
+        </p:style>
+        <p:txBody>
+          <a:bodyPr rtlCol="0" anchor="ctr"/>
+          <a:lstStyle/>
+          <a:p>
+            <a:pPr algn="ctr"/>
+            <a:endParaRPr lang="en-US"/>
+          </a:p>
+        </p:txBody>
+      </p:sp>
+      <p:sp>
+        <p:nvSpPr>
+          <p:cNvPr id="9" name="Rectangle 8">
+            <a:extLst>
+              <a:ext uri="{FF2B5EF4-FFF2-40B4-BE49-F238E27FC236}">
+                <a16:creationId xmlns:a16="http://schemas.microsoft.com/office/drawing/2014/main" id="{0F375881-E1F9-E7CD-B274-016727D87CD6}"/>
+              </a:ext>
+            </a:extLst>
+          </p:cNvPr>
+          <p:cNvSpPr/>
+          <p:nvPr/>
+        </p:nvSpPr>
+        <p:spPr>
+          <a:xfrm>
+            <a:off x="4886705" y="434974"/>
+            <a:ext cx="81536" cy="426086"/>
+          </a:xfrm>
+          <a:prstGeom prst="rect">
+            <a:avLst/>
+          </a:prstGeom>
+          <a:solidFill>
+            <a:srgbClr val="ACD433">
+              <a:alpha val="50196"/>
+            </a:srgbClr>
+          </a:solidFill>
+        </p:spPr>
+        <p:style>
+          <a:lnRef idx="2">
+            <a:schemeClr val="accent1">
+              <a:shade val="15000"/>
+            </a:schemeClr>
+          </a:lnRef>
+          <a:fillRef idx="1">
+            <a:schemeClr val="accent1"/>
+          </a:fillRef>
+          <a:effectRef idx="0">
+            <a:schemeClr val="accent1"/>
+          </a:effectRef>
+          <a:fontRef idx="minor">
+            <a:schemeClr val="lt1"/>
+          </a:fontRef>
+        </p:style>
+        <p:txBody>
+          <a:bodyPr rtlCol="0" anchor="ctr"/>
+          <a:lstStyle/>
+          <a:p>
+            <a:pPr algn="ctr"/>
+            <a:endParaRPr lang="en-US"/>
+          </a:p>
+        </p:txBody>
+      </p:sp>
+      <p:sp>
+        <p:nvSpPr>
+          <p:cNvPr id="10" name="Rectangle 9">
+            <a:extLst>
+              <a:ext uri="{FF2B5EF4-FFF2-40B4-BE49-F238E27FC236}">
+                <a16:creationId xmlns:a16="http://schemas.microsoft.com/office/drawing/2014/main" id="{722273BE-C1ED-EF5C-37DE-7AACF5213FF5}"/>
+              </a:ext>
+            </a:extLst>
+          </p:cNvPr>
+          <p:cNvSpPr/>
+          <p:nvPr/>
+        </p:nvSpPr>
+        <p:spPr>
+          <a:xfrm>
+            <a:off x="5006340" y="478664"/>
+            <a:ext cx="622522" cy="100455"/>
+          </a:xfrm>
+          <a:prstGeom prst="rect">
+            <a:avLst/>
+          </a:prstGeom>
+          <a:solidFill>
+            <a:srgbClr val="ACD433">
+              <a:alpha val="50196"/>
+            </a:srgbClr>
+          </a:solidFill>
+        </p:spPr>
+        <p:style>
+          <a:lnRef idx="2">
+            <a:schemeClr val="accent1">
+              <a:shade val="15000"/>
+            </a:schemeClr>
+          </a:lnRef>
+          <a:fillRef idx="1">
+            <a:schemeClr val="accent1"/>
+          </a:fillRef>
+          <a:effectRef idx="0">
+            <a:schemeClr val="accent1"/>
+          </a:effectRef>
+          <a:fontRef idx="minor">
+            <a:schemeClr val="lt1"/>
+          </a:fontRef>
+        </p:style>
+        <p:txBody>
+          <a:bodyPr rtlCol="0" anchor="ctr"/>
+          <a:lstStyle/>
+          <a:p>
+            <a:pPr algn="ctr"/>
+            <a:endParaRPr lang="en-US"/>
+          </a:p>
+        </p:txBody>
+      </p:sp>
+      <p:sp>
+        <p:nvSpPr>
+          <p:cNvPr id="11" name="Rectangle 10">
+            <a:extLst>
+              <a:ext uri="{FF2B5EF4-FFF2-40B4-BE49-F238E27FC236}">
+                <a16:creationId xmlns:a16="http://schemas.microsoft.com/office/drawing/2014/main" id="{1550CE9D-AA99-C501-6697-B96F7913DC71}"/>
+              </a:ext>
+            </a:extLst>
+          </p:cNvPr>
+          <p:cNvSpPr/>
+          <p:nvPr/>
+        </p:nvSpPr>
+        <p:spPr>
+          <a:xfrm>
+            <a:off x="5006340" y="587374"/>
+            <a:ext cx="114301" cy="273686"/>
+          </a:xfrm>
+          <a:prstGeom prst="rect">
+            <a:avLst/>
+          </a:prstGeom>
+          <a:solidFill>
+            <a:srgbClr val="ACD433">
+              <a:alpha val="50196"/>
+            </a:srgbClr>
+          </a:solidFill>
+        </p:spPr>
+        <p:style>
+          <a:lnRef idx="2">
+            <a:schemeClr val="accent1">
+              <a:shade val="15000"/>
+            </a:schemeClr>
+          </a:lnRef>
+          <a:fillRef idx="1">
+            <a:schemeClr val="accent1"/>
+          </a:fillRef>
+          <a:effectRef idx="0">
+            <a:schemeClr val="accent1"/>
+          </a:effectRef>
+          <a:fontRef idx="minor">
+            <a:schemeClr val="lt1"/>
+          </a:fontRef>
+        </p:style>
+        <p:txBody>
+          <a:bodyPr rtlCol="0" anchor="ctr"/>
+          <a:lstStyle/>
+          <a:p>
+            <a:pPr algn="ctr"/>
+            <a:endParaRPr lang="en-US"/>
+          </a:p>
+        </p:txBody>
+      </p:sp>
+      <p:sp>
+        <p:nvSpPr>
+          <p:cNvPr id="12" name="Rectangle 11">
+            <a:extLst>
+              <a:ext uri="{FF2B5EF4-FFF2-40B4-BE49-F238E27FC236}">
+                <a16:creationId xmlns:a16="http://schemas.microsoft.com/office/drawing/2014/main" id="{C0DB64D3-E557-A17A-2B66-6C91B8F22CCC}"/>
+              </a:ext>
+            </a:extLst>
+          </p:cNvPr>
+          <p:cNvSpPr/>
+          <p:nvPr/>
+        </p:nvSpPr>
+        <p:spPr>
+          <a:xfrm>
+            <a:off x="3382706" y="434974"/>
+            <a:ext cx="76700" cy="1133476"/>
+          </a:xfrm>
+          <a:prstGeom prst="rect">
+            <a:avLst/>
+          </a:prstGeom>
+          <a:solidFill>
+            <a:srgbClr val="ACD433">
+              <a:alpha val="50196"/>
+            </a:srgbClr>
+          </a:solidFill>
+        </p:spPr>
+        <p:style>
+          <a:lnRef idx="2">
+            <a:schemeClr val="accent1">
+              <a:shade val="15000"/>
+            </a:schemeClr>
+          </a:lnRef>
+          <a:fillRef idx="1">
+            <a:schemeClr val="accent1"/>
+          </a:fillRef>
+          <a:effectRef idx="0">
+            <a:schemeClr val="accent1"/>
+          </a:effectRef>
+          <a:fontRef idx="minor">
+            <a:schemeClr val="lt1"/>
+          </a:fontRef>
+        </p:style>
+        <p:txBody>
+          <a:bodyPr rtlCol="0" anchor="ctr"/>
+          <a:lstStyle/>
+          <a:p>
+            <a:pPr algn="ctr"/>
+            <a:endParaRPr lang="en-US"/>
+          </a:p>
+        </p:txBody>
+      </p:sp>
+      <p:sp>
+        <p:nvSpPr>
+          <p:cNvPr id="13" name="Rectangle 12">
+            <a:extLst>
+              <a:ext uri="{FF2B5EF4-FFF2-40B4-BE49-F238E27FC236}">
+                <a16:creationId xmlns:a16="http://schemas.microsoft.com/office/drawing/2014/main" id="{D7E5F8E2-04C5-93F9-2D3A-2DDAB823EBBD}"/>
+              </a:ext>
+            </a:extLst>
+          </p:cNvPr>
+          <p:cNvSpPr/>
+          <p:nvPr/>
+        </p:nvSpPr>
+        <p:spPr>
+          <a:xfrm>
+            <a:off x="3565097" y="974398"/>
+            <a:ext cx="76700" cy="594051"/>
+          </a:xfrm>
+          <a:prstGeom prst="rect">
+            <a:avLst/>
+          </a:prstGeom>
+          <a:solidFill>
+            <a:srgbClr val="ACD433">
+              <a:alpha val="50196"/>
+            </a:srgbClr>
+          </a:solidFill>
+        </p:spPr>
+        <p:style>
+          <a:lnRef idx="2">
+            <a:schemeClr val="accent1">
+              <a:shade val="15000"/>
+            </a:schemeClr>
+          </a:lnRef>
+          <a:fillRef idx="1">
+            <a:schemeClr val="accent1"/>
+          </a:fillRef>
+          <a:effectRef idx="0">
+            <a:schemeClr val="accent1"/>
+          </a:effectRef>
+          <a:fontRef idx="minor">
+            <a:schemeClr val="lt1"/>
+          </a:fontRef>
+        </p:style>
+        <p:txBody>
+          <a:bodyPr rtlCol="0" anchor="ctr"/>
+          <a:lstStyle/>
+          <a:p>
+            <a:pPr algn="ctr"/>
+            <a:endParaRPr lang="en-US"/>
+          </a:p>
+        </p:txBody>
+      </p:sp>
+      <p:sp>
+        <p:nvSpPr>
+          <p:cNvPr id="14" name="Rectangle 13">
+            <a:extLst>
+              <a:ext uri="{FF2B5EF4-FFF2-40B4-BE49-F238E27FC236}">
+                <a16:creationId xmlns:a16="http://schemas.microsoft.com/office/drawing/2014/main" id="{F0159988-3F96-D0DA-38E7-72467C0EB5B1}"/>
+              </a:ext>
+            </a:extLst>
+          </p:cNvPr>
+          <p:cNvSpPr/>
+          <p:nvPr/>
+        </p:nvSpPr>
+        <p:spPr>
+          <a:xfrm>
+            <a:off x="3641797" y="958524"/>
+            <a:ext cx="993006" cy="102111"/>
+          </a:xfrm>
+          <a:prstGeom prst="rect">
+            <a:avLst/>
+          </a:prstGeom>
+          <a:solidFill>
+            <a:srgbClr val="ACD433">
+              <a:alpha val="50196"/>
+            </a:srgbClr>
+          </a:solidFill>
+        </p:spPr>
+        <p:style>
+          <a:lnRef idx="2">
+            <a:schemeClr val="accent1">
+              <a:shade val="15000"/>
+            </a:schemeClr>
+          </a:lnRef>
+          <a:fillRef idx="1">
+            <a:schemeClr val="accent1"/>
+          </a:fillRef>
+          <a:effectRef idx="0">
+            <a:schemeClr val="accent1"/>
+          </a:effectRef>
+          <a:fontRef idx="minor">
+            <a:schemeClr val="lt1"/>
+          </a:fontRef>
+        </p:style>
+        <p:txBody>
+          <a:bodyPr rtlCol="0" anchor="ctr"/>
+          <a:lstStyle/>
+          <a:p>
+            <a:pPr algn="ctr"/>
+            <a:endParaRPr lang="en-US"/>
+          </a:p>
+        </p:txBody>
+      </p:sp>
+      <p:sp>
+        <p:nvSpPr>
+          <p:cNvPr id="15" name="Rectangle 14">
+            <a:extLst>
+              <a:ext uri="{FF2B5EF4-FFF2-40B4-BE49-F238E27FC236}">
+                <a16:creationId xmlns:a16="http://schemas.microsoft.com/office/drawing/2014/main" id="{09070E29-145E-34E1-A825-940F08454EA2}"/>
+              </a:ext>
+            </a:extLst>
+          </p:cNvPr>
+          <p:cNvSpPr/>
+          <p:nvPr/>
+        </p:nvSpPr>
+        <p:spPr>
+          <a:xfrm>
+            <a:off x="3788357" y="1447841"/>
+            <a:ext cx="233295" cy="181579"/>
+          </a:xfrm>
+          <a:prstGeom prst="rect">
+            <a:avLst/>
+          </a:prstGeom>
+          <a:solidFill>
+            <a:srgbClr val="ACD433">
+              <a:alpha val="50196"/>
+            </a:srgbClr>
+          </a:solidFill>
+        </p:spPr>
+        <p:style>
+          <a:lnRef idx="2">
+            <a:schemeClr val="accent1">
+              <a:shade val="15000"/>
+            </a:schemeClr>
+          </a:lnRef>
+          <a:fillRef idx="1">
+            <a:schemeClr val="accent1"/>
+          </a:fillRef>
+          <a:effectRef idx="0">
+            <a:schemeClr val="accent1"/>
+          </a:effectRef>
+          <a:fontRef idx="minor">
+            <a:schemeClr val="lt1"/>
+          </a:fontRef>
+        </p:style>
+        <p:txBody>
+          <a:bodyPr rtlCol="0" anchor="ctr"/>
+          <a:lstStyle/>
+          <a:p>
+            <a:pPr algn="ctr"/>
+            <a:endParaRPr lang="en-US"/>
+          </a:p>
+        </p:txBody>
+      </p:sp>
+      <p:sp>
+        <p:nvSpPr>
+          <p:cNvPr id="16" name="Rectangle 15">
+            <a:extLst>
+              <a:ext uri="{FF2B5EF4-FFF2-40B4-BE49-F238E27FC236}">
+                <a16:creationId xmlns:a16="http://schemas.microsoft.com/office/drawing/2014/main" id="{60BC2BDE-1C1D-868B-8C90-E761B0C79004}"/>
+              </a:ext>
+            </a:extLst>
+          </p:cNvPr>
+          <p:cNvSpPr/>
+          <p:nvPr/>
+        </p:nvSpPr>
+        <p:spPr>
+          <a:xfrm rot="4874518">
+            <a:off x="4478330" y="985650"/>
+            <a:ext cx="81536" cy="426086"/>
+          </a:xfrm>
+          <a:prstGeom prst="rect">
+            <a:avLst/>
+          </a:prstGeom>
+          <a:solidFill>
+            <a:srgbClr val="ACD433">
+              <a:alpha val="50196"/>
+            </a:srgbClr>
+          </a:solidFill>
+        </p:spPr>
+        <p:style>
+          <a:lnRef idx="2">
+            <a:schemeClr val="accent1">
+              <a:shade val="15000"/>
+            </a:schemeClr>
+          </a:lnRef>
+          <a:fillRef idx="1">
+            <a:schemeClr val="accent1"/>
+          </a:fillRef>
+          <a:effectRef idx="0">
+            <a:schemeClr val="accent1"/>
+          </a:effectRef>
+          <a:fontRef idx="minor">
+            <a:schemeClr val="lt1"/>
+          </a:fontRef>
+        </p:style>
+        <p:txBody>
+          <a:bodyPr rtlCol="0" anchor="ctr"/>
+          <a:lstStyle/>
+          <a:p>
+            <a:pPr algn="ctr"/>
+            <a:endParaRPr lang="en-US"/>
+          </a:p>
+        </p:txBody>
+      </p:sp>
+      <p:sp>
+        <p:nvSpPr>
+          <p:cNvPr id="17" name="Rectangle 16">
+            <a:extLst>
+              <a:ext uri="{FF2B5EF4-FFF2-40B4-BE49-F238E27FC236}">
+                <a16:creationId xmlns:a16="http://schemas.microsoft.com/office/drawing/2014/main" id="{539B32D0-82EC-E4A3-CBAA-8C36B86F0C52}"/>
+              </a:ext>
+            </a:extLst>
+          </p:cNvPr>
+          <p:cNvSpPr/>
+          <p:nvPr/>
+        </p:nvSpPr>
+        <p:spPr>
+          <a:xfrm>
+            <a:off x="4904356" y="1176175"/>
+            <a:ext cx="81536" cy="426086"/>
+          </a:xfrm>
+          <a:prstGeom prst="rect">
+            <a:avLst/>
+          </a:prstGeom>
+          <a:solidFill>
+            <a:srgbClr val="ACD433">
+              <a:alpha val="50196"/>
+            </a:srgbClr>
+          </a:solidFill>
+        </p:spPr>
+        <p:style>
+          <a:lnRef idx="2">
+            <a:schemeClr val="accent1">
+              <a:shade val="15000"/>
+            </a:schemeClr>
+          </a:lnRef>
+          <a:fillRef idx="1">
+            <a:schemeClr val="accent1"/>
+          </a:fillRef>
+          <a:effectRef idx="0">
+            <a:schemeClr val="accent1"/>
+          </a:effectRef>
+          <a:fontRef idx="minor">
+            <a:schemeClr val="lt1"/>
+          </a:fontRef>
+        </p:style>
+        <p:txBody>
+          <a:bodyPr rtlCol="0" anchor="ctr"/>
+          <a:lstStyle/>
+          <a:p>
+            <a:pPr algn="ctr"/>
+            <a:endParaRPr lang="en-US"/>
+          </a:p>
+        </p:txBody>
+      </p:sp>
+      <p:sp>
+        <p:nvSpPr>
+          <p:cNvPr id="18" name="Rectangle 17">
+            <a:extLst>
+              <a:ext uri="{FF2B5EF4-FFF2-40B4-BE49-F238E27FC236}">
+                <a16:creationId xmlns:a16="http://schemas.microsoft.com/office/drawing/2014/main" id="{112A6016-811E-A807-0676-8CD726EC6C0B}"/>
+              </a:ext>
+            </a:extLst>
+          </p:cNvPr>
+          <p:cNvSpPr/>
+          <p:nvPr/>
+        </p:nvSpPr>
+        <p:spPr>
+          <a:xfrm>
+            <a:off x="5200132" y="946721"/>
+            <a:ext cx="428730" cy="100455"/>
+          </a:xfrm>
+          <a:prstGeom prst="rect">
+            <a:avLst/>
+          </a:prstGeom>
+          <a:solidFill>
+            <a:srgbClr val="ACD433">
+              <a:alpha val="50196"/>
+            </a:srgbClr>
+          </a:solidFill>
+        </p:spPr>
+        <p:style>
+          <a:lnRef idx="2">
+            <a:schemeClr val="accent1">
+              <a:shade val="15000"/>
+            </a:schemeClr>
+          </a:lnRef>
+          <a:fillRef idx="1">
+            <a:schemeClr val="accent1"/>
+          </a:fillRef>
+          <a:effectRef idx="0">
+            <a:schemeClr val="accent1"/>
+          </a:effectRef>
+          <a:fontRef idx="minor">
+            <a:schemeClr val="lt1"/>
+          </a:fontRef>
+        </p:style>
+        <p:txBody>
+          <a:bodyPr rtlCol="0" anchor="ctr"/>
+          <a:lstStyle/>
+          <a:p>
+            <a:pPr algn="ctr"/>
+            <a:endParaRPr lang="en-US"/>
+          </a:p>
+        </p:txBody>
+      </p:sp>
+      <p:sp>
+        <p:nvSpPr>
+          <p:cNvPr id="19" name="Rectangle 18">
+            <a:extLst>
+              <a:ext uri="{FF2B5EF4-FFF2-40B4-BE49-F238E27FC236}">
+                <a16:creationId xmlns:a16="http://schemas.microsoft.com/office/drawing/2014/main" id="{5CA64304-B2C3-6FCD-4668-ACB4680EED7F}"/>
+              </a:ext>
+            </a:extLst>
+          </p:cNvPr>
+          <p:cNvSpPr/>
+          <p:nvPr/>
+        </p:nvSpPr>
+        <p:spPr>
+          <a:xfrm>
+            <a:off x="6191487" y="946721"/>
+            <a:ext cx="312055" cy="100455"/>
+          </a:xfrm>
+          <a:prstGeom prst="rect">
+            <a:avLst/>
+          </a:prstGeom>
+          <a:solidFill>
+            <a:srgbClr val="ACD433">
+              <a:alpha val="50196"/>
+            </a:srgbClr>
+          </a:solidFill>
+        </p:spPr>
+        <p:style>
+          <a:lnRef idx="2">
+            <a:schemeClr val="accent1">
+              <a:shade val="15000"/>
+            </a:schemeClr>
+          </a:lnRef>
+          <a:fillRef idx="1">
+            <a:schemeClr val="accent1"/>
+          </a:fillRef>
+          <a:effectRef idx="0">
+            <a:schemeClr val="accent1"/>
+          </a:effectRef>
+          <a:fontRef idx="minor">
+            <a:schemeClr val="lt1"/>
+          </a:fontRef>
+        </p:style>
+        <p:txBody>
+          <a:bodyPr rtlCol="0" anchor="ctr"/>
+          <a:lstStyle/>
+          <a:p>
+            <a:pPr algn="ctr"/>
+            <a:endParaRPr lang="en-US"/>
+          </a:p>
+        </p:txBody>
+      </p:sp>
+      <p:sp>
+        <p:nvSpPr>
+          <p:cNvPr id="21" name="Rectangle 20">
+            <a:extLst>
+              <a:ext uri="{FF2B5EF4-FFF2-40B4-BE49-F238E27FC236}">
+                <a16:creationId xmlns:a16="http://schemas.microsoft.com/office/drawing/2014/main" id="{79FA2329-1A8E-891D-4DD4-908879CADBCB}"/>
+              </a:ext>
+            </a:extLst>
+          </p:cNvPr>
+          <p:cNvSpPr/>
+          <p:nvPr/>
+        </p:nvSpPr>
+        <p:spPr>
+          <a:xfrm rot="7689780">
+            <a:off x="5689987" y="725525"/>
+            <a:ext cx="76042" cy="1357830"/>
+          </a:xfrm>
+          <a:prstGeom prst="rect">
+            <a:avLst/>
+          </a:prstGeom>
+          <a:solidFill>
+            <a:srgbClr val="ACD433">
+              <a:alpha val="50196"/>
+            </a:srgbClr>
+          </a:solidFill>
+        </p:spPr>
+        <p:style>
+          <a:lnRef idx="2">
+            <a:schemeClr val="accent1">
+              <a:shade val="15000"/>
+            </a:schemeClr>
+          </a:lnRef>
+          <a:fillRef idx="1">
+            <a:schemeClr val="accent1"/>
+          </a:fillRef>
+          <a:effectRef idx="0">
+            <a:schemeClr val="accent1"/>
+          </a:effectRef>
+          <a:fontRef idx="minor">
+            <a:schemeClr val="lt1"/>
+          </a:fontRef>
+        </p:style>
+        <p:txBody>
+          <a:bodyPr rtlCol="0" anchor="ctr"/>
+          <a:lstStyle/>
+          <a:p>
+            <a:pPr algn="ctr"/>
+            <a:endParaRPr lang="en-US"/>
+          </a:p>
+        </p:txBody>
+      </p:sp>
+      <p:sp>
+        <p:nvSpPr>
+          <p:cNvPr id="22" name="Rectangle 21">
+            <a:extLst>
+              <a:ext uri="{FF2B5EF4-FFF2-40B4-BE49-F238E27FC236}">
+                <a16:creationId xmlns:a16="http://schemas.microsoft.com/office/drawing/2014/main" id="{220A786F-F73E-CD57-E048-DFDF070827FF}"/>
+              </a:ext>
+            </a:extLst>
+          </p:cNvPr>
+          <p:cNvSpPr/>
+          <p:nvPr/>
+        </p:nvSpPr>
+        <p:spPr>
+          <a:xfrm>
+            <a:off x="6503542" y="1862159"/>
+            <a:ext cx="647271" cy="131738"/>
+          </a:xfrm>
+          <a:prstGeom prst="rect">
+            <a:avLst/>
+          </a:prstGeom>
+          <a:solidFill>
+            <a:srgbClr val="ACD433">
+              <a:alpha val="50196"/>
+            </a:srgbClr>
+          </a:solidFill>
+        </p:spPr>
+        <p:style>
+          <a:lnRef idx="2">
+            <a:schemeClr val="accent1">
+              <a:shade val="15000"/>
+            </a:schemeClr>
+          </a:lnRef>
+          <a:fillRef idx="1">
+            <a:schemeClr val="accent1"/>
+          </a:fillRef>
+          <a:effectRef idx="0">
+            <a:schemeClr val="accent1"/>
+          </a:effectRef>
+          <a:fontRef idx="minor">
+            <a:schemeClr val="lt1"/>
+          </a:fontRef>
+        </p:style>
+        <p:txBody>
+          <a:bodyPr rtlCol="0" anchor="ctr"/>
+          <a:lstStyle/>
+          <a:p>
+            <a:pPr algn="ctr"/>
+            <a:endParaRPr lang="en-US"/>
+          </a:p>
+        </p:txBody>
+      </p:sp>
+      <p:sp>
+        <p:nvSpPr>
+          <p:cNvPr id="23" name="Rectangle 22">
+            <a:extLst>
+              <a:ext uri="{FF2B5EF4-FFF2-40B4-BE49-F238E27FC236}">
+                <a16:creationId xmlns:a16="http://schemas.microsoft.com/office/drawing/2014/main" id="{149424F9-ED50-B28D-8FC8-A58966162251}"/>
+              </a:ext>
+            </a:extLst>
+          </p:cNvPr>
+          <p:cNvSpPr/>
+          <p:nvPr/>
+        </p:nvSpPr>
+        <p:spPr>
+          <a:xfrm>
+            <a:off x="6285303" y="1568449"/>
+            <a:ext cx="1278993" cy="252208"/>
+          </a:xfrm>
+          <a:prstGeom prst="rect">
+            <a:avLst/>
+          </a:prstGeom>
+          <a:solidFill>
+            <a:srgbClr val="ACD433">
+              <a:alpha val="50196"/>
+            </a:srgbClr>
+          </a:solidFill>
+        </p:spPr>
+        <p:style>
+          <a:lnRef idx="2">
+            <a:schemeClr val="accent1">
+              <a:shade val="15000"/>
+            </a:schemeClr>
+          </a:lnRef>
+          <a:fillRef idx="1">
+            <a:schemeClr val="accent1"/>
+          </a:fillRef>
+          <a:effectRef idx="0">
+            <a:schemeClr val="accent1"/>
+          </a:effectRef>
+          <a:fontRef idx="minor">
+            <a:schemeClr val="lt1"/>
+          </a:fontRef>
+        </p:style>
+        <p:txBody>
+          <a:bodyPr rtlCol="0" anchor="ctr"/>
+          <a:lstStyle/>
+          <a:p>
+            <a:pPr algn="ctr"/>
+            <a:endParaRPr lang="en-US"/>
+          </a:p>
+        </p:txBody>
+      </p:sp>
+      <p:sp>
+        <p:nvSpPr>
+          <p:cNvPr id="20" name="Rectangle 19">
+            <a:extLst>
+              <a:ext uri="{FF2B5EF4-FFF2-40B4-BE49-F238E27FC236}">
+                <a16:creationId xmlns:a16="http://schemas.microsoft.com/office/drawing/2014/main" id="{DB559C73-859C-C2FC-3BBA-7B6479181214}"/>
+              </a:ext>
+            </a:extLst>
+          </p:cNvPr>
+          <p:cNvSpPr/>
+          <p:nvPr/>
+        </p:nvSpPr>
+        <p:spPr>
+          <a:xfrm>
+            <a:off x="6191487" y="2160350"/>
+            <a:ext cx="312055" cy="181579"/>
+          </a:xfrm>
+          <a:prstGeom prst="rect">
+            <a:avLst/>
+          </a:prstGeom>
+          <a:solidFill>
+            <a:srgbClr val="ACD433">
+              <a:alpha val="50196"/>
+            </a:srgbClr>
+          </a:solidFill>
+        </p:spPr>
+        <p:style>
+          <a:lnRef idx="2">
+            <a:schemeClr val="accent1">
+              <a:shade val="15000"/>
+            </a:schemeClr>
+          </a:lnRef>
+          <a:fillRef idx="1">
+            <a:schemeClr val="accent1"/>
+          </a:fillRef>
+          <a:effectRef idx="0">
+            <a:schemeClr val="accent1"/>
+          </a:effectRef>
+          <a:fontRef idx="minor">
+            <a:schemeClr val="lt1"/>
+          </a:fontRef>
+        </p:style>
+        <p:txBody>
+          <a:bodyPr rtlCol="0" anchor="ctr"/>
+          <a:lstStyle/>
+          <a:p>
+            <a:pPr algn="ctr"/>
+            <a:endParaRPr lang="en-US"/>
+          </a:p>
+        </p:txBody>
+      </p:sp>
+      <p:sp>
+        <p:nvSpPr>
+          <p:cNvPr id="24" name="Rectangle 23">
+            <a:extLst>
+              <a:ext uri="{FF2B5EF4-FFF2-40B4-BE49-F238E27FC236}">
+                <a16:creationId xmlns:a16="http://schemas.microsoft.com/office/drawing/2014/main" id="{F54B43AA-B2E5-E380-897F-8AC602FEB09E}"/>
+              </a:ext>
+            </a:extLst>
+          </p:cNvPr>
+          <p:cNvSpPr/>
+          <p:nvPr/>
+        </p:nvSpPr>
+        <p:spPr>
+          <a:xfrm>
+            <a:off x="5200132" y="2341929"/>
+            <a:ext cx="546618" cy="115521"/>
+          </a:xfrm>
+          <a:prstGeom prst="rect">
+            <a:avLst/>
+          </a:prstGeom>
+          <a:solidFill>
+            <a:srgbClr val="ACD433">
+              <a:alpha val="50196"/>
+            </a:srgbClr>
+          </a:solidFill>
+        </p:spPr>
+        <p:style>
+          <a:lnRef idx="2">
+            <a:schemeClr val="accent1">
+              <a:shade val="15000"/>
+            </a:schemeClr>
+          </a:lnRef>
+          <a:fillRef idx="1">
+            <a:schemeClr val="accent1"/>
+          </a:fillRef>
+          <a:effectRef idx="0">
+            <a:schemeClr val="accent1"/>
+          </a:effectRef>
+          <a:fontRef idx="minor">
+            <a:schemeClr val="lt1"/>
+          </a:fontRef>
+        </p:style>
+        <p:txBody>
+          <a:bodyPr rtlCol="0" anchor="ctr"/>
+          <a:lstStyle/>
+          <a:p>
+            <a:pPr algn="ctr"/>
+            <a:endParaRPr lang="en-US"/>
+          </a:p>
+        </p:txBody>
+      </p:sp>
+      <p:sp>
+        <p:nvSpPr>
+          <p:cNvPr id="25" name="Rectangle 24">
+            <a:extLst>
+              <a:ext uri="{FF2B5EF4-FFF2-40B4-BE49-F238E27FC236}">
+                <a16:creationId xmlns:a16="http://schemas.microsoft.com/office/drawing/2014/main" id="{7562138F-B471-5FC6-8D4A-98AE292B212F}"/>
+              </a:ext>
+            </a:extLst>
+          </p:cNvPr>
+          <p:cNvSpPr/>
+          <p:nvPr/>
+        </p:nvSpPr>
+        <p:spPr>
+          <a:xfrm rot="8938082">
+            <a:off x="5502940" y="1047172"/>
+            <a:ext cx="76042" cy="1357830"/>
+          </a:xfrm>
+          <a:prstGeom prst="rect">
+            <a:avLst/>
+          </a:prstGeom>
+          <a:solidFill>
+            <a:schemeClr val="accent3">
+              <a:alpha val="50196"/>
+            </a:schemeClr>
+          </a:solidFill>
+        </p:spPr>
+        <p:style>
+          <a:lnRef idx="2">
+            <a:schemeClr val="accent1">
+              <a:shade val="15000"/>
+            </a:schemeClr>
+          </a:lnRef>
+          <a:fillRef idx="1">
+            <a:schemeClr val="accent1"/>
+          </a:fillRef>
+          <a:effectRef idx="0">
+            <a:schemeClr val="accent1"/>
+          </a:effectRef>
+          <a:fontRef idx="minor">
+            <a:schemeClr val="lt1"/>
+          </a:fontRef>
+        </p:style>
+        <p:txBody>
+          <a:bodyPr rtlCol="0" anchor="ctr"/>
+          <a:lstStyle/>
+          <a:p>
+            <a:pPr algn="ctr"/>
+            <a:endParaRPr lang="en-US"/>
+          </a:p>
+        </p:txBody>
+      </p:sp>
+      <p:sp>
+        <p:nvSpPr>
+          <p:cNvPr id="26" name="Rectangle 25">
+            <a:extLst>
+              <a:ext uri="{FF2B5EF4-FFF2-40B4-BE49-F238E27FC236}">
+                <a16:creationId xmlns:a16="http://schemas.microsoft.com/office/drawing/2014/main" id="{04BF704D-8F26-0746-B19B-7350F6D936D2}"/>
+              </a:ext>
+            </a:extLst>
+          </p:cNvPr>
+          <p:cNvSpPr/>
+          <p:nvPr/>
+        </p:nvSpPr>
+        <p:spPr>
+          <a:xfrm rot="10800000">
+            <a:off x="5873291" y="1176175"/>
+            <a:ext cx="90481" cy="1117544"/>
+          </a:xfrm>
+          <a:prstGeom prst="rect">
+            <a:avLst/>
+          </a:prstGeom>
+          <a:solidFill>
+            <a:schemeClr val="accent3">
+              <a:alpha val="50196"/>
+            </a:schemeClr>
+          </a:solidFill>
+        </p:spPr>
+        <p:style>
+          <a:lnRef idx="2">
+            <a:schemeClr val="accent1">
+              <a:shade val="15000"/>
+            </a:schemeClr>
+          </a:lnRef>
+          <a:fillRef idx="1">
+            <a:schemeClr val="accent1"/>
+          </a:fillRef>
+          <a:effectRef idx="0">
+            <a:schemeClr val="accent1"/>
+          </a:effectRef>
+          <a:fontRef idx="minor">
+            <a:schemeClr val="lt1"/>
+          </a:fontRef>
+        </p:style>
+        <p:txBody>
+          <a:bodyPr rtlCol="0" anchor="ctr"/>
+          <a:lstStyle/>
+          <a:p>
+            <a:pPr algn="ctr"/>
+            <a:endParaRPr lang="en-US"/>
+          </a:p>
+        </p:txBody>
+      </p:sp>
+      <p:sp>
+        <p:nvSpPr>
+          <p:cNvPr id="27" name="Rectangle 26">
+            <a:extLst>
+              <a:ext uri="{FF2B5EF4-FFF2-40B4-BE49-F238E27FC236}">
+                <a16:creationId xmlns:a16="http://schemas.microsoft.com/office/drawing/2014/main" id="{A8C7A53B-99DF-945B-755D-30A06077D5CA}"/>
+              </a:ext>
+            </a:extLst>
+          </p:cNvPr>
+          <p:cNvSpPr/>
+          <p:nvPr/>
+        </p:nvSpPr>
+        <p:spPr>
+          <a:xfrm rot="12691686" flipH="1">
+            <a:off x="5408785" y="1079456"/>
+            <a:ext cx="55472" cy="1281028"/>
+          </a:xfrm>
+          <a:prstGeom prst="rect">
+            <a:avLst/>
+          </a:prstGeom>
+          <a:solidFill>
+            <a:schemeClr val="accent3">
+              <a:alpha val="50196"/>
+            </a:schemeClr>
+          </a:solidFill>
+        </p:spPr>
+        <p:style>
+          <a:lnRef idx="2">
+            <a:schemeClr val="accent1">
+              <a:shade val="15000"/>
+            </a:schemeClr>
+          </a:lnRef>
+          <a:fillRef idx="1">
+            <a:schemeClr val="accent1"/>
+          </a:fillRef>
+          <a:effectRef idx="0">
+            <a:schemeClr val="accent1"/>
+          </a:effectRef>
+          <a:fontRef idx="minor">
+            <a:schemeClr val="lt1"/>
+          </a:fontRef>
+        </p:style>
+        <p:txBody>
+          <a:bodyPr rtlCol="0" anchor="ctr"/>
+          <a:lstStyle/>
+          <a:p>
+            <a:pPr algn="ctr"/>
+            <a:endParaRPr lang="en-US"/>
+          </a:p>
+        </p:txBody>
+      </p:sp>
+      <p:sp>
+        <p:nvSpPr>
+          <p:cNvPr id="28" name="Rectangle 27">
+            <a:extLst>
+              <a:ext uri="{FF2B5EF4-FFF2-40B4-BE49-F238E27FC236}">
+                <a16:creationId xmlns:a16="http://schemas.microsoft.com/office/drawing/2014/main" id="{67D0F940-B5DC-F5E4-083E-172056BD78D7}"/>
+              </a:ext>
+            </a:extLst>
+          </p:cNvPr>
+          <p:cNvSpPr/>
+          <p:nvPr/>
+        </p:nvSpPr>
+        <p:spPr>
+          <a:xfrm>
+            <a:off x="4901946" y="2574289"/>
+            <a:ext cx="104394" cy="100455"/>
+          </a:xfrm>
+          <a:prstGeom prst="rect">
+            <a:avLst/>
+          </a:prstGeom>
+          <a:solidFill>
+            <a:srgbClr val="ACD433">
+              <a:alpha val="50196"/>
+            </a:srgbClr>
+          </a:solidFill>
+        </p:spPr>
+        <p:style>
+          <a:lnRef idx="2">
+            <a:schemeClr val="accent1">
+              <a:shade val="15000"/>
+            </a:schemeClr>
+          </a:lnRef>
+          <a:fillRef idx="1">
+            <a:schemeClr val="accent1"/>
+          </a:fillRef>
+          <a:effectRef idx="0">
+            <a:schemeClr val="accent1"/>
+          </a:effectRef>
+          <a:fontRef idx="minor">
+            <a:schemeClr val="lt1"/>
+          </a:fontRef>
+        </p:style>
+        <p:txBody>
+          <a:bodyPr rtlCol="0" anchor="ctr"/>
+          <a:lstStyle/>
+          <a:p>
+            <a:pPr algn="ctr"/>
+            <a:endParaRPr lang="en-US"/>
+          </a:p>
+        </p:txBody>
+      </p:sp>
+      <p:sp>
+        <p:nvSpPr>
+          <p:cNvPr id="29" name="Rectangle 28">
+            <a:extLst>
+              <a:ext uri="{FF2B5EF4-FFF2-40B4-BE49-F238E27FC236}">
+                <a16:creationId xmlns:a16="http://schemas.microsoft.com/office/drawing/2014/main" id="{7B2832E2-4A17-8061-8901-CF1A6780348C}"/>
+              </a:ext>
+            </a:extLst>
+          </p:cNvPr>
+          <p:cNvSpPr/>
+          <p:nvPr/>
+        </p:nvSpPr>
+        <p:spPr>
+          <a:xfrm>
+            <a:off x="6150719" y="2574289"/>
+            <a:ext cx="81536" cy="298451"/>
+          </a:xfrm>
+          <a:prstGeom prst="rect">
+            <a:avLst/>
+          </a:prstGeom>
+          <a:solidFill>
+            <a:srgbClr val="ACD433">
+              <a:alpha val="50196"/>
+            </a:srgbClr>
+          </a:solidFill>
+        </p:spPr>
+        <p:style>
+          <a:lnRef idx="2">
+            <a:schemeClr val="accent1">
+              <a:shade val="15000"/>
+            </a:schemeClr>
+          </a:lnRef>
+          <a:fillRef idx="1">
+            <a:schemeClr val="accent1"/>
+          </a:fillRef>
+          <a:effectRef idx="0">
+            <a:schemeClr val="accent1"/>
+          </a:effectRef>
+          <a:fontRef idx="minor">
+            <a:schemeClr val="lt1"/>
+          </a:fontRef>
+        </p:style>
+        <p:txBody>
+          <a:bodyPr rtlCol="0" anchor="ctr"/>
+          <a:lstStyle/>
+          <a:p>
+            <a:pPr algn="ctr"/>
+            <a:endParaRPr lang="en-US"/>
+          </a:p>
+        </p:txBody>
+      </p:sp>
+      <p:sp>
+        <p:nvSpPr>
+          <p:cNvPr id="30" name="Rectangle 29">
+            <a:extLst>
+              <a:ext uri="{FF2B5EF4-FFF2-40B4-BE49-F238E27FC236}">
+                <a16:creationId xmlns:a16="http://schemas.microsoft.com/office/drawing/2014/main" id="{E126CAB6-E5AE-370C-6252-FD297C3AB9DA}"/>
+              </a:ext>
+            </a:extLst>
+          </p:cNvPr>
+          <p:cNvSpPr/>
+          <p:nvPr/>
+        </p:nvSpPr>
+        <p:spPr>
+          <a:xfrm>
+            <a:off x="4985891" y="2649403"/>
+            <a:ext cx="2164922" cy="100455"/>
+          </a:xfrm>
+          <a:prstGeom prst="rect">
+            <a:avLst/>
+          </a:prstGeom>
+          <a:solidFill>
+            <a:srgbClr val="ACD433">
+              <a:alpha val="50196"/>
+            </a:srgbClr>
+          </a:solidFill>
+        </p:spPr>
+        <p:style>
+          <a:lnRef idx="2">
+            <a:schemeClr val="accent1">
+              <a:shade val="15000"/>
+            </a:schemeClr>
+          </a:lnRef>
+          <a:fillRef idx="1">
+            <a:schemeClr val="accent1"/>
+          </a:fillRef>
+          <a:effectRef idx="0">
+            <a:schemeClr val="accent1"/>
+          </a:effectRef>
+          <a:fontRef idx="minor">
+            <a:schemeClr val="lt1"/>
+          </a:fontRef>
+        </p:style>
+        <p:txBody>
+          <a:bodyPr rtlCol="0" anchor="ctr"/>
+          <a:lstStyle/>
+          <a:p>
+            <a:pPr algn="ctr"/>
+            <a:endParaRPr lang="en-US"/>
+          </a:p>
+        </p:txBody>
+      </p:sp>
+      <p:sp>
+        <p:nvSpPr>
+          <p:cNvPr id="31" name="Rectangle 30">
+            <a:extLst>
+              <a:ext uri="{FF2B5EF4-FFF2-40B4-BE49-F238E27FC236}">
+                <a16:creationId xmlns:a16="http://schemas.microsoft.com/office/drawing/2014/main" id="{05DE09C5-AF7F-59D9-AA41-8066C7F77FA6}"/>
+              </a:ext>
+            </a:extLst>
+          </p:cNvPr>
+          <p:cNvSpPr/>
+          <p:nvPr/>
+        </p:nvSpPr>
+        <p:spPr>
+          <a:xfrm>
+            <a:off x="6191486" y="2789463"/>
+            <a:ext cx="796053" cy="83277"/>
+          </a:xfrm>
+          <a:prstGeom prst="rect">
+            <a:avLst/>
+          </a:prstGeom>
+          <a:solidFill>
+            <a:srgbClr val="ACD433">
+              <a:alpha val="50196"/>
+            </a:srgbClr>
+          </a:solidFill>
+        </p:spPr>
+        <p:style>
+          <a:lnRef idx="2">
+            <a:schemeClr val="accent1">
+              <a:shade val="15000"/>
+            </a:schemeClr>
+          </a:lnRef>
+          <a:fillRef idx="1">
+            <a:schemeClr val="accent1"/>
+          </a:fillRef>
+          <a:effectRef idx="0">
+            <a:schemeClr val="accent1"/>
+          </a:effectRef>
+          <a:fontRef idx="minor">
+            <a:schemeClr val="lt1"/>
+          </a:fontRef>
+        </p:style>
+        <p:txBody>
+          <a:bodyPr rtlCol="0" anchor="ctr"/>
+          <a:lstStyle/>
+          <a:p>
+            <a:pPr algn="ctr"/>
+            <a:endParaRPr lang="en-US"/>
+          </a:p>
+        </p:txBody>
+      </p:sp>
+      <p:sp>
+        <p:nvSpPr>
+          <p:cNvPr id="32" name="Rectangle 31">
+            <a:extLst>
+              <a:ext uri="{FF2B5EF4-FFF2-40B4-BE49-F238E27FC236}">
+                <a16:creationId xmlns:a16="http://schemas.microsoft.com/office/drawing/2014/main" id="{CEA2FCF1-03BC-B370-412D-79A02F9A6AED}"/>
+              </a:ext>
+            </a:extLst>
+          </p:cNvPr>
+          <p:cNvSpPr/>
+          <p:nvPr/>
+        </p:nvSpPr>
+        <p:spPr>
+          <a:xfrm>
+            <a:off x="6946770" y="2858780"/>
+            <a:ext cx="81536" cy="652755"/>
+          </a:xfrm>
+          <a:prstGeom prst="rect">
+            <a:avLst/>
+          </a:prstGeom>
+          <a:solidFill>
+            <a:srgbClr val="ACD433">
+              <a:alpha val="50196"/>
+            </a:srgbClr>
+          </a:solidFill>
+        </p:spPr>
+        <p:style>
+          <a:lnRef idx="2">
+            <a:schemeClr val="accent1">
+              <a:shade val="15000"/>
+            </a:schemeClr>
+          </a:lnRef>
+          <a:fillRef idx="1">
+            <a:schemeClr val="accent1"/>
+          </a:fillRef>
+          <a:effectRef idx="0">
+            <a:schemeClr val="accent1"/>
+          </a:effectRef>
+          <a:fontRef idx="minor">
+            <a:schemeClr val="lt1"/>
+          </a:fontRef>
+        </p:style>
+        <p:txBody>
+          <a:bodyPr rtlCol="0" anchor="ctr"/>
+          <a:lstStyle/>
+          <a:p>
+            <a:pPr algn="ctr"/>
+            <a:endParaRPr lang="en-US"/>
+          </a:p>
+        </p:txBody>
+      </p:sp>
+      <p:sp>
+        <p:nvSpPr>
+          <p:cNvPr id="33" name="Rectangle 32">
+            <a:extLst>
+              <a:ext uri="{FF2B5EF4-FFF2-40B4-BE49-F238E27FC236}">
+                <a16:creationId xmlns:a16="http://schemas.microsoft.com/office/drawing/2014/main" id="{1980CEED-1C41-EF9A-A620-C53178B61913}"/>
+              </a:ext>
+            </a:extLst>
+          </p:cNvPr>
+          <p:cNvSpPr/>
+          <p:nvPr/>
+        </p:nvSpPr>
+        <p:spPr>
+          <a:xfrm>
+            <a:off x="7069277" y="2752609"/>
+            <a:ext cx="81536" cy="758926"/>
+          </a:xfrm>
+          <a:prstGeom prst="rect">
+            <a:avLst/>
+          </a:prstGeom>
+          <a:solidFill>
+            <a:srgbClr val="ACD433">
+              <a:alpha val="50196"/>
+            </a:srgbClr>
+          </a:solidFill>
+        </p:spPr>
+        <p:style>
+          <a:lnRef idx="2">
+            <a:schemeClr val="accent1">
+              <a:shade val="15000"/>
+            </a:schemeClr>
+          </a:lnRef>
+          <a:fillRef idx="1">
+            <a:schemeClr val="accent1"/>
+          </a:fillRef>
+          <a:effectRef idx="0">
+            <a:schemeClr val="accent1"/>
+          </a:effectRef>
+          <a:fontRef idx="minor">
+            <a:schemeClr val="lt1"/>
+          </a:fontRef>
+        </p:style>
+        <p:txBody>
+          <a:bodyPr rtlCol="0" anchor="ctr"/>
+          <a:lstStyle/>
+          <a:p>
+            <a:pPr algn="ctr"/>
+            <a:endParaRPr lang="en-US"/>
+          </a:p>
+        </p:txBody>
+      </p:sp>
+    </p:spTree>
+    <p:extLst>
+      <p:ext uri="{BB962C8B-B14F-4D97-AF65-F5344CB8AC3E}">
+        <p14:creationId xmlns:p14="http://schemas.microsoft.com/office/powerpoint/2010/main" val="275037422"/>
+      </p:ext>
+    </p:extLst>
+  </p:cSld>
+  <p:clrMapOvr>
+    <a:masterClrMapping/>
+  </p:clrMapOvr>
+</p:sld>
+</file>
+
+<file path=ppt/slides/slide33.xml><?xml version="1.0" encoding="utf-8"?>
+<p:sld xmlns:a="http://schemas.openxmlformats.org/drawingml/2006/main" xmlns:r="http://schemas.openxmlformats.org/officeDocument/2006/relationships" xmlns:p="http://schemas.openxmlformats.org/presentationml/2006/main">
+  <p:cSld>
+    <p:spTree>
+      <p:nvGrpSpPr>
+        <p:cNvPr id="1" name="">
+          <a:extLst>
+            <a:ext uri="{FF2B5EF4-FFF2-40B4-BE49-F238E27FC236}">
+              <a16:creationId xmlns:a16="http://schemas.microsoft.com/office/drawing/2014/main" id="{473807F4-5268-AC9D-3045-0972FE0D7444}"/>
+            </a:ext>
+          </a:extLst>
+        </p:cNvPr>
+        <p:cNvGrpSpPr/>
+        <p:nvPr/>
+      </p:nvGrpSpPr>
+      <p:grpSpPr>
+        <a:xfrm>
+          <a:off x="0" y="0"/>
+          <a:ext cx="0" cy="0"/>
+          <a:chOff x="0" y="0"/>
+          <a:chExt cx="0" cy="0"/>
+        </a:xfrm>
+      </p:grpSpPr>
+      <p:sp>
+        <p:nvSpPr>
+          <p:cNvPr id="2" name="Title 1">
+            <a:extLst>
+              <a:ext uri="{FF2B5EF4-FFF2-40B4-BE49-F238E27FC236}">
+                <a16:creationId xmlns:a16="http://schemas.microsoft.com/office/drawing/2014/main" id="{7DC96789-E673-FD50-3677-170ADDA6CA8D}"/>
+              </a:ext>
+            </a:extLst>
+          </p:cNvPr>
+          <p:cNvSpPr>
+            <a:spLocks noGrp="1"/>
+          </p:cNvSpPr>
+          <p:nvPr>
+            <p:ph type="title"/>
+          </p:nvPr>
+        </p:nvSpPr>
+        <p:spPr>
+          <a:xfrm>
+            <a:off x="1754188" y="452718"/>
+            <a:ext cx="8296646" cy="1400530"/>
+          </a:xfrm>
+        </p:spPr>
+        <p:txBody>
+          <a:bodyPr/>
+          <a:lstStyle/>
+          <a:p>
+            <a:r>
+              <a:rPr lang="en-US" b="1" dirty="0"/>
+              <a:t>Essential EA Meta-Model</a:t>
+            </a:r>
+            <a:br>
+              <a:rPr lang="en-US" b="1" dirty="0"/>
+            </a:br>
+            <a:r>
+              <a:rPr lang="en-US" b="1" dirty="0"/>
+              <a:t>- Business Layer - 16</a:t>
+            </a:r>
+          </a:p>
+        </p:txBody>
+      </p:sp>
+      <p:sp>
+        <p:nvSpPr>
+          <p:cNvPr id="4" name="Title 1">
+            <a:extLst>
+              <a:ext uri="{FF2B5EF4-FFF2-40B4-BE49-F238E27FC236}">
+                <a16:creationId xmlns:a16="http://schemas.microsoft.com/office/drawing/2014/main" id="{3A9AFD81-0501-AE7F-F633-3E2EA7CADE02}"/>
+              </a:ext>
+            </a:extLst>
+          </p:cNvPr>
+          <p:cNvSpPr txBox="1">
+            <a:spLocks/>
+          </p:cNvSpPr>
+          <p:nvPr/>
+        </p:nvSpPr>
+        <p:spPr>
+          <a:xfrm>
+            <a:off x="0" y="3143"/>
+            <a:ext cx="1754188" cy="1058013"/>
+          </a:xfrm>
+          <a:prstGeom prst="rect">
+            <a:avLst/>
+          </a:prstGeom>
+        </p:spPr>
+        <p:txBody>
+          <a:bodyPr vert="horz" lIns="91440" tIns="45720" rIns="91440" bIns="45720" rtlCol="0" anchor="ctr">
+            <a:noAutofit/>
+          </a:bodyPr>
+          <a:lstStyle>
+            <a:lvl1pPr algn="l" defTabSz="457200" rtl="0" eaLnBrk="1" latinLnBrk="0" hangingPunct="1">
+              <a:spcBef>
+                <a:spcPct val="0"/>
+              </a:spcBef>
+              <a:buNone/>
+              <a:defRPr sz="7200" b="0" i="0" kern="1200">
+                <a:solidFill>
+                  <a:schemeClr val="tx2"/>
+                </a:solidFill>
+                <a:latin typeface="+mj-lt"/>
+                <a:ea typeface="+mj-ea"/>
+                <a:cs typeface="+mj-cs"/>
+              </a:defRPr>
+            </a:lvl1pPr>
+            <a:lvl2pPr eaLnBrk="1" hangingPunct="1">
+              <a:defRPr>
+                <a:solidFill>
+                  <a:schemeClr val="tx2"/>
+                </a:solidFill>
+              </a:defRPr>
+            </a:lvl2pPr>
+            <a:lvl3pPr eaLnBrk="1" hangingPunct="1">
+              <a:defRPr>
+                <a:solidFill>
+                  <a:schemeClr val="tx2"/>
+                </a:solidFill>
+              </a:defRPr>
+            </a:lvl3pPr>
+            <a:lvl4pPr eaLnBrk="1" hangingPunct="1">
+              <a:defRPr>
+                <a:solidFill>
+                  <a:schemeClr val="tx2"/>
+                </a:solidFill>
+              </a:defRPr>
+            </a:lvl4pPr>
+            <a:lvl5pPr eaLnBrk="1" hangingPunct="1">
+              <a:defRPr>
+                <a:solidFill>
+                  <a:schemeClr val="tx2"/>
+                </a:solidFill>
+              </a:defRPr>
+            </a:lvl5pPr>
+            <a:lvl6pPr eaLnBrk="1" hangingPunct="1">
+              <a:defRPr>
+                <a:solidFill>
+                  <a:schemeClr val="tx2"/>
+                </a:solidFill>
+              </a:defRPr>
+            </a:lvl6pPr>
+            <a:lvl7pPr eaLnBrk="1" hangingPunct="1">
+              <a:defRPr>
+                <a:solidFill>
+                  <a:schemeClr val="tx2"/>
+                </a:solidFill>
+              </a:defRPr>
+            </a:lvl7pPr>
+            <a:lvl8pPr eaLnBrk="1" hangingPunct="1">
+              <a:defRPr>
+                <a:solidFill>
+                  <a:schemeClr val="tx2"/>
+                </a:solidFill>
+              </a:defRPr>
+            </a:lvl8pPr>
+            <a:lvl9pPr eaLnBrk="1" hangingPunct="1">
+              <a:defRPr>
+                <a:solidFill>
+                  <a:schemeClr val="tx2"/>
+                </a:solidFill>
+              </a:defRPr>
+            </a:lvl9pPr>
+          </a:lstStyle>
+          <a:p>
+            <a:pPr algn="ctr"/>
+            <a:r>
+              <a:rPr lang="en-US" b="1" dirty="0">
+                <a:solidFill>
+                  <a:schemeClr val="accent1">
+                    <a:lumMod val="75000"/>
+                  </a:schemeClr>
+                </a:solidFill>
+              </a:rPr>
+              <a:t>022</a:t>
+            </a:r>
+            <a:endParaRPr lang="ru-RU" b="1" dirty="0">
+              <a:solidFill>
+                <a:schemeClr val="accent1">
+                  <a:lumMod val="75000"/>
+                </a:schemeClr>
+              </a:solidFill>
+            </a:endParaRPr>
+          </a:p>
+        </p:txBody>
+      </p:sp>
+      <p:pic>
+        <p:nvPicPr>
+          <p:cNvPr id="3" name="Picture 2">
+            <a:extLst>
+              <a:ext uri="{FF2B5EF4-FFF2-40B4-BE49-F238E27FC236}">
+                <a16:creationId xmlns:a16="http://schemas.microsoft.com/office/drawing/2014/main" id="{423C1866-64AD-D032-ACF5-AD5431623B0C}"/>
+              </a:ext>
+            </a:extLst>
+          </p:cNvPr>
+          <p:cNvPicPr>
+            <a:picLocks noChangeAspect="1"/>
+          </p:cNvPicPr>
+          <p:nvPr/>
+        </p:nvPicPr>
+        <p:blipFill>
+          <a:blip r:embed="rId2"/>
+          <a:stretch>
+            <a:fillRect/>
+          </a:stretch>
+        </p:blipFill>
+        <p:spPr>
+          <a:xfrm>
+            <a:off x="236841" y="1853248"/>
+            <a:ext cx="8296646" cy="4669795"/>
+          </a:xfrm>
+          <a:prstGeom prst="rect">
+            <a:avLst/>
+          </a:prstGeom>
+          <a:ln>
+            <a:noFill/>
+          </a:ln>
+          <a:effectLst>
+            <a:outerShdw blurRad="292100" dist="139700" dir="2700000" algn="tl" rotWithShape="0">
+              <a:srgbClr val="333333">
+                <a:alpha val="65000"/>
+              </a:srgbClr>
+            </a:outerShdw>
+          </a:effectLst>
+        </p:spPr>
+      </p:pic>
+      <p:sp>
+        <p:nvSpPr>
+          <p:cNvPr id="6" name="Rectangle: Rounded Corners 5">
+            <a:extLst>
+              <a:ext uri="{FF2B5EF4-FFF2-40B4-BE49-F238E27FC236}">
+                <a16:creationId xmlns:a16="http://schemas.microsoft.com/office/drawing/2014/main" id="{923F3FD8-1211-7079-13DB-FD5838045E99}"/>
+              </a:ext>
+            </a:extLst>
+          </p:cNvPr>
+          <p:cNvSpPr/>
+          <p:nvPr/>
+        </p:nvSpPr>
+        <p:spPr>
+          <a:xfrm>
+            <a:off x="596436" y="2188396"/>
+            <a:ext cx="2054832" cy="1400530"/>
+          </a:xfrm>
+          <a:prstGeom prst="roundRect">
+            <a:avLst>
+              <a:gd name="adj" fmla="val 6916"/>
+            </a:avLst>
+          </a:prstGeom>
+          <a:solidFill>
+            <a:srgbClr val="FFCC66">
+              <a:alpha val="20000"/>
+            </a:srgbClr>
+          </a:solidFill>
+          <a:ln>
+            <a:solidFill>
+              <a:srgbClr val="92D050"/>
+            </a:solidFill>
+          </a:ln>
+        </p:spPr>
+        <p:style>
+          <a:lnRef idx="2">
+            <a:schemeClr val="accent1">
+              <a:shade val="15000"/>
+            </a:schemeClr>
+          </a:lnRef>
+          <a:fillRef idx="1">
+            <a:schemeClr val="accent1"/>
+          </a:fillRef>
+          <a:effectRef idx="0">
+            <a:schemeClr val="accent1"/>
+          </a:effectRef>
+          <a:fontRef idx="minor">
+            <a:schemeClr val="lt1"/>
+          </a:fontRef>
+        </p:style>
+        <p:txBody>
+          <a:bodyPr rtlCol="0" anchor="ctr"/>
+          <a:lstStyle/>
+          <a:p>
+            <a:pPr algn="ctr"/>
+            <a:endParaRPr lang="en-US"/>
+          </a:p>
+        </p:txBody>
+      </p:sp>
+      <p:pic>
+        <p:nvPicPr>
+          <p:cNvPr id="11" name="Picture 10">
+            <a:extLst>
+              <a:ext uri="{FF2B5EF4-FFF2-40B4-BE49-F238E27FC236}">
+                <a16:creationId xmlns:a16="http://schemas.microsoft.com/office/drawing/2014/main" id="{93852B40-289A-7EFF-0CEE-80A4E2403495}"/>
+              </a:ext>
+            </a:extLst>
+          </p:cNvPr>
+          <p:cNvPicPr>
+            <a:picLocks noChangeAspect="1"/>
+          </p:cNvPicPr>
+          <p:nvPr/>
+        </p:nvPicPr>
+        <p:blipFill>
+          <a:blip r:embed="rId3"/>
+          <a:stretch>
+            <a:fillRect/>
+          </a:stretch>
+        </p:blipFill>
+        <p:spPr>
+          <a:xfrm>
+            <a:off x="157000" y="1094226"/>
+            <a:ext cx="362976" cy="362976"/>
+          </a:xfrm>
+          <a:prstGeom prst="rect">
+            <a:avLst/>
+          </a:prstGeom>
+          <a:ln>
+            <a:noFill/>
+          </a:ln>
+          <a:effectLst>
+            <a:outerShdw blurRad="292100" dist="139700" dir="2700000" algn="tl" rotWithShape="0">
+              <a:srgbClr val="333333">
+                <a:alpha val="65000"/>
+              </a:srgbClr>
+            </a:outerShdw>
+          </a:effectLst>
+        </p:spPr>
+      </p:pic>
+      <p:pic>
+        <p:nvPicPr>
+          <p:cNvPr id="12" name="Picture 11">
+            <a:extLst>
+              <a:ext uri="{FF2B5EF4-FFF2-40B4-BE49-F238E27FC236}">
+                <a16:creationId xmlns:a16="http://schemas.microsoft.com/office/drawing/2014/main" id="{DB2AE1B6-3CA4-02A7-8317-540E8F93AE19}"/>
+              </a:ext>
+            </a:extLst>
+          </p:cNvPr>
+          <p:cNvPicPr>
+            <a:picLocks noChangeAspect="1"/>
+          </p:cNvPicPr>
+          <p:nvPr/>
+        </p:nvPicPr>
+        <p:blipFill>
+          <a:blip r:embed="rId4"/>
+          <a:stretch>
+            <a:fillRect/>
+          </a:stretch>
+        </p:blipFill>
+        <p:spPr>
+          <a:xfrm>
+            <a:off x="611241" y="1094226"/>
+            <a:ext cx="362976" cy="362976"/>
+          </a:xfrm>
+          <a:prstGeom prst="rect">
+            <a:avLst/>
+          </a:prstGeom>
+          <a:ln>
+            <a:noFill/>
+          </a:ln>
+          <a:effectLst>
+            <a:outerShdw blurRad="292100" dist="139700" dir="2700000" algn="tl" rotWithShape="0">
+              <a:srgbClr val="333333">
+                <a:alpha val="65000"/>
+              </a:srgbClr>
+            </a:outerShdw>
+          </a:effectLst>
+        </p:spPr>
+      </p:pic>
+      <p:pic>
+        <p:nvPicPr>
+          <p:cNvPr id="13" name="Picture 12">
+            <a:extLst>
+              <a:ext uri="{FF2B5EF4-FFF2-40B4-BE49-F238E27FC236}">
+                <a16:creationId xmlns:a16="http://schemas.microsoft.com/office/drawing/2014/main" id="{22279822-2466-5670-FA1C-2552EBCC1972}"/>
+              </a:ext>
+            </a:extLst>
+          </p:cNvPr>
+          <p:cNvPicPr>
+            <a:picLocks noChangeAspect="1"/>
+          </p:cNvPicPr>
+          <p:nvPr/>
+        </p:nvPicPr>
+        <p:blipFill>
+          <a:blip r:embed="rId5"/>
+          <a:stretch>
+            <a:fillRect/>
+          </a:stretch>
+        </p:blipFill>
+        <p:spPr>
+          <a:xfrm>
+            <a:off x="1065482" y="1094226"/>
+            <a:ext cx="371111" cy="362976"/>
+          </a:xfrm>
+          <a:prstGeom prst="rect">
+            <a:avLst/>
+          </a:prstGeom>
+          <a:ln>
+            <a:noFill/>
+          </a:ln>
+          <a:effectLst>
+            <a:outerShdw blurRad="292100" dist="139700" dir="2700000" algn="tl" rotWithShape="0">
+              <a:srgbClr val="333333">
+                <a:alpha val="65000"/>
+              </a:srgbClr>
+            </a:outerShdw>
+          </a:effectLst>
+        </p:spPr>
+      </p:pic>
+    </p:spTree>
+    <p:extLst>
+      <p:ext uri="{BB962C8B-B14F-4D97-AF65-F5344CB8AC3E}">
+        <p14:creationId xmlns:p14="http://schemas.microsoft.com/office/powerpoint/2010/main" val="2033321699"/>
+      </p:ext>
+    </p:extLst>
+  </p:cSld>
+  <p:clrMapOvr>
+    <a:masterClrMapping/>
+  </p:clrMapOvr>
+</p:sld>
+</file>
+
+<file path=ppt/slides/slide34.xml><?xml version="1.0" encoding="utf-8"?>
+<p:sld xmlns:a="http://schemas.openxmlformats.org/drawingml/2006/main" xmlns:r="http://schemas.openxmlformats.org/officeDocument/2006/relationships" xmlns:p="http://schemas.openxmlformats.org/presentationml/2006/main">
+  <p:cSld>
+    <p:spTree>
+      <p:nvGrpSpPr>
+        <p:cNvPr id="1" name="">
+          <a:extLst>
+            <a:ext uri="{FF2B5EF4-FFF2-40B4-BE49-F238E27FC236}">
+              <a16:creationId xmlns:a16="http://schemas.microsoft.com/office/drawing/2014/main" id="{4371BE77-8BEA-47C9-03FD-67299CCCC59F}"/>
+            </a:ext>
+          </a:extLst>
+        </p:cNvPr>
+        <p:cNvGrpSpPr/>
+        <p:nvPr/>
+      </p:nvGrpSpPr>
+      <p:grpSpPr>
+        <a:xfrm>
+          <a:off x="0" y="0"/>
+          <a:ext cx="0" cy="0"/>
+          <a:chOff x="0" y="0"/>
+          <a:chExt cx="0" cy="0"/>
+        </a:xfrm>
+      </p:grpSpPr>
+      <p:pic>
+        <p:nvPicPr>
+          <p:cNvPr id="3" name="Picture 2">
+            <a:extLst>
+              <a:ext uri="{FF2B5EF4-FFF2-40B4-BE49-F238E27FC236}">
+                <a16:creationId xmlns:a16="http://schemas.microsoft.com/office/drawing/2014/main" id="{0E606F4A-37FB-4E0E-49EF-3D980CF2335B}"/>
+              </a:ext>
+            </a:extLst>
+          </p:cNvPr>
+          <p:cNvPicPr>
+            <a:picLocks noChangeAspect="1"/>
+          </p:cNvPicPr>
+          <p:nvPr/>
+        </p:nvPicPr>
+        <p:blipFill>
+          <a:blip r:embed="rId2"/>
+          <a:stretch>
+            <a:fillRect/>
+          </a:stretch>
+        </p:blipFill>
+        <p:spPr>
+          <a:xfrm>
+            <a:off x="2592309" y="0"/>
+            <a:ext cx="7007382" cy="6858000"/>
+          </a:xfrm>
+          <a:prstGeom prst="rect">
+            <a:avLst/>
+          </a:prstGeom>
+        </p:spPr>
+      </p:pic>
+      <p:sp>
+        <p:nvSpPr>
+          <p:cNvPr id="4" name="Rectangle 3">
+            <a:extLst>
+              <a:ext uri="{FF2B5EF4-FFF2-40B4-BE49-F238E27FC236}">
+                <a16:creationId xmlns:a16="http://schemas.microsoft.com/office/drawing/2014/main" id="{F1E6343D-1646-4BB1-68CE-F90A7EA420A3}"/>
+              </a:ext>
+            </a:extLst>
+          </p:cNvPr>
+          <p:cNvSpPr/>
+          <p:nvPr/>
+        </p:nvSpPr>
+        <p:spPr>
+          <a:xfrm>
+            <a:off x="3700530" y="223234"/>
+            <a:ext cx="957329" cy="64394"/>
+          </a:xfrm>
+          <a:prstGeom prst="rect">
+            <a:avLst/>
+          </a:prstGeom>
+          <a:solidFill>
+            <a:srgbClr val="ACD433">
+              <a:alpha val="50196"/>
+            </a:srgbClr>
+          </a:solidFill>
+        </p:spPr>
+        <p:style>
+          <a:lnRef idx="2">
+            <a:schemeClr val="accent1">
+              <a:shade val="15000"/>
+            </a:schemeClr>
+          </a:lnRef>
+          <a:fillRef idx="1">
+            <a:schemeClr val="accent1"/>
+          </a:fillRef>
+          <a:effectRef idx="0">
+            <a:schemeClr val="accent1"/>
+          </a:effectRef>
+          <a:fontRef idx="minor">
+            <a:schemeClr val="lt1"/>
+          </a:fontRef>
+        </p:style>
+        <p:txBody>
+          <a:bodyPr rtlCol="0" anchor="ctr"/>
+          <a:lstStyle/>
+          <a:p>
+            <a:pPr algn="ctr"/>
+            <a:endParaRPr lang="en-US"/>
+          </a:p>
+        </p:txBody>
+      </p:sp>
+      <p:sp>
+        <p:nvSpPr>
+          <p:cNvPr id="5" name="Rectangle 4">
+            <a:extLst>
+              <a:ext uri="{FF2B5EF4-FFF2-40B4-BE49-F238E27FC236}">
+                <a16:creationId xmlns:a16="http://schemas.microsoft.com/office/drawing/2014/main" id="{665BA46F-85E2-D94F-66CE-DFD7C3887D81}"/>
+              </a:ext>
+            </a:extLst>
+          </p:cNvPr>
+          <p:cNvSpPr/>
+          <p:nvPr/>
+        </p:nvSpPr>
+        <p:spPr>
+          <a:xfrm>
+            <a:off x="3619568" y="0"/>
+            <a:ext cx="233295" cy="181579"/>
+          </a:xfrm>
+          <a:prstGeom prst="rect">
+            <a:avLst/>
+          </a:prstGeom>
+          <a:solidFill>
+            <a:srgbClr val="ACD433">
+              <a:alpha val="50196"/>
+            </a:srgbClr>
+          </a:solidFill>
+        </p:spPr>
+        <p:style>
+          <a:lnRef idx="2">
+            <a:schemeClr val="accent1">
+              <a:shade val="15000"/>
+            </a:schemeClr>
+          </a:lnRef>
+          <a:fillRef idx="1">
+            <a:schemeClr val="accent1"/>
+          </a:fillRef>
+          <a:effectRef idx="0">
+            <a:schemeClr val="accent1"/>
+          </a:effectRef>
+          <a:fontRef idx="minor">
+            <a:schemeClr val="lt1"/>
+          </a:fontRef>
+        </p:style>
+        <p:txBody>
+          <a:bodyPr rtlCol="0" anchor="ctr"/>
+          <a:lstStyle/>
+          <a:p>
+            <a:pPr algn="ctr"/>
+            <a:endParaRPr lang="en-US"/>
+          </a:p>
+        </p:txBody>
+      </p:sp>
+      <p:sp>
+        <p:nvSpPr>
+          <p:cNvPr id="6" name="Rectangle 5">
+            <a:extLst>
+              <a:ext uri="{FF2B5EF4-FFF2-40B4-BE49-F238E27FC236}">
+                <a16:creationId xmlns:a16="http://schemas.microsoft.com/office/drawing/2014/main" id="{46F34160-8C63-45A7-8A00-337E891EAD77}"/>
+              </a:ext>
+            </a:extLst>
+          </p:cNvPr>
+          <p:cNvSpPr/>
+          <p:nvPr/>
+        </p:nvSpPr>
+        <p:spPr>
+          <a:xfrm>
+            <a:off x="6757680" y="424700"/>
+            <a:ext cx="1028938" cy="436792"/>
+          </a:xfrm>
+          <a:prstGeom prst="rect">
+            <a:avLst/>
+          </a:prstGeom>
+          <a:solidFill>
+            <a:srgbClr val="ACD433">
+              <a:alpha val="50196"/>
+            </a:srgbClr>
+          </a:solidFill>
+        </p:spPr>
+        <p:style>
+          <a:lnRef idx="2">
+            <a:schemeClr val="accent1">
+              <a:shade val="15000"/>
+            </a:schemeClr>
+          </a:lnRef>
+          <a:fillRef idx="1">
+            <a:schemeClr val="accent1"/>
+          </a:fillRef>
+          <a:effectRef idx="0">
+            <a:schemeClr val="accent1"/>
+          </a:effectRef>
+          <a:fontRef idx="minor">
+            <a:schemeClr val="lt1"/>
+          </a:fontRef>
+        </p:style>
+        <p:txBody>
+          <a:bodyPr rtlCol="0" anchor="ctr"/>
+          <a:lstStyle/>
+          <a:p>
+            <a:pPr algn="ctr"/>
+            <a:endParaRPr lang="en-US"/>
+          </a:p>
+        </p:txBody>
+      </p:sp>
+      <p:sp>
+        <p:nvSpPr>
+          <p:cNvPr id="7" name="Rectangle 6">
+            <a:extLst>
+              <a:ext uri="{FF2B5EF4-FFF2-40B4-BE49-F238E27FC236}">
+                <a16:creationId xmlns:a16="http://schemas.microsoft.com/office/drawing/2014/main" id="{96007D1B-3288-CBD6-AA10-E44679496F17}"/>
+              </a:ext>
+            </a:extLst>
+          </p:cNvPr>
+          <p:cNvSpPr/>
+          <p:nvPr/>
+        </p:nvSpPr>
+        <p:spPr>
+          <a:xfrm>
+            <a:off x="2913124" y="996949"/>
+            <a:ext cx="115825" cy="298451"/>
+          </a:xfrm>
+          <a:prstGeom prst="rect">
+            <a:avLst/>
+          </a:prstGeom>
+          <a:solidFill>
+            <a:srgbClr val="ACD433">
+              <a:alpha val="50196"/>
+            </a:srgbClr>
+          </a:solidFill>
+        </p:spPr>
+        <p:style>
+          <a:lnRef idx="2">
+            <a:schemeClr val="accent1">
+              <a:shade val="15000"/>
+            </a:schemeClr>
+          </a:lnRef>
+          <a:fillRef idx="1">
+            <a:schemeClr val="accent1"/>
+          </a:fillRef>
+          <a:effectRef idx="0">
+            <a:schemeClr val="accent1"/>
+          </a:effectRef>
+          <a:fontRef idx="minor">
+            <a:schemeClr val="lt1"/>
+          </a:fontRef>
+        </p:style>
+        <p:txBody>
+          <a:bodyPr rtlCol="0" anchor="ctr"/>
+          <a:lstStyle/>
+          <a:p>
+            <a:pPr algn="ctr"/>
+            <a:endParaRPr lang="en-US"/>
+          </a:p>
+        </p:txBody>
+      </p:sp>
+      <p:sp>
+        <p:nvSpPr>
+          <p:cNvPr id="2" name="Rectangle 1">
+            <a:extLst>
+              <a:ext uri="{FF2B5EF4-FFF2-40B4-BE49-F238E27FC236}">
+                <a16:creationId xmlns:a16="http://schemas.microsoft.com/office/drawing/2014/main" id="{329C761D-F7FC-8775-72BE-92828C3825BC}"/>
+              </a:ext>
+            </a:extLst>
+          </p:cNvPr>
+          <p:cNvSpPr/>
+          <p:nvPr/>
+        </p:nvSpPr>
+        <p:spPr>
+          <a:xfrm rot="1551019">
+            <a:off x="3573376" y="623121"/>
+            <a:ext cx="1093916" cy="102021"/>
+          </a:xfrm>
+          <a:prstGeom prst="rect">
+            <a:avLst/>
+          </a:prstGeom>
+          <a:solidFill>
+            <a:srgbClr val="ACD433">
+              <a:alpha val="50196"/>
+            </a:srgbClr>
+          </a:solidFill>
+        </p:spPr>
+        <p:style>
+          <a:lnRef idx="2">
+            <a:schemeClr val="accent1">
+              <a:shade val="15000"/>
+            </a:schemeClr>
+          </a:lnRef>
+          <a:fillRef idx="1">
+            <a:schemeClr val="accent1"/>
+          </a:fillRef>
+          <a:effectRef idx="0">
+            <a:schemeClr val="accent1"/>
+          </a:effectRef>
+          <a:fontRef idx="minor">
+            <a:schemeClr val="lt1"/>
+          </a:fontRef>
+        </p:style>
+        <p:txBody>
+          <a:bodyPr rtlCol="0" anchor="ctr"/>
+          <a:lstStyle/>
+          <a:p>
+            <a:pPr algn="ctr"/>
+            <a:endParaRPr lang="en-US"/>
+          </a:p>
+        </p:txBody>
+      </p:sp>
+      <p:sp>
+        <p:nvSpPr>
+          <p:cNvPr id="8" name="Rectangle 7">
+            <a:extLst>
+              <a:ext uri="{FF2B5EF4-FFF2-40B4-BE49-F238E27FC236}">
+                <a16:creationId xmlns:a16="http://schemas.microsoft.com/office/drawing/2014/main" id="{A57C6E0B-6CD7-D3BB-6577-69F6948A5801}"/>
+              </a:ext>
+            </a:extLst>
+          </p:cNvPr>
+          <p:cNvSpPr/>
+          <p:nvPr/>
+        </p:nvSpPr>
+        <p:spPr>
+          <a:xfrm>
+            <a:off x="5065260" y="733425"/>
+            <a:ext cx="318398" cy="225099"/>
+          </a:xfrm>
+          <a:prstGeom prst="rect">
+            <a:avLst/>
+          </a:prstGeom>
+          <a:solidFill>
+            <a:srgbClr val="ACD433">
+              <a:alpha val="50196"/>
+            </a:srgbClr>
+          </a:solidFill>
+        </p:spPr>
+        <p:style>
+          <a:lnRef idx="2">
+            <a:schemeClr val="accent1">
+              <a:shade val="15000"/>
+            </a:schemeClr>
+          </a:lnRef>
+          <a:fillRef idx="1">
+            <a:schemeClr val="accent1"/>
+          </a:fillRef>
+          <a:effectRef idx="0">
+            <a:schemeClr val="accent1"/>
+          </a:effectRef>
+          <a:fontRef idx="minor">
+            <a:schemeClr val="lt1"/>
+          </a:fontRef>
+        </p:style>
+        <p:txBody>
+          <a:bodyPr rtlCol="0" anchor="ctr"/>
+          <a:lstStyle/>
+          <a:p>
+            <a:pPr algn="ctr"/>
+            <a:endParaRPr lang="en-US"/>
+          </a:p>
+        </p:txBody>
+      </p:sp>
+      <p:sp>
+        <p:nvSpPr>
+          <p:cNvPr id="9" name="Rectangle 8">
+            <a:extLst>
+              <a:ext uri="{FF2B5EF4-FFF2-40B4-BE49-F238E27FC236}">
+                <a16:creationId xmlns:a16="http://schemas.microsoft.com/office/drawing/2014/main" id="{8FD4DA41-9A4E-B7F2-E52F-D2682571BB2D}"/>
+              </a:ext>
+            </a:extLst>
+          </p:cNvPr>
+          <p:cNvSpPr/>
+          <p:nvPr/>
+        </p:nvSpPr>
+        <p:spPr>
+          <a:xfrm>
+            <a:off x="4886705" y="434974"/>
+            <a:ext cx="81536" cy="426086"/>
+          </a:xfrm>
+          <a:prstGeom prst="rect">
+            <a:avLst/>
+          </a:prstGeom>
+          <a:solidFill>
+            <a:srgbClr val="ACD433">
+              <a:alpha val="50196"/>
+            </a:srgbClr>
+          </a:solidFill>
+        </p:spPr>
+        <p:style>
+          <a:lnRef idx="2">
+            <a:schemeClr val="accent1">
+              <a:shade val="15000"/>
+            </a:schemeClr>
+          </a:lnRef>
+          <a:fillRef idx="1">
+            <a:schemeClr val="accent1"/>
+          </a:fillRef>
+          <a:effectRef idx="0">
+            <a:schemeClr val="accent1"/>
+          </a:effectRef>
+          <a:fontRef idx="minor">
+            <a:schemeClr val="lt1"/>
+          </a:fontRef>
+        </p:style>
+        <p:txBody>
+          <a:bodyPr rtlCol="0" anchor="ctr"/>
+          <a:lstStyle/>
+          <a:p>
+            <a:pPr algn="ctr"/>
+            <a:endParaRPr lang="en-US"/>
+          </a:p>
+        </p:txBody>
+      </p:sp>
+      <p:sp>
+        <p:nvSpPr>
+          <p:cNvPr id="10" name="Rectangle 9">
+            <a:extLst>
+              <a:ext uri="{FF2B5EF4-FFF2-40B4-BE49-F238E27FC236}">
+                <a16:creationId xmlns:a16="http://schemas.microsoft.com/office/drawing/2014/main" id="{1E567DB5-0F62-37F8-220C-F8F8B4568497}"/>
+              </a:ext>
+            </a:extLst>
+          </p:cNvPr>
+          <p:cNvSpPr/>
+          <p:nvPr/>
+        </p:nvSpPr>
+        <p:spPr>
+          <a:xfrm>
+            <a:off x="5006340" y="478664"/>
+            <a:ext cx="622522" cy="100455"/>
+          </a:xfrm>
+          <a:prstGeom prst="rect">
+            <a:avLst/>
+          </a:prstGeom>
+          <a:solidFill>
+            <a:srgbClr val="ACD433">
+              <a:alpha val="50196"/>
+            </a:srgbClr>
+          </a:solidFill>
+        </p:spPr>
+        <p:style>
+          <a:lnRef idx="2">
+            <a:schemeClr val="accent1">
+              <a:shade val="15000"/>
+            </a:schemeClr>
+          </a:lnRef>
+          <a:fillRef idx="1">
+            <a:schemeClr val="accent1"/>
+          </a:fillRef>
+          <a:effectRef idx="0">
+            <a:schemeClr val="accent1"/>
+          </a:effectRef>
+          <a:fontRef idx="minor">
+            <a:schemeClr val="lt1"/>
+          </a:fontRef>
+        </p:style>
+        <p:txBody>
+          <a:bodyPr rtlCol="0" anchor="ctr"/>
+          <a:lstStyle/>
+          <a:p>
+            <a:pPr algn="ctr"/>
+            <a:endParaRPr lang="en-US"/>
+          </a:p>
+        </p:txBody>
+      </p:sp>
+      <p:sp>
+        <p:nvSpPr>
+          <p:cNvPr id="11" name="Rectangle 10">
+            <a:extLst>
+              <a:ext uri="{FF2B5EF4-FFF2-40B4-BE49-F238E27FC236}">
+                <a16:creationId xmlns:a16="http://schemas.microsoft.com/office/drawing/2014/main" id="{849B480B-22B3-50A0-C22C-052E7272CA05}"/>
+              </a:ext>
+            </a:extLst>
+          </p:cNvPr>
+          <p:cNvSpPr/>
+          <p:nvPr/>
+        </p:nvSpPr>
+        <p:spPr>
+          <a:xfrm>
+            <a:off x="5006340" y="587374"/>
+            <a:ext cx="114301" cy="273686"/>
+          </a:xfrm>
+          <a:prstGeom prst="rect">
+            <a:avLst/>
+          </a:prstGeom>
+          <a:solidFill>
+            <a:srgbClr val="ACD433">
+              <a:alpha val="50196"/>
+            </a:srgbClr>
+          </a:solidFill>
+        </p:spPr>
+        <p:style>
+          <a:lnRef idx="2">
+            <a:schemeClr val="accent1">
+              <a:shade val="15000"/>
+            </a:schemeClr>
+          </a:lnRef>
+          <a:fillRef idx="1">
+            <a:schemeClr val="accent1"/>
+          </a:fillRef>
+          <a:effectRef idx="0">
+            <a:schemeClr val="accent1"/>
+          </a:effectRef>
+          <a:fontRef idx="minor">
+            <a:schemeClr val="lt1"/>
+          </a:fontRef>
+        </p:style>
+        <p:txBody>
+          <a:bodyPr rtlCol="0" anchor="ctr"/>
+          <a:lstStyle/>
+          <a:p>
+            <a:pPr algn="ctr"/>
+            <a:endParaRPr lang="en-US"/>
+          </a:p>
+        </p:txBody>
+      </p:sp>
+      <p:sp>
+        <p:nvSpPr>
+          <p:cNvPr id="12" name="Rectangle 11">
+            <a:extLst>
+              <a:ext uri="{FF2B5EF4-FFF2-40B4-BE49-F238E27FC236}">
+                <a16:creationId xmlns:a16="http://schemas.microsoft.com/office/drawing/2014/main" id="{FEC40226-FE18-2145-FAD2-ACC0561D7AF5}"/>
+              </a:ext>
+            </a:extLst>
+          </p:cNvPr>
+          <p:cNvSpPr/>
+          <p:nvPr/>
+        </p:nvSpPr>
+        <p:spPr>
+          <a:xfrm>
+            <a:off x="3382706" y="434974"/>
+            <a:ext cx="76700" cy="1133476"/>
+          </a:xfrm>
+          <a:prstGeom prst="rect">
+            <a:avLst/>
+          </a:prstGeom>
+          <a:solidFill>
+            <a:srgbClr val="ACD433">
+              <a:alpha val="50196"/>
+            </a:srgbClr>
+          </a:solidFill>
+        </p:spPr>
+        <p:style>
+          <a:lnRef idx="2">
+            <a:schemeClr val="accent1">
+              <a:shade val="15000"/>
+            </a:schemeClr>
+          </a:lnRef>
+          <a:fillRef idx="1">
+            <a:schemeClr val="accent1"/>
+          </a:fillRef>
+          <a:effectRef idx="0">
+            <a:schemeClr val="accent1"/>
+          </a:effectRef>
+          <a:fontRef idx="minor">
+            <a:schemeClr val="lt1"/>
+          </a:fontRef>
+        </p:style>
+        <p:txBody>
+          <a:bodyPr rtlCol="0" anchor="ctr"/>
+          <a:lstStyle/>
+          <a:p>
+            <a:pPr algn="ctr"/>
+            <a:endParaRPr lang="en-US"/>
+          </a:p>
+        </p:txBody>
+      </p:sp>
+      <p:sp>
+        <p:nvSpPr>
+          <p:cNvPr id="13" name="Rectangle 12">
+            <a:extLst>
+              <a:ext uri="{FF2B5EF4-FFF2-40B4-BE49-F238E27FC236}">
+                <a16:creationId xmlns:a16="http://schemas.microsoft.com/office/drawing/2014/main" id="{A54E351E-9E50-DB76-22C8-CD8F5F27F567}"/>
+              </a:ext>
+            </a:extLst>
+          </p:cNvPr>
+          <p:cNvSpPr/>
+          <p:nvPr/>
+        </p:nvSpPr>
+        <p:spPr>
+          <a:xfrm>
+            <a:off x="3565097" y="974398"/>
+            <a:ext cx="76700" cy="594051"/>
+          </a:xfrm>
+          <a:prstGeom prst="rect">
+            <a:avLst/>
+          </a:prstGeom>
+          <a:solidFill>
+            <a:srgbClr val="ACD433">
+              <a:alpha val="50196"/>
+            </a:srgbClr>
+          </a:solidFill>
+        </p:spPr>
+        <p:style>
+          <a:lnRef idx="2">
+            <a:schemeClr val="accent1">
+              <a:shade val="15000"/>
+            </a:schemeClr>
+          </a:lnRef>
+          <a:fillRef idx="1">
+            <a:schemeClr val="accent1"/>
+          </a:fillRef>
+          <a:effectRef idx="0">
+            <a:schemeClr val="accent1"/>
+          </a:effectRef>
+          <a:fontRef idx="minor">
+            <a:schemeClr val="lt1"/>
+          </a:fontRef>
+        </p:style>
+        <p:txBody>
+          <a:bodyPr rtlCol="0" anchor="ctr"/>
+          <a:lstStyle/>
+          <a:p>
+            <a:pPr algn="ctr"/>
+            <a:endParaRPr lang="en-US"/>
+          </a:p>
+        </p:txBody>
+      </p:sp>
+      <p:sp>
+        <p:nvSpPr>
+          <p:cNvPr id="14" name="Rectangle 13">
+            <a:extLst>
+              <a:ext uri="{FF2B5EF4-FFF2-40B4-BE49-F238E27FC236}">
+                <a16:creationId xmlns:a16="http://schemas.microsoft.com/office/drawing/2014/main" id="{75686508-C3EF-70A5-FC96-38130E462500}"/>
+              </a:ext>
+            </a:extLst>
+          </p:cNvPr>
+          <p:cNvSpPr/>
+          <p:nvPr/>
+        </p:nvSpPr>
+        <p:spPr>
+          <a:xfrm>
+            <a:off x="3641797" y="958524"/>
+            <a:ext cx="993006" cy="102111"/>
+          </a:xfrm>
+          <a:prstGeom prst="rect">
+            <a:avLst/>
+          </a:prstGeom>
+          <a:solidFill>
+            <a:srgbClr val="ACD433">
+              <a:alpha val="50196"/>
+            </a:srgbClr>
+          </a:solidFill>
+        </p:spPr>
+        <p:style>
+          <a:lnRef idx="2">
+            <a:schemeClr val="accent1">
+              <a:shade val="15000"/>
+            </a:schemeClr>
+          </a:lnRef>
+          <a:fillRef idx="1">
+            <a:schemeClr val="accent1"/>
+          </a:fillRef>
+          <a:effectRef idx="0">
+            <a:schemeClr val="accent1"/>
+          </a:effectRef>
+          <a:fontRef idx="minor">
+            <a:schemeClr val="lt1"/>
+          </a:fontRef>
+        </p:style>
+        <p:txBody>
+          <a:bodyPr rtlCol="0" anchor="ctr"/>
+          <a:lstStyle/>
+          <a:p>
+            <a:pPr algn="ctr"/>
+            <a:endParaRPr lang="en-US"/>
+          </a:p>
+        </p:txBody>
+      </p:sp>
+      <p:sp>
+        <p:nvSpPr>
+          <p:cNvPr id="15" name="Rectangle 14">
+            <a:extLst>
+              <a:ext uri="{FF2B5EF4-FFF2-40B4-BE49-F238E27FC236}">
+                <a16:creationId xmlns:a16="http://schemas.microsoft.com/office/drawing/2014/main" id="{5E903C36-1C38-5F33-1C1D-307AF6BB87F4}"/>
+              </a:ext>
+            </a:extLst>
+          </p:cNvPr>
+          <p:cNvSpPr/>
+          <p:nvPr/>
+        </p:nvSpPr>
+        <p:spPr>
+          <a:xfrm>
+            <a:off x="3788357" y="1447841"/>
+            <a:ext cx="233295" cy="181579"/>
+          </a:xfrm>
+          <a:prstGeom prst="rect">
+            <a:avLst/>
+          </a:prstGeom>
+          <a:solidFill>
+            <a:srgbClr val="ACD433">
+              <a:alpha val="50196"/>
+            </a:srgbClr>
+          </a:solidFill>
+        </p:spPr>
+        <p:style>
+          <a:lnRef idx="2">
+            <a:schemeClr val="accent1">
+              <a:shade val="15000"/>
+            </a:schemeClr>
+          </a:lnRef>
+          <a:fillRef idx="1">
+            <a:schemeClr val="accent1"/>
+          </a:fillRef>
+          <a:effectRef idx="0">
+            <a:schemeClr val="accent1"/>
+          </a:effectRef>
+          <a:fontRef idx="minor">
+            <a:schemeClr val="lt1"/>
+          </a:fontRef>
+        </p:style>
+        <p:txBody>
+          <a:bodyPr rtlCol="0" anchor="ctr"/>
+          <a:lstStyle/>
+          <a:p>
+            <a:pPr algn="ctr"/>
+            <a:endParaRPr lang="en-US"/>
+          </a:p>
+        </p:txBody>
+      </p:sp>
+      <p:sp>
+        <p:nvSpPr>
+          <p:cNvPr id="16" name="Rectangle 15">
+            <a:extLst>
+              <a:ext uri="{FF2B5EF4-FFF2-40B4-BE49-F238E27FC236}">
+                <a16:creationId xmlns:a16="http://schemas.microsoft.com/office/drawing/2014/main" id="{BC51DBEA-E6FE-3BF4-5364-55F881E86F19}"/>
+              </a:ext>
+            </a:extLst>
+          </p:cNvPr>
+          <p:cNvSpPr/>
+          <p:nvPr/>
+        </p:nvSpPr>
+        <p:spPr>
+          <a:xfrm rot="4874518">
+            <a:off x="4478330" y="985650"/>
+            <a:ext cx="81536" cy="426086"/>
+          </a:xfrm>
+          <a:prstGeom prst="rect">
+            <a:avLst/>
+          </a:prstGeom>
+          <a:solidFill>
+            <a:srgbClr val="ACD433">
+              <a:alpha val="50196"/>
+            </a:srgbClr>
+          </a:solidFill>
+        </p:spPr>
+        <p:style>
+          <a:lnRef idx="2">
+            <a:schemeClr val="accent1">
+              <a:shade val="15000"/>
+            </a:schemeClr>
+          </a:lnRef>
+          <a:fillRef idx="1">
+            <a:schemeClr val="accent1"/>
+          </a:fillRef>
+          <a:effectRef idx="0">
+            <a:schemeClr val="accent1"/>
+          </a:effectRef>
+          <a:fontRef idx="minor">
+            <a:schemeClr val="lt1"/>
+          </a:fontRef>
+        </p:style>
+        <p:txBody>
+          <a:bodyPr rtlCol="0" anchor="ctr"/>
+          <a:lstStyle/>
+          <a:p>
+            <a:pPr algn="ctr"/>
+            <a:endParaRPr lang="en-US"/>
+          </a:p>
+        </p:txBody>
+      </p:sp>
+      <p:sp>
+        <p:nvSpPr>
+          <p:cNvPr id="17" name="Rectangle 16">
+            <a:extLst>
+              <a:ext uri="{FF2B5EF4-FFF2-40B4-BE49-F238E27FC236}">
+                <a16:creationId xmlns:a16="http://schemas.microsoft.com/office/drawing/2014/main" id="{73B44448-06DF-1F3E-AF4D-8F207D582B60}"/>
+              </a:ext>
+            </a:extLst>
+          </p:cNvPr>
+          <p:cNvSpPr/>
+          <p:nvPr/>
+        </p:nvSpPr>
+        <p:spPr>
+          <a:xfrm>
+            <a:off x="4904356" y="1176175"/>
+            <a:ext cx="81536" cy="426086"/>
+          </a:xfrm>
+          <a:prstGeom prst="rect">
+            <a:avLst/>
+          </a:prstGeom>
+          <a:solidFill>
+            <a:srgbClr val="ACD433">
+              <a:alpha val="50196"/>
+            </a:srgbClr>
+          </a:solidFill>
+        </p:spPr>
+        <p:style>
+          <a:lnRef idx="2">
+            <a:schemeClr val="accent1">
+              <a:shade val="15000"/>
+            </a:schemeClr>
+          </a:lnRef>
+          <a:fillRef idx="1">
+            <a:schemeClr val="accent1"/>
+          </a:fillRef>
+          <a:effectRef idx="0">
+            <a:schemeClr val="accent1"/>
+          </a:effectRef>
+          <a:fontRef idx="minor">
+            <a:schemeClr val="lt1"/>
+          </a:fontRef>
+        </p:style>
+        <p:txBody>
+          <a:bodyPr rtlCol="0" anchor="ctr"/>
+          <a:lstStyle/>
+          <a:p>
+            <a:pPr algn="ctr"/>
+            <a:endParaRPr lang="en-US"/>
+          </a:p>
+        </p:txBody>
+      </p:sp>
+      <p:sp>
+        <p:nvSpPr>
+          <p:cNvPr id="18" name="Rectangle 17">
+            <a:extLst>
+              <a:ext uri="{FF2B5EF4-FFF2-40B4-BE49-F238E27FC236}">
+                <a16:creationId xmlns:a16="http://schemas.microsoft.com/office/drawing/2014/main" id="{F4969315-431B-89A4-9D3E-DDBE3B4FD35D}"/>
+              </a:ext>
+            </a:extLst>
+          </p:cNvPr>
+          <p:cNvSpPr/>
+          <p:nvPr/>
+        </p:nvSpPr>
+        <p:spPr>
+          <a:xfrm>
+            <a:off x="5200132" y="946721"/>
+            <a:ext cx="428730" cy="100455"/>
+          </a:xfrm>
+          <a:prstGeom prst="rect">
+            <a:avLst/>
+          </a:prstGeom>
+          <a:solidFill>
+            <a:srgbClr val="ACD433">
+              <a:alpha val="50196"/>
+            </a:srgbClr>
+          </a:solidFill>
+        </p:spPr>
+        <p:style>
+          <a:lnRef idx="2">
+            <a:schemeClr val="accent1">
+              <a:shade val="15000"/>
+            </a:schemeClr>
+          </a:lnRef>
+          <a:fillRef idx="1">
+            <a:schemeClr val="accent1"/>
+          </a:fillRef>
+          <a:effectRef idx="0">
+            <a:schemeClr val="accent1"/>
+          </a:effectRef>
+          <a:fontRef idx="minor">
+            <a:schemeClr val="lt1"/>
+          </a:fontRef>
+        </p:style>
+        <p:txBody>
+          <a:bodyPr rtlCol="0" anchor="ctr"/>
+          <a:lstStyle/>
+          <a:p>
+            <a:pPr algn="ctr"/>
+            <a:endParaRPr lang="en-US"/>
+          </a:p>
+        </p:txBody>
+      </p:sp>
+      <p:sp>
+        <p:nvSpPr>
+          <p:cNvPr id="19" name="Rectangle 18">
+            <a:extLst>
+              <a:ext uri="{FF2B5EF4-FFF2-40B4-BE49-F238E27FC236}">
+                <a16:creationId xmlns:a16="http://schemas.microsoft.com/office/drawing/2014/main" id="{5481B9C4-6CB5-75DB-FE1C-4130B14127F5}"/>
+              </a:ext>
+            </a:extLst>
+          </p:cNvPr>
+          <p:cNvSpPr/>
+          <p:nvPr/>
+        </p:nvSpPr>
+        <p:spPr>
+          <a:xfrm>
+            <a:off x="6191487" y="946721"/>
+            <a:ext cx="312055" cy="100455"/>
+          </a:xfrm>
+          <a:prstGeom prst="rect">
+            <a:avLst/>
+          </a:prstGeom>
+          <a:solidFill>
+            <a:srgbClr val="ACD433">
+              <a:alpha val="50196"/>
+            </a:srgbClr>
+          </a:solidFill>
+        </p:spPr>
+        <p:style>
+          <a:lnRef idx="2">
+            <a:schemeClr val="accent1">
+              <a:shade val="15000"/>
+            </a:schemeClr>
+          </a:lnRef>
+          <a:fillRef idx="1">
+            <a:schemeClr val="accent1"/>
+          </a:fillRef>
+          <a:effectRef idx="0">
+            <a:schemeClr val="accent1"/>
+          </a:effectRef>
+          <a:fontRef idx="minor">
+            <a:schemeClr val="lt1"/>
+          </a:fontRef>
+        </p:style>
+        <p:txBody>
+          <a:bodyPr rtlCol="0" anchor="ctr"/>
+          <a:lstStyle/>
+          <a:p>
+            <a:pPr algn="ctr"/>
+            <a:endParaRPr lang="en-US"/>
+          </a:p>
+        </p:txBody>
+      </p:sp>
+      <p:sp>
+        <p:nvSpPr>
+          <p:cNvPr id="21" name="Rectangle 20">
+            <a:extLst>
+              <a:ext uri="{FF2B5EF4-FFF2-40B4-BE49-F238E27FC236}">
+                <a16:creationId xmlns:a16="http://schemas.microsoft.com/office/drawing/2014/main" id="{DB369383-1BF2-9DA9-F0BB-517E27B6E933}"/>
+              </a:ext>
+            </a:extLst>
+          </p:cNvPr>
+          <p:cNvSpPr/>
+          <p:nvPr/>
+        </p:nvSpPr>
+        <p:spPr>
+          <a:xfrm rot="7689780">
+            <a:off x="5689987" y="725525"/>
+            <a:ext cx="76042" cy="1357830"/>
+          </a:xfrm>
+          <a:prstGeom prst="rect">
+            <a:avLst/>
+          </a:prstGeom>
+          <a:solidFill>
+            <a:srgbClr val="ACD433">
+              <a:alpha val="50196"/>
+            </a:srgbClr>
+          </a:solidFill>
+        </p:spPr>
+        <p:style>
+          <a:lnRef idx="2">
+            <a:schemeClr val="accent1">
+              <a:shade val="15000"/>
+            </a:schemeClr>
+          </a:lnRef>
+          <a:fillRef idx="1">
+            <a:schemeClr val="accent1"/>
+          </a:fillRef>
+          <a:effectRef idx="0">
+            <a:schemeClr val="accent1"/>
+          </a:effectRef>
+          <a:fontRef idx="minor">
+            <a:schemeClr val="lt1"/>
+          </a:fontRef>
+        </p:style>
+        <p:txBody>
+          <a:bodyPr rtlCol="0" anchor="ctr"/>
+          <a:lstStyle/>
+          <a:p>
+            <a:pPr algn="ctr"/>
+            <a:endParaRPr lang="en-US"/>
+          </a:p>
+        </p:txBody>
+      </p:sp>
+      <p:sp>
+        <p:nvSpPr>
+          <p:cNvPr id="22" name="Rectangle 21">
+            <a:extLst>
+              <a:ext uri="{FF2B5EF4-FFF2-40B4-BE49-F238E27FC236}">
+                <a16:creationId xmlns:a16="http://schemas.microsoft.com/office/drawing/2014/main" id="{0BE6EDB8-5817-A7C2-F25B-663CCF4FB80E}"/>
+              </a:ext>
+            </a:extLst>
+          </p:cNvPr>
+          <p:cNvSpPr/>
+          <p:nvPr/>
+        </p:nvSpPr>
+        <p:spPr>
+          <a:xfrm>
+            <a:off x="6503542" y="1862159"/>
+            <a:ext cx="647271" cy="131738"/>
+          </a:xfrm>
+          <a:prstGeom prst="rect">
+            <a:avLst/>
+          </a:prstGeom>
+          <a:solidFill>
+            <a:srgbClr val="ACD433">
+              <a:alpha val="50196"/>
+            </a:srgbClr>
+          </a:solidFill>
+        </p:spPr>
+        <p:style>
+          <a:lnRef idx="2">
+            <a:schemeClr val="accent1">
+              <a:shade val="15000"/>
+            </a:schemeClr>
+          </a:lnRef>
+          <a:fillRef idx="1">
+            <a:schemeClr val="accent1"/>
+          </a:fillRef>
+          <a:effectRef idx="0">
+            <a:schemeClr val="accent1"/>
+          </a:effectRef>
+          <a:fontRef idx="minor">
+            <a:schemeClr val="lt1"/>
+          </a:fontRef>
+        </p:style>
+        <p:txBody>
+          <a:bodyPr rtlCol="0" anchor="ctr"/>
+          <a:lstStyle/>
+          <a:p>
+            <a:pPr algn="ctr"/>
+            <a:endParaRPr lang="en-US"/>
+          </a:p>
+        </p:txBody>
+      </p:sp>
+      <p:sp>
+        <p:nvSpPr>
+          <p:cNvPr id="23" name="Rectangle 22">
+            <a:extLst>
+              <a:ext uri="{FF2B5EF4-FFF2-40B4-BE49-F238E27FC236}">
+                <a16:creationId xmlns:a16="http://schemas.microsoft.com/office/drawing/2014/main" id="{D5B968C1-7645-AA12-7E6A-930B7335A5AA}"/>
+              </a:ext>
+            </a:extLst>
+          </p:cNvPr>
+          <p:cNvSpPr/>
+          <p:nvPr/>
+        </p:nvSpPr>
+        <p:spPr>
+          <a:xfrm>
+            <a:off x="6285303" y="1568449"/>
+            <a:ext cx="1278993" cy="252208"/>
+          </a:xfrm>
+          <a:prstGeom prst="rect">
+            <a:avLst/>
+          </a:prstGeom>
+          <a:solidFill>
+            <a:srgbClr val="ACD433">
+              <a:alpha val="50196"/>
+            </a:srgbClr>
+          </a:solidFill>
+        </p:spPr>
+        <p:style>
+          <a:lnRef idx="2">
+            <a:schemeClr val="accent1">
+              <a:shade val="15000"/>
+            </a:schemeClr>
+          </a:lnRef>
+          <a:fillRef idx="1">
+            <a:schemeClr val="accent1"/>
+          </a:fillRef>
+          <a:effectRef idx="0">
+            <a:schemeClr val="accent1"/>
+          </a:effectRef>
+          <a:fontRef idx="minor">
+            <a:schemeClr val="lt1"/>
+          </a:fontRef>
+        </p:style>
+        <p:txBody>
+          <a:bodyPr rtlCol="0" anchor="ctr"/>
+          <a:lstStyle/>
+          <a:p>
+            <a:pPr algn="ctr"/>
+            <a:endParaRPr lang="en-US"/>
+          </a:p>
+        </p:txBody>
+      </p:sp>
+      <p:sp>
+        <p:nvSpPr>
+          <p:cNvPr id="20" name="Rectangle 19">
+            <a:extLst>
+              <a:ext uri="{FF2B5EF4-FFF2-40B4-BE49-F238E27FC236}">
+                <a16:creationId xmlns:a16="http://schemas.microsoft.com/office/drawing/2014/main" id="{0A4C863E-C315-8296-95C3-C5C10D01C1B7}"/>
+              </a:ext>
+            </a:extLst>
+          </p:cNvPr>
+          <p:cNvSpPr/>
+          <p:nvPr/>
+        </p:nvSpPr>
+        <p:spPr>
+          <a:xfrm>
+            <a:off x="6191487" y="2160350"/>
+            <a:ext cx="312055" cy="181579"/>
+          </a:xfrm>
+          <a:prstGeom prst="rect">
+            <a:avLst/>
+          </a:prstGeom>
+          <a:solidFill>
+            <a:srgbClr val="ACD433">
+              <a:alpha val="50196"/>
+            </a:srgbClr>
+          </a:solidFill>
+        </p:spPr>
+        <p:style>
+          <a:lnRef idx="2">
+            <a:schemeClr val="accent1">
+              <a:shade val="15000"/>
+            </a:schemeClr>
+          </a:lnRef>
+          <a:fillRef idx="1">
+            <a:schemeClr val="accent1"/>
+          </a:fillRef>
+          <a:effectRef idx="0">
+            <a:schemeClr val="accent1"/>
+          </a:effectRef>
+          <a:fontRef idx="minor">
+            <a:schemeClr val="lt1"/>
+          </a:fontRef>
+        </p:style>
+        <p:txBody>
+          <a:bodyPr rtlCol="0" anchor="ctr"/>
+          <a:lstStyle/>
+          <a:p>
+            <a:pPr algn="ctr"/>
+            <a:endParaRPr lang="en-US"/>
+          </a:p>
+        </p:txBody>
+      </p:sp>
+      <p:sp>
+        <p:nvSpPr>
+          <p:cNvPr id="24" name="Rectangle 23">
+            <a:extLst>
+              <a:ext uri="{FF2B5EF4-FFF2-40B4-BE49-F238E27FC236}">
+                <a16:creationId xmlns:a16="http://schemas.microsoft.com/office/drawing/2014/main" id="{2AE1DD47-2B32-5CA7-8EBA-C2A350A7E0A1}"/>
+              </a:ext>
+            </a:extLst>
+          </p:cNvPr>
+          <p:cNvSpPr/>
+          <p:nvPr/>
+        </p:nvSpPr>
+        <p:spPr>
+          <a:xfrm>
+            <a:off x="5200132" y="2341929"/>
+            <a:ext cx="546618" cy="115521"/>
+          </a:xfrm>
+          <a:prstGeom prst="rect">
+            <a:avLst/>
+          </a:prstGeom>
+          <a:solidFill>
+            <a:srgbClr val="ACD433">
+              <a:alpha val="50196"/>
+            </a:srgbClr>
+          </a:solidFill>
+        </p:spPr>
+        <p:style>
+          <a:lnRef idx="2">
+            <a:schemeClr val="accent1">
+              <a:shade val="15000"/>
+            </a:schemeClr>
+          </a:lnRef>
+          <a:fillRef idx="1">
+            <a:schemeClr val="accent1"/>
+          </a:fillRef>
+          <a:effectRef idx="0">
+            <a:schemeClr val="accent1"/>
+          </a:effectRef>
+          <a:fontRef idx="minor">
+            <a:schemeClr val="lt1"/>
+          </a:fontRef>
+        </p:style>
+        <p:txBody>
+          <a:bodyPr rtlCol="0" anchor="ctr"/>
+          <a:lstStyle/>
+          <a:p>
+            <a:pPr algn="ctr"/>
+            <a:endParaRPr lang="en-US"/>
+          </a:p>
+        </p:txBody>
+      </p:sp>
+      <p:sp>
+        <p:nvSpPr>
+          <p:cNvPr id="25" name="Rectangle 24">
+            <a:extLst>
+              <a:ext uri="{FF2B5EF4-FFF2-40B4-BE49-F238E27FC236}">
+                <a16:creationId xmlns:a16="http://schemas.microsoft.com/office/drawing/2014/main" id="{836BC75E-E6C7-8E4C-4D33-372345A4D4A3}"/>
+              </a:ext>
+            </a:extLst>
+          </p:cNvPr>
+          <p:cNvSpPr/>
+          <p:nvPr/>
+        </p:nvSpPr>
+        <p:spPr>
+          <a:xfrm rot="8938082">
+            <a:off x="5502940" y="1047172"/>
+            <a:ext cx="76042" cy="1357830"/>
+          </a:xfrm>
+          <a:prstGeom prst="rect">
+            <a:avLst/>
+          </a:prstGeom>
+          <a:solidFill>
+            <a:schemeClr val="accent3">
+              <a:alpha val="50196"/>
+            </a:schemeClr>
+          </a:solidFill>
+        </p:spPr>
+        <p:style>
+          <a:lnRef idx="2">
+            <a:schemeClr val="accent1">
+              <a:shade val="15000"/>
+            </a:schemeClr>
+          </a:lnRef>
+          <a:fillRef idx="1">
+            <a:schemeClr val="accent1"/>
+          </a:fillRef>
+          <a:effectRef idx="0">
+            <a:schemeClr val="accent1"/>
+          </a:effectRef>
+          <a:fontRef idx="minor">
+            <a:schemeClr val="lt1"/>
+          </a:fontRef>
+        </p:style>
+        <p:txBody>
+          <a:bodyPr rtlCol="0" anchor="ctr"/>
+          <a:lstStyle/>
+          <a:p>
+            <a:pPr algn="ctr"/>
+            <a:endParaRPr lang="en-US"/>
+          </a:p>
+        </p:txBody>
+      </p:sp>
+      <p:sp>
+        <p:nvSpPr>
+          <p:cNvPr id="26" name="Rectangle 25">
+            <a:extLst>
+              <a:ext uri="{FF2B5EF4-FFF2-40B4-BE49-F238E27FC236}">
+                <a16:creationId xmlns:a16="http://schemas.microsoft.com/office/drawing/2014/main" id="{3F3E368A-4F51-6736-8DA5-37E30D11870B}"/>
+              </a:ext>
+            </a:extLst>
+          </p:cNvPr>
+          <p:cNvSpPr/>
+          <p:nvPr/>
+        </p:nvSpPr>
+        <p:spPr>
+          <a:xfrm rot="10800000">
+            <a:off x="5873291" y="1176175"/>
+            <a:ext cx="90481" cy="1117544"/>
+          </a:xfrm>
+          <a:prstGeom prst="rect">
+            <a:avLst/>
+          </a:prstGeom>
+          <a:solidFill>
+            <a:schemeClr val="accent3">
+              <a:alpha val="50196"/>
+            </a:schemeClr>
+          </a:solidFill>
+        </p:spPr>
+        <p:style>
+          <a:lnRef idx="2">
+            <a:schemeClr val="accent1">
+              <a:shade val="15000"/>
+            </a:schemeClr>
+          </a:lnRef>
+          <a:fillRef idx="1">
+            <a:schemeClr val="accent1"/>
+          </a:fillRef>
+          <a:effectRef idx="0">
+            <a:schemeClr val="accent1"/>
+          </a:effectRef>
+          <a:fontRef idx="minor">
+            <a:schemeClr val="lt1"/>
+          </a:fontRef>
+        </p:style>
+        <p:txBody>
+          <a:bodyPr rtlCol="0" anchor="ctr"/>
+          <a:lstStyle/>
+          <a:p>
+            <a:pPr algn="ctr"/>
+            <a:endParaRPr lang="en-US"/>
+          </a:p>
+        </p:txBody>
+      </p:sp>
+      <p:sp>
+        <p:nvSpPr>
+          <p:cNvPr id="27" name="Rectangle 26">
+            <a:extLst>
+              <a:ext uri="{FF2B5EF4-FFF2-40B4-BE49-F238E27FC236}">
+                <a16:creationId xmlns:a16="http://schemas.microsoft.com/office/drawing/2014/main" id="{360B51EF-21B6-B9CC-6355-D6D7EFD1CC8D}"/>
+              </a:ext>
+            </a:extLst>
+          </p:cNvPr>
+          <p:cNvSpPr/>
+          <p:nvPr/>
+        </p:nvSpPr>
+        <p:spPr>
+          <a:xfrm rot="12691686" flipH="1">
+            <a:off x="5408785" y="1079456"/>
+            <a:ext cx="55472" cy="1281028"/>
+          </a:xfrm>
+          <a:prstGeom prst="rect">
+            <a:avLst/>
+          </a:prstGeom>
+          <a:solidFill>
+            <a:schemeClr val="accent3">
+              <a:alpha val="50196"/>
+            </a:schemeClr>
+          </a:solidFill>
+        </p:spPr>
+        <p:style>
+          <a:lnRef idx="2">
+            <a:schemeClr val="accent1">
+              <a:shade val="15000"/>
+            </a:schemeClr>
+          </a:lnRef>
+          <a:fillRef idx="1">
+            <a:schemeClr val="accent1"/>
+          </a:fillRef>
+          <a:effectRef idx="0">
+            <a:schemeClr val="accent1"/>
+          </a:effectRef>
+          <a:fontRef idx="minor">
+            <a:schemeClr val="lt1"/>
+          </a:fontRef>
+        </p:style>
+        <p:txBody>
+          <a:bodyPr rtlCol="0" anchor="ctr"/>
+          <a:lstStyle/>
+          <a:p>
+            <a:pPr algn="ctr"/>
+            <a:endParaRPr lang="en-US"/>
+          </a:p>
+        </p:txBody>
+      </p:sp>
+      <p:sp>
+        <p:nvSpPr>
+          <p:cNvPr id="28" name="Rectangle 27">
+            <a:extLst>
+              <a:ext uri="{FF2B5EF4-FFF2-40B4-BE49-F238E27FC236}">
+                <a16:creationId xmlns:a16="http://schemas.microsoft.com/office/drawing/2014/main" id="{67DF9B66-7431-1A59-7188-3C0E64107F99}"/>
+              </a:ext>
+            </a:extLst>
+          </p:cNvPr>
+          <p:cNvSpPr/>
+          <p:nvPr/>
+        </p:nvSpPr>
+        <p:spPr>
+          <a:xfrm>
+            <a:off x="4901946" y="2574289"/>
+            <a:ext cx="104394" cy="100455"/>
+          </a:xfrm>
+          <a:prstGeom prst="rect">
+            <a:avLst/>
+          </a:prstGeom>
+          <a:solidFill>
+            <a:srgbClr val="ACD433">
+              <a:alpha val="50196"/>
+            </a:srgbClr>
+          </a:solidFill>
+        </p:spPr>
+        <p:style>
+          <a:lnRef idx="2">
+            <a:schemeClr val="accent1">
+              <a:shade val="15000"/>
+            </a:schemeClr>
+          </a:lnRef>
+          <a:fillRef idx="1">
+            <a:schemeClr val="accent1"/>
+          </a:fillRef>
+          <a:effectRef idx="0">
+            <a:schemeClr val="accent1"/>
+          </a:effectRef>
+          <a:fontRef idx="minor">
+            <a:schemeClr val="lt1"/>
+          </a:fontRef>
+        </p:style>
+        <p:txBody>
+          <a:bodyPr rtlCol="0" anchor="ctr"/>
+          <a:lstStyle/>
+          <a:p>
+            <a:pPr algn="ctr"/>
+            <a:endParaRPr lang="en-US"/>
+          </a:p>
+        </p:txBody>
+      </p:sp>
+      <p:sp>
+        <p:nvSpPr>
+          <p:cNvPr id="29" name="Rectangle 28">
+            <a:extLst>
+              <a:ext uri="{FF2B5EF4-FFF2-40B4-BE49-F238E27FC236}">
+                <a16:creationId xmlns:a16="http://schemas.microsoft.com/office/drawing/2014/main" id="{8A4B1659-8D43-769B-AEF3-F79100B09B1C}"/>
+              </a:ext>
+            </a:extLst>
+          </p:cNvPr>
+          <p:cNvSpPr/>
+          <p:nvPr/>
+        </p:nvSpPr>
+        <p:spPr>
+          <a:xfrm>
+            <a:off x="6150719" y="2574289"/>
+            <a:ext cx="81536" cy="298451"/>
+          </a:xfrm>
+          <a:prstGeom prst="rect">
+            <a:avLst/>
+          </a:prstGeom>
+          <a:solidFill>
+            <a:srgbClr val="ACD433">
+              <a:alpha val="50196"/>
+            </a:srgbClr>
+          </a:solidFill>
+        </p:spPr>
+        <p:style>
+          <a:lnRef idx="2">
+            <a:schemeClr val="accent1">
+              <a:shade val="15000"/>
+            </a:schemeClr>
+          </a:lnRef>
+          <a:fillRef idx="1">
+            <a:schemeClr val="accent1"/>
+          </a:fillRef>
+          <a:effectRef idx="0">
+            <a:schemeClr val="accent1"/>
+          </a:effectRef>
+          <a:fontRef idx="minor">
+            <a:schemeClr val="lt1"/>
+          </a:fontRef>
+        </p:style>
+        <p:txBody>
+          <a:bodyPr rtlCol="0" anchor="ctr"/>
+          <a:lstStyle/>
+          <a:p>
+            <a:pPr algn="ctr"/>
+            <a:endParaRPr lang="en-US"/>
+          </a:p>
+        </p:txBody>
+      </p:sp>
+      <p:sp>
+        <p:nvSpPr>
+          <p:cNvPr id="30" name="Rectangle 29">
+            <a:extLst>
+              <a:ext uri="{FF2B5EF4-FFF2-40B4-BE49-F238E27FC236}">
+                <a16:creationId xmlns:a16="http://schemas.microsoft.com/office/drawing/2014/main" id="{618C9774-7A50-5CD0-FD00-8FB87D6673B9}"/>
+              </a:ext>
+            </a:extLst>
+          </p:cNvPr>
+          <p:cNvSpPr/>
+          <p:nvPr/>
+        </p:nvSpPr>
+        <p:spPr>
+          <a:xfrm>
+            <a:off x="4985891" y="2649403"/>
+            <a:ext cx="2164922" cy="100455"/>
+          </a:xfrm>
+          <a:prstGeom prst="rect">
+            <a:avLst/>
+          </a:prstGeom>
+          <a:solidFill>
+            <a:srgbClr val="ACD433">
+              <a:alpha val="50196"/>
+            </a:srgbClr>
+          </a:solidFill>
+        </p:spPr>
+        <p:style>
+          <a:lnRef idx="2">
+            <a:schemeClr val="accent1">
+              <a:shade val="15000"/>
+            </a:schemeClr>
+          </a:lnRef>
+          <a:fillRef idx="1">
+            <a:schemeClr val="accent1"/>
+          </a:fillRef>
+          <a:effectRef idx="0">
+            <a:schemeClr val="accent1"/>
+          </a:effectRef>
+          <a:fontRef idx="minor">
+            <a:schemeClr val="lt1"/>
+          </a:fontRef>
+        </p:style>
+        <p:txBody>
+          <a:bodyPr rtlCol="0" anchor="ctr"/>
+          <a:lstStyle/>
+          <a:p>
+            <a:pPr algn="ctr"/>
+            <a:endParaRPr lang="en-US"/>
+          </a:p>
+        </p:txBody>
+      </p:sp>
+      <p:sp>
+        <p:nvSpPr>
+          <p:cNvPr id="31" name="Rectangle 30">
+            <a:extLst>
+              <a:ext uri="{FF2B5EF4-FFF2-40B4-BE49-F238E27FC236}">
+                <a16:creationId xmlns:a16="http://schemas.microsoft.com/office/drawing/2014/main" id="{5BBA1E83-AE41-EB9F-70F4-68B4FD7ED095}"/>
+              </a:ext>
+            </a:extLst>
+          </p:cNvPr>
+          <p:cNvSpPr/>
+          <p:nvPr/>
+        </p:nvSpPr>
+        <p:spPr>
+          <a:xfrm>
+            <a:off x="6191486" y="2789463"/>
+            <a:ext cx="796053" cy="83277"/>
+          </a:xfrm>
+          <a:prstGeom prst="rect">
+            <a:avLst/>
+          </a:prstGeom>
+          <a:solidFill>
+            <a:srgbClr val="ACD433">
+              <a:alpha val="50196"/>
+            </a:srgbClr>
+          </a:solidFill>
+        </p:spPr>
+        <p:style>
+          <a:lnRef idx="2">
+            <a:schemeClr val="accent1">
+              <a:shade val="15000"/>
+            </a:schemeClr>
+          </a:lnRef>
+          <a:fillRef idx="1">
+            <a:schemeClr val="accent1"/>
+          </a:fillRef>
+          <a:effectRef idx="0">
+            <a:schemeClr val="accent1"/>
+          </a:effectRef>
+          <a:fontRef idx="minor">
+            <a:schemeClr val="lt1"/>
+          </a:fontRef>
+        </p:style>
+        <p:txBody>
+          <a:bodyPr rtlCol="0" anchor="ctr"/>
+          <a:lstStyle/>
+          <a:p>
+            <a:pPr algn="ctr"/>
+            <a:endParaRPr lang="en-US"/>
+          </a:p>
+        </p:txBody>
+      </p:sp>
+      <p:sp>
+        <p:nvSpPr>
+          <p:cNvPr id="32" name="Rectangle 31">
+            <a:extLst>
+              <a:ext uri="{FF2B5EF4-FFF2-40B4-BE49-F238E27FC236}">
+                <a16:creationId xmlns:a16="http://schemas.microsoft.com/office/drawing/2014/main" id="{4CF34D68-FC06-2891-B90E-9F1A0D98EA9D}"/>
+              </a:ext>
+            </a:extLst>
+          </p:cNvPr>
+          <p:cNvSpPr/>
+          <p:nvPr/>
+        </p:nvSpPr>
+        <p:spPr>
+          <a:xfrm>
+            <a:off x="6946770" y="2858780"/>
+            <a:ext cx="81536" cy="652755"/>
+          </a:xfrm>
+          <a:prstGeom prst="rect">
+            <a:avLst/>
+          </a:prstGeom>
+          <a:solidFill>
+            <a:srgbClr val="ACD433">
+              <a:alpha val="50196"/>
+            </a:srgbClr>
+          </a:solidFill>
+        </p:spPr>
+        <p:style>
+          <a:lnRef idx="2">
+            <a:schemeClr val="accent1">
+              <a:shade val="15000"/>
+            </a:schemeClr>
+          </a:lnRef>
+          <a:fillRef idx="1">
+            <a:schemeClr val="accent1"/>
+          </a:fillRef>
+          <a:effectRef idx="0">
+            <a:schemeClr val="accent1"/>
+          </a:effectRef>
+          <a:fontRef idx="minor">
+            <a:schemeClr val="lt1"/>
+          </a:fontRef>
+        </p:style>
+        <p:txBody>
+          <a:bodyPr rtlCol="0" anchor="ctr"/>
+          <a:lstStyle/>
+          <a:p>
+            <a:pPr algn="ctr"/>
+            <a:endParaRPr lang="en-US"/>
+          </a:p>
+        </p:txBody>
+      </p:sp>
+      <p:sp>
+        <p:nvSpPr>
+          <p:cNvPr id="33" name="Rectangle 32">
+            <a:extLst>
+              <a:ext uri="{FF2B5EF4-FFF2-40B4-BE49-F238E27FC236}">
+                <a16:creationId xmlns:a16="http://schemas.microsoft.com/office/drawing/2014/main" id="{3C158F12-1CF0-8976-7711-37C4074955D7}"/>
+              </a:ext>
+            </a:extLst>
+          </p:cNvPr>
+          <p:cNvSpPr/>
+          <p:nvPr/>
+        </p:nvSpPr>
+        <p:spPr>
+          <a:xfrm>
+            <a:off x="7069277" y="2752609"/>
+            <a:ext cx="81536" cy="758926"/>
+          </a:xfrm>
+          <a:prstGeom prst="rect">
+            <a:avLst/>
+          </a:prstGeom>
+          <a:solidFill>
+            <a:srgbClr val="ACD433">
+              <a:alpha val="50196"/>
+            </a:srgbClr>
+          </a:solidFill>
+        </p:spPr>
+        <p:style>
+          <a:lnRef idx="2">
+            <a:schemeClr val="accent1">
+              <a:shade val="15000"/>
+            </a:schemeClr>
+          </a:lnRef>
+          <a:fillRef idx="1">
+            <a:schemeClr val="accent1"/>
+          </a:fillRef>
+          <a:effectRef idx="0">
+            <a:schemeClr val="accent1"/>
+          </a:effectRef>
+          <a:fontRef idx="minor">
+            <a:schemeClr val="lt1"/>
+          </a:fontRef>
+        </p:style>
+        <p:txBody>
+          <a:bodyPr rtlCol="0" anchor="ctr"/>
+          <a:lstStyle/>
+          <a:p>
+            <a:pPr algn="ctr"/>
+            <a:endParaRPr lang="en-US"/>
+          </a:p>
+        </p:txBody>
+      </p:sp>
+    </p:spTree>
+    <p:extLst>
+      <p:ext uri="{BB962C8B-B14F-4D97-AF65-F5344CB8AC3E}">
+        <p14:creationId xmlns:p14="http://schemas.microsoft.com/office/powerpoint/2010/main" val="1663390482"/>
+      </p:ext>
+    </p:extLst>
+  </p:cSld>
+  <p:clrMapOvr>
+    <a:masterClrMapping/>
+  </p:clrMapOvr>
+</p:sld>
+</file>
+
+<file path=ppt/slides/slide35.xml><?xml version="1.0" encoding="utf-8"?>
 <p:sld xmlns:a="http://schemas.openxmlformats.org/drawingml/2006/main" xmlns:r="http://schemas.openxmlformats.org/officeDocument/2006/relationships" xmlns:p="http://schemas.openxmlformats.org/presentationml/2006/main">
   <p:cSld>
     <p:bg>

--- a/Master_EAS_Meta-Model.pptx
+++ b/Master_EAS_Meta-Model.pptx
@@ -5,10 +5,10 @@
     <p:sldMasterId id="2147483648" r:id="rId4"/>
   </p:sldMasterIdLst>
   <p:notesMasterIdLst>
-    <p:notesMasterId r:id="rId40"/>
+    <p:notesMasterId r:id="rId42"/>
   </p:notesMasterIdLst>
   <p:handoutMasterIdLst>
-    <p:handoutMasterId r:id="rId41"/>
+    <p:handoutMasterId r:id="rId43"/>
   </p:handoutMasterIdLst>
   <p:sldIdLst>
     <p:sldId id="256" r:id="rId5"/>
@@ -45,7 +45,9 @@
     <p:sldId id="301" r:id="rId36"/>
     <p:sldId id="302" r:id="rId37"/>
     <p:sldId id="303" r:id="rId38"/>
-    <p:sldId id="267" r:id="rId39"/>
+    <p:sldId id="304" r:id="rId39"/>
+    <p:sldId id="305" r:id="rId40"/>
+    <p:sldId id="267" r:id="rId41"/>
   </p:sldIdLst>
   <p:sldSz cx="12192000" cy="6858000"/>
   <p:notesSz cx="6858000" cy="9144000"/>
@@ -853,7 +855,7 @@
           <a:p>
             <a:fld id="{EE000EEB-8338-48D7-8EE8-EE0082EF7602}" type="slidenum">
               <a:rPr lang="en-US" smtClean="0"/>
-              <a:t>35</a:t>
+              <a:t>37</a:t>
             </a:fld>
             <a:endParaRPr lang="en-US" dirty="0"/>
           </a:p>
@@ -22196,7 +22198,7 @@
         <p:spPr>
           <a:xfrm>
             <a:off x="596436" y="2188396"/>
-            <a:ext cx="2054832" cy="1400530"/>
+            <a:ext cx="2054832" cy="2735942"/>
           </a:xfrm>
           <a:prstGeom prst="roundRect">
             <a:avLst>
@@ -24033,6 +24035,57 @@
             <a:srgbClr val="ACD433">
               <a:alpha val="50196"/>
             </a:srgbClr>
+          </a:solidFill>
+        </p:spPr>
+        <p:style>
+          <a:lnRef idx="2">
+            <a:schemeClr val="accent1">
+              <a:shade val="15000"/>
+            </a:schemeClr>
+          </a:lnRef>
+          <a:fillRef idx="1">
+            <a:schemeClr val="accent1"/>
+          </a:fillRef>
+          <a:effectRef idx="0">
+            <a:schemeClr val="accent1"/>
+          </a:effectRef>
+          <a:fontRef idx="minor">
+            <a:schemeClr val="lt1"/>
+          </a:fontRef>
+        </p:style>
+        <p:txBody>
+          <a:bodyPr rtlCol="0" anchor="ctr"/>
+          <a:lstStyle/>
+          <a:p>
+            <a:pPr algn="ctr"/>
+            <a:endParaRPr lang="en-US"/>
+          </a:p>
+        </p:txBody>
+      </p:sp>
+      <p:sp>
+        <p:nvSpPr>
+          <p:cNvPr id="34" name="Rectangle 33">
+            <a:extLst>
+              <a:ext uri="{FF2B5EF4-FFF2-40B4-BE49-F238E27FC236}">
+                <a16:creationId xmlns:a16="http://schemas.microsoft.com/office/drawing/2014/main" id="{2E7ED695-DEB1-3B02-0B82-D4971DE31931}"/>
+              </a:ext>
+            </a:extLst>
+          </p:cNvPr>
+          <p:cNvSpPr/>
+          <p:nvPr/>
+        </p:nvSpPr>
+        <p:spPr>
+          <a:xfrm rot="9307021">
+            <a:off x="6527495" y="1029611"/>
+            <a:ext cx="45719" cy="2689598"/>
+          </a:xfrm>
+          <a:prstGeom prst="rect">
+            <a:avLst/>
+          </a:prstGeom>
+          <a:solidFill>
+            <a:schemeClr val="accent3">
+              <a:alpha val="50196"/>
+            </a:schemeClr>
           </a:solidFill>
         </p:spPr>
         <p:style>
@@ -24312,7 +24365,7 @@
         <p:spPr>
           <a:xfrm>
             <a:off x="596436" y="2188396"/>
-            <a:ext cx="2054832" cy="1400530"/>
+            <a:ext cx="2054832" cy="2671280"/>
           </a:xfrm>
           <a:prstGeom prst="roundRect">
             <a:avLst>
@@ -24473,6 +24526,60 @@
               </a:srgbClr>
             </a:outerShdw>
           </a:effectLst>
+        </p:spPr>
+      </p:pic>
+      <p:pic>
+        <p:nvPicPr>
+          <p:cNvPr id="8" name="Picture 7">
+            <a:extLst>
+              <a:ext uri="{FF2B5EF4-FFF2-40B4-BE49-F238E27FC236}">
+                <a16:creationId xmlns:a16="http://schemas.microsoft.com/office/drawing/2014/main" id="{F18DFCE6-6340-49CA-92B7-4BA2E517DCD0}"/>
+              </a:ext>
+            </a:extLst>
+          </p:cNvPr>
+          <p:cNvPicPr>
+            <a:picLocks noChangeAspect="1"/>
+          </p:cNvPicPr>
+          <p:nvPr/>
+        </p:nvPicPr>
+        <p:blipFill>
+          <a:blip r:embed="rId6"/>
+          <a:stretch>
+            <a:fillRect/>
+          </a:stretch>
+        </p:blipFill>
+        <p:spPr>
+          <a:xfrm>
+            <a:off x="6500369" y="2517461"/>
+            <a:ext cx="5184602" cy="3056817"/>
+          </a:xfrm>
+          <a:prstGeom prst="roundRect">
+            <a:avLst>
+              <a:gd name="adj" fmla="val 16667"/>
+            </a:avLst>
+          </a:prstGeom>
+          <a:ln>
+            <a:noFill/>
+          </a:ln>
+          <a:effectLst>
+            <a:outerShdw blurRad="152400" dist="12000" dir="900000" sy="98000" kx="110000" ky="200000" algn="tl" rotWithShape="0">
+              <a:srgbClr val="000000">
+                <a:alpha val="30000"/>
+              </a:srgbClr>
+            </a:outerShdw>
+          </a:effectLst>
+          <a:scene3d>
+            <a:camera prst="perspectiveRelaxed">
+              <a:rot lat="19800000" lon="1200000" rev="20820000"/>
+            </a:camera>
+            <a:lightRig rig="threePt" dir="t"/>
+          </a:scene3d>
+          <a:sp3d contourW="6350" prstMaterial="matte">
+            <a:bevelT w="101600" h="101600"/>
+            <a:contourClr>
+              <a:srgbClr val="969696"/>
+            </a:contourClr>
+          </a:sp3d>
         </p:spPr>
       </p:pic>
     </p:spTree>
@@ -24496,7 +24603,7 @@
         <p:cNvPr id="1" name="">
           <a:extLst>
             <a:ext uri="{FF2B5EF4-FFF2-40B4-BE49-F238E27FC236}">
-              <a16:creationId xmlns:a16="http://schemas.microsoft.com/office/drawing/2014/main" id="{4371BE77-8BEA-47C9-03FD-67299CCCC59F}"/>
+              <a16:creationId xmlns:a16="http://schemas.microsoft.com/office/drawing/2014/main" id="{5386F7CA-C8CC-D9D5-CE74-5FEB89814FA8}"/>
             </a:ext>
           </a:extLst>
         </p:cNvPr>
@@ -24516,7 +24623,7 @@
           <p:cNvPr id="3" name="Picture 2">
             <a:extLst>
               <a:ext uri="{FF2B5EF4-FFF2-40B4-BE49-F238E27FC236}">
-                <a16:creationId xmlns:a16="http://schemas.microsoft.com/office/drawing/2014/main" id="{0E606F4A-37FB-4E0E-49EF-3D980CF2335B}"/>
+                <a16:creationId xmlns:a16="http://schemas.microsoft.com/office/drawing/2014/main" id="{740593F9-6B8E-9D52-580D-1A5900396184}"/>
               </a:ext>
             </a:extLst>
           </p:cNvPr>
@@ -24543,10 +24650,10 @@
       </p:pic>
       <p:sp>
         <p:nvSpPr>
-          <p:cNvPr id="4" name="Rectangle 3">
-            <a:extLst>
-              <a:ext uri="{FF2B5EF4-FFF2-40B4-BE49-F238E27FC236}">
-                <a16:creationId xmlns:a16="http://schemas.microsoft.com/office/drawing/2014/main" id="{F1E6343D-1646-4BB1-68CE-F90A7EA420A3}"/>
+          <p:cNvPr id="5" name="Rectangle 4">
+            <a:extLst>
+              <a:ext uri="{FF2B5EF4-FFF2-40B4-BE49-F238E27FC236}">
+                <a16:creationId xmlns:a16="http://schemas.microsoft.com/office/drawing/2014/main" id="{E6857D92-187B-31EC-E6ED-0994B08F91DB}"/>
               </a:ext>
             </a:extLst>
           </p:cNvPr>
@@ -24555,8 +24662,8 @@
         </p:nvSpPr>
         <p:spPr>
           <a:xfrm>
-            <a:off x="3700530" y="223234"/>
-            <a:ext cx="957329" cy="64394"/>
+            <a:off x="3619568" y="0"/>
+            <a:ext cx="233295" cy="181579"/>
           </a:xfrm>
           <a:prstGeom prst="rect">
             <a:avLst/>
@@ -24594,10 +24701,10 @@
       </p:sp>
       <p:sp>
         <p:nvSpPr>
-          <p:cNvPr id="5" name="Rectangle 4">
-            <a:extLst>
-              <a:ext uri="{FF2B5EF4-FFF2-40B4-BE49-F238E27FC236}">
-                <a16:creationId xmlns:a16="http://schemas.microsoft.com/office/drawing/2014/main" id="{665BA46F-85E2-D94F-66CE-DFD7C3887D81}"/>
+          <p:cNvPr id="6" name="Rectangle 5">
+            <a:extLst>
+              <a:ext uri="{FF2B5EF4-FFF2-40B4-BE49-F238E27FC236}">
+                <a16:creationId xmlns:a16="http://schemas.microsoft.com/office/drawing/2014/main" id="{925DE7C5-F2B7-0456-2DF7-1513D678ED9A}"/>
               </a:ext>
             </a:extLst>
           </p:cNvPr>
@@ -24606,16 +24713,18 @@
         </p:nvSpPr>
         <p:spPr>
           <a:xfrm>
-            <a:off x="3619568" y="0"/>
-            <a:ext cx="233295" cy="181579"/>
+            <a:off x="6757680" y="424700"/>
+            <a:ext cx="1028938" cy="436792"/>
           </a:xfrm>
           <a:prstGeom prst="rect">
             <a:avLst/>
           </a:prstGeom>
           <a:solidFill>
-            <a:srgbClr val="ACD433">
+            <a:schemeClr val="bg2">
+              <a:lumMod val="20000"/>
+              <a:lumOff val="80000"/>
               <a:alpha val="50196"/>
-            </a:srgbClr>
+            </a:schemeClr>
           </a:solidFill>
         </p:spPr>
         <p:style>
@@ -24645,10 +24754,10 @@
       </p:sp>
       <p:sp>
         <p:nvSpPr>
-          <p:cNvPr id="6" name="Rectangle 5">
-            <a:extLst>
-              <a:ext uri="{FF2B5EF4-FFF2-40B4-BE49-F238E27FC236}">
-                <a16:creationId xmlns:a16="http://schemas.microsoft.com/office/drawing/2014/main" id="{46F34160-8C63-45A7-8A00-337E891EAD77}"/>
+          <p:cNvPr id="8" name="Rectangle 7">
+            <a:extLst>
+              <a:ext uri="{FF2B5EF4-FFF2-40B4-BE49-F238E27FC236}">
+                <a16:creationId xmlns:a16="http://schemas.microsoft.com/office/drawing/2014/main" id="{6228EBDB-C75E-8E69-037B-2F6BEB932E98}"/>
               </a:ext>
             </a:extLst>
           </p:cNvPr>
@@ -24657,8 +24766,8 @@
         </p:nvSpPr>
         <p:spPr>
           <a:xfrm>
-            <a:off x="6757680" y="424700"/>
-            <a:ext cx="1028938" cy="436792"/>
+            <a:off x="5065260" y="733425"/>
+            <a:ext cx="318398" cy="225099"/>
           </a:xfrm>
           <a:prstGeom prst="rect">
             <a:avLst/>
@@ -24696,10 +24805,10 @@
       </p:sp>
       <p:sp>
         <p:nvSpPr>
-          <p:cNvPr id="7" name="Rectangle 6">
-            <a:extLst>
-              <a:ext uri="{FF2B5EF4-FFF2-40B4-BE49-F238E27FC236}">
-                <a16:creationId xmlns:a16="http://schemas.microsoft.com/office/drawing/2014/main" id="{96007D1B-3288-CBD6-AA10-E44679496F17}"/>
+          <p:cNvPr id="15" name="Rectangle 14">
+            <a:extLst>
+              <a:ext uri="{FF2B5EF4-FFF2-40B4-BE49-F238E27FC236}">
+                <a16:creationId xmlns:a16="http://schemas.microsoft.com/office/drawing/2014/main" id="{BD574E9E-F5B4-E05E-1009-376803BC2664}"/>
               </a:ext>
             </a:extLst>
           </p:cNvPr>
@@ -24708,8 +24817,8 @@
         </p:nvSpPr>
         <p:spPr>
           <a:xfrm>
-            <a:off x="2913124" y="996949"/>
-            <a:ext cx="115825" cy="298451"/>
+            <a:off x="3788357" y="1447841"/>
+            <a:ext cx="233295" cy="181579"/>
           </a:xfrm>
           <a:prstGeom prst="rect">
             <a:avLst/>
@@ -24747,10 +24856,10 @@
       </p:sp>
       <p:sp>
         <p:nvSpPr>
-          <p:cNvPr id="2" name="Rectangle 1">
-            <a:extLst>
-              <a:ext uri="{FF2B5EF4-FFF2-40B4-BE49-F238E27FC236}">
-                <a16:creationId xmlns:a16="http://schemas.microsoft.com/office/drawing/2014/main" id="{329C761D-F7FC-8775-72BE-92828C3825BC}"/>
+          <p:cNvPr id="23" name="Rectangle 22">
+            <a:extLst>
+              <a:ext uri="{FF2B5EF4-FFF2-40B4-BE49-F238E27FC236}">
+                <a16:creationId xmlns:a16="http://schemas.microsoft.com/office/drawing/2014/main" id="{7AF1ACD2-221F-0289-4BC2-725DEEB42794}"/>
               </a:ext>
             </a:extLst>
           </p:cNvPr>
@@ -24758,17 +24867,19 @@
           <p:nvPr/>
         </p:nvSpPr>
         <p:spPr>
-          <a:xfrm rot="1551019">
-            <a:off x="3573376" y="623121"/>
-            <a:ext cx="1093916" cy="102021"/>
+          <a:xfrm>
+            <a:off x="6285303" y="1568449"/>
+            <a:ext cx="1278993" cy="252208"/>
           </a:xfrm>
           <a:prstGeom prst="rect">
             <a:avLst/>
           </a:prstGeom>
           <a:solidFill>
-            <a:srgbClr val="ACD433">
+            <a:schemeClr val="bg2">
+              <a:lumMod val="20000"/>
+              <a:lumOff val="80000"/>
               <a:alpha val="50196"/>
-            </a:srgbClr>
+            </a:schemeClr>
           </a:solidFill>
         </p:spPr>
         <p:style>
@@ -24798,10 +24909,10 @@
       </p:sp>
       <p:sp>
         <p:nvSpPr>
-          <p:cNvPr id="8" name="Rectangle 7">
-            <a:extLst>
-              <a:ext uri="{FF2B5EF4-FFF2-40B4-BE49-F238E27FC236}">
-                <a16:creationId xmlns:a16="http://schemas.microsoft.com/office/drawing/2014/main" id="{A57C6E0B-6CD7-D3BB-6577-69F6948A5801}"/>
+          <p:cNvPr id="20" name="Rectangle 19">
+            <a:extLst>
+              <a:ext uri="{FF2B5EF4-FFF2-40B4-BE49-F238E27FC236}">
+                <a16:creationId xmlns:a16="http://schemas.microsoft.com/office/drawing/2014/main" id="{FCEE4AA9-7366-1282-EA02-E3D17C0C52A1}"/>
               </a:ext>
             </a:extLst>
           </p:cNvPr>
@@ -24810,8 +24921,8 @@
         </p:nvSpPr>
         <p:spPr>
           <a:xfrm>
-            <a:off x="5065260" y="733425"/>
-            <a:ext cx="318398" cy="225099"/>
+            <a:off x="6191487" y="2160350"/>
+            <a:ext cx="312055" cy="181579"/>
           </a:xfrm>
           <a:prstGeom prst="rect">
             <a:avLst/>
@@ -24849,10 +24960,10 @@
       </p:sp>
       <p:sp>
         <p:nvSpPr>
-          <p:cNvPr id="9" name="Rectangle 8">
-            <a:extLst>
-              <a:ext uri="{FF2B5EF4-FFF2-40B4-BE49-F238E27FC236}">
-                <a16:creationId xmlns:a16="http://schemas.microsoft.com/office/drawing/2014/main" id="{8FD4DA41-9A4E-B7F2-E52F-D2682571BB2D}"/>
+          <p:cNvPr id="25" name="Rectangle 24">
+            <a:extLst>
+              <a:ext uri="{FF2B5EF4-FFF2-40B4-BE49-F238E27FC236}">
+                <a16:creationId xmlns:a16="http://schemas.microsoft.com/office/drawing/2014/main" id="{6247EAA7-A9EA-84FB-AF6E-8AFCC47E644D}"/>
               </a:ext>
             </a:extLst>
           </p:cNvPr>
@@ -24860,17 +24971,17 @@
           <p:nvPr/>
         </p:nvSpPr>
         <p:spPr>
-          <a:xfrm>
-            <a:off x="4886705" y="434974"/>
-            <a:ext cx="81536" cy="426086"/>
+          <a:xfrm rot="8938082">
+            <a:off x="5502940" y="1047172"/>
+            <a:ext cx="76042" cy="1357830"/>
           </a:xfrm>
           <a:prstGeom prst="rect">
             <a:avLst/>
           </a:prstGeom>
           <a:solidFill>
-            <a:srgbClr val="ACD433">
+            <a:schemeClr val="accent3">
               <a:alpha val="50196"/>
-            </a:srgbClr>
+            </a:schemeClr>
           </a:solidFill>
         </p:spPr>
         <p:style>
@@ -24900,10 +25011,10 @@
       </p:sp>
       <p:sp>
         <p:nvSpPr>
-          <p:cNvPr id="10" name="Rectangle 9">
-            <a:extLst>
-              <a:ext uri="{FF2B5EF4-FFF2-40B4-BE49-F238E27FC236}">
-                <a16:creationId xmlns:a16="http://schemas.microsoft.com/office/drawing/2014/main" id="{1E567DB5-0F62-37F8-220C-F8F8B4568497}"/>
+          <p:cNvPr id="26" name="Rectangle 25">
+            <a:extLst>
+              <a:ext uri="{FF2B5EF4-FFF2-40B4-BE49-F238E27FC236}">
+                <a16:creationId xmlns:a16="http://schemas.microsoft.com/office/drawing/2014/main" id="{392D2A54-F269-7573-CDEE-B94C0F9B5494}"/>
               </a:ext>
             </a:extLst>
           </p:cNvPr>
@@ -24911,17 +25022,17 @@
           <p:nvPr/>
         </p:nvSpPr>
         <p:spPr>
-          <a:xfrm>
-            <a:off x="5006340" y="478664"/>
-            <a:ext cx="622522" cy="100455"/>
+          <a:xfrm rot="10800000">
+            <a:off x="5873291" y="1176175"/>
+            <a:ext cx="90481" cy="1117544"/>
           </a:xfrm>
           <a:prstGeom prst="rect">
             <a:avLst/>
           </a:prstGeom>
           <a:solidFill>
-            <a:srgbClr val="ACD433">
+            <a:schemeClr val="accent3">
               <a:alpha val="50196"/>
-            </a:srgbClr>
+            </a:schemeClr>
           </a:solidFill>
         </p:spPr>
         <p:style>
@@ -24951,10 +25062,10 @@
       </p:sp>
       <p:sp>
         <p:nvSpPr>
-          <p:cNvPr id="11" name="Rectangle 10">
-            <a:extLst>
-              <a:ext uri="{FF2B5EF4-FFF2-40B4-BE49-F238E27FC236}">
-                <a16:creationId xmlns:a16="http://schemas.microsoft.com/office/drawing/2014/main" id="{849B480B-22B3-50A0-C22C-052E7272CA05}"/>
+          <p:cNvPr id="27" name="Rectangle 26">
+            <a:extLst>
+              <a:ext uri="{FF2B5EF4-FFF2-40B4-BE49-F238E27FC236}">
+                <a16:creationId xmlns:a16="http://schemas.microsoft.com/office/drawing/2014/main" id="{805D4C1B-596F-9174-ACA4-467F2736FE4D}"/>
               </a:ext>
             </a:extLst>
           </p:cNvPr>
@@ -24962,17 +25073,17 @@
           <p:nvPr/>
         </p:nvSpPr>
         <p:spPr>
-          <a:xfrm>
-            <a:off x="5006340" y="587374"/>
-            <a:ext cx="114301" cy="273686"/>
+          <a:xfrm rot="12691686" flipH="1">
+            <a:off x="5408785" y="1079456"/>
+            <a:ext cx="55472" cy="1281028"/>
           </a:xfrm>
           <a:prstGeom prst="rect">
             <a:avLst/>
           </a:prstGeom>
           <a:solidFill>
-            <a:srgbClr val="ACD433">
+            <a:schemeClr val="accent3">
               <a:alpha val="50196"/>
-            </a:srgbClr>
+            </a:schemeClr>
           </a:solidFill>
         </p:spPr>
         <p:style>
@@ -25002,10 +25113,10 @@
       </p:sp>
       <p:sp>
         <p:nvSpPr>
-          <p:cNvPr id="12" name="Rectangle 11">
-            <a:extLst>
-              <a:ext uri="{FF2B5EF4-FFF2-40B4-BE49-F238E27FC236}">
-                <a16:creationId xmlns:a16="http://schemas.microsoft.com/office/drawing/2014/main" id="{FEC40226-FE18-2145-FAD2-ACC0561D7AF5}"/>
+          <p:cNvPr id="34" name="Rectangle 33">
+            <a:extLst>
+              <a:ext uri="{FF2B5EF4-FFF2-40B4-BE49-F238E27FC236}">
+                <a16:creationId xmlns:a16="http://schemas.microsoft.com/office/drawing/2014/main" id="{9B3A00AF-C6DD-F505-31CD-17E6C847C008}"/>
               </a:ext>
             </a:extLst>
           </p:cNvPr>
@@ -25013,17 +25124,17 @@
           <p:nvPr/>
         </p:nvSpPr>
         <p:spPr>
-          <a:xfrm>
-            <a:off x="3382706" y="434974"/>
-            <a:ext cx="76700" cy="1133476"/>
+          <a:xfrm rot="9307021">
+            <a:off x="6527495" y="1029611"/>
+            <a:ext cx="45719" cy="2689598"/>
           </a:xfrm>
           <a:prstGeom prst="rect">
             <a:avLst/>
           </a:prstGeom>
           <a:solidFill>
-            <a:srgbClr val="ACD433">
+            <a:schemeClr val="accent3">
               <a:alpha val="50196"/>
-            </a:srgbClr>
+            </a:schemeClr>
           </a:solidFill>
         </p:spPr>
         <p:style>
@@ -25053,10 +25164,10 @@
       </p:sp>
       <p:sp>
         <p:nvSpPr>
-          <p:cNvPr id="13" name="Rectangle 12">
-            <a:extLst>
-              <a:ext uri="{FF2B5EF4-FFF2-40B4-BE49-F238E27FC236}">
-                <a16:creationId xmlns:a16="http://schemas.microsoft.com/office/drawing/2014/main" id="{A54E351E-9E50-DB76-22C8-CD8F5F27F567}"/>
+          <p:cNvPr id="35" name="Rectangle 34">
+            <a:extLst>
+              <a:ext uri="{FF2B5EF4-FFF2-40B4-BE49-F238E27FC236}">
+                <a16:creationId xmlns:a16="http://schemas.microsoft.com/office/drawing/2014/main" id="{705B02E6-CB31-CC93-8B12-61CBCC34CC1E}"/>
               </a:ext>
             </a:extLst>
           </p:cNvPr>
@@ -25065,8 +25176,8 @@
         </p:nvSpPr>
         <p:spPr>
           <a:xfrm>
-            <a:off x="3565097" y="974398"/>
-            <a:ext cx="76700" cy="594051"/>
+            <a:off x="7187151" y="3322342"/>
+            <a:ext cx="346323" cy="252208"/>
           </a:xfrm>
           <a:prstGeom prst="rect">
             <a:avLst/>
@@ -25104,10 +25215,10 @@
       </p:sp>
       <p:sp>
         <p:nvSpPr>
-          <p:cNvPr id="14" name="Rectangle 13">
-            <a:extLst>
-              <a:ext uri="{FF2B5EF4-FFF2-40B4-BE49-F238E27FC236}">
-                <a16:creationId xmlns:a16="http://schemas.microsoft.com/office/drawing/2014/main" id="{75686508-C3EF-70A5-FC96-38130E462500}"/>
+          <p:cNvPr id="36" name="Rectangle 35">
+            <a:extLst>
+              <a:ext uri="{FF2B5EF4-FFF2-40B4-BE49-F238E27FC236}">
+                <a16:creationId xmlns:a16="http://schemas.microsoft.com/office/drawing/2014/main" id="{8F23580A-49CD-300B-246B-E7A618A76139}"/>
               </a:ext>
             </a:extLst>
           </p:cNvPr>
@@ -25116,16 +25227,18 @@
         </p:nvSpPr>
         <p:spPr>
           <a:xfrm>
-            <a:off x="3641797" y="958524"/>
-            <a:ext cx="993006" cy="102111"/>
+            <a:off x="7459492" y="2574289"/>
+            <a:ext cx="1028938" cy="262192"/>
           </a:xfrm>
           <a:prstGeom prst="rect">
             <a:avLst/>
           </a:prstGeom>
           <a:solidFill>
-            <a:srgbClr val="ACD433">
+            <a:schemeClr val="bg2">
+              <a:lumMod val="20000"/>
+              <a:lumOff val="80000"/>
               <a:alpha val="50196"/>
-            </a:srgbClr>
+            </a:schemeClr>
           </a:solidFill>
         </p:spPr>
         <p:style>
@@ -25155,10 +25268,10 @@
       </p:sp>
       <p:sp>
         <p:nvSpPr>
-          <p:cNvPr id="15" name="Rectangle 14">
-            <a:extLst>
-              <a:ext uri="{FF2B5EF4-FFF2-40B4-BE49-F238E27FC236}">
-                <a16:creationId xmlns:a16="http://schemas.microsoft.com/office/drawing/2014/main" id="{5E903C36-1C38-5F33-1C1D-307AF6BB87F4}"/>
+          <p:cNvPr id="37" name="Rectangle 36">
+            <a:extLst>
+              <a:ext uri="{FF2B5EF4-FFF2-40B4-BE49-F238E27FC236}">
+                <a16:creationId xmlns:a16="http://schemas.microsoft.com/office/drawing/2014/main" id="{2E1219D9-39D8-2570-DC2A-0312DE3CE60A}"/>
               </a:ext>
             </a:extLst>
           </p:cNvPr>
@@ -25167,16 +25280,18 @@
         </p:nvSpPr>
         <p:spPr>
           <a:xfrm>
-            <a:off x="3788357" y="1447841"/>
-            <a:ext cx="233295" cy="181579"/>
+            <a:off x="7742821" y="5340598"/>
+            <a:ext cx="1205970" cy="436792"/>
           </a:xfrm>
           <a:prstGeom prst="rect">
             <a:avLst/>
           </a:prstGeom>
           <a:solidFill>
-            <a:srgbClr val="ACD433">
+            <a:schemeClr val="bg2">
+              <a:lumMod val="20000"/>
+              <a:lumOff val="80000"/>
               <a:alpha val="50196"/>
-            </a:srgbClr>
+            </a:schemeClr>
           </a:solidFill>
         </p:spPr>
         <p:style>
@@ -25206,10 +25321,10 @@
       </p:sp>
       <p:sp>
         <p:nvSpPr>
-          <p:cNvPr id="16" name="Rectangle 15">
-            <a:extLst>
-              <a:ext uri="{FF2B5EF4-FFF2-40B4-BE49-F238E27FC236}">
-                <a16:creationId xmlns:a16="http://schemas.microsoft.com/office/drawing/2014/main" id="{BC51DBEA-E6FE-3BF4-5364-55F881E86F19}"/>
+          <p:cNvPr id="38" name="Rectangle 37">
+            <a:extLst>
+              <a:ext uri="{FF2B5EF4-FFF2-40B4-BE49-F238E27FC236}">
+                <a16:creationId xmlns:a16="http://schemas.microsoft.com/office/drawing/2014/main" id="{83752DDD-5831-73D0-5796-8C86FA84B651}"/>
               </a:ext>
             </a:extLst>
           </p:cNvPr>
@@ -25217,17 +25332,19 @@
           <p:nvPr/>
         </p:nvSpPr>
         <p:spPr>
-          <a:xfrm rot="4874518">
-            <a:off x="4478330" y="985650"/>
-            <a:ext cx="81536" cy="426086"/>
+          <a:xfrm>
+            <a:off x="6425321" y="3740812"/>
+            <a:ext cx="1205970" cy="436792"/>
           </a:xfrm>
           <a:prstGeom prst="rect">
             <a:avLst/>
           </a:prstGeom>
           <a:solidFill>
-            <a:srgbClr val="ACD433">
+            <a:schemeClr val="bg2">
+              <a:lumMod val="20000"/>
+              <a:lumOff val="80000"/>
               <a:alpha val="50196"/>
-            </a:srgbClr>
+            </a:schemeClr>
           </a:solidFill>
         </p:spPr>
         <p:style>
@@ -25257,10 +25374,10 @@
       </p:sp>
       <p:sp>
         <p:nvSpPr>
-          <p:cNvPr id="17" name="Rectangle 16">
-            <a:extLst>
-              <a:ext uri="{FF2B5EF4-FFF2-40B4-BE49-F238E27FC236}">
-                <a16:creationId xmlns:a16="http://schemas.microsoft.com/office/drawing/2014/main" id="{73B44448-06DF-1F3E-AF4D-8F207D582B60}"/>
+          <p:cNvPr id="39" name="Rectangle 38">
+            <a:extLst>
+              <a:ext uri="{FF2B5EF4-FFF2-40B4-BE49-F238E27FC236}">
+                <a16:creationId xmlns:a16="http://schemas.microsoft.com/office/drawing/2014/main" id="{4F795464-1595-2E0D-0837-21FE781A4BE2}"/>
               </a:ext>
             </a:extLst>
           </p:cNvPr>
@@ -25269,16 +25386,18 @@
         </p:nvSpPr>
         <p:spPr>
           <a:xfrm>
-            <a:off x="4904356" y="1176175"/>
-            <a:ext cx="81536" cy="426086"/>
+            <a:off x="4531163" y="5340598"/>
+            <a:ext cx="986059" cy="436792"/>
           </a:xfrm>
           <a:prstGeom prst="rect">
             <a:avLst/>
           </a:prstGeom>
           <a:solidFill>
-            <a:srgbClr val="ACD433">
+            <a:schemeClr val="bg2">
+              <a:lumMod val="20000"/>
+              <a:lumOff val="80000"/>
               <a:alpha val="50196"/>
-            </a:srgbClr>
+            </a:schemeClr>
           </a:solidFill>
         </p:spPr>
         <p:style>
@@ -25308,10 +25427,10 @@
       </p:sp>
       <p:sp>
         <p:nvSpPr>
-          <p:cNvPr id="18" name="Rectangle 17">
-            <a:extLst>
-              <a:ext uri="{FF2B5EF4-FFF2-40B4-BE49-F238E27FC236}">
-                <a16:creationId xmlns:a16="http://schemas.microsoft.com/office/drawing/2014/main" id="{F4969315-431B-89A4-9D3E-DDBE3B4FD35D}"/>
+          <p:cNvPr id="40" name="Rectangle 39">
+            <a:extLst>
+              <a:ext uri="{FF2B5EF4-FFF2-40B4-BE49-F238E27FC236}">
+                <a16:creationId xmlns:a16="http://schemas.microsoft.com/office/drawing/2014/main" id="{353F8C04-FEC4-CF44-4930-81F8A56A3C79}"/>
               </a:ext>
             </a:extLst>
           </p:cNvPr>
@@ -25320,16 +25439,18 @@
         </p:nvSpPr>
         <p:spPr>
           <a:xfrm>
-            <a:off x="5200132" y="946721"/>
-            <a:ext cx="428730" cy="100455"/>
+            <a:off x="4058782" y="3862163"/>
+            <a:ext cx="1707898" cy="330837"/>
           </a:xfrm>
           <a:prstGeom prst="rect">
             <a:avLst/>
           </a:prstGeom>
           <a:solidFill>
-            <a:srgbClr val="ACD433">
+            <a:schemeClr val="bg2">
+              <a:lumMod val="20000"/>
+              <a:lumOff val="80000"/>
               <a:alpha val="50196"/>
-            </a:srgbClr>
+            </a:schemeClr>
           </a:solidFill>
         </p:spPr>
         <p:style>
@@ -25359,10 +25480,10 @@
       </p:sp>
       <p:sp>
         <p:nvSpPr>
-          <p:cNvPr id="19" name="Rectangle 18">
-            <a:extLst>
-              <a:ext uri="{FF2B5EF4-FFF2-40B4-BE49-F238E27FC236}">
-                <a16:creationId xmlns:a16="http://schemas.microsoft.com/office/drawing/2014/main" id="{5481B9C4-6CB5-75DB-FE1C-4130B14127F5}"/>
+          <p:cNvPr id="48" name="Freeform: Shape 47">
+            <a:extLst>
+              <a:ext uri="{FF2B5EF4-FFF2-40B4-BE49-F238E27FC236}">
+                <a16:creationId xmlns:a16="http://schemas.microsoft.com/office/drawing/2014/main" id="{C3B17625-9BB8-B830-18E7-2C1957CE0128}"/>
               </a:ext>
             </a:extLst>
           </p:cNvPr>
@@ -25371,32 +25492,67 @@
         </p:nvSpPr>
         <p:spPr>
           <a:xfrm>
-            <a:off x="6191487" y="946721"/>
-            <a:ext cx="312055" cy="100455"/>
-          </a:xfrm>
-          <a:prstGeom prst="rect">
-            <a:avLst/>
-          </a:prstGeom>
-          <a:solidFill>
-            <a:srgbClr val="ACD433">
-              <a:alpha val="50196"/>
-            </a:srgbClr>
-          </a:solidFill>
+            <a:off x="6164494" y="2589088"/>
+            <a:ext cx="852755" cy="842481"/>
+          </a:xfrm>
+          <a:custGeom>
+            <a:avLst/>
+            <a:gdLst>
+              <a:gd name="csX0" fmla="*/ 10275 w 852755"/>
+              <a:gd name="csY0" fmla="*/ 0 h 842481"/>
+              <a:gd name="csX1" fmla="*/ 0 w 852755"/>
+              <a:gd name="csY1" fmla="*/ 277402 h 842481"/>
+              <a:gd name="csX2" fmla="*/ 842481 w 852755"/>
+              <a:gd name="csY2" fmla="*/ 267128 h 842481"/>
+              <a:gd name="csX3" fmla="*/ 852755 w 852755"/>
+              <a:gd name="csY3" fmla="*/ 842481 h 842481"/>
+            </a:gdLst>
+            <a:ahLst/>
+            <a:cxnLst>
+              <a:cxn ang="0">
+                <a:pos x="csX0" y="csY0"/>
+              </a:cxn>
+              <a:cxn ang="0">
+                <a:pos x="csX1" y="csY1"/>
+              </a:cxn>
+              <a:cxn ang="0">
+                <a:pos x="csX2" y="csY2"/>
+              </a:cxn>
+              <a:cxn ang="0">
+                <a:pos x="csX3" y="csY3"/>
+              </a:cxn>
+            </a:cxnLst>
+            <a:rect l="l" t="t" r="r" b="b"/>
+            <a:pathLst>
+              <a:path w="852755" h="842481">
+                <a:moveTo>
+                  <a:pt x="10275" y="0"/>
+                </a:moveTo>
+                <a:lnTo>
+                  <a:pt x="0" y="277402"/>
+                </a:lnTo>
+                <a:lnTo>
+                  <a:pt x="842481" y="267128"/>
+                </a:lnTo>
+                <a:lnTo>
+                  <a:pt x="852755" y="842481"/>
+                </a:lnTo>
+              </a:path>
+            </a:pathLst>
+          </a:custGeom>
         </p:spPr>
         <p:style>
-          <a:lnRef idx="2">
-            <a:schemeClr val="accent1">
-              <a:shade val="15000"/>
-            </a:schemeClr>
+          <a:lnRef idx="3">
+            <a:schemeClr val="accent1"/>
           </a:lnRef>
-          <a:fillRef idx="1">
+          <a:fillRef idx="0">
             <a:schemeClr val="accent1"/>
           </a:fillRef>
-          <a:effectRef idx="0">
+          <a:effectRef idx="2">
             <a:schemeClr val="accent1"/>
           </a:effectRef>
           <a:fontRef idx="minor">
-            <a:schemeClr val="lt1"/>
+            <a:schemeClr val="tx1"/>
           </a:fontRef>
         </p:style>
         <p:txBody>
@@ -25410,10 +25566,10 @@
       </p:sp>
       <p:sp>
         <p:nvSpPr>
-          <p:cNvPr id="21" name="Rectangle 20">
-            <a:extLst>
-              <a:ext uri="{FF2B5EF4-FFF2-40B4-BE49-F238E27FC236}">
-                <a16:creationId xmlns:a16="http://schemas.microsoft.com/office/drawing/2014/main" id="{DB369383-1BF2-9DA9-F0BB-517E27B6E933}"/>
+          <p:cNvPr id="49" name="Freeform: Shape 48">
+            <a:extLst>
+              <a:ext uri="{FF2B5EF4-FFF2-40B4-BE49-F238E27FC236}">
+                <a16:creationId xmlns:a16="http://schemas.microsoft.com/office/drawing/2014/main" id="{4705E87A-9F91-4912-CCFC-415431A11782}"/>
               </a:ext>
             </a:extLst>
           </p:cNvPr>
@@ -25421,33 +25577,60 @@
           <p:nvPr/>
         </p:nvSpPr>
         <p:spPr>
-          <a:xfrm rot="7689780">
-            <a:off x="5689987" y="725525"/>
-            <a:ext cx="76042" cy="1357830"/>
-          </a:xfrm>
-          <a:prstGeom prst="rect">
-            <a:avLst/>
-          </a:prstGeom>
-          <a:solidFill>
-            <a:srgbClr val="ACD433">
-              <a:alpha val="50196"/>
-            </a:srgbClr>
-          </a:solidFill>
+          <a:xfrm>
+            <a:off x="5054885" y="513708"/>
+            <a:ext cx="544531" cy="297950"/>
+          </a:xfrm>
+          <a:custGeom>
+            <a:avLst/>
+            <a:gdLst>
+              <a:gd name="csX0" fmla="*/ 544531 w 544531"/>
+              <a:gd name="csY0" fmla="*/ 0 h 297950"/>
+              <a:gd name="csX1" fmla="*/ 0 w 544531"/>
+              <a:gd name="csY1" fmla="*/ 0 h 297950"/>
+              <a:gd name="csX2" fmla="*/ 0 w 544531"/>
+              <a:gd name="csY2" fmla="*/ 297950 h 297950"/>
+            </a:gdLst>
+            <a:ahLst/>
+            <a:cxnLst>
+              <a:cxn ang="0">
+                <a:pos x="csX0" y="csY0"/>
+              </a:cxn>
+              <a:cxn ang="0">
+                <a:pos x="csX1" y="csY1"/>
+              </a:cxn>
+              <a:cxn ang="0">
+                <a:pos x="csX2" y="csY2"/>
+              </a:cxn>
+            </a:cxnLst>
+            <a:rect l="l" t="t" r="r" b="b"/>
+            <a:pathLst>
+              <a:path w="544531" h="297950">
+                <a:moveTo>
+                  <a:pt x="544531" y="0"/>
+                </a:moveTo>
+                <a:lnTo>
+                  <a:pt x="0" y="0"/>
+                </a:lnTo>
+                <a:lnTo>
+                  <a:pt x="0" y="297950"/>
+                </a:lnTo>
+              </a:path>
+            </a:pathLst>
+          </a:custGeom>
         </p:spPr>
         <p:style>
-          <a:lnRef idx="2">
-            <a:schemeClr val="accent1">
-              <a:shade val="15000"/>
-            </a:schemeClr>
+          <a:lnRef idx="3">
+            <a:schemeClr val="accent1"/>
           </a:lnRef>
-          <a:fillRef idx="1">
+          <a:fillRef idx="0">
             <a:schemeClr val="accent1"/>
           </a:fillRef>
-          <a:effectRef idx="0">
+          <a:effectRef idx="2">
             <a:schemeClr val="accent1"/>
           </a:effectRef>
           <a:fontRef idx="minor">
-            <a:schemeClr val="lt1"/>
+            <a:schemeClr val="tx1"/>
           </a:fontRef>
         </p:style>
         <p:txBody>
@@ -25459,48 +25642,113 @@
           </a:p>
         </p:txBody>
       </p:sp>
-      <p:sp>
-        <p:nvSpPr>
-          <p:cNvPr id="22" name="Rectangle 21">
-            <a:extLst>
-              <a:ext uri="{FF2B5EF4-FFF2-40B4-BE49-F238E27FC236}">
-                <a16:creationId xmlns:a16="http://schemas.microsoft.com/office/drawing/2014/main" id="{0BE6EDB8-5817-A7C2-F25B-663CCF4FB80E}"/>
-              </a:ext>
-            </a:extLst>
-          </p:cNvPr>
-          <p:cNvSpPr/>
-          <p:nvPr/>
-        </p:nvSpPr>
-        <p:spPr>
-          <a:xfrm>
-            <a:off x="6503542" y="1862159"/>
-            <a:ext cx="647271" cy="131738"/>
-          </a:xfrm>
-          <a:prstGeom prst="rect">
-            <a:avLst/>
-          </a:prstGeom>
-          <a:solidFill>
-            <a:srgbClr val="ACD433">
-              <a:alpha val="50196"/>
-            </a:srgbClr>
-          </a:solidFill>
+      <p:cxnSp>
+        <p:nvCxnSpPr>
+          <p:cNvPr id="51" name="Straight Connector 50">
+            <a:extLst>
+              <a:ext uri="{FF2B5EF4-FFF2-40B4-BE49-F238E27FC236}">
+                <a16:creationId xmlns:a16="http://schemas.microsoft.com/office/drawing/2014/main" id="{A9DDC344-79F7-263B-7B9D-2F4534780F2C}"/>
+              </a:ext>
+            </a:extLst>
+          </p:cNvPr>
+          <p:cNvCxnSpPr>
+            <a:cxnSpLocks/>
+          </p:cNvCxnSpPr>
+          <p:nvPr/>
+        </p:nvCxnSpPr>
+        <p:spPr>
+          <a:xfrm>
+            <a:off x="3411020" y="424700"/>
+            <a:ext cx="0" cy="1143749"/>
+          </a:xfrm>
+          <a:prstGeom prst="line">
+            <a:avLst/>
+          </a:prstGeom>
         </p:spPr>
         <p:style>
-          <a:lnRef idx="2">
-            <a:schemeClr val="accent1">
-              <a:shade val="15000"/>
-            </a:schemeClr>
+          <a:lnRef idx="3">
+            <a:schemeClr val="accent1"/>
           </a:lnRef>
-          <a:fillRef idx="1">
+          <a:fillRef idx="0">
             <a:schemeClr val="accent1"/>
           </a:fillRef>
-          <a:effectRef idx="0">
+          <a:effectRef idx="2">
             <a:schemeClr val="accent1"/>
           </a:effectRef>
           <a:fontRef idx="minor">
-            <a:schemeClr val="lt1"/>
+            <a:schemeClr val="tx1"/>
           </a:fontRef>
         </p:style>
+      </p:cxnSp>
+      <p:sp>
+        <p:nvSpPr>
+          <p:cNvPr id="53" name="Freeform: Shape 52">
+            <a:extLst>
+              <a:ext uri="{FF2B5EF4-FFF2-40B4-BE49-F238E27FC236}">
+                <a16:creationId xmlns:a16="http://schemas.microsoft.com/office/drawing/2014/main" id="{35D7CECE-66E1-6B94-1FDA-926C3D23609A}"/>
+              </a:ext>
+            </a:extLst>
+          </p:cNvPr>
+          <p:cNvSpPr/>
+          <p:nvPr/>
+        </p:nvSpPr>
+        <p:spPr>
+          <a:xfrm>
+            <a:off x="3565133" y="996593"/>
+            <a:ext cx="1047964" cy="544531"/>
+          </a:xfrm>
+          <a:custGeom>
+            <a:avLst/>
+            <a:gdLst>
+              <a:gd name="csX0" fmla="*/ 1047964 w 1047964"/>
+              <a:gd name="csY0" fmla="*/ 0 h 544531"/>
+              <a:gd name="csX1" fmla="*/ 0 w 1047964"/>
+              <a:gd name="csY1" fmla="*/ 10274 h 544531"/>
+              <a:gd name="csX2" fmla="*/ 10274 w 1047964"/>
+              <a:gd name="csY2" fmla="*/ 544531 h 544531"/>
+            </a:gdLst>
+            <a:ahLst/>
+            <a:cxnLst>
+              <a:cxn ang="0">
+                <a:pos x="csX0" y="csY0"/>
+              </a:cxn>
+              <a:cxn ang="0">
+                <a:pos x="csX1" y="csY1"/>
+              </a:cxn>
+              <a:cxn ang="0">
+                <a:pos x="csX2" y="csY2"/>
+              </a:cxn>
+            </a:cxnLst>
+            <a:rect l="l" t="t" r="r" b="b"/>
+            <a:pathLst>
+              <a:path w="1047964" h="544531">
+                <a:moveTo>
+                  <a:pt x="1047964" y="0"/>
+                </a:moveTo>
+                <a:lnTo>
+                  <a:pt x="0" y="10274"/>
+                </a:lnTo>
+                <a:lnTo>
+                  <a:pt x="10274" y="544531"/>
+                </a:lnTo>
+              </a:path>
+            </a:pathLst>
+          </a:custGeom>
+        </p:spPr>
+        <p:style>
+          <a:lnRef idx="3">
+            <a:schemeClr val="accent1"/>
+          </a:lnRef>
+          <a:fillRef idx="0">
+            <a:schemeClr val="accent1"/>
+          </a:fillRef>
+          <a:effectRef idx="2">
+            <a:schemeClr val="accent1"/>
+          </a:effectRef>
+          <a:fontRef idx="minor">
+            <a:schemeClr val="tx1"/>
+          </a:fontRef>
+        </p:style>
         <p:txBody>
           <a:bodyPr rtlCol="0" anchor="ctr"/>
           <a:lstStyle/>
@@ -25512,10 +25760,10 @@
       </p:sp>
       <p:sp>
         <p:nvSpPr>
-          <p:cNvPr id="23" name="Rectangle 22">
-            <a:extLst>
-              <a:ext uri="{FF2B5EF4-FFF2-40B4-BE49-F238E27FC236}">
-                <a16:creationId xmlns:a16="http://schemas.microsoft.com/office/drawing/2014/main" id="{D5B968C1-7645-AA12-7E6A-930B7335A5AA}"/>
+          <p:cNvPr id="54" name="Freeform: Shape 53">
+            <a:extLst>
+              <a:ext uri="{FF2B5EF4-FFF2-40B4-BE49-F238E27FC236}">
+                <a16:creationId xmlns:a16="http://schemas.microsoft.com/office/drawing/2014/main" id="{2A394329-D3FD-329C-51C7-132800837F47}"/>
               </a:ext>
             </a:extLst>
           </p:cNvPr>
@@ -25524,32 +25772,51 @@
         </p:nvSpPr>
         <p:spPr>
           <a:xfrm>
-            <a:off x="6285303" y="1568449"/>
-            <a:ext cx="1278993" cy="252208"/>
-          </a:xfrm>
-          <a:prstGeom prst="rect">
-            <a:avLst/>
-          </a:prstGeom>
-          <a:solidFill>
-            <a:srgbClr val="ACD433">
-              <a:alpha val="50196"/>
-            </a:srgbClr>
-          </a:solidFill>
+            <a:off x="3616503" y="431515"/>
+            <a:ext cx="1006868" cy="482885"/>
+          </a:xfrm>
+          <a:custGeom>
+            <a:avLst/>
+            <a:gdLst>
+              <a:gd name="csX0" fmla="*/ 1006868 w 1006868"/>
+              <a:gd name="csY0" fmla="*/ 482885 h 482885"/>
+              <a:gd name="csX1" fmla="*/ 0 w 1006868"/>
+              <a:gd name="csY1" fmla="*/ 0 h 482885"/>
+            </a:gdLst>
+            <a:ahLst/>
+            <a:cxnLst>
+              <a:cxn ang="0">
+                <a:pos x="csX0" y="csY0"/>
+              </a:cxn>
+              <a:cxn ang="0">
+                <a:pos x="csX1" y="csY1"/>
+              </a:cxn>
+            </a:cxnLst>
+            <a:rect l="l" t="t" r="r" b="b"/>
+            <a:pathLst>
+              <a:path w="1006868" h="482885">
+                <a:moveTo>
+                  <a:pt x="1006868" y="482885"/>
+                </a:moveTo>
+                <a:lnTo>
+                  <a:pt x="0" y="0"/>
+                </a:lnTo>
+              </a:path>
+            </a:pathLst>
+          </a:custGeom>
         </p:spPr>
         <p:style>
-          <a:lnRef idx="2">
-            <a:schemeClr val="accent1">
-              <a:shade val="15000"/>
-            </a:schemeClr>
+          <a:lnRef idx="3">
+            <a:schemeClr val="accent1"/>
           </a:lnRef>
-          <a:fillRef idx="1">
+          <a:fillRef idx="0">
             <a:schemeClr val="accent1"/>
           </a:fillRef>
-          <a:effectRef idx="0">
+          <a:effectRef idx="2">
             <a:schemeClr val="accent1"/>
           </a:effectRef>
           <a:fontRef idx="minor">
-            <a:schemeClr val="lt1"/>
+            <a:schemeClr val="tx1"/>
           </a:fontRef>
         </p:style>
         <p:txBody>
@@ -25563,10 +25830,10 @@
       </p:sp>
       <p:sp>
         <p:nvSpPr>
-          <p:cNvPr id="20" name="Rectangle 19">
-            <a:extLst>
-              <a:ext uri="{FF2B5EF4-FFF2-40B4-BE49-F238E27FC236}">
-                <a16:creationId xmlns:a16="http://schemas.microsoft.com/office/drawing/2014/main" id="{0A4C863E-C315-8296-95C3-C5C10D01C1B7}"/>
+          <p:cNvPr id="55" name="Freeform: Shape 54">
+            <a:extLst>
+              <a:ext uri="{FF2B5EF4-FFF2-40B4-BE49-F238E27FC236}">
+                <a16:creationId xmlns:a16="http://schemas.microsoft.com/office/drawing/2014/main" id="{147C7B45-F605-0963-A5CB-099AB0B86C65}"/>
               </a:ext>
             </a:extLst>
           </p:cNvPr>
@@ -25575,32 +25842,75 @@
         </p:nvSpPr>
         <p:spPr>
           <a:xfrm>
-            <a:off x="6191487" y="2160350"/>
-            <a:ext cx="312055" cy="181579"/>
-          </a:xfrm>
-          <a:prstGeom prst="rect">
-            <a:avLst/>
-          </a:prstGeom>
-          <a:solidFill>
-            <a:srgbClr val="ACD433">
-              <a:alpha val="50196"/>
-            </a:srgbClr>
-          </a:solidFill>
+            <a:off x="7161088" y="3102796"/>
+            <a:ext cx="431514" cy="328773"/>
+          </a:xfrm>
+          <a:custGeom>
+            <a:avLst/>
+            <a:gdLst>
+              <a:gd name="csX0" fmla="*/ 431514 w 431514"/>
+              <a:gd name="csY0" fmla="*/ 0 h 328773"/>
+              <a:gd name="csX1" fmla="*/ 431514 w 431514"/>
+              <a:gd name="csY1" fmla="*/ 61644 h 328773"/>
+              <a:gd name="csX2" fmla="*/ 421240 w 431514"/>
+              <a:gd name="csY2" fmla="*/ 184934 h 328773"/>
+              <a:gd name="csX3" fmla="*/ 0 w 431514"/>
+              <a:gd name="csY3" fmla="*/ 174660 h 328773"/>
+              <a:gd name="csX4" fmla="*/ 0 w 431514"/>
+              <a:gd name="csY4" fmla="*/ 328773 h 328773"/>
+            </a:gdLst>
+            <a:ahLst/>
+            <a:cxnLst>
+              <a:cxn ang="0">
+                <a:pos x="csX0" y="csY0"/>
+              </a:cxn>
+              <a:cxn ang="0">
+                <a:pos x="csX1" y="csY1"/>
+              </a:cxn>
+              <a:cxn ang="0">
+                <a:pos x="csX2" y="csY2"/>
+              </a:cxn>
+              <a:cxn ang="0">
+                <a:pos x="csX3" y="csY3"/>
+              </a:cxn>
+              <a:cxn ang="0">
+                <a:pos x="csX4" y="csY4"/>
+              </a:cxn>
+            </a:cxnLst>
+            <a:rect l="l" t="t" r="r" b="b"/>
+            <a:pathLst>
+              <a:path w="431514" h="328773">
+                <a:moveTo>
+                  <a:pt x="431514" y="0"/>
+                </a:moveTo>
+                <a:lnTo>
+                  <a:pt x="431514" y="61644"/>
+                </a:lnTo>
+                <a:lnTo>
+                  <a:pt x="421240" y="184934"/>
+                </a:lnTo>
+                <a:lnTo>
+                  <a:pt x="0" y="174660"/>
+                </a:lnTo>
+                <a:lnTo>
+                  <a:pt x="0" y="328773"/>
+                </a:lnTo>
+              </a:path>
+            </a:pathLst>
+          </a:custGeom>
         </p:spPr>
         <p:style>
-          <a:lnRef idx="2">
-            <a:schemeClr val="accent1">
-              <a:shade val="15000"/>
-            </a:schemeClr>
+          <a:lnRef idx="3">
+            <a:schemeClr val="accent1"/>
           </a:lnRef>
-          <a:fillRef idx="1">
+          <a:fillRef idx="0">
             <a:schemeClr val="accent1"/>
           </a:fillRef>
-          <a:effectRef idx="0">
+          <a:effectRef idx="2">
             <a:schemeClr val="accent1"/>
           </a:effectRef>
           <a:fontRef idx="minor">
-            <a:schemeClr val="lt1"/>
+            <a:schemeClr val="tx1"/>
           </a:fontRef>
         </p:style>
         <p:txBody>
@@ -25614,10 +25924,10 @@
       </p:sp>
       <p:sp>
         <p:nvSpPr>
-          <p:cNvPr id="24" name="Rectangle 23">
-            <a:extLst>
-              <a:ext uri="{FF2B5EF4-FFF2-40B4-BE49-F238E27FC236}">
-                <a16:creationId xmlns:a16="http://schemas.microsoft.com/office/drawing/2014/main" id="{2AE1DD47-2B32-5CA7-8EBA-C2A350A7E0A1}"/>
+          <p:cNvPr id="56" name="Freeform: Shape 55">
+            <a:extLst>
+              <a:ext uri="{FF2B5EF4-FFF2-40B4-BE49-F238E27FC236}">
+                <a16:creationId xmlns:a16="http://schemas.microsoft.com/office/drawing/2014/main" id="{31011ECF-4292-E943-8926-E6234EA6FA47}"/>
               </a:ext>
             </a:extLst>
           </p:cNvPr>
@@ -25626,32 +25936,51 @@
         </p:nvSpPr>
         <p:spPr>
           <a:xfrm>
-            <a:off x="5200132" y="2341929"/>
-            <a:ext cx="546618" cy="115521"/>
-          </a:xfrm>
-          <a:prstGeom prst="rect">
-            <a:avLst/>
-          </a:prstGeom>
-          <a:solidFill>
-            <a:srgbClr val="ACD433">
-              <a:alpha val="50196"/>
-            </a:srgbClr>
-          </a:solidFill>
+            <a:off x="5270643" y="2393879"/>
+            <a:ext cx="431514" cy="0"/>
+          </a:xfrm>
+          <a:custGeom>
+            <a:avLst/>
+            <a:gdLst>
+              <a:gd name="csX0" fmla="*/ 0 w 431514"/>
+              <a:gd name="csY0" fmla="*/ 0 h 0"/>
+              <a:gd name="csX1" fmla="*/ 431514 w 431514"/>
+              <a:gd name="csY1" fmla="*/ 0 h 0"/>
+            </a:gdLst>
+            <a:ahLst/>
+            <a:cxnLst>
+              <a:cxn ang="0">
+                <a:pos x="csX0" y="csY0"/>
+              </a:cxn>
+              <a:cxn ang="0">
+                <a:pos x="csX1" y="csY1"/>
+              </a:cxn>
+            </a:cxnLst>
+            <a:rect l="l" t="t" r="r" b="b"/>
+            <a:pathLst>
+              <a:path w="431514">
+                <a:moveTo>
+                  <a:pt x="0" y="0"/>
+                </a:moveTo>
+                <a:lnTo>
+                  <a:pt x="431514" y="0"/>
+                </a:lnTo>
+              </a:path>
+            </a:pathLst>
+          </a:custGeom>
         </p:spPr>
         <p:style>
-          <a:lnRef idx="2">
-            <a:schemeClr val="accent1">
-              <a:shade val="15000"/>
-            </a:schemeClr>
+          <a:lnRef idx="3">
+            <a:schemeClr val="accent1"/>
           </a:lnRef>
-          <a:fillRef idx="1">
+          <a:fillRef idx="0">
             <a:schemeClr val="accent1"/>
           </a:fillRef>
-          <a:effectRef idx="0">
+          <a:effectRef idx="2">
             <a:schemeClr val="accent1"/>
           </a:effectRef>
           <a:fontRef idx="minor">
-            <a:schemeClr val="lt1"/>
+            <a:schemeClr val="tx1"/>
           </a:fontRef>
         </p:style>
         <p:txBody>
@@ -25665,10 +25994,10 @@
       </p:sp>
       <p:sp>
         <p:nvSpPr>
-          <p:cNvPr id="25" name="Rectangle 24">
-            <a:extLst>
-              <a:ext uri="{FF2B5EF4-FFF2-40B4-BE49-F238E27FC236}">
-                <a16:creationId xmlns:a16="http://schemas.microsoft.com/office/drawing/2014/main" id="{836BC75E-E6C7-8E4C-4D33-372345A4D4A3}"/>
+          <p:cNvPr id="57" name="Freeform: Shape 56">
+            <a:extLst>
+              <a:ext uri="{FF2B5EF4-FFF2-40B4-BE49-F238E27FC236}">
+                <a16:creationId xmlns:a16="http://schemas.microsoft.com/office/drawing/2014/main" id="{C8A3BD9C-168D-BC3F-0AD9-EC95FE993A85}"/>
               </a:ext>
             </a:extLst>
           </p:cNvPr>
@@ -25676,33 +26005,68 @@
           <p:nvPr/>
         </p:nvSpPr>
         <p:spPr>
-          <a:xfrm rot="8938082">
-            <a:off x="5502940" y="1047172"/>
-            <a:ext cx="76042" cy="1357830"/>
-          </a:xfrm>
-          <a:prstGeom prst="rect">
-            <a:avLst/>
-          </a:prstGeom>
-          <a:solidFill>
-            <a:schemeClr val="accent3">
-              <a:alpha val="50196"/>
-            </a:schemeClr>
-          </a:solidFill>
+          <a:xfrm>
+            <a:off x="4941870" y="2578813"/>
+            <a:ext cx="2147299" cy="852756"/>
+          </a:xfrm>
+          <a:custGeom>
+            <a:avLst/>
+            <a:gdLst>
+              <a:gd name="csX0" fmla="*/ 2147299 w 2147299"/>
+              <a:gd name="csY0" fmla="*/ 852756 h 852756"/>
+              <a:gd name="csX1" fmla="*/ 2147299 w 2147299"/>
+              <a:gd name="csY1" fmla="*/ 102742 h 852756"/>
+              <a:gd name="csX2" fmla="*/ 0 w 2147299"/>
+              <a:gd name="csY2" fmla="*/ 102742 h 852756"/>
+              <a:gd name="csX3" fmla="*/ 10274 w 2147299"/>
+              <a:gd name="csY3" fmla="*/ 0 h 852756"/>
+            </a:gdLst>
+            <a:ahLst/>
+            <a:cxnLst>
+              <a:cxn ang="0">
+                <a:pos x="csX0" y="csY0"/>
+              </a:cxn>
+              <a:cxn ang="0">
+                <a:pos x="csX1" y="csY1"/>
+              </a:cxn>
+              <a:cxn ang="0">
+                <a:pos x="csX2" y="csY2"/>
+              </a:cxn>
+              <a:cxn ang="0">
+                <a:pos x="csX3" y="csY3"/>
+              </a:cxn>
+            </a:cxnLst>
+            <a:rect l="l" t="t" r="r" b="b"/>
+            <a:pathLst>
+              <a:path w="2147299" h="852756">
+                <a:moveTo>
+                  <a:pt x="2147299" y="852756"/>
+                </a:moveTo>
+                <a:lnTo>
+                  <a:pt x="2147299" y="102742"/>
+                </a:lnTo>
+                <a:lnTo>
+                  <a:pt x="0" y="102742"/>
+                </a:lnTo>
+                <a:lnTo>
+                  <a:pt x="10274" y="0"/>
+                </a:lnTo>
+              </a:path>
+            </a:pathLst>
+          </a:custGeom>
         </p:spPr>
         <p:style>
-          <a:lnRef idx="2">
-            <a:schemeClr val="accent1">
-              <a:shade val="15000"/>
-            </a:schemeClr>
+          <a:lnRef idx="3">
+            <a:schemeClr val="accent1"/>
           </a:lnRef>
-          <a:fillRef idx="1">
+          <a:fillRef idx="0">
             <a:schemeClr val="accent1"/>
           </a:fillRef>
-          <a:effectRef idx="0">
+          <a:effectRef idx="2">
             <a:schemeClr val="accent1"/>
           </a:effectRef>
           <a:fontRef idx="minor">
-            <a:schemeClr val="lt1"/>
+            <a:schemeClr val="tx1"/>
           </a:fontRef>
         </p:style>
         <p:txBody>
@@ -25716,10 +26080,10 @@
       </p:sp>
       <p:sp>
         <p:nvSpPr>
-          <p:cNvPr id="26" name="Rectangle 25">
-            <a:extLst>
-              <a:ext uri="{FF2B5EF4-FFF2-40B4-BE49-F238E27FC236}">
-                <a16:creationId xmlns:a16="http://schemas.microsoft.com/office/drawing/2014/main" id="{3F3E368A-4F51-6736-8DA5-37E30D11870B}"/>
+          <p:cNvPr id="58" name="Freeform: Shape 57">
+            <a:extLst>
+              <a:ext uri="{FF2B5EF4-FFF2-40B4-BE49-F238E27FC236}">
+                <a16:creationId xmlns:a16="http://schemas.microsoft.com/office/drawing/2014/main" id="{081E4820-0CBC-6BF0-694B-30603702532A}"/>
               </a:ext>
             </a:extLst>
           </p:cNvPr>
@@ -25727,33 +26091,52 @@
           <p:nvPr/>
         </p:nvSpPr>
         <p:spPr>
-          <a:xfrm rot="10800000">
-            <a:off x="5873291" y="1176175"/>
-            <a:ext cx="90481" cy="1117544"/>
-          </a:xfrm>
-          <a:prstGeom prst="rect">
-            <a:avLst/>
-          </a:prstGeom>
-          <a:solidFill>
-            <a:schemeClr val="accent3">
-              <a:alpha val="50196"/>
-            </a:schemeClr>
-          </a:solidFill>
+          <a:xfrm>
+            <a:off x="6554912" y="1941816"/>
+            <a:ext cx="554805" cy="0"/>
+          </a:xfrm>
+          <a:custGeom>
+            <a:avLst/>
+            <a:gdLst>
+              <a:gd name="csX0" fmla="*/ 0 w 554805"/>
+              <a:gd name="csY0" fmla="*/ 0 h 0"/>
+              <a:gd name="csX1" fmla="*/ 554805 w 554805"/>
+              <a:gd name="csY1" fmla="*/ 0 h 0"/>
+            </a:gdLst>
+            <a:ahLst/>
+            <a:cxnLst>
+              <a:cxn ang="0">
+                <a:pos x="csX0" y="csY0"/>
+              </a:cxn>
+              <a:cxn ang="0">
+                <a:pos x="csX1" y="csY1"/>
+              </a:cxn>
+            </a:cxnLst>
+            <a:rect l="l" t="t" r="r" b="b"/>
+            <a:pathLst>
+              <a:path w="554805">
+                <a:moveTo>
+                  <a:pt x="0" y="0"/>
+                </a:moveTo>
+                <a:lnTo>
+                  <a:pt x="554805" y="0"/>
+                </a:lnTo>
+              </a:path>
+            </a:pathLst>
+          </a:custGeom>
         </p:spPr>
         <p:style>
-          <a:lnRef idx="2">
-            <a:schemeClr val="accent1">
-              <a:shade val="15000"/>
-            </a:schemeClr>
+          <a:lnRef idx="3">
+            <a:schemeClr val="accent1"/>
           </a:lnRef>
-          <a:fillRef idx="1">
+          <a:fillRef idx="0">
             <a:schemeClr val="accent1"/>
           </a:fillRef>
-          <a:effectRef idx="0">
+          <a:effectRef idx="2">
             <a:schemeClr val="accent1"/>
           </a:effectRef>
           <a:fontRef idx="minor">
-            <a:schemeClr val="lt1"/>
+            <a:schemeClr val="tx1"/>
           </a:fontRef>
         </p:style>
         <p:txBody>
@@ -25767,10 +26150,10 @@
       </p:sp>
       <p:sp>
         <p:nvSpPr>
-          <p:cNvPr id="27" name="Rectangle 26">
-            <a:extLst>
-              <a:ext uri="{FF2B5EF4-FFF2-40B4-BE49-F238E27FC236}">
-                <a16:creationId xmlns:a16="http://schemas.microsoft.com/office/drawing/2014/main" id="{360B51EF-21B6-B9CC-6355-D6D7EFD1CC8D}"/>
+          <p:cNvPr id="59" name="Freeform: Shape 58">
+            <a:extLst>
+              <a:ext uri="{FF2B5EF4-FFF2-40B4-BE49-F238E27FC236}">
+                <a16:creationId xmlns:a16="http://schemas.microsoft.com/office/drawing/2014/main" id="{32A0F0EE-191D-5199-3571-0BA3E5EC5F7B}"/>
               </a:ext>
             </a:extLst>
           </p:cNvPr>
@@ -25778,33 +26161,52 @@
           <p:nvPr/>
         </p:nvSpPr>
         <p:spPr>
-          <a:xfrm rot="12691686" flipH="1">
-            <a:off x="5408785" y="1079456"/>
-            <a:ext cx="55472" cy="1281028"/>
-          </a:xfrm>
-          <a:prstGeom prst="rect">
-            <a:avLst/>
-          </a:prstGeom>
-          <a:solidFill>
-            <a:schemeClr val="accent3">
-              <a:alpha val="50196"/>
-            </a:schemeClr>
-          </a:solidFill>
+          <a:xfrm>
+            <a:off x="4941870" y="431515"/>
+            <a:ext cx="0" cy="390418"/>
+          </a:xfrm>
+          <a:custGeom>
+            <a:avLst/>
+            <a:gdLst>
+              <a:gd name="csX0" fmla="*/ 0 w 0"/>
+              <a:gd name="csY0" fmla="*/ 390418 h 390418"/>
+              <a:gd name="csX1" fmla="*/ 0 w 0"/>
+              <a:gd name="csY1" fmla="*/ 0 h 390418"/>
+            </a:gdLst>
+            <a:ahLst/>
+            <a:cxnLst>
+              <a:cxn ang="0">
+                <a:pos x="csX0" y="csY0"/>
+              </a:cxn>
+              <a:cxn ang="0">
+                <a:pos x="csX1" y="csY1"/>
+              </a:cxn>
+            </a:cxnLst>
+            <a:rect l="l" t="t" r="r" b="b"/>
+            <a:pathLst>
+              <a:path h="390418">
+                <a:moveTo>
+                  <a:pt x="0" y="390418"/>
+                </a:moveTo>
+                <a:lnTo>
+                  <a:pt x="0" y="0"/>
+                </a:lnTo>
+              </a:path>
+            </a:pathLst>
+          </a:custGeom>
         </p:spPr>
         <p:style>
-          <a:lnRef idx="2">
-            <a:schemeClr val="accent1">
-              <a:shade val="15000"/>
-            </a:schemeClr>
+          <a:lnRef idx="3">
+            <a:schemeClr val="accent1"/>
           </a:lnRef>
-          <a:fillRef idx="1">
+          <a:fillRef idx="0">
             <a:schemeClr val="accent1"/>
           </a:fillRef>
-          <a:effectRef idx="0">
+          <a:effectRef idx="2">
             <a:schemeClr val="accent1"/>
           </a:effectRef>
           <a:fontRef idx="minor">
-            <a:schemeClr val="lt1"/>
+            <a:schemeClr val="tx1"/>
           </a:fontRef>
         </p:style>
         <p:txBody>
@@ -25818,10 +26220,10 @@
       </p:sp>
       <p:sp>
         <p:nvSpPr>
-          <p:cNvPr id="28" name="Rectangle 27">
-            <a:extLst>
-              <a:ext uri="{FF2B5EF4-FFF2-40B4-BE49-F238E27FC236}">
-                <a16:creationId xmlns:a16="http://schemas.microsoft.com/office/drawing/2014/main" id="{67DF9B66-7431-1A59-7188-3C0E64107F99}"/>
+          <p:cNvPr id="60" name="Freeform: Shape 59">
+            <a:extLst>
+              <a:ext uri="{FF2B5EF4-FFF2-40B4-BE49-F238E27FC236}">
+                <a16:creationId xmlns:a16="http://schemas.microsoft.com/office/drawing/2014/main" id="{6CB97D67-84FA-071F-A18B-58E8A0CCE182}"/>
               </a:ext>
             </a:extLst>
           </p:cNvPr>
@@ -25830,32 +26232,69 @@
         </p:nvSpPr>
         <p:spPr>
           <a:xfrm>
-            <a:off x="4901946" y="2574289"/>
-            <a:ext cx="104394" cy="100455"/>
-          </a:xfrm>
-          <a:prstGeom prst="rect">
-            <a:avLst/>
-          </a:prstGeom>
-          <a:solidFill>
-            <a:srgbClr val="ACD433">
-              <a:alpha val="50196"/>
-            </a:srgbClr>
-          </a:solidFill>
+            <a:off x="3750067" y="246420"/>
+            <a:ext cx="873304" cy="10434"/>
+          </a:xfrm>
+          <a:custGeom>
+            <a:avLst/>
+            <a:gdLst>
+              <a:gd name="csX0" fmla="*/ 0 w 873304"/>
+              <a:gd name="csY0" fmla="*/ 10434 h 10434"/>
+              <a:gd name="csX1" fmla="*/ 0 w 873304"/>
+              <a:gd name="csY1" fmla="*/ 10434 h 10434"/>
+              <a:gd name="csX2" fmla="*/ 154113 w 873304"/>
+              <a:gd name="csY2" fmla="*/ 160 h 10434"/>
+              <a:gd name="csX3" fmla="*/ 873304 w 873304"/>
+              <a:gd name="csY3" fmla="*/ 160 h 10434"/>
+            </a:gdLst>
+            <a:ahLst/>
+            <a:cxnLst>
+              <a:cxn ang="0">
+                <a:pos x="csX0" y="csY0"/>
+              </a:cxn>
+              <a:cxn ang="0">
+                <a:pos x="csX1" y="csY1"/>
+              </a:cxn>
+              <a:cxn ang="0">
+                <a:pos x="csX2" y="csY2"/>
+              </a:cxn>
+              <a:cxn ang="0">
+                <a:pos x="csX3" y="csY3"/>
+              </a:cxn>
+            </a:cxnLst>
+            <a:rect l="l" t="t" r="r" b="b"/>
+            <a:pathLst>
+              <a:path w="873304" h="10434">
+                <a:moveTo>
+                  <a:pt x="0" y="10434"/>
+                </a:moveTo>
+                <a:lnTo>
+                  <a:pt x="0" y="10434"/>
+                </a:lnTo>
+                <a:cubicBezTo>
+                  <a:pt x="112891" y="-2109"/>
+                  <a:pt x="61456" y="160"/>
+                  <a:pt x="154113" y="160"/>
+                </a:cubicBezTo>
+                <a:lnTo>
+                  <a:pt x="873304" y="160"/>
+                </a:lnTo>
+              </a:path>
+            </a:pathLst>
+          </a:custGeom>
         </p:spPr>
         <p:style>
-          <a:lnRef idx="2">
-            <a:schemeClr val="accent1">
-              <a:shade val="15000"/>
-            </a:schemeClr>
+          <a:lnRef idx="3">
+            <a:schemeClr val="accent1"/>
           </a:lnRef>
-          <a:fillRef idx="1">
+          <a:fillRef idx="0">
             <a:schemeClr val="accent1"/>
           </a:fillRef>
-          <a:effectRef idx="0">
+          <a:effectRef idx="2">
             <a:schemeClr val="accent1"/>
           </a:effectRef>
           <a:fontRef idx="minor">
-            <a:schemeClr val="lt1"/>
+            <a:schemeClr val="tx1"/>
           </a:fontRef>
         </p:style>
         <p:txBody>
@@ -25869,10 +26308,10 @@
       </p:sp>
       <p:sp>
         <p:nvSpPr>
-          <p:cNvPr id="29" name="Rectangle 28">
-            <a:extLst>
-              <a:ext uri="{FF2B5EF4-FFF2-40B4-BE49-F238E27FC236}">
-                <a16:creationId xmlns:a16="http://schemas.microsoft.com/office/drawing/2014/main" id="{8A4B1659-8D43-769B-AEF3-F79100B09B1C}"/>
+          <p:cNvPr id="61" name="Freeform: Shape 60">
+            <a:extLst>
+              <a:ext uri="{FF2B5EF4-FFF2-40B4-BE49-F238E27FC236}">
+                <a16:creationId xmlns:a16="http://schemas.microsoft.com/office/drawing/2014/main" id="{A9F13761-A4A7-9A53-DCC7-4C5C1D3C448B}"/>
               </a:ext>
             </a:extLst>
           </p:cNvPr>
@@ -25881,32 +26320,51 @@
         </p:nvSpPr>
         <p:spPr>
           <a:xfrm>
-            <a:off x="6150719" y="2574289"/>
-            <a:ext cx="81536" cy="298451"/>
-          </a:xfrm>
-          <a:prstGeom prst="rect">
-            <a:avLst/>
-          </a:prstGeom>
-          <a:solidFill>
-            <a:srgbClr val="ACD433">
-              <a:alpha val="50196"/>
-            </a:srgbClr>
-          </a:solidFill>
+            <a:off x="2989780" y="996593"/>
+            <a:ext cx="0" cy="205483"/>
+          </a:xfrm>
+          <a:custGeom>
+            <a:avLst/>
+            <a:gdLst>
+              <a:gd name="csX0" fmla="*/ 0 w 0"/>
+              <a:gd name="csY0" fmla="*/ 0 h 205483"/>
+              <a:gd name="csX1" fmla="*/ 0 w 0"/>
+              <a:gd name="csY1" fmla="*/ 205483 h 205483"/>
+            </a:gdLst>
+            <a:ahLst/>
+            <a:cxnLst>
+              <a:cxn ang="0">
+                <a:pos x="csX0" y="csY0"/>
+              </a:cxn>
+              <a:cxn ang="0">
+                <a:pos x="csX1" y="csY1"/>
+              </a:cxn>
+            </a:cxnLst>
+            <a:rect l="l" t="t" r="r" b="b"/>
+            <a:pathLst>
+              <a:path h="205483">
+                <a:moveTo>
+                  <a:pt x="0" y="0"/>
+                </a:moveTo>
+                <a:lnTo>
+                  <a:pt x="0" y="205483"/>
+                </a:lnTo>
+              </a:path>
+            </a:pathLst>
+          </a:custGeom>
         </p:spPr>
         <p:style>
-          <a:lnRef idx="2">
-            <a:schemeClr val="accent1">
-              <a:shade val="15000"/>
-            </a:schemeClr>
+          <a:lnRef idx="3">
+            <a:schemeClr val="accent1"/>
           </a:lnRef>
-          <a:fillRef idx="1">
+          <a:fillRef idx="0">
             <a:schemeClr val="accent1"/>
           </a:fillRef>
-          <a:effectRef idx="0">
+          <a:effectRef idx="2">
             <a:schemeClr val="accent1"/>
           </a:effectRef>
           <a:fontRef idx="minor">
-            <a:schemeClr val="lt1"/>
+            <a:schemeClr val="tx1"/>
           </a:fontRef>
         </p:style>
         <p:txBody>
@@ -25920,10 +26378,10 @@
       </p:sp>
       <p:sp>
         <p:nvSpPr>
-          <p:cNvPr id="30" name="Rectangle 29">
-            <a:extLst>
-              <a:ext uri="{FF2B5EF4-FFF2-40B4-BE49-F238E27FC236}">
-                <a16:creationId xmlns:a16="http://schemas.microsoft.com/office/drawing/2014/main" id="{618C9774-7A50-5CD0-FD00-8FB87D6673B9}"/>
+          <p:cNvPr id="62" name="Freeform: Shape 61">
+            <a:extLst>
+              <a:ext uri="{FF2B5EF4-FFF2-40B4-BE49-F238E27FC236}">
+                <a16:creationId xmlns:a16="http://schemas.microsoft.com/office/drawing/2014/main" id="{568ECF0D-9DBA-B3C9-7A3F-4253ED0547A6}"/>
               </a:ext>
             </a:extLst>
           </p:cNvPr>
@@ -25932,32 +26390,67 @@
         </p:nvSpPr>
         <p:spPr>
           <a:xfrm>
-            <a:off x="4985891" y="2649403"/>
-            <a:ext cx="2164922" cy="100455"/>
-          </a:xfrm>
-          <a:prstGeom prst="rect">
-            <a:avLst/>
-          </a:prstGeom>
-          <a:solidFill>
-            <a:srgbClr val="ACD433">
-              <a:alpha val="50196"/>
-            </a:srgbClr>
-          </a:solidFill>
+            <a:off x="2989780" y="256854"/>
+            <a:ext cx="102741" cy="426359"/>
+          </a:xfrm>
+          <a:custGeom>
+            <a:avLst/>
+            <a:gdLst>
+              <a:gd name="csX0" fmla="*/ 0 w 113016"/>
+              <a:gd name="csY0" fmla="*/ 421240 h 482885"/>
+              <a:gd name="csX1" fmla="*/ 0 w 113016"/>
+              <a:gd name="csY1" fmla="*/ 482885 h 482885"/>
+              <a:gd name="csX2" fmla="*/ 10274 w 113016"/>
+              <a:gd name="csY2" fmla="*/ 0 h 482885"/>
+              <a:gd name="csX3" fmla="*/ 113016 w 113016"/>
+              <a:gd name="csY3" fmla="*/ 0 h 482885"/>
+            </a:gdLst>
+            <a:ahLst/>
+            <a:cxnLst>
+              <a:cxn ang="0">
+                <a:pos x="csX0" y="csY0"/>
+              </a:cxn>
+              <a:cxn ang="0">
+                <a:pos x="csX1" y="csY1"/>
+              </a:cxn>
+              <a:cxn ang="0">
+                <a:pos x="csX2" y="csY2"/>
+              </a:cxn>
+              <a:cxn ang="0">
+                <a:pos x="csX3" y="csY3"/>
+              </a:cxn>
+            </a:cxnLst>
+            <a:rect l="l" t="t" r="r" b="b"/>
+            <a:pathLst>
+              <a:path w="113016" h="482885">
+                <a:moveTo>
+                  <a:pt x="0" y="421240"/>
+                </a:moveTo>
+                <a:lnTo>
+                  <a:pt x="0" y="482885"/>
+                </a:lnTo>
+                <a:lnTo>
+                  <a:pt x="10274" y="0"/>
+                </a:lnTo>
+                <a:lnTo>
+                  <a:pt x="113016" y="0"/>
+                </a:lnTo>
+              </a:path>
+            </a:pathLst>
+          </a:custGeom>
         </p:spPr>
         <p:style>
-          <a:lnRef idx="2">
-            <a:schemeClr val="accent1">
-              <a:shade val="15000"/>
-            </a:schemeClr>
+          <a:lnRef idx="3">
+            <a:schemeClr val="accent1"/>
           </a:lnRef>
-          <a:fillRef idx="1">
+          <a:fillRef idx="0">
             <a:schemeClr val="accent1"/>
           </a:fillRef>
-          <a:effectRef idx="0">
+          <a:effectRef idx="2">
             <a:schemeClr val="accent1"/>
           </a:effectRef>
           <a:fontRef idx="minor">
-            <a:schemeClr val="lt1"/>
+            <a:schemeClr val="tx1"/>
           </a:fontRef>
         </p:style>
         <p:txBody>
@@ -25965,16 +26458,20 @@
           <a:lstStyle/>
           <a:p>
             <a:pPr algn="ctr"/>
-            <a:endParaRPr lang="en-US"/>
-          </a:p>
-        </p:txBody>
-      </p:sp>
-      <p:sp>
-        <p:nvSpPr>
-          <p:cNvPr id="31" name="Rectangle 30">
-            <a:extLst>
-              <a:ext uri="{FF2B5EF4-FFF2-40B4-BE49-F238E27FC236}">
-                <a16:creationId xmlns:a16="http://schemas.microsoft.com/office/drawing/2014/main" id="{5BBA1E83-AE41-EB9F-70F4-68B4FD7ED095}"/>
+            <a:r>
+              <a:rPr lang="en-US" altLang="zh-CN" dirty="0"/>
+              <a:t>·</a:t>
+            </a:r>
+            <a:endParaRPr lang="en-US" dirty="0"/>
+          </a:p>
+        </p:txBody>
+      </p:sp>
+      <p:sp>
+        <p:nvSpPr>
+          <p:cNvPr id="63" name="Freeform: Shape 62">
+            <a:extLst>
+              <a:ext uri="{FF2B5EF4-FFF2-40B4-BE49-F238E27FC236}">
+                <a16:creationId xmlns:a16="http://schemas.microsoft.com/office/drawing/2014/main" id="{72D67EDB-461B-60E6-B361-CD5816F9A5D1}"/>
               </a:ext>
             </a:extLst>
           </p:cNvPr>
@@ -25983,32 +26480,51 @@
         </p:nvSpPr>
         <p:spPr>
           <a:xfrm>
-            <a:off x="6191486" y="2789463"/>
-            <a:ext cx="796053" cy="83277"/>
-          </a:xfrm>
-          <a:prstGeom prst="rect">
-            <a:avLst/>
-          </a:prstGeom>
-          <a:solidFill>
-            <a:srgbClr val="ACD433">
-              <a:alpha val="50196"/>
-            </a:srgbClr>
-          </a:solidFill>
+            <a:off x="5239820" y="1068512"/>
+            <a:ext cx="1027416" cy="739740"/>
+          </a:xfrm>
+          <a:custGeom>
+            <a:avLst/>
+            <a:gdLst>
+              <a:gd name="csX0" fmla="*/ 0 w 1027416"/>
+              <a:gd name="csY0" fmla="*/ 0 h 739740"/>
+              <a:gd name="csX1" fmla="*/ 1027416 w 1027416"/>
+              <a:gd name="csY1" fmla="*/ 739740 h 739740"/>
+            </a:gdLst>
+            <a:ahLst/>
+            <a:cxnLst>
+              <a:cxn ang="0">
+                <a:pos x="csX0" y="csY0"/>
+              </a:cxn>
+              <a:cxn ang="0">
+                <a:pos x="csX1" y="csY1"/>
+              </a:cxn>
+            </a:cxnLst>
+            <a:rect l="l" t="t" r="r" b="b"/>
+            <a:pathLst>
+              <a:path w="1027416" h="739740">
+                <a:moveTo>
+                  <a:pt x="0" y="0"/>
+                </a:moveTo>
+                <a:lnTo>
+                  <a:pt x="1027416" y="739740"/>
+                </a:lnTo>
+              </a:path>
+            </a:pathLst>
+          </a:custGeom>
         </p:spPr>
         <p:style>
-          <a:lnRef idx="2">
-            <a:schemeClr val="accent1">
-              <a:shade val="15000"/>
-            </a:schemeClr>
+          <a:lnRef idx="3">
+            <a:schemeClr val="accent1"/>
           </a:lnRef>
-          <a:fillRef idx="1">
+          <a:fillRef idx="0">
             <a:schemeClr val="accent1"/>
           </a:fillRef>
-          <a:effectRef idx="0">
+          <a:effectRef idx="2">
             <a:schemeClr val="accent1"/>
           </a:effectRef>
           <a:fontRef idx="minor">
-            <a:schemeClr val="lt1"/>
+            <a:schemeClr val="tx1"/>
           </a:fontRef>
         </p:style>
         <p:txBody>
@@ -26022,10 +26538,10 @@
       </p:sp>
       <p:sp>
         <p:nvSpPr>
-          <p:cNvPr id="32" name="Rectangle 31">
-            <a:extLst>
-              <a:ext uri="{FF2B5EF4-FFF2-40B4-BE49-F238E27FC236}">
-                <a16:creationId xmlns:a16="http://schemas.microsoft.com/office/drawing/2014/main" id="{4CF34D68-FC06-2891-B90E-9F1A0D98EA9D}"/>
+          <p:cNvPr id="64" name="Freeform: Shape 63">
+            <a:extLst>
+              <a:ext uri="{FF2B5EF4-FFF2-40B4-BE49-F238E27FC236}">
+                <a16:creationId xmlns:a16="http://schemas.microsoft.com/office/drawing/2014/main" id="{AAF35B68-C81C-2380-D153-4D62E646870D}"/>
               </a:ext>
             </a:extLst>
           </p:cNvPr>
@@ -26034,32 +26550,51 @@
         </p:nvSpPr>
         <p:spPr>
           <a:xfrm>
-            <a:off x="6946770" y="2858780"/>
-            <a:ext cx="81536" cy="652755"/>
-          </a:xfrm>
-          <a:prstGeom prst="rect">
-            <a:avLst/>
-          </a:prstGeom>
-          <a:solidFill>
-            <a:srgbClr val="ACD433">
-              <a:alpha val="50196"/>
-            </a:srgbClr>
-          </a:solidFill>
+            <a:off x="4941870" y="1181528"/>
+            <a:ext cx="0" cy="400692"/>
+          </a:xfrm>
+          <a:custGeom>
+            <a:avLst/>
+            <a:gdLst>
+              <a:gd name="csX0" fmla="*/ 0 w 0"/>
+              <a:gd name="csY0" fmla="*/ 0 h 400692"/>
+              <a:gd name="csX1" fmla="*/ 0 w 0"/>
+              <a:gd name="csY1" fmla="*/ 400692 h 400692"/>
+            </a:gdLst>
+            <a:ahLst/>
+            <a:cxnLst>
+              <a:cxn ang="0">
+                <a:pos x="csX0" y="csY0"/>
+              </a:cxn>
+              <a:cxn ang="0">
+                <a:pos x="csX1" y="csY1"/>
+              </a:cxn>
+            </a:cxnLst>
+            <a:rect l="l" t="t" r="r" b="b"/>
+            <a:pathLst>
+              <a:path h="400692">
+                <a:moveTo>
+                  <a:pt x="0" y="0"/>
+                </a:moveTo>
+                <a:lnTo>
+                  <a:pt x="0" y="400692"/>
+                </a:lnTo>
+              </a:path>
+            </a:pathLst>
+          </a:custGeom>
         </p:spPr>
         <p:style>
-          <a:lnRef idx="2">
-            <a:schemeClr val="accent1">
-              <a:shade val="15000"/>
-            </a:schemeClr>
+          <a:lnRef idx="3">
+            <a:schemeClr val="accent1"/>
           </a:lnRef>
-          <a:fillRef idx="1">
+          <a:fillRef idx="0">
             <a:schemeClr val="accent1"/>
           </a:fillRef>
-          <a:effectRef idx="0">
+          <a:effectRef idx="2">
             <a:schemeClr val="accent1"/>
           </a:effectRef>
           <a:fontRef idx="minor">
-            <a:schemeClr val="lt1"/>
+            <a:schemeClr val="tx1"/>
           </a:fontRef>
         </p:style>
         <p:txBody>
@@ -26073,10 +26608,10 @@
       </p:sp>
       <p:sp>
         <p:nvSpPr>
-          <p:cNvPr id="33" name="Rectangle 32">
-            <a:extLst>
-              <a:ext uri="{FF2B5EF4-FFF2-40B4-BE49-F238E27FC236}">
-                <a16:creationId xmlns:a16="http://schemas.microsoft.com/office/drawing/2014/main" id="{3C158F12-1CF0-8976-7711-37C4074955D7}"/>
+          <p:cNvPr id="65" name="Freeform: Shape 64">
+            <a:extLst>
+              <a:ext uri="{FF2B5EF4-FFF2-40B4-BE49-F238E27FC236}">
+                <a16:creationId xmlns:a16="http://schemas.microsoft.com/office/drawing/2014/main" id="{3C5A3C8F-6C1D-A29A-0168-31B94146FEE3}"/>
               </a:ext>
             </a:extLst>
           </p:cNvPr>
@@ -26085,32 +26620,191 @@
         </p:nvSpPr>
         <p:spPr>
           <a:xfrm>
-            <a:off x="7069277" y="2752609"/>
-            <a:ext cx="81536" cy="758926"/>
-          </a:xfrm>
-          <a:prstGeom prst="rect">
-            <a:avLst/>
-          </a:prstGeom>
-          <a:solidFill>
-            <a:srgbClr val="ACD433">
-              <a:alpha val="50196"/>
-            </a:srgbClr>
-          </a:solidFill>
+            <a:off x="4366517" y="1140431"/>
+            <a:ext cx="421240" cy="113016"/>
+          </a:xfrm>
+          <a:custGeom>
+            <a:avLst/>
+            <a:gdLst>
+              <a:gd name="csX0" fmla="*/ 421240 w 421240"/>
+              <a:gd name="csY0" fmla="*/ 0 h 113016"/>
+              <a:gd name="csX1" fmla="*/ 0 w 421240"/>
+              <a:gd name="csY1" fmla="*/ 113016 h 113016"/>
+            </a:gdLst>
+            <a:ahLst/>
+            <a:cxnLst>
+              <a:cxn ang="0">
+                <a:pos x="csX0" y="csY0"/>
+              </a:cxn>
+              <a:cxn ang="0">
+                <a:pos x="csX1" y="csY1"/>
+              </a:cxn>
+            </a:cxnLst>
+            <a:rect l="l" t="t" r="r" b="b"/>
+            <a:pathLst>
+              <a:path w="421240" h="113016">
+                <a:moveTo>
+                  <a:pt x="421240" y="0"/>
+                </a:moveTo>
+                <a:lnTo>
+                  <a:pt x="0" y="113016"/>
+                </a:lnTo>
+              </a:path>
+            </a:pathLst>
+          </a:custGeom>
         </p:spPr>
         <p:style>
-          <a:lnRef idx="2">
-            <a:schemeClr val="accent1">
-              <a:shade val="15000"/>
-            </a:schemeClr>
+          <a:lnRef idx="3">
+            <a:schemeClr val="accent1"/>
           </a:lnRef>
-          <a:fillRef idx="1">
+          <a:fillRef idx="0">
             <a:schemeClr val="accent1"/>
           </a:fillRef>
-          <a:effectRef idx="0">
+          <a:effectRef idx="2">
             <a:schemeClr val="accent1"/>
           </a:effectRef>
           <a:fontRef idx="minor">
-            <a:schemeClr val="lt1"/>
+            <a:schemeClr val="tx1"/>
+          </a:fontRef>
+        </p:style>
+        <p:txBody>
+          <a:bodyPr rtlCol="0" anchor="ctr"/>
+          <a:lstStyle/>
+          <a:p>
+            <a:pPr algn="ctr"/>
+            <a:endParaRPr lang="en-US"/>
+          </a:p>
+        </p:txBody>
+      </p:sp>
+      <p:sp>
+        <p:nvSpPr>
+          <p:cNvPr id="66" name="Freeform: Shape 65">
+            <a:extLst>
+              <a:ext uri="{FF2B5EF4-FFF2-40B4-BE49-F238E27FC236}">
+                <a16:creationId xmlns:a16="http://schemas.microsoft.com/office/drawing/2014/main" id="{439BA9BE-C36C-54A2-5A89-FA93C156A82E}"/>
+              </a:ext>
+            </a:extLst>
+          </p:cNvPr>
+          <p:cNvSpPr/>
+          <p:nvPr/>
+        </p:nvSpPr>
+        <p:spPr>
+          <a:xfrm>
+            <a:off x="5270643" y="1017142"/>
+            <a:ext cx="339047" cy="0"/>
+          </a:xfrm>
+          <a:custGeom>
+            <a:avLst/>
+            <a:gdLst>
+              <a:gd name="csX0" fmla="*/ 0 w 339047"/>
+              <a:gd name="csY0" fmla="*/ 0 h 0"/>
+              <a:gd name="csX1" fmla="*/ 339047 w 339047"/>
+              <a:gd name="csY1" fmla="*/ 0 h 0"/>
+            </a:gdLst>
+            <a:ahLst/>
+            <a:cxnLst>
+              <a:cxn ang="0">
+                <a:pos x="csX0" y="csY0"/>
+              </a:cxn>
+              <a:cxn ang="0">
+                <a:pos x="csX1" y="csY1"/>
+              </a:cxn>
+            </a:cxnLst>
+            <a:rect l="l" t="t" r="r" b="b"/>
+            <a:pathLst>
+              <a:path w="339047">
+                <a:moveTo>
+                  <a:pt x="0" y="0"/>
+                </a:moveTo>
+                <a:lnTo>
+                  <a:pt x="339047" y="0"/>
+                </a:lnTo>
+              </a:path>
+            </a:pathLst>
+          </a:custGeom>
+        </p:spPr>
+        <p:style>
+          <a:lnRef idx="3">
+            <a:schemeClr val="accent1"/>
+          </a:lnRef>
+          <a:fillRef idx="0">
+            <a:schemeClr val="accent1"/>
+          </a:fillRef>
+          <a:effectRef idx="2">
+            <a:schemeClr val="accent1"/>
+          </a:effectRef>
+          <a:fontRef idx="minor">
+            <a:schemeClr val="tx1"/>
+          </a:fontRef>
+        </p:style>
+        <p:txBody>
+          <a:bodyPr rtlCol="0" anchor="ctr"/>
+          <a:lstStyle/>
+          <a:p>
+            <a:pPr algn="ctr"/>
+            <a:endParaRPr lang="en-US"/>
+          </a:p>
+        </p:txBody>
+      </p:sp>
+      <p:sp>
+        <p:nvSpPr>
+          <p:cNvPr id="67" name="Freeform: Shape 66">
+            <a:extLst>
+              <a:ext uri="{FF2B5EF4-FFF2-40B4-BE49-F238E27FC236}">
+                <a16:creationId xmlns:a16="http://schemas.microsoft.com/office/drawing/2014/main" id="{1C9E6B3A-8CA7-926D-403D-2E1B5FFE1D49}"/>
+              </a:ext>
+            </a:extLst>
+          </p:cNvPr>
+          <p:cNvSpPr/>
+          <p:nvPr/>
+        </p:nvSpPr>
+        <p:spPr>
+          <a:xfrm>
+            <a:off x="6236413" y="996593"/>
+            <a:ext cx="328774" cy="0"/>
+          </a:xfrm>
+          <a:custGeom>
+            <a:avLst/>
+            <a:gdLst>
+              <a:gd name="csX0" fmla="*/ 0 w 328774"/>
+              <a:gd name="csY0" fmla="*/ 0 h 0"/>
+              <a:gd name="csX1" fmla="*/ 328774 w 328774"/>
+              <a:gd name="csY1" fmla="*/ 0 h 0"/>
+            </a:gdLst>
+            <a:ahLst/>
+            <a:cxnLst>
+              <a:cxn ang="0">
+                <a:pos x="csX0" y="csY0"/>
+              </a:cxn>
+              <a:cxn ang="0">
+                <a:pos x="csX1" y="csY1"/>
+              </a:cxn>
+            </a:cxnLst>
+            <a:rect l="l" t="t" r="r" b="b"/>
+            <a:pathLst>
+              <a:path w="328774">
+                <a:moveTo>
+                  <a:pt x="0" y="0"/>
+                </a:moveTo>
+                <a:lnTo>
+                  <a:pt x="328774" y="0"/>
+                </a:lnTo>
+              </a:path>
+            </a:pathLst>
+          </a:custGeom>
+        </p:spPr>
+        <p:style>
+          <a:lnRef idx="3">
+            <a:schemeClr val="accent1"/>
+          </a:lnRef>
+          <a:fillRef idx="0">
+            <a:schemeClr val="accent1"/>
+          </a:fillRef>
+          <a:effectRef idx="2">
+            <a:schemeClr val="accent1"/>
+          </a:effectRef>
+          <a:fontRef idx="minor">
+            <a:schemeClr val="tx1"/>
           </a:fontRef>
         </p:style>
         <p:txBody>
@@ -26125,7 +26819,7 @@
     </p:spTree>
     <p:extLst>
       <p:ext uri="{BB962C8B-B14F-4D97-AF65-F5344CB8AC3E}">
-        <p14:creationId xmlns:p14="http://schemas.microsoft.com/office/powerpoint/2010/main" val="1663390482"/>
+        <p14:creationId xmlns:p14="http://schemas.microsoft.com/office/powerpoint/2010/main" val="35202502"/>
       </p:ext>
     </p:extLst>
   </p:cSld>
@@ -26136,6 +26830,2709 @@
 </file>
 
 <file path=ppt/slides/slide35.xml><?xml version="1.0" encoding="utf-8"?>
+<p:sld xmlns:a="http://schemas.openxmlformats.org/drawingml/2006/main" xmlns:r="http://schemas.openxmlformats.org/officeDocument/2006/relationships" xmlns:p="http://schemas.openxmlformats.org/presentationml/2006/main">
+  <p:cSld>
+    <p:spTree>
+      <p:nvGrpSpPr>
+        <p:cNvPr id="1" name="">
+          <a:extLst>
+            <a:ext uri="{FF2B5EF4-FFF2-40B4-BE49-F238E27FC236}">
+              <a16:creationId xmlns:a16="http://schemas.microsoft.com/office/drawing/2014/main" id="{6A897ECE-FA3A-41FE-754D-BCA9BB23933F}"/>
+            </a:ext>
+          </a:extLst>
+        </p:cNvPr>
+        <p:cNvGrpSpPr/>
+        <p:nvPr/>
+      </p:nvGrpSpPr>
+      <p:grpSpPr>
+        <a:xfrm>
+          <a:off x="0" y="0"/>
+          <a:ext cx="0" cy="0"/>
+          <a:chOff x="0" y="0"/>
+          <a:chExt cx="0" cy="0"/>
+        </a:xfrm>
+      </p:grpSpPr>
+      <p:sp>
+        <p:nvSpPr>
+          <p:cNvPr id="2" name="Title 1">
+            <a:extLst>
+              <a:ext uri="{FF2B5EF4-FFF2-40B4-BE49-F238E27FC236}">
+                <a16:creationId xmlns:a16="http://schemas.microsoft.com/office/drawing/2014/main" id="{546E7A87-9289-EC2A-02C9-97DA687D1ED8}"/>
+              </a:ext>
+            </a:extLst>
+          </p:cNvPr>
+          <p:cNvSpPr>
+            <a:spLocks noGrp="1"/>
+          </p:cNvSpPr>
+          <p:nvPr>
+            <p:ph type="title"/>
+          </p:nvPr>
+        </p:nvSpPr>
+        <p:spPr>
+          <a:xfrm>
+            <a:off x="1754188" y="452718"/>
+            <a:ext cx="8296646" cy="1400530"/>
+          </a:xfrm>
+        </p:spPr>
+        <p:txBody>
+          <a:bodyPr/>
+          <a:lstStyle/>
+          <a:p>
+            <a:r>
+              <a:rPr lang="en-US" b="1" dirty="0"/>
+              <a:t>Essential EA Meta-Model</a:t>
+            </a:r>
+            <a:br>
+              <a:rPr lang="en-US" b="1" dirty="0"/>
+            </a:br>
+            <a:r>
+              <a:rPr lang="en-US" b="1" dirty="0"/>
+              <a:t>- Business Layer - 17</a:t>
+            </a:r>
+          </a:p>
+        </p:txBody>
+      </p:sp>
+      <p:sp>
+        <p:nvSpPr>
+          <p:cNvPr id="4" name="Title 1">
+            <a:extLst>
+              <a:ext uri="{FF2B5EF4-FFF2-40B4-BE49-F238E27FC236}">
+                <a16:creationId xmlns:a16="http://schemas.microsoft.com/office/drawing/2014/main" id="{FDDBDF6C-C964-1BC5-EE85-14EE2806E8C3}"/>
+              </a:ext>
+            </a:extLst>
+          </p:cNvPr>
+          <p:cNvSpPr txBox="1">
+            <a:spLocks/>
+          </p:cNvSpPr>
+          <p:nvPr/>
+        </p:nvSpPr>
+        <p:spPr>
+          <a:xfrm>
+            <a:off x="0" y="3143"/>
+            <a:ext cx="1754188" cy="1058013"/>
+          </a:xfrm>
+          <a:prstGeom prst="rect">
+            <a:avLst/>
+          </a:prstGeom>
+        </p:spPr>
+        <p:txBody>
+          <a:bodyPr vert="horz" lIns="91440" tIns="45720" rIns="91440" bIns="45720" rtlCol="0" anchor="ctr">
+            <a:noAutofit/>
+          </a:bodyPr>
+          <a:lstStyle>
+            <a:lvl1pPr algn="l" defTabSz="457200" rtl="0" eaLnBrk="1" latinLnBrk="0" hangingPunct="1">
+              <a:spcBef>
+                <a:spcPct val="0"/>
+              </a:spcBef>
+              <a:buNone/>
+              <a:defRPr sz="7200" b="0" i="0" kern="1200">
+                <a:solidFill>
+                  <a:schemeClr val="tx2"/>
+                </a:solidFill>
+                <a:latin typeface="+mj-lt"/>
+                <a:ea typeface="+mj-ea"/>
+                <a:cs typeface="+mj-cs"/>
+              </a:defRPr>
+            </a:lvl1pPr>
+            <a:lvl2pPr eaLnBrk="1" hangingPunct="1">
+              <a:defRPr>
+                <a:solidFill>
+                  <a:schemeClr val="tx2"/>
+                </a:solidFill>
+              </a:defRPr>
+            </a:lvl2pPr>
+            <a:lvl3pPr eaLnBrk="1" hangingPunct="1">
+              <a:defRPr>
+                <a:solidFill>
+                  <a:schemeClr val="tx2"/>
+                </a:solidFill>
+              </a:defRPr>
+            </a:lvl3pPr>
+            <a:lvl4pPr eaLnBrk="1" hangingPunct="1">
+              <a:defRPr>
+                <a:solidFill>
+                  <a:schemeClr val="tx2"/>
+                </a:solidFill>
+              </a:defRPr>
+            </a:lvl4pPr>
+            <a:lvl5pPr eaLnBrk="1" hangingPunct="1">
+              <a:defRPr>
+                <a:solidFill>
+                  <a:schemeClr val="tx2"/>
+                </a:solidFill>
+              </a:defRPr>
+            </a:lvl5pPr>
+            <a:lvl6pPr eaLnBrk="1" hangingPunct="1">
+              <a:defRPr>
+                <a:solidFill>
+                  <a:schemeClr val="tx2"/>
+                </a:solidFill>
+              </a:defRPr>
+            </a:lvl6pPr>
+            <a:lvl7pPr eaLnBrk="1" hangingPunct="1">
+              <a:defRPr>
+                <a:solidFill>
+                  <a:schemeClr val="tx2"/>
+                </a:solidFill>
+              </a:defRPr>
+            </a:lvl7pPr>
+            <a:lvl8pPr eaLnBrk="1" hangingPunct="1">
+              <a:defRPr>
+                <a:solidFill>
+                  <a:schemeClr val="tx2"/>
+                </a:solidFill>
+              </a:defRPr>
+            </a:lvl8pPr>
+            <a:lvl9pPr eaLnBrk="1" hangingPunct="1">
+              <a:defRPr>
+                <a:solidFill>
+                  <a:schemeClr val="tx2"/>
+                </a:solidFill>
+              </a:defRPr>
+            </a:lvl9pPr>
+          </a:lstStyle>
+          <a:p>
+            <a:pPr algn="ctr"/>
+            <a:r>
+              <a:rPr lang="en-US" b="1" dirty="0">
+                <a:solidFill>
+                  <a:schemeClr val="accent1">
+                    <a:lumMod val="75000"/>
+                  </a:schemeClr>
+                </a:solidFill>
+              </a:rPr>
+              <a:t>023</a:t>
+            </a:r>
+            <a:endParaRPr lang="ru-RU" b="1" dirty="0">
+              <a:solidFill>
+                <a:schemeClr val="accent1">
+                  <a:lumMod val="75000"/>
+                </a:schemeClr>
+              </a:solidFill>
+            </a:endParaRPr>
+          </a:p>
+        </p:txBody>
+      </p:sp>
+      <p:pic>
+        <p:nvPicPr>
+          <p:cNvPr id="3" name="Picture 2">
+            <a:extLst>
+              <a:ext uri="{FF2B5EF4-FFF2-40B4-BE49-F238E27FC236}">
+                <a16:creationId xmlns:a16="http://schemas.microsoft.com/office/drawing/2014/main" id="{701EEA8F-A5B3-C76B-7DEF-B5365025109B}"/>
+              </a:ext>
+            </a:extLst>
+          </p:cNvPr>
+          <p:cNvPicPr>
+            <a:picLocks noChangeAspect="1"/>
+          </p:cNvPicPr>
+          <p:nvPr/>
+        </p:nvPicPr>
+        <p:blipFill>
+          <a:blip r:embed="rId2"/>
+          <a:stretch>
+            <a:fillRect/>
+          </a:stretch>
+        </p:blipFill>
+        <p:spPr>
+          <a:xfrm>
+            <a:off x="236841" y="1853248"/>
+            <a:ext cx="8296646" cy="4669795"/>
+          </a:xfrm>
+          <a:prstGeom prst="rect">
+            <a:avLst/>
+          </a:prstGeom>
+          <a:ln>
+            <a:noFill/>
+          </a:ln>
+          <a:effectLst>
+            <a:outerShdw blurRad="292100" dist="139700" dir="2700000" algn="tl" rotWithShape="0">
+              <a:srgbClr val="333333">
+                <a:alpha val="65000"/>
+              </a:srgbClr>
+            </a:outerShdw>
+          </a:effectLst>
+        </p:spPr>
+      </p:pic>
+      <p:sp>
+        <p:nvSpPr>
+          <p:cNvPr id="6" name="Rectangle: Rounded Corners 5">
+            <a:extLst>
+              <a:ext uri="{FF2B5EF4-FFF2-40B4-BE49-F238E27FC236}">
+                <a16:creationId xmlns:a16="http://schemas.microsoft.com/office/drawing/2014/main" id="{979563B2-F981-DD92-4DE7-B64522230230}"/>
+              </a:ext>
+            </a:extLst>
+          </p:cNvPr>
+          <p:cNvSpPr/>
+          <p:nvPr/>
+        </p:nvSpPr>
+        <p:spPr>
+          <a:xfrm>
+            <a:off x="596436" y="2188396"/>
+            <a:ext cx="2054832" cy="2671280"/>
+          </a:xfrm>
+          <a:prstGeom prst="roundRect">
+            <a:avLst>
+              <a:gd name="adj" fmla="val 6916"/>
+            </a:avLst>
+          </a:prstGeom>
+          <a:solidFill>
+            <a:srgbClr val="FFCC66">
+              <a:alpha val="20000"/>
+            </a:srgbClr>
+          </a:solidFill>
+          <a:ln>
+            <a:solidFill>
+              <a:srgbClr val="92D050"/>
+            </a:solidFill>
+          </a:ln>
+        </p:spPr>
+        <p:style>
+          <a:lnRef idx="2">
+            <a:schemeClr val="accent1">
+              <a:shade val="15000"/>
+            </a:schemeClr>
+          </a:lnRef>
+          <a:fillRef idx="1">
+            <a:schemeClr val="accent1"/>
+          </a:fillRef>
+          <a:effectRef idx="0">
+            <a:schemeClr val="accent1"/>
+          </a:effectRef>
+          <a:fontRef idx="minor">
+            <a:schemeClr val="lt1"/>
+          </a:fontRef>
+        </p:style>
+        <p:txBody>
+          <a:bodyPr rtlCol="0" anchor="ctr"/>
+          <a:lstStyle/>
+          <a:p>
+            <a:pPr algn="ctr"/>
+            <a:endParaRPr lang="en-US"/>
+          </a:p>
+        </p:txBody>
+      </p:sp>
+      <p:pic>
+        <p:nvPicPr>
+          <p:cNvPr id="11" name="Picture 10">
+            <a:extLst>
+              <a:ext uri="{FF2B5EF4-FFF2-40B4-BE49-F238E27FC236}">
+                <a16:creationId xmlns:a16="http://schemas.microsoft.com/office/drawing/2014/main" id="{E46B4F72-91A6-20EE-AE4B-4D35DC9C9D9C}"/>
+              </a:ext>
+            </a:extLst>
+          </p:cNvPr>
+          <p:cNvPicPr>
+            <a:picLocks noChangeAspect="1"/>
+          </p:cNvPicPr>
+          <p:nvPr/>
+        </p:nvPicPr>
+        <p:blipFill>
+          <a:blip r:embed="rId3"/>
+          <a:stretch>
+            <a:fillRect/>
+          </a:stretch>
+        </p:blipFill>
+        <p:spPr>
+          <a:xfrm>
+            <a:off x="157000" y="1094226"/>
+            <a:ext cx="362976" cy="362976"/>
+          </a:xfrm>
+          <a:prstGeom prst="rect">
+            <a:avLst/>
+          </a:prstGeom>
+          <a:ln>
+            <a:noFill/>
+          </a:ln>
+          <a:effectLst>
+            <a:outerShdw blurRad="292100" dist="139700" dir="2700000" algn="tl" rotWithShape="0">
+              <a:srgbClr val="333333">
+                <a:alpha val="65000"/>
+              </a:srgbClr>
+            </a:outerShdw>
+          </a:effectLst>
+        </p:spPr>
+      </p:pic>
+      <p:pic>
+        <p:nvPicPr>
+          <p:cNvPr id="12" name="Picture 11">
+            <a:extLst>
+              <a:ext uri="{FF2B5EF4-FFF2-40B4-BE49-F238E27FC236}">
+                <a16:creationId xmlns:a16="http://schemas.microsoft.com/office/drawing/2014/main" id="{2774F60F-2144-8F0A-9F1B-C42A4765AD7D}"/>
+              </a:ext>
+            </a:extLst>
+          </p:cNvPr>
+          <p:cNvPicPr>
+            <a:picLocks noChangeAspect="1"/>
+          </p:cNvPicPr>
+          <p:nvPr/>
+        </p:nvPicPr>
+        <p:blipFill>
+          <a:blip r:embed="rId4"/>
+          <a:stretch>
+            <a:fillRect/>
+          </a:stretch>
+        </p:blipFill>
+        <p:spPr>
+          <a:xfrm>
+            <a:off x="611241" y="1094226"/>
+            <a:ext cx="362976" cy="362976"/>
+          </a:xfrm>
+          <a:prstGeom prst="rect">
+            <a:avLst/>
+          </a:prstGeom>
+          <a:ln>
+            <a:noFill/>
+          </a:ln>
+          <a:effectLst>
+            <a:outerShdw blurRad="292100" dist="139700" dir="2700000" algn="tl" rotWithShape="0">
+              <a:srgbClr val="333333">
+                <a:alpha val="65000"/>
+              </a:srgbClr>
+            </a:outerShdw>
+          </a:effectLst>
+        </p:spPr>
+      </p:pic>
+      <p:pic>
+        <p:nvPicPr>
+          <p:cNvPr id="13" name="Picture 12">
+            <a:extLst>
+              <a:ext uri="{FF2B5EF4-FFF2-40B4-BE49-F238E27FC236}">
+                <a16:creationId xmlns:a16="http://schemas.microsoft.com/office/drawing/2014/main" id="{AAFFD93E-ACE4-740C-A05D-C11A4B9BA843}"/>
+              </a:ext>
+            </a:extLst>
+          </p:cNvPr>
+          <p:cNvPicPr>
+            <a:picLocks noChangeAspect="1"/>
+          </p:cNvPicPr>
+          <p:nvPr/>
+        </p:nvPicPr>
+        <p:blipFill>
+          <a:blip r:embed="rId5"/>
+          <a:stretch>
+            <a:fillRect/>
+          </a:stretch>
+        </p:blipFill>
+        <p:spPr>
+          <a:xfrm>
+            <a:off x="1065482" y="1094226"/>
+            <a:ext cx="371111" cy="362976"/>
+          </a:xfrm>
+          <a:prstGeom prst="rect">
+            <a:avLst/>
+          </a:prstGeom>
+          <a:ln>
+            <a:noFill/>
+          </a:ln>
+          <a:effectLst>
+            <a:outerShdw blurRad="292100" dist="139700" dir="2700000" algn="tl" rotWithShape="0">
+              <a:srgbClr val="333333">
+                <a:alpha val="65000"/>
+              </a:srgbClr>
+            </a:outerShdw>
+          </a:effectLst>
+        </p:spPr>
+      </p:pic>
+      <p:pic>
+        <p:nvPicPr>
+          <p:cNvPr id="7" name="Picture 6">
+            <a:extLst>
+              <a:ext uri="{FF2B5EF4-FFF2-40B4-BE49-F238E27FC236}">
+                <a16:creationId xmlns:a16="http://schemas.microsoft.com/office/drawing/2014/main" id="{3898BB5B-1016-862E-9F55-7F20ABEFE39A}"/>
+              </a:ext>
+            </a:extLst>
+          </p:cNvPr>
+          <p:cNvPicPr>
+            <a:picLocks noChangeAspect="1"/>
+          </p:cNvPicPr>
+          <p:nvPr/>
+        </p:nvPicPr>
+        <p:blipFill>
+          <a:blip r:embed="rId6"/>
+          <a:stretch>
+            <a:fillRect/>
+          </a:stretch>
+        </p:blipFill>
+        <p:spPr>
+          <a:xfrm>
+            <a:off x="5368476" y="1853248"/>
+            <a:ext cx="6510221" cy="4345473"/>
+          </a:xfrm>
+          <a:prstGeom prst="roundRect">
+            <a:avLst>
+              <a:gd name="adj" fmla="val 16667"/>
+            </a:avLst>
+          </a:prstGeom>
+          <a:ln>
+            <a:noFill/>
+          </a:ln>
+          <a:effectLst>
+            <a:outerShdw blurRad="152400" dist="12000" dir="900000" sy="98000" kx="110000" ky="200000" algn="tl" rotWithShape="0">
+              <a:srgbClr val="000000">
+                <a:alpha val="30000"/>
+              </a:srgbClr>
+            </a:outerShdw>
+          </a:effectLst>
+          <a:scene3d>
+            <a:camera prst="perspectiveRelaxed">
+              <a:rot lat="19800000" lon="1200000" rev="20820000"/>
+            </a:camera>
+            <a:lightRig rig="threePt" dir="t"/>
+          </a:scene3d>
+          <a:sp3d contourW="6350" prstMaterial="matte">
+            <a:bevelT w="101600" h="101600"/>
+            <a:contourClr>
+              <a:srgbClr val="969696"/>
+            </a:contourClr>
+          </a:sp3d>
+        </p:spPr>
+      </p:pic>
+    </p:spTree>
+    <p:extLst>
+      <p:ext uri="{BB962C8B-B14F-4D97-AF65-F5344CB8AC3E}">
+        <p14:creationId xmlns:p14="http://schemas.microsoft.com/office/powerpoint/2010/main" val="3039420484"/>
+      </p:ext>
+    </p:extLst>
+  </p:cSld>
+  <p:clrMapOvr>
+    <a:masterClrMapping/>
+  </p:clrMapOvr>
+</p:sld>
+</file>
+
+<file path=ppt/slides/slide36.xml><?xml version="1.0" encoding="utf-8"?>
+<p:sld xmlns:a="http://schemas.openxmlformats.org/drawingml/2006/main" xmlns:r="http://schemas.openxmlformats.org/officeDocument/2006/relationships" xmlns:p="http://schemas.openxmlformats.org/presentationml/2006/main">
+  <p:cSld>
+    <p:spTree>
+      <p:nvGrpSpPr>
+        <p:cNvPr id="1" name="">
+          <a:extLst>
+            <a:ext uri="{FF2B5EF4-FFF2-40B4-BE49-F238E27FC236}">
+              <a16:creationId xmlns:a16="http://schemas.microsoft.com/office/drawing/2014/main" id="{1B417BCF-5909-B942-100F-E65BCB68DBED}"/>
+            </a:ext>
+          </a:extLst>
+        </p:cNvPr>
+        <p:cNvGrpSpPr/>
+        <p:nvPr/>
+      </p:nvGrpSpPr>
+      <p:grpSpPr>
+        <a:xfrm>
+          <a:off x="0" y="0"/>
+          <a:ext cx="0" cy="0"/>
+          <a:chOff x="0" y="0"/>
+          <a:chExt cx="0" cy="0"/>
+        </a:xfrm>
+      </p:grpSpPr>
+      <p:pic>
+        <p:nvPicPr>
+          <p:cNvPr id="3" name="Picture 2">
+            <a:extLst>
+              <a:ext uri="{FF2B5EF4-FFF2-40B4-BE49-F238E27FC236}">
+                <a16:creationId xmlns:a16="http://schemas.microsoft.com/office/drawing/2014/main" id="{E27B8EF9-6F5A-F6A4-B564-A6B30750241D}"/>
+              </a:ext>
+            </a:extLst>
+          </p:cNvPr>
+          <p:cNvPicPr>
+            <a:picLocks noChangeAspect="1"/>
+          </p:cNvPicPr>
+          <p:nvPr/>
+        </p:nvPicPr>
+        <p:blipFill>
+          <a:blip r:embed="rId2"/>
+          <a:stretch>
+            <a:fillRect/>
+          </a:stretch>
+        </p:blipFill>
+        <p:spPr>
+          <a:xfrm>
+            <a:off x="2592309" y="0"/>
+            <a:ext cx="7007382" cy="6858000"/>
+          </a:xfrm>
+          <a:prstGeom prst="rect">
+            <a:avLst/>
+          </a:prstGeom>
+        </p:spPr>
+      </p:pic>
+      <p:sp>
+        <p:nvSpPr>
+          <p:cNvPr id="5" name="Rectangle 4">
+            <a:extLst>
+              <a:ext uri="{FF2B5EF4-FFF2-40B4-BE49-F238E27FC236}">
+                <a16:creationId xmlns:a16="http://schemas.microsoft.com/office/drawing/2014/main" id="{78AD7B39-1BBC-32BF-6282-A185E398EA7A}"/>
+              </a:ext>
+            </a:extLst>
+          </p:cNvPr>
+          <p:cNvSpPr/>
+          <p:nvPr/>
+        </p:nvSpPr>
+        <p:spPr>
+          <a:xfrm>
+            <a:off x="3619568" y="0"/>
+            <a:ext cx="233295" cy="181579"/>
+          </a:xfrm>
+          <a:prstGeom prst="rect">
+            <a:avLst/>
+          </a:prstGeom>
+          <a:solidFill>
+            <a:srgbClr val="ACD433">
+              <a:alpha val="50196"/>
+            </a:srgbClr>
+          </a:solidFill>
+        </p:spPr>
+        <p:style>
+          <a:lnRef idx="2">
+            <a:schemeClr val="accent1">
+              <a:shade val="15000"/>
+            </a:schemeClr>
+          </a:lnRef>
+          <a:fillRef idx="1">
+            <a:schemeClr val="accent1"/>
+          </a:fillRef>
+          <a:effectRef idx="0">
+            <a:schemeClr val="accent1"/>
+          </a:effectRef>
+          <a:fontRef idx="minor">
+            <a:schemeClr val="lt1"/>
+          </a:fontRef>
+        </p:style>
+        <p:txBody>
+          <a:bodyPr rtlCol="0" anchor="ctr"/>
+          <a:lstStyle/>
+          <a:p>
+            <a:pPr algn="ctr"/>
+            <a:endParaRPr lang="en-US"/>
+          </a:p>
+        </p:txBody>
+      </p:sp>
+      <p:sp>
+        <p:nvSpPr>
+          <p:cNvPr id="6" name="Rectangle 5">
+            <a:extLst>
+              <a:ext uri="{FF2B5EF4-FFF2-40B4-BE49-F238E27FC236}">
+                <a16:creationId xmlns:a16="http://schemas.microsoft.com/office/drawing/2014/main" id="{1145BB57-67F6-63F8-863E-D1336749B22D}"/>
+              </a:ext>
+            </a:extLst>
+          </p:cNvPr>
+          <p:cNvSpPr/>
+          <p:nvPr/>
+        </p:nvSpPr>
+        <p:spPr>
+          <a:xfrm>
+            <a:off x="6757680" y="424700"/>
+            <a:ext cx="1028938" cy="436792"/>
+          </a:xfrm>
+          <a:prstGeom prst="rect">
+            <a:avLst/>
+          </a:prstGeom>
+          <a:solidFill>
+            <a:schemeClr val="bg2">
+              <a:lumMod val="20000"/>
+              <a:lumOff val="80000"/>
+              <a:alpha val="50196"/>
+            </a:schemeClr>
+          </a:solidFill>
+        </p:spPr>
+        <p:style>
+          <a:lnRef idx="2">
+            <a:schemeClr val="accent1">
+              <a:shade val="15000"/>
+            </a:schemeClr>
+          </a:lnRef>
+          <a:fillRef idx="1">
+            <a:schemeClr val="accent1"/>
+          </a:fillRef>
+          <a:effectRef idx="0">
+            <a:schemeClr val="accent1"/>
+          </a:effectRef>
+          <a:fontRef idx="minor">
+            <a:schemeClr val="lt1"/>
+          </a:fontRef>
+        </p:style>
+        <p:txBody>
+          <a:bodyPr rtlCol="0" anchor="ctr"/>
+          <a:lstStyle/>
+          <a:p>
+            <a:pPr algn="ctr"/>
+            <a:endParaRPr lang="en-US"/>
+          </a:p>
+        </p:txBody>
+      </p:sp>
+      <p:sp>
+        <p:nvSpPr>
+          <p:cNvPr id="8" name="Rectangle 7">
+            <a:extLst>
+              <a:ext uri="{FF2B5EF4-FFF2-40B4-BE49-F238E27FC236}">
+                <a16:creationId xmlns:a16="http://schemas.microsoft.com/office/drawing/2014/main" id="{39B3D784-936E-F040-E993-539CB824FE9D}"/>
+              </a:ext>
+            </a:extLst>
+          </p:cNvPr>
+          <p:cNvSpPr/>
+          <p:nvPr/>
+        </p:nvSpPr>
+        <p:spPr>
+          <a:xfrm>
+            <a:off x="5065260" y="733425"/>
+            <a:ext cx="318398" cy="225099"/>
+          </a:xfrm>
+          <a:prstGeom prst="rect">
+            <a:avLst/>
+          </a:prstGeom>
+          <a:solidFill>
+            <a:srgbClr val="ACD433">
+              <a:alpha val="50196"/>
+            </a:srgbClr>
+          </a:solidFill>
+        </p:spPr>
+        <p:style>
+          <a:lnRef idx="2">
+            <a:schemeClr val="accent1">
+              <a:shade val="15000"/>
+            </a:schemeClr>
+          </a:lnRef>
+          <a:fillRef idx="1">
+            <a:schemeClr val="accent1"/>
+          </a:fillRef>
+          <a:effectRef idx="0">
+            <a:schemeClr val="accent1"/>
+          </a:effectRef>
+          <a:fontRef idx="minor">
+            <a:schemeClr val="lt1"/>
+          </a:fontRef>
+        </p:style>
+        <p:txBody>
+          <a:bodyPr rtlCol="0" anchor="ctr"/>
+          <a:lstStyle/>
+          <a:p>
+            <a:pPr algn="ctr"/>
+            <a:endParaRPr lang="en-US"/>
+          </a:p>
+        </p:txBody>
+      </p:sp>
+      <p:sp>
+        <p:nvSpPr>
+          <p:cNvPr id="15" name="Rectangle 14">
+            <a:extLst>
+              <a:ext uri="{FF2B5EF4-FFF2-40B4-BE49-F238E27FC236}">
+                <a16:creationId xmlns:a16="http://schemas.microsoft.com/office/drawing/2014/main" id="{15AABCEF-7171-15E5-61D9-0A731BA1A4F3}"/>
+              </a:ext>
+            </a:extLst>
+          </p:cNvPr>
+          <p:cNvSpPr/>
+          <p:nvPr/>
+        </p:nvSpPr>
+        <p:spPr>
+          <a:xfrm>
+            <a:off x="3788357" y="1447841"/>
+            <a:ext cx="233295" cy="181579"/>
+          </a:xfrm>
+          <a:prstGeom prst="rect">
+            <a:avLst/>
+          </a:prstGeom>
+          <a:solidFill>
+            <a:srgbClr val="ACD433">
+              <a:alpha val="50196"/>
+            </a:srgbClr>
+          </a:solidFill>
+        </p:spPr>
+        <p:style>
+          <a:lnRef idx="2">
+            <a:schemeClr val="accent1">
+              <a:shade val="15000"/>
+            </a:schemeClr>
+          </a:lnRef>
+          <a:fillRef idx="1">
+            <a:schemeClr val="accent1"/>
+          </a:fillRef>
+          <a:effectRef idx="0">
+            <a:schemeClr val="accent1"/>
+          </a:effectRef>
+          <a:fontRef idx="minor">
+            <a:schemeClr val="lt1"/>
+          </a:fontRef>
+        </p:style>
+        <p:txBody>
+          <a:bodyPr rtlCol="0" anchor="ctr"/>
+          <a:lstStyle/>
+          <a:p>
+            <a:pPr algn="ctr"/>
+            <a:endParaRPr lang="en-US"/>
+          </a:p>
+        </p:txBody>
+      </p:sp>
+      <p:sp>
+        <p:nvSpPr>
+          <p:cNvPr id="23" name="Rectangle 22">
+            <a:extLst>
+              <a:ext uri="{FF2B5EF4-FFF2-40B4-BE49-F238E27FC236}">
+                <a16:creationId xmlns:a16="http://schemas.microsoft.com/office/drawing/2014/main" id="{0297789E-78D2-4EB4-E6BB-12C4E6EDD0D2}"/>
+              </a:ext>
+            </a:extLst>
+          </p:cNvPr>
+          <p:cNvSpPr/>
+          <p:nvPr/>
+        </p:nvSpPr>
+        <p:spPr>
+          <a:xfrm>
+            <a:off x="6285303" y="1568449"/>
+            <a:ext cx="1278993" cy="252208"/>
+          </a:xfrm>
+          <a:prstGeom prst="rect">
+            <a:avLst/>
+          </a:prstGeom>
+          <a:solidFill>
+            <a:schemeClr val="bg2">
+              <a:lumMod val="20000"/>
+              <a:lumOff val="80000"/>
+              <a:alpha val="50196"/>
+            </a:schemeClr>
+          </a:solidFill>
+        </p:spPr>
+        <p:style>
+          <a:lnRef idx="2">
+            <a:schemeClr val="accent1">
+              <a:shade val="15000"/>
+            </a:schemeClr>
+          </a:lnRef>
+          <a:fillRef idx="1">
+            <a:schemeClr val="accent1"/>
+          </a:fillRef>
+          <a:effectRef idx="0">
+            <a:schemeClr val="accent1"/>
+          </a:effectRef>
+          <a:fontRef idx="minor">
+            <a:schemeClr val="lt1"/>
+          </a:fontRef>
+        </p:style>
+        <p:txBody>
+          <a:bodyPr rtlCol="0" anchor="ctr"/>
+          <a:lstStyle/>
+          <a:p>
+            <a:pPr algn="ctr"/>
+            <a:endParaRPr lang="en-US"/>
+          </a:p>
+        </p:txBody>
+      </p:sp>
+      <p:sp>
+        <p:nvSpPr>
+          <p:cNvPr id="20" name="Rectangle 19">
+            <a:extLst>
+              <a:ext uri="{FF2B5EF4-FFF2-40B4-BE49-F238E27FC236}">
+                <a16:creationId xmlns:a16="http://schemas.microsoft.com/office/drawing/2014/main" id="{A2EC0391-0D5E-6492-01F6-775742084690}"/>
+              </a:ext>
+            </a:extLst>
+          </p:cNvPr>
+          <p:cNvSpPr/>
+          <p:nvPr/>
+        </p:nvSpPr>
+        <p:spPr>
+          <a:xfrm>
+            <a:off x="6191487" y="2160350"/>
+            <a:ext cx="312055" cy="181579"/>
+          </a:xfrm>
+          <a:prstGeom prst="rect">
+            <a:avLst/>
+          </a:prstGeom>
+          <a:solidFill>
+            <a:srgbClr val="ACD433">
+              <a:alpha val="50196"/>
+            </a:srgbClr>
+          </a:solidFill>
+        </p:spPr>
+        <p:style>
+          <a:lnRef idx="2">
+            <a:schemeClr val="accent1">
+              <a:shade val="15000"/>
+            </a:schemeClr>
+          </a:lnRef>
+          <a:fillRef idx="1">
+            <a:schemeClr val="accent1"/>
+          </a:fillRef>
+          <a:effectRef idx="0">
+            <a:schemeClr val="accent1"/>
+          </a:effectRef>
+          <a:fontRef idx="minor">
+            <a:schemeClr val="lt1"/>
+          </a:fontRef>
+        </p:style>
+        <p:txBody>
+          <a:bodyPr rtlCol="0" anchor="ctr"/>
+          <a:lstStyle/>
+          <a:p>
+            <a:pPr algn="ctr"/>
+            <a:endParaRPr lang="en-US"/>
+          </a:p>
+        </p:txBody>
+      </p:sp>
+      <p:sp>
+        <p:nvSpPr>
+          <p:cNvPr id="25" name="Rectangle 24">
+            <a:extLst>
+              <a:ext uri="{FF2B5EF4-FFF2-40B4-BE49-F238E27FC236}">
+                <a16:creationId xmlns:a16="http://schemas.microsoft.com/office/drawing/2014/main" id="{1B29C1FF-1124-3ADB-04ED-B0F9E3B5BEB0}"/>
+              </a:ext>
+            </a:extLst>
+          </p:cNvPr>
+          <p:cNvSpPr/>
+          <p:nvPr/>
+        </p:nvSpPr>
+        <p:spPr>
+          <a:xfrm rot="8938082">
+            <a:off x="5502940" y="1047172"/>
+            <a:ext cx="76042" cy="1357830"/>
+          </a:xfrm>
+          <a:prstGeom prst="rect">
+            <a:avLst/>
+          </a:prstGeom>
+          <a:solidFill>
+            <a:schemeClr val="accent3">
+              <a:alpha val="50196"/>
+            </a:schemeClr>
+          </a:solidFill>
+        </p:spPr>
+        <p:style>
+          <a:lnRef idx="2">
+            <a:schemeClr val="accent1">
+              <a:shade val="15000"/>
+            </a:schemeClr>
+          </a:lnRef>
+          <a:fillRef idx="1">
+            <a:schemeClr val="accent1"/>
+          </a:fillRef>
+          <a:effectRef idx="0">
+            <a:schemeClr val="accent1"/>
+          </a:effectRef>
+          <a:fontRef idx="minor">
+            <a:schemeClr val="lt1"/>
+          </a:fontRef>
+        </p:style>
+        <p:txBody>
+          <a:bodyPr rtlCol="0" anchor="ctr"/>
+          <a:lstStyle/>
+          <a:p>
+            <a:pPr algn="ctr"/>
+            <a:endParaRPr lang="en-US"/>
+          </a:p>
+        </p:txBody>
+      </p:sp>
+      <p:sp>
+        <p:nvSpPr>
+          <p:cNvPr id="26" name="Rectangle 25">
+            <a:extLst>
+              <a:ext uri="{FF2B5EF4-FFF2-40B4-BE49-F238E27FC236}">
+                <a16:creationId xmlns:a16="http://schemas.microsoft.com/office/drawing/2014/main" id="{DB9ADCB4-FB81-56C8-65EE-D67282827F64}"/>
+              </a:ext>
+            </a:extLst>
+          </p:cNvPr>
+          <p:cNvSpPr/>
+          <p:nvPr/>
+        </p:nvSpPr>
+        <p:spPr>
+          <a:xfrm rot="10800000">
+            <a:off x="5873291" y="1176175"/>
+            <a:ext cx="90481" cy="1117544"/>
+          </a:xfrm>
+          <a:prstGeom prst="rect">
+            <a:avLst/>
+          </a:prstGeom>
+          <a:solidFill>
+            <a:schemeClr val="accent3">
+              <a:alpha val="50196"/>
+            </a:schemeClr>
+          </a:solidFill>
+        </p:spPr>
+        <p:style>
+          <a:lnRef idx="2">
+            <a:schemeClr val="accent1">
+              <a:shade val="15000"/>
+            </a:schemeClr>
+          </a:lnRef>
+          <a:fillRef idx="1">
+            <a:schemeClr val="accent1"/>
+          </a:fillRef>
+          <a:effectRef idx="0">
+            <a:schemeClr val="accent1"/>
+          </a:effectRef>
+          <a:fontRef idx="minor">
+            <a:schemeClr val="lt1"/>
+          </a:fontRef>
+        </p:style>
+        <p:txBody>
+          <a:bodyPr rtlCol="0" anchor="ctr"/>
+          <a:lstStyle/>
+          <a:p>
+            <a:pPr algn="ctr"/>
+            <a:endParaRPr lang="en-US"/>
+          </a:p>
+        </p:txBody>
+      </p:sp>
+      <p:sp>
+        <p:nvSpPr>
+          <p:cNvPr id="27" name="Rectangle 26">
+            <a:extLst>
+              <a:ext uri="{FF2B5EF4-FFF2-40B4-BE49-F238E27FC236}">
+                <a16:creationId xmlns:a16="http://schemas.microsoft.com/office/drawing/2014/main" id="{1CA24398-D52D-57EC-EBB6-2158D05BE368}"/>
+              </a:ext>
+            </a:extLst>
+          </p:cNvPr>
+          <p:cNvSpPr/>
+          <p:nvPr/>
+        </p:nvSpPr>
+        <p:spPr>
+          <a:xfrm rot="12691686" flipH="1">
+            <a:off x="5408785" y="1079456"/>
+            <a:ext cx="55472" cy="1281028"/>
+          </a:xfrm>
+          <a:prstGeom prst="rect">
+            <a:avLst/>
+          </a:prstGeom>
+          <a:solidFill>
+            <a:schemeClr val="accent3">
+              <a:alpha val="50196"/>
+            </a:schemeClr>
+          </a:solidFill>
+        </p:spPr>
+        <p:style>
+          <a:lnRef idx="2">
+            <a:schemeClr val="accent1">
+              <a:shade val="15000"/>
+            </a:schemeClr>
+          </a:lnRef>
+          <a:fillRef idx="1">
+            <a:schemeClr val="accent1"/>
+          </a:fillRef>
+          <a:effectRef idx="0">
+            <a:schemeClr val="accent1"/>
+          </a:effectRef>
+          <a:fontRef idx="minor">
+            <a:schemeClr val="lt1"/>
+          </a:fontRef>
+        </p:style>
+        <p:txBody>
+          <a:bodyPr rtlCol="0" anchor="ctr"/>
+          <a:lstStyle/>
+          <a:p>
+            <a:pPr algn="ctr"/>
+            <a:endParaRPr lang="en-US"/>
+          </a:p>
+        </p:txBody>
+      </p:sp>
+      <p:sp>
+        <p:nvSpPr>
+          <p:cNvPr id="34" name="Rectangle 33">
+            <a:extLst>
+              <a:ext uri="{FF2B5EF4-FFF2-40B4-BE49-F238E27FC236}">
+                <a16:creationId xmlns:a16="http://schemas.microsoft.com/office/drawing/2014/main" id="{113075E4-1736-5E8F-5C22-4A2DC7EF4862}"/>
+              </a:ext>
+            </a:extLst>
+          </p:cNvPr>
+          <p:cNvSpPr/>
+          <p:nvPr/>
+        </p:nvSpPr>
+        <p:spPr>
+          <a:xfrm rot="9307021">
+            <a:off x="6527495" y="1029611"/>
+            <a:ext cx="45719" cy="2689598"/>
+          </a:xfrm>
+          <a:prstGeom prst="rect">
+            <a:avLst/>
+          </a:prstGeom>
+          <a:solidFill>
+            <a:schemeClr val="accent3">
+              <a:alpha val="50196"/>
+            </a:schemeClr>
+          </a:solidFill>
+        </p:spPr>
+        <p:style>
+          <a:lnRef idx="2">
+            <a:schemeClr val="accent1">
+              <a:shade val="15000"/>
+            </a:schemeClr>
+          </a:lnRef>
+          <a:fillRef idx="1">
+            <a:schemeClr val="accent1"/>
+          </a:fillRef>
+          <a:effectRef idx="0">
+            <a:schemeClr val="accent1"/>
+          </a:effectRef>
+          <a:fontRef idx="minor">
+            <a:schemeClr val="lt1"/>
+          </a:fontRef>
+        </p:style>
+        <p:txBody>
+          <a:bodyPr rtlCol="0" anchor="ctr"/>
+          <a:lstStyle/>
+          <a:p>
+            <a:pPr algn="ctr"/>
+            <a:endParaRPr lang="en-US"/>
+          </a:p>
+        </p:txBody>
+      </p:sp>
+      <p:sp>
+        <p:nvSpPr>
+          <p:cNvPr id="35" name="Rectangle 34">
+            <a:extLst>
+              <a:ext uri="{FF2B5EF4-FFF2-40B4-BE49-F238E27FC236}">
+                <a16:creationId xmlns:a16="http://schemas.microsoft.com/office/drawing/2014/main" id="{498BA96D-F5F7-A370-CBFA-97B723169683}"/>
+              </a:ext>
+            </a:extLst>
+          </p:cNvPr>
+          <p:cNvSpPr/>
+          <p:nvPr/>
+        </p:nvSpPr>
+        <p:spPr>
+          <a:xfrm>
+            <a:off x="7187151" y="3322342"/>
+            <a:ext cx="346323" cy="252208"/>
+          </a:xfrm>
+          <a:prstGeom prst="rect">
+            <a:avLst/>
+          </a:prstGeom>
+          <a:solidFill>
+            <a:srgbClr val="ACD433">
+              <a:alpha val="50196"/>
+            </a:srgbClr>
+          </a:solidFill>
+        </p:spPr>
+        <p:style>
+          <a:lnRef idx="2">
+            <a:schemeClr val="accent1">
+              <a:shade val="15000"/>
+            </a:schemeClr>
+          </a:lnRef>
+          <a:fillRef idx="1">
+            <a:schemeClr val="accent1"/>
+          </a:fillRef>
+          <a:effectRef idx="0">
+            <a:schemeClr val="accent1"/>
+          </a:effectRef>
+          <a:fontRef idx="minor">
+            <a:schemeClr val="lt1"/>
+          </a:fontRef>
+        </p:style>
+        <p:txBody>
+          <a:bodyPr rtlCol="0" anchor="ctr"/>
+          <a:lstStyle/>
+          <a:p>
+            <a:pPr algn="ctr"/>
+            <a:endParaRPr lang="en-US"/>
+          </a:p>
+        </p:txBody>
+      </p:sp>
+      <p:sp>
+        <p:nvSpPr>
+          <p:cNvPr id="36" name="Rectangle 35">
+            <a:extLst>
+              <a:ext uri="{FF2B5EF4-FFF2-40B4-BE49-F238E27FC236}">
+                <a16:creationId xmlns:a16="http://schemas.microsoft.com/office/drawing/2014/main" id="{8BDC6863-9329-26C9-278F-41AB9A216099}"/>
+              </a:ext>
+            </a:extLst>
+          </p:cNvPr>
+          <p:cNvSpPr/>
+          <p:nvPr/>
+        </p:nvSpPr>
+        <p:spPr>
+          <a:xfrm>
+            <a:off x="7459492" y="2574289"/>
+            <a:ext cx="1028938" cy="262192"/>
+          </a:xfrm>
+          <a:prstGeom prst="rect">
+            <a:avLst/>
+          </a:prstGeom>
+          <a:solidFill>
+            <a:schemeClr val="bg2">
+              <a:lumMod val="20000"/>
+              <a:lumOff val="80000"/>
+              <a:alpha val="50196"/>
+            </a:schemeClr>
+          </a:solidFill>
+        </p:spPr>
+        <p:style>
+          <a:lnRef idx="2">
+            <a:schemeClr val="accent1">
+              <a:shade val="15000"/>
+            </a:schemeClr>
+          </a:lnRef>
+          <a:fillRef idx="1">
+            <a:schemeClr val="accent1"/>
+          </a:fillRef>
+          <a:effectRef idx="0">
+            <a:schemeClr val="accent1"/>
+          </a:effectRef>
+          <a:fontRef idx="minor">
+            <a:schemeClr val="lt1"/>
+          </a:fontRef>
+        </p:style>
+        <p:txBody>
+          <a:bodyPr rtlCol="0" anchor="ctr"/>
+          <a:lstStyle/>
+          <a:p>
+            <a:pPr algn="ctr"/>
+            <a:endParaRPr lang="en-US"/>
+          </a:p>
+        </p:txBody>
+      </p:sp>
+      <p:sp>
+        <p:nvSpPr>
+          <p:cNvPr id="37" name="Rectangle 36">
+            <a:extLst>
+              <a:ext uri="{FF2B5EF4-FFF2-40B4-BE49-F238E27FC236}">
+                <a16:creationId xmlns:a16="http://schemas.microsoft.com/office/drawing/2014/main" id="{15AF2E9D-353B-8059-5A54-5710F33D4265}"/>
+              </a:ext>
+            </a:extLst>
+          </p:cNvPr>
+          <p:cNvSpPr/>
+          <p:nvPr/>
+        </p:nvSpPr>
+        <p:spPr>
+          <a:xfrm>
+            <a:off x="7742821" y="5340598"/>
+            <a:ext cx="1205970" cy="436792"/>
+          </a:xfrm>
+          <a:prstGeom prst="rect">
+            <a:avLst/>
+          </a:prstGeom>
+          <a:solidFill>
+            <a:schemeClr val="bg2">
+              <a:lumMod val="20000"/>
+              <a:lumOff val="80000"/>
+              <a:alpha val="50196"/>
+            </a:schemeClr>
+          </a:solidFill>
+        </p:spPr>
+        <p:style>
+          <a:lnRef idx="2">
+            <a:schemeClr val="accent1">
+              <a:shade val="15000"/>
+            </a:schemeClr>
+          </a:lnRef>
+          <a:fillRef idx="1">
+            <a:schemeClr val="accent1"/>
+          </a:fillRef>
+          <a:effectRef idx="0">
+            <a:schemeClr val="accent1"/>
+          </a:effectRef>
+          <a:fontRef idx="minor">
+            <a:schemeClr val="lt1"/>
+          </a:fontRef>
+        </p:style>
+        <p:txBody>
+          <a:bodyPr rtlCol="0" anchor="ctr"/>
+          <a:lstStyle/>
+          <a:p>
+            <a:pPr algn="ctr"/>
+            <a:endParaRPr lang="en-US"/>
+          </a:p>
+        </p:txBody>
+      </p:sp>
+      <p:sp>
+        <p:nvSpPr>
+          <p:cNvPr id="38" name="Rectangle 37">
+            <a:extLst>
+              <a:ext uri="{FF2B5EF4-FFF2-40B4-BE49-F238E27FC236}">
+                <a16:creationId xmlns:a16="http://schemas.microsoft.com/office/drawing/2014/main" id="{947C26A7-8717-11C7-D2C9-6F2DF0C7DF8C}"/>
+              </a:ext>
+            </a:extLst>
+          </p:cNvPr>
+          <p:cNvSpPr/>
+          <p:nvPr/>
+        </p:nvSpPr>
+        <p:spPr>
+          <a:xfrm>
+            <a:off x="6425321" y="3740812"/>
+            <a:ext cx="1205970" cy="436792"/>
+          </a:xfrm>
+          <a:prstGeom prst="rect">
+            <a:avLst/>
+          </a:prstGeom>
+          <a:solidFill>
+            <a:schemeClr val="bg2">
+              <a:lumMod val="20000"/>
+              <a:lumOff val="80000"/>
+              <a:alpha val="50196"/>
+            </a:schemeClr>
+          </a:solidFill>
+        </p:spPr>
+        <p:style>
+          <a:lnRef idx="2">
+            <a:schemeClr val="accent1">
+              <a:shade val="15000"/>
+            </a:schemeClr>
+          </a:lnRef>
+          <a:fillRef idx="1">
+            <a:schemeClr val="accent1"/>
+          </a:fillRef>
+          <a:effectRef idx="0">
+            <a:schemeClr val="accent1"/>
+          </a:effectRef>
+          <a:fontRef idx="minor">
+            <a:schemeClr val="lt1"/>
+          </a:fontRef>
+        </p:style>
+        <p:txBody>
+          <a:bodyPr rtlCol="0" anchor="ctr"/>
+          <a:lstStyle/>
+          <a:p>
+            <a:pPr algn="ctr"/>
+            <a:endParaRPr lang="en-US"/>
+          </a:p>
+        </p:txBody>
+      </p:sp>
+      <p:sp>
+        <p:nvSpPr>
+          <p:cNvPr id="39" name="Rectangle 38">
+            <a:extLst>
+              <a:ext uri="{FF2B5EF4-FFF2-40B4-BE49-F238E27FC236}">
+                <a16:creationId xmlns:a16="http://schemas.microsoft.com/office/drawing/2014/main" id="{90F505AD-9E66-1114-FDC9-F2CC5658780E}"/>
+              </a:ext>
+            </a:extLst>
+          </p:cNvPr>
+          <p:cNvSpPr/>
+          <p:nvPr/>
+        </p:nvSpPr>
+        <p:spPr>
+          <a:xfrm>
+            <a:off x="4531163" y="5340598"/>
+            <a:ext cx="986059" cy="436792"/>
+          </a:xfrm>
+          <a:prstGeom prst="rect">
+            <a:avLst/>
+          </a:prstGeom>
+          <a:solidFill>
+            <a:schemeClr val="bg2">
+              <a:lumMod val="20000"/>
+              <a:lumOff val="80000"/>
+              <a:alpha val="50196"/>
+            </a:schemeClr>
+          </a:solidFill>
+        </p:spPr>
+        <p:style>
+          <a:lnRef idx="2">
+            <a:schemeClr val="accent1">
+              <a:shade val="15000"/>
+            </a:schemeClr>
+          </a:lnRef>
+          <a:fillRef idx="1">
+            <a:schemeClr val="accent1"/>
+          </a:fillRef>
+          <a:effectRef idx="0">
+            <a:schemeClr val="accent1"/>
+          </a:effectRef>
+          <a:fontRef idx="minor">
+            <a:schemeClr val="lt1"/>
+          </a:fontRef>
+        </p:style>
+        <p:txBody>
+          <a:bodyPr rtlCol="0" anchor="ctr"/>
+          <a:lstStyle/>
+          <a:p>
+            <a:pPr algn="ctr"/>
+            <a:endParaRPr lang="en-US"/>
+          </a:p>
+        </p:txBody>
+      </p:sp>
+      <p:sp>
+        <p:nvSpPr>
+          <p:cNvPr id="40" name="Rectangle 39">
+            <a:extLst>
+              <a:ext uri="{FF2B5EF4-FFF2-40B4-BE49-F238E27FC236}">
+                <a16:creationId xmlns:a16="http://schemas.microsoft.com/office/drawing/2014/main" id="{6DA986DB-7E26-CB61-679D-DA0618115D1F}"/>
+              </a:ext>
+            </a:extLst>
+          </p:cNvPr>
+          <p:cNvSpPr/>
+          <p:nvPr/>
+        </p:nvSpPr>
+        <p:spPr>
+          <a:xfrm>
+            <a:off x="4058782" y="3862163"/>
+            <a:ext cx="1707898" cy="330837"/>
+          </a:xfrm>
+          <a:prstGeom prst="rect">
+            <a:avLst/>
+          </a:prstGeom>
+          <a:solidFill>
+            <a:schemeClr val="bg2">
+              <a:lumMod val="20000"/>
+              <a:lumOff val="80000"/>
+              <a:alpha val="50196"/>
+            </a:schemeClr>
+          </a:solidFill>
+        </p:spPr>
+        <p:style>
+          <a:lnRef idx="2">
+            <a:schemeClr val="accent1">
+              <a:shade val="15000"/>
+            </a:schemeClr>
+          </a:lnRef>
+          <a:fillRef idx="1">
+            <a:schemeClr val="accent1"/>
+          </a:fillRef>
+          <a:effectRef idx="0">
+            <a:schemeClr val="accent1"/>
+          </a:effectRef>
+          <a:fontRef idx="minor">
+            <a:schemeClr val="lt1"/>
+          </a:fontRef>
+        </p:style>
+        <p:txBody>
+          <a:bodyPr rtlCol="0" anchor="ctr"/>
+          <a:lstStyle/>
+          <a:p>
+            <a:pPr algn="ctr"/>
+            <a:endParaRPr lang="en-US"/>
+          </a:p>
+        </p:txBody>
+      </p:sp>
+      <p:sp>
+        <p:nvSpPr>
+          <p:cNvPr id="48" name="Freeform: Shape 47">
+            <a:extLst>
+              <a:ext uri="{FF2B5EF4-FFF2-40B4-BE49-F238E27FC236}">
+                <a16:creationId xmlns:a16="http://schemas.microsoft.com/office/drawing/2014/main" id="{91CC046E-A252-D033-B152-30A657B7A843}"/>
+              </a:ext>
+            </a:extLst>
+          </p:cNvPr>
+          <p:cNvSpPr/>
+          <p:nvPr/>
+        </p:nvSpPr>
+        <p:spPr>
+          <a:xfrm>
+            <a:off x="6164494" y="2589088"/>
+            <a:ext cx="852755" cy="842481"/>
+          </a:xfrm>
+          <a:custGeom>
+            <a:avLst/>
+            <a:gdLst>
+              <a:gd name="csX0" fmla="*/ 10275 w 852755"/>
+              <a:gd name="csY0" fmla="*/ 0 h 842481"/>
+              <a:gd name="csX1" fmla="*/ 0 w 852755"/>
+              <a:gd name="csY1" fmla="*/ 277402 h 842481"/>
+              <a:gd name="csX2" fmla="*/ 842481 w 852755"/>
+              <a:gd name="csY2" fmla="*/ 267128 h 842481"/>
+              <a:gd name="csX3" fmla="*/ 852755 w 852755"/>
+              <a:gd name="csY3" fmla="*/ 842481 h 842481"/>
+            </a:gdLst>
+            <a:ahLst/>
+            <a:cxnLst>
+              <a:cxn ang="0">
+                <a:pos x="csX0" y="csY0"/>
+              </a:cxn>
+              <a:cxn ang="0">
+                <a:pos x="csX1" y="csY1"/>
+              </a:cxn>
+              <a:cxn ang="0">
+                <a:pos x="csX2" y="csY2"/>
+              </a:cxn>
+              <a:cxn ang="0">
+                <a:pos x="csX3" y="csY3"/>
+              </a:cxn>
+            </a:cxnLst>
+            <a:rect l="l" t="t" r="r" b="b"/>
+            <a:pathLst>
+              <a:path w="852755" h="842481">
+                <a:moveTo>
+                  <a:pt x="10275" y="0"/>
+                </a:moveTo>
+                <a:lnTo>
+                  <a:pt x="0" y="277402"/>
+                </a:lnTo>
+                <a:lnTo>
+                  <a:pt x="842481" y="267128"/>
+                </a:lnTo>
+                <a:lnTo>
+                  <a:pt x="852755" y="842481"/>
+                </a:lnTo>
+              </a:path>
+            </a:pathLst>
+          </a:custGeom>
+        </p:spPr>
+        <p:style>
+          <a:lnRef idx="3">
+            <a:schemeClr val="accent1"/>
+          </a:lnRef>
+          <a:fillRef idx="0">
+            <a:schemeClr val="accent1"/>
+          </a:fillRef>
+          <a:effectRef idx="2">
+            <a:schemeClr val="accent1"/>
+          </a:effectRef>
+          <a:fontRef idx="minor">
+            <a:schemeClr val="tx1"/>
+          </a:fontRef>
+        </p:style>
+        <p:txBody>
+          <a:bodyPr rtlCol="0" anchor="ctr"/>
+          <a:lstStyle/>
+          <a:p>
+            <a:pPr algn="ctr"/>
+            <a:endParaRPr lang="en-US"/>
+          </a:p>
+        </p:txBody>
+      </p:sp>
+      <p:sp>
+        <p:nvSpPr>
+          <p:cNvPr id="49" name="Freeform: Shape 48">
+            <a:extLst>
+              <a:ext uri="{FF2B5EF4-FFF2-40B4-BE49-F238E27FC236}">
+                <a16:creationId xmlns:a16="http://schemas.microsoft.com/office/drawing/2014/main" id="{2A6F5033-29E3-5BF7-632A-F37A48F6E3CF}"/>
+              </a:ext>
+            </a:extLst>
+          </p:cNvPr>
+          <p:cNvSpPr/>
+          <p:nvPr/>
+        </p:nvSpPr>
+        <p:spPr>
+          <a:xfrm>
+            <a:off x="5054885" y="513708"/>
+            <a:ext cx="544531" cy="297950"/>
+          </a:xfrm>
+          <a:custGeom>
+            <a:avLst/>
+            <a:gdLst>
+              <a:gd name="csX0" fmla="*/ 544531 w 544531"/>
+              <a:gd name="csY0" fmla="*/ 0 h 297950"/>
+              <a:gd name="csX1" fmla="*/ 0 w 544531"/>
+              <a:gd name="csY1" fmla="*/ 0 h 297950"/>
+              <a:gd name="csX2" fmla="*/ 0 w 544531"/>
+              <a:gd name="csY2" fmla="*/ 297950 h 297950"/>
+            </a:gdLst>
+            <a:ahLst/>
+            <a:cxnLst>
+              <a:cxn ang="0">
+                <a:pos x="csX0" y="csY0"/>
+              </a:cxn>
+              <a:cxn ang="0">
+                <a:pos x="csX1" y="csY1"/>
+              </a:cxn>
+              <a:cxn ang="0">
+                <a:pos x="csX2" y="csY2"/>
+              </a:cxn>
+            </a:cxnLst>
+            <a:rect l="l" t="t" r="r" b="b"/>
+            <a:pathLst>
+              <a:path w="544531" h="297950">
+                <a:moveTo>
+                  <a:pt x="544531" y="0"/>
+                </a:moveTo>
+                <a:lnTo>
+                  <a:pt x="0" y="0"/>
+                </a:lnTo>
+                <a:lnTo>
+                  <a:pt x="0" y="297950"/>
+                </a:lnTo>
+              </a:path>
+            </a:pathLst>
+          </a:custGeom>
+        </p:spPr>
+        <p:style>
+          <a:lnRef idx="3">
+            <a:schemeClr val="accent1"/>
+          </a:lnRef>
+          <a:fillRef idx="0">
+            <a:schemeClr val="accent1"/>
+          </a:fillRef>
+          <a:effectRef idx="2">
+            <a:schemeClr val="accent1"/>
+          </a:effectRef>
+          <a:fontRef idx="minor">
+            <a:schemeClr val="tx1"/>
+          </a:fontRef>
+        </p:style>
+        <p:txBody>
+          <a:bodyPr rtlCol="0" anchor="ctr"/>
+          <a:lstStyle/>
+          <a:p>
+            <a:pPr algn="ctr"/>
+            <a:endParaRPr lang="en-US"/>
+          </a:p>
+        </p:txBody>
+      </p:sp>
+      <p:cxnSp>
+        <p:nvCxnSpPr>
+          <p:cNvPr id="51" name="Straight Connector 50">
+            <a:extLst>
+              <a:ext uri="{FF2B5EF4-FFF2-40B4-BE49-F238E27FC236}">
+                <a16:creationId xmlns:a16="http://schemas.microsoft.com/office/drawing/2014/main" id="{F807AAC3-67A6-C0DF-6708-4D900E681C7E}"/>
+              </a:ext>
+            </a:extLst>
+          </p:cNvPr>
+          <p:cNvCxnSpPr>
+            <a:cxnSpLocks/>
+          </p:cNvCxnSpPr>
+          <p:nvPr/>
+        </p:nvCxnSpPr>
+        <p:spPr>
+          <a:xfrm>
+            <a:off x="3411020" y="424700"/>
+            <a:ext cx="0" cy="1143749"/>
+          </a:xfrm>
+          <a:prstGeom prst="line">
+            <a:avLst/>
+          </a:prstGeom>
+        </p:spPr>
+        <p:style>
+          <a:lnRef idx="3">
+            <a:schemeClr val="accent1"/>
+          </a:lnRef>
+          <a:fillRef idx="0">
+            <a:schemeClr val="accent1"/>
+          </a:fillRef>
+          <a:effectRef idx="2">
+            <a:schemeClr val="accent1"/>
+          </a:effectRef>
+          <a:fontRef idx="minor">
+            <a:schemeClr val="tx1"/>
+          </a:fontRef>
+        </p:style>
+      </p:cxnSp>
+      <p:sp>
+        <p:nvSpPr>
+          <p:cNvPr id="53" name="Freeform: Shape 52">
+            <a:extLst>
+              <a:ext uri="{FF2B5EF4-FFF2-40B4-BE49-F238E27FC236}">
+                <a16:creationId xmlns:a16="http://schemas.microsoft.com/office/drawing/2014/main" id="{789E763C-E208-9C9D-E650-90AA83D4064C}"/>
+              </a:ext>
+            </a:extLst>
+          </p:cNvPr>
+          <p:cNvSpPr/>
+          <p:nvPr/>
+        </p:nvSpPr>
+        <p:spPr>
+          <a:xfrm>
+            <a:off x="3565133" y="996593"/>
+            <a:ext cx="1047964" cy="544531"/>
+          </a:xfrm>
+          <a:custGeom>
+            <a:avLst/>
+            <a:gdLst>
+              <a:gd name="csX0" fmla="*/ 1047964 w 1047964"/>
+              <a:gd name="csY0" fmla="*/ 0 h 544531"/>
+              <a:gd name="csX1" fmla="*/ 0 w 1047964"/>
+              <a:gd name="csY1" fmla="*/ 10274 h 544531"/>
+              <a:gd name="csX2" fmla="*/ 10274 w 1047964"/>
+              <a:gd name="csY2" fmla="*/ 544531 h 544531"/>
+            </a:gdLst>
+            <a:ahLst/>
+            <a:cxnLst>
+              <a:cxn ang="0">
+                <a:pos x="csX0" y="csY0"/>
+              </a:cxn>
+              <a:cxn ang="0">
+                <a:pos x="csX1" y="csY1"/>
+              </a:cxn>
+              <a:cxn ang="0">
+                <a:pos x="csX2" y="csY2"/>
+              </a:cxn>
+            </a:cxnLst>
+            <a:rect l="l" t="t" r="r" b="b"/>
+            <a:pathLst>
+              <a:path w="1047964" h="544531">
+                <a:moveTo>
+                  <a:pt x="1047964" y="0"/>
+                </a:moveTo>
+                <a:lnTo>
+                  <a:pt x="0" y="10274"/>
+                </a:lnTo>
+                <a:lnTo>
+                  <a:pt x="10274" y="544531"/>
+                </a:lnTo>
+              </a:path>
+            </a:pathLst>
+          </a:custGeom>
+        </p:spPr>
+        <p:style>
+          <a:lnRef idx="3">
+            <a:schemeClr val="accent1"/>
+          </a:lnRef>
+          <a:fillRef idx="0">
+            <a:schemeClr val="accent1"/>
+          </a:fillRef>
+          <a:effectRef idx="2">
+            <a:schemeClr val="accent1"/>
+          </a:effectRef>
+          <a:fontRef idx="minor">
+            <a:schemeClr val="tx1"/>
+          </a:fontRef>
+        </p:style>
+        <p:txBody>
+          <a:bodyPr rtlCol="0" anchor="ctr"/>
+          <a:lstStyle/>
+          <a:p>
+            <a:pPr algn="ctr"/>
+            <a:endParaRPr lang="en-US"/>
+          </a:p>
+        </p:txBody>
+      </p:sp>
+      <p:sp>
+        <p:nvSpPr>
+          <p:cNvPr id="54" name="Freeform: Shape 53">
+            <a:extLst>
+              <a:ext uri="{FF2B5EF4-FFF2-40B4-BE49-F238E27FC236}">
+                <a16:creationId xmlns:a16="http://schemas.microsoft.com/office/drawing/2014/main" id="{C4500383-FD19-8A08-9A11-0072F832E748}"/>
+              </a:ext>
+            </a:extLst>
+          </p:cNvPr>
+          <p:cNvSpPr/>
+          <p:nvPr/>
+        </p:nvSpPr>
+        <p:spPr>
+          <a:xfrm>
+            <a:off x="3616503" y="431515"/>
+            <a:ext cx="1006868" cy="482885"/>
+          </a:xfrm>
+          <a:custGeom>
+            <a:avLst/>
+            <a:gdLst>
+              <a:gd name="csX0" fmla="*/ 1006868 w 1006868"/>
+              <a:gd name="csY0" fmla="*/ 482885 h 482885"/>
+              <a:gd name="csX1" fmla="*/ 0 w 1006868"/>
+              <a:gd name="csY1" fmla="*/ 0 h 482885"/>
+            </a:gdLst>
+            <a:ahLst/>
+            <a:cxnLst>
+              <a:cxn ang="0">
+                <a:pos x="csX0" y="csY0"/>
+              </a:cxn>
+              <a:cxn ang="0">
+                <a:pos x="csX1" y="csY1"/>
+              </a:cxn>
+            </a:cxnLst>
+            <a:rect l="l" t="t" r="r" b="b"/>
+            <a:pathLst>
+              <a:path w="1006868" h="482885">
+                <a:moveTo>
+                  <a:pt x="1006868" y="482885"/>
+                </a:moveTo>
+                <a:lnTo>
+                  <a:pt x="0" y="0"/>
+                </a:lnTo>
+              </a:path>
+            </a:pathLst>
+          </a:custGeom>
+        </p:spPr>
+        <p:style>
+          <a:lnRef idx="3">
+            <a:schemeClr val="accent1"/>
+          </a:lnRef>
+          <a:fillRef idx="0">
+            <a:schemeClr val="accent1"/>
+          </a:fillRef>
+          <a:effectRef idx="2">
+            <a:schemeClr val="accent1"/>
+          </a:effectRef>
+          <a:fontRef idx="minor">
+            <a:schemeClr val="tx1"/>
+          </a:fontRef>
+        </p:style>
+        <p:txBody>
+          <a:bodyPr rtlCol="0" anchor="ctr"/>
+          <a:lstStyle/>
+          <a:p>
+            <a:pPr algn="ctr"/>
+            <a:endParaRPr lang="en-US"/>
+          </a:p>
+        </p:txBody>
+      </p:sp>
+      <p:sp>
+        <p:nvSpPr>
+          <p:cNvPr id="55" name="Freeform: Shape 54">
+            <a:extLst>
+              <a:ext uri="{FF2B5EF4-FFF2-40B4-BE49-F238E27FC236}">
+                <a16:creationId xmlns:a16="http://schemas.microsoft.com/office/drawing/2014/main" id="{05E374B1-B80E-DDA3-660A-C50F3C812109}"/>
+              </a:ext>
+            </a:extLst>
+          </p:cNvPr>
+          <p:cNvSpPr/>
+          <p:nvPr/>
+        </p:nvSpPr>
+        <p:spPr>
+          <a:xfrm>
+            <a:off x="7161088" y="3102796"/>
+            <a:ext cx="431514" cy="328773"/>
+          </a:xfrm>
+          <a:custGeom>
+            <a:avLst/>
+            <a:gdLst>
+              <a:gd name="csX0" fmla="*/ 431514 w 431514"/>
+              <a:gd name="csY0" fmla="*/ 0 h 328773"/>
+              <a:gd name="csX1" fmla="*/ 431514 w 431514"/>
+              <a:gd name="csY1" fmla="*/ 61644 h 328773"/>
+              <a:gd name="csX2" fmla="*/ 421240 w 431514"/>
+              <a:gd name="csY2" fmla="*/ 184934 h 328773"/>
+              <a:gd name="csX3" fmla="*/ 0 w 431514"/>
+              <a:gd name="csY3" fmla="*/ 174660 h 328773"/>
+              <a:gd name="csX4" fmla="*/ 0 w 431514"/>
+              <a:gd name="csY4" fmla="*/ 328773 h 328773"/>
+            </a:gdLst>
+            <a:ahLst/>
+            <a:cxnLst>
+              <a:cxn ang="0">
+                <a:pos x="csX0" y="csY0"/>
+              </a:cxn>
+              <a:cxn ang="0">
+                <a:pos x="csX1" y="csY1"/>
+              </a:cxn>
+              <a:cxn ang="0">
+                <a:pos x="csX2" y="csY2"/>
+              </a:cxn>
+              <a:cxn ang="0">
+                <a:pos x="csX3" y="csY3"/>
+              </a:cxn>
+              <a:cxn ang="0">
+                <a:pos x="csX4" y="csY4"/>
+              </a:cxn>
+            </a:cxnLst>
+            <a:rect l="l" t="t" r="r" b="b"/>
+            <a:pathLst>
+              <a:path w="431514" h="328773">
+                <a:moveTo>
+                  <a:pt x="431514" y="0"/>
+                </a:moveTo>
+                <a:lnTo>
+                  <a:pt x="431514" y="61644"/>
+                </a:lnTo>
+                <a:lnTo>
+                  <a:pt x="421240" y="184934"/>
+                </a:lnTo>
+                <a:lnTo>
+                  <a:pt x="0" y="174660"/>
+                </a:lnTo>
+                <a:lnTo>
+                  <a:pt x="0" y="328773"/>
+                </a:lnTo>
+              </a:path>
+            </a:pathLst>
+          </a:custGeom>
+        </p:spPr>
+        <p:style>
+          <a:lnRef idx="3">
+            <a:schemeClr val="accent1"/>
+          </a:lnRef>
+          <a:fillRef idx="0">
+            <a:schemeClr val="accent1"/>
+          </a:fillRef>
+          <a:effectRef idx="2">
+            <a:schemeClr val="accent1"/>
+          </a:effectRef>
+          <a:fontRef idx="minor">
+            <a:schemeClr val="tx1"/>
+          </a:fontRef>
+        </p:style>
+        <p:txBody>
+          <a:bodyPr rtlCol="0" anchor="ctr"/>
+          <a:lstStyle/>
+          <a:p>
+            <a:pPr algn="ctr"/>
+            <a:endParaRPr lang="en-US"/>
+          </a:p>
+        </p:txBody>
+      </p:sp>
+      <p:sp>
+        <p:nvSpPr>
+          <p:cNvPr id="56" name="Freeform: Shape 55">
+            <a:extLst>
+              <a:ext uri="{FF2B5EF4-FFF2-40B4-BE49-F238E27FC236}">
+                <a16:creationId xmlns:a16="http://schemas.microsoft.com/office/drawing/2014/main" id="{B77BCD45-B4CA-2414-C780-BAE085485898}"/>
+              </a:ext>
+            </a:extLst>
+          </p:cNvPr>
+          <p:cNvSpPr/>
+          <p:nvPr/>
+        </p:nvSpPr>
+        <p:spPr>
+          <a:xfrm>
+            <a:off x="5270643" y="2393879"/>
+            <a:ext cx="431514" cy="0"/>
+          </a:xfrm>
+          <a:custGeom>
+            <a:avLst/>
+            <a:gdLst>
+              <a:gd name="csX0" fmla="*/ 0 w 431514"/>
+              <a:gd name="csY0" fmla="*/ 0 h 0"/>
+              <a:gd name="csX1" fmla="*/ 431514 w 431514"/>
+              <a:gd name="csY1" fmla="*/ 0 h 0"/>
+            </a:gdLst>
+            <a:ahLst/>
+            <a:cxnLst>
+              <a:cxn ang="0">
+                <a:pos x="csX0" y="csY0"/>
+              </a:cxn>
+              <a:cxn ang="0">
+                <a:pos x="csX1" y="csY1"/>
+              </a:cxn>
+            </a:cxnLst>
+            <a:rect l="l" t="t" r="r" b="b"/>
+            <a:pathLst>
+              <a:path w="431514">
+                <a:moveTo>
+                  <a:pt x="0" y="0"/>
+                </a:moveTo>
+                <a:lnTo>
+                  <a:pt x="431514" y="0"/>
+                </a:lnTo>
+              </a:path>
+            </a:pathLst>
+          </a:custGeom>
+        </p:spPr>
+        <p:style>
+          <a:lnRef idx="3">
+            <a:schemeClr val="accent1"/>
+          </a:lnRef>
+          <a:fillRef idx="0">
+            <a:schemeClr val="accent1"/>
+          </a:fillRef>
+          <a:effectRef idx="2">
+            <a:schemeClr val="accent1"/>
+          </a:effectRef>
+          <a:fontRef idx="minor">
+            <a:schemeClr val="tx1"/>
+          </a:fontRef>
+        </p:style>
+        <p:txBody>
+          <a:bodyPr rtlCol="0" anchor="ctr"/>
+          <a:lstStyle/>
+          <a:p>
+            <a:pPr algn="ctr"/>
+            <a:endParaRPr lang="en-US"/>
+          </a:p>
+        </p:txBody>
+      </p:sp>
+      <p:sp>
+        <p:nvSpPr>
+          <p:cNvPr id="57" name="Freeform: Shape 56">
+            <a:extLst>
+              <a:ext uri="{FF2B5EF4-FFF2-40B4-BE49-F238E27FC236}">
+                <a16:creationId xmlns:a16="http://schemas.microsoft.com/office/drawing/2014/main" id="{D36A860F-0A7D-0DFF-4ECC-781EE476F507}"/>
+              </a:ext>
+            </a:extLst>
+          </p:cNvPr>
+          <p:cNvSpPr/>
+          <p:nvPr/>
+        </p:nvSpPr>
+        <p:spPr>
+          <a:xfrm>
+            <a:off x="4941870" y="2578813"/>
+            <a:ext cx="2147299" cy="852756"/>
+          </a:xfrm>
+          <a:custGeom>
+            <a:avLst/>
+            <a:gdLst>
+              <a:gd name="csX0" fmla="*/ 2147299 w 2147299"/>
+              <a:gd name="csY0" fmla="*/ 852756 h 852756"/>
+              <a:gd name="csX1" fmla="*/ 2147299 w 2147299"/>
+              <a:gd name="csY1" fmla="*/ 102742 h 852756"/>
+              <a:gd name="csX2" fmla="*/ 0 w 2147299"/>
+              <a:gd name="csY2" fmla="*/ 102742 h 852756"/>
+              <a:gd name="csX3" fmla="*/ 10274 w 2147299"/>
+              <a:gd name="csY3" fmla="*/ 0 h 852756"/>
+            </a:gdLst>
+            <a:ahLst/>
+            <a:cxnLst>
+              <a:cxn ang="0">
+                <a:pos x="csX0" y="csY0"/>
+              </a:cxn>
+              <a:cxn ang="0">
+                <a:pos x="csX1" y="csY1"/>
+              </a:cxn>
+              <a:cxn ang="0">
+                <a:pos x="csX2" y="csY2"/>
+              </a:cxn>
+              <a:cxn ang="0">
+                <a:pos x="csX3" y="csY3"/>
+              </a:cxn>
+            </a:cxnLst>
+            <a:rect l="l" t="t" r="r" b="b"/>
+            <a:pathLst>
+              <a:path w="2147299" h="852756">
+                <a:moveTo>
+                  <a:pt x="2147299" y="852756"/>
+                </a:moveTo>
+                <a:lnTo>
+                  <a:pt x="2147299" y="102742"/>
+                </a:lnTo>
+                <a:lnTo>
+                  <a:pt x="0" y="102742"/>
+                </a:lnTo>
+                <a:lnTo>
+                  <a:pt x="10274" y="0"/>
+                </a:lnTo>
+              </a:path>
+            </a:pathLst>
+          </a:custGeom>
+        </p:spPr>
+        <p:style>
+          <a:lnRef idx="3">
+            <a:schemeClr val="accent1"/>
+          </a:lnRef>
+          <a:fillRef idx="0">
+            <a:schemeClr val="accent1"/>
+          </a:fillRef>
+          <a:effectRef idx="2">
+            <a:schemeClr val="accent1"/>
+          </a:effectRef>
+          <a:fontRef idx="minor">
+            <a:schemeClr val="tx1"/>
+          </a:fontRef>
+        </p:style>
+        <p:txBody>
+          <a:bodyPr rtlCol="0" anchor="ctr"/>
+          <a:lstStyle/>
+          <a:p>
+            <a:pPr algn="ctr"/>
+            <a:endParaRPr lang="en-US"/>
+          </a:p>
+        </p:txBody>
+      </p:sp>
+      <p:sp>
+        <p:nvSpPr>
+          <p:cNvPr id="58" name="Freeform: Shape 57">
+            <a:extLst>
+              <a:ext uri="{FF2B5EF4-FFF2-40B4-BE49-F238E27FC236}">
+                <a16:creationId xmlns:a16="http://schemas.microsoft.com/office/drawing/2014/main" id="{778F4E96-E4FE-B983-A346-6DA51CBA428D}"/>
+              </a:ext>
+            </a:extLst>
+          </p:cNvPr>
+          <p:cNvSpPr/>
+          <p:nvPr/>
+        </p:nvSpPr>
+        <p:spPr>
+          <a:xfrm>
+            <a:off x="6554912" y="1941816"/>
+            <a:ext cx="554805" cy="0"/>
+          </a:xfrm>
+          <a:custGeom>
+            <a:avLst/>
+            <a:gdLst>
+              <a:gd name="csX0" fmla="*/ 0 w 554805"/>
+              <a:gd name="csY0" fmla="*/ 0 h 0"/>
+              <a:gd name="csX1" fmla="*/ 554805 w 554805"/>
+              <a:gd name="csY1" fmla="*/ 0 h 0"/>
+            </a:gdLst>
+            <a:ahLst/>
+            <a:cxnLst>
+              <a:cxn ang="0">
+                <a:pos x="csX0" y="csY0"/>
+              </a:cxn>
+              <a:cxn ang="0">
+                <a:pos x="csX1" y="csY1"/>
+              </a:cxn>
+            </a:cxnLst>
+            <a:rect l="l" t="t" r="r" b="b"/>
+            <a:pathLst>
+              <a:path w="554805">
+                <a:moveTo>
+                  <a:pt x="0" y="0"/>
+                </a:moveTo>
+                <a:lnTo>
+                  <a:pt x="554805" y="0"/>
+                </a:lnTo>
+              </a:path>
+            </a:pathLst>
+          </a:custGeom>
+        </p:spPr>
+        <p:style>
+          <a:lnRef idx="3">
+            <a:schemeClr val="accent1"/>
+          </a:lnRef>
+          <a:fillRef idx="0">
+            <a:schemeClr val="accent1"/>
+          </a:fillRef>
+          <a:effectRef idx="2">
+            <a:schemeClr val="accent1"/>
+          </a:effectRef>
+          <a:fontRef idx="minor">
+            <a:schemeClr val="tx1"/>
+          </a:fontRef>
+        </p:style>
+        <p:txBody>
+          <a:bodyPr rtlCol="0" anchor="ctr"/>
+          <a:lstStyle/>
+          <a:p>
+            <a:pPr algn="ctr"/>
+            <a:endParaRPr lang="en-US"/>
+          </a:p>
+        </p:txBody>
+      </p:sp>
+      <p:sp>
+        <p:nvSpPr>
+          <p:cNvPr id="59" name="Freeform: Shape 58">
+            <a:extLst>
+              <a:ext uri="{FF2B5EF4-FFF2-40B4-BE49-F238E27FC236}">
+                <a16:creationId xmlns:a16="http://schemas.microsoft.com/office/drawing/2014/main" id="{AE1B7EF0-B810-2A1A-A0CD-EF6ABAD692CD}"/>
+              </a:ext>
+            </a:extLst>
+          </p:cNvPr>
+          <p:cNvSpPr/>
+          <p:nvPr/>
+        </p:nvSpPr>
+        <p:spPr>
+          <a:xfrm>
+            <a:off x="4941870" y="431515"/>
+            <a:ext cx="0" cy="390418"/>
+          </a:xfrm>
+          <a:custGeom>
+            <a:avLst/>
+            <a:gdLst>
+              <a:gd name="csX0" fmla="*/ 0 w 0"/>
+              <a:gd name="csY0" fmla="*/ 390418 h 390418"/>
+              <a:gd name="csX1" fmla="*/ 0 w 0"/>
+              <a:gd name="csY1" fmla="*/ 0 h 390418"/>
+            </a:gdLst>
+            <a:ahLst/>
+            <a:cxnLst>
+              <a:cxn ang="0">
+                <a:pos x="csX0" y="csY0"/>
+              </a:cxn>
+              <a:cxn ang="0">
+                <a:pos x="csX1" y="csY1"/>
+              </a:cxn>
+            </a:cxnLst>
+            <a:rect l="l" t="t" r="r" b="b"/>
+            <a:pathLst>
+              <a:path h="390418">
+                <a:moveTo>
+                  <a:pt x="0" y="390418"/>
+                </a:moveTo>
+                <a:lnTo>
+                  <a:pt x="0" y="0"/>
+                </a:lnTo>
+              </a:path>
+            </a:pathLst>
+          </a:custGeom>
+        </p:spPr>
+        <p:style>
+          <a:lnRef idx="3">
+            <a:schemeClr val="accent1"/>
+          </a:lnRef>
+          <a:fillRef idx="0">
+            <a:schemeClr val="accent1"/>
+          </a:fillRef>
+          <a:effectRef idx="2">
+            <a:schemeClr val="accent1"/>
+          </a:effectRef>
+          <a:fontRef idx="minor">
+            <a:schemeClr val="tx1"/>
+          </a:fontRef>
+        </p:style>
+        <p:txBody>
+          <a:bodyPr rtlCol="0" anchor="ctr"/>
+          <a:lstStyle/>
+          <a:p>
+            <a:pPr algn="ctr"/>
+            <a:endParaRPr lang="en-US"/>
+          </a:p>
+        </p:txBody>
+      </p:sp>
+      <p:sp>
+        <p:nvSpPr>
+          <p:cNvPr id="60" name="Freeform: Shape 59">
+            <a:extLst>
+              <a:ext uri="{FF2B5EF4-FFF2-40B4-BE49-F238E27FC236}">
+                <a16:creationId xmlns:a16="http://schemas.microsoft.com/office/drawing/2014/main" id="{44201DD5-55C0-4A91-CD80-09B549F509D4}"/>
+              </a:ext>
+            </a:extLst>
+          </p:cNvPr>
+          <p:cNvSpPr/>
+          <p:nvPr/>
+        </p:nvSpPr>
+        <p:spPr>
+          <a:xfrm>
+            <a:off x="3750067" y="246420"/>
+            <a:ext cx="873304" cy="10434"/>
+          </a:xfrm>
+          <a:custGeom>
+            <a:avLst/>
+            <a:gdLst>
+              <a:gd name="csX0" fmla="*/ 0 w 873304"/>
+              <a:gd name="csY0" fmla="*/ 10434 h 10434"/>
+              <a:gd name="csX1" fmla="*/ 0 w 873304"/>
+              <a:gd name="csY1" fmla="*/ 10434 h 10434"/>
+              <a:gd name="csX2" fmla="*/ 154113 w 873304"/>
+              <a:gd name="csY2" fmla="*/ 160 h 10434"/>
+              <a:gd name="csX3" fmla="*/ 873304 w 873304"/>
+              <a:gd name="csY3" fmla="*/ 160 h 10434"/>
+            </a:gdLst>
+            <a:ahLst/>
+            <a:cxnLst>
+              <a:cxn ang="0">
+                <a:pos x="csX0" y="csY0"/>
+              </a:cxn>
+              <a:cxn ang="0">
+                <a:pos x="csX1" y="csY1"/>
+              </a:cxn>
+              <a:cxn ang="0">
+                <a:pos x="csX2" y="csY2"/>
+              </a:cxn>
+              <a:cxn ang="0">
+                <a:pos x="csX3" y="csY3"/>
+              </a:cxn>
+            </a:cxnLst>
+            <a:rect l="l" t="t" r="r" b="b"/>
+            <a:pathLst>
+              <a:path w="873304" h="10434">
+                <a:moveTo>
+                  <a:pt x="0" y="10434"/>
+                </a:moveTo>
+                <a:lnTo>
+                  <a:pt x="0" y="10434"/>
+                </a:lnTo>
+                <a:cubicBezTo>
+                  <a:pt x="112891" y="-2109"/>
+                  <a:pt x="61456" y="160"/>
+                  <a:pt x="154113" y="160"/>
+                </a:cubicBezTo>
+                <a:lnTo>
+                  <a:pt x="873304" y="160"/>
+                </a:lnTo>
+              </a:path>
+            </a:pathLst>
+          </a:custGeom>
+        </p:spPr>
+        <p:style>
+          <a:lnRef idx="3">
+            <a:schemeClr val="accent1"/>
+          </a:lnRef>
+          <a:fillRef idx="0">
+            <a:schemeClr val="accent1"/>
+          </a:fillRef>
+          <a:effectRef idx="2">
+            <a:schemeClr val="accent1"/>
+          </a:effectRef>
+          <a:fontRef idx="minor">
+            <a:schemeClr val="tx1"/>
+          </a:fontRef>
+        </p:style>
+        <p:txBody>
+          <a:bodyPr rtlCol="0" anchor="ctr"/>
+          <a:lstStyle/>
+          <a:p>
+            <a:pPr algn="ctr"/>
+            <a:endParaRPr lang="en-US"/>
+          </a:p>
+        </p:txBody>
+      </p:sp>
+      <p:sp>
+        <p:nvSpPr>
+          <p:cNvPr id="61" name="Freeform: Shape 60">
+            <a:extLst>
+              <a:ext uri="{FF2B5EF4-FFF2-40B4-BE49-F238E27FC236}">
+                <a16:creationId xmlns:a16="http://schemas.microsoft.com/office/drawing/2014/main" id="{B24555C6-841A-499B-0579-17A45F77361B}"/>
+              </a:ext>
+            </a:extLst>
+          </p:cNvPr>
+          <p:cNvSpPr/>
+          <p:nvPr/>
+        </p:nvSpPr>
+        <p:spPr>
+          <a:xfrm>
+            <a:off x="2989780" y="996593"/>
+            <a:ext cx="0" cy="205483"/>
+          </a:xfrm>
+          <a:custGeom>
+            <a:avLst/>
+            <a:gdLst>
+              <a:gd name="csX0" fmla="*/ 0 w 0"/>
+              <a:gd name="csY0" fmla="*/ 0 h 205483"/>
+              <a:gd name="csX1" fmla="*/ 0 w 0"/>
+              <a:gd name="csY1" fmla="*/ 205483 h 205483"/>
+            </a:gdLst>
+            <a:ahLst/>
+            <a:cxnLst>
+              <a:cxn ang="0">
+                <a:pos x="csX0" y="csY0"/>
+              </a:cxn>
+              <a:cxn ang="0">
+                <a:pos x="csX1" y="csY1"/>
+              </a:cxn>
+            </a:cxnLst>
+            <a:rect l="l" t="t" r="r" b="b"/>
+            <a:pathLst>
+              <a:path h="205483">
+                <a:moveTo>
+                  <a:pt x="0" y="0"/>
+                </a:moveTo>
+                <a:lnTo>
+                  <a:pt x="0" y="205483"/>
+                </a:lnTo>
+              </a:path>
+            </a:pathLst>
+          </a:custGeom>
+        </p:spPr>
+        <p:style>
+          <a:lnRef idx="3">
+            <a:schemeClr val="accent1"/>
+          </a:lnRef>
+          <a:fillRef idx="0">
+            <a:schemeClr val="accent1"/>
+          </a:fillRef>
+          <a:effectRef idx="2">
+            <a:schemeClr val="accent1"/>
+          </a:effectRef>
+          <a:fontRef idx="minor">
+            <a:schemeClr val="tx1"/>
+          </a:fontRef>
+        </p:style>
+        <p:txBody>
+          <a:bodyPr rtlCol="0" anchor="ctr"/>
+          <a:lstStyle/>
+          <a:p>
+            <a:pPr algn="ctr"/>
+            <a:endParaRPr lang="en-US"/>
+          </a:p>
+        </p:txBody>
+      </p:sp>
+      <p:sp>
+        <p:nvSpPr>
+          <p:cNvPr id="62" name="Freeform: Shape 61">
+            <a:extLst>
+              <a:ext uri="{FF2B5EF4-FFF2-40B4-BE49-F238E27FC236}">
+                <a16:creationId xmlns:a16="http://schemas.microsoft.com/office/drawing/2014/main" id="{A9479932-953F-5115-05BD-DE3049740D13}"/>
+              </a:ext>
+            </a:extLst>
+          </p:cNvPr>
+          <p:cNvSpPr/>
+          <p:nvPr/>
+        </p:nvSpPr>
+        <p:spPr>
+          <a:xfrm>
+            <a:off x="2989780" y="256854"/>
+            <a:ext cx="102741" cy="426359"/>
+          </a:xfrm>
+          <a:custGeom>
+            <a:avLst/>
+            <a:gdLst>
+              <a:gd name="csX0" fmla="*/ 0 w 113016"/>
+              <a:gd name="csY0" fmla="*/ 421240 h 482885"/>
+              <a:gd name="csX1" fmla="*/ 0 w 113016"/>
+              <a:gd name="csY1" fmla="*/ 482885 h 482885"/>
+              <a:gd name="csX2" fmla="*/ 10274 w 113016"/>
+              <a:gd name="csY2" fmla="*/ 0 h 482885"/>
+              <a:gd name="csX3" fmla="*/ 113016 w 113016"/>
+              <a:gd name="csY3" fmla="*/ 0 h 482885"/>
+            </a:gdLst>
+            <a:ahLst/>
+            <a:cxnLst>
+              <a:cxn ang="0">
+                <a:pos x="csX0" y="csY0"/>
+              </a:cxn>
+              <a:cxn ang="0">
+                <a:pos x="csX1" y="csY1"/>
+              </a:cxn>
+              <a:cxn ang="0">
+                <a:pos x="csX2" y="csY2"/>
+              </a:cxn>
+              <a:cxn ang="0">
+                <a:pos x="csX3" y="csY3"/>
+              </a:cxn>
+            </a:cxnLst>
+            <a:rect l="l" t="t" r="r" b="b"/>
+            <a:pathLst>
+              <a:path w="113016" h="482885">
+                <a:moveTo>
+                  <a:pt x="0" y="421240"/>
+                </a:moveTo>
+                <a:lnTo>
+                  <a:pt x="0" y="482885"/>
+                </a:lnTo>
+                <a:lnTo>
+                  <a:pt x="10274" y="0"/>
+                </a:lnTo>
+                <a:lnTo>
+                  <a:pt x="113016" y="0"/>
+                </a:lnTo>
+              </a:path>
+            </a:pathLst>
+          </a:custGeom>
+        </p:spPr>
+        <p:style>
+          <a:lnRef idx="3">
+            <a:schemeClr val="accent1"/>
+          </a:lnRef>
+          <a:fillRef idx="0">
+            <a:schemeClr val="accent1"/>
+          </a:fillRef>
+          <a:effectRef idx="2">
+            <a:schemeClr val="accent1"/>
+          </a:effectRef>
+          <a:fontRef idx="minor">
+            <a:schemeClr val="tx1"/>
+          </a:fontRef>
+        </p:style>
+        <p:txBody>
+          <a:bodyPr rtlCol="0" anchor="ctr"/>
+          <a:lstStyle/>
+          <a:p>
+            <a:pPr algn="ctr"/>
+            <a:r>
+              <a:rPr lang="en-US" altLang="zh-CN" dirty="0"/>
+              <a:t>·</a:t>
+            </a:r>
+            <a:endParaRPr lang="en-US" dirty="0"/>
+          </a:p>
+        </p:txBody>
+      </p:sp>
+      <p:sp>
+        <p:nvSpPr>
+          <p:cNvPr id="63" name="Freeform: Shape 62">
+            <a:extLst>
+              <a:ext uri="{FF2B5EF4-FFF2-40B4-BE49-F238E27FC236}">
+                <a16:creationId xmlns:a16="http://schemas.microsoft.com/office/drawing/2014/main" id="{B8621B1A-1BC4-42FE-5E11-A0E3339B79BB}"/>
+              </a:ext>
+            </a:extLst>
+          </p:cNvPr>
+          <p:cNvSpPr/>
+          <p:nvPr/>
+        </p:nvSpPr>
+        <p:spPr>
+          <a:xfrm>
+            <a:off x="5239820" y="1068512"/>
+            <a:ext cx="1027416" cy="739740"/>
+          </a:xfrm>
+          <a:custGeom>
+            <a:avLst/>
+            <a:gdLst>
+              <a:gd name="csX0" fmla="*/ 0 w 1027416"/>
+              <a:gd name="csY0" fmla="*/ 0 h 739740"/>
+              <a:gd name="csX1" fmla="*/ 1027416 w 1027416"/>
+              <a:gd name="csY1" fmla="*/ 739740 h 739740"/>
+            </a:gdLst>
+            <a:ahLst/>
+            <a:cxnLst>
+              <a:cxn ang="0">
+                <a:pos x="csX0" y="csY0"/>
+              </a:cxn>
+              <a:cxn ang="0">
+                <a:pos x="csX1" y="csY1"/>
+              </a:cxn>
+            </a:cxnLst>
+            <a:rect l="l" t="t" r="r" b="b"/>
+            <a:pathLst>
+              <a:path w="1027416" h="739740">
+                <a:moveTo>
+                  <a:pt x="0" y="0"/>
+                </a:moveTo>
+                <a:lnTo>
+                  <a:pt x="1027416" y="739740"/>
+                </a:lnTo>
+              </a:path>
+            </a:pathLst>
+          </a:custGeom>
+        </p:spPr>
+        <p:style>
+          <a:lnRef idx="3">
+            <a:schemeClr val="accent1"/>
+          </a:lnRef>
+          <a:fillRef idx="0">
+            <a:schemeClr val="accent1"/>
+          </a:fillRef>
+          <a:effectRef idx="2">
+            <a:schemeClr val="accent1"/>
+          </a:effectRef>
+          <a:fontRef idx="minor">
+            <a:schemeClr val="tx1"/>
+          </a:fontRef>
+        </p:style>
+        <p:txBody>
+          <a:bodyPr rtlCol="0" anchor="ctr"/>
+          <a:lstStyle/>
+          <a:p>
+            <a:pPr algn="ctr"/>
+            <a:endParaRPr lang="en-US"/>
+          </a:p>
+        </p:txBody>
+      </p:sp>
+      <p:sp>
+        <p:nvSpPr>
+          <p:cNvPr id="64" name="Freeform: Shape 63">
+            <a:extLst>
+              <a:ext uri="{FF2B5EF4-FFF2-40B4-BE49-F238E27FC236}">
+                <a16:creationId xmlns:a16="http://schemas.microsoft.com/office/drawing/2014/main" id="{F752B758-E80E-5B6A-5664-B38334D07467}"/>
+              </a:ext>
+            </a:extLst>
+          </p:cNvPr>
+          <p:cNvSpPr/>
+          <p:nvPr/>
+        </p:nvSpPr>
+        <p:spPr>
+          <a:xfrm>
+            <a:off x="4941870" y="1181528"/>
+            <a:ext cx="0" cy="400692"/>
+          </a:xfrm>
+          <a:custGeom>
+            <a:avLst/>
+            <a:gdLst>
+              <a:gd name="csX0" fmla="*/ 0 w 0"/>
+              <a:gd name="csY0" fmla="*/ 0 h 400692"/>
+              <a:gd name="csX1" fmla="*/ 0 w 0"/>
+              <a:gd name="csY1" fmla="*/ 400692 h 400692"/>
+            </a:gdLst>
+            <a:ahLst/>
+            <a:cxnLst>
+              <a:cxn ang="0">
+                <a:pos x="csX0" y="csY0"/>
+              </a:cxn>
+              <a:cxn ang="0">
+                <a:pos x="csX1" y="csY1"/>
+              </a:cxn>
+            </a:cxnLst>
+            <a:rect l="l" t="t" r="r" b="b"/>
+            <a:pathLst>
+              <a:path h="400692">
+                <a:moveTo>
+                  <a:pt x="0" y="0"/>
+                </a:moveTo>
+                <a:lnTo>
+                  <a:pt x="0" y="400692"/>
+                </a:lnTo>
+              </a:path>
+            </a:pathLst>
+          </a:custGeom>
+        </p:spPr>
+        <p:style>
+          <a:lnRef idx="3">
+            <a:schemeClr val="accent1"/>
+          </a:lnRef>
+          <a:fillRef idx="0">
+            <a:schemeClr val="accent1"/>
+          </a:fillRef>
+          <a:effectRef idx="2">
+            <a:schemeClr val="accent1"/>
+          </a:effectRef>
+          <a:fontRef idx="minor">
+            <a:schemeClr val="tx1"/>
+          </a:fontRef>
+        </p:style>
+        <p:txBody>
+          <a:bodyPr rtlCol="0" anchor="ctr"/>
+          <a:lstStyle/>
+          <a:p>
+            <a:pPr algn="ctr"/>
+            <a:endParaRPr lang="en-US"/>
+          </a:p>
+        </p:txBody>
+      </p:sp>
+      <p:sp>
+        <p:nvSpPr>
+          <p:cNvPr id="65" name="Freeform: Shape 64">
+            <a:extLst>
+              <a:ext uri="{FF2B5EF4-FFF2-40B4-BE49-F238E27FC236}">
+                <a16:creationId xmlns:a16="http://schemas.microsoft.com/office/drawing/2014/main" id="{238F7785-6787-090E-4E66-573506126CAF}"/>
+              </a:ext>
+            </a:extLst>
+          </p:cNvPr>
+          <p:cNvSpPr/>
+          <p:nvPr/>
+        </p:nvSpPr>
+        <p:spPr>
+          <a:xfrm>
+            <a:off x="4366517" y="1140431"/>
+            <a:ext cx="421240" cy="113016"/>
+          </a:xfrm>
+          <a:custGeom>
+            <a:avLst/>
+            <a:gdLst>
+              <a:gd name="csX0" fmla="*/ 421240 w 421240"/>
+              <a:gd name="csY0" fmla="*/ 0 h 113016"/>
+              <a:gd name="csX1" fmla="*/ 0 w 421240"/>
+              <a:gd name="csY1" fmla="*/ 113016 h 113016"/>
+            </a:gdLst>
+            <a:ahLst/>
+            <a:cxnLst>
+              <a:cxn ang="0">
+                <a:pos x="csX0" y="csY0"/>
+              </a:cxn>
+              <a:cxn ang="0">
+                <a:pos x="csX1" y="csY1"/>
+              </a:cxn>
+            </a:cxnLst>
+            <a:rect l="l" t="t" r="r" b="b"/>
+            <a:pathLst>
+              <a:path w="421240" h="113016">
+                <a:moveTo>
+                  <a:pt x="421240" y="0"/>
+                </a:moveTo>
+                <a:lnTo>
+                  <a:pt x="0" y="113016"/>
+                </a:lnTo>
+              </a:path>
+            </a:pathLst>
+          </a:custGeom>
+        </p:spPr>
+        <p:style>
+          <a:lnRef idx="3">
+            <a:schemeClr val="accent1"/>
+          </a:lnRef>
+          <a:fillRef idx="0">
+            <a:schemeClr val="accent1"/>
+          </a:fillRef>
+          <a:effectRef idx="2">
+            <a:schemeClr val="accent1"/>
+          </a:effectRef>
+          <a:fontRef idx="minor">
+            <a:schemeClr val="tx1"/>
+          </a:fontRef>
+        </p:style>
+        <p:txBody>
+          <a:bodyPr rtlCol="0" anchor="ctr"/>
+          <a:lstStyle/>
+          <a:p>
+            <a:pPr algn="ctr"/>
+            <a:endParaRPr lang="en-US"/>
+          </a:p>
+        </p:txBody>
+      </p:sp>
+      <p:sp>
+        <p:nvSpPr>
+          <p:cNvPr id="66" name="Freeform: Shape 65">
+            <a:extLst>
+              <a:ext uri="{FF2B5EF4-FFF2-40B4-BE49-F238E27FC236}">
+                <a16:creationId xmlns:a16="http://schemas.microsoft.com/office/drawing/2014/main" id="{C72049AA-9293-90BD-C2EE-BA4941B93169}"/>
+              </a:ext>
+            </a:extLst>
+          </p:cNvPr>
+          <p:cNvSpPr/>
+          <p:nvPr/>
+        </p:nvSpPr>
+        <p:spPr>
+          <a:xfrm>
+            <a:off x="5270643" y="1017142"/>
+            <a:ext cx="339047" cy="0"/>
+          </a:xfrm>
+          <a:custGeom>
+            <a:avLst/>
+            <a:gdLst>
+              <a:gd name="csX0" fmla="*/ 0 w 339047"/>
+              <a:gd name="csY0" fmla="*/ 0 h 0"/>
+              <a:gd name="csX1" fmla="*/ 339047 w 339047"/>
+              <a:gd name="csY1" fmla="*/ 0 h 0"/>
+            </a:gdLst>
+            <a:ahLst/>
+            <a:cxnLst>
+              <a:cxn ang="0">
+                <a:pos x="csX0" y="csY0"/>
+              </a:cxn>
+              <a:cxn ang="0">
+                <a:pos x="csX1" y="csY1"/>
+              </a:cxn>
+            </a:cxnLst>
+            <a:rect l="l" t="t" r="r" b="b"/>
+            <a:pathLst>
+              <a:path w="339047">
+                <a:moveTo>
+                  <a:pt x="0" y="0"/>
+                </a:moveTo>
+                <a:lnTo>
+                  <a:pt x="339047" y="0"/>
+                </a:lnTo>
+              </a:path>
+            </a:pathLst>
+          </a:custGeom>
+        </p:spPr>
+        <p:style>
+          <a:lnRef idx="3">
+            <a:schemeClr val="accent1"/>
+          </a:lnRef>
+          <a:fillRef idx="0">
+            <a:schemeClr val="accent1"/>
+          </a:fillRef>
+          <a:effectRef idx="2">
+            <a:schemeClr val="accent1"/>
+          </a:effectRef>
+          <a:fontRef idx="minor">
+            <a:schemeClr val="tx1"/>
+          </a:fontRef>
+        </p:style>
+        <p:txBody>
+          <a:bodyPr rtlCol="0" anchor="ctr"/>
+          <a:lstStyle/>
+          <a:p>
+            <a:pPr algn="ctr"/>
+            <a:endParaRPr lang="en-US"/>
+          </a:p>
+        </p:txBody>
+      </p:sp>
+      <p:sp>
+        <p:nvSpPr>
+          <p:cNvPr id="67" name="Freeform: Shape 66">
+            <a:extLst>
+              <a:ext uri="{FF2B5EF4-FFF2-40B4-BE49-F238E27FC236}">
+                <a16:creationId xmlns:a16="http://schemas.microsoft.com/office/drawing/2014/main" id="{2BACC523-31D2-AF04-AB03-9754F674A040}"/>
+              </a:ext>
+            </a:extLst>
+          </p:cNvPr>
+          <p:cNvSpPr/>
+          <p:nvPr/>
+        </p:nvSpPr>
+        <p:spPr>
+          <a:xfrm>
+            <a:off x="6236413" y="996593"/>
+            <a:ext cx="328774" cy="0"/>
+          </a:xfrm>
+          <a:custGeom>
+            <a:avLst/>
+            <a:gdLst>
+              <a:gd name="csX0" fmla="*/ 0 w 328774"/>
+              <a:gd name="csY0" fmla="*/ 0 h 0"/>
+              <a:gd name="csX1" fmla="*/ 328774 w 328774"/>
+              <a:gd name="csY1" fmla="*/ 0 h 0"/>
+            </a:gdLst>
+            <a:ahLst/>
+            <a:cxnLst>
+              <a:cxn ang="0">
+                <a:pos x="csX0" y="csY0"/>
+              </a:cxn>
+              <a:cxn ang="0">
+                <a:pos x="csX1" y="csY1"/>
+              </a:cxn>
+            </a:cxnLst>
+            <a:rect l="l" t="t" r="r" b="b"/>
+            <a:pathLst>
+              <a:path w="328774">
+                <a:moveTo>
+                  <a:pt x="0" y="0"/>
+                </a:moveTo>
+                <a:lnTo>
+                  <a:pt x="328774" y="0"/>
+                </a:lnTo>
+              </a:path>
+            </a:pathLst>
+          </a:custGeom>
+        </p:spPr>
+        <p:style>
+          <a:lnRef idx="3">
+            <a:schemeClr val="accent1"/>
+          </a:lnRef>
+          <a:fillRef idx="0">
+            <a:schemeClr val="accent1"/>
+          </a:fillRef>
+          <a:effectRef idx="2">
+            <a:schemeClr val="accent1"/>
+          </a:effectRef>
+          <a:fontRef idx="minor">
+            <a:schemeClr val="tx1"/>
+          </a:fontRef>
+        </p:style>
+        <p:txBody>
+          <a:bodyPr rtlCol="0" anchor="ctr"/>
+          <a:lstStyle/>
+          <a:p>
+            <a:pPr algn="ctr"/>
+            <a:endParaRPr lang="en-US"/>
+          </a:p>
+        </p:txBody>
+      </p:sp>
+    </p:spTree>
+    <p:extLst>
+      <p:ext uri="{BB962C8B-B14F-4D97-AF65-F5344CB8AC3E}">
+        <p14:creationId xmlns:p14="http://schemas.microsoft.com/office/powerpoint/2010/main" val="619172244"/>
+      </p:ext>
+    </p:extLst>
+  </p:cSld>
+  <p:clrMapOvr>
+    <a:masterClrMapping/>
+  </p:clrMapOvr>
+</p:sld>
+</file>
+
+<file path=ppt/slides/slide37.xml><?xml version="1.0" encoding="utf-8"?>
 <p:sld xmlns:a="http://schemas.openxmlformats.org/drawingml/2006/main" xmlns:r="http://schemas.openxmlformats.org/officeDocument/2006/relationships" xmlns:p="http://schemas.openxmlformats.org/presentationml/2006/main">
   <p:cSld>
     <p:bg>

--- a/Master_EAS_Meta-Model.pptx
+++ b/Master_EAS_Meta-Model.pptx
@@ -5,10 +5,10 @@
     <p:sldMasterId id="2147483648" r:id="rId4"/>
   </p:sldMasterIdLst>
   <p:notesMasterIdLst>
-    <p:notesMasterId r:id="rId42"/>
+    <p:notesMasterId r:id="rId44"/>
   </p:notesMasterIdLst>
   <p:handoutMasterIdLst>
-    <p:handoutMasterId r:id="rId43"/>
+    <p:handoutMasterId r:id="rId45"/>
   </p:handoutMasterIdLst>
   <p:sldIdLst>
     <p:sldId id="256" r:id="rId5"/>
@@ -47,7 +47,9 @@
     <p:sldId id="303" r:id="rId38"/>
     <p:sldId id="304" r:id="rId39"/>
     <p:sldId id="305" r:id="rId40"/>
-    <p:sldId id="267" r:id="rId41"/>
+    <p:sldId id="306" r:id="rId41"/>
+    <p:sldId id="307" r:id="rId42"/>
+    <p:sldId id="267" r:id="rId43"/>
   </p:sldIdLst>
   <p:sldSz cx="12192000" cy="6858000"/>
   <p:notesSz cx="6858000" cy="9144000"/>
@@ -855,7 +857,7 @@
           <a:p>
             <a:fld id="{EE000EEB-8338-48D7-8EE8-EE0082EF7602}" type="slidenum">
               <a:rPr lang="en-US" smtClean="0"/>
-              <a:t>37</a:t>
+              <a:t>39</a:t>
             </a:fld>
             <a:endParaRPr lang="en-US" dirty="0"/>
           </a:p>
@@ -27663,210 +27665,6 @@
       </p:sp>
       <p:sp>
         <p:nvSpPr>
-          <p:cNvPr id="25" name="Rectangle 24">
-            <a:extLst>
-              <a:ext uri="{FF2B5EF4-FFF2-40B4-BE49-F238E27FC236}">
-                <a16:creationId xmlns:a16="http://schemas.microsoft.com/office/drawing/2014/main" id="{1B29C1FF-1124-3ADB-04ED-B0F9E3B5BEB0}"/>
-              </a:ext>
-            </a:extLst>
-          </p:cNvPr>
-          <p:cNvSpPr/>
-          <p:nvPr/>
-        </p:nvSpPr>
-        <p:spPr>
-          <a:xfrm rot="8938082">
-            <a:off x="5502940" y="1047172"/>
-            <a:ext cx="76042" cy="1357830"/>
-          </a:xfrm>
-          <a:prstGeom prst="rect">
-            <a:avLst/>
-          </a:prstGeom>
-          <a:solidFill>
-            <a:schemeClr val="accent3">
-              <a:alpha val="50196"/>
-            </a:schemeClr>
-          </a:solidFill>
-        </p:spPr>
-        <p:style>
-          <a:lnRef idx="2">
-            <a:schemeClr val="accent1">
-              <a:shade val="15000"/>
-            </a:schemeClr>
-          </a:lnRef>
-          <a:fillRef idx="1">
-            <a:schemeClr val="accent1"/>
-          </a:fillRef>
-          <a:effectRef idx="0">
-            <a:schemeClr val="accent1"/>
-          </a:effectRef>
-          <a:fontRef idx="minor">
-            <a:schemeClr val="lt1"/>
-          </a:fontRef>
-        </p:style>
-        <p:txBody>
-          <a:bodyPr rtlCol="0" anchor="ctr"/>
-          <a:lstStyle/>
-          <a:p>
-            <a:pPr algn="ctr"/>
-            <a:endParaRPr lang="en-US"/>
-          </a:p>
-        </p:txBody>
-      </p:sp>
-      <p:sp>
-        <p:nvSpPr>
-          <p:cNvPr id="26" name="Rectangle 25">
-            <a:extLst>
-              <a:ext uri="{FF2B5EF4-FFF2-40B4-BE49-F238E27FC236}">
-                <a16:creationId xmlns:a16="http://schemas.microsoft.com/office/drawing/2014/main" id="{DB9ADCB4-FB81-56C8-65EE-D67282827F64}"/>
-              </a:ext>
-            </a:extLst>
-          </p:cNvPr>
-          <p:cNvSpPr/>
-          <p:nvPr/>
-        </p:nvSpPr>
-        <p:spPr>
-          <a:xfrm rot="10800000">
-            <a:off x="5873291" y="1176175"/>
-            <a:ext cx="90481" cy="1117544"/>
-          </a:xfrm>
-          <a:prstGeom prst="rect">
-            <a:avLst/>
-          </a:prstGeom>
-          <a:solidFill>
-            <a:schemeClr val="accent3">
-              <a:alpha val="50196"/>
-            </a:schemeClr>
-          </a:solidFill>
-        </p:spPr>
-        <p:style>
-          <a:lnRef idx="2">
-            <a:schemeClr val="accent1">
-              <a:shade val="15000"/>
-            </a:schemeClr>
-          </a:lnRef>
-          <a:fillRef idx="1">
-            <a:schemeClr val="accent1"/>
-          </a:fillRef>
-          <a:effectRef idx="0">
-            <a:schemeClr val="accent1"/>
-          </a:effectRef>
-          <a:fontRef idx="minor">
-            <a:schemeClr val="lt1"/>
-          </a:fontRef>
-        </p:style>
-        <p:txBody>
-          <a:bodyPr rtlCol="0" anchor="ctr"/>
-          <a:lstStyle/>
-          <a:p>
-            <a:pPr algn="ctr"/>
-            <a:endParaRPr lang="en-US"/>
-          </a:p>
-        </p:txBody>
-      </p:sp>
-      <p:sp>
-        <p:nvSpPr>
-          <p:cNvPr id="27" name="Rectangle 26">
-            <a:extLst>
-              <a:ext uri="{FF2B5EF4-FFF2-40B4-BE49-F238E27FC236}">
-                <a16:creationId xmlns:a16="http://schemas.microsoft.com/office/drawing/2014/main" id="{1CA24398-D52D-57EC-EBB6-2158D05BE368}"/>
-              </a:ext>
-            </a:extLst>
-          </p:cNvPr>
-          <p:cNvSpPr/>
-          <p:nvPr/>
-        </p:nvSpPr>
-        <p:spPr>
-          <a:xfrm rot="12691686" flipH="1">
-            <a:off x="5408785" y="1079456"/>
-            <a:ext cx="55472" cy="1281028"/>
-          </a:xfrm>
-          <a:prstGeom prst="rect">
-            <a:avLst/>
-          </a:prstGeom>
-          <a:solidFill>
-            <a:schemeClr val="accent3">
-              <a:alpha val="50196"/>
-            </a:schemeClr>
-          </a:solidFill>
-        </p:spPr>
-        <p:style>
-          <a:lnRef idx="2">
-            <a:schemeClr val="accent1">
-              <a:shade val="15000"/>
-            </a:schemeClr>
-          </a:lnRef>
-          <a:fillRef idx="1">
-            <a:schemeClr val="accent1"/>
-          </a:fillRef>
-          <a:effectRef idx="0">
-            <a:schemeClr val="accent1"/>
-          </a:effectRef>
-          <a:fontRef idx="minor">
-            <a:schemeClr val="lt1"/>
-          </a:fontRef>
-        </p:style>
-        <p:txBody>
-          <a:bodyPr rtlCol="0" anchor="ctr"/>
-          <a:lstStyle/>
-          <a:p>
-            <a:pPr algn="ctr"/>
-            <a:endParaRPr lang="en-US"/>
-          </a:p>
-        </p:txBody>
-      </p:sp>
-      <p:sp>
-        <p:nvSpPr>
-          <p:cNvPr id="34" name="Rectangle 33">
-            <a:extLst>
-              <a:ext uri="{FF2B5EF4-FFF2-40B4-BE49-F238E27FC236}">
-                <a16:creationId xmlns:a16="http://schemas.microsoft.com/office/drawing/2014/main" id="{113075E4-1736-5E8F-5C22-4A2DC7EF4862}"/>
-              </a:ext>
-            </a:extLst>
-          </p:cNvPr>
-          <p:cNvSpPr/>
-          <p:nvPr/>
-        </p:nvSpPr>
-        <p:spPr>
-          <a:xfrm rot="9307021">
-            <a:off x="6527495" y="1029611"/>
-            <a:ext cx="45719" cy="2689598"/>
-          </a:xfrm>
-          <a:prstGeom prst="rect">
-            <a:avLst/>
-          </a:prstGeom>
-          <a:solidFill>
-            <a:schemeClr val="accent3">
-              <a:alpha val="50196"/>
-            </a:schemeClr>
-          </a:solidFill>
-        </p:spPr>
-        <p:style>
-          <a:lnRef idx="2">
-            <a:schemeClr val="accent1">
-              <a:shade val="15000"/>
-            </a:schemeClr>
-          </a:lnRef>
-          <a:fillRef idx="1">
-            <a:schemeClr val="accent1"/>
-          </a:fillRef>
-          <a:effectRef idx="0">
-            <a:schemeClr val="accent1"/>
-          </a:effectRef>
-          <a:fontRef idx="minor">
-            <a:schemeClr val="lt1"/>
-          </a:fontRef>
-        </p:style>
-        <p:txBody>
-          <a:bodyPr rtlCol="0" anchor="ctr"/>
-          <a:lstStyle/>
-          <a:p>
-            <a:pPr algn="ctr"/>
-            <a:endParaRPr lang="en-US"/>
-          </a:p>
-        </p:txBody>
-      </p:sp>
-      <p:sp>
-        <p:nvSpPr>
           <p:cNvPr id="35" name="Rectangle 34">
             <a:extLst>
               <a:ext uri="{FF2B5EF4-FFF2-40B4-BE49-F238E27FC236}">
@@ -29519,6 +29317,524 @@
           </a:p>
         </p:txBody>
       </p:sp>
+      <p:sp>
+        <p:nvSpPr>
+          <p:cNvPr id="4" name="Freeform: Shape 3">
+            <a:extLst>
+              <a:ext uri="{FF2B5EF4-FFF2-40B4-BE49-F238E27FC236}">
+                <a16:creationId xmlns:a16="http://schemas.microsoft.com/office/drawing/2014/main" id="{534F66EB-7E02-CB96-8803-AEA365D06354}"/>
+              </a:ext>
+            </a:extLst>
+          </p:cNvPr>
+          <p:cNvSpPr/>
+          <p:nvPr/>
+        </p:nvSpPr>
+        <p:spPr>
+          <a:xfrm>
+            <a:off x="3648075" y="3009900"/>
+            <a:ext cx="4763" cy="442913"/>
+          </a:xfrm>
+          <a:custGeom>
+            <a:avLst/>
+            <a:gdLst>
+              <a:gd name="csX0" fmla="*/ 0 w 4763"/>
+              <a:gd name="csY0" fmla="*/ 0 h 442913"/>
+              <a:gd name="csX1" fmla="*/ 4763 w 4763"/>
+              <a:gd name="csY1" fmla="*/ 442913 h 442913"/>
+            </a:gdLst>
+            <a:ahLst/>
+            <a:cxnLst>
+              <a:cxn ang="0">
+                <a:pos x="csX0" y="csY0"/>
+              </a:cxn>
+              <a:cxn ang="0">
+                <a:pos x="csX1" y="csY1"/>
+              </a:cxn>
+            </a:cxnLst>
+            <a:rect l="l" t="t" r="r" b="b"/>
+            <a:pathLst>
+              <a:path w="4763" h="442913">
+                <a:moveTo>
+                  <a:pt x="0" y="0"/>
+                </a:moveTo>
+                <a:cubicBezTo>
+                  <a:pt x="1588" y="147638"/>
+                  <a:pt x="3175" y="295275"/>
+                  <a:pt x="4763" y="442913"/>
+                </a:cubicBezTo>
+              </a:path>
+            </a:pathLst>
+          </a:custGeom>
+        </p:spPr>
+        <p:style>
+          <a:lnRef idx="3">
+            <a:schemeClr val="accent1"/>
+          </a:lnRef>
+          <a:fillRef idx="0">
+            <a:schemeClr val="accent1"/>
+          </a:fillRef>
+          <a:effectRef idx="2">
+            <a:schemeClr val="accent1"/>
+          </a:effectRef>
+          <a:fontRef idx="minor">
+            <a:schemeClr val="tx1"/>
+          </a:fontRef>
+        </p:style>
+        <p:txBody>
+          <a:bodyPr rtlCol="0" anchor="ctr"/>
+          <a:lstStyle/>
+          <a:p>
+            <a:pPr algn="ctr"/>
+            <a:endParaRPr lang="en-US"/>
+          </a:p>
+        </p:txBody>
+      </p:sp>
+      <p:sp>
+        <p:nvSpPr>
+          <p:cNvPr id="7" name="Freeform: Shape 6">
+            <a:extLst>
+              <a:ext uri="{FF2B5EF4-FFF2-40B4-BE49-F238E27FC236}">
+                <a16:creationId xmlns:a16="http://schemas.microsoft.com/office/drawing/2014/main" id="{ABFF1D59-2671-AAE9-ECB8-2C3F02397FA8}"/>
+              </a:ext>
+            </a:extLst>
+          </p:cNvPr>
+          <p:cNvSpPr/>
+          <p:nvPr/>
+        </p:nvSpPr>
+        <p:spPr>
+          <a:xfrm>
+            <a:off x="3810000" y="2414588"/>
+            <a:ext cx="809625" cy="1028700"/>
+          </a:xfrm>
+          <a:custGeom>
+            <a:avLst/>
+            <a:gdLst>
+              <a:gd name="csX0" fmla="*/ 809625 w 809625"/>
+              <a:gd name="csY0" fmla="*/ 0 h 1028700"/>
+              <a:gd name="csX1" fmla="*/ 261938 w 809625"/>
+              <a:gd name="csY1" fmla="*/ 0 h 1028700"/>
+              <a:gd name="csX2" fmla="*/ 261938 w 809625"/>
+              <a:gd name="csY2" fmla="*/ 866775 h 1028700"/>
+              <a:gd name="csX3" fmla="*/ 0 w 809625"/>
+              <a:gd name="csY3" fmla="*/ 866775 h 1028700"/>
+              <a:gd name="csX4" fmla="*/ 0 w 809625"/>
+              <a:gd name="csY4" fmla="*/ 1028700 h 1028700"/>
+            </a:gdLst>
+            <a:ahLst/>
+            <a:cxnLst>
+              <a:cxn ang="0">
+                <a:pos x="csX0" y="csY0"/>
+              </a:cxn>
+              <a:cxn ang="0">
+                <a:pos x="csX1" y="csY1"/>
+              </a:cxn>
+              <a:cxn ang="0">
+                <a:pos x="csX2" y="csY2"/>
+              </a:cxn>
+              <a:cxn ang="0">
+                <a:pos x="csX3" y="csY3"/>
+              </a:cxn>
+              <a:cxn ang="0">
+                <a:pos x="csX4" y="csY4"/>
+              </a:cxn>
+            </a:cxnLst>
+            <a:rect l="l" t="t" r="r" b="b"/>
+            <a:pathLst>
+              <a:path w="809625" h="1028700">
+                <a:moveTo>
+                  <a:pt x="809625" y="0"/>
+                </a:moveTo>
+                <a:lnTo>
+                  <a:pt x="261938" y="0"/>
+                </a:lnTo>
+                <a:lnTo>
+                  <a:pt x="261938" y="866775"/>
+                </a:lnTo>
+                <a:lnTo>
+                  <a:pt x="0" y="866775"/>
+                </a:lnTo>
+                <a:lnTo>
+                  <a:pt x="0" y="1028700"/>
+                </a:lnTo>
+              </a:path>
+            </a:pathLst>
+          </a:custGeom>
+        </p:spPr>
+        <p:style>
+          <a:lnRef idx="3">
+            <a:schemeClr val="accent1"/>
+          </a:lnRef>
+          <a:fillRef idx="0">
+            <a:schemeClr val="accent1"/>
+          </a:fillRef>
+          <a:effectRef idx="2">
+            <a:schemeClr val="accent1"/>
+          </a:effectRef>
+          <a:fontRef idx="minor">
+            <a:schemeClr val="tx1"/>
+          </a:fontRef>
+        </p:style>
+        <p:txBody>
+          <a:bodyPr rtlCol="0" anchor="ctr"/>
+          <a:lstStyle/>
+          <a:p>
+            <a:pPr algn="ctr"/>
+            <a:endParaRPr lang="en-US"/>
+          </a:p>
+        </p:txBody>
+      </p:sp>
+      <p:sp>
+        <p:nvSpPr>
+          <p:cNvPr id="9" name="Freeform: Shape 8">
+            <a:extLst>
+              <a:ext uri="{FF2B5EF4-FFF2-40B4-BE49-F238E27FC236}">
+                <a16:creationId xmlns:a16="http://schemas.microsoft.com/office/drawing/2014/main" id="{49753E05-DB1B-AAC7-0A68-960E96B1935C}"/>
+              </a:ext>
+            </a:extLst>
+          </p:cNvPr>
+          <p:cNvSpPr/>
+          <p:nvPr/>
+        </p:nvSpPr>
+        <p:spPr>
+          <a:xfrm>
+            <a:off x="3750067" y="1839074"/>
+            <a:ext cx="852755" cy="1623317"/>
+          </a:xfrm>
+          <a:custGeom>
+            <a:avLst/>
+            <a:gdLst>
+              <a:gd name="csX0" fmla="*/ 0 w 852755"/>
+              <a:gd name="csY0" fmla="*/ 1623317 h 1623317"/>
+              <a:gd name="csX1" fmla="*/ 852755 w 852755"/>
+              <a:gd name="csY1" fmla="*/ 0 h 1623317"/>
+            </a:gdLst>
+            <a:ahLst/>
+            <a:cxnLst>
+              <a:cxn ang="0">
+                <a:pos x="csX0" y="csY0"/>
+              </a:cxn>
+              <a:cxn ang="0">
+                <a:pos x="csX1" y="csY1"/>
+              </a:cxn>
+            </a:cxnLst>
+            <a:rect l="l" t="t" r="r" b="b"/>
+            <a:pathLst>
+              <a:path w="852755" h="1623317">
+                <a:moveTo>
+                  <a:pt x="0" y="1623317"/>
+                </a:moveTo>
+                <a:lnTo>
+                  <a:pt x="852755" y="0"/>
+                </a:lnTo>
+              </a:path>
+            </a:pathLst>
+          </a:custGeom>
+        </p:spPr>
+        <p:style>
+          <a:lnRef idx="3">
+            <a:schemeClr val="accent2"/>
+          </a:lnRef>
+          <a:fillRef idx="0">
+            <a:schemeClr val="accent2"/>
+          </a:fillRef>
+          <a:effectRef idx="2">
+            <a:schemeClr val="accent2"/>
+          </a:effectRef>
+          <a:fontRef idx="minor">
+            <a:schemeClr val="tx1"/>
+          </a:fontRef>
+        </p:style>
+        <p:txBody>
+          <a:bodyPr rtlCol="0" anchor="ctr"/>
+          <a:lstStyle/>
+          <a:p>
+            <a:pPr algn="ctr"/>
+            <a:endParaRPr lang="en-US"/>
+          </a:p>
+        </p:txBody>
+      </p:sp>
+      <p:sp>
+        <p:nvSpPr>
+          <p:cNvPr id="10" name="Freeform: Shape 9">
+            <a:extLst>
+              <a:ext uri="{FF2B5EF4-FFF2-40B4-BE49-F238E27FC236}">
+                <a16:creationId xmlns:a16="http://schemas.microsoft.com/office/drawing/2014/main" id="{B135A2E3-F732-9F2A-5927-604AB8C8BD60}"/>
+              </a:ext>
+            </a:extLst>
+          </p:cNvPr>
+          <p:cNvSpPr/>
+          <p:nvPr/>
+        </p:nvSpPr>
+        <p:spPr>
+          <a:xfrm>
+            <a:off x="4952144" y="1150706"/>
+            <a:ext cx="821932" cy="1099334"/>
+          </a:xfrm>
+          <a:custGeom>
+            <a:avLst/>
+            <a:gdLst>
+              <a:gd name="csX0" fmla="*/ 0 w 821932"/>
+              <a:gd name="csY0" fmla="*/ 1099334 h 1099334"/>
+              <a:gd name="csX1" fmla="*/ 821932 w 821932"/>
+              <a:gd name="csY1" fmla="*/ 0 h 1099334"/>
+            </a:gdLst>
+            <a:ahLst/>
+            <a:cxnLst>
+              <a:cxn ang="0">
+                <a:pos x="csX0" y="csY0"/>
+              </a:cxn>
+              <a:cxn ang="0">
+                <a:pos x="csX1" y="csY1"/>
+              </a:cxn>
+            </a:cxnLst>
+            <a:rect l="l" t="t" r="r" b="b"/>
+            <a:pathLst>
+              <a:path w="821932" h="1099334">
+                <a:moveTo>
+                  <a:pt x="0" y="1099334"/>
+                </a:moveTo>
+                <a:lnTo>
+                  <a:pt x="821932" y="0"/>
+                </a:lnTo>
+              </a:path>
+            </a:pathLst>
+          </a:custGeom>
+        </p:spPr>
+        <p:style>
+          <a:lnRef idx="3">
+            <a:schemeClr val="accent2"/>
+          </a:lnRef>
+          <a:fillRef idx="0">
+            <a:schemeClr val="accent2"/>
+          </a:fillRef>
+          <a:effectRef idx="2">
+            <a:schemeClr val="accent2"/>
+          </a:effectRef>
+          <a:fontRef idx="minor">
+            <a:schemeClr val="tx1"/>
+          </a:fontRef>
+        </p:style>
+        <p:txBody>
+          <a:bodyPr rtlCol="0" anchor="ctr"/>
+          <a:lstStyle/>
+          <a:p>
+            <a:pPr algn="ctr"/>
+            <a:endParaRPr lang="en-US"/>
+          </a:p>
+        </p:txBody>
+      </p:sp>
+      <p:sp>
+        <p:nvSpPr>
+          <p:cNvPr id="11" name="Freeform: Shape 10">
+            <a:extLst>
+              <a:ext uri="{FF2B5EF4-FFF2-40B4-BE49-F238E27FC236}">
+                <a16:creationId xmlns:a16="http://schemas.microsoft.com/office/drawing/2014/main" id="{9DC30F13-6D08-583B-0180-F35190353A15}"/>
+              </a:ext>
+            </a:extLst>
+          </p:cNvPr>
+          <p:cNvSpPr/>
+          <p:nvPr/>
+        </p:nvSpPr>
+        <p:spPr>
+          <a:xfrm>
+            <a:off x="5167901" y="1150706"/>
+            <a:ext cx="678095" cy="1130157"/>
+          </a:xfrm>
+          <a:custGeom>
+            <a:avLst/>
+            <a:gdLst>
+              <a:gd name="csX0" fmla="*/ 678095 w 678095"/>
+              <a:gd name="csY0" fmla="*/ 1130157 h 1130157"/>
+              <a:gd name="csX1" fmla="*/ 0 w 678095"/>
+              <a:gd name="csY1" fmla="*/ 0 h 1130157"/>
+            </a:gdLst>
+            <a:ahLst/>
+            <a:cxnLst>
+              <a:cxn ang="0">
+                <a:pos x="csX0" y="csY0"/>
+              </a:cxn>
+              <a:cxn ang="0">
+                <a:pos x="csX1" y="csY1"/>
+              </a:cxn>
+            </a:cxnLst>
+            <a:rect l="l" t="t" r="r" b="b"/>
+            <a:pathLst>
+              <a:path w="678095" h="1130157">
+                <a:moveTo>
+                  <a:pt x="678095" y="1130157"/>
+                </a:moveTo>
+                <a:lnTo>
+                  <a:pt x="0" y="0"/>
+                </a:lnTo>
+              </a:path>
+            </a:pathLst>
+          </a:custGeom>
+        </p:spPr>
+        <p:style>
+          <a:lnRef idx="3">
+            <a:schemeClr val="accent2"/>
+          </a:lnRef>
+          <a:fillRef idx="0">
+            <a:schemeClr val="accent2"/>
+          </a:fillRef>
+          <a:effectRef idx="2">
+            <a:schemeClr val="accent2"/>
+          </a:effectRef>
+          <a:fontRef idx="minor">
+            <a:schemeClr val="tx1"/>
+          </a:fontRef>
+        </p:style>
+        <p:txBody>
+          <a:bodyPr rtlCol="0" anchor="ctr"/>
+          <a:lstStyle/>
+          <a:p>
+            <a:pPr algn="ctr"/>
+            <a:endParaRPr lang="en-US"/>
+          </a:p>
+        </p:txBody>
+      </p:sp>
+      <p:sp>
+        <p:nvSpPr>
+          <p:cNvPr id="12" name="Freeform: Shape 11">
+            <a:extLst>
+              <a:ext uri="{FF2B5EF4-FFF2-40B4-BE49-F238E27FC236}">
+                <a16:creationId xmlns:a16="http://schemas.microsoft.com/office/drawing/2014/main" id="{8C3AA6E2-70C8-4FD2-C583-54CA951B3AD6}"/>
+              </a:ext>
+            </a:extLst>
+          </p:cNvPr>
+          <p:cNvSpPr/>
+          <p:nvPr/>
+        </p:nvSpPr>
+        <p:spPr>
+          <a:xfrm>
+            <a:off x="5876819" y="1160980"/>
+            <a:ext cx="10274" cy="1150705"/>
+          </a:xfrm>
+          <a:custGeom>
+            <a:avLst/>
+            <a:gdLst>
+              <a:gd name="csX0" fmla="*/ 0 w 10274"/>
+              <a:gd name="csY0" fmla="*/ 1150705 h 1150705"/>
+              <a:gd name="csX1" fmla="*/ 10274 w 10274"/>
+              <a:gd name="csY1" fmla="*/ 0 h 1150705"/>
+            </a:gdLst>
+            <a:ahLst/>
+            <a:cxnLst>
+              <a:cxn ang="0">
+                <a:pos x="csX0" y="csY0"/>
+              </a:cxn>
+              <a:cxn ang="0">
+                <a:pos x="csX1" y="csY1"/>
+              </a:cxn>
+            </a:cxnLst>
+            <a:rect l="l" t="t" r="r" b="b"/>
+            <a:pathLst>
+              <a:path w="10274" h="1150705">
+                <a:moveTo>
+                  <a:pt x="0" y="1150705"/>
+                </a:moveTo>
+                <a:cubicBezTo>
+                  <a:pt x="3425" y="767137"/>
+                  <a:pt x="6849" y="383568"/>
+                  <a:pt x="10274" y="0"/>
+                </a:cubicBezTo>
+              </a:path>
+            </a:pathLst>
+          </a:custGeom>
+        </p:spPr>
+        <p:style>
+          <a:lnRef idx="3">
+            <a:schemeClr val="accent2"/>
+          </a:lnRef>
+          <a:fillRef idx="0">
+            <a:schemeClr val="accent2"/>
+          </a:fillRef>
+          <a:effectRef idx="2">
+            <a:schemeClr val="accent2"/>
+          </a:effectRef>
+          <a:fontRef idx="minor">
+            <a:schemeClr val="tx1"/>
+          </a:fontRef>
+        </p:style>
+        <p:txBody>
+          <a:bodyPr rtlCol="0" anchor="ctr"/>
+          <a:lstStyle/>
+          <a:p>
+            <a:pPr algn="ctr"/>
+            <a:endParaRPr lang="en-US"/>
+          </a:p>
+        </p:txBody>
+      </p:sp>
+      <p:sp>
+        <p:nvSpPr>
+          <p:cNvPr id="13" name="Freeform: Shape 12">
+            <a:extLst>
+              <a:ext uri="{FF2B5EF4-FFF2-40B4-BE49-F238E27FC236}">
+                <a16:creationId xmlns:a16="http://schemas.microsoft.com/office/drawing/2014/main" id="{36A5669E-96C0-C847-DC02-5CE0B4AC6255}"/>
+              </a:ext>
+            </a:extLst>
+          </p:cNvPr>
+          <p:cNvSpPr/>
+          <p:nvPr/>
+        </p:nvSpPr>
+        <p:spPr>
+          <a:xfrm>
+            <a:off x="6082301" y="1160980"/>
+            <a:ext cx="832207" cy="2311685"/>
+          </a:xfrm>
+          <a:custGeom>
+            <a:avLst/>
+            <a:gdLst>
+              <a:gd name="csX0" fmla="*/ 832207 w 832207"/>
+              <a:gd name="csY0" fmla="*/ 2311685 h 2311685"/>
+              <a:gd name="csX1" fmla="*/ 0 w 832207"/>
+              <a:gd name="csY1" fmla="*/ 0 h 2311685"/>
+            </a:gdLst>
+            <a:ahLst/>
+            <a:cxnLst>
+              <a:cxn ang="0">
+                <a:pos x="csX0" y="csY0"/>
+              </a:cxn>
+              <a:cxn ang="0">
+                <a:pos x="csX1" y="csY1"/>
+              </a:cxn>
+            </a:cxnLst>
+            <a:rect l="l" t="t" r="r" b="b"/>
+            <a:pathLst>
+              <a:path w="832207" h="2311685">
+                <a:moveTo>
+                  <a:pt x="832207" y="2311685"/>
+                </a:moveTo>
+                <a:lnTo>
+                  <a:pt x="0" y="0"/>
+                </a:lnTo>
+              </a:path>
+            </a:pathLst>
+          </a:custGeom>
+        </p:spPr>
+        <p:style>
+          <a:lnRef idx="3">
+            <a:schemeClr val="accent2"/>
+          </a:lnRef>
+          <a:fillRef idx="0">
+            <a:schemeClr val="accent2"/>
+          </a:fillRef>
+          <a:effectRef idx="2">
+            <a:schemeClr val="accent2"/>
+          </a:effectRef>
+          <a:fontRef idx="minor">
+            <a:schemeClr val="tx1"/>
+          </a:fontRef>
+        </p:style>
+        <p:txBody>
+          <a:bodyPr rtlCol="0" anchor="ctr"/>
+          <a:lstStyle/>
+          <a:p>
+            <a:pPr algn="ctr"/>
+            <a:endParaRPr lang="en-US"/>
+          </a:p>
+        </p:txBody>
+      </p:sp>
     </p:spTree>
     <p:extLst>
       <p:ext uri="{BB962C8B-B14F-4D97-AF65-F5344CB8AC3E}">
@@ -29533,6 +29849,3023 @@
 </file>
 
 <file path=ppt/slides/slide37.xml><?xml version="1.0" encoding="utf-8"?>
+<p:sld xmlns:a="http://schemas.openxmlformats.org/drawingml/2006/main" xmlns:r="http://schemas.openxmlformats.org/officeDocument/2006/relationships" xmlns:p="http://schemas.openxmlformats.org/presentationml/2006/main">
+  <p:cSld>
+    <p:spTree>
+      <p:nvGrpSpPr>
+        <p:cNvPr id="1" name="">
+          <a:extLst>
+            <a:ext uri="{FF2B5EF4-FFF2-40B4-BE49-F238E27FC236}">
+              <a16:creationId xmlns:a16="http://schemas.microsoft.com/office/drawing/2014/main" id="{F2FA62F3-E995-E6DE-AE8C-9D046A3F2601}"/>
+            </a:ext>
+          </a:extLst>
+        </p:cNvPr>
+        <p:cNvGrpSpPr/>
+        <p:nvPr/>
+      </p:nvGrpSpPr>
+      <p:grpSpPr>
+        <a:xfrm>
+          <a:off x="0" y="0"/>
+          <a:ext cx="0" cy="0"/>
+          <a:chOff x="0" y="0"/>
+          <a:chExt cx="0" cy="0"/>
+        </a:xfrm>
+      </p:grpSpPr>
+      <p:sp>
+        <p:nvSpPr>
+          <p:cNvPr id="2" name="Title 1">
+            <a:extLst>
+              <a:ext uri="{FF2B5EF4-FFF2-40B4-BE49-F238E27FC236}">
+                <a16:creationId xmlns:a16="http://schemas.microsoft.com/office/drawing/2014/main" id="{E9B6B2B6-8779-E0D3-77E3-FA429EB6F230}"/>
+              </a:ext>
+            </a:extLst>
+          </p:cNvPr>
+          <p:cNvSpPr>
+            <a:spLocks noGrp="1"/>
+          </p:cNvSpPr>
+          <p:nvPr>
+            <p:ph type="title"/>
+          </p:nvPr>
+        </p:nvSpPr>
+        <p:spPr>
+          <a:xfrm>
+            <a:off x="1754188" y="452718"/>
+            <a:ext cx="8296646" cy="1400530"/>
+          </a:xfrm>
+        </p:spPr>
+        <p:txBody>
+          <a:bodyPr/>
+          <a:lstStyle/>
+          <a:p>
+            <a:r>
+              <a:rPr lang="en-US" b="1" dirty="0"/>
+              <a:t>Essential EA Meta-Model</a:t>
+            </a:r>
+            <a:br>
+              <a:rPr lang="en-US" b="1" dirty="0"/>
+            </a:br>
+            <a:r>
+              <a:rPr lang="en-US" b="1" dirty="0"/>
+              <a:t>- Business Layer - 18</a:t>
+            </a:r>
+          </a:p>
+        </p:txBody>
+      </p:sp>
+      <p:sp>
+        <p:nvSpPr>
+          <p:cNvPr id="4" name="Title 1">
+            <a:extLst>
+              <a:ext uri="{FF2B5EF4-FFF2-40B4-BE49-F238E27FC236}">
+                <a16:creationId xmlns:a16="http://schemas.microsoft.com/office/drawing/2014/main" id="{986A0FD5-D650-90EE-F714-5073B67C2D70}"/>
+              </a:ext>
+            </a:extLst>
+          </p:cNvPr>
+          <p:cNvSpPr txBox="1">
+            <a:spLocks/>
+          </p:cNvSpPr>
+          <p:nvPr/>
+        </p:nvSpPr>
+        <p:spPr>
+          <a:xfrm>
+            <a:off x="0" y="3143"/>
+            <a:ext cx="1754188" cy="1058013"/>
+          </a:xfrm>
+          <a:prstGeom prst="rect">
+            <a:avLst/>
+          </a:prstGeom>
+        </p:spPr>
+        <p:txBody>
+          <a:bodyPr vert="horz" lIns="91440" tIns="45720" rIns="91440" bIns="45720" rtlCol="0" anchor="ctr">
+            <a:noAutofit/>
+          </a:bodyPr>
+          <a:lstStyle>
+            <a:lvl1pPr algn="l" defTabSz="457200" rtl="0" eaLnBrk="1" latinLnBrk="0" hangingPunct="1">
+              <a:spcBef>
+                <a:spcPct val="0"/>
+              </a:spcBef>
+              <a:buNone/>
+              <a:defRPr sz="7200" b="0" i="0" kern="1200">
+                <a:solidFill>
+                  <a:schemeClr val="tx2"/>
+                </a:solidFill>
+                <a:latin typeface="+mj-lt"/>
+                <a:ea typeface="+mj-ea"/>
+                <a:cs typeface="+mj-cs"/>
+              </a:defRPr>
+            </a:lvl1pPr>
+            <a:lvl2pPr eaLnBrk="1" hangingPunct="1">
+              <a:defRPr>
+                <a:solidFill>
+                  <a:schemeClr val="tx2"/>
+                </a:solidFill>
+              </a:defRPr>
+            </a:lvl2pPr>
+            <a:lvl3pPr eaLnBrk="1" hangingPunct="1">
+              <a:defRPr>
+                <a:solidFill>
+                  <a:schemeClr val="tx2"/>
+                </a:solidFill>
+              </a:defRPr>
+            </a:lvl3pPr>
+            <a:lvl4pPr eaLnBrk="1" hangingPunct="1">
+              <a:defRPr>
+                <a:solidFill>
+                  <a:schemeClr val="tx2"/>
+                </a:solidFill>
+              </a:defRPr>
+            </a:lvl4pPr>
+            <a:lvl5pPr eaLnBrk="1" hangingPunct="1">
+              <a:defRPr>
+                <a:solidFill>
+                  <a:schemeClr val="tx2"/>
+                </a:solidFill>
+              </a:defRPr>
+            </a:lvl5pPr>
+            <a:lvl6pPr eaLnBrk="1" hangingPunct="1">
+              <a:defRPr>
+                <a:solidFill>
+                  <a:schemeClr val="tx2"/>
+                </a:solidFill>
+              </a:defRPr>
+            </a:lvl6pPr>
+            <a:lvl7pPr eaLnBrk="1" hangingPunct="1">
+              <a:defRPr>
+                <a:solidFill>
+                  <a:schemeClr val="tx2"/>
+                </a:solidFill>
+              </a:defRPr>
+            </a:lvl7pPr>
+            <a:lvl8pPr eaLnBrk="1" hangingPunct="1">
+              <a:defRPr>
+                <a:solidFill>
+                  <a:schemeClr val="tx2"/>
+                </a:solidFill>
+              </a:defRPr>
+            </a:lvl8pPr>
+            <a:lvl9pPr eaLnBrk="1" hangingPunct="1">
+              <a:defRPr>
+                <a:solidFill>
+                  <a:schemeClr val="tx2"/>
+                </a:solidFill>
+              </a:defRPr>
+            </a:lvl9pPr>
+          </a:lstStyle>
+          <a:p>
+            <a:pPr algn="ctr"/>
+            <a:r>
+              <a:rPr lang="en-US" b="1" dirty="0">
+                <a:solidFill>
+                  <a:schemeClr val="accent1">
+                    <a:lumMod val="75000"/>
+                  </a:schemeClr>
+                </a:solidFill>
+              </a:rPr>
+              <a:t>024</a:t>
+            </a:r>
+            <a:endParaRPr lang="ru-RU" b="1" dirty="0">
+              <a:solidFill>
+                <a:schemeClr val="accent1">
+                  <a:lumMod val="75000"/>
+                </a:schemeClr>
+              </a:solidFill>
+            </a:endParaRPr>
+          </a:p>
+        </p:txBody>
+      </p:sp>
+      <p:pic>
+        <p:nvPicPr>
+          <p:cNvPr id="3" name="Picture 2">
+            <a:extLst>
+              <a:ext uri="{FF2B5EF4-FFF2-40B4-BE49-F238E27FC236}">
+                <a16:creationId xmlns:a16="http://schemas.microsoft.com/office/drawing/2014/main" id="{87BB7D64-982F-CD1E-46C7-A58A922F170A}"/>
+              </a:ext>
+            </a:extLst>
+          </p:cNvPr>
+          <p:cNvPicPr>
+            <a:picLocks noChangeAspect="1"/>
+          </p:cNvPicPr>
+          <p:nvPr/>
+        </p:nvPicPr>
+        <p:blipFill>
+          <a:blip r:embed="rId2"/>
+          <a:stretch>
+            <a:fillRect/>
+          </a:stretch>
+        </p:blipFill>
+        <p:spPr>
+          <a:xfrm>
+            <a:off x="236841" y="1853248"/>
+            <a:ext cx="8296646" cy="4669795"/>
+          </a:xfrm>
+          <a:prstGeom prst="rect">
+            <a:avLst/>
+          </a:prstGeom>
+          <a:ln>
+            <a:noFill/>
+          </a:ln>
+          <a:effectLst>
+            <a:outerShdw blurRad="292100" dist="139700" dir="2700000" algn="tl" rotWithShape="0">
+              <a:srgbClr val="333333">
+                <a:alpha val="65000"/>
+              </a:srgbClr>
+            </a:outerShdw>
+          </a:effectLst>
+        </p:spPr>
+      </p:pic>
+      <p:sp>
+        <p:nvSpPr>
+          <p:cNvPr id="6" name="Rectangle: Rounded Corners 5">
+            <a:extLst>
+              <a:ext uri="{FF2B5EF4-FFF2-40B4-BE49-F238E27FC236}">
+                <a16:creationId xmlns:a16="http://schemas.microsoft.com/office/drawing/2014/main" id="{C53BD349-2724-3D4E-CD82-42092361C7FB}"/>
+              </a:ext>
+            </a:extLst>
+          </p:cNvPr>
+          <p:cNvSpPr/>
+          <p:nvPr/>
+        </p:nvSpPr>
+        <p:spPr>
+          <a:xfrm>
+            <a:off x="596436" y="2188396"/>
+            <a:ext cx="2054832" cy="2671280"/>
+          </a:xfrm>
+          <a:prstGeom prst="roundRect">
+            <a:avLst>
+              <a:gd name="adj" fmla="val 6916"/>
+            </a:avLst>
+          </a:prstGeom>
+          <a:solidFill>
+            <a:srgbClr val="FFCC66">
+              <a:alpha val="20000"/>
+            </a:srgbClr>
+          </a:solidFill>
+          <a:ln>
+            <a:solidFill>
+              <a:srgbClr val="92D050"/>
+            </a:solidFill>
+          </a:ln>
+        </p:spPr>
+        <p:style>
+          <a:lnRef idx="2">
+            <a:schemeClr val="accent1">
+              <a:shade val="15000"/>
+            </a:schemeClr>
+          </a:lnRef>
+          <a:fillRef idx="1">
+            <a:schemeClr val="accent1"/>
+          </a:fillRef>
+          <a:effectRef idx="0">
+            <a:schemeClr val="accent1"/>
+          </a:effectRef>
+          <a:fontRef idx="minor">
+            <a:schemeClr val="lt1"/>
+          </a:fontRef>
+        </p:style>
+        <p:txBody>
+          <a:bodyPr rtlCol="0" anchor="ctr"/>
+          <a:lstStyle/>
+          <a:p>
+            <a:pPr algn="ctr"/>
+            <a:endParaRPr lang="en-US"/>
+          </a:p>
+        </p:txBody>
+      </p:sp>
+      <p:pic>
+        <p:nvPicPr>
+          <p:cNvPr id="11" name="Picture 10">
+            <a:extLst>
+              <a:ext uri="{FF2B5EF4-FFF2-40B4-BE49-F238E27FC236}">
+                <a16:creationId xmlns:a16="http://schemas.microsoft.com/office/drawing/2014/main" id="{3B603F07-F203-CBF4-726B-93F9EAAEEB01}"/>
+              </a:ext>
+            </a:extLst>
+          </p:cNvPr>
+          <p:cNvPicPr>
+            <a:picLocks noChangeAspect="1"/>
+          </p:cNvPicPr>
+          <p:nvPr/>
+        </p:nvPicPr>
+        <p:blipFill>
+          <a:blip r:embed="rId3"/>
+          <a:stretch>
+            <a:fillRect/>
+          </a:stretch>
+        </p:blipFill>
+        <p:spPr>
+          <a:xfrm>
+            <a:off x="157000" y="1094226"/>
+            <a:ext cx="362976" cy="362976"/>
+          </a:xfrm>
+          <a:prstGeom prst="rect">
+            <a:avLst/>
+          </a:prstGeom>
+          <a:ln>
+            <a:noFill/>
+          </a:ln>
+          <a:effectLst>
+            <a:outerShdw blurRad="292100" dist="139700" dir="2700000" algn="tl" rotWithShape="0">
+              <a:srgbClr val="333333">
+                <a:alpha val="65000"/>
+              </a:srgbClr>
+            </a:outerShdw>
+          </a:effectLst>
+        </p:spPr>
+      </p:pic>
+      <p:pic>
+        <p:nvPicPr>
+          <p:cNvPr id="12" name="Picture 11">
+            <a:extLst>
+              <a:ext uri="{FF2B5EF4-FFF2-40B4-BE49-F238E27FC236}">
+                <a16:creationId xmlns:a16="http://schemas.microsoft.com/office/drawing/2014/main" id="{62B62772-748F-2A54-7C3C-82524FC203D0}"/>
+              </a:ext>
+            </a:extLst>
+          </p:cNvPr>
+          <p:cNvPicPr>
+            <a:picLocks noChangeAspect="1"/>
+          </p:cNvPicPr>
+          <p:nvPr/>
+        </p:nvPicPr>
+        <p:blipFill>
+          <a:blip r:embed="rId4"/>
+          <a:stretch>
+            <a:fillRect/>
+          </a:stretch>
+        </p:blipFill>
+        <p:spPr>
+          <a:xfrm>
+            <a:off x="611241" y="1094226"/>
+            <a:ext cx="362976" cy="362976"/>
+          </a:xfrm>
+          <a:prstGeom prst="rect">
+            <a:avLst/>
+          </a:prstGeom>
+          <a:ln>
+            <a:noFill/>
+          </a:ln>
+          <a:effectLst>
+            <a:outerShdw blurRad="292100" dist="139700" dir="2700000" algn="tl" rotWithShape="0">
+              <a:srgbClr val="333333">
+                <a:alpha val="65000"/>
+              </a:srgbClr>
+            </a:outerShdw>
+          </a:effectLst>
+        </p:spPr>
+      </p:pic>
+      <p:pic>
+        <p:nvPicPr>
+          <p:cNvPr id="13" name="Picture 12">
+            <a:extLst>
+              <a:ext uri="{FF2B5EF4-FFF2-40B4-BE49-F238E27FC236}">
+                <a16:creationId xmlns:a16="http://schemas.microsoft.com/office/drawing/2014/main" id="{86D968E0-A26B-188B-AD2D-57E1887B6B91}"/>
+              </a:ext>
+            </a:extLst>
+          </p:cNvPr>
+          <p:cNvPicPr>
+            <a:picLocks noChangeAspect="1"/>
+          </p:cNvPicPr>
+          <p:nvPr/>
+        </p:nvPicPr>
+        <p:blipFill>
+          <a:blip r:embed="rId5"/>
+          <a:stretch>
+            <a:fillRect/>
+          </a:stretch>
+        </p:blipFill>
+        <p:spPr>
+          <a:xfrm>
+            <a:off x="1065482" y="1094226"/>
+            <a:ext cx="371111" cy="362976"/>
+          </a:xfrm>
+          <a:prstGeom prst="rect">
+            <a:avLst/>
+          </a:prstGeom>
+          <a:ln>
+            <a:noFill/>
+          </a:ln>
+          <a:effectLst>
+            <a:outerShdw blurRad="292100" dist="139700" dir="2700000" algn="tl" rotWithShape="0">
+              <a:srgbClr val="333333">
+                <a:alpha val="65000"/>
+              </a:srgbClr>
+            </a:outerShdw>
+          </a:effectLst>
+        </p:spPr>
+      </p:pic>
+      <p:pic>
+        <p:nvPicPr>
+          <p:cNvPr id="8" name="Picture 7">
+            <a:extLst>
+              <a:ext uri="{FF2B5EF4-FFF2-40B4-BE49-F238E27FC236}">
+                <a16:creationId xmlns:a16="http://schemas.microsoft.com/office/drawing/2014/main" id="{2AC378E4-4C89-0493-C7C0-EA18BA555E90}"/>
+              </a:ext>
+            </a:extLst>
+          </p:cNvPr>
+          <p:cNvPicPr>
+            <a:picLocks noChangeAspect="1"/>
+          </p:cNvPicPr>
+          <p:nvPr/>
+        </p:nvPicPr>
+        <p:blipFill>
+          <a:blip r:embed="rId6"/>
+          <a:stretch>
+            <a:fillRect/>
+          </a:stretch>
+        </p:blipFill>
+        <p:spPr>
+          <a:xfrm>
+            <a:off x="5679945" y="1931542"/>
+            <a:ext cx="5794652" cy="4238971"/>
+          </a:xfrm>
+          <a:prstGeom prst="roundRect">
+            <a:avLst>
+              <a:gd name="adj" fmla="val 16667"/>
+            </a:avLst>
+          </a:prstGeom>
+          <a:ln>
+            <a:noFill/>
+          </a:ln>
+          <a:effectLst>
+            <a:outerShdw blurRad="152400" dist="12000" dir="900000" sy="98000" kx="110000" ky="200000" algn="tl" rotWithShape="0">
+              <a:srgbClr val="000000">
+                <a:alpha val="30000"/>
+              </a:srgbClr>
+            </a:outerShdw>
+          </a:effectLst>
+          <a:scene3d>
+            <a:camera prst="perspectiveRelaxed">
+              <a:rot lat="19800000" lon="1200000" rev="20820000"/>
+            </a:camera>
+            <a:lightRig rig="threePt" dir="t"/>
+          </a:scene3d>
+          <a:sp3d contourW="6350" prstMaterial="matte">
+            <a:bevelT w="101600" h="101600"/>
+            <a:contourClr>
+              <a:srgbClr val="969696"/>
+            </a:contourClr>
+          </a:sp3d>
+        </p:spPr>
+      </p:pic>
+    </p:spTree>
+    <p:extLst>
+      <p:ext uri="{BB962C8B-B14F-4D97-AF65-F5344CB8AC3E}">
+        <p14:creationId xmlns:p14="http://schemas.microsoft.com/office/powerpoint/2010/main" val="2660352056"/>
+      </p:ext>
+    </p:extLst>
+  </p:cSld>
+  <p:clrMapOvr>
+    <a:masterClrMapping/>
+  </p:clrMapOvr>
+</p:sld>
+</file>
+
+<file path=ppt/slides/slide38.xml><?xml version="1.0" encoding="utf-8"?>
+<p:sld xmlns:a="http://schemas.openxmlformats.org/drawingml/2006/main" xmlns:r="http://schemas.openxmlformats.org/officeDocument/2006/relationships" xmlns:p="http://schemas.openxmlformats.org/presentationml/2006/main">
+  <p:cSld>
+    <p:spTree>
+      <p:nvGrpSpPr>
+        <p:cNvPr id="1" name="">
+          <a:extLst>
+            <a:ext uri="{FF2B5EF4-FFF2-40B4-BE49-F238E27FC236}">
+              <a16:creationId xmlns:a16="http://schemas.microsoft.com/office/drawing/2014/main" id="{D066522C-FCE3-0D90-5E62-CFC6801D988F}"/>
+            </a:ext>
+          </a:extLst>
+        </p:cNvPr>
+        <p:cNvGrpSpPr/>
+        <p:nvPr/>
+      </p:nvGrpSpPr>
+      <p:grpSpPr>
+        <a:xfrm>
+          <a:off x="0" y="0"/>
+          <a:ext cx="0" cy="0"/>
+          <a:chOff x="0" y="0"/>
+          <a:chExt cx="0" cy="0"/>
+        </a:xfrm>
+      </p:grpSpPr>
+      <p:pic>
+        <p:nvPicPr>
+          <p:cNvPr id="3" name="Picture 2">
+            <a:extLst>
+              <a:ext uri="{FF2B5EF4-FFF2-40B4-BE49-F238E27FC236}">
+                <a16:creationId xmlns:a16="http://schemas.microsoft.com/office/drawing/2014/main" id="{207E1451-A284-7E04-6C75-2FA1EDFC97A9}"/>
+              </a:ext>
+            </a:extLst>
+          </p:cNvPr>
+          <p:cNvPicPr>
+            <a:picLocks noChangeAspect="1"/>
+          </p:cNvPicPr>
+          <p:nvPr/>
+        </p:nvPicPr>
+        <p:blipFill>
+          <a:blip r:embed="rId2"/>
+          <a:stretch>
+            <a:fillRect/>
+          </a:stretch>
+        </p:blipFill>
+        <p:spPr>
+          <a:xfrm>
+            <a:off x="2592309" y="0"/>
+            <a:ext cx="7007382" cy="6858000"/>
+          </a:xfrm>
+          <a:prstGeom prst="rect">
+            <a:avLst/>
+          </a:prstGeom>
+        </p:spPr>
+      </p:pic>
+      <p:sp>
+        <p:nvSpPr>
+          <p:cNvPr id="5" name="Rectangle 4">
+            <a:extLst>
+              <a:ext uri="{FF2B5EF4-FFF2-40B4-BE49-F238E27FC236}">
+                <a16:creationId xmlns:a16="http://schemas.microsoft.com/office/drawing/2014/main" id="{49C8A31F-955A-4EE8-B76B-624F7058EA67}"/>
+              </a:ext>
+            </a:extLst>
+          </p:cNvPr>
+          <p:cNvSpPr/>
+          <p:nvPr/>
+        </p:nvSpPr>
+        <p:spPr>
+          <a:xfrm>
+            <a:off x="3619568" y="0"/>
+            <a:ext cx="233295" cy="181579"/>
+          </a:xfrm>
+          <a:prstGeom prst="rect">
+            <a:avLst/>
+          </a:prstGeom>
+          <a:solidFill>
+            <a:srgbClr val="ACD433">
+              <a:alpha val="50196"/>
+            </a:srgbClr>
+          </a:solidFill>
+        </p:spPr>
+        <p:style>
+          <a:lnRef idx="2">
+            <a:schemeClr val="accent1">
+              <a:shade val="15000"/>
+            </a:schemeClr>
+          </a:lnRef>
+          <a:fillRef idx="1">
+            <a:schemeClr val="accent1"/>
+          </a:fillRef>
+          <a:effectRef idx="0">
+            <a:schemeClr val="accent1"/>
+          </a:effectRef>
+          <a:fontRef idx="minor">
+            <a:schemeClr val="lt1"/>
+          </a:fontRef>
+        </p:style>
+        <p:txBody>
+          <a:bodyPr rtlCol="0" anchor="ctr"/>
+          <a:lstStyle/>
+          <a:p>
+            <a:pPr algn="ctr"/>
+            <a:endParaRPr lang="en-US"/>
+          </a:p>
+        </p:txBody>
+      </p:sp>
+      <p:sp>
+        <p:nvSpPr>
+          <p:cNvPr id="6" name="Rectangle 5">
+            <a:extLst>
+              <a:ext uri="{FF2B5EF4-FFF2-40B4-BE49-F238E27FC236}">
+                <a16:creationId xmlns:a16="http://schemas.microsoft.com/office/drawing/2014/main" id="{B864B650-144F-F92D-1DCD-273B0086CDB5}"/>
+              </a:ext>
+            </a:extLst>
+          </p:cNvPr>
+          <p:cNvSpPr/>
+          <p:nvPr/>
+        </p:nvSpPr>
+        <p:spPr>
+          <a:xfrm>
+            <a:off x="6757680" y="424700"/>
+            <a:ext cx="1028938" cy="436792"/>
+          </a:xfrm>
+          <a:prstGeom prst="rect">
+            <a:avLst/>
+          </a:prstGeom>
+          <a:solidFill>
+            <a:schemeClr val="bg2">
+              <a:lumMod val="20000"/>
+              <a:lumOff val="80000"/>
+              <a:alpha val="50196"/>
+            </a:schemeClr>
+          </a:solidFill>
+        </p:spPr>
+        <p:style>
+          <a:lnRef idx="2">
+            <a:schemeClr val="accent1">
+              <a:shade val="15000"/>
+            </a:schemeClr>
+          </a:lnRef>
+          <a:fillRef idx="1">
+            <a:schemeClr val="accent1"/>
+          </a:fillRef>
+          <a:effectRef idx="0">
+            <a:schemeClr val="accent1"/>
+          </a:effectRef>
+          <a:fontRef idx="minor">
+            <a:schemeClr val="lt1"/>
+          </a:fontRef>
+        </p:style>
+        <p:txBody>
+          <a:bodyPr rtlCol="0" anchor="ctr"/>
+          <a:lstStyle/>
+          <a:p>
+            <a:pPr algn="ctr"/>
+            <a:endParaRPr lang="en-US"/>
+          </a:p>
+        </p:txBody>
+      </p:sp>
+      <p:sp>
+        <p:nvSpPr>
+          <p:cNvPr id="8" name="Rectangle 7">
+            <a:extLst>
+              <a:ext uri="{FF2B5EF4-FFF2-40B4-BE49-F238E27FC236}">
+                <a16:creationId xmlns:a16="http://schemas.microsoft.com/office/drawing/2014/main" id="{EC0212FB-2148-C4C3-3AC4-C1A23D7A44FA}"/>
+              </a:ext>
+            </a:extLst>
+          </p:cNvPr>
+          <p:cNvSpPr/>
+          <p:nvPr/>
+        </p:nvSpPr>
+        <p:spPr>
+          <a:xfrm>
+            <a:off x="5065260" y="733425"/>
+            <a:ext cx="318398" cy="225099"/>
+          </a:xfrm>
+          <a:prstGeom prst="rect">
+            <a:avLst/>
+          </a:prstGeom>
+          <a:solidFill>
+            <a:srgbClr val="ACD433">
+              <a:alpha val="50196"/>
+            </a:srgbClr>
+          </a:solidFill>
+        </p:spPr>
+        <p:style>
+          <a:lnRef idx="2">
+            <a:schemeClr val="accent1">
+              <a:shade val="15000"/>
+            </a:schemeClr>
+          </a:lnRef>
+          <a:fillRef idx="1">
+            <a:schemeClr val="accent1"/>
+          </a:fillRef>
+          <a:effectRef idx="0">
+            <a:schemeClr val="accent1"/>
+          </a:effectRef>
+          <a:fontRef idx="minor">
+            <a:schemeClr val="lt1"/>
+          </a:fontRef>
+        </p:style>
+        <p:txBody>
+          <a:bodyPr rtlCol="0" anchor="ctr"/>
+          <a:lstStyle/>
+          <a:p>
+            <a:pPr algn="ctr"/>
+            <a:endParaRPr lang="en-US"/>
+          </a:p>
+        </p:txBody>
+      </p:sp>
+      <p:sp>
+        <p:nvSpPr>
+          <p:cNvPr id="15" name="Rectangle 14">
+            <a:extLst>
+              <a:ext uri="{FF2B5EF4-FFF2-40B4-BE49-F238E27FC236}">
+                <a16:creationId xmlns:a16="http://schemas.microsoft.com/office/drawing/2014/main" id="{16224CC9-AFCB-40CA-6CDF-C33A298C3EA5}"/>
+              </a:ext>
+            </a:extLst>
+          </p:cNvPr>
+          <p:cNvSpPr/>
+          <p:nvPr/>
+        </p:nvSpPr>
+        <p:spPr>
+          <a:xfrm>
+            <a:off x="3788357" y="1447841"/>
+            <a:ext cx="233295" cy="181579"/>
+          </a:xfrm>
+          <a:prstGeom prst="rect">
+            <a:avLst/>
+          </a:prstGeom>
+          <a:solidFill>
+            <a:srgbClr val="ACD433">
+              <a:alpha val="50196"/>
+            </a:srgbClr>
+          </a:solidFill>
+        </p:spPr>
+        <p:style>
+          <a:lnRef idx="2">
+            <a:schemeClr val="accent1">
+              <a:shade val="15000"/>
+            </a:schemeClr>
+          </a:lnRef>
+          <a:fillRef idx="1">
+            <a:schemeClr val="accent1"/>
+          </a:fillRef>
+          <a:effectRef idx="0">
+            <a:schemeClr val="accent1"/>
+          </a:effectRef>
+          <a:fontRef idx="minor">
+            <a:schemeClr val="lt1"/>
+          </a:fontRef>
+        </p:style>
+        <p:txBody>
+          <a:bodyPr rtlCol="0" anchor="ctr"/>
+          <a:lstStyle/>
+          <a:p>
+            <a:pPr algn="ctr"/>
+            <a:endParaRPr lang="en-US"/>
+          </a:p>
+        </p:txBody>
+      </p:sp>
+      <p:sp>
+        <p:nvSpPr>
+          <p:cNvPr id="23" name="Rectangle 22">
+            <a:extLst>
+              <a:ext uri="{FF2B5EF4-FFF2-40B4-BE49-F238E27FC236}">
+                <a16:creationId xmlns:a16="http://schemas.microsoft.com/office/drawing/2014/main" id="{2F118475-7FD8-48FD-10EC-C897DCAE6CA2}"/>
+              </a:ext>
+            </a:extLst>
+          </p:cNvPr>
+          <p:cNvSpPr/>
+          <p:nvPr/>
+        </p:nvSpPr>
+        <p:spPr>
+          <a:xfrm>
+            <a:off x="6285303" y="1568449"/>
+            <a:ext cx="1278993" cy="252208"/>
+          </a:xfrm>
+          <a:prstGeom prst="rect">
+            <a:avLst/>
+          </a:prstGeom>
+          <a:solidFill>
+            <a:schemeClr val="bg2">
+              <a:lumMod val="20000"/>
+              <a:lumOff val="80000"/>
+              <a:alpha val="50196"/>
+            </a:schemeClr>
+          </a:solidFill>
+        </p:spPr>
+        <p:style>
+          <a:lnRef idx="2">
+            <a:schemeClr val="accent1">
+              <a:shade val="15000"/>
+            </a:schemeClr>
+          </a:lnRef>
+          <a:fillRef idx="1">
+            <a:schemeClr val="accent1"/>
+          </a:fillRef>
+          <a:effectRef idx="0">
+            <a:schemeClr val="accent1"/>
+          </a:effectRef>
+          <a:fontRef idx="minor">
+            <a:schemeClr val="lt1"/>
+          </a:fontRef>
+        </p:style>
+        <p:txBody>
+          <a:bodyPr rtlCol="0" anchor="ctr"/>
+          <a:lstStyle/>
+          <a:p>
+            <a:pPr algn="ctr"/>
+            <a:endParaRPr lang="en-US"/>
+          </a:p>
+        </p:txBody>
+      </p:sp>
+      <p:sp>
+        <p:nvSpPr>
+          <p:cNvPr id="20" name="Rectangle 19">
+            <a:extLst>
+              <a:ext uri="{FF2B5EF4-FFF2-40B4-BE49-F238E27FC236}">
+                <a16:creationId xmlns:a16="http://schemas.microsoft.com/office/drawing/2014/main" id="{BFF2A97E-BCEA-E51B-C1D2-CD727947289F}"/>
+              </a:ext>
+            </a:extLst>
+          </p:cNvPr>
+          <p:cNvSpPr/>
+          <p:nvPr/>
+        </p:nvSpPr>
+        <p:spPr>
+          <a:xfrm>
+            <a:off x="6191487" y="2160350"/>
+            <a:ext cx="312055" cy="181579"/>
+          </a:xfrm>
+          <a:prstGeom prst="rect">
+            <a:avLst/>
+          </a:prstGeom>
+          <a:solidFill>
+            <a:srgbClr val="ACD433">
+              <a:alpha val="50196"/>
+            </a:srgbClr>
+          </a:solidFill>
+        </p:spPr>
+        <p:style>
+          <a:lnRef idx="2">
+            <a:schemeClr val="accent1">
+              <a:shade val="15000"/>
+            </a:schemeClr>
+          </a:lnRef>
+          <a:fillRef idx="1">
+            <a:schemeClr val="accent1"/>
+          </a:fillRef>
+          <a:effectRef idx="0">
+            <a:schemeClr val="accent1"/>
+          </a:effectRef>
+          <a:fontRef idx="minor">
+            <a:schemeClr val="lt1"/>
+          </a:fontRef>
+        </p:style>
+        <p:txBody>
+          <a:bodyPr rtlCol="0" anchor="ctr"/>
+          <a:lstStyle/>
+          <a:p>
+            <a:pPr algn="ctr"/>
+            <a:endParaRPr lang="en-US"/>
+          </a:p>
+        </p:txBody>
+      </p:sp>
+      <p:sp>
+        <p:nvSpPr>
+          <p:cNvPr id="35" name="Rectangle 34">
+            <a:extLst>
+              <a:ext uri="{FF2B5EF4-FFF2-40B4-BE49-F238E27FC236}">
+                <a16:creationId xmlns:a16="http://schemas.microsoft.com/office/drawing/2014/main" id="{0C054426-6379-7FB0-E776-D13F2C33B8BF}"/>
+              </a:ext>
+            </a:extLst>
+          </p:cNvPr>
+          <p:cNvSpPr/>
+          <p:nvPr/>
+        </p:nvSpPr>
+        <p:spPr>
+          <a:xfrm>
+            <a:off x="7187151" y="3322342"/>
+            <a:ext cx="346323" cy="252208"/>
+          </a:xfrm>
+          <a:prstGeom prst="rect">
+            <a:avLst/>
+          </a:prstGeom>
+          <a:solidFill>
+            <a:srgbClr val="ACD433">
+              <a:alpha val="50196"/>
+            </a:srgbClr>
+          </a:solidFill>
+        </p:spPr>
+        <p:style>
+          <a:lnRef idx="2">
+            <a:schemeClr val="accent1">
+              <a:shade val="15000"/>
+            </a:schemeClr>
+          </a:lnRef>
+          <a:fillRef idx="1">
+            <a:schemeClr val="accent1"/>
+          </a:fillRef>
+          <a:effectRef idx="0">
+            <a:schemeClr val="accent1"/>
+          </a:effectRef>
+          <a:fontRef idx="minor">
+            <a:schemeClr val="lt1"/>
+          </a:fontRef>
+        </p:style>
+        <p:txBody>
+          <a:bodyPr rtlCol="0" anchor="ctr"/>
+          <a:lstStyle/>
+          <a:p>
+            <a:pPr algn="ctr"/>
+            <a:endParaRPr lang="en-US"/>
+          </a:p>
+        </p:txBody>
+      </p:sp>
+      <p:sp>
+        <p:nvSpPr>
+          <p:cNvPr id="36" name="Rectangle 35">
+            <a:extLst>
+              <a:ext uri="{FF2B5EF4-FFF2-40B4-BE49-F238E27FC236}">
+                <a16:creationId xmlns:a16="http://schemas.microsoft.com/office/drawing/2014/main" id="{C3BCA771-AC11-4A04-016E-9B0980913F92}"/>
+              </a:ext>
+            </a:extLst>
+          </p:cNvPr>
+          <p:cNvSpPr/>
+          <p:nvPr/>
+        </p:nvSpPr>
+        <p:spPr>
+          <a:xfrm>
+            <a:off x="7459492" y="2574289"/>
+            <a:ext cx="1028938" cy="262192"/>
+          </a:xfrm>
+          <a:prstGeom prst="rect">
+            <a:avLst/>
+          </a:prstGeom>
+          <a:solidFill>
+            <a:schemeClr val="bg2">
+              <a:lumMod val="20000"/>
+              <a:lumOff val="80000"/>
+              <a:alpha val="50196"/>
+            </a:schemeClr>
+          </a:solidFill>
+        </p:spPr>
+        <p:style>
+          <a:lnRef idx="2">
+            <a:schemeClr val="accent1">
+              <a:shade val="15000"/>
+            </a:schemeClr>
+          </a:lnRef>
+          <a:fillRef idx="1">
+            <a:schemeClr val="accent1"/>
+          </a:fillRef>
+          <a:effectRef idx="0">
+            <a:schemeClr val="accent1"/>
+          </a:effectRef>
+          <a:fontRef idx="minor">
+            <a:schemeClr val="lt1"/>
+          </a:fontRef>
+        </p:style>
+        <p:txBody>
+          <a:bodyPr rtlCol="0" anchor="ctr"/>
+          <a:lstStyle/>
+          <a:p>
+            <a:pPr algn="ctr"/>
+            <a:endParaRPr lang="en-US"/>
+          </a:p>
+        </p:txBody>
+      </p:sp>
+      <p:sp>
+        <p:nvSpPr>
+          <p:cNvPr id="37" name="Rectangle 36">
+            <a:extLst>
+              <a:ext uri="{FF2B5EF4-FFF2-40B4-BE49-F238E27FC236}">
+                <a16:creationId xmlns:a16="http://schemas.microsoft.com/office/drawing/2014/main" id="{ABDE9CBB-FE4D-EC4F-24D8-FE281AFD95D4}"/>
+              </a:ext>
+            </a:extLst>
+          </p:cNvPr>
+          <p:cNvSpPr/>
+          <p:nvPr/>
+        </p:nvSpPr>
+        <p:spPr>
+          <a:xfrm>
+            <a:off x="7742821" y="5340598"/>
+            <a:ext cx="1205970" cy="436792"/>
+          </a:xfrm>
+          <a:prstGeom prst="rect">
+            <a:avLst/>
+          </a:prstGeom>
+          <a:solidFill>
+            <a:schemeClr val="bg2">
+              <a:lumMod val="20000"/>
+              <a:lumOff val="80000"/>
+              <a:alpha val="50196"/>
+            </a:schemeClr>
+          </a:solidFill>
+        </p:spPr>
+        <p:style>
+          <a:lnRef idx="2">
+            <a:schemeClr val="accent1">
+              <a:shade val="15000"/>
+            </a:schemeClr>
+          </a:lnRef>
+          <a:fillRef idx="1">
+            <a:schemeClr val="accent1"/>
+          </a:fillRef>
+          <a:effectRef idx="0">
+            <a:schemeClr val="accent1"/>
+          </a:effectRef>
+          <a:fontRef idx="minor">
+            <a:schemeClr val="lt1"/>
+          </a:fontRef>
+        </p:style>
+        <p:txBody>
+          <a:bodyPr rtlCol="0" anchor="ctr"/>
+          <a:lstStyle/>
+          <a:p>
+            <a:pPr algn="ctr"/>
+            <a:endParaRPr lang="en-US"/>
+          </a:p>
+        </p:txBody>
+      </p:sp>
+      <p:sp>
+        <p:nvSpPr>
+          <p:cNvPr id="38" name="Rectangle 37">
+            <a:extLst>
+              <a:ext uri="{FF2B5EF4-FFF2-40B4-BE49-F238E27FC236}">
+                <a16:creationId xmlns:a16="http://schemas.microsoft.com/office/drawing/2014/main" id="{F6347601-2392-41EA-DEE1-807F6C8C6316}"/>
+              </a:ext>
+            </a:extLst>
+          </p:cNvPr>
+          <p:cNvSpPr/>
+          <p:nvPr/>
+        </p:nvSpPr>
+        <p:spPr>
+          <a:xfrm>
+            <a:off x="6425321" y="3740812"/>
+            <a:ext cx="1205970" cy="436792"/>
+          </a:xfrm>
+          <a:prstGeom prst="rect">
+            <a:avLst/>
+          </a:prstGeom>
+          <a:solidFill>
+            <a:schemeClr val="bg2">
+              <a:lumMod val="20000"/>
+              <a:lumOff val="80000"/>
+              <a:alpha val="50196"/>
+            </a:schemeClr>
+          </a:solidFill>
+        </p:spPr>
+        <p:style>
+          <a:lnRef idx="2">
+            <a:schemeClr val="accent1">
+              <a:shade val="15000"/>
+            </a:schemeClr>
+          </a:lnRef>
+          <a:fillRef idx="1">
+            <a:schemeClr val="accent1"/>
+          </a:fillRef>
+          <a:effectRef idx="0">
+            <a:schemeClr val="accent1"/>
+          </a:effectRef>
+          <a:fontRef idx="minor">
+            <a:schemeClr val="lt1"/>
+          </a:fontRef>
+        </p:style>
+        <p:txBody>
+          <a:bodyPr rtlCol="0" anchor="ctr"/>
+          <a:lstStyle/>
+          <a:p>
+            <a:pPr algn="ctr"/>
+            <a:endParaRPr lang="en-US"/>
+          </a:p>
+        </p:txBody>
+      </p:sp>
+      <p:sp>
+        <p:nvSpPr>
+          <p:cNvPr id="39" name="Rectangle 38">
+            <a:extLst>
+              <a:ext uri="{FF2B5EF4-FFF2-40B4-BE49-F238E27FC236}">
+                <a16:creationId xmlns:a16="http://schemas.microsoft.com/office/drawing/2014/main" id="{84841F6B-F4D6-CBB1-E7F1-8B395AA52992}"/>
+              </a:ext>
+            </a:extLst>
+          </p:cNvPr>
+          <p:cNvSpPr/>
+          <p:nvPr/>
+        </p:nvSpPr>
+        <p:spPr>
+          <a:xfrm>
+            <a:off x="4531163" y="5340598"/>
+            <a:ext cx="986059" cy="436792"/>
+          </a:xfrm>
+          <a:prstGeom prst="rect">
+            <a:avLst/>
+          </a:prstGeom>
+          <a:solidFill>
+            <a:schemeClr val="bg2">
+              <a:lumMod val="20000"/>
+              <a:lumOff val="80000"/>
+              <a:alpha val="50196"/>
+            </a:schemeClr>
+          </a:solidFill>
+        </p:spPr>
+        <p:style>
+          <a:lnRef idx="2">
+            <a:schemeClr val="accent1">
+              <a:shade val="15000"/>
+            </a:schemeClr>
+          </a:lnRef>
+          <a:fillRef idx="1">
+            <a:schemeClr val="accent1"/>
+          </a:fillRef>
+          <a:effectRef idx="0">
+            <a:schemeClr val="accent1"/>
+          </a:effectRef>
+          <a:fontRef idx="minor">
+            <a:schemeClr val="lt1"/>
+          </a:fontRef>
+        </p:style>
+        <p:txBody>
+          <a:bodyPr rtlCol="0" anchor="ctr"/>
+          <a:lstStyle/>
+          <a:p>
+            <a:pPr algn="ctr"/>
+            <a:endParaRPr lang="en-US"/>
+          </a:p>
+        </p:txBody>
+      </p:sp>
+      <p:sp>
+        <p:nvSpPr>
+          <p:cNvPr id="40" name="Rectangle 39">
+            <a:extLst>
+              <a:ext uri="{FF2B5EF4-FFF2-40B4-BE49-F238E27FC236}">
+                <a16:creationId xmlns:a16="http://schemas.microsoft.com/office/drawing/2014/main" id="{211EA41A-815E-5AB4-17D0-C496A1345FF7}"/>
+              </a:ext>
+            </a:extLst>
+          </p:cNvPr>
+          <p:cNvSpPr/>
+          <p:nvPr/>
+        </p:nvSpPr>
+        <p:spPr>
+          <a:xfrm>
+            <a:off x="4058782" y="3862163"/>
+            <a:ext cx="1707898" cy="330837"/>
+          </a:xfrm>
+          <a:prstGeom prst="rect">
+            <a:avLst/>
+          </a:prstGeom>
+          <a:solidFill>
+            <a:schemeClr val="bg2">
+              <a:lumMod val="20000"/>
+              <a:lumOff val="80000"/>
+              <a:alpha val="50196"/>
+            </a:schemeClr>
+          </a:solidFill>
+        </p:spPr>
+        <p:style>
+          <a:lnRef idx="2">
+            <a:schemeClr val="accent1">
+              <a:shade val="15000"/>
+            </a:schemeClr>
+          </a:lnRef>
+          <a:fillRef idx="1">
+            <a:schemeClr val="accent1"/>
+          </a:fillRef>
+          <a:effectRef idx="0">
+            <a:schemeClr val="accent1"/>
+          </a:effectRef>
+          <a:fontRef idx="minor">
+            <a:schemeClr val="lt1"/>
+          </a:fontRef>
+        </p:style>
+        <p:txBody>
+          <a:bodyPr rtlCol="0" anchor="ctr"/>
+          <a:lstStyle/>
+          <a:p>
+            <a:pPr algn="ctr"/>
+            <a:endParaRPr lang="en-US"/>
+          </a:p>
+        </p:txBody>
+      </p:sp>
+      <p:sp>
+        <p:nvSpPr>
+          <p:cNvPr id="48" name="Freeform: Shape 47">
+            <a:extLst>
+              <a:ext uri="{FF2B5EF4-FFF2-40B4-BE49-F238E27FC236}">
+                <a16:creationId xmlns:a16="http://schemas.microsoft.com/office/drawing/2014/main" id="{E8F6A3B0-D83C-717E-5CBB-04C69A8BB1CF}"/>
+              </a:ext>
+            </a:extLst>
+          </p:cNvPr>
+          <p:cNvSpPr/>
+          <p:nvPr/>
+        </p:nvSpPr>
+        <p:spPr>
+          <a:xfrm>
+            <a:off x="6164494" y="2589088"/>
+            <a:ext cx="852755" cy="842481"/>
+          </a:xfrm>
+          <a:custGeom>
+            <a:avLst/>
+            <a:gdLst>
+              <a:gd name="csX0" fmla="*/ 10275 w 852755"/>
+              <a:gd name="csY0" fmla="*/ 0 h 842481"/>
+              <a:gd name="csX1" fmla="*/ 0 w 852755"/>
+              <a:gd name="csY1" fmla="*/ 277402 h 842481"/>
+              <a:gd name="csX2" fmla="*/ 842481 w 852755"/>
+              <a:gd name="csY2" fmla="*/ 267128 h 842481"/>
+              <a:gd name="csX3" fmla="*/ 852755 w 852755"/>
+              <a:gd name="csY3" fmla="*/ 842481 h 842481"/>
+            </a:gdLst>
+            <a:ahLst/>
+            <a:cxnLst>
+              <a:cxn ang="0">
+                <a:pos x="csX0" y="csY0"/>
+              </a:cxn>
+              <a:cxn ang="0">
+                <a:pos x="csX1" y="csY1"/>
+              </a:cxn>
+              <a:cxn ang="0">
+                <a:pos x="csX2" y="csY2"/>
+              </a:cxn>
+              <a:cxn ang="0">
+                <a:pos x="csX3" y="csY3"/>
+              </a:cxn>
+            </a:cxnLst>
+            <a:rect l="l" t="t" r="r" b="b"/>
+            <a:pathLst>
+              <a:path w="852755" h="842481">
+                <a:moveTo>
+                  <a:pt x="10275" y="0"/>
+                </a:moveTo>
+                <a:lnTo>
+                  <a:pt x="0" y="277402"/>
+                </a:lnTo>
+                <a:lnTo>
+                  <a:pt x="842481" y="267128"/>
+                </a:lnTo>
+                <a:lnTo>
+                  <a:pt x="852755" y="842481"/>
+                </a:lnTo>
+              </a:path>
+            </a:pathLst>
+          </a:custGeom>
+        </p:spPr>
+        <p:style>
+          <a:lnRef idx="3">
+            <a:schemeClr val="accent1"/>
+          </a:lnRef>
+          <a:fillRef idx="0">
+            <a:schemeClr val="accent1"/>
+          </a:fillRef>
+          <a:effectRef idx="2">
+            <a:schemeClr val="accent1"/>
+          </a:effectRef>
+          <a:fontRef idx="minor">
+            <a:schemeClr val="tx1"/>
+          </a:fontRef>
+        </p:style>
+        <p:txBody>
+          <a:bodyPr rtlCol="0" anchor="ctr"/>
+          <a:lstStyle/>
+          <a:p>
+            <a:pPr algn="ctr"/>
+            <a:endParaRPr lang="en-US"/>
+          </a:p>
+        </p:txBody>
+      </p:sp>
+      <p:sp>
+        <p:nvSpPr>
+          <p:cNvPr id="49" name="Freeform: Shape 48">
+            <a:extLst>
+              <a:ext uri="{FF2B5EF4-FFF2-40B4-BE49-F238E27FC236}">
+                <a16:creationId xmlns:a16="http://schemas.microsoft.com/office/drawing/2014/main" id="{3ACFEEB3-F473-2FD9-93B7-DD8EA3E978CD}"/>
+              </a:ext>
+            </a:extLst>
+          </p:cNvPr>
+          <p:cNvSpPr/>
+          <p:nvPr/>
+        </p:nvSpPr>
+        <p:spPr>
+          <a:xfrm>
+            <a:off x="5054885" y="513708"/>
+            <a:ext cx="544531" cy="297950"/>
+          </a:xfrm>
+          <a:custGeom>
+            <a:avLst/>
+            <a:gdLst>
+              <a:gd name="csX0" fmla="*/ 544531 w 544531"/>
+              <a:gd name="csY0" fmla="*/ 0 h 297950"/>
+              <a:gd name="csX1" fmla="*/ 0 w 544531"/>
+              <a:gd name="csY1" fmla="*/ 0 h 297950"/>
+              <a:gd name="csX2" fmla="*/ 0 w 544531"/>
+              <a:gd name="csY2" fmla="*/ 297950 h 297950"/>
+            </a:gdLst>
+            <a:ahLst/>
+            <a:cxnLst>
+              <a:cxn ang="0">
+                <a:pos x="csX0" y="csY0"/>
+              </a:cxn>
+              <a:cxn ang="0">
+                <a:pos x="csX1" y="csY1"/>
+              </a:cxn>
+              <a:cxn ang="0">
+                <a:pos x="csX2" y="csY2"/>
+              </a:cxn>
+            </a:cxnLst>
+            <a:rect l="l" t="t" r="r" b="b"/>
+            <a:pathLst>
+              <a:path w="544531" h="297950">
+                <a:moveTo>
+                  <a:pt x="544531" y="0"/>
+                </a:moveTo>
+                <a:lnTo>
+                  <a:pt x="0" y="0"/>
+                </a:lnTo>
+                <a:lnTo>
+                  <a:pt x="0" y="297950"/>
+                </a:lnTo>
+              </a:path>
+            </a:pathLst>
+          </a:custGeom>
+        </p:spPr>
+        <p:style>
+          <a:lnRef idx="3">
+            <a:schemeClr val="accent1"/>
+          </a:lnRef>
+          <a:fillRef idx="0">
+            <a:schemeClr val="accent1"/>
+          </a:fillRef>
+          <a:effectRef idx="2">
+            <a:schemeClr val="accent1"/>
+          </a:effectRef>
+          <a:fontRef idx="minor">
+            <a:schemeClr val="tx1"/>
+          </a:fontRef>
+        </p:style>
+        <p:txBody>
+          <a:bodyPr rtlCol="0" anchor="ctr"/>
+          <a:lstStyle/>
+          <a:p>
+            <a:pPr algn="ctr"/>
+            <a:endParaRPr lang="en-US"/>
+          </a:p>
+        </p:txBody>
+      </p:sp>
+      <p:cxnSp>
+        <p:nvCxnSpPr>
+          <p:cNvPr id="51" name="Straight Connector 50">
+            <a:extLst>
+              <a:ext uri="{FF2B5EF4-FFF2-40B4-BE49-F238E27FC236}">
+                <a16:creationId xmlns:a16="http://schemas.microsoft.com/office/drawing/2014/main" id="{40B1906A-6E0A-7236-4E1D-25510AC6402E}"/>
+              </a:ext>
+            </a:extLst>
+          </p:cNvPr>
+          <p:cNvCxnSpPr>
+            <a:cxnSpLocks/>
+          </p:cNvCxnSpPr>
+          <p:nvPr/>
+        </p:nvCxnSpPr>
+        <p:spPr>
+          <a:xfrm>
+            <a:off x="3411020" y="424700"/>
+            <a:ext cx="0" cy="1143749"/>
+          </a:xfrm>
+          <a:prstGeom prst="line">
+            <a:avLst/>
+          </a:prstGeom>
+        </p:spPr>
+        <p:style>
+          <a:lnRef idx="3">
+            <a:schemeClr val="accent1"/>
+          </a:lnRef>
+          <a:fillRef idx="0">
+            <a:schemeClr val="accent1"/>
+          </a:fillRef>
+          <a:effectRef idx="2">
+            <a:schemeClr val="accent1"/>
+          </a:effectRef>
+          <a:fontRef idx="minor">
+            <a:schemeClr val="tx1"/>
+          </a:fontRef>
+        </p:style>
+      </p:cxnSp>
+      <p:sp>
+        <p:nvSpPr>
+          <p:cNvPr id="53" name="Freeform: Shape 52">
+            <a:extLst>
+              <a:ext uri="{FF2B5EF4-FFF2-40B4-BE49-F238E27FC236}">
+                <a16:creationId xmlns:a16="http://schemas.microsoft.com/office/drawing/2014/main" id="{49F94FBF-18A1-D76E-EFE7-01F95D18DD32}"/>
+              </a:ext>
+            </a:extLst>
+          </p:cNvPr>
+          <p:cNvSpPr/>
+          <p:nvPr/>
+        </p:nvSpPr>
+        <p:spPr>
+          <a:xfrm>
+            <a:off x="3565133" y="996593"/>
+            <a:ext cx="1047964" cy="544531"/>
+          </a:xfrm>
+          <a:custGeom>
+            <a:avLst/>
+            <a:gdLst>
+              <a:gd name="csX0" fmla="*/ 1047964 w 1047964"/>
+              <a:gd name="csY0" fmla="*/ 0 h 544531"/>
+              <a:gd name="csX1" fmla="*/ 0 w 1047964"/>
+              <a:gd name="csY1" fmla="*/ 10274 h 544531"/>
+              <a:gd name="csX2" fmla="*/ 10274 w 1047964"/>
+              <a:gd name="csY2" fmla="*/ 544531 h 544531"/>
+            </a:gdLst>
+            <a:ahLst/>
+            <a:cxnLst>
+              <a:cxn ang="0">
+                <a:pos x="csX0" y="csY0"/>
+              </a:cxn>
+              <a:cxn ang="0">
+                <a:pos x="csX1" y="csY1"/>
+              </a:cxn>
+              <a:cxn ang="0">
+                <a:pos x="csX2" y="csY2"/>
+              </a:cxn>
+            </a:cxnLst>
+            <a:rect l="l" t="t" r="r" b="b"/>
+            <a:pathLst>
+              <a:path w="1047964" h="544531">
+                <a:moveTo>
+                  <a:pt x="1047964" y="0"/>
+                </a:moveTo>
+                <a:lnTo>
+                  <a:pt x="0" y="10274"/>
+                </a:lnTo>
+                <a:lnTo>
+                  <a:pt x="10274" y="544531"/>
+                </a:lnTo>
+              </a:path>
+            </a:pathLst>
+          </a:custGeom>
+        </p:spPr>
+        <p:style>
+          <a:lnRef idx="3">
+            <a:schemeClr val="accent1"/>
+          </a:lnRef>
+          <a:fillRef idx="0">
+            <a:schemeClr val="accent1"/>
+          </a:fillRef>
+          <a:effectRef idx="2">
+            <a:schemeClr val="accent1"/>
+          </a:effectRef>
+          <a:fontRef idx="minor">
+            <a:schemeClr val="tx1"/>
+          </a:fontRef>
+        </p:style>
+        <p:txBody>
+          <a:bodyPr rtlCol="0" anchor="ctr"/>
+          <a:lstStyle/>
+          <a:p>
+            <a:pPr algn="ctr"/>
+            <a:endParaRPr lang="en-US"/>
+          </a:p>
+        </p:txBody>
+      </p:sp>
+      <p:sp>
+        <p:nvSpPr>
+          <p:cNvPr id="54" name="Freeform: Shape 53">
+            <a:extLst>
+              <a:ext uri="{FF2B5EF4-FFF2-40B4-BE49-F238E27FC236}">
+                <a16:creationId xmlns:a16="http://schemas.microsoft.com/office/drawing/2014/main" id="{476D0ACE-7AED-BB31-5F86-846EE77E462E}"/>
+              </a:ext>
+            </a:extLst>
+          </p:cNvPr>
+          <p:cNvSpPr/>
+          <p:nvPr/>
+        </p:nvSpPr>
+        <p:spPr>
+          <a:xfrm>
+            <a:off x="3616503" y="431515"/>
+            <a:ext cx="1006868" cy="482885"/>
+          </a:xfrm>
+          <a:custGeom>
+            <a:avLst/>
+            <a:gdLst>
+              <a:gd name="csX0" fmla="*/ 1006868 w 1006868"/>
+              <a:gd name="csY0" fmla="*/ 482885 h 482885"/>
+              <a:gd name="csX1" fmla="*/ 0 w 1006868"/>
+              <a:gd name="csY1" fmla="*/ 0 h 482885"/>
+            </a:gdLst>
+            <a:ahLst/>
+            <a:cxnLst>
+              <a:cxn ang="0">
+                <a:pos x="csX0" y="csY0"/>
+              </a:cxn>
+              <a:cxn ang="0">
+                <a:pos x="csX1" y="csY1"/>
+              </a:cxn>
+            </a:cxnLst>
+            <a:rect l="l" t="t" r="r" b="b"/>
+            <a:pathLst>
+              <a:path w="1006868" h="482885">
+                <a:moveTo>
+                  <a:pt x="1006868" y="482885"/>
+                </a:moveTo>
+                <a:lnTo>
+                  <a:pt x="0" y="0"/>
+                </a:lnTo>
+              </a:path>
+            </a:pathLst>
+          </a:custGeom>
+        </p:spPr>
+        <p:style>
+          <a:lnRef idx="3">
+            <a:schemeClr val="accent1"/>
+          </a:lnRef>
+          <a:fillRef idx="0">
+            <a:schemeClr val="accent1"/>
+          </a:fillRef>
+          <a:effectRef idx="2">
+            <a:schemeClr val="accent1"/>
+          </a:effectRef>
+          <a:fontRef idx="minor">
+            <a:schemeClr val="tx1"/>
+          </a:fontRef>
+        </p:style>
+        <p:txBody>
+          <a:bodyPr rtlCol="0" anchor="ctr"/>
+          <a:lstStyle/>
+          <a:p>
+            <a:pPr algn="ctr"/>
+            <a:endParaRPr lang="en-US"/>
+          </a:p>
+        </p:txBody>
+      </p:sp>
+      <p:sp>
+        <p:nvSpPr>
+          <p:cNvPr id="55" name="Freeform: Shape 54">
+            <a:extLst>
+              <a:ext uri="{FF2B5EF4-FFF2-40B4-BE49-F238E27FC236}">
+                <a16:creationId xmlns:a16="http://schemas.microsoft.com/office/drawing/2014/main" id="{144F22A5-62E5-8AFE-63CA-2F2CCF0EEF44}"/>
+              </a:ext>
+            </a:extLst>
+          </p:cNvPr>
+          <p:cNvSpPr/>
+          <p:nvPr/>
+        </p:nvSpPr>
+        <p:spPr>
+          <a:xfrm>
+            <a:off x="7161088" y="3102796"/>
+            <a:ext cx="431514" cy="328773"/>
+          </a:xfrm>
+          <a:custGeom>
+            <a:avLst/>
+            <a:gdLst>
+              <a:gd name="csX0" fmla="*/ 431514 w 431514"/>
+              <a:gd name="csY0" fmla="*/ 0 h 328773"/>
+              <a:gd name="csX1" fmla="*/ 431514 w 431514"/>
+              <a:gd name="csY1" fmla="*/ 61644 h 328773"/>
+              <a:gd name="csX2" fmla="*/ 421240 w 431514"/>
+              <a:gd name="csY2" fmla="*/ 184934 h 328773"/>
+              <a:gd name="csX3" fmla="*/ 0 w 431514"/>
+              <a:gd name="csY3" fmla="*/ 174660 h 328773"/>
+              <a:gd name="csX4" fmla="*/ 0 w 431514"/>
+              <a:gd name="csY4" fmla="*/ 328773 h 328773"/>
+            </a:gdLst>
+            <a:ahLst/>
+            <a:cxnLst>
+              <a:cxn ang="0">
+                <a:pos x="csX0" y="csY0"/>
+              </a:cxn>
+              <a:cxn ang="0">
+                <a:pos x="csX1" y="csY1"/>
+              </a:cxn>
+              <a:cxn ang="0">
+                <a:pos x="csX2" y="csY2"/>
+              </a:cxn>
+              <a:cxn ang="0">
+                <a:pos x="csX3" y="csY3"/>
+              </a:cxn>
+              <a:cxn ang="0">
+                <a:pos x="csX4" y="csY4"/>
+              </a:cxn>
+            </a:cxnLst>
+            <a:rect l="l" t="t" r="r" b="b"/>
+            <a:pathLst>
+              <a:path w="431514" h="328773">
+                <a:moveTo>
+                  <a:pt x="431514" y="0"/>
+                </a:moveTo>
+                <a:lnTo>
+                  <a:pt x="431514" y="61644"/>
+                </a:lnTo>
+                <a:lnTo>
+                  <a:pt x="421240" y="184934"/>
+                </a:lnTo>
+                <a:lnTo>
+                  <a:pt x="0" y="174660"/>
+                </a:lnTo>
+                <a:lnTo>
+                  <a:pt x="0" y="328773"/>
+                </a:lnTo>
+              </a:path>
+            </a:pathLst>
+          </a:custGeom>
+        </p:spPr>
+        <p:style>
+          <a:lnRef idx="3">
+            <a:schemeClr val="accent1"/>
+          </a:lnRef>
+          <a:fillRef idx="0">
+            <a:schemeClr val="accent1"/>
+          </a:fillRef>
+          <a:effectRef idx="2">
+            <a:schemeClr val="accent1"/>
+          </a:effectRef>
+          <a:fontRef idx="minor">
+            <a:schemeClr val="tx1"/>
+          </a:fontRef>
+        </p:style>
+        <p:txBody>
+          <a:bodyPr rtlCol="0" anchor="ctr"/>
+          <a:lstStyle/>
+          <a:p>
+            <a:pPr algn="ctr"/>
+            <a:endParaRPr lang="en-US"/>
+          </a:p>
+        </p:txBody>
+      </p:sp>
+      <p:sp>
+        <p:nvSpPr>
+          <p:cNvPr id="56" name="Freeform: Shape 55">
+            <a:extLst>
+              <a:ext uri="{FF2B5EF4-FFF2-40B4-BE49-F238E27FC236}">
+                <a16:creationId xmlns:a16="http://schemas.microsoft.com/office/drawing/2014/main" id="{B45B771D-9A3D-0021-0330-7F6D7BD45DA1}"/>
+              </a:ext>
+            </a:extLst>
+          </p:cNvPr>
+          <p:cNvSpPr/>
+          <p:nvPr/>
+        </p:nvSpPr>
+        <p:spPr>
+          <a:xfrm>
+            <a:off x="5270643" y="2393879"/>
+            <a:ext cx="431514" cy="0"/>
+          </a:xfrm>
+          <a:custGeom>
+            <a:avLst/>
+            <a:gdLst>
+              <a:gd name="csX0" fmla="*/ 0 w 431514"/>
+              <a:gd name="csY0" fmla="*/ 0 h 0"/>
+              <a:gd name="csX1" fmla="*/ 431514 w 431514"/>
+              <a:gd name="csY1" fmla="*/ 0 h 0"/>
+            </a:gdLst>
+            <a:ahLst/>
+            <a:cxnLst>
+              <a:cxn ang="0">
+                <a:pos x="csX0" y="csY0"/>
+              </a:cxn>
+              <a:cxn ang="0">
+                <a:pos x="csX1" y="csY1"/>
+              </a:cxn>
+            </a:cxnLst>
+            <a:rect l="l" t="t" r="r" b="b"/>
+            <a:pathLst>
+              <a:path w="431514">
+                <a:moveTo>
+                  <a:pt x="0" y="0"/>
+                </a:moveTo>
+                <a:lnTo>
+                  <a:pt x="431514" y="0"/>
+                </a:lnTo>
+              </a:path>
+            </a:pathLst>
+          </a:custGeom>
+        </p:spPr>
+        <p:style>
+          <a:lnRef idx="3">
+            <a:schemeClr val="accent1"/>
+          </a:lnRef>
+          <a:fillRef idx="0">
+            <a:schemeClr val="accent1"/>
+          </a:fillRef>
+          <a:effectRef idx="2">
+            <a:schemeClr val="accent1"/>
+          </a:effectRef>
+          <a:fontRef idx="minor">
+            <a:schemeClr val="tx1"/>
+          </a:fontRef>
+        </p:style>
+        <p:txBody>
+          <a:bodyPr rtlCol="0" anchor="ctr"/>
+          <a:lstStyle/>
+          <a:p>
+            <a:pPr algn="ctr"/>
+            <a:endParaRPr lang="en-US"/>
+          </a:p>
+        </p:txBody>
+      </p:sp>
+      <p:sp>
+        <p:nvSpPr>
+          <p:cNvPr id="57" name="Freeform: Shape 56">
+            <a:extLst>
+              <a:ext uri="{FF2B5EF4-FFF2-40B4-BE49-F238E27FC236}">
+                <a16:creationId xmlns:a16="http://schemas.microsoft.com/office/drawing/2014/main" id="{BC332D02-C3EA-BE30-4307-E79CD5167AD4}"/>
+              </a:ext>
+            </a:extLst>
+          </p:cNvPr>
+          <p:cNvSpPr/>
+          <p:nvPr/>
+        </p:nvSpPr>
+        <p:spPr>
+          <a:xfrm>
+            <a:off x="4941870" y="2578813"/>
+            <a:ext cx="2147299" cy="852756"/>
+          </a:xfrm>
+          <a:custGeom>
+            <a:avLst/>
+            <a:gdLst>
+              <a:gd name="csX0" fmla="*/ 2147299 w 2147299"/>
+              <a:gd name="csY0" fmla="*/ 852756 h 852756"/>
+              <a:gd name="csX1" fmla="*/ 2147299 w 2147299"/>
+              <a:gd name="csY1" fmla="*/ 102742 h 852756"/>
+              <a:gd name="csX2" fmla="*/ 0 w 2147299"/>
+              <a:gd name="csY2" fmla="*/ 102742 h 852756"/>
+              <a:gd name="csX3" fmla="*/ 10274 w 2147299"/>
+              <a:gd name="csY3" fmla="*/ 0 h 852756"/>
+            </a:gdLst>
+            <a:ahLst/>
+            <a:cxnLst>
+              <a:cxn ang="0">
+                <a:pos x="csX0" y="csY0"/>
+              </a:cxn>
+              <a:cxn ang="0">
+                <a:pos x="csX1" y="csY1"/>
+              </a:cxn>
+              <a:cxn ang="0">
+                <a:pos x="csX2" y="csY2"/>
+              </a:cxn>
+              <a:cxn ang="0">
+                <a:pos x="csX3" y="csY3"/>
+              </a:cxn>
+            </a:cxnLst>
+            <a:rect l="l" t="t" r="r" b="b"/>
+            <a:pathLst>
+              <a:path w="2147299" h="852756">
+                <a:moveTo>
+                  <a:pt x="2147299" y="852756"/>
+                </a:moveTo>
+                <a:lnTo>
+                  <a:pt x="2147299" y="102742"/>
+                </a:lnTo>
+                <a:lnTo>
+                  <a:pt x="0" y="102742"/>
+                </a:lnTo>
+                <a:lnTo>
+                  <a:pt x="10274" y="0"/>
+                </a:lnTo>
+              </a:path>
+            </a:pathLst>
+          </a:custGeom>
+        </p:spPr>
+        <p:style>
+          <a:lnRef idx="3">
+            <a:schemeClr val="accent1"/>
+          </a:lnRef>
+          <a:fillRef idx="0">
+            <a:schemeClr val="accent1"/>
+          </a:fillRef>
+          <a:effectRef idx="2">
+            <a:schemeClr val="accent1"/>
+          </a:effectRef>
+          <a:fontRef idx="minor">
+            <a:schemeClr val="tx1"/>
+          </a:fontRef>
+        </p:style>
+        <p:txBody>
+          <a:bodyPr rtlCol="0" anchor="ctr"/>
+          <a:lstStyle/>
+          <a:p>
+            <a:pPr algn="ctr"/>
+            <a:endParaRPr lang="en-US"/>
+          </a:p>
+        </p:txBody>
+      </p:sp>
+      <p:sp>
+        <p:nvSpPr>
+          <p:cNvPr id="58" name="Freeform: Shape 57">
+            <a:extLst>
+              <a:ext uri="{FF2B5EF4-FFF2-40B4-BE49-F238E27FC236}">
+                <a16:creationId xmlns:a16="http://schemas.microsoft.com/office/drawing/2014/main" id="{B8E55D3B-2E26-01CF-BBED-63903698452A}"/>
+              </a:ext>
+            </a:extLst>
+          </p:cNvPr>
+          <p:cNvSpPr/>
+          <p:nvPr/>
+        </p:nvSpPr>
+        <p:spPr>
+          <a:xfrm>
+            <a:off x="6554912" y="1941816"/>
+            <a:ext cx="554805" cy="0"/>
+          </a:xfrm>
+          <a:custGeom>
+            <a:avLst/>
+            <a:gdLst>
+              <a:gd name="csX0" fmla="*/ 0 w 554805"/>
+              <a:gd name="csY0" fmla="*/ 0 h 0"/>
+              <a:gd name="csX1" fmla="*/ 554805 w 554805"/>
+              <a:gd name="csY1" fmla="*/ 0 h 0"/>
+            </a:gdLst>
+            <a:ahLst/>
+            <a:cxnLst>
+              <a:cxn ang="0">
+                <a:pos x="csX0" y="csY0"/>
+              </a:cxn>
+              <a:cxn ang="0">
+                <a:pos x="csX1" y="csY1"/>
+              </a:cxn>
+            </a:cxnLst>
+            <a:rect l="l" t="t" r="r" b="b"/>
+            <a:pathLst>
+              <a:path w="554805">
+                <a:moveTo>
+                  <a:pt x="0" y="0"/>
+                </a:moveTo>
+                <a:lnTo>
+                  <a:pt x="554805" y="0"/>
+                </a:lnTo>
+              </a:path>
+            </a:pathLst>
+          </a:custGeom>
+        </p:spPr>
+        <p:style>
+          <a:lnRef idx="3">
+            <a:schemeClr val="accent1"/>
+          </a:lnRef>
+          <a:fillRef idx="0">
+            <a:schemeClr val="accent1"/>
+          </a:fillRef>
+          <a:effectRef idx="2">
+            <a:schemeClr val="accent1"/>
+          </a:effectRef>
+          <a:fontRef idx="minor">
+            <a:schemeClr val="tx1"/>
+          </a:fontRef>
+        </p:style>
+        <p:txBody>
+          <a:bodyPr rtlCol="0" anchor="ctr"/>
+          <a:lstStyle/>
+          <a:p>
+            <a:pPr algn="ctr"/>
+            <a:endParaRPr lang="en-US"/>
+          </a:p>
+        </p:txBody>
+      </p:sp>
+      <p:sp>
+        <p:nvSpPr>
+          <p:cNvPr id="59" name="Freeform: Shape 58">
+            <a:extLst>
+              <a:ext uri="{FF2B5EF4-FFF2-40B4-BE49-F238E27FC236}">
+                <a16:creationId xmlns:a16="http://schemas.microsoft.com/office/drawing/2014/main" id="{361CA5B2-F51F-715A-EB45-7351747A200D}"/>
+              </a:ext>
+            </a:extLst>
+          </p:cNvPr>
+          <p:cNvSpPr/>
+          <p:nvPr/>
+        </p:nvSpPr>
+        <p:spPr>
+          <a:xfrm>
+            <a:off x="4941870" y="431515"/>
+            <a:ext cx="0" cy="390418"/>
+          </a:xfrm>
+          <a:custGeom>
+            <a:avLst/>
+            <a:gdLst>
+              <a:gd name="csX0" fmla="*/ 0 w 0"/>
+              <a:gd name="csY0" fmla="*/ 390418 h 390418"/>
+              <a:gd name="csX1" fmla="*/ 0 w 0"/>
+              <a:gd name="csY1" fmla="*/ 0 h 390418"/>
+            </a:gdLst>
+            <a:ahLst/>
+            <a:cxnLst>
+              <a:cxn ang="0">
+                <a:pos x="csX0" y="csY0"/>
+              </a:cxn>
+              <a:cxn ang="0">
+                <a:pos x="csX1" y="csY1"/>
+              </a:cxn>
+            </a:cxnLst>
+            <a:rect l="l" t="t" r="r" b="b"/>
+            <a:pathLst>
+              <a:path h="390418">
+                <a:moveTo>
+                  <a:pt x="0" y="390418"/>
+                </a:moveTo>
+                <a:lnTo>
+                  <a:pt x="0" y="0"/>
+                </a:lnTo>
+              </a:path>
+            </a:pathLst>
+          </a:custGeom>
+        </p:spPr>
+        <p:style>
+          <a:lnRef idx="3">
+            <a:schemeClr val="accent1"/>
+          </a:lnRef>
+          <a:fillRef idx="0">
+            <a:schemeClr val="accent1"/>
+          </a:fillRef>
+          <a:effectRef idx="2">
+            <a:schemeClr val="accent1"/>
+          </a:effectRef>
+          <a:fontRef idx="minor">
+            <a:schemeClr val="tx1"/>
+          </a:fontRef>
+        </p:style>
+        <p:txBody>
+          <a:bodyPr rtlCol="0" anchor="ctr"/>
+          <a:lstStyle/>
+          <a:p>
+            <a:pPr algn="ctr"/>
+            <a:endParaRPr lang="en-US"/>
+          </a:p>
+        </p:txBody>
+      </p:sp>
+      <p:sp>
+        <p:nvSpPr>
+          <p:cNvPr id="60" name="Freeform: Shape 59">
+            <a:extLst>
+              <a:ext uri="{FF2B5EF4-FFF2-40B4-BE49-F238E27FC236}">
+                <a16:creationId xmlns:a16="http://schemas.microsoft.com/office/drawing/2014/main" id="{FF37583C-153D-203A-CBBD-B240B05569F7}"/>
+              </a:ext>
+            </a:extLst>
+          </p:cNvPr>
+          <p:cNvSpPr/>
+          <p:nvPr/>
+        </p:nvSpPr>
+        <p:spPr>
+          <a:xfrm>
+            <a:off x="3750067" y="246420"/>
+            <a:ext cx="873304" cy="10434"/>
+          </a:xfrm>
+          <a:custGeom>
+            <a:avLst/>
+            <a:gdLst>
+              <a:gd name="csX0" fmla="*/ 0 w 873304"/>
+              <a:gd name="csY0" fmla="*/ 10434 h 10434"/>
+              <a:gd name="csX1" fmla="*/ 0 w 873304"/>
+              <a:gd name="csY1" fmla="*/ 10434 h 10434"/>
+              <a:gd name="csX2" fmla="*/ 154113 w 873304"/>
+              <a:gd name="csY2" fmla="*/ 160 h 10434"/>
+              <a:gd name="csX3" fmla="*/ 873304 w 873304"/>
+              <a:gd name="csY3" fmla="*/ 160 h 10434"/>
+            </a:gdLst>
+            <a:ahLst/>
+            <a:cxnLst>
+              <a:cxn ang="0">
+                <a:pos x="csX0" y="csY0"/>
+              </a:cxn>
+              <a:cxn ang="0">
+                <a:pos x="csX1" y="csY1"/>
+              </a:cxn>
+              <a:cxn ang="0">
+                <a:pos x="csX2" y="csY2"/>
+              </a:cxn>
+              <a:cxn ang="0">
+                <a:pos x="csX3" y="csY3"/>
+              </a:cxn>
+            </a:cxnLst>
+            <a:rect l="l" t="t" r="r" b="b"/>
+            <a:pathLst>
+              <a:path w="873304" h="10434">
+                <a:moveTo>
+                  <a:pt x="0" y="10434"/>
+                </a:moveTo>
+                <a:lnTo>
+                  <a:pt x="0" y="10434"/>
+                </a:lnTo>
+                <a:cubicBezTo>
+                  <a:pt x="112891" y="-2109"/>
+                  <a:pt x="61456" y="160"/>
+                  <a:pt x="154113" y="160"/>
+                </a:cubicBezTo>
+                <a:lnTo>
+                  <a:pt x="873304" y="160"/>
+                </a:lnTo>
+              </a:path>
+            </a:pathLst>
+          </a:custGeom>
+        </p:spPr>
+        <p:style>
+          <a:lnRef idx="3">
+            <a:schemeClr val="accent1"/>
+          </a:lnRef>
+          <a:fillRef idx="0">
+            <a:schemeClr val="accent1"/>
+          </a:fillRef>
+          <a:effectRef idx="2">
+            <a:schemeClr val="accent1"/>
+          </a:effectRef>
+          <a:fontRef idx="minor">
+            <a:schemeClr val="tx1"/>
+          </a:fontRef>
+        </p:style>
+        <p:txBody>
+          <a:bodyPr rtlCol="0" anchor="ctr"/>
+          <a:lstStyle/>
+          <a:p>
+            <a:pPr algn="ctr"/>
+            <a:endParaRPr lang="en-US"/>
+          </a:p>
+        </p:txBody>
+      </p:sp>
+      <p:sp>
+        <p:nvSpPr>
+          <p:cNvPr id="61" name="Freeform: Shape 60">
+            <a:extLst>
+              <a:ext uri="{FF2B5EF4-FFF2-40B4-BE49-F238E27FC236}">
+                <a16:creationId xmlns:a16="http://schemas.microsoft.com/office/drawing/2014/main" id="{49CE076D-07CB-36BC-5850-23498B4943A7}"/>
+              </a:ext>
+            </a:extLst>
+          </p:cNvPr>
+          <p:cNvSpPr/>
+          <p:nvPr/>
+        </p:nvSpPr>
+        <p:spPr>
+          <a:xfrm>
+            <a:off x="2989780" y="996593"/>
+            <a:ext cx="0" cy="205483"/>
+          </a:xfrm>
+          <a:custGeom>
+            <a:avLst/>
+            <a:gdLst>
+              <a:gd name="csX0" fmla="*/ 0 w 0"/>
+              <a:gd name="csY0" fmla="*/ 0 h 205483"/>
+              <a:gd name="csX1" fmla="*/ 0 w 0"/>
+              <a:gd name="csY1" fmla="*/ 205483 h 205483"/>
+            </a:gdLst>
+            <a:ahLst/>
+            <a:cxnLst>
+              <a:cxn ang="0">
+                <a:pos x="csX0" y="csY0"/>
+              </a:cxn>
+              <a:cxn ang="0">
+                <a:pos x="csX1" y="csY1"/>
+              </a:cxn>
+            </a:cxnLst>
+            <a:rect l="l" t="t" r="r" b="b"/>
+            <a:pathLst>
+              <a:path h="205483">
+                <a:moveTo>
+                  <a:pt x="0" y="0"/>
+                </a:moveTo>
+                <a:lnTo>
+                  <a:pt x="0" y="205483"/>
+                </a:lnTo>
+              </a:path>
+            </a:pathLst>
+          </a:custGeom>
+        </p:spPr>
+        <p:style>
+          <a:lnRef idx="3">
+            <a:schemeClr val="accent1"/>
+          </a:lnRef>
+          <a:fillRef idx="0">
+            <a:schemeClr val="accent1"/>
+          </a:fillRef>
+          <a:effectRef idx="2">
+            <a:schemeClr val="accent1"/>
+          </a:effectRef>
+          <a:fontRef idx="minor">
+            <a:schemeClr val="tx1"/>
+          </a:fontRef>
+        </p:style>
+        <p:txBody>
+          <a:bodyPr rtlCol="0" anchor="ctr"/>
+          <a:lstStyle/>
+          <a:p>
+            <a:pPr algn="ctr"/>
+            <a:endParaRPr lang="en-US"/>
+          </a:p>
+        </p:txBody>
+      </p:sp>
+      <p:sp>
+        <p:nvSpPr>
+          <p:cNvPr id="62" name="Freeform: Shape 61">
+            <a:extLst>
+              <a:ext uri="{FF2B5EF4-FFF2-40B4-BE49-F238E27FC236}">
+                <a16:creationId xmlns:a16="http://schemas.microsoft.com/office/drawing/2014/main" id="{39C838F6-8F8C-BD7A-3785-45FF04C9CF37}"/>
+              </a:ext>
+            </a:extLst>
+          </p:cNvPr>
+          <p:cNvSpPr/>
+          <p:nvPr/>
+        </p:nvSpPr>
+        <p:spPr>
+          <a:xfrm>
+            <a:off x="2989780" y="256854"/>
+            <a:ext cx="102741" cy="426359"/>
+          </a:xfrm>
+          <a:custGeom>
+            <a:avLst/>
+            <a:gdLst>
+              <a:gd name="csX0" fmla="*/ 0 w 113016"/>
+              <a:gd name="csY0" fmla="*/ 421240 h 482885"/>
+              <a:gd name="csX1" fmla="*/ 0 w 113016"/>
+              <a:gd name="csY1" fmla="*/ 482885 h 482885"/>
+              <a:gd name="csX2" fmla="*/ 10274 w 113016"/>
+              <a:gd name="csY2" fmla="*/ 0 h 482885"/>
+              <a:gd name="csX3" fmla="*/ 113016 w 113016"/>
+              <a:gd name="csY3" fmla="*/ 0 h 482885"/>
+            </a:gdLst>
+            <a:ahLst/>
+            <a:cxnLst>
+              <a:cxn ang="0">
+                <a:pos x="csX0" y="csY0"/>
+              </a:cxn>
+              <a:cxn ang="0">
+                <a:pos x="csX1" y="csY1"/>
+              </a:cxn>
+              <a:cxn ang="0">
+                <a:pos x="csX2" y="csY2"/>
+              </a:cxn>
+              <a:cxn ang="0">
+                <a:pos x="csX3" y="csY3"/>
+              </a:cxn>
+            </a:cxnLst>
+            <a:rect l="l" t="t" r="r" b="b"/>
+            <a:pathLst>
+              <a:path w="113016" h="482885">
+                <a:moveTo>
+                  <a:pt x="0" y="421240"/>
+                </a:moveTo>
+                <a:lnTo>
+                  <a:pt x="0" y="482885"/>
+                </a:lnTo>
+                <a:lnTo>
+                  <a:pt x="10274" y="0"/>
+                </a:lnTo>
+                <a:lnTo>
+                  <a:pt x="113016" y="0"/>
+                </a:lnTo>
+              </a:path>
+            </a:pathLst>
+          </a:custGeom>
+        </p:spPr>
+        <p:style>
+          <a:lnRef idx="3">
+            <a:schemeClr val="accent1"/>
+          </a:lnRef>
+          <a:fillRef idx="0">
+            <a:schemeClr val="accent1"/>
+          </a:fillRef>
+          <a:effectRef idx="2">
+            <a:schemeClr val="accent1"/>
+          </a:effectRef>
+          <a:fontRef idx="minor">
+            <a:schemeClr val="tx1"/>
+          </a:fontRef>
+        </p:style>
+        <p:txBody>
+          <a:bodyPr rtlCol="0" anchor="ctr"/>
+          <a:lstStyle/>
+          <a:p>
+            <a:pPr algn="ctr"/>
+            <a:r>
+              <a:rPr lang="en-US" altLang="zh-CN" dirty="0"/>
+              <a:t>·</a:t>
+            </a:r>
+            <a:endParaRPr lang="en-US" dirty="0"/>
+          </a:p>
+        </p:txBody>
+      </p:sp>
+      <p:sp>
+        <p:nvSpPr>
+          <p:cNvPr id="63" name="Freeform: Shape 62">
+            <a:extLst>
+              <a:ext uri="{FF2B5EF4-FFF2-40B4-BE49-F238E27FC236}">
+                <a16:creationId xmlns:a16="http://schemas.microsoft.com/office/drawing/2014/main" id="{E9700E52-C62E-7970-3977-3BB280FF1336}"/>
+              </a:ext>
+            </a:extLst>
+          </p:cNvPr>
+          <p:cNvSpPr/>
+          <p:nvPr/>
+        </p:nvSpPr>
+        <p:spPr>
+          <a:xfrm>
+            <a:off x="5239820" y="1068512"/>
+            <a:ext cx="1027416" cy="739740"/>
+          </a:xfrm>
+          <a:custGeom>
+            <a:avLst/>
+            <a:gdLst>
+              <a:gd name="csX0" fmla="*/ 0 w 1027416"/>
+              <a:gd name="csY0" fmla="*/ 0 h 739740"/>
+              <a:gd name="csX1" fmla="*/ 1027416 w 1027416"/>
+              <a:gd name="csY1" fmla="*/ 739740 h 739740"/>
+            </a:gdLst>
+            <a:ahLst/>
+            <a:cxnLst>
+              <a:cxn ang="0">
+                <a:pos x="csX0" y="csY0"/>
+              </a:cxn>
+              <a:cxn ang="0">
+                <a:pos x="csX1" y="csY1"/>
+              </a:cxn>
+            </a:cxnLst>
+            <a:rect l="l" t="t" r="r" b="b"/>
+            <a:pathLst>
+              <a:path w="1027416" h="739740">
+                <a:moveTo>
+                  <a:pt x="0" y="0"/>
+                </a:moveTo>
+                <a:lnTo>
+                  <a:pt x="1027416" y="739740"/>
+                </a:lnTo>
+              </a:path>
+            </a:pathLst>
+          </a:custGeom>
+        </p:spPr>
+        <p:style>
+          <a:lnRef idx="3">
+            <a:schemeClr val="accent1"/>
+          </a:lnRef>
+          <a:fillRef idx="0">
+            <a:schemeClr val="accent1"/>
+          </a:fillRef>
+          <a:effectRef idx="2">
+            <a:schemeClr val="accent1"/>
+          </a:effectRef>
+          <a:fontRef idx="minor">
+            <a:schemeClr val="tx1"/>
+          </a:fontRef>
+        </p:style>
+        <p:txBody>
+          <a:bodyPr rtlCol="0" anchor="ctr"/>
+          <a:lstStyle/>
+          <a:p>
+            <a:pPr algn="ctr"/>
+            <a:endParaRPr lang="en-US"/>
+          </a:p>
+        </p:txBody>
+      </p:sp>
+      <p:sp>
+        <p:nvSpPr>
+          <p:cNvPr id="64" name="Freeform: Shape 63">
+            <a:extLst>
+              <a:ext uri="{FF2B5EF4-FFF2-40B4-BE49-F238E27FC236}">
+                <a16:creationId xmlns:a16="http://schemas.microsoft.com/office/drawing/2014/main" id="{08378F7F-7646-EEA4-26C5-D789942AFDC9}"/>
+              </a:ext>
+            </a:extLst>
+          </p:cNvPr>
+          <p:cNvSpPr/>
+          <p:nvPr/>
+        </p:nvSpPr>
+        <p:spPr>
+          <a:xfrm>
+            <a:off x="4941870" y="1181528"/>
+            <a:ext cx="0" cy="400692"/>
+          </a:xfrm>
+          <a:custGeom>
+            <a:avLst/>
+            <a:gdLst>
+              <a:gd name="csX0" fmla="*/ 0 w 0"/>
+              <a:gd name="csY0" fmla="*/ 0 h 400692"/>
+              <a:gd name="csX1" fmla="*/ 0 w 0"/>
+              <a:gd name="csY1" fmla="*/ 400692 h 400692"/>
+            </a:gdLst>
+            <a:ahLst/>
+            <a:cxnLst>
+              <a:cxn ang="0">
+                <a:pos x="csX0" y="csY0"/>
+              </a:cxn>
+              <a:cxn ang="0">
+                <a:pos x="csX1" y="csY1"/>
+              </a:cxn>
+            </a:cxnLst>
+            <a:rect l="l" t="t" r="r" b="b"/>
+            <a:pathLst>
+              <a:path h="400692">
+                <a:moveTo>
+                  <a:pt x="0" y="0"/>
+                </a:moveTo>
+                <a:lnTo>
+                  <a:pt x="0" y="400692"/>
+                </a:lnTo>
+              </a:path>
+            </a:pathLst>
+          </a:custGeom>
+        </p:spPr>
+        <p:style>
+          <a:lnRef idx="3">
+            <a:schemeClr val="accent1"/>
+          </a:lnRef>
+          <a:fillRef idx="0">
+            <a:schemeClr val="accent1"/>
+          </a:fillRef>
+          <a:effectRef idx="2">
+            <a:schemeClr val="accent1"/>
+          </a:effectRef>
+          <a:fontRef idx="minor">
+            <a:schemeClr val="tx1"/>
+          </a:fontRef>
+        </p:style>
+        <p:txBody>
+          <a:bodyPr rtlCol="0" anchor="ctr"/>
+          <a:lstStyle/>
+          <a:p>
+            <a:pPr algn="ctr"/>
+            <a:endParaRPr lang="en-US"/>
+          </a:p>
+        </p:txBody>
+      </p:sp>
+      <p:sp>
+        <p:nvSpPr>
+          <p:cNvPr id="65" name="Freeform: Shape 64">
+            <a:extLst>
+              <a:ext uri="{FF2B5EF4-FFF2-40B4-BE49-F238E27FC236}">
+                <a16:creationId xmlns:a16="http://schemas.microsoft.com/office/drawing/2014/main" id="{6F859965-56A5-14C9-A7F1-7916621F6C10}"/>
+              </a:ext>
+            </a:extLst>
+          </p:cNvPr>
+          <p:cNvSpPr/>
+          <p:nvPr/>
+        </p:nvSpPr>
+        <p:spPr>
+          <a:xfrm>
+            <a:off x="4366517" y="1140431"/>
+            <a:ext cx="421240" cy="113016"/>
+          </a:xfrm>
+          <a:custGeom>
+            <a:avLst/>
+            <a:gdLst>
+              <a:gd name="csX0" fmla="*/ 421240 w 421240"/>
+              <a:gd name="csY0" fmla="*/ 0 h 113016"/>
+              <a:gd name="csX1" fmla="*/ 0 w 421240"/>
+              <a:gd name="csY1" fmla="*/ 113016 h 113016"/>
+            </a:gdLst>
+            <a:ahLst/>
+            <a:cxnLst>
+              <a:cxn ang="0">
+                <a:pos x="csX0" y="csY0"/>
+              </a:cxn>
+              <a:cxn ang="0">
+                <a:pos x="csX1" y="csY1"/>
+              </a:cxn>
+            </a:cxnLst>
+            <a:rect l="l" t="t" r="r" b="b"/>
+            <a:pathLst>
+              <a:path w="421240" h="113016">
+                <a:moveTo>
+                  <a:pt x="421240" y="0"/>
+                </a:moveTo>
+                <a:lnTo>
+                  <a:pt x="0" y="113016"/>
+                </a:lnTo>
+              </a:path>
+            </a:pathLst>
+          </a:custGeom>
+        </p:spPr>
+        <p:style>
+          <a:lnRef idx="3">
+            <a:schemeClr val="accent1"/>
+          </a:lnRef>
+          <a:fillRef idx="0">
+            <a:schemeClr val="accent1"/>
+          </a:fillRef>
+          <a:effectRef idx="2">
+            <a:schemeClr val="accent1"/>
+          </a:effectRef>
+          <a:fontRef idx="minor">
+            <a:schemeClr val="tx1"/>
+          </a:fontRef>
+        </p:style>
+        <p:txBody>
+          <a:bodyPr rtlCol="0" anchor="ctr"/>
+          <a:lstStyle/>
+          <a:p>
+            <a:pPr algn="ctr"/>
+            <a:endParaRPr lang="en-US"/>
+          </a:p>
+        </p:txBody>
+      </p:sp>
+      <p:sp>
+        <p:nvSpPr>
+          <p:cNvPr id="66" name="Freeform: Shape 65">
+            <a:extLst>
+              <a:ext uri="{FF2B5EF4-FFF2-40B4-BE49-F238E27FC236}">
+                <a16:creationId xmlns:a16="http://schemas.microsoft.com/office/drawing/2014/main" id="{692A1F0A-278F-7C1E-64DA-30BD804AE3DA}"/>
+              </a:ext>
+            </a:extLst>
+          </p:cNvPr>
+          <p:cNvSpPr/>
+          <p:nvPr/>
+        </p:nvSpPr>
+        <p:spPr>
+          <a:xfrm>
+            <a:off x="5270643" y="1017142"/>
+            <a:ext cx="339047" cy="0"/>
+          </a:xfrm>
+          <a:custGeom>
+            <a:avLst/>
+            <a:gdLst>
+              <a:gd name="csX0" fmla="*/ 0 w 339047"/>
+              <a:gd name="csY0" fmla="*/ 0 h 0"/>
+              <a:gd name="csX1" fmla="*/ 339047 w 339047"/>
+              <a:gd name="csY1" fmla="*/ 0 h 0"/>
+            </a:gdLst>
+            <a:ahLst/>
+            <a:cxnLst>
+              <a:cxn ang="0">
+                <a:pos x="csX0" y="csY0"/>
+              </a:cxn>
+              <a:cxn ang="0">
+                <a:pos x="csX1" y="csY1"/>
+              </a:cxn>
+            </a:cxnLst>
+            <a:rect l="l" t="t" r="r" b="b"/>
+            <a:pathLst>
+              <a:path w="339047">
+                <a:moveTo>
+                  <a:pt x="0" y="0"/>
+                </a:moveTo>
+                <a:lnTo>
+                  <a:pt x="339047" y="0"/>
+                </a:lnTo>
+              </a:path>
+            </a:pathLst>
+          </a:custGeom>
+        </p:spPr>
+        <p:style>
+          <a:lnRef idx="3">
+            <a:schemeClr val="accent1"/>
+          </a:lnRef>
+          <a:fillRef idx="0">
+            <a:schemeClr val="accent1"/>
+          </a:fillRef>
+          <a:effectRef idx="2">
+            <a:schemeClr val="accent1"/>
+          </a:effectRef>
+          <a:fontRef idx="minor">
+            <a:schemeClr val="tx1"/>
+          </a:fontRef>
+        </p:style>
+        <p:txBody>
+          <a:bodyPr rtlCol="0" anchor="ctr"/>
+          <a:lstStyle/>
+          <a:p>
+            <a:pPr algn="ctr"/>
+            <a:endParaRPr lang="en-US"/>
+          </a:p>
+        </p:txBody>
+      </p:sp>
+      <p:sp>
+        <p:nvSpPr>
+          <p:cNvPr id="67" name="Freeform: Shape 66">
+            <a:extLst>
+              <a:ext uri="{FF2B5EF4-FFF2-40B4-BE49-F238E27FC236}">
+                <a16:creationId xmlns:a16="http://schemas.microsoft.com/office/drawing/2014/main" id="{B8212ADB-6ED5-E0C9-6758-E459A58EED89}"/>
+              </a:ext>
+            </a:extLst>
+          </p:cNvPr>
+          <p:cNvSpPr/>
+          <p:nvPr/>
+        </p:nvSpPr>
+        <p:spPr>
+          <a:xfrm>
+            <a:off x="6236413" y="996593"/>
+            <a:ext cx="328774" cy="0"/>
+          </a:xfrm>
+          <a:custGeom>
+            <a:avLst/>
+            <a:gdLst>
+              <a:gd name="csX0" fmla="*/ 0 w 328774"/>
+              <a:gd name="csY0" fmla="*/ 0 h 0"/>
+              <a:gd name="csX1" fmla="*/ 328774 w 328774"/>
+              <a:gd name="csY1" fmla="*/ 0 h 0"/>
+            </a:gdLst>
+            <a:ahLst/>
+            <a:cxnLst>
+              <a:cxn ang="0">
+                <a:pos x="csX0" y="csY0"/>
+              </a:cxn>
+              <a:cxn ang="0">
+                <a:pos x="csX1" y="csY1"/>
+              </a:cxn>
+            </a:cxnLst>
+            <a:rect l="l" t="t" r="r" b="b"/>
+            <a:pathLst>
+              <a:path w="328774">
+                <a:moveTo>
+                  <a:pt x="0" y="0"/>
+                </a:moveTo>
+                <a:lnTo>
+                  <a:pt x="328774" y="0"/>
+                </a:lnTo>
+              </a:path>
+            </a:pathLst>
+          </a:custGeom>
+        </p:spPr>
+        <p:style>
+          <a:lnRef idx="3">
+            <a:schemeClr val="accent1"/>
+          </a:lnRef>
+          <a:fillRef idx="0">
+            <a:schemeClr val="accent1"/>
+          </a:fillRef>
+          <a:effectRef idx="2">
+            <a:schemeClr val="accent1"/>
+          </a:effectRef>
+          <a:fontRef idx="minor">
+            <a:schemeClr val="tx1"/>
+          </a:fontRef>
+        </p:style>
+        <p:txBody>
+          <a:bodyPr rtlCol="0" anchor="ctr"/>
+          <a:lstStyle/>
+          <a:p>
+            <a:pPr algn="ctr"/>
+            <a:endParaRPr lang="en-US"/>
+          </a:p>
+        </p:txBody>
+      </p:sp>
+      <p:sp>
+        <p:nvSpPr>
+          <p:cNvPr id="4" name="Freeform: Shape 3">
+            <a:extLst>
+              <a:ext uri="{FF2B5EF4-FFF2-40B4-BE49-F238E27FC236}">
+                <a16:creationId xmlns:a16="http://schemas.microsoft.com/office/drawing/2014/main" id="{415CCC24-8D70-BD6C-7E5C-51AF10D58116}"/>
+              </a:ext>
+            </a:extLst>
+          </p:cNvPr>
+          <p:cNvSpPr/>
+          <p:nvPr/>
+        </p:nvSpPr>
+        <p:spPr>
+          <a:xfrm>
+            <a:off x="3648075" y="3009900"/>
+            <a:ext cx="4763" cy="442913"/>
+          </a:xfrm>
+          <a:custGeom>
+            <a:avLst/>
+            <a:gdLst>
+              <a:gd name="csX0" fmla="*/ 0 w 4763"/>
+              <a:gd name="csY0" fmla="*/ 0 h 442913"/>
+              <a:gd name="csX1" fmla="*/ 4763 w 4763"/>
+              <a:gd name="csY1" fmla="*/ 442913 h 442913"/>
+            </a:gdLst>
+            <a:ahLst/>
+            <a:cxnLst>
+              <a:cxn ang="0">
+                <a:pos x="csX0" y="csY0"/>
+              </a:cxn>
+              <a:cxn ang="0">
+                <a:pos x="csX1" y="csY1"/>
+              </a:cxn>
+            </a:cxnLst>
+            <a:rect l="l" t="t" r="r" b="b"/>
+            <a:pathLst>
+              <a:path w="4763" h="442913">
+                <a:moveTo>
+                  <a:pt x="0" y="0"/>
+                </a:moveTo>
+                <a:cubicBezTo>
+                  <a:pt x="1588" y="147638"/>
+                  <a:pt x="3175" y="295275"/>
+                  <a:pt x="4763" y="442913"/>
+                </a:cubicBezTo>
+              </a:path>
+            </a:pathLst>
+          </a:custGeom>
+        </p:spPr>
+        <p:style>
+          <a:lnRef idx="3">
+            <a:schemeClr val="accent1"/>
+          </a:lnRef>
+          <a:fillRef idx="0">
+            <a:schemeClr val="accent1"/>
+          </a:fillRef>
+          <a:effectRef idx="2">
+            <a:schemeClr val="accent1"/>
+          </a:effectRef>
+          <a:fontRef idx="minor">
+            <a:schemeClr val="tx1"/>
+          </a:fontRef>
+        </p:style>
+        <p:txBody>
+          <a:bodyPr rtlCol="0" anchor="ctr"/>
+          <a:lstStyle/>
+          <a:p>
+            <a:pPr algn="ctr"/>
+            <a:endParaRPr lang="en-US"/>
+          </a:p>
+        </p:txBody>
+      </p:sp>
+      <p:sp>
+        <p:nvSpPr>
+          <p:cNvPr id="7" name="Freeform: Shape 6">
+            <a:extLst>
+              <a:ext uri="{FF2B5EF4-FFF2-40B4-BE49-F238E27FC236}">
+                <a16:creationId xmlns:a16="http://schemas.microsoft.com/office/drawing/2014/main" id="{5265EF82-892F-55B3-D976-298029086237}"/>
+              </a:ext>
+            </a:extLst>
+          </p:cNvPr>
+          <p:cNvSpPr/>
+          <p:nvPr/>
+        </p:nvSpPr>
+        <p:spPr>
+          <a:xfrm>
+            <a:off x="3810000" y="2414588"/>
+            <a:ext cx="809625" cy="1028700"/>
+          </a:xfrm>
+          <a:custGeom>
+            <a:avLst/>
+            <a:gdLst>
+              <a:gd name="csX0" fmla="*/ 809625 w 809625"/>
+              <a:gd name="csY0" fmla="*/ 0 h 1028700"/>
+              <a:gd name="csX1" fmla="*/ 261938 w 809625"/>
+              <a:gd name="csY1" fmla="*/ 0 h 1028700"/>
+              <a:gd name="csX2" fmla="*/ 261938 w 809625"/>
+              <a:gd name="csY2" fmla="*/ 866775 h 1028700"/>
+              <a:gd name="csX3" fmla="*/ 0 w 809625"/>
+              <a:gd name="csY3" fmla="*/ 866775 h 1028700"/>
+              <a:gd name="csX4" fmla="*/ 0 w 809625"/>
+              <a:gd name="csY4" fmla="*/ 1028700 h 1028700"/>
+            </a:gdLst>
+            <a:ahLst/>
+            <a:cxnLst>
+              <a:cxn ang="0">
+                <a:pos x="csX0" y="csY0"/>
+              </a:cxn>
+              <a:cxn ang="0">
+                <a:pos x="csX1" y="csY1"/>
+              </a:cxn>
+              <a:cxn ang="0">
+                <a:pos x="csX2" y="csY2"/>
+              </a:cxn>
+              <a:cxn ang="0">
+                <a:pos x="csX3" y="csY3"/>
+              </a:cxn>
+              <a:cxn ang="0">
+                <a:pos x="csX4" y="csY4"/>
+              </a:cxn>
+            </a:cxnLst>
+            <a:rect l="l" t="t" r="r" b="b"/>
+            <a:pathLst>
+              <a:path w="809625" h="1028700">
+                <a:moveTo>
+                  <a:pt x="809625" y="0"/>
+                </a:moveTo>
+                <a:lnTo>
+                  <a:pt x="261938" y="0"/>
+                </a:lnTo>
+                <a:lnTo>
+                  <a:pt x="261938" y="866775"/>
+                </a:lnTo>
+                <a:lnTo>
+                  <a:pt x="0" y="866775"/>
+                </a:lnTo>
+                <a:lnTo>
+                  <a:pt x="0" y="1028700"/>
+                </a:lnTo>
+              </a:path>
+            </a:pathLst>
+          </a:custGeom>
+        </p:spPr>
+        <p:style>
+          <a:lnRef idx="3">
+            <a:schemeClr val="accent1"/>
+          </a:lnRef>
+          <a:fillRef idx="0">
+            <a:schemeClr val="accent1"/>
+          </a:fillRef>
+          <a:effectRef idx="2">
+            <a:schemeClr val="accent1"/>
+          </a:effectRef>
+          <a:fontRef idx="minor">
+            <a:schemeClr val="tx1"/>
+          </a:fontRef>
+        </p:style>
+        <p:txBody>
+          <a:bodyPr rtlCol="0" anchor="ctr"/>
+          <a:lstStyle/>
+          <a:p>
+            <a:pPr algn="ctr"/>
+            <a:endParaRPr lang="en-US"/>
+          </a:p>
+        </p:txBody>
+      </p:sp>
+      <p:sp>
+        <p:nvSpPr>
+          <p:cNvPr id="9" name="Freeform: Shape 8">
+            <a:extLst>
+              <a:ext uri="{FF2B5EF4-FFF2-40B4-BE49-F238E27FC236}">
+                <a16:creationId xmlns:a16="http://schemas.microsoft.com/office/drawing/2014/main" id="{4043E53C-8320-AFF5-531B-029F544C8FEE}"/>
+              </a:ext>
+            </a:extLst>
+          </p:cNvPr>
+          <p:cNvSpPr/>
+          <p:nvPr/>
+        </p:nvSpPr>
+        <p:spPr>
+          <a:xfrm>
+            <a:off x="3750067" y="1839074"/>
+            <a:ext cx="852755" cy="1623317"/>
+          </a:xfrm>
+          <a:custGeom>
+            <a:avLst/>
+            <a:gdLst>
+              <a:gd name="csX0" fmla="*/ 0 w 852755"/>
+              <a:gd name="csY0" fmla="*/ 1623317 h 1623317"/>
+              <a:gd name="csX1" fmla="*/ 852755 w 852755"/>
+              <a:gd name="csY1" fmla="*/ 0 h 1623317"/>
+            </a:gdLst>
+            <a:ahLst/>
+            <a:cxnLst>
+              <a:cxn ang="0">
+                <a:pos x="csX0" y="csY0"/>
+              </a:cxn>
+              <a:cxn ang="0">
+                <a:pos x="csX1" y="csY1"/>
+              </a:cxn>
+            </a:cxnLst>
+            <a:rect l="l" t="t" r="r" b="b"/>
+            <a:pathLst>
+              <a:path w="852755" h="1623317">
+                <a:moveTo>
+                  <a:pt x="0" y="1623317"/>
+                </a:moveTo>
+                <a:lnTo>
+                  <a:pt x="852755" y="0"/>
+                </a:lnTo>
+              </a:path>
+            </a:pathLst>
+          </a:custGeom>
+        </p:spPr>
+        <p:style>
+          <a:lnRef idx="3">
+            <a:schemeClr val="accent2"/>
+          </a:lnRef>
+          <a:fillRef idx="0">
+            <a:schemeClr val="accent2"/>
+          </a:fillRef>
+          <a:effectRef idx="2">
+            <a:schemeClr val="accent2"/>
+          </a:effectRef>
+          <a:fontRef idx="minor">
+            <a:schemeClr val="tx1"/>
+          </a:fontRef>
+        </p:style>
+        <p:txBody>
+          <a:bodyPr rtlCol="0" anchor="ctr"/>
+          <a:lstStyle/>
+          <a:p>
+            <a:pPr algn="ctr"/>
+            <a:endParaRPr lang="en-US"/>
+          </a:p>
+        </p:txBody>
+      </p:sp>
+      <p:sp>
+        <p:nvSpPr>
+          <p:cNvPr id="10" name="Freeform: Shape 9">
+            <a:extLst>
+              <a:ext uri="{FF2B5EF4-FFF2-40B4-BE49-F238E27FC236}">
+                <a16:creationId xmlns:a16="http://schemas.microsoft.com/office/drawing/2014/main" id="{82B450A7-3A0E-59F2-3DB1-9F34A18011B1}"/>
+              </a:ext>
+            </a:extLst>
+          </p:cNvPr>
+          <p:cNvSpPr/>
+          <p:nvPr/>
+        </p:nvSpPr>
+        <p:spPr>
+          <a:xfrm>
+            <a:off x="4952144" y="1150706"/>
+            <a:ext cx="821932" cy="1099334"/>
+          </a:xfrm>
+          <a:custGeom>
+            <a:avLst/>
+            <a:gdLst>
+              <a:gd name="csX0" fmla="*/ 0 w 821932"/>
+              <a:gd name="csY0" fmla="*/ 1099334 h 1099334"/>
+              <a:gd name="csX1" fmla="*/ 821932 w 821932"/>
+              <a:gd name="csY1" fmla="*/ 0 h 1099334"/>
+            </a:gdLst>
+            <a:ahLst/>
+            <a:cxnLst>
+              <a:cxn ang="0">
+                <a:pos x="csX0" y="csY0"/>
+              </a:cxn>
+              <a:cxn ang="0">
+                <a:pos x="csX1" y="csY1"/>
+              </a:cxn>
+            </a:cxnLst>
+            <a:rect l="l" t="t" r="r" b="b"/>
+            <a:pathLst>
+              <a:path w="821932" h="1099334">
+                <a:moveTo>
+                  <a:pt x="0" y="1099334"/>
+                </a:moveTo>
+                <a:lnTo>
+                  <a:pt x="821932" y="0"/>
+                </a:lnTo>
+              </a:path>
+            </a:pathLst>
+          </a:custGeom>
+        </p:spPr>
+        <p:style>
+          <a:lnRef idx="3">
+            <a:schemeClr val="accent2"/>
+          </a:lnRef>
+          <a:fillRef idx="0">
+            <a:schemeClr val="accent2"/>
+          </a:fillRef>
+          <a:effectRef idx="2">
+            <a:schemeClr val="accent2"/>
+          </a:effectRef>
+          <a:fontRef idx="minor">
+            <a:schemeClr val="tx1"/>
+          </a:fontRef>
+        </p:style>
+        <p:txBody>
+          <a:bodyPr rtlCol="0" anchor="ctr"/>
+          <a:lstStyle/>
+          <a:p>
+            <a:pPr algn="ctr"/>
+            <a:endParaRPr lang="en-US"/>
+          </a:p>
+        </p:txBody>
+      </p:sp>
+      <p:sp>
+        <p:nvSpPr>
+          <p:cNvPr id="11" name="Freeform: Shape 10">
+            <a:extLst>
+              <a:ext uri="{FF2B5EF4-FFF2-40B4-BE49-F238E27FC236}">
+                <a16:creationId xmlns:a16="http://schemas.microsoft.com/office/drawing/2014/main" id="{59C602B2-0D71-AD34-346E-0F11EE3F01F4}"/>
+              </a:ext>
+            </a:extLst>
+          </p:cNvPr>
+          <p:cNvSpPr/>
+          <p:nvPr/>
+        </p:nvSpPr>
+        <p:spPr>
+          <a:xfrm>
+            <a:off x="5167901" y="1150706"/>
+            <a:ext cx="678095" cy="1130157"/>
+          </a:xfrm>
+          <a:custGeom>
+            <a:avLst/>
+            <a:gdLst>
+              <a:gd name="csX0" fmla="*/ 678095 w 678095"/>
+              <a:gd name="csY0" fmla="*/ 1130157 h 1130157"/>
+              <a:gd name="csX1" fmla="*/ 0 w 678095"/>
+              <a:gd name="csY1" fmla="*/ 0 h 1130157"/>
+            </a:gdLst>
+            <a:ahLst/>
+            <a:cxnLst>
+              <a:cxn ang="0">
+                <a:pos x="csX0" y="csY0"/>
+              </a:cxn>
+              <a:cxn ang="0">
+                <a:pos x="csX1" y="csY1"/>
+              </a:cxn>
+            </a:cxnLst>
+            <a:rect l="l" t="t" r="r" b="b"/>
+            <a:pathLst>
+              <a:path w="678095" h="1130157">
+                <a:moveTo>
+                  <a:pt x="678095" y="1130157"/>
+                </a:moveTo>
+                <a:lnTo>
+                  <a:pt x="0" y="0"/>
+                </a:lnTo>
+              </a:path>
+            </a:pathLst>
+          </a:custGeom>
+        </p:spPr>
+        <p:style>
+          <a:lnRef idx="3">
+            <a:schemeClr val="accent2"/>
+          </a:lnRef>
+          <a:fillRef idx="0">
+            <a:schemeClr val="accent2"/>
+          </a:fillRef>
+          <a:effectRef idx="2">
+            <a:schemeClr val="accent2"/>
+          </a:effectRef>
+          <a:fontRef idx="minor">
+            <a:schemeClr val="tx1"/>
+          </a:fontRef>
+        </p:style>
+        <p:txBody>
+          <a:bodyPr rtlCol="0" anchor="ctr"/>
+          <a:lstStyle/>
+          <a:p>
+            <a:pPr algn="ctr"/>
+            <a:endParaRPr lang="en-US"/>
+          </a:p>
+        </p:txBody>
+      </p:sp>
+      <p:sp>
+        <p:nvSpPr>
+          <p:cNvPr id="12" name="Freeform: Shape 11">
+            <a:extLst>
+              <a:ext uri="{FF2B5EF4-FFF2-40B4-BE49-F238E27FC236}">
+                <a16:creationId xmlns:a16="http://schemas.microsoft.com/office/drawing/2014/main" id="{8707690B-F929-024B-BE2A-BABF55F6F6F3}"/>
+              </a:ext>
+            </a:extLst>
+          </p:cNvPr>
+          <p:cNvSpPr/>
+          <p:nvPr/>
+        </p:nvSpPr>
+        <p:spPr>
+          <a:xfrm>
+            <a:off x="5876819" y="1160980"/>
+            <a:ext cx="10274" cy="1150705"/>
+          </a:xfrm>
+          <a:custGeom>
+            <a:avLst/>
+            <a:gdLst>
+              <a:gd name="csX0" fmla="*/ 0 w 10274"/>
+              <a:gd name="csY0" fmla="*/ 1150705 h 1150705"/>
+              <a:gd name="csX1" fmla="*/ 10274 w 10274"/>
+              <a:gd name="csY1" fmla="*/ 0 h 1150705"/>
+            </a:gdLst>
+            <a:ahLst/>
+            <a:cxnLst>
+              <a:cxn ang="0">
+                <a:pos x="csX0" y="csY0"/>
+              </a:cxn>
+              <a:cxn ang="0">
+                <a:pos x="csX1" y="csY1"/>
+              </a:cxn>
+            </a:cxnLst>
+            <a:rect l="l" t="t" r="r" b="b"/>
+            <a:pathLst>
+              <a:path w="10274" h="1150705">
+                <a:moveTo>
+                  <a:pt x="0" y="1150705"/>
+                </a:moveTo>
+                <a:cubicBezTo>
+                  <a:pt x="3425" y="767137"/>
+                  <a:pt x="6849" y="383568"/>
+                  <a:pt x="10274" y="0"/>
+                </a:cubicBezTo>
+              </a:path>
+            </a:pathLst>
+          </a:custGeom>
+        </p:spPr>
+        <p:style>
+          <a:lnRef idx="3">
+            <a:schemeClr val="accent2"/>
+          </a:lnRef>
+          <a:fillRef idx="0">
+            <a:schemeClr val="accent2"/>
+          </a:fillRef>
+          <a:effectRef idx="2">
+            <a:schemeClr val="accent2"/>
+          </a:effectRef>
+          <a:fontRef idx="minor">
+            <a:schemeClr val="tx1"/>
+          </a:fontRef>
+        </p:style>
+        <p:txBody>
+          <a:bodyPr rtlCol="0" anchor="ctr"/>
+          <a:lstStyle/>
+          <a:p>
+            <a:pPr algn="ctr"/>
+            <a:endParaRPr lang="en-US"/>
+          </a:p>
+        </p:txBody>
+      </p:sp>
+      <p:sp>
+        <p:nvSpPr>
+          <p:cNvPr id="13" name="Freeform: Shape 12">
+            <a:extLst>
+              <a:ext uri="{FF2B5EF4-FFF2-40B4-BE49-F238E27FC236}">
+                <a16:creationId xmlns:a16="http://schemas.microsoft.com/office/drawing/2014/main" id="{8D811C5C-8E3A-C09F-A5F7-968F53742862}"/>
+              </a:ext>
+            </a:extLst>
+          </p:cNvPr>
+          <p:cNvSpPr/>
+          <p:nvPr/>
+        </p:nvSpPr>
+        <p:spPr>
+          <a:xfrm>
+            <a:off x="6082301" y="1160980"/>
+            <a:ext cx="832207" cy="2311685"/>
+          </a:xfrm>
+          <a:custGeom>
+            <a:avLst/>
+            <a:gdLst>
+              <a:gd name="csX0" fmla="*/ 832207 w 832207"/>
+              <a:gd name="csY0" fmla="*/ 2311685 h 2311685"/>
+              <a:gd name="csX1" fmla="*/ 0 w 832207"/>
+              <a:gd name="csY1" fmla="*/ 0 h 2311685"/>
+            </a:gdLst>
+            <a:ahLst/>
+            <a:cxnLst>
+              <a:cxn ang="0">
+                <a:pos x="csX0" y="csY0"/>
+              </a:cxn>
+              <a:cxn ang="0">
+                <a:pos x="csX1" y="csY1"/>
+              </a:cxn>
+            </a:cxnLst>
+            <a:rect l="l" t="t" r="r" b="b"/>
+            <a:pathLst>
+              <a:path w="832207" h="2311685">
+                <a:moveTo>
+                  <a:pt x="832207" y="2311685"/>
+                </a:moveTo>
+                <a:lnTo>
+                  <a:pt x="0" y="0"/>
+                </a:lnTo>
+              </a:path>
+            </a:pathLst>
+          </a:custGeom>
+        </p:spPr>
+        <p:style>
+          <a:lnRef idx="3">
+            <a:schemeClr val="accent2"/>
+          </a:lnRef>
+          <a:fillRef idx="0">
+            <a:schemeClr val="accent2"/>
+          </a:fillRef>
+          <a:effectRef idx="2">
+            <a:schemeClr val="accent2"/>
+          </a:effectRef>
+          <a:fontRef idx="minor">
+            <a:schemeClr val="tx1"/>
+          </a:fontRef>
+        </p:style>
+        <p:txBody>
+          <a:bodyPr rtlCol="0" anchor="ctr"/>
+          <a:lstStyle/>
+          <a:p>
+            <a:pPr algn="ctr"/>
+            <a:endParaRPr lang="en-US"/>
+          </a:p>
+        </p:txBody>
+      </p:sp>
+    </p:spTree>
+    <p:extLst>
+      <p:ext uri="{BB962C8B-B14F-4D97-AF65-F5344CB8AC3E}">
+        <p14:creationId xmlns:p14="http://schemas.microsoft.com/office/powerpoint/2010/main" val="498286070"/>
+      </p:ext>
+    </p:extLst>
+  </p:cSld>
+  <p:clrMapOvr>
+    <a:masterClrMapping/>
+  </p:clrMapOvr>
+</p:sld>
+</file>
+
+<file path=ppt/slides/slide39.xml><?xml version="1.0" encoding="utf-8"?>
 <p:sld xmlns:a="http://schemas.openxmlformats.org/drawingml/2006/main" xmlns:r="http://schemas.openxmlformats.org/officeDocument/2006/relationships" xmlns:p="http://schemas.openxmlformats.org/presentationml/2006/main">
   <p:cSld>
     <p:bg>

--- a/Master_EAS_Meta-Model.pptx
+++ b/Master_EAS_Meta-Model.pptx
@@ -5,10 +5,10 @@
     <p:sldMasterId id="2147483648" r:id="rId4"/>
   </p:sldMasterIdLst>
   <p:notesMasterIdLst>
-    <p:notesMasterId r:id="rId44"/>
+    <p:notesMasterId r:id="rId47"/>
   </p:notesMasterIdLst>
   <p:handoutMasterIdLst>
-    <p:handoutMasterId r:id="rId45"/>
+    <p:handoutMasterId r:id="rId48"/>
   </p:handoutMasterIdLst>
   <p:sldIdLst>
     <p:sldId id="256" r:id="rId5"/>
@@ -49,7 +49,10 @@
     <p:sldId id="305" r:id="rId40"/>
     <p:sldId id="306" r:id="rId41"/>
     <p:sldId id="307" r:id="rId42"/>
-    <p:sldId id="267" r:id="rId43"/>
+    <p:sldId id="308" r:id="rId43"/>
+    <p:sldId id="309" r:id="rId44"/>
+    <p:sldId id="310" r:id="rId45"/>
+    <p:sldId id="267" r:id="rId46"/>
   </p:sldIdLst>
   <p:sldSz cx="12192000" cy="6858000"/>
   <p:notesSz cx="6858000" cy="9144000"/>
@@ -857,7 +860,7 @@
           <a:p>
             <a:fld id="{EE000EEB-8338-48D7-8EE8-EE0082EF7602}" type="slidenum">
               <a:rPr lang="en-US" smtClean="0"/>
-              <a:t>39</a:t>
+              <a:t>42</a:t>
             </a:fld>
             <a:endParaRPr lang="en-US" dirty="0"/>
           </a:p>
@@ -32852,6 +32855,264 @@
           </a:p>
         </p:txBody>
       </p:sp>
+      <p:sp>
+        <p:nvSpPr>
+          <p:cNvPr id="2" name="Freeform: Shape 1">
+            <a:extLst>
+              <a:ext uri="{FF2B5EF4-FFF2-40B4-BE49-F238E27FC236}">
+                <a16:creationId xmlns:a16="http://schemas.microsoft.com/office/drawing/2014/main" id="{794AE9E5-07C1-73D5-7F4D-33370B4DF9F8}"/>
+              </a:ext>
+            </a:extLst>
+          </p:cNvPr>
+          <p:cNvSpPr/>
+          <p:nvPr/>
+        </p:nvSpPr>
+        <p:spPr>
+          <a:xfrm>
+            <a:off x="5105400" y="2571750"/>
+            <a:ext cx="762000" cy="848623"/>
+          </a:xfrm>
+          <a:custGeom>
+            <a:avLst/>
+            <a:gdLst>
+              <a:gd name="csX0" fmla="*/ 762000 w 762000"/>
+              <a:gd name="csY0" fmla="*/ 0 h 863600"/>
+              <a:gd name="csX1" fmla="*/ 762000 w 762000"/>
+              <a:gd name="csY1" fmla="*/ 273050 h 863600"/>
+              <a:gd name="csX2" fmla="*/ 0 w 762000"/>
+              <a:gd name="csY2" fmla="*/ 279400 h 863600"/>
+              <a:gd name="csX3" fmla="*/ 0 w 762000"/>
+              <a:gd name="csY3" fmla="*/ 863600 h 863600"/>
+            </a:gdLst>
+            <a:ahLst/>
+            <a:cxnLst>
+              <a:cxn ang="0">
+                <a:pos x="csX0" y="csY0"/>
+              </a:cxn>
+              <a:cxn ang="0">
+                <a:pos x="csX1" y="csY1"/>
+              </a:cxn>
+              <a:cxn ang="0">
+                <a:pos x="csX2" y="csY2"/>
+              </a:cxn>
+              <a:cxn ang="0">
+                <a:pos x="csX3" y="csY3"/>
+              </a:cxn>
+            </a:cxnLst>
+            <a:rect l="l" t="t" r="r" b="b"/>
+            <a:pathLst>
+              <a:path w="762000" h="863600">
+                <a:moveTo>
+                  <a:pt x="762000" y="0"/>
+                </a:moveTo>
+                <a:lnTo>
+                  <a:pt x="762000" y="273050"/>
+                </a:lnTo>
+                <a:lnTo>
+                  <a:pt x="0" y="279400"/>
+                </a:lnTo>
+                <a:lnTo>
+                  <a:pt x="0" y="863600"/>
+                </a:lnTo>
+              </a:path>
+            </a:pathLst>
+          </a:custGeom>
+        </p:spPr>
+        <p:style>
+          <a:lnRef idx="3">
+            <a:schemeClr val="accent1"/>
+          </a:lnRef>
+          <a:fillRef idx="0">
+            <a:schemeClr val="accent1"/>
+          </a:fillRef>
+          <a:effectRef idx="2">
+            <a:schemeClr val="accent1"/>
+          </a:effectRef>
+          <a:fontRef idx="minor">
+            <a:schemeClr val="tx1"/>
+          </a:fontRef>
+        </p:style>
+        <p:txBody>
+          <a:bodyPr rtlCol="0" anchor="ctr"/>
+          <a:lstStyle/>
+          <a:p>
+            <a:pPr algn="ctr"/>
+            <a:endParaRPr lang="en-US"/>
+          </a:p>
+        </p:txBody>
+      </p:sp>
+      <p:sp>
+        <p:nvSpPr>
+          <p:cNvPr id="14" name="Freeform: Shape 13">
+            <a:extLst>
+              <a:ext uri="{FF2B5EF4-FFF2-40B4-BE49-F238E27FC236}">
+                <a16:creationId xmlns:a16="http://schemas.microsoft.com/office/drawing/2014/main" id="{93CA1F19-8F06-987C-FBAE-ACDB72D382EC}"/>
+              </a:ext>
+            </a:extLst>
+          </p:cNvPr>
+          <p:cNvSpPr/>
+          <p:nvPr/>
+        </p:nvSpPr>
+        <p:spPr>
+          <a:xfrm>
+            <a:off x="4502150" y="3232150"/>
+            <a:ext cx="279400" cy="196850"/>
+          </a:xfrm>
+          <a:custGeom>
+            <a:avLst/>
+            <a:gdLst>
+              <a:gd name="csX0" fmla="*/ 0 w 279400"/>
+              <a:gd name="csY0" fmla="*/ 0 h 209550"/>
+              <a:gd name="csX1" fmla="*/ 6350 w 279400"/>
+              <a:gd name="csY1" fmla="*/ 101600 h 209550"/>
+              <a:gd name="csX2" fmla="*/ 273050 w 279400"/>
+              <a:gd name="csY2" fmla="*/ 107950 h 209550"/>
+              <a:gd name="csX3" fmla="*/ 279400 w 279400"/>
+              <a:gd name="csY3" fmla="*/ 209550 h 209550"/>
+            </a:gdLst>
+            <a:ahLst/>
+            <a:cxnLst>
+              <a:cxn ang="0">
+                <a:pos x="csX0" y="csY0"/>
+              </a:cxn>
+              <a:cxn ang="0">
+                <a:pos x="csX1" y="csY1"/>
+              </a:cxn>
+              <a:cxn ang="0">
+                <a:pos x="csX2" y="csY2"/>
+              </a:cxn>
+              <a:cxn ang="0">
+                <a:pos x="csX3" y="csY3"/>
+              </a:cxn>
+            </a:cxnLst>
+            <a:rect l="l" t="t" r="r" b="b"/>
+            <a:pathLst>
+              <a:path w="279400" h="209550">
+                <a:moveTo>
+                  <a:pt x="0" y="0"/>
+                </a:moveTo>
+                <a:lnTo>
+                  <a:pt x="6350" y="101600"/>
+                </a:lnTo>
+                <a:lnTo>
+                  <a:pt x="273050" y="107950"/>
+                </a:lnTo>
+                <a:lnTo>
+                  <a:pt x="279400" y="209550"/>
+                </a:lnTo>
+              </a:path>
+            </a:pathLst>
+          </a:custGeom>
+          <a:ln>
+            <a:solidFill>
+              <a:schemeClr val="accent3">
+                <a:lumMod val="60000"/>
+                <a:lumOff val="40000"/>
+              </a:schemeClr>
+            </a:solidFill>
+          </a:ln>
+        </p:spPr>
+        <p:style>
+          <a:lnRef idx="3">
+            <a:schemeClr val="accent1"/>
+          </a:lnRef>
+          <a:fillRef idx="0">
+            <a:schemeClr val="accent1"/>
+          </a:fillRef>
+          <a:effectRef idx="2">
+            <a:schemeClr val="accent1"/>
+          </a:effectRef>
+          <a:fontRef idx="minor">
+            <a:schemeClr val="tx1"/>
+          </a:fontRef>
+        </p:style>
+        <p:txBody>
+          <a:bodyPr rtlCol="0" anchor="ctr"/>
+          <a:lstStyle/>
+          <a:p>
+            <a:pPr algn="ctr"/>
+            <a:endParaRPr lang="en-US"/>
+          </a:p>
+        </p:txBody>
+      </p:sp>
+      <p:sp>
+        <p:nvSpPr>
+          <p:cNvPr id="16" name="Freeform: Shape 15">
+            <a:extLst>
+              <a:ext uri="{FF2B5EF4-FFF2-40B4-BE49-F238E27FC236}">
+                <a16:creationId xmlns:a16="http://schemas.microsoft.com/office/drawing/2014/main" id="{CD2DAB03-653E-0B62-34AF-3D64E4093FF3}"/>
+              </a:ext>
+            </a:extLst>
+          </p:cNvPr>
+          <p:cNvSpPr/>
+          <p:nvPr/>
+        </p:nvSpPr>
+        <p:spPr>
+          <a:xfrm>
+            <a:off x="5276850" y="3270250"/>
+            <a:ext cx="444500" cy="247650"/>
+          </a:xfrm>
+          <a:custGeom>
+            <a:avLst/>
+            <a:gdLst>
+              <a:gd name="csX0" fmla="*/ 438150 w 444500"/>
+              <a:gd name="csY0" fmla="*/ 0 h 247650"/>
+              <a:gd name="csX1" fmla="*/ 444500 w 444500"/>
+              <a:gd name="csY1" fmla="*/ 247650 h 247650"/>
+              <a:gd name="csX2" fmla="*/ 0 w 444500"/>
+              <a:gd name="csY2" fmla="*/ 247650 h 247650"/>
+            </a:gdLst>
+            <a:ahLst/>
+            <a:cxnLst>
+              <a:cxn ang="0">
+                <a:pos x="csX0" y="csY0"/>
+              </a:cxn>
+              <a:cxn ang="0">
+                <a:pos x="csX1" y="csY1"/>
+              </a:cxn>
+              <a:cxn ang="0">
+                <a:pos x="csX2" y="csY2"/>
+              </a:cxn>
+            </a:cxnLst>
+            <a:rect l="l" t="t" r="r" b="b"/>
+            <a:pathLst>
+              <a:path w="444500" h="247650">
+                <a:moveTo>
+                  <a:pt x="438150" y="0"/>
+                </a:moveTo>
+                <a:lnTo>
+                  <a:pt x="444500" y="247650"/>
+                </a:lnTo>
+                <a:lnTo>
+                  <a:pt x="0" y="247650"/>
+                </a:lnTo>
+              </a:path>
+            </a:pathLst>
+          </a:custGeom>
+        </p:spPr>
+        <p:style>
+          <a:lnRef idx="3">
+            <a:schemeClr val="accent1"/>
+          </a:lnRef>
+          <a:fillRef idx="0">
+            <a:schemeClr val="accent1"/>
+          </a:fillRef>
+          <a:effectRef idx="2">
+            <a:schemeClr val="accent1"/>
+          </a:effectRef>
+          <a:fontRef idx="minor">
+            <a:schemeClr val="tx1"/>
+          </a:fontRef>
+        </p:style>
+        <p:txBody>
+          <a:bodyPr rtlCol="0" anchor="ctr"/>
+          <a:lstStyle/>
+          <a:p>
+            <a:pPr algn="ctr"/>
+            <a:endParaRPr lang="en-US"/>
+          </a:p>
+        </p:txBody>
+      </p:sp>
     </p:spTree>
     <p:extLst>
       <p:ext uri="{BB962C8B-B14F-4D97-AF65-F5344CB8AC3E}">
@@ -32868,266 +33129,12 @@
 <file path=ppt/slides/slide39.xml><?xml version="1.0" encoding="utf-8"?>
 <p:sld xmlns:a="http://schemas.openxmlformats.org/drawingml/2006/main" xmlns:r="http://schemas.openxmlformats.org/officeDocument/2006/relationships" xmlns:p="http://schemas.openxmlformats.org/presentationml/2006/main">
   <p:cSld>
-    <p:bg>
-      <p:bgPr>
-        <a:blipFill rotWithShape="1">
-          <a:blip r:embed="rId3">
-            <a:duotone>
-              <a:schemeClr val="bg2">
-                <a:shade val="62000"/>
-                <a:hueMod val="108000"/>
-                <a:satMod val="164000"/>
-                <a:lumMod val="69000"/>
-              </a:schemeClr>
-              <a:schemeClr val="bg2">
-                <a:tint val="96000"/>
-                <a:hueMod val="90000"/>
-                <a:satMod val="130000"/>
-                <a:lumMod val="134000"/>
-              </a:schemeClr>
-            </a:duotone>
-          </a:blip>
-          <a:stretch/>
-        </a:blipFill>
-        <a:effectLst/>
-      </p:bgPr>
-    </p:bg>
-    <p:spTree>
-      <p:nvGrpSpPr>
-        <p:cNvPr id="1" name=""/>
-        <p:cNvGrpSpPr/>
-        <p:nvPr/>
-      </p:nvGrpSpPr>
-      <p:grpSpPr>
-        <a:xfrm>
-          <a:off x="0" y="0"/>
-          <a:ext cx="0" cy="0"/>
-          <a:chOff x="0" y="0"/>
-          <a:chExt cx="0" cy="0"/>
-        </a:xfrm>
-      </p:grpSpPr>
-      <p:pic>
-        <p:nvPicPr>
-          <p:cNvPr id="15" name="Picture 14" descr="abstract design">
-            <a:extLst>
-              <a:ext uri="{FF2B5EF4-FFF2-40B4-BE49-F238E27FC236}">
-                <a16:creationId xmlns:a16="http://schemas.microsoft.com/office/drawing/2014/main" id="{6D363037-1741-4470-A023-883E2FFD5840}"/>
-              </a:ext>
-            </a:extLst>
-          </p:cNvPr>
-          <p:cNvPicPr>
-            <a:picLocks noChangeAspect="1"/>
-          </p:cNvPicPr>
-          <p:nvPr/>
-        </p:nvPicPr>
-        <p:blipFill rotWithShape="1">
-          <a:blip r:embed="rId4">
-            <a:duotone>
-              <a:prstClr val="black"/>
-              <a:schemeClr val="accent5">
-                <a:tint val="45000"/>
-                <a:satMod val="400000"/>
-              </a:schemeClr>
-            </a:duotone>
-            <a:alphaModFix amt="25000"/>
-          </a:blip>
-          <a:srcRect t="18308" r="6818" b="2872"/>
-          <a:stretch/>
-        </p:blipFill>
-        <p:spPr>
-          <a:xfrm flipH="1">
-            <a:off x="20" y="10"/>
-            <a:ext cx="12191980" cy="6857990"/>
-          </a:xfrm>
-          <a:prstGeom prst="rect">
-            <a:avLst/>
-          </a:prstGeom>
-        </p:spPr>
-      </p:pic>
-      <p:sp>
-        <p:nvSpPr>
-          <p:cNvPr id="12" name="Title 11">
-            <a:extLst>
-              <a:ext uri="{FF2B5EF4-FFF2-40B4-BE49-F238E27FC236}">
-                <a16:creationId xmlns:a16="http://schemas.microsoft.com/office/drawing/2014/main" id="{970C361B-D32E-42E0-A41E-86C3D9AC886F}"/>
-              </a:ext>
-            </a:extLst>
-          </p:cNvPr>
-          <p:cNvSpPr>
-            <a:spLocks noGrp="1"/>
-          </p:cNvSpPr>
-          <p:nvPr>
-            <p:ph type="ctrTitle"/>
-          </p:nvPr>
-        </p:nvSpPr>
-        <p:spPr>
-          <a:xfrm>
-            <a:off x="1154955" y="1447800"/>
-            <a:ext cx="8825658" cy="3329581"/>
-          </a:xfrm>
-        </p:spPr>
-        <p:txBody>
-          <a:bodyPr>
-            <a:normAutofit/>
-          </a:bodyPr>
-          <a:lstStyle/>
-          <a:p>
-            <a:r>
-              <a:rPr lang="en-US" dirty="0"/>
-              <a:t>Thank You!</a:t>
-            </a:r>
-            <a:endParaRPr lang="ru-RU" dirty="0"/>
-          </a:p>
-        </p:txBody>
-      </p:sp>
-      <p:sp>
-        <p:nvSpPr>
-          <p:cNvPr id="13" name="Subtitle 12">
-            <a:extLst>
-              <a:ext uri="{FF2B5EF4-FFF2-40B4-BE49-F238E27FC236}">
-                <a16:creationId xmlns:a16="http://schemas.microsoft.com/office/drawing/2014/main" id="{336E726C-3DE4-41AA-88A0-C92B0C34163D}"/>
-              </a:ext>
-            </a:extLst>
-          </p:cNvPr>
-          <p:cNvSpPr>
-            <a:spLocks noGrp="1"/>
-          </p:cNvSpPr>
-          <p:nvPr>
-            <p:ph type="subTitle" idx="1"/>
-          </p:nvPr>
-        </p:nvSpPr>
-        <p:spPr>
-          <a:xfrm>
-            <a:off x="1154955" y="4777380"/>
-            <a:ext cx="8825658" cy="861420"/>
-          </a:xfrm>
-        </p:spPr>
-        <p:txBody>
-          <a:bodyPr>
-            <a:normAutofit/>
-          </a:bodyPr>
-          <a:lstStyle/>
-          <a:p>
-            <a:r>
-              <a:rPr lang="en-US" dirty="0"/>
-              <a:t>someone@Example.com</a:t>
-            </a:r>
-            <a:endParaRPr lang="ru-RU" dirty="0"/>
-          </a:p>
-        </p:txBody>
-      </p:sp>
-      <p:sp>
-        <p:nvSpPr>
-          <p:cNvPr id="57" name="Rectangle 56">
-            <a:extLst>
-              <a:ext uri="{FF2B5EF4-FFF2-40B4-BE49-F238E27FC236}">
-                <a16:creationId xmlns:a16="http://schemas.microsoft.com/office/drawing/2014/main" id="{318E9D62-7BA3-4D5E-8915-0D0E8661E3D7}"/>
-              </a:ext>
-              <a:ext uri="{C183D7F6-B498-43B3-948B-1728B52AA6E4}">
-                <adec:decorative xmlns:adec="http://schemas.microsoft.com/office/drawing/2017/decorative" val="1"/>
-              </a:ext>
-            </a:extLst>
-          </p:cNvPr>
-          <p:cNvSpPr>
-            <a:spLocks noGrp="1" noRot="1" noChangeAspect="1" noMove="1" noResize="1" noEditPoints="1" noAdjustHandles="1" noChangeArrowheads="1" noChangeShapeType="1" noTextEdit="1"/>
-          </p:cNvSpPr>
-          <p:nvPr>
-            <p:extLst>
-              <p:ext uri="{386F3935-93C4-4BCD-93E2-E3B085C9AB24}">
-                <p16:designElem xmlns:p16="http://schemas.microsoft.com/office/powerpoint/2015/main" val="1"/>
-              </p:ext>
-            </p:extLst>
-          </p:nvPr>
-        </p:nvSpPr>
-        <p:spPr>
-          <a:xfrm>
-            <a:off x="10437812" y="0"/>
-            <a:ext cx="685800" cy="1143000"/>
-          </a:xfrm>
-          <a:prstGeom prst="rect">
-            <a:avLst/>
-          </a:prstGeom>
-          <a:solidFill>
-            <a:schemeClr val="accent1"/>
-          </a:solidFill>
-          <a:ln>
-            <a:noFill/>
-          </a:ln>
-        </p:spPr>
-        <p:style>
-          <a:lnRef idx="1">
-            <a:schemeClr val="accent1"/>
-          </a:lnRef>
-          <a:fillRef idx="3">
-            <a:schemeClr val="accent1"/>
-          </a:fillRef>
-          <a:effectRef idx="2">
-            <a:schemeClr val="accent1"/>
-          </a:effectRef>
-          <a:fontRef idx="minor">
-            <a:schemeClr val="lt1"/>
-          </a:fontRef>
-        </p:style>
-        <p:txBody>
-          <a:bodyPr/>
-          <a:lstStyle/>
-          <a:p>
-            <a:endParaRPr lang="en-US"/>
-          </a:p>
-        </p:txBody>
-      </p:sp>
-      <p:pic>
-        <p:nvPicPr>
-          <p:cNvPr id="4" name="Picture 3">
-            <a:extLst>
-              <a:ext uri="{FF2B5EF4-FFF2-40B4-BE49-F238E27FC236}">
-                <a16:creationId xmlns:a16="http://schemas.microsoft.com/office/drawing/2014/main" id="{B011F562-7C5B-B39E-2FF0-681E86D50FE2}"/>
-              </a:ext>
-            </a:extLst>
-          </p:cNvPr>
-          <p:cNvPicPr>
-            <a:picLocks noChangeAspect="1"/>
-          </p:cNvPicPr>
-          <p:nvPr/>
-        </p:nvPicPr>
-        <p:blipFill>
-          <a:blip r:embed="rId5"/>
-          <a:stretch>
-            <a:fillRect/>
-          </a:stretch>
-        </p:blipFill>
-        <p:spPr>
-          <a:xfrm>
-            <a:off x="10440834" y="0"/>
-            <a:ext cx="682228" cy="682228"/>
-          </a:xfrm>
-          <a:prstGeom prst="rect">
-            <a:avLst/>
-          </a:prstGeom>
-        </p:spPr>
-      </p:pic>
-    </p:spTree>
-    <p:extLst>
-      <p:ext uri="{BB962C8B-B14F-4D97-AF65-F5344CB8AC3E}">
-        <p14:creationId xmlns:p14="http://schemas.microsoft.com/office/powerpoint/2010/main" val="510767980"/>
-      </p:ext>
-    </p:extLst>
-  </p:cSld>
-  <p:clrMapOvr>
-    <a:masterClrMapping/>
-  </p:clrMapOvr>
-</p:sld>
-</file>
-
-<file path=ppt/slides/slide4.xml><?xml version="1.0" encoding="utf-8"?>
-<p:sld xmlns:a="http://schemas.openxmlformats.org/drawingml/2006/main" xmlns:r="http://schemas.openxmlformats.org/officeDocument/2006/relationships" xmlns:p="http://schemas.openxmlformats.org/presentationml/2006/main">
-  <p:cSld>
     <p:spTree>
       <p:nvGrpSpPr>
         <p:cNvPr id="1" name="">
           <a:extLst>
             <a:ext uri="{FF2B5EF4-FFF2-40B4-BE49-F238E27FC236}">
-              <a16:creationId xmlns:a16="http://schemas.microsoft.com/office/drawing/2014/main" id="{87548F35-04E4-5807-5C2A-620BEA0DAE47}"/>
+              <a16:creationId xmlns:a16="http://schemas.microsoft.com/office/drawing/2014/main" id="{C8971C09-BB3D-2036-8F1E-C7D0155630A4}"/>
             </a:ext>
           </a:extLst>
         </p:cNvPr>
@@ -33147,7 +33154,7 @@
           <p:cNvPr id="2" name="Title 1">
             <a:extLst>
               <a:ext uri="{FF2B5EF4-FFF2-40B4-BE49-F238E27FC236}">
-                <a16:creationId xmlns:a16="http://schemas.microsoft.com/office/drawing/2014/main" id="{A6AA4448-02F1-CDC2-FAF7-969D8DE4B91A}"/>
+                <a16:creationId xmlns:a16="http://schemas.microsoft.com/office/drawing/2014/main" id="{F7FE5F5E-F83F-80FA-202C-74D9622BCCB0}"/>
               </a:ext>
             </a:extLst>
           </p:cNvPr>
@@ -33170,59 +33177,24 @@
           <a:p>
             <a:r>
               <a:rPr lang="en-US" b="1" dirty="0"/>
-              <a:t>Metamodel in Reference EA Frameworks</a:t>
+              <a:t>Essential EA Meta-Model</a:t>
             </a:r>
-          </a:p>
-        </p:txBody>
-      </p:sp>
-      <p:pic>
-        <p:nvPicPr>
-          <p:cNvPr id="6" name="Content Placeholder 5">
-            <a:extLst>
-              <a:ext uri="{FF2B5EF4-FFF2-40B4-BE49-F238E27FC236}">
-                <a16:creationId xmlns:a16="http://schemas.microsoft.com/office/drawing/2014/main" id="{AD9AC4B2-6317-9F6B-9FC4-C1FFE15BE3B4}"/>
-              </a:ext>
-            </a:extLst>
-          </p:cNvPr>
-          <p:cNvPicPr>
-            <a:picLocks noGrp="1" noChangeAspect="1"/>
-          </p:cNvPicPr>
-          <p:nvPr>
-            <p:ph idx="1"/>
-          </p:nvPr>
-        </p:nvPicPr>
-        <p:blipFill>
-          <a:blip r:embed="rId2"/>
-          <a:stretch>
-            <a:fillRect/>
-          </a:stretch>
-        </p:blipFill>
-        <p:spPr>
-          <a:xfrm>
-            <a:off x="1456647" y="2302822"/>
-            <a:ext cx="3798427" cy="4310913"/>
-          </a:xfrm>
-          <a:prstGeom prst="rect">
-            <a:avLst/>
-          </a:prstGeom>
-          <a:ln>
-            <a:noFill/>
-          </a:ln>
-          <a:effectLst>
-            <a:outerShdw blurRad="292100" dist="139700" dir="2700000" algn="tl" rotWithShape="0">
-              <a:srgbClr val="333333">
-                <a:alpha val="65000"/>
-              </a:srgbClr>
-            </a:outerShdw>
-          </a:effectLst>
-        </p:spPr>
-      </p:pic>
+            <a:br>
+              <a:rPr lang="en-US" b="1" dirty="0"/>
+            </a:br>
+            <a:r>
+              <a:rPr lang="en-US" b="1" dirty="0"/>
+              <a:t>- Business Layer - 19</a:t>
+            </a:r>
+          </a:p>
+        </p:txBody>
+      </p:sp>
       <p:sp>
         <p:nvSpPr>
           <p:cNvPr id="4" name="Title 1">
             <a:extLst>
               <a:ext uri="{FF2B5EF4-FFF2-40B4-BE49-F238E27FC236}">
-                <a16:creationId xmlns:a16="http://schemas.microsoft.com/office/drawing/2014/main" id="{D9EDD144-F22C-74B4-5002-E4C6BD3EE513}"/>
+                <a16:creationId xmlns:a16="http://schemas.microsoft.com/office/drawing/2014/main" id="{9EF09283-022D-B87B-A804-F17CF8AF90A5}"/>
               </a:ext>
             </a:extLst>
           </p:cNvPr>
@@ -33326,6 +33298,510 @@
                   </a:schemeClr>
                 </a:solidFill>
               </a:rPr>
+              <a:t>025</a:t>
+            </a:r>
+            <a:endParaRPr lang="ru-RU" b="1" dirty="0">
+              <a:solidFill>
+                <a:schemeClr val="accent1">
+                  <a:lumMod val="75000"/>
+                </a:schemeClr>
+              </a:solidFill>
+            </a:endParaRPr>
+          </a:p>
+        </p:txBody>
+      </p:sp>
+      <p:pic>
+        <p:nvPicPr>
+          <p:cNvPr id="3" name="Picture 2">
+            <a:extLst>
+              <a:ext uri="{FF2B5EF4-FFF2-40B4-BE49-F238E27FC236}">
+                <a16:creationId xmlns:a16="http://schemas.microsoft.com/office/drawing/2014/main" id="{4860768F-50C7-CDAB-2151-F98AFF07B4E7}"/>
+              </a:ext>
+            </a:extLst>
+          </p:cNvPr>
+          <p:cNvPicPr>
+            <a:picLocks noChangeAspect="1"/>
+          </p:cNvPicPr>
+          <p:nvPr/>
+        </p:nvPicPr>
+        <p:blipFill>
+          <a:blip r:embed="rId2"/>
+          <a:stretch>
+            <a:fillRect/>
+          </a:stretch>
+        </p:blipFill>
+        <p:spPr>
+          <a:xfrm>
+            <a:off x="236841" y="1853248"/>
+            <a:ext cx="8296646" cy="4669795"/>
+          </a:xfrm>
+          <a:prstGeom prst="rect">
+            <a:avLst/>
+          </a:prstGeom>
+          <a:ln>
+            <a:noFill/>
+          </a:ln>
+          <a:effectLst>
+            <a:outerShdw blurRad="292100" dist="139700" dir="2700000" algn="tl" rotWithShape="0">
+              <a:srgbClr val="333333">
+                <a:alpha val="65000"/>
+              </a:srgbClr>
+            </a:outerShdw>
+          </a:effectLst>
+        </p:spPr>
+      </p:pic>
+      <p:sp>
+        <p:nvSpPr>
+          <p:cNvPr id="6" name="Rectangle: Rounded Corners 5">
+            <a:extLst>
+              <a:ext uri="{FF2B5EF4-FFF2-40B4-BE49-F238E27FC236}">
+                <a16:creationId xmlns:a16="http://schemas.microsoft.com/office/drawing/2014/main" id="{2363AF58-5418-446F-474C-344AA971EACE}"/>
+              </a:ext>
+            </a:extLst>
+          </p:cNvPr>
+          <p:cNvSpPr/>
+          <p:nvPr/>
+        </p:nvSpPr>
+        <p:spPr>
+          <a:xfrm>
+            <a:off x="596436" y="3513762"/>
+            <a:ext cx="2033748" cy="1345914"/>
+          </a:xfrm>
+          <a:prstGeom prst="roundRect">
+            <a:avLst>
+              <a:gd name="adj" fmla="val 6916"/>
+            </a:avLst>
+          </a:prstGeom>
+          <a:solidFill>
+            <a:srgbClr val="FFCC66">
+              <a:alpha val="20000"/>
+            </a:srgbClr>
+          </a:solidFill>
+          <a:ln>
+            <a:solidFill>
+              <a:srgbClr val="92D050"/>
+            </a:solidFill>
+          </a:ln>
+        </p:spPr>
+        <p:style>
+          <a:lnRef idx="2">
+            <a:schemeClr val="accent1">
+              <a:shade val="15000"/>
+            </a:schemeClr>
+          </a:lnRef>
+          <a:fillRef idx="1">
+            <a:schemeClr val="accent1"/>
+          </a:fillRef>
+          <a:effectRef idx="0">
+            <a:schemeClr val="accent1"/>
+          </a:effectRef>
+          <a:fontRef idx="minor">
+            <a:schemeClr val="lt1"/>
+          </a:fontRef>
+        </p:style>
+        <p:txBody>
+          <a:bodyPr rtlCol="0" anchor="ctr"/>
+          <a:lstStyle/>
+          <a:p>
+            <a:pPr algn="ctr"/>
+            <a:endParaRPr lang="en-US"/>
+          </a:p>
+        </p:txBody>
+      </p:sp>
+      <p:pic>
+        <p:nvPicPr>
+          <p:cNvPr id="11" name="Picture 10">
+            <a:extLst>
+              <a:ext uri="{FF2B5EF4-FFF2-40B4-BE49-F238E27FC236}">
+                <a16:creationId xmlns:a16="http://schemas.microsoft.com/office/drawing/2014/main" id="{B3A6C4E6-741A-756F-A356-2C2771630F7F}"/>
+              </a:ext>
+            </a:extLst>
+          </p:cNvPr>
+          <p:cNvPicPr>
+            <a:picLocks noChangeAspect="1"/>
+          </p:cNvPicPr>
+          <p:nvPr/>
+        </p:nvPicPr>
+        <p:blipFill>
+          <a:blip r:embed="rId3"/>
+          <a:stretch>
+            <a:fillRect/>
+          </a:stretch>
+        </p:blipFill>
+        <p:spPr>
+          <a:xfrm>
+            <a:off x="157000" y="1094226"/>
+            <a:ext cx="362976" cy="362976"/>
+          </a:xfrm>
+          <a:prstGeom prst="rect">
+            <a:avLst/>
+          </a:prstGeom>
+          <a:ln>
+            <a:noFill/>
+          </a:ln>
+          <a:effectLst>
+            <a:outerShdw blurRad="292100" dist="139700" dir="2700000" algn="tl" rotWithShape="0">
+              <a:srgbClr val="333333">
+                <a:alpha val="65000"/>
+              </a:srgbClr>
+            </a:outerShdw>
+          </a:effectLst>
+        </p:spPr>
+      </p:pic>
+      <p:pic>
+        <p:nvPicPr>
+          <p:cNvPr id="12" name="Picture 11">
+            <a:extLst>
+              <a:ext uri="{FF2B5EF4-FFF2-40B4-BE49-F238E27FC236}">
+                <a16:creationId xmlns:a16="http://schemas.microsoft.com/office/drawing/2014/main" id="{539EBA4A-6121-C5D1-B6A2-0158BEC83BD9}"/>
+              </a:ext>
+            </a:extLst>
+          </p:cNvPr>
+          <p:cNvPicPr>
+            <a:picLocks noChangeAspect="1"/>
+          </p:cNvPicPr>
+          <p:nvPr/>
+        </p:nvPicPr>
+        <p:blipFill>
+          <a:blip r:embed="rId4"/>
+          <a:stretch>
+            <a:fillRect/>
+          </a:stretch>
+        </p:blipFill>
+        <p:spPr>
+          <a:xfrm>
+            <a:off x="611241" y="1094226"/>
+            <a:ext cx="362976" cy="362976"/>
+          </a:xfrm>
+          <a:prstGeom prst="rect">
+            <a:avLst/>
+          </a:prstGeom>
+          <a:ln>
+            <a:noFill/>
+          </a:ln>
+          <a:effectLst>
+            <a:outerShdw blurRad="292100" dist="139700" dir="2700000" algn="tl" rotWithShape="0">
+              <a:srgbClr val="333333">
+                <a:alpha val="65000"/>
+              </a:srgbClr>
+            </a:outerShdw>
+          </a:effectLst>
+        </p:spPr>
+      </p:pic>
+      <p:pic>
+        <p:nvPicPr>
+          <p:cNvPr id="13" name="Picture 12">
+            <a:extLst>
+              <a:ext uri="{FF2B5EF4-FFF2-40B4-BE49-F238E27FC236}">
+                <a16:creationId xmlns:a16="http://schemas.microsoft.com/office/drawing/2014/main" id="{6E8C93DD-530D-5A7E-3903-A9C635B12F09}"/>
+              </a:ext>
+            </a:extLst>
+          </p:cNvPr>
+          <p:cNvPicPr>
+            <a:picLocks noChangeAspect="1"/>
+          </p:cNvPicPr>
+          <p:nvPr/>
+        </p:nvPicPr>
+        <p:blipFill>
+          <a:blip r:embed="rId5"/>
+          <a:stretch>
+            <a:fillRect/>
+          </a:stretch>
+        </p:blipFill>
+        <p:spPr>
+          <a:xfrm>
+            <a:off x="1065482" y="1094226"/>
+            <a:ext cx="371111" cy="362976"/>
+          </a:xfrm>
+          <a:prstGeom prst="rect">
+            <a:avLst/>
+          </a:prstGeom>
+          <a:ln>
+            <a:noFill/>
+          </a:ln>
+          <a:effectLst>
+            <a:outerShdw blurRad="292100" dist="139700" dir="2700000" algn="tl" rotWithShape="0">
+              <a:srgbClr val="333333">
+                <a:alpha val="65000"/>
+              </a:srgbClr>
+            </a:outerShdw>
+          </a:effectLst>
+        </p:spPr>
+      </p:pic>
+      <p:pic>
+        <p:nvPicPr>
+          <p:cNvPr id="7" name="Picture 6">
+            <a:extLst>
+              <a:ext uri="{FF2B5EF4-FFF2-40B4-BE49-F238E27FC236}">
+                <a16:creationId xmlns:a16="http://schemas.microsoft.com/office/drawing/2014/main" id="{AFE6658F-C57C-83FD-35B8-AF3EF8D17CEE}"/>
+              </a:ext>
+            </a:extLst>
+          </p:cNvPr>
+          <p:cNvPicPr>
+            <a:picLocks noChangeAspect="1"/>
+          </p:cNvPicPr>
+          <p:nvPr/>
+        </p:nvPicPr>
+        <p:blipFill>
+          <a:blip r:embed="rId6"/>
+          <a:stretch>
+            <a:fillRect/>
+          </a:stretch>
+        </p:blipFill>
+        <p:spPr>
+          <a:xfrm>
+            <a:off x="4726462" y="3253778"/>
+            <a:ext cx="6961548" cy="2119606"/>
+          </a:xfrm>
+          <a:prstGeom prst="roundRect">
+            <a:avLst>
+              <a:gd name="adj" fmla="val 16667"/>
+            </a:avLst>
+          </a:prstGeom>
+          <a:ln>
+            <a:noFill/>
+          </a:ln>
+          <a:effectLst>
+            <a:outerShdw blurRad="152400" dist="12000" dir="900000" sy="98000" kx="110000" ky="200000" algn="tl" rotWithShape="0">
+              <a:srgbClr val="000000">
+                <a:alpha val="30000"/>
+              </a:srgbClr>
+            </a:outerShdw>
+          </a:effectLst>
+          <a:scene3d>
+            <a:camera prst="perspectiveRelaxed">
+              <a:rot lat="19800000" lon="1200000" rev="20820000"/>
+            </a:camera>
+            <a:lightRig rig="threePt" dir="t"/>
+          </a:scene3d>
+          <a:sp3d contourW="6350" prstMaterial="matte">
+            <a:bevelT w="101600" h="101600"/>
+            <a:contourClr>
+              <a:srgbClr val="969696"/>
+            </a:contourClr>
+          </a:sp3d>
+        </p:spPr>
+      </p:pic>
+    </p:spTree>
+    <p:extLst>
+      <p:ext uri="{BB962C8B-B14F-4D97-AF65-F5344CB8AC3E}">
+        <p14:creationId xmlns:p14="http://schemas.microsoft.com/office/powerpoint/2010/main" val="2431684080"/>
+      </p:ext>
+    </p:extLst>
+  </p:cSld>
+  <p:clrMapOvr>
+    <a:masterClrMapping/>
+  </p:clrMapOvr>
+</p:sld>
+</file>
+
+<file path=ppt/slides/slide4.xml><?xml version="1.0" encoding="utf-8"?>
+<p:sld xmlns:a="http://schemas.openxmlformats.org/drawingml/2006/main" xmlns:r="http://schemas.openxmlformats.org/officeDocument/2006/relationships" xmlns:p="http://schemas.openxmlformats.org/presentationml/2006/main">
+  <p:cSld>
+    <p:spTree>
+      <p:nvGrpSpPr>
+        <p:cNvPr id="1" name="">
+          <a:extLst>
+            <a:ext uri="{FF2B5EF4-FFF2-40B4-BE49-F238E27FC236}">
+              <a16:creationId xmlns:a16="http://schemas.microsoft.com/office/drawing/2014/main" id="{87548F35-04E4-5807-5C2A-620BEA0DAE47}"/>
+            </a:ext>
+          </a:extLst>
+        </p:cNvPr>
+        <p:cNvGrpSpPr/>
+        <p:nvPr/>
+      </p:nvGrpSpPr>
+      <p:grpSpPr>
+        <a:xfrm>
+          <a:off x="0" y="0"/>
+          <a:ext cx="0" cy="0"/>
+          <a:chOff x="0" y="0"/>
+          <a:chExt cx="0" cy="0"/>
+        </a:xfrm>
+      </p:grpSpPr>
+      <p:sp>
+        <p:nvSpPr>
+          <p:cNvPr id="2" name="Title 1">
+            <a:extLst>
+              <a:ext uri="{FF2B5EF4-FFF2-40B4-BE49-F238E27FC236}">
+                <a16:creationId xmlns:a16="http://schemas.microsoft.com/office/drawing/2014/main" id="{A6AA4448-02F1-CDC2-FAF7-969D8DE4B91A}"/>
+              </a:ext>
+            </a:extLst>
+          </p:cNvPr>
+          <p:cNvSpPr>
+            <a:spLocks noGrp="1"/>
+          </p:cNvSpPr>
+          <p:nvPr>
+            <p:ph type="title"/>
+          </p:nvPr>
+        </p:nvSpPr>
+        <p:spPr>
+          <a:xfrm>
+            <a:off x="1754188" y="452718"/>
+            <a:ext cx="8296646" cy="1400530"/>
+          </a:xfrm>
+        </p:spPr>
+        <p:txBody>
+          <a:bodyPr/>
+          <a:lstStyle/>
+          <a:p>
+            <a:r>
+              <a:rPr lang="en-US" b="1" dirty="0"/>
+              <a:t>Metamodel in Reference EA Frameworks</a:t>
+            </a:r>
+          </a:p>
+        </p:txBody>
+      </p:sp>
+      <p:pic>
+        <p:nvPicPr>
+          <p:cNvPr id="6" name="Content Placeholder 5">
+            <a:extLst>
+              <a:ext uri="{FF2B5EF4-FFF2-40B4-BE49-F238E27FC236}">
+                <a16:creationId xmlns:a16="http://schemas.microsoft.com/office/drawing/2014/main" id="{AD9AC4B2-6317-9F6B-9FC4-C1FFE15BE3B4}"/>
+              </a:ext>
+            </a:extLst>
+          </p:cNvPr>
+          <p:cNvPicPr>
+            <a:picLocks noGrp="1" noChangeAspect="1"/>
+          </p:cNvPicPr>
+          <p:nvPr>
+            <p:ph idx="1"/>
+          </p:nvPr>
+        </p:nvPicPr>
+        <p:blipFill>
+          <a:blip r:embed="rId2"/>
+          <a:stretch>
+            <a:fillRect/>
+          </a:stretch>
+        </p:blipFill>
+        <p:spPr>
+          <a:xfrm>
+            <a:off x="1456647" y="2302822"/>
+            <a:ext cx="3798427" cy="4310913"/>
+          </a:xfrm>
+          <a:prstGeom prst="rect">
+            <a:avLst/>
+          </a:prstGeom>
+          <a:ln>
+            <a:noFill/>
+          </a:ln>
+          <a:effectLst>
+            <a:outerShdw blurRad="292100" dist="139700" dir="2700000" algn="tl" rotWithShape="0">
+              <a:srgbClr val="333333">
+                <a:alpha val="65000"/>
+              </a:srgbClr>
+            </a:outerShdw>
+          </a:effectLst>
+        </p:spPr>
+      </p:pic>
+      <p:sp>
+        <p:nvSpPr>
+          <p:cNvPr id="4" name="Title 1">
+            <a:extLst>
+              <a:ext uri="{FF2B5EF4-FFF2-40B4-BE49-F238E27FC236}">
+                <a16:creationId xmlns:a16="http://schemas.microsoft.com/office/drawing/2014/main" id="{D9EDD144-F22C-74B4-5002-E4C6BD3EE513}"/>
+              </a:ext>
+            </a:extLst>
+          </p:cNvPr>
+          <p:cNvSpPr txBox="1">
+            <a:spLocks/>
+          </p:cNvSpPr>
+          <p:nvPr/>
+        </p:nvSpPr>
+        <p:spPr>
+          <a:xfrm>
+            <a:off x="0" y="3143"/>
+            <a:ext cx="1754188" cy="1058013"/>
+          </a:xfrm>
+          <a:prstGeom prst="rect">
+            <a:avLst/>
+          </a:prstGeom>
+        </p:spPr>
+        <p:txBody>
+          <a:bodyPr vert="horz" lIns="91440" tIns="45720" rIns="91440" bIns="45720" rtlCol="0" anchor="ctr">
+            <a:noAutofit/>
+          </a:bodyPr>
+          <a:lstStyle>
+            <a:lvl1pPr algn="l" defTabSz="457200" rtl="0" eaLnBrk="1" latinLnBrk="0" hangingPunct="1">
+              <a:spcBef>
+                <a:spcPct val="0"/>
+              </a:spcBef>
+              <a:buNone/>
+              <a:defRPr sz="7200" b="0" i="0" kern="1200">
+                <a:solidFill>
+                  <a:schemeClr val="tx2"/>
+                </a:solidFill>
+                <a:latin typeface="+mj-lt"/>
+                <a:ea typeface="+mj-ea"/>
+                <a:cs typeface="+mj-cs"/>
+              </a:defRPr>
+            </a:lvl1pPr>
+            <a:lvl2pPr eaLnBrk="1" hangingPunct="1">
+              <a:defRPr>
+                <a:solidFill>
+                  <a:schemeClr val="tx2"/>
+                </a:solidFill>
+              </a:defRPr>
+            </a:lvl2pPr>
+            <a:lvl3pPr eaLnBrk="1" hangingPunct="1">
+              <a:defRPr>
+                <a:solidFill>
+                  <a:schemeClr val="tx2"/>
+                </a:solidFill>
+              </a:defRPr>
+            </a:lvl3pPr>
+            <a:lvl4pPr eaLnBrk="1" hangingPunct="1">
+              <a:defRPr>
+                <a:solidFill>
+                  <a:schemeClr val="tx2"/>
+                </a:solidFill>
+              </a:defRPr>
+            </a:lvl4pPr>
+            <a:lvl5pPr eaLnBrk="1" hangingPunct="1">
+              <a:defRPr>
+                <a:solidFill>
+                  <a:schemeClr val="tx2"/>
+                </a:solidFill>
+              </a:defRPr>
+            </a:lvl5pPr>
+            <a:lvl6pPr eaLnBrk="1" hangingPunct="1">
+              <a:defRPr>
+                <a:solidFill>
+                  <a:schemeClr val="tx2"/>
+                </a:solidFill>
+              </a:defRPr>
+            </a:lvl6pPr>
+            <a:lvl7pPr eaLnBrk="1" hangingPunct="1">
+              <a:defRPr>
+                <a:solidFill>
+                  <a:schemeClr val="tx2"/>
+                </a:solidFill>
+              </a:defRPr>
+            </a:lvl7pPr>
+            <a:lvl8pPr eaLnBrk="1" hangingPunct="1">
+              <a:defRPr>
+                <a:solidFill>
+                  <a:schemeClr val="tx2"/>
+                </a:solidFill>
+              </a:defRPr>
+            </a:lvl8pPr>
+            <a:lvl9pPr eaLnBrk="1" hangingPunct="1">
+              <a:defRPr>
+                <a:solidFill>
+                  <a:schemeClr val="tx2"/>
+                </a:solidFill>
+              </a:defRPr>
+            </a:lvl9pPr>
+          </a:lstStyle>
+          <a:p>
+            <a:pPr algn="ctr"/>
+            <a:r>
+              <a:rPr lang="en-US" b="1" dirty="0">
+                <a:solidFill>
+                  <a:schemeClr val="accent1">
+                    <a:lumMod val="75000"/>
+                  </a:schemeClr>
+                </a:solidFill>
+              </a:rPr>
               <a:t>004</a:t>
             </a:r>
             <a:endParaRPr lang="ru-RU" b="1" dirty="0">
@@ -33601,6 +34077,3701 @@
     <p:extLst>
       <p:ext uri="{BB962C8B-B14F-4D97-AF65-F5344CB8AC3E}">
         <p14:creationId xmlns:p14="http://schemas.microsoft.com/office/powerpoint/2010/main" val="1139562465"/>
+      </p:ext>
+    </p:extLst>
+  </p:cSld>
+  <p:clrMapOvr>
+    <a:masterClrMapping/>
+  </p:clrMapOvr>
+</p:sld>
+</file>
+
+<file path=ppt/slides/slide40.xml><?xml version="1.0" encoding="utf-8"?>
+<p:sld xmlns:a="http://schemas.openxmlformats.org/drawingml/2006/main" xmlns:r="http://schemas.openxmlformats.org/officeDocument/2006/relationships" xmlns:p="http://schemas.openxmlformats.org/presentationml/2006/main">
+  <p:cSld>
+    <p:spTree>
+      <p:nvGrpSpPr>
+        <p:cNvPr id="1" name="">
+          <a:extLst>
+            <a:ext uri="{FF2B5EF4-FFF2-40B4-BE49-F238E27FC236}">
+              <a16:creationId xmlns:a16="http://schemas.microsoft.com/office/drawing/2014/main" id="{621995F0-C5FC-B08C-7B4C-57407698F248}"/>
+            </a:ext>
+          </a:extLst>
+        </p:cNvPr>
+        <p:cNvGrpSpPr/>
+        <p:nvPr/>
+      </p:nvGrpSpPr>
+      <p:grpSpPr>
+        <a:xfrm>
+          <a:off x="0" y="0"/>
+          <a:ext cx="0" cy="0"/>
+          <a:chOff x="0" y="0"/>
+          <a:chExt cx="0" cy="0"/>
+        </a:xfrm>
+      </p:grpSpPr>
+      <p:pic>
+        <p:nvPicPr>
+          <p:cNvPr id="3" name="Picture 2">
+            <a:extLst>
+              <a:ext uri="{FF2B5EF4-FFF2-40B4-BE49-F238E27FC236}">
+                <a16:creationId xmlns:a16="http://schemas.microsoft.com/office/drawing/2014/main" id="{66DBF0EC-DCE4-BE21-A9E1-F2D7D7ADF8C7}"/>
+              </a:ext>
+            </a:extLst>
+          </p:cNvPr>
+          <p:cNvPicPr>
+            <a:picLocks noChangeAspect="1"/>
+          </p:cNvPicPr>
+          <p:nvPr/>
+        </p:nvPicPr>
+        <p:blipFill>
+          <a:blip r:embed="rId2"/>
+          <a:stretch>
+            <a:fillRect/>
+          </a:stretch>
+        </p:blipFill>
+        <p:spPr>
+          <a:xfrm>
+            <a:off x="2592309" y="0"/>
+            <a:ext cx="7007382" cy="6858000"/>
+          </a:xfrm>
+          <a:prstGeom prst="rect">
+            <a:avLst/>
+          </a:prstGeom>
+        </p:spPr>
+      </p:pic>
+      <p:sp>
+        <p:nvSpPr>
+          <p:cNvPr id="5" name="Rectangle 4">
+            <a:extLst>
+              <a:ext uri="{FF2B5EF4-FFF2-40B4-BE49-F238E27FC236}">
+                <a16:creationId xmlns:a16="http://schemas.microsoft.com/office/drawing/2014/main" id="{C55E4CF5-F904-1F8F-D86D-85DA5774E969}"/>
+              </a:ext>
+            </a:extLst>
+          </p:cNvPr>
+          <p:cNvSpPr/>
+          <p:nvPr/>
+        </p:nvSpPr>
+        <p:spPr>
+          <a:xfrm>
+            <a:off x="3619568" y="0"/>
+            <a:ext cx="233295" cy="181579"/>
+          </a:xfrm>
+          <a:prstGeom prst="rect">
+            <a:avLst/>
+          </a:prstGeom>
+          <a:solidFill>
+            <a:srgbClr val="ACD433">
+              <a:alpha val="50196"/>
+            </a:srgbClr>
+          </a:solidFill>
+        </p:spPr>
+        <p:style>
+          <a:lnRef idx="2">
+            <a:schemeClr val="accent1">
+              <a:shade val="15000"/>
+            </a:schemeClr>
+          </a:lnRef>
+          <a:fillRef idx="1">
+            <a:schemeClr val="accent1"/>
+          </a:fillRef>
+          <a:effectRef idx="0">
+            <a:schemeClr val="accent1"/>
+          </a:effectRef>
+          <a:fontRef idx="minor">
+            <a:schemeClr val="lt1"/>
+          </a:fontRef>
+        </p:style>
+        <p:txBody>
+          <a:bodyPr rtlCol="0" anchor="ctr"/>
+          <a:lstStyle/>
+          <a:p>
+            <a:pPr algn="ctr"/>
+            <a:endParaRPr lang="en-US"/>
+          </a:p>
+        </p:txBody>
+      </p:sp>
+      <p:sp>
+        <p:nvSpPr>
+          <p:cNvPr id="6" name="Rectangle 5">
+            <a:extLst>
+              <a:ext uri="{FF2B5EF4-FFF2-40B4-BE49-F238E27FC236}">
+                <a16:creationId xmlns:a16="http://schemas.microsoft.com/office/drawing/2014/main" id="{307720CB-DEAA-BE99-E5F1-12FD17C7300C}"/>
+              </a:ext>
+            </a:extLst>
+          </p:cNvPr>
+          <p:cNvSpPr/>
+          <p:nvPr/>
+        </p:nvSpPr>
+        <p:spPr>
+          <a:xfrm>
+            <a:off x="6757680" y="424700"/>
+            <a:ext cx="1028938" cy="436792"/>
+          </a:xfrm>
+          <a:prstGeom prst="rect">
+            <a:avLst/>
+          </a:prstGeom>
+          <a:solidFill>
+            <a:schemeClr val="bg2">
+              <a:lumMod val="20000"/>
+              <a:lumOff val="80000"/>
+              <a:alpha val="50196"/>
+            </a:schemeClr>
+          </a:solidFill>
+        </p:spPr>
+        <p:style>
+          <a:lnRef idx="2">
+            <a:schemeClr val="accent1">
+              <a:shade val="15000"/>
+            </a:schemeClr>
+          </a:lnRef>
+          <a:fillRef idx="1">
+            <a:schemeClr val="accent1"/>
+          </a:fillRef>
+          <a:effectRef idx="0">
+            <a:schemeClr val="accent1"/>
+          </a:effectRef>
+          <a:fontRef idx="minor">
+            <a:schemeClr val="lt1"/>
+          </a:fontRef>
+        </p:style>
+        <p:txBody>
+          <a:bodyPr rtlCol="0" anchor="ctr"/>
+          <a:lstStyle/>
+          <a:p>
+            <a:pPr algn="ctr"/>
+            <a:endParaRPr lang="en-US"/>
+          </a:p>
+        </p:txBody>
+      </p:sp>
+      <p:sp>
+        <p:nvSpPr>
+          <p:cNvPr id="8" name="Rectangle 7">
+            <a:extLst>
+              <a:ext uri="{FF2B5EF4-FFF2-40B4-BE49-F238E27FC236}">
+                <a16:creationId xmlns:a16="http://schemas.microsoft.com/office/drawing/2014/main" id="{0EFEB83E-15C0-283F-D63E-43563B1555C5}"/>
+              </a:ext>
+            </a:extLst>
+          </p:cNvPr>
+          <p:cNvSpPr/>
+          <p:nvPr/>
+        </p:nvSpPr>
+        <p:spPr>
+          <a:xfrm>
+            <a:off x="5065260" y="733425"/>
+            <a:ext cx="318398" cy="225099"/>
+          </a:xfrm>
+          <a:prstGeom prst="rect">
+            <a:avLst/>
+          </a:prstGeom>
+          <a:solidFill>
+            <a:srgbClr val="ACD433">
+              <a:alpha val="50196"/>
+            </a:srgbClr>
+          </a:solidFill>
+        </p:spPr>
+        <p:style>
+          <a:lnRef idx="2">
+            <a:schemeClr val="accent1">
+              <a:shade val="15000"/>
+            </a:schemeClr>
+          </a:lnRef>
+          <a:fillRef idx="1">
+            <a:schemeClr val="accent1"/>
+          </a:fillRef>
+          <a:effectRef idx="0">
+            <a:schemeClr val="accent1"/>
+          </a:effectRef>
+          <a:fontRef idx="minor">
+            <a:schemeClr val="lt1"/>
+          </a:fontRef>
+        </p:style>
+        <p:txBody>
+          <a:bodyPr rtlCol="0" anchor="ctr"/>
+          <a:lstStyle/>
+          <a:p>
+            <a:pPr algn="ctr"/>
+            <a:endParaRPr lang="en-US"/>
+          </a:p>
+        </p:txBody>
+      </p:sp>
+      <p:sp>
+        <p:nvSpPr>
+          <p:cNvPr id="15" name="Rectangle 14">
+            <a:extLst>
+              <a:ext uri="{FF2B5EF4-FFF2-40B4-BE49-F238E27FC236}">
+                <a16:creationId xmlns:a16="http://schemas.microsoft.com/office/drawing/2014/main" id="{C3D3BF14-CC01-4664-B0B8-16CC08145AF6}"/>
+              </a:ext>
+            </a:extLst>
+          </p:cNvPr>
+          <p:cNvSpPr/>
+          <p:nvPr/>
+        </p:nvSpPr>
+        <p:spPr>
+          <a:xfrm>
+            <a:off x="3788357" y="1447841"/>
+            <a:ext cx="233295" cy="181579"/>
+          </a:xfrm>
+          <a:prstGeom prst="rect">
+            <a:avLst/>
+          </a:prstGeom>
+          <a:solidFill>
+            <a:srgbClr val="ACD433">
+              <a:alpha val="50196"/>
+            </a:srgbClr>
+          </a:solidFill>
+        </p:spPr>
+        <p:style>
+          <a:lnRef idx="2">
+            <a:schemeClr val="accent1">
+              <a:shade val="15000"/>
+            </a:schemeClr>
+          </a:lnRef>
+          <a:fillRef idx="1">
+            <a:schemeClr val="accent1"/>
+          </a:fillRef>
+          <a:effectRef idx="0">
+            <a:schemeClr val="accent1"/>
+          </a:effectRef>
+          <a:fontRef idx="minor">
+            <a:schemeClr val="lt1"/>
+          </a:fontRef>
+        </p:style>
+        <p:txBody>
+          <a:bodyPr rtlCol="0" anchor="ctr"/>
+          <a:lstStyle/>
+          <a:p>
+            <a:pPr algn="ctr"/>
+            <a:endParaRPr lang="en-US"/>
+          </a:p>
+        </p:txBody>
+      </p:sp>
+      <p:sp>
+        <p:nvSpPr>
+          <p:cNvPr id="23" name="Rectangle 22">
+            <a:extLst>
+              <a:ext uri="{FF2B5EF4-FFF2-40B4-BE49-F238E27FC236}">
+                <a16:creationId xmlns:a16="http://schemas.microsoft.com/office/drawing/2014/main" id="{A1C817A6-6E60-6E95-8822-5221DD10503D}"/>
+              </a:ext>
+            </a:extLst>
+          </p:cNvPr>
+          <p:cNvSpPr/>
+          <p:nvPr/>
+        </p:nvSpPr>
+        <p:spPr>
+          <a:xfrm>
+            <a:off x="6285303" y="1568449"/>
+            <a:ext cx="1278993" cy="252208"/>
+          </a:xfrm>
+          <a:prstGeom prst="rect">
+            <a:avLst/>
+          </a:prstGeom>
+          <a:solidFill>
+            <a:schemeClr val="bg2">
+              <a:lumMod val="20000"/>
+              <a:lumOff val="80000"/>
+              <a:alpha val="50196"/>
+            </a:schemeClr>
+          </a:solidFill>
+        </p:spPr>
+        <p:style>
+          <a:lnRef idx="2">
+            <a:schemeClr val="accent1">
+              <a:shade val="15000"/>
+            </a:schemeClr>
+          </a:lnRef>
+          <a:fillRef idx="1">
+            <a:schemeClr val="accent1"/>
+          </a:fillRef>
+          <a:effectRef idx="0">
+            <a:schemeClr val="accent1"/>
+          </a:effectRef>
+          <a:fontRef idx="minor">
+            <a:schemeClr val="lt1"/>
+          </a:fontRef>
+        </p:style>
+        <p:txBody>
+          <a:bodyPr rtlCol="0" anchor="ctr"/>
+          <a:lstStyle/>
+          <a:p>
+            <a:pPr algn="ctr"/>
+            <a:endParaRPr lang="en-US"/>
+          </a:p>
+        </p:txBody>
+      </p:sp>
+      <p:sp>
+        <p:nvSpPr>
+          <p:cNvPr id="20" name="Rectangle 19">
+            <a:extLst>
+              <a:ext uri="{FF2B5EF4-FFF2-40B4-BE49-F238E27FC236}">
+                <a16:creationId xmlns:a16="http://schemas.microsoft.com/office/drawing/2014/main" id="{FEE6219E-908C-6A7F-3959-46492B3B3EF1}"/>
+              </a:ext>
+            </a:extLst>
+          </p:cNvPr>
+          <p:cNvSpPr/>
+          <p:nvPr/>
+        </p:nvSpPr>
+        <p:spPr>
+          <a:xfrm>
+            <a:off x="6191487" y="2160350"/>
+            <a:ext cx="312055" cy="181579"/>
+          </a:xfrm>
+          <a:prstGeom prst="rect">
+            <a:avLst/>
+          </a:prstGeom>
+          <a:solidFill>
+            <a:srgbClr val="ACD433">
+              <a:alpha val="50196"/>
+            </a:srgbClr>
+          </a:solidFill>
+        </p:spPr>
+        <p:style>
+          <a:lnRef idx="2">
+            <a:schemeClr val="accent1">
+              <a:shade val="15000"/>
+            </a:schemeClr>
+          </a:lnRef>
+          <a:fillRef idx="1">
+            <a:schemeClr val="accent1"/>
+          </a:fillRef>
+          <a:effectRef idx="0">
+            <a:schemeClr val="accent1"/>
+          </a:effectRef>
+          <a:fontRef idx="minor">
+            <a:schemeClr val="lt1"/>
+          </a:fontRef>
+        </p:style>
+        <p:txBody>
+          <a:bodyPr rtlCol="0" anchor="ctr"/>
+          <a:lstStyle/>
+          <a:p>
+            <a:pPr algn="ctr"/>
+            <a:endParaRPr lang="en-US"/>
+          </a:p>
+        </p:txBody>
+      </p:sp>
+      <p:sp>
+        <p:nvSpPr>
+          <p:cNvPr id="35" name="Rectangle 34">
+            <a:extLst>
+              <a:ext uri="{FF2B5EF4-FFF2-40B4-BE49-F238E27FC236}">
+                <a16:creationId xmlns:a16="http://schemas.microsoft.com/office/drawing/2014/main" id="{AEBE4F9A-5B1C-C38E-93C8-75F45C7FC5A2}"/>
+              </a:ext>
+            </a:extLst>
+          </p:cNvPr>
+          <p:cNvSpPr/>
+          <p:nvPr/>
+        </p:nvSpPr>
+        <p:spPr>
+          <a:xfrm>
+            <a:off x="7187151" y="3322342"/>
+            <a:ext cx="346323" cy="252208"/>
+          </a:xfrm>
+          <a:prstGeom prst="rect">
+            <a:avLst/>
+          </a:prstGeom>
+          <a:solidFill>
+            <a:srgbClr val="ACD433">
+              <a:alpha val="50196"/>
+            </a:srgbClr>
+          </a:solidFill>
+        </p:spPr>
+        <p:style>
+          <a:lnRef idx="2">
+            <a:schemeClr val="accent1">
+              <a:shade val="15000"/>
+            </a:schemeClr>
+          </a:lnRef>
+          <a:fillRef idx="1">
+            <a:schemeClr val="accent1"/>
+          </a:fillRef>
+          <a:effectRef idx="0">
+            <a:schemeClr val="accent1"/>
+          </a:effectRef>
+          <a:fontRef idx="minor">
+            <a:schemeClr val="lt1"/>
+          </a:fontRef>
+        </p:style>
+        <p:txBody>
+          <a:bodyPr rtlCol="0" anchor="ctr"/>
+          <a:lstStyle/>
+          <a:p>
+            <a:pPr algn="ctr"/>
+            <a:endParaRPr lang="en-US"/>
+          </a:p>
+        </p:txBody>
+      </p:sp>
+      <p:sp>
+        <p:nvSpPr>
+          <p:cNvPr id="36" name="Rectangle 35">
+            <a:extLst>
+              <a:ext uri="{FF2B5EF4-FFF2-40B4-BE49-F238E27FC236}">
+                <a16:creationId xmlns:a16="http://schemas.microsoft.com/office/drawing/2014/main" id="{7EC3BA8D-1DC4-8AD3-603D-1D143E81962A}"/>
+              </a:ext>
+            </a:extLst>
+          </p:cNvPr>
+          <p:cNvSpPr/>
+          <p:nvPr/>
+        </p:nvSpPr>
+        <p:spPr>
+          <a:xfrm>
+            <a:off x="7459492" y="2574289"/>
+            <a:ext cx="1028938" cy="262192"/>
+          </a:xfrm>
+          <a:prstGeom prst="rect">
+            <a:avLst/>
+          </a:prstGeom>
+          <a:solidFill>
+            <a:schemeClr val="bg2">
+              <a:lumMod val="20000"/>
+              <a:lumOff val="80000"/>
+              <a:alpha val="50196"/>
+            </a:schemeClr>
+          </a:solidFill>
+        </p:spPr>
+        <p:style>
+          <a:lnRef idx="2">
+            <a:schemeClr val="accent1">
+              <a:shade val="15000"/>
+            </a:schemeClr>
+          </a:lnRef>
+          <a:fillRef idx="1">
+            <a:schemeClr val="accent1"/>
+          </a:fillRef>
+          <a:effectRef idx="0">
+            <a:schemeClr val="accent1"/>
+          </a:effectRef>
+          <a:fontRef idx="minor">
+            <a:schemeClr val="lt1"/>
+          </a:fontRef>
+        </p:style>
+        <p:txBody>
+          <a:bodyPr rtlCol="0" anchor="ctr"/>
+          <a:lstStyle/>
+          <a:p>
+            <a:pPr algn="ctr"/>
+            <a:endParaRPr lang="en-US"/>
+          </a:p>
+        </p:txBody>
+      </p:sp>
+      <p:sp>
+        <p:nvSpPr>
+          <p:cNvPr id="37" name="Rectangle 36">
+            <a:extLst>
+              <a:ext uri="{FF2B5EF4-FFF2-40B4-BE49-F238E27FC236}">
+                <a16:creationId xmlns:a16="http://schemas.microsoft.com/office/drawing/2014/main" id="{630004A8-B646-61AC-C217-A9A5F6A543DA}"/>
+              </a:ext>
+            </a:extLst>
+          </p:cNvPr>
+          <p:cNvSpPr/>
+          <p:nvPr/>
+        </p:nvSpPr>
+        <p:spPr>
+          <a:xfrm>
+            <a:off x="7742821" y="5340598"/>
+            <a:ext cx="1205970" cy="436792"/>
+          </a:xfrm>
+          <a:prstGeom prst="rect">
+            <a:avLst/>
+          </a:prstGeom>
+          <a:solidFill>
+            <a:schemeClr val="bg2">
+              <a:lumMod val="20000"/>
+              <a:lumOff val="80000"/>
+              <a:alpha val="50196"/>
+            </a:schemeClr>
+          </a:solidFill>
+        </p:spPr>
+        <p:style>
+          <a:lnRef idx="2">
+            <a:schemeClr val="accent1">
+              <a:shade val="15000"/>
+            </a:schemeClr>
+          </a:lnRef>
+          <a:fillRef idx="1">
+            <a:schemeClr val="accent1"/>
+          </a:fillRef>
+          <a:effectRef idx="0">
+            <a:schemeClr val="accent1"/>
+          </a:effectRef>
+          <a:fontRef idx="minor">
+            <a:schemeClr val="lt1"/>
+          </a:fontRef>
+        </p:style>
+        <p:txBody>
+          <a:bodyPr rtlCol="0" anchor="ctr"/>
+          <a:lstStyle/>
+          <a:p>
+            <a:pPr algn="ctr"/>
+            <a:endParaRPr lang="en-US"/>
+          </a:p>
+        </p:txBody>
+      </p:sp>
+      <p:sp>
+        <p:nvSpPr>
+          <p:cNvPr id="38" name="Rectangle 37">
+            <a:extLst>
+              <a:ext uri="{FF2B5EF4-FFF2-40B4-BE49-F238E27FC236}">
+                <a16:creationId xmlns:a16="http://schemas.microsoft.com/office/drawing/2014/main" id="{25A58633-1939-419E-D55C-6F0DBE42F041}"/>
+              </a:ext>
+            </a:extLst>
+          </p:cNvPr>
+          <p:cNvSpPr/>
+          <p:nvPr/>
+        </p:nvSpPr>
+        <p:spPr>
+          <a:xfrm>
+            <a:off x="6425321" y="3740812"/>
+            <a:ext cx="1205970" cy="436792"/>
+          </a:xfrm>
+          <a:prstGeom prst="rect">
+            <a:avLst/>
+          </a:prstGeom>
+          <a:solidFill>
+            <a:schemeClr val="bg2">
+              <a:lumMod val="20000"/>
+              <a:lumOff val="80000"/>
+              <a:alpha val="50196"/>
+            </a:schemeClr>
+          </a:solidFill>
+        </p:spPr>
+        <p:style>
+          <a:lnRef idx="2">
+            <a:schemeClr val="accent1">
+              <a:shade val="15000"/>
+            </a:schemeClr>
+          </a:lnRef>
+          <a:fillRef idx="1">
+            <a:schemeClr val="accent1"/>
+          </a:fillRef>
+          <a:effectRef idx="0">
+            <a:schemeClr val="accent1"/>
+          </a:effectRef>
+          <a:fontRef idx="minor">
+            <a:schemeClr val="lt1"/>
+          </a:fontRef>
+        </p:style>
+        <p:txBody>
+          <a:bodyPr rtlCol="0" anchor="ctr"/>
+          <a:lstStyle/>
+          <a:p>
+            <a:pPr algn="ctr"/>
+            <a:endParaRPr lang="en-US"/>
+          </a:p>
+        </p:txBody>
+      </p:sp>
+      <p:sp>
+        <p:nvSpPr>
+          <p:cNvPr id="39" name="Rectangle 38">
+            <a:extLst>
+              <a:ext uri="{FF2B5EF4-FFF2-40B4-BE49-F238E27FC236}">
+                <a16:creationId xmlns:a16="http://schemas.microsoft.com/office/drawing/2014/main" id="{AA80DCB5-9157-1D45-B6F8-53F9C428D9BC}"/>
+              </a:ext>
+            </a:extLst>
+          </p:cNvPr>
+          <p:cNvSpPr/>
+          <p:nvPr/>
+        </p:nvSpPr>
+        <p:spPr>
+          <a:xfrm>
+            <a:off x="4531163" y="5340598"/>
+            <a:ext cx="986059" cy="436792"/>
+          </a:xfrm>
+          <a:prstGeom prst="rect">
+            <a:avLst/>
+          </a:prstGeom>
+          <a:solidFill>
+            <a:schemeClr val="bg2">
+              <a:lumMod val="20000"/>
+              <a:lumOff val="80000"/>
+              <a:alpha val="50196"/>
+            </a:schemeClr>
+          </a:solidFill>
+        </p:spPr>
+        <p:style>
+          <a:lnRef idx="2">
+            <a:schemeClr val="accent1">
+              <a:shade val="15000"/>
+            </a:schemeClr>
+          </a:lnRef>
+          <a:fillRef idx="1">
+            <a:schemeClr val="accent1"/>
+          </a:fillRef>
+          <a:effectRef idx="0">
+            <a:schemeClr val="accent1"/>
+          </a:effectRef>
+          <a:fontRef idx="minor">
+            <a:schemeClr val="lt1"/>
+          </a:fontRef>
+        </p:style>
+        <p:txBody>
+          <a:bodyPr rtlCol="0" anchor="ctr"/>
+          <a:lstStyle/>
+          <a:p>
+            <a:pPr algn="ctr"/>
+            <a:endParaRPr lang="en-US"/>
+          </a:p>
+        </p:txBody>
+      </p:sp>
+      <p:sp>
+        <p:nvSpPr>
+          <p:cNvPr id="40" name="Rectangle 39">
+            <a:extLst>
+              <a:ext uri="{FF2B5EF4-FFF2-40B4-BE49-F238E27FC236}">
+                <a16:creationId xmlns:a16="http://schemas.microsoft.com/office/drawing/2014/main" id="{F9ACCD6A-0EA2-6D99-C41D-5E10F3C394FE}"/>
+              </a:ext>
+            </a:extLst>
+          </p:cNvPr>
+          <p:cNvSpPr/>
+          <p:nvPr/>
+        </p:nvSpPr>
+        <p:spPr>
+          <a:xfrm>
+            <a:off x="4058782" y="3862163"/>
+            <a:ext cx="1707898" cy="330837"/>
+          </a:xfrm>
+          <a:prstGeom prst="rect">
+            <a:avLst/>
+          </a:prstGeom>
+          <a:solidFill>
+            <a:schemeClr val="bg2">
+              <a:lumMod val="20000"/>
+              <a:lumOff val="80000"/>
+              <a:alpha val="50196"/>
+            </a:schemeClr>
+          </a:solidFill>
+        </p:spPr>
+        <p:style>
+          <a:lnRef idx="2">
+            <a:schemeClr val="accent1">
+              <a:shade val="15000"/>
+            </a:schemeClr>
+          </a:lnRef>
+          <a:fillRef idx="1">
+            <a:schemeClr val="accent1"/>
+          </a:fillRef>
+          <a:effectRef idx="0">
+            <a:schemeClr val="accent1"/>
+          </a:effectRef>
+          <a:fontRef idx="minor">
+            <a:schemeClr val="lt1"/>
+          </a:fontRef>
+        </p:style>
+        <p:txBody>
+          <a:bodyPr rtlCol="0" anchor="ctr"/>
+          <a:lstStyle/>
+          <a:p>
+            <a:pPr algn="ctr"/>
+            <a:endParaRPr lang="en-US"/>
+          </a:p>
+        </p:txBody>
+      </p:sp>
+      <p:sp>
+        <p:nvSpPr>
+          <p:cNvPr id="48" name="Freeform: Shape 47">
+            <a:extLst>
+              <a:ext uri="{FF2B5EF4-FFF2-40B4-BE49-F238E27FC236}">
+                <a16:creationId xmlns:a16="http://schemas.microsoft.com/office/drawing/2014/main" id="{BEDEE43A-9CEE-971A-5415-07AE465A641F}"/>
+              </a:ext>
+            </a:extLst>
+          </p:cNvPr>
+          <p:cNvSpPr/>
+          <p:nvPr/>
+        </p:nvSpPr>
+        <p:spPr>
+          <a:xfrm>
+            <a:off x="6164494" y="2589088"/>
+            <a:ext cx="852755" cy="842481"/>
+          </a:xfrm>
+          <a:custGeom>
+            <a:avLst/>
+            <a:gdLst>
+              <a:gd name="csX0" fmla="*/ 10275 w 852755"/>
+              <a:gd name="csY0" fmla="*/ 0 h 842481"/>
+              <a:gd name="csX1" fmla="*/ 0 w 852755"/>
+              <a:gd name="csY1" fmla="*/ 277402 h 842481"/>
+              <a:gd name="csX2" fmla="*/ 842481 w 852755"/>
+              <a:gd name="csY2" fmla="*/ 267128 h 842481"/>
+              <a:gd name="csX3" fmla="*/ 852755 w 852755"/>
+              <a:gd name="csY3" fmla="*/ 842481 h 842481"/>
+            </a:gdLst>
+            <a:ahLst/>
+            <a:cxnLst>
+              <a:cxn ang="0">
+                <a:pos x="csX0" y="csY0"/>
+              </a:cxn>
+              <a:cxn ang="0">
+                <a:pos x="csX1" y="csY1"/>
+              </a:cxn>
+              <a:cxn ang="0">
+                <a:pos x="csX2" y="csY2"/>
+              </a:cxn>
+              <a:cxn ang="0">
+                <a:pos x="csX3" y="csY3"/>
+              </a:cxn>
+            </a:cxnLst>
+            <a:rect l="l" t="t" r="r" b="b"/>
+            <a:pathLst>
+              <a:path w="852755" h="842481">
+                <a:moveTo>
+                  <a:pt x="10275" y="0"/>
+                </a:moveTo>
+                <a:lnTo>
+                  <a:pt x="0" y="277402"/>
+                </a:lnTo>
+                <a:lnTo>
+                  <a:pt x="842481" y="267128"/>
+                </a:lnTo>
+                <a:lnTo>
+                  <a:pt x="852755" y="842481"/>
+                </a:lnTo>
+              </a:path>
+            </a:pathLst>
+          </a:custGeom>
+        </p:spPr>
+        <p:style>
+          <a:lnRef idx="3">
+            <a:schemeClr val="accent1"/>
+          </a:lnRef>
+          <a:fillRef idx="0">
+            <a:schemeClr val="accent1"/>
+          </a:fillRef>
+          <a:effectRef idx="2">
+            <a:schemeClr val="accent1"/>
+          </a:effectRef>
+          <a:fontRef idx="minor">
+            <a:schemeClr val="tx1"/>
+          </a:fontRef>
+        </p:style>
+        <p:txBody>
+          <a:bodyPr rtlCol="0" anchor="ctr"/>
+          <a:lstStyle/>
+          <a:p>
+            <a:pPr algn="ctr"/>
+            <a:endParaRPr lang="en-US"/>
+          </a:p>
+        </p:txBody>
+      </p:sp>
+      <p:sp>
+        <p:nvSpPr>
+          <p:cNvPr id="49" name="Freeform: Shape 48">
+            <a:extLst>
+              <a:ext uri="{FF2B5EF4-FFF2-40B4-BE49-F238E27FC236}">
+                <a16:creationId xmlns:a16="http://schemas.microsoft.com/office/drawing/2014/main" id="{D0A088EA-12D8-4463-A99F-1FE13B1199FE}"/>
+              </a:ext>
+            </a:extLst>
+          </p:cNvPr>
+          <p:cNvSpPr/>
+          <p:nvPr/>
+        </p:nvSpPr>
+        <p:spPr>
+          <a:xfrm>
+            <a:off x="5054885" y="513708"/>
+            <a:ext cx="544531" cy="297950"/>
+          </a:xfrm>
+          <a:custGeom>
+            <a:avLst/>
+            <a:gdLst>
+              <a:gd name="csX0" fmla="*/ 544531 w 544531"/>
+              <a:gd name="csY0" fmla="*/ 0 h 297950"/>
+              <a:gd name="csX1" fmla="*/ 0 w 544531"/>
+              <a:gd name="csY1" fmla="*/ 0 h 297950"/>
+              <a:gd name="csX2" fmla="*/ 0 w 544531"/>
+              <a:gd name="csY2" fmla="*/ 297950 h 297950"/>
+            </a:gdLst>
+            <a:ahLst/>
+            <a:cxnLst>
+              <a:cxn ang="0">
+                <a:pos x="csX0" y="csY0"/>
+              </a:cxn>
+              <a:cxn ang="0">
+                <a:pos x="csX1" y="csY1"/>
+              </a:cxn>
+              <a:cxn ang="0">
+                <a:pos x="csX2" y="csY2"/>
+              </a:cxn>
+            </a:cxnLst>
+            <a:rect l="l" t="t" r="r" b="b"/>
+            <a:pathLst>
+              <a:path w="544531" h="297950">
+                <a:moveTo>
+                  <a:pt x="544531" y="0"/>
+                </a:moveTo>
+                <a:lnTo>
+                  <a:pt x="0" y="0"/>
+                </a:lnTo>
+                <a:lnTo>
+                  <a:pt x="0" y="297950"/>
+                </a:lnTo>
+              </a:path>
+            </a:pathLst>
+          </a:custGeom>
+        </p:spPr>
+        <p:style>
+          <a:lnRef idx="3">
+            <a:schemeClr val="accent1"/>
+          </a:lnRef>
+          <a:fillRef idx="0">
+            <a:schemeClr val="accent1"/>
+          </a:fillRef>
+          <a:effectRef idx="2">
+            <a:schemeClr val="accent1"/>
+          </a:effectRef>
+          <a:fontRef idx="minor">
+            <a:schemeClr val="tx1"/>
+          </a:fontRef>
+        </p:style>
+        <p:txBody>
+          <a:bodyPr rtlCol="0" anchor="ctr"/>
+          <a:lstStyle/>
+          <a:p>
+            <a:pPr algn="ctr"/>
+            <a:endParaRPr lang="en-US"/>
+          </a:p>
+        </p:txBody>
+      </p:sp>
+      <p:cxnSp>
+        <p:nvCxnSpPr>
+          <p:cNvPr id="51" name="Straight Connector 50">
+            <a:extLst>
+              <a:ext uri="{FF2B5EF4-FFF2-40B4-BE49-F238E27FC236}">
+                <a16:creationId xmlns:a16="http://schemas.microsoft.com/office/drawing/2014/main" id="{8C39D36A-4A5D-202E-DD2A-B870C1BB6B6E}"/>
+              </a:ext>
+            </a:extLst>
+          </p:cNvPr>
+          <p:cNvCxnSpPr>
+            <a:cxnSpLocks/>
+          </p:cNvCxnSpPr>
+          <p:nvPr/>
+        </p:nvCxnSpPr>
+        <p:spPr>
+          <a:xfrm>
+            <a:off x="3411020" y="424700"/>
+            <a:ext cx="0" cy="1143749"/>
+          </a:xfrm>
+          <a:prstGeom prst="line">
+            <a:avLst/>
+          </a:prstGeom>
+        </p:spPr>
+        <p:style>
+          <a:lnRef idx="3">
+            <a:schemeClr val="accent1"/>
+          </a:lnRef>
+          <a:fillRef idx="0">
+            <a:schemeClr val="accent1"/>
+          </a:fillRef>
+          <a:effectRef idx="2">
+            <a:schemeClr val="accent1"/>
+          </a:effectRef>
+          <a:fontRef idx="minor">
+            <a:schemeClr val="tx1"/>
+          </a:fontRef>
+        </p:style>
+      </p:cxnSp>
+      <p:sp>
+        <p:nvSpPr>
+          <p:cNvPr id="53" name="Freeform: Shape 52">
+            <a:extLst>
+              <a:ext uri="{FF2B5EF4-FFF2-40B4-BE49-F238E27FC236}">
+                <a16:creationId xmlns:a16="http://schemas.microsoft.com/office/drawing/2014/main" id="{CE6380EE-88CD-B382-1450-714EB2D2C72B}"/>
+              </a:ext>
+            </a:extLst>
+          </p:cNvPr>
+          <p:cNvSpPr/>
+          <p:nvPr/>
+        </p:nvSpPr>
+        <p:spPr>
+          <a:xfrm>
+            <a:off x="3565133" y="996593"/>
+            <a:ext cx="1047964" cy="544531"/>
+          </a:xfrm>
+          <a:custGeom>
+            <a:avLst/>
+            <a:gdLst>
+              <a:gd name="csX0" fmla="*/ 1047964 w 1047964"/>
+              <a:gd name="csY0" fmla="*/ 0 h 544531"/>
+              <a:gd name="csX1" fmla="*/ 0 w 1047964"/>
+              <a:gd name="csY1" fmla="*/ 10274 h 544531"/>
+              <a:gd name="csX2" fmla="*/ 10274 w 1047964"/>
+              <a:gd name="csY2" fmla="*/ 544531 h 544531"/>
+            </a:gdLst>
+            <a:ahLst/>
+            <a:cxnLst>
+              <a:cxn ang="0">
+                <a:pos x="csX0" y="csY0"/>
+              </a:cxn>
+              <a:cxn ang="0">
+                <a:pos x="csX1" y="csY1"/>
+              </a:cxn>
+              <a:cxn ang="0">
+                <a:pos x="csX2" y="csY2"/>
+              </a:cxn>
+            </a:cxnLst>
+            <a:rect l="l" t="t" r="r" b="b"/>
+            <a:pathLst>
+              <a:path w="1047964" h="544531">
+                <a:moveTo>
+                  <a:pt x="1047964" y="0"/>
+                </a:moveTo>
+                <a:lnTo>
+                  <a:pt x="0" y="10274"/>
+                </a:lnTo>
+                <a:lnTo>
+                  <a:pt x="10274" y="544531"/>
+                </a:lnTo>
+              </a:path>
+            </a:pathLst>
+          </a:custGeom>
+        </p:spPr>
+        <p:style>
+          <a:lnRef idx="3">
+            <a:schemeClr val="accent1"/>
+          </a:lnRef>
+          <a:fillRef idx="0">
+            <a:schemeClr val="accent1"/>
+          </a:fillRef>
+          <a:effectRef idx="2">
+            <a:schemeClr val="accent1"/>
+          </a:effectRef>
+          <a:fontRef idx="minor">
+            <a:schemeClr val="tx1"/>
+          </a:fontRef>
+        </p:style>
+        <p:txBody>
+          <a:bodyPr rtlCol="0" anchor="ctr"/>
+          <a:lstStyle/>
+          <a:p>
+            <a:pPr algn="ctr"/>
+            <a:endParaRPr lang="en-US"/>
+          </a:p>
+        </p:txBody>
+      </p:sp>
+      <p:sp>
+        <p:nvSpPr>
+          <p:cNvPr id="54" name="Freeform: Shape 53">
+            <a:extLst>
+              <a:ext uri="{FF2B5EF4-FFF2-40B4-BE49-F238E27FC236}">
+                <a16:creationId xmlns:a16="http://schemas.microsoft.com/office/drawing/2014/main" id="{F9210D08-4481-5B63-6D4B-6F7A95E020F8}"/>
+              </a:ext>
+            </a:extLst>
+          </p:cNvPr>
+          <p:cNvSpPr/>
+          <p:nvPr/>
+        </p:nvSpPr>
+        <p:spPr>
+          <a:xfrm>
+            <a:off x="3616503" y="431515"/>
+            <a:ext cx="1006868" cy="482885"/>
+          </a:xfrm>
+          <a:custGeom>
+            <a:avLst/>
+            <a:gdLst>
+              <a:gd name="csX0" fmla="*/ 1006868 w 1006868"/>
+              <a:gd name="csY0" fmla="*/ 482885 h 482885"/>
+              <a:gd name="csX1" fmla="*/ 0 w 1006868"/>
+              <a:gd name="csY1" fmla="*/ 0 h 482885"/>
+            </a:gdLst>
+            <a:ahLst/>
+            <a:cxnLst>
+              <a:cxn ang="0">
+                <a:pos x="csX0" y="csY0"/>
+              </a:cxn>
+              <a:cxn ang="0">
+                <a:pos x="csX1" y="csY1"/>
+              </a:cxn>
+            </a:cxnLst>
+            <a:rect l="l" t="t" r="r" b="b"/>
+            <a:pathLst>
+              <a:path w="1006868" h="482885">
+                <a:moveTo>
+                  <a:pt x="1006868" y="482885"/>
+                </a:moveTo>
+                <a:lnTo>
+                  <a:pt x="0" y="0"/>
+                </a:lnTo>
+              </a:path>
+            </a:pathLst>
+          </a:custGeom>
+        </p:spPr>
+        <p:style>
+          <a:lnRef idx="3">
+            <a:schemeClr val="accent1"/>
+          </a:lnRef>
+          <a:fillRef idx="0">
+            <a:schemeClr val="accent1"/>
+          </a:fillRef>
+          <a:effectRef idx="2">
+            <a:schemeClr val="accent1"/>
+          </a:effectRef>
+          <a:fontRef idx="minor">
+            <a:schemeClr val="tx1"/>
+          </a:fontRef>
+        </p:style>
+        <p:txBody>
+          <a:bodyPr rtlCol="0" anchor="ctr"/>
+          <a:lstStyle/>
+          <a:p>
+            <a:pPr algn="ctr"/>
+            <a:endParaRPr lang="en-US"/>
+          </a:p>
+        </p:txBody>
+      </p:sp>
+      <p:sp>
+        <p:nvSpPr>
+          <p:cNvPr id="55" name="Freeform: Shape 54">
+            <a:extLst>
+              <a:ext uri="{FF2B5EF4-FFF2-40B4-BE49-F238E27FC236}">
+                <a16:creationId xmlns:a16="http://schemas.microsoft.com/office/drawing/2014/main" id="{7FBE6B56-D023-F5E8-F1AD-4EE419DCBF57}"/>
+              </a:ext>
+            </a:extLst>
+          </p:cNvPr>
+          <p:cNvSpPr/>
+          <p:nvPr/>
+        </p:nvSpPr>
+        <p:spPr>
+          <a:xfrm>
+            <a:off x="7161088" y="3102796"/>
+            <a:ext cx="431514" cy="328773"/>
+          </a:xfrm>
+          <a:custGeom>
+            <a:avLst/>
+            <a:gdLst>
+              <a:gd name="csX0" fmla="*/ 431514 w 431514"/>
+              <a:gd name="csY0" fmla="*/ 0 h 328773"/>
+              <a:gd name="csX1" fmla="*/ 431514 w 431514"/>
+              <a:gd name="csY1" fmla="*/ 61644 h 328773"/>
+              <a:gd name="csX2" fmla="*/ 421240 w 431514"/>
+              <a:gd name="csY2" fmla="*/ 184934 h 328773"/>
+              <a:gd name="csX3" fmla="*/ 0 w 431514"/>
+              <a:gd name="csY3" fmla="*/ 174660 h 328773"/>
+              <a:gd name="csX4" fmla="*/ 0 w 431514"/>
+              <a:gd name="csY4" fmla="*/ 328773 h 328773"/>
+            </a:gdLst>
+            <a:ahLst/>
+            <a:cxnLst>
+              <a:cxn ang="0">
+                <a:pos x="csX0" y="csY0"/>
+              </a:cxn>
+              <a:cxn ang="0">
+                <a:pos x="csX1" y="csY1"/>
+              </a:cxn>
+              <a:cxn ang="0">
+                <a:pos x="csX2" y="csY2"/>
+              </a:cxn>
+              <a:cxn ang="0">
+                <a:pos x="csX3" y="csY3"/>
+              </a:cxn>
+              <a:cxn ang="0">
+                <a:pos x="csX4" y="csY4"/>
+              </a:cxn>
+            </a:cxnLst>
+            <a:rect l="l" t="t" r="r" b="b"/>
+            <a:pathLst>
+              <a:path w="431514" h="328773">
+                <a:moveTo>
+                  <a:pt x="431514" y="0"/>
+                </a:moveTo>
+                <a:lnTo>
+                  <a:pt x="431514" y="61644"/>
+                </a:lnTo>
+                <a:lnTo>
+                  <a:pt x="421240" y="184934"/>
+                </a:lnTo>
+                <a:lnTo>
+                  <a:pt x="0" y="174660"/>
+                </a:lnTo>
+                <a:lnTo>
+                  <a:pt x="0" y="328773"/>
+                </a:lnTo>
+              </a:path>
+            </a:pathLst>
+          </a:custGeom>
+        </p:spPr>
+        <p:style>
+          <a:lnRef idx="3">
+            <a:schemeClr val="accent1"/>
+          </a:lnRef>
+          <a:fillRef idx="0">
+            <a:schemeClr val="accent1"/>
+          </a:fillRef>
+          <a:effectRef idx="2">
+            <a:schemeClr val="accent1"/>
+          </a:effectRef>
+          <a:fontRef idx="minor">
+            <a:schemeClr val="tx1"/>
+          </a:fontRef>
+        </p:style>
+        <p:txBody>
+          <a:bodyPr rtlCol="0" anchor="ctr"/>
+          <a:lstStyle/>
+          <a:p>
+            <a:pPr algn="ctr"/>
+            <a:endParaRPr lang="en-US"/>
+          </a:p>
+        </p:txBody>
+      </p:sp>
+      <p:sp>
+        <p:nvSpPr>
+          <p:cNvPr id="56" name="Freeform: Shape 55">
+            <a:extLst>
+              <a:ext uri="{FF2B5EF4-FFF2-40B4-BE49-F238E27FC236}">
+                <a16:creationId xmlns:a16="http://schemas.microsoft.com/office/drawing/2014/main" id="{3C832DA1-A1D9-BE1E-4B26-E1D5833DFD26}"/>
+              </a:ext>
+            </a:extLst>
+          </p:cNvPr>
+          <p:cNvSpPr/>
+          <p:nvPr/>
+        </p:nvSpPr>
+        <p:spPr>
+          <a:xfrm>
+            <a:off x="5270643" y="2393879"/>
+            <a:ext cx="431514" cy="0"/>
+          </a:xfrm>
+          <a:custGeom>
+            <a:avLst/>
+            <a:gdLst>
+              <a:gd name="csX0" fmla="*/ 0 w 431514"/>
+              <a:gd name="csY0" fmla="*/ 0 h 0"/>
+              <a:gd name="csX1" fmla="*/ 431514 w 431514"/>
+              <a:gd name="csY1" fmla="*/ 0 h 0"/>
+            </a:gdLst>
+            <a:ahLst/>
+            <a:cxnLst>
+              <a:cxn ang="0">
+                <a:pos x="csX0" y="csY0"/>
+              </a:cxn>
+              <a:cxn ang="0">
+                <a:pos x="csX1" y="csY1"/>
+              </a:cxn>
+            </a:cxnLst>
+            <a:rect l="l" t="t" r="r" b="b"/>
+            <a:pathLst>
+              <a:path w="431514">
+                <a:moveTo>
+                  <a:pt x="0" y="0"/>
+                </a:moveTo>
+                <a:lnTo>
+                  <a:pt x="431514" y="0"/>
+                </a:lnTo>
+              </a:path>
+            </a:pathLst>
+          </a:custGeom>
+        </p:spPr>
+        <p:style>
+          <a:lnRef idx="3">
+            <a:schemeClr val="accent1"/>
+          </a:lnRef>
+          <a:fillRef idx="0">
+            <a:schemeClr val="accent1"/>
+          </a:fillRef>
+          <a:effectRef idx="2">
+            <a:schemeClr val="accent1"/>
+          </a:effectRef>
+          <a:fontRef idx="minor">
+            <a:schemeClr val="tx1"/>
+          </a:fontRef>
+        </p:style>
+        <p:txBody>
+          <a:bodyPr rtlCol="0" anchor="ctr"/>
+          <a:lstStyle/>
+          <a:p>
+            <a:pPr algn="ctr"/>
+            <a:endParaRPr lang="en-US"/>
+          </a:p>
+        </p:txBody>
+      </p:sp>
+      <p:sp>
+        <p:nvSpPr>
+          <p:cNvPr id="57" name="Freeform: Shape 56">
+            <a:extLst>
+              <a:ext uri="{FF2B5EF4-FFF2-40B4-BE49-F238E27FC236}">
+                <a16:creationId xmlns:a16="http://schemas.microsoft.com/office/drawing/2014/main" id="{151F7984-6ECA-EED7-FB05-0471CA712BE2}"/>
+              </a:ext>
+            </a:extLst>
+          </p:cNvPr>
+          <p:cNvSpPr/>
+          <p:nvPr/>
+        </p:nvSpPr>
+        <p:spPr>
+          <a:xfrm>
+            <a:off x="4941870" y="2578813"/>
+            <a:ext cx="2147299" cy="852756"/>
+          </a:xfrm>
+          <a:custGeom>
+            <a:avLst/>
+            <a:gdLst>
+              <a:gd name="csX0" fmla="*/ 2147299 w 2147299"/>
+              <a:gd name="csY0" fmla="*/ 852756 h 852756"/>
+              <a:gd name="csX1" fmla="*/ 2147299 w 2147299"/>
+              <a:gd name="csY1" fmla="*/ 102742 h 852756"/>
+              <a:gd name="csX2" fmla="*/ 0 w 2147299"/>
+              <a:gd name="csY2" fmla="*/ 102742 h 852756"/>
+              <a:gd name="csX3" fmla="*/ 10274 w 2147299"/>
+              <a:gd name="csY3" fmla="*/ 0 h 852756"/>
+            </a:gdLst>
+            <a:ahLst/>
+            <a:cxnLst>
+              <a:cxn ang="0">
+                <a:pos x="csX0" y="csY0"/>
+              </a:cxn>
+              <a:cxn ang="0">
+                <a:pos x="csX1" y="csY1"/>
+              </a:cxn>
+              <a:cxn ang="0">
+                <a:pos x="csX2" y="csY2"/>
+              </a:cxn>
+              <a:cxn ang="0">
+                <a:pos x="csX3" y="csY3"/>
+              </a:cxn>
+            </a:cxnLst>
+            <a:rect l="l" t="t" r="r" b="b"/>
+            <a:pathLst>
+              <a:path w="2147299" h="852756">
+                <a:moveTo>
+                  <a:pt x="2147299" y="852756"/>
+                </a:moveTo>
+                <a:lnTo>
+                  <a:pt x="2147299" y="102742"/>
+                </a:lnTo>
+                <a:lnTo>
+                  <a:pt x="0" y="102742"/>
+                </a:lnTo>
+                <a:lnTo>
+                  <a:pt x="10274" y="0"/>
+                </a:lnTo>
+              </a:path>
+            </a:pathLst>
+          </a:custGeom>
+        </p:spPr>
+        <p:style>
+          <a:lnRef idx="3">
+            <a:schemeClr val="accent1"/>
+          </a:lnRef>
+          <a:fillRef idx="0">
+            <a:schemeClr val="accent1"/>
+          </a:fillRef>
+          <a:effectRef idx="2">
+            <a:schemeClr val="accent1"/>
+          </a:effectRef>
+          <a:fontRef idx="minor">
+            <a:schemeClr val="tx1"/>
+          </a:fontRef>
+        </p:style>
+        <p:txBody>
+          <a:bodyPr rtlCol="0" anchor="ctr"/>
+          <a:lstStyle/>
+          <a:p>
+            <a:pPr algn="ctr"/>
+            <a:endParaRPr lang="en-US"/>
+          </a:p>
+        </p:txBody>
+      </p:sp>
+      <p:sp>
+        <p:nvSpPr>
+          <p:cNvPr id="58" name="Freeform: Shape 57">
+            <a:extLst>
+              <a:ext uri="{FF2B5EF4-FFF2-40B4-BE49-F238E27FC236}">
+                <a16:creationId xmlns:a16="http://schemas.microsoft.com/office/drawing/2014/main" id="{BF472FAD-8FFA-4852-F4AF-7084E6503B2A}"/>
+              </a:ext>
+            </a:extLst>
+          </p:cNvPr>
+          <p:cNvSpPr/>
+          <p:nvPr/>
+        </p:nvSpPr>
+        <p:spPr>
+          <a:xfrm>
+            <a:off x="6554912" y="1941816"/>
+            <a:ext cx="554805" cy="0"/>
+          </a:xfrm>
+          <a:custGeom>
+            <a:avLst/>
+            <a:gdLst>
+              <a:gd name="csX0" fmla="*/ 0 w 554805"/>
+              <a:gd name="csY0" fmla="*/ 0 h 0"/>
+              <a:gd name="csX1" fmla="*/ 554805 w 554805"/>
+              <a:gd name="csY1" fmla="*/ 0 h 0"/>
+            </a:gdLst>
+            <a:ahLst/>
+            <a:cxnLst>
+              <a:cxn ang="0">
+                <a:pos x="csX0" y="csY0"/>
+              </a:cxn>
+              <a:cxn ang="0">
+                <a:pos x="csX1" y="csY1"/>
+              </a:cxn>
+            </a:cxnLst>
+            <a:rect l="l" t="t" r="r" b="b"/>
+            <a:pathLst>
+              <a:path w="554805">
+                <a:moveTo>
+                  <a:pt x="0" y="0"/>
+                </a:moveTo>
+                <a:lnTo>
+                  <a:pt x="554805" y="0"/>
+                </a:lnTo>
+              </a:path>
+            </a:pathLst>
+          </a:custGeom>
+        </p:spPr>
+        <p:style>
+          <a:lnRef idx="3">
+            <a:schemeClr val="accent1"/>
+          </a:lnRef>
+          <a:fillRef idx="0">
+            <a:schemeClr val="accent1"/>
+          </a:fillRef>
+          <a:effectRef idx="2">
+            <a:schemeClr val="accent1"/>
+          </a:effectRef>
+          <a:fontRef idx="minor">
+            <a:schemeClr val="tx1"/>
+          </a:fontRef>
+        </p:style>
+        <p:txBody>
+          <a:bodyPr rtlCol="0" anchor="ctr"/>
+          <a:lstStyle/>
+          <a:p>
+            <a:pPr algn="ctr"/>
+            <a:endParaRPr lang="en-US"/>
+          </a:p>
+        </p:txBody>
+      </p:sp>
+      <p:sp>
+        <p:nvSpPr>
+          <p:cNvPr id="59" name="Freeform: Shape 58">
+            <a:extLst>
+              <a:ext uri="{FF2B5EF4-FFF2-40B4-BE49-F238E27FC236}">
+                <a16:creationId xmlns:a16="http://schemas.microsoft.com/office/drawing/2014/main" id="{C2CF8910-22DA-9478-92C7-F885B95CD897}"/>
+              </a:ext>
+            </a:extLst>
+          </p:cNvPr>
+          <p:cNvSpPr/>
+          <p:nvPr/>
+        </p:nvSpPr>
+        <p:spPr>
+          <a:xfrm>
+            <a:off x="4941870" y="431515"/>
+            <a:ext cx="0" cy="390418"/>
+          </a:xfrm>
+          <a:custGeom>
+            <a:avLst/>
+            <a:gdLst>
+              <a:gd name="csX0" fmla="*/ 0 w 0"/>
+              <a:gd name="csY0" fmla="*/ 390418 h 390418"/>
+              <a:gd name="csX1" fmla="*/ 0 w 0"/>
+              <a:gd name="csY1" fmla="*/ 0 h 390418"/>
+            </a:gdLst>
+            <a:ahLst/>
+            <a:cxnLst>
+              <a:cxn ang="0">
+                <a:pos x="csX0" y="csY0"/>
+              </a:cxn>
+              <a:cxn ang="0">
+                <a:pos x="csX1" y="csY1"/>
+              </a:cxn>
+            </a:cxnLst>
+            <a:rect l="l" t="t" r="r" b="b"/>
+            <a:pathLst>
+              <a:path h="390418">
+                <a:moveTo>
+                  <a:pt x="0" y="390418"/>
+                </a:moveTo>
+                <a:lnTo>
+                  <a:pt x="0" y="0"/>
+                </a:lnTo>
+              </a:path>
+            </a:pathLst>
+          </a:custGeom>
+        </p:spPr>
+        <p:style>
+          <a:lnRef idx="3">
+            <a:schemeClr val="accent1"/>
+          </a:lnRef>
+          <a:fillRef idx="0">
+            <a:schemeClr val="accent1"/>
+          </a:fillRef>
+          <a:effectRef idx="2">
+            <a:schemeClr val="accent1"/>
+          </a:effectRef>
+          <a:fontRef idx="minor">
+            <a:schemeClr val="tx1"/>
+          </a:fontRef>
+        </p:style>
+        <p:txBody>
+          <a:bodyPr rtlCol="0" anchor="ctr"/>
+          <a:lstStyle/>
+          <a:p>
+            <a:pPr algn="ctr"/>
+            <a:endParaRPr lang="en-US"/>
+          </a:p>
+        </p:txBody>
+      </p:sp>
+      <p:sp>
+        <p:nvSpPr>
+          <p:cNvPr id="60" name="Freeform: Shape 59">
+            <a:extLst>
+              <a:ext uri="{FF2B5EF4-FFF2-40B4-BE49-F238E27FC236}">
+                <a16:creationId xmlns:a16="http://schemas.microsoft.com/office/drawing/2014/main" id="{718EE46C-5051-279D-932F-1792832BF7A0}"/>
+              </a:ext>
+            </a:extLst>
+          </p:cNvPr>
+          <p:cNvSpPr/>
+          <p:nvPr/>
+        </p:nvSpPr>
+        <p:spPr>
+          <a:xfrm>
+            <a:off x="3750067" y="246420"/>
+            <a:ext cx="873304" cy="10434"/>
+          </a:xfrm>
+          <a:custGeom>
+            <a:avLst/>
+            <a:gdLst>
+              <a:gd name="csX0" fmla="*/ 0 w 873304"/>
+              <a:gd name="csY0" fmla="*/ 10434 h 10434"/>
+              <a:gd name="csX1" fmla="*/ 0 w 873304"/>
+              <a:gd name="csY1" fmla="*/ 10434 h 10434"/>
+              <a:gd name="csX2" fmla="*/ 154113 w 873304"/>
+              <a:gd name="csY2" fmla="*/ 160 h 10434"/>
+              <a:gd name="csX3" fmla="*/ 873304 w 873304"/>
+              <a:gd name="csY3" fmla="*/ 160 h 10434"/>
+            </a:gdLst>
+            <a:ahLst/>
+            <a:cxnLst>
+              <a:cxn ang="0">
+                <a:pos x="csX0" y="csY0"/>
+              </a:cxn>
+              <a:cxn ang="0">
+                <a:pos x="csX1" y="csY1"/>
+              </a:cxn>
+              <a:cxn ang="0">
+                <a:pos x="csX2" y="csY2"/>
+              </a:cxn>
+              <a:cxn ang="0">
+                <a:pos x="csX3" y="csY3"/>
+              </a:cxn>
+            </a:cxnLst>
+            <a:rect l="l" t="t" r="r" b="b"/>
+            <a:pathLst>
+              <a:path w="873304" h="10434">
+                <a:moveTo>
+                  <a:pt x="0" y="10434"/>
+                </a:moveTo>
+                <a:lnTo>
+                  <a:pt x="0" y="10434"/>
+                </a:lnTo>
+                <a:cubicBezTo>
+                  <a:pt x="112891" y="-2109"/>
+                  <a:pt x="61456" y="160"/>
+                  <a:pt x="154113" y="160"/>
+                </a:cubicBezTo>
+                <a:lnTo>
+                  <a:pt x="873304" y="160"/>
+                </a:lnTo>
+              </a:path>
+            </a:pathLst>
+          </a:custGeom>
+        </p:spPr>
+        <p:style>
+          <a:lnRef idx="3">
+            <a:schemeClr val="accent1"/>
+          </a:lnRef>
+          <a:fillRef idx="0">
+            <a:schemeClr val="accent1"/>
+          </a:fillRef>
+          <a:effectRef idx="2">
+            <a:schemeClr val="accent1"/>
+          </a:effectRef>
+          <a:fontRef idx="minor">
+            <a:schemeClr val="tx1"/>
+          </a:fontRef>
+        </p:style>
+        <p:txBody>
+          <a:bodyPr rtlCol="0" anchor="ctr"/>
+          <a:lstStyle/>
+          <a:p>
+            <a:pPr algn="ctr"/>
+            <a:endParaRPr lang="en-US"/>
+          </a:p>
+        </p:txBody>
+      </p:sp>
+      <p:sp>
+        <p:nvSpPr>
+          <p:cNvPr id="61" name="Freeform: Shape 60">
+            <a:extLst>
+              <a:ext uri="{FF2B5EF4-FFF2-40B4-BE49-F238E27FC236}">
+                <a16:creationId xmlns:a16="http://schemas.microsoft.com/office/drawing/2014/main" id="{594104B2-F440-56FF-7E7A-1F261C708435}"/>
+              </a:ext>
+            </a:extLst>
+          </p:cNvPr>
+          <p:cNvSpPr/>
+          <p:nvPr/>
+        </p:nvSpPr>
+        <p:spPr>
+          <a:xfrm>
+            <a:off x="2989780" y="996593"/>
+            <a:ext cx="0" cy="205483"/>
+          </a:xfrm>
+          <a:custGeom>
+            <a:avLst/>
+            <a:gdLst>
+              <a:gd name="csX0" fmla="*/ 0 w 0"/>
+              <a:gd name="csY0" fmla="*/ 0 h 205483"/>
+              <a:gd name="csX1" fmla="*/ 0 w 0"/>
+              <a:gd name="csY1" fmla="*/ 205483 h 205483"/>
+            </a:gdLst>
+            <a:ahLst/>
+            <a:cxnLst>
+              <a:cxn ang="0">
+                <a:pos x="csX0" y="csY0"/>
+              </a:cxn>
+              <a:cxn ang="0">
+                <a:pos x="csX1" y="csY1"/>
+              </a:cxn>
+            </a:cxnLst>
+            <a:rect l="l" t="t" r="r" b="b"/>
+            <a:pathLst>
+              <a:path h="205483">
+                <a:moveTo>
+                  <a:pt x="0" y="0"/>
+                </a:moveTo>
+                <a:lnTo>
+                  <a:pt x="0" y="205483"/>
+                </a:lnTo>
+              </a:path>
+            </a:pathLst>
+          </a:custGeom>
+        </p:spPr>
+        <p:style>
+          <a:lnRef idx="3">
+            <a:schemeClr val="accent1"/>
+          </a:lnRef>
+          <a:fillRef idx="0">
+            <a:schemeClr val="accent1"/>
+          </a:fillRef>
+          <a:effectRef idx="2">
+            <a:schemeClr val="accent1"/>
+          </a:effectRef>
+          <a:fontRef idx="minor">
+            <a:schemeClr val="tx1"/>
+          </a:fontRef>
+        </p:style>
+        <p:txBody>
+          <a:bodyPr rtlCol="0" anchor="ctr"/>
+          <a:lstStyle/>
+          <a:p>
+            <a:pPr algn="ctr"/>
+            <a:endParaRPr lang="en-US"/>
+          </a:p>
+        </p:txBody>
+      </p:sp>
+      <p:sp>
+        <p:nvSpPr>
+          <p:cNvPr id="62" name="Freeform: Shape 61">
+            <a:extLst>
+              <a:ext uri="{FF2B5EF4-FFF2-40B4-BE49-F238E27FC236}">
+                <a16:creationId xmlns:a16="http://schemas.microsoft.com/office/drawing/2014/main" id="{EEAF3805-7528-4404-7A36-C1135CC6D41F}"/>
+              </a:ext>
+            </a:extLst>
+          </p:cNvPr>
+          <p:cNvSpPr/>
+          <p:nvPr/>
+        </p:nvSpPr>
+        <p:spPr>
+          <a:xfrm>
+            <a:off x="2989780" y="256854"/>
+            <a:ext cx="102741" cy="426359"/>
+          </a:xfrm>
+          <a:custGeom>
+            <a:avLst/>
+            <a:gdLst>
+              <a:gd name="csX0" fmla="*/ 0 w 113016"/>
+              <a:gd name="csY0" fmla="*/ 421240 h 482885"/>
+              <a:gd name="csX1" fmla="*/ 0 w 113016"/>
+              <a:gd name="csY1" fmla="*/ 482885 h 482885"/>
+              <a:gd name="csX2" fmla="*/ 10274 w 113016"/>
+              <a:gd name="csY2" fmla="*/ 0 h 482885"/>
+              <a:gd name="csX3" fmla="*/ 113016 w 113016"/>
+              <a:gd name="csY3" fmla="*/ 0 h 482885"/>
+            </a:gdLst>
+            <a:ahLst/>
+            <a:cxnLst>
+              <a:cxn ang="0">
+                <a:pos x="csX0" y="csY0"/>
+              </a:cxn>
+              <a:cxn ang="0">
+                <a:pos x="csX1" y="csY1"/>
+              </a:cxn>
+              <a:cxn ang="0">
+                <a:pos x="csX2" y="csY2"/>
+              </a:cxn>
+              <a:cxn ang="0">
+                <a:pos x="csX3" y="csY3"/>
+              </a:cxn>
+            </a:cxnLst>
+            <a:rect l="l" t="t" r="r" b="b"/>
+            <a:pathLst>
+              <a:path w="113016" h="482885">
+                <a:moveTo>
+                  <a:pt x="0" y="421240"/>
+                </a:moveTo>
+                <a:lnTo>
+                  <a:pt x="0" y="482885"/>
+                </a:lnTo>
+                <a:lnTo>
+                  <a:pt x="10274" y="0"/>
+                </a:lnTo>
+                <a:lnTo>
+                  <a:pt x="113016" y="0"/>
+                </a:lnTo>
+              </a:path>
+            </a:pathLst>
+          </a:custGeom>
+        </p:spPr>
+        <p:style>
+          <a:lnRef idx="3">
+            <a:schemeClr val="accent1"/>
+          </a:lnRef>
+          <a:fillRef idx="0">
+            <a:schemeClr val="accent1"/>
+          </a:fillRef>
+          <a:effectRef idx="2">
+            <a:schemeClr val="accent1"/>
+          </a:effectRef>
+          <a:fontRef idx="minor">
+            <a:schemeClr val="tx1"/>
+          </a:fontRef>
+        </p:style>
+        <p:txBody>
+          <a:bodyPr rtlCol="0" anchor="ctr"/>
+          <a:lstStyle/>
+          <a:p>
+            <a:pPr algn="ctr"/>
+            <a:r>
+              <a:rPr lang="en-US" altLang="zh-CN" dirty="0"/>
+              <a:t>·</a:t>
+            </a:r>
+            <a:endParaRPr lang="en-US" dirty="0"/>
+          </a:p>
+        </p:txBody>
+      </p:sp>
+      <p:sp>
+        <p:nvSpPr>
+          <p:cNvPr id="63" name="Freeform: Shape 62">
+            <a:extLst>
+              <a:ext uri="{FF2B5EF4-FFF2-40B4-BE49-F238E27FC236}">
+                <a16:creationId xmlns:a16="http://schemas.microsoft.com/office/drawing/2014/main" id="{E41D24D3-A1AF-980B-69E7-1EFF52868806}"/>
+              </a:ext>
+            </a:extLst>
+          </p:cNvPr>
+          <p:cNvSpPr/>
+          <p:nvPr/>
+        </p:nvSpPr>
+        <p:spPr>
+          <a:xfrm>
+            <a:off x="5239820" y="1068512"/>
+            <a:ext cx="1027416" cy="739740"/>
+          </a:xfrm>
+          <a:custGeom>
+            <a:avLst/>
+            <a:gdLst>
+              <a:gd name="csX0" fmla="*/ 0 w 1027416"/>
+              <a:gd name="csY0" fmla="*/ 0 h 739740"/>
+              <a:gd name="csX1" fmla="*/ 1027416 w 1027416"/>
+              <a:gd name="csY1" fmla="*/ 739740 h 739740"/>
+            </a:gdLst>
+            <a:ahLst/>
+            <a:cxnLst>
+              <a:cxn ang="0">
+                <a:pos x="csX0" y="csY0"/>
+              </a:cxn>
+              <a:cxn ang="0">
+                <a:pos x="csX1" y="csY1"/>
+              </a:cxn>
+            </a:cxnLst>
+            <a:rect l="l" t="t" r="r" b="b"/>
+            <a:pathLst>
+              <a:path w="1027416" h="739740">
+                <a:moveTo>
+                  <a:pt x="0" y="0"/>
+                </a:moveTo>
+                <a:lnTo>
+                  <a:pt x="1027416" y="739740"/>
+                </a:lnTo>
+              </a:path>
+            </a:pathLst>
+          </a:custGeom>
+        </p:spPr>
+        <p:style>
+          <a:lnRef idx="3">
+            <a:schemeClr val="accent1"/>
+          </a:lnRef>
+          <a:fillRef idx="0">
+            <a:schemeClr val="accent1"/>
+          </a:fillRef>
+          <a:effectRef idx="2">
+            <a:schemeClr val="accent1"/>
+          </a:effectRef>
+          <a:fontRef idx="minor">
+            <a:schemeClr val="tx1"/>
+          </a:fontRef>
+        </p:style>
+        <p:txBody>
+          <a:bodyPr rtlCol="0" anchor="ctr"/>
+          <a:lstStyle/>
+          <a:p>
+            <a:pPr algn="ctr"/>
+            <a:endParaRPr lang="en-US"/>
+          </a:p>
+        </p:txBody>
+      </p:sp>
+      <p:sp>
+        <p:nvSpPr>
+          <p:cNvPr id="64" name="Freeform: Shape 63">
+            <a:extLst>
+              <a:ext uri="{FF2B5EF4-FFF2-40B4-BE49-F238E27FC236}">
+                <a16:creationId xmlns:a16="http://schemas.microsoft.com/office/drawing/2014/main" id="{8C643FE2-476F-148C-6392-F1467C64CB92}"/>
+              </a:ext>
+            </a:extLst>
+          </p:cNvPr>
+          <p:cNvSpPr/>
+          <p:nvPr/>
+        </p:nvSpPr>
+        <p:spPr>
+          <a:xfrm>
+            <a:off x="4941870" y="1181528"/>
+            <a:ext cx="0" cy="400692"/>
+          </a:xfrm>
+          <a:custGeom>
+            <a:avLst/>
+            <a:gdLst>
+              <a:gd name="csX0" fmla="*/ 0 w 0"/>
+              <a:gd name="csY0" fmla="*/ 0 h 400692"/>
+              <a:gd name="csX1" fmla="*/ 0 w 0"/>
+              <a:gd name="csY1" fmla="*/ 400692 h 400692"/>
+            </a:gdLst>
+            <a:ahLst/>
+            <a:cxnLst>
+              <a:cxn ang="0">
+                <a:pos x="csX0" y="csY0"/>
+              </a:cxn>
+              <a:cxn ang="0">
+                <a:pos x="csX1" y="csY1"/>
+              </a:cxn>
+            </a:cxnLst>
+            <a:rect l="l" t="t" r="r" b="b"/>
+            <a:pathLst>
+              <a:path h="400692">
+                <a:moveTo>
+                  <a:pt x="0" y="0"/>
+                </a:moveTo>
+                <a:lnTo>
+                  <a:pt x="0" y="400692"/>
+                </a:lnTo>
+              </a:path>
+            </a:pathLst>
+          </a:custGeom>
+        </p:spPr>
+        <p:style>
+          <a:lnRef idx="3">
+            <a:schemeClr val="accent1"/>
+          </a:lnRef>
+          <a:fillRef idx="0">
+            <a:schemeClr val="accent1"/>
+          </a:fillRef>
+          <a:effectRef idx="2">
+            <a:schemeClr val="accent1"/>
+          </a:effectRef>
+          <a:fontRef idx="minor">
+            <a:schemeClr val="tx1"/>
+          </a:fontRef>
+        </p:style>
+        <p:txBody>
+          <a:bodyPr rtlCol="0" anchor="ctr"/>
+          <a:lstStyle/>
+          <a:p>
+            <a:pPr algn="ctr"/>
+            <a:endParaRPr lang="en-US"/>
+          </a:p>
+        </p:txBody>
+      </p:sp>
+      <p:sp>
+        <p:nvSpPr>
+          <p:cNvPr id="65" name="Freeform: Shape 64">
+            <a:extLst>
+              <a:ext uri="{FF2B5EF4-FFF2-40B4-BE49-F238E27FC236}">
+                <a16:creationId xmlns:a16="http://schemas.microsoft.com/office/drawing/2014/main" id="{81E20B50-8193-5DF7-3904-675B1F75ABB0}"/>
+              </a:ext>
+            </a:extLst>
+          </p:cNvPr>
+          <p:cNvSpPr/>
+          <p:nvPr/>
+        </p:nvSpPr>
+        <p:spPr>
+          <a:xfrm>
+            <a:off x="4366517" y="1140431"/>
+            <a:ext cx="421240" cy="113016"/>
+          </a:xfrm>
+          <a:custGeom>
+            <a:avLst/>
+            <a:gdLst>
+              <a:gd name="csX0" fmla="*/ 421240 w 421240"/>
+              <a:gd name="csY0" fmla="*/ 0 h 113016"/>
+              <a:gd name="csX1" fmla="*/ 0 w 421240"/>
+              <a:gd name="csY1" fmla="*/ 113016 h 113016"/>
+            </a:gdLst>
+            <a:ahLst/>
+            <a:cxnLst>
+              <a:cxn ang="0">
+                <a:pos x="csX0" y="csY0"/>
+              </a:cxn>
+              <a:cxn ang="0">
+                <a:pos x="csX1" y="csY1"/>
+              </a:cxn>
+            </a:cxnLst>
+            <a:rect l="l" t="t" r="r" b="b"/>
+            <a:pathLst>
+              <a:path w="421240" h="113016">
+                <a:moveTo>
+                  <a:pt x="421240" y="0"/>
+                </a:moveTo>
+                <a:lnTo>
+                  <a:pt x="0" y="113016"/>
+                </a:lnTo>
+              </a:path>
+            </a:pathLst>
+          </a:custGeom>
+        </p:spPr>
+        <p:style>
+          <a:lnRef idx="3">
+            <a:schemeClr val="accent1"/>
+          </a:lnRef>
+          <a:fillRef idx="0">
+            <a:schemeClr val="accent1"/>
+          </a:fillRef>
+          <a:effectRef idx="2">
+            <a:schemeClr val="accent1"/>
+          </a:effectRef>
+          <a:fontRef idx="minor">
+            <a:schemeClr val="tx1"/>
+          </a:fontRef>
+        </p:style>
+        <p:txBody>
+          <a:bodyPr rtlCol="0" anchor="ctr"/>
+          <a:lstStyle/>
+          <a:p>
+            <a:pPr algn="ctr"/>
+            <a:endParaRPr lang="en-US"/>
+          </a:p>
+        </p:txBody>
+      </p:sp>
+      <p:sp>
+        <p:nvSpPr>
+          <p:cNvPr id="66" name="Freeform: Shape 65">
+            <a:extLst>
+              <a:ext uri="{FF2B5EF4-FFF2-40B4-BE49-F238E27FC236}">
+                <a16:creationId xmlns:a16="http://schemas.microsoft.com/office/drawing/2014/main" id="{7CC9065B-44E9-8069-789E-F15AFCCBFA79}"/>
+              </a:ext>
+            </a:extLst>
+          </p:cNvPr>
+          <p:cNvSpPr/>
+          <p:nvPr/>
+        </p:nvSpPr>
+        <p:spPr>
+          <a:xfrm>
+            <a:off x="5270643" y="1017142"/>
+            <a:ext cx="339047" cy="0"/>
+          </a:xfrm>
+          <a:custGeom>
+            <a:avLst/>
+            <a:gdLst>
+              <a:gd name="csX0" fmla="*/ 0 w 339047"/>
+              <a:gd name="csY0" fmla="*/ 0 h 0"/>
+              <a:gd name="csX1" fmla="*/ 339047 w 339047"/>
+              <a:gd name="csY1" fmla="*/ 0 h 0"/>
+            </a:gdLst>
+            <a:ahLst/>
+            <a:cxnLst>
+              <a:cxn ang="0">
+                <a:pos x="csX0" y="csY0"/>
+              </a:cxn>
+              <a:cxn ang="0">
+                <a:pos x="csX1" y="csY1"/>
+              </a:cxn>
+            </a:cxnLst>
+            <a:rect l="l" t="t" r="r" b="b"/>
+            <a:pathLst>
+              <a:path w="339047">
+                <a:moveTo>
+                  <a:pt x="0" y="0"/>
+                </a:moveTo>
+                <a:lnTo>
+                  <a:pt x="339047" y="0"/>
+                </a:lnTo>
+              </a:path>
+            </a:pathLst>
+          </a:custGeom>
+        </p:spPr>
+        <p:style>
+          <a:lnRef idx="3">
+            <a:schemeClr val="accent1"/>
+          </a:lnRef>
+          <a:fillRef idx="0">
+            <a:schemeClr val="accent1"/>
+          </a:fillRef>
+          <a:effectRef idx="2">
+            <a:schemeClr val="accent1"/>
+          </a:effectRef>
+          <a:fontRef idx="minor">
+            <a:schemeClr val="tx1"/>
+          </a:fontRef>
+        </p:style>
+        <p:txBody>
+          <a:bodyPr rtlCol="0" anchor="ctr"/>
+          <a:lstStyle/>
+          <a:p>
+            <a:pPr algn="ctr"/>
+            <a:endParaRPr lang="en-US"/>
+          </a:p>
+        </p:txBody>
+      </p:sp>
+      <p:sp>
+        <p:nvSpPr>
+          <p:cNvPr id="67" name="Freeform: Shape 66">
+            <a:extLst>
+              <a:ext uri="{FF2B5EF4-FFF2-40B4-BE49-F238E27FC236}">
+                <a16:creationId xmlns:a16="http://schemas.microsoft.com/office/drawing/2014/main" id="{642308F6-960D-6412-8FD4-E7596174CF8E}"/>
+              </a:ext>
+            </a:extLst>
+          </p:cNvPr>
+          <p:cNvSpPr/>
+          <p:nvPr/>
+        </p:nvSpPr>
+        <p:spPr>
+          <a:xfrm>
+            <a:off x="6236413" y="996593"/>
+            <a:ext cx="328774" cy="0"/>
+          </a:xfrm>
+          <a:custGeom>
+            <a:avLst/>
+            <a:gdLst>
+              <a:gd name="csX0" fmla="*/ 0 w 328774"/>
+              <a:gd name="csY0" fmla="*/ 0 h 0"/>
+              <a:gd name="csX1" fmla="*/ 328774 w 328774"/>
+              <a:gd name="csY1" fmla="*/ 0 h 0"/>
+            </a:gdLst>
+            <a:ahLst/>
+            <a:cxnLst>
+              <a:cxn ang="0">
+                <a:pos x="csX0" y="csY0"/>
+              </a:cxn>
+              <a:cxn ang="0">
+                <a:pos x="csX1" y="csY1"/>
+              </a:cxn>
+            </a:cxnLst>
+            <a:rect l="l" t="t" r="r" b="b"/>
+            <a:pathLst>
+              <a:path w="328774">
+                <a:moveTo>
+                  <a:pt x="0" y="0"/>
+                </a:moveTo>
+                <a:lnTo>
+                  <a:pt x="328774" y="0"/>
+                </a:lnTo>
+              </a:path>
+            </a:pathLst>
+          </a:custGeom>
+        </p:spPr>
+        <p:style>
+          <a:lnRef idx="3">
+            <a:schemeClr val="accent1"/>
+          </a:lnRef>
+          <a:fillRef idx="0">
+            <a:schemeClr val="accent1"/>
+          </a:fillRef>
+          <a:effectRef idx="2">
+            <a:schemeClr val="accent1"/>
+          </a:effectRef>
+          <a:fontRef idx="minor">
+            <a:schemeClr val="tx1"/>
+          </a:fontRef>
+        </p:style>
+        <p:txBody>
+          <a:bodyPr rtlCol="0" anchor="ctr"/>
+          <a:lstStyle/>
+          <a:p>
+            <a:pPr algn="ctr"/>
+            <a:endParaRPr lang="en-US"/>
+          </a:p>
+        </p:txBody>
+      </p:sp>
+      <p:sp>
+        <p:nvSpPr>
+          <p:cNvPr id="4" name="Freeform: Shape 3">
+            <a:extLst>
+              <a:ext uri="{FF2B5EF4-FFF2-40B4-BE49-F238E27FC236}">
+                <a16:creationId xmlns:a16="http://schemas.microsoft.com/office/drawing/2014/main" id="{8336E6CE-D36B-192F-9E2A-EBE0292B51BF}"/>
+              </a:ext>
+            </a:extLst>
+          </p:cNvPr>
+          <p:cNvSpPr/>
+          <p:nvPr/>
+        </p:nvSpPr>
+        <p:spPr>
+          <a:xfrm>
+            <a:off x="3648075" y="3009900"/>
+            <a:ext cx="4763" cy="442913"/>
+          </a:xfrm>
+          <a:custGeom>
+            <a:avLst/>
+            <a:gdLst>
+              <a:gd name="csX0" fmla="*/ 0 w 4763"/>
+              <a:gd name="csY0" fmla="*/ 0 h 442913"/>
+              <a:gd name="csX1" fmla="*/ 4763 w 4763"/>
+              <a:gd name="csY1" fmla="*/ 442913 h 442913"/>
+            </a:gdLst>
+            <a:ahLst/>
+            <a:cxnLst>
+              <a:cxn ang="0">
+                <a:pos x="csX0" y="csY0"/>
+              </a:cxn>
+              <a:cxn ang="0">
+                <a:pos x="csX1" y="csY1"/>
+              </a:cxn>
+            </a:cxnLst>
+            <a:rect l="l" t="t" r="r" b="b"/>
+            <a:pathLst>
+              <a:path w="4763" h="442913">
+                <a:moveTo>
+                  <a:pt x="0" y="0"/>
+                </a:moveTo>
+                <a:cubicBezTo>
+                  <a:pt x="1588" y="147638"/>
+                  <a:pt x="3175" y="295275"/>
+                  <a:pt x="4763" y="442913"/>
+                </a:cubicBezTo>
+              </a:path>
+            </a:pathLst>
+          </a:custGeom>
+        </p:spPr>
+        <p:style>
+          <a:lnRef idx="3">
+            <a:schemeClr val="accent1"/>
+          </a:lnRef>
+          <a:fillRef idx="0">
+            <a:schemeClr val="accent1"/>
+          </a:fillRef>
+          <a:effectRef idx="2">
+            <a:schemeClr val="accent1"/>
+          </a:effectRef>
+          <a:fontRef idx="minor">
+            <a:schemeClr val="tx1"/>
+          </a:fontRef>
+        </p:style>
+        <p:txBody>
+          <a:bodyPr rtlCol="0" anchor="ctr"/>
+          <a:lstStyle/>
+          <a:p>
+            <a:pPr algn="ctr"/>
+            <a:endParaRPr lang="en-US"/>
+          </a:p>
+        </p:txBody>
+      </p:sp>
+      <p:sp>
+        <p:nvSpPr>
+          <p:cNvPr id="7" name="Freeform: Shape 6">
+            <a:extLst>
+              <a:ext uri="{FF2B5EF4-FFF2-40B4-BE49-F238E27FC236}">
+                <a16:creationId xmlns:a16="http://schemas.microsoft.com/office/drawing/2014/main" id="{9D988C10-ADE0-236A-3731-B9169ED1BE69}"/>
+              </a:ext>
+            </a:extLst>
+          </p:cNvPr>
+          <p:cNvSpPr/>
+          <p:nvPr/>
+        </p:nvSpPr>
+        <p:spPr>
+          <a:xfrm>
+            <a:off x="3810000" y="2414588"/>
+            <a:ext cx="809625" cy="1028700"/>
+          </a:xfrm>
+          <a:custGeom>
+            <a:avLst/>
+            <a:gdLst>
+              <a:gd name="csX0" fmla="*/ 809625 w 809625"/>
+              <a:gd name="csY0" fmla="*/ 0 h 1028700"/>
+              <a:gd name="csX1" fmla="*/ 261938 w 809625"/>
+              <a:gd name="csY1" fmla="*/ 0 h 1028700"/>
+              <a:gd name="csX2" fmla="*/ 261938 w 809625"/>
+              <a:gd name="csY2" fmla="*/ 866775 h 1028700"/>
+              <a:gd name="csX3" fmla="*/ 0 w 809625"/>
+              <a:gd name="csY3" fmla="*/ 866775 h 1028700"/>
+              <a:gd name="csX4" fmla="*/ 0 w 809625"/>
+              <a:gd name="csY4" fmla="*/ 1028700 h 1028700"/>
+            </a:gdLst>
+            <a:ahLst/>
+            <a:cxnLst>
+              <a:cxn ang="0">
+                <a:pos x="csX0" y="csY0"/>
+              </a:cxn>
+              <a:cxn ang="0">
+                <a:pos x="csX1" y="csY1"/>
+              </a:cxn>
+              <a:cxn ang="0">
+                <a:pos x="csX2" y="csY2"/>
+              </a:cxn>
+              <a:cxn ang="0">
+                <a:pos x="csX3" y="csY3"/>
+              </a:cxn>
+              <a:cxn ang="0">
+                <a:pos x="csX4" y="csY4"/>
+              </a:cxn>
+            </a:cxnLst>
+            <a:rect l="l" t="t" r="r" b="b"/>
+            <a:pathLst>
+              <a:path w="809625" h="1028700">
+                <a:moveTo>
+                  <a:pt x="809625" y="0"/>
+                </a:moveTo>
+                <a:lnTo>
+                  <a:pt x="261938" y="0"/>
+                </a:lnTo>
+                <a:lnTo>
+                  <a:pt x="261938" y="866775"/>
+                </a:lnTo>
+                <a:lnTo>
+                  <a:pt x="0" y="866775"/>
+                </a:lnTo>
+                <a:lnTo>
+                  <a:pt x="0" y="1028700"/>
+                </a:lnTo>
+              </a:path>
+            </a:pathLst>
+          </a:custGeom>
+        </p:spPr>
+        <p:style>
+          <a:lnRef idx="3">
+            <a:schemeClr val="accent1"/>
+          </a:lnRef>
+          <a:fillRef idx="0">
+            <a:schemeClr val="accent1"/>
+          </a:fillRef>
+          <a:effectRef idx="2">
+            <a:schemeClr val="accent1"/>
+          </a:effectRef>
+          <a:fontRef idx="minor">
+            <a:schemeClr val="tx1"/>
+          </a:fontRef>
+        </p:style>
+        <p:txBody>
+          <a:bodyPr rtlCol="0" anchor="ctr"/>
+          <a:lstStyle/>
+          <a:p>
+            <a:pPr algn="ctr"/>
+            <a:endParaRPr lang="en-US"/>
+          </a:p>
+        </p:txBody>
+      </p:sp>
+      <p:sp>
+        <p:nvSpPr>
+          <p:cNvPr id="9" name="Freeform: Shape 8">
+            <a:extLst>
+              <a:ext uri="{FF2B5EF4-FFF2-40B4-BE49-F238E27FC236}">
+                <a16:creationId xmlns:a16="http://schemas.microsoft.com/office/drawing/2014/main" id="{82B398D6-8A46-0C74-C947-83276010901A}"/>
+              </a:ext>
+            </a:extLst>
+          </p:cNvPr>
+          <p:cNvSpPr/>
+          <p:nvPr/>
+        </p:nvSpPr>
+        <p:spPr>
+          <a:xfrm>
+            <a:off x="3750067" y="1839074"/>
+            <a:ext cx="852755" cy="1623317"/>
+          </a:xfrm>
+          <a:custGeom>
+            <a:avLst/>
+            <a:gdLst>
+              <a:gd name="csX0" fmla="*/ 0 w 852755"/>
+              <a:gd name="csY0" fmla="*/ 1623317 h 1623317"/>
+              <a:gd name="csX1" fmla="*/ 852755 w 852755"/>
+              <a:gd name="csY1" fmla="*/ 0 h 1623317"/>
+            </a:gdLst>
+            <a:ahLst/>
+            <a:cxnLst>
+              <a:cxn ang="0">
+                <a:pos x="csX0" y="csY0"/>
+              </a:cxn>
+              <a:cxn ang="0">
+                <a:pos x="csX1" y="csY1"/>
+              </a:cxn>
+            </a:cxnLst>
+            <a:rect l="l" t="t" r="r" b="b"/>
+            <a:pathLst>
+              <a:path w="852755" h="1623317">
+                <a:moveTo>
+                  <a:pt x="0" y="1623317"/>
+                </a:moveTo>
+                <a:lnTo>
+                  <a:pt x="852755" y="0"/>
+                </a:lnTo>
+              </a:path>
+            </a:pathLst>
+          </a:custGeom>
+        </p:spPr>
+        <p:style>
+          <a:lnRef idx="3">
+            <a:schemeClr val="accent2"/>
+          </a:lnRef>
+          <a:fillRef idx="0">
+            <a:schemeClr val="accent2"/>
+          </a:fillRef>
+          <a:effectRef idx="2">
+            <a:schemeClr val="accent2"/>
+          </a:effectRef>
+          <a:fontRef idx="minor">
+            <a:schemeClr val="tx1"/>
+          </a:fontRef>
+        </p:style>
+        <p:txBody>
+          <a:bodyPr rtlCol="0" anchor="ctr"/>
+          <a:lstStyle/>
+          <a:p>
+            <a:pPr algn="ctr"/>
+            <a:endParaRPr lang="en-US"/>
+          </a:p>
+        </p:txBody>
+      </p:sp>
+      <p:sp>
+        <p:nvSpPr>
+          <p:cNvPr id="10" name="Freeform: Shape 9">
+            <a:extLst>
+              <a:ext uri="{FF2B5EF4-FFF2-40B4-BE49-F238E27FC236}">
+                <a16:creationId xmlns:a16="http://schemas.microsoft.com/office/drawing/2014/main" id="{F00B211B-D0DE-7074-921E-8FA903AD314C}"/>
+              </a:ext>
+            </a:extLst>
+          </p:cNvPr>
+          <p:cNvSpPr/>
+          <p:nvPr/>
+        </p:nvSpPr>
+        <p:spPr>
+          <a:xfrm>
+            <a:off x="4952144" y="1150706"/>
+            <a:ext cx="821932" cy="1099334"/>
+          </a:xfrm>
+          <a:custGeom>
+            <a:avLst/>
+            <a:gdLst>
+              <a:gd name="csX0" fmla="*/ 0 w 821932"/>
+              <a:gd name="csY0" fmla="*/ 1099334 h 1099334"/>
+              <a:gd name="csX1" fmla="*/ 821932 w 821932"/>
+              <a:gd name="csY1" fmla="*/ 0 h 1099334"/>
+            </a:gdLst>
+            <a:ahLst/>
+            <a:cxnLst>
+              <a:cxn ang="0">
+                <a:pos x="csX0" y="csY0"/>
+              </a:cxn>
+              <a:cxn ang="0">
+                <a:pos x="csX1" y="csY1"/>
+              </a:cxn>
+            </a:cxnLst>
+            <a:rect l="l" t="t" r="r" b="b"/>
+            <a:pathLst>
+              <a:path w="821932" h="1099334">
+                <a:moveTo>
+                  <a:pt x="0" y="1099334"/>
+                </a:moveTo>
+                <a:lnTo>
+                  <a:pt x="821932" y="0"/>
+                </a:lnTo>
+              </a:path>
+            </a:pathLst>
+          </a:custGeom>
+        </p:spPr>
+        <p:style>
+          <a:lnRef idx="3">
+            <a:schemeClr val="accent2"/>
+          </a:lnRef>
+          <a:fillRef idx="0">
+            <a:schemeClr val="accent2"/>
+          </a:fillRef>
+          <a:effectRef idx="2">
+            <a:schemeClr val="accent2"/>
+          </a:effectRef>
+          <a:fontRef idx="minor">
+            <a:schemeClr val="tx1"/>
+          </a:fontRef>
+        </p:style>
+        <p:txBody>
+          <a:bodyPr rtlCol="0" anchor="ctr"/>
+          <a:lstStyle/>
+          <a:p>
+            <a:pPr algn="ctr"/>
+            <a:endParaRPr lang="en-US"/>
+          </a:p>
+        </p:txBody>
+      </p:sp>
+      <p:sp>
+        <p:nvSpPr>
+          <p:cNvPr id="11" name="Freeform: Shape 10">
+            <a:extLst>
+              <a:ext uri="{FF2B5EF4-FFF2-40B4-BE49-F238E27FC236}">
+                <a16:creationId xmlns:a16="http://schemas.microsoft.com/office/drawing/2014/main" id="{3271D490-50AE-2987-AB94-4BD8E4120F6C}"/>
+              </a:ext>
+            </a:extLst>
+          </p:cNvPr>
+          <p:cNvSpPr/>
+          <p:nvPr/>
+        </p:nvSpPr>
+        <p:spPr>
+          <a:xfrm>
+            <a:off x="5167901" y="1150706"/>
+            <a:ext cx="678095" cy="1130157"/>
+          </a:xfrm>
+          <a:custGeom>
+            <a:avLst/>
+            <a:gdLst>
+              <a:gd name="csX0" fmla="*/ 678095 w 678095"/>
+              <a:gd name="csY0" fmla="*/ 1130157 h 1130157"/>
+              <a:gd name="csX1" fmla="*/ 0 w 678095"/>
+              <a:gd name="csY1" fmla="*/ 0 h 1130157"/>
+            </a:gdLst>
+            <a:ahLst/>
+            <a:cxnLst>
+              <a:cxn ang="0">
+                <a:pos x="csX0" y="csY0"/>
+              </a:cxn>
+              <a:cxn ang="0">
+                <a:pos x="csX1" y="csY1"/>
+              </a:cxn>
+            </a:cxnLst>
+            <a:rect l="l" t="t" r="r" b="b"/>
+            <a:pathLst>
+              <a:path w="678095" h="1130157">
+                <a:moveTo>
+                  <a:pt x="678095" y="1130157"/>
+                </a:moveTo>
+                <a:lnTo>
+                  <a:pt x="0" y="0"/>
+                </a:lnTo>
+              </a:path>
+            </a:pathLst>
+          </a:custGeom>
+        </p:spPr>
+        <p:style>
+          <a:lnRef idx="3">
+            <a:schemeClr val="accent2"/>
+          </a:lnRef>
+          <a:fillRef idx="0">
+            <a:schemeClr val="accent2"/>
+          </a:fillRef>
+          <a:effectRef idx="2">
+            <a:schemeClr val="accent2"/>
+          </a:effectRef>
+          <a:fontRef idx="minor">
+            <a:schemeClr val="tx1"/>
+          </a:fontRef>
+        </p:style>
+        <p:txBody>
+          <a:bodyPr rtlCol="0" anchor="ctr"/>
+          <a:lstStyle/>
+          <a:p>
+            <a:pPr algn="ctr"/>
+            <a:endParaRPr lang="en-US"/>
+          </a:p>
+        </p:txBody>
+      </p:sp>
+      <p:sp>
+        <p:nvSpPr>
+          <p:cNvPr id="12" name="Freeform: Shape 11">
+            <a:extLst>
+              <a:ext uri="{FF2B5EF4-FFF2-40B4-BE49-F238E27FC236}">
+                <a16:creationId xmlns:a16="http://schemas.microsoft.com/office/drawing/2014/main" id="{B8508A59-8AD5-9953-0AB3-B9F820328EA2}"/>
+              </a:ext>
+            </a:extLst>
+          </p:cNvPr>
+          <p:cNvSpPr/>
+          <p:nvPr/>
+        </p:nvSpPr>
+        <p:spPr>
+          <a:xfrm>
+            <a:off x="5876819" y="1160980"/>
+            <a:ext cx="10274" cy="1150705"/>
+          </a:xfrm>
+          <a:custGeom>
+            <a:avLst/>
+            <a:gdLst>
+              <a:gd name="csX0" fmla="*/ 0 w 10274"/>
+              <a:gd name="csY0" fmla="*/ 1150705 h 1150705"/>
+              <a:gd name="csX1" fmla="*/ 10274 w 10274"/>
+              <a:gd name="csY1" fmla="*/ 0 h 1150705"/>
+            </a:gdLst>
+            <a:ahLst/>
+            <a:cxnLst>
+              <a:cxn ang="0">
+                <a:pos x="csX0" y="csY0"/>
+              </a:cxn>
+              <a:cxn ang="0">
+                <a:pos x="csX1" y="csY1"/>
+              </a:cxn>
+            </a:cxnLst>
+            <a:rect l="l" t="t" r="r" b="b"/>
+            <a:pathLst>
+              <a:path w="10274" h="1150705">
+                <a:moveTo>
+                  <a:pt x="0" y="1150705"/>
+                </a:moveTo>
+                <a:cubicBezTo>
+                  <a:pt x="3425" y="767137"/>
+                  <a:pt x="6849" y="383568"/>
+                  <a:pt x="10274" y="0"/>
+                </a:cubicBezTo>
+              </a:path>
+            </a:pathLst>
+          </a:custGeom>
+        </p:spPr>
+        <p:style>
+          <a:lnRef idx="3">
+            <a:schemeClr val="accent2"/>
+          </a:lnRef>
+          <a:fillRef idx="0">
+            <a:schemeClr val="accent2"/>
+          </a:fillRef>
+          <a:effectRef idx="2">
+            <a:schemeClr val="accent2"/>
+          </a:effectRef>
+          <a:fontRef idx="minor">
+            <a:schemeClr val="tx1"/>
+          </a:fontRef>
+        </p:style>
+        <p:txBody>
+          <a:bodyPr rtlCol="0" anchor="ctr"/>
+          <a:lstStyle/>
+          <a:p>
+            <a:pPr algn="ctr"/>
+            <a:endParaRPr lang="en-US"/>
+          </a:p>
+        </p:txBody>
+      </p:sp>
+      <p:sp>
+        <p:nvSpPr>
+          <p:cNvPr id="13" name="Freeform: Shape 12">
+            <a:extLst>
+              <a:ext uri="{FF2B5EF4-FFF2-40B4-BE49-F238E27FC236}">
+                <a16:creationId xmlns:a16="http://schemas.microsoft.com/office/drawing/2014/main" id="{946F8DC0-43D8-5770-212E-904B4CC65F06}"/>
+              </a:ext>
+            </a:extLst>
+          </p:cNvPr>
+          <p:cNvSpPr/>
+          <p:nvPr/>
+        </p:nvSpPr>
+        <p:spPr>
+          <a:xfrm>
+            <a:off x="6082301" y="1160980"/>
+            <a:ext cx="832207" cy="2311685"/>
+          </a:xfrm>
+          <a:custGeom>
+            <a:avLst/>
+            <a:gdLst>
+              <a:gd name="csX0" fmla="*/ 832207 w 832207"/>
+              <a:gd name="csY0" fmla="*/ 2311685 h 2311685"/>
+              <a:gd name="csX1" fmla="*/ 0 w 832207"/>
+              <a:gd name="csY1" fmla="*/ 0 h 2311685"/>
+            </a:gdLst>
+            <a:ahLst/>
+            <a:cxnLst>
+              <a:cxn ang="0">
+                <a:pos x="csX0" y="csY0"/>
+              </a:cxn>
+              <a:cxn ang="0">
+                <a:pos x="csX1" y="csY1"/>
+              </a:cxn>
+            </a:cxnLst>
+            <a:rect l="l" t="t" r="r" b="b"/>
+            <a:pathLst>
+              <a:path w="832207" h="2311685">
+                <a:moveTo>
+                  <a:pt x="832207" y="2311685"/>
+                </a:moveTo>
+                <a:lnTo>
+                  <a:pt x="0" y="0"/>
+                </a:lnTo>
+              </a:path>
+            </a:pathLst>
+          </a:custGeom>
+        </p:spPr>
+        <p:style>
+          <a:lnRef idx="3">
+            <a:schemeClr val="accent2"/>
+          </a:lnRef>
+          <a:fillRef idx="0">
+            <a:schemeClr val="accent2"/>
+          </a:fillRef>
+          <a:effectRef idx="2">
+            <a:schemeClr val="accent2"/>
+          </a:effectRef>
+          <a:fontRef idx="minor">
+            <a:schemeClr val="tx1"/>
+          </a:fontRef>
+        </p:style>
+        <p:txBody>
+          <a:bodyPr rtlCol="0" anchor="ctr"/>
+          <a:lstStyle/>
+          <a:p>
+            <a:pPr algn="ctr"/>
+            <a:endParaRPr lang="en-US"/>
+          </a:p>
+        </p:txBody>
+      </p:sp>
+      <p:sp>
+        <p:nvSpPr>
+          <p:cNvPr id="2" name="Freeform: Shape 1">
+            <a:extLst>
+              <a:ext uri="{FF2B5EF4-FFF2-40B4-BE49-F238E27FC236}">
+                <a16:creationId xmlns:a16="http://schemas.microsoft.com/office/drawing/2014/main" id="{1EED2848-DB3F-E266-45E0-BA78A32C47FE}"/>
+              </a:ext>
+            </a:extLst>
+          </p:cNvPr>
+          <p:cNvSpPr/>
+          <p:nvPr/>
+        </p:nvSpPr>
+        <p:spPr>
+          <a:xfrm>
+            <a:off x="5105400" y="2571750"/>
+            <a:ext cx="762000" cy="848623"/>
+          </a:xfrm>
+          <a:custGeom>
+            <a:avLst/>
+            <a:gdLst>
+              <a:gd name="csX0" fmla="*/ 762000 w 762000"/>
+              <a:gd name="csY0" fmla="*/ 0 h 863600"/>
+              <a:gd name="csX1" fmla="*/ 762000 w 762000"/>
+              <a:gd name="csY1" fmla="*/ 273050 h 863600"/>
+              <a:gd name="csX2" fmla="*/ 0 w 762000"/>
+              <a:gd name="csY2" fmla="*/ 279400 h 863600"/>
+              <a:gd name="csX3" fmla="*/ 0 w 762000"/>
+              <a:gd name="csY3" fmla="*/ 863600 h 863600"/>
+            </a:gdLst>
+            <a:ahLst/>
+            <a:cxnLst>
+              <a:cxn ang="0">
+                <a:pos x="csX0" y="csY0"/>
+              </a:cxn>
+              <a:cxn ang="0">
+                <a:pos x="csX1" y="csY1"/>
+              </a:cxn>
+              <a:cxn ang="0">
+                <a:pos x="csX2" y="csY2"/>
+              </a:cxn>
+              <a:cxn ang="0">
+                <a:pos x="csX3" y="csY3"/>
+              </a:cxn>
+            </a:cxnLst>
+            <a:rect l="l" t="t" r="r" b="b"/>
+            <a:pathLst>
+              <a:path w="762000" h="863600">
+                <a:moveTo>
+                  <a:pt x="762000" y="0"/>
+                </a:moveTo>
+                <a:lnTo>
+                  <a:pt x="762000" y="273050"/>
+                </a:lnTo>
+                <a:lnTo>
+                  <a:pt x="0" y="279400"/>
+                </a:lnTo>
+                <a:lnTo>
+                  <a:pt x="0" y="863600"/>
+                </a:lnTo>
+              </a:path>
+            </a:pathLst>
+          </a:custGeom>
+        </p:spPr>
+        <p:style>
+          <a:lnRef idx="3">
+            <a:schemeClr val="accent1"/>
+          </a:lnRef>
+          <a:fillRef idx="0">
+            <a:schemeClr val="accent1"/>
+          </a:fillRef>
+          <a:effectRef idx="2">
+            <a:schemeClr val="accent1"/>
+          </a:effectRef>
+          <a:fontRef idx="minor">
+            <a:schemeClr val="tx1"/>
+          </a:fontRef>
+        </p:style>
+        <p:txBody>
+          <a:bodyPr rtlCol="0" anchor="ctr"/>
+          <a:lstStyle/>
+          <a:p>
+            <a:pPr algn="ctr"/>
+            <a:endParaRPr lang="en-US"/>
+          </a:p>
+        </p:txBody>
+      </p:sp>
+      <p:sp>
+        <p:nvSpPr>
+          <p:cNvPr id="14" name="Freeform: Shape 13">
+            <a:extLst>
+              <a:ext uri="{FF2B5EF4-FFF2-40B4-BE49-F238E27FC236}">
+                <a16:creationId xmlns:a16="http://schemas.microsoft.com/office/drawing/2014/main" id="{725D4481-0B94-1F60-DEE0-C6B3F7FF4EBF}"/>
+              </a:ext>
+            </a:extLst>
+          </p:cNvPr>
+          <p:cNvSpPr/>
+          <p:nvPr/>
+        </p:nvSpPr>
+        <p:spPr>
+          <a:xfrm>
+            <a:off x="4502150" y="3232150"/>
+            <a:ext cx="279400" cy="196850"/>
+          </a:xfrm>
+          <a:custGeom>
+            <a:avLst/>
+            <a:gdLst>
+              <a:gd name="csX0" fmla="*/ 0 w 279400"/>
+              <a:gd name="csY0" fmla="*/ 0 h 209550"/>
+              <a:gd name="csX1" fmla="*/ 6350 w 279400"/>
+              <a:gd name="csY1" fmla="*/ 101600 h 209550"/>
+              <a:gd name="csX2" fmla="*/ 273050 w 279400"/>
+              <a:gd name="csY2" fmla="*/ 107950 h 209550"/>
+              <a:gd name="csX3" fmla="*/ 279400 w 279400"/>
+              <a:gd name="csY3" fmla="*/ 209550 h 209550"/>
+            </a:gdLst>
+            <a:ahLst/>
+            <a:cxnLst>
+              <a:cxn ang="0">
+                <a:pos x="csX0" y="csY0"/>
+              </a:cxn>
+              <a:cxn ang="0">
+                <a:pos x="csX1" y="csY1"/>
+              </a:cxn>
+              <a:cxn ang="0">
+                <a:pos x="csX2" y="csY2"/>
+              </a:cxn>
+              <a:cxn ang="0">
+                <a:pos x="csX3" y="csY3"/>
+              </a:cxn>
+            </a:cxnLst>
+            <a:rect l="l" t="t" r="r" b="b"/>
+            <a:pathLst>
+              <a:path w="279400" h="209550">
+                <a:moveTo>
+                  <a:pt x="0" y="0"/>
+                </a:moveTo>
+                <a:lnTo>
+                  <a:pt x="6350" y="101600"/>
+                </a:lnTo>
+                <a:lnTo>
+                  <a:pt x="273050" y="107950"/>
+                </a:lnTo>
+                <a:lnTo>
+                  <a:pt x="279400" y="209550"/>
+                </a:lnTo>
+              </a:path>
+            </a:pathLst>
+          </a:custGeom>
+          <a:ln>
+            <a:solidFill>
+              <a:schemeClr val="accent3">
+                <a:lumMod val="60000"/>
+                <a:lumOff val="40000"/>
+              </a:schemeClr>
+            </a:solidFill>
+          </a:ln>
+        </p:spPr>
+        <p:style>
+          <a:lnRef idx="3">
+            <a:schemeClr val="accent1"/>
+          </a:lnRef>
+          <a:fillRef idx="0">
+            <a:schemeClr val="accent1"/>
+          </a:fillRef>
+          <a:effectRef idx="2">
+            <a:schemeClr val="accent1"/>
+          </a:effectRef>
+          <a:fontRef idx="minor">
+            <a:schemeClr val="tx1"/>
+          </a:fontRef>
+        </p:style>
+        <p:txBody>
+          <a:bodyPr rtlCol="0" anchor="ctr"/>
+          <a:lstStyle/>
+          <a:p>
+            <a:pPr algn="ctr"/>
+            <a:endParaRPr lang="en-US"/>
+          </a:p>
+        </p:txBody>
+      </p:sp>
+      <p:sp>
+        <p:nvSpPr>
+          <p:cNvPr id="16" name="Freeform: Shape 15">
+            <a:extLst>
+              <a:ext uri="{FF2B5EF4-FFF2-40B4-BE49-F238E27FC236}">
+                <a16:creationId xmlns:a16="http://schemas.microsoft.com/office/drawing/2014/main" id="{470FFA48-756C-8483-3AD0-07E735BAC2F1}"/>
+              </a:ext>
+            </a:extLst>
+          </p:cNvPr>
+          <p:cNvSpPr/>
+          <p:nvPr/>
+        </p:nvSpPr>
+        <p:spPr>
+          <a:xfrm>
+            <a:off x="5276850" y="3270250"/>
+            <a:ext cx="444500" cy="247650"/>
+          </a:xfrm>
+          <a:custGeom>
+            <a:avLst/>
+            <a:gdLst>
+              <a:gd name="csX0" fmla="*/ 438150 w 444500"/>
+              <a:gd name="csY0" fmla="*/ 0 h 247650"/>
+              <a:gd name="csX1" fmla="*/ 444500 w 444500"/>
+              <a:gd name="csY1" fmla="*/ 247650 h 247650"/>
+              <a:gd name="csX2" fmla="*/ 0 w 444500"/>
+              <a:gd name="csY2" fmla="*/ 247650 h 247650"/>
+            </a:gdLst>
+            <a:ahLst/>
+            <a:cxnLst>
+              <a:cxn ang="0">
+                <a:pos x="csX0" y="csY0"/>
+              </a:cxn>
+              <a:cxn ang="0">
+                <a:pos x="csX1" y="csY1"/>
+              </a:cxn>
+              <a:cxn ang="0">
+                <a:pos x="csX2" y="csY2"/>
+              </a:cxn>
+            </a:cxnLst>
+            <a:rect l="l" t="t" r="r" b="b"/>
+            <a:pathLst>
+              <a:path w="444500" h="247650">
+                <a:moveTo>
+                  <a:pt x="438150" y="0"/>
+                </a:moveTo>
+                <a:lnTo>
+                  <a:pt x="444500" y="247650"/>
+                </a:lnTo>
+                <a:lnTo>
+                  <a:pt x="0" y="247650"/>
+                </a:lnTo>
+              </a:path>
+            </a:pathLst>
+          </a:custGeom>
+        </p:spPr>
+        <p:style>
+          <a:lnRef idx="3">
+            <a:schemeClr val="accent1"/>
+          </a:lnRef>
+          <a:fillRef idx="0">
+            <a:schemeClr val="accent1"/>
+          </a:fillRef>
+          <a:effectRef idx="2">
+            <a:schemeClr val="accent1"/>
+          </a:effectRef>
+          <a:fontRef idx="minor">
+            <a:schemeClr val="tx1"/>
+          </a:fontRef>
+        </p:style>
+        <p:txBody>
+          <a:bodyPr rtlCol="0" anchor="ctr"/>
+          <a:lstStyle/>
+          <a:p>
+            <a:pPr algn="ctr"/>
+            <a:endParaRPr lang="en-US"/>
+          </a:p>
+        </p:txBody>
+      </p:sp>
+      <p:sp>
+        <p:nvSpPr>
+          <p:cNvPr id="17" name="Freeform: Shape 16">
+            <a:extLst>
+              <a:ext uri="{FF2B5EF4-FFF2-40B4-BE49-F238E27FC236}">
+                <a16:creationId xmlns:a16="http://schemas.microsoft.com/office/drawing/2014/main" id="{CD622EA5-C962-95A7-4D18-9CCB13A6ACE6}"/>
+              </a:ext>
+            </a:extLst>
+          </p:cNvPr>
+          <p:cNvSpPr/>
+          <p:nvPr/>
+        </p:nvSpPr>
+        <p:spPr>
+          <a:xfrm>
+            <a:off x="5276850" y="3605213"/>
+            <a:ext cx="1400175" cy="0"/>
+          </a:xfrm>
+          <a:custGeom>
+            <a:avLst/>
+            <a:gdLst>
+              <a:gd name="csX0" fmla="*/ 0 w 1400175"/>
+              <a:gd name="csY0" fmla="*/ 0 h 0"/>
+              <a:gd name="csX1" fmla="*/ 1400175 w 1400175"/>
+              <a:gd name="csY1" fmla="*/ 0 h 0"/>
+            </a:gdLst>
+            <a:ahLst/>
+            <a:cxnLst>
+              <a:cxn ang="0">
+                <a:pos x="csX0" y="csY0"/>
+              </a:cxn>
+              <a:cxn ang="0">
+                <a:pos x="csX1" y="csY1"/>
+              </a:cxn>
+            </a:cxnLst>
+            <a:rect l="l" t="t" r="r" b="b"/>
+            <a:pathLst>
+              <a:path w="1400175">
+                <a:moveTo>
+                  <a:pt x="0" y="0"/>
+                </a:moveTo>
+                <a:lnTo>
+                  <a:pt x="1400175" y="0"/>
+                </a:lnTo>
+              </a:path>
+            </a:pathLst>
+          </a:custGeom>
+        </p:spPr>
+        <p:style>
+          <a:lnRef idx="3">
+            <a:schemeClr val="accent1"/>
+          </a:lnRef>
+          <a:fillRef idx="0">
+            <a:schemeClr val="accent1"/>
+          </a:fillRef>
+          <a:effectRef idx="2">
+            <a:schemeClr val="accent1"/>
+          </a:effectRef>
+          <a:fontRef idx="minor">
+            <a:schemeClr val="tx1"/>
+          </a:fontRef>
+        </p:style>
+        <p:txBody>
+          <a:bodyPr rtlCol="0" anchor="ctr"/>
+          <a:lstStyle/>
+          <a:p>
+            <a:pPr algn="ctr"/>
+            <a:endParaRPr lang="en-US"/>
+          </a:p>
+        </p:txBody>
+      </p:sp>
+      <p:sp>
+        <p:nvSpPr>
+          <p:cNvPr id="18" name="Freeform: Shape 17">
+            <a:extLst>
+              <a:ext uri="{FF2B5EF4-FFF2-40B4-BE49-F238E27FC236}">
+                <a16:creationId xmlns:a16="http://schemas.microsoft.com/office/drawing/2014/main" id="{082A2D90-8AF2-3F66-1A9B-1DBF8C51C83E}"/>
+              </a:ext>
+            </a:extLst>
+          </p:cNvPr>
+          <p:cNvSpPr/>
+          <p:nvPr/>
+        </p:nvSpPr>
+        <p:spPr>
+          <a:xfrm>
+            <a:off x="3981450" y="3605213"/>
+            <a:ext cx="642938" cy="0"/>
+          </a:xfrm>
+          <a:custGeom>
+            <a:avLst/>
+            <a:gdLst>
+              <a:gd name="csX0" fmla="*/ 0 w 642938"/>
+              <a:gd name="csY0" fmla="*/ 0 h 0"/>
+              <a:gd name="csX1" fmla="*/ 642938 w 642938"/>
+              <a:gd name="csY1" fmla="*/ 0 h 0"/>
+            </a:gdLst>
+            <a:ahLst/>
+            <a:cxnLst>
+              <a:cxn ang="0">
+                <a:pos x="csX0" y="csY0"/>
+              </a:cxn>
+              <a:cxn ang="0">
+                <a:pos x="csX1" y="csY1"/>
+              </a:cxn>
+            </a:cxnLst>
+            <a:rect l="l" t="t" r="r" b="b"/>
+            <a:pathLst>
+              <a:path w="642938">
+                <a:moveTo>
+                  <a:pt x="0" y="0"/>
+                </a:moveTo>
+                <a:lnTo>
+                  <a:pt x="642938" y="0"/>
+                </a:lnTo>
+              </a:path>
+            </a:pathLst>
+          </a:custGeom>
+        </p:spPr>
+        <p:style>
+          <a:lnRef idx="3">
+            <a:schemeClr val="accent1"/>
+          </a:lnRef>
+          <a:fillRef idx="0">
+            <a:schemeClr val="accent1"/>
+          </a:fillRef>
+          <a:effectRef idx="2">
+            <a:schemeClr val="accent1"/>
+          </a:effectRef>
+          <a:fontRef idx="minor">
+            <a:schemeClr val="tx1"/>
+          </a:fontRef>
+        </p:style>
+        <p:txBody>
+          <a:bodyPr rtlCol="0" anchor="ctr"/>
+          <a:lstStyle/>
+          <a:p>
+            <a:pPr algn="ctr"/>
+            <a:endParaRPr lang="en-US"/>
+          </a:p>
+        </p:txBody>
+      </p:sp>
+      <p:sp>
+        <p:nvSpPr>
+          <p:cNvPr id="19" name="Freeform: Shape 18">
+            <a:extLst>
+              <a:ext uri="{FF2B5EF4-FFF2-40B4-BE49-F238E27FC236}">
+                <a16:creationId xmlns:a16="http://schemas.microsoft.com/office/drawing/2014/main" id="{B854E31F-B284-6CFE-966F-AE1C0F7B1A21}"/>
+              </a:ext>
+            </a:extLst>
+          </p:cNvPr>
+          <p:cNvSpPr/>
+          <p:nvPr/>
+        </p:nvSpPr>
+        <p:spPr>
+          <a:xfrm>
+            <a:off x="6419850" y="3276600"/>
+            <a:ext cx="271463" cy="247650"/>
+          </a:xfrm>
+          <a:custGeom>
+            <a:avLst/>
+            <a:gdLst>
+              <a:gd name="csX0" fmla="*/ 0 w 271463"/>
+              <a:gd name="csY0" fmla="*/ 0 h 247650"/>
+              <a:gd name="csX1" fmla="*/ 4763 w 271463"/>
+              <a:gd name="csY1" fmla="*/ 247650 h 247650"/>
+              <a:gd name="csX2" fmla="*/ 271463 w 271463"/>
+              <a:gd name="csY2" fmla="*/ 247650 h 247650"/>
+            </a:gdLst>
+            <a:ahLst/>
+            <a:cxnLst>
+              <a:cxn ang="0">
+                <a:pos x="csX0" y="csY0"/>
+              </a:cxn>
+              <a:cxn ang="0">
+                <a:pos x="csX1" y="csY1"/>
+              </a:cxn>
+              <a:cxn ang="0">
+                <a:pos x="csX2" y="csY2"/>
+              </a:cxn>
+            </a:cxnLst>
+            <a:rect l="l" t="t" r="r" b="b"/>
+            <a:pathLst>
+              <a:path w="271463" h="247650">
+                <a:moveTo>
+                  <a:pt x="0" y="0"/>
+                </a:moveTo>
+                <a:cubicBezTo>
+                  <a:pt x="1588" y="82550"/>
+                  <a:pt x="3175" y="165100"/>
+                  <a:pt x="4763" y="247650"/>
+                </a:cubicBezTo>
+                <a:lnTo>
+                  <a:pt x="271463" y="247650"/>
+                </a:lnTo>
+              </a:path>
+            </a:pathLst>
+          </a:custGeom>
+        </p:spPr>
+        <p:style>
+          <a:lnRef idx="3">
+            <a:schemeClr val="accent1"/>
+          </a:lnRef>
+          <a:fillRef idx="0">
+            <a:schemeClr val="accent1"/>
+          </a:fillRef>
+          <a:effectRef idx="2">
+            <a:schemeClr val="accent1"/>
+          </a:effectRef>
+          <a:fontRef idx="minor">
+            <a:schemeClr val="tx1"/>
+          </a:fontRef>
+        </p:style>
+        <p:txBody>
+          <a:bodyPr rtlCol="0" anchor="ctr"/>
+          <a:lstStyle/>
+          <a:p>
+            <a:pPr algn="ctr"/>
+            <a:endParaRPr lang="en-US"/>
+          </a:p>
+        </p:txBody>
+      </p:sp>
+    </p:spTree>
+    <p:extLst>
+      <p:ext uri="{BB962C8B-B14F-4D97-AF65-F5344CB8AC3E}">
+        <p14:creationId xmlns:p14="http://schemas.microsoft.com/office/powerpoint/2010/main" val="893379728"/>
+      </p:ext>
+    </p:extLst>
+  </p:cSld>
+  <p:clrMapOvr>
+    <a:masterClrMapping/>
+  </p:clrMapOvr>
+</p:sld>
+</file>
+
+<file path=ppt/slides/slide41.xml><?xml version="1.0" encoding="utf-8"?>
+<p:sld xmlns:a="http://schemas.openxmlformats.org/drawingml/2006/main" xmlns:r="http://schemas.openxmlformats.org/officeDocument/2006/relationships" xmlns:p="http://schemas.openxmlformats.org/presentationml/2006/main">
+  <p:cSld>
+    <p:spTree>
+      <p:nvGrpSpPr>
+        <p:cNvPr id="1" name="">
+          <a:extLst>
+            <a:ext uri="{FF2B5EF4-FFF2-40B4-BE49-F238E27FC236}">
+              <a16:creationId xmlns:a16="http://schemas.microsoft.com/office/drawing/2014/main" id="{C88AA3D3-ACB2-0AF1-27EE-C1522E62398D}"/>
+            </a:ext>
+          </a:extLst>
+        </p:cNvPr>
+        <p:cNvGrpSpPr/>
+        <p:nvPr/>
+      </p:nvGrpSpPr>
+      <p:grpSpPr>
+        <a:xfrm>
+          <a:off x="0" y="0"/>
+          <a:ext cx="0" cy="0"/>
+          <a:chOff x="0" y="0"/>
+          <a:chExt cx="0" cy="0"/>
+        </a:xfrm>
+      </p:grpSpPr>
+      <p:sp>
+        <p:nvSpPr>
+          <p:cNvPr id="2" name="Title 1">
+            <a:extLst>
+              <a:ext uri="{FF2B5EF4-FFF2-40B4-BE49-F238E27FC236}">
+                <a16:creationId xmlns:a16="http://schemas.microsoft.com/office/drawing/2014/main" id="{3A688A5D-D0BA-F6AE-C028-E04D49640992}"/>
+              </a:ext>
+            </a:extLst>
+          </p:cNvPr>
+          <p:cNvSpPr>
+            <a:spLocks noGrp="1"/>
+          </p:cNvSpPr>
+          <p:nvPr>
+            <p:ph type="title"/>
+          </p:nvPr>
+        </p:nvSpPr>
+        <p:spPr>
+          <a:xfrm>
+            <a:off x="1754188" y="452718"/>
+            <a:ext cx="8296646" cy="1400530"/>
+          </a:xfrm>
+        </p:spPr>
+        <p:txBody>
+          <a:bodyPr/>
+          <a:lstStyle/>
+          <a:p>
+            <a:r>
+              <a:rPr lang="en-US" b="1" dirty="0"/>
+              <a:t>Essential EA Meta-Model</a:t>
+            </a:r>
+            <a:br>
+              <a:rPr lang="en-US" b="1" dirty="0"/>
+            </a:br>
+            <a:r>
+              <a:rPr lang="en-US" b="1" dirty="0"/>
+              <a:t>- Business Layer - 20</a:t>
+            </a:r>
+          </a:p>
+        </p:txBody>
+      </p:sp>
+      <p:sp>
+        <p:nvSpPr>
+          <p:cNvPr id="4" name="Title 1">
+            <a:extLst>
+              <a:ext uri="{FF2B5EF4-FFF2-40B4-BE49-F238E27FC236}">
+                <a16:creationId xmlns:a16="http://schemas.microsoft.com/office/drawing/2014/main" id="{3A7F8950-E521-F267-F89F-048FC3913F37}"/>
+              </a:ext>
+            </a:extLst>
+          </p:cNvPr>
+          <p:cNvSpPr txBox="1">
+            <a:spLocks/>
+          </p:cNvSpPr>
+          <p:nvPr/>
+        </p:nvSpPr>
+        <p:spPr>
+          <a:xfrm>
+            <a:off x="0" y="3143"/>
+            <a:ext cx="1754188" cy="1058013"/>
+          </a:xfrm>
+          <a:prstGeom prst="rect">
+            <a:avLst/>
+          </a:prstGeom>
+        </p:spPr>
+        <p:txBody>
+          <a:bodyPr vert="horz" lIns="91440" tIns="45720" rIns="91440" bIns="45720" rtlCol="0" anchor="ctr">
+            <a:noAutofit/>
+          </a:bodyPr>
+          <a:lstStyle>
+            <a:lvl1pPr algn="l" defTabSz="457200" rtl="0" eaLnBrk="1" latinLnBrk="0" hangingPunct="1">
+              <a:spcBef>
+                <a:spcPct val="0"/>
+              </a:spcBef>
+              <a:buNone/>
+              <a:defRPr sz="7200" b="0" i="0" kern="1200">
+                <a:solidFill>
+                  <a:schemeClr val="tx2"/>
+                </a:solidFill>
+                <a:latin typeface="+mj-lt"/>
+                <a:ea typeface="+mj-ea"/>
+                <a:cs typeface="+mj-cs"/>
+              </a:defRPr>
+            </a:lvl1pPr>
+            <a:lvl2pPr eaLnBrk="1" hangingPunct="1">
+              <a:defRPr>
+                <a:solidFill>
+                  <a:schemeClr val="tx2"/>
+                </a:solidFill>
+              </a:defRPr>
+            </a:lvl2pPr>
+            <a:lvl3pPr eaLnBrk="1" hangingPunct="1">
+              <a:defRPr>
+                <a:solidFill>
+                  <a:schemeClr val="tx2"/>
+                </a:solidFill>
+              </a:defRPr>
+            </a:lvl3pPr>
+            <a:lvl4pPr eaLnBrk="1" hangingPunct="1">
+              <a:defRPr>
+                <a:solidFill>
+                  <a:schemeClr val="tx2"/>
+                </a:solidFill>
+              </a:defRPr>
+            </a:lvl4pPr>
+            <a:lvl5pPr eaLnBrk="1" hangingPunct="1">
+              <a:defRPr>
+                <a:solidFill>
+                  <a:schemeClr val="tx2"/>
+                </a:solidFill>
+              </a:defRPr>
+            </a:lvl5pPr>
+            <a:lvl6pPr eaLnBrk="1" hangingPunct="1">
+              <a:defRPr>
+                <a:solidFill>
+                  <a:schemeClr val="tx2"/>
+                </a:solidFill>
+              </a:defRPr>
+            </a:lvl6pPr>
+            <a:lvl7pPr eaLnBrk="1" hangingPunct="1">
+              <a:defRPr>
+                <a:solidFill>
+                  <a:schemeClr val="tx2"/>
+                </a:solidFill>
+              </a:defRPr>
+            </a:lvl7pPr>
+            <a:lvl8pPr eaLnBrk="1" hangingPunct="1">
+              <a:defRPr>
+                <a:solidFill>
+                  <a:schemeClr val="tx2"/>
+                </a:solidFill>
+              </a:defRPr>
+            </a:lvl8pPr>
+            <a:lvl9pPr eaLnBrk="1" hangingPunct="1">
+              <a:defRPr>
+                <a:solidFill>
+                  <a:schemeClr val="tx2"/>
+                </a:solidFill>
+              </a:defRPr>
+            </a:lvl9pPr>
+          </a:lstStyle>
+          <a:p>
+            <a:pPr algn="ctr"/>
+            <a:r>
+              <a:rPr lang="en-US" b="1" dirty="0">
+                <a:solidFill>
+                  <a:schemeClr val="accent1">
+                    <a:lumMod val="75000"/>
+                  </a:schemeClr>
+                </a:solidFill>
+              </a:rPr>
+              <a:t>026</a:t>
+            </a:r>
+            <a:endParaRPr lang="ru-RU" b="1" dirty="0">
+              <a:solidFill>
+                <a:schemeClr val="accent1">
+                  <a:lumMod val="75000"/>
+                </a:schemeClr>
+              </a:solidFill>
+            </a:endParaRPr>
+          </a:p>
+        </p:txBody>
+      </p:sp>
+      <p:pic>
+        <p:nvPicPr>
+          <p:cNvPr id="3" name="Picture 2">
+            <a:extLst>
+              <a:ext uri="{FF2B5EF4-FFF2-40B4-BE49-F238E27FC236}">
+                <a16:creationId xmlns:a16="http://schemas.microsoft.com/office/drawing/2014/main" id="{C5410B64-1BA9-0648-6DAB-B65E6E95C636}"/>
+              </a:ext>
+            </a:extLst>
+          </p:cNvPr>
+          <p:cNvPicPr>
+            <a:picLocks noChangeAspect="1"/>
+          </p:cNvPicPr>
+          <p:nvPr/>
+        </p:nvPicPr>
+        <p:blipFill>
+          <a:blip r:embed="rId2"/>
+          <a:stretch>
+            <a:fillRect/>
+          </a:stretch>
+        </p:blipFill>
+        <p:spPr>
+          <a:xfrm>
+            <a:off x="236841" y="1853248"/>
+            <a:ext cx="8296646" cy="4669795"/>
+          </a:xfrm>
+          <a:prstGeom prst="rect">
+            <a:avLst/>
+          </a:prstGeom>
+          <a:ln>
+            <a:noFill/>
+          </a:ln>
+          <a:effectLst>
+            <a:outerShdw blurRad="292100" dist="139700" dir="2700000" algn="tl" rotWithShape="0">
+              <a:srgbClr val="333333">
+                <a:alpha val="65000"/>
+              </a:srgbClr>
+            </a:outerShdw>
+          </a:effectLst>
+        </p:spPr>
+      </p:pic>
+      <p:sp>
+        <p:nvSpPr>
+          <p:cNvPr id="6" name="Rectangle: Rounded Corners 5">
+            <a:extLst>
+              <a:ext uri="{FF2B5EF4-FFF2-40B4-BE49-F238E27FC236}">
+                <a16:creationId xmlns:a16="http://schemas.microsoft.com/office/drawing/2014/main" id="{A52B3E22-218A-30F8-9B7B-5B2246E92E01}"/>
+              </a:ext>
+            </a:extLst>
+          </p:cNvPr>
+          <p:cNvSpPr/>
+          <p:nvPr/>
+        </p:nvSpPr>
+        <p:spPr>
+          <a:xfrm>
+            <a:off x="596436" y="3513762"/>
+            <a:ext cx="2033748" cy="1345914"/>
+          </a:xfrm>
+          <a:prstGeom prst="roundRect">
+            <a:avLst>
+              <a:gd name="adj" fmla="val 6916"/>
+            </a:avLst>
+          </a:prstGeom>
+          <a:solidFill>
+            <a:srgbClr val="FFCC66">
+              <a:alpha val="20000"/>
+            </a:srgbClr>
+          </a:solidFill>
+          <a:ln>
+            <a:solidFill>
+              <a:srgbClr val="92D050"/>
+            </a:solidFill>
+          </a:ln>
+        </p:spPr>
+        <p:style>
+          <a:lnRef idx="2">
+            <a:schemeClr val="accent1">
+              <a:shade val="15000"/>
+            </a:schemeClr>
+          </a:lnRef>
+          <a:fillRef idx="1">
+            <a:schemeClr val="accent1"/>
+          </a:fillRef>
+          <a:effectRef idx="0">
+            <a:schemeClr val="accent1"/>
+          </a:effectRef>
+          <a:fontRef idx="minor">
+            <a:schemeClr val="lt1"/>
+          </a:fontRef>
+        </p:style>
+        <p:txBody>
+          <a:bodyPr rtlCol="0" anchor="ctr"/>
+          <a:lstStyle/>
+          <a:p>
+            <a:pPr algn="ctr"/>
+            <a:endParaRPr lang="en-US"/>
+          </a:p>
+        </p:txBody>
+      </p:sp>
+      <p:pic>
+        <p:nvPicPr>
+          <p:cNvPr id="11" name="Picture 10">
+            <a:extLst>
+              <a:ext uri="{FF2B5EF4-FFF2-40B4-BE49-F238E27FC236}">
+                <a16:creationId xmlns:a16="http://schemas.microsoft.com/office/drawing/2014/main" id="{645BB086-CA43-55C9-7DBE-A6FCC03C1742}"/>
+              </a:ext>
+            </a:extLst>
+          </p:cNvPr>
+          <p:cNvPicPr>
+            <a:picLocks noChangeAspect="1"/>
+          </p:cNvPicPr>
+          <p:nvPr/>
+        </p:nvPicPr>
+        <p:blipFill>
+          <a:blip r:embed="rId3"/>
+          <a:stretch>
+            <a:fillRect/>
+          </a:stretch>
+        </p:blipFill>
+        <p:spPr>
+          <a:xfrm>
+            <a:off x="157000" y="1094226"/>
+            <a:ext cx="362976" cy="362976"/>
+          </a:xfrm>
+          <a:prstGeom prst="rect">
+            <a:avLst/>
+          </a:prstGeom>
+          <a:ln>
+            <a:noFill/>
+          </a:ln>
+          <a:effectLst>
+            <a:outerShdw blurRad="292100" dist="139700" dir="2700000" algn="tl" rotWithShape="0">
+              <a:srgbClr val="333333">
+                <a:alpha val="65000"/>
+              </a:srgbClr>
+            </a:outerShdw>
+          </a:effectLst>
+        </p:spPr>
+      </p:pic>
+      <p:pic>
+        <p:nvPicPr>
+          <p:cNvPr id="12" name="Picture 11">
+            <a:extLst>
+              <a:ext uri="{FF2B5EF4-FFF2-40B4-BE49-F238E27FC236}">
+                <a16:creationId xmlns:a16="http://schemas.microsoft.com/office/drawing/2014/main" id="{AC196BAC-1B4E-B6A3-2373-24CE0BB74530}"/>
+              </a:ext>
+            </a:extLst>
+          </p:cNvPr>
+          <p:cNvPicPr>
+            <a:picLocks noChangeAspect="1"/>
+          </p:cNvPicPr>
+          <p:nvPr/>
+        </p:nvPicPr>
+        <p:blipFill>
+          <a:blip r:embed="rId4"/>
+          <a:stretch>
+            <a:fillRect/>
+          </a:stretch>
+        </p:blipFill>
+        <p:spPr>
+          <a:xfrm>
+            <a:off x="611241" y="1094226"/>
+            <a:ext cx="362976" cy="362976"/>
+          </a:xfrm>
+          <a:prstGeom prst="rect">
+            <a:avLst/>
+          </a:prstGeom>
+          <a:ln>
+            <a:noFill/>
+          </a:ln>
+          <a:effectLst>
+            <a:outerShdw blurRad="292100" dist="139700" dir="2700000" algn="tl" rotWithShape="0">
+              <a:srgbClr val="333333">
+                <a:alpha val="65000"/>
+              </a:srgbClr>
+            </a:outerShdw>
+          </a:effectLst>
+        </p:spPr>
+      </p:pic>
+      <p:pic>
+        <p:nvPicPr>
+          <p:cNvPr id="13" name="Picture 12">
+            <a:extLst>
+              <a:ext uri="{FF2B5EF4-FFF2-40B4-BE49-F238E27FC236}">
+                <a16:creationId xmlns:a16="http://schemas.microsoft.com/office/drawing/2014/main" id="{BC45E735-F511-BDEB-6207-F2679FC5EFC0}"/>
+              </a:ext>
+            </a:extLst>
+          </p:cNvPr>
+          <p:cNvPicPr>
+            <a:picLocks noChangeAspect="1"/>
+          </p:cNvPicPr>
+          <p:nvPr/>
+        </p:nvPicPr>
+        <p:blipFill>
+          <a:blip r:embed="rId5"/>
+          <a:stretch>
+            <a:fillRect/>
+          </a:stretch>
+        </p:blipFill>
+        <p:spPr>
+          <a:xfrm>
+            <a:off x="1065482" y="1094226"/>
+            <a:ext cx="371111" cy="362976"/>
+          </a:xfrm>
+          <a:prstGeom prst="rect">
+            <a:avLst/>
+          </a:prstGeom>
+          <a:ln>
+            <a:noFill/>
+          </a:ln>
+          <a:effectLst>
+            <a:outerShdw blurRad="292100" dist="139700" dir="2700000" algn="tl" rotWithShape="0">
+              <a:srgbClr val="333333">
+                <a:alpha val="65000"/>
+              </a:srgbClr>
+            </a:outerShdw>
+          </a:effectLst>
+        </p:spPr>
+      </p:pic>
+    </p:spTree>
+    <p:extLst>
+      <p:ext uri="{BB962C8B-B14F-4D97-AF65-F5344CB8AC3E}">
+        <p14:creationId xmlns:p14="http://schemas.microsoft.com/office/powerpoint/2010/main" val="3765415581"/>
+      </p:ext>
+    </p:extLst>
+  </p:cSld>
+  <p:clrMapOvr>
+    <a:masterClrMapping/>
+  </p:clrMapOvr>
+</p:sld>
+</file>
+
+<file path=ppt/slides/slide42.xml><?xml version="1.0" encoding="utf-8"?>
+<p:sld xmlns:a="http://schemas.openxmlformats.org/drawingml/2006/main" xmlns:r="http://schemas.openxmlformats.org/officeDocument/2006/relationships" xmlns:p="http://schemas.openxmlformats.org/presentationml/2006/main">
+  <p:cSld>
+    <p:bg>
+      <p:bgPr>
+        <a:blipFill rotWithShape="1">
+          <a:blip r:embed="rId3">
+            <a:duotone>
+              <a:schemeClr val="bg2">
+                <a:shade val="62000"/>
+                <a:hueMod val="108000"/>
+                <a:satMod val="164000"/>
+                <a:lumMod val="69000"/>
+              </a:schemeClr>
+              <a:schemeClr val="bg2">
+                <a:tint val="96000"/>
+                <a:hueMod val="90000"/>
+                <a:satMod val="130000"/>
+                <a:lumMod val="134000"/>
+              </a:schemeClr>
+            </a:duotone>
+          </a:blip>
+          <a:stretch/>
+        </a:blipFill>
+        <a:effectLst/>
+      </p:bgPr>
+    </p:bg>
+    <p:spTree>
+      <p:nvGrpSpPr>
+        <p:cNvPr id="1" name=""/>
+        <p:cNvGrpSpPr/>
+        <p:nvPr/>
+      </p:nvGrpSpPr>
+      <p:grpSpPr>
+        <a:xfrm>
+          <a:off x="0" y="0"/>
+          <a:ext cx="0" cy="0"/>
+          <a:chOff x="0" y="0"/>
+          <a:chExt cx="0" cy="0"/>
+        </a:xfrm>
+      </p:grpSpPr>
+      <p:pic>
+        <p:nvPicPr>
+          <p:cNvPr id="15" name="Picture 14" descr="abstract design">
+            <a:extLst>
+              <a:ext uri="{FF2B5EF4-FFF2-40B4-BE49-F238E27FC236}">
+                <a16:creationId xmlns:a16="http://schemas.microsoft.com/office/drawing/2014/main" id="{6D363037-1741-4470-A023-883E2FFD5840}"/>
+              </a:ext>
+            </a:extLst>
+          </p:cNvPr>
+          <p:cNvPicPr>
+            <a:picLocks noChangeAspect="1"/>
+          </p:cNvPicPr>
+          <p:nvPr/>
+        </p:nvPicPr>
+        <p:blipFill rotWithShape="1">
+          <a:blip r:embed="rId4">
+            <a:duotone>
+              <a:prstClr val="black"/>
+              <a:schemeClr val="accent5">
+                <a:tint val="45000"/>
+                <a:satMod val="400000"/>
+              </a:schemeClr>
+            </a:duotone>
+            <a:alphaModFix amt="25000"/>
+          </a:blip>
+          <a:srcRect t="18308" r="6818" b="2872"/>
+          <a:stretch/>
+        </p:blipFill>
+        <p:spPr>
+          <a:xfrm flipH="1">
+            <a:off x="20" y="10"/>
+            <a:ext cx="12191980" cy="6857990"/>
+          </a:xfrm>
+          <a:prstGeom prst="rect">
+            <a:avLst/>
+          </a:prstGeom>
+        </p:spPr>
+      </p:pic>
+      <p:sp>
+        <p:nvSpPr>
+          <p:cNvPr id="12" name="Title 11">
+            <a:extLst>
+              <a:ext uri="{FF2B5EF4-FFF2-40B4-BE49-F238E27FC236}">
+                <a16:creationId xmlns:a16="http://schemas.microsoft.com/office/drawing/2014/main" id="{970C361B-D32E-42E0-A41E-86C3D9AC886F}"/>
+              </a:ext>
+            </a:extLst>
+          </p:cNvPr>
+          <p:cNvSpPr>
+            <a:spLocks noGrp="1"/>
+          </p:cNvSpPr>
+          <p:nvPr>
+            <p:ph type="ctrTitle"/>
+          </p:nvPr>
+        </p:nvSpPr>
+        <p:spPr>
+          <a:xfrm>
+            <a:off x="1154955" y="1447800"/>
+            <a:ext cx="8825658" cy="3329581"/>
+          </a:xfrm>
+        </p:spPr>
+        <p:txBody>
+          <a:bodyPr>
+            <a:normAutofit/>
+          </a:bodyPr>
+          <a:lstStyle/>
+          <a:p>
+            <a:r>
+              <a:rPr lang="en-US" dirty="0"/>
+              <a:t>Thank You!</a:t>
+            </a:r>
+            <a:endParaRPr lang="ru-RU" dirty="0"/>
+          </a:p>
+        </p:txBody>
+      </p:sp>
+      <p:sp>
+        <p:nvSpPr>
+          <p:cNvPr id="13" name="Subtitle 12">
+            <a:extLst>
+              <a:ext uri="{FF2B5EF4-FFF2-40B4-BE49-F238E27FC236}">
+                <a16:creationId xmlns:a16="http://schemas.microsoft.com/office/drawing/2014/main" id="{336E726C-3DE4-41AA-88A0-C92B0C34163D}"/>
+              </a:ext>
+            </a:extLst>
+          </p:cNvPr>
+          <p:cNvSpPr>
+            <a:spLocks noGrp="1"/>
+          </p:cNvSpPr>
+          <p:nvPr>
+            <p:ph type="subTitle" idx="1"/>
+          </p:nvPr>
+        </p:nvSpPr>
+        <p:spPr>
+          <a:xfrm>
+            <a:off x="1154955" y="4777380"/>
+            <a:ext cx="8825658" cy="861420"/>
+          </a:xfrm>
+        </p:spPr>
+        <p:txBody>
+          <a:bodyPr>
+            <a:normAutofit/>
+          </a:bodyPr>
+          <a:lstStyle/>
+          <a:p>
+            <a:r>
+              <a:rPr lang="en-US" dirty="0"/>
+              <a:t>someone@Example.com</a:t>
+            </a:r>
+            <a:endParaRPr lang="ru-RU" dirty="0"/>
+          </a:p>
+        </p:txBody>
+      </p:sp>
+      <p:sp>
+        <p:nvSpPr>
+          <p:cNvPr id="57" name="Rectangle 56">
+            <a:extLst>
+              <a:ext uri="{FF2B5EF4-FFF2-40B4-BE49-F238E27FC236}">
+                <a16:creationId xmlns:a16="http://schemas.microsoft.com/office/drawing/2014/main" id="{318E9D62-7BA3-4D5E-8915-0D0E8661E3D7}"/>
+              </a:ext>
+              <a:ext uri="{C183D7F6-B498-43B3-948B-1728B52AA6E4}">
+                <adec:decorative xmlns:adec="http://schemas.microsoft.com/office/drawing/2017/decorative" val="1"/>
+              </a:ext>
+            </a:extLst>
+          </p:cNvPr>
+          <p:cNvSpPr>
+            <a:spLocks noGrp="1" noRot="1" noChangeAspect="1" noMove="1" noResize="1" noEditPoints="1" noAdjustHandles="1" noChangeArrowheads="1" noChangeShapeType="1" noTextEdit="1"/>
+          </p:cNvSpPr>
+          <p:nvPr>
+            <p:extLst>
+              <p:ext uri="{386F3935-93C4-4BCD-93E2-E3B085C9AB24}">
+                <p16:designElem xmlns:p16="http://schemas.microsoft.com/office/powerpoint/2015/main" val="1"/>
+              </p:ext>
+            </p:extLst>
+          </p:nvPr>
+        </p:nvSpPr>
+        <p:spPr>
+          <a:xfrm>
+            <a:off x="10437812" y="0"/>
+            <a:ext cx="685800" cy="1143000"/>
+          </a:xfrm>
+          <a:prstGeom prst="rect">
+            <a:avLst/>
+          </a:prstGeom>
+          <a:solidFill>
+            <a:schemeClr val="accent1"/>
+          </a:solidFill>
+          <a:ln>
+            <a:noFill/>
+          </a:ln>
+        </p:spPr>
+        <p:style>
+          <a:lnRef idx="1">
+            <a:schemeClr val="accent1"/>
+          </a:lnRef>
+          <a:fillRef idx="3">
+            <a:schemeClr val="accent1"/>
+          </a:fillRef>
+          <a:effectRef idx="2">
+            <a:schemeClr val="accent1"/>
+          </a:effectRef>
+          <a:fontRef idx="minor">
+            <a:schemeClr val="lt1"/>
+          </a:fontRef>
+        </p:style>
+        <p:txBody>
+          <a:bodyPr/>
+          <a:lstStyle/>
+          <a:p>
+            <a:endParaRPr lang="en-US"/>
+          </a:p>
+        </p:txBody>
+      </p:sp>
+      <p:pic>
+        <p:nvPicPr>
+          <p:cNvPr id="4" name="Picture 3">
+            <a:extLst>
+              <a:ext uri="{FF2B5EF4-FFF2-40B4-BE49-F238E27FC236}">
+                <a16:creationId xmlns:a16="http://schemas.microsoft.com/office/drawing/2014/main" id="{B011F562-7C5B-B39E-2FF0-681E86D50FE2}"/>
+              </a:ext>
+            </a:extLst>
+          </p:cNvPr>
+          <p:cNvPicPr>
+            <a:picLocks noChangeAspect="1"/>
+          </p:cNvPicPr>
+          <p:nvPr/>
+        </p:nvPicPr>
+        <p:blipFill>
+          <a:blip r:embed="rId5"/>
+          <a:stretch>
+            <a:fillRect/>
+          </a:stretch>
+        </p:blipFill>
+        <p:spPr>
+          <a:xfrm>
+            <a:off x="10440834" y="0"/>
+            <a:ext cx="682228" cy="682228"/>
+          </a:xfrm>
+          <a:prstGeom prst="rect">
+            <a:avLst/>
+          </a:prstGeom>
+        </p:spPr>
+      </p:pic>
+    </p:spTree>
+    <p:extLst>
+      <p:ext uri="{BB962C8B-B14F-4D97-AF65-F5344CB8AC3E}">
+        <p14:creationId xmlns:p14="http://schemas.microsoft.com/office/powerpoint/2010/main" val="510767980"/>
       </p:ext>
     </p:extLst>
   </p:cSld>

--- a/Master_EAS_Meta-Model.pptx
+++ b/Master_EAS_Meta-Model.pptx
@@ -5,10 +5,10 @@
     <p:sldMasterId id="2147483648" r:id="rId4"/>
   </p:sldMasterIdLst>
   <p:notesMasterIdLst>
-    <p:notesMasterId r:id="rId47"/>
+    <p:notesMasterId r:id="rId49"/>
   </p:notesMasterIdLst>
   <p:handoutMasterIdLst>
-    <p:handoutMasterId r:id="rId48"/>
+    <p:handoutMasterId r:id="rId50"/>
   </p:handoutMasterIdLst>
   <p:sldIdLst>
     <p:sldId id="256" r:id="rId5"/>
@@ -52,7 +52,9 @@
     <p:sldId id="308" r:id="rId43"/>
     <p:sldId id="309" r:id="rId44"/>
     <p:sldId id="310" r:id="rId45"/>
-    <p:sldId id="267" r:id="rId46"/>
+    <p:sldId id="311" r:id="rId46"/>
+    <p:sldId id="312" r:id="rId47"/>
+    <p:sldId id="267" r:id="rId48"/>
   </p:sldIdLst>
   <p:sldSz cx="12192000" cy="6858000"/>
   <p:notesSz cx="6858000" cy="9144000"/>
@@ -860,7 +862,7 @@
           <a:p>
             <a:fld id="{EE000EEB-8338-48D7-8EE8-EE0082EF7602}" type="slidenum">
               <a:rPr lang="en-US" smtClean="0"/>
-              <a:t>42</a:t>
+              <a:t>44</a:t>
             </a:fld>
             <a:endParaRPr lang="en-US" dirty="0"/>
           </a:p>
@@ -37350,8 +37352,8 @@
         </p:nvSpPr>
         <p:spPr>
           <a:xfrm>
-            <a:off x="596436" y="3513762"/>
-            <a:ext cx="2033748" cy="1345914"/>
+            <a:off x="596436" y="2249293"/>
+            <a:ext cx="2033748" cy="2600109"/>
           </a:xfrm>
           <a:prstGeom prst="roundRect">
             <a:avLst>
@@ -37512,6 +37514,60 @@
               </a:srgbClr>
             </a:outerShdw>
           </a:effectLst>
+        </p:spPr>
+      </p:pic>
+      <p:pic>
+        <p:nvPicPr>
+          <p:cNvPr id="15" name="Picture 14">
+            <a:extLst>
+              <a:ext uri="{FF2B5EF4-FFF2-40B4-BE49-F238E27FC236}">
+                <a16:creationId xmlns:a16="http://schemas.microsoft.com/office/drawing/2014/main" id="{B5B08E4B-11FF-E36C-7FCF-0BB29249E29F}"/>
+              </a:ext>
+            </a:extLst>
+          </p:cNvPr>
+          <p:cNvPicPr>
+            <a:picLocks noChangeAspect="1"/>
+          </p:cNvPicPr>
+          <p:nvPr/>
+        </p:nvPicPr>
+        <p:blipFill>
+          <a:blip r:embed="rId6"/>
+          <a:stretch>
+            <a:fillRect/>
+          </a:stretch>
+        </p:blipFill>
+        <p:spPr>
+          <a:xfrm>
+            <a:off x="6880343" y="904126"/>
+            <a:ext cx="4730954" cy="5491755"/>
+          </a:xfrm>
+          <a:prstGeom prst="roundRect">
+            <a:avLst>
+              <a:gd name="adj" fmla="val 16667"/>
+            </a:avLst>
+          </a:prstGeom>
+          <a:ln>
+            <a:noFill/>
+          </a:ln>
+          <a:effectLst>
+            <a:outerShdw blurRad="152400" dist="12000" dir="900000" sy="98000" kx="110000" ky="200000" algn="tl" rotWithShape="0">
+              <a:srgbClr val="000000">
+                <a:alpha val="30000"/>
+              </a:srgbClr>
+            </a:outerShdw>
+          </a:effectLst>
+          <a:scene3d>
+            <a:camera prst="perspectiveRelaxed">
+              <a:rot lat="19800000" lon="1200000" rev="20820000"/>
+            </a:camera>
+            <a:lightRig rig="threePt" dir="t"/>
+          </a:scene3d>
+          <a:sp3d contourW="6350" prstMaterial="matte">
+            <a:bevelT w="101600" h="101600"/>
+            <a:contourClr>
+              <a:srgbClr val="969696"/>
+            </a:contourClr>
+          </a:sp3d>
         </p:spPr>
       </p:pic>
     </p:spTree>
@@ -37528,6 +37584,3670 @@
 </file>
 
 <file path=ppt/slides/slide42.xml><?xml version="1.0" encoding="utf-8"?>
+<p:sld xmlns:a="http://schemas.openxmlformats.org/drawingml/2006/main" xmlns:r="http://schemas.openxmlformats.org/officeDocument/2006/relationships" xmlns:p="http://schemas.openxmlformats.org/presentationml/2006/main">
+  <p:cSld>
+    <p:spTree>
+      <p:nvGrpSpPr>
+        <p:cNvPr id="1" name="">
+          <a:extLst>
+            <a:ext uri="{FF2B5EF4-FFF2-40B4-BE49-F238E27FC236}">
+              <a16:creationId xmlns:a16="http://schemas.microsoft.com/office/drawing/2014/main" id="{35CF22B4-1A6A-46F8-FC43-2987172A5D0C}"/>
+            </a:ext>
+          </a:extLst>
+        </p:cNvPr>
+        <p:cNvGrpSpPr/>
+        <p:nvPr/>
+      </p:nvGrpSpPr>
+      <p:grpSpPr>
+        <a:xfrm>
+          <a:off x="0" y="0"/>
+          <a:ext cx="0" cy="0"/>
+          <a:chOff x="0" y="0"/>
+          <a:chExt cx="0" cy="0"/>
+        </a:xfrm>
+      </p:grpSpPr>
+      <p:pic>
+        <p:nvPicPr>
+          <p:cNvPr id="3" name="Picture 2">
+            <a:extLst>
+              <a:ext uri="{FF2B5EF4-FFF2-40B4-BE49-F238E27FC236}">
+                <a16:creationId xmlns:a16="http://schemas.microsoft.com/office/drawing/2014/main" id="{2201A7E6-BD62-A312-CE9B-15C6CD345FA2}"/>
+              </a:ext>
+            </a:extLst>
+          </p:cNvPr>
+          <p:cNvPicPr>
+            <a:picLocks noChangeAspect="1"/>
+          </p:cNvPicPr>
+          <p:nvPr/>
+        </p:nvPicPr>
+        <p:blipFill>
+          <a:blip r:embed="rId2"/>
+          <a:stretch>
+            <a:fillRect/>
+          </a:stretch>
+        </p:blipFill>
+        <p:spPr>
+          <a:xfrm>
+            <a:off x="2592309" y="0"/>
+            <a:ext cx="7007382" cy="6858000"/>
+          </a:xfrm>
+          <a:prstGeom prst="rect">
+            <a:avLst/>
+          </a:prstGeom>
+        </p:spPr>
+      </p:pic>
+      <p:sp>
+        <p:nvSpPr>
+          <p:cNvPr id="5" name="Rectangle 4">
+            <a:extLst>
+              <a:ext uri="{FF2B5EF4-FFF2-40B4-BE49-F238E27FC236}">
+                <a16:creationId xmlns:a16="http://schemas.microsoft.com/office/drawing/2014/main" id="{98B3DD77-B0F0-CF5B-5BB6-C43435182A94}"/>
+              </a:ext>
+            </a:extLst>
+          </p:cNvPr>
+          <p:cNvSpPr/>
+          <p:nvPr/>
+        </p:nvSpPr>
+        <p:spPr>
+          <a:xfrm>
+            <a:off x="3619568" y="0"/>
+            <a:ext cx="233295" cy="181579"/>
+          </a:xfrm>
+          <a:prstGeom prst="rect">
+            <a:avLst/>
+          </a:prstGeom>
+          <a:solidFill>
+            <a:srgbClr val="ACD433">
+              <a:alpha val="50196"/>
+            </a:srgbClr>
+          </a:solidFill>
+        </p:spPr>
+        <p:style>
+          <a:lnRef idx="2">
+            <a:schemeClr val="accent1">
+              <a:shade val="15000"/>
+            </a:schemeClr>
+          </a:lnRef>
+          <a:fillRef idx="1">
+            <a:schemeClr val="accent1"/>
+          </a:fillRef>
+          <a:effectRef idx="0">
+            <a:schemeClr val="accent1"/>
+          </a:effectRef>
+          <a:fontRef idx="minor">
+            <a:schemeClr val="lt1"/>
+          </a:fontRef>
+        </p:style>
+        <p:txBody>
+          <a:bodyPr rtlCol="0" anchor="ctr"/>
+          <a:lstStyle/>
+          <a:p>
+            <a:pPr algn="ctr"/>
+            <a:endParaRPr lang="en-US"/>
+          </a:p>
+        </p:txBody>
+      </p:sp>
+      <p:sp>
+        <p:nvSpPr>
+          <p:cNvPr id="6" name="Rectangle 5">
+            <a:extLst>
+              <a:ext uri="{FF2B5EF4-FFF2-40B4-BE49-F238E27FC236}">
+                <a16:creationId xmlns:a16="http://schemas.microsoft.com/office/drawing/2014/main" id="{3452F0E2-BB7C-0B0F-C5FA-FE74AA6BAD7C}"/>
+              </a:ext>
+            </a:extLst>
+          </p:cNvPr>
+          <p:cNvSpPr/>
+          <p:nvPr/>
+        </p:nvSpPr>
+        <p:spPr>
+          <a:xfrm>
+            <a:off x="6757680" y="424700"/>
+            <a:ext cx="1028938" cy="436792"/>
+          </a:xfrm>
+          <a:prstGeom prst="rect">
+            <a:avLst/>
+          </a:prstGeom>
+          <a:solidFill>
+            <a:schemeClr val="bg2">
+              <a:lumMod val="20000"/>
+              <a:lumOff val="80000"/>
+              <a:alpha val="50196"/>
+            </a:schemeClr>
+          </a:solidFill>
+        </p:spPr>
+        <p:style>
+          <a:lnRef idx="2">
+            <a:schemeClr val="accent1">
+              <a:shade val="15000"/>
+            </a:schemeClr>
+          </a:lnRef>
+          <a:fillRef idx="1">
+            <a:schemeClr val="accent1"/>
+          </a:fillRef>
+          <a:effectRef idx="0">
+            <a:schemeClr val="accent1"/>
+          </a:effectRef>
+          <a:fontRef idx="minor">
+            <a:schemeClr val="lt1"/>
+          </a:fontRef>
+        </p:style>
+        <p:txBody>
+          <a:bodyPr rtlCol="0" anchor="ctr"/>
+          <a:lstStyle/>
+          <a:p>
+            <a:pPr algn="ctr"/>
+            <a:endParaRPr lang="en-US"/>
+          </a:p>
+        </p:txBody>
+      </p:sp>
+      <p:sp>
+        <p:nvSpPr>
+          <p:cNvPr id="8" name="Rectangle 7">
+            <a:extLst>
+              <a:ext uri="{FF2B5EF4-FFF2-40B4-BE49-F238E27FC236}">
+                <a16:creationId xmlns:a16="http://schemas.microsoft.com/office/drawing/2014/main" id="{856B6A8A-19E1-F2FF-E027-59352CC91948}"/>
+              </a:ext>
+            </a:extLst>
+          </p:cNvPr>
+          <p:cNvSpPr/>
+          <p:nvPr/>
+        </p:nvSpPr>
+        <p:spPr>
+          <a:xfrm>
+            <a:off x="5065260" y="733425"/>
+            <a:ext cx="318398" cy="225099"/>
+          </a:xfrm>
+          <a:prstGeom prst="rect">
+            <a:avLst/>
+          </a:prstGeom>
+          <a:solidFill>
+            <a:srgbClr val="ACD433">
+              <a:alpha val="50196"/>
+            </a:srgbClr>
+          </a:solidFill>
+        </p:spPr>
+        <p:style>
+          <a:lnRef idx="2">
+            <a:schemeClr val="accent1">
+              <a:shade val="15000"/>
+            </a:schemeClr>
+          </a:lnRef>
+          <a:fillRef idx="1">
+            <a:schemeClr val="accent1"/>
+          </a:fillRef>
+          <a:effectRef idx="0">
+            <a:schemeClr val="accent1"/>
+          </a:effectRef>
+          <a:fontRef idx="minor">
+            <a:schemeClr val="lt1"/>
+          </a:fontRef>
+        </p:style>
+        <p:txBody>
+          <a:bodyPr rtlCol="0" anchor="ctr"/>
+          <a:lstStyle/>
+          <a:p>
+            <a:pPr algn="ctr"/>
+            <a:endParaRPr lang="en-US"/>
+          </a:p>
+        </p:txBody>
+      </p:sp>
+      <p:sp>
+        <p:nvSpPr>
+          <p:cNvPr id="15" name="Rectangle 14">
+            <a:extLst>
+              <a:ext uri="{FF2B5EF4-FFF2-40B4-BE49-F238E27FC236}">
+                <a16:creationId xmlns:a16="http://schemas.microsoft.com/office/drawing/2014/main" id="{06C7BFA4-9488-FEB4-0A83-ADC45797D97F}"/>
+              </a:ext>
+            </a:extLst>
+          </p:cNvPr>
+          <p:cNvSpPr/>
+          <p:nvPr/>
+        </p:nvSpPr>
+        <p:spPr>
+          <a:xfrm>
+            <a:off x="3788357" y="1447841"/>
+            <a:ext cx="233295" cy="181579"/>
+          </a:xfrm>
+          <a:prstGeom prst="rect">
+            <a:avLst/>
+          </a:prstGeom>
+          <a:solidFill>
+            <a:srgbClr val="ACD433">
+              <a:alpha val="50196"/>
+            </a:srgbClr>
+          </a:solidFill>
+        </p:spPr>
+        <p:style>
+          <a:lnRef idx="2">
+            <a:schemeClr val="accent1">
+              <a:shade val="15000"/>
+            </a:schemeClr>
+          </a:lnRef>
+          <a:fillRef idx="1">
+            <a:schemeClr val="accent1"/>
+          </a:fillRef>
+          <a:effectRef idx="0">
+            <a:schemeClr val="accent1"/>
+          </a:effectRef>
+          <a:fontRef idx="minor">
+            <a:schemeClr val="lt1"/>
+          </a:fontRef>
+        </p:style>
+        <p:txBody>
+          <a:bodyPr rtlCol="0" anchor="ctr"/>
+          <a:lstStyle/>
+          <a:p>
+            <a:pPr algn="ctr"/>
+            <a:endParaRPr lang="en-US"/>
+          </a:p>
+        </p:txBody>
+      </p:sp>
+      <p:sp>
+        <p:nvSpPr>
+          <p:cNvPr id="23" name="Rectangle 22">
+            <a:extLst>
+              <a:ext uri="{FF2B5EF4-FFF2-40B4-BE49-F238E27FC236}">
+                <a16:creationId xmlns:a16="http://schemas.microsoft.com/office/drawing/2014/main" id="{B2239820-C8EB-25FD-823E-C7FD05FFB137}"/>
+              </a:ext>
+            </a:extLst>
+          </p:cNvPr>
+          <p:cNvSpPr/>
+          <p:nvPr/>
+        </p:nvSpPr>
+        <p:spPr>
+          <a:xfrm>
+            <a:off x="6285303" y="1568449"/>
+            <a:ext cx="1278993" cy="252208"/>
+          </a:xfrm>
+          <a:prstGeom prst="rect">
+            <a:avLst/>
+          </a:prstGeom>
+          <a:solidFill>
+            <a:schemeClr val="bg2">
+              <a:lumMod val="20000"/>
+              <a:lumOff val="80000"/>
+              <a:alpha val="50196"/>
+            </a:schemeClr>
+          </a:solidFill>
+        </p:spPr>
+        <p:style>
+          <a:lnRef idx="2">
+            <a:schemeClr val="accent1">
+              <a:shade val="15000"/>
+            </a:schemeClr>
+          </a:lnRef>
+          <a:fillRef idx="1">
+            <a:schemeClr val="accent1"/>
+          </a:fillRef>
+          <a:effectRef idx="0">
+            <a:schemeClr val="accent1"/>
+          </a:effectRef>
+          <a:fontRef idx="minor">
+            <a:schemeClr val="lt1"/>
+          </a:fontRef>
+        </p:style>
+        <p:txBody>
+          <a:bodyPr rtlCol="0" anchor="ctr"/>
+          <a:lstStyle/>
+          <a:p>
+            <a:pPr algn="ctr"/>
+            <a:endParaRPr lang="en-US"/>
+          </a:p>
+        </p:txBody>
+      </p:sp>
+      <p:sp>
+        <p:nvSpPr>
+          <p:cNvPr id="20" name="Rectangle 19">
+            <a:extLst>
+              <a:ext uri="{FF2B5EF4-FFF2-40B4-BE49-F238E27FC236}">
+                <a16:creationId xmlns:a16="http://schemas.microsoft.com/office/drawing/2014/main" id="{436D056C-FB7E-7473-CDA4-68D1D5C8CAF2}"/>
+              </a:ext>
+            </a:extLst>
+          </p:cNvPr>
+          <p:cNvSpPr/>
+          <p:nvPr/>
+        </p:nvSpPr>
+        <p:spPr>
+          <a:xfrm>
+            <a:off x="6191487" y="2160350"/>
+            <a:ext cx="312055" cy="181579"/>
+          </a:xfrm>
+          <a:prstGeom prst="rect">
+            <a:avLst/>
+          </a:prstGeom>
+          <a:solidFill>
+            <a:srgbClr val="ACD433">
+              <a:alpha val="50196"/>
+            </a:srgbClr>
+          </a:solidFill>
+        </p:spPr>
+        <p:style>
+          <a:lnRef idx="2">
+            <a:schemeClr val="accent1">
+              <a:shade val="15000"/>
+            </a:schemeClr>
+          </a:lnRef>
+          <a:fillRef idx="1">
+            <a:schemeClr val="accent1"/>
+          </a:fillRef>
+          <a:effectRef idx="0">
+            <a:schemeClr val="accent1"/>
+          </a:effectRef>
+          <a:fontRef idx="minor">
+            <a:schemeClr val="lt1"/>
+          </a:fontRef>
+        </p:style>
+        <p:txBody>
+          <a:bodyPr rtlCol="0" anchor="ctr"/>
+          <a:lstStyle/>
+          <a:p>
+            <a:pPr algn="ctr"/>
+            <a:endParaRPr lang="en-US"/>
+          </a:p>
+        </p:txBody>
+      </p:sp>
+      <p:sp>
+        <p:nvSpPr>
+          <p:cNvPr id="35" name="Rectangle 34">
+            <a:extLst>
+              <a:ext uri="{FF2B5EF4-FFF2-40B4-BE49-F238E27FC236}">
+                <a16:creationId xmlns:a16="http://schemas.microsoft.com/office/drawing/2014/main" id="{4292B0FF-6CEA-9E5C-7343-93D56A06C706}"/>
+              </a:ext>
+            </a:extLst>
+          </p:cNvPr>
+          <p:cNvSpPr/>
+          <p:nvPr/>
+        </p:nvSpPr>
+        <p:spPr>
+          <a:xfrm>
+            <a:off x="7187151" y="3322342"/>
+            <a:ext cx="346323" cy="252208"/>
+          </a:xfrm>
+          <a:prstGeom prst="rect">
+            <a:avLst/>
+          </a:prstGeom>
+          <a:solidFill>
+            <a:srgbClr val="ACD433">
+              <a:alpha val="50196"/>
+            </a:srgbClr>
+          </a:solidFill>
+        </p:spPr>
+        <p:style>
+          <a:lnRef idx="2">
+            <a:schemeClr val="accent1">
+              <a:shade val="15000"/>
+            </a:schemeClr>
+          </a:lnRef>
+          <a:fillRef idx="1">
+            <a:schemeClr val="accent1"/>
+          </a:fillRef>
+          <a:effectRef idx="0">
+            <a:schemeClr val="accent1"/>
+          </a:effectRef>
+          <a:fontRef idx="minor">
+            <a:schemeClr val="lt1"/>
+          </a:fontRef>
+        </p:style>
+        <p:txBody>
+          <a:bodyPr rtlCol="0" anchor="ctr"/>
+          <a:lstStyle/>
+          <a:p>
+            <a:pPr algn="ctr"/>
+            <a:endParaRPr lang="en-US"/>
+          </a:p>
+        </p:txBody>
+      </p:sp>
+      <p:sp>
+        <p:nvSpPr>
+          <p:cNvPr id="36" name="Rectangle 35">
+            <a:extLst>
+              <a:ext uri="{FF2B5EF4-FFF2-40B4-BE49-F238E27FC236}">
+                <a16:creationId xmlns:a16="http://schemas.microsoft.com/office/drawing/2014/main" id="{403E0934-7824-64B7-AE4F-F3F37D111342}"/>
+              </a:ext>
+            </a:extLst>
+          </p:cNvPr>
+          <p:cNvSpPr/>
+          <p:nvPr/>
+        </p:nvSpPr>
+        <p:spPr>
+          <a:xfrm>
+            <a:off x="7459492" y="2574289"/>
+            <a:ext cx="1028938" cy="262192"/>
+          </a:xfrm>
+          <a:prstGeom prst="rect">
+            <a:avLst/>
+          </a:prstGeom>
+          <a:solidFill>
+            <a:schemeClr val="bg2">
+              <a:lumMod val="20000"/>
+              <a:lumOff val="80000"/>
+              <a:alpha val="50196"/>
+            </a:schemeClr>
+          </a:solidFill>
+        </p:spPr>
+        <p:style>
+          <a:lnRef idx="2">
+            <a:schemeClr val="accent1">
+              <a:shade val="15000"/>
+            </a:schemeClr>
+          </a:lnRef>
+          <a:fillRef idx="1">
+            <a:schemeClr val="accent1"/>
+          </a:fillRef>
+          <a:effectRef idx="0">
+            <a:schemeClr val="accent1"/>
+          </a:effectRef>
+          <a:fontRef idx="minor">
+            <a:schemeClr val="lt1"/>
+          </a:fontRef>
+        </p:style>
+        <p:txBody>
+          <a:bodyPr rtlCol="0" anchor="ctr"/>
+          <a:lstStyle/>
+          <a:p>
+            <a:pPr algn="ctr"/>
+            <a:endParaRPr lang="en-US"/>
+          </a:p>
+        </p:txBody>
+      </p:sp>
+      <p:sp>
+        <p:nvSpPr>
+          <p:cNvPr id="37" name="Rectangle 36">
+            <a:extLst>
+              <a:ext uri="{FF2B5EF4-FFF2-40B4-BE49-F238E27FC236}">
+                <a16:creationId xmlns:a16="http://schemas.microsoft.com/office/drawing/2014/main" id="{D34B2BA4-2385-EADA-2E79-FE1FC77257CB}"/>
+              </a:ext>
+            </a:extLst>
+          </p:cNvPr>
+          <p:cNvSpPr/>
+          <p:nvPr/>
+        </p:nvSpPr>
+        <p:spPr>
+          <a:xfrm>
+            <a:off x="7742821" y="5340598"/>
+            <a:ext cx="1205970" cy="436792"/>
+          </a:xfrm>
+          <a:prstGeom prst="rect">
+            <a:avLst/>
+          </a:prstGeom>
+          <a:solidFill>
+            <a:schemeClr val="bg2">
+              <a:lumMod val="20000"/>
+              <a:lumOff val="80000"/>
+              <a:alpha val="50196"/>
+            </a:schemeClr>
+          </a:solidFill>
+        </p:spPr>
+        <p:style>
+          <a:lnRef idx="2">
+            <a:schemeClr val="accent1">
+              <a:shade val="15000"/>
+            </a:schemeClr>
+          </a:lnRef>
+          <a:fillRef idx="1">
+            <a:schemeClr val="accent1"/>
+          </a:fillRef>
+          <a:effectRef idx="0">
+            <a:schemeClr val="accent1"/>
+          </a:effectRef>
+          <a:fontRef idx="minor">
+            <a:schemeClr val="lt1"/>
+          </a:fontRef>
+        </p:style>
+        <p:txBody>
+          <a:bodyPr rtlCol="0" anchor="ctr"/>
+          <a:lstStyle/>
+          <a:p>
+            <a:pPr algn="ctr"/>
+            <a:endParaRPr lang="en-US"/>
+          </a:p>
+        </p:txBody>
+      </p:sp>
+      <p:sp>
+        <p:nvSpPr>
+          <p:cNvPr id="38" name="Rectangle 37">
+            <a:extLst>
+              <a:ext uri="{FF2B5EF4-FFF2-40B4-BE49-F238E27FC236}">
+                <a16:creationId xmlns:a16="http://schemas.microsoft.com/office/drawing/2014/main" id="{06C106C0-E66B-E36A-DC3D-5DEDE336539D}"/>
+              </a:ext>
+            </a:extLst>
+          </p:cNvPr>
+          <p:cNvSpPr/>
+          <p:nvPr/>
+        </p:nvSpPr>
+        <p:spPr>
+          <a:xfrm>
+            <a:off x="6425321" y="3740812"/>
+            <a:ext cx="1205970" cy="436792"/>
+          </a:xfrm>
+          <a:prstGeom prst="rect">
+            <a:avLst/>
+          </a:prstGeom>
+          <a:solidFill>
+            <a:schemeClr val="bg2">
+              <a:lumMod val="20000"/>
+              <a:lumOff val="80000"/>
+              <a:alpha val="50196"/>
+            </a:schemeClr>
+          </a:solidFill>
+        </p:spPr>
+        <p:style>
+          <a:lnRef idx="2">
+            <a:schemeClr val="accent1">
+              <a:shade val="15000"/>
+            </a:schemeClr>
+          </a:lnRef>
+          <a:fillRef idx="1">
+            <a:schemeClr val="accent1"/>
+          </a:fillRef>
+          <a:effectRef idx="0">
+            <a:schemeClr val="accent1"/>
+          </a:effectRef>
+          <a:fontRef idx="minor">
+            <a:schemeClr val="lt1"/>
+          </a:fontRef>
+        </p:style>
+        <p:txBody>
+          <a:bodyPr rtlCol="0" anchor="ctr"/>
+          <a:lstStyle/>
+          <a:p>
+            <a:pPr algn="ctr"/>
+            <a:endParaRPr lang="en-US"/>
+          </a:p>
+        </p:txBody>
+      </p:sp>
+      <p:sp>
+        <p:nvSpPr>
+          <p:cNvPr id="39" name="Rectangle 38">
+            <a:extLst>
+              <a:ext uri="{FF2B5EF4-FFF2-40B4-BE49-F238E27FC236}">
+                <a16:creationId xmlns:a16="http://schemas.microsoft.com/office/drawing/2014/main" id="{E2216E36-7083-1D7A-9F66-7A5035186813}"/>
+              </a:ext>
+            </a:extLst>
+          </p:cNvPr>
+          <p:cNvSpPr/>
+          <p:nvPr/>
+        </p:nvSpPr>
+        <p:spPr>
+          <a:xfrm>
+            <a:off x="4531163" y="5340598"/>
+            <a:ext cx="986059" cy="436792"/>
+          </a:xfrm>
+          <a:prstGeom prst="rect">
+            <a:avLst/>
+          </a:prstGeom>
+          <a:solidFill>
+            <a:schemeClr val="bg2">
+              <a:lumMod val="20000"/>
+              <a:lumOff val="80000"/>
+              <a:alpha val="50196"/>
+            </a:schemeClr>
+          </a:solidFill>
+        </p:spPr>
+        <p:style>
+          <a:lnRef idx="2">
+            <a:schemeClr val="accent1">
+              <a:shade val="15000"/>
+            </a:schemeClr>
+          </a:lnRef>
+          <a:fillRef idx="1">
+            <a:schemeClr val="accent1"/>
+          </a:fillRef>
+          <a:effectRef idx="0">
+            <a:schemeClr val="accent1"/>
+          </a:effectRef>
+          <a:fontRef idx="minor">
+            <a:schemeClr val="lt1"/>
+          </a:fontRef>
+        </p:style>
+        <p:txBody>
+          <a:bodyPr rtlCol="0" anchor="ctr"/>
+          <a:lstStyle/>
+          <a:p>
+            <a:pPr algn="ctr"/>
+            <a:endParaRPr lang="en-US"/>
+          </a:p>
+        </p:txBody>
+      </p:sp>
+      <p:sp>
+        <p:nvSpPr>
+          <p:cNvPr id="40" name="Rectangle 39">
+            <a:extLst>
+              <a:ext uri="{FF2B5EF4-FFF2-40B4-BE49-F238E27FC236}">
+                <a16:creationId xmlns:a16="http://schemas.microsoft.com/office/drawing/2014/main" id="{78531A43-C5E5-1697-F482-FC190C759BCE}"/>
+              </a:ext>
+            </a:extLst>
+          </p:cNvPr>
+          <p:cNvSpPr/>
+          <p:nvPr/>
+        </p:nvSpPr>
+        <p:spPr>
+          <a:xfrm>
+            <a:off x="4058782" y="3862163"/>
+            <a:ext cx="1707898" cy="330837"/>
+          </a:xfrm>
+          <a:prstGeom prst="rect">
+            <a:avLst/>
+          </a:prstGeom>
+          <a:solidFill>
+            <a:schemeClr val="bg2">
+              <a:lumMod val="20000"/>
+              <a:lumOff val="80000"/>
+              <a:alpha val="50196"/>
+            </a:schemeClr>
+          </a:solidFill>
+        </p:spPr>
+        <p:style>
+          <a:lnRef idx="2">
+            <a:schemeClr val="accent1">
+              <a:shade val="15000"/>
+            </a:schemeClr>
+          </a:lnRef>
+          <a:fillRef idx="1">
+            <a:schemeClr val="accent1"/>
+          </a:fillRef>
+          <a:effectRef idx="0">
+            <a:schemeClr val="accent1"/>
+          </a:effectRef>
+          <a:fontRef idx="minor">
+            <a:schemeClr val="lt1"/>
+          </a:fontRef>
+        </p:style>
+        <p:txBody>
+          <a:bodyPr rtlCol="0" anchor="ctr"/>
+          <a:lstStyle/>
+          <a:p>
+            <a:pPr algn="ctr"/>
+            <a:endParaRPr lang="en-US"/>
+          </a:p>
+        </p:txBody>
+      </p:sp>
+      <p:sp>
+        <p:nvSpPr>
+          <p:cNvPr id="48" name="Freeform: Shape 47">
+            <a:extLst>
+              <a:ext uri="{FF2B5EF4-FFF2-40B4-BE49-F238E27FC236}">
+                <a16:creationId xmlns:a16="http://schemas.microsoft.com/office/drawing/2014/main" id="{F7FD4980-3266-44E3-2183-2BAEE4A2CEAC}"/>
+              </a:ext>
+            </a:extLst>
+          </p:cNvPr>
+          <p:cNvSpPr/>
+          <p:nvPr/>
+        </p:nvSpPr>
+        <p:spPr>
+          <a:xfrm>
+            <a:off x="6164494" y="2589088"/>
+            <a:ext cx="852755" cy="842481"/>
+          </a:xfrm>
+          <a:custGeom>
+            <a:avLst/>
+            <a:gdLst>
+              <a:gd name="csX0" fmla="*/ 10275 w 852755"/>
+              <a:gd name="csY0" fmla="*/ 0 h 842481"/>
+              <a:gd name="csX1" fmla="*/ 0 w 852755"/>
+              <a:gd name="csY1" fmla="*/ 277402 h 842481"/>
+              <a:gd name="csX2" fmla="*/ 842481 w 852755"/>
+              <a:gd name="csY2" fmla="*/ 267128 h 842481"/>
+              <a:gd name="csX3" fmla="*/ 852755 w 852755"/>
+              <a:gd name="csY3" fmla="*/ 842481 h 842481"/>
+            </a:gdLst>
+            <a:ahLst/>
+            <a:cxnLst>
+              <a:cxn ang="0">
+                <a:pos x="csX0" y="csY0"/>
+              </a:cxn>
+              <a:cxn ang="0">
+                <a:pos x="csX1" y="csY1"/>
+              </a:cxn>
+              <a:cxn ang="0">
+                <a:pos x="csX2" y="csY2"/>
+              </a:cxn>
+              <a:cxn ang="0">
+                <a:pos x="csX3" y="csY3"/>
+              </a:cxn>
+            </a:cxnLst>
+            <a:rect l="l" t="t" r="r" b="b"/>
+            <a:pathLst>
+              <a:path w="852755" h="842481">
+                <a:moveTo>
+                  <a:pt x="10275" y="0"/>
+                </a:moveTo>
+                <a:lnTo>
+                  <a:pt x="0" y="277402"/>
+                </a:lnTo>
+                <a:lnTo>
+                  <a:pt x="842481" y="267128"/>
+                </a:lnTo>
+                <a:lnTo>
+                  <a:pt x="852755" y="842481"/>
+                </a:lnTo>
+              </a:path>
+            </a:pathLst>
+          </a:custGeom>
+        </p:spPr>
+        <p:style>
+          <a:lnRef idx="3">
+            <a:schemeClr val="accent1"/>
+          </a:lnRef>
+          <a:fillRef idx="0">
+            <a:schemeClr val="accent1"/>
+          </a:fillRef>
+          <a:effectRef idx="2">
+            <a:schemeClr val="accent1"/>
+          </a:effectRef>
+          <a:fontRef idx="minor">
+            <a:schemeClr val="tx1"/>
+          </a:fontRef>
+        </p:style>
+        <p:txBody>
+          <a:bodyPr rtlCol="0" anchor="ctr"/>
+          <a:lstStyle/>
+          <a:p>
+            <a:pPr algn="ctr"/>
+            <a:endParaRPr lang="en-US"/>
+          </a:p>
+        </p:txBody>
+      </p:sp>
+      <p:sp>
+        <p:nvSpPr>
+          <p:cNvPr id="49" name="Freeform: Shape 48">
+            <a:extLst>
+              <a:ext uri="{FF2B5EF4-FFF2-40B4-BE49-F238E27FC236}">
+                <a16:creationId xmlns:a16="http://schemas.microsoft.com/office/drawing/2014/main" id="{CDBF736C-9236-5D80-D237-BA9F88728932}"/>
+              </a:ext>
+            </a:extLst>
+          </p:cNvPr>
+          <p:cNvSpPr/>
+          <p:nvPr/>
+        </p:nvSpPr>
+        <p:spPr>
+          <a:xfrm>
+            <a:off x="5054885" y="513708"/>
+            <a:ext cx="544531" cy="297950"/>
+          </a:xfrm>
+          <a:custGeom>
+            <a:avLst/>
+            <a:gdLst>
+              <a:gd name="csX0" fmla="*/ 544531 w 544531"/>
+              <a:gd name="csY0" fmla="*/ 0 h 297950"/>
+              <a:gd name="csX1" fmla="*/ 0 w 544531"/>
+              <a:gd name="csY1" fmla="*/ 0 h 297950"/>
+              <a:gd name="csX2" fmla="*/ 0 w 544531"/>
+              <a:gd name="csY2" fmla="*/ 297950 h 297950"/>
+            </a:gdLst>
+            <a:ahLst/>
+            <a:cxnLst>
+              <a:cxn ang="0">
+                <a:pos x="csX0" y="csY0"/>
+              </a:cxn>
+              <a:cxn ang="0">
+                <a:pos x="csX1" y="csY1"/>
+              </a:cxn>
+              <a:cxn ang="0">
+                <a:pos x="csX2" y="csY2"/>
+              </a:cxn>
+            </a:cxnLst>
+            <a:rect l="l" t="t" r="r" b="b"/>
+            <a:pathLst>
+              <a:path w="544531" h="297950">
+                <a:moveTo>
+                  <a:pt x="544531" y="0"/>
+                </a:moveTo>
+                <a:lnTo>
+                  <a:pt x="0" y="0"/>
+                </a:lnTo>
+                <a:lnTo>
+                  <a:pt x="0" y="297950"/>
+                </a:lnTo>
+              </a:path>
+            </a:pathLst>
+          </a:custGeom>
+        </p:spPr>
+        <p:style>
+          <a:lnRef idx="3">
+            <a:schemeClr val="accent1"/>
+          </a:lnRef>
+          <a:fillRef idx="0">
+            <a:schemeClr val="accent1"/>
+          </a:fillRef>
+          <a:effectRef idx="2">
+            <a:schemeClr val="accent1"/>
+          </a:effectRef>
+          <a:fontRef idx="minor">
+            <a:schemeClr val="tx1"/>
+          </a:fontRef>
+        </p:style>
+        <p:txBody>
+          <a:bodyPr rtlCol="0" anchor="ctr"/>
+          <a:lstStyle/>
+          <a:p>
+            <a:pPr algn="ctr"/>
+            <a:endParaRPr lang="en-US"/>
+          </a:p>
+        </p:txBody>
+      </p:sp>
+      <p:cxnSp>
+        <p:nvCxnSpPr>
+          <p:cNvPr id="51" name="Straight Connector 50">
+            <a:extLst>
+              <a:ext uri="{FF2B5EF4-FFF2-40B4-BE49-F238E27FC236}">
+                <a16:creationId xmlns:a16="http://schemas.microsoft.com/office/drawing/2014/main" id="{CD39DA3F-3B3E-DF88-C1AA-61B824060173}"/>
+              </a:ext>
+            </a:extLst>
+          </p:cNvPr>
+          <p:cNvCxnSpPr>
+            <a:cxnSpLocks/>
+          </p:cNvCxnSpPr>
+          <p:nvPr/>
+        </p:nvCxnSpPr>
+        <p:spPr>
+          <a:xfrm>
+            <a:off x="3411020" y="424700"/>
+            <a:ext cx="0" cy="1143749"/>
+          </a:xfrm>
+          <a:prstGeom prst="line">
+            <a:avLst/>
+          </a:prstGeom>
+        </p:spPr>
+        <p:style>
+          <a:lnRef idx="3">
+            <a:schemeClr val="accent1"/>
+          </a:lnRef>
+          <a:fillRef idx="0">
+            <a:schemeClr val="accent1"/>
+          </a:fillRef>
+          <a:effectRef idx="2">
+            <a:schemeClr val="accent1"/>
+          </a:effectRef>
+          <a:fontRef idx="minor">
+            <a:schemeClr val="tx1"/>
+          </a:fontRef>
+        </p:style>
+      </p:cxnSp>
+      <p:sp>
+        <p:nvSpPr>
+          <p:cNvPr id="53" name="Freeform: Shape 52">
+            <a:extLst>
+              <a:ext uri="{FF2B5EF4-FFF2-40B4-BE49-F238E27FC236}">
+                <a16:creationId xmlns:a16="http://schemas.microsoft.com/office/drawing/2014/main" id="{EB2A5180-E351-BDC7-9D78-A119DD7D58A0}"/>
+              </a:ext>
+            </a:extLst>
+          </p:cNvPr>
+          <p:cNvSpPr/>
+          <p:nvPr/>
+        </p:nvSpPr>
+        <p:spPr>
+          <a:xfrm>
+            <a:off x="3565133" y="996593"/>
+            <a:ext cx="1047964" cy="544531"/>
+          </a:xfrm>
+          <a:custGeom>
+            <a:avLst/>
+            <a:gdLst>
+              <a:gd name="csX0" fmla="*/ 1047964 w 1047964"/>
+              <a:gd name="csY0" fmla="*/ 0 h 544531"/>
+              <a:gd name="csX1" fmla="*/ 0 w 1047964"/>
+              <a:gd name="csY1" fmla="*/ 10274 h 544531"/>
+              <a:gd name="csX2" fmla="*/ 10274 w 1047964"/>
+              <a:gd name="csY2" fmla="*/ 544531 h 544531"/>
+            </a:gdLst>
+            <a:ahLst/>
+            <a:cxnLst>
+              <a:cxn ang="0">
+                <a:pos x="csX0" y="csY0"/>
+              </a:cxn>
+              <a:cxn ang="0">
+                <a:pos x="csX1" y="csY1"/>
+              </a:cxn>
+              <a:cxn ang="0">
+                <a:pos x="csX2" y="csY2"/>
+              </a:cxn>
+            </a:cxnLst>
+            <a:rect l="l" t="t" r="r" b="b"/>
+            <a:pathLst>
+              <a:path w="1047964" h="544531">
+                <a:moveTo>
+                  <a:pt x="1047964" y="0"/>
+                </a:moveTo>
+                <a:lnTo>
+                  <a:pt x="0" y="10274"/>
+                </a:lnTo>
+                <a:lnTo>
+                  <a:pt x="10274" y="544531"/>
+                </a:lnTo>
+              </a:path>
+            </a:pathLst>
+          </a:custGeom>
+        </p:spPr>
+        <p:style>
+          <a:lnRef idx="3">
+            <a:schemeClr val="accent1"/>
+          </a:lnRef>
+          <a:fillRef idx="0">
+            <a:schemeClr val="accent1"/>
+          </a:fillRef>
+          <a:effectRef idx="2">
+            <a:schemeClr val="accent1"/>
+          </a:effectRef>
+          <a:fontRef idx="minor">
+            <a:schemeClr val="tx1"/>
+          </a:fontRef>
+        </p:style>
+        <p:txBody>
+          <a:bodyPr rtlCol="0" anchor="ctr"/>
+          <a:lstStyle/>
+          <a:p>
+            <a:pPr algn="ctr"/>
+            <a:endParaRPr lang="en-US"/>
+          </a:p>
+        </p:txBody>
+      </p:sp>
+      <p:sp>
+        <p:nvSpPr>
+          <p:cNvPr id="54" name="Freeform: Shape 53">
+            <a:extLst>
+              <a:ext uri="{FF2B5EF4-FFF2-40B4-BE49-F238E27FC236}">
+                <a16:creationId xmlns:a16="http://schemas.microsoft.com/office/drawing/2014/main" id="{17369FEE-AA6A-EDC4-E1AB-42C6227FCE03}"/>
+              </a:ext>
+            </a:extLst>
+          </p:cNvPr>
+          <p:cNvSpPr/>
+          <p:nvPr/>
+        </p:nvSpPr>
+        <p:spPr>
+          <a:xfrm>
+            <a:off x="3616503" y="431515"/>
+            <a:ext cx="1006868" cy="482885"/>
+          </a:xfrm>
+          <a:custGeom>
+            <a:avLst/>
+            <a:gdLst>
+              <a:gd name="csX0" fmla="*/ 1006868 w 1006868"/>
+              <a:gd name="csY0" fmla="*/ 482885 h 482885"/>
+              <a:gd name="csX1" fmla="*/ 0 w 1006868"/>
+              <a:gd name="csY1" fmla="*/ 0 h 482885"/>
+            </a:gdLst>
+            <a:ahLst/>
+            <a:cxnLst>
+              <a:cxn ang="0">
+                <a:pos x="csX0" y="csY0"/>
+              </a:cxn>
+              <a:cxn ang="0">
+                <a:pos x="csX1" y="csY1"/>
+              </a:cxn>
+            </a:cxnLst>
+            <a:rect l="l" t="t" r="r" b="b"/>
+            <a:pathLst>
+              <a:path w="1006868" h="482885">
+                <a:moveTo>
+                  <a:pt x="1006868" y="482885"/>
+                </a:moveTo>
+                <a:lnTo>
+                  <a:pt x="0" y="0"/>
+                </a:lnTo>
+              </a:path>
+            </a:pathLst>
+          </a:custGeom>
+        </p:spPr>
+        <p:style>
+          <a:lnRef idx="3">
+            <a:schemeClr val="accent1"/>
+          </a:lnRef>
+          <a:fillRef idx="0">
+            <a:schemeClr val="accent1"/>
+          </a:fillRef>
+          <a:effectRef idx="2">
+            <a:schemeClr val="accent1"/>
+          </a:effectRef>
+          <a:fontRef idx="minor">
+            <a:schemeClr val="tx1"/>
+          </a:fontRef>
+        </p:style>
+        <p:txBody>
+          <a:bodyPr rtlCol="0" anchor="ctr"/>
+          <a:lstStyle/>
+          <a:p>
+            <a:pPr algn="ctr"/>
+            <a:endParaRPr lang="en-US"/>
+          </a:p>
+        </p:txBody>
+      </p:sp>
+      <p:sp>
+        <p:nvSpPr>
+          <p:cNvPr id="55" name="Freeform: Shape 54">
+            <a:extLst>
+              <a:ext uri="{FF2B5EF4-FFF2-40B4-BE49-F238E27FC236}">
+                <a16:creationId xmlns:a16="http://schemas.microsoft.com/office/drawing/2014/main" id="{4269CC7F-8F18-BFEF-70F7-0E0E1A76F260}"/>
+              </a:ext>
+            </a:extLst>
+          </p:cNvPr>
+          <p:cNvSpPr/>
+          <p:nvPr/>
+        </p:nvSpPr>
+        <p:spPr>
+          <a:xfrm>
+            <a:off x="7161088" y="3102796"/>
+            <a:ext cx="431514" cy="328773"/>
+          </a:xfrm>
+          <a:custGeom>
+            <a:avLst/>
+            <a:gdLst>
+              <a:gd name="csX0" fmla="*/ 431514 w 431514"/>
+              <a:gd name="csY0" fmla="*/ 0 h 328773"/>
+              <a:gd name="csX1" fmla="*/ 431514 w 431514"/>
+              <a:gd name="csY1" fmla="*/ 61644 h 328773"/>
+              <a:gd name="csX2" fmla="*/ 421240 w 431514"/>
+              <a:gd name="csY2" fmla="*/ 184934 h 328773"/>
+              <a:gd name="csX3" fmla="*/ 0 w 431514"/>
+              <a:gd name="csY3" fmla="*/ 174660 h 328773"/>
+              <a:gd name="csX4" fmla="*/ 0 w 431514"/>
+              <a:gd name="csY4" fmla="*/ 328773 h 328773"/>
+            </a:gdLst>
+            <a:ahLst/>
+            <a:cxnLst>
+              <a:cxn ang="0">
+                <a:pos x="csX0" y="csY0"/>
+              </a:cxn>
+              <a:cxn ang="0">
+                <a:pos x="csX1" y="csY1"/>
+              </a:cxn>
+              <a:cxn ang="0">
+                <a:pos x="csX2" y="csY2"/>
+              </a:cxn>
+              <a:cxn ang="0">
+                <a:pos x="csX3" y="csY3"/>
+              </a:cxn>
+              <a:cxn ang="0">
+                <a:pos x="csX4" y="csY4"/>
+              </a:cxn>
+            </a:cxnLst>
+            <a:rect l="l" t="t" r="r" b="b"/>
+            <a:pathLst>
+              <a:path w="431514" h="328773">
+                <a:moveTo>
+                  <a:pt x="431514" y="0"/>
+                </a:moveTo>
+                <a:lnTo>
+                  <a:pt x="431514" y="61644"/>
+                </a:lnTo>
+                <a:lnTo>
+                  <a:pt x="421240" y="184934"/>
+                </a:lnTo>
+                <a:lnTo>
+                  <a:pt x="0" y="174660"/>
+                </a:lnTo>
+                <a:lnTo>
+                  <a:pt x="0" y="328773"/>
+                </a:lnTo>
+              </a:path>
+            </a:pathLst>
+          </a:custGeom>
+        </p:spPr>
+        <p:style>
+          <a:lnRef idx="3">
+            <a:schemeClr val="accent1"/>
+          </a:lnRef>
+          <a:fillRef idx="0">
+            <a:schemeClr val="accent1"/>
+          </a:fillRef>
+          <a:effectRef idx="2">
+            <a:schemeClr val="accent1"/>
+          </a:effectRef>
+          <a:fontRef idx="minor">
+            <a:schemeClr val="tx1"/>
+          </a:fontRef>
+        </p:style>
+        <p:txBody>
+          <a:bodyPr rtlCol="0" anchor="ctr"/>
+          <a:lstStyle/>
+          <a:p>
+            <a:pPr algn="ctr"/>
+            <a:endParaRPr lang="en-US"/>
+          </a:p>
+        </p:txBody>
+      </p:sp>
+      <p:sp>
+        <p:nvSpPr>
+          <p:cNvPr id="56" name="Freeform: Shape 55">
+            <a:extLst>
+              <a:ext uri="{FF2B5EF4-FFF2-40B4-BE49-F238E27FC236}">
+                <a16:creationId xmlns:a16="http://schemas.microsoft.com/office/drawing/2014/main" id="{26B839A6-427C-AA0F-6DD7-7A3105DB41FA}"/>
+              </a:ext>
+            </a:extLst>
+          </p:cNvPr>
+          <p:cNvSpPr/>
+          <p:nvPr/>
+        </p:nvSpPr>
+        <p:spPr>
+          <a:xfrm>
+            <a:off x="5270643" y="2393879"/>
+            <a:ext cx="431514" cy="0"/>
+          </a:xfrm>
+          <a:custGeom>
+            <a:avLst/>
+            <a:gdLst>
+              <a:gd name="csX0" fmla="*/ 0 w 431514"/>
+              <a:gd name="csY0" fmla="*/ 0 h 0"/>
+              <a:gd name="csX1" fmla="*/ 431514 w 431514"/>
+              <a:gd name="csY1" fmla="*/ 0 h 0"/>
+            </a:gdLst>
+            <a:ahLst/>
+            <a:cxnLst>
+              <a:cxn ang="0">
+                <a:pos x="csX0" y="csY0"/>
+              </a:cxn>
+              <a:cxn ang="0">
+                <a:pos x="csX1" y="csY1"/>
+              </a:cxn>
+            </a:cxnLst>
+            <a:rect l="l" t="t" r="r" b="b"/>
+            <a:pathLst>
+              <a:path w="431514">
+                <a:moveTo>
+                  <a:pt x="0" y="0"/>
+                </a:moveTo>
+                <a:lnTo>
+                  <a:pt x="431514" y="0"/>
+                </a:lnTo>
+              </a:path>
+            </a:pathLst>
+          </a:custGeom>
+        </p:spPr>
+        <p:style>
+          <a:lnRef idx="3">
+            <a:schemeClr val="accent1"/>
+          </a:lnRef>
+          <a:fillRef idx="0">
+            <a:schemeClr val="accent1"/>
+          </a:fillRef>
+          <a:effectRef idx="2">
+            <a:schemeClr val="accent1"/>
+          </a:effectRef>
+          <a:fontRef idx="minor">
+            <a:schemeClr val="tx1"/>
+          </a:fontRef>
+        </p:style>
+        <p:txBody>
+          <a:bodyPr rtlCol="0" anchor="ctr"/>
+          <a:lstStyle/>
+          <a:p>
+            <a:pPr algn="ctr"/>
+            <a:endParaRPr lang="en-US"/>
+          </a:p>
+        </p:txBody>
+      </p:sp>
+      <p:sp>
+        <p:nvSpPr>
+          <p:cNvPr id="57" name="Freeform: Shape 56">
+            <a:extLst>
+              <a:ext uri="{FF2B5EF4-FFF2-40B4-BE49-F238E27FC236}">
+                <a16:creationId xmlns:a16="http://schemas.microsoft.com/office/drawing/2014/main" id="{9F597EB5-CAEA-D4A5-B042-DFB114184818}"/>
+              </a:ext>
+            </a:extLst>
+          </p:cNvPr>
+          <p:cNvSpPr/>
+          <p:nvPr/>
+        </p:nvSpPr>
+        <p:spPr>
+          <a:xfrm>
+            <a:off x="4941870" y="2578813"/>
+            <a:ext cx="2147299" cy="852756"/>
+          </a:xfrm>
+          <a:custGeom>
+            <a:avLst/>
+            <a:gdLst>
+              <a:gd name="csX0" fmla="*/ 2147299 w 2147299"/>
+              <a:gd name="csY0" fmla="*/ 852756 h 852756"/>
+              <a:gd name="csX1" fmla="*/ 2147299 w 2147299"/>
+              <a:gd name="csY1" fmla="*/ 102742 h 852756"/>
+              <a:gd name="csX2" fmla="*/ 0 w 2147299"/>
+              <a:gd name="csY2" fmla="*/ 102742 h 852756"/>
+              <a:gd name="csX3" fmla="*/ 10274 w 2147299"/>
+              <a:gd name="csY3" fmla="*/ 0 h 852756"/>
+            </a:gdLst>
+            <a:ahLst/>
+            <a:cxnLst>
+              <a:cxn ang="0">
+                <a:pos x="csX0" y="csY0"/>
+              </a:cxn>
+              <a:cxn ang="0">
+                <a:pos x="csX1" y="csY1"/>
+              </a:cxn>
+              <a:cxn ang="0">
+                <a:pos x="csX2" y="csY2"/>
+              </a:cxn>
+              <a:cxn ang="0">
+                <a:pos x="csX3" y="csY3"/>
+              </a:cxn>
+            </a:cxnLst>
+            <a:rect l="l" t="t" r="r" b="b"/>
+            <a:pathLst>
+              <a:path w="2147299" h="852756">
+                <a:moveTo>
+                  <a:pt x="2147299" y="852756"/>
+                </a:moveTo>
+                <a:lnTo>
+                  <a:pt x="2147299" y="102742"/>
+                </a:lnTo>
+                <a:lnTo>
+                  <a:pt x="0" y="102742"/>
+                </a:lnTo>
+                <a:lnTo>
+                  <a:pt x="10274" y="0"/>
+                </a:lnTo>
+              </a:path>
+            </a:pathLst>
+          </a:custGeom>
+        </p:spPr>
+        <p:style>
+          <a:lnRef idx="3">
+            <a:schemeClr val="accent1"/>
+          </a:lnRef>
+          <a:fillRef idx="0">
+            <a:schemeClr val="accent1"/>
+          </a:fillRef>
+          <a:effectRef idx="2">
+            <a:schemeClr val="accent1"/>
+          </a:effectRef>
+          <a:fontRef idx="minor">
+            <a:schemeClr val="tx1"/>
+          </a:fontRef>
+        </p:style>
+        <p:txBody>
+          <a:bodyPr rtlCol="0" anchor="ctr"/>
+          <a:lstStyle/>
+          <a:p>
+            <a:pPr algn="ctr"/>
+            <a:endParaRPr lang="en-US"/>
+          </a:p>
+        </p:txBody>
+      </p:sp>
+      <p:sp>
+        <p:nvSpPr>
+          <p:cNvPr id="58" name="Freeform: Shape 57">
+            <a:extLst>
+              <a:ext uri="{FF2B5EF4-FFF2-40B4-BE49-F238E27FC236}">
+                <a16:creationId xmlns:a16="http://schemas.microsoft.com/office/drawing/2014/main" id="{ED968289-9CAA-FE31-8856-8BD7E638CE1E}"/>
+              </a:ext>
+            </a:extLst>
+          </p:cNvPr>
+          <p:cNvSpPr/>
+          <p:nvPr/>
+        </p:nvSpPr>
+        <p:spPr>
+          <a:xfrm>
+            <a:off x="6554912" y="1941816"/>
+            <a:ext cx="554805" cy="0"/>
+          </a:xfrm>
+          <a:custGeom>
+            <a:avLst/>
+            <a:gdLst>
+              <a:gd name="csX0" fmla="*/ 0 w 554805"/>
+              <a:gd name="csY0" fmla="*/ 0 h 0"/>
+              <a:gd name="csX1" fmla="*/ 554805 w 554805"/>
+              <a:gd name="csY1" fmla="*/ 0 h 0"/>
+            </a:gdLst>
+            <a:ahLst/>
+            <a:cxnLst>
+              <a:cxn ang="0">
+                <a:pos x="csX0" y="csY0"/>
+              </a:cxn>
+              <a:cxn ang="0">
+                <a:pos x="csX1" y="csY1"/>
+              </a:cxn>
+            </a:cxnLst>
+            <a:rect l="l" t="t" r="r" b="b"/>
+            <a:pathLst>
+              <a:path w="554805">
+                <a:moveTo>
+                  <a:pt x="0" y="0"/>
+                </a:moveTo>
+                <a:lnTo>
+                  <a:pt x="554805" y="0"/>
+                </a:lnTo>
+              </a:path>
+            </a:pathLst>
+          </a:custGeom>
+        </p:spPr>
+        <p:style>
+          <a:lnRef idx="3">
+            <a:schemeClr val="accent1"/>
+          </a:lnRef>
+          <a:fillRef idx="0">
+            <a:schemeClr val="accent1"/>
+          </a:fillRef>
+          <a:effectRef idx="2">
+            <a:schemeClr val="accent1"/>
+          </a:effectRef>
+          <a:fontRef idx="minor">
+            <a:schemeClr val="tx1"/>
+          </a:fontRef>
+        </p:style>
+        <p:txBody>
+          <a:bodyPr rtlCol="0" anchor="ctr"/>
+          <a:lstStyle/>
+          <a:p>
+            <a:pPr algn="ctr"/>
+            <a:endParaRPr lang="en-US"/>
+          </a:p>
+        </p:txBody>
+      </p:sp>
+      <p:sp>
+        <p:nvSpPr>
+          <p:cNvPr id="59" name="Freeform: Shape 58">
+            <a:extLst>
+              <a:ext uri="{FF2B5EF4-FFF2-40B4-BE49-F238E27FC236}">
+                <a16:creationId xmlns:a16="http://schemas.microsoft.com/office/drawing/2014/main" id="{E1E50490-E82D-9031-CA95-D7755044AF92}"/>
+              </a:ext>
+            </a:extLst>
+          </p:cNvPr>
+          <p:cNvSpPr/>
+          <p:nvPr/>
+        </p:nvSpPr>
+        <p:spPr>
+          <a:xfrm>
+            <a:off x="4941870" y="431515"/>
+            <a:ext cx="0" cy="390418"/>
+          </a:xfrm>
+          <a:custGeom>
+            <a:avLst/>
+            <a:gdLst>
+              <a:gd name="csX0" fmla="*/ 0 w 0"/>
+              <a:gd name="csY0" fmla="*/ 390418 h 390418"/>
+              <a:gd name="csX1" fmla="*/ 0 w 0"/>
+              <a:gd name="csY1" fmla="*/ 0 h 390418"/>
+            </a:gdLst>
+            <a:ahLst/>
+            <a:cxnLst>
+              <a:cxn ang="0">
+                <a:pos x="csX0" y="csY0"/>
+              </a:cxn>
+              <a:cxn ang="0">
+                <a:pos x="csX1" y="csY1"/>
+              </a:cxn>
+            </a:cxnLst>
+            <a:rect l="l" t="t" r="r" b="b"/>
+            <a:pathLst>
+              <a:path h="390418">
+                <a:moveTo>
+                  <a:pt x="0" y="390418"/>
+                </a:moveTo>
+                <a:lnTo>
+                  <a:pt x="0" y="0"/>
+                </a:lnTo>
+              </a:path>
+            </a:pathLst>
+          </a:custGeom>
+        </p:spPr>
+        <p:style>
+          <a:lnRef idx="3">
+            <a:schemeClr val="accent1"/>
+          </a:lnRef>
+          <a:fillRef idx="0">
+            <a:schemeClr val="accent1"/>
+          </a:fillRef>
+          <a:effectRef idx="2">
+            <a:schemeClr val="accent1"/>
+          </a:effectRef>
+          <a:fontRef idx="minor">
+            <a:schemeClr val="tx1"/>
+          </a:fontRef>
+        </p:style>
+        <p:txBody>
+          <a:bodyPr rtlCol="0" anchor="ctr"/>
+          <a:lstStyle/>
+          <a:p>
+            <a:pPr algn="ctr"/>
+            <a:endParaRPr lang="en-US"/>
+          </a:p>
+        </p:txBody>
+      </p:sp>
+      <p:sp>
+        <p:nvSpPr>
+          <p:cNvPr id="60" name="Freeform: Shape 59">
+            <a:extLst>
+              <a:ext uri="{FF2B5EF4-FFF2-40B4-BE49-F238E27FC236}">
+                <a16:creationId xmlns:a16="http://schemas.microsoft.com/office/drawing/2014/main" id="{992CAA49-A15E-9216-545B-43161E72BE16}"/>
+              </a:ext>
+            </a:extLst>
+          </p:cNvPr>
+          <p:cNvSpPr/>
+          <p:nvPr/>
+        </p:nvSpPr>
+        <p:spPr>
+          <a:xfrm>
+            <a:off x="3750067" y="246420"/>
+            <a:ext cx="873304" cy="10434"/>
+          </a:xfrm>
+          <a:custGeom>
+            <a:avLst/>
+            <a:gdLst>
+              <a:gd name="csX0" fmla="*/ 0 w 873304"/>
+              <a:gd name="csY0" fmla="*/ 10434 h 10434"/>
+              <a:gd name="csX1" fmla="*/ 0 w 873304"/>
+              <a:gd name="csY1" fmla="*/ 10434 h 10434"/>
+              <a:gd name="csX2" fmla="*/ 154113 w 873304"/>
+              <a:gd name="csY2" fmla="*/ 160 h 10434"/>
+              <a:gd name="csX3" fmla="*/ 873304 w 873304"/>
+              <a:gd name="csY3" fmla="*/ 160 h 10434"/>
+            </a:gdLst>
+            <a:ahLst/>
+            <a:cxnLst>
+              <a:cxn ang="0">
+                <a:pos x="csX0" y="csY0"/>
+              </a:cxn>
+              <a:cxn ang="0">
+                <a:pos x="csX1" y="csY1"/>
+              </a:cxn>
+              <a:cxn ang="0">
+                <a:pos x="csX2" y="csY2"/>
+              </a:cxn>
+              <a:cxn ang="0">
+                <a:pos x="csX3" y="csY3"/>
+              </a:cxn>
+            </a:cxnLst>
+            <a:rect l="l" t="t" r="r" b="b"/>
+            <a:pathLst>
+              <a:path w="873304" h="10434">
+                <a:moveTo>
+                  <a:pt x="0" y="10434"/>
+                </a:moveTo>
+                <a:lnTo>
+                  <a:pt x="0" y="10434"/>
+                </a:lnTo>
+                <a:cubicBezTo>
+                  <a:pt x="112891" y="-2109"/>
+                  <a:pt x="61456" y="160"/>
+                  <a:pt x="154113" y="160"/>
+                </a:cubicBezTo>
+                <a:lnTo>
+                  <a:pt x="873304" y="160"/>
+                </a:lnTo>
+              </a:path>
+            </a:pathLst>
+          </a:custGeom>
+        </p:spPr>
+        <p:style>
+          <a:lnRef idx="3">
+            <a:schemeClr val="accent1"/>
+          </a:lnRef>
+          <a:fillRef idx="0">
+            <a:schemeClr val="accent1"/>
+          </a:fillRef>
+          <a:effectRef idx="2">
+            <a:schemeClr val="accent1"/>
+          </a:effectRef>
+          <a:fontRef idx="minor">
+            <a:schemeClr val="tx1"/>
+          </a:fontRef>
+        </p:style>
+        <p:txBody>
+          <a:bodyPr rtlCol="0" anchor="ctr"/>
+          <a:lstStyle/>
+          <a:p>
+            <a:pPr algn="ctr"/>
+            <a:endParaRPr lang="en-US"/>
+          </a:p>
+        </p:txBody>
+      </p:sp>
+      <p:sp>
+        <p:nvSpPr>
+          <p:cNvPr id="61" name="Freeform: Shape 60">
+            <a:extLst>
+              <a:ext uri="{FF2B5EF4-FFF2-40B4-BE49-F238E27FC236}">
+                <a16:creationId xmlns:a16="http://schemas.microsoft.com/office/drawing/2014/main" id="{B9B0F0EA-0BF4-9D58-D3FD-62D848295860}"/>
+              </a:ext>
+            </a:extLst>
+          </p:cNvPr>
+          <p:cNvSpPr/>
+          <p:nvPr/>
+        </p:nvSpPr>
+        <p:spPr>
+          <a:xfrm>
+            <a:off x="2989780" y="996593"/>
+            <a:ext cx="0" cy="205483"/>
+          </a:xfrm>
+          <a:custGeom>
+            <a:avLst/>
+            <a:gdLst>
+              <a:gd name="csX0" fmla="*/ 0 w 0"/>
+              <a:gd name="csY0" fmla="*/ 0 h 205483"/>
+              <a:gd name="csX1" fmla="*/ 0 w 0"/>
+              <a:gd name="csY1" fmla="*/ 205483 h 205483"/>
+            </a:gdLst>
+            <a:ahLst/>
+            <a:cxnLst>
+              <a:cxn ang="0">
+                <a:pos x="csX0" y="csY0"/>
+              </a:cxn>
+              <a:cxn ang="0">
+                <a:pos x="csX1" y="csY1"/>
+              </a:cxn>
+            </a:cxnLst>
+            <a:rect l="l" t="t" r="r" b="b"/>
+            <a:pathLst>
+              <a:path h="205483">
+                <a:moveTo>
+                  <a:pt x="0" y="0"/>
+                </a:moveTo>
+                <a:lnTo>
+                  <a:pt x="0" y="205483"/>
+                </a:lnTo>
+              </a:path>
+            </a:pathLst>
+          </a:custGeom>
+        </p:spPr>
+        <p:style>
+          <a:lnRef idx="3">
+            <a:schemeClr val="accent1"/>
+          </a:lnRef>
+          <a:fillRef idx="0">
+            <a:schemeClr val="accent1"/>
+          </a:fillRef>
+          <a:effectRef idx="2">
+            <a:schemeClr val="accent1"/>
+          </a:effectRef>
+          <a:fontRef idx="minor">
+            <a:schemeClr val="tx1"/>
+          </a:fontRef>
+        </p:style>
+        <p:txBody>
+          <a:bodyPr rtlCol="0" anchor="ctr"/>
+          <a:lstStyle/>
+          <a:p>
+            <a:pPr algn="ctr"/>
+            <a:endParaRPr lang="en-US"/>
+          </a:p>
+        </p:txBody>
+      </p:sp>
+      <p:sp>
+        <p:nvSpPr>
+          <p:cNvPr id="62" name="Freeform: Shape 61">
+            <a:extLst>
+              <a:ext uri="{FF2B5EF4-FFF2-40B4-BE49-F238E27FC236}">
+                <a16:creationId xmlns:a16="http://schemas.microsoft.com/office/drawing/2014/main" id="{21670D05-272B-2354-4730-CEDC6CB9A02D}"/>
+              </a:ext>
+            </a:extLst>
+          </p:cNvPr>
+          <p:cNvSpPr/>
+          <p:nvPr/>
+        </p:nvSpPr>
+        <p:spPr>
+          <a:xfrm>
+            <a:off x="2989780" y="256854"/>
+            <a:ext cx="102741" cy="426359"/>
+          </a:xfrm>
+          <a:custGeom>
+            <a:avLst/>
+            <a:gdLst>
+              <a:gd name="csX0" fmla="*/ 0 w 113016"/>
+              <a:gd name="csY0" fmla="*/ 421240 h 482885"/>
+              <a:gd name="csX1" fmla="*/ 0 w 113016"/>
+              <a:gd name="csY1" fmla="*/ 482885 h 482885"/>
+              <a:gd name="csX2" fmla="*/ 10274 w 113016"/>
+              <a:gd name="csY2" fmla="*/ 0 h 482885"/>
+              <a:gd name="csX3" fmla="*/ 113016 w 113016"/>
+              <a:gd name="csY3" fmla="*/ 0 h 482885"/>
+            </a:gdLst>
+            <a:ahLst/>
+            <a:cxnLst>
+              <a:cxn ang="0">
+                <a:pos x="csX0" y="csY0"/>
+              </a:cxn>
+              <a:cxn ang="0">
+                <a:pos x="csX1" y="csY1"/>
+              </a:cxn>
+              <a:cxn ang="0">
+                <a:pos x="csX2" y="csY2"/>
+              </a:cxn>
+              <a:cxn ang="0">
+                <a:pos x="csX3" y="csY3"/>
+              </a:cxn>
+            </a:cxnLst>
+            <a:rect l="l" t="t" r="r" b="b"/>
+            <a:pathLst>
+              <a:path w="113016" h="482885">
+                <a:moveTo>
+                  <a:pt x="0" y="421240"/>
+                </a:moveTo>
+                <a:lnTo>
+                  <a:pt x="0" y="482885"/>
+                </a:lnTo>
+                <a:lnTo>
+                  <a:pt x="10274" y="0"/>
+                </a:lnTo>
+                <a:lnTo>
+                  <a:pt x="113016" y="0"/>
+                </a:lnTo>
+              </a:path>
+            </a:pathLst>
+          </a:custGeom>
+        </p:spPr>
+        <p:style>
+          <a:lnRef idx="3">
+            <a:schemeClr val="accent1"/>
+          </a:lnRef>
+          <a:fillRef idx="0">
+            <a:schemeClr val="accent1"/>
+          </a:fillRef>
+          <a:effectRef idx="2">
+            <a:schemeClr val="accent1"/>
+          </a:effectRef>
+          <a:fontRef idx="minor">
+            <a:schemeClr val="tx1"/>
+          </a:fontRef>
+        </p:style>
+        <p:txBody>
+          <a:bodyPr rtlCol="0" anchor="ctr"/>
+          <a:lstStyle/>
+          <a:p>
+            <a:pPr algn="ctr"/>
+            <a:r>
+              <a:rPr lang="en-US" altLang="zh-CN" dirty="0"/>
+              <a:t>·</a:t>
+            </a:r>
+            <a:endParaRPr lang="en-US" dirty="0"/>
+          </a:p>
+        </p:txBody>
+      </p:sp>
+      <p:sp>
+        <p:nvSpPr>
+          <p:cNvPr id="63" name="Freeform: Shape 62">
+            <a:extLst>
+              <a:ext uri="{FF2B5EF4-FFF2-40B4-BE49-F238E27FC236}">
+                <a16:creationId xmlns:a16="http://schemas.microsoft.com/office/drawing/2014/main" id="{E546C66D-DF82-D7E1-749A-A0D5E0157C70}"/>
+              </a:ext>
+            </a:extLst>
+          </p:cNvPr>
+          <p:cNvSpPr/>
+          <p:nvPr/>
+        </p:nvSpPr>
+        <p:spPr>
+          <a:xfrm>
+            <a:off x="5239820" y="1068512"/>
+            <a:ext cx="1027416" cy="739740"/>
+          </a:xfrm>
+          <a:custGeom>
+            <a:avLst/>
+            <a:gdLst>
+              <a:gd name="csX0" fmla="*/ 0 w 1027416"/>
+              <a:gd name="csY0" fmla="*/ 0 h 739740"/>
+              <a:gd name="csX1" fmla="*/ 1027416 w 1027416"/>
+              <a:gd name="csY1" fmla="*/ 739740 h 739740"/>
+            </a:gdLst>
+            <a:ahLst/>
+            <a:cxnLst>
+              <a:cxn ang="0">
+                <a:pos x="csX0" y="csY0"/>
+              </a:cxn>
+              <a:cxn ang="0">
+                <a:pos x="csX1" y="csY1"/>
+              </a:cxn>
+            </a:cxnLst>
+            <a:rect l="l" t="t" r="r" b="b"/>
+            <a:pathLst>
+              <a:path w="1027416" h="739740">
+                <a:moveTo>
+                  <a:pt x="0" y="0"/>
+                </a:moveTo>
+                <a:lnTo>
+                  <a:pt x="1027416" y="739740"/>
+                </a:lnTo>
+              </a:path>
+            </a:pathLst>
+          </a:custGeom>
+        </p:spPr>
+        <p:style>
+          <a:lnRef idx="3">
+            <a:schemeClr val="accent1"/>
+          </a:lnRef>
+          <a:fillRef idx="0">
+            <a:schemeClr val="accent1"/>
+          </a:fillRef>
+          <a:effectRef idx="2">
+            <a:schemeClr val="accent1"/>
+          </a:effectRef>
+          <a:fontRef idx="minor">
+            <a:schemeClr val="tx1"/>
+          </a:fontRef>
+        </p:style>
+        <p:txBody>
+          <a:bodyPr rtlCol="0" anchor="ctr"/>
+          <a:lstStyle/>
+          <a:p>
+            <a:pPr algn="ctr"/>
+            <a:endParaRPr lang="en-US"/>
+          </a:p>
+        </p:txBody>
+      </p:sp>
+      <p:sp>
+        <p:nvSpPr>
+          <p:cNvPr id="64" name="Freeform: Shape 63">
+            <a:extLst>
+              <a:ext uri="{FF2B5EF4-FFF2-40B4-BE49-F238E27FC236}">
+                <a16:creationId xmlns:a16="http://schemas.microsoft.com/office/drawing/2014/main" id="{B9690BC7-C991-66B0-80FA-367D9D58CA7F}"/>
+              </a:ext>
+            </a:extLst>
+          </p:cNvPr>
+          <p:cNvSpPr/>
+          <p:nvPr/>
+        </p:nvSpPr>
+        <p:spPr>
+          <a:xfrm>
+            <a:off x="4941870" y="1181528"/>
+            <a:ext cx="0" cy="400692"/>
+          </a:xfrm>
+          <a:custGeom>
+            <a:avLst/>
+            <a:gdLst>
+              <a:gd name="csX0" fmla="*/ 0 w 0"/>
+              <a:gd name="csY0" fmla="*/ 0 h 400692"/>
+              <a:gd name="csX1" fmla="*/ 0 w 0"/>
+              <a:gd name="csY1" fmla="*/ 400692 h 400692"/>
+            </a:gdLst>
+            <a:ahLst/>
+            <a:cxnLst>
+              <a:cxn ang="0">
+                <a:pos x="csX0" y="csY0"/>
+              </a:cxn>
+              <a:cxn ang="0">
+                <a:pos x="csX1" y="csY1"/>
+              </a:cxn>
+            </a:cxnLst>
+            <a:rect l="l" t="t" r="r" b="b"/>
+            <a:pathLst>
+              <a:path h="400692">
+                <a:moveTo>
+                  <a:pt x="0" y="0"/>
+                </a:moveTo>
+                <a:lnTo>
+                  <a:pt x="0" y="400692"/>
+                </a:lnTo>
+              </a:path>
+            </a:pathLst>
+          </a:custGeom>
+        </p:spPr>
+        <p:style>
+          <a:lnRef idx="3">
+            <a:schemeClr val="accent1"/>
+          </a:lnRef>
+          <a:fillRef idx="0">
+            <a:schemeClr val="accent1"/>
+          </a:fillRef>
+          <a:effectRef idx="2">
+            <a:schemeClr val="accent1"/>
+          </a:effectRef>
+          <a:fontRef idx="minor">
+            <a:schemeClr val="tx1"/>
+          </a:fontRef>
+        </p:style>
+        <p:txBody>
+          <a:bodyPr rtlCol="0" anchor="ctr"/>
+          <a:lstStyle/>
+          <a:p>
+            <a:pPr algn="ctr"/>
+            <a:endParaRPr lang="en-US"/>
+          </a:p>
+        </p:txBody>
+      </p:sp>
+      <p:sp>
+        <p:nvSpPr>
+          <p:cNvPr id="65" name="Freeform: Shape 64">
+            <a:extLst>
+              <a:ext uri="{FF2B5EF4-FFF2-40B4-BE49-F238E27FC236}">
+                <a16:creationId xmlns:a16="http://schemas.microsoft.com/office/drawing/2014/main" id="{ED9F6058-1BBF-0574-239E-09EF60389B00}"/>
+              </a:ext>
+            </a:extLst>
+          </p:cNvPr>
+          <p:cNvSpPr/>
+          <p:nvPr/>
+        </p:nvSpPr>
+        <p:spPr>
+          <a:xfrm>
+            <a:off x="4366517" y="1140431"/>
+            <a:ext cx="421240" cy="113016"/>
+          </a:xfrm>
+          <a:custGeom>
+            <a:avLst/>
+            <a:gdLst>
+              <a:gd name="csX0" fmla="*/ 421240 w 421240"/>
+              <a:gd name="csY0" fmla="*/ 0 h 113016"/>
+              <a:gd name="csX1" fmla="*/ 0 w 421240"/>
+              <a:gd name="csY1" fmla="*/ 113016 h 113016"/>
+            </a:gdLst>
+            <a:ahLst/>
+            <a:cxnLst>
+              <a:cxn ang="0">
+                <a:pos x="csX0" y="csY0"/>
+              </a:cxn>
+              <a:cxn ang="0">
+                <a:pos x="csX1" y="csY1"/>
+              </a:cxn>
+            </a:cxnLst>
+            <a:rect l="l" t="t" r="r" b="b"/>
+            <a:pathLst>
+              <a:path w="421240" h="113016">
+                <a:moveTo>
+                  <a:pt x="421240" y="0"/>
+                </a:moveTo>
+                <a:lnTo>
+                  <a:pt x="0" y="113016"/>
+                </a:lnTo>
+              </a:path>
+            </a:pathLst>
+          </a:custGeom>
+        </p:spPr>
+        <p:style>
+          <a:lnRef idx="3">
+            <a:schemeClr val="accent1"/>
+          </a:lnRef>
+          <a:fillRef idx="0">
+            <a:schemeClr val="accent1"/>
+          </a:fillRef>
+          <a:effectRef idx="2">
+            <a:schemeClr val="accent1"/>
+          </a:effectRef>
+          <a:fontRef idx="minor">
+            <a:schemeClr val="tx1"/>
+          </a:fontRef>
+        </p:style>
+        <p:txBody>
+          <a:bodyPr rtlCol="0" anchor="ctr"/>
+          <a:lstStyle/>
+          <a:p>
+            <a:pPr algn="ctr"/>
+            <a:endParaRPr lang="en-US"/>
+          </a:p>
+        </p:txBody>
+      </p:sp>
+      <p:sp>
+        <p:nvSpPr>
+          <p:cNvPr id="66" name="Freeform: Shape 65">
+            <a:extLst>
+              <a:ext uri="{FF2B5EF4-FFF2-40B4-BE49-F238E27FC236}">
+                <a16:creationId xmlns:a16="http://schemas.microsoft.com/office/drawing/2014/main" id="{10518BFD-E70E-2E67-2F50-AC3F7447DA12}"/>
+              </a:ext>
+            </a:extLst>
+          </p:cNvPr>
+          <p:cNvSpPr/>
+          <p:nvPr/>
+        </p:nvSpPr>
+        <p:spPr>
+          <a:xfrm>
+            <a:off x="5270643" y="1017142"/>
+            <a:ext cx="339047" cy="0"/>
+          </a:xfrm>
+          <a:custGeom>
+            <a:avLst/>
+            <a:gdLst>
+              <a:gd name="csX0" fmla="*/ 0 w 339047"/>
+              <a:gd name="csY0" fmla="*/ 0 h 0"/>
+              <a:gd name="csX1" fmla="*/ 339047 w 339047"/>
+              <a:gd name="csY1" fmla="*/ 0 h 0"/>
+            </a:gdLst>
+            <a:ahLst/>
+            <a:cxnLst>
+              <a:cxn ang="0">
+                <a:pos x="csX0" y="csY0"/>
+              </a:cxn>
+              <a:cxn ang="0">
+                <a:pos x="csX1" y="csY1"/>
+              </a:cxn>
+            </a:cxnLst>
+            <a:rect l="l" t="t" r="r" b="b"/>
+            <a:pathLst>
+              <a:path w="339047">
+                <a:moveTo>
+                  <a:pt x="0" y="0"/>
+                </a:moveTo>
+                <a:lnTo>
+                  <a:pt x="339047" y="0"/>
+                </a:lnTo>
+              </a:path>
+            </a:pathLst>
+          </a:custGeom>
+        </p:spPr>
+        <p:style>
+          <a:lnRef idx="3">
+            <a:schemeClr val="accent1"/>
+          </a:lnRef>
+          <a:fillRef idx="0">
+            <a:schemeClr val="accent1"/>
+          </a:fillRef>
+          <a:effectRef idx="2">
+            <a:schemeClr val="accent1"/>
+          </a:effectRef>
+          <a:fontRef idx="minor">
+            <a:schemeClr val="tx1"/>
+          </a:fontRef>
+        </p:style>
+        <p:txBody>
+          <a:bodyPr rtlCol="0" anchor="ctr"/>
+          <a:lstStyle/>
+          <a:p>
+            <a:pPr algn="ctr"/>
+            <a:endParaRPr lang="en-US"/>
+          </a:p>
+        </p:txBody>
+      </p:sp>
+      <p:sp>
+        <p:nvSpPr>
+          <p:cNvPr id="67" name="Freeform: Shape 66">
+            <a:extLst>
+              <a:ext uri="{FF2B5EF4-FFF2-40B4-BE49-F238E27FC236}">
+                <a16:creationId xmlns:a16="http://schemas.microsoft.com/office/drawing/2014/main" id="{548674E5-F9A8-4170-9CE7-D9D2C6E3E2E8}"/>
+              </a:ext>
+            </a:extLst>
+          </p:cNvPr>
+          <p:cNvSpPr/>
+          <p:nvPr/>
+        </p:nvSpPr>
+        <p:spPr>
+          <a:xfrm>
+            <a:off x="6236413" y="996593"/>
+            <a:ext cx="328774" cy="0"/>
+          </a:xfrm>
+          <a:custGeom>
+            <a:avLst/>
+            <a:gdLst>
+              <a:gd name="csX0" fmla="*/ 0 w 328774"/>
+              <a:gd name="csY0" fmla="*/ 0 h 0"/>
+              <a:gd name="csX1" fmla="*/ 328774 w 328774"/>
+              <a:gd name="csY1" fmla="*/ 0 h 0"/>
+            </a:gdLst>
+            <a:ahLst/>
+            <a:cxnLst>
+              <a:cxn ang="0">
+                <a:pos x="csX0" y="csY0"/>
+              </a:cxn>
+              <a:cxn ang="0">
+                <a:pos x="csX1" y="csY1"/>
+              </a:cxn>
+            </a:cxnLst>
+            <a:rect l="l" t="t" r="r" b="b"/>
+            <a:pathLst>
+              <a:path w="328774">
+                <a:moveTo>
+                  <a:pt x="0" y="0"/>
+                </a:moveTo>
+                <a:lnTo>
+                  <a:pt x="328774" y="0"/>
+                </a:lnTo>
+              </a:path>
+            </a:pathLst>
+          </a:custGeom>
+        </p:spPr>
+        <p:style>
+          <a:lnRef idx="3">
+            <a:schemeClr val="accent1"/>
+          </a:lnRef>
+          <a:fillRef idx="0">
+            <a:schemeClr val="accent1"/>
+          </a:fillRef>
+          <a:effectRef idx="2">
+            <a:schemeClr val="accent1"/>
+          </a:effectRef>
+          <a:fontRef idx="minor">
+            <a:schemeClr val="tx1"/>
+          </a:fontRef>
+        </p:style>
+        <p:txBody>
+          <a:bodyPr rtlCol="0" anchor="ctr"/>
+          <a:lstStyle/>
+          <a:p>
+            <a:pPr algn="ctr"/>
+            <a:endParaRPr lang="en-US"/>
+          </a:p>
+        </p:txBody>
+      </p:sp>
+      <p:sp>
+        <p:nvSpPr>
+          <p:cNvPr id="4" name="Freeform: Shape 3">
+            <a:extLst>
+              <a:ext uri="{FF2B5EF4-FFF2-40B4-BE49-F238E27FC236}">
+                <a16:creationId xmlns:a16="http://schemas.microsoft.com/office/drawing/2014/main" id="{D523B543-62B7-1ED7-7FC7-C5B65483AB0E}"/>
+              </a:ext>
+            </a:extLst>
+          </p:cNvPr>
+          <p:cNvSpPr/>
+          <p:nvPr/>
+        </p:nvSpPr>
+        <p:spPr>
+          <a:xfrm>
+            <a:off x="3648075" y="3009900"/>
+            <a:ext cx="4763" cy="442913"/>
+          </a:xfrm>
+          <a:custGeom>
+            <a:avLst/>
+            <a:gdLst>
+              <a:gd name="csX0" fmla="*/ 0 w 4763"/>
+              <a:gd name="csY0" fmla="*/ 0 h 442913"/>
+              <a:gd name="csX1" fmla="*/ 4763 w 4763"/>
+              <a:gd name="csY1" fmla="*/ 442913 h 442913"/>
+            </a:gdLst>
+            <a:ahLst/>
+            <a:cxnLst>
+              <a:cxn ang="0">
+                <a:pos x="csX0" y="csY0"/>
+              </a:cxn>
+              <a:cxn ang="0">
+                <a:pos x="csX1" y="csY1"/>
+              </a:cxn>
+            </a:cxnLst>
+            <a:rect l="l" t="t" r="r" b="b"/>
+            <a:pathLst>
+              <a:path w="4763" h="442913">
+                <a:moveTo>
+                  <a:pt x="0" y="0"/>
+                </a:moveTo>
+                <a:cubicBezTo>
+                  <a:pt x="1588" y="147638"/>
+                  <a:pt x="3175" y="295275"/>
+                  <a:pt x="4763" y="442913"/>
+                </a:cubicBezTo>
+              </a:path>
+            </a:pathLst>
+          </a:custGeom>
+        </p:spPr>
+        <p:style>
+          <a:lnRef idx="3">
+            <a:schemeClr val="accent1"/>
+          </a:lnRef>
+          <a:fillRef idx="0">
+            <a:schemeClr val="accent1"/>
+          </a:fillRef>
+          <a:effectRef idx="2">
+            <a:schemeClr val="accent1"/>
+          </a:effectRef>
+          <a:fontRef idx="minor">
+            <a:schemeClr val="tx1"/>
+          </a:fontRef>
+        </p:style>
+        <p:txBody>
+          <a:bodyPr rtlCol="0" anchor="ctr"/>
+          <a:lstStyle/>
+          <a:p>
+            <a:pPr algn="ctr"/>
+            <a:endParaRPr lang="en-US"/>
+          </a:p>
+        </p:txBody>
+      </p:sp>
+      <p:sp>
+        <p:nvSpPr>
+          <p:cNvPr id="7" name="Freeform: Shape 6">
+            <a:extLst>
+              <a:ext uri="{FF2B5EF4-FFF2-40B4-BE49-F238E27FC236}">
+                <a16:creationId xmlns:a16="http://schemas.microsoft.com/office/drawing/2014/main" id="{54152BFB-D349-97E9-E750-F213147CA611}"/>
+              </a:ext>
+            </a:extLst>
+          </p:cNvPr>
+          <p:cNvSpPr/>
+          <p:nvPr/>
+        </p:nvSpPr>
+        <p:spPr>
+          <a:xfrm>
+            <a:off x="3810000" y="2414588"/>
+            <a:ext cx="809625" cy="1028700"/>
+          </a:xfrm>
+          <a:custGeom>
+            <a:avLst/>
+            <a:gdLst>
+              <a:gd name="csX0" fmla="*/ 809625 w 809625"/>
+              <a:gd name="csY0" fmla="*/ 0 h 1028700"/>
+              <a:gd name="csX1" fmla="*/ 261938 w 809625"/>
+              <a:gd name="csY1" fmla="*/ 0 h 1028700"/>
+              <a:gd name="csX2" fmla="*/ 261938 w 809625"/>
+              <a:gd name="csY2" fmla="*/ 866775 h 1028700"/>
+              <a:gd name="csX3" fmla="*/ 0 w 809625"/>
+              <a:gd name="csY3" fmla="*/ 866775 h 1028700"/>
+              <a:gd name="csX4" fmla="*/ 0 w 809625"/>
+              <a:gd name="csY4" fmla="*/ 1028700 h 1028700"/>
+            </a:gdLst>
+            <a:ahLst/>
+            <a:cxnLst>
+              <a:cxn ang="0">
+                <a:pos x="csX0" y="csY0"/>
+              </a:cxn>
+              <a:cxn ang="0">
+                <a:pos x="csX1" y="csY1"/>
+              </a:cxn>
+              <a:cxn ang="0">
+                <a:pos x="csX2" y="csY2"/>
+              </a:cxn>
+              <a:cxn ang="0">
+                <a:pos x="csX3" y="csY3"/>
+              </a:cxn>
+              <a:cxn ang="0">
+                <a:pos x="csX4" y="csY4"/>
+              </a:cxn>
+            </a:cxnLst>
+            <a:rect l="l" t="t" r="r" b="b"/>
+            <a:pathLst>
+              <a:path w="809625" h="1028700">
+                <a:moveTo>
+                  <a:pt x="809625" y="0"/>
+                </a:moveTo>
+                <a:lnTo>
+                  <a:pt x="261938" y="0"/>
+                </a:lnTo>
+                <a:lnTo>
+                  <a:pt x="261938" y="866775"/>
+                </a:lnTo>
+                <a:lnTo>
+                  <a:pt x="0" y="866775"/>
+                </a:lnTo>
+                <a:lnTo>
+                  <a:pt x="0" y="1028700"/>
+                </a:lnTo>
+              </a:path>
+            </a:pathLst>
+          </a:custGeom>
+        </p:spPr>
+        <p:style>
+          <a:lnRef idx="3">
+            <a:schemeClr val="accent1"/>
+          </a:lnRef>
+          <a:fillRef idx="0">
+            <a:schemeClr val="accent1"/>
+          </a:fillRef>
+          <a:effectRef idx="2">
+            <a:schemeClr val="accent1"/>
+          </a:effectRef>
+          <a:fontRef idx="minor">
+            <a:schemeClr val="tx1"/>
+          </a:fontRef>
+        </p:style>
+        <p:txBody>
+          <a:bodyPr rtlCol="0" anchor="ctr"/>
+          <a:lstStyle/>
+          <a:p>
+            <a:pPr algn="ctr"/>
+            <a:endParaRPr lang="en-US"/>
+          </a:p>
+        </p:txBody>
+      </p:sp>
+      <p:sp>
+        <p:nvSpPr>
+          <p:cNvPr id="9" name="Freeform: Shape 8">
+            <a:extLst>
+              <a:ext uri="{FF2B5EF4-FFF2-40B4-BE49-F238E27FC236}">
+                <a16:creationId xmlns:a16="http://schemas.microsoft.com/office/drawing/2014/main" id="{C0665E0A-4E76-AA18-691C-E5AF3ED4B327}"/>
+              </a:ext>
+            </a:extLst>
+          </p:cNvPr>
+          <p:cNvSpPr/>
+          <p:nvPr/>
+        </p:nvSpPr>
+        <p:spPr>
+          <a:xfrm>
+            <a:off x="3750067" y="1839074"/>
+            <a:ext cx="852755" cy="1623317"/>
+          </a:xfrm>
+          <a:custGeom>
+            <a:avLst/>
+            <a:gdLst>
+              <a:gd name="csX0" fmla="*/ 0 w 852755"/>
+              <a:gd name="csY0" fmla="*/ 1623317 h 1623317"/>
+              <a:gd name="csX1" fmla="*/ 852755 w 852755"/>
+              <a:gd name="csY1" fmla="*/ 0 h 1623317"/>
+            </a:gdLst>
+            <a:ahLst/>
+            <a:cxnLst>
+              <a:cxn ang="0">
+                <a:pos x="csX0" y="csY0"/>
+              </a:cxn>
+              <a:cxn ang="0">
+                <a:pos x="csX1" y="csY1"/>
+              </a:cxn>
+            </a:cxnLst>
+            <a:rect l="l" t="t" r="r" b="b"/>
+            <a:pathLst>
+              <a:path w="852755" h="1623317">
+                <a:moveTo>
+                  <a:pt x="0" y="1623317"/>
+                </a:moveTo>
+                <a:lnTo>
+                  <a:pt x="852755" y="0"/>
+                </a:lnTo>
+              </a:path>
+            </a:pathLst>
+          </a:custGeom>
+        </p:spPr>
+        <p:style>
+          <a:lnRef idx="3">
+            <a:schemeClr val="accent2"/>
+          </a:lnRef>
+          <a:fillRef idx="0">
+            <a:schemeClr val="accent2"/>
+          </a:fillRef>
+          <a:effectRef idx="2">
+            <a:schemeClr val="accent2"/>
+          </a:effectRef>
+          <a:fontRef idx="minor">
+            <a:schemeClr val="tx1"/>
+          </a:fontRef>
+        </p:style>
+        <p:txBody>
+          <a:bodyPr rtlCol="0" anchor="ctr"/>
+          <a:lstStyle/>
+          <a:p>
+            <a:pPr algn="ctr"/>
+            <a:endParaRPr lang="en-US"/>
+          </a:p>
+        </p:txBody>
+      </p:sp>
+      <p:sp>
+        <p:nvSpPr>
+          <p:cNvPr id="10" name="Freeform: Shape 9">
+            <a:extLst>
+              <a:ext uri="{FF2B5EF4-FFF2-40B4-BE49-F238E27FC236}">
+                <a16:creationId xmlns:a16="http://schemas.microsoft.com/office/drawing/2014/main" id="{46F4B32D-63DD-79C2-EB11-1C6B5134AC22}"/>
+              </a:ext>
+            </a:extLst>
+          </p:cNvPr>
+          <p:cNvSpPr/>
+          <p:nvPr/>
+        </p:nvSpPr>
+        <p:spPr>
+          <a:xfrm>
+            <a:off x="4952144" y="1150706"/>
+            <a:ext cx="821932" cy="1099334"/>
+          </a:xfrm>
+          <a:custGeom>
+            <a:avLst/>
+            <a:gdLst>
+              <a:gd name="csX0" fmla="*/ 0 w 821932"/>
+              <a:gd name="csY0" fmla="*/ 1099334 h 1099334"/>
+              <a:gd name="csX1" fmla="*/ 821932 w 821932"/>
+              <a:gd name="csY1" fmla="*/ 0 h 1099334"/>
+            </a:gdLst>
+            <a:ahLst/>
+            <a:cxnLst>
+              <a:cxn ang="0">
+                <a:pos x="csX0" y="csY0"/>
+              </a:cxn>
+              <a:cxn ang="0">
+                <a:pos x="csX1" y="csY1"/>
+              </a:cxn>
+            </a:cxnLst>
+            <a:rect l="l" t="t" r="r" b="b"/>
+            <a:pathLst>
+              <a:path w="821932" h="1099334">
+                <a:moveTo>
+                  <a:pt x="0" y="1099334"/>
+                </a:moveTo>
+                <a:lnTo>
+                  <a:pt x="821932" y="0"/>
+                </a:lnTo>
+              </a:path>
+            </a:pathLst>
+          </a:custGeom>
+        </p:spPr>
+        <p:style>
+          <a:lnRef idx="3">
+            <a:schemeClr val="accent2"/>
+          </a:lnRef>
+          <a:fillRef idx="0">
+            <a:schemeClr val="accent2"/>
+          </a:fillRef>
+          <a:effectRef idx="2">
+            <a:schemeClr val="accent2"/>
+          </a:effectRef>
+          <a:fontRef idx="minor">
+            <a:schemeClr val="tx1"/>
+          </a:fontRef>
+        </p:style>
+        <p:txBody>
+          <a:bodyPr rtlCol="0" anchor="ctr"/>
+          <a:lstStyle/>
+          <a:p>
+            <a:pPr algn="ctr"/>
+            <a:endParaRPr lang="en-US"/>
+          </a:p>
+        </p:txBody>
+      </p:sp>
+      <p:sp>
+        <p:nvSpPr>
+          <p:cNvPr id="11" name="Freeform: Shape 10">
+            <a:extLst>
+              <a:ext uri="{FF2B5EF4-FFF2-40B4-BE49-F238E27FC236}">
+                <a16:creationId xmlns:a16="http://schemas.microsoft.com/office/drawing/2014/main" id="{0FF2A21D-2A4C-C56C-478F-136A6DA4F1C0}"/>
+              </a:ext>
+            </a:extLst>
+          </p:cNvPr>
+          <p:cNvSpPr/>
+          <p:nvPr/>
+        </p:nvSpPr>
+        <p:spPr>
+          <a:xfrm>
+            <a:off x="5167901" y="1150706"/>
+            <a:ext cx="678095" cy="1130157"/>
+          </a:xfrm>
+          <a:custGeom>
+            <a:avLst/>
+            <a:gdLst>
+              <a:gd name="csX0" fmla="*/ 678095 w 678095"/>
+              <a:gd name="csY0" fmla="*/ 1130157 h 1130157"/>
+              <a:gd name="csX1" fmla="*/ 0 w 678095"/>
+              <a:gd name="csY1" fmla="*/ 0 h 1130157"/>
+            </a:gdLst>
+            <a:ahLst/>
+            <a:cxnLst>
+              <a:cxn ang="0">
+                <a:pos x="csX0" y="csY0"/>
+              </a:cxn>
+              <a:cxn ang="0">
+                <a:pos x="csX1" y="csY1"/>
+              </a:cxn>
+            </a:cxnLst>
+            <a:rect l="l" t="t" r="r" b="b"/>
+            <a:pathLst>
+              <a:path w="678095" h="1130157">
+                <a:moveTo>
+                  <a:pt x="678095" y="1130157"/>
+                </a:moveTo>
+                <a:lnTo>
+                  <a:pt x="0" y="0"/>
+                </a:lnTo>
+              </a:path>
+            </a:pathLst>
+          </a:custGeom>
+        </p:spPr>
+        <p:style>
+          <a:lnRef idx="3">
+            <a:schemeClr val="accent2"/>
+          </a:lnRef>
+          <a:fillRef idx="0">
+            <a:schemeClr val="accent2"/>
+          </a:fillRef>
+          <a:effectRef idx="2">
+            <a:schemeClr val="accent2"/>
+          </a:effectRef>
+          <a:fontRef idx="minor">
+            <a:schemeClr val="tx1"/>
+          </a:fontRef>
+        </p:style>
+        <p:txBody>
+          <a:bodyPr rtlCol="0" anchor="ctr"/>
+          <a:lstStyle/>
+          <a:p>
+            <a:pPr algn="ctr"/>
+            <a:endParaRPr lang="en-US"/>
+          </a:p>
+        </p:txBody>
+      </p:sp>
+      <p:sp>
+        <p:nvSpPr>
+          <p:cNvPr id="12" name="Freeform: Shape 11">
+            <a:extLst>
+              <a:ext uri="{FF2B5EF4-FFF2-40B4-BE49-F238E27FC236}">
+                <a16:creationId xmlns:a16="http://schemas.microsoft.com/office/drawing/2014/main" id="{2A2DADB3-570D-A90F-D20D-65C5A60C5483}"/>
+              </a:ext>
+            </a:extLst>
+          </p:cNvPr>
+          <p:cNvSpPr/>
+          <p:nvPr/>
+        </p:nvSpPr>
+        <p:spPr>
+          <a:xfrm>
+            <a:off x="5876819" y="1160980"/>
+            <a:ext cx="10274" cy="1150705"/>
+          </a:xfrm>
+          <a:custGeom>
+            <a:avLst/>
+            <a:gdLst>
+              <a:gd name="csX0" fmla="*/ 0 w 10274"/>
+              <a:gd name="csY0" fmla="*/ 1150705 h 1150705"/>
+              <a:gd name="csX1" fmla="*/ 10274 w 10274"/>
+              <a:gd name="csY1" fmla="*/ 0 h 1150705"/>
+            </a:gdLst>
+            <a:ahLst/>
+            <a:cxnLst>
+              <a:cxn ang="0">
+                <a:pos x="csX0" y="csY0"/>
+              </a:cxn>
+              <a:cxn ang="0">
+                <a:pos x="csX1" y="csY1"/>
+              </a:cxn>
+            </a:cxnLst>
+            <a:rect l="l" t="t" r="r" b="b"/>
+            <a:pathLst>
+              <a:path w="10274" h="1150705">
+                <a:moveTo>
+                  <a:pt x="0" y="1150705"/>
+                </a:moveTo>
+                <a:cubicBezTo>
+                  <a:pt x="3425" y="767137"/>
+                  <a:pt x="6849" y="383568"/>
+                  <a:pt x="10274" y="0"/>
+                </a:cubicBezTo>
+              </a:path>
+            </a:pathLst>
+          </a:custGeom>
+        </p:spPr>
+        <p:style>
+          <a:lnRef idx="3">
+            <a:schemeClr val="accent2"/>
+          </a:lnRef>
+          <a:fillRef idx="0">
+            <a:schemeClr val="accent2"/>
+          </a:fillRef>
+          <a:effectRef idx="2">
+            <a:schemeClr val="accent2"/>
+          </a:effectRef>
+          <a:fontRef idx="minor">
+            <a:schemeClr val="tx1"/>
+          </a:fontRef>
+        </p:style>
+        <p:txBody>
+          <a:bodyPr rtlCol="0" anchor="ctr"/>
+          <a:lstStyle/>
+          <a:p>
+            <a:pPr algn="ctr"/>
+            <a:endParaRPr lang="en-US"/>
+          </a:p>
+        </p:txBody>
+      </p:sp>
+      <p:sp>
+        <p:nvSpPr>
+          <p:cNvPr id="13" name="Freeform: Shape 12">
+            <a:extLst>
+              <a:ext uri="{FF2B5EF4-FFF2-40B4-BE49-F238E27FC236}">
+                <a16:creationId xmlns:a16="http://schemas.microsoft.com/office/drawing/2014/main" id="{67BA8C59-F106-C12B-A657-1D7108138B1E}"/>
+              </a:ext>
+            </a:extLst>
+          </p:cNvPr>
+          <p:cNvSpPr/>
+          <p:nvPr/>
+        </p:nvSpPr>
+        <p:spPr>
+          <a:xfrm>
+            <a:off x="6082301" y="1160980"/>
+            <a:ext cx="832207" cy="2311685"/>
+          </a:xfrm>
+          <a:custGeom>
+            <a:avLst/>
+            <a:gdLst>
+              <a:gd name="csX0" fmla="*/ 832207 w 832207"/>
+              <a:gd name="csY0" fmla="*/ 2311685 h 2311685"/>
+              <a:gd name="csX1" fmla="*/ 0 w 832207"/>
+              <a:gd name="csY1" fmla="*/ 0 h 2311685"/>
+            </a:gdLst>
+            <a:ahLst/>
+            <a:cxnLst>
+              <a:cxn ang="0">
+                <a:pos x="csX0" y="csY0"/>
+              </a:cxn>
+              <a:cxn ang="0">
+                <a:pos x="csX1" y="csY1"/>
+              </a:cxn>
+            </a:cxnLst>
+            <a:rect l="l" t="t" r="r" b="b"/>
+            <a:pathLst>
+              <a:path w="832207" h="2311685">
+                <a:moveTo>
+                  <a:pt x="832207" y="2311685"/>
+                </a:moveTo>
+                <a:lnTo>
+                  <a:pt x="0" y="0"/>
+                </a:lnTo>
+              </a:path>
+            </a:pathLst>
+          </a:custGeom>
+        </p:spPr>
+        <p:style>
+          <a:lnRef idx="3">
+            <a:schemeClr val="accent2"/>
+          </a:lnRef>
+          <a:fillRef idx="0">
+            <a:schemeClr val="accent2"/>
+          </a:fillRef>
+          <a:effectRef idx="2">
+            <a:schemeClr val="accent2"/>
+          </a:effectRef>
+          <a:fontRef idx="minor">
+            <a:schemeClr val="tx1"/>
+          </a:fontRef>
+        </p:style>
+        <p:txBody>
+          <a:bodyPr rtlCol="0" anchor="ctr"/>
+          <a:lstStyle/>
+          <a:p>
+            <a:pPr algn="ctr"/>
+            <a:endParaRPr lang="en-US"/>
+          </a:p>
+        </p:txBody>
+      </p:sp>
+      <p:sp>
+        <p:nvSpPr>
+          <p:cNvPr id="2" name="Freeform: Shape 1">
+            <a:extLst>
+              <a:ext uri="{FF2B5EF4-FFF2-40B4-BE49-F238E27FC236}">
+                <a16:creationId xmlns:a16="http://schemas.microsoft.com/office/drawing/2014/main" id="{69CF54E8-113A-1B8F-88EC-4094C300F5F1}"/>
+              </a:ext>
+            </a:extLst>
+          </p:cNvPr>
+          <p:cNvSpPr/>
+          <p:nvPr/>
+        </p:nvSpPr>
+        <p:spPr>
+          <a:xfrm>
+            <a:off x="5105400" y="2571750"/>
+            <a:ext cx="762000" cy="848623"/>
+          </a:xfrm>
+          <a:custGeom>
+            <a:avLst/>
+            <a:gdLst>
+              <a:gd name="csX0" fmla="*/ 762000 w 762000"/>
+              <a:gd name="csY0" fmla="*/ 0 h 863600"/>
+              <a:gd name="csX1" fmla="*/ 762000 w 762000"/>
+              <a:gd name="csY1" fmla="*/ 273050 h 863600"/>
+              <a:gd name="csX2" fmla="*/ 0 w 762000"/>
+              <a:gd name="csY2" fmla="*/ 279400 h 863600"/>
+              <a:gd name="csX3" fmla="*/ 0 w 762000"/>
+              <a:gd name="csY3" fmla="*/ 863600 h 863600"/>
+            </a:gdLst>
+            <a:ahLst/>
+            <a:cxnLst>
+              <a:cxn ang="0">
+                <a:pos x="csX0" y="csY0"/>
+              </a:cxn>
+              <a:cxn ang="0">
+                <a:pos x="csX1" y="csY1"/>
+              </a:cxn>
+              <a:cxn ang="0">
+                <a:pos x="csX2" y="csY2"/>
+              </a:cxn>
+              <a:cxn ang="0">
+                <a:pos x="csX3" y="csY3"/>
+              </a:cxn>
+            </a:cxnLst>
+            <a:rect l="l" t="t" r="r" b="b"/>
+            <a:pathLst>
+              <a:path w="762000" h="863600">
+                <a:moveTo>
+                  <a:pt x="762000" y="0"/>
+                </a:moveTo>
+                <a:lnTo>
+                  <a:pt x="762000" y="273050"/>
+                </a:lnTo>
+                <a:lnTo>
+                  <a:pt x="0" y="279400"/>
+                </a:lnTo>
+                <a:lnTo>
+                  <a:pt x="0" y="863600"/>
+                </a:lnTo>
+              </a:path>
+            </a:pathLst>
+          </a:custGeom>
+        </p:spPr>
+        <p:style>
+          <a:lnRef idx="3">
+            <a:schemeClr val="accent1"/>
+          </a:lnRef>
+          <a:fillRef idx="0">
+            <a:schemeClr val="accent1"/>
+          </a:fillRef>
+          <a:effectRef idx="2">
+            <a:schemeClr val="accent1"/>
+          </a:effectRef>
+          <a:fontRef idx="minor">
+            <a:schemeClr val="tx1"/>
+          </a:fontRef>
+        </p:style>
+        <p:txBody>
+          <a:bodyPr rtlCol="0" anchor="ctr"/>
+          <a:lstStyle/>
+          <a:p>
+            <a:pPr algn="ctr"/>
+            <a:endParaRPr lang="en-US"/>
+          </a:p>
+        </p:txBody>
+      </p:sp>
+      <p:sp>
+        <p:nvSpPr>
+          <p:cNvPr id="14" name="Freeform: Shape 13">
+            <a:extLst>
+              <a:ext uri="{FF2B5EF4-FFF2-40B4-BE49-F238E27FC236}">
+                <a16:creationId xmlns:a16="http://schemas.microsoft.com/office/drawing/2014/main" id="{32F0C493-D928-AA9F-A13B-129A80FE9957}"/>
+              </a:ext>
+            </a:extLst>
+          </p:cNvPr>
+          <p:cNvSpPr/>
+          <p:nvPr/>
+        </p:nvSpPr>
+        <p:spPr>
+          <a:xfrm>
+            <a:off x="4502150" y="3232150"/>
+            <a:ext cx="279400" cy="196850"/>
+          </a:xfrm>
+          <a:custGeom>
+            <a:avLst/>
+            <a:gdLst>
+              <a:gd name="csX0" fmla="*/ 0 w 279400"/>
+              <a:gd name="csY0" fmla="*/ 0 h 209550"/>
+              <a:gd name="csX1" fmla="*/ 6350 w 279400"/>
+              <a:gd name="csY1" fmla="*/ 101600 h 209550"/>
+              <a:gd name="csX2" fmla="*/ 273050 w 279400"/>
+              <a:gd name="csY2" fmla="*/ 107950 h 209550"/>
+              <a:gd name="csX3" fmla="*/ 279400 w 279400"/>
+              <a:gd name="csY3" fmla="*/ 209550 h 209550"/>
+            </a:gdLst>
+            <a:ahLst/>
+            <a:cxnLst>
+              <a:cxn ang="0">
+                <a:pos x="csX0" y="csY0"/>
+              </a:cxn>
+              <a:cxn ang="0">
+                <a:pos x="csX1" y="csY1"/>
+              </a:cxn>
+              <a:cxn ang="0">
+                <a:pos x="csX2" y="csY2"/>
+              </a:cxn>
+              <a:cxn ang="0">
+                <a:pos x="csX3" y="csY3"/>
+              </a:cxn>
+            </a:cxnLst>
+            <a:rect l="l" t="t" r="r" b="b"/>
+            <a:pathLst>
+              <a:path w="279400" h="209550">
+                <a:moveTo>
+                  <a:pt x="0" y="0"/>
+                </a:moveTo>
+                <a:lnTo>
+                  <a:pt x="6350" y="101600"/>
+                </a:lnTo>
+                <a:lnTo>
+                  <a:pt x="273050" y="107950"/>
+                </a:lnTo>
+                <a:lnTo>
+                  <a:pt x="279400" y="209550"/>
+                </a:lnTo>
+              </a:path>
+            </a:pathLst>
+          </a:custGeom>
+          <a:ln>
+            <a:solidFill>
+              <a:schemeClr val="accent3">
+                <a:lumMod val="60000"/>
+                <a:lumOff val="40000"/>
+              </a:schemeClr>
+            </a:solidFill>
+          </a:ln>
+        </p:spPr>
+        <p:style>
+          <a:lnRef idx="3">
+            <a:schemeClr val="accent1"/>
+          </a:lnRef>
+          <a:fillRef idx="0">
+            <a:schemeClr val="accent1"/>
+          </a:fillRef>
+          <a:effectRef idx="2">
+            <a:schemeClr val="accent1"/>
+          </a:effectRef>
+          <a:fontRef idx="minor">
+            <a:schemeClr val="tx1"/>
+          </a:fontRef>
+        </p:style>
+        <p:txBody>
+          <a:bodyPr rtlCol="0" anchor="ctr"/>
+          <a:lstStyle/>
+          <a:p>
+            <a:pPr algn="ctr"/>
+            <a:endParaRPr lang="en-US"/>
+          </a:p>
+        </p:txBody>
+      </p:sp>
+      <p:sp>
+        <p:nvSpPr>
+          <p:cNvPr id="16" name="Freeform: Shape 15">
+            <a:extLst>
+              <a:ext uri="{FF2B5EF4-FFF2-40B4-BE49-F238E27FC236}">
+                <a16:creationId xmlns:a16="http://schemas.microsoft.com/office/drawing/2014/main" id="{78ECC932-F132-34BA-C6CD-ECD99AF720CB}"/>
+              </a:ext>
+            </a:extLst>
+          </p:cNvPr>
+          <p:cNvSpPr/>
+          <p:nvPr/>
+        </p:nvSpPr>
+        <p:spPr>
+          <a:xfrm>
+            <a:off x="5276850" y="3270250"/>
+            <a:ext cx="444500" cy="247650"/>
+          </a:xfrm>
+          <a:custGeom>
+            <a:avLst/>
+            <a:gdLst>
+              <a:gd name="csX0" fmla="*/ 438150 w 444500"/>
+              <a:gd name="csY0" fmla="*/ 0 h 247650"/>
+              <a:gd name="csX1" fmla="*/ 444500 w 444500"/>
+              <a:gd name="csY1" fmla="*/ 247650 h 247650"/>
+              <a:gd name="csX2" fmla="*/ 0 w 444500"/>
+              <a:gd name="csY2" fmla="*/ 247650 h 247650"/>
+            </a:gdLst>
+            <a:ahLst/>
+            <a:cxnLst>
+              <a:cxn ang="0">
+                <a:pos x="csX0" y="csY0"/>
+              </a:cxn>
+              <a:cxn ang="0">
+                <a:pos x="csX1" y="csY1"/>
+              </a:cxn>
+              <a:cxn ang="0">
+                <a:pos x="csX2" y="csY2"/>
+              </a:cxn>
+            </a:cxnLst>
+            <a:rect l="l" t="t" r="r" b="b"/>
+            <a:pathLst>
+              <a:path w="444500" h="247650">
+                <a:moveTo>
+                  <a:pt x="438150" y="0"/>
+                </a:moveTo>
+                <a:lnTo>
+                  <a:pt x="444500" y="247650"/>
+                </a:lnTo>
+                <a:lnTo>
+                  <a:pt x="0" y="247650"/>
+                </a:lnTo>
+              </a:path>
+            </a:pathLst>
+          </a:custGeom>
+        </p:spPr>
+        <p:style>
+          <a:lnRef idx="3">
+            <a:schemeClr val="accent1"/>
+          </a:lnRef>
+          <a:fillRef idx="0">
+            <a:schemeClr val="accent1"/>
+          </a:fillRef>
+          <a:effectRef idx="2">
+            <a:schemeClr val="accent1"/>
+          </a:effectRef>
+          <a:fontRef idx="minor">
+            <a:schemeClr val="tx1"/>
+          </a:fontRef>
+        </p:style>
+        <p:txBody>
+          <a:bodyPr rtlCol="0" anchor="ctr"/>
+          <a:lstStyle/>
+          <a:p>
+            <a:pPr algn="ctr"/>
+            <a:endParaRPr lang="en-US"/>
+          </a:p>
+        </p:txBody>
+      </p:sp>
+      <p:sp>
+        <p:nvSpPr>
+          <p:cNvPr id="17" name="Freeform: Shape 16">
+            <a:extLst>
+              <a:ext uri="{FF2B5EF4-FFF2-40B4-BE49-F238E27FC236}">
+                <a16:creationId xmlns:a16="http://schemas.microsoft.com/office/drawing/2014/main" id="{731033C7-30F9-CC8A-AA6D-607352280624}"/>
+              </a:ext>
+            </a:extLst>
+          </p:cNvPr>
+          <p:cNvSpPr/>
+          <p:nvPr/>
+        </p:nvSpPr>
+        <p:spPr>
+          <a:xfrm>
+            <a:off x="5276850" y="3605213"/>
+            <a:ext cx="1400175" cy="0"/>
+          </a:xfrm>
+          <a:custGeom>
+            <a:avLst/>
+            <a:gdLst>
+              <a:gd name="csX0" fmla="*/ 0 w 1400175"/>
+              <a:gd name="csY0" fmla="*/ 0 h 0"/>
+              <a:gd name="csX1" fmla="*/ 1400175 w 1400175"/>
+              <a:gd name="csY1" fmla="*/ 0 h 0"/>
+            </a:gdLst>
+            <a:ahLst/>
+            <a:cxnLst>
+              <a:cxn ang="0">
+                <a:pos x="csX0" y="csY0"/>
+              </a:cxn>
+              <a:cxn ang="0">
+                <a:pos x="csX1" y="csY1"/>
+              </a:cxn>
+            </a:cxnLst>
+            <a:rect l="l" t="t" r="r" b="b"/>
+            <a:pathLst>
+              <a:path w="1400175">
+                <a:moveTo>
+                  <a:pt x="0" y="0"/>
+                </a:moveTo>
+                <a:lnTo>
+                  <a:pt x="1400175" y="0"/>
+                </a:lnTo>
+              </a:path>
+            </a:pathLst>
+          </a:custGeom>
+        </p:spPr>
+        <p:style>
+          <a:lnRef idx="3">
+            <a:schemeClr val="accent1"/>
+          </a:lnRef>
+          <a:fillRef idx="0">
+            <a:schemeClr val="accent1"/>
+          </a:fillRef>
+          <a:effectRef idx="2">
+            <a:schemeClr val="accent1"/>
+          </a:effectRef>
+          <a:fontRef idx="minor">
+            <a:schemeClr val="tx1"/>
+          </a:fontRef>
+        </p:style>
+        <p:txBody>
+          <a:bodyPr rtlCol="0" anchor="ctr"/>
+          <a:lstStyle/>
+          <a:p>
+            <a:pPr algn="ctr"/>
+            <a:endParaRPr lang="en-US"/>
+          </a:p>
+        </p:txBody>
+      </p:sp>
+      <p:sp>
+        <p:nvSpPr>
+          <p:cNvPr id="18" name="Freeform: Shape 17">
+            <a:extLst>
+              <a:ext uri="{FF2B5EF4-FFF2-40B4-BE49-F238E27FC236}">
+                <a16:creationId xmlns:a16="http://schemas.microsoft.com/office/drawing/2014/main" id="{E621AC8A-E58F-6B6B-502B-7B9ADEA629AB}"/>
+              </a:ext>
+            </a:extLst>
+          </p:cNvPr>
+          <p:cNvSpPr/>
+          <p:nvPr/>
+        </p:nvSpPr>
+        <p:spPr>
+          <a:xfrm>
+            <a:off x="3981450" y="3605213"/>
+            <a:ext cx="642938" cy="0"/>
+          </a:xfrm>
+          <a:custGeom>
+            <a:avLst/>
+            <a:gdLst>
+              <a:gd name="csX0" fmla="*/ 0 w 642938"/>
+              <a:gd name="csY0" fmla="*/ 0 h 0"/>
+              <a:gd name="csX1" fmla="*/ 642938 w 642938"/>
+              <a:gd name="csY1" fmla="*/ 0 h 0"/>
+            </a:gdLst>
+            <a:ahLst/>
+            <a:cxnLst>
+              <a:cxn ang="0">
+                <a:pos x="csX0" y="csY0"/>
+              </a:cxn>
+              <a:cxn ang="0">
+                <a:pos x="csX1" y="csY1"/>
+              </a:cxn>
+            </a:cxnLst>
+            <a:rect l="l" t="t" r="r" b="b"/>
+            <a:pathLst>
+              <a:path w="642938">
+                <a:moveTo>
+                  <a:pt x="0" y="0"/>
+                </a:moveTo>
+                <a:lnTo>
+                  <a:pt x="642938" y="0"/>
+                </a:lnTo>
+              </a:path>
+            </a:pathLst>
+          </a:custGeom>
+        </p:spPr>
+        <p:style>
+          <a:lnRef idx="3">
+            <a:schemeClr val="accent1"/>
+          </a:lnRef>
+          <a:fillRef idx="0">
+            <a:schemeClr val="accent1"/>
+          </a:fillRef>
+          <a:effectRef idx="2">
+            <a:schemeClr val="accent1"/>
+          </a:effectRef>
+          <a:fontRef idx="minor">
+            <a:schemeClr val="tx1"/>
+          </a:fontRef>
+        </p:style>
+        <p:txBody>
+          <a:bodyPr rtlCol="0" anchor="ctr"/>
+          <a:lstStyle/>
+          <a:p>
+            <a:pPr algn="ctr"/>
+            <a:endParaRPr lang="en-US"/>
+          </a:p>
+        </p:txBody>
+      </p:sp>
+      <p:sp>
+        <p:nvSpPr>
+          <p:cNvPr id="19" name="Freeform: Shape 18">
+            <a:extLst>
+              <a:ext uri="{FF2B5EF4-FFF2-40B4-BE49-F238E27FC236}">
+                <a16:creationId xmlns:a16="http://schemas.microsoft.com/office/drawing/2014/main" id="{3F2935DE-BDCE-DA4E-C545-91984074D198}"/>
+              </a:ext>
+            </a:extLst>
+          </p:cNvPr>
+          <p:cNvSpPr/>
+          <p:nvPr/>
+        </p:nvSpPr>
+        <p:spPr>
+          <a:xfrm>
+            <a:off x="6419850" y="3276600"/>
+            <a:ext cx="271463" cy="247650"/>
+          </a:xfrm>
+          <a:custGeom>
+            <a:avLst/>
+            <a:gdLst>
+              <a:gd name="csX0" fmla="*/ 0 w 271463"/>
+              <a:gd name="csY0" fmla="*/ 0 h 247650"/>
+              <a:gd name="csX1" fmla="*/ 4763 w 271463"/>
+              <a:gd name="csY1" fmla="*/ 247650 h 247650"/>
+              <a:gd name="csX2" fmla="*/ 271463 w 271463"/>
+              <a:gd name="csY2" fmla="*/ 247650 h 247650"/>
+            </a:gdLst>
+            <a:ahLst/>
+            <a:cxnLst>
+              <a:cxn ang="0">
+                <a:pos x="csX0" y="csY0"/>
+              </a:cxn>
+              <a:cxn ang="0">
+                <a:pos x="csX1" y="csY1"/>
+              </a:cxn>
+              <a:cxn ang="0">
+                <a:pos x="csX2" y="csY2"/>
+              </a:cxn>
+            </a:cxnLst>
+            <a:rect l="l" t="t" r="r" b="b"/>
+            <a:pathLst>
+              <a:path w="271463" h="247650">
+                <a:moveTo>
+                  <a:pt x="0" y="0"/>
+                </a:moveTo>
+                <a:cubicBezTo>
+                  <a:pt x="1588" y="82550"/>
+                  <a:pt x="3175" y="165100"/>
+                  <a:pt x="4763" y="247650"/>
+                </a:cubicBezTo>
+                <a:lnTo>
+                  <a:pt x="271463" y="247650"/>
+                </a:lnTo>
+              </a:path>
+            </a:pathLst>
+          </a:custGeom>
+        </p:spPr>
+        <p:style>
+          <a:lnRef idx="3">
+            <a:schemeClr val="accent1"/>
+          </a:lnRef>
+          <a:fillRef idx="0">
+            <a:schemeClr val="accent1"/>
+          </a:fillRef>
+          <a:effectRef idx="2">
+            <a:schemeClr val="accent1"/>
+          </a:effectRef>
+          <a:fontRef idx="minor">
+            <a:schemeClr val="tx1"/>
+          </a:fontRef>
+        </p:style>
+        <p:txBody>
+          <a:bodyPr rtlCol="0" anchor="ctr"/>
+          <a:lstStyle/>
+          <a:p>
+            <a:pPr algn="ctr"/>
+            <a:endParaRPr lang="en-US"/>
+          </a:p>
+        </p:txBody>
+      </p:sp>
+      <p:sp>
+        <p:nvSpPr>
+          <p:cNvPr id="22" name="Freeform: Shape 21">
+            <a:extLst>
+              <a:ext uri="{FF2B5EF4-FFF2-40B4-BE49-F238E27FC236}">
+                <a16:creationId xmlns:a16="http://schemas.microsoft.com/office/drawing/2014/main" id="{8006CEA2-5104-40F4-BA9D-C176CFF58445}"/>
+              </a:ext>
+            </a:extLst>
+          </p:cNvPr>
+          <p:cNvSpPr/>
+          <p:nvPr/>
+        </p:nvSpPr>
+        <p:spPr>
+          <a:xfrm>
+            <a:off x="5191125" y="1171575"/>
+            <a:ext cx="19050" cy="2276475"/>
+          </a:xfrm>
+          <a:custGeom>
+            <a:avLst/>
+            <a:gdLst>
+              <a:gd name="csX0" fmla="*/ 19050 w 19050"/>
+              <a:gd name="csY0" fmla="*/ 2276475 h 2276475"/>
+              <a:gd name="csX1" fmla="*/ 0 w 19050"/>
+              <a:gd name="csY1" fmla="*/ 0 h 2276475"/>
+            </a:gdLst>
+            <a:ahLst/>
+            <a:cxnLst>
+              <a:cxn ang="0">
+                <a:pos x="csX0" y="csY0"/>
+              </a:cxn>
+              <a:cxn ang="0">
+                <a:pos x="csX1" y="csY1"/>
+              </a:cxn>
+            </a:cxnLst>
+            <a:rect l="l" t="t" r="r" b="b"/>
+            <a:pathLst>
+              <a:path w="19050" h="2276475">
+                <a:moveTo>
+                  <a:pt x="19050" y="2276475"/>
+                </a:moveTo>
+                <a:lnTo>
+                  <a:pt x="0" y="0"/>
+                </a:lnTo>
+              </a:path>
+            </a:pathLst>
+          </a:custGeom>
+        </p:spPr>
+        <p:style>
+          <a:lnRef idx="3">
+            <a:schemeClr val="accent2"/>
+          </a:lnRef>
+          <a:fillRef idx="0">
+            <a:schemeClr val="accent2"/>
+          </a:fillRef>
+          <a:effectRef idx="2">
+            <a:schemeClr val="accent2"/>
+          </a:effectRef>
+          <a:fontRef idx="minor">
+            <a:schemeClr val="tx1"/>
+          </a:fontRef>
+        </p:style>
+        <p:txBody>
+          <a:bodyPr rtlCol="0" anchor="ctr"/>
+          <a:lstStyle/>
+          <a:p>
+            <a:pPr algn="ctr"/>
+            <a:endParaRPr lang="en-US"/>
+          </a:p>
+        </p:txBody>
+      </p:sp>
+      <p:sp>
+        <p:nvSpPr>
+          <p:cNvPr id="24" name="Freeform: Shape 23">
+            <a:extLst>
+              <a:ext uri="{FF2B5EF4-FFF2-40B4-BE49-F238E27FC236}">
+                <a16:creationId xmlns:a16="http://schemas.microsoft.com/office/drawing/2014/main" id="{00911E0A-C9D7-7C00-E99E-CB00B1FCB37D}"/>
+              </a:ext>
+            </a:extLst>
+          </p:cNvPr>
+          <p:cNvSpPr/>
+          <p:nvPr/>
+        </p:nvSpPr>
+        <p:spPr>
+          <a:xfrm>
+            <a:off x="3638550" y="3690938"/>
+            <a:ext cx="1038225" cy="1428750"/>
+          </a:xfrm>
+          <a:custGeom>
+            <a:avLst/>
+            <a:gdLst>
+              <a:gd name="csX0" fmla="*/ 981075 w 1038225"/>
+              <a:gd name="csY0" fmla="*/ 0 h 1428750"/>
+              <a:gd name="csX1" fmla="*/ 752475 w 1038225"/>
+              <a:gd name="csY1" fmla="*/ 0 h 1428750"/>
+              <a:gd name="csX2" fmla="*/ 752475 w 1038225"/>
+              <a:gd name="csY2" fmla="*/ 138112 h 1428750"/>
+              <a:gd name="csX3" fmla="*/ 0 w 1038225"/>
+              <a:gd name="csY3" fmla="*/ 138112 h 1428750"/>
+              <a:gd name="csX4" fmla="*/ 0 w 1038225"/>
+              <a:gd name="csY4" fmla="*/ 1423987 h 1428750"/>
+              <a:gd name="csX5" fmla="*/ 1038225 w 1038225"/>
+              <a:gd name="csY5" fmla="*/ 1428750 h 1428750"/>
+            </a:gdLst>
+            <a:ahLst/>
+            <a:cxnLst>
+              <a:cxn ang="0">
+                <a:pos x="csX0" y="csY0"/>
+              </a:cxn>
+              <a:cxn ang="0">
+                <a:pos x="csX1" y="csY1"/>
+              </a:cxn>
+              <a:cxn ang="0">
+                <a:pos x="csX2" y="csY2"/>
+              </a:cxn>
+              <a:cxn ang="0">
+                <a:pos x="csX3" y="csY3"/>
+              </a:cxn>
+              <a:cxn ang="0">
+                <a:pos x="csX4" y="csY4"/>
+              </a:cxn>
+              <a:cxn ang="0">
+                <a:pos x="csX5" y="csY5"/>
+              </a:cxn>
+            </a:cxnLst>
+            <a:rect l="l" t="t" r="r" b="b"/>
+            <a:pathLst>
+              <a:path w="1038225" h="1428750">
+                <a:moveTo>
+                  <a:pt x="981075" y="0"/>
+                </a:moveTo>
+                <a:lnTo>
+                  <a:pt x="752475" y="0"/>
+                </a:lnTo>
+                <a:lnTo>
+                  <a:pt x="752475" y="138112"/>
+                </a:lnTo>
+                <a:lnTo>
+                  <a:pt x="0" y="138112"/>
+                </a:lnTo>
+                <a:lnTo>
+                  <a:pt x="0" y="1423987"/>
+                </a:lnTo>
+                <a:lnTo>
+                  <a:pt x="1038225" y="1428750"/>
+                </a:lnTo>
+              </a:path>
+            </a:pathLst>
+          </a:custGeom>
+        </p:spPr>
+        <p:style>
+          <a:lnRef idx="3">
+            <a:schemeClr val="accent1"/>
+          </a:lnRef>
+          <a:fillRef idx="0">
+            <a:schemeClr val="accent1"/>
+          </a:fillRef>
+          <a:effectRef idx="2">
+            <a:schemeClr val="accent1"/>
+          </a:effectRef>
+          <a:fontRef idx="minor">
+            <a:schemeClr val="tx1"/>
+          </a:fontRef>
+        </p:style>
+        <p:txBody>
+          <a:bodyPr rtlCol="0" anchor="ctr"/>
+          <a:lstStyle/>
+          <a:p>
+            <a:pPr algn="ctr"/>
+            <a:endParaRPr lang="en-US"/>
+          </a:p>
+        </p:txBody>
+      </p:sp>
+      <p:sp>
+        <p:nvSpPr>
+          <p:cNvPr id="25" name="Rectangle 24">
+            <a:extLst>
+              <a:ext uri="{FF2B5EF4-FFF2-40B4-BE49-F238E27FC236}">
+                <a16:creationId xmlns:a16="http://schemas.microsoft.com/office/drawing/2014/main" id="{01892701-3A22-40D7-502A-7BF6B7CF2A07}"/>
+              </a:ext>
+            </a:extLst>
+          </p:cNvPr>
+          <p:cNvSpPr/>
+          <p:nvPr/>
+        </p:nvSpPr>
+        <p:spPr>
+          <a:xfrm>
+            <a:off x="3667124" y="4014092"/>
+            <a:ext cx="300037" cy="252208"/>
+          </a:xfrm>
+          <a:prstGeom prst="rect">
+            <a:avLst/>
+          </a:prstGeom>
+          <a:solidFill>
+            <a:srgbClr val="ACD433">
+              <a:alpha val="50196"/>
+            </a:srgbClr>
+          </a:solidFill>
+        </p:spPr>
+        <p:style>
+          <a:lnRef idx="2">
+            <a:schemeClr val="accent1">
+              <a:shade val="15000"/>
+            </a:schemeClr>
+          </a:lnRef>
+          <a:fillRef idx="1">
+            <a:schemeClr val="accent1"/>
+          </a:fillRef>
+          <a:effectRef idx="0">
+            <a:schemeClr val="accent1"/>
+          </a:effectRef>
+          <a:fontRef idx="minor">
+            <a:schemeClr val="lt1"/>
+          </a:fontRef>
+        </p:style>
+        <p:txBody>
+          <a:bodyPr rtlCol="0" anchor="ctr"/>
+          <a:lstStyle/>
+          <a:p>
+            <a:pPr algn="ctr"/>
+            <a:endParaRPr lang="en-US"/>
+          </a:p>
+        </p:txBody>
+      </p:sp>
+    </p:spTree>
+    <p:extLst>
+      <p:ext uri="{BB962C8B-B14F-4D97-AF65-F5344CB8AC3E}">
+        <p14:creationId xmlns:p14="http://schemas.microsoft.com/office/powerpoint/2010/main" val="880063246"/>
+      </p:ext>
+    </p:extLst>
+  </p:cSld>
+  <p:clrMapOvr>
+    <a:masterClrMapping/>
+  </p:clrMapOvr>
+</p:sld>
+</file>
+
+<file path=ppt/slides/slide43.xml><?xml version="1.0" encoding="utf-8"?>
+<p:sld xmlns:a="http://schemas.openxmlformats.org/drawingml/2006/main" xmlns:r="http://schemas.openxmlformats.org/officeDocument/2006/relationships" xmlns:p="http://schemas.openxmlformats.org/presentationml/2006/main">
+  <p:cSld>
+    <p:spTree>
+      <p:nvGrpSpPr>
+        <p:cNvPr id="1" name="">
+          <a:extLst>
+            <a:ext uri="{FF2B5EF4-FFF2-40B4-BE49-F238E27FC236}">
+              <a16:creationId xmlns:a16="http://schemas.microsoft.com/office/drawing/2014/main" id="{D762A57B-0E20-5737-9435-7CE2475F7ADC}"/>
+            </a:ext>
+          </a:extLst>
+        </p:cNvPr>
+        <p:cNvGrpSpPr/>
+        <p:nvPr/>
+      </p:nvGrpSpPr>
+      <p:grpSpPr>
+        <a:xfrm>
+          <a:off x="0" y="0"/>
+          <a:ext cx="0" cy="0"/>
+          <a:chOff x="0" y="0"/>
+          <a:chExt cx="0" cy="0"/>
+        </a:xfrm>
+      </p:grpSpPr>
+      <p:sp>
+        <p:nvSpPr>
+          <p:cNvPr id="2" name="Title 1">
+            <a:extLst>
+              <a:ext uri="{FF2B5EF4-FFF2-40B4-BE49-F238E27FC236}">
+                <a16:creationId xmlns:a16="http://schemas.microsoft.com/office/drawing/2014/main" id="{6C356F97-2EE7-C23B-8662-0E4E9DDF38DF}"/>
+              </a:ext>
+            </a:extLst>
+          </p:cNvPr>
+          <p:cNvSpPr>
+            <a:spLocks noGrp="1"/>
+          </p:cNvSpPr>
+          <p:nvPr>
+            <p:ph type="title"/>
+          </p:nvPr>
+        </p:nvSpPr>
+        <p:spPr>
+          <a:xfrm>
+            <a:off x="1754188" y="452718"/>
+            <a:ext cx="8296646" cy="1400530"/>
+          </a:xfrm>
+        </p:spPr>
+        <p:txBody>
+          <a:bodyPr/>
+          <a:lstStyle/>
+          <a:p>
+            <a:r>
+              <a:rPr lang="en-US" b="1" dirty="0"/>
+              <a:t>Essential EA Meta-Model</a:t>
+            </a:r>
+            <a:br>
+              <a:rPr lang="en-US" b="1" dirty="0"/>
+            </a:br>
+            <a:r>
+              <a:rPr lang="en-US" b="1" dirty="0"/>
+              <a:t>- Business Layer - 21</a:t>
+            </a:r>
+          </a:p>
+        </p:txBody>
+      </p:sp>
+      <p:sp>
+        <p:nvSpPr>
+          <p:cNvPr id="4" name="Title 1">
+            <a:extLst>
+              <a:ext uri="{FF2B5EF4-FFF2-40B4-BE49-F238E27FC236}">
+                <a16:creationId xmlns:a16="http://schemas.microsoft.com/office/drawing/2014/main" id="{32176413-A55E-AEA5-6BC0-E1A5E667915F}"/>
+              </a:ext>
+            </a:extLst>
+          </p:cNvPr>
+          <p:cNvSpPr txBox="1">
+            <a:spLocks/>
+          </p:cNvSpPr>
+          <p:nvPr/>
+        </p:nvSpPr>
+        <p:spPr>
+          <a:xfrm>
+            <a:off x="0" y="3143"/>
+            <a:ext cx="1754188" cy="1058013"/>
+          </a:xfrm>
+          <a:prstGeom prst="rect">
+            <a:avLst/>
+          </a:prstGeom>
+        </p:spPr>
+        <p:txBody>
+          <a:bodyPr vert="horz" lIns="91440" tIns="45720" rIns="91440" bIns="45720" rtlCol="0" anchor="ctr">
+            <a:noAutofit/>
+          </a:bodyPr>
+          <a:lstStyle>
+            <a:lvl1pPr algn="l" defTabSz="457200" rtl="0" eaLnBrk="1" latinLnBrk="0" hangingPunct="1">
+              <a:spcBef>
+                <a:spcPct val="0"/>
+              </a:spcBef>
+              <a:buNone/>
+              <a:defRPr sz="7200" b="0" i="0" kern="1200">
+                <a:solidFill>
+                  <a:schemeClr val="tx2"/>
+                </a:solidFill>
+                <a:latin typeface="+mj-lt"/>
+                <a:ea typeface="+mj-ea"/>
+                <a:cs typeface="+mj-cs"/>
+              </a:defRPr>
+            </a:lvl1pPr>
+            <a:lvl2pPr eaLnBrk="1" hangingPunct="1">
+              <a:defRPr>
+                <a:solidFill>
+                  <a:schemeClr val="tx2"/>
+                </a:solidFill>
+              </a:defRPr>
+            </a:lvl2pPr>
+            <a:lvl3pPr eaLnBrk="1" hangingPunct="1">
+              <a:defRPr>
+                <a:solidFill>
+                  <a:schemeClr val="tx2"/>
+                </a:solidFill>
+              </a:defRPr>
+            </a:lvl3pPr>
+            <a:lvl4pPr eaLnBrk="1" hangingPunct="1">
+              <a:defRPr>
+                <a:solidFill>
+                  <a:schemeClr val="tx2"/>
+                </a:solidFill>
+              </a:defRPr>
+            </a:lvl4pPr>
+            <a:lvl5pPr eaLnBrk="1" hangingPunct="1">
+              <a:defRPr>
+                <a:solidFill>
+                  <a:schemeClr val="tx2"/>
+                </a:solidFill>
+              </a:defRPr>
+            </a:lvl5pPr>
+            <a:lvl6pPr eaLnBrk="1" hangingPunct="1">
+              <a:defRPr>
+                <a:solidFill>
+                  <a:schemeClr val="tx2"/>
+                </a:solidFill>
+              </a:defRPr>
+            </a:lvl6pPr>
+            <a:lvl7pPr eaLnBrk="1" hangingPunct="1">
+              <a:defRPr>
+                <a:solidFill>
+                  <a:schemeClr val="tx2"/>
+                </a:solidFill>
+              </a:defRPr>
+            </a:lvl7pPr>
+            <a:lvl8pPr eaLnBrk="1" hangingPunct="1">
+              <a:defRPr>
+                <a:solidFill>
+                  <a:schemeClr val="tx2"/>
+                </a:solidFill>
+              </a:defRPr>
+            </a:lvl8pPr>
+            <a:lvl9pPr eaLnBrk="1" hangingPunct="1">
+              <a:defRPr>
+                <a:solidFill>
+                  <a:schemeClr val="tx2"/>
+                </a:solidFill>
+              </a:defRPr>
+            </a:lvl9pPr>
+          </a:lstStyle>
+          <a:p>
+            <a:pPr algn="ctr"/>
+            <a:r>
+              <a:rPr lang="en-US" b="1" dirty="0">
+                <a:solidFill>
+                  <a:schemeClr val="accent1">
+                    <a:lumMod val="75000"/>
+                  </a:schemeClr>
+                </a:solidFill>
+              </a:rPr>
+              <a:t>027</a:t>
+            </a:r>
+            <a:endParaRPr lang="ru-RU" b="1" dirty="0">
+              <a:solidFill>
+                <a:schemeClr val="accent1">
+                  <a:lumMod val="75000"/>
+                </a:schemeClr>
+              </a:solidFill>
+            </a:endParaRPr>
+          </a:p>
+        </p:txBody>
+      </p:sp>
+      <p:pic>
+        <p:nvPicPr>
+          <p:cNvPr id="3" name="Picture 2">
+            <a:extLst>
+              <a:ext uri="{FF2B5EF4-FFF2-40B4-BE49-F238E27FC236}">
+                <a16:creationId xmlns:a16="http://schemas.microsoft.com/office/drawing/2014/main" id="{198FC06E-9204-FCA6-09A4-C39C34471651}"/>
+              </a:ext>
+            </a:extLst>
+          </p:cNvPr>
+          <p:cNvPicPr>
+            <a:picLocks noChangeAspect="1"/>
+          </p:cNvPicPr>
+          <p:nvPr/>
+        </p:nvPicPr>
+        <p:blipFill>
+          <a:blip r:embed="rId2"/>
+          <a:stretch>
+            <a:fillRect/>
+          </a:stretch>
+        </p:blipFill>
+        <p:spPr>
+          <a:xfrm>
+            <a:off x="236841" y="1853248"/>
+            <a:ext cx="8296646" cy="4669795"/>
+          </a:xfrm>
+          <a:prstGeom prst="rect">
+            <a:avLst/>
+          </a:prstGeom>
+          <a:ln>
+            <a:noFill/>
+          </a:ln>
+          <a:effectLst>
+            <a:outerShdw blurRad="292100" dist="139700" dir="2700000" algn="tl" rotWithShape="0">
+              <a:srgbClr val="333333">
+                <a:alpha val="65000"/>
+              </a:srgbClr>
+            </a:outerShdw>
+          </a:effectLst>
+        </p:spPr>
+      </p:pic>
+      <p:sp>
+        <p:nvSpPr>
+          <p:cNvPr id="6" name="Rectangle: Rounded Corners 5">
+            <a:extLst>
+              <a:ext uri="{FF2B5EF4-FFF2-40B4-BE49-F238E27FC236}">
+                <a16:creationId xmlns:a16="http://schemas.microsoft.com/office/drawing/2014/main" id="{36090951-728B-4AB1-4D32-C31147ECFAFB}"/>
+              </a:ext>
+            </a:extLst>
+          </p:cNvPr>
+          <p:cNvSpPr/>
+          <p:nvPr/>
+        </p:nvSpPr>
+        <p:spPr>
+          <a:xfrm>
+            <a:off x="596436" y="2249293"/>
+            <a:ext cx="2033748" cy="4027681"/>
+          </a:xfrm>
+          <a:prstGeom prst="roundRect">
+            <a:avLst>
+              <a:gd name="adj" fmla="val 6916"/>
+            </a:avLst>
+          </a:prstGeom>
+          <a:solidFill>
+            <a:srgbClr val="FFCC66">
+              <a:alpha val="20000"/>
+            </a:srgbClr>
+          </a:solidFill>
+          <a:ln>
+            <a:solidFill>
+              <a:srgbClr val="92D050"/>
+            </a:solidFill>
+          </a:ln>
+        </p:spPr>
+        <p:style>
+          <a:lnRef idx="2">
+            <a:schemeClr val="accent1">
+              <a:shade val="15000"/>
+            </a:schemeClr>
+          </a:lnRef>
+          <a:fillRef idx="1">
+            <a:schemeClr val="accent1"/>
+          </a:fillRef>
+          <a:effectRef idx="0">
+            <a:schemeClr val="accent1"/>
+          </a:effectRef>
+          <a:fontRef idx="minor">
+            <a:schemeClr val="lt1"/>
+          </a:fontRef>
+        </p:style>
+        <p:txBody>
+          <a:bodyPr rtlCol="0" anchor="ctr"/>
+          <a:lstStyle/>
+          <a:p>
+            <a:pPr algn="ctr"/>
+            <a:endParaRPr lang="en-US"/>
+          </a:p>
+        </p:txBody>
+      </p:sp>
+      <p:pic>
+        <p:nvPicPr>
+          <p:cNvPr id="11" name="Picture 10">
+            <a:extLst>
+              <a:ext uri="{FF2B5EF4-FFF2-40B4-BE49-F238E27FC236}">
+                <a16:creationId xmlns:a16="http://schemas.microsoft.com/office/drawing/2014/main" id="{EC6D718F-362D-5756-E6A0-89DE7A7AF04B}"/>
+              </a:ext>
+            </a:extLst>
+          </p:cNvPr>
+          <p:cNvPicPr>
+            <a:picLocks noChangeAspect="1"/>
+          </p:cNvPicPr>
+          <p:nvPr/>
+        </p:nvPicPr>
+        <p:blipFill>
+          <a:blip r:embed="rId3"/>
+          <a:stretch>
+            <a:fillRect/>
+          </a:stretch>
+        </p:blipFill>
+        <p:spPr>
+          <a:xfrm>
+            <a:off x="157000" y="1094226"/>
+            <a:ext cx="362976" cy="362976"/>
+          </a:xfrm>
+          <a:prstGeom prst="rect">
+            <a:avLst/>
+          </a:prstGeom>
+          <a:ln>
+            <a:noFill/>
+          </a:ln>
+          <a:effectLst>
+            <a:outerShdw blurRad="292100" dist="139700" dir="2700000" algn="tl" rotWithShape="0">
+              <a:srgbClr val="333333">
+                <a:alpha val="65000"/>
+              </a:srgbClr>
+            </a:outerShdw>
+          </a:effectLst>
+        </p:spPr>
+      </p:pic>
+      <p:pic>
+        <p:nvPicPr>
+          <p:cNvPr id="12" name="Picture 11">
+            <a:extLst>
+              <a:ext uri="{FF2B5EF4-FFF2-40B4-BE49-F238E27FC236}">
+                <a16:creationId xmlns:a16="http://schemas.microsoft.com/office/drawing/2014/main" id="{42E8A879-2C15-3C3F-6209-7068D0A7D347}"/>
+              </a:ext>
+            </a:extLst>
+          </p:cNvPr>
+          <p:cNvPicPr>
+            <a:picLocks noChangeAspect="1"/>
+          </p:cNvPicPr>
+          <p:nvPr/>
+        </p:nvPicPr>
+        <p:blipFill>
+          <a:blip r:embed="rId4"/>
+          <a:stretch>
+            <a:fillRect/>
+          </a:stretch>
+        </p:blipFill>
+        <p:spPr>
+          <a:xfrm>
+            <a:off x="611241" y="1094226"/>
+            <a:ext cx="362976" cy="362976"/>
+          </a:xfrm>
+          <a:prstGeom prst="rect">
+            <a:avLst/>
+          </a:prstGeom>
+          <a:ln>
+            <a:noFill/>
+          </a:ln>
+          <a:effectLst>
+            <a:outerShdw blurRad="292100" dist="139700" dir="2700000" algn="tl" rotWithShape="0">
+              <a:srgbClr val="333333">
+                <a:alpha val="65000"/>
+              </a:srgbClr>
+            </a:outerShdw>
+          </a:effectLst>
+        </p:spPr>
+      </p:pic>
+      <p:pic>
+        <p:nvPicPr>
+          <p:cNvPr id="13" name="Picture 12">
+            <a:extLst>
+              <a:ext uri="{FF2B5EF4-FFF2-40B4-BE49-F238E27FC236}">
+                <a16:creationId xmlns:a16="http://schemas.microsoft.com/office/drawing/2014/main" id="{291DC338-5CD2-E07B-2901-E8411071EFB4}"/>
+              </a:ext>
+            </a:extLst>
+          </p:cNvPr>
+          <p:cNvPicPr>
+            <a:picLocks noChangeAspect="1"/>
+          </p:cNvPicPr>
+          <p:nvPr/>
+        </p:nvPicPr>
+        <p:blipFill>
+          <a:blip r:embed="rId5"/>
+          <a:stretch>
+            <a:fillRect/>
+          </a:stretch>
+        </p:blipFill>
+        <p:spPr>
+          <a:xfrm>
+            <a:off x="1065482" y="1094226"/>
+            <a:ext cx="371111" cy="362976"/>
+          </a:xfrm>
+          <a:prstGeom prst="rect">
+            <a:avLst/>
+          </a:prstGeom>
+          <a:ln>
+            <a:noFill/>
+          </a:ln>
+          <a:effectLst>
+            <a:outerShdw blurRad="292100" dist="139700" dir="2700000" algn="tl" rotWithShape="0">
+              <a:srgbClr val="333333">
+                <a:alpha val="65000"/>
+              </a:srgbClr>
+            </a:outerShdw>
+          </a:effectLst>
+        </p:spPr>
+      </p:pic>
+    </p:spTree>
+    <p:extLst>
+      <p:ext uri="{BB962C8B-B14F-4D97-AF65-F5344CB8AC3E}">
+        <p14:creationId xmlns:p14="http://schemas.microsoft.com/office/powerpoint/2010/main" val="1644927834"/>
+      </p:ext>
+    </p:extLst>
+  </p:cSld>
+  <p:clrMapOvr>
+    <a:masterClrMapping/>
+  </p:clrMapOvr>
+</p:sld>
+</file>
+
+<file path=ppt/slides/slide44.xml><?xml version="1.0" encoding="utf-8"?>
 <p:sld xmlns:a="http://schemas.openxmlformats.org/drawingml/2006/main" xmlns:r="http://schemas.openxmlformats.org/officeDocument/2006/relationships" xmlns:p="http://schemas.openxmlformats.org/presentationml/2006/main">
   <p:cSld>
     <p:bg>

--- a/Master_EAS_Meta-Model.pptx
+++ b/Master_EAS_Meta-Model.pptx
@@ -5,10 +5,10 @@
     <p:sldMasterId id="2147483648" r:id="rId4"/>
   </p:sldMasterIdLst>
   <p:notesMasterIdLst>
-    <p:notesMasterId r:id="rId49"/>
+    <p:notesMasterId r:id="rId51"/>
   </p:notesMasterIdLst>
   <p:handoutMasterIdLst>
-    <p:handoutMasterId r:id="rId50"/>
+    <p:handoutMasterId r:id="rId52"/>
   </p:handoutMasterIdLst>
   <p:sldIdLst>
     <p:sldId id="256" r:id="rId5"/>
@@ -54,7 +54,9 @@
     <p:sldId id="310" r:id="rId45"/>
     <p:sldId id="311" r:id="rId46"/>
     <p:sldId id="312" r:id="rId47"/>
-    <p:sldId id="267" r:id="rId48"/>
+    <p:sldId id="313" r:id="rId48"/>
+    <p:sldId id="314" r:id="rId49"/>
+    <p:sldId id="267" r:id="rId50"/>
   </p:sldIdLst>
   <p:sldSz cx="12192000" cy="6858000"/>
   <p:notesSz cx="6858000" cy="9144000"/>
@@ -862,7 +864,7 @@
           <a:p>
             <a:fld id="{EE000EEB-8338-48D7-8EE8-EE0082EF7602}" type="slidenum">
               <a:rPr lang="en-US" smtClean="0"/>
-              <a:t>44</a:t>
+              <a:t>46</a:t>
             </a:fld>
             <a:endParaRPr lang="en-US" dirty="0"/>
           </a:p>
@@ -40609,9 +40611,9 @@
           <p:nvPr/>
         </p:nvSpPr>
         <p:spPr>
-          <a:xfrm>
-            <a:off x="5191125" y="1171575"/>
-            <a:ext cx="19050" cy="2276475"/>
+          <a:xfrm rot="631608" flipH="1">
+            <a:off x="4335450" y="1100603"/>
+            <a:ext cx="304961" cy="3159505"/>
           </a:xfrm>
           <a:custGeom>
             <a:avLst/>
@@ -40652,108 +40654,6 @@
           </a:fillRef>
           <a:effectRef idx="2">
             <a:schemeClr val="accent2"/>
-          </a:effectRef>
-          <a:fontRef idx="minor">
-            <a:schemeClr val="tx1"/>
-          </a:fontRef>
-        </p:style>
-        <p:txBody>
-          <a:bodyPr rtlCol="0" anchor="ctr"/>
-          <a:lstStyle/>
-          <a:p>
-            <a:pPr algn="ctr"/>
-            <a:endParaRPr lang="en-US"/>
-          </a:p>
-        </p:txBody>
-      </p:sp>
-      <p:sp>
-        <p:nvSpPr>
-          <p:cNvPr id="24" name="Freeform: Shape 23">
-            <a:extLst>
-              <a:ext uri="{FF2B5EF4-FFF2-40B4-BE49-F238E27FC236}">
-                <a16:creationId xmlns:a16="http://schemas.microsoft.com/office/drawing/2014/main" id="{00911E0A-C9D7-7C00-E99E-CB00B1FCB37D}"/>
-              </a:ext>
-            </a:extLst>
-          </p:cNvPr>
-          <p:cNvSpPr/>
-          <p:nvPr/>
-        </p:nvSpPr>
-        <p:spPr>
-          <a:xfrm>
-            <a:off x="3638550" y="3690938"/>
-            <a:ext cx="1038225" cy="1428750"/>
-          </a:xfrm>
-          <a:custGeom>
-            <a:avLst/>
-            <a:gdLst>
-              <a:gd name="csX0" fmla="*/ 981075 w 1038225"/>
-              <a:gd name="csY0" fmla="*/ 0 h 1428750"/>
-              <a:gd name="csX1" fmla="*/ 752475 w 1038225"/>
-              <a:gd name="csY1" fmla="*/ 0 h 1428750"/>
-              <a:gd name="csX2" fmla="*/ 752475 w 1038225"/>
-              <a:gd name="csY2" fmla="*/ 138112 h 1428750"/>
-              <a:gd name="csX3" fmla="*/ 0 w 1038225"/>
-              <a:gd name="csY3" fmla="*/ 138112 h 1428750"/>
-              <a:gd name="csX4" fmla="*/ 0 w 1038225"/>
-              <a:gd name="csY4" fmla="*/ 1423987 h 1428750"/>
-              <a:gd name="csX5" fmla="*/ 1038225 w 1038225"/>
-              <a:gd name="csY5" fmla="*/ 1428750 h 1428750"/>
-            </a:gdLst>
-            <a:ahLst/>
-            <a:cxnLst>
-              <a:cxn ang="0">
-                <a:pos x="csX0" y="csY0"/>
-              </a:cxn>
-              <a:cxn ang="0">
-                <a:pos x="csX1" y="csY1"/>
-              </a:cxn>
-              <a:cxn ang="0">
-                <a:pos x="csX2" y="csY2"/>
-              </a:cxn>
-              <a:cxn ang="0">
-                <a:pos x="csX3" y="csY3"/>
-              </a:cxn>
-              <a:cxn ang="0">
-                <a:pos x="csX4" y="csY4"/>
-              </a:cxn>
-              <a:cxn ang="0">
-                <a:pos x="csX5" y="csY5"/>
-              </a:cxn>
-            </a:cxnLst>
-            <a:rect l="l" t="t" r="r" b="b"/>
-            <a:pathLst>
-              <a:path w="1038225" h="1428750">
-                <a:moveTo>
-                  <a:pt x="981075" y="0"/>
-                </a:moveTo>
-                <a:lnTo>
-                  <a:pt x="752475" y="0"/>
-                </a:lnTo>
-                <a:lnTo>
-                  <a:pt x="752475" y="138112"/>
-                </a:lnTo>
-                <a:lnTo>
-                  <a:pt x="0" y="138112"/>
-                </a:lnTo>
-                <a:lnTo>
-                  <a:pt x="0" y="1423987"/>
-                </a:lnTo>
-                <a:lnTo>
-                  <a:pt x="1038225" y="1428750"/>
-                </a:lnTo>
-              </a:path>
-            </a:pathLst>
-          </a:custGeom>
-        </p:spPr>
-        <p:style>
-          <a:lnRef idx="3">
-            <a:schemeClr val="accent1"/>
-          </a:lnRef>
-          <a:fillRef idx="0">
-            <a:schemeClr val="accent1"/>
-          </a:fillRef>
-          <a:effectRef idx="2">
-            <a:schemeClr val="accent1"/>
           </a:effectRef>
           <a:fontRef idx="minor">
             <a:schemeClr val="tx1"/>
@@ -41070,8 +40970,8 @@
         </p:nvSpPr>
         <p:spPr>
           <a:xfrm>
-            <a:off x="596436" y="2249293"/>
-            <a:ext cx="2033748" cy="4027681"/>
+            <a:off x="596436" y="3534310"/>
+            <a:ext cx="2033748" cy="2742664"/>
           </a:xfrm>
           <a:prstGeom prst="roundRect">
             <a:avLst>
@@ -41234,6 +41134,100 @@
           </a:effectLst>
         </p:spPr>
       </p:pic>
+      <p:pic>
+        <p:nvPicPr>
+          <p:cNvPr id="7" name="Picture 6">
+            <a:extLst>
+              <a:ext uri="{FF2B5EF4-FFF2-40B4-BE49-F238E27FC236}">
+                <a16:creationId xmlns:a16="http://schemas.microsoft.com/office/drawing/2014/main" id="{F9243BC4-69A3-EE14-4195-C33925B480BB}"/>
+              </a:ext>
+            </a:extLst>
+          </p:cNvPr>
+          <p:cNvPicPr>
+            <a:picLocks noChangeAspect="1"/>
+          </p:cNvPicPr>
+          <p:nvPr/>
+        </p:nvPicPr>
+        <p:blipFill>
+          <a:blip r:embed="rId6"/>
+          <a:stretch>
+            <a:fillRect/>
+          </a:stretch>
+        </p:blipFill>
+        <p:spPr>
+          <a:xfrm>
+            <a:off x="7039573" y="1094226"/>
+            <a:ext cx="4915586" cy="5506218"/>
+          </a:xfrm>
+          <a:prstGeom prst="roundRect">
+            <a:avLst>
+              <a:gd name="adj" fmla="val 16667"/>
+            </a:avLst>
+          </a:prstGeom>
+          <a:ln>
+            <a:noFill/>
+          </a:ln>
+          <a:effectLst>
+            <a:outerShdw blurRad="152400" dist="12000" dir="900000" sy="98000" kx="110000" ky="200000" algn="tl" rotWithShape="0">
+              <a:srgbClr val="000000">
+                <a:alpha val="30000"/>
+              </a:srgbClr>
+            </a:outerShdw>
+          </a:effectLst>
+          <a:scene3d>
+            <a:camera prst="perspectiveRelaxed">
+              <a:rot lat="19800000" lon="1200000" rev="20820000"/>
+            </a:camera>
+            <a:lightRig rig="threePt" dir="t"/>
+          </a:scene3d>
+          <a:sp3d contourW="6350" prstMaterial="matte">
+            <a:bevelT w="101600" h="101600"/>
+            <a:contourClr>
+              <a:srgbClr val="969696"/>
+            </a:contourClr>
+          </a:sp3d>
+        </p:spPr>
+      </p:pic>
+      <p:cxnSp>
+        <p:nvCxnSpPr>
+          <p:cNvPr id="15" name="Straight Arrow Connector 14">
+            <a:extLst>
+              <a:ext uri="{FF2B5EF4-FFF2-40B4-BE49-F238E27FC236}">
+                <a16:creationId xmlns:a16="http://schemas.microsoft.com/office/drawing/2014/main" id="{C24251C0-856E-8696-FE2C-4B7E9DC802A0}"/>
+              </a:ext>
+            </a:extLst>
+          </p:cNvPr>
+          <p:cNvCxnSpPr/>
+          <p:nvPr/>
+        </p:nvCxnSpPr>
+        <p:spPr>
+          <a:xfrm flipH="1">
+            <a:off x="9100249" y="3176337"/>
+            <a:ext cx="1203158" cy="2581320"/>
+          </a:xfrm>
+          <a:prstGeom prst="straightConnector1">
+            <a:avLst/>
+          </a:prstGeom>
+          <a:ln>
+            <a:headEnd type="triangle" w="med" len="med"/>
+            <a:tailEnd type="triangle" w="med" len="med"/>
+          </a:ln>
+        </p:spPr>
+        <p:style>
+          <a:lnRef idx="3">
+            <a:schemeClr val="accent3"/>
+          </a:lnRef>
+          <a:fillRef idx="0">
+            <a:schemeClr val="accent3"/>
+          </a:fillRef>
+          <a:effectRef idx="2">
+            <a:schemeClr val="accent3"/>
+          </a:effectRef>
+          <a:fontRef idx="minor">
+            <a:schemeClr val="tx1"/>
+          </a:fontRef>
+        </p:style>
+      </p:cxnSp>
     </p:spTree>
     <p:extLst>
       <p:ext uri="{BB962C8B-B14F-4D97-AF65-F5344CB8AC3E}">
@@ -41248,6 +41242,3756 @@
 </file>
 
 <file path=ppt/slides/slide44.xml><?xml version="1.0" encoding="utf-8"?>
+<p:sld xmlns:a="http://schemas.openxmlformats.org/drawingml/2006/main" xmlns:r="http://schemas.openxmlformats.org/officeDocument/2006/relationships" xmlns:p="http://schemas.openxmlformats.org/presentationml/2006/main">
+  <p:cSld>
+    <p:spTree>
+      <p:nvGrpSpPr>
+        <p:cNvPr id="1" name="">
+          <a:extLst>
+            <a:ext uri="{FF2B5EF4-FFF2-40B4-BE49-F238E27FC236}">
+              <a16:creationId xmlns:a16="http://schemas.microsoft.com/office/drawing/2014/main" id="{DF121D9F-275A-FEF6-FD99-2029888D0B6B}"/>
+            </a:ext>
+          </a:extLst>
+        </p:cNvPr>
+        <p:cNvGrpSpPr/>
+        <p:nvPr/>
+      </p:nvGrpSpPr>
+      <p:grpSpPr>
+        <a:xfrm>
+          <a:off x="0" y="0"/>
+          <a:ext cx="0" cy="0"/>
+          <a:chOff x="0" y="0"/>
+          <a:chExt cx="0" cy="0"/>
+        </a:xfrm>
+      </p:grpSpPr>
+      <p:pic>
+        <p:nvPicPr>
+          <p:cNvPr id="3" name="Picture 2">
+            <a:extLst>
+              <a:ext uri="{FF2B5EF4-FFF2-40B4-BE49-F238E27FC236}">
+                <a16:creationId xmlns:a16="http://schemas.microsoft.com/office/drawing/2014/main" id="{BC600E97-8D4F-FA73-9B93-4D8BB4ADF394}"/>
+              </a:ext>
+            </a:extLst>
+          </p:cNvPr>
+          <p:cNvPicPr>
+            <a:picLocks noChangeAspect="1"/>
+          </p:cNvPicPr>
+          <p:nvPr/>
+        </p:nvPicPr>
+        <p:blipFill>
+          <a:blip r:embed="rId2"/>
+          <a:stretch>
+            <a:fillRect/>
+          </a:stretch>
+        </p:blipFill>
+        <p:spPr>
+          <a:xfrm>
+            <a:off x="2592309" y="0"/>
+            <a:ext cx="7007382" cy="6858000"/>
+          </a:xfrm>
+          <a:prstGeom prst="rect">
+            <a:avLst/>
+          </a:prstGeom>
+        </p:spPr>
+      </p:pic>
+      <p:sp>
+        <p:nvSpPr>
+          <p:cNvPr id="5" name="Rectangle 4">
+            <a:extLst>
+              <a:ext uri="{FF2B5EF4-FFF2-40B4-BE49-F238E27FC236}">
+                <a16:creationId xmlns:a16="http://schemas.microsoft.com/office/drawing/2014/main" id="{7E792B02-F0EA-0A4B-AB3E-FDE087D3ACF7}"/>
+              </a:ext>
+            </a:extLst>
+          </p:cNvPr>
+          <p:cNvSpPr/>
+          <p:nvPr/>
+        </p:nvSpPr>
+        <p:spPr>
+          <a:xfrm>
+            <a:off x="3619568" y="0"/>
+            <a:ext cx="233295" cy="181579"/>
+          </a:xfrm>
+          <a:prstGeom prst="rect">
+            <a:avLst/>
+          </a:prstGeom>
+          <a:solidFill>
+            <a:srgbClr val="ACD433">
+              <a:alpha val="50196"/>
+            </a:srgbClr>
+          </a:solidFill>
+        </p:spPr>
+        <p:style>
+          <a:lnRef idx="2">
+            <a:schemeClr val="accent1">
+              <a:shade val="15000"/>
+            </a:schemeClr>
+          </a:lnRef>
+          <a:fillRef idx="1">
+            <a:schemeClr val="accent1"/>
+          </a:fillRef>
+          <a:effectRef idx="0">
+            <a:schemeClr val="accent1"/>
+          </a:effectRef>
+          <a:fontRef idx="minor">
+            <a:schemeClr val="lt1"/>
+          </a:fontRef>
+        </p:style>
+        <p:txBody>
+          <a:bodyPr rtlCol="0" anchor="ctr"/>
+          <a:lstStyle/>
+          <a:p>
+            <a:pPr algn="ctr"/>
+            <a:endParaRPr lang="en-US"/>
+          </a:p>
+        </p:txBody>
+      </p:sp>
+      <p:sp>
+        <p:nvSpPr>
+          <p:cNvPr id="6" name="Rectangle 5">
+            <a:extLst>
+              <a:ext uri="{FF2B5EF4-FFF2-40B4-BE49-F238E27FC236}">
+                <a16:creationId xmlns:a16="http://schemas.microsoft.com/office/drawing/2014/main" id="{642576E6-91A7-7E4F-5160-E4F4CF044413}"/>
+              </a:ext>
+            </a:extLst>
+          </p:cNvPr>
+          <p:cNvSpPr/>
+          <p:nvPr/>
+        </p:nvSpPr>
+        <p:spPr>
+          <a:xfrm>
+            <a:off x="6757680" y="424700"/>
+            <a:ext cx="1028938" cy="436792"/>
+          </a:xfrm>
+          <a:prstGeom prst="rect">
+            <a:avLst/>
+          </a:prstGeom>
+          <a:solidFill>
+            <a:schemeClr val="bg2">
+              <a:lumMod val="20000"/>
+              <a:lumOff val="80000"/>
+              <a:alpha val="50196"/>
+            </a:schemeClr>
+          </a:solidFill>
+        </p:spPr>
+        <p:style>
+          <a:lnRef idx="2">
+            <a:schemeClr val="accent1">
+              <a:shade val="15000"/>
+            </a:schemeClr>
+          </a:lnRef>
+          <a:fillRef idx="1">
+            <a:schemeClr val="accent1"/>
+          </a:fillRef>
+          <a:effectRef idx="0">
+            <a:schemeClr val="accent1"/>
+          </a:effectRef>
+          <a:fontRef idx="minor">
+            <a:schemeClr val="lt1"/>
+          </a:fontRef>
+        </p:style>
+        <p:txBody>
+          <a:bodyPr rtlCol="0" anchor="ctr"/>
+          <a:lstStyle/>
+          <a:p>
+            <a:pPr algn="ctr"/>
+            <a:endParaRPr lang="en-US"/>
+          </a:p>
+        </p:txBody>
+      </p:sp>
+      <p:sp>
+        <p:nvSpPr>
+          <p:cNvPr id="8" name="Rectangle 7">
+            <a:extLst>
+              <a:ext uri="{FF2B5EF4-FFF2-40B4-BE49-F238E27FC236}">
+                <a16:creationId xmlns:a16="http://schemas.microsoft.com/office/drawing/2014/main" id="{C81ADBFB-953C-EC79-6601-32515E38D417}"/>
+              </a:ext>
+            </a:extLst>
+          </p:cNvPr>
+          <p:cNvSpPr/>
+          <p:nvPr/>
+        </p:nvSpPr>
+        <p:spPr>
+          <a:xfrm>
+            <a:off x="5065260" y="733425"/>
+            <a:ext cx="318398" cy="225099"/>
+          </a:xfrm>
+          <a:prstGeom prst="rect">
+            <a:avLst/>
+          </a:prstGeom>
+          <a:solidFill>
+            <a:srgbClr val="ACD433">
+              <a:alpha val="50196"/>
+            </a:srgbClr>
+          </a:solidFill>
+        </p:spPr>
+        <p:style>
+          <a:lnRef idx="2">
+            <a:schemeClr val="accent1">
+              <a:shade val="15000"/>
+            </a:schemeClr>
+          </a:lnRef>
+          <a:fillRef idx="1">
+            <a:schemeClr val="accent1"/>
+          </a:fillRef>
+          <a:effectRef idx="0">
+            <a:schemeClr val="accent1"/>
+          </a:effectRef>
+          <a:fontRef idx="minor">
+            <a:schemeClr val="lt1"/>
+          </a:fontRef>
+        </p:style>
+        <p:txBody>
+          <a:bodyPr rtlCol="0" anchor="ctr"/>
+          <a:lstStyle/>
+          <a:p>
+            <a:pPr algn="ctr"/>
+            <a:endParaRPr lang="en-US"/>
+          </a:p>
+        </p:txBody>
+      </p:sp>
+      <p:sp>
+        <p:nvSpPr>
+          <p:cNvPr id="15" name="Rectangle 14">
+            <a:extLst>
+              <a:ext uri="{FF2B5EF4-FFF2-40B4-BE49-F238E27FC236}">
+                <a16:creationId xmlns:a16="http://schemas.microsoft.com/office/drawing/2014/main" id="{905A11F9-13F6-9F09-8711-A2464AFCC76B}"/>
+              </a:ext>
+            </a:extLst>
+          </p:cNvPr>
+          <p:cNvSpPr/>
+          <p:nvPr/>
+        </p:nvSpPr>
+        <p:spPr>
+          <a:xfrm>
+            <a:off x="3788357" y="1447841"/>
+            <a:ext cx="233295" cy="181579"/>
+          </a:xfrm>
+          <a:prstGeom prst="rect">
+            <a:avLst/>
+          </a:prstGeom>
+          <a:solidFill>
+            <a:srgbClr val="ACD433">
+              <a:alpha val="50196"/>
+            </a:srgbClr>
+          </a:solidFill>
+        </p:spPr>
+        <p:style>
+          <a:lnRef idx="2">
+            <a:schemeClr val="accent1">
+              <a:shade val="15000"/>
+            </a:schemeClr>
+          </a:lnRef>
+          <a:fillRef idx="1">
+            <a:schemeClr val="accent1"/>
+          </a:fillRef>
+          <a:effectRef idx="0">
+            <a:schemeClr val="accent1"/>
+          </a:effectRef>
+          <a:fontRef idx="minor">
+            <a:schemeClr val="lt1"/>
+          </a:fontRef>
+        </p:style>
+        <p:txBody>
+          <a:bodyPr rtlCol="0" anchor="ctr"/>
+          <a:lstStyle/>
+          <a:p>
+            <a:pPr algn="ctr"/>
+            <a:endParaRPr lang="en-US"/>
+          </a:p>
+        </p:txBody>
+      </p:sp>
+      <p:sp>
+        <p:nvSpPr>
+          <p:cNvPr id="23" name="Rectangle 22">
+            <a:extLst>
+              <a:ext uri="{FF2B5EF4-FFF2-40B4-BE49-F238E27FC236}">
+                <a16:creationId xmlns:a16="http://schemas.microsoft.com/office/drawing/2014/main" id="{8B318EE2-8D98-D164-A332-21D5A5649D8A}"/>
+              </a:ext>
+            </a:extLst>
+          </p:cNvPr>
+          <p:cNvSpPr/>
+          <p:nvPr/>
+        </p:nvSpPr>
+        <p:spPr>
+          <a:xfrm>
+            <a:off x="6285303" y="1568449"/>
+            <a:ext cx="1278993" cy="252208"/>
+          </a:xfrm>
+          <a:prstGeom prst="rect">
+            <a:avLst/>
+          </a:prstGeom>
+          <a:solidFill>
+            <a:schemeClr val="bg2">
+              <a:lumMod val="20000"/>
+              <a:lumOff val="80000"/>
+              <a:alpha val="50196"/>
+            </a:schemeClr>
+          </a:solidFill>
+        </p:spPr>
+        <p:style>
+          <a:lnRef idx="2">
+            <a:schemeClr val="accent1">
+              <a:shade val="15000"/>
+            </a:schemeClr>
+          </a:lnRef>
+          <a:fillRef idx="1">
+            <a:schemeClr val="accent1"/>
+          </a:fillRef>
+          <a:effectRef idx="0">
+            <a:schemeClr val="accent1"/>
+          </a:effectRef>
+          <a:fontRef idx="minor">
+            <a:schemeClr val="lt1"/>
+          </a:fontRef>
+        </p:style>
+        <p:txBody>
+          <a:bodyPr rtlCol="0" anchor="ctr"/>
+          <a:lstStyle/>
+          <a:p>
+            <a:pPr algn="ctr"/>
+            <a:endParaRPr lang="en-US"/>
+          </a:p>
+        </p:txBody>
+      </p:sp>
+      <p:sp>
+        <p:nvSpPr>
+          <p:cNvPr id="20" name="Rectangle 19">
+            <a:extLst>
+              <a:ext uri="{FF2B5EF4-FFF2-40B4-BE49-F238E27FC236}">
+                <a16:creationId xmlns:a16="http://schemas.microsoft.com/office/drawing/2014/main" id="{C723DA7D-F23A-2BCC-F0A9-8E490FE093F6}"/>
+              </a:ext>
+            </a:extLst>
+          </p:cNvPr>
+          <p:cNvSpPr/>
+          <p:nvPr/>
+        </p:nvSpPr>
+        <p:spPr>
+          <a:xfrm>
+            <a:off x="6191487" y="2160350"/>
+            <a:ext cx="312055" cy="181579"/>
+          </a:xfrm>
+          <a:prstGeom prst="rect">
+            <a:avLst/>
+          </a:prstGeom>
+          <a:solidFill>
+            <a:srgbClr val="ACD433">
+              <a:alpha val="50196"/>
+            </a:srgbClr>
+          </a:solidFill>
+        </p:spPr>
+        <p:style>
+          <a:lnRef idx="2">
+            <a:schemeClr val="accent1">
+              <a:shade val="15000"/>
+            </a:schemeClr>
+          </a:lnRef>
+          <a:fillRef idx="1">
+            <a:schemeClr val="accent1"/>
+          </a:fillRef>
+          <a:effectRef idx="0">
+            <a:schemeClr val="accent1"/>
+          </a:effectRef>
+          <a:fontRef idx="minor">
+            <a:schemeClr val="lt1"/>
+          </a:fontRef>
+        </p:style>
+        <p:txBody>
+          <a:bodyPr rtlCol="0" anchor="ctr"/>
+          <a:lstStyle/>
+          <a:p>
+            <a:pPr algn="ctr"/>
+            <a:endParaRPr lang="en-US"/>
+          </a:p>
+        </p:txBody>
+      </p:sp>
+      <p:sp>
+        <p:nvSpPr>
+          <p:cNvPr id="35" name="Rectangle 34">
+            <a:extLst>
+              <a:ext uri="{FF2B5EF4-FFF2-40B4-BE49-F238E27FC236}">
+                <a16:creationId xmlns:a16="http://schemas.microsoft.com/office/drawing/2014/main" id="{DD5C8035-8C6F-9BED-FB02-9334112511E2}"/>
+              </a:ext>
+            </a:extLst>
+          </p:cNvPr>
+          <p:cNvSpPr/>
+          <p:nvPr/>
+        </p:nvSpPr>
+        <p:spPr>
+          <a:xfrm>
+            <a:off x="7187151" y="3322342"/>
+            <a:ext cx="346323" cy="252208"/>
+          </a:xfrm>
+          <a:prstGeom prst="rect">
+            <a:avLst/>
+          </a:prstGeom>
+          <a:solidFill>
+            <a:srgbClr val="ACD433">
+              <a:alpha val="50196"/>
+            </a:srgbClr>
+          </a:solidFill>
+        </p:spPr>
+        <p:style>
+          <a:lnRef idx="2">
+            <a:schemeClr val="accent1">
+              <a:shade val="15000"/>
+            </a:schemeClr>
+          </a:lnRef>
+          <a:fillRef idx="1">
+            <a:schemeClr val="accent1"/>
+          </a:fillRef>
+          <a:effectRef idx="0">
+            <a:schemeClr val="accent1"/>
+          </a:effectRef>
+          <a:fontRef idx="minor">
+            <a:schemeClr val="lt1"/>
+          </a:fontRef>
+        </p:style>
+        <p:txBody>
+          <a:bodyPr rtlCol="0" anchor="ctr"/>
+          <a:lstStyle/>
+          <a:p>
+            <a:pPr algn="ctr"/>
+            <a:endParaRPr lang="en-US"/>
+          </a:p>
+        </p:txBody>
+      </p:sp>
+      <p:sp>
+        <p:nvSpPr>
+          <p:cNvPr id="36" name="Rectangle 35">
+            <a:extLst>
+              <a:ext uri="{FF2B5EF4-FFF2-40B4-BE49-F238E27FC236}">
+                <a16:creationId xmlns:a16="http://schemas.microsoft.com/office/drawing/2014/main" id="{04ECBD7E-0CDB-A6D7-9451-68656BE65D1D}"/>
+              </a:ext>
+            </a:extLst>
+          </p:cNvPr>
+          <p:cNvSpPr/>
+          <p:nvPr/>
+        </p:nvSpPr>
+        <p:spPr>
+          <a:xfrm>
+            <a:off x="7459492" y="2574289"/>
+            <a:ext cx="1028938" cy="262192"/>
+          </a:xfrm>
+          <a:prstGeom prst="rect">
+            <a:avLst/>
+          </a:prstGeom>
+          <a:solidFill>
+            <a:schemeClr val="bg2">
+              <a:lumMod val="20000"/>
+              <a:lumOff val="80000"/>
+              <a:alpha val="50196"/>
+            </a:schemeClr>
+          </a:solidFill>
+        </p:spPr>
+        <p:style>
+          <a:lnRef idx="2">
+            <a:schemeClr val="accent1">
+              <a:shade val="15000"/>
+            </a:schemeClr>
+          </a:lnRef>
+          <a:fillRef idx="1">
+            <a:schemeClr val="accent1"/>
+          </a:fillRef>
+          <a:effectRef idx="0">
+            <a:schemeClr val="accent1"/>
+          </a:effectRef>
+          <a:fontRef idx="minor">
+            <a:schemeClr val="lt1"/>
+          </a:fontRef>
+        </p:style>
+        <p:txBody>
+          <a:bodyPr rtlCol="0" anchor="ctr"/>
+          <a:lstStyle/>
+          <a:p>
+            <a:pPr algn="ctr"/>
+            <a:endParaRPr lang="en-US"/>
+          </a:p>
+        </p:txBody>
+      </p:sp>
+      <p:sp>
+        <p:nvSpPr>
+          <p:cNvPr id="37" name="Rectangle 36">
+            <a:extLst>
+              <a:ext uri="{FF2B5EF4-FFF2-40B4-BE49-F238E27FC236}">
+                <a16:creationId xmlns:a16="http://schemas.microsoft.com/office/drawing/2014/main" id="{7EFD298A-DC24-94F2-0454-9A08D2887BEC}"/>
+              </a:ext>
+            </a:extLst>
+          </p:cNvPr>
+          <p:cNvSpPr/>
+          <p:nvPr/>
+        </p:nvSpPr>
+        <p:spPr>
+          <a:xfrm>
+            <a:off x="7742821" y="5340598"/>
+            <a:ext cx="1205970" cy="436792"/>
+          </a:xfrm>
+          <a:prstGeom prst="rect">
+            <a:avLst/>
+          </a:prstGeom>
+          <a:solidFill>
+            <a:schemeClr val="bg2">
+              <a:lumMod val="20000"/>
+              <a:lumOff val="80000"/>
+              <a:alpha val="50196"/>
+            </a:schemeClr>
+          </a:solidFill>
+        </p:spPr>
+        <p:style>
+          <a:lnRef idx="2">
+            <a:schemeClr val="accent1">
+              <a:shade val="15000"/>
+            </a:schemeClr>
+          </a:lnRef>
+          <a:fillRef idx="1">
+            <a:schemeClr val="accent1"/>
+          </a:fillRef>
+          <a:effectRef idx="0">
+            <a:schemeClr val="accent1"/>
+          </a:effectRef>
+          <a:fontRef idx="minor">
+            <a:schemeClr val="lt1"/>
+          </a:fontRef>
+        </p:style>
+        <p:txBody>
+          <a:bodyPr rtlCol="0" anchor="ctr"/>
+          <a:lstStyle/>
+          <a:p>
+            <a:pPr algn="ctr"/>
+            <a:endParaRPr lang="en-US"/>
+          </a:p>
+        </p:txBody>
+      </p:sp>
+      <p:sp>
+        <p:nvSpPr>
+          <p:cNvPr id="38" name="Rectangle 37">
+            <a:extLst>
+              <a:ext uri="{FF2B5EF4-FFF2-40B4-BE49-F238E27FC236}">
+                <a16:creationId xmlns:a16="http://schemas.microsoft.com/office/drawing/2014/main" id="{CD2513D2-0F5C-F81A-BF31-710A9CF72D1A}"/>
+              </a:ext>
+            </a:extLst>
+          </p:cNvPr>
+          <p:cNvSpPr/>
+          <p:nvPr/>
+        </p:nvSpPr>
+        <p:spPr>
+          <a:xfrm>
+            <a:off x="6425321" y="3740812"/>
+            <a:ext cx="1205970" cy="436792"/>
+          </a:xfrm>
+          <a:prstGeom prst="rect">
+            <a:avLst/>
+          </a:prstGeom>
+          <a:solidFill>
+            <a:schemeClr val="bg2">
+              <a:lumMod val="20000"/>
+              <a:lumOff val="80000"/>
+              <a:alpha val="50196"/>
+            </a:schemeClr>
+          </a:solidFill>
+        </p:spPr>
+        <p:style>
+          <a:lnRef idx="2">
+            <a:schemeClr val="accent1">
+              <a:shade val="15000"/>
+            </a:schemeClr>
+          </a:lnRef>
+          <a:fillRef idx="1">
+            <a:schemeClr val="accent1"/>
+          </a:fillRef>
+          <a:effectRef idx="0">
+            <a:schemeClr val="accent1"/>
+          </a:effectRef>
+          <a:fontRef idx="minor">
+            <a:schemeClr val="lt1"/>
+          </a:fontRef>
+        </p:style>
+        <p:txBody>
+          <a:bodyPr rtlCol="0" anchor="ctr"/>
+          <a:lstStyle/>
+          <a:p>
+            <a:pPr algn="ctr"/>
+            <a:endParaRPr lang="en-US"/>
+          </a:p>
+        </p:txBody>
+      </p:sp>
+      <p:sp>
+        <p:nvSpPr>
+          <p:cNvPr id="39" name="Rectangle 38">
+            <a:extLst>
+              <a:ext uri="{FF2B5EF4-FFF2-40B4-BE49-F238E27FC236}">
+                <a16:creationId xmlns:a16="http://schemas.microsoft.com/office/drawing/2014/main" id="{B06E5707-C50D-38FC-78E4-8ECE669DC0C3}"/>
+              </a:ext>
+            </a:extLst>
+          </p:cNvPr>
+          <p:cNvSpPr/>
+          <p:nvPr/>
+        </p:nvSpPr>
+        <p:spPr>
+          <a:xfrm>
+            <a:off x="4531163" y="5340598"/>
+            <a:ext cx="986059" cy="436792"/>
+          </a:xfrm>
+          <a:prstGeom prst="rect">
+            <a:avLst/>
+          </a:prstGeom>
+          <a:solidFill>
+            <a:schemeClr val="bg2">
+              <a:lumMod val="20000"/>
+              <a:lumOff val="80000"/>
+              <a:alpha val="50196"/>
+            </a:schemeClr>
+          </a:solidFill>
+        </p:spPr>
+        <p:style>
+          <a:lnRef idx="2">
+            <a:schemeClr val="accent1">
+              <a:shade val="15000"/>
+            </a:schemeClr>
+          </a:lnRef>
+          <a:fillRef idx="1">
+            <a:schemeClr val="accent1"/>
+          </a:fillRef>
+          <a:effectRef idx="0">
+            <a:schemeClr val="accent1"/>
+          </a:effectRef>
+          <a:fontRef idx="minor">
+            <a:schemeClr val="lt1"/>
+          </a:fontRef>
+        </p:style>
+        <p:txBody>
+          <a:bodyPr rtlCol="0" anchor="ctr"/>
+          <a:lstStyle/>
+          <a:p>
+            <a:pPr algn="ctr"/>
+            <a:endParaRPr lang="en-US"/>
+          </a:p>
+        </p:txBody>
+      </p:sp>
+      <p:sp>
+        <p:nvSpPr>
+          <p:cNvPr id="40" name="Rectangle 39">
+            <a:extLst>
+              <a:ext uri="{FF2B5EF4-FFF2-40B4-BE49-F238E27FC236}">
+                <a16:creationId xmlns:a16="http://schemas.microsoft.com/office/drawing/2014/main" id="{B5B6F945-EE6F-6705-5664-DA51C7061754}"/>
+              </a:ext>
+            </a:extLst>
+          </p:cNvPr>
+          <p:cNvSpPr/>
+          <p:nvPr/>
+        </p:nvSpPr>
+        <p:spPr>
+          <a:xfrm>
+            <a:off x="4058782" y="3862163"/>
+            <a:ext cx="1707898" cy="330837"/>
+          </a:xfrm>
+          <a:prstGeom prst="rect">
+            <a:avLst/>
+          </a:prstGeom>
+          <a:solidFill>
+            <a:schemeClr val="bg2">
+              <a:lumMod val="20000"/>
+              <a:lumOff val="80000"/>
+              <a:alpha val="50196"/>
+            </a:schemeClr>
+          </a:solidFill>
+        </p:spPr>
+        <p:style>
+          <a:lnRef idx="2">
+            <a:schemeClr val="accent1">
+              <a:shade val="15000"/>
+            </a:schemeClr>
+          </a:lnRef>
+          <a:fillRef idx="1">
+            <a:schemeClr val="accent1"/>
+          </a:fillRef>
+          <a:effectRef idx="0">
+            <a:schemeClr val="accent1"/>
+          </a:effectRef>
+          <a:fontRef idx="minor">
+            <a:schemeClr val="lt1"/>
+          </a:fontRef>
+        </p:style>
+        <p:txBody>
+          <a:bodyPr rtlCol="0" anchor="ctr"/>
+          <a:lstStyle/>
+          <a:p>
+            <a:pPr algn="ctr"/>
+            <a:endParaRPr lang="en-US"/>
+          </a:p>
+        </p:txBody>
+      </p:sp>
+      <p:sp>
+        <p:nvSpPr>
+          <p:cNvPr id="48" name="Freeform: Shape 47">
+            <a:extLst>
+              <a:ext uri="{FF2B5EF4-FFF2-40B4-BE49-F238E27FC236}">
+                <a16:creationId xmlns:a16="http://schemas.microsoft.com/office/drawing/2014/main" id="{7A38D211-95C9-FC61-5C78-F53D105EF78F}"/>
+              </a:ext>
+            </a:extLst>
+          </p:cNvPr>
+          <p:cNvSpPr/>
+          <p:nvPr/>
+        </p:nvSpPr>
+        <p:spPr>
+          <a:xfrm>
+            <a:off x="6164494" y="2589088"/>
+            <a:ext cx="852755" cy="842481"/>
+          </a:xfrm>
+          <a:custGeom>
+            <a:avLst/>
+            <a:gdLst>
+              <a:gd name="csX0" fmla="*/ 10275 w 852755"/>
+              <a:gd name="csY0" fmla="*/ 0 h 842481"/>
+              <a:gd name="csX1" fmla="*/ 0 w 852755"/>
+              <a:gd name="csY1" fmla="*/ 277402 h 842481"/>
+              <a:gd name="csX2" fmla="*/ 842481 w 852755"/>
+              <a:gd name="csY2" fmla="*/ 267128 h 842481"/>
+              <a:gd name="csX3" fmla="*/ 852755 w 852755"/>
+              <a:gd name="csY3" fmla="*/ 842481 h 842481"/>
+            </a:gdLst>
+            <a:ahLst/>
+            <a:cxnLst>
+              <a:cxn ang="0">
+                <a:pos x="csX0" y="csY0"/>
+              </a:cxn>
+              <a:cxn ang="0">
+                <a:pos x="csX1" y="csY1"/>
+              </a:cxn>
+              <a:cxn ang="0">
+                <a:pos x="csX2" y="csY2"/>
+              </a:cxn>
+              <a:cxn ang="0">
+                <a:pos x="csX3" y="csY3"/>
+              </a:cxn>
+            </a:cxnLst>
+            <a:rect l="l" t="t" r="r" b="b"/>
+            <a:pathLst>
+              <a:path w="852755" h="842481">
+                <a:moveTo>
+                  <a:pt x="10275" y="0"/>
+                </a:moveTo>
+                <a:lnTo>
+                  <a:pt x="0" y="277402"/>
+                </a:lnTo>
+                <a:lnTo>
+                  <a:pt x="842481" y="267128"/>
+                </a:lnTo>
+                <a:lnTo>
+                  <a:pt x="852755" y="842481"/>
+                </a:lnTo>
+              </a:path>
+            </a:pathLst>
+          </a:custGeom>
+        </p:spPr>
+        <p:style>
+          <a:lnRef idx="3">
+            <a:schemeClr val="accent1"/>
+          </a:lnRef>
+          <a:fillRef idx="0">
+            <a:schemeClr val="accent1"/>
+          </a:fillRef>
+          <a:effectRef idx="2">
+            <a:schemeClr val="accent1"/>
+          </a:effectRef>
+          <a:fontRef idx="minor">
+            <a:schemeClr val="tx1"/>
+          </a:fontRef>
+        </p:style>
+        <p:txBody>
+          <a:bodyPr rtlCol="0" anchor="ctr"/>
+          <a:lstStyle/>
+          <a:p>
+            <a:pPr algn="ctr"/>
+            <a:endParaRPr lang="en-US"/>
+          </a:p>
+        </p:txBody>
+      </p:sp>
+      <p:sp>
+        <p:nvSpPr>
+          <p:cNvPr id="49" name="Freeform: Shape 48">
+            <a:extLst>
+              <a:ext uri="{FF2B5EF4-FFF2-40B4-BE49-F238E27FC236}">
+                <a16:creationId xmlns:a16="http://schemas.microsoft.com/office/drawing/2014/main" id="{98F3E48A-2722-BA86-9611-FFA11717D543}"/>
+              </a:ext>
+            </a:extLst>
+          </p:cNvPr>
+          <p:cNvSpPr/>
+          <p:nvPr/>
+        </p:nvSpPr>
+        <p:spPr>
+          <a:xfrm>
+            <a:off x="5054885" y="513708"/>
+            <a:ext cx="544531" cy="297950"/>
+          </a:xfrm>
+          <a:custGeom>
+            <a:avLst/>
+            <a:gdLst>
+              <a:gd name="csX0" fmla="*/ 544531 w 544531"/>
+              <a:gd name="csY0" fmla="*/ 0 h 297950"/>
+              <a:gd name="csX1" fmla="*/ 0 w 544531"/>
+              <a:gd name="csY1" fmla="*/ 0 h 297950"/>
+              <a:gd name="csX2" fmla="*/ 0 w 544531"/>
+              <a:gd name="csY2" fmla="*/ 297950 h 297950"/>
+            </a:gdLst>
+            <a:ahLst/>
+            <a:cxnLst>
+              <a:cxn ang="0">
+                <a:pos x="csX0" y="csY0"/>
+              </a:cxn>
+              <a:cxn ang="0">
+                <a:pos x="csX1" y="csY1"/>
+              </a:cxn>
+              <a:cxn ang="0">
+                <a:pos x="csX2" y="csY2"/>
+              </a:cxn>
+            </a:cxnLst>
+            <a:rect l="l" t="t" r="r" b="b"/>
+            <a:pathLst>
+              <a:path w="544531" h="297950">
+                <a:moveTo>
+                  <a:pt x="544531" y="0"/>
+                </a:moveTo>
+                <a:lnTo>
+                  <a:pt x="0" y="0"/>
+                </a:lnTo>
+                <a:lnTo>
+                  <a:pt x="0" y="297950"/>
+                </a:lnTo>
+              </a:path>
+            </a:pathLst>
+          </a:custGeom>
+        </p:spPr>
+        <p:style>
+          <a:lnRef idx="3">
+            <a:schemeClr val="accent1"/>
+          </a:lnRef>
+          <a:fillRef idx="0">
+            <a:schemeClr val="accent1"/>
+          </a:fillRef>
+          <a:effectRef idx="2">
+            <a:schemeClr val="accent1"/>
+          </a:effectRef>
+          <a:fontRef idx="minor">
+            <a:schemeClr val="tx1"/>
+          </a:fontRef>
+        </p:style>
+        <p:txBody>
+          <a:bodyPr rtlCol="0" anchor="ctr"/>
+          <a:lstStyle/>
+          <a:p>
+            <a:pPr algn="ctr"/>
+            <a:endParaRPr lang="en-US"/>
+          </a:p>
+        </p:txBody>
+      </p:sp>
+      <p:cxnSp>
+        <p:nvCxnSpPr>
+          <p:cNvPr id="51" name="Straight Connector 50">
+            <a:extLst>
+              <a:ext uri="{FF2B5EF4-FFF2-40B4-BE49-F238E27FC236}">
+                <a16:creationId xmlns:a16="http://schemas.microsoft.com/office/drawing/2014/main" id="{DFE557FF-76AC-A889-CBC5-2896D9A6B24A}"/>
+              </a:ext>
+            </a:extLst>
+          </p:cNvPr>
+          <p:cNvCxnSpPr>
+            <a:cxnSpLocks/>
+          </p:cNvCxnSpPr>
+          <p:nvPr/>
+        </p:nvCxnSpPr>
+        <p:spPr>
+          <a:xfrm>
+            <a:off x="3411020" y="424700"/>
+            <a:ext cx="0" cy="1143749"/>
+          </a:xfrm>
+          <a:prstGeom prst="line">
+            <a:avLst/>
+          </a:prstGeom>
+        </p:spPr>
+        <p:style>
+          <a:lnRef idx="3">
+            <a:schemeClr val="accent1"/>
+          </a:lnRef>
+          <a:fillRef idx="0">
+            <a:schemeClr val="accent1"/>
+          </a:fillRef>
+          <a:effectRef idx="2">
+            <a:schemeClr val="accent1"/>
+          </a:effectRef>
+          <a:fontRef idx="minor">
+            <a:schemeClr val="tx1"/>
+          </a:fontRef>
+        </p:style>
+      </p:cxnSp>
+      <p:sp>
+        <p:nvSpPr>
+          <p:cNvPr id="53" name="Freeform: Shape 52">
+            <a:extLst>
+              <a:ext uri="{FF2B5EF4-FFF2-40B4-BE49-F238E27FC236}">
+                <a16:creationId xmlns:a16="http://schemas.microsoft.com/office/drawing/2014/main" id="{42AC591C-DC34-F440-52B2-DF4F969766A9}"/>
+              </a:ext>
+            </a:extLst>
+          </p:cNvPr>
+          <p:cNvSpPr/>
+          <p:nvPr/>
+        </p:nvSpPr>
+        <p:spPr>
+          <a:xfrm>
+            <a:off x="3565133" y="996593"/>
+            <a:ext cx="1047964" cy="544531"/>
+          </a:xfrm>
+          <a:custGeom>
+            <a:avLst/>
+            <a:gdLst>
+              <a:gd name="csX0" fmla="*/ 1047964 w 1047964"/>
+              <a:gd name="csY0" fmla="*/ 0 h 544531"/>
+              <a:gd name="csX1" fmla="*/ 0 w 1047964"/>
+              <a:gd name="csY1" fmla="*/ 10274 h 544531"/>
+              <a:gd name="csX2" fmla="*/ 10274 w 1047964"/>
+              <a:gd name="csY2" fmla="*/ 544531 h 544531"/>
+            </a:gdLst>
+            <a:ahLst/>
+            <a:cxnLst>
+              <a:cxn ang="0">
+                <a:pos x="csX0" y="csY0"/>
+              </a:cxn>
+              <a:cxn ang="0">
+                <a:pos x="csX1" y="csY1"/>
+              </a:cxn>
+              <a:cxn ang="0">
+                <a:pos x="csX2" y="csY2"/>
+              </a:cxn>
+            </a:cxnLst>
+            <a:rect l="l" t="t" r="r" b="b"/>
+            <a:pathLst>
+              <a:path w="1047964" h="544531">
+                <a:moveTo>
+                  <a:pt x="1047964" y="0"/>
+                </a:moveTo>
+                <a:lnTo>
+                  <a:pt x="0" y="10274"/>
+                </a:lnTo>
+                <a:lnTo>
+                  <a:pt x="10274" y="544531"/>
+                </a:lnTo>
+              </a:path>
+            </a:pathLst>
+          </a:custGeom>
+        </p:spPr>
+        <p:style>
+          <a:lnRef idx="3">
+            <a:schemeClr val="accent1"/>
+          </a:lnRef>
+          <a:fillRef idx="0">
+            <a:schemeClr val="accent1"/>
+          </a:fillRef>
+          <a:effectRef idx="2">
+            <a:schemeClr val="accent1"/>
+          </a:effectRef>
+          <a:fontRef idx="minor">
+            <a:schemeClr val="tx1"/>
+          </a:fontRef>
+        </p:style>
+        <p:txBody>
+          <a:bodyPr rtlCol="0" anchor="ctr"/>
+          <a:lstStyle/>
+          <a:p>
+            <a:pPr algn="ctr"/>
+            <a:endParaRPr lang="en-US"/>
+          </a:p>
+        </p:txBody>
+      </p:sp>
+      <p:sp>
+        <p:nvSpPr>
+          <p:cNvPr id="54" name="Freeform: Shape 53">
+            <a:extLst>
+              <a:ext uri="{FF2B5EF4-FFF2-40B4-BE49-F238E27FC236}">
+                <a16:creationId xmlns:a16="http://schemas.microsoft.com/office/drawing/2014/main" id="{42FB1858-25DC-5F91-729A-05CF3E028179}"/>
+              </a:ext>
+            </a:extLst>
+          </p:cNvPr>
+          <p:cNvSpPr/>
+          <p:nvPr/>
+        </p:nvSpPr>
+        <p:spPr>
+          <a:xfrm>
+            <a:off x="3616503" y="431515"/>
+            <a:ext cx="1006868" cy="482885"/>
+          </a:xfrm>
+          <a:custGeom>
+            <a:avLst/>
+            <a:gdLst>
+              <a:gd name="csX0" fmla="*/ 1006868 w 1006868"/>
+              <a:gd name="csY0" fmla="*/ 482885 h 482885"/>
+              <a:gd name="csX1" fmla="*/ 0 w 1006868"/>
+              <a:gd name="csY1" fmla="*/ 0 h 482885"/>
+            </a:gdLst>
+            <a:ahLst/>
+            <a:cxnLst>
+              <a:cxn ang="0">
+                <a:pos x="csX0" y="csY0"/>
+              </a:cxn>
+              <a:cxn ang="0">
+                <a:pos x="csX1" y="csY1"/>
+              </a:cxn>
+            </a:cxnLst>
+            <a:rect l="l" t="t" r="r" b="b"/>
+            <a:pathLst>
+              <a:path w="1006868" h="482885">
+                <a:moveTo>
+                  <a:pt x="1006868" y="482885"/>
+                </a:moveTo>
+                <a:lnTo>
+                  <a:pt x="0" y="0"/>
+                </a:lnTo>
+              </a:path>
+            </a:pathLst>
+          </a:custGeom>
+        </p:spPr>
+        <p:style>
+          <a:lnRef idx="3">
+            <a:schemeClr val="accent1"/>
+          </a:lnRef>
+          <a:fillRef idx="0">
+            <a:schemeClr val="accent1"/>
+          </a:fillRef>
+          <a:effectRef idx="2">
+            <a:schemeClr val="accent1"/>
+          </a:effectRef>
+          <a:fontRef idx="minor">
+            <a:schemeClr val="tx1"/>
+          </a:fontRef>
+        </p:style>
+        <p:txBody>
+          <a:bodyPr rtlCol="0" anchor="ctr"/>
+          <a:lstStyle/>
+          <a:p>
+            <a:pPr algn="ctr"/>
+            <a:endParaRPr lang="en-US"/>
+          </a:p>
+        </p:txBody>
+      </p:sp>
+      <p:sp>
+        <p:nvSpPr>
+          <p:cNvPr id="55" name="Freeform: Shape 54">
+            <a:extLst>
+              <a:ext uri="{FF2B5EF4-FFF2-40B4-BE49-F238E27FC236}">
+                <a16:creationId xmlns:a16="http://schemas.microsoft.com/office/drawing/2014/main" id="{60253AAF-68BE-AA98-F355-45FB243D8A84}"/>
+              </a:ext>
+            </a:extLst>
+          </p:cNvPr>
+          <p:cNvSpPr/>
+          <p:nvPr/>
+        </p:nvSpPr>
+        <p:spPr>
+          <a:xfrm>
+            <a:off x="7161088" y="3102796"/>
+            <a:ext cx="431514" cy="328773"/>
+          </a:xfrm>
+          <a:custGeom>
+            <a:avLst/>
+            <a:gdLst>
+              <a:gd name="csX0" fmla="*/ 431514 w 431514"/>
+              <a:gd name="csY0" fmla="*/ 0 h 328773"/>
+              <a:gd name="csX1" fmla="*/ 431514 w 431514"/>
+              <a:gd name="csY1" fmla="*/ 61644 h 328773"/>
+              <a:gd name="csX2" fmla="*/ 421240 w 431514"/>
+              <a:gd name="csY2" fmla="*/ 184934 h 328773"/>
+              <a:gd name="csX3" fmla="*/ 0 w 431514"/>
+              <a:gd name="csY3" fmla="*/ 174660 h 328773"/>
+              <a:gd name="csX4" fmla="*/ 0 w 431514"/>
+              <a:gd name="csY4" fmla="*/ 328773 h 328773"/>
+            </a:gdLst>
+            <a:ahLst/>
+            <a:cxnLst>
+              <a:cxn ang="0">
+                <a:pos x="csX0" y="csY0"/>
+              </a:cxn>
+              <a:cxn ang="0">
+                <a:pos x="csX1" y="csY1"/>
+              </a:cxn>
+              <a:cxn ang="0">
+                <a:pos x="csX2" y="csY2"/>
+              </a:cxn>
+              <a:cxn ang="0">
+                <a:pos x="csX3" y="csY3"/>
+              </a:cxn>
+              <a:cxn ang="0">
+                <a:pos x="csX4" y="csY4"/>
+              </a:cxn>
+            </a:cxnLst>
+            <a:rect l="l" t="t" r="r" b="b"/>
+            <a:pathLst>
+              <a:path w="431514" h="328773">
+                <a:moveTo>
+                  <a:pt x="431514" y="0"/>
+                </a:moveTo>
+                <a:lnTo>
+                  <a:pt x="431514" y="61644"/>
+                </a:lnTo>
+                <a:lnTo>
+                  <a:pt x="421240" y="184934"/>
+                </a:lnTo>
+                <a:lnTo>
+                  <a:pt x="0" y="174660"/>
+                </a:lnTo>
+                <a:lnTo>
+                  <a:pt x="0" y="328773"/>
+                </a:lnTo>
+              </a:path>
+            </a:pathLst>
+          </a:custGeom>
+        </p:spPr>
+        <p:style>
+          <a:lnRef idx="3">
+            <a:schemeClr val="accent1"/>
+          </a:lnRef>
+          <a:fillRef idx="0">
+            <a:schemeClr val="accent1"/>
+          </a:fillRef>
+          <a:effectRef idx="2">
+            <a:schemeClr val="accent1"/>
+          </a:effectRef>
+          <a:fontRef idx="minor">
+            <a:schemeClr val="tx1"/>
+          </a:fontRef>
+        </p:style>
+        <p:txBody>
+          <a:bodyPr rtlCol="0" anchor="ctr"/>
+          <a:lstStyle/>
+          <a:p>
+            <a:pPr algn="ctr"/>
+            <a:endParaRPr lang="en-US"/>
+          </a:p>
+        </p:txBody>
+      </p:sp>
+      <p:sp>
+        <p:nvSpPr>
+          <p:cNvPr id="56" name="Freeform: Shape 55">
+            <a:extLst>
+              <a:ext uri="{FF2B5EF4-FFF2-40B4-BE49-F238E27FC236}">
+                <a16:creationId xmlns:a16="http://schemas.microsoft.com/office/drawing/2014/main" id="{3E5DF044-51F9-D76C-8DFB-06ACAF8869A9}"/>
+              </a:ext>
+            </a:extLst>
+          </p:cNvPr>
+          <p:cNvSpPr/>
+          <p:nvPr/>
+        </p:nvSpPr>
+        <p:spPr>
+          <a:xfrm>
+            <a:off x="5270643" y="2393879"/>
+            <a:ext cx="431514" cy="0"/>
+          </a:xfrm>
+          <a:custGeom>
+            <a:avLst/>
+            <a:gdLst>
+              <a:gd name="csX0" fmla="*/ 0 w 431514"/>
+              <a:gd name="csY0" fmla="*/ 0 h 0"/>
+              <a:gd name="csX1" fmla="*/ 431514 w 431514"/>
+              <a:gd name="csY1" fmla="*/ 0 h 0"/>
+            </a:gdLst>
+            <a:ahLst/>
+            <a:cxnLst>
+              <a:cxn ang="0">
+                <a:pos x="csX0" y="csY0"/>
+              </a:cxn>
+              <a:cxn ang="0">
+                <a:pos x="csX1" y="csY1"/>
+              </a:cxn>
+            </a:cxnLst>
+            <a:rect l="l" t="t" r="r" b="b"/>
+            <a:pathLst>
+              <a:path w="431514">
+                <a:moveTo>
+                  <a:pt x="0" y="0"/>
+                </a:moveTo>
+                <a:lnTo>
+                  <a:pt x="431514" y="0"/>
+                </a:lnTo>
+              </a:path>
+            </a:pathLst>
+          </a:custGeom>
+        </p:spPr>
+        <p:style>
+          <a:lnRef idx="3">
+            <a:schemeClr val="accent1"/>
+          </a:lnRef>
+          <a:fillRef idx="0">
+            <a:schemeClr val="accent1"/>
+          </a:fillRef>
+          <a:effectRef idx="2">
+            <a:schemeClr val="accent1"/>
+          </a:effectRef>
+          <a:fontRef idx="minor">
+            <a:schemeClr val="tx1"/>
+          </a:fontRef>
+        </p:style>
+        <p:txBody>
+          <a:bodyPr rtlCol="0" anchor="ctr"/>
+          <a:lstStyle/>
+          <a:p>
+            <a:pPr algn="ctr"/>
+            <a:endParaRPr lang="en-US"/>
+          </a:p>
+        </p:txBody>
+      </p:sp>
+      <p:sp>
+        <p:nvSpPr>
+          <p:cNvPr id="57" name="Freeform: Shape 56">
+            <a:extLst>
+              <a:ext uri="{FF2B5EF4-FFF2-40B4-BE49-F238E27FC236}">
+                <a16:creationId xmlns:a16="http://schemas.microsoft.com/office/drawing/2014/main" id="{308C5643-CA4C-A089-C73B-505754B61036}"/>
+              </a:ext>
+            </a:extLst>
+          </p:cNvPr>
+          <p:cNvSpPr/>
+          <p:nvPr/>
+        </p:nvSpPr>
+        <p:spPr>
+          <a:xfrm>
+            <a:off x="4941870" y="2578813"/>
+            <a:ext cx="2147299" cy="852756"/>
+          </a:xfrm>
+          <a:custGeom>
+            <a:avLst/>
+            <a:gdLst>
+              <a:gd name="csX0" fmla="*/ 2147299 w 2147299"/>
+              <a:gd name="csY0" fmla="*/ 852756 h 852756"/>
+              <a:gd name="csX1" fmla="*/ 2147299 w 2147299"/>
+              <a:gd name="csY1" fmla="*/ 102742 h 852756"/>
+              <a:gd name="csX2" fmla="*/ 0 w 2147299"/>
+              <a:gd name="csY2" fmla="*/ 102742 h 852756"/>
+              <a:gd name="csX3" fmla="*/ 10274 w 2147299"/>
+              <a:gd name="csY3" fmla="*/ 0 h 852756"/>
+            </a:gdLst>
+            <a:ahLst/>
+            <a:cxnLst>
+              <a:cxn ang="0">
+                <a:pos x="csX0" y="csY0"/>
+              </a:cxn>
+              <a:cxn ang="0">
+                <a:pos x="csX1" y="csY1"/>
+              </a:cxn>
+              <a:cxn ang="0">
+                <a:pos x="csX2" y="csY2"/>
+              </a:cxn>
+              <a:cxn ang="0">
+                <a:pos x="csX3" y="csY3"/>
+              </a:cxn>
+            </a:cxnLst>
+            <a:rect l="l" t="t" r="r" b="b"/>
+            <a:pathLst>
+              <a:path w="2147299" h="852756">
+                <a:moveTo>
+                  <a:pt x="2147299" y="852756"/>
+                </a:moveTo>
+                <a:lnTo>
+                  <a:pt x="2147299" y="102742"/>
+                </a:lnTo>
+                <a:lnTo>
+                  <a:pt x="0" y="102742"/>
+                </a:lnTo>
+                <a:lnTo>
+                  <a:pt x="10274" y="0"/>
+                </a:lnTo>
+              </a:path>
+            </a:pathLst>
+          </a:custGeom>
+        </p:spPr>
+        <p:style>
+          <a:lnRef idx="3">
+            <a:schemeClr val="accent1"/>
+          </a:lnRef>
+          <a:fillRef idx="0">
+            <a:schemeClr val="accent1"/>
+          </a:fillRef>
+          <a:effectRef idx="2">
+            <a:schemeClr val="accent1"/>
+          </a:effectRef>
+          <a:fontRef idx="minor">
+            <a:schemeClr val="tx1"/>
+          </a:fontRef>
+        </p:style>
+        <p:txBody>
+          <a:bodyPr rtlCol="0" anchor="ctr"/>
+          <a:lstStyle/>
+          <a:p>
+            <a:pPr algn="ctr"/>
+            <a:endParaRPr lang="en-US"/>
+          </a:p>
+        </p:txBody>
+      </p:sp>
+      <p:sp>
+        <p:nvSpPr>
+          <p:cNvPr id="58" name="Freeform: Shape 57">
+            <a:extLst>
+              <a:ext uri="{FF2B5EF4-FFF2-40B4-BE49-F238E27FC236}">
+                <a16:creationId xmlns:a16="http://schemas.microsoft.com/office/drawing/2014/main" id="{857CEAE1-D934-C58C-4B81-CDA7F954AD21}"/>
+              </a:ext>
+            </a:extLst>
+          </p:cNvPr>
+          <p:cNvSpPr/>
+          <p:nvPr/>
+        </p:nvSpPr>
+        <p:spPr>
+          <a:xfrm>
+            <a:off x="6554912" y="1941816"/>
+            <a:ext cx="554805" cy="0"/>
+          </a:xfrm>
+          <a:custGeom>
+            <a:avLst/>
+            <a:gdLst>
+              <a:gd name="csX0" fmla="*/ 0 w 554805"/>
+              <a:gd name="csY0" fmla="*/ 0 h 0"/>
+              <a:gd name="csX1" fmla="*/ 554805 w 554805"/>
+              <a:gd name="csY1" fmla="*/ 0 h 0"/>
+            </a:gdLst>
+            <a:ahLst/>
+            <a:cxnLst>
+              <a:cxn ang="0">
+                <a:pos x="csX0" y="csY0"/>
+              </a:cxn>
+              <a:cxn ang="0">
+                <a:pos x="csX1" y="csY1"/>
+              </a:cxn>
+            </a:cxnLst>
+            <a:rect l="l" t="t" r="r" b="b"/>
+            <a:pathLst>
+              <a:path w="554805">
+                <a:moveTo>
+                  <a:pt x="0" y="0"/>
+                </a:moveTo>
+                <a:lnTo>
+                  <a:pt x="554805" y="0"/>
+                </a:lnTo>
+              </a:path>
+            </a:pathLst>
+          </a:custGeom>
+        </p:spPr>
+        <p:style>
+          <a:lnRef idx="3">
+            <a:schemeClr val="accent1"/>
+          </a:lnRef>
+          <a:fillRef idx="0">
+            <a:schemeClr val="accent1"/>
+          </a:fillRef>
+          <a:effectRef idx="2">
+            <a:schemeClr val="accent1"/>
+          </a:effectRef>
+          <a:fontRef idx="minor">
+            <a:schemeClr val="tx1"/>
+          </a:fontRef>
+        </p:style>
+        <p:txBody>
+          <a:bodyPr rtlCol="0" anchor="ctr"/>
+          <a:lstStyle/>
+          <a:p>
+            <a:pPr algn="ctr"/>
+            <a:endParaRPr lang="en-US"/>
+          </a:p>
+        </p:txBody>
+      </p:sp>
+      <p:sp>
+        <p:nvSpPr>
+          <p:cNvPr id="59" name="Freeform: Shape 58">
+            <a:extLst>
+              <a:ext uri="{FF2B5EF4-FFF2-40B4-BE49-F238E27FC236}">
+                <a16:creationId xmlns:a16="http://schemas.microsoft.com/office/drawing/2014/main" id="{BED2A2F6-A3F5-9C9D-9DCB-77ED0EE1018A}"/>
+              </a:ext>
+            </a:extLst>
+          </p:cNvPr>
+          <p:cNvSpPr/>
+          <p:nvPr/>
+        </p:nvSpPr>
+        <p:spPr>
+          <a:xfrm>
+            <a:off x="4941870" y="431515"/>
+            <a:ext cx="0" cy="390418"/>
+          </a:xfrm>
+          <a:custGeom>
+            <a:avLst/>
+            <a:gdLst>
+              <a:gd name="csX0" fmla="*/ 0 w 0"/>
+              <a:gd name="csY0" fmla="*/ 390418 h 390418"/>
+              <a:gd name="csX1" fmla="*/ 0 w 0"/>
+              <a:gd name="csY1" fmla="*/ 0 h 390418"/>
+            </a:gdLst>
+            <a:ahLst/>
+            <a:cxnLst>
+              <a:cxn ang="0">
+                <a:pos x="csX0" y="csY0"/>
+              </a:cxn>
+              <a:cxn ang="0">
+                <a:pos x="csX1" y="csY1"/>
+              </a:cxn>
+            </a:cxnLst>
+            <a:rect l="l" t="t" r="r" b="b"/>
+            <a:pathLst>
+              <a:path h="390418">
+                <a:moveTo>
+                  <a:pt x="0" y="390418"/>
+                </a:moveTo>
+                <a:lnTo>
+                  <a:pt x="0" y="0"/>
+                </a:lnTo>
+              </a:path>
+            </a:pathLst>
+          </a:custGeom>
+        </p:spPr>
+        <p:style>
+          <a:lnRef idx="3">
+            <a:schemeClr val="accent1"/>
+          </a:lnRef>
+          <a:fillRef idx="0">
+            <a:schemeClr val="accent1"/>
+          </a:fillRef>
+          <a:effectRef idx="2">
+            <a:schemeClr val="accent1"/>
+          </a:effectRef>
+          <a:fontRef idx="minor">
+            <a:schemeClr val="tx1"/>
+          </a:fontRef>
+        </p:style>
+        <p:txBody>
+          <a:bodyPr rtlCol="0" anchor="ctr"/>
+          <a:lstStyle/>
+          <a:p>
+            <a:pPr algn="ctr"/>
+            <a:endParaRPr lang="en-US"/>
+          </a:p>
+        </p:txBody>
+      </p:sp>
+      <p:sp>
+        <p:nvSpPr>
+          <p:cNvPr id="60" name="Freeform: Shape 59">
+            <a:extLst>
+              <a:ext uri="{FF2B5EF4-FFF2-40B4-BE49-F238E27FC236}">
+                <a16:creationId xmlns:a16="http://schemas.microsoft.com/office/drawing/2014/main" id="{69D2AA50-2C7D-F215-1CD2-0A8C9CA40677}"/>
+              </a:ext>
+            </a:extLst>
+          </p:cNvPr>
+          <p:cNvSpPr/>
+          <p:nvPr/>
+        </p:nvSpPr>
+        <p:spPr>
+          <a:xfrm>
+            <a:off x="3750067" y="246420"/>
+            <a:ext cx="873304" cy="10434"/>
+          </a:xfrm>
+          <a:custGeom>
+            <a:avLst/>
+            <a:gdLst>
+              <a:gd name="csX0" fmla="*/ 0 w 873304"/>
+              <a:gd name="csY0" fmla="*/ 10434 h 10434"/>
+              <a:gd name="csX1" fmla="*/ 0 w 873304"/>
+              <a:gd name="csY1" fmla="*/ 10434 h 10434"/>
+              <a:gd name="csX2" fmla="*/ 154113 w 873304"/>
+              <a:gd name="csY2" fmla="*/ 160 h 10434"/>
+              <a:gd name="csX3" fmla="*/ 873304 w 873304"/>
+              <a:gd name="csY3" fmla="*/ 160 h 10434"/>
+            </a:gdLst>
+            <a:ahLst/>
+            <a:cxnLst>
+              <a:cxn ang="0">
+                <a:pos x="csX0" y="csY0"/>
+              </a:cxn>
+              <a:cxn ang="0">
+                <a:pos x="csX1" y="csY1"/>
+              </a:cxn>
+              <a:cxn ang="0">
+                <a:pos x="csX2" y="csY2"/>
+              </a:cxn>
+              <a:cxn ang="0">
+                <a:pos x="csX3" y="csY3"/>
+              </a:cxn>
+            </a:cxnLst>
+            <a:rect l="l" t="t" r="r" b="b"/>
+            <a:pathLst>
+              <a:path w="873304" h="10434">
+                <a:moveTo>
+                  <a:pt x="0" y="10434"/>
+                </a:moveTo>
+                <a:lnTo>
+                  <a:pt x="0" y="10434"/>
+                </a:lnTo>
+                <a:cubicBezTo>
+                  <a:pt x="112891" y="-2109"/>
+                  <a:pt x="61456" y="160"/>
+                  <a:pt x="154113" y="160"/>
+                </a:cubicBezTo>
+                <a:lnTo>
+                  <a:pt x="873304" y="160"/>
+                </a:lnTo>
+              </a:path>
+            </a:pathLst>
+          </a:custGeom>
+        </p:spPr>
+        <p:style>
+          <a:lnRef idx="3">
+            <a:schemeClr val="accent1"/>
+          </a:lnRef>
+          <a:fillRef idx="0">
+            <a:schemeClr val="accent1"/>
+          </a:fillRef>
+          <a:effectRef idx="2">
+            <a:schemeClr val="accent1"/>
+          </a:effectRef>
+          <a:fontRef idx="minor">
+            <a:schemeClr val="tx1"/>
+          </a:fontRef>
+        </p:style>
+        <p:txBody>
+          <a:bodyPr rtlCol="0" anchor="ctr"/>
+          <a:lstStyle/>
+          <a:p>
+            <a:pPr algn="ctr"/>
+            <a:endParaRPr lang="en-US"/>
+          </a:p>
+        </p:txBody>
+      </p:sp>
+      <p:sp>
+        <p:nvSpPr>
+          <p:cNvPr id="61" name="Freeform: Shape 60">
+            <a:extLst>
+              <a:ext uri="{FF2B5EF4-FFF2-40B4-BE49-F238E27FC236}">
+                <a16:creationId xmlns:a16="http://schemas.microsoft.com/office/drawing/2014/main" id="{CFA7F6A0-00E1-8D59-C76A-CD89AA39F01D}"/>
+              </a:ext>
+            </a:extLst>
+          </p:cNvPr>
+          <p:cNvSpPr/>
+          <p:nvPr/>
+        </p:nvSpPr>
+        <p:spPr>
+          <a:xfrm>
+            <a:off x="2989780" y="996593"/>
+            <a:ext cx="0" cy="205483"/>
+          </a:xfrm>
+          <a:custGeom>
+            <a:avLst/>
+            <a:gdLst>
+              <a:gd name="csX0" fmla="*/ 0 w 0"/>
+              <a:gd name="csY0" fmla="*/ 0 h 205483"/>
+              <a:gd name="csX1" fmla="*/ 0 w 0"/>
+              <a:gd name="csY1" fmla="*/ 205483 h 205483"/>
+            </a:gdLst>
+            <a:ahLst/>
+            <a:cxnLst>
+              <a:cxn ang="0">
+                <a:pos x="csX0" y="csY0"/>
+              </a:cxn>
+              <a:cxn ang="0">
+                <a:pos x="csX1" y="csY1"/>
+              </a:cxn>
+            </a:cxnLst>
+            <a:rect l="l" t="t" r="r" b="b"/>
+            <a:pathLst>
+              <a:path h="205483">
+                <a:moveTo>
+                  <a:pt x="0" y="0"/>
+                </a:moveTo>
+                <a:lnTo>
+                  <a:pt x="0" y="205483"/>
+                </a:lnTo>
+              </a:path>
+            </a:pathLst>
+          </a:custGeom>
+        </p:spPr>
+        <p:style>
+          <a:lnRef idx="3">
+            <a:schemeClr val="accent1"/>
+          </a:lnRef>
+          <a:fillRef idx="0">
+            <a:schemeClr val="accent1"/>
+          </a:fillRef>
+          <a:effectRef idx="2">
+            <a:schemeClr val="accent1"/>
+          </a:effectRef>
+          <a:fontRef idx="minor">
+            <a:schemeClr val="tx1"/>
+          </a:fontRef>
+        </p:style>
+        <p:txBody>
+          <a:bodyPr rtlCol="0" anchor="ctr"/>
+          <a:lstStyle/>
+          <a:p>
+            <a:pPr algn="ctr"/>
+            <a:endParaRPr lang="en-US"/>
+          </a:p>
+        </p:txBody>
+      </p:sp>
+      <p:sp>
+        <p:nvSpPr>
+          <p:cNvPr id="62" name="Freeform: Shape 61">
+            <a:extLst>
+              <a:ext uri="{FF2B5EF4-FFF2-40B4-BE49-F238E27FC236}">
+                <a16:creationId xmlns:a16="http://schemas.microsoft.com/office/drawing/2014/main" id="{53356E20-CCA5-5EE0-2341-83C156A0B7D9}"/>
+              </a:ext>
+            </a:extLst>
+          </p:cNvPr>
+          <p:cNvSpPr/>
+          <p:nvPr/>
+        </p:nvSpPr>
+        <p:spPr>
+          <a:xfrm>
+            <a:off x="2989780" y="256854"/>
+            <a:ext cx="102741" cy="426359"/>
+          </a:xfrm>
+          <a:custGeom>
+            <a:avLst/>
+            <a:gdLst>
+              <a:gd name="csX0" fmla="*/ 0 w 113016"/>
+              <a:gd name="csY0" fmla="*/ 421240 h 482885"/>
+              <a:gd name="csX1" fmla="*/ 0 w 113016"/>
+              <a:gd name="csY1" fmla="*/ 482885 h 482885"/>
+              <a:gd name="csX2" fmla="*/ 10274 w 113016"/>
+              <a:gd name="csY2" fmla="*/ 0 h 482885"/>
+              <a:gd name="csX3" fmla="*/ 113016 w 113016"/>
+              <a:gd name="csY3" fmla="*/ 0 h 482885"/>
+            </a:gdLst>
+            <a:ahLst/>
+            <a:cxnLst>
+              <a:cxn ang="0">
+                <a:pos x="csX0" y="csY0"/>
+              </a:cxn>
+              <a:cxn ang="0">
+                <a:pos x="csX1" y="csY1"/>
+              </a:cxn>
+              <a:cxn ang="0">
+                <a:pos x="csX2" y="csY2"/>
+              </a:cxn>
+              <a:cxn ang="0">
+                <a:pos x="csX3" y="csY3"/>
+              </a:cxn>
+            </a:cxnLst>
+            <a:rect l="l" t="t" r="r" b="b"/>
+            <a:pathLst>
+              <a:path w="113016" h="482885">
+                <a:moveTo>
+                  <a:pt x="0" y="421240"/>
+                </a:moveTo>
+                <a:lnTo>
+                  <a:pt x="0" y="482885"/>
+                </a:lnTo>
+                <a:lnTo>
+                  <a:pt x="10274" y="0"/>
+                </a:lnTo>
+                <a:lnTo>
+                  <a:pt x="113016" y="0"/>
+                </a:lnTo>
+              </a:path>
+            </a:pathLst>
+          </a:custGeom>
+        </p:spPr>
+        <p:style>
+          <a:lnRef idx="3">
+            <a:schemeClr val="accent1"/>
+          </a:lnRef>
+          <a:fillRef idx="0">
+            <a:schemeClr val="accent1"/>
+          </a:fillRef>
+          <a:effectRef idx="2">
+            <a:schemeClr val="accent1"/>
+          </a:effectRef>
+          <a:fontRef idx="minor">
+            <a:schemeClr val="tx1"/>
+          </a:fontRef>
+        </p:style>
+        <p:txBody>
+          <a:bodyPr rtlCol="0" anchor="ctr"/>
+          <a:lstStyle/>
+          <a:p>
+            <a:pPr algn="ctr"/>
+            <a:r>
+              <a:rPr lang="en-US" altLang="zh-CN" dirty="0"/>
+              <a:t>·</a:t>
+            </a:r>
+            <a:endParaRPr lang="en-US" dirty="0"/>
+          </a:p>
+        </p:txBody>
+      </p:sp>
+      <p:sp>
+        <p:nvSpPr>
+          <p:cNvPr id="63" name="Freeform: Shape 62">
+            <a:extLst>
+              <a:ext uri="{FF2B5EF4-FFF2-40B4-BE49-F238E27FC236}">
+                <a16:creationId xmlns:a16="http://schemas.microsoft.com/office/drawing/2014/main" id="{F99969C9-E4A9-438B-9511-A3DCBEBAB3D2}"/>
+              </a:ext>
+            </a:extLst>
+          </p:cNvPr>
+          <p:cNvSpPr/>
+          <p:nvPr/>
+        </p:nvSpPr>
+        <p:spPr>
+          <a:xfrm>
+            <a:off x="5239820" y="1068512"/>
+            <a:ext cx="1027416" cy="739740"/>
+          </a:xfrm>
+          <a:custGeom>
+            <a:avLst/>
+            <a:gdLst>
+              <a:gd name="csX0" fmla="*/ 0 w 1027416"/>
+              <a:gd name="csY0" fmla="*/ 0 h 739740"/>
+              <a:gd name="csX1" fmla="*/ 1027416 w 1027416"/>
+              <a:gd name="csY1" fmla="*/ 739740 h 739740"/>
+            </a:gdLst>
+            <a:ahLst/>
+            <a:cxnLst>
+              <a:cxn ang="0">
+                <a:pos x="csX0" y="csY0"/>
+              </a:cxn>
+              <a:cxn ang="0">
+                <a:pos x="csX1" y="csY1"/>
+              </a:cxn>
+            </a:cxnLst>
+            <a:rect l="l" t="t" r="r" b="b"/>
+            <a:pathLst>
+              <a:path w="1027416" h="739740">
+                <a:moveTo>
+                  <a:pt x="0" y="0"/>
+                </a:moveTo>
+                <a:lnTo>
+                  <a:pt x="1027416" y="739740"/>
+                </a:lnTo>
+              </a:path>
+            </a:pathLst>
+          </a:custGeom>
+        </p:spPr>
+        <p:style>
+          <a:lnRef idx="3">
+            <a:schemeClr val="accent1"/>
+          </a:lnRef>
+          <a:fillRef idx="0">
+            <a:schemeClr val="accent1"/>
+          </a:fillRef>
+          <a:effectRef idx="2">
+            <a:schemeClr val="accent1"/>
+          </a:effectRef>
+          <a:fontRef idx="minor">
+            <a:schemeClr val="tx1"/>
+          </a:fontRef>
+        </p:style>
+        <p:txBody>
+          <a:bodyPr rtlCol="0" anchor="ctr"/>
+          <a:lstStyle/>
+          <a:p>
+            <a:pPr algn="ctr"/>
+            <a:endParaRPr lang="en-US"/>
+          </a:p>
+        </p:txBody>
+      </p:sp>
+      <p:sp>
+        <p:nvSpPr>
+          <p:cNvPr id="64" name="Freeform: Shape 63">
+            <a:extLst>
+              <a:ext uri="{FF2B5EF4-FFF2-40B4-BE49-F238E27FC236}">
+                <a16:creationId xmlns:a16="http://schemas.microsoft.com/office/drawing/2014/main" id="{74CEA05C-B1CC-8746-ACA8-4A87564A0B1A}"/>
+              </a:ext>
+            </a:extLst>
+          </p:cNvPr>
+          <p:cNvSpPr/>
+          <p:nvPr/>
+        </p:nvSpPr>
+        <p:spPr>
+          <a:xfrm>
+            <a:off x="4941870" y="1181528"/>
+            <a:ext cx="0" cy="400692"/>
+          </a:xfrm>
+          <a:custGeom>
+            <a:avLst/>
+            <a:gdLst>
+              <a:gd name="csX0" fmla="*/ 0 w 0"/>
+              <a:gd name="csY0" fmla="*/ 0 h 400692"/>
+              <a:gd name="csX1" fmla="*/ 0 w 0"/>
+              <a:gd name="csY1" fmla="*/ 400692 h 400692"/>
+            </a:gdLst>
+            <a:ahLst/>
+            <a:cxnLst>
+              <a:cxn ang="0">
+                <a:pos x="csX0" y="csY0"/>
+              </a:cxn>
+              <a:cxn ang="0">
+                <a:pos x="csX1" y="csY1"/>
+              </a:cxn>
+            </a:cxnLst>
+            <a:rect l="l" t="t" r="r" b="b"/>
+            <a:pathLst>
+              <a:path h="400692">
+                <a:moveTo>
+                  <a:pt x="0" y="0"/>
+                </a:moveTo>
+                <a:lnTo>
+                  <a:pt x="0" y="400692"/>
+                </a:lnTo>
+              </a:path>
+            </a:pathLst>
+          </a:custGeom>
+        </p:spPr>
+        <p:style>
+          <a:lnRef idx="3">
+            <a:schemeClr val="accent1"/>
+          </a:lnRef>
+          <a:fillRef idx="0">
+            <a:schemeClr val="accent1"/>
+          </a:fillRef>
+          <a:effectRef idx="2">
+            <a:schemeClr val="accent1"/>
+          </a:effectRef>
+          <a:fontRef idx="minor">
+            <a:schemeClr val="tx1"/>
+          </a:fontRef>
+        </p:style>
+        <p:txBody>
+          <a:bodyPr rtlCol="0" anchor="ctr"/>
+          <a:lstStyle/>
+          <a:p>
+            <a:pPr algn="ctr"/>
+            <a:endParaRPr lang="en-US"/>
+          </a:p>
+        </p:txBody>
+      </p:sp>
+      <p:sp>
+        <p:nvSpPr>
+          <p:cNvPr id="65" name="Freeform: Shape 64">
+            <a:extLst>
+              <a:ext uri="{FF2B5EF4-FFF2-40B4-BE49-F238E27FC236}">
+                <a16:creationId xmlns:a16="http://schemas.microsoft.com/office/drawing/2014/main" id="{66A824B9-3305-F717-E460-E26228AD343A}"/>
+              </a:ext>
+            </a:extLst>
+          </p:cNvPr>
+          <p:cNvSpPr/>
+          <p:nvPr/>
+        </p:nvSpPr>
+        <p:spPr>
+          <a:xfrm>
+            <a:off x="4366517" y="1140431"/>
+            <a:ext cx="421240" cy="113016"/>
+          </a:xfrm>
+          <a:custGeom>
+            <a:avLst/>
+            <a:gdLst>
+              <a:gd name="csX0" fmla="*/ 421240 w 421240"/>
+              <a:gd name="csY0" fmla="*/ 0 h 113016"/>
+              <a:gd name="csX1" fmla="*/ 0 w 421240"/>
+              <a:gd name="csY1" fmla="*/ 113016 h 113016"/>
+            </a:gdLst>
+            <a:ahLst/>
+            <a:cxnLst>
+              <a:cxn ang="0">
+                <a:pos x="csX0" y="csY0"/>
+              </a:cxn>
+              <a:cxn ang="0">
+                <a:pos x="csX1" y="csY1"/>
+              </a:cxn>
+            </a:cxnLst>
+            <a:rect l="l" t="t" r="r" b="b"/>
+            <a:pathLst>
+              <a:path w="421240" h="113016">
+                <a:moveTo>
+                  <a:pt x="421240" y="0"/>
+                </a:moveTo>
+                <a:lnTo>
+                  <a:pt x="0" y="113016"/>
+                </a:lnTo>
+              </a:path>
+            </a:pathLst>
+          </a:custGeom>
+        </p:spPr>
+        <p:style>
+          <a:lnRef idx="3">
+            <a:schemeClr val="accent1"/>
+          </a:lnRef>
+          <a:fillRef idx="0">
+            <a:schemeClr val="accent1"/>
+          </a:fillRef>
+          <a:effectRef idx="2">
+            <a:schemeClr val="accent1"/>
+          </a:effectRef>
+          <a:fontRef idx="minor">
+            <a:schemeClr val="tx1"/>
+          </a:fontRef>
+        </p:style>
+        <p:txBody>
+          <a:bodyPr rtlCol="0" anchor="ctr"/>
+          <a:lstStyle/>
+          <a:p>
+            <a:pPr algn="ctr"/>
+            <a:endParaRPr lang="en-US"/>
+          </a:p>
+        </p:txBody>
+      </p:sp>
+      <p:sp>
+        <p:nvSpPr>
+          <p:cNvPr id="66" name="Freeform: Shape 65">
+            <a:extLst>
+              <a:ext uri="{FF2B5EF4-FFF2-40B4-BE49-F238E27FC236}">
+                <a16:creationId xmlns:a16="http://schemas.microsoft.com/office/drawing/2014/main" id="{B8398FA5-0A71-99E4-FFA9-4B259FCC33B7}"/>
+              </a:ext>
+            </a:extLst>
+          </p:cNvPr>
+          <p:cNvSpPr/>
+          <p:nvPr/>
+        </p:nvSpPr>
+        <p:spPr>
+          <a:xfrm>
+            <a:off x="5270643" y="1017142"/>
+            <a:ext cx="339047" cy="0"/>
+          </a:xfrm>
+          <a:custGeom>
+            <a:avLst/>
+            <a:gdLst>
+              <a:gd name="csX0" fmla="*/ 0 w 339047"/>
+              <a:gd name="csY0" fmla="*/ 0 h 0"/>
+              <a:gd name="csX1" fmla="*/ 339047 w 339047"/>
+              <a:gd name="csY1" fmla="*/ 0 h 0"/>
+            </a:gdLst>
+            <a:ahLst/>
+            <a:cxnLst>
+              <a:cxn ang="0">
+                <a:pos x="csX0" y="csY0"/>
+              </a:cxn>
+              <a:cxn ang="0">
+                <a:pos x="csX1" y="csY1"/>
+              </a:cxn>
+            </a:cxnLst>
+            <a:rect l="l" t="t" r="r" b="b"/>
+            <a:pathLst>
+              <a:path w="339047">
+                <a:moveTo>
+                  <a:pt x="0" y="0"/>
+                </a:moveTo>
+                <a:lnTo>
+                  <a:pt x="339047" y="0"/>
+                </a:lnTo>
+              </a:path>
+            </a:pathLst>
+          </a:custGeom>
+        </p:spPr>
+        <p:style>
+          <a:lnRef idx="3">
+            <a:schemeClr val="accent1"/>
+          </a:lnRef>
+          <a:fillRef idx="0">
+            <a:schemeClr val="accent1"/>
+          </a:fillRef>
+          <a:effectRef idx="2">
+            <a:schemeClr val="accent1"/>
+          </a:effectRef>
+          <a:fontRef idx="minor">
+            <a:schemeClr val="tx1"/>
+          </a:fontRef>
+        </p:style>
+        <p:txBody>
+          <a:bodyPr rtlCol="0" anchor="ctr"/>
+          <a:lstStyle/>
+          <a:p>
+            <a:pPr algn="ctr"/>
+            <a:endParaRPr lang="en-US"/>
+          </a:p>
+        </p:txBody>
+      </p:sp>
+      <p:sp>
+        <p:nvSpPr>
+          <p:cNvPr id="67" name="Freeform: Shape 66">
+            <a:extLst>
+              <a:ext uri="{FF2B5EF4-FFF2-40B4-BE49-F238E27FC236}">
+                <a16:creationId xmlns:a16="http://schemas.microsoft.com/office/drawing/2014/main" id="{4DC2762F-D248-6762-E902-D5CE07573FC5}"/>
+              </a:ext>
+            </a:extLst>
+          </p:cNvPr>
+          <p:cNvSpPr/>
+          <p:nvPr/>
+        </p:nvSpPr>
+        <p:spPr>
+          <a:xfrm>
+            <a:off x="6236413" y="996593"/>
+            <a:ext cx="328774" cy="0"/>
+          </a:xfrm>
+          <a:custGeom>
+            <a:avLst/>
+            <a:gdLst>
+              <a:gd name="csX0" fmla="*/ 0 w 328774"/>
+              <a:gd name="csY0" fmla="*/ 0 h 0"/>
+              <a:gd name="csX1" fmla="*/ 328774 w 328774"/>
+              <a:gd name="csY1" fmla="*/ 0 h 0"/>
+            </a:gdLst>
+            <a:ahLst/>
+            <a:cxnLst>
+              <a:cxn ang="0">
+                <a:pos x="csX0" y="csY0"/>
+              </a:cxn>
+              <a:cxn ang="0">
+                <a:pos x="csX1" y="csY1"/>
+              </a:cxn>
+            </a:cxnLst>
+            <a:rect l="l" t="t" r="r" b="b"/>
+            <a:pathLst>
+              <a:path w="328774">
+                <a:moveTo>
+                  <a:pt x="0" y="0"/>
+                </a:moveTo>
+                <a:lnTo>
+                  <a:pt x="328774" y="0"/>
+                </a:lnTo>
+              </a:path>
+            </a:pathLst>
+          </a:custGeom>
+        </p:spPr>
+        <p:style>
+          <a:lnRef idx="3">
+            <a:schemeClr val="accent1"/>
+          </a:lnRef>
+          <a:fillRef idx="0">
+            <a:schemeClr val="accent1"/>
+          </a:fillRef>
+          <a:effectRef idx="2">
+            <a:schemeClr val="accent1"/>
+          </a:effectRef>
+          <a:fontRef idx="minor">
+            <a:schemeClr val="tx1"/>
+          </a:fontRef>
+        </p:style>
+        <p:txBody>
+          <a:bodyPr rtlCol="0" anchor="ctr"/>
+          <a:lstStyle/>
+          <a:p>
+            <a:pPr algn="ctr"/>
+            <a:endParaRPr lang="en-US"/>
+          </a:p>
+        </p:txBody>
+      </p:sp>
+      <p:sp>
+        <p:nvSpPr>
+          <p:cNvPr id="4" name="Freeform: Shape 3">
+            <a:extLst>
+              <a:ext uri="{FF2B5EF4-FFF2-40B4-BE49-F238E27FC236}">
+                <a16:creationId xmlns:a16="http://schemas.microsoft.com/office/drawing/2014/main" id="{997DF462-F54A-4F71-DB92-C948495085DF}"/>
+              </a:ext>
+            </a:extLst>
+          </p:cNvPr>
+          <p:cNvSpPr/>
+          <p:nvPr/>
+        </p:nvSpPr>
+        <p:spPr>
+          <a:xfrm>
+            <a:off x="3648075" y="3009900"/>
+            <a:ext cx="4763" cy="442913"/>
+          </a:xfrm>
+          <a:custGeom>
+            <a:avLst/>
+            <a:gdLst>
+              <a:gd name="csX0" fmla="*/ 0 w 4763"/>
+              <a:gd name="csY0" fmla="*/ 0 h 442913"/>
+              <a:gd name="csX1" fmla="*/ 4763 w 4763"/>
+              <a:gd name="csY1" fmla="*/ 442913 h 442913"/>
+            </a:gdLst>
+            <a:ahLst/>
+            <a:cxnLst>
+              <a:cxn ang="0">
+                <a:pos x="csX0" y="csY0"/>
+              </a:cxn>
+              <a:cxn ang="0">
+                <a:pos x="csX1" y="csY1"/>
+              </a:cxn>
+            </a:cxnLst>
+            <a:rect l="l" t="t" r="r" b="b"/>
+            <a:pathLst>
+              <a:path w="4763" h="442913">
+                <a:moveTo>
+                  <a:pt x="0" y="0"/>
+                </a:moveTo>
+                <a:cubicBezTo>
+                  <a:pt x="1588" y="147638"/>
+                  <a:pt x="3175" y="295275"/>
+                  <a:pt x="4763" y="442913"/>
+                </a:cubicBezTo>
+              </a:path>
+            </a:pathLst>
+          </a:custGeom>
+        </p:spPr>
+        <p:style>
+          <a:lnRef idx="3">
+            <a:schemeClr val="accent1"/>
+          </a:lnRef>
+          <a:fillRef idx="0">
+            <a:schemeClr val="accent1"/>
+          </a:fillRef>
+          <a:effectRef idx="2">
+            <a:schemeClr val="accent1"/>
+          </a:effectRef>
+          <a:fontRef idx="minor">
+            <a:schemeClr val="tx1"/>
+          </a:fontRef>
+        </p:style>
+        <p:txBody>
+          <a:bodyPr rtlCol="0" anchor="ctr"/>
+          <a:lstStyle/>
+          <a:p>
+            <a:pPr algn="ctr"/>
+            <a:endParaRPr lang="en-US"/>
+          </a:p>
+        </p:txBody>
+      </p:sp>
+      <p:sp>
+        <p:nvSpPr>
+          <p:cNvPr id="7" name="Freeform: Shape 6">
+            <a:extLst>
+              <a:ext uri="{FF2B5EF4-FFF2-40B4-BE49-F238E27FC236}">
+                <a16:creationId xmlns:a16="http://schemas.microsoft.com/office/drawing/2014/main" id="{5A473EE8-E6BE-AE32-032B-8B97A02F3885}"/>
+              </a:ext>
+            </a:extLst>
+          </p:cNvPr>
+          <p:cNvSpPr/>
+          <p:nvPr/>
+        </p:nvSpPr>
+        <p:spPr>
+          <a:xfrm>
+            <a:off x="3810000" y="2414588"/>
+            <a:ext cx="809625" cy="1028700"/>
+          </a:xfrm>
+          <a:custGeom>
+            <a:avLst/>
+            <a:gdLst>
+              <a:gd name="csX0" fmla="*/ 809625 w 809625"/>
+              <a:gd name="csY0" fmla="*/ 0 h 1028700"/>
+              <a:gd name="csX1" fmla="*/ 261938 w 809625"/>
+              <a:gd name="csY1" fmla="*/ 0 h 1028700"/>
+              <a:gd name="csX2" fmla="*/ 261938 w 809625"/>
+              <a:gd name="csY2" fmla="*/ 866775 h 1028700"/>
+              <a:gd name="csX3" fmla="*/ 0 w 809625"/>
+              <a:gd name="csY3" fmla="*/ 866775 h 1028700"/>
+              <a:gd name="csX4" fmla="*/ 0 w 809625"/>
+              <a:gd name="csY4" fmla="*/ 1028700 h 1028700"/>
+            </a:gdLst>
+            <a:ahLst/>
+            <a:cxnLst>
+              <a:cxn ang="0">
+                <a:pos x="csX0" y="csY0"/>
+              </a:cxn>
+              <a:cxn ang="0">
+                <a:pos x="csX1" y="csY1"/>
+              </a:cxn>
+              <a:cxn ang="0">
+                <a:pos x="csX2" y="csY2"/>
+              </a:cxn>
+              <a:cxn ang="0">
+                <a:pos x="csX3" y="csY3"/>
+              </a:cxn>
+              <a:cxn ang="0">
+                <a:pos x="csX4" y="csY4"/>
+              </a:cxn>
+            </a:cxnLst>
+            <a:rect l="l" t="t" r="r" b="b"/>
+            <a:pathLst>
+              <a:path w="809625" h="1028700">
+                <a:moveTo>
+                  <a:pt x="809625" y="0"/>
+                </a:moveTo>
+                <a:lnTo>
+                  <a:pt x="261938" y="0"/>
+                </a:lnTo>
+                <a:lnTo>
+                  <a:pt x="261938" y="866775"/>
+                </a:lnTo>
+                <a:lnTo>
+                  <a:pt x="0" y="866775"/>
+                </a:lnTo>
+                <a:lnTo>
+                  <a:pt x="0" y="1028700"/>
+                </a:lnTo>
+              </a:path>
+            </a:pathLst>
+          </a:custGeom>
+        </p:spPr>
+        <p:style>
+          <a:lnRef idx="3">
+            <a:schemeClr val="accent1"/>
+          </a:lnRef>
+          <a:fillRef idx="0">
+            <a:schemeClr val="accent1"/>
+          </a:fillRef>
+          <a:effectRef idx="2">
+            <a:schemeClr val="accent1"/>
+          </a:effectRef>
+          <a:fontRef idx="minor">
+            <a:schemeClr val="tx1"/>
+          </a:fontRef>
+        </p:style>
+        <p:txBody>
+          <a:bodyPr rtlCol="0" anchor="ctr"/>
+          <a:lstStyle/>
+          <a:p>
+            <a:pPr algn="ctr"/>
+            <a:endParaRPr lang="en-US"/>
+          </a:p>
+        </p:txBody>
+      </p:sp>
+      <p:sp>
+        <p:nvSpPr>
+          <p:cNvPr id="9" name="Freeform: Shape 8">
+            <a:extLst>
+              <a:ext uri="{FF2B5EF4-FFF2-40B4-BE49-F238E27FC236}">
+                <a16:creationId xmlns:a16="http://schemas.microsoft.com/office/drawing/2014/main" id="{FCFB8CA4-ECA9-3721-ECA1-B3D6BC233FF7}"/>
+              </a:ext>
+            </a:extLst>
+          </p:cNvPr>
+          <p:cNvSpPr/>
+          <p:nvPr/>
+        </p:nvSpPr>
+        <p:spPr>
+          <a:xfrm>
+            <a:off x="3750067" y="1839074"/>
+            <a:ext cx="852755" cy="1623317"/>
+          </a:xfrm>
+          <a:custGeom>
+            <a:avLst/>
+            <a:gdLst>
+              <a:gd name="csX0" fmla="*/ 0 w 852755"/>
+              <a:gd name="csY0" fmla="*/ 1623317 h 1623317"/>
+              <a:gd name="csX1" fmla="*/ 852755 w 852755"/>
+              <a:gd name="csY1" fmla="*/ 0 h 1623317"/>
+            </a:gdLst>
+            <a:ahLst/>
+            <a:cxnLst>
+              <a:cxn ang="0">
+                <a:pos x="csX0" y="csY0"/>
+              </a:cxn>
+              <a:cxn ang="0">
+                <a:pos x="csX1" y="csY1"/>
+              </a:cxn>
+            </a:cxnLst>
+            <a:rect l="l" t="t" r="r" b="b"/>
+            <a:pathLst>
+              <a:path w="852755" h="1623317">
+                <a:moveTo>
+                  <a:pt x="0" y="1623317"/>
+                </a:moveTo>
+                <a:lnTo>
+                  <a:pt x="852755" y="0"/>
+                </a:lnTo>
+              </a:path>
+            </a:pathLst>
+          </a:custGeom>
+        </p:spPr>
+        <p:style>
+          <a:lnRef idx="3">
+            <a:schemeClr val="accent2"/>
+          </a:lnRef>
+          <a:fillRef idx="0">
+            <a:schemeClr val="accent2"/>
+          </a:fillRef>
+          <a:effectRef idx="2">
+            <a:schemeClr val="accent2"/>
+          </a:effectRef>
+          <a:fontRef idx="minor">
+            <a:schemeClr val="tx1"/>
+          </a:fontRef>
+        </p:style>
+        <p:txBody>
+          <a:bodyPr rtlCol="0" anchor="ctr"/>
+          <a:lstStyle/>
+          <a:p>
+            <a:pPr algn="ctr"/>
+            <a:endParaRPr lang="en-US"/>
+          </a:p>
+        </p:txBody>
+      </p:sp>
+      <p:sp>
+        <p:nvSpPr>
+          <p:cNvPr id="10" name="Freeform: Shape 9">
+            <a:extLst>
+              <a:ext uri="{FF2B5EF4-FFF2-40B4-BE49-F238E27FC236}">
+                <a16:creationId xmlns:a16="http://schemas.microsoft.com/office/drawing/2014/main" id="{CA1530D2-DE11-B08F-24F6-28D028CD790D}"/>
+              </a:ext>
+            </a:extLst>
+          </p:cNvPr>
+          <p:cNvSpPr/>
+          <p:nvPr/>
+        </p:nvSpPr>
+        <p:spPr>
+          <a:xfrm>
+            <a:off x="4952144" y="1150706"/>
+            <a:ext cx="821932" cy="1099334"/>
+          </a:xfrm>
+          <a:custGeom>
+            <a:avLst/>
+            <a:gdLst>
+              <a:gd name="csX0" fmla="*/ 0 w 821932"/>
+              <a:gd name="csY0" fmla="*/ 1099334 h 1099334"/>
+              <a:gd name="csX1" fmla="*/ 821932 w 821932"/>
+              <a:gd name="csY1" fmla="*/ 0 h 1099334"/>
+            </a:gdLst>
+            <a:ahLst/>
+            <a:cxnLst>
+              <a:cxn ang="0">
+                <a:pos x="csX0" y="csY0"/>
+              </a:cxn>
+              <a:cxn ang="0">
+                <a:pos x="csX1" y="csY1"/>
+              </a:cxn>
+            </a:cxnLst>
+            <a:rect l="l" t="t" r="r" b="b"/>
+            <a:pathLst>
+              <a:path w="821932" h="1099334">
+                <a:moveTo>
+                  <a:pt x="0" y="1099334"/>
+                </a:moveTo>
+                <a:lnTo>
+                  <a:pt x="821932" y="0"/>
+                </a:lnTo>
+              </a:path>
+            </a:pathLst>
+          </a:custGeom>
+        </p:spPr>
+        <p:style>
+          <a:lnRef idx="3">
+            <a:schemeClr val="accent2"/>
+          </a:lnRef>
+          <a:fillRef idx="0">
+            <a:schemeClr val="accent2"/>
+          </a:fillRef>
+          <a:effectRef idx="2">
+            <a:schemeClr val="accent2"/>
+          </a:effectRef>
+          <a:fontRef idx="minor">
+            <a:schemeClr val="tx1"/>
+          </a:fontRef>
+        </p:style>
+        <p:txBody>
+          <a:bodyPr rtlCol="0" anchor="ctr"/>
+          <a:lstStyle/>
+          <a:p>
+            <a:pPr algn="ctr"/>
+            <a:endParaRPr lang="en-US"/>
+          </a:p>
+        </p:txBody>
+      </p:sp>
+      <p:sp>
+        <p:nvSpPr>
+          <p:cNvPr id="11" name="Freeform: Shape 10">
+            <a:extLst>
+              <a:ext uri="{FF2B5EF4-FFF2-40B4-BE49-F238E27FC236}">
+                <a16:creationId xmlns:a16="http://schemas.microsoft.com/office/drawing/2014/main" id="{8B0EAD3A-A2B5-1060-8EA2-27BECB02CECC}"/>
+              </a:ext>
+            </a:extLst>
+          </p:cNvPr>
+          <p:cNvSpPr/>
+          <p:nvPr/>
+        </p:nvSpPr>
+        <p:spPr>
+          <a:xfrm>
+            <a:off x="5167901" y="1150706"/>
+            <a:ext cx="678095" cy="1130157"/>
+          </a:xfrm>
+          <a:custGeom>
+            <a:avLst/>
+            <a:gdLst>
+              <a:gd name="csX0" fmla="*/ 678095 w 678095"/>
+              <a:gd name="csY0" fmla="*/ 1130157 h 1130157"/>
+              <a:gd name="csX1" fmla="*/ 0 w 678095"/>
+              <a:gd name="csY1" fmla="*/ 0 h 1130157"/>
+            </a:gdLst>
+            <a:ahLst/>
+            <a:cxnLst>
+              <a:cxn ang="0">
+                <a:pos x="csX0" y="csY0"/>
+              </a:cxn>
+              <a:cxn ang="0">
+                <a:pos x="csX1" y="csY1"/>
+              </a:cxn>
+            </a:cxnLst>
+            <a:rect l="l" t="t" r="r" b="b"/>
+            <a:pathLst>
+              <a:path w="678095" h="1130157">
+                <a:moveTo>
+                  <a:pt x="678095" y="1130157"/>
+                </a:moveTo>
+                <a:lnTo>
+                  <a:pt x="0" y="0"/>
+                </a:lnTo>
+              </a:path>
+            </a:pathLst>
+          </a:custGeom>
+        </p:spPr>
+        <p:style>
+          <a:lnRef idx="3">
+            <a:schemeClr val="accent2"/>
+          </a:lnRef>
+          <a:fillRef idx="0">
+            <a:schemeClr val="accent2"/>
+          </a:fillRef>
+          <a:effectRef idx="2">
+            <a:schemeClr val="accent2"/>
+          </a:effectRef>
+          <a:fontRef idx="minor">
+            <a:schemeClr val="tx1"/>
+          </a:fontRef>
+        </p:style>
+        <p:txBody>
+          <a:bodyPr rtlCol="0" anchor="ctr"/>
+          <a:lstStyle/>
+          <a:p>
+            <a:pPr algn="ctr"/>
+            <a:endParaRPr lang="en-US"/>
+          </a:p>
+        </p:txBody>
+      </p:sp>
+      <p:sp>
+        <p:nvSpPr>
+          <p:cNvPr id="12" name="Freeform: Shape 11">
+            <a:extLst>
+              <a:ext uri="{FF2B5EF4-FFF2-40B4-BE49-F238E27FC236}">
+                <a16:creationId xmlns:a16="http://schemas.microsoft.com/office/drawing/2014/main" id="{A1AFA2DE-B403-D75D-EA02-B8215394D174}"/>
+              </a:ext>
+            </a:extLst>
+          </p:cNvPr>
+          <p:cNvSpPr/>
+          <p:nvPr/>
+        </p:nvSpPr>
+        <p:spPr>
+          <a:xfrm>
+            <a:off x="5876819" y="1160980"/>
+            <a:ext cx="10274" cy="1150705"/>
+          </a:xfrm>
+          <a:custGeom>
+            <a:avLst/>
+            <a:gdLst>
+              <a:gd name="csX0" fmla="*/ 0 w 10274"/>
+              <a:gd name="csY0" fmla="*/ 1150705 h 1150705"/>
+              <a:gd name="csX1" fmla="*/ 10274 w 10274"/>
+              <a:gd name="csY1" fmla="*/ 0 h 1150705"/>
+            </a:gdLst>
+            <a:ahLst/>
+            <a:cxnLst>
+              <a:cxn ang="0">
+                <a:pos x="csX0" y="csY0"/>
+              </a:cxn>
+              <a:cxn ang="0">
+                <a:pos x="csX1" y="csY1"/>
+              </a:cxn>
+            </a:cxnLst>
+            <a:rect l="l" t="t" r="r" b="b"/>
+            <a:pathLst>
+              <a:path w="10274" h="1150705">
+                <a:moveTo>
+                  <a:pt x="0" y="1150705"/>
+                </a:moveTo>
+                <a:cubicBezTo>
+                  <a:pt x="3425" y="767137"/>
+                  <a:pt x="6849" y="383568"/>
+                  <a:pt x="10274" y="0"/>
+                </a:cubicBezTo>
+              </a:path>
+            </a:pathLst>
+          </a:custGeom>
+        </p:spPr>
+        <p:style>
+          <a:lnRef idx="3">
+            <a:schemeClr val="accent2"/>
+          </a:lnRef>
+          <a:fillRef idx="0">
+            <a:schemeClr val="accent2"/>
+          </a:fillRef>
+          <a:effectRef idx="2">
+            <a:schemeClr val="accent2"/>
+          </a:effectRef>
+          <a:fontRef idx="minor">
+            <a:schemeClr val="tx1"/>
+          </a:fontRef>
+        </p:style>
+        <p:txBody>
+          <a:bodyPr rtlCol="0" anchor="ctr"/>
+          <a:lstStyle/>
+          <a:p>
+            <a:pPr algn="ctr"/>
+            <a:endParaRPr lang="en-US"/>
+          </a:p>
+        </p:txBody>
+      </p:sp>
+      <p:sp>
+        <p:nvSpPr>
+          <p:cNvPr id="13" name="Freeform: Shape 12">
+            <a:extLst>
+              <a:ext uri="{FF2B5EF4-FFF2-40B4-BE49-F238E27FC236}">
+                <a16:creationId xmlns:a16="http://schemas.microsoft.com/office/drawing/2014/main" id="{6ACFC45A-FA8A-8DA6-56D2-5BDD5E33D12E}"/>
+              </a:ext>
+            </a:extLst>
+          </p:cNvPr>
+          <p:cNvSpPr/>
+          <p:nvPr/>
+        </p:nvSpPr>
+        <p:spPr>
+          <a:xfrm>
+            <a:off x="6082301" y="1160980"/>
+            <a:ext cx="832207" cy="2311685"/>
+          </a:xfrm>
+          <a:custGeom>
+            <a:avLst/>
+            <a:gdLst>
+              <a:gd name="csX0" fmla="*/ 832207 w 832207"/>
+              <a:gd name="csY0" fmla="*/ 2311685 h 2311685"/>
+              <a:gd name="csX1" fmla="*/ 0 w 832207"/>
+              <a:gd name="csY1" fmla="*/ 0 h 2311685"/>
+            </a:gdLst>
+            <a:ahLst/>
+            <a:cxnLst>
+              <a:cxn ang="0">
+                <a:pos x="csX0" y="csY0"/>
+              </a:cxn>
+              <a:cxn ang="0">
+                <a:pos x="csX1" y="csY1"/>
+              </a:cxn>
+            </a:cxnLst>
+            <a:rect l="l" t="t" r="r" b="b"/>
+            <a:pathLst>
+              <a:path w="832207" h="2311685">
+                <a:moveTo>
+                  <a:pt x="832207" y="2311685"/>
+                </a:moveTo>
+                <a:lnTo>
+                  <a:pt x="0" y="0"/>
+                </a:lnTo>
+              </a:path>
+            </a:pathLst>
+          </a:custGeom>
+        </p:spPr>
+        <p:style>
+          <a:lnRef idx="3">
+            <a:schemeClr val="accent2"/>
+          </a:lnRef>
+          <a:fillRef idx="0">
+            <a:schemeClr val="accent2"/>
+          </a:fillRef>
+          <a:effectRef idx="2">
+            <a:schemeClr val="accent2"/>
+          </a:effectRef>
+          <a:fontRef idx="minor">
+            <a:schemeClr val="tx1"/>
+          </a:fontRef>
+        </p:style>
+        <p:txBody>
+          <a:bodyPr rtlCol="0" anchor="ctr"/>
+          <a:lstStyle/>
+          <a:p>
+            <a:pPr algn="ctr"/>
+            <a:endParaRPr lang="en-US"/>
+          </a:p>
+        </p:txBody>
+      </p:sp>
+      <p:sp>
+        <p:nvSpPr>
+          <p:cNvPr id="2" name="Freeform: Shape 1">
+            <a:extLst>
+              <a:ext uri="{FF2B5EF4-FFF2-40B4-BE49-F238E27FC236}">
+                <a16:creationId xmlns:a16="http://schemas.microsoft.com/office/drawing/2014/main" id="{AD745F1F-0126-1CC7-2104-A997041C1CD8}"/>
+              </a:ext>
+            </a:extLst>
+          </p:cNvPr>
+          <p:cNvSpPr/>
+          <p:nvPr/>
+        </p:nvSpPr>
+        <p:spPr>
+          <a:xfrm>
+            <a:off x="5105400" y="2571750"/>
+            <a:ext cx="762000" cy="848623"/>
+          </a:xfrm>
+          <a:custGeom>
+            <a:avLst/>
+            <a:gdLst>
+              <a:gd name="csX0" fmla="*/ 762000 w 762000"/>
+              <a:gd name="csY0" fmla="*/ 0 h 863600"/>
+              <a:gd name="csX1" fmla="*/ 762000 w 762000"/>
+              <a:gd name="csY1" fmla="*/ 273050 h 863600"/>
+              <a:gd name="csX2" fmla="*/ 0 w 762000"/>
+              <a:gd name="csY2" fmla="*/ 279400 h 863600"/>
+              <a:gd name="csX3" fmla="*/ 0 w 762000"/>
+              <a:gd name="csY3" fmla="*/ 863600 h 863600"/>
+            </a:gdLst>
+            <a:ahLst/>
+            <a:cxnLst>
+              <a:cxn ang="0">
+                <a:pos x="csX0" y="csY0"/>
+              </a:cxn>
+              <a:cxn ang="0">
+                <a:pos x="csX1" y="csY1"/>
+              </a:cxn>
+              <a:cxn ang="0">
+                <a:pos x="csX2" y="csY2"/>
+              </a:cxn>
+              <a:cxn ang="0">
+                <a:pos x="csX3" y="csY3"/>
+              </a:cxn>
+            </a:cxnLst>
+            <a:rect l="l" t="t" r="r" b="b"/>
+            <a:pathLst>
+              <a:path w="762000" h="863600">
+                <a:moveTo>
+                  <a:pt x="762000" y="0"/>
+                </a:moveTo>
+                <a:lnTo>
+                  <a:pt x="762000" y="273050"/>
+                </a:lnTo>
+                <a:lnTo>
+                  <a:pt x="0" y="279400"/>
+                </a:lnTo>
+                <a:lnTo>
+                  <a:pt x="0" y="863600"/>
+                </a:lnTo>
+              </a:path>
+            </a:pathLst>
+          </a:custGeom>
+        </p:spPr>
+        <p:style>
+          <a:lnRef idx="3">
+            <a:schemeClr val="accent1"/>
+          </a:lnRef>
+          <a:fillRef idx="0">
+            <a:schemeClr val="accent1"/>
+          </a:fillRef>
+          <a:effectRef idx="2">
+            <a:schemeClr val="accent1"/>
+          </a:effectRef>
+          <a:fontRef idx="minor">
+            <a:schemeClr val="tx1"/>
+          </a:fontRef>
+        </p:style>
+        <p:txBody>
+          <a:bodyPr rtlCol="0" anchor="ctr"/>
+          <a:lstStyle/>
+          <a:p>
+            <a:pPr algn="ctr"/>
+            <a:endParaRPr lang="en-US"/>
+          </a:p>
+        </p:txBody>
+      </p:sp>
+      <p:sp>
+        <p:nvSpPr>
+          <p:cNvPr id="14" name="Freeform: Shape 13">
+            <a:extLst>
+              <a:ext uri="{FF2B5EF4-FFF2-40B4-BE49-F238E27FC236}">
+                <a16:creationId xmlns:a16="http://schemas.microsoft.com/office/drawing/2014/main" id="{501AC840-A9DD-9DBD-AF96-F23733AEBA08}"/>
+              </a:ext>
+            </a:extLst>
+          </p:cNvPr>
+          <p:cNvSpPr/>
+          <p:nvPr/>
+        </p:nvSpPr>
+        <p:spPr>
+          <a:xfrm>
+            <a:off x="4502150" y="3232150"/>
+            <a:ext cx="279400" cy="196850"/>
+          </a:xfrm>
+          <a:custGeom>
+            <a:avLst/>
+            <a:gdLst>
+              <a:gd name="csX0" fmla="*/ 0 w 279400"/>
+              <a:gd name="csY0" fmla="*/ 0 h 209550"/>
+              <a:gd name="csX1" fmla="*/ 6350 w 279400"/>
+              <a:gd name="csY1" fmla="*/ 101600 h 209550"/>
+              <a:gd name="csX2" fmla="*/ 273050 w 279400"/>
+              <a:gd name="csY2" fmla="*/ 107950 h 209550"/>
+              <a:gd name="csX3" fmla="*/ 279400 w 279400"/>
+              <a:gd name="csY3" fmla="*/ 209550 h 209550"/>
+            </a:gdLst>
+            <a:ahLst/>
+            <a:cxnLst>
+              <a:cxn ang="0">
+                <a:pos x="csX0" y="csY0"/>
+              </a:cxn>
+              <a:cxn ang="0">
+                <a:pos x="csX1" y="csY1"/>
+              </a:cxn>
+              <a:cxn ang="0">
+                <a:pos x="csX2" y="csY2"/>
+              </a:cxn>
+              <a:cxn ang="0">
+                <a:pos x="csX3" y="csY3"/>
+              </a:cxn>
+            </a:cxnLst>
+            <a:rect l="l" t="t" r="r" b="b"/>
+            <a:pathLst>
+              <a:path w="279400" h="209550">
+                <a:moveTo>
+                  <a:pt x="0" y="0"/>
+                </a:moveTo>
+                <a:lnTo>
+                  <a:pt x="6350" y="101600"/>
+                </a:lnTo>
+                <a:lnTo>
+                  <a:pt x="273050" y="107950"/>
+                </a:lnTo>
+                <a:lnTo>
+                  <a:pt x="279400" y="209550"/>
+                </a:lnTo>
+              </a:path>
+            </a:pathLst>
+          </a:custGeom>
+          <a:ln>
+            <a:solidFill>
+              <a:schemeClr val="accent3">
+                <a:lumMod val="60000"/>
+                <a:lumOff val="40000"/>
+              </a:schemeClr>
+            </a:solidFill>
+          </a:ln>
+        </p:spPr>
+        <p:style>
+          <a:lnRef idx="3">
+            <a:schemeClr val="accent1"/>
+          </a:lnRef>
+          <a:fillRef idx="0">
+            <a:schemeClr val="accent1"/>
+          </a:fillRef>
+          <a:effectRef idx="2">
+            <a:schemeClr val="accent1"/>
+          </a:effectRef>
+          <a:fontRef idx="minor">
+            <a:schemeClr val="tx1"/>
+          </a:fontRef>
+        </p:style>
+        <p:txBody>
+          <a:bodyPr rtlCol="0" anchor="ctr"/>
+          <a:lstStyle/>
+          <a:p>
+            <a:pPr algn="ctr"/>
+            <a:endParaRPr lang="en-US"/>
+          </a:p>
+        </p:txBody>
+      </p:sp>
+      <p:sp>
+        <p:nvSpPr>
+          <p:cNvPr id="16" name="Freeform: Shape 15">
+            <a:extLst>
+              <a:ext uri="{FF2B5EF4-FFF2-40B4-BE49-F238E27FC236}">
+                <a16:creationId xmlns:a16="http://schemas.microsoft.com/office/drawing/2014/main" id="{EEF01747-0AE5-2DD5-CD23-C1D6E7E01813}"/>
+              </a:ext>
+            </a:extLst>
+          </p:cNvPr>
+          <p:cNvSpPr/>
+          <p:nvPr/>
+        </p:nvSpPr>
+        <p:spPr>
+          <a:xfrm>
+            <a:off x="5276850" y="3270250"/>
+            <a:ext cx="444500" cy="247650"/>
+          </a:xfrm>
+          <a:custGeom>
+            <a:avLst/>
+            <a:gdLst>
+              <a:gd name="csX0" fmla="*/ 438150 w 444500"/>
+              <a:gd name="csY0" fmla="*/ 0 h 247650"/>
+              <a:gd name="csX1" fmla="*/ 444500 w 444500"/>
+              <a:gd name="csY1" fmla="*/ 247650 h 247650"/>
+              <a:gd name="csX2" fmla="*/ 0 w 444500"/>
+              <a:gd name="csY2" fmla="*/ 247650 h 247650"/>
+            </a:gdLst>
+            <a:ahLst/>
+            <a:cxnLst>
+              <a:cxn ang="0">
+                <a:pos x="csX0" y="csY0"/>
+              </a:cxn>
+              <a:cxn ang="0">
+                <a:pos x="csX1" y="csY1"/>
+              </a:cxn>
+              <a:cxn ang="0">
+                <a:pos x="csX2" y="csY2"/>
+              </a:cxn>
+            </a:cxnLst>
+            <a:rect l="l" t="t" r="r" b="b"/>
+            <a:pathLst>
+              <a:path w="444500" h="247650">
+                <a:moveTo>
+                  <a:pt x="438150" y="0"/>
+                </a:moveTo>
+                <a:lnTo>
+                  <a:pt x="444500" y="247650"/>
+                </a:lnTo>
+                <a:lnTo>
+                  <a:pt x="0" y="247650"/>
+                </a:lnTo>
+              </a:path>
+            </a:pathLst>
+          </a:custGeom>
+        </p:spPr>
+        <p:style>
+          <a:lnRef idx="3">
+            <a:schemeClr val="accent1"/>
+          </a:lnRef>
+          <a:fillRef idx="0">
+            <a:schemeClr val="accent1"/>
+          </a:fillRef>
+          <a:effectRef idx="2">
+            <a:schemeClr val="accent1"/>
+          </a:effectRef>
+          <a:fontRef idx="minor">
+            <a:schemeClr val="tx1"/>
+          </a:fontRef>
+        </p:style>
+        <p:txBody>
+          <a:bodyPr rtlCol="0" anchor="ctr"/>
+          <a:lstStyle/>
+          <a:p>
+            <a:pPr algn="ctr"/>
+            <a:endParaRPr lang="en-US"/>
+          </a:p>
+        </p:txBody>
+      </p:sp>
+      <p:sp>
+        <p:nvSpPr>
+          <p:cNvPr id="17" name="Freeform: Shape 16">
+            <a:extLst>
+              <a:ext uri="{FF2B5EF4-FFF2-40B4-BE49-F238E27FC236}">
+                <a16:creationId xmlns:a16="http://schemas.microsoft.com/office/drawing/2014/main" id="{858A667E-A2A8-12AF-4E0F-EB6EEAD41127}"/>
+              </a:ext>
+            </a:extLst>
+          </p:cNvPr>
+          <p:cNvSpPr/>
+          <p:nvPr/>
+        </p:nvSpPr>
+        <p:spPr>
+          <a:xfrm>
+            <a:off x="5276850" y="3605213"/>
+            <a:ext cx="1400175" cy="0"/>
+          </a:xfrm>
+          <a:custGeom>
+            <a:avLst/>
+            <a:gdLst>
+              <a:gd name="csX0" fmla="*/ 0 w 1400175"/>
+              <a:gd name="csY0" fmla="*/ 0 h 0"/>
+              <a:gd name="csX1" fmla="*/ 1400175 w 1400175"/>
+              <a:gd name="csY1" fmla="*/ 0 h 0"/>
+            </a:gdLst>
+            <a:ahLst/>
+            <a:cxnLst>
+              <a:cxn ang="0">
+                <a:pos x="csX0" y="csY0"/>
+              </a:cxn>
+              <a:cxn ang="0">
+                <a:pos x="csX1" y="csY1"/>
+              </a:cxn>
+            </a:cxnLst>
+            <a:rect l="l" t="t" r="r" b="b"/>
+            <a:pathLst>
+              <a:path w="1400175">
+                <a:moveTo>
+                  <a:pt x="0" y="0"/>
+                </a:moveTo>
+                <a:lnTo>
+                  <a:pt x="1400175" y="0"/>
+                </a:lnTo>
+              </a:path>
+            </a:pathLst>
+          </a:custGeom>
+        </p:spPr>
+        <p:style>
+          <a:lnRef idx="3">
+            <a:schemeClr val="accent1"/>
+          </a:lnRef>
+          <a:fillRef idx="0">
+            <a:schemeClr val="accent1"/>
+          </a:fillRef>
+          <a:effectRef idx="2">
+            <a:schemeClr val="accent1"/>
+          </a:effectRef>
+          <a:fontRef idx="minor">
+            <a:schemeClr val="tx1"/>
+          </a:fontRef>
+        </p:style>
+        <p:txBody>
+          <a:bodyPr rtlCol="0" anchor="ctr"/>
+          <a:lstStyle/>
+          <a:p>
+            <a:pPr algn="ctr"/>
+            <a:endParaRPr lang="en-US"/>
+          </a:p>
+        </p:txBody>
+      </p:sp>
+      <p:sp>
+        <p:nvSpPr>
+          <p:cNvPr id="18" name="Freeform: Shape 17">
+            <a:extLst>
+              <a:ext uri="{FF2B5EF4-FFF2-40B4-BE49-F238E27FC236}">
+                <a16:creationId xmlns:a16="http://schemas.microsoft.com/office/drawing/2014/main" id="{934B66ED-5A41-D2E0-6B1F-6D99B4E53054}"/>
+              </a:ext>
+            </a:extLst>
+          </p:cNvPr>
+          <p:cNvSpPr/>
+          <p:nvPr/>
+        </p:nvSpPr>
+        <p:spPr>
+          <a:xfrm>
+            <a:off x="3981450" y="3605213"/>
+            <a:ext cx="642938" cy="0"/>
+          </a:xfrm>
+          <a:custGeom>
+            <a:avLst/>
+            <a:gdLst>
+              <a:gd name="csX0" fmla="*/ 0 w 642938"/>
+              <a:gd name="csY0" fmla="*/ 0 h 0"/>
+              <a:gd name="csX1" fmla="*/ 642938 w 642938"/>
+              <a:gd name="csY1" fmla="*/ 0 h 0"/>
+            </a:gdLst>
+            <a:ahLst/>
+            <a:cxnLst>
+              <a:cxn ang="0">
+                <a:pos x="csX0" y="csY0"/>
+              </a:cxn>
+              <a:cxn ang="0">
+                <a:pos x="csX1" y="csY1"/>
+              </a:cxn>
+            </a:cxnLst>
+            <a:rect l="l" t="t" r="r" b="b"/>
+            <a:pathLst>
+              <a:path w="642938">
+                <a:moveTo>
+                  <a:pt x="0" y="0"/>
+                </a:moveTo>
+                <a:lnTo>
+                  <a:pt x="642938" y="0"/>
+                </a:lnTo>
+              </a:path>
+            </a:pathLst>
+          </a:custGeom>
+        </p:spPr>
+        <p:style>
+          <a:lnRef idx="3">
+            <a:schemeClr val="accent1"/>
+          </a:lnRef>
+          <a:fillRef idx="0">
+            <a:schemeClr val="accent1"/>
+          </a:fillRef>
+          <a:effectRef idx="2">
+            <a:schemeClr val="accent1"/>
+          </a:effectRef>
+          <a:fontRef idx="minor">
+            <a:schemeClr val="tx1"/>
+          </a:fontRef>
+        </p:style>
+        <p:txBody>
+          <a:bodyPr rtlCol="0" anchor="ctr"/>
+          <a:lstStyle/>
+          <a:p>
+            <a:pPr algn="ctr"/>
+            <a:endParaRPr lang="en-US"/>
+          </a:p>
+        </p:txBody>
+      </p:sp>
+      <p:sp>
+        <p:nvSpPr>
+          <p:cNvPr id="19" name="Freeform: Shape 18">
+            <a:extLst>
+              <a:ext uri="{FF2B5EF4-FFF2-40B4-BE49-F238E27FC236}">
+                <a16:creationId xmlns:a16="http://schemas.microsoft.com/office/drawing/2014/main" id="{7B86A58C-0E1A-C1A1-08E9-A034D0B9CAE8}"/>
+              </a:ext>
+            </a:extLst>
+          </p:cNvPr>
+          <p:cNvSpPr/>
+          <p:nvPr/>
+        </p:nvSpPr>
+        <p:spPr>
+          <a:xfrm>
+            <a:off x="6419850" y="3276600"/>
+            <a:ext cx="271463" cy="247650"/>
+          </a:xfrm>
+          <a:custGeom>
+            <a:avLst/>
+            <a:gdLst>
+              <a:gd name="csX0" fmla="*/ 0 w 271463"/>
+              <a:gd name="csY0" fmla="*/ 0 h 247650"/>
+              <a:gd name="csX1" fmla="*/ 4763 w 271463"/>
+              <a:gd name="csY1" fmla="*/ 247650 h 247650"/>
+              <a:gd name="csX2" fmla="*/ 271463 w 271463"/>
+              <a:gd name="csY2" fmla="*/ 247650 h 247650"/>
+            </a:gdLst>
+            <a:ahLst/>
+            <a:cxnLst>
+              <a:cxn ang="0">
+                <a:pos x="csX0" y="csY0"/>
+              </a:cxn>
+              <a:cxn ang="0">
+                <a:pos x="csX1" y="csY1"/>
+              </a:cxn>
+              <a:cxn ang="0">
+                <a:pos x="csX2" y="csY2"/>
+              </a:cxn>
+            </a:cxnLst>
+            <a:rect l="l" t="t" r="r" b="b"/>
+            <a:pathLst>
+              <a:path w="271463" h="247650">
+                <a:moveTo>
+                  <a:pt x="0" y="0"/>
+                </a:moveTo>
+                <a:cubicBezTo>
+                  <a:pt x="1588" y="82550"/>
+                  <a:pt x="3175" y="165100"/>
+                  <a:pt x="4763" y="247650"/>
+                </a:cubicBezTo>
+                <a:lnTo>
+                  <a:pt x="271463" y="247650"/>
+                </a:lnTo>
+              </a:path>
+            </a:pathLst>
+          </a:custGeom>
+        </p:spPr>
+        <p:style>
+          <a:lnRef idx="3">
+            <a:schemeClr val="accent1"/>
+          </a:lnRef>
+          <a:fillRef idx="0">
+            <a:schemeClr val="accent1"/>
+          </a:fillRef>
+          <a:effectRef idx="2">
+            <a:schemeClr val="accent1"/>
+          </a:effectRef>
+          <a:fontRef idx="minor">
+            <a:schemeClr val="tx1"/>
+          </a:fontRef>
+        </p:style>
+        <p:txBody>
+          <a:bodyPr rtlCol="0" anchor="ctr"/>
+          <a:lstStyle/>
+          <a:p>
+            <a:pPr algn="ctr"/>
+            <a:endParaRPr lang="en-US"/>
+          </a:p>
+        </p:txBody>
+      </p:sp>
+      <p:sp>
+        <p:nvSpPr>
+          <p:cNvPr id="22" name="Freeform: Shape 21">
+            <a:extLst>
+              <a:ext uri="{FF2B5EF4-FFF2-40B4-BE49-F238E27FC236}">
+                <a16:creationId xmlns:a16="http://schemas.microsoft.com/office/drawing/2014/main" id="{56A4B5F9-7918-6864-CCE3-2EDBDED7529F}"/>
+              </a:ext>
+            </a:extLst>
+          </p:cNvPr>
+          <p:cNvSpPr/>
+          <p:nvPr/>
+        </p:nvSpPr>
+        <p:spPr>
+          <a:xfrm rot="631608" flipH="1">
+            <a:off x="4335450" y="1100603"/>
+            <a:ext cx="304961" cy="3159505"/>
+          </a:xfrm>
+          <a:custGeom>
+            <a:avLst/>
+            <a:gdLst>
+              <a:gd name="csX0" fmla="*/ 19050 w 19050"/>
+              <a:gd name="csY0" fmla="*/ 2276475 h 2276475"/>
+              <a:gd name="csX1" fmla="*/ 0 w 19050"/>
+              <a:gd name="csY1" fmla="*/ 0 h 2276475"/>
+            </a:gdLst>
+            <a:ahLst/>
+            <a:cxnLst>
+              <a:cxn ang="0">
+                <a:pos x="csX0" y="csY0"/>
+              </a:cxn>
+              <a:cxn ang="0">
+                <a:pos x="csX1" y="csY1"/>
+              </a:cxn>
+            </a:cxnLst>
+            <a:rect l="l" t="t" r="r" b="b"/>
+            <a:pathLst>
+              <a:path w="19050" h="2276475">
+                <a:moveTo>
+                  <a:pt x="19050" y="2276475"/>
+                </a:moveTo>
+                <a:lnTo>
+                  <a:pt x="0" y="0"/>
+                </a:lnTo>
+              </a:path>
+            </a:pathLst>
+          </a:custGeom>
+        </p:spPr>
+        <p:style>
+          <a:lnRef idx="3">
+            <a:schemeClr val="accent2"/>
+          </a:lnRef>
+          <a:fillRef idx="0">
+            <a:schemeClr val="accent2"/>
+          </a:fillRef>
+          <a:effectRef idx="2">
+            <a:schemeClr val="accent2"/>
+          </a:effectRef>
+          <a:fontRef idx="minor">
+            <a:schemeClr val="tx1"/>
+          </a:fontRef>
+        </p:style>
+        <p:txBody>
+          <a:bodyPr rtlCol="0" anchor="ctr"/>
+          <a:lstStyle/>
+          <a:p>
+            <a:pPr algn="ctr"/>
+            <a:endParaRPr lang="en-US"/>
+          </a:p>
+        </p:txBody>
+      </p:sp>
+      <p:sp>
+        <p:nvSpPr>
+          <p:cNvPr id="24" name="Freeform: Shape 23">
+            <a:extLst>
+              <a:ext uri="{FF2B5EF4-FFF2-40B4-BE49-F238E27FC236}">
+                <a16:creationId xmlns:a16="http://schemas.microsoft.com/office/drawing/2014/main" id="{236B8611-157C-5E0C-5E5C-DECA4E446C52}"/>
+              </a:ext>
+            </a:extLst>
+          </p:cNvPr>
+          <p:cNvSpPr/>
+          <p:nvPr/>
+        </p:nvSpPr>
+        <p:spPr>
+          <a:xfrm>
+            <a:off x="3638550" y="3690938"/>
+            <a:ext cx="1038225" cy="1428750"/>
+          </a:xfrm>
+          <a:custGeom>
+            <a:avLst/>
+            <a:gdLst>
+              <a:gd name="csX0" fmla="*/ 981075 w 1038225"/>
+              <a:gd name="csY0" fmla="*/ 0 h 1428750"/>
+              <a:gd name="csX1" fmla="*/ 752475 w 1038225"/>
+              <a:gd name="csY1" fmla="*/ 0 h 1428750"/>
+              <a:gd name="csX2" fmla="*/ 752475 w 1038225"/>
+              <a:gd name="csY2" fmla="*/ 138112 h 1428750"/>
+              <a:gd name="csX3" fmla="*/ 0 w 1038225"/>
+              <a:gd name="csY3" fmla="*/ 138112 h 1428750"/>
+              <a:gd name="csX4" fmla="*/ 0 w 1038225"/>
+              <a:gd name="csY4" fmla="*/ 1423987 h 1428750"/>
+              <a:gd name="csX5" fmla="*/ 1038225 w 1038225"/>
+              <a:gd name="csY5" fmla="*/ 1428750 h 1428750"/>
+            </a:gdLst>
+            <a:ahLst/>
+            <a:cxnLst>
+              <a:cxn ang="0">
+                <a:pos x="csX0" y="csY0"/>
+              </a:cxn>
+              <a:cxn ang="0">
+                <a:pos x="csX1" y="csY1"/>
+              </a:cxn>
+              <a:cxn ang="0">
+                <a:pos x="csX2" y="csY2"/>
+              </a:cxn>
+              <a:cxn ang="0">
+                <a:pos x="csX3" y="csY3"/>
+              </a:cxn>
+              <a:cxn ang="0">
+                <a:pos x="csX4" y="csY4"/>
+              </a:cxn>
+              <a:cxn ang="0">
+                <a:pos x="csX5" y="csY5"/>
+              </a:cxn>
+            </a:cxnLst>
+            <a:rect l="l" t="t" r="r" b="b"/>
+            <a:pathLst>
+              <a:path w="1038225" h="1428750">
+                <a:moveTo>
+                  <a:pt x="981075" y="0"/>
+                </a:moveTo>
+                <a:lnTo>
+                  <a:pt x="752475" y="0"/>
+                </a:lnTo>
+                <a:lnTo>
+                  <a:pt x="752475" y="138112"/>
+                </a:lnTo>
+                <a:lnTo>
+                  <a:pt x="0" y="138112"/>
+                </a:lnTo>
+                <a:lnTo>
+                  <a:pt x="0" y="1423987"/>
+                </a:lnTo>
+                <a:lnTo>
+                  <a:pt x="1038225" y="1428750"/>
+                </a:lnTo>
+              </a:path>
+            </a:pathLst>
+          </a:custGeom>
+        </p:spPr>
+        <p:style>
+          <a:lnRef idx="3">
+            <a:schemeClr val="accent1"/>
+          </a:lnRef>
+          <a:fillRef idx="0">
+            <a:schemeClr val="accent1"/>
+          </a:fillRef>
+          <a:effectRef idx="2">
+            <a:schemeClr val="accent1"/>
+          </a:effectRef>
+          <a:fontRef idx="minor">
+            <a:schemeClr val="tx1"/>
+          </a:fontRef>
+        </p:style>
+        <p:txBody>
+          <a:bodyPr rtlCol="0" anchor="ctr"/>
+          <a:lstStyle/>
+          <a:p>
+            <a:pPr algn="ctr"/>
+            <a:endParaRPr lang="en-US"/>
+          </a:p>
+        </p:txBody>
+      </p:sp>
+      <p:sp>
+        <p:nvSpPr>
+          <p:cNvPr id="25" name="Rectangle 24">
+            <a:extLst>
+              <a:ext uri="{FF2B5EF4-FFF2-40B4-BE49-F238E27FC236}">
+                <a16:creationId xmlns:a16="http://schemas.microsoft.com/office/drawing/2014/main" id="{7C0CAC27-8A27-69B3-1E54-FD076927D47D}"/>
+              </a:ext>
+            </a:extLst>
+          </p:cNvPr>
+          <p:cNvSpPr/>
+          <p:nvPr/>
+        </p:nvSpPr>
+        <p:spPr>
+          <a:xfrm>
+            <a:off x="3667124" y="4014092"/>
+            <a:ext cx="300037" cy="252208"/>
+          </a:xfrm>
+          <a:prstGeom prst="rect">
+            <a:avLst/>
+          </a:prstGeom>
+          <a:solidFill>
+            <a:srgbClr val="ACD433">
+              <a:alpha val="50196"/>
+            </a:srgbClr>
+          </a:solidFill>
+        </p:spPr>
+        <p:style>
+          <a:lnRef idx="2">
+            <a:schemeClr val="accent1">
+              <a:shade val="15000"/>
+            </a:schemeClr>
+          </a:lnRef>
+          <a:fillRef idx="1">
+            <a:schemeClr val="accent1"/>
+          </a:fillRef>
+          <a:effectRef idx="0">
+            <a:schemeClr val="accent1"/>
+          </a:effectRef>
+          <a:fontRef idx="minor">
+            <a:schemeClr val="lt1"/>
+          </a:fontRef>
+        </p:style>
+        <p:txBody>
+          <a:bodyPr rtlCol="0" anchor="ctr"/>
+          <a:lstStyle/>
+          <a:p>
+            <a:pPr algn="ctr"/>
+            <a:endParaRPr lang="en-US"/>
+          </a:p>
+        </p:txBody>
+      </p:sp>
+      <p:sp>
+        <p:nvSpPr>
+          <p:cNvPr id="21" name="Freeform: Shape 20">
+            <a:extLst>
+              <a:ext uri="{FF2B5EF4-FFF2-40B4-BE49-F238E27FC236}">
+                <a16:creationId xmlns:a16="http://schemas.microsoft.com/office/drawing/2014/main" id="{557FF0C5-9D33-5B0C-1812-7C63A4E15CC4}"/>
+              </a:ext>
+            </a:extLst>
+          </p:cNvPr>
+          <p:cNvSpPr/>
+          <p:nvPr/>
+        </p:nvSpPr>
+        <p:spPr>
+          <a:xfrm>
+            <a:off x="2933700" y="2849880"/>
+            <a:ext cx="1737360" cy="2354580"/>
+          </a:xfrm>
+          <a:custGeom>
+            <a:avLst/>
+            <a:gdLst>
+              <a:gd name="csX0" fmla="*/ 381000 w 1737360"/>
+              <a:gd name="csY0" fmla="*/ 0 h 2354580"/>
+              <a:gd name="csX1" fmla="*/ 7620 w 1737360"/>
+              <a:gd name="csY1" fmla="*/ 0 h 2354580"/>
+              <a:gd name="csX2" fmla="*/ 0 w 1737360"/>
+              <a:gd name="csY2" fmla="*/ 2354580 h 2354580"/>
+              <a:gd name="csX3" fmla="*/ 1737360 w 1737360"/>
+              <a:gd name="csY3" fmla="*/ 2346960 h 2354580"/>
+            </a:gdLst>
+            <a:ahLst/>
+            <a:cxnLst>
+              <a:cxn ang="0">
+                <a:pos x="csX0" y="csY0"/>
+              </a:cxn>
+              <a:cxn ang="0">
+                <a:pos x="csX1" y="csY1"/>
+              </a:cxn>
+              <a:cxn ang="0">
+                <a:pos x="csX2" y="csY2"/>
+              </a:cxn>
+              <a:cxn ang="0">
+                <a:pos x="csX3" y="csY3"/>
+              </a:cxn>
+            </a:cxnLst>
+            <a:rect l="l" t="t" r="r" b="b"/>
+            <a:pathLst>
+              <a:path w="1737360" h="2354580">
+                <a:moveTo>
+                  <a:pt x="381000" y="0"/>
+                </a:moveTo>
+                <a:lnTo>
+                  <a:pt x="7620" y="0"/>
+                </a:lnTo>
+                <a:lnTo>
+                  <a:pt x="0" y="2354580"/>
+                </a:lnTo>
+                <a:lnTo>
+                  <a:pt x="1737360" y="2346960"/>
+                </a:lnTo>
+              </a:path>
+            </a:pathLst>
+          </a:custGeom>
+        </p:spPr>
+        <p:style>
+          <a:lnRef idx="3">
+            <a:schemeClr val="accent1"/>
+          </a:lnRef>
+          <a:fillRef idx="0">
+            <a:schemeClr val="accent1"/>
+          </a:fillRef>
+          <a:effectRef idx="2">
+            <a:schemeClr val="accent1"/>
+          </a:effectRef>
+          <a:fontRef idx="minor">
+            <a:schemeClr val="tx1"/>
+          </a:fontRef>
+        </p:style>
+        <p:txBody>
+          <a:bodyPr rtlCol="0" anchor="ctr"/>
+          <a:lstStyle/>
+          <a:p>
+            <a:pPr algn="ctr"/>
+            <a:endParaRPr lang="en-US"/>
+          </a:p>
+        </p:txBody>
+      </p:sp>
+    </p:spTree>
+    <p:extLst>
+      <p:ext uri="{BB962C8B-B14F-4D97-AF65-F5344CB8AC3E}">
+        <p14:creationId xmlns:p14="http://schemas.microsoft.com/office/powerpoint/2010/main" val="2044338750"/>
+      </p:ext>
+    </p:extLst>
+  </p:cSld>
+  <p:clrMapOvr>
+    <a:masterClrMapping/>
+  </p:clrMapOvr>
+</p:sld>
+</file>
+
+<file path=ppt/slides/slide45.xml><?xml version="1.0" encoding="utf-8"?>
+<p:sld xmlns:a="http://schemas.openxmlformats.org/drawingml/2006/main" xmlns:r="http://schemas.openxmlformats.org/officeDocument/2006/relationships" xmlns:p="http://schemas.openxmlformats.org/presentationml/2006/main">
+  <p:cSld>
+    <p:spTree>
+      <p:nvGrpSpPr>
+        <p:cNvPr id="1" name="">
+          <a:extLst>
+            <a:ext uri="{FF2B5EF4-FFF2-40B4-BE49-F238E27FC236}">
+              <a16:creationId xmlns:a16="http://schemas.microsoft.com/office/drawing/2014/main" id="{81B0D1E9-8854-2DD2-5CB3-727047C2EFB8}"/>
+            </a:ext>
+          </a:extLst>
+        </p:cNvPr>
+        <p:cNvGrpSpPr/>
+        <p:nvPr/>
+      </p:nvGrpSpPr>
+      <p:grpSpPr>
+        <a:xfrm>
+          <a:off x="0" y="0"/>
+          <a:ext cx="0" cy="0"/>
+          <a:chOff x="0" y="0"/>
+          <a:chExt cx="0" cy="0"/>
+        </a:xfrm>
+      </p:grpSpPr>
+      <p:sp>
+        <p:nvSpPr>
+          <p:cNvPr id="2" name="Title 1">
+            <a:extLst>
+              <a:ext uri="{FF2B5EF4-FFF2-40B4-BE49-F238E27FC236}">
+                <a16:creationId xmlns:a16="http://schemas.microsoft.com/office/drawing/2014/main" id="{CB5D4C96-10BB-ACB1-704A-B2C90348D2BE}"/>
+              </a:ext>
+            </a:extLst>
+          </p:cNvPr>
+          <p:cNvSpPr>
+            <a:spLocks noGrp="1"/>
+          </p:cNvSpPr>
+          <p:nvPr>
+            <p:ph type="title"/>
+          </p:nvPr>
+        </p:nvSpPr>
+        <p:spPr>
+          <a:xfrm>
+            <a:off x="1754188" y="452718"/>
+            <a:ext cx="8296646" cy="1400530"/>
+          </a:xfrm>
+        </p:spPr>
+        <p:txBody>
+          <a:bodyPr/>
+          <a:lstStyle/>
+          <a:p>
+            <a:r>
+              <a:rPr lang="en-US" b="1" dirty="0"/>
+              <a:t>Essential EA Meta-Model</a:t>
+            </a:r>
+            <a:br>
+              <a:rPr lang="en-US" b="1" dirty="0"/>
+            </a:br>
+            <a:r>
+              <a:rPr lang="en-US" b="1" dirty="0"/>
+              <a:t>- Business Layer - 22</a:t>
+            </a:r>
+          </a:p>
+        </p:txBody>
+      </p:sp>
+      <p:sp>
+        <p:nvSpPr>
+          <p:cNvPr id="4" name="Title 1">
+            <a:extLst>
+              <a:ext uri="{FF2B5EF4-FFF2-40B4-BE49-F238E27FC236}">
+                <a16:creationId xmlns:a16="http://schemas.microsoft.com/office/drawing/2014/main" id="{4FA1FC18-03A0-BE34-165D-0ED6A607BF3A}"/>
+              </a:ext>
+            </a:extLst>
+          </p:cNvPr>
+          <p:cNvSpPr txBox="1">
+            <a:spLocks/>
+          </p:cNvSpPr>
+          <p:nvPr/>
+        </p:nvSpPr>
+        <p:spPr>
+          <a:xfrm>
+            <a:off x="0" y="3143"/>
+            <a:ext cx="1754188" cy="1058013"/>
+          </a:xfrm>
+          <a:prstGeom prst="rect">
+            <a:avLst/>
+          </a:prstGeom>
+        </p:spPr>
+        <p:txBody>
+          <a:bodyPr vert="horz" lIns="91440" tIns="45720" rIns="91440" bIns="45720" rtlCol="0" anchor="ctr">
+            <a:noAutofit/>
+          </a:bodyPr>
+          <a:lstStyle>
+            <a:lvl1pPr algn="l" defTabSz="457200" rtl="0" eaLnBrk="1" latinLnBrk="0" hangingPunct="1">
+              <a:spcBef>
+                <a:spcPct val="0"/>
+              </a:spcBef>
+              <a:buNone/>
+              <a:defRPr sz="7200" b="0" i="0" kern="1200">
+                <a:solidFill>
+                  <a:schemeClr val="tx2"/>
+                </a:solidFill>
+                <a:latin typeface="+mj-lt"/>
+                <a:ea typeface="+mj-ea"/>
+                <a:cs typeface="+mj-cs"/>
+              </a:defRPr>
+            </a:lvl1pPr>
+            <a:lvl2pPr eaLnBrk="1" hangingPunct="1">
+              <a:defRPr>
+                <a:solidFill>
+                  <a:schemeClr val="tx2"/>
+                </a:solidFill>
+              </a:defRPr>
+            </a:lvl2pPr>
+            <a:lvl3pPr eaLnBrk="1" hangingPunct="1">
+              <a:defRPr>
+                <a:solidFill>
+                  <a:schemeClr val="tx2"/>
+                </a:solidFill>
+              </a:defRPr>
+            </a:lvl3pPr>
+            <a:lvl4pPr eaLnBrk="1" hangingPunct="1">
+              <a:defRPr>
+                <a:solidFill>
+                  <a:schemeClr val="tx2"/>
+                </a:solidFill>
+              </a:defRPr>
+            </a:lvl4pPr>
+            <a:lvl5pPr eaLnBrk="1" hangingPunct="1">
+              <a:defRPr>
+                <a:solidFill>
+                  <a:schemeClr val="tx2"/>
+                </a:solidFill>
+              </a:defRPr>
+            </a:lvl5pPr>
+            <a:lvl6pPr eaLnBrk="1" hangingPunct="1">
+              <a:defRPr>
+                <a:solidFill>
+                  <a:schemeClr val="tx2"/>
+                </a:solidFill>
+              </a:defRPr>
+            </a:lvl6pPr>
+            <a:lvl7pPr eaLnBrk="1" hangingPunct="1">
+              <a:defRPr>
+                <a:solidFill>
+                  <a:schemeClr val="tx2"/>
+                </a:solidFill>
+              </a:defRPr>
+            </a:lvl7pPr>
+            <a:lvl8pPr eaLnBrk="1" hangingPunct="1">
+              <a:defRPr>
+                <a:solidFill>
+                  <a:schemeClr val="tx2"/>
+                </a:solidFill>
+              </a:defRPr>
+            </a:lvl8pPr>
+            <a:lvl9pPr eaLnBrk="1" hangingPunct="1">
+              <a:defRPr>
+                <a:solidFill>
+                  <a:schemeClr val="tx2"/>
+                </a:solidFill>
+              </a:defRPr>
+            </a:lvl9pPr>
+          </a:lstStyle>
+          <a:p>
+            <a:pPr algn="ctr"/>
+            <a:r>
+              <a:rPr lang="en-US" b="1" dirty="0">
+                <a:solidFill>
+                  <a:schemeClr val="accent1">
+                    <a:lumMod val="75000"/>
+                  </a:schemeClr>
+                </a:solidFill>
+              </a:rPr>
+              <a:t>028</a:t>
+            </a:r>
+            <a:endParaRPr lang="ru-RU" b="1" dirty="0">
+              <a:solidFill>
+                <a:schemeClr val="accent1">
+                  <a:lumMod val="75000"/>
+                </a:schemeClr>
+              </a:solidFill>
+            </a:endParaRPr>
+          </a:p>
+        </p:txBody>
+      </p:sp>
+      <p:pic>
+        <p:nvPicPr>
+          <p:cNvPr id="3" name="Picture 2">
+            <a:extLst>
+              <a:ext uri="{FF2B5EF4-FFF2-40B4-BE49-F238E27FC236}">
+                <a16:creationId xmlns:a16="http://schemas.microsoft.com/office/drawing/2014/main" id="{BC9582D7-20A3-A5E0-C093-D0CB5CB3241A}"/>
+              </a:ext>
+            </a:extLst>
+          </p:cNvPr>
+          <p:cNvPicPr>
+            <a:picLocks noChangeAspect="1"/>
+          </p:cNvPicPr>
+          <p:nvPr/>
+        </p:nvPicPr>
+        <p:blipFill>
+          <a:blip r:embed="rId2"/>
+          <a:stretch>
+            <a:fillRect/>
+          </a:stretch>
+        </p:blipFill>
+        <p:spPr>
+          <a:xfrm>
+            <a:off x="236841" y="1853248"/>
+            <a:ext cx="8296646" cy="4669795"/>
+          </a:xfrm>
+          <a:prstGeom prst="rect">
+            <a:avLst/>
+          </a:prstGeom>
+          <a:ln>
+            <a:noFill/>
+          </a:ln>
+          <a:effectLst>
+            <a:outerShdw blurRad="292100" dist="139700" dir="2700000" algn="tl" rotWithShape="0">
+              <a:srgbClr val="333333">
+                <a:alpha val="65000"/>
+              </a:srgbClr>
+            </a:outerShdw>
+          </a:effectLst>
+        </p:spPr>
+      </p:pic>
+      <p:sp>
+        <p:nvSpPr>
+          <p:cNvPr id="6" name="Rectangle: Rounded Corners 5">
+            <a:extLst>
+              <a:ext uri="{FF2B5EF4-FFF2-40B4-BE49-F238E27FC236}">
+                <a16:creationId xmlns:a16="http://schemas.microsoft.com/office/drawing/2014/main" id="{84E2974F-B6A3-A99C-1447-257CBA7DF708}"/>
+              </a:ext>
+            </a:extLst>
+          </p:cNvPr>
+          <p:cNvSpPr/>
+          <p:nvPr/>
+        </p:nvSpPr>
+        <p:spPr>
+          <a:xfrm>
+            <a:off x="596436" y="3534310"/>
+            <a:ext cx="2033748" cy="2742664"/>
+          </a:xfrm>
+          <a:prstGeom prst="roundRect">
+            <a:avLst>
+              <a:gd name="adj" fmla="val 6916"/>
+            </a:avLst>
+          </a:prstGeom>
+          <a:solidFill>
+            <a:srgbClr val="FFCC66">
+              <a:alpha val="20000"/>
+            </a:srgbClr>
+          </a:solidFill>
+          <a:ln>
+            <a:solidFill>
+              <a:srgbClr val="92D050"/>
+            </a:solidFill>
+          </a:ln>
+        </p:spPr>
+        <p:style>
+          <a:lnRef idx="2">
+            <a:schemeClr val="accent1">
+              <a:shade val="15000"/>
+            </a:schemeClr>
+          </a:lnRef>
+          <a:fillRef idx="1">
+            <a:schemeClr val="accent1"/>
+          </a:fillRef>
+          <a:effectRef idx="0">
+            <a:schemeClr val="accent1"/>
+          </a:effectRef>
+          <a:fontRef idx="minor">
+            <a:schemeClr val="lt1"/>
+          </a:fontRef>
+        </p:style>
+        <p:txBody>
+          <a:bodyPr rtlCol="0" anchor="ctr"/>
+          <a:lstStyle/>
+          <a:p>
+            <a:pPr algn="ctr"/>
+            <a:endParaRPr lang="en-US"/>
+          </a:p>
+        </p:txBody>
+      </p:sp>
+      <p:pic>
+        <p:nvPicPr>
+          <p:cNvPr id="11" name="Picture 10">
+            <a:extLst>
+              <a:ext uri="{FF2B5EF4-FFF2-40B4-BE49-F238E27FC236}">
+                <a16:creationId xmlns:a16="http://schemas.microsoft.com/office/drawing/2014/main" id="{0552C3A3-94A8-A1FB-6B6F-0FEE7EE3B36E}"/>
+              </a:ext>
+            </a:extLst>
+          </p:cNvPr>
+          <p:cNvPicPr>
+            <a:picLocks noChangeAspect="1"/>
+          </p:cNvPicPr>
+          <p:nvPr/>
+        </p:nvPicPr>
+        <p:blipFill>
+          <a:blip r:embed="rId3"/>
+          <a:stretch>
+            <a:fillRect/>
+          </a:stretch>
+        </p:blipFill>
+        <p:spPr>
+          <a:xfrm>
+            <a:off x="157000" y="1094226"/>
+            <a:ext cx="362976" cy="362976"/>
+          </a:xfrm>
+          <a:prstGeom prst="rect">
+            <a:avLst/>
+          </a:prstGeom>
+          <a:ln>
+            <a:noFill/>
+          </a:ln>
+          <a:effectLst>
+            <a:outerShdw blurRad="292100" dist="139700" dir="2700000" algn="tl" rotWithShape="0">
+              <a:srgbClr val="333333">
+                <a:alpha val="65000"/>
+              </a:srgbClr>
+            </a:outerShdw>
+          </a:effectLst>
+        </p:spPr>
+      </p:pic>
+      <p:pic>
+        <p:nvPicPr>
+          <p:cNvPr id="12" name="Picture 11">
+            <a:extLst>
+              <a:ext uri="{FF2B5EF4-FFF2-40B4-BE49-F238E27FC236}">
+                <a16:creationId xmlns:a16="http://schemas.microsoft.com/office/drawing/2014/main" id="{3A36A2F4-5EF7-06C8-4DB0-2AEF2674EF1C}"/>
+              </a:ext>
+            </a:extLst>
+          </p:cNvPr>
+          <p:cNvPicPr>
+            <a:picLocks noChangeAspect="1"/>
+          </p:cNvPicPr>
+          <p:nvPr/>
+        </p:nvPicPr>
+        <p:blipFill>
+          <a:blip r:embed="rId4"/>
+          <a:stretch>
+            <a:fillRect/>
+          </a:stretch>
+        </p:blipFill>
+        <p:spPr>
+          <a:xfrm>
+            <a:off x="611241" y="1094226"/>
+            <a:ext cx="362976" cy="362976"/>
+          </a:xfrm>
+          <a:prstGeom prst="rect">
+            <a:avLst/>
+          </a:prstGeom>
+          <a:ln>
+            <a:noFill/>
+          </a:ln>
+          <a:effectLst>
+            <a:outerShdw blurRad="292100" dist="139700" dir="2700000" algn="tl" rotWithShape="0">
+              <a:srgbClr val="333333">
+                <a:alpha val="65000"/>
+              </a:srgbClr>
+            </a:outerShdw>
+          </a:effectLst>
+        </p:spPr>
+      </p:pic>
+      <p:pic>
+        <p:nvPicPr>
+          <p:cNvPr id="13" name="Picture 12">
+            <a:extLst>
+              <a:ext uri="{FF2B5EF4-FFF2-40B4-BE49-F238E27FC236}">
+                <a16:creationId xmlns:a16="http://schemas.microsoft.com/office/drawing/2014/main" id="{160FA46D-4A24-7BBC-393D-FE80D8C2B7D0}"/>
+              </a:ext>
+            </a:extLst>
+          </p:cNvPr>
+          <p:cNvPicPr>
+            <a:picLocks noChangeAspect="1"/>
+          </p:cNvPicPr>
+          <p:nvPr/>
+        </p:nvPicPr>
+        <p:blipFill>
+          <a:blip r:embed="rId5"/>
+          <a:stretch>
+            <a:fillRect/>
+          </a:stretch>
+        </p:blipFill>
+        <p:spPr>
+          <a:xfrm>
+            <a:off x="1065482" y="1094226"/>
+            <a:ext cx="371111" cy="362976"/>
+          </a:xfrm>
+          <a:prstGeom prst="rect">
+            <a:avLst/>
+          </a:prstGeom>
+          <a:ln>
+            <a:noFill/>
+          </a:ln>
+          <a:effectLst>
+            <a:outerShdw blurRad="292100" dist="139700" dir="2700000" algn="tl" rotWithShape="0">
+              <a:srgbClr val="333333">
+                <a:alpha val="65000"/>
+              </a:srgbClr>
+            </a:outerShdw>
+          </a:effectLst>
+        </p:spPr>
+      </p:pic>
+    </p:spTree>
+    <p:extLst>
+      <p:ext uri="{BB962C8B-B14F-4D97-AF65-F5344CB8AC3E}">
+        <p14:creationId xmlns:p14="http://schemas.microsoft.com/office/powerpoint/2010/main" val="2434535923"/>
+      </p:ext>
+    </p:extLst>
+  </p:cSld>
+  <p:clrMapOvr>
+    <a:masterClrMapping/>
+  </p:clrMapOvr>
+</p:sld>
+</file>
+
+<file path=ppt/slides/slide46.xml><?xml version="1.0" encoding="utf-8"?>
 <p:sld xmlns:a="http://schemas.openxmlformats.org/drawingml/2006/main" xmlns:r="http://schemas.openxmlformats.org/officeDocument/2006/relationships" xmlns:p="http://schemas.openxmlformats.org/presentationml/2006/main">
   <p:cSld>
     <p:bg>
